--- a/ecnu-cg/02-PPT/PPT-即时三维高斯泼溅重建.pptx
+++ b/ecnu-cg/02-PPT/PPT-即时三维高斯泼溅重建.pptx
@@ -5,7 +5,7 @@
     <p:sldMasterId id="2147483648" r:id="rId0"/>
   </p:sldMasterIdLst>
   <p:notesMasterIdLst>
-    <p:notesMasterId r:id="rId16"/>
+    <p:notesMasterId r:id="rId15"/>
   </p:notesMasterIdLst>
   <p:sldIdLst>
     <p:sldId id="256" r:id="rId1"/>
@@ -22,7 +22,6 @@
     <p:sldId id="267" r:id="rId12"/>
     <p:sldId id="268" r:id="rId13"/>
     <p:sldId id="269" r:id="rId14"/>
-    <p:sldId id="270" r:id="rId15"/>
   </p:sldIdLst>
   <p:sldSz cx="12192000" cy="6858000"/>
   <p:notesSz cx="6858000" cy="12192000"/>
@@ -1071,7 +1070,7 @@
   <p:cSld>
     <p:spTree>
       <p:nvGrpSpPr>
-        <p:cNvPr id="13" name="" descr="&lt;Slide style={{ width: '1280px', height: '720px', backgroundColor: '#FFFFFF', padding: '0px', flexDirection: 'column' }}&gt;&#10;    &lt;Box style={{ width: '1280px', height: '8px', backgroundColor: '#1E4FA8' }} /&gt;&#10;    &lt;Box style={{ padding: '30px 40px 0px 40px', flexDirection: 'row', justifyContent: 'space-between', alignItems: 'flex-end' }}&gt;&#10;        &lt;Text style={{ fontSize: 34, fontWeight: 'bold', color: '#1E4FA8' }}&gt;关键方式④：渐进式高斯层级控显存&lt;/Text&gt;&#10;        &lt;Text style={{ fontSize: 15, color: '#8B97A8' }}&gt;10 / 15&lt;/Text&gt;&#10;    &lt;/Box&gt;&#10;    &lt;Box style={{ padding: '20px 40px 0px 40px', flexDirection: 'row', gap: 26 }}&gt;&#10;        &lt;Box style={{ width: '380px', backgroundColor: '#F0F5FC', borderRadius: 6, padding: '22px 20px', flexDirection: 'column' }}&gt;&#10;            &lt;Text style={{ fontSize: 74, fontWeight: 'bold', color: '#1E4FA8', lineHeight: 1.1 }}&gt;0.5 px&lt;/Text&gt;&#10;            &lt;Text style={{ fontSize: 21, color: '#1A2230', lineHeight: 1.5, marginTop: 8 }}&gt;屏幕尺寸小于该值、且这类高斯占比超过 20% 时，触发合并&lt;/Text&gt;&#10;            &lt;Box style={{ width: '100%', height: '1px', backgroundColor: '#D6DCE5', marginTop: 16, marginBottom: 14 }} /&gt;&#10;            &lt;Text style={{ fontSize: 74, fontWeight: 'bold', color: '#1E4FA8', lineHeight: 1.1 }}&gt;1 px&lt;/Text&gt;&#10;            &lt;Text style={{ fontSize: 21, color: '#1A2230', lineHeight: 1.5, marginTop: 8 }}&gt;合并节点的贡献超过该值时，异步回取其子节点（双缓冲防卡顿）&lt;/Text&gt;&#10;        &lt;/Box&gt;&#10;        &lt;Box style={{ flex: 1, flexDirection: 'column', gap: 14 }}&gt;&#10;            &lt;Box style={{ backgroundColor: '#F7F9FC', border: '1px solid #D6DCE5', borderRadius: 6, padding: '14px 18px', flexDirection: 'column' }}&gt;&#10;                &lt;Text style={{ fontSize: 23, fontWeight: 'bold', color: '#1E4FA8' }}&gt;合并怎么做&lt;/Text&gt;&#10;                &lt;Text style={{ fontSize: 21, color: '#1A2230', lineHeight: 1.55, marginTop: 8 }}&gt;KNN 找 4 个最近高斯，按 KL 散度合并成一个父节点；叶节点参数卸载到 CPU 内存，显存只留活跃部分。&lt;/Text&gt;&#10;            &lt;/Box&gt;&#10;            &lt;Box style={{ backgroundColor: '#F7F9FC', border: '1px solid #D6DCE5', borderRadius: 6, padding: '14px 18px', flexDirection: 'column' }}&gt;&#10;                &lt;Text style={{ fontSize: 23, fontWeight: 'bold', color: '#1E4FA8' }}&gt;回环时怎么办&lt;/Text&gt;&#10;                &lt;Text style={{ fontSize: 21, color: '#1A2230', lineHeight: 1.55, marginTop: 8 }}&gt;每个高斯记录&quot;出生关键帧&quot;，回环修正时整棵子树按该关键帧的变换异步移动，不必逐个改。&lt;/Text&gt;&#10;            &lt;/Box&gt;&#10;            &lt;Box style={{ backgroundColor: '#F0F5FC', border: '1px solid #3D7BD9', borderRadius: 6, padding: '14px 18px', flexDirection: 'column' }}&gt;&#10;                &lt;Text style={{ fontSize: 23, fontWeight: 'bold', color: '#1E4FA8' }}&gt;实测效果（论文）&lt;/Text&gt;&#10;                &lt;Text style={{ fontSize: 21, color: '#1A2230', lineHeight: 1.55, marginTop: 8 }}&gt;CityWalk 不用层级：第 &lt;b&gt;795/4050&lt;/b&gt; 帧即 OOM；用后峰值高斯 &amp;lt; &lt;b&gt;370 万&lt;/b&gt;、显存 &amp;lt; &lt;b&gt;12.8 GB&lt;/b&gt;，层级达 &lt;b&gt;8 层&lt;/b&gt;。&lt;/Text&gt;&#10;            &lt;/Box&gt;&#10;        &lt;/Box&gt;&#10;    &lt;/Box&gt;&#10;&lt;/Slide&gt;&#10;"/>
+        <p:cNvPr id="13" name="" descr="&lt;Slide style={{ width: '1280px', height: '720px', backgroundColor: '#FFFFFF', padding: '0px', flexDirection: 'column' }}&gt;&#10;    &lt;Box style={{ width: '1280px', height: '8px', backgroundColor: '#1E4FA8' }} /&gt;&#10;    &lt;Box style={{ padding: '30px 40px 0px 40px', flexDirection: 'row', justifyContent: 'space-between', alignItems: 'flex-end' }}&gt;&#10;        &lt;Text style={{ fontSize: 34, fontWeight: 'bold', color: '#1E4FA8' }}&gt;关键方式④：渐进式高斯层级控显存&lt;/Text&gt;&#10;        &lt;Text style={{ fontSize: 15, color: '#8B97A8' }}&gt;10 / 14&lt;/Text&gt;&#10;    &lt;/Box&gt;&#10;    &lt;Box style={{ padding: '20px 40px 0px 40px', flexDirection: 'row', gap: 26 }}&gt;&#10;        &lt;Box style={{ width: '380px', backgroundColor: '#F0F5FC', borderRadius: 6, padding: '22px 20px', flexDirection: 'column' }}&gt;&#10;            &lt;Text style={{ fontSize: 74, fontWeight: 'bold', color: '#1E4FA8', lineHeight: 1.1 }}&gt;0.5 px&lt;/Text&gt;&#10;            &lt;Text style={{ fontSize: 21, color: '#1A2230', lineHeight: 1.5, marginTop: 8 }}&gt;屏幕尺寸小于该值、且这类高斯占比超过 20% 时，触发合并&lt;/Text&gt;&#10;            &lt;Box style={{ width: '100%', height: '1px', backgroundColor: '#D6DCE5', marginTop: 16, marginBottom: 14 }} /&gt;&#10;            &lt;Text style={{ fontSize: 74, fontWeight: 'bold', color: '#1E4FA8', lineHeight: 1.1 }}&gt;1 px&lt;/Text&gt;&#10;            &lt;Text style={{ fontSize: 21, color: '#1A2230', lineHeight: 1.5, marginTop: 8 }}&gt;合并节点的贡献超过该值时，异步回取其子节点（双缓冲防卡顿）&lt;/Text&gt;&#10;        &lt;/Box&gt;&#10;        &lt;Box style={{ flex: 1, flexDirection: 'column', gap: 14 }}&gt;&#10;            &lt;Box style={{ backgroundColor: '#F7F9FC', border: '1px solid #D6DCE5', borderRadius: 6, padding: '14px 18px', flexDirection: 'column' }}&gt;&#10;                &lt;Text style={{ fontSize: 23, fontWeight: 'bold', color: '#1E4FA8' }}&gt;合并怎么做&lt;/Text&gt;&#10;                &lt;Text style={{ fontSize: 21, color: '#1A2230', lineHeight: 1.55, marginTop: 8 }}&gt;KNN 找 4 个最近高斯，按 KL 散度合并成一个父节点；叶节点参数卸载到 CPU 内存，显存只留活跃部分。&lt;/Text&gt;&#10;            &lt;/Box&gt;&#10;            &lt;Box style={{ backgroundColor: '#F7F9FC', border: '1px solid #D6DCE5', borderRadius: 6, padding: '14px 18px', flexDirection: 'column' }}&gt;&#10;                &lt;Text style={{ fontSize: 23, fontWeight: 'bold', color: '#1E4FA8' }}&gt;回环时怎么办&lt;/Text&gt;&#10;                &lt;Text style={{ fontSize: 21, color: '#1A2230', lineHeight: 1.55, marginTop: 8 }}&gt;每个高斯记录&quot;出生关键帧&quot;，回环修正时整棵子树按该关键帧的变换异步移动，不必逐个改。&lt;/Text&gt;&#10;            &lt;/Box&gt;&#10;            &lt;Box style={{ backgroundColor: '#F0F5FC', border: '1px solid #3D7BD9', borderRadius: 6, padding: '14px 18px', flexDirection: 'column' }}&gt;&#10;                &lt;Text style={{ fontSize: 23, fontWeight: 'bold', color: '#1E4FA8' }}&gt;实测效果（论文）&lt;/Text&gt;&#10;                &lt;Text style={{ fontSize: 21, color: '#1A2230', lineHeight: 1.55, marginTop: 8 }}&gt;CityWalk 不用层级：第 &lt;b&gt;795/4050&lt;/b&gt; 帧即 OOM；用后峰值高斯 &amp;lt; &lt;b&gt;370 万&lt;/b&gt;、显存 &amp;lt; &lt;b&gt;12.8 GB&lt;/b&gt;，层级达 &lt;b&gt;8 层&lt;/b&gt;。&lt;/Text&gt;&#10;            &lt;/Box&gt;&#10;        &lt;/Box&gt;&#10;    &lt;/Box&gt;&#10;&lt;/Slide&gt;&#10;"/>
         <p:cNvGrpSpPr/>
         <p:nvPr/>
       </p:nvGrpSpPr>
@@ -1195,7 +1194,7 @@
                 <a:latin typeface="Microsoft YaHei"/>
                 <a:ea typeface="Microsoft YaHei"/>
               </a:rPr>
-              <a:t>10 / 15</a:t>
+              <a:t>10 / 14</a:t>
             </a:r>
             <a:endParaRPr/>
           </a:p>
@@ -2024,7 +2023,7 @@
   <p:cSld>
     <p:spTree>
       <p:nvGrpSpPr>
-        <p:cNvPr id="33" name="" descr="&lt;Slide style={{ width: '1280px', height: '720px', backgroundColor: '#FFFFFF', padding: '0px', flexDirection: 'column' }}&gt;&#10;    &lt;Box style={{ width: '1280px', height: '8px', backgroundColor: '#1E4FA8' }} /&gt;&#10;    &lt;Box style={{ padding: '30px 40px 0px 40px', flexDirection: 'row', justifyContent: 'space-between', alignItems: 'flex-end' }}&gt;&#10;        &lt;Text style={{ fontSize: 34, fontWeight: 'bold', color: '#1E4FA8' }}&gt;论文实验：快一个数量级，只差 1–2 dB&lt;/Text&gt;&#10;        &lt;Text style={{ fontSize: 15, color: '#8B97A8' }}&gt;11 / 15&lt;/Text&gt;&#10;    &lt;/Box&gt;&#10;    &lt;Box style={{ padding: '18px 40px 0px 40px', flexDirection: 'column' }}&gt;&#10;        &lt;Box style={{ flexDirection: 'row', backgroundColor: '#1E4FA8', padding: '11px 14px' }}&gt;&#10;            &lt;Text style={{ flex: 1.5, fontSize: 19, fontWeight: 'bold', color: '#FFFFFF' }}&gt;数据集（有序）&lt;/Text&gt;&#10;            &lt;Text style={{ flex: 1.4, fontSize: 19, fontWeight: 'bold', color: '#FFFFFF' }}&gt;本方法 PSNR / 时间&lt;/Text&gt;&#10;            &lt;Text style={{ flex: 1.7, fontSize: 19, fontWeight: 'bold', color: '#FFFFFF' }}&gt;离线参考 GLOMAP+3DGS(7k)&lt;/Text&gt;&#10;            &lt;Text style={{ flex: 1.4, fontSize: 19, fontWeight: 'bold', color: '#FFFFFF' }}&gt;结论&lt;/Text&gt;&#10;        &lt;/Box&gt;&#10;        &lt;Box style={{ flexDirection: 'row', padding: '11px 14px', borderBottom: '1px solid #D6DCE5' }}&gt;&#10;            &lt;Text style={{ flex: 1.5, fontSize: 19, color: '#1A2230' }}&gt;TUM&lt;/Text&gt;&#10;            &lt;Text style={{ flex: 1.4, fontSize: 19, fontWeight: 'bold', color: '#1E4FA8' }}&gt;24.77 / 1:22&lt;/Text&gt;&#10;            &lt;Text style={{ flex: 1.7, fontSize: 19, color: '#1A2230' }}&gt;25.29 / 3:33&lt;/Text&gt;&#10;            &lt;Text style={{ flex: 1.4, fontSize: 19, color: '#1A2230' }}&gt;比 LongSplat 快约 75×&lt;/Text&gt;&#10;        &lt;/Box&gt;&#10;        &lt;Box style={{ flexDirection: 'row', padding: '11px 14px', backgroundColor: '#F7F9FC', borderBottom: '1px solid #D6DCE5' }}&gt;&#10;            &lt;Text style={{ flex: 1.5, fontSize: 19, color: '#1A2230' }}&gt;MipNeRF360&lt;/Text&gt;&#10;            &lt;Text style={{ flex: 1.4, fontSize: 19, fontWeight: 'bold', color: '#1E4FA8' }}&gt;26.29 / 1:17&lt;/Text&gt;&#10;            &lt;Text style={{ flex: 1.7, fontSize: 19, color: '#1A2230' }}&gt;27.52 / 8:50&lt;/Text&gt;&#10;            &lt;Text style={{ flex: 1.4, fontSize: 19, color: '#1A2230' }}&gt;快 6.9×，差 1.23 dB&lt;/Text&gt;&#10;        &lt;/Box&gt;&#10;        &lt;Box style={{ flexDirection: 'row', padding: '11px 14px', borderBottom: '1px solid #D6DCE5' }}&gt;&#10;            &lt;Text style={{ flex: 1.5, fontSize: 19, color: '#1A2230' }}&gt;StaticHikes&lt;/Text&gt;&#10;            &lt;Text style={{ flex: 1.4, fontSize: 19, fontWeight: 'bold', color: '#1E4FA8' }}&gt;22.12 / 2:14&lt;/Text&gt;&#10;            &lt;Text style={{ flex: 1.7, fontSize: 19, color: '#1A2230' }}&gt;20.23 / 1:02:34&lt;/Text&gt;&#10;            &lt;Text style={{ flex: 1.4, fontSize: 19, color: '#1A2230' }}&gt;质量反超离线&lt;/Text&gt;&#10;        &lt;/Box&gt;&#10;        &lt;Box style={{ flexDirection: 'row', padding: '11px 14px', backgroundColor: '#F7F9FC', borderBottom: '1px solid #D6DCE5' }}&gt;&#10;            &lt;Text style={{ flex: 1.5, fontSize: 19, color: '#1A2230' }}&gt;CityWalk（4050 帧）&lt;/Text&gt;&#10;            &lt;Text style={{ flex: 1.4, fontSize: 19, fontWeight: 'bold', color: '#1E4FA8' }}&gt;22.03 / 29:38&lt;/Text&gt;&#10;            &lt;Text style={{ flex: 1.7, fontSize: 19, color: '#1A2230' }}&gt;Octree-GS 17.33 / 3:11:40&lt;/Text&gt;&#10;            &lt;Text style={{ flex: 1.4, fontSize: 19, color: '#1A2230' }}&gt;大场景最优&lt;/Text&gt;&#10;        &lt;/Box&gt;&#10;    &lt;/Box&gt;&#10;    &lt;Box style={{ padding: '16px 40px 0px 40px', flexDirection: 'row', gap: 16 }}&gt;&#10;        &lt;Box style={{ flex: 1, backgroundColor: '#F0F5FC', borderRadius: 6, padding: '13px 16px', flexDirection: 'column' }}&gt;&#10;            &lt;Text style={{ fontSize: 36, fontWeight: 'bold', color: '#1E4FA8' }}&gt;0.5 dB&lt;/Text&gt;&#10;            &lt;Text style={{ fontSize: 19, color: '#1A2230', lineHeight: 1.45, marginTop: 4 }}&gt;输入顺序打乱后 PSNR 26.29 → 25.73，&quot;无序&quot;不是门槛&lt;/Text&gt;&#10;        &lt;/Box&gt;&#10;        &lt;Box style={{ flex: 1, backgroundColor: '#F0F5FC', borderRadius: 6, padding: '13px 16px', flexDirection: 'column' }}&gt;&#10;            &lt;Text style={{ fontSize: 36, fontWeight: 'bold', color: '#1E4FA8' }}&gt;8.5&lt;/Text&gt;&#10;            &lt;Text style={{ fontSize: 19, color: '#1A2230', lineHeight: 1.45, marginTop: 4 }}&gt;MipNeRF360 平移 APE（对比 Photo-SLAM 161+）&lt;/Text&gt;&#10;        &lt;/Box&gt;&#10;        &lt;Box style={{ flex: 1, backgroundColor: '#F0F5FC', borderRadius: 6, padding: '13px 16px', flexDirection: 'column' }}&gt;&#10;            &lt;Text style={{ fontSize: 36, fontWeight: 'bold', color: '#1E4FA8' }}&gt;324 ms&lt;/Text&gt;&#10;            &lt;Text style={{ fontSize: 19, color: '#1A2230', lineHeight: 1.45, marginTop: 4 }}&gt;MipNeRF360 平均每帧延迟，具备&quot;即时反馈&quot;资格&lt;/Text&gt;&#10;        &lt;/Box&gt;&#10;    &lt;/Box&gt;&#10;&lt;/Slide&gt;&#10;"/>
+        <p:cNvPr id="33" name="" descr="&lt;Slide style={{ width: '1280px', height: '720px', backgroundColor: '#FFFFFF', padding: '0px', flexDirection: 'column' }}&gt;&#10;    &lt;Box style={{ width: '1280px', height: '8px', backgroundColor: '#1E4FA8' }} /&gt;&#10;    &lt;Box style={{ padding: '30px 40px 0px 40px', flexDirection: 'row', justifyContent: 'space-between', alignItems: 'flex-end' }}&gt;&#10;        &lt;Text style={{ fontSize: 34, fontWeight: 'bold', color: '#1E4FA8' }}&gt;论文实验：快一个数量级，只差 1–2 dB&lt;/Text&gt;&#10;        &lt;Text style={{ fontSize: 15, color: '#8B97A8' }}&gt;11 / 14&lt;/Text&gt;&#10;    &lt;/Box&gt;&#10;    &lt;Box style={{ padding: '18px 40px 0px 40px', flexDirection: 'column' }}&gt;&#10;        &lt;Box style={{ flexDirection: 'row', backgroundColor: '#1E4FA8', padding: '11px 14px' }}&gt;&#10;            &lt;Text style={{ flex: 1.5, fontSize: 19, fontWeight: 'bold', color: '#FFFFFF' }}&gt;数据集（有序）&lt;/Text&gt;&#10;            &lt;Text style={{ flex: 1.4, fontSize: 19, fontWeight: 'bold', color: '#FFFFFF' }}&gt;本方法 PSNR / 时间&lt;/Text&gt;&#10;            &lt;Text style={{ flex: 1.7, fontSize: 19, fontWeight: 'bold', color: '#FFFFFF' }}&gt;离线参考 GLOMAP+3DGS(7k)&lt;/Text&gt;&#10;            &lt;Text style={{ flex: 1.4, fontSize: 19, fontWeight: 'bold', color: '#FFFFFF' }}&gt;结论&lt;/Text&gt;&#10;        &lt;/Box&gt;&#10;        &lt;Box style={{ flexDirection: 'row', padding: '11px 14px', borderBottom: '1px solid #D6DCE5' }}&gt;&#10;            &lt;Text style={{ flex: 1.5, fontSize: 19, color: '#1A2230' }}&gt;TUM&lt;/Text&gt;&#10;            &lt;Text style={{ flex: 1.4, fontSize: 19, fontWeight: 'bold', color: '#1E4FA8' }}&gt;24.77 / 1:22&lt;/Text&gt;&#10;            &lt;Text style={{ flex: 1.7, fontSize: 19, color: '#1A2230' }}&gt;25.29 / 3:33&lt;/Text&gt;&#10;            &lt;Text style={{ flex: 1.4, fontSize: 19, color: '#1A2230' }}&gt;比 LongSplat 快约 75×&lt;/Text&gt;&#10;        &lt;/Box&gt;&#10;        &lt;Box style={{ flexDirection: 'row', padding: '11px 14px', backgroundColor: '#F7F9FC', borderBottom: '1px solid #D6DCE5' }}&gt;&#10;            &lt;Text style={{ flex: 1.5, fontSize: 19, color: '#1A2230' }}&gt;MipNeRF360&lt;/Text&gt;&#10;            &lt;Text style={{ flex: 1.4, fontSize: 19, fontWeight: 'bold', color: '#1E4FA8' }}&gt;26.29 / 1:17&lt;/Text&gt;&#10;            &lt;Text style={{ flex: 1.7, fontSize: 19, color: '#1A2230' }}&gt;27.52 / 8:50&lt;/Text&gt;&#10;            &lt;Text style={{ flex: 1.4, fontSize: 19, color: '#1A2230' }}&gt;快 6.9×，差 1.23 dB&lt;/Text&gt;&#10;        &lt;/Box&gt;&#10;        &lt;Box style={{ flexDirection: 'row', padding: '11px 14px', borderBottom: '1px solid #D6DCE5' }}&gt;&#10;            &lt;Text style={{ flex: 1.5, fontSize: 19, color: '#1A2230' }}&gt;StaticHikes&lt;/Text&gt;&#10;            &lt;Text style={{ flex: 1.4, fontSize: 19, fontWeight: 'bold', color: '#1E4FA8' }}&gt;22.12 / 2:14&lt;/Text&gt;&#10;            &lt;Text style={{ flex: 1.7, fontSize: 19, color: '#1A2230' }}&gt;20.23 / 1:02:34&lt;/Text&gt;&#10;            &lt;Text style={{ flex: 1.4, fontSize: 19, color: '#1A2230' }}&gt;质量反超离线&lt;/Text&gt;&#10;        &lt;/Box&gt;&#10;        &lt;Box style={{ flexDirection: 'row', padding: '11px 14px', backgroundColor: '#F7F9FC', borderBottom: '1px solid #D6DCE5' }}&gt;&#10;            &lt;Text style={{ flex: 1.5, fontSize: 19, color: '#1A2230' }}&gt;CityWalk（4050 帧）&lt;/Text&gt;&#10;            &lt;Text style={{ flex: 1.4, fontSize: 19, fontWeight: 'bold', color: '#1E4FA8' }}&gt;22.03 / 29:38&lt;/Text&gt;&#10;            &lt;Text style={{ flex: 1.7, fontSize: 19, color: '#1A2230' }}&gt;Octree-GS 17.33 / 3:11:40&lt;/Text&gt;&#10;            &lt;Text style={{ flex: 1.4, fontSize: 19, color: '#1A2230' }}&gt;大场景最优&lt;/Text&gt;&#10;        &lt;/Box&gt;&#10;    &lt;/Box&gt;&#10;    &lt;Box style={{ padding: '16px 40px 0px 40px', flexDirection: 'row', gap: 16 }}&gt;&#10;        &lt;Box style={{ flex: 1, backgroundColor: '#F0F5FC', borderRadius: 6, padding: '13px 16px', flexDirection: 'column' }}&gt;&#10;            &lt;Text style={{ fontSize: 36, fontWeight: 'bold', color: '#1E4FA8' }}&gt;0.5 dB&lt;/Text&gt;&#10;            &lt;Text style={{ fontSize: 19, color: '#1A2230', lineHeight: 1.45, marginTop: 4 }}&gt;输入顺序打乱后 PSNR 26.29 → 25.73，&quot;无序&quot;不是门槛&lt;/Text&gt;&#10;        &lt;/Box&gt;&#10;        &lt;Box style={{ flex: 1, backgroundColor: '#F0F5FC', borderRadius: 6, padding: '13px 16px', flexDirection: 'column' }}&gt;&#10;            &lt;Text style={{ fontSize: 36, fontWeight: 'bold', color: '#1E4FA8' }}&gt;8.5&lt;/Text&gt;&#10;            &lt;Text style={{ fontSize: 19, color: '#1A2230', lineHeight: 1.45, marginTop: 4 }}&gt;MipNeRF360 平移 APE（对比 Photo-SLAM 161+）&lt;/Text&gt;&#10;        &lt;/Box&gt;&#10;        &lt;Box style={{ flex: 1, backgroundColor: '#F0F5FC', borderRadius: 6, padding: '13px 16px', flexDirection: 'column' }}&gt;&#10;            &lt;Text style={{ fontSize: 36, fontWeight: 'bold', color: '#1E4FA8' }}&gt;324 ms&lt;/Text&gt;&#10;            &lt;Text style={{ fontSize: 19, color: '#1A2230', lineHeight: 1.45, marginTop: 4 }}&gt;MipNeRF360 平均每帧延迟，具备&quot;即时反馈&quot;资格&lt;/Text&gt;&#10;        &lt;/Box&gt;&#10;    &lt;/Box&gt;&#10;&lt;/Slide&gt;&#10;"/>
         <p:cNvGrpSpPr/>
         <p:nvPr/>
       </p:nvGrpSpPr>
@@ -2158,7 +2157,7 @@
                 <a:latin typeface="Microsoft YaHei"/>
                 <a:ea typeface="Microsoft YaHei"/>
               </a:rPr>
-              <a:t>11 / 15</a:t>
+              <a:t>11 / 14</a:t>
             </a:r>
             <a:endParaRPr/>
           </a:p>
@@ -3680,7 +3679,7 @@
   <p:cSld>
     <p:spTree>
       <p:nvGrpSpPr>
-        <p:cNvPr id="74" name="" descr="&lt;Slide style={{ width: '1280px', height: '720px', backgroundColor: '#FFFFFF', padding: '0px', flexDirection: 'column' }}&gt;&#10;    &lt;Box style={{ width: '1280px', height: '8px', backgroundColor: '#1E4FA8' }} /&gt;&#10;    &lt;Box style={{ padding: '26px 40px 0px 40px', flexDirection: 'row', justifyContent: 'space-between', alignItems: 'flex-end' }}&gt;&#10;        &lt;Text style={{ fontSize: 34, fontWeight: 'bold', color: '#1E4FA8' }}&gt;我们的复现：跑通了什么、拿到了什么数&lt;/Text&gt;&#10;        &lt;Text style={{ fontSize: 15, color: '#8B97A8' }}&gt;12 / 15&lt;/Text&gt;&#10;    &lt;/Box&gt;&#10;&#10;    &lt;Box style={{ padding: '16px 40px 0px 40px', flexDirection: 'row', gap: 14 }}&gt;&#10;        &lt;Box style={{ flex: 1, backgroundColor: '#1E4FA8', borderRadius: 6, padding: '12px 14px', flexDirection: 'column' }}&gt;&#10;            &lt;Text style={{ fontSize: 32, fontWeight: 'bold', color: '#FFFFFF' }}&gt;25.95 dB&lt;/Text&gt;&#10;            &lt;Text style={{ fontSize: 16, color: '#D6E4F7' }}&gt;PSNR（SSIM 0.786 / LPIPS 0.206）&lt;/Text&gt;&#10;        &lt;/Box&gt;&#10;        &lt;Box style={{ flex: 1, backgroundColor: '#1E4FA8', borderRadius: 6, padding: '12px 14px', flexDirection: 'column' }}&gt;&#10;            &lt;Text style={{ fontSize: 32, fontWeight: 'bold', color: '#FFFFFF' }}&gt;62.7 s&lt;/Text&gt;&#10;            &lt;Text style={{ fontSize: 16, color: '#D6E4F7' }}&gt;185 帧流式重建，2.95 帧/秒&lt;/Text&gt;&#10;        &lt;/Box&gt;&#10;        &lt;Box style={{ flex: 1, backgroundColor: '#1E4FA8', borderRadius: 6, padding: '12px 14px', flexDirection: 'column' }}&gt;&#10;            &lt;Text style={{ fontSize: 32, fontWeight: 'bold', color: '#FFFFFF' }}&gt;R° 0.16&lt;/Text&gt;&#10;            &lt;Text style={{ fontSize: 16, color: '#D6E4F7' }}&gt;位姿误差（t 1.89，未用 COLMAP 先验）&lt;/Text&gt;&#10;        &lt;/Box&gt;&#10;        &lt;Box style={{ flex: 1, backgroundColor: '#1E4FA8', borderRadius: 6, padding: '12px 14px', flexDirection: 'column' }}&gt;&#10;            &lt;Text style={{ fontSize: 32, fontWeight: 'bold', color: '#FFFFFF' }}&gt;19.5 GB&lt;/Text&gt;&#10;            &lt;Text style={{ fontSize: 16, color: '#D6E4F7' }}&gt;峰值显存（2× 降采样，36.2 万高斯）&lt;/Text&gt;&#10;        &lt;/Box&gt;&#10;    &lt;/Box&gt;&#10;&#10;    &lt;Box style={{ padding: '14px 40px 0px 40px', flexDirection: 'row', gap: 22 }}&gt;&#10;        &lt;Box style={{ width: '430px', flexDirection: 'column', gap: 8 }}&gt;&#10;            &lt;Text style={{ fontSize: 20, fontWeight: 'bold', color: '#1A2230' }}&gt;四步全部走完&lt;/Text&gt;&#10;            &lt;Box style={{ backgroundColor: '#F0F5FC', borderRadius: 6, padding: '9px 12px', flexDirection: 'row', gap: 8 }}&gt;&#10;                &lt;Text style={{ fontSize: 17, color: '#1E4FA8', fontWeight: 'bold' }}&gt;✓&lt;/Text&gt;&#10;                &lt;Text style={{ fontSize: 16, color: '#1A2230', lineHeight: 1.4 }}&gt;环境搭建：torch 2.7.1+cu126，扩展按 sm_89 编译通过&lt;/Text&gt;&#10;            &lt;/Box&gt;&#10;            &lt;Box style={{ backgroundColor: '#F0F5FC', borderRadius: 6, padding: '9px 12px', flexDirection: 'row', gap: 8 }}&gt;&#10;                &lt;Text style={{ fontSize: 17, color: '#1E4FA8', fontWeight: 'bold' }}&gt;✓&lt;/Text&gt;&#10;                &lt;Text style={{ fontSize: 16, color: '#1A2230', lineHeight: 1.4 }}&gt;数据与模型链：185 张图 + 5 个上游权重全部离线可用&lt;/Text&gt;&#10;            &lt;/Box&gt;&#10;            &lt;Box style={{ backgroundColor: '#F0F5FC', borderRadius: 6, padding: '9px 12px', flexDirection: 'row', gap: 8 }}&gt;&#10;                &lt;Text style={{ fontSize: 17, color: '#1E4FA8', fontWeight: 'bold' }}&gt;✓&lt;/Text&gt;&#10;                &lt;Text style={{ fontSize: 16, color: '#1A2230', lineHeight: 1.4 }}&gt;端到端重建：156 个关键帧、36.2 万高斯，一次跑通&lt;/Text&gt;&#10;            &lt;/Box&gt;&#10;            &lt;Box style={{ backgroundColor: '#F0F5FC', borderRadius: 6, padding: '9px 12px', flexDirection: 'row', gap: 8 }}&gt;&#10;                &lt;Text style={{ fontSize: 17, color: '#1E4FA8', fontWeight: 'bold' }}&gt;✓&lt;/Text&gt;&#10;                &lt;Text style={{ fontSize: 16, color: '#1A2230', lineHeight: 1.4 }}&gt;评估与可视化：149 帧漫游视频 + 24 张测试视角渲染图&lt;/Text&gt;&#10;            &lt;/Box&gt;&#10;            &lt;Box style={{ backgroundColor: '#FFF6F6', border: '1px solid #E8C4C2', borderRadius: 6, padding: '9px 12px', flexDirection: 'column' }}&gt;&#10;                &lt;Text style={{ fontSize: 15, color: '#D9534F', fontWeight: 'bold' }}&gt;换成 4×RTX 4090 才跑完&lt;/Text&gt;&#10;                &lt;Text style={{ fontSize: 15, color: '#5A6B80', lineHeight: 1.4, marginTop: 2 }}&gt;原 5090 机器长期被他人任务占满，可跑通模块但无法完成整段重建。&lt;/Text&gt;&#10;            &lt;/Box&gt;&#10;        &lt;/Box&gt;&#10;        &lt;Box style={{ flex: 1, flexDirection: 'column', gap: 7 }}&gt;&#10;            &lt;Text style={{ fontSize: 20, fontWeight: 'bold', color: '#1A2230' }}&gt;照 README 装完跑不起来 —— 累计 12 个坑&lt;/Text&gt;&#10;            &lt;Text style={{ fontSize: 16, color: '#1A2230', lineHeight: 1.45 }}&gt;&lt;b&gt;① 架构&lt;/b&gt;　sm_120 要 cu128；换 4090 后要改回 sm_89，否则编译产物不可用&lt;/Text&gt;&#10;            &lt;Text style={{ fontSize: 16, color: '#1A2230', lineHeight: 1.45 }}&gt;&lt;b&gt;② 源码&lt;/b&gt;　嵌套 glm 子模块缺失；DA-V2 子模块为空，改用 codeload tarball&lt;/Text&gt;&#10;            &lt;Text style={{ fontSize: 16, color: '#1A2230', lineHeight: 1.45 }}&gt;&lt;b&gt;③ 网络&lt;/b&gt;　GitHub / HuggingFace 均不可达，权重与 hub 缓存全部本地化&lt;/Text&gt;&#10;            &lt;Text style={{ fontSize: 16, color: '#1A2230', lineHeight: 1.45 }}&gt;&lt;b&gt;④ 精度&lt;/b&gt;　MegaLoc 半精度冲突、VPR 前向硬写 half，改为跟随 dtype&lt;/Text&gt;&#10;            &lt;Text style={{ fontSize: 16, color: '#1A2230', lineHeight: 1.45 }}&gt;&lt;b&gt;⑤ 环境&lt;/b&gt;　必须在 i3dgs/ 下运行；DA3 缺 6 个运行期依赖 + 2 个构建后端&lt;/Text&gt;&#10;            &lt;Text style={{ fontSize: 16, color: '#1A2230', lineHeight: 1.45 }}&gt;&lt;b&gt;⑥ 缓存&lt;/b&gt;　torch.hub 只搬了仓库代码、漏了 checkpoints 与 HF 缓存，一启动就联网&lt;/Text&gt;&#10;            &lt;Text style={{ fontSize: 14, color: '#8B97A8', lineHeight: 1.4, marginTop: 2 }}&gt;12 个坑里真正要改代码的只有 3 处，落在 2 个文件，均标注 [LOCAL PATCH]。&lt;/Text&gt;&#10;        &lt;/Box&gt;&#10;    &lt;/Box&gt;&#10;&#10;    &lt;Box style={{ marginTop: 'auto', marginLeft: 40, marginRight: 40, marginBottom: 26, backgroundColor: '#F7F9FC', border: '1px solid #D6DCE5', borderRadius: 6, padding: '11px 14px', flexDirection: 'row', justifyContent: 'space-between', alignItems: 'center' }}&gt;&#10;        &lt;Text style={{ fontSize: 15, color: '#3A4A5E' }}&gt;一键复现：&lt;b&gt;bash scripts/run_all_14.sh&lt;/b&gt;　（自动挑最空闲的 4090 → 重建 → 渲染漫游视频 → 汇总指标）&lt;/Text&gt;&#10;        &lt;Text style={{ fontSize: 14, color: '#8B97A8' }}&gt;172.88.88.14 / 4×RTX 4090&lt;/Text&gt;&#10;    &lt;/Box&gt;&#10;&lt;/Slide&gt;&#10;"/>
+        <p:cNvPr id="74" name="" descr="&lt;Slide style={{ width: '1280px', height: '720px', backgroundColor: '#FFFFFF', padding: '0px', flexDirection: 'column' }}&gt;&#10;    &lt;Box style={{ width: '1280px', height: '8px', backgroundColor: '#1E4FA8' }} /&gt;&#10;    &lt;Box style={{ padding: '30px 40px 0px 40px', flexDirection: 'row', justifyContent: 'space-between', alignItems: 'flex-end' }}&gt;&#10;        &lt;Text style={{ fontSize: 34, fontWeight: 'bold', color: '#1E4FA8' }}&gt;不足与改进：哪些是硬伤，哪些能补&lt;/Text&gt;&#10;        &lt;Text style={{ fontSize: 15, color: '#8B97A8' }}&gt;12 / 14&lt;/Text&gt;&#10;    &lt;/Box&gt;&#10;    &lt;Box style={{ padding: '18px 40px 0px 40px' }}&gt;&#10;        &lt;Text style={{ fontSize: 21, color: '#4A5568', lineHeight: 1.5 }}&gt;左栏是它现在的边界（①–④ 来自论文自述，⑤ 是我们复现的边界），右栏是对应的补法。&lt;/Text&gt;&#10;    &lt;/Box&gt;&#10;    &lt;Box style={{ padding: '12px 40px 0px 40px', flexDirection: 'row', gap: 26 }}&gt;&#10;        &lt;Box style={{ flex: 1, flexDirection: 'column' }}&gt;&#10;            &lt;Box style={{ flexDirection: 'row', alignItems: 'center', gap: 8 }}&gt;&#10;                &lt;Box style={{ width: '5px', height: '26px', backgroundColor: '#D9534F' }} /&gt;&#10;                &lt;Text style={{ fontSize: 26, fontWeight: 'bold', color: '#1A2230' }}&gt;目前方法的不足&lt;/Text&gt;&#10;            &lt;/Box&gt;&#10;            &lt;Text style={{ fontSize: 20, color: '#1A2230', lineHeight: 1.55, marginTop: 16 }}&gt;&lt;b&gt;① 低视差直接失效&lt;/b&gt;　纯旋转或平移太小，三角化不出深度，论文自述这类采集会失败。&lt;/Text&gt;&#10;            &lt;Text style={{ fontSize: 20, color: '#1A2230', lineHeight: 1.55, marginTop: 16 }}&gt;&lt;b&gt;② 精度有天花板&lt;/b&gt;　作者用 NoGraphProp 消融证明图传播不比全局 PGO 差，但同时承认仍不如全局 BA。&lt;/Text&gt;&#10;            &lt;Text style={{ fontSize: 20, color: '#1A2230', lineHeight: 1.55, marginTop: 16 }}&gt;&lt;b&gt;③ 上游依赖重&lt;/b&gt;　VPR + XFeat + LightGlue + Depth Anything 3 串成一条链，任一环失效整条断。&lt;/Text&gt;&#10;            &lt;Text style={{ fontSize: 20, color: '#1A2230', lineHeight: 1.55, marginTop: 16 }}&gt;&lt;b&gt;④ 阈值靠经验&lt;/b&gt;　合并 0.5 px / 占比 20%、跳数 5、建边 500 匹配，换场景需重调。&lt;/Text&gt;&#10;            &lt;Text style={{ fontSize: 20, color: '#1A2230', lineHeight: 1.55, marginTop: 16 }}&gt;&lt;b&gt;⑤ 我们的复现边界&lt;/b&gt;　只跑有序序列（未验真无序）、2 倍降采样、单场景。&lt;/Text&gt;&#10;        &lt;/Box&gt;&#10;        &lt;Box style={{ width: '1px', backgroundColor: '#D6DCE5' }} /&gt;&#10;        &lt;Box style={{ flex: 1, flexDirection: 'column' }}&gt;&#10;            &lt;Box style={{ flexDirection: 'row', alignItems: 'center', gap: 8 }}&gt;&#10;                &lt;Box style={{ width: '5px', height: '26px', backgroundColor: '#1E4FA8' }} /&gt;&#10;                &lt;Text style={{ fontSize: 26, fontWeight: 'bold', color: '#1A2230' }}&gt;以后的改进点&lt;/Text&gt;&#10;            &lt;/Box&gt;&#10;            &lt;Text style={{ fontSize: 20, color: '#1A2230', lineHeight: 1.55, marginTop: 16 }}&gt;&lt;b&gt;① 低视差帧降级&lt;/b&gt;　只参与渲染、不进位姿求解，避免污染轨迹。&lt;/Text&gt;&#10;            &lt;Text style={{ fontSize: 20, color: '#1A2230', lineHeight: 1.55, marginTop: 16 }}&gt;&lt;b&gt;② 在线粗 + 离线精&lt;/b&gt;　实时出预览，结束时用 GLOMAP 回填一次全局 BA，把 1.2 dB 补回来。&lt;/Text&gt;&#10;            &lt;Text style={{ fontSize: 20, color: '#1A2230', lineHeight: 1.55, marginTop: 16 }}&gt;&lt;b&gt;③ 采集端闭环&lt;/b&gt;　实时覆盖率与重投影误差热图，直接提示&quot;这块没拍&quot;——论文 motivation 的自然下一步。&lt;/Text&gt;&#10;            &lt;Text style={{ fontSize: 20, color: '#1A2230', lineHeight: 1.55, marginTop: 16 }}&gt;&lt;b&gt;④ 阈值自适应&lt;/b&gt;　按纹理强度与重叠度在线估计，替代固定常数。&lt;/Text&gt;&#10;            &lt;Text style={{ fontSize: 20, color: '#1A2230', lineHeight: 1.55, marginTop: 16 }}&gt;&lt;b&gt;⑤ 我们能立刻做的&lt;/b&gt;　打乱实验（--shuffle）、全分辨率重跑、再换 2–3 个场景。&lt;/Text&gt;&#10;        &lt;/Box&gt;&#10;    &lt;/Box&gt;&#10;    &lt;Box style={{ margin: '12px 40px 0px 40px', backgroundColor: '#F0F5FC', borderLeft: '5px solid #1E4FA8', padding: '15px 20px' }}&gt;&#10;        &lt;Text style={{ fontSize: 21, color: '#1A2230', lineHeight: 1.5 }}&gt;它把&quot;精度&quot;换成了&quot;时间&quot;。补回精度只有两条路：&lt;b&gt;要么离线回填，要么让采集端少犯错&lt;/b&gt;——后者才是它真正打开的方向。&lt;/Text&gt;&#10;    &lt;/Box&gt;&#10;&lt;/Slide&gt;&#10;"/>
         <p:cNvGrpSpPr/>
         <p:nvPr/>
       </p:nvGrpSpPr>
@@ -3748,8 +3747,8 @@
         </p:nvSpPr>
         <p:spPr>
           <a:xfrm rot="0" flipH="0" flipV="0">
-            <a:off x="381000" y="323850"/>
-            <a:ext cx="5829300" cy="390525"/>
+            <a:off x="381000" y="361950"/>
+            <a:ext cx="5181600" cy="390525"/>
           </a:xfrm>
           <a:prstGeom prst="rect"/>
         </p:spPr>
@@ -3769,7 +3768,7 @@
                 <a:latin typeface="Microsoft YaHei"/>
                 <a:ea typeface="Microsoft YaHei"/>
               </a:rPr>
-              <a:t>我们的复现：跑通了什么、拿到了什么数</a:t>
+              <a:t>不足与改进：哪些是硬伤，哪些能补</a:t>
             </a:r>
             <a:endParaRPr/>
           </a:p>
@@ -3783,7 +3782,7 @@
         </p:nvSpPr>
         <p:spPr>
           <a:xfrm rot="0" flipH="0" flipV="0">
-            <a:off x="11325225" y="542925"/>
+            <a:off x="11325225" y="581025"/>
             <a:ext cx="485775" cy="171450"/>
           </a:xfrm>
           <a:prstGeom prst="rect"/>
@@ -3804,2413 +3803,103 @@
                 <a:latin typeface="Microsoft YaHei"/>
                 <a:ea typeface="Microsoft YaHei"/>
               </a:rPr>
-              <a:t>12 / 15</a:t>
-            </a:r>
-            <a:endParaRPr/>
-          </a:p>
-        </p:txBody>
-      </p:sp>
-      <p:sp>
-        <p:nvSpPr>
-          <p:cNvPr id="79" name=""/>
+              <a:t>12 / 14</a:t>
+            </a:r>
+            <a:endParaRPr/>
+          </a:p>
+        </p:txBody>
+      </p:sp>
+      <p:sp>
+        <p:nvSpPr>
+          <p:cNvPr id="79" name="" descr="{&quot;isTemplate&quot;:true,&quot;type&quot;:&quot;text&quot;}"/>
+          <p:cNvSpPr txBox="1"/>
+          <p:nvPr/>
+        </p:nvSpPr>
+        <p:spPr>
+          <a:xfrm rot="0" flipH="0" flipV="0">
+            <a:off x="381000" y="923925"/>
+            <a:ext cx="11430000" cy="361950"/>
+          </a:xfrm>
+          <a:prstGeom prst="rect"/>
+        </p:spPr>
+        <p:txBody>
+          <a:bodyPr wrap="none" lIns="0" tIns="0" rIns="0" bIns="0"/>
+          <a:p>
+            <a:pPr>
+              <a:lnSpc>
+                <a:spcPct val="150000"/>
+              </a:lnSpc>
+            </a:pPr>
+            <a:r>
+              <a:rPr lang="zh-CN" sz="1575">
+                <a:solidFill>
+                  <a:srgbClr val="4A5568"/>
+                </a:solidFill>
+                <a:latin typeface="Microsoft YaHei"/>
+                <a:ea typeface="Microsoft YaHei"/>
+              </a:rPr>
+              <a:t>左栏是它现在的边界（①–④</a:t>
+            </a:r>
+            <a:r>
+              <a:rPr lang="en-US" sz="1575">
+                <a:solidFill>
+                  <a:srgbClr val="4A5568"/>
+                </a:solidFill>
+                <a:latin typeface="Microsoft YaHei"/>
+                <a:ea typeface="Microsoft YaHei"/>
+              </a:rPr>
+              <a:t xml:space="preserve"> </a:t>
+            </a:r>
+            <a:r>
+              <a:rPr lang="zh-CN" sz="1575">
+                <a:solidFill>
+                  <a:srgbClr val="4A5568"/>
+                </a:solidFill>
+                <a:latin typeface="Microsoft YaHei"/>
+                <a:ea typeface="Microsoft YaHei"/>
+              </a:rPr>
+              <a:t>来自论文自述，⑤</a:t>
+            </a:r>
+            <a:r>
+              <a:rPr lang="en-US" sz="1575">
+                <a:solidFill>
+                  <a:srgbClr val="4A5568"/>
+                </a:solidFill>
+                <a:latin typeface="Microsoft YaHei"/>
+                <a:ea typeface="Microsoft YaHei"/>
+              </a:rPr>
+              <a:t xml:space="preserve"> </a:t>
+            </a:r>
+            <a:r>
+              <a:rPr lang="zh-CN" sz="1575">
+                <a:solidFill>
+                  <a:srgbClr val="4A5568"/>
+                </a:solidFill>
+                <a:latin typeface="Microsoft YaHei"/>
+                <a:ea typeface="Microsoft YaHei"/>
+              </a:rPr>
+              <a:t>是我们复现的边界），右栏是对应的补法。</a:t>
+            </a:r>
+            <a:endParaRPr/>
+          </a:p>
+        </p:txBody>
+      </p:sp>
+      <p:sp>
+        <p:nvSpPr>
+          <p:cNvPr id="80" name=""/>
           <p:cNvSpPr/>
           <p:nvPr/>
         </p:nvSpPr>
         <p:spPr>
           <a:xfrm rot="0" flipH="0" flipV="0">
-            <a:off x="381000" y="866775"/>
-            <a:ext cx="2762250" cy="971550"/>
-          </a:xfrm>
-          <a:prstGeom prst="roundRect">
-            <a:avLst>
-              <a:gd name="adj" fmla="val 5882"/>
-            </a:avLst>
-          </a:prstGeom>
-          <a:solidFill>
-            <a:srgbClr val="1E4FA8"/>
-          </a:solidFill>
-          <a:ln/>
-        </p:spPr>
-        <p:txBody>
-          <a:bodyPr/>
-          <a:p/>
-        </p:txBody>
-      </p:sp>
-      <p:sp>
-        <p:nvSpPr>
-          <p:cNvPr id="80" name="" descr="{&quot;isTemplate&quot;:true,&quot;type&quot;:&quot;text&quot;}"/>
-          <p:cNvSpPr txBox="1"/>
-          <p:nvPr/>
-        </p:nvSpPr>
-        <p:spPr>
-          <a:xfrm rot="0" flipH="0" flipV="0">
-            <a:off x="514350" y="981075"/>
-            <a:ext cx="2495550" cy="371475"/>
-          </a:xfrm>
-          <a:prstGeom prst="rect"/>
-        </p:spPr>
-        <p:txBody>
-          <a:bodyPr wrap="none" lIns="0" tIns="0" rIns="0" bIns="0"/>
-          <a:p>
-            <a:pPr>
-              <a:lnSpc>
-                <a:spcPct val="100000"/>
-              </a:lnSpc>
-            </a:pPr>
-            <a:r>
-              <a:rPr lang="en-US" sz="2400" b="1">
-                <a:solidFill>
-                  <a:srgbClr val="FFFFFF"/>
-                </a:solidFill>
-                <a:latin typeface="Microsoft YaHei"/>
-                <a:ea typeface="Microsoft YaHei"/>
-              </a:rPr>
-              <a:t>25.95 dB</a:t>
-            </a:r>
-            <a:endParaRPr/>
-          </a:p>
-        </p:txBody>
-      </p:sp>
-      <p:sp>
-        <p:nvSpPr>
-          <p:cNvPr id="81" name="" descr="{&quot;isTemplate&quot;:true,&quot;type&quot;:&quot;text&quot;}"/>
-          <p:cNvSpPr txBox="1"/>
-          <p:nvPr/>
-        </p:nvSpPr>
-        <p:spPr>
-          <a:xfrm rot="0" flipH="0" flipV="0">
-            <a:off x="514350" y="1352550"/>
-            <a:ext cx="2495550" cy="371475"/>
-          </a:xfrm>
-          <a:prstGeom prst="rect"/>
-        </p:spPr>
-        <p:txBody>
-          <a:bodyPr wrap="square" lIns="0" tIns="0" rIns="0" bIns="0">
-            <a:normAutofit/>
-          </a:bodyPr>
-          <a:p>
-            <a:pPr>
-              <a:lnSpc>
-                <a:spcPct val="100000"/>
-              </a:lnSpc>
-            </a:pPr>
-            <a:r>
-              <a:rPr lang="en-US" sz="1200">
-                <a:solidFill>
-                  <a:srgbClr val="D6E4F7"/>
-                </a:solidFill>
-                <a:latin typeface="Microsoft YaHei"/>
-                <a:ea typeface="Microsoft YaHei"/>
-              </a:rPr>
-              <a:t>PSNR</a:t>
-            </a:r>
-            <a:r>
-              <a:rPr lang="zh-CN" sz="1200">
-                <a:solidFill>
-                  <a:srgbClr val="D6E4F7"/>
-                </a:solidFill>
-                <a:latin typeface="Microsoft YaHei"/>
-                <a:ea typeface="Microsoft YaHei"/>
-              </a:rPr>
-              <a:t>（</a:t>
-            </a:r>
-            <a:r>
-              <a:rPr lang="en-US" sz="1200">
-                <a:solidFill>
-                  <a:srgbClr val="D6E4F7"/>
-                </a:solidFill>
-                <a:latin typeface="Microsoft YaHei"/>
-                <a:ea typeface="Microsoft YaHei"/>
-              </a:rPr>
-              <a:t>SSIM 0.786 / LPIPS 0.206</a:t>
-            </a:r>
-            <a:r>
-              <a:rPr lang="zh-CN" sz="1200">
-                <a:solidFill>
-                  <a:srgbClr val="D6E4F7"/>
-                </a:solidFill>
-                <a:latin typeface="Microsoft YaHei"/>
-                <a:ea typeface="Microsoft YaHei"/>
-              </a:rPr>
-              <a:t>）</a:t>
-            </a:r>
-            <a:endParaRPr/>
-          </a:p>
-        </p:txBody>
-      </p:sp>
-      <p:sp>
-        <p:nvSpPr>
-          <p:cNvPr id="82" name=""/>
-          <p:cNvSpPr/>
-          <p:nvPr/>
-        </p:nvSpPr>
-        <p:spPr>
-          <a:xfrm rot="0" flipH="0" flipV="0">
-            <a:off x="3276600" y="866775"/>
-            <a:ext cx="2752725" cy="971550"/>
-          </a:xfrm>
-          <a:prstGeom prst="roundRect">
-            <a:avLst>
-              <a:gd name="adj" fmla="val 5882"/>
-            </a:avLst>
-          </a:prstGeom>
-          <a:solidFill>
-            <a:srgbClr val="1E4FA8"/>
-          </a:solidFill>
-          <a:ln/>
-        </p:spPr>
-        <p:txBody>
-          <a:bodyPr/>
-          <a:p/>
-        </p:txBody>
-      </p:sp>
-      <p:sp>
-        <p:nvSpPr>
-          <p:cNvPr id="83" name="" descr="{&quot;isTemplate&quot;:true,&quot;type&quot;:&quot;text&quot;}"/>
-          <p:cNvSpPr txBox="1"/>
-          <p:nvPr/>
-        </p:nvSpPr>
-        <p:spPr>
-          <a:xfrm rot="0" flipH="0" flipV="0">
-            <a:off x="3409950" y="981075"/>
-            <a:ext cx="2486025" cy="371475"/>
-          </a:xfrm>
-          <a:prstGeom prst="rect"/>
-        </p:spPr>
-        <p:txBody>
-          <a:bodyPr wrap="none" lIns="0" tIns="0" rIns="0" bIns="0"/>
-          <a:p>
-            <a:pPr>
-              <a:lnSpc>
-                <a:spcPct val="100000"/>
-              </a:lnSpc>
-            </a:pPr>
-            <a:r>
-              <a:rPr lang="en-US" sz="2400" b="1">
-                <a:solidFill>
-                  <a:srgbClr val="FFFFFF"/>
-                </a:solidFill>
-                <a:latin typeface="Microsoft YaHei"/>
-                <a:ea typeface="Microsoft YaHei"/>
-              </a:rPr>
-              <a:t>62.7 s</a:t>
-            </a:r>
-            <a:endParaRPr/>
-          </a:p>
-        </p:txBody>
-      </p:sp>
-      <p:sp>
-        <p:nvSpPr>
-          <p:cNvPr id="84" name="" descr="{&quot;isTemplate&quot;:true,&quot;type&quot;:&quot;text&quot;}"/>
-          <p:cNvSpPr txBox="1"/>
-          <p:nvPr/>
-        </p:nvSpPr>
-        <p:spPr>
-          <a:xfrm rot="0" flipH="0" flipV="0">
-            <a:off x="3409950" y="1352550"/>
-            <a:ext cx="2486025" cy="190500"/>
-          </a:xfrm>
-          <a:prstGeom prst="rect"/>
-        </p:spPr>
-        <p:txBody>
-          <a:bodyPr wrap="none" lIns="0" tIns="0" rIns="0" bIns="0"/>
-          <a:p>
-            <a:pPr>
-              <a:lnSpc>
-                <a:spcPct val="100000"/>
-              </a:lnSpc>
-            </a:pPr>
-            <a:r>
-              <a:rPr lang="en-US" sz="1200">
-                <a:solidFill>
-                  <a:srgbClr val="D6E4F7"/>
-                </a:solidFill>
-                <a:latin typeface="Microsoft YaHei"/>
-                <a:ea typeface="Microsoft YaHei"/>
-              </a:rPr>
-              <a:t xml:space="preserve">185 </a:t>
-            </a:r>
-            <a:r>
-              <a:rPr lang="zh-CN" sz="1200">
-                <a:solidFill>
-                  <a:srgbClr val="D6E4F7"/>
-                </a:solidFill>
-                <a:latin typeface="Microsoft YaHei"/>
-                <a:ea typeface="Microsoft YaHei"/>
-              </a:rPr>
-              <a:t>帧流式重建，</a:t>
-            </a:r>
-            <a:r>
-              <a:rPr lang="en-US" sz="1200">
-                <a:solidFill>
-                  <a:srgbClr val="D6E4F7"/>
-                </a:solidFill>
-                <a:latin typeface="Microsoft YaHei"/>
-                <a:ea typeface="Microsoft YaHei"/>
-              </a:rPr>
-              <a:t xml:space="preserve">2.95 </a:t>
-            </a:r>
-            <a:r>
-              <a:rPr lang="zh-CN" sz="1200">
-                <a:solidFill>
-                  <a:srgbClr val="D6E4F7"/>
-                </a:solidFill>
-                <a:latin typeface="Microsoft YaHei"/>
-                <a:ea typeface="Microsoft YaHei"/>
-              </a:rPr>
-              <a:t>帧</a:t>
-            </a:r>
-            <a:r>
-              <a:rPr lang="en-US" sz="1200">
-                <a:solidFill>
-                  <a:srgbClr val="D6E4F7"/>
-                </a:solidFill>
-                <a:latin typeface="Microsoft YaHei"/>
-                <a:ea typeface="Microsoft YaHei"/>
-              </a:rPr>
-              <a:t>/</a:t>
-            </a:r>
-            <a:r>
-              <a:rPr lang="zh-CN" sz="1200">
-                <a:solidFill>
-                  <a:srgbClr val="D6E4F7"/>
-                </a:solidFill>
-                <a:latin typeface="Microsoft YaHei"/>
-                <a:ea typeface="Microsoft YaHei"/>
-              </a:rPr>
-              <a:t>秒</a:t>
-            </a:r>
-            <a:endParaRPr/>
-          </a:p>
-        </p:txBody>
-      </p:sp>
-      <p:sp>
-        <p:nvSpPr>
-          <p:cNvPr id="85" name=""/>
-          <p:cNvSpPr/>
-          <p:nvPr/>
-        </p:nvSpPr>
-        <p:spPr>
-          <a:xfrm rot="0" flipH="0" flipV="0">
-            <a:off x="6162675" y="866775"/>
-            <a:ext cx="2762250" cy="971550"/>
-          </a:xfrm>
-          <a:prstGeom prst="roundRect">
-            <a:avLst>
-              <a:gd name="adj" fmla="val 5882"/>
-            </a:avLst>
-          </a:prstGeom>
-          <a:solidFill>
-            <a:srgbClr val="1E4FA8"/>
-          </a:solidFill>
-          <a:ln/>
-        </p:spPr>
-        <p:txBody>
-          <a:bodyPr/>
-          <a:p/>
-        </p:txBody>
-      </p:sp>
-      <p:sp>
-        <p:nvSpPr>
-          <p:cNvPr id="86" name="" descr="{&quot;isTemplate&quot;:true,&quot;type&quot;:&quot;text&quot;}"/>
-          <p:cNvSpPr txBox="1"/>
-          <p:nvPr/>
-        </p:nvSpPr>
-        <p:spPr>
-          <a:xfrm rot="0" flipH="0" flipV="0">
-            <a:off x="6296025" y="981075"/>
-            <a:ext cx="2495550" cy="371475"/>
-          </a:xfrm>
-          <a:prstGeom prst="rect"/>
-        </p:spPr>
-        <p:txBody>
-          <a:bodyPr wrap="none" lIns="0" tIns="0" rIns="0" bIns="0"/>
-          <a:p>
-            <a:pPr>
-              <a:lnSpc>
-                <a:spcPct val="100000"/>
-              </a:lnSpc>
-            </a:pPr>
-            <a:r>
-              <a:rPr lang="en-US" sz="2400" b="1">
-                <a:solidFill>
-                  <a:srgbClr val="FFFFFF"/>
-                </a:solidFill>
-                <a:latin typeface="Microsoft YaHei"/>
-                <a:ea typeface="Microsoft YaHei"/>
-              </a:rPr>
-              <a:t>R° 0.16</a:t>
-            </a:r>
-            <a:endParaRPr/>
-          </a:p>
-        </p:txBody>
-      </p:sp>
-      <p:sp>
-        <p:nvSpPr>
-          <p:cNvPr id="87" name="" descr="{&quot;isTemplate&quot;:true,&quot;type&quot;:&quot;text&quot;}"/>
-          <p:cNvSpPr txBox="1"/>
-          <p:nvPr/>
-        </p:nvSpPr>
-        <p:spPr>
-          <a:xfrm rot="0" flipH="0" flipV="0">
-            <a:off x="6296025" y="1352550"/>
-            <a:ext cx="2495550" cy="371475"/>
-          </a:xfrm>
-          <a:prstGeom prst="rect"/>
-        </p:spPr>
-        <p:txBody>
-          <a:bodyPr wrap="square" lIns="0" tIns="0" rIns="0" bIns="0">
-            <a:normAutofit/>
-          </a:bodyPr>
-          <a:p>
-            <a:pPr>
-              <a:lnSpc>
-                <a:spcPct val="100000"/>
-              </a:lnSpc>
-            </a:pPr>
-            <a:r>
-              <a:rPr lang="zh-CN" sz="1200">
-                <a:solidFill>
-                  <a:srgbClr val="D6E4F7"/>
-                </a:solidFill>
-                <a:latin typeface="Microsoft YaHei"/>
-                <a:ea typeface="Microsoft YaHei"/>
-              </a:rPr>
-              <a:t>位姿误差（</a:t>
-            </a:r>
-            <a:r>
-              <a:rPr lang="en-US" sz="1200">
-                <a:solidFill>
-                  <a:srgbClr val="D6E4F7"/>
-                </a:solidFill>
-                <a:latin typeface="Microsoft YaHei"/>
-                <a:ea typeface="Microsoft YaHei"/>
-              </a:rPr>
-              <a:t>t 1.89</a:t>
-            </a:r>
-            <a:r>
-              <a:rPr lang="zh-CN" sz="1200">
-                <a:solidFill>
-                  <a:srgbClr val="D6E4F7"/>
-                </a:solidFill>
-                <a:latin typeface="Microsoft YaHei"/>
-                <a:ea typeface="Microsoft YaHei"/>
-              </a:rPr>
-              <a:t>，未用</a:t>
-            </a:r>
-            <a:r>
-              <a:rPr lang="en-US" sz="1200">
-                <a:solidFill>
-                  <a:srgbClr val="D6E4F7"/>
-                </a:solidFill>
-                <a:latin typeface="Microsoft YaHei"/>
-                <a:ea typeface="Microsoft YaHei"/>
-              </a:rPr>
-              <a:t xml:space="preserve"> COLMAP </a:t>
-            </a:r>
-            <a:r>
-              <a:rPr lang="zh-CN" sz="1200">
-                <a:solidFill>
-                  <a:srgbClr val="D6E4F7"/>
-                </a:solidFill>
-                <a:latin typeface="Microsoft YaHei"/>
-                <a:ea typeface="Microsoft YaHei"/>
-              </a:rPr>
-              <a:t>先验）</a:t>
-            </a:r>
-            <a:endParaRPr/>
-          </a:p>
-        </p:txBody>
-      </p:sp>
-      <p:sp>
-        <p:nvSpPr>
-          <p:cNvPr id="88" name=""/>
-          <p:cNvSpPr/>
-          <p:nvPr/>
-        </p:nvSpPr>
-        <p:spPr>
-          <a:xfrm rot="0" flipH="0" flipV="0">
-            <a:off x="9058275" y="866775"/>
-            <a:ext cx="2752725" cy="971550"/>
-          </a:xfrm>
-          <a:prstGeom prst="roundRect">
-            <a:avLst>
-              <a:gd name="adj" fmla="val 5882"/>
-            </a:avLst>
-          </a:prstGeom>
-          <a:solidFill>
-            <a:srgbClr val="1E4FA8"/>
-          </a:solidFill>
-          <a:ln/>
-        </p:spPr>
-        <p:txBody>
-          <a:bodyPr/>
-          <a:p/>
-        </p:txBody>
-      </p:sp>
-      <p:sp>
-        <p:nvSpPr>
-          <p:cNvPr id="89" name="" descr="{&quot;isTemplate&quot;:true,&quot;type&quot;:&quot;text&quot;}"/>
-          <p:cNvSpPr txBox="1"/>
-          <p:nvPr/>
-        </p:nvSpPr>
-        <p:spPr>
-          <a:xfrm rot="0" flipH="0" flipV="0">
-            <a:off x="9191625" y="981075"/>
-            <a:ext cx="2486025" cy="371475"/>
-          </a:xfrm>
-          <a:prstGeom prst="rect"/>
-        </p:spPr>
-        <p:txBody>
-          <a:bodyPr wrap="none" lIns="0" tIns="0" rIns="0" bIns="0"/>
-          <a:p>
-            <a:pPr>
-              <a:lnSpc>
-                <a:spcPct val="100000"/>
-              </a:lnSpc>
-            </a:pPr>
-            <a:r>
-              <a:rPr lang="en-US" sz="2400" b="1">
-                <a:solidFill>
-                  <a:srgbClr val="FFFFFF"/>
-                </a:solidFill>
-                <a:latin typeface="Microsoft YaHei"/>
-                <a:ea typeface="Microsoft YaHei"/>
-              </a:rPr>
-              <a:t>19.5 GB</a:t>
-            </a:r>
-            <a:endParaRPr/>
-          </a:p>
-        </p:txBody>
-      </p:sp>
-      <p:sp>
-        <p:nvSpPr>
-          <p:cNvPr id="90" name="" descr="{&quot;isTemplate&quot;:true,&quot;type&quot;:&quot;text&quot;}"/>
-          <p:cNvSpPr txBox="1"/>
-          <p:nvPr/>
-        </p:nvSpPr>
-        <p:spPr>
-          <a:xfrm rot="0" flipH="0" flipV="0">
-            <a:off x="9191625" y="1352550"/>
-            <a:ext cx="2486025" cy="371475"/>
-          </a:xfrm>
-          <a:prstGeom prst="rect"/>
-        </p:spPr>
-        <p:txBody>
-          <a:bodyPr wrap="square" lIns="0" tIns="0" rIns="0" bIns="0">
-            <a:normAutofit/>
-          </a:bodyPr>
-          <a:p>
-            <a:pPr>
-              <a:lnSpc>
-                <a:spcPct val="100000"/>
-              </a:lnSpc>
-            </a:pPr>
-            <a:r>
-              <a:rPr lang="zh-CN" sz="1200">
-                <a:solidFill>
-                  <a:srgbClr val="D6E4F7"/>
-                </a:solidFill>
-                <a:latin typeface="Microsoft YaHei"/>
-                <a:ea typeface="Microsoft YaHei"/>
-              </a:rPr>
-              <a:t>峰值显存（</a:t>
-            </a:r>
-            <a:r>
-              <a:rPr lang="en-US" sz="1200">
-                <a:solidFill>
-                  <a:srgbClr val="D6E4F7"/>
-                </a:solidFill>
-                <a:latin typeface="Microsoft YaHei"/>
-                <a:ea typeface="Microsoft YaHei"/>
-              </a:rPr>
-              <a:t xml:space="preserve">2× </a:t>
-            </a:r>
-            <a:r>
-              <a:rPr lang="zh-CN" sz="1200">
-                <a:solidFill>
-                  <a:srgbClr val="D6E4F7"/>
-                </a:solidFill>
-                <a:latin typeface="Microsoft YaHei"/>
-                <a:ea typeface="Microsoft YaHei"/>
-              </a:rPr>
-              <a:t>降采样，</a:t>
-            </a:r>
-            <a:r>
-              <a:rPr lang="en-US" sz="1200">
-                <a:solidFill>
-                  <a:srgbClr val="D6E4F7"/>
-                </a:solidFill>
-                <a:latin typeface="Microsoft YaHei"/>
-                <a:ea typeface="Microsoft YaHei"/>
-              </a:rPr>
-              <a:t xml:space="preserve">36.2 </a:t>
-            </a:r>
-            <a:r>
-              <a:rPr lang="zh-CN" sz="1200">
-                <a:solidFill>
-                  <a:srgbClr val="D6E4F7"/>
-                </a:solidFill>
-                <a:latin typeface="Microsoft YaHei"/>
-                <a:ea typeface="Microsoft YaHei"/>
-              </a:rPr>
-              <a:t>万高斯）</a:t>
-            </a:r>
-            <a:endParaRPr/>
-          </a:p>
-        </p:txBody>
-      </p:sp>
-      <p:sp>
-        <p:nvSpPr>
-          <p:cNvPr id="91" name="" descr="{&quot;isTemplate&quot;:true,&quot;type&quot;:&quot;text&quot;}"/>
-          <p:cNvSpPr txBox="1"/>
-          <p:nvPr/>
-        </p:nvSpPr>
-        <p:spPr>
-          <a:xfrm rot="0" flipH="0" flipV="0">
-            <a:off x="381000" y="1971675"/>
-            <a:ext cx="4095750" cy="228600"/>
-          </a:xfrm>
-          <a:prstGeom prst="rect"/>
-        </p:spPr>
-        <p:txBody>
-          <a:bodyPr wrap="none" lIns="0" tIns="0" rIns="0" bIns="0"/>
-          <a:p>
-            <a:pPr>
-              <a:lnSpc>
-                <a:spcPct val="100000"/>
-              </a:lnSpc>
-            </a:pPr>
-            <a:r>
-              <a:rPr lang="zh-CN" sz="1500" b="1">
-                <a:solidFill>
-                  <a:srgbClr val="1A2230"/>
-                </a:solidFill>
-                <a:latin typeface="Microsoft YaHei"/>
-                <a:ea typeface="Microsoft YaHei"/>
-              </a:rPr>
-              <a:t>四步全部走完</a:t>
-            </a:r>
-            <a:endParaRPr/>
-          </a:p>
-        </p:txBody>
-      </p:sp>
-      <p:sp>
-        <p:nvSpPr>
-          <p:cNvPr id="92" name=""/>
-          <p:cNvSpPr/>
-          <p:nvPr/>
-        </p:nvSpPr>
-        <p:spPr>
-          <a:xfrm rot="0" flipH="0" flipV="0">
-            <a:off x="381000" y="2276475"/>
-            <a:ext cx="4095750" cy="428625"/>
-          </a:xfrm>
-          <a:prstGeom prst="roundRect">
-            <a:avLst>
-              <a:gd name="adj" fmla="val 13333"/>
-            </a:avLst>
-          </a:prstGeom>
-          <a:solidFill>
-            <a:srgbClr val="F0F5FC"/>
-          </a:solidFill>
-          <a:ln/>
-        </p:spPr>
-        <p:txBody>
-          <a:bodyPr/>
-          <a:p/>
-        </p:txBody>
-      </p:sp>
-      <p:sp>
-        <p:nvSpPr>
-          <p:cNvPr id="93" name="" descr="{&quot;isTemplate&quot;:true,&quot;type&quot;:&quot;text&quot;}"/>
-          <p:cNvSpPr txBox="1"/>
-          <p:nvPr/>
-        </p:nvSpPr>
-        <p:spPr>
-          <a:xfrm rot="0" flipH="0" flipV="0">
-            <a:off x="495300" y="2362200"/>
-            <a:ext cx="152400" cy="257175"/>
-          </a:xfrm>
-          <a:prstGeom prst="rect"/>
-        </p:spPr>
-        <p:txBody>
-          <a:bodyPr wrap="none" lIns="0" tIns="0" rIns="0" bIns="0"/>
-          <a:p>
-            <a:pPr>
-              <a:lnSpc>
-                <a:spcPct val="100000"/>
-              </a:lnSpc>
-            </a:pPr>
-            <a:r>
-              <a:rPr sz="1275" b="1">
-                <a:solidFill>
-                  <a:srgbClr val="1E4FA8"/>
-                </a:solidFill>
-                <a:latin typeface="Microsoft YaHei"/>
-                <a:ea typeface="Microsoft YaHei"/>
-              </a:rPr>
-              <a:t>✓</a:t>
-            </a:r>
-            <a:endParaRPr/>
-          </a:p>
-        </p:txBody>
-      </p:sp>
-      <p:sp>
-        <p:nvSpPr>
-          <p:cNvPr id="94" name="" descr="{&quot;isTemplate&quot;:true,&quot;type&quot;:&quot;text&quot;}"/>
-          <p:cNvSpPr txBox="1"/>
-          <p:nvPr/>
-        </p:nvSpPr>
-        <p:spPr>
-          <a:xfrm rot="0" flipH="0" flipV="0">
-            <a:off x="723900" y="2362200"/>
-            <a:ext cx="3638550" cy="257175"/>
-          </a:xfrm>
-          <a:prstGeom prst="rect"/>
-        </p:spPr>
-        <p:txBody>
-          <a:bodyPr wrap="none" lIns="0" tIns="0" rIns="0" bIns="0"/>
-          <a:p>
-            <a:pPr>
-              <a:lnSpc>
-                <a:spcPct val="140000"/>
-              </a:lnSpc>
-            </a:pPr>
-            <a:r>
-              <a:rPr lang="zh-CN" sz="1200">
-                <a:solidFill>
-                  <a:srgbClr val="1A2230"/>
-                </a:solidFill>
-                <a:latin typeface="Microsoft YaHei"/>
-                <a:ea typeface="Microsoft YaHei"/>
-              </a:rPr>
-              <a:t>环境搭建：</a:t>
-            </a:r>
-            <a:r>
-              <a:rPr lang="en-US" sz="1200">
-                <a:solidFill>
-                  <a:srgbClr val="1A2230"/>
-                </a:solidFill>
-                <a:latin typeface="Microsoft YaHei"/>
-                <a:ea typeface="Microsoft YaHei"/>
-              </a:rPr>
-              <a:t>torch 2.7.1+cu126</a:t>
-            </a:r>
-            <a:r>
-              <a:rPr lang="zh-CN" sz="1200">
-                <a:solidFill>
-                  <a:srgbClr val="1A2230"/>
-                </a:solidFill>
-                <a:latin typeface="Microsoft YaHei"/>
-                <a:ea typeface="Microsoft YaHei"/>
-              </a:rPr>
-              <a:t>，扩展按</a:t>
-            </a:r>
-            <a:r>
-              <a:rPr lang="en-US" sz="1200">
-                <a:solidFill>
-                  <a:srgbClr val="1A2230"/>
-                </a:solidFill>
-                <a:latin typeface="Microsoft YaHei"/>
-                <a:ea typeface="Microsoft YaHei"/>
-              </a:rPr>
-              <a:t xml:space="preserve"> sm_89 </a:t>
-            </a:r>
-            <a:r>
-              <a:rPr lang="zh-CN" sz="1200">
-                <a:solidFill>
-                  <a:srgbClr val="1A2230"/>
-                </a:solidFill>
-                <a:latin typeface="Microsoft YaHei"/>
-                <a:ea typeface="Microsoft YaHei"/>
-              </a:rPr>
-              <a:t>编译通过</a:t>
-            </a:r>
-            <a:endParaRPr/>
-          </a:p>
-        </p:txBody>
-      </p:sp>
-      <p:sp>
-        <p:nvSpPr>
-          <p:cNvPr id="95" name=""/>
-          <p:cNvSpPr/>
-          <p:nvPr/>
-        </p:nvSpPr>
-        <p:spPr>
-          <a:xfrm rot="0" flipH="0" flipV="0">
-            <a:off x="381000" y="2781300"/>
-            <a:ext cx="4095750" cy="428625"/>
-          </a:xfrm>
-          <a:prstGeom prst="roundRect">
-            <a:avLst>
-              <a:gd name="adj" fmla="val 13333"/>
-            </a:avLst>
-          </a:prstGeom>
-          <a:solidFill>
-            <a:srgbClr val="F0F5FC"/>
-          </a:solidFill>
-          <a:ln/>
-        </p:spPr>
-        <p:txBody>
-          <a:bodyPr/>
-          <a:p/>
-        </p:txBody>
-      </p:sp>
-      <p:sp>
-        <p:nvSpPr>
-          <p:cNvPr id="96" name="" descr="{&quot;isTemplate&quot;:true,&quot;type&quot;:&quot;text&quot;}"/>
-          <p:cNvSpPr txBox="1"/>
-          <p:nvPr/>
-        </p:nvSpPr>
-        <p:spPr>
-          <a:xfrm rot="0" flipH="0" flipV="0">
-            <a:off x="495300" y="2867025"/>
-            <a:ext cx="161925" cy="257175"/>
-          </a:xfrm>
-          <a:prstGeom prst="rect"/>
-        </p:spPr>
-        <p:txBody>
-          <a:bodyPr wrap="none" lIns="0" tIns="0" rIns="0" bIns="0"/>
-          <a:p>
-            <a:pPr>
-              <a:lnSpc>
-                <a:spcPct val="100000"/>
-              </a:lnSpc>
-            </a:pPr>
-            <a:r>
-              <a:rPr sz="1275" b="1">
-                <a:solidFill>
-                  <a:srgbClr val="1E4FA8"/>
-                </a:solidFill>
-                <a:latin typeface="Microsoft YaHei"/>
-                <a:ea typeface="Microsoft YaHei"/>
-              </a:rPr>
-              <a:t>✓</a:t>
-            </a:r>
-            <a:endParaRPr/>
-          </a:p>
-        </p:txBody>
-      </p:sp>
-      <p:sp>
-        <p:nvSpPr>
-          <p:cNvPr id="97" name="" descr="{&quot;isTemplate&quot;:true,&quot;type&quot;:&quot;text&quot;}"/>
-          <p:cNvSpPr txBox="1"/>
-          <p:nvPr/>
-        </p:nvSpPr>
-        <p:spPr>
-          <a:xfrm rot="0" flipH="0" flipV="0">
-            <a:off x="733425" y="2867025"/>
-            <a:ext cx="3629025" cy="257175"/>
-          </a:xfrm>
-          <a:prstGeom prst="rect"/>
-        </p:spPr>
-        <p:txBody>
-          <a:bodyPr wrap="none" lIns="0" tIns="0" rIns="0" bIns="0"/>
-          <a:p>
-            <a:pPr>
-              <a:lnSpc>
-                <a:spcPct val="140000"/>
-              </a:lnSpc>
-            </a:pPr>
-            <a:r>
-              <a:rPr lang="zh-CN" sz="1200">
-                <a:solidFill>
-                  <a:srgbClr val="1A2230"/>
-                </a:solidFill>
-                <a:latin typeface="Microsoft YaHei"/>
-                <a:ea typeface="Microsoft YaHei"/>
-              </a:rPr>
-              <a:t>数据与模型链：</a:t>
-            </a:r>
-            <a:r>
-              <a:rPr lang="en-US" sz="1200">
-                <a:solidFill>
-                  <a:srgbClr val="1A2230"/>
-                </a:solidFill>
-                <a:latin typeface="Microsoft YaHei"/>
-                <a:ea typeface="Microsoft YaHei"/>
-              </a:rPr>
-              <a:t xml:space="preserve">185 </a:t>
-            </a:r>
-            <a:r>
-              <a:rPr lang="zh-CN" sz="1200">
-                <a:solidFill>
-                  <a:srgbClr val="1A2230"/>
-                </a:solidFill>
-                <a:latin typeface="Microsoft YaHei"/>
-                <a:ea typeface="Microsoft YaHei"/>
-              </a:rPr>
-              <a:t>张图</a:t>
-            </a:r>
-            <a:r>
-              <a:rPr lang="en-US" sz="1200">
-                <a:solidFill>
-                  <a:srgbClr val="1A2230"/>
-                </a:solidFill>
-                <a:latin typeface="Microsoft YaHei"/>
-                <a:ea typeface="Microsoft YaHei"/>
-              </a:rPr>
-              <a:t xml:space="preserve"> + 5 </a:t>
-            </a:r>
-            <a:r>
-              <a:rPr lang="zh-CN" sz="1200">
-                <a:solidFill>
-                  <a:srgbClr val="1A2230"/>
-                </a:solidFill>
-                <a:latin typeface="Microsoft YaHei"/>
-                <a:ea typeface="Microsoft YaHei"/>
-              </a:rPr>
-              <a:t>个上游权重全部离线可用</a:t>
-            </a:r>
-            <a:endParaRPr/>
-          </a:p>
-        </p:txBody>
-      </p:sp>
-      <p:sp>
-        <p:nvSpPr>
-          <p:cNvPr id="98" name=""/>
-          <p:cNvSpPr/>
-          <p:nvPr/>
-        </p:nvSpPr>
-        <p:spPr>
-          <a:xfrm rot="0" flipH="0" flipV="0">
-            <a:off x="381000" y="3286125"/>
-            <a:ext cx="4095750" cy="428625"/>
-          </a:xfrm>
-          <a:prstGeom prst="roundRect">
-            <a:avLst>
-              <a:gd name="adj" fmla="val 13333"/>
-            </a:avLst>
-          </a:prstGeom>
-          <a:solidFill>
-            <a:srgbClr val="F0F5FC"/>
-          </a:solidFill>
-          <a:ln/>
-        </p:spPr>
-        <p:txBody>
-          <a:bodyPr/>
-          <a:p/>
-        </p:txBody>
-      </p:sp>
-      <p:sp>
-        <p:nvSpPr>
-          <p:cNvPr id="99" name="" descr="{&quot;isTemplate&quot;:true,&quot;type&quot;:&quot;text&quot;}"/>
-          <p:cNvSpPr txBox="1"/>
-          <p:nvPr/>
-        </p:nvSpPr>
-        <p:spPr>
-          <a:xfrm rot="0" flipH="0" flipV="0">
-            <a:off x="495300" y="3371850"/>
-            <a:ext cx="161925" cy="257175"/>
-          </a:xfrm>
-          <a:prstGeom prst="rect"/>
-        </p:spPr>
-        <p:txBody>
-          <a:bodyPr wrap="none" lIns="0" tIns="0" rIns="0" bIns="0"/>
-          <a:p>
-            <a:pPr>
-              <a:lnSpc>
-                <a:spcPct val="100000"/>
-              </a:lnSpc>
-            </a:pPr>
-            <a:r>
-              <a:rPr sz="1275" b="1">
-                <a:solidFill>
-                  <a:srgbClr val="1E4FA8"/>
-                </a:solidFill>
-                <a:latin typeface="Microsoft YaHei"/>
-                <a:ea typeface="Microsoft YaHei"/>
-              </a:rPr>
-              <a:t>✓</a:t>
-            </a:r>
-            <a:endParaRPr/>
-          </a:p>
-        </p:txBody>
-      </p:sp>
-      <p:sp>
-        <p:nvSpPr>
-          <p:cNvPr id="100" name="" descr="{&quot;isTemplate&quot;:true,&quot;type&quot;:&quot;text&quot;}"/>
-          <p:cNvSpPr txBox="1"/>
-          <p:nvPr/>
-        </p:nvSpPr>
-        <p:spPr>
-          <a:xfrm rot="0" flipH="0" flipV="0">
-            <a:off x="733425" y="3371850"/>
-            <a:ext cx="3562350" cy="257175"/>
-          </a:xfrm>
-          <a:prstGeom prst="rect"/>
-        </p:spPr>
-        <p:txBody>
-          <a:bodyPr wrap="none" lIns="0" tIns="0" rIns="0" bIns="0"/>
-          <a:p>
-            <a:pPr>
-              <a:lnSpc>
-                <a:spcPct val="140000"/>
-              </a:lnSpc>
-            </a:pPr>
-            <a:r>
-              <a:rPr lang="zh-CN" sz="1200">
-                <a:solidFill>
-                  <a:srgbClr val="1A2230"/>
-                </a:solidFill>
-                <a:latin typeface="Microsoft YaHei"/>
-                <a:ea typeface="Microsoft YaHei"/>
-              </a:rPr>
-              <a:t>端到端重建：</a:t>
-            </a:r>
-            <a:r>
-              <a:rPr lang="en-US" sz="1200">
-                <a:solidFill>
-                  <a:srgbClr val="1A2230"/>
-                </a:solidFill>
-                <a:latin typeface="Microsoft YaHei"/>
-                <a:ea typeface="Microsoft YaHei"/>
-              </a:rPr>
-              <a:t xml:space="preserve">156 </a:t>
-            </a:r>
-            <a:r>
-              <a:rPr lang="zh-CN" sz="1200">
-                <a:solidFill>
-                  <a:srgbClr val="1A2230"/>
-                </a:solidFill>
-                <a:latin typeface="Microsoft YaHei"/>
-                <a:ea typeface="Microsoft YaHei"/>
-              </a:rPr>
-              <a:t>个关键帧、</a:t>
-            </a:r>
-            <a:r>
-              <a:rPr lang="en-US" sz="1200">
-                <a:solidFill>
-                  <a:srgbClr val="1A2230"/>
-                </a:solidFill>
-                <a:latin typeface="Microsoft YaHei"/>
-                <a:ea typeface="Microsoft YaHei"/>
-              </a:rPr>
-              <a:t xml:space="preserve">36.2 </a:t>
-            </a:r>
-            <a:r>
-              <a:rPr lang="zh-CN" sz="1200">
-                <a:solidFill>
-                  <a:srgbClr val="1A2230"/>
-                </a:solidFill>
-                <a:latin typeface="Microsoft YaHei"/>
-                <a:ea typeface="Microsoft YaHei"/>
-              </a:rPr>
-              <a:t>万高斯，一次跑通</a:t>
-            </a:r>
-            <a:endParaRPr/>
-          </a:p>
-        </p:txBody>
-      </p:sp>
-      <p:sp>
-        <p:nvSpPr>
-          <p:cNvPr id="101" name=""/>
-          <p:cNvSpPr/>
-          <p:nvPr/>
-        </p:nvSpPr>
-        <p:spPr>
-          <a:xfrm rot="0" flipH="0" flipV="0">
-            <a:off x="381000" y="3790950"/>
-            <a:ext cx="4095750" cy="428625"/>
-          </a:xfrm>
-          <a:prstGeom prst="roundRect">
-            <a:avLst>
-              <a:gd name="adj" fmla="val 13333"/>
-            </a:avLst>
-          </a:prstGeom>
-          <a:solidFill>
-            <a:srgbClr val="F0F5FC"/>
-          </a:solidFill>
-          <a:ln/>
-        </p:spPr>
-        <p:txBody>
-          <a:bodyPr/>
-          <a:p/>
-        </p:txBody>
-      </p:sp>
-      <p:sp>
-        <p:nvSpPr>
-          <p:cNvPr id="102" name="" descr="{&quot;isTemplate&quot;:true,&quot;type&quot;:&quot;text&quot;}"/>
-          <p:cNvSpPr txBox="1"/>
-          <p:nvPr/>
-        </p:nvSpPr>
-        <p:spPr>
-          <a:xfrm rot="0" flipH="0" flipV="0">
-            <a:off x="495300" y="3876675"/>
-            <a:ext cx="152400" cy="257175"/>
-          </a:xfrm>
-          <a:prstGeom prst="rect"/>
-        </p:spPr>
-        <p:txBody>
-          <a:bodyPr wrap="none" lIns="0" tIns="0" rIns="0" bIns="0"/>
-          <a:p>
-            <a:pPr>
-              <a:lnSpc>
-                <a:spcPct val="100000"/>
-              </a:lnSpc>
-            </a:pPr>
-            <a:r>
-              <a:rPr sz="1275" b="1">
-                <a:solidFill>
-                  <a:srgbClr val="1E4FA8"/>
-                </a:solidFill>
-                <a:latin typeface="Microsoft YaHei"/>
-                <a:ea typeface="Microsoft YaHei"/>
-              </a:rPr>
-              <a:t>✓</a:t>
-            </a:r>
-            <a:endParaRPr/>
-          </a:p>
-        </p:txBody>
-      </p:sp>
-      <p:sp>
-        <p:nvSpPr>
-          <p:cNvPr id="103" name="" descr="{&quot;isTemplate&quot;:true,&quot;type&quot;:&quot;text&quot;}"/>
-          <p:cNvSpPr txBox="1"/>
-          <p:nvPr/>
-        </p:nvSpPr>
-        <p:spPr>
-          <a:xfrm rot="0" flipH="0" flipV="0">
-            <a:off x="723900" y="3876675"/>
-            <a:ext cx="3638550" cy="257175"/>
-          </a:xfrm>
-          <a:prstGeom prst="rect"/>
-        </p:spPr>
-        <p:txBody>
-          <a:bodyPr wrap="none" lIns="0" tIns="0" rIns="0" bIns="0"/>
-          <a:p>
-            <a:pPr>
-              <a:lnSpc>
-                <a:spcPct val="140000"/>
-              </a:lnSpc>
-            </a:pPr>
-            <a:r>
-              <a:rPr lang="zh-CN" sz="1200">
-                <a:solidFill>
-                  <a:srgbClr val="1A2230"/>
-                </a:solidFill>
-                <a:latin typeface="Microsoft YaHei"/>
-                <a:ea typeface="Microsoft YaHei"/>
-              </a:rPr>
-              <a:t>评估与可视化：</a:t>
-            </a:r>
-            <a:r>
-              <a:rPr lang="en-US" sz="1200">
-                <a:solidFill>
-                  <a:srgbClr val="1A2230"/>
-                </a:solidFill>
-                <a:latin typeface="Microsoft YaHei"/>
-                <a:ea typeface="Microsoft YaHei"/>
-              </a:rPr>
-              <a:t xml:space="preserve">149 </a:t>
-            </a:r>
-            <a:r>
-              <a:rPr lang="zh-CN" sz="1200">
-                <a:solidFill>
-                  <a:srgbClr val="1A2230"/>
-                </a:solidFill>
-                <a:latin typeface="Microsoft YaHei"/>
-                <a:ea typeface="Microsoft YaHei"/>
-              </a:rPr>
-              <a:t>帧漫游视频</a:t>
-            </a:r>
-            <a:r>
-              <a:rPr lang="en-US" sz="1200">
-                <a:solidFill>
-                  <a:srgbClr val="1A2230"/>
-                </a:solidFill>
-                <a:latin typeface="Microsoft YaHei"/>
-                <a:ea typeface="Microsoft YaHei"/>
-              </a:rPr>
-              <a:t xml:space="preserve"> + 24 </a:t>
-            </a:r>
-            <a:r>
-              <a:rPr lang="zh-CN" sz="1200">
-                <a:solidFill>
-                  <a:srgbClr val="1A2230"/>
-                </a:solidFill>
-                <a:latin typeface="Microsoft YaHei"/>
-                <a:ea typeface="Microsoft YaHei"/>
-              </a:rPr>
-              <a:t>张测试视角渲染图</a:t>
-            </a:r>
-            <a:endParaRPr/>
-          </a:p>
-        </p:txBody>
-      </p:sp>
-      <p:sp>
-        <p:nvSpPr>
-          <p:cNvPr id="104" name=""/>
-          <p:cNvSpPr/>
-          <p:nvPr/>
-        </p:nvSpPr>
-        <p:spPr>
-          <a:xfrm rot="0" flipH="0" flipV="0">
-            <a:off x="381000" y="4295775"/>
-            <a:ext cx="4095750" cy="847725"/>
-          </a:xfrm>
-          <a:prstGeom prst="roundRect">
-            <a:avLst>
-              <a:gd name="adj" fmla="val 6742"/>
-            </a:avLst>
-          </a:prstGeom>
-          <a:solidFill>
-            <a:srgbClr val="FFF6F6"/>
-          </a:solidFill>
-          <a:ln w="12700">
-            <a:solidFill>
-              <a:srgbClr val="E8C4C2"/>
-            </a:solidFill>
-            <a:prstDash val="solid"/>
-          </a:ln>
-        </p:spPr>
-        <p:txBody>
-          <a:bodyPr/>
-          <a:p/>
-        </p:txBody>
-      </p:sp>
-      <p:sp>
-        <p:nvSpPr>
-          <p:cNvPr id="105" name="" descr="{&quot;isTemplate&quot;:true,&quot;type&quot;:&quot;text&quot;}"/>
-          <p:cNvSpPr txBox="1"/>
-          <p:nvPr/>
-        </p:nvSpPr>
-        <p:spPr>
-          <a:xfrm rot="0" flipH="0" flipV="0">
-            <a:off x="495300" y="4381500"/>
-            <a:ext cx="3867150" cy="171450"/>
-          </a:xfrm>
-          <a:prstGeom prst="rect"/>
-        </p:spPr>
-        <p:txBody>
-          <a:bodyPr wrap="none" lIns="0" tIns="0" rIns="0" bIns="0"/>
-          <a:p>
-            <a:pPr>
-              <a:lnSpc>
-                <a:spcPct val="100000"/>
-              </a:lnSpc>
-            </a:pPr>
-            <a:r>
-              <a:rPr lang="zh-CN" sz="1125" b="1">
-                <a:solidFill>
-                  <a:srgbClr val="D9534F"/>
-                </a:solidFill>
-                <a:latin typeface="Microsoft YaHei"/>
-                <a:ea typeface="Microsoft YaHei"/>
-              </a:rPr>
-              <a:t>换成</a:t>
-            </a:r>
-            <a:r>
-              <a:rPr lang="en-US" sz="1125" b="1">
-                <a:solidFill>
-                  <a:srgbClr val="D9534F"/>
-                </a:solidFill>
-                <a:latin typeface="Microsoft YaHei"/>
-                <a:ea typeface="Microsoft YaHei"/>
-              </a:rPr>
-              <a:t xml:space="preserve"> 4×RTX 4090 </a:t>
-            </a:r>
-            <a:r>
-              <a:rPr lang="zh-CN" sz="1125" b="1">
-                <a:solidFill>
-                  <a:srgbClr val="D9534F"/>
-                </a:solidFill>
-                <a:latin typeface="Microsoft YaHei"/>
-                <a:ea typeface="Microsoft YaHei"/>
-              </a:rPr>
-              <a:t>才跑完</a:t>
-            </a:r>
-            <a:endParaRPr/>
-          </a:p>
-        </p:txBody>
-      </p:sp>
-      <p:sp>
-        <p:nvSpPr>
-          <p:cNvPr id="106" name="" descr="{&quot;isTemplate&quot;:true,&quot;type&quot;:&quot;text&quot;}"/>
-          <p:cNvSpPr txBox="1"/>
-          <p:nvPr/>
-        </p:nvSpPr>
-        <p:spPr>
-          <a:xfrm rot="0" flipH="0" flipV="0">
-            <a:off x="495300" y="4572000"/>
-            <a:ext cx="3867150" cy="485775"/>
-          </a:xfrm>
-          <a:prstGeom prst="rect"/>
-        </p:spPr>
-        <p:txBody>
-          <a:bodyPr wrap="square" lIns="0" tIns="0" rIns="0" bIns="0">
-            <a:normAutofit/>
-          </a:bodyPr>
-          <a:p>
-            <a:pPr>
-              <a:lnSpc>
-                <a:spcPct val="140000"/>
-              </a:lnSpc>
-            </a:pPr>
-            <a:r>
-              <a:rPr lang="zh-CN" sz="1125">
-                <a:solidFill>
-                  <a:srgbClr val="5A6B80"/>
-                </a:solidFill>
-                <a:latin typeface="Microsoft YaHei"/>
-                <a:ea typeface="Microsoft YaHei"/>
-              </a:rPr>
-              <a:t>原</a:t>
-            </a:r>
-            <a:r>
-              <a:rPr lang="en-US" sz="1125">
-                <a:solidFill>
-                  <a:srgbClr val="5A6B80"/>
-                </a:solidFill>
-                <a:latin typeface="Microsoft YaHei"/>
-                <a:ea typeface="Microsoft YaHei"/>
-              </a:rPr>
-              <a:t xml:space="preserve"> 5090 </a:t>
-            </a:r>
-            <a:r>
-              <a:rPr lang="zh-CN" sz="1125">
-                <a:solidFill>
-                  <a:srgbClr val="5A6B80"/>
-                </a:solidFill>
-                <a:latin typeface="Microsoft YaHei"/>
-                <a:ea typeface="Microsoft YaHei"/>
-              </a:rPr>
-              <a:t>机器长期被他人任务占满，可跑通模块但无法完成整段重建。</a:t>
-            </a:r>
-            <a:endParaRPr/>
-          </a:p>
-        </p:txBody>
-      </p:sp>
-      <p:sp>
-        <p:nvSpPr>
-          <p:cNvPr id="107" name="" descr="{&quot;isTemplate&quot;:true,&quot;type&quot;:&quot;text&quot;}"/>
-          <p:cNvSpPr txBox="1"/>
-          <p:nvPr/>
-        </p:nvSpPr>
-        <p:spPr>
-          <a:xfrm rot="0" flipH="0" flipV="0">
-            <a:off x="4686300" y="1971675"/>
-            <a:ext cx="7124700" cy="228600"/>
-          </a:xfrm>
-          <a:prstGeom prst="rect"/>
-        </p:spPr>
-        <p:txBody>
-          <a:bodyPr wrap="none" lIns="0" tIns="0" rIns="0" bIns="0"/>
-          <a:p>
-            <a:pPr>
-              <a:lnSpc>
-                <a:spcPct val="100000"/>
-              </a:lnSpc>
-            </a:pPr>
-            <a:r>
-              <a:rPr lang="zh-CN" sz="1500" b="1">
-                <a:solidFill>
-                  <a:srgbClr val="1A2230"/>
-                </a:solidFill>
-                <a:latin typeface="Microsoft YaHei"/>
-                <a:ea typeface="Microsoft YaHei"/>
-              </a:rPr>
-              <a:t>照</a:t>
-            </a:r>
-            <a:r>
-              <a:rPr lang="en-US" sz="1500" b="1">
-                <a:solidFill>
-                  <a:srgbClr val="1A2230"/>
-                </a:solidFill>
-                <a:latin typeface="Microsoft YaHei"/>
-                <a:ea typeface="Microsoft YaHei"/>
-              </a:rPr>
-              <a:t xml:space="preserve"> README </a:t>
-            </a:r>
-            <a:r>
-              <a:rPr lang="zh-CN" sz="1500" b="1">
-                <a:solidFill>
-                  <a:srgbClr val="1A2230"/>
-                </a:solidFill>
-                <a:latin typeface="Microsoft YaHei"/>
-                <a:ea typeface="Microsoft YaHei"/>
-              </a:rPr>
-              <a:t>装完跑不起来</a:t>
-            </a:r>
-            <a:r>
-              <a:rPr lang="en-US" sz="1500" b="1">
-                <a:solidFill>
-                  <a:srgbClr val="1A2230"/>
-                </a:solidFill>
-                <a:latin typeface="Microsoft YaHei"/>
-                <a:ea typeface="Microsoft YaHei"/>
-              </a:rPr>
-              <a:t xml:space="preserve"> —— </a:t>
-            </a:r>
-            <a:r>
-              <a:rPr lang="zh-CN" sz="1500" b="1">
-                <a:solidFill>
-                  <a:srgbClr val="1A2230"/>
-                </a:solidFill>
-                <a:latin typeface="Microsoft YaHei"/>
-                <a:ea typeface="Microsoft YaHei"/>
-              </a:rPr>
-              <a:t>累计</a:t>
-            </a:r>
-            <a:r>
-              <a:rPr lang="en-US" sz="1500" b="1">
-                <a:solidFill>
-                  <a:srgbClr val="1A2230"/>
-                </a:solidFill>
-                <a:latin typeface="Microsoft YaHei"/>
-                <a:ea typeface="Microsoft YaHei"/>
-              </a:rPr>
-              <a:t xml:space="preserve"> 12 </a:t>
-            </a:r>
-            <a:r>
-              <a:rPr lang="zh-CN" sz="1500" b="1">
-                <a:solidFill>
-                  <a:srgbClr val="1A2230"/>
-                </a:solidFill>
-                <a:latin typeface="Microsoft YaHei"/>
-                <a:ea typeface="Microsoft YaHei"/>
-              </a:rPr>
-              <a:t>个坑</a:t>
-            </a:r>
-            <a:endParaRPr/>
-          </a:p>
-        </p:txBody>
-      </p:sp>
-      <p:sp>
-        <p:nvSpPr>
-          <p:cNvPr id="108" name="" descr="{&quot;isTemplate&quot;:true,&quot;type&quot;:&quot;text&quot;}"/>
-          <p:cNvSpPr txBox="1"/>
-          <p:nvPr/>
-        </p:nvSpPr>
-        <p:spPr>
-          <a:xfrm rot="0" flipH="0" flipV="0">
-            <a:off x="4686300" y="2266950"/>
-            <a:ext cx="7124700" cy="266700"/>
-          </a:xfrm>
-          <a:prstGeom prst="rect"/>
-        </p:spPr>
-        <p:txBody>
-          <a:bodyPr wrap="none" lIns="0" tIns="0" rIns="0" bIns="0"/>
-          <a:p>
-            <a:pPr>
-              <a:lnSpc>
-                <a:spcPct val="145000"/>
-              </a:lnSpc>
-            </a:pPr>
-            <a:r>
-              <a:rPr lang="en-US" sz="1200">
-                <a:solidFill>
-                  <a:srgbClr val="1A2230"/>
-                </a:solidFill>
-                <a:latin typeface="Microsoft YaHei"/>
-                <a:ea typeface="Microsoft YaHei"/>
-              </a:rPr>
-              <a:t xml:space="preserve">① </a:t>
-            </a:r>
-            <a:r>
-              <a:rPr lang="zh-CN" sz="1200">
-                <a:solidFill>
-                  <a:srgbClr val="1A2230"/>
-                </a:solidFill>
-                <a:latin typeface="Microsoft YaHei"/>
-                <a:ea typeface="Microsoft YaHei"/>
-              </a:rPr>
-              <a:t>架构</a:t>
-            </a:r>
-            <a:r>
-              <a:rPr lang="zh-CN" sz="1200">
-                <a:solidFill>
-                  <a:srgbClr val="1A2230"/>
-                </a:solidFill>
-                <a:latin typeface="Microsoft YaHei"/>
-                <a:ea typeface="Microsoft YaHei"/>
-              </a:rPr>
-              <a:t>　</a:t>
-            </a:r>
-            <a:r>
-              <a:rPr lang="en-US" sz="1200">
-                <a:solidFill>
-                  <a:srgbClr val="1A2230"/>
-                </a:solidFill>
-                <a:latin typeface="Microsoft YaHei"/>
-                <a:ea typeface="Microsoft YaHei"/>
-              </a:rPr>
-              <a:t xml:space="preserve">sm_120 </a:t>
-            </a:r>
-            <a:r>
-              <a:rPr lang="zh-CN" sz="1200">
-                <a:solidFill>
-                  <a:srgbClr val="1A2230"/>
-                </a:solidFill>
-                <a:latin typeface="Microsoft YaHei"/>
-                <a:ea typeface="Microsoft YaHei"/>
-              </a:rPr>
-              <a:t>要</a:t>
-            </a:r>
-            <a:r>
-              <a:rPr lang="en-US" sz="1200">
-                <a:solidFill>
-                  <a:srgbClr val="1A2230"/>
-                </a:solidFill>
-                <a:latin typeface="Microsoft YaHei"/>
-                <a:ea typeface="Microsoft YaHei"/>
-              </a:rPr>
-              <a:t xml:space="preserve"> cu128</a:t>
-            </a:r>
-            <a:r>
-              <a:rPr lang="zh-CN" sz="1200">
-                <a:solidFill>
-                  <a:srgbClr val="1A2230"/>
-                </a:solidFill>
-                <a:latin typeface="Microsoft YaHei"/>
-                <a:ea typeface="Microsoft YaHei"/>
-              </a:rPr>
-              <a:t>；换</a:t>
-            </a:r>
-            <a:r>
-              <a:rPr lang="en-US" sz="1200">
-                <a:solidFill>
-                  <a:srgbClr val="1A2230"/>
-                </a:solidFill>
-                <a:latin typeface="Microsoft YaHei"/>
-                <a:ea typeface="Microsoft YaHei"/>
-              </a:rPr>
-              <a:t xml:space="preserve"> 4090 </a:t>
-            </a:r>
-            <a:r>
-              <a:rPr lang="zh-CN" sz="1200">
-                <a:solidFill>
-                  <a:srgbClr val="1A2230"/>
-                </a:solidFill>
-                <a:latin typeface="Microsoft YaHei"/>
-                <a:ea typeface="Microsoft YaHei"/>
-              </a:rPr>
-              <a:t>后要改回</a:t>
-            </a:r>
-            <a:r>
-              <a:rPr lang="en-US" sz="1200">
-                <a:solidFill>
-                  <a:srgbClr val="1A2230"/>
-                </a:solidFill>
-                <a:latin typeface="Microsoft YaHei"/>
-                <a:ea typeface="Microsoft YaHei"/>
-              </a:rPr>
-              <a:t xml:space="preserve"> sm_89</a:t>
-            </a:r>
-            <a:r>
-              <a:rPr lang="zh-CN" sz="1200">
-                <a:solidFill>
-                  <a:srgbClr val="1A2230"/>
-                </a:solidFill>
-                <a:latin typeface="Microsoft YaHei"/>
-                <a:ea typeface="Microsoft YaHei"/>
-              </a:rPr>
-              <a:t>，否则编译产物不可用</a:t>
-            </a:r>
-            <a:endParaRPr/>
-          </a:p>
-        </p:txBody>
-      </p:sp>
-      <p:sp>
-        <p:nvSpPr>
-          <p:cNvPr id="109" name="" descr="{&quot;isTemplate&quot;:true,&quot;type&quot;:&quot;text&quot;}"/>
-          <p:cNvSpPr txBox="1"/>
-          <p:nvPr/>
-        </p:nvSpPr>
-        <p:spPr>
-          <a:xfrm rot="0" flipH="0" flipV="0">
-            <a:off x="4686300" y="2600325"/>
-            <a:ext cx="7124700" cy="266700"/>
-          </a:xfrm>
-          <a:prstGeom prst="rect"/>
-        </p:spPr>
-        <p:txBody>
-          <a:bodyPr wrap="none" lIns="0" tIns="0" rIns="0" bIns="0"/>
-          <a:p>
-            <a:pPr>
-              <a:lnSpc>
-                <a:spcPct val="145000"/>
-              </a:lnSpc>
-            </a:pPr>
-            <a:r>
-              <a:rPr lang="en-US" sz="1200">
-                <a:solidFill>
-                  <a:srgbClr val="1A2230"/>
-                </a:solidFill>
-                <a:latin typeface="Microsoft YaHei"/>
-                <a:ea typeface="Microsoft YaHei"/>
-              </a:rPr>
-              <a:t xml:space="preserve">② </a:t>
-            </a:r>
-            <a:r>
-              <a:rPr lang="zh-CN" sz="1200">
-                <a:solidFill>
-                  <a:srgbClr val="1A2230"/>
-                </a:solidFill>
-                <a:latin typeface="Microsoft YaHei"/>
-                <a:ea typeface="Microsoft YaHei"/>
-              </a:rPr>
-              <a:t>源码</a:t>
-            </a:r>
-            <a:r>
-              <a:rPr lang="zh-CN" sz="1200">
-                <a:solidFill>
-                  <a:srgbClr val="1A2230"/>
-                </a:solidFill>
-                <a:latin typeface="Microsoft YaHei"/>
-                <a:ea typeface="Microsoft YaHei"/>
-              </a:rPr>
-              <a:t>　嵌套</a:t>
-            </a:r>
-            <a:r>
-              <a:rPr lang="en-US" sz="1200">
-                <a:solidFill>
-                  <a:srgbClr val="1A2230"/>
-                </a:solidFill>
-                <a:latin typeface="Microsoft YaHei"/>
-                <a:ea typeface="Microsoft YaHei"/>
-              </a:rPr>
-              <a:t xml:space="preserve"> glm </a:t>
-            </a:r>
-            <a:r>
-              <a:rPr lang="zh-CN" sz="1200">
-                <a:solidFill>
-                  <a:srgbClr val="1A2230"/>
-                </a:solidFill>
-                <a:latin typeface="Microsoft YaHei"/>
-                <a:ea typeface="Microsoft YaHei"/>
-              </a:rPr>
-              <a:t>子模块缺失；</a:t>
-            </a:r>
-            <a:r>
-              <a:rPr lang="en-US" sz="1200">
-                <a:solidFill>
-                  <a:srgbClr val="1A2230"/>
-                </a:solidFill>
-                <a:latin typeface="Microsoft YaHei"/>
-                <a:ea typeface="Microsoft YaHei"/>
-              </a:rPr>
-              <a:t xml:space="preserve">DA-V2 </a:t>
-            </a:r>
-            <a:r>
-              <a:rPr lang="zh-CN" sz="1200">
-                <a:solidFill>
-                  <a:srgbClr val="1A2230"/>
-                </a:solidFill>
-                <a:latin typeface="Microsoft YaHei"/>
-                <a:ea typeface="Microsoft YaHei"/>
-              </a:rPr>
-              <a:t>子模块为空，改用</a:t>
-            </a:r>
-            <a:r>
-              <a:rPr lang="en-US" sz="1200">
-                <a:solidFill>
-                  <a:srgbClr val="1A2230"/>
-                </a:solidFill>
-                <a:latin typeface="Microsoft YaHei"/>
-                <a:ea typeface="Microsoft YaHei"/>
-              </a:rPr>
-              <a:t xml:space="preserve"> codeload tarball</a:t>
-            </a:r>
-            <a:endParaRPr/>
-          </a:p>
-        </p:txBody>
-      </p:sp>
-      <p:sp>
-        <p:nvSpPr>
-          <p:cNvPr id="110" name="" descr="{&quot;isTemplate&quot;:true,&quot;type&quot;:&quot;text&quot;}"/>
-          <p:cNvSpPr txBox="1"/>
-          <p:nvPr/>
-        </p:nvSpPr>
-        <p:spPr>
-          <a:xfrm rot="0" flipH="0" flipV="0">
-            <a:off x="4686300" y="2933700"/>
-            <a:ext cx="7124700" cy="266700"/>
-          </a:xfrm>
-          <a:prstGeom prst="rect"/>
-        </p:spPr>
-        <p:txBody>
-          <a:bodyPr wrap="none" lIns="0" tIns="0" rIns="0" bIns="0"/>
-          <a:p>
-            <a:pPr>
-              <a:lnSpc>
-                <a:spcPct val="145000"/>
-              </a:lnSpc>
-            </a:pPr>
-            <a:r>
-              <a:rPr lang="en-US" sz="1200">
-                <a:solidFill>
-                  <a:srgbClr val="1A2230"/>
-                </a:solidFill>
-                <a:latin typeface="Microsoft YaHei"/>
-                <a:ea typeface="Microsoft YaHei"/>
-              </a:rPr>
-              <a:t xml:space="preserve">③ </a:t>
-            </a:r>
-            <a:r>
-              <a:rPr lang="zh-CN" sz="1200">
-                <a:solidFill>
-                  <a:srgbClr val="1A2230"/>
-                </a:solidFill>
-                <a:latin typeface="Microsoft YaHei"/>
-                <a:ea typeface="Microsoft YaHei"/>
-              </a:rPr>
-              <a:t>网络</a:t>
-            </a:r>
-            <a:r>
-              <a:rPr lang="zh-CN" sz="1200">
-                <a:solidFill>
-                  <a:srgbClr val="1A2230"/>
-                </a:solidFill>
-                <a:latin typeface="Microsoft YaHei"/>
-                <a:ea typeface="Microsoft YaHei"/>
-              </a:rPr>
-              <a:t>　</a:t>
-            </a:r>
-            <a:r>
-              <a:rPr lang="en-US" sz="1200">
-                <a:solidFill>
-                  <a:srgbClr val="1A2230"/>
-                </a:solidFill>
-                <a:latin typeface="Microsoft YaHei"/>
-                <a:ea typeface="Microsoft YaHei"/>
-              </a:rPr>
-              <a:t xml:space="preserve">GitHub / HuggingFace </a:t>
-            </a:r>
-            <a:r>
-              <a:rPr lang="zh-CN" sz="1200">
-                <a:solidFill>
-                  <a:srgbClr val="1A2230"/>
-                </a:solidFill>
-                <a:latin typeface="Microsoft YaHei"/>
-                <a:ea typeface="Microsoft YaHei"/>
-              </a:rPr>
-              <a:t>均不可达，权重与</a:t>
-            </a:r>
-            <a:r>
-              <a:rPr lang="en-US" sz="1200">
-                <a:solidFill>
-                  <a:srgbClr val="1A2230"/>
-                </a:solidFill>
-                <a:latin typeface="Microsoft YaHei"/>
-                <a:ea typeface="Microsoft YaHei"/>
-              </a:rPr>
-              <a:t xml:space="preserve"> hub </a:t>
-            </a:r>
-            <a:r>
-              <a:rPr lang="zh-CN" sz="1200">
-                <a:solidFill>
-                  <a:srgbClr val="1A2230"/>
-                </a:solidFill>
-                <a:latin typeface="Microsoft YaHei"/>
-                <a:ea typeface="Microsoft YaHei"/>
-              </a:rPr>
-              <a:t>缓存全部本地化</a:t>
-            </a:r>
-            <a:endParaRPr/>
-          </a:p>
-        </p:txBody>
-      </p:sp>
-      <p:sp>
-        <p:nvSpPr>
-          <p:cNvPr id="111" name="" descr="{&quot;isTemplate&quot;:true,&quot;type&quot;:&quot;text&quot;}"/>
-          <p:cNvSpPr txBox="1"/>
-          <p:nvPr/>
-        </p:nvSpPr>
-        <p:spPr>
-          <a:xfrm rot="0" flipH="0" flipV="0">
-            <a:off x="4686300" y="3267075"/>
-            <a:ext cx="7124700" cy="266700"/>
-          </a:xfrm>
-          <a:prstGeom prst="rect"/>
-        </p:spPr>
-        <p:txBody>
-          <a:bodyPr wrap="none" lIns="0" tIns="0" rIns="0" bIns="0"/>
-          <a:p>
-            <a:pPr>
-              <a:lnSpc>
-                <a:spcPct val="145000"/>
-              </a:lnSpc>
-            </a:pPr>
-            <a:r>
-              <a:rPr lang="en-US" sz="1200">
-                <a:solidFill>
-                  <a:srgbClr val="1A2230"/>
-                </a:solidFill>
-                <a:latin typeface="Microsoft YaHei"/>
-                <a:ea typeface="Microsoft YaHei"/>
-              </a:rPr>
-              <a:t xml:space="preserve">④ </a:t>
-            </a:r>
-            <a:r>
-              <a:rPr lang="zh-CN" sz="1200">
-                <a:solidFill>
-                  <a:srgbClr val="1A2230"/>
-                </a:solidFill>
-                <a:latin typeface="Microsoft YaHei"/>
-                <a:ea typeface="Microsoft YaHei"/>
-              </a:rPr>
-              <a:t>精度</a:t>
-            </a:r>
-            <a:r>
-              <a:rPr lang="zh-CN" sz="1200">
-                <a:solidFill>
-                  <a:srgbClr val="1A2230"/>
-                </a:solidFill>
-                <a:latin typeface="Microsoft YaHei"/>
-                <a:ea typeface="Microsoft YaHei"/>
-              </a:rPr>
-              <a:t>　</a:t>
-            </a:r>
-            <a:r>
-              <a:rPr lang="en-US" sz="1200">
-                <a:solidFill>
-                  <a:srgbClr val="1A2230"/>
-                </a:solidFill>
-                <a:latin typeface="Microsoft YaHei"/>
-                <a:ea typeface="Microsoft YaHei"/>
-              </a:rPr>
-              <a:t xml:space="preserve">MegaLoc </a:t>
-            </a:r>
-            <a:r>
-              <a:rPr lang="zh-CN" sz="1200">
-                <a:solidFill>
-                  <a:srgbClr val="1A2230"/>
-                </a:solidFill>
-                <a:latin typeface="Microsoft YaHei"/>
-                <a:ea typeface="Microsoft YaHei"/>
-              </a:rPr>
-              <a:t>半精度冲突、</a:t>
-            </a:r>
-            <a:r>
-              <a:rPr lang="en-US" sz="1200">
-                <a:solidFill>
-                  <a:srgbClr val="1A2230"/>
-                </a:solidFill>
-                <a:latin typeface="Microsoft YaHei"/>
-                <a:ea typeface="Microsoft YaHei"/>
-              </a:rPr>
-              <a:t xml:space="preserve">VPR </a:t>
-            </a:r>
-            <a:r>
-              <a:rPr lang="zh-CN" sz="1200">
-                <a:solidFill>
-                  <a:srgbClr val="1A2230"/>
-                </a:solidFill>
-                <a:latin typeface="Microsoft YaHei"/>
-                <a:ea typeface="Microsoft YaHei"/>
-              </a:rPr>
-              <a:t>前向硬写</a:t>
-            </a:r>
-            <a:r>
-              <a:rPr lang="en-US" sz="1200">
-                <a:solidFill>
-                  <a:srgbClr val="1A2230"/>
-                </a:solidFill>
-                <a:latin typeface="Microsoft YaHei"/>
-                <a:ea typeface="Microsoft YaHei"/>
-              </a:rPr>
-              <a:t xml:space="preserve"> half</a:t>
-            </a:r>
-            <a:r>
-              <a:rPr lang="zh-CN" sz="1200">
-                <a:solidFill>
-                  <a:srgbClr val="1A2230"/>
-                </a:solidFill>
-                <a:latin typeface="Microsoft YaHei"/>
-                <a:ea typeface="Microsoft YaHei"/>
-              </a:rPr>
-              <a:t>，改为跟随</a:t>
-            </a:r>
-            <a:r>
-              <a:rPr lang="en-US" sz="1200">
-                <a:solidFill>
-                  <a:srgbClr val="1A2230"/>
-                </a:solidFill>
-                <a:latin typeface="Microsoft YaHei"/>
-                <a:ea typeface="Microsoft YaHei"/>
-              </a:rPr>
-              <a:t xml:space="preserve"> dtype</a:t>
-            </a:r>
-            <a:endParaRPr/>
-          </a:p>
-        </p:txBody>
-      </p:sp>
-      <p:sp>
-        <p:nvSpPr>
-          <p:cNvPr id="112" name="" descr="{&quot;isTemplate&quot;:true,&quot;type&quot;:&quot;text&quot;}"/>
-          <p:cNvSpPr txBox="1"/>
-          <p:nvPr/>
-        </p:nvSpPr>
-        <p:spPr>
-          <a:xfrm rot="0" flipH="0" flipV="0">
-            <a:off x="4686300" y="3600450"/>
-            <a:ext cx="7124700" cy="266700"/>
-          </a:xfrm>
-          <a:prstGeom prst="rect"/>
-        </p:spPr>
-        <p:txBody>
-          <a:bodyPr wrap="none" lIns="0" tIns="0" rIns="0" bIns="0"/>
-          <a:p>
-            <a:pPr>
-              <a:lnSpc>
-                <a:spcPct val="145000"/>
-              </a:lnSpc>
-            </a:pPr>
-            <a:r>
-              <a:rPr lang="en-US" sz="1200">
-                <a:solidFill>
-                  <a:srgbClr val="1A2230"/>
-                </a:solidFill>
-                <a:latin typeface="Microsoft YaHei"/>
-                <a:ea typeface="Microsoft YaHei"/>
-              </a:rPr>
-              <a:t xml:space="preserve">⑤ </a:t>
-            </a:r>
-            <a:r>
-              <a:rPr lang="zh-CN" sz="1200">
-                <a:solidFill>
-                  <a:srgbClr val="1A2230"/>
-                </a:solidFill>
-                <a:latin typeface="Microsoft YaHei"/>
-                <a:ea typeface="Microsoft YaHei"/>
-              </a:rPr>
-              <a:t>环境</a:t>
-            </a:r>
-            <a:r>
-              <a:rPr lang="zh-CN" sz="1200">
-                <a:solidFill>
-                  <a:srgbClr val="1A2230"/>
-                </a:solidFill>
-                <a:latin typeface="Microsoft YaHei"/>
-                <a:ea typeface="Microsoft YaHei"/>
-              </a:rPr>
-              <a:t>　必须在</a:t>
-            </a:r>
-            <a:r>
-              <a:rPr lang="en-US" sz="1200">
-                <a:solidFill>
-                  <a:srgbClr val="1A2230"/>
-                </a:solidFill>
-                <a:latin typeface="Microsoft YaHei"/>
-                <a:ea typeface="Microsoft YaHei"/>
-              </a:rPr>
-              <a:t xml:space="preserve"> i3dgs/ </a:t>
-            </a:r>
-            <a:r>
-              <a:rPr lang="zh-CN" sz="1200">
-                <a:solidFill>
-                  <a:srgbClr val="1A2230"/>
-                </a:solidFill>
-                <a:latin typeface="Microsoft YaHei"/>
-                <a:ea typeface="Microsoft YaHei"/>
-              </a:rPr>
-              <a:t>下运行；</a:t>
-            </a:r>
-            <a:r>
-              <a:rPr lang="en-US" sz="1200">
-                <a:solidFill>
-                  <a:srgbClr val="1A2230"/>
-                </a:solidFill>
-                <a:latin typeface="Microsoft YaHei"/>
-                <a:ea typeface="Microsoft YaHei"/>
-              </a:rPr>
-              <a:t xml:space="preserve">DA3 </a:t>
-            </a:r>
-            <a:r>
-              <a:rPr lang="zh-CN" sz="1200">
-                <a:solidFill>
-                  <a:srgbClr val="1A2230"/>
-                </a:solidFill>
-                <a:latin typeface="Microsoft YaHei"/>
-                <a:ea typeface="Microsoft YaHei"/>
-              </a:rPr>
-              <a:t>缺</a:t>
-            </a:r>
-            <a:r>
-              <a:rPr lang="en-US" sz="1200">
-                <a:solidFill>
-                  <a:srgbClr val="1A2230"/>
-                </a:solidFill>
-                <a:latin typeface="Microsoft YaHei"/>
-                <a:ea typeface="Microsoft YaHei"/>
-              </a:rPr>
-              <a:t xml:space="preserve"> 6 </a:t>
-            </a:r>
-            <a:r>
-              <a:rPr lang="zh-CN" sz="1200">
-                <a:solidFill>
-                  <a:srgbClr val="1A2230"/>
-                </a:solidFill>
-                <a:latin typeface="Microsoft YaHei"/>
-                <a:ea typeface="Microsoft YaHei"/>
-              </a:rPr>
-              <a:t>个运行期依赖</a:t>
-            </a:r>
-            <a:r>
-              <a:rPr lang="en-US" sz="1200">
-                <a:solidFill>
-                  <a:srgbClr val="1A2230"/>
-                </a:solidFill>
-                <a:latin typeface="Microsoft YaHei"/>
-                <a:ea typeface="Microsoft YaHei"/>
-              </a:rPr>
-              <a:t xml:space="preserve"> + 2 </a:t>
-            </a:r>
-            <a:r>
-              <a:rPr lang="zh-CN" sz="1200">
-                <a:solidFill>
-                  <a:srgbClr val="1A2230"/>
-                </a:solidFill>
-                <a:latin typeface="Microsoft YaHei"/>
-                <a:ea typeface="Microsoft YaHei"/>
-              </a:rPr>
-              <a:t>个构建后端</a:t>
-            </a:r>
-            <a:endParaRPr/>
-          </a:p>
-        </p:txBody>
-      </p:sp>
-      <p:sp>
-        <p:nvSpPr>
-          <p:cNvPr id="113" name="" descr="{&quot;isTemplate&quot;:true,&quot;type&quot;:&quot;text&quot;}"/>
-          <p:cNvSpPr txBox="1"/>
-          <p:nvPr/>
-        </p:nvSpPr>
-        <p:spPr>
-          <a:xfrm rot="0" flipH="0" flipV="0">
-            <a:off x="4686300" y="3933825"/>
-            <a:ext cx="7124700" cy="266700"/>
-          </a:xfrm>
-          <a:prstGeom prst="rect"/>
-        </p:spPr>
-        <p:txBody>
-          <a:bodyPr wrap="none" lIns="0" tIns="0" rIns="0" bIns="0"/>
-          <a:p>
-            <a:pPr>
-              <a:lnSpc>
-                <a:spcPct val="145000"/>
-              </a:lnSpc>
-            </a:pPr>
-            <a:r>
-              <a:rPr lang="en-US" sz="1200">
-                <a:solidFill>
-                  <a:srgbClr val="1A2230"/>
-                </a:solidFill>
-                <a:latin typeface="Microsoft YaHei"/>
-                <a:ea typeface="Microsoft YaHei"/>
-              </a:rPr>
-              <a:t xml:space="preserve">⑥ </a:t>
-            </a:r>
-            <a:r>
-              <a:rPr lang="zh-CN" sz="1200">
-                <a:solidFill>
-                  <a:srgbClr val="1A2230"/>
-                </a:solidFill>
-                <a:latin typeface="Microsoft YaHei"/>
-                <a:ea typeface="Microsoft YaHei"/>
-              </a:rPr>
-              <a:t>缓存</a:t>
-            </a:r>
-            <a:r>
-              <a:rPr lang="zh-CN" sz="1200">
-                <a:solidFill>
-                  <a:srgbClr val="1A2230"/>
-                </a:solidFill>
-                <a:latin typeface="Microsoft YaHei"/>
-                <a:ea typeface="Microsoft YaHei"/>
-              </a:rPr>
-              <a:t>　</a:t>
-            </a:r>
-            <a:r>
-              <a:rPr lang="en-US" sz="1200">
-                <a:solidFill>
-                  <a:srgbClr val="1A2230"/>
-                </a:solidFill>
-                <a:latin typeface="Microsoft YaHei"/>
-                <a:ea typeface="Microsoft YaHei"/>
-              </a:rPr>
-              <a:t xml:space="preserve">torch.hub </a:t>
-            </a:r>
-            <a:r>
-              <a:rPr lang="zh-CN" sz="1200">
-                <a:solidFill>
-                  <a:srgbClr val="1A2230"/>
-                </a:solidFill>
-                <a:latin typeface="Microsoft YaHei"/>
-                <a:ea typeface="Microsoft YaHei"/>
-              </a:rPr>
-              <a:t>只搬了仓库代码、漏了</a:t>
-            </a:r>
-            <a:r>
-              <a:rPr lang="en-US" sz="1200">
-                <a:solidFill>
-                  <a:srgbClr val="1A2230"/>
-                </a:solidFill>
-                <a:latin typeface="Microsoft YaHei"/>
-                <a:ea typeface="Microsoft YaHei"/>
-              </a:rPr>
-              <a:t xml:space="preserve"> checkpoints </a:t>
-            </a:r>
-            <a:r>
-              <a:rPr lang="zh-CN" sz="1200">
-                <a:solidFill>
-                  <a:srgbClr val="1A2230"/>
-                </a:solidFill>
-                <a:latin typeface="Microsoft YaHei"/>
-                <a:ea typeface="Microsoft YaHei"/>
-              </a:rPr>
-              <a:t>与</a:t>
-            </a:r>
-            <a:r>
-              <a:rPr lang="en-US" sz="1200">
-                <a:solidFill>
-                  <a:srgbClr val="1A2230"/>
-                </a:solidFill>
-                <a:latin typeface="Microsoft YaHei"/>
-                <a:ea typeface="Microsoft YaHei"/>
-              </a:rPr>
-              <a:t xml:space="preserve"> HF </a:t>
-            </a:r>
-            <a:r>
-              <a:rPr lang="zh-CN" sz="1200">
-                <a:solidFill>
-                  <a:srgbClr val="1A2230"/>
-                </a:solidFill>
-                <a:latin typeface="Microsoft YaHei"/>
-                <a:ea typeface="Microsoft YaHei"/>
-              </a:rPr>
-              <a:t>缓存，一启动就联网</a:t>
-            </a:r>
-            <a:endParaRPr/>
-          </a:p>
-        </p:txBody>
-      </p:sp>
-      <p:sp>
-        <p:nvSpPr>
-          <p:cNvPr id="114" name="" descr="{&quot;isTemplate&quot;:true,&quot;type&quot;:&quot;text&quot;}"/>
-          <p:cNvSpPr txBox="1"/>
-          <p:nvPr/>
-        </p:nvSpPr>
-        <p:spPr>
-          <a:xfrm rot="0" flipH="0" flipV="0">
-            <a:off x="4686300" y="4286250"/>
-            <a:ext cx="7124700" cy="228600"/>
-          </a:xfrm>
-          <a:prstGeom prst="rect"/>
-        </p:spPr>
-        <p:txBody>
-          <a:bodyPr wrap="none" lIns="0" tIns="0" rIns="0" bIns="0"/>
-          <a:p>
-            <a:pPr>
-              <a:lnSpc>
-                <a:spcPct val="140000"/>
-              </a:lnSpc>
-            </a:pPr>
-            <a:r>
-              <a:rPr lang="en-US" sz="1050">
-                <a:solidFill>
-                  <a:srgbClr val="8B97A8"/>
-                </a:solidFill>
-                <a:latin typeface="Microsoft YaHei"/>
-                <a:ea typeface="Microsoft YaHei"/>
-              </a:rPr>
-              <a:t xml:space="preserve">12 </a:t>
-            </a:r>
-            <a:r>
-              <a:rPr lang="zh-CN" sz="1050">
-                <a:solidFill>
-                  <a:srgbClr val="8B97A8"/>
-                </a:solidFill>
-                <a:latin typeface="Microsoft YaHei"/>
-                <a:ea typeface="Microsoft YaHei"/>
-              </a:rPr>
-              <a:t>个坑里真正要改代码的只有</a:t>
-            </a:r>
-            <a:r>
-              <a:rPr lang="en-US" sz="1050">
-                <a:solidFill>
-                  <a:srgbClr val="8B97A8"/>
-                </a:solidFill>
-                <a:latin typeface="Microsoft YaHei"/>
-                <a:ea typeface="Microsoft YaHei"/>
-              </a:rPr>
-              <a:t xml:space="preserve"> 3 </a:t>
-            </a:r>
-            <a:r>
-              <a:rPr lang="zh-CN" sz="1050">
-                <a:solidFill>
-                  <a:srgbClr val="8B97A8"/>
-                </a:solidFill>
-                <a:latin typeface="Microsoft YaHei"/>
-                <a:ea typeface="Microsoft YaHei"/>
-              </a:rPr>
-              <a:t>处，落在</a:t>
-            </a:r>
-            <a:r>
-              <a:rPr lang="en-US" sz="1050">
-                <a:solidFill>
-                  <a:srgbClr val="8B97A8"/>
-                </a:solidFill>
-                <a:latin typeface="Microsoft YaHei"/>
-                <a:ea typeface="Microsoft YaHei"/>
-              </a:rPr>
-              <a:t xml:space="preserve"> 2 </a:t>
-            </a:r>
-            <a:r>
-              <a:rPr lang="zh-CN" sz="1050">
-                <a:solidFill>
-                  <a:srgbClr val="8B97A8"/>
-                </a:solidFill>
-                <a:latin typeface="Microsoft YaHei"/>
-                <a:ea typeface="Microsoft YaHei"/>
-              </a:rPr>
-              <a:t>个文件，均标注</a:t>
-            </a:r>
-            <a:r>
-              <a:rPr lang="en-US" sz="1050">
-                <a:solidFill>
-                  <a:srgbClr val="8B97A8"/>
-                </a:solidFill>
-                <a:latin typeface="Microsoft YaHei"/>
-                <a:ea typeface="Microsoft YaHei"/>
-              </a:rPr>
-              <a:t xml:space="preserve"> [LOCAL PATCH]</a:t>
-            </a:r>
-            <a:r>
-              <a:rPr lang="zh-CN" sz="1050">
-                <a:solidFill>
-                  <a:srgbClr val="8B97A8"/>
-                </a:solidFill>
-                <a:latin typeface="Microsoft YaHei"/>
-                <a:ea typeface="Microsoft YaHei"/>
-              </a:rPr>
-              <a:t>。</a:t>
-            </a:r>
-            <a:endParaRPr/>
-          </a:p>
-        </p:txBody>
-      </p:sp>
-      <p:sp>
-        <p:nvSpPr>
-          <p:cNvPr id="115" name=""/>
-          <p:cNvSpPr/>
-          <p:nvPr/>
-        </p:nvSpPr>
-        <p:spPr>
-          <a:xfrm rot="0" flipH="0" flipV="0">
-            <a:off x="381000" y="6229350"/>
-            <a:ext cx="11430000" cy="381000"/>
-          </a:xfrm>
-          <a:prstGeom prst="roundRect">
-            <a:avLst>
-              <a:gd name="adj" fmla="val 15000"/>
-            </a:avLst>
-          </a:prstGeom>
-          <a:solidFill>
-            <a:srgbClr val="F7F9FC"/>
-          </a:solidFill>
-          <a:ln w="12700">
-            <a:solidFill>
-              <a:srgbClr val="D6DCE5"/>
-            </a:solidFill>
-            <a:prstDash val="solid"/>
-          </a:ln>
-        </p:spPr>
-        <p:txBody>
-          <a:bodyPr/>
-          <a:p/>
-        </p:txBody>
-      </p:sp>
-      <p:sp>
-        <p:nvSpPr>
-          <p:cNvPr id="116" name="" descr="{&quot;isTemplate&quot;:true,&quot;type&quot;:&quot;text&quot;}"/>
-          <p:cNvSpPr txBox="1"/>
-          <p:nvPr/>
-        </p:nvSpPr>
-        <p:spPr>
-          <a:xfrm rot="0" flipH="0" flipV="0">
-            <a:off x="514350" y="6334125"/>
-            <a:ext cx="6657975" cy="171450"/>
-          </a:xfrm>
-          <a:prstGeom prst="rect"/>
-        </p:spPr>
-        <p:txBody>
-          <a:bodyPr wrap="none" lIns="0" tIns="0" rIns="0" bIns="0"/>
-          <a:p>
-            <a:pPr>
-              <a:lnSpc>
-                <a:spcPct val="100000"/>
-              </a:lnSpc>
-            </a:pPr>
-            <a:r>
-              <a:rPr lang="zh-CN" sz="1125">
-                <a:solidFill>
-                  <a:srgbClr val="3A4A5E"/>
-                </a:solidFill>
-                <a:latin typeface="Microsoft YaHei"/>
-                <a:ea typeface="Microsoft YaHei"/>
-              </a:rPr>
-              <a:t>一键复现：</a:t>
-            </a:r>
-            <a:r>
-              <a:rPr lang="en-US" sz="1125">
-                <a:solidFill>
-                  <a:srgbClr val="3A4A5E"/>
-                </a:solidFill>
-                <a:latin typeface="Microsoft YaHei"/>
-                <a:ea typeface="Microsoft YaHei"/>
-              </a:rPr>
-              <a:t>bash scripts/run_all_14.sh</a:t>
-            </a:r>
-            <a:r>
-              <a:rPr lang="zh-CN" sz="1125">
-                <a:solidFill>
-                  <a:srgbClr val="3A4A5E"/>
-                </a:solidFill>
-                <a:latin typeface="Microsoft YaHei"/>
-                <a:ea typeface="Microsoft YaHei"/>
-              </a:rPr>
-              <a:t>　（自动挑最空闲的</a:t>
-            </a:r>
-            <a:r>
-              <a:rPr lang="en-US" sz="1125">
-                <a:solidFill>
-                  <a:srgbClr val="3A4A5E"/>
-                </a:solidFill>
-                <a:latin typeface="Microsoft YaHei"/>
-                <a:ea typeface="Microsoft YaHei"/>
-              </a:rPr>
-              <a:t xml:space="preserve"> 4090 → </a:t>
-            </a:r>
-            <a:r>
-              <a:rPr lang="zh-CN" sz="1125">
-                <a:solidFill>
-                  <a:srgbClr val="3A4A5E"/>
-                </a:solidFill>
-                <a:latin typeface="Microsoft YaHei"/>
-                <a:ea typeface="Microsoft YaHei"/>
-              </a:rPr>
-              <a:t>重建</a:t>
-            </a:r>
-            <a:r>
-              <a:rPr lang="en-US" sz="1125">
-                <a:solidFill>
-                  <a:srgbClr val="3A4A5E"/>
-                </a:solidFill>
-                <a:latin typeface="Microsoft YaHei"/>
-                <a:ea typeface="Microsoft YaHei"/>
-              </a:rPr>
-              <a:t xml:space="preserve"> → </a:t>
-            </a:r>
-            <a:r>
-              <a:rPr lang="zh-CN" sz="1125">
-                <a:solidFill>
-                  <a:srgbClr val="3A4A5E"/>
-                </a:solidFill>
-                <a:latin typeface="Microsoft YaHei"/>
-                <a:ea typeface="Microsoft YaHei"/>
-              </a:rPr>
-              <a:t>渲染漫游视频</a:t>
-            </a:r>
-            <a:r>
-              <a:rPr lang="en-US" sz="1125">
-                <a:solidFill>
-                  <a:srgbClr val="3A4A5E"/>
-                </a:solidFill>
-                <a:latin typeface="Microsoft YaHei"/>
-                <a:ea typeface="Microsoft YaHei"/>
-              </a:rPr>
-              <a:t xml:space="preserve"> → </a:t>
-            </a:r>
-            <a:r>
-              <a:rPr lang="zh-CN" sz="1125">
-                <a:solidFill>
-                  <a:srgbClr val="3A4A5E"/>
-                </a:solidFill>
-                <a:latin typeface="Microsoft YaHei"/>
-                <a:ea typeface="Microsoft YaHei"/>
-              </a:rPr>
-              <a:t>汇总指标）</a:t>
-            </a:r>
-            <a:endParaRPr/>
-          </a:p>
-        </p:txBody>
-      </p:sp>
-      <p:sp>
-        <p:nvSpPr>
-          <p:cNvPr id="117" name="" descr="{&quot;isTemplate&quot;:true,&quot;type&quot;:&quot;text&quot;}"/>
-          <p:cNvSpPr txBox="1"/>
-          <p:nvPr/>
-        </p:nvSpPr>
-        <p:spPr>
-          <a:xfrm rot="0" flipH="0" flipV="0">
-            <a:off x="9963150" y="6343650"/>
-            <a:ext cx="1714500" cy="161925"/>
-          </a:xfrm>
-          <a:prstGeom prst="rect"/>
-        </p:spPr>
-        <p:txBody>
-          <a:bodyPr wrap="none" lIns="0" tIns="0" rIns="0" bIns="0"/>
-          <a:p>
-            <a:pPr>
-              <a:lnSpc>
-                <a:spcPct val="100000"/>
-              </a:lnSpc>
-            </a:pPr>
-            <a:r>
-              <a:rPr lang="en-US" sz="1050">
-                <a:solidFill>
-                  <a:srgbClr val="8B97A8"/>
-                </a:solidFill>
-                <a:latin typeface="Microsoft YaHei"/>
-                <a:ea typeface="Microsoft YaHei"/>
-              </a:rPr>
-              <a:t>172.88.88.14 / 4×RTX 4090</a:t>
-            </a:r>
-            <a:endParaRPr/>
-          </a:p>
-        </p:txBody>
-      </p:sp>
-    </p:spTree>
-  </p:cSld>
-</p:sld>
-</file>
-
-<file path=ppt/slides/slide13.xml><?xml version="1.0" encoding="utf-8"?>
-<p:sld xmlns:p="http://schemas.openxmlformats.org/presentationml/2006/main" xmlns:a="http://schemas.openxmlformats.org/drawingml/2006/main">
-  <p:cSld>
-    <p:spTree>
-      <p:nvGrpSpPr>
-        <p:cNvPr id="118" name="" descr="&lt;Slide style={{ width: '1280px', height: '720px', backgroundColor: '#FFFFFF', padding: '0px', flexDirection: 'column' }}&gt;&#10;    &lt;Box style={{ width: '1280px', height: '8px', backgroundColor: '#1E4FA8' }} /&gt;&#10;    &lt;Box style={{ padding: '30px 40px 0px 40px', flexDirection: 'row', justifyContent: 'space-between', alignItems: 'flex-end' }}&gt;&#10;        &lt;Text style={{ fontSize: 34, fontWeight: 'bold', color: '#1E4FA8' }}&gt;不足与改进：哪些是硬伤，哪些能补&lt;/Text&gt;&#10;        &lt;Text style={{ fontSize: 15, color: '#8B97A8' }}&gt;13 / 15&lt;/Text&gt;&#10;    &lt;/Box&gt;&#10;    &lt;Box style={{ padding: '18px 40px 0px 40px' }}&gt;&#10;        &lt;Text style={{ fontSize: 21, color: '#4A5568', lineHeight: 1.5 }}&gt;左栏是它现在的边界（①–④ 来自论文自述，⑤ 是我们复现的边界），右栏是对应的补法。&lt;/Text&gt;&#10;    &lt;/Box&gt;&#10;    &lt;Box style={{ padding: '12px 40px 0px 40px', flexDirection: 'row', gap: 26 }}&gt;&#10;        &lt;Box style={{ flex: 1, flexDirection: 'column' }}&gt;&#10;            &lt;Box style={{ flexDirection: 'row', alignItems: 'center', gap: 8 }}&gt;&#10;                &lt;Box style={{ width: '5px', height: '26px', backgroundColor: '#D9534F' }} /&gt;&#10;                &lt;Text style={{ fontSize: 26, fontWeight: 'bold', color: '#1A2230' }}&gt;目前方法的不足&lt;/Text&gt;&#10;            &lt;/Box&gt;&#10;            &lt;Text style={{ fontSize: 20, color: '#1A2230', lineHeight: 1.55, marginTop: 16 }}&gt;&lt;b&gt;① 低视差直接失效&lt;/b&gt;　纯旋转或平移太小，三角化不出深度，论文自述这类采集会失败。&lt;/Text&gt;&#10;            &lt;Text style={{ fontSize: 20, color: '#1A2230', lineHeight: 1.55, marginTop: 16 }}&gt;&lt;b&gt;② 精度有天花板&lt;/b&gt;　作者用 NoGraphProp 消融证明图传播不比全局 PGO 差，但同时承认仍不如全局 BA。&lt;/Text&gt;&#10;            &lt;Text style={{ fontSize: 20, color: '#1A2230', lineHeight: 1.55, marginTop: 16 }}&gt;&lt;b&gt;③ 上游依赖重&lt;/b&gt;　VPR + XFeat + LightGlue + Depth Anything 3 串成一条链，任一环失效整条断。&lt;/Text&gt;&#10;            &lt;Text style={{ fontSize: 20, color: '#1A2230', lineHeight: 1.55, marginTop: 16 }}&gt;&lt;b&gt;④ 阈值靠经验&lt;/b&gt;　合并 0.5 px / 占比 20%、跳数 5、建边 500 匹配，换场景需重调。&lt;/Text&gt;&#10;            &lt;Text style={{ fontSize: 20, color: '#1A2230', lineHeight: 1.55, marginTop: 16 }}&gt;&lt;b&gt;⑤ 我们的复现边界&lt;/b&gt;　只跑有序序列（未验真无序）、2 倍降采样、单场景。&lt;/Text&gt;&#10;        &lt;/Box&gt;&#10;        &lt;Box style={{ width: '1px', backgroundColor: '#D6DCE5' }} /&gt;&#10;        &lt;Box style={{ flex: 1, flexDirection: 'column' }}&gt;&#10;            &lt;Box style={{ flexDirection: 'row', alignItems: 'center', gap: 8 }}&gt;&#10;                &lt;Box style={{ width: '5px', height: '26px', backgroundColor: '#1E4FA8' }} /&gt;&#10;                &lt;Text style={{ fontSize: 26, fontWeight: 'bold', color: '#1A2230' }}&gt;以后的改进点&lt;/Text&gt;&#10;            &lt;/Box&gt;&#10;            &lt;Text style={{ fontSize: 20, color: '#1A2230', lineHeight: 1.55, marginTop: 16 }}&gt;&lt;b&gt;① 低视差帧降级&lt;/b&gt;　只参与渲染、不进位姿求解，避免污染轨迹。&lt;/Text&gt;&#10;            &lt;Text style={{ fontSize: 20, color: '#1A2230', lineHeight: 1.55, marginTop: 16 }}&gt;&lt;b&gt;② 在线粗 + 离线精&lt;/b&gt;　实时出预览，结束时用 GLOMAP 回填一次全局 BA，把 1.2 dB 补回来。&lt;/Text&gt;&#10;            &lt;Text style={{ fontSize: 20, color: '#1A2230', lineHeight: 1.55, marginTop: 16 }}&gt;&lt;b&gt;③ 采集端闭环&lt;/b&gt;　实时覆盖率与重投影误差热图，直接提示&quot;这块没拍&quot;——论文 motivation 的自然下一步。&lt;/Text&gt;&#10;            &lt;Text style={{ fontSize: 20, color: '#1A2230', lineHeight: 1.55, marginTop: 16 }}&gt;&lt;b&gt;④ 阈值自适应&lt;/b&gt;　按纹理强度与重叠度在线估计，替代固定常数。&lt;/Text&gt;&#10;            &lt;Text style={{ fontSize: 20, color: '#1A2230', lineHeight: 1.55, marginTop: 16 }}&gt;&lt;b&gt;⑤ 我们能立刻做的&lt;/b&gt;　打乱实验（--shuffle）、全分辨率重跑、再换 2–3 个场景。&lt;/Text&gt;&#10;        &lt;/Box&gt;&#10;    &lt;/Box&gt;&#10;    &lt;Box style={{ margin: '12px 40px 0px 40px', backgroundColor: '#F0F5FC', borderLeft: '5px solid #1E4FA8', padding: '15px 20px' }}&gt;&#10;        &lt;Text style={{ fontSize: 21, color: '#1A2230', lineHeight: 1.5 }}&gt;它把&quot;精度&quot;换成了&quot;时间&quot;。补回精度只有两条路：&lt;b&gt;要么离线回填，要么让采集端少犯错&lt;/b&gt;——后者才是它真正打开的方向。&lt;/Text&gt;&#10;    &lt;/Box&gt;&#10;&lt;/Slide&gt;&#10;"/>
-        <p:cNvGrpSpPr/>
-        <p:nvPr/>
-      </p:nvGrpSpPr>
-      <p:grpSpPr>
-        <a:xfrm>
-          <a:off x="0" y="0"/>
-          <a:ext cx="0" cy="0"/>
-          <a:chOff x="0" y="0"/>
-          <a:chExt cx="0" cy="0"/>
-        </a:xfrm>
-      </p:grpSpPr>
-      <p:sp>
-        <p:nvSpPr>
-          <p:cNvPr id="119" name=""/>
-          <p:cNvSpPr/>
-          <p:nvPr/>
-        </p:nvSpPr>
-        <p:spPr>
-          <a:xfrm rot="0" flipH="0" flipV="0">
-            <a:off x="0" y="0"/>
-            <a:ext cx="12192000" cy="6858000"/>
+            <a:off x="381000" y="1428750"/>
+            <a:ext cx="47625" cy="247650"/>
           </a:xfrm>
           <a:prstGeom prst="rect">
             <a:avLst/>
           </a:prstGeom>
           <a:solidFill>
-            <a:srgbClr val="FFFFFF"/>
+            <a:srgbClr val="D9534F"/>
           </a:solidFill>
           <a:ln/>
         </p:spPr>
@@ -6221,14 +3910,538 @@
       </p:sp>
       <p:sp>
         <p:nvSpPr>
-          <p:cNvPr id="120" name=""/>
+          <p:cNvPr id="81" name="" descr="{&quot;isTemplate&quot;:true,&quot;type&quot;:&quot;text&quot;}"/>
+          <p:cNvSpPr txBox="1"/>
+          <p:nvPr/>
+        </p:nvSpPr>
+        <p:spPr>
+          <a:xfrm rot="0" flipH="0" flipV="0">
+            <a:off x="504825" y="1400175"/>
+            <a:ext cx="1733550" cy="304800"/>
+          </a:xfrm>
+          <a:prstGeom prst="rect"/>
+        </p:spPr>
+        <p:txBody>
+          <a:bodyPr wrap="none" lIns="0" tIns="0" rIns="0" bIns="0"/>
+          <a:p>
+            <a:pPr>
+              <a:lnSpc>
+                <a:spcPct val="100000"/>
+              </a:lnSpc>
+            </a:pPr>
+            <a:r>
+              <a:rPr lang="zh-CN" sz="1950" b="1">
+                <a:solidFill>
+                  <a:srgbClr val="1A2230"/>
+                </a:solidFill>
+                <a:latin typeface="Microsoft YaHei"/>
+                <a:ea typeface="Microsoft YaHei"/>
+              </a:rPr>
+              <a:t>目前方法的不足</a:t>
+            </a:r>
+            <a:endParaRPr/>
+          </a:p>
+        </p:txBody>
+      </p:sp>
+      <p:sp>
+        <p:nvSpPr>
+          <p:cNvPr id="82" name="" descr="{&quot;isTemplate&quot;:true,&quot;type&quot;:&quot;text&quot;}"/>
+          <p:cNvSpPr txBox="1"/>
+          <p:nvPr/>
+        </p:nvSpPr>
+        <p:spPr>
+          <a:xfrm rot="0" flipH="0" flipV="0">
+            <a:off x="381000" y="1857375"/>
+            <a:ext cx="5467350" cy="714375"/>
+          </a:xfrm>
+          <a:prstGeom prst="rect"/>
+        </p:spPr>
+        <p:txBody>
+          <a:bodyPr wrap="square" lIns="0" tIns="0" rIns="0" bIns="0">
+            <a:normAutofit/>
+          </a:bodyPr>
+          <a:p>
+            <a:pPr>
+              <a:lnSpc>
+                <a:spcPct val="155000"/>
+              </a:lnSpc>
+            </a:pPr>
+            <a:r>
+              <a:rPr lang="en-US" sz="1500">
+                <a:solidFill>
+                  <a:srgbClr val="1A2230"/>
+                </a:solidFill>
+                <a:latin typeface="Microsoft YaHei"/>
+                <a:ea typeface="Microsoft YaHei"/>
+              </a:rPr>
+              <a:t xml:space="preserve">① </a:t>
+            </a:r>
+            <a:r>
+              <a:rPr lang="zh-CN" sz="1500">
+                <a:solidFill>
+                  <a:srgbClr val="1A2230"/>
+                </a:solidFill>
+                <a:latin typeface="Microsoft YaHei"/>
+                <a:ea typeface="Microsoft YaHei"/>
+              </a:rPr>
+              <a:t>低视差直接失效</a:t>
+            </a:r>
+            <a:r>
+              <a:rPr lang="zh-CN" sz="1500">
+                <a:solidFill>
+                  <a:srgbClr val="1A2230"/>
+                </a:solidFill>
+                <a:latin typeface="Microsoft YaHei"/>
+                <a:ea typeface="Microsoft YaHei"/>
+              </a:rPr>
+              <a:t>　纯旋转或平移太小，三角化不出深度，论文自述这类采集会失败。</a:t>
+            </a:r>
+            <a:endParaRPr/>
+          </a:p>
+        </p:txBody>
+      </p:sp>
+      <p:sp>
+        <p:nvSpPr>
+          <p:cNvPr id="83" name="" descr="{&quot;isTemplate&quot;:true,&quot;type&quot;:&quot;text&quot;}"/>
+          <p:cNvSpPr txBox="1"/>
+          <p:nvPr/>
+        </p:nvSpPr>
+        <p:spPr>
+          <a:xfrm rot="0" flipH="0" flipV="0">
+            <a:off x="381000" y="2724150"/>
+            <a:ext cx="5467350" cy="714375"/>
+          </a:xfrm>
+          <a:prstGeom prst="rect"/>
+        </p:spPr>
+        <p:txBody>
+          <a:bodyPr wrap="square" lIns="0" tIns="0" rIns="0" bIns="0">
+            <a:normAutofit/>
+          </a:bodyPr>
+          <a:p>
+            <a:pPr>
+              <a:lnSpc>
+                <a:spcPct val="155000"/>
+              </a:lnSpc>
+            </a:pPr>
+            <a:r>
+              <a:rPr lang="en-US" sz="1500">
+                <a:solidFill>
+                  <a:srgbClr val="1A2230"/>
+                </a:solidFill>
+                <a:latin typeface="Microsoft YaHei"/>
+                <a:ea typeface="Microsoft YaHei"/>
+              </a:rPr>
+              <a:t xml:space="preserve">② </a:t>
+            </a:r>
+            <a:r>
+              <a:rPr lang="zh-CN" sz="1500">
+                <a:solidFill>
+                  <a:srgbClr val="1A2230"/>
+                </a:solidFill>
+                <a:latin typeface="Microsoft YaHei"/>
+                <a:ea typeface="Microsoft YaHei"/>
+              </a:rPr>
+              <a:t>精度有天花板</a:t>
+            </a:r>
+            <a:r>
+              <a:rPr lang="zh-CN" sz="1500">
+                <a:solidFill>
+                  <a:srgbClr val="1A2230"/>
+                </a:solidFill>
+                <a:latin typeface="Microsoft YaHei"/>
+                <a:ea typeface="Microsoft YaHei"/>
+              </a:rPr>
+              <a:t>　作者用</a:t>
+            </a:r>
+            <a:r>
+              <a:rPr lang="en-US" sz="1500">
+                <a:solidFill>
+                  <a:srgbClr val="1A2230"/>
+                </a:solidFill>
+                <a:latin typeface="Microsoft YaHei"/>
+                <a:ea typeface="Microsoft YaHei"/>
+              </a:rPr>
+              <a:t xml:space="preserve"> NoGraphProp </a:t>
+            </a:r>
+            <a:r>
+              <a:rPr lang="zh-CN" sz="1500">
+                <a:solidFill>
+                  <a:srgbClr val="1A2230"/>
+                </a:solidFill>
+                <a:latin typeface="Microsoft YaHei"/>
+                <a:ea typeface="Microsoft YaHei"/>
+              </a:rPr>
+              <a:t>消融证明图传播不比全局</a:t>
+            </a:r>
+            <a:r>
+              <a:rPr lang="en-US" sz="1500">
+                <a:solidFill>
+                  <a:srgbClr val="1A2230"/>
+                </a:solidFill>
+                <a:latin typeface="Microsoft YaHei"/>
+                <a:ea typeface="Microsoft YaHei"/>
+              </a:rPr>
+              <a:t xml:space="preserve"> PGO </a:t>
+            </a:r>
+            <a:r>
+              <a:rPr lang="zh-CN" sz="1500">
+                <a:solidFill>
+                  <a:srgbClr val="1A2230"/>
+                </a:solidFill>
+                <a:latin typeface="Microsoft YaHei"/>
+                <a:ea typeface="Microsoft YaHei"/>
+              </a:rPr>
+              <a:t>差，但同时承认仍不如全局</a:t>
+            </a:r>
+            <a:r>
+              <a:rPr lang="en-US" sz="1500">
+                <a:solidFill>
+                  <a:srgbClr val="1A2230"/>
+                </a:solidFill>
+                <a:latin typeface="Microsoft YaHei"/>
+                <a:ea typeface="Microsoft YaHei"/>
+              </a:rPr>
+              <a:t xml:space="preserve"> BA</a:t>
+            </a:r>
+            <a:r>
+              <a:rPr lang="zh-CN" sz="1500">
+                <a:solidFill>
+                  <a:srgbClr val="1A2230"/>
+                </a:solidFill>
+                <a:latin typeface="Microsoft YaHei"/>
+                <a:ea typeface="Microsoft YaHei"/>
+              </a:rPr>
+              <a:t>。</a:t>
+            </a:r>
+            <a:endParaRPr/>
+          </a:p>
+        </p:txBody>
+      </p:sp>
+      <p:sp>
+        <p:nvSpPr>
+          <p:cNvPr id="84" name="" descr="{&quot;isTemplate&quot;:true,&quot;type&quot;:&quot;text&quot;}"/>
+          <p:cNvSpPr txBox="1"/>
+          <p:nvPr/>
+        </p:nvSpPr>
+        <p:spPr>
+          <a:xfrm rot="0" flipH="0" flipV="0">
+            <a:off x="381000" y="3590925"/>
+            <a:ext cx="5467350" cy="714375"/>
+          </a:xfrm>
+          <a:prstGeom prst="rect"/>
+        </p:spPr>
+        <p:txBody>
+          <a:bodyPr wrap="square" lIns="0" tIns="0" rIns="0" bIns="0">
+            <a:normAutofit/>
+          </a:bodyPr>
+          <a:p>
+            <a:pPr>
+              <a:lnSpc>
+                <a:spcPct val="155000"/>
+              </a:lnSpc>
+            </a:pPr>
+            <a:r>
+              <a:rPr lang="en-US" sz="1500">
+                <a:solidFill>
+                  <a:srgbClr val="1A2230"/>
+                </a:solidFill>
+                <a:latin typeface="Microsoft YaHei"/>
+                <a:ea typeface="Microsoft YaHei"/>
+              </a:rPr>
+              <a:t xml:space="preserve">③ </a:t>
+            </a:r>
+            <a:r>
+              <a:rPr lang="zh-CN" sz="1500">
+                <a:solidFill>
+                  <a:srgbClr val="1A2230"/>
+                </a:solidFill>
+                <a:latin typeface="Microsoft YaHei"/>
+                <a:ea typeface="Microsoft YaHei"/>
+              </a:rPr>
+              <a:t>上游依赖重</a:t>
+            </a:r>
+            <a:r>
+              <a:rPr lang="zh-CN" sz="1500">
+                <a:solidFill>
+                  <a:srgbClr val="1A2230"/>
+                </a:solidFill>
+                <a:latin typeface="Microsoft YaHei"/>
+                <a:ea typeface="Microsoft YaHei"/>
+              </a:rPr>
+              <a:t>　</a:t>
+            </a:r>
+            <a:r>
+              <a:rPr lang="en-US" sz="1500">
+                <a:solidFill>
+                  <a:srgbClr val="1A2230"/>
+                </a:solidFill>
+                <a:latin typeface="Microsoft YaHei"/>
+                <a:ea typeface="Microsoft YaHei"/>
+              </a:rPr>
+              <a:t xml:space="preserve">VPR + XFeat + LightGlue + Depth Anything 3 </a:t>
+            </a:r>
+            <a:r>
+              <a:rPr lang="zh-CN" sz="1500">
+                <a:solidFill>
+                  <a:srgbClr val="1A2230"/>
+                </a:solidFill>
+                <a:latin typeface="Microsoft YaHei"/>
+                <a:ea typeface="Microsoft YaHei"/>
+              </a:rPr>
+              <a:t>串成一条链，任一环失效整条断。</a:t>
+            </a:r>
+            <a:endParaRPr/>
+          </a:p>
+        </p:txBody>
+      </p:sp>
+      <p:sp>
+        <p:nvSpPr>
+          <p:cNvPr id="85" name="" descr="{&quot;isTemplate&quot;:true,&quot;type&quot;:&quot;text&quot;}"/>
+          <p:cNvSpPr txBox="1"/>
+          <p:nvPr/>
+        </p:nvSpPr>
+        <p:spPr>
+          <a:xfrm rot="0" flipH="0" flipV="0">
+            <a:off x="381000" y="4457700"/>
+            <a:ext cx="5467350" cy="714375"/>
+          </a:xfrm>
+          <a:prstGeom prst="rect"/>
+        </p:spPr>
+        <p:txBody>
+          <a:bodyPr wrap="square" lIns="0" tIns="0" rIns="0" bIns="0">
+            <a:normAutofit/>
+          </a:bodyPr>
+          <a:p>
+            <a:pPr>
+              <a:lnSpc>
+                <a:spcPct val="155000"/>
+              </a:lnSpc>
+            </a:pPr>
+            <a:r>
+              <a:rPr lang="en-US" sz="1500">
+                <a:solidFill>
+                  <a:srgbClr val="1A2230"/>
+                </a:solidFill>
+                <a:latin typeface="Microsoft YaHei"/>
+                <a:ea typeface="Microsoft YaHei"/>
+              </a:rPr>
+              <a:t xml:space="preserve">④ </a:t>
+            </a:r>
+            <a:r>
+              <a:rPr lang="zh-CN" sz="1500">
+                <a:solidFill>
+                  <a:srgbClr val="1A2230"/>
+                </a:solidFill>
+                <a:latin typeface="Microsoft YaHei"/>
+                <a:ea typeface="Microsoft YaHei"/>
+              </a:rPr>
+              <a:t>阈值靠经验</a:t>
+            </a:r>
+            <a:r>
+              <a:rPr lang="zh-CN" sz="1500">
+                <a:solidFill>
+                  <a:srgbClr val="1A2230"/>
+                </a:solidFill>
+                <a:latin typeface="Microsoft YaHei"/>
+                <a:ea typeface="Microsoft YaHei"/>
+              </a:rPr>
+              <a:t>　合并</a:t>
+            </a:r>
+            <a:r>
+              <a:rPr lang="en-US" sz="1500">
+                <a:solidFill>
+                  <a:srgbClr val="1A2230"/>
+                </a:solidFill>
+                <a:latin typeface="Microsoft YaHei"/>
+                <a:ea typeface="Microsoft YaHei"/>
+              </a:rPr>
+              <a:t xml:space="preserve"> 0.5 px / </a:t>
+            </a:r>
+            <a:r>
+              <a:rPr lang="zh-CN" sz="1500">
+                <a:solidFill>
+                  <a:srgbClr val="1A2230"/>
+                </a:solidFill>
+                <a:latin typeface="Microsoft YaHei"/>
+                <a:ea typeface="Microsoft YaHei"/>
+              </a:rPr>
+              <a:t>占比</a:t>
+            </a:r>
+            <a:r>
+              <a:rPr lang="en-US" sz="1500">
+                <a:solidFill>
+                  <a:srgbClr val="1A2230"/>
+                </a:solidFill>
+                <a:latin typeface="Microsoft YaHei"/>
+                <a:ea typeface="Microsoft YaHei"/>
+              </a:rPr>
+              <a:t xml:space="preserve"> 20%</a:t>
+            </a:r>
+            <a:r>
+              <a:rPr lang="zh-CN" sz="1500">
+                <a:solidFill>
+                  <a:srgbClr val="1A2230"/>
+                </a:solidFill>
+                <a:latin typeface="Microsoft YaHei"/>
+                <a:ea typeface="Microsoft YaHei"/>
+              </a:rPr>
+              <a:t>、跳数</a:t>
+            </a:r>
+            <a:r>
+              <a:rPr lang="en-US" sz="1500">
+                <a:solidFill>
+                  <a:srgbClr val="1A2230"/>
+                </a:solidFill>
+                <a:latin typeface="Microsoft YaHei"/>
+                <a:ea typeface="Microsoft YaHei"/>
+              </a:rPr>
+              <a:t xml:space="preserve"> 5</a:t>
+            </a:r>
+            <a:r>
+              <a:rPr lang="zh-CN" sz="1500">
+                <a:solidFill>
+                  <a:srgbClr val="1A2230"/>
+                </a:solidFill>
+                <a:latin typeface="Microsoft YaHei"/>
+                <a:ea typeface="Microsoft YaHei"/>
+              </a:rPr>
+              <a:t>、建边</a:t>
+            </a:r>
+            <a:r>
+              <a:rPr lang="en-US" sz="1500">
+                <a:solidFill>
+                  <a:srgbClr val="1A2230"/>
+                </a:solidFill>
+                <a:latin typeface="Microsoft YaHei"/>
+                <a:ea typeface="Microsoft YaHei"/>
+              </a:rPr>
+              <a:t xml:space="preserve"> 500 </a:t>
+            </a:r>
+            <a:r>
+              <a:rPr lang="zh-CN" sz="1500">
+                <a:solidFill>
+                  <a:srgbClr val="1A2230"/>
+                </a:solidFill>
+                <a:latin typeface="Microsoft YaHei"/>
+                <a:ea typeface="Microsoft YaHei"/>
+              </a:rPr>
+              <a:t>匹配，换场景需重调。</a:t>
+            </a:r>
+            <a:endParaRPr/>
+          </a:p>
+        </p:txBody>
+      </p:sp>
+      <p:sp>
+        <p:nvSpPr>
+          <p:cNvPr id="86" name="" descr="{&quot;isTemplate&quot;:true,&quot;type&quot;:&quot;text&quot;}"/>
+          <p:cNvSpPr txBox="1"/>
+          <p:nvPr/>
+        </p:nvSpPr>
+        <p:spPr>
+          <a:xfrm rot="0" flipH="0" flipV="0">
+            <a:off x="381000" y="5324475"/>
+            <a:ext cx="5467350" cy="714375"/>
+          </a:xfrm>
+          <a:prstGeom prst="rect"/>
+        </p:spPr>
+        <p:txBody>
+          <a:bodyPr wrap="square" lIns="0" tIns="0" rIns="0" bIns="0">
+            <a:normAutofit/>
+          </a:bodyPr>
+          <a:p>
+            <a:pPr>
+              <a:lnSpc>
+                <a:spcPct val="155000"/>
+              </a:lnSpc>
+            </a:pPr>
+            <a:r>
+              <a:rPr lang="en-US" sz="1500">
+                <a:solidFill>
+                  <a:srgbClr val="1A2230"/>
+                </a:solidFill>
+                <a:latin typeface="Microsoft YaHei"/>
+                <a:ea typeface="Microsoft YaHei"/>
+              </a:rPr>
+              <a:t xml:space="preserve">⑤ </a:t>
+            </a:r>
+            <a:r>
+              <a:rPr lang="zh-CN" sz="1500">
+                <a:solidFill>
+                  <a:srgbClr val="1A2230"/>
+                </a:solidFill>
+                <a:latin typeface="Microsoft YaHei"/>
+                <a:ea typeface="Microsoft YaHei"/>
+              </a:rPr>
+              <a:t>我们的复现边界</a:t>
+            </a:r>
+            <a:r>
+              <a:rPr lang="zh-CN" sz="1500">
+                <a:solidFill>
+                  <a:srgbClr val="1A2230"/>
+                </a:solidFill>
+                <a:latin typeface="Microsoft YaHei"/>
+                <a:ea typeface="Microsoft YaHei"/>
+              </a:rPr>
+              <a:t>　只跑有序序列（未验真无序）、</a:t>
+            </a:r>
+            <a:r>
+              <a:rPr lang="en-US" sz="1500">
+                <a:solidFill>
+                  <a:srgbClr val="1A2230"/>
+                </a:solidFill>
+                <a:latin typeface="Microsoft YaHei"/>
+                <a:ea typeface="Microsoft YaHei"/>
+              </a:rPr>
+              <a:t xml:space="preserve">2 </a:t>
+            </a:r>
+            <a:r>
+              <a:rPr lang="zh-CN" sz="1500">
+                <a:solidFill>
+                  <a:srgbClr val="1A2230"/>
+                </a:solidFill>
+                <a:latin typeface="Microsoft YaHei"/>
+                <a:ea typeface="Microsoft YaHei"/>
+              </a:rPr>
+              <a:t>倍降采样、单场景。</a:t>
+            </a:r>
+            <a:endParaRPr/>
+          </a:p>
+        </p:txBody>
+      </p:sp>
+      <p:sp>
+        <p:nvSpPr>
+          <p:cNvPr id="87" name=""/>
           <p:cNvSpPr/>
           <p:nvPr/>
         </p:nvSpPr>
         <p:spPr>
           <a:xfrm rot="0" flipH="0" flipV="0">
-            <a:off x="0" y="0"/>
-            <a:ext cx="12192000" cy="76200"/>
+            <a:off x="6096000" y="1400175"/>
+            <a:ext cx="9525" cy="4638675"/>
+          </a:xfrm>
+          <a:prstGeom prst="rect">
+            <a:avLst/>
+          </a:prstGeom>
+          <a:solidFill>
+            <a:srgbClr val="D6DCE5"/>
+          </a:solidFill>
+          <a:ln/>
+        </p:spPr>
+        <p:txBody>
+          <a:bodyPr/>
+          <a:p/>
+        </p:txBody>
+      </p:sp>
+      <p:sp>
+        <p:nvSpPr>
+          <p:cNvPr id="88" name=""/>
+          <p:cNvSpPr/>
+          <p:nvPr/>
+        </p:nvSpPr>
+        <p:spPr>
+          <a:xfrm rot="0" flipH="0" flipV="0">
+            <a:off x="6353175" y="1428750"/>
+            <a:ext cx="47625" cy="247650"/>
           </a:xfrm>
           <a:prstGeom prst="rect">
             <a:avLst/>
@@ -6245,14 +4458,14 @@
       </p:sp>
       <p:sp>
         <p:nvSpPr>
-          <p:cNvPr id="121" name="" descr="{&quot;isTemplate&quot;:true,&quot;type&quot;:&quot;text&quot;}"/>
-          <p:cNvSpPr txBox="1"/>
-          <p:nvPr/>
-        </p:nvSpPr>
-        <p:spPr>
-          <a:xfrm rot="0" flipH="0" flipV="0">
-            <a:off x="381000" y="361950"/>
-            <a:ext cx="5181600" cy="390525"/>
+          <p:cNvPr id="89" name="" descr="{&quot;isTemplate&quot;:true,&quot;type&quot;:&quot;text&quot;}"/>
+          <p:cNvSpPr txBox="1"/>
+          <p:nvPr/>
+        </p:nvSpPr>
+        <p:spPr>
+          <a:xfrm rot="0" flipH="0" flipV="0">
+            <a:off x="6477000" y="1400175"/>
+            <a:ext cx="1485900" cy="304800"/>
           </a:xfrm>
           <a:prstGeom prst="rect"/>
         </p:spPr>
@@ -6265,175 +4478,6 @@
               </a:lnSpc>
             </a:pPr>
             <a:r>
-              <a:rPr lang="zh-CN" sz="2550" b="1">
-                <a:solidFill>
-                  <a:srgbClr val="1E4FA8"/>
-                </a:solidFill>
-                <a:latin typeface="Microsoft YaHei"/>
-                <a:ea typeface="Microsoft YaHei"/>
-              </a:rPr>
-              <a:t>不足与改进：哪些是硬伤，哪些能补</a:t>
-            </a:r>
-            <a:endParaRPr/>
-          </a:p>
-        </p:txBody>
-      </p:sp>
-      <p:sp>
-        <p:nvSpPr>
-          <p:cNvPr id="122" name="" descr="{&quot;isTemplate&quot;:true,&quot;type&quot;:&quot;text&quot;}"/>
-          <p:cNvSpPr txBox="1"/>
-          <p:nvPr/>
-        </p:nvSpPr>
-        <p:spPr>
-          <a:xfrm rot="0" flipH="0" flipV="0">
-            <a:off x="11325225" y="581025"/>
-            <a:ext cx="485775" cy="171450"/>
-          </a:xfrm>
-          <a:prstGeom prst="rect"/>
-        </p:spPr>
-        <p:txBody>
-          <a:bodyPr wrap="none" lIns="0" tIns="0" rIns="0" bIns="0"/>
-          <a:p>
-            <a:pPr>
-              <a:lnSpc>
-                <a:spcPct val="100000"/>
-              </a:lnSpc>
-            </a:pPr>
-            <a:r>
-              <a:rPr lang="en-US" sz="1125">
-                <a:solidFill>
-                  <a:srgbClr val="8B97A8"/>
-                </a:solidFill>
-                <a:latin typeface="Microsoft YaHei"/>
-                <a:ea typeface="Microsoft YaHei"/>
-              </a:rPr>
-              <a:t>13 / 15</a:t>
-            </a:r>
-            <a:endParaRPr/>
-          </a:p>
-        </p:txBody>
-      </p:sp>
-      <p:sp>
-        <p:nvSpPr>
-          <p:cNvPr id="123" name="" descr="{&quot;isTemplate&quot;:true,&quot;type&quot;:&quot;text&quot;}"/>
-          <p:cNvSpPr txBox="1"/>
-          <p:nvPr/>
-        </p:nvSpPr>
-        <p:spPr>
-          <a:xfrm rot="0" flipH="0" flipV="0">
-            <a:off x="381000" y="923925"/>
-            <a:ext cx="11430000" cy="361950"/>
-          </a:xfrm>
-          <a:prstGeom prst="rect"/>
-        </p:spPr>
-        <p:txBody>
-          <a:bodyPr wrap="none" lIns="0" tIns="0" rIns="0" bIns="0"/>
-          <a:p>
-            <a:pPr>
-              <a:lnSpc>
-                <a:spcPct val="150000"/>
-              </a:lnSpc>
-            </a:pPr>
-            <a:r>
-              <a:rPr lang="zh-CN" sz="1575">
-                <a:solidFill>
-                  <a:srgbClr val="4A5568"/>
-                </a:solidFill>
-                <a:latin typeface="Microsoft YaHei"/>
-                <a:ea typeface="Microsoft YaHei"/>
-              </a:rPr>
-              <a:t>左栏是它现在的边界（①–④</a:t>
-            </a:r>
-            <a:r>
-              <a:rPr lang="en-US" sz="1575">
-                <a:solidFill>
-                  <a:srgbClr val="4A5568"/>
-                </a:solidFill>
-                <a:latin typeface="Microsoft YaHei"/>
-                <a:ea typeface="Microsoft YaHei"/>
-              </a:rPr>
-              <a:t xml:space="preserve"> </a:t>
-            </a:r>
-            <a:r>
-              <a:rPr lang="zh-CN" sz="1575">
-                <a:solidFill>
-                  <a:srgbClr val="4A5568"/>
-                </a:solidFill>
-                <a:latin typeface="Microsoft YaHei"/>
-                <a:ea typeface="Microsoft YaHei"/>
-              </a:rPr>
-              <a:t>来自论文自述，⑤</a:t>
-            </a:r>
-            <a:r>
-              <a:rPr lang="en-US" sz="1575">
-                <a:solidFill>
-                  <a:srgbClr val="4A5568"/>
-                </a:solidFill>
-                <a:latin typeface="Microsoft YaHei"/>
-                <a:ea typeface="Microsoft YaHei"/>
-              </a:rPr>
-              <a:t xml:space="preserve"> </a:t>
-            </a:r>
-            <a:r>
-              <a:rPr lang="zh-CN" sz="1575">
-                <a:solidFill>
-                  <a:srgbClr val="4A5568"/>
-                </a:solidFill>
-                <a:latin typeface="Microsoft YaHei"/>
-                <a:ea typeface="Microsoft YaHei"/>
-              </a:rPr>
-              <a:t>是我们复现的边界），右栏是对应的补法。</a:t>
-            </a:r>
-            <a:endParaRPr/>
-          </a:p>
-        </p:txBody>
-      </p:sp>
-      <p:sp>
-        <p:nvSpPr>
-          <p:cNvPr id="124" name=""/>
-          <p:cNvSpPr/>
-          <p:nvPr/>
-        </p:nvSpPr>
-        <p:spPr>
-          <a:xfrm rot="0" flipH="0" flipV="0">
-            <a:off x="381000" y="1428750"/>
-            <a:ext cx="47625" cy="247650"/>
-          </a:xfrm>
-          <a:prstGeom prst="rect">
-            <a:avLst/>
-          </a:prstGeom>
-          <a:solidFill>
-            <a:srgbClr val="D9534F"/>
-          </a:solidFill>
-          <a:ln/>
-        </p:spPr>
-        <p:txBody>
-          <a:bodyPr/>
-          <a:p/>
-        </p:txBody>
-      </p:sp>
-      <p:sp>
-        <p:nvSpPr>
-          <p:cNvPr id="125" name="" descr="{&quot;isTemplate&quot;:true,&quot;type&quot;:&quot;text&quot;}"/>
-          <p:cNvSpPr txBox="1"/>
-          <p:nvPr/>
-        </p:nvSpPr>
-        <p:spPr>
-          <a:xfrm rot="0" flipH="0" flipV="0">
-            <a:off x="504825" y="1400175"/>
-            <a:ext cx="1733550" cy="304800"/>
-          </a:xfrm>
-          <a:prstGeom prst="rect"/>
-        </p:spPr>
-        <p:txBody>
-          <a:bodyPr wrap="none" lIns="0" tIns="0" rIns="0" bIns="0"/>
-          <a:p>
-            <a:pPr>
-              <a:lnSpc>
-                <a:spcPct val="100000"/>
-              </a:lnSpc>
-            </a:pPr>
-            <a:r>
               <a:rPr lang="zh-CN" sz="1950" b="1">
                 <a:solidFill>
                   <a:srgbClr val="1A2230"/>
@@ -6441,22 +4485,77 @@
                 <a:latin typeface="Microsoft YaHei"/>
                 <a:ea typeface="Microsoft YaHei"/>
               </a:rPr>
-              <a:t>目前方法的不足</a:t>
-            </a:r>
-            <a:endParaRPr/>
-          </a:p>
-        </p:txBody>
-      </p:sp>
-      <p:sp>
-        <p:nvSpPr>
-          <p:cNvPr id="126" name="" descr="{&quot;isTemplate&quot;:true,&quot;type&quot;:&quot;text&quot;}"/>
-          <p:cNvSpPr txBox="1"/>
-          <p:nvPr/>
-        </p:nvSpPr>
-        <p:spPr>
-          <a:xfrm rot="0" flipH="0" flipV="0">
-            <a:off x="381000" y="1857375"/>
-            <a:ext cx="5467350" cy="714375"/>
+              <a:t>以后的改进点</a:t>
+            </a:r>
+            <a:endParaRPr/>
+          </a:p>
+        </p:txBody>
+      </p:sp>
+      <p:sp>
+        <p:nvSpPr>
+          <p:cNvPr id="90" name="" descr="{&quot;isTemplate&quot;:true,&quot;type&quot;:&quot;text&quot;}"/>
+          <p:cNvSpPr txBox="1"/>
+          <p:nvPr/>
+        </p:nvSpPr>
+        <p:spPr>
+          <a:xfrm rot="0" flipH="0" flipV="0">
+            <a:off x="6353175" y="1857375"/>
+            <a:ext cx="5457825" cy="361950"/>
+          </a:xfrm>
+          <a:prstGeom prst="rect"/>
+        </p:spPr>
+        <p:txBody>
+          <a:bodyPr wrap="none" lIns="0" tIns="0" rIns="0" bIns="0"/>
+          <a:p>
+            <a:pPr>
+              <a:lnSpc>
+                <a:spcPct val="155000"/>
+              </a:lnSpc>
+            </a:pPr>
+            <a:r>
+              <a:rPr lang="en-US" sz="1500">
+                <a:solidFill>
+                  <a:srgbClr val="1A2230"/>
+                </a:solidFill>
+                <a:latin typeface="Microsoft YaHei"/>
+                <a:ea typeface="Microsoft YaHei"/>
+              </a:rPr>
+              <a:t xml:space="preserve">① </a:t>
+            </a:r>
+            <a:r>
+              <a:rPr lang="zh-CN" sz="1500">
+                <a:solidFill>
+                  <a:srgbClr val="1A2230"/>
+                </a:solidFill>
+                <a:latin typeface="Microsoft YaHei"/>
+                <a:ea typeface="Microsoft YaHei"/>
+              </a:rPr>
+              <a:t>低视差帧降级</a:t>
+            </a:r>
+            <a:r>
+              <a:rPr lang="zh-CN" sz="1500">
+                <a:solidFill>
+                  <a:srgbClr val="1A2230"/>
+                </a:solidFill>
+                <a:latin typeface="Microsoft YaHei"/>
+                <a:ea typeface="Microsoft YaHei"/>
+              </a:rPr>
+              <a:t>　只参与渲染、不进位姿求解，避免污染轨迹。</a:t>
+            </a:r>
+            <a:endParaRPr/>
+          </a:p>
+        </p:txBody>
+      </p:sp>
+      <p:sp>
+        <p:nvSpPr>
+          <p:cNvPr id="91" name="" descr="{&quot;isTemplate&quot;:true,&quot;type&quot;:&quot;text&quot;}"/>
+          <p:cNvSpPr txBox="1"/>
+          <p:nvPr/>
+        </p:nvSpPr>
+        <p:spPr>
+          <a:xfrm rot="0" flipH="0" flipV="0">
+            <a:off x="6353175" y="2371725"/>
+            <a:ext cx="5457825" cy="714375"/>
           </a:xfrm>
           <a:prstGeom prst="rect"/>
         </p:spPr>
@@ -6478,7 +4577,7 @@
                 <a:latin typeface="Microsoft YaHei"/>
                 <a:ea typeface="Microsoft YaHei"/>
               </a:rPr>
-              <a:t xml:space="preserve">① </a:t>
+              <a:t xml:space="preserve">② </a:t>
             </a:r>
             <a:r>
               <a:rPr lang="zh-CN" sz="1500">
@@ -6488,7 +4587,17 @@
                 <a:latin typeface="Microsoft YaHei"/>
                 <a:ea typeface="Microsoft YaHei"/>
               </a:rPr>
-              <a:t>低视差直接失效</a:t>
+              <a:t>在线粗</a:t>
+            </a:r>
+            <a:r>
+              <a:rPr lang="en-US" sz="1500">
+                <a:solidFill>
+                  <a:srgbClr val="1A2230"/>
+                </a:solidFill>
+                <a:latin typeface="Microsoft YaHei"/>
+                <a:ea typeface="Microsoft YaHei"/>
+              </a:rPr>
+              <a:t xml:space="preserve"> + </a:t>
             </a:r>
             <a:r>
               <a:rPr lang="zh-CN" sz="1500">
@@ -6498,22 +4607,92 @@
                 <a:latin typeface="Microsoft YaHei"/>
                 <a:ea typeface="Microsoft YaHei"/>
               </a:rPr>
-              <a:t>　纯旋转或平移太小，三角化不出深度，论文自述这类采集会失败。</a:t>
-            </a:r>
-            <a:endParaRPr/>
-          </a:p>
-        </p:txBody>
-      </p:sp>
-      <p:sp>
-        <p:nvSpPr>
-          <p:cNvPr id="127" name="" descr="{&quot;isTemplate&quot;:true,&quot;type&quot;:&quot;text&quot;}"/>
-          <p:cNvSpPr txBox="1"/>
-          <p:nvPr/>
-        </p:nvSpPr>
-        <p:spPr>
-          <a:xfrm rot="0" flipH="0" flipV="0">
-            <a:off x="381000" y="2724150"/>
-            <a:ext cx="5467350" cy="714375"/>
+              <a:t>离线精</a:t>
+            </a:r>
+            <a:r>
+              <a:rPr lang="zh-CN" sz="1500">
+                <a:solidFill>
+                  <a:srgbClr val="1A2230"/>
+                </a:solidFill>
+                <a:latin typeface="Microsoft YaHei"/>
+                <a:ea typeface="Microsoft YaHei"/>
+              </a:rPr>
+              <a:t>　实时出预览，结束时用</a:t>
+            </a:r>
+            <a:r>
+              <a:rPr lang="en-US" sz="1500">
+                <a:solidFill>
+                  <a:srgbClr val="1A2230"/>
+                </a:solidFill>
+                <a:latin typeface="Microsoft YaHei"/>
+                <a:ea typeface="Microsoft YaHei"/>
+              </a:rPr>
+              <a:t xml:space="preserve"> GLOMAP </a:t>
+            </a:r>
+            <a:r>
+              <a:rPr lang="zh-CN" sz="1500">
+                <a:solidFill>
+                  <a:srgbClr val="1A2230"/>
+                </a:solidFill>
+                <a:latin typeface="Microsoft YaHei"/>
+                <a:ea typeface="Microsoft YaHei"/>
+              </a:rPr>
+              <a:t>回填一次全局</a:t>
+            </a:r>
+            <a:r>
+              <a:rPr lang="en-US" sz="1500">
+                <a:solidFill>
+                  <a:srgbClr val="1A2230"/>
+                </a:solidFill>
+                <a:latin typeface="Microsoft YaHei"/>
+                <a:ea typeface="Microsoft YaHei"/>
+              </a:rPr>
+              <a:t xml:space="preserve"> BA</a:t>
+            </a:r>
+            <a:r>
+              <a:rPr lang="zh-CN" sz="1500">
+                <a:solidFill>
+                  <a:srgbClr val="1A2230"/>
+                </a:solidFill>
+                <a:latin typeface="Microsoft YaHei"/>
+                <a:ea typeface="Microsoft YaHei"/>
+              </a:rPr>
+              <a:t>，把</a:t>
+            </a:r>
+            <a:r>
+              <a:rPr lang="en-US" sz="1500">
+                <a:solidFill>
+                  <a:srgbClr val="1A2230"/>
+                </a:solidFill>
+                <a:latin typeface="Microsoft YaHei"/>
+                <a:ea typeface="Microsoft YaHei"/>
+              </a:rPr>
+              <a:t xml:space="preserve"> 1.2 dB </a:t>
+            </a:r>
+            <a:r>
+              <a:rPr lang="zh-CN" sz="1500">
+                <a:solidFill>
+                  <a:srgbClr val="1A2230"/>
+                </a:solidFill>
+                <a:latin typeface="Microsoft YaHei"/>
+                <a:ea typeface="Microsoft YaHei"/>
+              </a:rPr>
+              <a:t>补回来。</a:t>
+            </a:r>
+            <a:endParaRPr/>
+          </a:p>
+        </p:txBody>
+      </p:sp>
+      <p:sp>
+        <p:nvSpPr>
+          <p:cNvPr id="92" name="" descr="{&quot;isTemplate&quot;:true,&quot;type&quot;:&quot;text&quot;}"/>
+          <p:cNvSpPr txBox="1"/>
+          <p:nvPr/>
+        </p:nvSpPr>
+        <p:spPr>
+          <a:xfrm rot="0" flipH="0" flipV="0">
+            <a:off x="6353175" y="3238500"/>
+            <a:ext cx="5457825" cy="714375"/>
           </a:xfrm>
           <a:prstGeom prst="rect"/>
         </p:spPr>
@@ -6535,7 +4714,7 @@
                 <a:latin typeface="Microsoft YaHei"/>
                 <a:ea typeface="Microsoft YaHei"/>
               </a:rPr>
-              <a:t xml:space="preserve">② </a:t>
+              <a:t xml:space="preserve">③ </a:t>
             </a:r>
             <a:r>
               <a:rPr lang="zh-CN" sz="1500">
@@ -6545,7 +4724,7 @@
                 <a:latin typeface="Microsoft YaHei"/>
                 <a:ea typeface="Microsoft YaHei"/>
               </a:rPr>
-              <a:t>精度有天花板</a:t>
+              <a:t>采集端闭环</a:t>
             </a:r>
             <a:r>
               <a:rPr lang="zh-CN" sz="1500">
@@ -6555,7 +4734,7 @@
                 <a:latin typeface="Microsoft YaHei"/>
                 <a:ea typeface="Microsoft YaHei"/>
               </a:rPr>
-              <a:t>　作者用</a:t>
+              <a:t>　实时覆盖率与重投影误差热图，直接提示</a:t>
             </a:r>
             <a:r>
               <a:rPr lang="en-US" sz="1500">
@@ -6565,7 +4744,7 @@
                 <a:latin typeface="Microsoft YaHei"/>
                 <a:ea typeface="Microsoft YaHei"/>
               </a:rPr>
-              <a:t xml:space="preserve"> NoGraphProp </a:t>
+              <a:t>"</a:t>
             </a:r>
             <a:r>
               <a:rPr lang="zh-CN" sz="1500">
@@ -6575,7 +4754,7 @@
                 <a:latin typeface="Microsoft YaHei"/>
                 <a:ea typeface="Microsoft YaHei"/>
               </a:rPr>
-              <a:t>消融证明图传播不比全局</a:t>
+              <a:t>这块没拍</a:t>
             </a:r>
             <a:r>
               <a:rPr lang="en-US" sz="1500">
@@ -6585,7 +4764,7 @@
                 <a:latin typeface="Microsoft YaHei"/>
                 <a:ea typeface="Microsoft YaHei"/>
               </a:rPr>
-              <a:t xml:space="preserve"> PGO </a:t>
+              <a:t>"——</a:t>
             </a:r>
             <a:r>
               <a:rPr lang="zh-CN" sz="1500">
@@ -6595,7 +4774,7 @@
                 <a:latin typeface="Microsoft YaHei"/>
                 <a:ea typeface="Microsoft YaHei"/>
               </a:rPr>
-              <a:t>差，但同时承认仍不如全局</a:t>
+              <a:t>论文</a:t>
             </a:r>
             <a:r>
               <a:rPr lang="en-US" sz="1500">
@@ -6605,7 +4784,7 @@
                 <a:latin typeface="Microsoft YaHei"/>
                 <a:ea typeface="Microsoft YaHei"/>
               </a:rPr>
-              <a:t xml:space="preserve"> BA</a:t>
+              <a:t xml:space="preserve"> motivation </a:t>
             </a:r>
             <a:r>
               <a:rPr lang="zh-CN" sz="1500">
@@ -6615,22 +4794,77 @@
                 <a:latin typeface="Microsoft YaHei"/>
                 <a:ea typeface="Microsoft YaHei"/>
               </a:rPr>
-              <a:t>。</a:t>
-            </a:r>
-            <a:endParaRPr/>
-          </a:p>
-        </p:txBody>
-      </p:sp>
-      <p:sp>
-        <p:nvSpPr>
-          <p:cNvPr id="128" name="" descr="{&quot;isTemplate&quot;:true,&quot;type&quot;:&quot;text&quot;}"/>
-          <p:cNvSpPr txBox="1"/>
-          <p:nvPr/>
-        </p:nvSpPr>
-        <p:spPr>
-          <a:xfrm rot="0" flipH="0" flipV="0">
-            <a:off x="381000" y="3590925"/>
-            <a:ext cx="5467350" cy="714375"/>
+              <a:t>的自然下一步。</a:t>
+            </a:r>
+            <a:endParaRPr/>
+          </a:p>
+        </p:txBody>
+      </p:sp>
+      <p:sp>
+        <p:nvSpPr>
+          <p:cNvPr id="93" name="" descr="{&quot;isTemplate&quot;:true,&quot;type&quot;:&quot;text&quot;}"/>
+          <p:cNvSpPr txBox="1"/>
+          <p:nvPr/>
+        </p:nvSpPr>
+        <p:spPr>
+          <a:xfrm rot="0" flipH="0" flipV="0">
+            <a:off x="6353175" y="4105275"/>
+            <a:ext cx="5457825" cy="361950"/>
+          </a:xfrm>
+          <a:prstGeom prst="rect"/>
+        </p:spPr>
+        <p:txBody>
+          <a:bodyPr wrap="none" lIns="0" tIns="0" rIns="0" bIns="0"/>
+          <a:p>
+            <a:pPr>
+              <a:lnSpc>
+                <a:spcPct val="155000"/>
+              </a:lnSpc>
+            </a:pPr>
+            <a:r>
+              <a:rPr lang="en-US" sz="1500">
+                <a:solidFill>
+                  <a:srgbClr val="1A2230"/>
+                </a:solidFill>
+                <a:latin typeface="Microsoft YaHei"/>
+                <a:ea typeface="Microsoft YaHei"/>
+              </a:rPr>
+              <a:t xml:space="preserve">④ </a:t>
+            </a:r>
+            <a:r>
+              <a:rPr lang="zh-CN" sz="1500">
+                <a:solidFill>
+                  <a:srgbClr val="1A2230"/>
+                </a:solidFill>
+                <a:latin typeface="Microsoft YaHei"/>
+                <a:ea typeface="Microsoft YaHei"/>
+              </a:rPr>
+              <a:t>阈值自适应</a:t>
+            </a:r>
+            <a:r>
+              <a:rPr lang="zh-CN" sz="1500">
+                <a:solidFill>
+                  <a:srgbClr val="1A2230"/>
+                </a:solidFill>
+                <a:latin typeface="Microsoft YaHei"/>
+                <a:ea typeface="Microsoft YaHei"/>
+              </a:rPr>
+              <a:t>　按纹理强度与重叠度在线估计，替代固定常数。</a:t>
+            </a:r>
+            <a:endParaRPr/>
+          </a:p>
+        </p:txBody>
+      </p:sp>
+      <p:sp>
+        <p:nvSpPr>
+          <p:cNvPr id="94" name="" descr="{&quot;isTemplate&quot;:true,&quot;type&quot;:&quot;text&quot;}"/>
+          <p:cNvSpPr txBox="1"/>
+          <p:nvPr/>
+        </p:nvSpPr>
+        <p:spPr>
+          <a:xfrm rot="0" flipH="0" flipV="0">
+            <a:off x="6353175" y="4619625"/>
+            <a:ext cx="5457825" cy="714375"/>
           </a:xfrm>
           <a:prstGeom prst="rect"/>
         </p:spPr>
@@ -6652,7 +4886,7 @@
                 <a:latin typeface="Microsoft YaHei"/>
                 <a:ea typeface="Microsoft YaHei"/>
               </a:rPr>
-              <a:t xml:space="preserve">③ </a:t>
+              <a:t xml:space="preserve">⑤ </a:t>
             </a:r>
             <a:r>
               <a:rPr lang="zh-CN" sz="1500">
@@ -6662,7 +4896,7 @@
                 <a:latin typeface="Microsoft YaHei"/>
                 <a:ea typeface="Microsoft YaHei"/>
               </a:rPr>
-              <a:t>上游依赖重</a:t>
+              <a:t>我们能立刻做的</a:t>
             </a:r>
             <a:r>
               <a:rPr lang="zh-CN" sz="1500">
@@ -6672,7 +4906,7 @@
                 <a:latin typeface="Microsoft YaHei"/>
                 <a:ea typeface="Microsoft YaHei"/>
               </a:rPr>
-              <a:t>　</a:t>
+              <a:t>　打乱实验（</a:t>
             </a:r>
             <a:r>
               <a:rPr lang="en-US" sz="1500">
@@ -6682,7 +4916,7 @@
                 <a:latin typeface="Microsoft YaHei"/>
                 <a:ea typeface="Microsoft YaHei"/>
               </a:rPr>
-              <a:t xml:space="preserve">VPR + XFeat + LightGlue + Depth Anything 3 </a:t>
+              <a:t>--shuffle</a:t>
             </a:r>
             <a:r>
               <a:rPr lang="zh-CN" sz="1500">
@@ -6692,35 +4926,8 @@
                 <a:latin typeface="Microsoft YaHei"/>
                 <a:ea typeface="Microsoft YaHei"/>
               </a:rPr>
-              <a:t>串成一条链，任一环失效整条断。</a:t>
-            </a:r>
-            <a:endParaRPr/>
-          </a:p>
-        </p:txBody>
-      </p:sp>
-      <p:sp>
-        <p:nvSpPr>
-          <p:cNvPr id="129" name="" descr="{&quot;isTemplate&quot;:true,&quot;type&quot;:&quot;text&quot;}"/>
-          <p:cNvSpPr txBox="1"/>
-          <p:nvPr/>
-        </p:nvSpPr>
-        <p:spPr>
-          <a:xfrm rot="0" flipH="0" flipV="0">
-            <a:off x="381000" y="4457700"/>
-            <a:ext cx="5467350" cy="714375"/>
-          </a:xfrm>
-          <a:prstGeom prst="rect"/>
-        </p:spPr>
-        <p:txBody>
-          <a:bodyPr wrap="square" lIns="0" tIns="0" rIns="0" bIns="0">
-            <a:normAutofit/>
-          </a:bodyPr>
-          <a:p>
-            <a:pPr>
-              <a:lnSpc>
-                <a:spcPct val="155000"/>
-              </a:lnSpc>
-            </a:pPr>
+              <a:t>）、全分辨率重跑、再换</a:t>
+            </a:r>
             <a:r>
               <a:rPr lang="en-US" sz="1500">
                 <a:solidFill>
@@ -6729,7 +4936,7 @@
                 <a:latin typeface="Microsoft YaHei"/>
                 <a:ea typeface="Microsoft YaHei"/>
               </a:rPr>
-              <a:t xml:space="preserve">④ </a:t>
+              <a:t xml:space="preserve"> 2–3 </a:t>
             </a:r>
             <a:r>
               <a:rPr lang="zh-CN" sz="1500">
@@ -6739,717 +4946,6 @@
                 <a:latin typeface="Microsoft YaHei"/>
                 <a:ea typeface="Microsoft YaHei"/>
               </a:rPr>
-              <a:t>阈值靠经验</a:t>
-            </a:r>
-            <a:r>
-              <a:rPr lang="zh-CN" sz="1500">
-                <a:solidFill>
-                  <a:srgbClr val="1A2230"/>
-                </a:solidFill>
-                <a:latin typeface="Microsoft YaHei"/>
-                <a:ea typeface="Microsoft YaHei"/>
-              </a:rPr>
-              <a:t>　合并</a:t>
-            </a:r>
-            <a:r>
-              <a:rPr lang="en-US" sz="1500">
-                <a:solidFill>
-                  <a:srgbClr val="1A2230"/>
-                </a:solidFill>
-                <a:latin typeface="Microsoft YaHei"/>
-                <a:ea typeface="Microsoft YaHei"/>
-              </a:rPr>
-              <a:t xml:space="preserve"> 0.5 px / </a:t>
-            </a:r>
-            <a:r>
-              <a:rPr lang="zh-CN" sz="1500">
-                <a:solidFill>
-                  <a:srgbClr val="1A2230"/>
-                </a:solidFill>
-                <a:latin typeface="Microsoft YaHei"/>
-                <a:ea typeface="Microsoft YaHei"/>
-              </a:rPr>
-              <a:t>占比</a:t>
-            </a:r>
-            <a:r>
-              <a:rPr lang="en-US" sz="1500">
-                <a:solidFill>
-                  <a:srgbClr val="1A2230"/>
-                </a:solidFill>
-                <a:latin typeface="Microsoft YaHei"/>
-                <a:ea typeface="Microsoft YaHei"/>
-              </a:rPr>
-              <a:t xml:space="preserve"> 20%</a:t>
-            </a:r>
-            <a:r>
-              <a:rPr lang="zh-CN" sz="1500">
-                <a:solidFill>
-                  <a:srgbClr val="1A2230"/>
-                </a:solidFill>
-                <a:latin typeface="Microsoft YaHei"/>
-                <a:ea typeface="Microsoft YaHei"/>
-              </a:rPr>
-              <a:t>、跳数</a:t>
-            </a:r>
-            <a:r>
-              <a:rPr lang="en-US" sz="1500">
-                <a:solidFill>
-                  <a:srgbClr val="1A2230"/>
-                </a:solidFill>
-                <a:latin typeface="Microsoft YaHei"/>
-                <a:ea typeface="Microsoft YaHei"/>
-              </a:rPr>
-              <a:t xml:space="preserve"> 5</a:t>
-            </a:r>
-            <a:r>
-              <a:rPr lang="zh-CN" sz="1500">
-                <a:solidFill>
-                  <a:srgbClr val="1A2230"/>
-                </a:solidFill>
-                <a:latin typeface="Microsoft YaHei"/>
-                <a:ea typeface="Microsoft YaHei"/>
-              </a:rPr>
-              <a:t>、建边</a:t>
-            </a:r>
-            <a:r>
-              <a:rPr lang="en-US" sz="1500">
-                <a:solidFill>
-                  <a:srgbClr val="1A2230"/>
-                </a:solidFill>
-                <a:latin typeface="Microsoft YaHei"/>
-                <a:ea typeface="Microsoft YaHei"/>
-              </a:rPr>
-              <a:t xml:space="preserve"> 500 </a:t>
-            </a:r>
-            <a:r>
-              <a:rPr lang="zh-CN" sz="1500">
-                <a:solidFill>
-                  <a:srgbClr val="1A2230"/>
-                </a:solidFill>
-                <a:latin typeface="Microsoft YaHei"/>
-                <a:ea typeface="Microsoft YaHei"/>
-              </a:rPr>
-              <a:t>匹配，换场景需重调。</a:t>
-            </a:r>
-            <a:endParaRPr/>
-          </a:p>
-        </p:txBody>
-      </p:sp>
-      <p:sp>
-        <p:nvSpPr>
-          <p:cNvPr id="130" name="" descr="{&quot;isTemplate&quot;:true,&quot;type&quot;:&quot;text&quot;}"/>
-          <p:cNvSpPr txBox="1"/>
-          <p:nvPr/>
-        </p:nvSpPr>
-        <p:spPr>
-          <a:xfrm rot="0" flipH="0" flipV="0">
-            <a:off x="381000" y="5324475"/>
-            <a:ext cx="5467350" cy="714375"/>
-          </a:xfrm>
-          <a:prstGeom prst="rect"/>
-        </p:spPr>
-        <p:txBody>
-          <a:bodyPr wrap="square" lIns="0" tIns="0" rIns="0" bIns="0">
-            <a:normAutofit/>
-          </a:bodyPr>
-          <a:p>
-            <a:pPr>
-              <a:lnSpc>
-                <a:spcPct val="155000"/>
-              </a:lnSpc>
-            </a:pPr>
-            <a:r>
-              <a:rPr lang="en-US" sz="1500">
-                <a:solidFill>
-                  <a:srgbClr val="1A2230"/>
-                </a:solidFill>
-                <a:latin typeface="Microsoft YaHei"/>
-                <a:ea typeface="Microsoft YaHei"/>
-              </a:rPr>
-              <a:t xml:space="preserve">⑤ </a:t>
-            </a:r>
-            <a:r>
-              <a:rPr lang="zh-CN" sz="1500">
-                <a:solidFill>
-                  <a:srgbClr val="1A2230"/>
-                </a:solidFill>
-                <a:latin typeface="Microsoft YaHei"/>
-                <a:ea typeface="Microsoft YaHei"/>
-              </a:rPr>
-              <a:t>我们的复现边界</a:t>
-            </a:r>
-            <a:r>
-              <a:rPr lang="zh-CN" sz="1500">
-                <a:solidFill>
-                  <a:srgbClr val="1A2230"/>
-                </a:solidFill>
-                <a:latin typeface="Microsoft YaHei"/>
-                <a:ea typeface="Microsoft YaHei"/>
-              </a:rPr>
-              <a:t>　只跑有序序列（未验真无序）、</a:t>
-            </a:r>
-            <a:r>
-              <a:rPr lang="en-US" sz="1500">
-                <a:solidFill>
-                  <a:srgbClr val="1A2230"/>
-                </a:solidFill>
-                <a:latin typeface="Microsoft YaHei"/>
-                <a:ea typeface="Microsoft YaHei"/>
-              </a:rPr>
-              <a:t xml:space="preserve">2 </a:t>
-            </a:r>
-            <a:r>
-              <a:rPr lang="zh-CN" sz="1500">
-                <a:solidFill>
-                  <a:srgbClr val="1A2230"/>
-                </a:solidFill>
-                <a:latin typeface="Microsoft YaHei"/>
-                <a:ea typeface="Microsoft YaHei"/>
-              </a:rPr>
-              <a:t>倍降采样、单场景。</a:t>
-            </a:r>
-            <a:endParaRPr/>
-          </a:p>
-        </p:txBody>
-      </p:sp>
-      <p:sp>
-        <p:nvSpPr>
-          <p:cNvPr id="131" name=""/>
-          <p:cNvSpPr/>
-          <p:nvPr/>
-        </p:nvSpPr>
-        <p:spPr>
-          <a:xfrm rot="0" flipH="0" flipV="0">
-            <a:off x="6096000" y="1400175"/>
-            <a:ext cx="9525" cy="4638675"/>
-          </a:xfrm>
-          <a:prstGeom prst="rect">
-            <a:avLst/>
-          </a:prstGeom>
-          <a:solidFill>
-            <a:srgbClr val="D6DCE5"/>
-          </a:solidFill>
-          <a:ln/>
-        </p:spPr>
-        <p:txBody>
-          <a:bodyPr/>
-          <a:p/>
-        </p:txBody>
-      </p:sp>
-      <p:sp>
-        <p:nvSpPr>
-          <p:cNvPr id="132" name=""/>
-          <p:cNvSpPr/>
-          <p:nvPr/>
-        </p:nvSpPr>
-        <p:spPr>
-          <a:xfrm rot="0" flipH="0" flipV="0">
-            <a:off x="6353175" y="1428750"/>
-            <a:ext cx="47625" cy="247650"/>
-          </a:xfrm>
-          <a:prstGeom prst="rect">
-            <a:avLst/>
-          </a:prstGeom>
-          <a:solidFill>
-            <a:srgbClr val="1E4FA8"/>
-          </a:solidFill>
-          <a:ln/>
-        </p:spPr>
-        <p:txBody>
-          <a:bodyPr/>
-          <a:p/>
-        </p:txBody>
-      </p:sp>
-      <p:sp>
-        <p:nvSpPr>
-          <p:cNvPr id="133" name="" descr="{&quot;isTemplate&quot;:true,&quot;type&quot;:&quot;text&quot;}"/>
-          <p:cNvSpPr txBox="1"/>
-          <p:nvPr/>
-        </p:nvSpPr>
-        <p:spPr>
-          <a:xfrm rot="0" flipH="0" flipV="0">
-            <a:off x="6477000" y="1400175"/>
-            <a:ext cx="1485900" cy="304800"/>
-          </a:xfrm>
-          <a:prstGeom prst="rect"/>
-        </p:spPr>
-        <p:txBody>
-          <a:bodyPr wrap="none" lIns="0" tIns="0" rIns="0" bIns="0"/>
-          <a:p>
-            <a:pPr>
-              <a:lnSpc>
-                <a:spcPct val="100000"/>
-              </a:lnSpc>
-            </a:pPr>
-            <a:r>
-              <a:rPr lang="zh-CN" sz="1950" b="1">
-                <a:solidFill>
-                  <a:srgbClr val="1A2230"/>
-                </a:solidFill>
-                <a:latin typeface="Microsoft YaHei"/>
-                <a:ea typeface="Microsoft YaHei"/>
-              </a:rPr>
-              <a:t>以后的改进点</a:t>
-            </a:r>
-            <a:endParaRPr/>
-          </a:p>
-        </p:txBody>
-      </p:sp>
-      <p:sp>
-        <p:nvSpPr>
-          <p:cNvPr id="134" name="" descr="{&quot;isTemplate&quot;:true,&quot;type&quot;:&quot;text&quot;}"/>
-          <p:cNvSpPr txBox="1"/>
-          <p:nvPr/>
-        </p:nvSpPr>
-        <p:spPr>
-          <a:xfrm rot="0" flipH="0" flipV="0">
-            <a:off x="6353175" y="1857375"/>
-            <a:ext cx="5457825" cy="361950"/>
-          </a:xfrm>
-          <a:prstGeom prst="rect"/>
-        </p:spPr>
-        <p:txBody>
-          <a:bodyPr wrap="none" lIns="0" tIns="0" rIns="0" bIns="0"/>
-          <a:p>
-            <a:pPr>
-              <a:lnSpc>
-                <a:spcPct val="155000"/>
-              </a:lnSpc>
-            </a:pPr>
-            <a:r>
-              <a:rPr lang="en-US" sz="1500">
-                <a:solidFill>
-                  <a:srgbClr val="1A2230"/>
-                </a:solidFill>
-                <a:latin typeface="Microsoft YaHei"/>
-                <a:ea typeface="Microsoft YaHei"/>
-              </a:rPr>
-              <a:t xml:space="preserve">① </a:t>
-            </a:r>
-            <a:r>
-              <a:rPr lang="zh-CN" sz="1500">
-                <a:solidFill>
-                  <a:srgbClr val="1A2230"/>
-                </a:solidFill>
-                <a:latin typeface="Microsoft YaHei"/>
-                <a:ea typeface="Microsoft YaHei"/>
-              </a:rPr>
-              <a:t>低视差帧降级</a:t>
-            </a:r>
-            <a:r>
-              <a:rPr lang="zh-CN" sz="1500">
-                <a:solidFill>
-                  <a:srgbClr val="1A2230"/>
-                </a:solidFill>
-                <a:latin typeface="Microsoft YaHei"/>
-                <a:ea typeface="Microsoft YaHei"/>
-              </a:rPr>
-              <a:t>　只参与渲染、不进位姿求解，避免污染轨迹。</a:t>
-            </a:r>
-            <a:endParaRPr/>
-          </a:p>
-        </p:txBody>
-      </p:sp>
-      <p:sp>
-        <p:nvSpPr>
-          <p:cNvPr id="135" name="" descr="{&quot;isTemplate&quot;:true,&quot;type&quot;:&quot;text&quot;}"/>
-          <p:cNvSpPr txBox="1"/>
-          <p:nvPr/>
-        </p:nvSpPr>
-        <p:spPr>
-          <a:xfrm rot="0" flipH="0" flipV="0">
-            <a:off x="6353175" y="2371725"/>
-            <a:ext cx="5457825" cy="714375"/>
-          </a:xfrm>
-          <a:prstGeom prst="rect"/>
-        </p:spPr>
-        <p:txBody>
-          <a:bodyPr wrap="square" lIns="0" tIns="0" rIns="0" bIns="0">
-            <a:normAutofit/>
-          </a:bodyPr>
-          <a:p>
-            <a:pPr>
-              <a:lnSpc>
-                <a:spcPct val="155000"/>
-              </a:lnSpc>
-            </a:pPr>
-            <a:r>
-              <a:rPr lang="en-US" sz="1500">
-                <a:solidFill>
-                  <a:srgbClr val="1A2230"/>
-                </a:solidFill>
-                <a:latin typeface="Microsoft YaHei"/>
-                <a:ea typeface="Microsoft YaHei"/>
-              </a:rPr>
-              <a:t xml:space="preserve">② </a:t>
-            </a:r>
-            <a:r>
-              <a:rPr lang="zh-CN" sz="1500">
-                <a:solidFill>
-                  <a:srgbClr val="1A2230"/>
-                </a:solidFill>
-                <a:latin typeface="Microsoft YaHei"/>
-                <a:ea typeface="Microsoft YaHei"/>
-              </a:rPr>
-              <a:t>在线粗</a:t>
-            </a:r>
-            <a:r>
-              <a:rPr lang="en-US" sz="1500">
-                <a:solidFill>
-                  <a:srgbClr val="1A2230"/>
-                </a:solidFill>
-                <a:latin typeface="Microsoft YaHei"/>
-                <a:ea typeface="Microsoft YaHei"/>
-              </a:rPr>
-              <a:t xml:space="preserve"> + </a:t>
-            </a:r>
-            <a:r>
-              <a:rPr lang="zh-CN" sz="1500">
-                <a:solidFill>
-                  <a:srgbClr val="1A2230"/>
-                </a:solidFill>
-                <a:latin typeface="Microsoft YaHei"/>
-                <a:ea typeface="Microsoft YaHei"/>
-              </a:rPr>
-              <a:t>离线精</a:t>
-            </a:r>
-            <a:r>
-              <a:rPr lang="zh-CN" sz="1500">
-                <a:solidFill>
-                  <a:srgbClr val="1A2230"/>
-                </a:solidFill>
-                <a:latin typeface="Microsoft YaHei"/>
-                <a:ea typeface="Microsoft YaHei"/>
-              </a:rPr>
-              <a:t>　实时出预览，结束时用</a:t>
-            </a:r>
-            <a:r>
-              <a:rPr lang="en-US" sz="1500">
-                <a:solidFill>
-                  <a:srgbClr val="1A2230"/>
-                </a:solidFill>
-                <a:latin typeface="Microsoft YaHei"/>
-                <a:ea typeface="Microsoft YaHei"/>
-              </a:rPr>
-              <a:t xml:space="preserve"> GLOMAP </a:t>
-            </a:r>
-            <a:r>
-              <a:rPr lang="zh-CN" sz="1500">
-                <a:solidFill>
-                  <a:srgbClr val="1A2230"/>
-                </a:solidFill>
-                <a:latin typeface="Microsoft YaHei"/>
-                <a:ea typeface="Microsoft YaHei"/>
-              </a:rPr>
-              <a:t>回填一次全局</a:t>
-            </a:r>
-            <a:r>
-              <a:rPr lang="en-US" sz="1500">
-                <a:solidFill>
-                  <a:srgbClr val="1A2230"/>
-                </a:solidFill>
-                <a:latin typeface="Microsoft YaHei"/>
-                <a:ea typeface="Microsoft YaHei"/>
-              </a:rPr>
-              <a:t xml:space="preserve"> BA</a:t>
-            </a:r>
-            <a:r>
-              <a:rPr lang="zh-CN" sz="1500">
-                <a:solidFill>
-                  <a:srgbClr val="1A2230"/>
-                </a:solidFill>
-                <a:latin typeface="Microsoft YaHei"/>
-                <a:ea typeface="Microsoft YaHei"/>
-              </a:rPr>
-              <a:t>，把</a:t>
-            </a:r>
-            <a:r>
-              <a:rPr lang="en-US" sz="1500">
-                <a:solidFill>
-                  <a:srgbClr val="1A2230"/>
-                </a:solidFill>
-                <a:latin typeface="Microsoft YaHei"/>
-                <a:ea typeface="Microsoft YaHei"/>
-              </a:rPr>
-              <a:t xml:space="preserve"> 1.2 dB </a:t>
-            </a:r>
-            <a:r>
-              <a:rPr lang="zh-CN" sz="1500">
-                <a:solidFill>
-                  <a:srgbClr val="1A2230"/>
-                </a:solidFill>
-                <a:latin typeface="Microsoft YaHei"/>
-                <a:ea typeface="Microsoft YaHei"/>
-              </a:rPr>
-              <a:t>补回来。</a:t>
-            </a:r>
-            <a:endParaRPr/>
-          </a:p>
-        </p:txBody>
-      </p:sp>
-      <p:sp>
-        <p:nvSpPr>
-          <p:cNvPr id="136" name="" descr="{&quot;isTemplate&quot;:true,&quot;type&quot;:&quot;text&quot;}"/>
-          <p:cNvSpPr txBox="1"/>
-          <p:nvPr/>
-        </p:nvSpPr>
-        <p:spPr>
-          <a:xfrm rot="0" flipH="0" flipV="0">
-            <a:off x="6353175" y="3238500"/>
-            <a:ext cx="5457825" cy="714375"/>
-          </a:xfrm>
-          <a:prstGeom prst="rect"/>
-        </p:spPr>
-        <p:txBody>
-          <a:bodyPr wrap="square" lIns="0" tIns="0" rIns="0" bIns="0">
-            <a:normAutofit/>
-          </a:bodyPr>
-          <a:p>
-            <a:pPr>
-              <a:lnSpc>
-                <a:spcPct val="155000"/>
-              </a:lnSpc>
-            </a:pPr>
-            <a:r>
-              <a:rPr lang="en-US" sz="1500">
-                <a:solidFill>
-                  <a:srgbClr val="1A2230"/>
-                </a:solidFill>
-                <a:latin typeface="Microsoft YaHei"/>
-                <a:ea typeface="Microsoft YaHei"/>
-              </a:rPr>
-              <a:t xml:space="preserve">③ </a:t>
-            </a:r>
-            <a:r>
-              <a:rPr lang="zh-CN" sz="1500">
-                <a:solidFill>
-                  <a:srgbClr val="1A2230"/>
-                </a:solidFill>
-                <a:latin typeface="Microsoft YaHei"/>
-                <a:ea typeface="Microsoft YaHei"/>
-              </a:rPr>
-              <a:t>采集端闭环</a:t>
-            </a:r>
-            <a:r>
-              <a:rPr lang="zh-CN" sz="1500">
-                <a:solidFill>
-                  <a:srgbClr val="1A2230"/>
-                </a:solidFill>
-                <a:latin typeface="Microsoft YaHei"/>
-                <a:ea typeface="Microsoft YaHei"/>
-              </a:rPr>
-              <a:t>　实时覆盖率与重投影误差热图，直接提示</a:t>
-            </a:r>
-            <a:r>
-              <a:rPr lang="en-US" sz="1500">
-                <a:solidFill>
-                  <a:srgbClr val="1A2230"/>
-                </a:solidFill>
-                <a:latin typeface="Microsoft YaHei"/>
-                <a:ea typeface="Microsoft YaHei"/>
-              </a:rPr>
-              <a:t>"</a:t>
-            </a:r>
-            <a:r>
-              <a:rPr lang="zh-CN" sz="1500">
-                <a:solidFill>
-                  <a:srgbClr val="1A2230"/>
-                </a:solidFill>
-                <a:latin typeface="Microsoft YaHei"/>
-                <a:ea typeface="Microsoft YaHei"/>
-              </a:rPr>
-              <a:t>这块没拍</a:t>
-            </a:r>
-            <a:r>
-              <a:rPr lang="en-US" sz="1500">
-                <a:solidFill>
-                  <a:srgbClr val="1A2230"/>
-                </a:solidFill>
-                <a:latin typeface="Microsoft YaHei"/>
-                <a:ea typeface="Microsoft YaHei"/>
-              </a:rPr>
-              <a:t>"——</a:t>
-            </a:r>
-            <a:r>
-              <a:rPr lang="zh-CN" sz="1500">
-                <a:solidFill>
-                  <a:srgbClr val="1A2230"/>
-                </a:solidFill>
-                <a:latin typeface="Microsoft YaHei"/>
-                <a:ea typeface="Microsoft YaHei"/>
-              </a:rPr>
-              <a:t>论文</a:t>
-            </a:r>
-            <a:r>
-              <a:rPr lang="en-US" sz="1500">
-                <a:solidFill>
-                  <a:srgbClr val="1A2230"/>
-                </a:solidFill>
-                <a:latin typeface="Microsoft YaHei"/>
-                <a:ea typeface="Microsoft YaHei"/>
-              </a:rPr>
-              <a:t xml:space="preserve"> motivation </a:t>
-            </a:r>
-            <a:r>
-              <a:rPr lang="zh-CN" sz="1500">
-                <a:solidFill>
-                  <a:srgbClr val="1A2230"/>
-                </a:solidFill>
-                <a:latin typeface="Microsoft YaHei"/>
-                <a:ea typeface="Microsoft YaHei"/>
-              </a:rPr>
-              <a:t>的自然下一步。</a:t>
-            </a:r>
-            <a:endParaRPr/>
-          </a:p>
-        </p:txBody>
-      </p:sp>
-      <p:sp>
-        <p:nvSpPr>
-          <p:cNvPr id="137" name="" descr="{&quot;isTemplate&quot;:true,&quot;type&quot;:&quot;text&quot;}"/>
-          <p:cNvSpPr txBox="1"/>
-          <p:nvPr/>
-        </p:nvSpPr>
-        <p:spPr>
-          <a:xfrm rot="0" flipH="0" flipV="0">
-            <a:off x="6353175" y="4105275"/>
-            <a:ext cx="5457825" cy="361950"/>
-          </a:xfrm>
-          <a:prstGeom prst="rect"/>
-        </p:spPr>
-        <p:txBody>
-          <a:bodyPr wrap="none" lIns="0" tIns="0" rIns="0" bIns="0"/>
-          <a:p>
-            <a:pPr>
-              <a:lnSpc>
-                <a:spcPct val="155000"/>
-              </a:lnSpc>
-            </a:pPr>
-            <a:r>
-              <a:rPr lang="en-US" sz="1500">
-                <a:solidFill>
-                  <a:srgbClr val="1A2230"/>
-                </a:solidFill>
-                <a:latin typeface="Microsoft YaHei"/>
-                <a:ea typeface="Microsoft YaHei"/>
-              </a:rPr>
-              <a:t xml:space="preserve">④ </a:t>
-            </a:r>
-            <a:r>
-              <a:rPr lang="zh-CN" sz="1500">
-                <a:solidFill>
-                  <a:srgbClr val="1A2230"/>
-                </a:solidFill>
-                <a:latin typeface="Microsoft YaHei"/>
-                <a:ea typeface="Microsoft YaHei"/>
-              </a:rPr>
-              <a:t>阈值自适应</a:t>
-            </a:r>
-            <a:r>
-              <a:rPr lang="zh-CN" sz="1500">
-                <a:solidFill>
-                  <a:srgbClr val="1A2230"/>
-                </a:solidFill>
-                <a:latin typeface="Microsoft YaHei"/>
-                <a:ea typeface="Microsoft YaHei"/>
-              </a:rPr>
-              <a:t>　按纹理强度与重叠度在线估计，替代固定常数。</a:t>
-            </a:r>
-            <a:endParaRPr/>
-          </a:p>
-        </p:txBody>
-      </p:sp>
-      <p:sp>
-        <p:nvSpPr>
-          <p:cNvPr id="138" name="" descr="{&quot;isTemplate&quot;:true,&quot;type&quot;:&quot;text&quot;}"/>
-          <p:cNvSpPr txBox="1"/>
-          <p:nvPr/>
-        </p:nvSpPr>
-        <p:spPr>
-          <a:xfrm rot="0" flipH="0" flipV="0">
-            <a:off x="6353175" y="4619625"/>
-            <a:ext cx="5457825" cy="714375"/>
-          </a:xfrm>
-          <a:prstGeom prst="rect"/>
-        </p:spPr>
-        <p:txBody>
-          <a:bodyPr wrap="square" lIns="0" tIns="0" rIns="0" bIns="0">
-            <a:normAutofit/>
-          </a:bodyPr>
-          <a:p>
-            <a:pPr>
-              <a:lnSpc>
-                <a:spcPct val="155000"/>
-              </a:lnSpc>
-            </a:pPr>
-            <a:r>
-              <a:rPr lang="en-US" sz="1500">
-                <a:solidFill>
-                  <a:srgbClr val="1A2230"/>
-                </a:solidFill>
-                <a:latin typeface="Microsoft YaHei"/>
-                <a:ea typeface="Microsoft YaHei"/>
-              </a:rPr>
-              <a:t xml:space="preserve">⑤ </a:t>
-            </a:r>
-            <a:r>
-              <a:rPr lang="zh-CN" sz="1500">
-                <a:solidFill>
-                  <a:srgbClr val="1A2230"/>
-                </a:solidFill>
-                <a:latin typeface="Microsoft YaHei"/>
-                <a:ea typeface="Microsoft YaHei"/>
-              </a:rPr>
-              <a:t>我们能立刻做的</a:t>
-            </a:r>
-            <a:r>
-              <a:rPr lang="zh-CN" sz="1500">
-                <a:solidFill>
-                  <a:srgbClr val="1A2230"/>
-                </a:solidFill>
-                <a:latin typeface="Microsoft YaHei"/>
-                <a:ea typeface="Microsoft YaHei"/>
-              </a:rPr>
-              <a:t>　打乱实验（</a:t>
-            </a:r>
-            <a:r>
-              <a:rPr lang="en-US" sz="1500">
-                <a:solidFill>
-                  <a:srgbClr val="1A2230"/>
-                </a:solidFill>
-                <a:latin typeface="Microsoft YaHei"/>
-                <a:ea typeface="Microsoft YaHei"/>
-              </a:rPr>
-              <a:t>--shuffle</a:t>
-            </a:r>
-            <a:r>
-              <a:rPr lang="zh-CN" sz="1500">
-                <a:solidFill>
-                  <a:srgbClr val="1A2230"/>
-                </a:solidFill>
-                <a:latin typeface="Microsoft YaHei"/>
-                <a:ea typeface="Microsoft YaHei"/>
-              </a:rPr>
-              <a:t>）、全分辨率重跑、再换</a:t>
-            </a:r>
-            <a:r>
-              <a:rPr lang="en-US" sz="1500">
-                <a:solidFill>
-                  <a:srgbClr val="1A2230"/>
-                </a:solidFill>
-                <a:latin typeface="Microsoft YaHei"/>
-                <a:ea typeface="Microsoft YaHei"/>
-              </a:rPr>
-              <a:t xml:space="preserve"> 2–3 </a:t>
-            </a:r>
-            <a:r>
-              <a:rPr lang="zh-CN" sz="1500">
-                <a:solidFill>
-                  <a:srgbClr val="1A2230"/>
-                </a:solidFill>
-                <a:latin typeface="Microsoft YaHei"/>
-                <a:ea typeface="Microsoft YaHei"/>
-              </a:rPr>
               <a:t>个场景。</a:t>
             </a:r>
             <a:endParaRPr/>
@@ -7458,7 +4954,7 @@
       </p:sp>
       <p:sp>
         <p:nvSpPr>
-          <p:cNvPr id="139" name=""/>
+          <p:cNvPr id="95" name=""/>
           <p:cNvSpPr/>
           <p:nvPr/>
         </p:nvSpPr>
@@ -7482,7 +4978,7 @@
       </p:sp>
       <p:sp>
         <p:nvSpPr>
-          <p:cNvPr id="140" name=""/>
+          <p:cNvPr id="96" name=""/>
           <p:cNvSpPr/>
           <p:nvPr/>
         </p:nvSpPr>
@@ -7522,7 +5018,7 @@
       </p:sp>
       <p:sp>
         <p:nvSpPr>
-          <p:cNvPr id="141" name="" descr="{&quot;isTemplate&quot;:true,&quot;type&quot;:&quot;text&quot;}"/>
+          <p:cNvPr id="97" name="" descr="{&quot;isTemplate&quot;:true,&quot;type&quot;:&quot;text&quot;}"/>
           <p:cNvSpPr txBox="1"/>
           <p:nvPr/>
         </p:nvSpPr>
@@ -7660,12 +5156,12 @@
 </p:sld>
 </file>
 
-<file path=ppt/slides/slide14.xml><?xml version="1.0" encoding="utf-8"?>
+<file path=ppt/slides/slide13.xml><?xml version="1.0" encoding="utf-8"?>
 <p:sld xmlns:p="http://schemas.openxmlformats.org/presentationml/2006/main" xmlns:a="http://schemas.openxmlformats.org/drawingml/2006/main">
   <p:cSld>
     <p:spTree>
       <p:nvGrpSpPr>
-        <p:cNvPr id="142" name="" descr="&lt;Slide style={{ width: '1280px', height: '720px', backgroundColor: '#FFFFFF', padding: '0px', flexDirection: 'column' }}&gt;&#10;    &lt;Box style={{ width: '1280px', height: '8px', backgroundColor: '#1E4FA8' }} /&gt;&#10;    &lt;Box style={{ padding: '30px 40px 0px 40px', flexDirection: 'row', justifyContent: 'space-between', alignItems: 'flex-end' }}&gt;&#10;        &lt;Text style={{ fontSize: 34, fontWeight: 'bold', color: '#1E4FA8' }}&gt;这条线怎么长出来的：三代工作&lt;/Text&gt;&#10;        &lt;Text style={{ fontSize: 15, color: '#8B97A8' }}&gt;14 / 15&lt;/Text&gt;&#10;    &lt;/Box&gt;&#10;    &lt;Box style={{ padding: '16px 40px 0px 40px' }}&gt;&#10;        &lt;Text style={{ fontSize: 21, color: '#4A5568', lineHeight: 1.5 }}&gt;本文不是孤立的一篇。同一团队三年做的是同一件事：&lt;b&gt;把辐射场重建变&quot;局部、渐进、免位姿&quot;&lt;/b&gt;，本文补上最后一块&quot;无序 + 全局一致&quot;。&lt;/Text&gt;&#10;    &lt;/Box&gt;&#10;&#10;    &lt;Box style={{ padding: '20px 40px 0px 40px', flexDirection: 'row', gap: 24 }}&gt;&#10;        &lt;Box style={{ width: '750px', flexDirection: 'column' }}&gt;&#10;            &lt;Box style={{ flexDirection: 'row', gap: 16 }}&gt;&#10;                &lt;Box style={{ width: '108px', backgroundColor: '#F0F5FC', borderRadius: 4, padding: '8px 8px', alignItems: 'center' }}&gt;&#10;                    &lt;Text style={{ fontSize: 20, fontWeight: 'bold', color: '#1E4FA8' }}&gt;2023&lt;/Text&gt;&#10;                    &lt;Text style={{ fontSize: 15, color: '#4A5568' }}&gt;CVPR&lt;/Text&gt;&#10;                &lt;/Box&gt;&#10;                &lt;Box style={{ flex: 1, flexDirection: 'column' }}&gt;&#10;                    &lt;Text style={{ fontSize: 22, fontWeight: 'bold', color: '#1A2230' }}&gt;渐进式局部辐射场&lt;/Text&gt;&#10;                    &lt;Text style={{ fontSize: 19, color: '#1A2230', lineHeight: 1.5, marginTop: 6 }}&gt;Progressively Optimized Local Radiance Fields：把场景切块、渐进而非一次性优化，是本文&quot;渐进层级&quot;的思想来源。&lt;/Text&gt;&#10;                &lt;/Box&gt;&#10;            &lt;/Box&gt;&#10;            &lt;Box style={{ height: '1px', backgroundColor: '#D6DCE5', marginTop: 16, marginBottom: 16 }} /&gt;&#10;            &lt;Box style={{ flexDirection: 'row', gap: 16 }}&gt;&#10;                &lt;Box style={{ width: '108px', backgroundColor: '#F0F5FC', borderRadius: 4, padding: '8px 8px', alignItems: 'center' }}&gt;&#10;                    &lt;Text style={{ fontSize: 20, fontWeight: 'bold', color: '#1E4FA8' }}&gt;2025&lt;/Text&gt;&#10;                    &lt;Text style={{ fontSize: 15, color: '#4A5568' }}&gt;ACM TOG&lt;/Text&gt;&#10;                &lt;/Box&gt;&#10;                &lt;Box style={{ flex: 1, flexDirection: 'column' }}&gt;&#10;                    &lt;Text style={{ fontSize: 22, fontWeight: 'bold', color: '#1A2230' }}&gt;免位姿的大场景即时重建（直接前作）&lt;/Text&gt;&#10;                    &lt;Text style={{ fontSize: 19, color: '#1A2230', lineHeight: 1.5, marginTop: 6 }}&gt;On-the-fly Reconstruction for Large-Scale NVS from Unposed Images：已做到&quot;不用 COLMAP + 大场景 + 即时&quot;，但&lt;b&gt;要求图像有序、且不做回环&lt;/b&gt;。&lt;/Text&gt;&#10;                &lt;/Box&gt;&#10;            &lt;/Box&gt;&#10;            &lt;Box style={{ height: '1px', backgroundColor: '#D6DCE5', marginTop: 16, marginBottom: 16 }} /&gt;&#10;            &lt;Box style={{ flexDirection: 'row', gap: 16 }}&gt;&#10;                &lt;Box style={{ width: '108px', backgroundColor: '#1E4FA8', borderRadius: 4, padding: '8px 8px', alignItems: 'center' }}&gt;&#10;                    &lt;Text style={{ fontSize: 20, fontWeight: 'bold', color: '#FFFFFF' }}&gt;2026&lt;/Text&gt;&#10;                    &lt;Text style={{ fontSize: 15, color: '#D6E4F7' }}&gt;SIGGRAPH&lt;/Text&gt;&#10;                &lt;/Box&gt;&#10;                &lt;Box style={{ flex: 1, flexDirection: 'column' }}&gt;&#10;                    &lt;Text style={{ fontSize: 22, fontWeight: 'bold', color: '#1A2230' }}&gt;本文：无序匹配 + 簇级回环&lt;/Text&gt;&#10;                    &lt;Text style={{ fontSize: 19, color: '#1A2230', lineHeight: 1.5, marginTop: 6 }}&gt;在前作之上只补两件事——在全部历史里检索重叠帧、用图传播做不重算的回环。增量不大，但恰好补在前作的假设上。&lt;/Text&gt;&#10;                &lt;/Box&gt;&#10;            &lt;/Box&gt;&#10;        &lt;/Box&gt;&#10;&#10;        &lt;Box style={{ flex: 1, backgroundColor: '#F7F9FC', border: '1px solid #D6DCE5', borderRadius: 6, padding: '18px 20px', flexDirection: 'column' }}&gt;&#10;            &lt;Text style={{ fontSize: 23, fontWeight: 'bold', color: '#1A2230' }}&gt;之后呢&lt;/Text&gt;&#10;            &lt;Text style={{ fontSize: 17, color: '#4A5568', lineHeight: 1.45, marginTop: 6 }}&gt;截至 2026-10-29 检索，未见正式发表的后续论文（本文 7 月才上线）。以下为按其脉络的判断：&lt;/Text&gt;&#10;            &lt;Text style={{ fontSize: 19, color: '#1A2230', lineHeight: 1.5, marginTop: 12 }}&gt;&lt;b&gt;① 走向采集端&lt;/b&gt;　从&quot;重建工具&quot;变成&quot;拍摄仪表盘&quot;。&lt;/Text&gt;&#10;            &lt;Text style={{ fontSize: 19, color: '#1A2230', lineHeight: 1.5, marginTop: 10 }}&gt;&lt;b&gt;② 精度回填&lt;/b&gt;　在线粗轨迹 + 收尾一次全局 BA。&lt;/Text&gt;&#10;            &lt;Text style={{ fontSize: 19, color: '#1A2230', lineHeight: 1.5, marginTop: 10 }}&gt;&lt;b&gt;③ 动态与大尺度&lt;/b&gt;　4050 帧已是当前上限，动态物体仍是空白。&lt;/Text&gt;&#10;            &lt;Text style={{ fontSize: 19, color: '#1A2230', lineHeight: 1.5, marginTop: 10 }}&gt;&lt;b&gt;④ 与离线并存&lt;/b&gt;　更可能被采集 App 吸收，而非取代离线流程。&lt;/Text&gt;&#10;        &lt;/Box&gt;&#10;    &lt;/Box&gt;&#10;&#10;    &lt;Box style={{ padding: '16px 40px 0px 40px' }}&gt;&#10;        &lt;Text style={{ fontSize: 16, color: '#8B97A8', lineHeight: 1.45 }}&gt;前两项工作引自本文参考文献（Meuleman et al. 2023 / 2025）；&quot;之后呢&quot;四条为汇报人判断，不代表作者观点，答辩时请按&quot;推测&quot;表述。&lt;/Text&gt;&#10;    &lt;/Box&gt;&#10;&lt;/Slide&gt;&#10;"/>
+        <p:cNvPr id="98" name="" descr="&lt;Slide style={{ width: '1280px', height: '720px', backgroundColor: '#FFFFFF', padding: '0px', flexDirection: 'column' }}&gt;&#10;    &lt;Box style={{ width: '1280px', height: '8px', backgroundColor: '#1E4FA8' }} /&gt;&#10;    &lt;Box style={{ padding: '30px 40px 0px 40px', flexDirection: 'row', justifyContent: 'space-between', alignItems: 'flex-end' }}&gt;&#10;        &lt;Text style={{ fontSize: 34, fontWeight: 'bold', color: '#1E4FA8' }}&gt;这条线怎么长出来的：三代工作&lt;/Text&gt;&#10;        &lt;Text style={{ fontSize: 15, color: '#8B97A8' }}&gt;13 / 14&lt;/Text&gt;&#10;    &lt;/Box&gt;&#10;    &lt;Box style={{ padding: '16px 40px 0px 40px' }}&gt;&#10;        &lt;Text style={{ fontSize: 21, color: '#4A5568', lineHeight: 1.5 }}&gt;本文不是孤立的一篇。同一团队三年做的是同一件事：&lt;b&gt;把辐射场重建变&quot;局部、渐进、免位姿&quot;&lt;/b&gt;，本文补上最后一块&quot;无序 + 全局一致&quot;。&lt;/Text&gt;&#10;    &lt;/Box&gt;&#10;&#10;    &lt;Box style={{ padding: '20px 40px 0px 40px', flexDirection: 'row', gap: 24 }}&gt;&#10;        &lt;Box style={{ width: '750px', flexDirection: 'column' }}&gt;&#10;            &lt;Box style={{ flexDirection: 'row', gap: 16 }}&gt;&#10;                &lt;Box style={{ width: '108px', backgroundColor: '#F0F5FC', borderRadius: 4, padding: '8px 8px', alignItems: 'center' }}&gt;&#10;                    &lt;Text style={{ fontSize: 20, fontWeight: 'bold', color: '#1E4FA8' }}&gt;2023&lt;/Text&gt;&#10;                    &lt;Text style={{ fontSize: 15, color: '#4A5568' }}&gt;CVPR&lt;/Text&gt;&#10;                &lt;/Box&gt;&#10;                &lt;Box style={{ flex: 1, flexDirection: 'column' }}&gt;&#10;                    &lt;Text style={{ fontSize: 22, fontWeight: 'bold', color: '#1A2230' }}&gt;渐进式局部辐射场&lt;/Text&gt;&#10;                    &lt;Text style={{ fontSize: 19, color: '#1A2230', lineHeight: 1.5, marginTop: 6 }}&gt;Progressively Optimized Local Radiance Fields：把场景切块、渐进而非一次性优化，是本文&quot;渐进层级&quot;的思想来源。&lt;/Text&gt;&#10;                &lt;/Box&gt;&#10;            &lt;/Box&gt;&#10;            &lt;Box style={{ height: '1px', backgroundColor: '#D6DCE5', marginTop: 16, marginBottom: 16 }} /&gt;&#10;            &lt;Box style={{ flexDirection: 'row', gap: 16 }}&gt;&#10;                &lt;Box style={{ width: '108px', backgroundColor: '#F0F5FC', borderRadius: 4, padding: '8px 8px', alignItems: 'center' }}&gt;&#10;                    &lt;Text style={{ fontSize: 20, fontWeight: 'bold', color: '#1E4FA8' }}&gt;2025&lt;/Text&gt;&#10;                    &lt;Text style={{ fontSize: 15, color: '#4A5568' }}&gt;ACM TOG&lt;/Text&gt;&#10;                &lt;/Box&gt;&#10;                &lt;Box style={{ flex: 1, flexDirection: 'column' }}&gt;&#10;                    &lt;Text style={{ fontSize: 22, fontWeight: 'bold', color: '#1A2230' }}&gt;免位姿的大场景即时重建（直接前作）&lt;/Text&gt;&#10;                    &lt;Text style={{ fontSize: 19, color: '#1A2230', lineHeight: 1.5, marginTop: 6 }}&gt;On-the-fly Reconstruction for Large-Scale NVS from Unposed Images：已做到&quot;不用 COLMAP + 大场景 + 即时&quot;，但&lt;b&gt;要求图像有序、且不做回环&lt;/b&gt;。&lt;/Text&gt;&#10;                &lt;/Box&gt;&#10;            &lt;/Box&gt;&#10;            &lt;Box style={{ height: '1px', backgroundColor: '#D6DCE5', marginTop: 16, marginBottom: 16 }} /&gt;&#10;            &lt;Box style={{ flexDirection: 'row', gap: 16 }}&gt;&#10;                &lt;Box style={{ width: '108px', backgroundColor: '#1E4FA8', borderRadius: 4, padding: '8px 8px', alignItems: 'center' }}&gt;&#10;                    &lt;Text style={{ fontSize: 20, fontWeight: 'bold', color: '#FFFFFF' }}&gt;2026&lt;/Text&gt;&#10;                    &lt;Text style={{ fontSize: 15, color: '#D6E4F7' }}&gt;SIGGRAPH&lt;/Text&gt;&#10;                &lt;/Box&gt;&#10;                &lt;Box style={{ flex: 1, flexDirection: 'column' }}&gt;&#10;                    &lt;Text style={{ fontSize: 22, fontWeight: 'bold', color: '#1A2230' }}&gt;本文：无序匹配 + 簇级回环&lt;/Text&gt;&#10;                    &lt;Text style={{ fontSize: 19, color: '#1A2230', lineHeight: 1.5, marginTop: 6 }}&gt;在前作之上只补两件事——在全部历史里检索重叠帧、用图传播做不重算的回环。增量不大，但恰好补在前作的假设上。&lt;/Text&gt;&#10;                &lt;/Box&gt;&#10;            &lt;/Box&gt;&#10;        &lt;/Box&gt;&#10;&#10;        &lt;Box style={{ flex: 1, backgroundColor: '#F7F9FC', border: '1px solid #D6DCE5', borderRadius: 6, padding: '18px 20px', flexDirection: 'column' }}&gt;&#10;            &lt;Text style={{ fontSize: 23, fontWeight: 'bold', color: '#1A2230' }}&gt;之后呢&lt;/Text&gt;&#10;            &lt;Text style={{ fontSize: 17, color: '#4A5568', lineHeight: 1.45, marginTop: 6 }}&gt;截至 2026-10-29 检索，未见正式发表的后续论文（本文 7 月才上线）。以下为按其脉络的判断：&lt;/Text&gt;&#10;            &lt;Text style={{ fontSize: 19, color: '#1A2230', lineHeight: 1.5, marginTop: 12 }}&gt;&lt;b&gt;① 走向采集端&lt;/b&gt;　从&quot;重建工具&quot;变成&quot;拍摄仪表盘&quot;。&lt;/Text&gt;&#10;            &lt;Text style={{ fontSize: 19, color: '#1A2230', lineHeight: 1.5, marginTop: 10 }}&gt;&lt;b&gt;② 精度回填&lt;/b&gt;　在线粗轨迹 + 收尾一次全局 BA。&lt;/Text&gt;&#10;            &lt;Text style={{ fontSize: 19, color: '#1A2230', lineHeight: 1.5, marginTop: 10 }}&gt;&lt;b&gt;③ 动态与大尺度&lt;/b&gt;　4050 帧已是当前上限，动态物体仍是空白。&lt;/Text&gt;&#10;            &lt;Text style={{ fontSize: 19, color: '#1A2230', lineHeight: 1.5, marginTop: 10 }}&gt;&lt;b&gt;④ 与离线并存&lt;/b&gt;　更可能被采集 App 吸收，而非取代离线流程。&lt;/Text&gt;&#10;        &lt;/Box&gt;&#10;    &lt;/Box&gt;&#10;&#10;    &lt;Box style={{ padding: '16px 40px 0px 40px' }}&gt;&#10;        &lt;Text style={{ fontSize: 16, color: '#8B97A8', lineHeight: 1.45 }}&gt;前两项工作引自本文参考文献（Meuleman et al. 2023 / 2025）；&quot;之后呢&quot;四条为汇报人判断，不代表作者观点，答辩时请按&quot;推测&quot;表述。&lt;/Text&gt;&#10;    &lt;/Box&gt;&#10;&lt;/Slide&gt;&#10;"/>
         <p:cNvGrpSpPr/>
         <p:nvPr/>
       </p:nvGrpSpPr>
@@ -7679,7 +5175,7 @@
       </p:grpSpPr>
       <p:sp>
         <p:nvSpPr>
-          <p:cNvPr id="143" name=""/>
+          <p:cNvPr id="99" name=""/>
           <p:cNvSpPr/>
           <p:nvPr/>
         </p:nvSpPr>
@@ -7703,7 +5199,7 @@
       </p:sp>
       <p:sp>
         <p:nvSpPr>
-          <p:cNvPr id="144" name=""/>
+          <p:cNvPr id="100" name=""/>
           <p:cNvSpPr/>
           <p:nvPr/>
         </p:nvSpPr>
@@ -7727,7 +5223,7 @@
       </p:sp>
       <p:sp>
         <p:nvSpPr>
-          <p:cNvPr id="145" name="" descr="{&quot;isTemplate&quot;:true,&quot;type&quot;:&quot;text&quot;}"/>
+          <p:cNvPr id="101" name="" descr="{&quot;isTemplate&quot;:true,&quot;type&quot;:&quot;text&quot;}"/>
           <p:cNvSpPr txBox="1"/>
           <p:nvPr/>
         </p:nvSpPr>
@@ -7762,7 +5258,7 @@
       </p:sp>
       <p:sp>
         <p:nvSpPr>
-          <p:cNvPr id="146" name="" descr="{&quot;isTemplate&quot;:true,&quot;type&quot;:&quot;text&quot;}"/>
+          <p:cNvPr id="102" name="" descr="{&quot;isTemplate&quot;:true,&quot;type&quot;:&quot;text&quot;}"/>
           <p:cNvSpPr txBox="1"/>
           <p:nvPr/>
         </p:nvSpPr>
@@ -7789,15 +5285,15 @@
                 <a:latin typeface="Microsoft YaHei"/>
                 <a:ea typeface="Microsoft YaHei"/>
               </a:rPr>
-              <a:t>14 / 15</a:t>
-            </a:r>
-            <a:endParaRPr/>
-          </a:p>
-        </p:txBody>
-      </p:sp>
-      <p:sp>
-        <p:nvSpPr>
-          <p:cNvPr id="147" name="" descr="{&quot;isTemplate&quot;:true,&quot;type&quot;:&quot;text&quot;}"/>
+              <a:t>13 / 14</a:t>
+            </a:r>
+            <a:endParaRPr/>
+          </a:p>
+        </p:txBody>
+      </p:sp>
+      <p:sp>
+        <p:nvSpPr>
+          <p:cNvPr id="103" name="" descr="{&quot;isTemplate&quot;:true,&quot;type&quot;:&quot;text&quot;}"/>
           <p:cNvSpPr txBox="1"/>
           <p:nvPr/>
         </p:nvSpPr>
@@ -7944,7 +5440,7 @@
       </p:sp>
       <p:sp>
         <p:nvSpPr>
-          <p:cNvPr id="148" name=""/>
+          <p:cNvPr id="104" name=""/>
           <p:cNvSpPr/>
           <p:nvPr/>
         </p:nvSpPr>
@@ -7970,7 +5466,7 @@
       </p:sp>
       <p:sp>
         <p:nvSpPr>
-          <p:cNvPr id="149" name="" descr="{&quot;isTemplate&quot;:true,&quot;type&quot;:&quot;text&quot;}"/>
+          <p:cNvPr id="105" name="" descr="{&quot;isTemplate&quot;:true,&quot;type&quot;:&quot;text&quot;}"/>
           <p:cNvSpPr txBox="1"/>
           <p:nvPr/>
         </p:nvSpPr>
@@ -8005,7 +5501,7 @@
       </p:sp>
       <p:sp>
         <p:nvSpPr>
-          <p:cNvPr id="150" name="" descr="{&quot;isTemplate&quot;:true,&quot;type&quot;:&quot;text&quot;}"/>
+          <p:cNvPr id="106" name="" descr="{&quot;isTemplate&quot;:true,&quot;type&quot;:&quot;text&quot;}"/>
           <p:cNvSpPr txBox="1"/>
           <p:nvPr/>
         </p:nvSpPr>
@@ -8040,7 +5536,7 @@
       </p:sp>
       <p:sp>
         <p:nvSpPr>
-          <p:cNvPr id="151" name="" descr="{&quot;isTemplate&quot;:true,&quot;type&quot;:&quot;text&quot;}"/>
+          <p:cNvPr id="107" name="" descr="{&quot;isTemplate&quot;:true,&quot;type&quot;:&quot;text&quot;}"/>
           <p:cNvSpPr txBox="1"/>
           <p:nvPr/>
         </p:nvSpPr>
@@ -8075,7 +5571,7 @@
       </p:sp>
       <p:sp>
         <p:nvSpPr>
-          <p:cNvPr id="152" name="" descr="{&quot;isTemplate&quot;:true,&quot;type&quot;:&quot;text&quot;}"/>
+          <p:cNvPr id="108" name="" descr="{&quot;isTemplate&quot;:true,&quot;type&quot;:&quot;text&quot;}"/>
           <p:cNvSpPr txBox="1"/>
           <p:nvPr/>
         </p:nvSpPr>
@@ -8162,7 +5658,7 @@
       </p:sp>
       <p:sp>
         <p:nvSpPr>
-          <p:cNvPr id="153" name=""/>
+          <p:cNvPr id="109" name=""/>
           <p:cNvSpPr/>
           <p:nvPr/>
         </p:nvSpPr>
@@ -8186,7 +5682,7 @@
       </p:sp>
       <p:sp>
         <p:nvSpPr>
-          <p:cNvPr id="154" name=""/>
+          <p:cNvPr id="110" name=""/>
           <p:cNvSpPr/>
           <p:nvPr/>
         </p:nvSpPr>
@@ -8212,7 +5708,7 @@
       </p:sp>
       <p:sp>
         <p:nvSpPr>
-          <p:cNvPr id="155" name="" descr="{&quot;isTemplate&quot;:true,&quot;type&quot;:&quot;text&quot;}"/>
+          <p:cNvPr id="111" name="" descr="{&quot;isTemplate&quot;:true,&quot;type&quot;:&quot;text&quot;}"/>
           <p:cNvSpPr txBox="1"/>
           <p:nvPr/>
         </p:nvSpPr>
@@ -8247,7 +5743,7 @@
       </p:sp>
       <p:sp>
         <p:nvSpPr>
-          <p:cNvPr id="156" name="" descr="{&quot;isTemplate&quot;:true,&quot;type&quot;:&quot;text&quot;}"/>
+          <p:cNvPr id="112" name="" descr="{&quot;isTemplate&quot;:true,&quot;type&quot;:&quot;text&quot;}"/>
           <p:cNvSpPr txBox="1"/>
           <p:nvPr/>
         </p:nvSpPr>
@@ -8282,7 +5778,7 @@
       </p:sp>
       <p:sp>
         <p:nvSpPr>
-          <p:cNvPr id="157" name="" descr="{&quot;isTemplate&quot;:true,&quot;type&quot;:&quot;text&quot;}"/>
+          <p:cNvPr id="113" name="" descr="{&quot;isTemplate&quot;:true,&quot;type&quot;:&quot;text&quot;}"/>
           <p:cNvSpPr txBox="1"/>
           <p:nvPr/>
         </p:nvSpPr>
@@ -8317,7 +5813,7 @@
       </p:sp>
       <p:sp>
         <p:nvSpPr>
-          <p:cNvPr id="158" name="" descr="{&quot;isTemplate&quot;:true,&quot;type&quot;:&quot;text&quot;}"/>
+          <p:cNvPr id="114" name="" descr="{&quot;isTemplate&quot;:true,&quot;type&quot;:&quot;text&quot;}"/>
           <p:cNvSpPr txBox="1"/>
           <p:nvPr/>
         </p:nvSpPr>
@@ -8464,7 +5960,7 @@
       </p:sp>
       <p:sp>
         <p:nvSpPr>
-          <p:cNvPr id="159" name=""/>
+          <p:cNvPr id="115" name=""/>
           <p:cNvSpPr/>
           <p:nvPr/>
         </p:nvSpPr>
@@ -8488,7 +5984,7 @@
       </p:sp>
       <p:sp>
         <p:nvSpPr>
-          <p:cNvPr id="160" name=""/>
+          <p:cNvPr id="116" name=""/>
           <p:cNvSpPr/>
           <p:nvPr/>
         </p:nvSpPr>
@@ -8514,7 +6010,7 @@
       </p:sp>
       <p:sp>
         <p:nvSpPr>
-          <p:cNvPr id="161" name="" descr="{&quot;isTemplate&quot;:true,&quot;type&quot;:&quot;text&quot;}"/>
+          <p:cNvPr id="117" name="" descr="{&quot;isTemplate&quot;:true,&quot;type&quot;:&quot;text&quot;}"/>
           <p:cNvSpPr txBox="1"/>
           <p:nvPr/>
         </p:nvSpPr>
@@ -8549,7 +6045,7 @@
       </p:sp>
       <p:sp>
         <p:nvSpPr>
-          <p:cNvPr id="162" name="" descr="{&quot;isTemplate&quot;:true,&quot;type&quot;:&quot;text&quot;}"/>
+          <p:cNvPr id="118" name="" descr="{&quot;isTemplate&quot;:true,&quot;type&quot;:&quot;text&quot;}"/>
           <p:cNvSpPr txBox="1"/>
           <p:nvPr/>
         </p:nvSpPr>
@@ -8584,7 +6080,7 @@
       </p:sp>
       <p:sp>
         <p:nvSpPr>
-          <p:cNvPr id="163" name="" descr="{&quot;isTemplate&quot;:true,&quot;type&quot;:&quot;text&quot;}"/>
+          <p:cNvPr id="119" name="" descr="{&quot;isTemplate&quot;:true,&quot;type&quot;:&quot;text&quot;}"/>
           <p:cNvSpPr txBox="1"/>
           <p:nvPr/>
         </p:nvSpPr>
@@ -8639,7 +6135,7 @@
       </p:sp>
       <p:sp>
         <p:nvSpPr>
-          <p:cNvPr id="164" name="" descr="{&quot;isTemplate&quot;:true,&quot;type&quot;:&quot;text&quot;}"/>
+          <p:cNvPr id="120" name="" descr="{&quot;isTemplate&quot;:true,&quot;type&quot;:&quot;text&quot;}"/>
           <p:cNvSpPr txBox="1"/>
           <p:nvPr/>
         </p:nvSpPr>
@@ -8676,7 +6172,7 @@
       </p:sp>
       <p:sp>
         <p:nvSpPr>
-          <p:cNvPr id="165" name=""/>
+          <p:cNvPr id="121" name=""/>
           <p:cNvSpPr/>
           <p:nvPr/>
         </p:nvSpPr>
@@ -8707,7 +6203,7 @@
       </p:sp>
       <p:sp>
         <p:nvSpPr>
-          <p:cNvPr id="166" name="" descr="{&quot;isTemplate&quot;:true,&quot;type&quot;:&quot;text&quot;}"/>
+          <p:cNvPr id="122" name="" descr="{&quot;isTemplate&quot;:true,&quot;type&quot;:&quot;text&quot;}"/>
           <p:cNvSpPr txBox="1"/>
           <p:nvPr/>
         </p:nvSpPr>
@@ -8742,7 +6238,7 @@
       </p:sp>
       <p:sp>
         <p:nvSpPr>
-          <p:cNvPr id="167" name="" descr="{&quot;isTemplate&quot;:true,&quot;type&quot;:&quot;text&quot;}"/>
+          <p:cNvPr id="123" name="" descr="{&quot;isTemplate&quot;:true,&quot;type&quot;:&quot;text&quot;}"/>
           <p:cNvSpPr txBox="1"/>
           <p:nvPr/>
         </p:nvSpPr>
@@ -8819,7 +6315,7 @@
       </p:sp>
       <p:sp>
         <p:nvSpPr>
-          <p:cNvPr id="168" name="" descr="{&quot;isTemplate&quot;:true,&quot;type&quot;:&quot;text&quot;}"/>
+          <p:cNvPr id="124" name="" descr="{&quot;isTemplate&quot;:true,&quot;type&quot;:&quot;text&quot;}"/>
           <p:cNvSpPr txBox="1"/>
           <p:nvPr/>
         </p:nvSpPr>
@@ -8956,7 +6452,7 @@
       </p:sp>
       <p:sp>
         <p:nvSpPr>
-          <p:cNvPr id="169" name="" descr="{&quot;isTemplate&quot;:true,&quot;type&quot;:&quot;text&quot;}"/>
+          <p:cNvPr id="125" name="" descr="{&quot;isTemplate&quot;:true,&quot;type&quot;:&quot;text&quot;}"/>
           <p:cNvSpPr txBox="1"/>
           <p:nvPr/>
         </p:nvSpPr>
@@ -9053,7 +6549,7 @@
       </p:sp>
       <p:sp>
         <p:nvSpPr>
-          <p:cNvPr id="170" name="" descr="{&quot;isTemplate&quot;:true,&quot;type&quot;:&quot;text&quot;}"/>
+          <p:cNvPr id="126" name="" descr="{&quot;isTemplate&quot;:true,&quot;type&quot;:&quot;text&quot;}"/>
           <p:cNvSpPr txBox="1"/>
           <p:nvPr/>
         </p:nvSpPr>
@@ -9130,7 +6626,7 @@
       </p:sp>
       <p:sp>
         <p:nvSpPr>
-          <p:cNvPr id="171" name="" descr="{&quot;isTemplate&quot;:true,&quot;type&quot;:&quot;text&quot;}"/>
+          <p:cNvPr id="127" name="" descr="{&quot;isTemplate&quot;:true,&quot;type&quot;:&quot;text&quot;}"/>
           <p:cNvSpPr txBox="1"/>
           <p:nvPr/>
         </p:nvSpPr>
@@ -9207,7 +6703,7 @@
       </p:sp>
       <p:sp>
         <p:nvSpPr>
-          <p:cNvPr id="172" name="" descr="{&quot;isTemplate&quot;:true,&quot;type&quot;:&quot;text&quot;}"/>
+          <p:cNvPr id="128" name="" descr="{&quot;isTemplate&quot;:true,&quot;type&quot;:&quot;text&quot;}"/>
           <p:cNvSpPr txBox="1"/>
           <p:nvPr/>
         </p:nvSpPr>
@@ -9345,12 +6841,12 @@
 </p:sld>
 </file>
 
-<file path=ppt/slides/slide15.xml><?xml version="1.0" encoding="utf-8"?>
+<file path=ppt/slides/slide14.xml><?xml version="1.0" encoding="utf-8"?>
 <p:sld xmlns:p="http://schemas.openxmlformats.org/presentationml/2006/main" xmlns:a="http://schemas.openxmlformats.org/drawingml/2006/main">
   <p:cSld>
     <p:spTree>
       <p:nvGrpSpPr>
-        <p:cNvPr id="173" name="" descr="&lt;Slide style={{ width: '1280px', height: '720px', backgroundColor: '#FFFFFF', padding: '0px', flexDirection: 'column' }}&gt;&#10;    &lt;Box style={{ width: '1280px', height: '8px', backgroundColor: '#1E4FA8' }} /&gt;&#10;    &lt;Box style={{ padding: '30px 40px 0px 40px', flexDirection: 'row', justifyContent: 'space-between', alignItems: 'flex-end' }}&gt;&#10;        &lt;Text style={{ fontSize: 34, fontWeight: 'bold', color: '#1E4FA8' }}&gt;结论：三句话带走&lt;/Text&gt;&#10;        &lt;Text style={{ fontSize: 15, color: '#8B97A8' }}&gt;15 / 15&lt;/Text&gt;&#10;    &lt;/Box&gt;&#10;&#10;    &lt;Box style={{ padding: '24px 40px 0px 40px', flexDirection: 'column', gap: 20 }}&gt;&#10;        &lt;Box style={{ flexDirection: 'row', gap: 18, alignItems: 'flex-start' }}&gt;&#10;            &lt;Box style={{ width: '38px', height: '38px', backgroundColor: '#1E4FA8', borderRadius: 4, alignItems: 'center', justifyContent: 'center' }}&gt;&#10;                &lt;Text style={{ fontSize: 21, fontWeight: 'bold', color: '#FFFFFF' }}&gt;1&lt;/Text&gt;&#10;            &lt;/Box&gt;&#10;            &lt;Box style={{ flex: 1, flexDirection: 'column' }}&gt;&#10;                &lt;Text style={{ fontSize: 26, fontWeight: 'bold', color: '#1A2230' }}&gt;它填的是一块空格，不是&quot;更快的离线 SfM&quot;&lt;/Text&gt;&#10;                &lt;Text style={{ fontSize: 20, color: '#4A5568', lineHeight: 1.45, marginTop: 6 }}&gt;即时、无序、全局一致三者同时成立，此前没有方法做到。速度只是手段，&quot;现场可判断&quot;才是目的。&lt;/Text&gt;&#10;            &lt;/Box&gt;&#10;        &lt;/Box&gt;&#10;        &lt;Box style={{ flexDirection: 'row', gap: 18, alignItems: 'flex-start' }}&gt;&#10;            &lt;Box style={{ width: '38px', height: '38px', backgroundColor: '#1E4FA8', borderRadius: 4, alignItems: 'center', justifyContent: 'center' }}&gt;&#10;                &lt;Text style={{ fontSize: 21, fontWeight: 'bold', color: '#FFFFFF' }}&gt;2&lt;/Text&gt;&#10;            &lt;/Box&gt;&#10;            &lt;Box style={{ flex: 1, flexDirection: 'column' }}&gt;&#10;                &lt;Text style={{ fontSize: 26, fontWeight: 'bold', color: '#1A2230' }}&gt;题眼是用&quot;图上的距离&quot;替换&quot;全局优化的解&quot;&lt;/Text&gt;&#10;                &lt;Text style={{ fontSize: 20, color: '#4A5568', lineHeight: 1.45, marginTop: 6 }}&gt;判定看跳数不看时间，求解用焊接窗口得 Sim(3)，再把修正按测地距离摊给全图——回环不必重算第二遍。&lt;/Text&gt;&#10;            &lt;/Box&gt;&#10;        &lt;/Box&gt;&#10;        &lt;Box style={{ flexDirection: 'row', gap: 18, alignItems: 'flex-start' }}&gt;&#10;            &lt;Box style={{ width: '38px', height: '38px', backgroundColor: '#0E3F8C', borderRadius: 4, alignItems: 'center', justifyContent: 'center' }}&gt;&#10;                &lt;Text style={{ fontSize: 21, fontWeight: 'bold', color: '#FFFFFF' }}&gt;3&lt;/Text&gt;&#10;            &lt;/Box&gt;&#10;            &lt;Box style={{ flex: 1, flexDirection: 'column' }}&gt;&#10;                &lt;Text style={{ fontSize: 26, fontWeight: 'bold', color: '#1A2230' }}&gt;代价是真的：1.2 dB 与一条更重的依赖链&lt;/Text&gt;&#10;                &lt;Text style={{ fontSize: 20, color: '#4A5568', lineHeight: 1.45, marginTop: 6 }}&gt;精度上限低于全局 BA，低视差会失败，阈值靠经验。它换的是时间，不是免费午餐。&lt;/Text&gt;&#10;            &lt;/Box&gt;&#10;        &lt;/Box&gt;&#10;    &lt;/Box&gt;&#10;&#10;    &lt;Box style={{ padding: '22px 40px 0px 40px', flexDirection: 'row', gap: 16 }}&gt;&#10;        &lt;Box style={{ flex: 1, backgroundColor: '#F0F5FC', borderRadius: 6, padding: '12px 16px', flexDirection: 'row', alignItems: 'baseline', gap: 10 }}&gt;&#10;            &lt;Text style={{ fontSize: 32, fontWeight: 'bold', color: '#1E4FA8' }}&gt;26.29 dB&lt;/Text&gt;&#10;            &lt;Text style={{ fontSize: 17, color: '#1A2230' }}&gt;论文在 MipNeRF360 的成绩&lt;/Text&gt;&#10;        &lt;/Box&gt;&#10;        &lt;Box style={{ flex: 1, backgroundColor: '#F0F5FC', borderRadius: 6, padding: '12px 16px', flexDirection: 'row', alignItems: 'baseline', gap: 10 }}&gt;&#10;            &lt;Text style={{ fontSize: 32, fontWeight: 'bold', color: '#1E4FA8' }}&gt;0.5 dB&lt;/Text&gt;&#10;            &lt;Text style={{ fontSize: 17, color: '#1A2230' }}&gt;输入打乱后的代价&lt;/Text&gt;&#10;        &lt;/Box&gt;&#10;        &lt;Box style={{ flex: 1, backgroundColor: '#F0F5FC', borderRadius: 6, padding: '12px 16px', flexDirection: 'row', alignItems: 'baseline', gap: 10 }}&gt;&#10;            &lt;Text style={{ fontSize: 32, fontWeight: 'bold', color: '#1E4FA8' }}&gt;25.95 dB&lt;/Text&gt;&#10;            &lt;Text style={{ fontSize: 17, color: '#1A2230' }}&gt;我们自己跑出来的&lt;/Text&gt;&#10;        &lt;/Box&gt;&#10;    &lt;/Box&gt;&#10;&#10;    &lt;Box style={{ margin: '16px 40px 0px 40px', backgroundColor: '#1E4FA8', borderRadius: 6, padding: '15px 22px' }}&gt;&#10;        &lt;Text style={{ fontSize: 22, fontWeight: 'bold', color: '#FFFFFF', lineHeight: 1.45 }}&gt;一句话总结：它把 3DGS 从&quot;拍完再算的离线工具&quot;变成了&quot;拍摄现场的仪表盘&quot;，代价是让出一点精度。&lt;/Text&gt;&#10;    &lt;/Box&gt;&#10;&#10;    &lt;Box style={{ marginTop: 'auto', padding: '20px 40px 0px 40px', paddingBottom: '26px', flexDirection: 'row', justifyContent: 'space-between', alignItems: 'center' }}&gt;&#10;        &lt;Text style={{ fontSize: 26, fontWeight: 'bold', color: '#1E4FA8' }}&gt;谢谢，欢迎提问&lt;/Text&gt;&#10;        &lt;Text style={{ fontSize: 15, color: '#8B97A8' }}&gt;论文：SIGGRAPH 2026 / arXiv:2607.14481 · 代码：github.com/graphdeco-inria/i3dgs&lt;/Text&gt;&#10;    &lt;/Box&gt;&#10;&lt;/Slide&gt;&#10;"/>
+        <p:cNvPr id="129" name="" descr="&lt;Slide style={{ width: '1280px', height: '720px', backgroundColor: '#FFFFFF', padding: '0px', flexDirection: 'column' }}&gt;&#10;    &lt;Box style={{ width: '1280px', height: '8px', backgroundColor: '#1E4FA8' }} /&gt;&#10;    &lt;Box style={{ padding: '30px 40px 0px 40px', flexDirection: 'row', justifyContent: 'space-between', alignItems: 'flex-end' }}&gt;&#10;        &lt;Text style={{ fontSize: 34, fontWeight: 'bold', color: '#1E4FA8' }}&gt;结论：三句话带走&lt;/Text&gt;&#10;        &lt;Text style={{ fontSize: 15, color: '#8B97A8' }}&gt;14 / 14&lt;/Text&gt;&#10;    &lt;/Box&gt;&#10;&#10;    &lt;Box style={{ padding: '24px 40px 0px 40px', flexDirection: 'column', gap: 20 }}&gt;&#10;        &lt;Box style={{ flexDirection: 'row', gap: 18, alignItems: 'flex-start' }}&gt;&#10;            &lt;Box style={{ width: '38px', height: '38px', backgroundColor: '#1E4FA8', borderRadius: 4, alignItems: 'center', justifyContent: 'center' }}&gt;&#10;                &lt;Text style={{ fontSize: 21, fontWeight: 'bold', color: '#FFFFFF' }}&gt;1&lt;/Text&gt;&#10;            &lt;/Box&gt;&#10;            &lt;Box style={{ flex: 1, flexDirection: 'column' }}&gt;&#10;                &lt;Text style={{ fontSize: 26, fontWeight: 'bold', color: '#1A2230' }}&gt;它填的是一块空格，不是&quot;更快的离线 SfM&quot;&lt;/Text&gt;&#10;                &lt;Text style={{ fontSize: 20, color: '#4A5568', lineHeight: 1.45, marginTop: 6 }}&gt;即时、无序、全局一致三者同时成立，此前没有方法做到。速度只是手段，&quot;现场可判断&quot;才是目的。&lt;/Text&gt;&#10;            &lt;/Box&gt;&#10;        &lt;/Box&gt;&#10;        &lt;Box style={{ flexDirection: 'row', gap: 18, alignItems: 'flex-start' }}&gt;&#10;            &lt;Box style={{ width: '38px', height: '38px', backgroundColor: '#1E4FA8', borderRadius: 4, alignItems: 'center', justifyContent: 'center' }}&gt;&#10;                &lt;Text style={{ fontSize: 21, fontWeight: 'bold', color: '#FFFFFF' }}&gt;2&lt;/Text&gt;&#10;            &lt;/Box&gt;&#10;            &lt;Box style={{ flex: 1, flexDirection: 'column' }}&gt;&#10;                &lt;Text style={{ fontSize: 26, fontWeight: 'bold', color: '#1A2230' }}&gt;题眼是用&quot;图上的距离&quot;替换&quot;全局优化的解&quot;&lt;/Text&gt;&#10;                &lt;Text style={{ fontSize: 20, color: '#4A5568', lineHeight: 1.45, marginTop: 6 }}&gt;判定看跳数不看时间，求解用焊接窗口得 Sim(3)，再把修正按测地距离摊给全图——回环不必重算第二遍。&lt;/Text&gt;&#10;            &lt;/Box&gt;&#10;        &lt;/Box&gt;&#10;        &lt;Box style={{ flexDirection: 'row', gap: 18, alignItems: 'flex-start' }}&gt;&#10;            &lt;Box style={{ width: '38px', height: '38px', backgroundColor: '#0E3F8C', borderRadius: 4, alignItems: 'center', justifyContent: 'center' }}&gt;&#10;                &lt;Text style={{ fontSize: 21, fontWeight: 'bold', color: '#FFFFFF' }}&gt;3&lt;/Text&gt;&#10;            &lt;/Box&gt;&#10;            &lt;Box style={{ flex: 1, flexDirection: 'column' }}&gt;&#10;                &lt;Text style={{ fontSize: 26, fontWeight: 'bold', color: '#1A2230' }}&gt;代价是真的：1.2 dB 与一条更重的依赖链&lt;/Text&gt;&#10;                &lt;Text style={{ fontSize: 20, color: '#4A5568', lineHeight: 1.45, marginTop: 6 }}&gt;精度上限低于全局 BA，低视差会失败，阈值靠经验。它换的是时间，不是免费午餐。&lt;/Text&gt;&#10;            &lt;/Box&gt;&#10;        &lt;/Box&gt;&#10;    &lt;/Box&gt;&#10;&#10;    &lt;Box style={{ padding: '22px 40px 0px 40px', flexDirection: 'row', gap: 16 }}&gt;&#10;        &lt;Box style={{ flex: 1, backgroundColor: '#F0F5FC', borderRadius: 6, padding: '12px 16px', flexDirection: 'row', alignItems: 'baseline', gap: 10 }}&gt;&#10;            &lt;Text style={{ fontSize: 32, fontWeight: 'bold', color: '#1E4FA8' }}&gt;26.29 dB&lt;/Text&gt;&#10;            &lt;Text style={{ fontSize: 17, color: '#1A2230' }}&gt;论文在 MipNeRF360 的成绩&lt;/Text&gt;&#10;        &lt;/Box&gt;&#10;        &lt;Box style={{ flex: 1, backgroundColor: '#F0F5FC', borderRadius: 6, padding: '12px 16px', flexDirection: 'row', alignItems: 'baseline', gap: 10 }}&gt;&#10;            &lt;Text style={{ fontSize: 32, fontWeight: 'bold', color: '#1E4FA8' }}&gt;0.5 dB&lt;/Text&gt;&#10;            &lt;Text style={{ fontSize: 17, color: '#1A2230' }}&gt;输入打乱后的代价&lt;/Text&gt;&#10;        &lt;/Box&gt;&#10;        &lt;Box style={{ flex: 1, backgroundColor: '#F0F5FC', borderRadius: 6, padding: '12px 16px', flexDirection: 'row', alignItems: 'baseline', gap: 10 }}&gt;&#10;            &lt;Text style={{ fontSize: 32, fontWeight: 'bold', color: '#1E4FA8' }}&gt;25.95 dB&lt;/Text&gt;&#10;            &lt;Text style={{ fontSize: 17, color: '#1A2230' }}&gt;我们自己跑出来的&lt;/Text&gt;&#10;        &lt;/Box&gt;&#10;    &lt;/Box&gt;&#10;&#10;    &lt;Box style={{ margin: '16px 40px 0px 40px', backgroundColor: '#1E4FA8', borderRadius: 6, padding: '15px 22px' }}&gt;&#10;        &lt;Text style={{ fontSize: 22, fontWeight: 'bold', color: '#FFFFFF', lineHeight: 1.45 }}&gt;一句话总结：它把 3DGS 从&quot;拍完再算的离线工具&quot;变成了&quot;拍摄现场的仪表盘&quot;，代价是让出一点精度。&lt;/Text&gt;&#10;    &lt;/Box&gt;&#10;&#10;    &lt;Box style={{ marginTop: 'auto', padding: '20px 40px 0px 40px', paddingBottom: '26px', flexDirection: 'row', justifyContent: 'space-between', alignItems: 'center' }}&gt;&#10;        &lt;Text style={{ fontSize: 26, fontWeight: 'bold', color: '#1E4FA8' }}&gt;谢谢，欢迎提问&lt;/Text&gt;&#10;        &lt;Text style={{ fontSize: 15, color: '#8B97A8' }}&gt;论文：SIGGRAPH 2026 / arXiv:2607.14481 · 代码：github.com/graphdeco-inria/i3dgs&lt;/Text&gt;&#10;    &lt;/Box&gt;&#10;&lt;/Slide&gt;&#10;"/>
         <p:cNvGrpSpPr/>
         <p:nvPr/>
       </p:nvGrpSpPr>
@@ -9364,7 +6860,7 @@
       </p:grpSpPr>
       <p:sp>
         <p:nvSpPr>
-          <p:cNvPr id="174" name=""/>
+          <p:cNvPr id="130" name=""/>
           <p:cNvSpPr/>
           <p:nvPr/>
         </p:nvSpPr>
@@ -9388,7 +6884,7 @@
       </p:sp>
       <p:sp>
         <p:nvSpPr>
-          <p:cNvPr id="175" name=""/>
+          <p:cNvPr id="131" name=""/>
           <p:cNvSpPr/>
           <p:nvPr/>
         </p:nvSpPr>
@@ -9412,7 +6908,7 @@
       </p:sp>
       <p:sp>
         <p:nvSpPr>
-          <p:cNvPr id="176" name="" descr="{&quot;isTemplate&quot;:true,&quot;type&quot;:&quot;text&quot;}"/>
+          <p:cNvPr id="132" name="" descr="{&quot;isTemplate&quot;:true,&quot;type&quot;:&quot;text&quot;}"/>
           <p:cNvSpPr txBox="1"/>
           <p:nvPr/>
         </p:nvSpPr>
@@ -9447,7 +6943,7 @@
       </p:sp>
       <p:sp>
         <p:nvSpPr>
-          <p:cNvPr id="177" name="" descr="{&quot;isTemplate&quot;:true,&quot;type&quot;:&quot;text&quot;}"/>
+          <p:cNvPr id="133" name="" descr="{&quot;isTemplate&quot;:true,&quot;type&quot;:&quot;text&quot;}"/>
           <p:cNvSpPr txBox="1"/>
           <p:nvPr/>
         </p:nvSpPr>
@@ -9474,15 +6970,15 @@
                 <a:latin typeface="Microsoft YaHei"/>
                 <a:ea typeface="Microsoft YaHei"/>
               </a:rPr>
-              <a:t>15 / 15</a:t>
-            </a:r>
-            <a:endParaRPr/>
-          </a:p>
-        </p:txBody>
-      </p:sp>
-      <p:sp>
-        <p:nvSpPr>
-          <p:cNvPr id="178" name=""/>
+              <a:t>14 / 14</a:t>
+            </a:r>
+            <a:endParaRPr/>
+          </a:p>
+        </p:txBody>
+      </p:sp>
+      <p:sp>
+        <p:nvSpPr>
+          <p:cNvPr id="134" name=""/>
           <p:cNvSpPr/>
           <p:nvPr/>
         </p:nvSpPr>
@@ -9508,7 +7004,7 @@
       </p:sp>
       <p:sp>
         <p:nvSpPr>
-          <p:cNvPr id="179" name="" descr="{&quot;isTemplate&quot;:true,&quot;type&quot;:&quot;text&quot;}"/>
+          <p:cNvPr id="135" name="" descr="{&quot;isTemplate&quot;:true,&quot;type&quot;:&quot;text&quot;}"/>
           <p:cNvSpPr txBox="1"/>
           <p:nvPr/>
         </p:nvSpPr>
@@ -9543,7 +7039,7 @@
       </p:sp>
       <p:sp>
         <p:nvSpPr>
-          <p:cNvPr id="180" name="" descr="{&quot;isTemplate&quot;:true,&quot;type&quot;:&quot;text&quot;}"/>
+          <p:cNvPr id="136" name="" descr="{&quot;isTemplate&quot;:true,&quot;type&quot;:&quot;text&quot;}"/>
           <p:cNvSpPr txBox="1"/>
           <p:nvPr/>
         </p:nvSpPr>
@@ -9608,7 +7104,7 @@
       </p:sp>
       <p:sp>
         <p:nvSpPr>
-          <p:cNvPr id="181" name="" descr="{&quot;isTemplate&quot;:true,&quot;type&quot;:&quot;text&quot;}"/>
+          <p:cNvPr id="137" name="" descr="{&quot;isTemplate&quot;:true,&quot;type&quot;:&quot;text&quot;}"/>
           <p:cNvSpPr txBox="1"/>
           <p:nvPr/>
         </p:nvSpPr>
@@ -9683,7 +7179,7 @@
       </p:sp>
       <p:sp>
         <p:nvSpPr>
-          <p:cNvPr id="182" name=""/>
+          <p:cNvPr id="138" name=""/>
           <p:cNvSpPr/>
           <p:nvPr/>
         </p:nvSpPr>
@@ -9709,7 +7205,7 @@
       </p:sp>
       <p:sp>
         <p:nvSpPr>
-          <p:cNvPr id="183" name="" descr="{&quot;isTemplate&quot;:true,&quot;type&quot;:&quot;text&quot;}"/>
+          <p:cNvPr id="139" name="" descr="{&quot;isTemplate&quot;:true,&quot;type&quot;:&quot;text&quot;}"/>
           <p:cNvSpPr txBox="1"/>
           <p:nvPr/>
         </p:nvSpPr>
@@ -9744,7 +7240,7 @@
       </p:sp>
       <p:sp>
         <p:nvSpPr>
-          <p:cNvPr id="184" name="" descr="{&quot;isTemplate&quot;:true,&quot;type&quot;:&quot;text&quot;}"/>
+          <p:cNvPr id="140" name="" descr="{&quot;isTemplate&quot;:true,&quot;type&quot;:&quot;text&quot;}"/>
           <p:cNvSpPr txBox="1"/>
           <p:nvPr/>
         </p:nvSpPr>
@@ -9849,7 +7345,7 @@
       </p:sp>
       <p:sp>
         <p:nvSpPr>
-          <p:cNvPr id="185" name="" descr="{&quot;isTemplate&quot;:true,&quot;type&quot;:&quot;text&quot;}"/>
+          <p:cNvPr id="141" name="" descr="{&quot;isTemplate&quot;:true,&quot;type&quot;:&quot;text&quot;}"/>
           <p:cNvSpPr txBox="1"/>
           <p:nvPr/>
         </p:nvSpPr>
@@ -9904,7 +7400,7 @@
       </p:sp>
       <p:sp>
         <p:nvSpPr>
-          <p:cNvPr id="186" name=""/>
+          <p:cNvPr id="142" name=""/>
           <p:cNvSpPr/>
           <p:nvPr/>
         </p:nvSpPr>
@@ -9930,7 +7426,7 @@
       </p:sp>
       <p:sp>
         <p:nvSpPr>
-          <p:cNvPr id="187" name="" descr="{&quot;isTemplate&quot;:true,&quot;type&quot;:&quot;text&quot;}"/>
+          <p:cNvPr id="143" name="" descr="{&quot;isTemplate&quot;:true,&quot;type&quot;:&quot;text&quot;}"/>
           <p:cNvSpPr txBox="1"/>
           <p:nvPr/>
         </p:nvSpPr>
@@ -9965,7 +7461,7 @@
       </p:sp>
       <p:sp>
         <p:nvSpPr>
-          <p:cNvPr id="188" name="" descr="{&quot;isTemplate&quot;:true,&quot;type&quot;:&quot;text&quot;}"/>
+          <p:cNvPr id="144" name="" descr="{&quot;isTemplate&quot;:true,&quot;type&quot;:&quot;text&quot;}"/>
           <p:cNvSpPr txBox="1"/>
           <p:nvPr/>
         </p:nvSpPr>
@@ -10020,7 +7516,7 @@
       </p:sp>
       <p:sp>
         <p:nvSpPr>
-          <p:cNvPr id="189" name="" descr="{&quot;isTemplate&quot;:true,&quot;type&quot;:&quot;text&quot;}"/>
+          <p:cNvPr id="145" name="" descr="{&quot;isTemplate&quot;:true,&quot;type&quot;:&quot;text&quot;}"/>
           <p:cNvSpPr txBox="1"/>
           <p:nvPr/>
         </p:nvSpPr>
@@ -10075,7 +7571,7 @@
       </p:sp>
       <p:sp>
         <p:nvSpPr>
-          <p:cNvPr id="190" name=""/>
+          <p:cNvPr id="146" name=""/>
           <p:cNvSpPr/>
           <p:nvPr/>
         </p:nvSpPr>
@@ -10101,7 +7597,7 @@
       </p:sp>
       <p:sp>
         <p:nvSpPr>
-          <p:cNvPr id="191" name="" descr="{&quot;isTemplate&quot;:true,&quot;type&quot;:&quot;text&quot;}"/>
+          <p:cNvPr id="147" name="" descr="{&quot;isTemplate&quot;:true,&quot;type&quot;:&quot;text&quot;}"/>
           <p:cNvSpPr txBox="1"/>
           <p:nvPr/>
         </p:nvSpPr>
@@ -10136,7 +7632,7 @@
       </p:sp>
       <p:sp>
         <p:nvSpPr>
-          <p:cNvPr id="192" name="" descr="{&quot;isTemplate&quot;:true,&quot;type&quot;:&quot;text&quot;}"/>
+          <p:cNvPr id="148" name="" descr="{&quot;isTemplate&quot;:true,&quot;type&quot;:&quot;text&quot;}"/>
           <p:cNvSpPr txBox="1"/>
           <p:nvPr/>
         </p:nvSpPr>
@@ -10191,7 +7687,7 @@
       </p:sp>
       <p:sp>
         <p:nvSpPr>
-          <p:cNvPr id="193" name=""/>
+          <p:cNvPr id="149" name=""/>
           <p:cNvSpPr/>
           <p:nvPr/>
         </p:nvSpPr>
@@ -10217,7 +7713,7 @@
       </p:sp>
       <p:sp>
         <p:nvSpPr>
-          <p:cNvPr id="194" name="" descr="{&quot;isTemplate&quot;:true,&quot;type&quot;:&quot;text&quot;}"/>
+          <p:cNvPr id="150" name="" descr="{&quot;isTemplate&quot;:true,&quot;type&quot;:&quot;text&quot;}"/>
           <p:cNvSpPr txBox="1"/>
           <p:nvPr/>
         </p:nvSpPr>
@@ -10252,7 +7748,7 @@
       </p:sp>
       <p:sp>
         <p:nvSpPr>
-          <p:cNvPr id="195" name="" descr="{&quot;isTemplate&quot;:true,&quot;type&quot;:&quot;text&quot;}"/>
+          <p:cNvPr id="151" name="" descr="{&quot;isTemplate&quot;:true,&quot;type&quot;:&quot;text&quot;}"/>
           <p:cNvSpPr txBox="1"/>
           <p:nvPr/>
         </p:nvSpPr>
@@ -10287,7 +7783,7 @@
       </p:sp>
       <p:sp>
         <p:nvSpPr>
-          <p:cNvPr id="196" name=""/>
+          <p:cNvPr id="152" name=""/>
           <p:cNvSpPr/>
           <p:nvPr/>
         </p:nvSpPr>
@@ -10313,7 +7809,7 @@
       </p:sp>
       <p:sp>
         <p:nvSpPr>
-          <p:cNvPr id="197" name="" descr="{&quot;isTemplate&quot;:true,&quot;type&quot;:&quot;text&quot;}"/>
+          <p:cNvPr id="153" name="" descr="{&quot;isTemplate&quot;:true,&quot;type&quot;:&quot;text&quot;}"/>
           <p:cNvSpPr txBox="1"/>
           <p:nvPr/>
         </p:nvSpPr>
@@ -10348,7 +7844,7 @@
       </p:sp>
       <p:sp>
         <p:nvSpPr>
-          <p:cNvPr id="198" name="" descr="{&quot;isTemplate&quot;:true,&quot;type&quot;:&quot;text&quot;}"/>
+          <p:cNvPr id="154" name="" descr="{&quot;isTemplate&quot;:true,&quot;type&quot;:&quot;text&quot;}"/>
           <p:cNvSpPr txBox="1"/>
           <p:nvPr/>
         </p:nvSpPr>
@@ -10383,7 +7879,7 @@
       </p:sp>
       <p:sp>
         <p:nvSpPr>
-          <p:cNvPr id="199" name=""/>
+          <p:cNvPr id="155" name=""/>
           <p:cNvSpPr/>
           <p:nvPr/>
         </p:nvSpPr>
@@ -10409,7 +7905,7 @@
       </p:sp>
       <p:sp>
         <p:nvSpPr>
-          <p:cNvPr id="200" name="" descr="{&quot;isTemplate&quot;:true,&quot;type&quot;:&quot;text&quot;}"/>
+          <p:cNvPr id="156" name="" descr="{&quot;isTemplate&quot;:true,&quot;type&quot;:&quot;text&quot;}"/>
           <p:cNvSpPr txBox="1"/>
           <p:nvPr/>
         </p:nvSpPr>
@@ -10544,7 +8040,7 @@
       </p:sp>
       <p:sp>
         <p:nvSpPr>
-          <p:cNvPr id="201" name="" descr="{&quot;isTemplate&quot;:true,&quot;type&quot;:&quot;text&quot;}"/>
+          <p:cNvPr id="157" name="" descr="{&quot;isTemplate&quot;:true,&quot;type&quot;:&quot;text&quot;}"/>
           <p:cNvSpPr txBox="1"/>
           <p:nvPr/>
         </p:nvSpPr>
@@ -10579,7 +8075,7 @@
       </p:sp>
       <p:sp>
         <p:nvSpPr>
-          <p:cNvPr id="202" name="" descr="{&quot;isTemplate&quot;:true,&quot;type&quot;:&quot;text&quot;}"/>
+          <p:cNvPr id="158" name="" descr="{&quot;isTemplate&quot;:true,&quot;type&quot;:&quot;text&quot;}"/>
           <p:cNvSpPr txBox="1"/>
           <p:nvPr/>
         </p:nvSpPr>
@@ -10652,7 +8148,7 @@
   <p:cSld>
     <p:spTree>
       <p:nvGrpSpPr>
-        <p:cNvPr id="203" name="" descr="&lt;Slide style={{ width: '1280px', height: '720px', backgroundColor: '#FFFFFF', padding: '0px', flexDirection: 'column' }}&gt;&#10;    &lt;Box style={{ width: '1280px', height: '8px', backgroundColor: '#1E4FA8' }} /&gt;&#10;    &lt;Box style={{ padding: '34px 40px 0px 40px', flexDirection: 'row', justifyContent: 'space-between', alignItems: 'flex-end' }}&gt;&#10;        &lt;Text style={{ fontSize: 34, fontWeight: 'bold', color: '#1E4FA8' }}&gt;摘要&lt;/Text&gt;&#10;        &lt;Text style={{ fontSize: 15, color: '#8B97A8' }}&gt;02 / 15&lt;/Text&gt;&#10;    &lt;/Box&gt;&#10;    &lt;Box style={{ padding: '20px 40px 0px 40px', flexDirection: 'column', gap: 13 }}&gt;&#10;        &lt;Box style={{ backgroundColor: '#F0F5FC', borderLeft: '5px solid #1E4FA8', padding: '14px 20px', flexDirection: 'column' }}&gt;&#10;            &lt;Text style={{ fontSize: 22, fontWeight: 'bold', color: '#1E4FA8' }}&gt;问题&lt;/Text&gt;&#10;            &lt;Text style={{ fontSize: 22, color: '#1A2230', lineHeight: 1.5, marginTop: 6 }}&gt;3DGS 重建质量高、可实时渲染，但训练前必须由 SfM（COLMAP）离线解算相机位姿；SfM 要等&lt;b&gt;全部图像到齐&lt;/b&gt;，且对&lt;b&gt;乱序采集&lt;/b&gt;敏感。&lt;/Text&gt;&#10;        &lt;/Box&gt;&#10;        &lt;Box style={{ backgroundColor: '#F7F9FC', borderLeft: '5px solid #4A5568', padding: '14px 20px', flexDirection: 'column' }}&gt;&#10;            &lt;Text style={{ fontSize: 22, fontWeight: 'bold', color: '#4A5568' }}&gt;现状缺口&lt;/Text&gt;&#10;            &lt;Text style={{ fontSize: 22, color: '#1A2230', lineHeight: 1.5, marginTop: 6 }}&gt;离线 SfM + 3DGS 质量好、但慢且无现场反馈；SLAM 类增量重建能实时，却&lt;b&gt;假设图像有序&lt;/b&gt;——两者之间没人补齐。&lt;/Text&gt;&#10;        &lt;/Box&gt;&#10;        &lt;Box style={{ backgroundColor: '#F0F5FC', borderLeft: '5px solid #1E4FA8', padding: '14px 20px', flexDirection: 'column' }}&gt;&#10;            &lt;Text style={{ fontSize: 22, fontWeight: 'bold', color: '#1E4FA8' }}&gt;本文做法&lt;/Text&gt;&#10;            &lt;Text style={{ fontSize: 22, color: '#1A2230', lineHeight: 1.5, marginTop: 6 }}&gt;首个面向无序输入、具备全局一致性的即时反馈 3DGS 重建：两级快速匹配 + GPU 局部 BA + 簇级回环图传播 + 渐进式高斯层级。&lt;/Text&gt;&#10;        &lt;/Box&gt;&#10;        &lt;Box style={{ backgroundColor: '#F7F9FC', borderLeft: '5px solid #3D7BD9', padding: '14px 20px', flexDirection: 'column' }}&gt;&#10;            &lt;Text style={{ fontSize: 22, fontWeight: 'bold', color: '#3D7BD9' }}&gt;结果与复现&lt;/Text&gt;&#10;            &lt;Text style={{ fontSize: 22, color: '#1A2230', lineHeight: 1.5, marginTop: 6 }}&gt;MipNeRF360 上 &lt;b&gt;1 分 17 秒&lt;/b&gt;达到 &lt;b&gt;26.29 dB&lt;/b&gt;（离线参考 8 分 50 秒 / 27.52 dB）；输入打乱仅降 &lt;b&gt;0.5 dB&lt;/b&gt;。我们完成了端到端复现：&lt;b&gt;25.95 dB / 62.7 秒 / 185 帧&lt;/b&gt;。&lt;/Text&gt;&#10;        &lt;/Box&gt;&#10;    &lt;/Box&gt;&#10;    &lt;Box style={{ padding: '16px 40px 0px 40px' }}&gt;&#10;        &lt;Text style={{ fontSize: 16, color: '#4A5568' }}&gt;关键词：三维高斯泼溅 · 无序采集 · 即时重建 · 协视图 · 回环闭合 · 渐进式层级&lt;/Text&gt;&#10;    &lt;/Box&gt;&#10;&lt;/Slide&gt;&#10;"/>
+        <p:cNvPr id="159" name="" descr="&lt;Slide style={{ width: '1280px', height: '720px', backgroundColor: '#FFFFFF', padding: '0px', flexDirection: 'column' }}&gt;&#10;    &lt;Box style={{ width: '1280px', height: '8px', backgroundColor: '#1E4FA8' }} /&gt;&#10;    &lt;Box style={{ padding: '34px 40px 0px 40px', flexDirection: 'row', justifyContent: 'space-between', alignItems: 'flex-end' }}&gt;&#10;        &lt;Text style={{ fontSize: 34, fontWeight: 'bold', color: '#1E4FA8' }}&gt;摘要&lt;/Text&gt;&#10;        &lt;Text style={{ fontSize: 15, color: '#8B97A8' }}&gt;02 / 14&lt;/Text&gt;&#10;    &lt;/Box&gt;&#10;    &lt;Box style={{ padding: '20px 40px 0px 40px', flexDirection: 'column', gap: 13 }}&gt;&#10;        &lt;Box style={{ backgroundColor: '#F0F5FC', borderLeft: '5px solid #1E4FA8', padding: '14px 20px', flexDirection: 'column' }}&gt;&#10;            &lt;Text style={{ fontSize: 22, fontWeight: 'bold', color: '#1E4FA8' }}&gt;问题&lt;/Text&gt;&#10;            &lt;Text style={{ fontSize: 22, color: '#1A2230', lineHeight: 1.5, marginTop: 6 }}&gt;3DGS 重建质量高、可实时渲染，但训练前必须由 SfM（COLMAP）离线解算相机位姿；SfM 要等&lt;b&gt;全部图像到齐&lt;/b&gt;，且对&lt;b&gt;乱序采集&lt;/b&gt;敏感。&lt;/Text&gt;&#10;        &lt;/Box&gt;&#10;        &lt;Box style={{ backgroundColor: '#F7F9FC', borderLeft: '5px solid #4A5568', padding: '14px 20px', flexDirection: 'column' }}&gt;&#10;            &lt;Text style={{ fontSize: 22, fontWeight: 'bold', color: '#4A5568' }}&gt;现状缺口&lt;/Text&gt;&#10;            &lt;Text style={{ fontSize: 22, color: '#1A2230', lineHeight: 1.5, marginTop: 6 }}&gt;离线 SfM + 3DGS 质量好、但慢且无现场反馈；SLAM 类增量重建能实时，却&lt;b&gt;假设图像有序&lt;/b&gt;——两者之间没人补齐。&lt;/Text&gt;&#10;        &lt;/Box&gt;&#10;        &lt;Box style={{ backgroundColor: '#F0F5FC', borderLeft: '5px solid #1E4FA8', padding: '14px 20px', flexDirection: 'column' }}&gt;&#10;            &lt;Text style={{ fontSize: 22, fontWeight: 'bold', color: '#1E4FA8' }}&gt;本文做法&lt;/Text&gt;&#10;            &lt;Text style={{ fontSize: 22, color: '#1A2230', lineHeight: 1.5, marginTop: 6 }}&gt;首个面向无序输入、具备全局一致性的即时反馈 3DGS 重建：两级快速匹配 + GPU 局部 BA + 簇级回环图传播 + 渐进式高斯层级。&lt;/Text&gt;&#10;        &lt;/Box&gt;&#10;        &lt;Box style={{ backgroundColor: '#F7F9FC', borderLeft: '5px solid #3D7BD9', padding: '14px 20px', flexDirection: 'column' }}&gt;&#10;            &lt;Text style={{ fontSize: 22, fontWeight: 'bold', color: '#3D7BD9' }}&gt;结果与复现&lt;/Text&gt;&#10;            &lt;Text style={{ fontSize: 22, color: '#1A2230', lineHeight: 1.5, marginTop: 6 }}&gt;MipNeRF360 上 &lt;b&gt;1 分 17 秒&lt;/b&gt;达到 &lt;b&gt;26.29 dB&lt;/b&gt;（离线参考 8 分 50 秒 / 27.52 dB）；输入打乱仅降 &lt;b&gt;0.5 dB&lt;/b&gt;。我们完成了端到端复现：&lt;b&gt;25.95 dB / 62.7 秒 / 185 帧&lt;/b&gt;。&lt;/Text&gt;&#10;        &lt;/Box&gt;&#10;    &lt;/Box&gt;&#10;    &lt;Box style={{ padding: '16px 40px 0px 40px' }}&gt;&#10;        &lt;Text style={{ fontSize: 16, color: '#4A5568' }}&gt;关键词：三维高斯泼溅 · 无序采集 · 即时重建 · 协视图 · 回环闭合 · 渐进式层级&lt;/Text&gt;&#10;    &lt;/Box&gt;&#10;&lt;/Slide&gt;&#10;"/>
         <p:cNvGrpSpPr/>
         <p:nvPr/>
       </p:nvGrpSpPr>
@@ -10666,7 +8162,7 @@
       </p:grpSpPr>
       <p:sp>
         <p:nvSpPr>
-          <p:cNvPr id="204" name=""/>
+          <p:cNvPr id="160" name=""/>
           <p:cNvSpPr/>
           <p:nvPr/>
         </p:nvSpPr>
@@ -10690,7 +8186,7 @@
       </p:sp>
       <p:sp>
         <p:nvSpPr>
-          <p:cNvPr id="205" name=""/>
+          <p:cNvPr id="161" name=""/>
           <p:cNvSpPr/>
           <p:nvPr/>
         </p:nvSpPr>
@@ -10714,7 +8210,7 @@
       </p:sp>
       <p:sp>
         <p:nvSpPr>
-          <p:cNvPr id="206" name="" descr="{&quot;isTemplate&quot;:true,&quot;type&quot;:&quot;text&quot;}"/>
+          <p:cNvPr id="162" name="" descr="{&quot;isTemplate&quot;:true,&quot;type&quot;:&quot;text&quot;}"/>
           <p:cNvSpPr txBox="1"/>
           <p:nvPr/>
         </p:nvSpPr>
@@ -10749,7 +8245,7 @@
       </p:sp>
       <p:sp>
         <p:nvSpPr>
-          <p:cNvPr id="207" name="" descr="{&quot;isTemplate&quot;:true,&quot;type&quot;:&quot;text&quot;}"/>
+          <p:cNvPr id="163" name="" descr="{&quot;isTemplate&quot;:true,&quot;type&quot;:&quot;text&quot;}"/>
           <p:cNvSpPr txBox="1"/>
           <p:nvPr/>
         </p:nvSpPr>
@@ -10776,15 +8272,15 @@
                 <a:latin typeface="Microsoft YaHei"/>
                 <a:ea typeface="Microsoft YaHei"/>
               </a:rPr>
-              <a:t>02 / 15</a:t>
-            </a:r>
-            <a:endParaRPr/>
-          </a:p>
-        </p:txBody>
-      </p:sp>
-      <p:sp>
-        <p:nvSpPr>
-          <p:cNvPr id="208" name=""/>
+              <a:t>02 / 14</a:t>
+            </a:r>
+            <a:endParaRPr/>
+          </a:p>
+        </p:txBody>
+      </p:sp>
+      <p:sp>
+        <p:nvSpPr>
+          <p:cNvPr id="164" name=""/>
           <p:cNvSpPr/>
           <p:nvPr/>
         </p:nvSpPr>
@@ -10808,7 +8304,7 @@
       </p:sp>
       <p:sp>
         <p:nvSpPr>
-          <p:cNvPr id="209" name=""/>
+          <p:cNvPr id="165" name=""/>
           <p:cNvSpPr/>
           <p:nvPr/>
         </p:nvSpPr>
@@ -10848,7 +8344,7 @@
       </p:sp>
       <p:sp>
         <p:nvSpPr>
-          <p:cNvPr id="210" name="" descr="{&quot;isTemplate&quot;:true,&quot;type&quot;:&quot;text&quot;}"/>
+          <p:cNvPr id="166" name="" descr="{&quot;isTemplate&quot;:true,&quot;type&quot;:&quot;text&quot;}"/>
           <p:cNvSpPr txBox="1"/>
           <p:nvPr/>
         </p:nvSpPr>
@@ -10883,7 +8379,7 @@
       </p:sp>
       <p:sp>
         <p:nvSpPr>
-          <p:cNvPr id="211" name="" descr="{&quot;isTemplate&quot;:true,&quot;type&quot;:&quot;text&quot;}"/>
+          <p:cNvPr id="167" name="" descr="{&quot;isTemplate&quot;:true,&quot;type&quot;:&quot;text&quot;}"/>
           <p:cNvSpPr txBox="1"/>
           <p:nvPr/>
         </p:nvSpPr>
@@ -11030,7 +8526,7 @@
       </p:sp>
       <p:sp>
         <p:nvSpPr>
-          <p:cNvPr id="212" name=""/>
+          <p:cNvPr id="168" name=""/>
           <p:cNvSpPr/>
           <p:nvPr/>
         </p:nvSpPr>
@@ -11054,7 +8550,7 @@
       </p:sp>
       <p:sp>
         <p:nvSpPr>
-          <p:cNvPr id="213" name=""/>
+          <p:cNvPr id="169" name=""/>
           <p:cNvSpPr/>
           <p:nvPr/>
         </p:nvSpPr>
@@ -11094,7 +8590,7 @@
       </p:sp>
       <p:sp>
         <p:nvSpPr>
-          <p:cNvPr id="214" name="" descr="{&quot;isTemplate&quot;:true,&quot;type&quot;:&quot;text&quot;}"/>
+          <p:cNvPr id="170" name="" descr="{&quot;isTemplate&quot;:true,&quot;type&quot;:&quot;text&quot;}"/>
           <p:cNvSpPr txBox="1"/>
           <p:nvPr/>
         </p:nvSpPr>
@@ -11129,7 +8625,7 @@
       </p:sp>
       <p:sp>
         <p:nvSpPr>
-          <p:cNvPr id="215" name="" descr="{&quot;isTemplate&quot;:true,&quot;type&quot;:&quot;text&quot;}"/>
+          <p:cNvPr id="171" name="" descr="{&quot;isTemplate&quot;:true,&quot;type&quot;:&quot;text&quot;}"/>
           <p:cNvSpPr txBox="1"/>
           <p:nvPr/>
         </p:nvSpPr>
@@ -11224,7 +8720,7 @@
       </p:sp>
       <p:sp>
         <p:nvSpPr>
-          <p:cNvPr id="216" name=""/>
+          <p:cNvPr id="172" name=""/>
           <p:cNvSpPr/>
           <p:nvPr/>
         </p:nvSpPr>
@@ -11248,7 +8744,7 @@
       </p:sp>
       <p:sp>
         <p:nvSpPr>
-          <p:cNvPr id="217" name=""/>
+          <p:cNvPr id="173" name=""/>
           <p:cNvSpPr/>
           <p:nvPr/>
         </p:nvSpPr>
@@ -11288,7 +8784,7 @@
       </p:sp>
       <p:sp>
         <p:nvSpPr>
-          <p:cNvPr id="218" name="" descr="{&quot;isTemplate&quot;:true,&quot;type&quot;:&quot;text&quot;}"/>
+          <p:cNvPr id="174" name="" descr="{&quot;isTemplate&quot;:true,&quot;type&quot;:&quot;text&quot;}"/>
           <p:cNvSpPr txBox="1"/>
           <p:nvPr/>
         </p:nvSpPr>
@@ -11323,7 +8819,7 @@
       </p:sp>
       <p:sp>
         <p:nvSpPr>
-          <p:cNvPr id="219" name="" descr="{&quot;isTemplate&quot;:true,&quot;type&quot;:&quot;text&quot;}"/>
+          <p:cNvPr id="175" name="" descr="{&quot;isTemplate&quot;:true,&quot;type&quot;:&quot;text&quot;}"/>
           <p:cNvSpPr txBox="1"/>
           <p:nvPr/>
         </p:nvSpPr>
@@ -11440,7 +8936,7 @@
       </p:sp>
       <p:sp>
         <p:nvSpPr>
-          <p:cNvPr id="220" name=""/>
+          <p:cNvPr id="176" name=""/>
           <p:cNvSpPr/>
           <p:nvPr/>
         </p:nvSpPr>
@@ -11464,7 +8960,7 @@
       </p:sp>
       <p:sp>
         <p:nvSpPr>
-          <p:cNvPr id="221" name=""/>
+          <p:cNvPr id="177" name=""/>
           <p:cNvSpPr/>
           <p:nvPr/>
         </p:nvSpPr>
@@ -11504,7 +9000,7 @@
       </p:sp>
       <p:sp>
         <p:nvSpPr>
-          <p:cNvPr id="222" name="" descr="{&quot;isTemplate&quot;:true,&quot;type&quot;:&quot;text&quot;}"/>
+          <p:cNvPr id="178" name="" descr="{&quot;isTemplate&quot;:true,&quot;type&quot;:&quot;text&quot;}"/>
           <p:cNvSpPr txBox="1"/>
           <p:nvPr/>
         </p:nvSpPr>
@@ -11539,7 +9035,7 @@
       </p:sp>
       <p:sp>
         <p:nvSpPr>
-          <p:cNvPr id="223" name="" descr="{&quot;isTemplate&quot;:true,&quot;type&quot;:&quot;text&quot;}"/>
+          <p:cNvPr id="179" name="" descr="{&quot;isTemplate&quot;:true,&quot;type&quot;:&quot;text&quot;}"/>
           <p:cNvSpPr txBox="1"/>
           <p:nvPr/>
         </p:nvSpPr>
@@ -11816,7 +9312,7 @@
       </p:sp>
       <p:sp>
         <p:nvSpPr>
-          <p:cNvPr id="224" name="" descr="{&quot;isTemplate&quot;:true,&quot;type&quot;:&quot;text&quot;}"/>
+          <p:cNvPr id="180" name="" descr="{&quot;isTemplate&quot;:true,&quot;type&quot;:&quot;text&quot;}"/>
           <p:cNvSpPr txBox="1"/>
           <p:nvPr/>
         </p:nvSpPr>
@@ -11959,7 +9455,7 @@
   <p:cSld>
     <p:spTree>
       <p:nvGrpSpPr>
-        <p:cNvPr id="225" name="" descr="&lt;Slide style={{ width: '1280px', height: '720px', backgroundColor: '#FFFFFF', padding: '0px', flexDirection: 'column' }}&gt;&#10;    &lt;Box style={{ width: '1280px', height: '8px', backgroundColor: '#1E4FA8' }} /&gt;&#10;    &lt;Box style={{ padding: '34px 40px 0px 40px', flexDirection: 'row', justifyContent: 'space-between', alignItems: 'flex-end' }}&gt;&#10;        &lt;Text style={{ fontSize: 34, fontWeight: 'bold', color: '#1E4FA8' }}&gt;主要贡献点&lt;/Text&gt;&#10;        &lt;Text style={{ fontSize: 15, color: '#8B97A8' }}&gt;03 / 15&lt;/Text&gt;&#10;    &lt;/Box&gt;&#10;    &lt;Box style={{ padding: '22px 40px 0px 40px', flexDirection: 'row', gap: 20 }}&gt;&#10;        &lt;Box style={{ flex: 1, backgroundColor: '#F7F9FC', border: '1px solid #D6DCE5', borderRadius: 6, padding: '18px 20px', flexDirection: 'column' }}&gt;&#10;            &lt;Box style={{ flexDirection: 'row', alignItems: 'center', gap: 10 }}&gt;&#10;                &lt;Box style={{ width: '34px', height: '34px', backgroundColor: '#1E4FA8', borderRadius: 4, alignItems: 'center', justifyContent: 'center' }}&gt;&#10;                    &lt;Text style={{ fontSize: 20, fontWeight: 'bold', color: '#FFFFFF' }}&gt;1&lt;/Text&gt;&#10;                &lt;/Box&gt;&#10;                &lt;Text style={{ fontSize: 24, fontWeight: 'bold', color: '#1A2230' }}&gt;无序序列快速匹配&lt;/Text&gt;&#10;            &lt;/Box&gt;&#10;            &lt;Text style={{ fontSize: 22, color: '#1A2230', lineHeight: 1.55, marginTop: 12 }}&gt;视觉位置识别 → XFeat 粗筛 → LightGlue 精验，三级把匹配代价从 O(n²) 降到常数级。&lt;/Text&gt;&#10;            &lt;Text style={{ fontSize: 20, color: '#1E4FA8', fontWeight: 'bold', marginTop: 14 }}&gt;配加权协视图 + 高连通关键帧贪心选取&lt;/Text&gt;&#10;        &lt;/Box&gt;&#10;        &lt;Box style={{ flex: 1, backgroundColor: '#F7F9FC', border: '1px solid #D6DCE5', borderRadius: 6, padding: '18px 20px', flexDirection: 'column' }}&gt;&#10;            &lt;Box style={{ flexDirection: 'row', alignItems: 'center', gap: 10 }}&gt;&#10;                &lt;Box style={{ width: '34px', height: '34px', backgroundColor: '#1E4FA8', borderRadius: 4, alignItems: 'center', justifyContent: 'center' }}&gt;&#10;                    &lt;Text style={{ fontSize: 20, fontWeight: 'bold', color: '#FFFFFF' }}&gt;2&lt;/Text&gt;&#10;                &lt;/Box&gt;&#10;                &lt;Text style={{ fontSize: 24, fontWeight: 'bold', color: '#1A2230' }}&gt;GPU 局部重建&lt;/Text&gt;&#10;            &lt;/Box&gt;&#10;            &lt;Text style={{ fontSize: 22, color: '#1A2230', lineHeight: 1.55, marginTop: 12 }}&gt;自写 BA 核函数（稠密 Schur 补），20 关键帧 / 1 万路标点下比现有优化器快约 5 倍。&lt;/Text&gt;&#10;            &lt;Text style={{ fontSize: 20, color: '#1E4FA8', fontWeight: 'bold', marginTop: 14 }}&gt;分块深度对齐，让高斯贴住真实表面&lt;/Text&gt;&#10;        &lt;/Box&gt;&#10;    &lt;/Box&gt;&#10;    &lt;Box style={{ padding: '20px 40px 0px 40px', flexDirection: 'row', gap: 20 }}&gt;&#10;        &lt;Box style={{ flex: 1, backgroundColor: '#F7F9FC', border: '1px solid #D6DCE5', borderRadius: 6, padding: '18px 20px', flexDirection: 'column' }}&gt;&#10;            &lt;Box style={{ flexDirection: 'row', alignItems: 'center', gap: 10 }}&gt;&#10;                &lt;Box style={{ width: '34px', height: '34px', backgroundColor: '#1E4FA8', borderRadius: 4, alignItems: 'center', justifyContent: 'center' }}&gt;&#10;                    &lt;Text style={{ fontSize: 20, fontWeight: 'bold', color: '#FFFFFF' }}&gt;3&lt;/Text&gt;&#10;                &lt;/Box&gt;&#10;                &lt;Text style={{ fontSize: 24, fontWeight: 'bold', color: '#1A2230' }}&gt;簇级回环闭合&lt;/Text&gt;&#10;            &lt;/Box&gt;&#10;            &lt;Text style={{ fontSize: 22, color: '#1A2230', lineHeight: 1.55, marginTop: 12 }}&gt;用协视图&quot;跳数距离&quot;判回环；焊接窗口 BA + Dijkstra 主干路径测地插值，把 Sim(3) 修正传到全图。&lt;/Text&gt;&#10;            &lt;Text style={{ fontSize: 20, color: '#D9534F', fontWeight: 'bold', marginTop: 14 }}&gt;关键：无需第二次全局优化&lt;/Text&gt;&#10;        &lt;/Box&gt;&#10;        &lt;Box style={{ flex: 1, backgroundColor: '#F0F5FC', border: '1px solid #3D7BD9', borderRadius: 6, padding: '18px 20px', flexDirection: 'column' }}&gt;&#10;            &lt;Box style={{ flexDirection: 'row', alignItems: 'center', gap: 10 }}&gt;&#10;                &lt;Box style={{ width: '34px', height: '34px', backgroundColor: '#0E3F8C', borderRadius: 4, alignItems: 'center', justifyContent: 'center' }}&gt;&#10;                    &lt;Text style={{ fontSize: 20, fontWeight: 'bold', color: '#FFFFFF' }}&gt;4&lt;/Text&gt;&#10;                &lt;/Box&gt;&#10;                &lt;Text style={{ fontSize: 24, fontWeight: 'bold', color: '#1A2230' }}&gt;渐进式高斯层级&lt;/Text&gt;&#10;            &lt;/Box&gt;&#10;            &lt;Text style={{ fontSize: 22, color: '#1A2230', lineHeight: 1.55, marginTop: 12 }}&gt;按屏幕尺寸合并 / 回取，叶节点卸载到 CPU；4050 帧大场景显存仍控制在 12.8 GB 内。&lt;/Text&gt;&#10;            &lt;Text style={{ fontSize: 20, color: '#1E4FA8', fontWeight: 'bold', marginTop: 14 }}&gt;峰值高斯 &amp;lt; 370 万，层级达 8 层&lt;/Text&gt;&#10;        &lt;/Box&gt;&#10;    &lt;/Box&gt;&#10;&lt;/Slide&gt;&#10;"/>
+        <p:cNvPr id="181" name="" descr="&lt;Slide style={{ width: '1280px', height: '720px', backgroundColor: '#FFFFFF', padding: '0px', flexDirection: 'column' }}&gt;&#10;    &lt;Box style={{ width: '1280px', height: '8px', backgroundColor: '#1E4FA8' }} /&gt;&#10;    &lt;Box style={{ padding: '34px 40px 0px 40px', flexDirection: 'row', justifyContent: 'space-between', alignItems: 'flex-end' }}&gt;&#10;        &lt;Text style={{ fontSize: 34, fontWeight: 'bold', color: '#1E4FA8' }}&gt;主要贡献点&lt;/Text&gt;&#10;        &lt;Text style={{ fontSize: 15, color: '#8B97A8' }}&gt;03 / 14&lt;/Text&gt;&#10;    &lt;/Box&gt;&#10;    &lt;Box style={{ padding: '22px 40px 0px 40px', flexDirection: 'row', gap: 20 }}&gt;&#10;        &lt;Box style={{ flex: 1, backgroundColor: '#F7F9FC', border: '1px solid #D6DCE5', borderRadius: 6, padding: '18px 20px', flexDirection: 'column' }}&gt;&#10;            &lt;Box style={{ flexDirection: 'row', alignItems: 'center', gap: 10 }}&gt;&#10;                &lt;Box style={{ width: '34px', height: '34px', backgroundColor: '#1E4FA8', borderRadius: 4, alignItems: 'center', justifyContent: 'center' }}&gt;&#10;                    &lt;Text style={{ fontSize: 20, fontWeight: 'bold', color: '#FFFFFF' }}&gt;1&lt;/Text&gt;&#10;                &lt;/Box&gt;&#10;                &lt;Text style={{ fontSize: 24, fontWeight: 'bold', color: '#1A2230' }}&gt;无序序列快速匹配&lt;/Text&gt;&#10;            &lt;/Box&gt;&#10;            &lt;Text style={{ fontSize: 22, color: '#1A2230', lineHeight: 1.55, marginTop: 12 }}&gt;视觉位置识别 → XFeat 粗筛 → LightGlue 精验，三级把匹配代价从 O(n²) 降到常数级。&lt;/Text&gt;&#10;            &lt;Text style={{ fontSize: 20, color: '#1E4FA8', fontWeight: 'bold', marginTop: 14 }}&gt;配加权协视图 + 高连通关键帧贪心选取&lt;/Text&gt;&#10;        &lt;/Box&gt;&#10;        &lt;Box style={{ flex: 1, backgroundColor: '#F7F9FC', border: '1px solid #D6DCE5', borderRadius: 6, padding: '18px 20px', flexDirection: 'column' }}&gt;&#10;            &lt;Box style={{ flexDirection: 'row', alignItems: 'center', gap: 10 }}&gt;&#10;                &lt;Box style={{ width: '34px', height: '34px', backgroundColor: '#1E4FA8', borderRadius: 4, alignItems: 'center', justifyContent: 'center' }}&gt;&#10;                    &lt;Text style={{ fontSize: 20, fontWeight: 'bold', color: '#FFFFFF' }}&gt;2&lt;/Text&gt;&#10;                &lt;/Box&gt;&#10;                &lt;Text style={{ fontSize: 24, fontWeight: 'bold', color: '#1A2230' }}&gt;GPU 局部重建&lt;/Text&gt;&#10;            &lt;/Box&gt;&#10;            &lt;Text style={{ fontSize: 22, color: '#1A2230', lineHeight: 1.55, marginTop: 12 }}&gt;自写 BA 核函数（稠密 Schur 补），20 关键帧 / 1 万路标点下比现有优化器快约 5 倍。&lt;/Text&gt;&#10;            &lt;Text style={{ fontSize: 20, color: '#1E4FA8', fontWeight: 'bold', marginTop: 14 }}&gt;分块深度对齐，让高斯贴住真实表面&lt;/Text&gt;&#10;        &lt;/Box&gt;&#10;    &lt;/Box&gt;&#10;    &lt;Box style={{ padding: '20px 40px 0px 40px', flexDirection: 'row', gap: 20 }}&gt;&#10;        &lt;Box style={{ flex: 1, backgroundColor: '#F7F9FC', border: '1px solid #D6DCE5', borderRadius: 6, padding: '18px 20px', flexDirection: 'column' }}&gt;&#10;            &lt;Box style={{ flexDirection: 'row', alignItems: 'center', gap: 10 }}&gt;&#10;                &lt;Box style={{ width: '34px', height: '34px', backgroundColor: '#1E4FA8', borderRadius: 4, alignItems: 'center', justifyContent: 'center' }}&gt;&#10;                    &lt;Text style={{ fontSize: 20, fontWeight: 'bold', color: '#FFFFFF' }}&gt;3&lt;/Text&gt;&#10;                &lt;/Box&gt;&#10;                &lt;Text style={{ fontSize: 24, fontWeight: 'bold', color: '#1A2230' }}&gt;簇级回环闭合&lt;/Text&gt;&#10;            &lt;/Box&gt;&#10;            &lt;Text style={{ fontSize: 22, color: '#1A2230', lineHeight: 1.55, marginTop: 12 }}&gt;用协视图&quot;跳数距离&quot;判回环；焊接窗口 BA + Dijkstra 主干路径测地插值，把 Sim(3) 修正传到全图。&lt;/Text&gt;&#10;            &lt;Text style={{ fontSize: 20, color: '#D9534F', fontWeight: 'bold', marginTop: 14 }}&gt;关键：无需第二次全局优化&lt;/Text&gt;&#10;        &lt;/Box&gt;&#10;        &lt;Box style={{ flex: 1, backgroundColor: '#F0F5FC', border: '1px solid #3D7BD9', borderRadius: 6, padding: '18px 20px', flexDirection: 'column' }}&gt;&#10;            &lt;Box style={{ flexDirection: 'row', alignItems: 'center', gap: 10 }}&gt;&#10;                &lt;Box style={{ width: '34px', height: '34px', backgroundColor: '#0E3F8C', borderRadius: 4, alignItems: 'center', justifyContent: 'center' }}&gt;&#10;                    &lt;Text style={{ fontSize: 20, fontWeight: 'bold', color: '#FFFFFF' }}&gt;4&lt;/Text&gt;&#10;                &lt;/Box&gt;&#10;                &lt;Text style={{ fontSize: 24, fontWeight: 'bold', color: '#1A2230' }}&gt;渐进式高斯层级&lt;/Text&gt;&#10;            &lt;/Box&gt;&#10;            &lt;Text style={{ fontSize: 22, color: '#1A2230', lineHeight: 1.55, marginTop: 12 }}&gt;按屏幕尺寸合并 / 回取，叶节点卸载到 CPU；4050 帧大场景显存仍控制在 12.8 GB 内。&lt;/Text&gt;&#10;            &lt;Text style={{ fontSize: 20, color: '#1E4FA8', fontWeight: 'bold', marginTop: 14 }}&gt;峰值高斯 &amp;lt; 370 万，层级达 8 层&lt;/Text&gt;&#10;        &lt;/Box&gt;&#10;    &lt;/Box&gt;&#10;&lt;/Slide&gt;&#10;"/>
         <p:cNvGrpSpPr/>
         <p:nvPr/>
       </p:nvGrpSpPr>
@@ -11973,7 +9469,7 @@
       </p:grpSpPr>
       <p:sp>
         <p:nvSpPr>
-          <p:cNvPr id="226" name=""/>
+          <p:cNvPr id="182" name=""/>
           <p:cNvSpPr/>
           <p:nvPr/>
         </p:nvSpPr>
@@ -11997,7 +9493,7 @@
       </p:sp>
       <p:sp>
         <p:nvSpPr>
-          <p:cNvPr id="227" name=""/>
+          <p:cNvPr id="183" name=""/>
           <p:cNvSpPr/>
           <p:nvPr/>
         </p:nvSpPr>
@@ -12021,7 +9517,7 @@
       </p:sp>
       <p:sp>
         <p:nvSpPr>
-          <p:cNvPr id="228" name="" descr="{&quot;isTemplate&quot;:true,&quot;type&quot;:&quot;text&quot;}"/>
+          <p:cNvPr id="184" name="" descr="{&quot;isTemplate&quot;:true,&quot;type&quot;:&quot;text&quot;}"/>
           <p:cNvSpPr txBox="1"/>
           <p:nvPr/>
         </p:nvSpPr>
@@ -12056,7 +9552,7 @@
       </p:sp>
       <p:sp>
         <p:nvSpPr>
-          <p:cNvPr id="229" name="" descr="{&quot;isTemplate&quot;:true,&quot;type&quot;:&quot;text&quot;}"/>
+          <p:cNvPr id="185" name="" descr="{&quot;isTemplate&quot;:true,&quot;type&quot;:&quot;text&quot;}"/>
           <p:cNvSpPr txBox="1"/>
           <p:nvPr/>
         </p:nvSpPr>
@@ -12083,15 +9579,15 @@
                 <a:latin typeface="Microsoft YaHei"/>
                 <a:ea typeface="Microsoft YaHei"/>
               </a:rPr>
-              <a:t>03 / 15</a:t>
-            </a:r>
-            <a:endParaRPr/>
-          </a:p>
-        </p:txBody>
-      </p:sp>
-      <p:sp>
-        <p:nvSpPr>
-          <p:cNvPr id="230" name=""/>
+              <a:t>03 / 14</a:t>
+            </a:r>
+            <a:endParaRPr/>
+          </a:p>
+        </p:txBody>
+      </p:sp>
+      <p:sp>
+        <p:nvSpPr>
+          <p:cNvPr id="186" name=""/>
           <p:cNvSpPr/>
           <p:nvPr/>
         </p:nvSpPr>
@@ -12122,7 +9618,7 @@
       </p:sp>
       <p:sp>
         <p:nvSpPr>
-          <p:cNvPr id="231" name=""/>
+          <p:cNvPr id="187" name=""/>
           <p:cNvSpPr/>
           <p:nvPr/>
         </p:nvSpPr>
@@ -12148,7 +9644,7 @@
       </p:sp>
       <p:sp>
         <p:nvSpPr>
-          <p:cNvPr id="232" name="" descr="{&quot;isTemplate&quot;:true,&quot;type&quot;:&quot;text&quot;}"/>
+          <p:cNvPr id="188" name="" descr="{&quot;isTemplate&quot;:true,&quot;type&quot;:&quot;text&quot;}"/>
           <p:cNvSpPr txBox="1"/>
           <p:nvPr/>
         </p:nvSpPr>
@@ -12183,7 +9679,7 @@
       </p:sp>
       <p:sp>
         <p:nvSpPr>
-          <p:cNvPr id="233" name="" descr="{&quot;isTemplate&quot;:true,&quot;type&quot;:&quot;text&quot;}"/>
+          <p:cNvPr id="189" name="" descr="{&quot;isTemplate&quot;:true,&quot;type&quot;:&quot;text&quot;}"/>
           <p:cNvSpPr txBox="1"/>
           <p:nvPr/>
         </p:nvSpPr>
@@ -12218,7 +9714,7 @@
       </p:sp>
       <p:sp>
         <p:nvSpPr>
-          <p:cNvPr id="234" name="" descr="{&quot;isTemplate&quot;:true,&quot;type&quot;:&quot;text&quot;}"/>
+          <p:cNvPr id="190" name="" descr="{&quot;isTemplate&quot;:true,&quot;type&quot;:&quot;text&quot;}"/>
           <p:cNvSpPr txBox="1"/>
           <p:nvPr/>
         </p:nvSpPr>
@@ -12315,7 +9811,7 @@
       </p:sp>
       <p:sp>
         <p:nvSpPr>
-          <p:cNvPr id="235" name="" descr="{&quot;isTemplate&quot;:true,&quot;type&quot;:&quot;text&quot;}"/>
+          <p:cNvPr id="191" name="" descr="{&quot;isTemplate&quot;:true,&quot;type&quot;:&quot;text&quot;}"/>
           <p:cNvSpPr txBox="1"/>
           <p:nvPr/>
         </p:nvSpPr>
@@ -12370,7 +9866,7 @@
       </p:sp>
       <p:sp>
         <p:nvSpPr>
-          <p:cNvPr id="236" name=""/>
+          <p:cNvPr id="192" name=""/>
           <p:cNvSpPr/>
           <p:nvPr/>
         </p:nvSpPr>
@@ -12401,7 +9897,7 @@
       </p:sp>
       <p:sp>
         <p:nvSpPr>
-          <p:cNvPr id="237" name=""/>
+          <p:cNvPr id="193" name=""/>
           <p:cNvSpPr/>
           <p:nvPr/>
         </p:nvSpPr>
@@ -12427,7 +9923,7 @@
       </p:sp>
       <p:sp>
         <p:nvSpPr>
-          <p:cNvPr id="238" name="" descr="{&quot;isTemplate&quot;:true,&quot;type&quot;:&quot;text&quot;}"/>
+          <p:cNvPr id="194" name="" descr="{&quot;isTemplate&quot;:true,&quot;type&quot;:&quot;text&quot;}"/>
           <p:cNvSpPr txBox="1"/>
           <p:nvPr/>
         </p:nvSpPr>
@@ -12462,7 +9958,7 @@
       </p:sp>
       <p:sp>
         <p:nvSpPr>
-          <p:cNvPr id="239" name="" descr="{&quot;isTemplate&quot;:true,&quot;type&quot;:&quot;text&quot;}"/>
+          <p:cNvPr id="195" name="" descr="{&quot;isTemplate&quot;:true,&quot;type&quot;:&quot;text&quot;}"/>
           <p:cNvSpPr txBox="1"/>
           <p:nvPr/>
         </p:nvSpPr>
@@ -12507,7 +10003,7 @@
       </p:sp>
       <p:sp>
         <p:nvSpPr>
-          <p:cNvPr id="240" name="" descr="{&quot;isTemplate&quot;:true,&quot;type&quot;:&quot;text&quot;}"/>
+          <p:cNvPr id="196" name="" descr="{&quot;isTemplate&quot;:true,&quot;type&quot;:&quot;text&quot;}"/>
           <p:cNvSpPr txBox="1"/>
           <p:nvPr/>
         </p:nvSpPr>
@@ -12644,7 +10140,7 @@
       </p:sp>
       <p:sp>
         <p:nvSpPr>
-          <p:cNvPr id="241" name="" descr="{&quot;isTemplate&quot;:true,&quot;type&quot;:&quot;text&quot;}"/>
+          <p:cNvPr id="197" name="" descr="{&quot;isTemplate&quot;:true,&quot;type&quot;:&quot;text&quot;}"/>
           <p:cNvSpPr txBox="1"/>
           <p:nvPr/>
         </p:nvSpPr>
@@ -12679,7 +10175,7 @@
       </p:sp>
       <p:sp>
         <p:nvSpPr>
-          <p:cNvPr id="242" name=""/>
+          <p:cNvPr id="198" name=""/>
           <p:cNvSpPr/>
           <p:nvPr/>
         </p:nvSpPr>
@@ -12710,7 +10206,7 @@
       </p:sp>
       <p:sp>
         <p:nvSpPr>
-          <p:cNvPr id="243" name=""/>
+          <p:cNvPr id="199" name=""/>
           <p:cNvSpPr/>
           <p:nvPr/>
         </p:nvSpPr>
@@ -12736,7 +10232,7 @@
       </p:sp>
       <p:sp>
         <p:nvSpPr>
-          <p:cNvPr id="244" name="" descr="{&quot;isTemplate&quot;:true,&quot;type&quot;:&quot;text&quot;}"/>
+          <p:cNvPr id="200" name="" descr="{&quot;isTemplate&quot;:true,&quot;type&quot;:&quot;text&quot;}"/>
           <p:cNvSpPr txBox="1"/>
           <p:nvPr/>
         </p:nvSpPr>
@@ -12771,7 +10267,7 @@
       </p:sp>
       <p:sp>
         <p:nvSpPr>
-          <p:cNvPr id="245" name="" descr="{&quot;isTemplate&quot;:true,&quot;type&quot;:&quot;text&quot;}"/>
+          <p:cNvPr id="201" name="" descr="{&quot;isTemplate&quot;:true,&quot;type&quot;:&quot;text&quot;}"/>
           <p:cNvSpPr txBox="1"/>
           <p:nvPr/>
         </p:nvSpPr>
@@ -12806,7 +10302,7 @@
       </p:sp>
       <p:sp>
         <p:nvSpPr>
-          <p:cNvPr id="246" name="" descr="{&quot;isTemplate&quot;:true,&quot;type&quot;:&quot;text&quot;}"/>
+          <p:cNvPr id="202" name="" descr="{&quot;isTemplate&quot;:true,&quot;type&quot;:&quot;text&quot;}"/>
           <p:cNvSpPr txBox="1"/>
           <p:nvPr/>
         </p:nvSpPr>
@@ -12923,7 +10419,7 @@
       </p:sp>
       <p:sp>
         <p:nvSpPr>
-          <p:cNvPr id="247" name="" descr="{&quot;isTemplate&quot;:true,&quot;type&quot;:&quot;text&quot;}"/>
+          <p:cNvPr id="203" name="" descr="{&quot;isTemplate&quot;:true,&quot;type&quot;:&quot;text&quot;}"/>
           <p:cNvSpPr txBox="1"/>
           <p:nvPr/>
         </p:nvSpPr>
@@ -12958,7 +10454,7 @@
       </p:sp>
       <p:sp>
         <p:nvSpPr>
-          <p:cNvPr id="248" name=""/>
+          <p:cNvPr id="204" name=""/>
           <p:cNvSpPr/>
           <p:nvPr/>
         </p:nvSpPr>
@@ -12989,7 +10485,7 @@
       </p:sp>
       <p:sp>
         <p:nvSpPr>
-          <p:cNvPr id="249" name=""/>
+          <p:cNvPr id="205" name=""/>
           <p:cNvSpPr/>
           <p:nvPr/>
         </p:nvSpPr>
@@ -13015,7 +10511,7 @@
       </p:sp>
       <p:sp>
         <p:nvSpPr>
-          <p:cNvPr id="250" name="" descr="{&quot;isTemplate&quot;:true,&quot;type&quot;:&quot;text&quot;}"/>
+          <p:cNvPr id="206" name="" descr="{&quot;isTemplate&quot;:true,&quot;type&quot;:&quot;text&quot;}"/>
           <p:cNvSpPr txBox="1"/>
           <p:nvPr/>
         </p:nvSpPr>
@@ -13050,7 +10546,7 @@
       </p:sp>
       <p:sp>
         <p:nvSpPr>
-          <p:cNvPr id="251" name="" descr="{&quot;isTemplate&quot;:true,&quot;type&quot;:&quot;text&quot;}"/>
+          <p:cNvPr id="207" name="" descr="{&quot;isTemplate&quot;:true,&quot;type&quot;:&quot;text&quot;}"/>
           <p:cNvSpPr txBox="1"/>
           <p:nvPr/>
         </p:nvSpPr>
@@ -13085,7 +10581,7 @@
       </p:sp>
       <p:sp>
         <p:nvSpPr>
-          <p:cNvPr id="252" name="" descr="{&quot;isTemplate&quot;:true,&quot;type&quot;:&quot;text&quot;}"/>
+          <p:cNvPr id="208" name="" descr="{&quot;isTemplate&quot;:true,&quot;type&quot;:&quot;text&quot;}"/>
           <p:cNvSpPr txBox="1"/>
           <p:nvPr/>
         </p:nvSpPr>
@@ -13202,7 +10698,7 @@
       </p:sp>
       <p:sp>
         <p:nvSpPr>
-          <p:cNvPr id="253" name="" descr="{&quot;isTemplate&quot;:true,&quot;type&quot;:&quot;text&quot;}"/>
+          <p:cNvPr id="209" name="" descr="{&quot;isTemplate&quot;:true,&quot;type&quot;:&quot;text&quot;}"/>
           <p:cNvSpPr txBox="1"/>
           <p:nvPr/>
         </p:nvSpPr>
@@ -13285,7 +10781,7 @@
   <p:cSld>
     <p:spTree>
       <p:nvGrpSpPr>
-        <p:cNvPr id="254" name="" descr="&lt;Slide style={{ width: '1280px', height: '720px', backgroundColor: '#FFFFFF', padding: '0px', flexDirection: 'column' }}&gt;&#10;    &lt;Box style={{ width: '1280px', height: '8px', backgroundColor: '#1E4FA8' }} /&gt;&#10;    &lt;Box style={{ padding: '30px 40px 0px 40px', flexDirection: 'row', justifyContent: 'space-between', alignItems: 'flex-end' }}&gt;&#10;        &lt;Text style={{ fontSize: 34, fontWeight: 'bold', color: '#1E4FA8' }}&gt;研究背景：两条路线，各自卡在一个前提上&lt;/Text&gt;&#10;        &lt;Text style={{ fontSize: 15, color: '#8B97A8' }}&gt;04 / 15&lt;/Text&gt;&#10;    &lt;/Box&gt;&#10;    &lt;Box style={{ padding: '16px 40px 0px 40px' }}&gt;&#10;        &lt;Text style={{ fontSize: 21, color: '#4A5568', lineHeight: 1.5 }}&gt;拿到&quot;一组照片 → 一个可漫游的 3D 场景&quot;，过去只有两条路可走。它们的分歧不在算法细节，而在&lt;b&gt;什么时候允许开始计算&lt;/b&gt;。&lt;/Text&gt;&#10;    &lt;/Box&gt;&#10;    &lt;Box style={{ padding: '16px 40px 0px 40px', flexDirection: 'row', gap: 24 }}&gt;&#10;        &lt;Box style={{ flex: 1, backgroundColor: '#F7F9FC', border: '1px solid #D6DCE5', borderRadius: 6, padding: '16px 20px', flexDirection: 'column' }}&gt;&#10;            &lt;Text style={{ fontSize: 26, fontWeight: 'bold', color: '#1A2230' }}&gt;路线一　离线 SfM + 3DGS&lt;/Text&gt;&#10;            &lt;Text style={{ fontSize: 19, color: '#4A5568', marginTop: 6 }}&gt;COLMAP / GLOMAP + 3DGS、H3DGS、Octree-GS&lt;/Text&gt;&#10;            &lt;Text style={{ fontSize: 21, color: '#1A2230', lineHeight: 1.55, marginTop: 12 }}&gt;先把所有照片两两匹配、三角化、全局 BA 解出位姿，再训练高斯。质量最高、全局一致，但&lt;b&gt;必须等图全部到齐&lt;/b&gt;，耗时从分钟到小时。&lt;/Text&gt;&#10;            &lt;Text style={{ fontSize: 21, color: '#1E4FA8', fontWeight: 'bold', marginTop: 12 }}&gt;前提：先有完整的照片集合&lt;/Text&gt;&#10;            &lt;Text style={{ fontSize: 21, color: '#D9534F', fontWeight: 'bold', marginTop: 4 }}&gt;代价：现场给不出任何反馈&lt;/Text&gt;&#10;        &lt;/Box&gt;&#10;        &lt;Box style={{ flex: 1, backgroundColor: '#F0F5FC', border: '1px solid #3D7BD9', borderRadius: 6, padding: '16px 20px', flexDirection: 'column' }}&gt;&#10;            &lt;Text style={{ fontSize: 26, fontWeight: 'bold', color: '#1A2230' }}&gt;路线二　增量 / 类 SLAM&lt;/Text&gt;&#10;            &lt;Text style={{ fontSize: 19, color: '#4A5568', marginTop: 6 }}&gt;Photo-SLAM、MonoGS、DROID-Splat、LongSplat&lt;/Text&gt;&#10;            &lt;Text style={{ fontSize: 21, color: '#1A2230', lineHeight: 1.55, marginTop: 12 }}&gt;边收边建、可交互。但新帧只与&lt;b&gt;时间上相邻&lt;/b&gt;的少数帧匹配（通常 5 帧窗口），一旦转身回访、或把两段序列拼起来，匹配就断了。&lt;/Text&gt;&#10;            &lt;Text style={{ fontSize: 21, color: '#1E4FA8', fontWeight: 'bold', marginTop: 12 }}&gt;前提：输入必须是连续视频&lt;/Text&gt;&#10;            &lt;Text style={{ fontSize: 21, color: '#D9534F', fontWeight: 'bold', marginTop: 4 }}&gt;代价：离开时间邻域就失效&lt;/Text&gt;&#10;        &lt;/Box&gt;&#10;    &lt;/Box&gt;&#10;    &lt;Box style={{ margin: '20px 40px 0px 40px', backgroundColor: '#1E4FA8', borderRadius: 6, padding: '16px 24px' }}&gt;&#10;        &lt;Text style={{ fontSize: 24, fontWeight: 'bold', color: '#FFFFFF', lineHeight: 1.5 }}&gt;两条路的前提是同一个东西：&lt;b&gt;帧序&lt;/b&gt;。一条等它全部确定，一条假设它天然有序——而真实拍摄两样都不满足。&lt;/Text&gt;&#10;    &lt;/Box&gt;&#10;    &lt;Box style={{ padding: '12px 40px 0px 40px' }}&gt;&#10;        &lt;Text style={{ fontSize: 17, color: '#8B97A8' }}&gt;真实采集几乎总是无序的：绕行、转身、回头补拍角落，覆盖更好，但让匹配与全局优化的代价陡增。&lt;/Text&gt;&#10;    &lt;/Box&gt;&#10;&lt;/Slide&gt;&#10;"/>
+        <p:cNvPr id="210" name="" descr="&lt;Slide style={{ width: '1280px', height: '720px', backgroundColor: '#FFFFFF', padding: '0px', flexDirection: 'column' }}&gt;&#10;    &lt;Box style={{ width: '1280px', height: '8px', backgroundColor: '#1E4FA8' }} /&gt;&#10;    &lt;Box style={{ padding: '30px 40px 0px 40px', flexDirection: 'row', justifyContent: 'space-between', alignItems: 'flex-end' }}&gt;&#10;        &lt;Text style={{ fontSize: 34, fontWeight: 'bold', color: '#1E4FA8' }}&gt;研究背景：两条路线，各自卡在一个前提上&lt;/Text&gt;&#10;        &lt;Text style={{ fontSize: 15, color: '#8B97A8' }}&gt;04 / 14&lt;/Text&gt;&#10;    &lt;/Box&gt;&#10;    &lt;Box style={{ padding: '16px 40px 0px 40px' }}&gt;&#10;        &lt;Text style={{ fontSize: 21, color: '#4A5568', lineHeight: 1.5 }}&gt;拿到&quot;一组照片 → 一个可漫游的 3D 场景&quot;，过去只有两条路可走。它们的分歧不在算法细节，而在&lt;b&gt;什么时候允许开始计算&lt;/b&gt;。&lt;/Text&gt;&#10;    &lt;/Box&gt;&#10;    &lt;Box style={{ padding: '16px 40px 0px 40px', flexDirection: 'row', gap: 24 }}&gt;&#10;        &lt;Box style={{ flex: 1, backgroundColor: '#F7F9FC', border: '1px solid #D6DCE5', borderRadius: 6, padding: '16px 20px', flexDirection: 'column' }}&gt;&#10;            &lt;Text style={{ fontSize: 26, fontWeight: 'bold', color: '#1A2230' }}&gt;路线一　离线 SfM + 3DGS&lt;/Text&gt;&#10;            &lt;Text style={{ fontSize: 19, color: '#4A5568', marginTop: 6 }}&gt;COLMAP / GLOMAP + 3DGS、H3DGS、Octree-GS&lt;/Text&gt;&#10;            &lt;Text style={{ fontSize: 21, color: '#1A2230', lineHeight: 1.55, marginTop: 12 }}&gt;先把所有照片两两匹配、三角化、全局 BA 解出位姿，再训练高斯。质量最高、全局一致，但&lt;b&gt;必须等图全部到齐&lt;/b&gt;，耗时从分钟到小时。&lt;/Text&gt;&#10;            &lt;Text style={{ fontSize: 21, color: '#1E4FA8', fontWeight: 'bold', marginTop: 12 }}&gt;前提：先有完整的照片集合&lt;/Text&gt;&#10;            &lt;Text style={{ fontSize: 21, color: '#D9534F', fontWeight: 'bold', marginTop: 4 }}&gt;代价：现场给不出任何反馈&lt;/Text&gt;&#10;        &lt;/Box&gt;&#10;        &lt;Box style={{ flex: 1, backgroundColor: '#F0F5FC', border: '1px solid #3D7BD9', borderRadius: 6, padding: '16px 20px', flexDirection: 'column' }}&gt;&#10;            &lt;Text style={{ fontSize: 26, fontWeight: 'bold', color: '#1A2230' }}&gt;路线二　增量 / 类 SLAM&lt;/Text&gt;&#10;            &lt;Text style={{ fontSize: 19, color: '#4A5568', marginTop: 6 }}&gt;Photo-SLAM、MonoGS、DROID-Splat、LongSplat&lt;/Text&gt;&#10;            &lt;Text style={{ fontSize: 21, color: '#1A2230', lineHeight: 1.55, marginTop: 12 }}&gt;边收边建、可交互。但新帧只与&lt;b&gt;时间上相邻&lt;/b&gt;的少数帧匹配（通常 5 帧窗口），一旦转身回访、或把两段序列拼起来，匹配就断了。&lt;/Text&gt;&#10;            &lt;Text style={{ fontSize: 21, color: '#1E4FA8', fontWeight: 'bold', marginTop: 12 }}&gt;前提：输入必须是连续视频&lt;/Text&gt;&#10;            &lt;Text style={{ fontSize: 21, color: '#D9534F', fontWeight: 'bold', marginTop: 4 }}&gt;代价：离开时间邻域就失效&lt;/Text&gt;&#10;        &lt;/Box&gt;&#10;    &lt;/Box&gt;&#10;    &lt;Box style={{ margin: '20px 40px 0px 40px', backgroundColor: '#1E4FA8', borderRadius: 6, padding: '16px 24px' }}&gt;&#10;        &lt;Text style={{ fontSize: 24, fontWeight: 'bold', color: '#FFFFFF', lineHeight: 1.5 }}&gt;两条路的前提是同一个东西：&lt;b&gt;帧序&lt;/b&gt;。一条等它全部确定，一条假设它天然有序——而真实拍摄两样都不满足。&lt;/Text&gt;&#10;    &lt;/Box&gt;&#10;    &lt;Box style={{ padding: '12px 40px 0px 40px' }}&gt;&#10;        &lt;Text style={{ fontSize: 17, color: '#8B97A8' }}&gt;真实采集几乎总是无序的：绕行、转身、回头补拍角落，覆盖更好，但让匹配与全局优化的代价陡增。&lt;/Text&gt;&#10;    &lt;/Box&gt;&#10;&lt;/Slide&gt;&#10;"/>
         <p:cNvGrpSpPr/>
         <p:nvPr/>
       </p:nvGrpSpPr>
@@ -13299,7 +10795,7 @@
       </p:grpSpPr>
       <p:sp>
         <p:nvSpPr>
-          <p:cNvPr id="255" name=""/>
+          <p:cNvPr id="211" name=""/>
           <p:cNvSpPr/>
           <p:nvPr/>
         </p:nvSpPr>
@@ -13323,7 +10819,7 @@
       </p:sp>
       <p:sp>
         <p:nvSpPr>
-          <p:cNvPr id="256" name=""/>
+          <p:cNvPr id="212" name=""/>
           <p:cNvSpPr/>
           <p:nvPr/>
         </p:nvSpPr>
@@ -13347,7 +10843,7 @@
       </p:sp>
       <p:sp>
         <p:nvSpPr>
-          <p:cNvPr id="257" name="" descr="{&quot;isTemplate&quot;:true,&quot;type&quot;:&quot;text&quot;}"/>
+          <p:cNvPr id="213" name="" descr="{&quot;isTemplate&quot;:true,&quot;type&quot;:&quot;text&quot;}"/>
           <p:cNvSpPr txBox="1"/>
           <p:nvPr/>
         </p:nvSpPr>
@@ -13382,7 +10878,7 @@
       </p:sp>
       <p:sp>
         <p:nvSpPr>
-          <p:cNvPr id="258" name="" descr="{&quot;isTemplate&quot;:true,&quot;type&quot;:&quot;text&quot;}"/>
+          <p:cNvPr id="214" name="" descr="{&quot;isTemplate&quot;:true,&quot;type&quot;:&quot;text&quot;}"/>
           <p:cNvSpPr txBox="1"/>
           <p:nvPr/>
         </p:nvSpPr>
@@ -13409,15 +10905,15 @@
                 <a:latin typeface="Microsoft YaHei"/>
                 <a:ea typeface="Microsoft YaHei"/>
               </a:rPr>
-              <a:t>04 / 15</a:t>
-            </a:r>
-            <a:endParaRPr/>
-          </a:p>
-        </p:txBody>
-      </p:sp>
-      <p:sp>
-        <p:nvSpPr>
-          <p:cNvPr id="259" name="" descr="{&quot;isTemplate&quot;:true,&quot;type&quot;:&quot;text&quot;}"/>
+              <a:t>04 / 14</a:t>
+            </a:r>
+            <a:endParaRPr/>
+          </a:p>
+        </p:txBody>
+      </p:sp>
+      <p:sp>
+        <p:nvSpPr>
+          <p:cNvPr id="215" name="" descr="{&quot;isTemplate&quot;:true,&quot;type&quot;:&quot;text&quot;}"/>
           <p:cNvSpPr txBox="1"/>
           <p:nvPr/>
         </p:nvSpPr>
@@ -13552,7 +11048,7 @@
       </p:sp>
       <p:sp>
         <p:nvSpPr>
-          <p:cNvPr id="260" name=""/>
+          <p:cNvPr id="216" name=""/>
           <p:cNvSpPr/>
           <p:nvPr/>
         </p:nvSpPr>
@@ -13583,7 +11079,7 @@
       </p:sp>
       <p:sp>
         <p:nvSpPr>
-          <p:cNvPr id="261" name="" descr="{&quot;isTemplate&quot;:true,&quot;type&quot;:&quot;text&quot;}"/>
+          <p:cNvPr id="217" name="" descr="{&quot;isTemplate&quot;:true,&quot;type&quot;:&quot;text&quot;}"/>
           <p:cNvSpPr txBox="1"/>
           <p:nvPr/>
         </p:nvSpPr>
@@ -13628,7 +11124,7 @@
       </p:sp>
       <p:sp>
         <p:nvSpPr>
-          <p:cNvPr id="262" name="" descr="{&quot;isTemplate&quot;:true,&quot;type&quot;:&quot;text&quot;}"/>
+          <p:cNvPr id="218" name="" descr="{&quot;isTemplate&quot;:true,&quot;type&quot;:&quot;text&quot;}"/>
           <p:cNvSpPr txBox="1"/>
           <p:nvPr/>
         </p:nvSpPr>
@@ -13703,7 +11199,7 @@
       </p:sp>
       <p:sp>
         <p:nvSpPr>
-          <p:cNvPr id="263" name="" descr="{&quot;isTemplate&quot;:true,&quot;type&quot;:&quot;text&quot;}"/>
+          <p:cNvPr id="219" name="" descr="{&quot;isTemplate&quot;:true,&quot;type&quot;:&quot;text&quot;}"/>
           <p:cNvSpPr txBox="1"/>
           <p:nvPr/>
         </p:nvSpPr>
@@ -13780,7 +11276,7 @@
       </p:sp>
       <p:sp>
         <p:nvSpPr>
-          <p:cNvPr id="264" name="" descr="{&quot;isTemplate&quot;:true,&quot;type&quot;:&quot;text&quot;}"/>
+          <p:cNvPr id="220" name="" descr="{&quot;isTemplate&quot;:true,&quot;type&quot;:&quot;text&quot;}"/>
           <p:cNvSpPr txBox="1"/>
           <p:nvPr/>
         </p:nvSpPr>
@@ -13815,7 +11311,7 @@
       </p:sp>
       <p:sp>
         <p:nvSpPr>
-          <p:cNvPr id="265" name="" descr="{&quot;isTemplate&quot;:true,&quot;type&quot;:&quot;text&quot;}"/>
+          <p:cNvPr id="221" name="" descr="{&quot;isTemplate&quot;:true,&quot;type&quot;:&quot;text&quot;}"/>
           <p:cNvSpPr txBox="1"/>
           <p:nvPr/>
         </p:nvSpPr>
@@ -13850,7 +11346,7 @@
       </p:sp>
       <p:sp>
         <p:nvSpPr>
-          <p:cNvPr id="266" name=""/>
+          <p:cNvPr id="222" name=""/>
           <p:cNvSpPr/>
           <p:nvPr/>
         </p:nvSpPr>
@@ -13881,7 +11377,7 @@
       </p:sp>
       <p:sp>
         <p:nvSpPr>
-          <p:cNvPr id="267" name="" descr="{&quot;isTemplate&quot;:true,&quot;type&quot;:&quot;text&quot;}"/>
+          <p:cNvPr id="223" name="" descr="{&quot;isTemplate&quot;:true,&quot;type&quot;:&quot;text&quot;}"/>
           <p:cNvSpPr txBox="1"/>
           <p:nvPr/>
         </p:nvSpPr>
@@ -13946,7 +11442,7 @@
       </p:sp>
       <p:sp>
         <p:nvSpPr>
-          <p:cNvPr id="268" name="" descr="{&quot;isTemplate&quot;:true,&quot;type&quot;:&quot;text&quot;}"/>
+          <p:cNvPr id="224" name="" descr="{&quot;isTemplate&quot;:true,&quot;type&quot;:&quot;text&quot;}"/>
           <p:cNvSpPr txBox="1"/>
           <p:nvPr/>
         </p:nvSpPr>
@@ -14041,7 +11537,7 @@
       </p:sp>
       <p:sp>
         <p:nvSpPr>
-          <p:cNvPr id="269" name="" descr="{&quot;isTemplate&quot;:true,&quot;type&quot;:&quot;text&quot;}"/>
+          <p:cNvPr id="225" name="" descr="{&quot;isTemplate&quot;:true,&quot;type&quot;:&quot;text&quot;}"/>
           <p:cNvSpPr txBox="1"/>
           <p:nvPr/>
         </p:nvSpPr>
@@ -14118,7 +11614,7 @@
       </p:sp>
       <p:sp>
         <p:nvSpPr>
-          <p:cNvPr id="270" name="" descr="{&quot;isTemplate&quot;:true,&quot;type&quot;:&quot;text&quot;}"/>
+          <p:cNvPr id="226" name="" descr="{&quot;isTemplate&quot;:true,&quot;type&quot;:&quot;text&quot;}"/>
           <p:cNvSpPr txBox="1"/>
           <p:nvPr/>
         </p:nvSpPr>
@@ -14153,7 +11649,7 @@
       </p:sp>
       <p:sp>
         <p:nvSpPr>
-          <p:cNvPr id="271" name="" descr="{&quot;isTemplate&quot;:true,&quot;type&quot;:&quot;text&quot;}"/>
+          <p:cNvPr id="227" name="" descr="{&quot;isTemplate&quot;:true,&quot;type&quot;:&quot;text&quot;}"/>
           <p:cNvSpPr txBox="1"/>
           <p:nvPr/>
         </p:nvSpPr>
@@ -14188,7 +11684,7 @@
       </p:sp>
       <p:sp>
         <p:nvSpPr>
-          <p:cNvPr id="272" name=""/>
+          <p:cNvPr id="228" name=""/>
           <p:cNvSpPr/>
           <p:nvPr/>
         </p:nvSpPr>
@@ -14214,7 +11710,7 @@
       </p:sp>
       <p:sp>
         <p:nvSpPr>
-          <p:cNvPr id="273" name="" descr="{&quot;isTemplate&quot;:true,&quot;type&quot;:&quot;text&quot;}"/>
+          <p:cNvPr id="229" name="" descr="{&quot;isTemplate&quot;:true,&quot;type&quot;:&quot;text&quot;}"/>
           <p:cNvSpPr txBox="1"/>
           <p:nvPr/>
         </p:nvSpPr>
@@ -14271,7 +11767,7 @@
       </p:sp>
       <p:sp>
         <p:nvSpPr>
-          <p:cNvPr id="274" name="" descr="{&quot;isTemplate&quot;:true,&quot;type&quot;:&quot;text&quot;}"/>
+          <p:cNvPr id="230" name="" descr="{&quot;isTemplate&quot;:true,&quot;type&quot;:&quot;text&quot;}"/>
           <p:cNvSpPr txBox="1"/>
           <p:nvPr/>
         </p:nvSpPr>
@@ -14314,7 +11810,7 @@
   <p:cSld>
     <p:spTree>
       <p:nvGrpSpPr>
-        <p:cNvPr id="275" name="" descr="&lt;Slide style={{ width: '1280px', height: '720px', backgroundColor: '#FFFFFF', padding: '0px', flexDirection: 'column' }}&gt;&#10;    &lt;Box style={{ width: '1280px', height: '8px', backgroundColor: '#1E4FA8' }} /&gt;&#10;    &lt;Box style={{ padding: '30px 40px 0px 40px', flexDirection: 'row', justifyContent: 'space-between', alignItems: 'flex-end' }}&gt;&#10;        &lt;Text style={{ fontSize: 34, fontWeight: 'bold', color: '#1E4FA8' }}&gt;过去遇到的问题：等、乱、漂、爆&lt;/Text&gt;&#10;        &lt;Text style={{ fontSize: 15, color: '#8B97A8' }}&gt;05 / 15&lt;/Text&gt;&#10;    &lt;/Box&gt;&#10;    &lt;Box style={{ padding: '16px 40px 0px 40px' }}&gt;&#10;        &lt;Text style={{ fontSize: 21, color: '#4A5568', lineHeight: 1.5 }}&gt;如果拿手机去拍一个房间，这四件事几乎一定会遇到——它们不是算法&quot;不够准&quot;，而是&lt;b&gt;流程本身没有为现场反馈设计&lt;/b&gt;。&lt;/Text&gt;&#10;    &lt;/Box&gt;&#10;    &lt;Box style={{ padding: '16px 40px 0px 40px', flexDirection: 'row', gap: 20 }}&gt;&#10;        &lt;Box style={{ flex: 1, backgroundColor: '#F7F9FC', border: '1px solid #D6DCE5', borderRadius: 6, padding: '14px 18px', flexDirection: 'column' }}&gt;&#10;            &lt;Box style={{ flexDirection: 'row', alignItems: 'center', gap: 10 }}&gt;&#10;                &lt;Box style={{ width: '32px', height: '32px', backgroundColor: '#1E4FA8', borderRadius: 4, alignItems: 'center', justifyContent: 'center' }}&gt;&#10;                    &lt;Text style={{ fontSize: 19, fontWeight: 'bold', color: '#FFFFFF' }}&gt;1&lt;/Text&gt;&#10;                &lt;/Box&gt;&#10;                &lt;Text style={{ fontSize: 24, fontWeight: 'bold', color: '#1A2230' }}&gt;等：必须等图到齐&lt;/Text&gt;&#10;            &lt;/Box&gt;&#10;            &lt;Text style={{ fontSize: 20, color: '#1A2230', lineHeight: 1.5, marginTop: 10 }}&gt;离线流程要求全部图像就位才能开算。现场拍完不知道行不行，回家发现漏拍，只能整组重拍。&lt;/Text&gt;&#10;            &lt;Text style={{ fontSize: 19, color: '#D9534F', fontWeight: 'bold', marginTop: 10 }}&gt;返工成本最高&lt;/Text&gt;&#10;        &lt;/Box&gt;&#10;        &lt;Box style={{ flex: 1, backgroundColor: '#F7F9FC', border: '1px solid #D6DCE5', borderRadius: 6, padding: '14px 18px', flexDirection: 'column' }}&gt;&#10;            &lt;Box style={{ flexDirection: 'row', alignItems: 'center', gap: 10 }}&gt;&#10;                &lt;Box style={{ width: '32px', height: '32px', backgroundColor: '#1E4FA8', borderRadius: 4, alignItems: 'center', justifyContent: 'center' }}&gt;&#10;                    &lt;Text style={{ fontSize: 19, fontWeight: 'bold', color: '#FFFFFF' }}&gt;2&lt;/Text&gt;&#10;                &lt;/Box&gt;&#10;                &lt;Text style={{ fontSize: 24, fontWeight: 'bold', color: '#1A2230' }}&gt;乱：顺序不能用了&lt;/Text&gt;&#10;            &lt;/Box&gt;&#10;            &lt;Text style={{ fontSize: 20, color: '#1A2230', lineHeight: 1.5, marginTop: 10 }}&gt;随手拍的顺序与空间邻接无关，没法只比相邻帧，只能两两匹配：1000 张约 50 万对，耗时陡增。&lt;/Text&gt;&#10;            &lt;Text style={{ fontSize: 19, color: '#D9534F', fontWeight: 'bold', marginTop: 10 }}&gt;SfM 从分钟变小时&lt;/Text&gt;&#10;        &lt;/Box&gt;&#10;    &lt;/Box&gt;&#10;    &lt;Box style={{ padding: '14px 40px 0px 40px', flexDirection: 'row', gap: 20 }}&gt;&#10;        &lt;Box style={{ flex: 1, backgroundColor: '#F7F9FC', border: '1px solid #D6DCE5', borderRadius: 6, padding: '14px 18px', flexDirection: 'column' }}&gt;&#10;            &lt;Box style={{ flexDirection: 'row', alignItems: 'center', gap: 10 }}&gt;&#10;                &lt;Box style={{ width: '32px', height: '32px', backgroundColor: '#1E4FA8', borderRadius: 4, alignItems: 'center', justifyContent: 'center' }}&gt;&#10;                    &lt;Text style={{ fontSize: 19, fontWeight: 'bold', color: '#FFFFFF' }}&gt;3&lt;/Text&gt;&#10;                &lt;/Box&gt;&#10;                &lt;Text style={{ fontSize: 24, fontWeight: 'bold', color: '#1A2230' }}&gt;漂：回访时接不上&lt;/Text&gt;&#10;            &lt;/Box&gt;&#10;            &lt;Text style={{ fontSize: 20, color: '#1A2230', lineHeight: 1.5, marginTop: 10 }}&gt;边走边建误差累积，绕一圈回来发现首尾差半米。传统做法重跑一次全局 BA，几分钟起步。&lt;/Text&gt;&#10;            &lt;Text style={{ fontSize: 19, color: '#D9534F', fontWeight: 'bold', marginTop: 10 }}&gt;实时性当场归零&lt;/Text&gt;&#10;        &lt;/Box&gt;&#10;        &lt;Box style={{ flex: 1, backgroundColor: '#F7F9FC', border: '1px solid #D6DCE5', borderRadius: 6, padding: '14px 18px', flexDirection: 'column' }}&gt;&#10;            &lt;Box style={{ flexDirection: 'row', alignItems: 'center', gap: 10 }}&gt;&#10;                &lt;Box style={{ width: '32px', height: '32px', backgroundColor: '#1E4FA8', borderRadius: 4, alignItems: 'center', justifyContent: 'center' }}&gt;&#10;                    &lt;Text style={{ fontSize: 19, fontWeight: 'bold', color: '#FFFFFF' }}&gt;4&lt;/Text&gt;&#10;                &lt;/Box&gt;&#10;                &lt;Text style={{ fontSize: 24, fontWeight: 'bold', color: '#1A2230' }}&gt;爆：大场景显存&lt;/Text&gt;&#10;            &lt;/Box&gt;&#10;            &lt;Text style={{ fontSize: 20, color: '#1A2230', lineHeight: 1.5, marginTop: 10 }}&gt;高斯数随场景线性增长。论文实测：不开层级结构，CityWalk 到第 &lt;b&gt;795 / 4050&lt;/b&gt; 帧就 OOM。&lt;/Text&gt;&#10;            &lt;Text style={{ fontSize: 19, color: '#D9534F', fontWeight: 'bold', marginTop: 10 }}&gt;规模一上来就跑不完&lt;/Text&gt;&#10;        &lt;/Box&gt;&#10;    &lt;/Box&gt;&#10;    &lt;Box style={{ margin: '18px 40px 0px 40px', backgroundColor: '#1E4FA8', borderRadius: 6, padding: '14px 22px' }}&gt;&#10;        &lt;Text style={{ fontSize: 22, fontWeight: 'bold', color: '#FFFFFF', lineHeight: 1.5 }}&gt;四个现象收敛成三条必须同时成立的约束：即时（每帧数百毫秒）· 无序（不依赖帧序）· 全局一致（回环能修）。过去的方法最多同时满足两条。&lt;/Text&gt;&#10;    &lt;/Box&gt;&#10;&lt;/Slide&gt;&#10;"/>
+        <p:cNvPr id="231" name="" descr="&lt;Slide style={{ width: '1280px', height: '720px', backgroundColor: '#FFFFFF', padding: '0px', flexDirection: 'column' }}&gt;&#10;    &lt;Box style={{ width: '1280px', height: '8px', backgroundColor: '#1E4FA8' }} /&gt;&#10;    &lt;Box style={{ padding: '30px 40px 0px 40px', flexDirection: 'row', justifyContent: 'space-between', alignItems: 'flex-end' }}&gt;&#10;        &lt;Text style={{ fontSize: 34, fontWeight: 'bold', color: '#1E4FA8' }}&gt;过去遇到的问题：等、乱、漂、爆&lt;/Text&gt;&#10;        &lt;Text style={{ fontSize: 15, color: '#8B97A8' }}&gt;05 / 14&lt;/Text&gt;&#10;    &lt;/Box&gt;&#10;    &lt;Box style={{ padding: '16px 40px 0px 40px' }}&gt;&#10;        &lt;Text style={{ fontSize: 21, color: '#4A5568', lineHeight: 1.5 }}&gt;如果拿手机去拍一个房间，这四件事几乎一定会遇到——它们不是算法&quot;不够准&quot;，而是&lt;b&gt;流程本身没有为现场反馈设计&lt;/b&gt;。&lt;/Text&gt;&#10;    &lt;/Box&gt;&#10;    &lt;Box style={{ padding: '16px 40px 0px 40px', flexDirection: 'row', gap: 20 }}&gt;&#10;        &lt;Box style={{ flex: 1, backgroundColor: '#F7F9FC', border: '1px solid #D6DCE5', borderRadius: 6, padding: '14px 18px', flexDirection: 'column' }}&gt;&#10;            &lt;Box style={{ flexDirection: 'row', alignItems: 'center', gap: 10 }}&gt;&#10;                &lt;Box style={{ width: '32px', height: '32px', backgroundColor: '#1E4FA8', borderRadius: 4, alignItems: 'center', justifyContent: 'center' }}&gt;&#10;                    &lt;Text style={{ fontSize: 19, fontWeight: 'bold', color: '#FFFFFF' }}&gt;1&lt;/Text&gt;&#10;                &lt;/Box&gt;&#10;                &lt;Text style={{ fontSize: 24, fontWeight: 'bold', color: '#1A2230' }}&gt;等：必须等图到齐&lt;/Text&gt;&#10;            &lt;/Box&gt;&#10;            &lt;Text style={{ fontSize: 20, color: '#1A2230', lineHeight: 1.5, marginTop: 10 }}&gt;离线流程要求全部图像就位才能开算。现场拍完不知道行不行，回家发现漏拍，只能整组重拍。&lt;/Text&gt;&#10;            &lt;Text style={{ fontSize: 19, color: '#D9534F', fontWeight: 'bold', marginTop: 10 }}&gt;返工成本最高&lt;/Text&gt;&#10;        &lt;/Box&gt;&#10;        &lt;Box style={{ flex: 1, backgroundColor: '#F7F9FC', border: '1px solid #D6DCE5', borderRadius: 6, padding: '14px 18px', flexDirection: 'column' }}&gt;&#10;            &lt;Box style={{ flexDirection: 'row', alignItems: 'center', gap: 10 }}&gt;&#10;                &lt;Box style={{ width: '32px', height: '32px', backgroundColor: '#1E4FA8', borderRadius: 4, alignItems: 'center', justifyContent: 'center' }}&gt;&#10;                    &lt;Text style={{ fontSize: 19, fontWeight: 'bold', color: '#FFFFFF' }}&gt;2&lt;/Text&gt;&#10;                &lt;/Box&gt;&#10;                &lt;Text style={{ fontSize: 24, fontWeight: 'bold', color: '#1A2230' }}&gt;乱：顺序不能用了&lt;/Text&gt;&#10;            &lt;/Box&gt;&#10;            &lt;Text style={{ fontSize: 20, color: '#1A2230', lineHeight: 1.5, marginTop: 10 }}&gt;随手拍的顺序与空间邻接无关，没法只比相邻帧，只能两两匹配：1000 张约 50 万对，耗时陡增。&lt;/Text&gt;&#10;            &lt;Text style={{ fontSize: 19, color: '#D9534F', fontWeight: 'bold', marginTop: 10 }}&gt;SfM 从分钟变小时&lt;/Text&gt;&#10;        &lt;/Box&gt;&#10;    &lt;/Box&gt;&#10;    &lt;Box style={{ padding: '14px 40px 0px 40px', flexDirection: 'row', gap: 20 }}&gt;&#10;        &lt;Box style={{ flex: 1, backgroundColor: '#F7F9FC', border: '1px solid #D6DCE5', borderRadius: 6, padding: '14px 18px', flexDirection: 'column' }}&gt;&#10;            &lt;Box style={{ flexDirection: 'row', alignItems: 'center', gap: 10 }}&gt;&#10;                &lt;Box style={{ width: '32px', height: '32px', backgroundColor: '#1E4FA8', borderRadius: 4, alignItems: 'center', justifyContent: 'center' }}&gt;&#10;                    &lt;Text style={{ fontSize: 19, fontWeight: 'bold', color: '#FFFFFF' }}&gt;3&lt;/Text&gt;&#10;                &lt;/Box&gt;&#10;                &lt;Text style={{ fontSize: 24, fontWeight: 'bold', color: '#1A2230' }}&gt;漂：回访时接不上&lt;/Text&gt;&#10;            &lt;/Box&gt;&#10;            &lt;Text style={{ fontSize: 20, color: '#1A2230', lineHeight: 1.5, marginTop: 10 }}&gt;边走边建误差累积，绕一圈回来发现首尾差半米。传统做法重跑一次全局 BA，几分钟起步。&lt;/Text&gt;&#10;            &lt;Text style={{ fontSize: 19, color: '#D9534F', fontWeight: 'bold', marginTop: 10 }}&gt;实时性当场归零&lt;/Text&gt;&#10;        &lt;/Box&gt;&#10;        &lt;Box style={{ flex: 1, backgroundColor: '#F7F9FC', border: '1px solid #D6DCE5', borderRadius: 6, padding: '14px 18px', flexDirection: 'column' }}&gt;&#10;            &lt;Box style={{ flexDirection: 'row', alignItems: 'center', gap: 10 }}&gt;&#10;                &lt;Box style={{ width: '32px', height: '32px', backgroundColor: '#1E4FA8', borderRadius: 4, alignItems: 'center', justifyContent: 'center' }}&gt;&#10;                    &lt;Text style={{ fontSize: 19, fontWeight: 'bold', color: '#FFFFFF' }}&gt;4&lt;/Text&gt;&#10;                &lt;/Box&gt;&#10;                &lt;Text style={{ fontSize: 24, fontWeight: 'bold', color: '#1A2230' }}&gt;爆：大场景显存&lt;/Text&gt;&#10;            &lt;/Box&gt;&#10;            &lt;Text style={{ fontSize: 20, color: '#1A2230', lineHeight: 1.5, marginTop: 10 }}&gt;高斯数随场景线性增长。论文实测：不开层级结构，CityWalk 到第 &lt;b&gt;795 / 4050&lt;/b&gt; 帧就 OOM。&lt;/Text&gt;&#10;            &lt;Text style={{ fontSize: 19, color: '#D9534F', fontWeight: 'bold', marginTop: 10 }}&gt;规模一上来就跑不完&lt;/Text&gt;&#10;        &lt;/Box&gt;&#10;    &lt;/Box&gt;&#10;    &lt;Box style={{ margin: '18px 40px 0px 40px', backgroundColor: '#1E4FA8', borderRadius: 6, padding: '14px 22px' }}&gt;&#10;        &lt;Text style={{ fontSize: 22, fontWeight: 'bold', color: '#FFFFFF', lineHeight: 1.5 }}&gt;四个现象收敛成三条必须同时成立的约束：即时（每帧数百毫秒）· 无序（不依赖帧序）· 全局一致（回环能修）。过去的方法最多同时满足两条。&lt;/Text&gt;&#10;    &lt;/Box&gt;&#10;&lt;/Slide&gt;&#10;"/>
         <p:cNvGrpSpPr/>
         <p:nvPr/>
       </p:nvGrpSpPr>
@@ -14328,7 +11824,7 @@
       </p:grpSpPr>
       <p:sp>
         <p:nvSpPr>
-          <p:cNvPr id="276" name=""/>
+          <p:cNvPr id="232" name=""/>
           <p:cNvSpPr/>
           <p:nvPr/>
         </p:nvSpPr>
@@ -14352,7 +11848,7 @@
       </p:sp>
       <p:sp>
         <p:nvSpPr>
-          <p:cNvPr id="277" name=""/>
+          <p:cNvPr id="233" name=""/>
           <p:cNvSpPr/>
           <p:nvPr/>
         </p:nvSpPr>
@@ -14376,7 +11872,7 @@
       </p:sp>
       <p:sp>
         <p:nvSpPr>
-          <p:cNvPr id="278" name="" descr="{&quot;isTemplate&quot;:true,&quot;type&quot;:&quot;text&quot;}"/>
+          <p:cNvPr id="234" name="" descr="{&quot;isTemplate&quot;:true,&quot;type&quot;:&quot;text&quot;}"/>
           <p:cNvSpPr txBox="1"/>
           <p:nvPr/>
         </p:nvSpPr>
@@ -14411,7 +11907,7 @@
       </p:sp>
       <p:sp>
         <p:nvSpPr>
-          <p:cNvPr id="279" name="" descr="{&quot;isTemplate&quot;:true,&quot;type&quot;:&quot;text&quot;}"/>
+          <p:cNvPr id="235" name="" descr="{&quot;isTemplate&quot;:true,&quot;type&quot;:&quot;text&quot;}"/>
           <p:cNvSpPr txBox="1"/>
           <p:nvPr/>
         </p:nvSpPr>
@@ -14438,15 +11934,15 @@
                 <a:latin typeface="Microsoft YaHei"/>
                 <a:ea typeface="Microsoft YaHei"/>
               </a:rPr>
-              <a:t>05 / 15</a:t>
-            </a:r>
-            <a:endParaRPr/>
-          </a:p>
-        </p:txBody>
-      </p:sp>
-      <p:sp>
-        <p:nvSpPr>
-          <p:cNvPr id="280" name="" descr="{&quot;isTemplate&quot;:true,&quot;type&quot;:&quot;text&quot;}"/>
+              <a:t>05 / 14</a:t>
+            </a:r>
+            <a:endParaRPr/>
+          </a:p>
+        </p:txBody>
+      </p:sp>
+      <p:sp>
+        <p:nvSpPr>
+          <p:cNvPr id="236" name="" descr="{&quot;isTemplate&quot;:true,&quot;type&quot;:&quot;text&quot;}"/>
           <p:cNvSpPr txBox="1"/>
           <p:nvPr/>
         </p:nvSpPr>
@@ -14541,7 +12037,7 @@
       </p:sp>
       <p:sp>
         <p:nvSpPr>
-          <p:cNvPr id="281" name=""/>
+          <p:cNvPr id="237" name=""/>
           <p:cNvSpPr/>
           <p:nvPr/>
         </p:nvSpPr>
@@ -14572,7 +12068,7 @@
       </p:sp>
       <p:sp>
         <p:nvSpPr>
-          <p:cNvPr id="282" name=""/>
+          <p:cNvPr id="238" name=""/>
           <p:cNvSpPr/>
           <p:nvPr/>
         </p:nvSpPr>
@@ -14598,7 +12094,7 @@
       </p:sp>
       <p:sp>
         <p:nvSpPr>
-          <p:cNvPr id="283" name="" descr="{&quot;isTemplate&quot;:true,&quot;type&quot;:&quot;text&quot;}"/>
+          <p:cNvPr id="239" name="" descr="{&quot;isTemplate&quot;:true,&quot;type&quot;:&quot;text&quot;}"/>
           <p:cNvSpPr txBox="1"/>
           <p:nvPr/>
         </p:nvSpPr>
@@ -14633,7 +12129,7 @@
       </p:sp>
       <p:sp>
         <p:nvSpPr>
-          <p:cNvPr id="284" name="" descr="{&quot;isTemplate&quot;:true,&quot;type&quot;:&quot;text&quot;}"/>
+          <p:cNvPr id="240" name="" descr="{&quot;isTemplate&quot;:true,&quot;type&quot;:&quot;text&quot;}"/>
           <p:cNvSpPr txBox="1"/>
           <p:nvPr/>
         </p:nvSpPr>
@@ -14668,7 +12164,7 @@
       </p:sp>
       <p:sp>
         <p:nvSpPr>
-          <p:cNvPr id="285" name="" descr="{&quot;isTemplate&quot;:true,&quot;type&quot;:&quot;text&quot;}"/>
+          <p:cNvPr id="241" name="" descr="{&quot;isTemplate&quot;:true,&quot;type&quot;:&quot;text&quot;}"/>
           <p:cNvSpPr txBox="1"/>
           <p:nvPr/>
         </p:nvSpPr>
@@ -14705,7 +12201,7 @@
       </p:sp>
       <p:sp>
         <p:nvSpPr>
-          <p:cNvPr id="286" name="" descr="{&quot;isTemplate&quot;:true,&quot;type&quot;:&quot;text&quot;}"/>
+          <p:cNvPr id="242" name="" descr="{&quot;isTemplate&quot;:true,&quot;type&quot;:&quot;text&quot;}"/>
           <p:cNvSpPr txBox="1"/>
           <p:nvPr/>
         </p:nvSpPr>
@@ -14740,7 +12236,7 @@
       </p:sp>
       <p:sp>
         <p:nvSpPr>
-          <p:cNvPr id="287" name=""/>
+          <p:cNvPr id="243" name=""/>
           <p:cNvSpPr/>
           <p:nvPr/>
         </p:nvSpPr>
@@ -14771,7 +12267,7 @@
       </p:sp>
       <p:sp>
         <p:nvSpPr>
-          <p:cNvPr id="288" name=""/>
+          <p:cNvPr id="244" name=""/>
           <p:cNvSpPr/>
           <p:nvPr/>
         </p:nvSpPr>
@@ -14797,7 +12293,7 @@
       </p:sp>
       <p:sp>
         <p:nvSpPr>
-          <p:cNvPr id="289" name="" descr="{&quot;isTemplate&quot;:true,&quot;type&quot;:&quot;text&quot;}"/>
+          <p:cNvPr id="245" name="" descr="{&quot;isTemplate&quot;:true,&quot;type&quot;:&quot;text&quot;}"/>
           <p:cNvSpPr txBox="1"/>
           <p:nvPr/>
         </p:nvSpPr>
@@ -14832,7 +12328,7 @@
       </p:sp>
       <p:sp>
         <p:nvSpPr>
-          <p:cNvPr id="290" name="" descr="{&quot;isTemplate&quot;:true,&quot;type&quot;:&quot;text&quot;}"/>
+          <p:cNvPr id="246" name="" descr="{&quot;isTemplate&quot;:true,&quot;type&quot;:&quot;text&quot;}"/>
           <p:cNvSpPr txBox="1"/>
           <p:nvPr/>
         </p:nvSpPr>
@@ -14867,7 +12363,7 @@
       </p:sp>
       <p:sp>
         <p:nvSpPr>
-          <p:cNvPr id="291" name="" descr="{&quot;isTemplate&quot;:true,&quot;type&quot;:&quot;text&quot;}"/>
+          <p:cNvPr id="247" name="" descr="{&quot;isTemplate&quot;:true,&quot;type&quot;:&quot;text&quot;}"/>
           <p:cNvSpPr txBox="1"/>
           <p:nvPr/>
         </p:nvSpPr>
@@ -14944,7 +12440,7 @@
       </p:sp>
       <p:sp>
         <p:nvSpPr>
-          <p:cNvPr id="292" name="" descr="{&quot;isTemplate&quot;:true,&quot;type&quot;:&quot;text&quot;}"/>
+          <p:cNvPr id="248" name="" descr="{&quot;isTemplate&quot;:true,&quot;type&quot;:&quot;text&quot;}"/>
           <p:cNvSpPr txBox="1"/>
           <p:nvPr/>
         </p:nvSpPr>
@@ -14989,7 +12485,7 @@
       </p:sp>
       <p:sp>
         <p:nvSpPr>
-          <p:cNvPr id="293" name=""/>
+          <p:cNvPr id="249" name=""/>
           <p:cNvSpPr/>
           <p:nvPr/>
         </p:nvSpPr>
@@ -15020,7 +12516,7 @@
       </p:sp>
       <p:sp>
         <p:nvSpPr>
-          <p:cNvPr id="294" name=""/>
+          <p:cNvPr id="250" name=""/>
           <p:cNvSpPr/>
           <p:nvPr/>
         </p:nvSpPr>
@@ -15046,7 +12542,7 @@
       </p:sp>
       <p:sp>
         <p:nvSpPr>
-          <p:cNvPr id="295" name="" descr="{&quot;isTemplate&quot;:true,&quot;type&quot;:&quot;text&quot;}"/>
+          <p:cNvPr id="251" name="" descr="{&quot;isTemplate&quot;:true,&quot;type&quot;:&quot;text&quot;}"/>
           <p:cNvSpPr txBox="1"/>
           <p:nvPr/>
         </p:nvSpPr>
@@ -15081,7 +12577,7 @@
       </p:sp>
       <p:sp>
         <p:nvSpPr>
-          <p:cNvPr id="296" name="" descr="{&quot;isTemplate&quot;:true,&quot;type&quot;:&quot;text&quot;}"/>
+          <p:cNvPr id="252" name="" descr="{&quot;isTemplate&quot;:true,&quot;type&quot;:&quot;text&quot;}"/>
           <p:cNvSpPr txBox="1"/>
           <p:nvPr/>
         </p:nvSpPr>
@@ -15116,7 +12612,7 @@
       </p:sp>
       <p:sp>
         <p:nvSpPr>
-          <p:cNvPr id="297" name="" descr="{&quot;isTemplate&quot;:true,&quot;type&quot;:&quot;text&quot;}"/>
+          <p:cNvPr id="253" name="" descr="{&quot;isTemplate&quot;:true,&quot;type&quot;:&quot;text&quot;}"/>
           <p:cNvSpPr txBox="1"/>
           <p:nvPr/>
         </p:nvSpPr>
@@ -15173,7 +12669,7 @@
       </p:sp>
       <p:sp>
         <p:nvSpPr>
-          <p:cNvPr id="298" name="" descr="{&quot;isTemplate&quot;:true,&quot;type&quot;:&quot;text&quot;}"/>
+          <p:cNvPr id="254" name="" descr="{&quot;isTemplate&quot;:true,&quot;type&quot;:&quot;text&quot;}"/>
           <p:cNvSpPr txBox="1"/>
           <p:nvPr/>
         </p:nvSpPr>
@@ -15208,7 +12704,7 @@
       </p:sp>
       <p:sp>
         <p:nvSpPr>
-          <p:cNvPr id="299" name=""/>
+          <p:cNvPr id="255" name=""/>
           <p:cNvSpPr/>
           <p:nvPr/>
         </p:nvSpPr>
@@ -15239,7 +12735,7 @@
       </p:sp>
       <p:sp>
         <p:nvSpPr>
-          <p:cNvPr id="300" name=""/>
+          <p:cNvPr id="256" name=""/>
           <p:cNvSpPr/>
           <p:nvPr/>
         </p:nvSpPr>
@@ -15265,7 +12761,7 @@
       </p:sp>
       <p:sp>
         <p:nvSpPr>
-          <p:cNvPr id="301" name="" descr="{&quot;isTemplate&quot;:true,&quot;type&quot;:&quot;text&quot;}"/>
+          <p:cNvPr id="257" name="" descr="{&quot;isTemplate&quot;:true,&quot;type&quot;:&quot;text&quot;}"/>
           <p:cNvSpPr txBox="1"/>
           <p:nvPr/>
         </p:nvSpPr>
@@ -15300,7 +12796,7 @@
       </p:sp>
       <p:sp>
         <p:nvSpPr>
-          <p:cNvPr id="302" name="" descr="{&quot;isTemplate&quot;:true,&quot;type&quot;:&quot;text&quot;}"/>
+          <p:cNvPr id="258" name="" descr="{&quot;isTemplate&quot;:true,&quot;type&quot;:&quot;text&quot;}"/>
           <p:cNvSpPr txBox="1"/>
           <p:nvPr/>
         </p:nvSpPr>
@@ -15335,7 +12831,7 @@
       </p:sp>
       <p:sp>
         <p:nvSpPr>
-          <p:cNvPr id="303" name="" descr="{&quot;isTemplate&quot;:true,&quot;type&quot;:&quot;text&quot;}"/>
+          <p:cNvPr id="259" name="" descr="{&quot;isTemplate&quot;:true,&quot;type&quot;:&quot;text&quot;}"/>
           <p:cNvSpPr txBox="1"/>
           <p:nvPr/>
         </p:nvSpPr>
@@ -15452,7 +12948,7 @@
       </p:sp>
       <p:sp>
         <p:nvSpPr>
-          <p:cNvPr id="304" name="" descr="{&quot;isTemplate&quot;:true,&quot;type&quot;:&quot;text&quot;}"/>
+          <p:cNvPr id="260" name="" descr="{&quot;isTemplate&quot;:true,&quot;type&quot;:&quot;text&quot;}"/>
           <p:cNvSpPr txBox="1"/>
           <p:nvPr/>
         </p:nvSpPr>
@@ -15487,7 +12983,7 @@
       </p:sp>
       <p:sp>
         <p:nvSpPr>
-          <p:cNvPr id="305" name=""/>
+          <p:cNvPr id="261" name=""/>
           <p:cNvSpPr/>
           <p:nvPr/>
         </p:nvSpPr>
@@ -15513,7 +13009,7 @@
       </p:sp>
       <p:sp>
         <p:nvSpPr>
-          <p:cNvPr id="306" name="" descr="{&quot;isTemplate&quot;:true,&quot;type&quot;:&quot;text&quot;}"/>
+          <p:cNvPr id="262" name="" descr="{&quot;isTemplate&quot;:true,&quot;type&quot;:&quot;text&quot;}"/>
           <p:cNvSpPr txBox="1"/>
           <p:nvPr/>
         </p:nvSpPr>
@@ -15598,7 +13094,7 @@
   <p:cSld>
     <p:spTree>
       <p:nvGrpSpPr>
-        <p:cNvPr id="307" name="" descr="&lt;Slide style={{ width: '1280px', height: '720px', backgroundColor: '#FFFFFF', padding: '0px', flexDirection: 'column' }}&gt;&#10;    &lt;Box style={{ width: '1280px', height: '8px', backgroundColor: '#1E4FA8' }} /&gt;&#10;    &lt;Box style={{ padding: '30px 40px 0px 40px', flexDirection: 'row', justifyContent: 'space-between', alignItems: 'flex-end' }}&gt;&#10;        &lt;Text style={{ fontSize: 34, fontWeight: 'bold', color: '#1E4FA8' }}&gt;方法总览：每来一个关键帧做六件事&lt;/Text&gt;&#10;        &lt;Text style={{ fontSize: 15, color: '#8B97A8' }}&gt;06 / 15&lt;/Text&gt;&#10;    &lt;/Box&gt;&#10;    &lt;Box style={{ padding: '14px 40px 0px 40px' }}&gt;&#10;        &lt;Text style={{ fontSize: 22, color: '#4A5568', lineHeight: 1.5 }}&gt;设计哲学一句话：&lt;b&gt;每帧做小事，偶尔做一次大事&lt;/b&gt;。前者保证实时，后者保证不漂。每一步都对应上一页四个问题中的一个。&lt;/Text&gt;&#10;    &lt;/Box&gt;&#10;    &lt;Box style={{ padding: '18px 40px 0px 40px', flexDirection: 'row', gap: 14 }}&gt;&#10;        &lt;Box style={{ flex: 1, minHeight: '158px', backgroundColor: '#F0F5FC', borderRadius: 6, padding: '16px 14px', flexDirection: 'column' }}&gt;&#10;            &lt;Text style={{ fontSize: 18, fontWeight: 'bold', color: '#1E4FA8' }}&gt;STEP 1&lt;/Text&gt;&#10;            &lt;Text style={{ fontSize: 23, fontWeight: 'bold', color: '#1A2230', marginTop: 7 }}&gt;两级匹配&lt;/Text&gt;&#10;            &lt;Text style={{ fontSize: 19, color: '#1A2230', lineHeight: 1.5, marginTop: 7 }}&gt;检索候选 → 局部特征 → 精验，得到可信帧对&lt;/Text&gt;&#10;            &lt;Text style={{ fontSize: 18, color: '#1D5FC0', fontWeight: 'bold', marginTop: 'auto' }}&gt;治&quot;乱&quot;&lt;/Text&gt;&#10;        &lt;/Box&gt;&#10;        &lt;Box style={{ flex: 1, minHeight: '158px', backgroundColor: '#F0F5FC', borderRadius: 6, padding: '16px 14px', flexDirection: 'column' }}&gt;&#10;            &lt;Text style={{ fontSize: 18, fontWeight: 'bold', color: '#1E4FA8' }}&gt;STEP 2&lt;/Text&gt;&#10;            &lt;Text style={{ fontSize: 23, fontWeight: 'bold', color: '#1A2230', marginTop: 7 }}&gt;更新协视图&lt;/Text&gt;&#10;            &lt;Text style={{ fontSize: 19, color: '#1A2230', lineHeight: 1.5, marginTop: 7 }}&gt;边权 = 内点数倒数，越可靠越&quot;近&quot;&lt;/Text&gt;&#10;            &lt;Text style={{ fontSize: 18, color: '#1D5FC0', fontWeight: 'bold', marginTop: 'auto' }}&gt;为后续提供&quot;距离&quot;&lt;/Text&gt;&#10;        &lt;/Box&gt;&#10;        &lt;Box style={{ flex: 1, minHeight: '158px', backgroundColor: '#F0F5FC', borderRadius: 6, padding: '16px 14px', flexDirection: 'column' }}&gt;&#10;            &lt;Text style={{ fontSize: 18, fontWeight: 'bold', color: '#1E4FA8' }}&gt;STEP 3&lt;/Text&gt;&#10;            &lt;Text style={{ fontSize: 23, fontWeight: 'bold', color: '#1A2230', marginTop: 7 }}&gt;回环检测&lt;/Text&gt;&#10;            &lt;Text style={{ fontSize: 19, color: '#1A2230', lineHeight: 1.5, marginTop: 7 }}&gt;簇间跳数 &amp;gt; 5 且有效对 &amp;gt; 2 才触发&lt;/Text&gt;&#10;            &lt;Text style={{ fontSize: 18, color: '#1D5FC0', fontWeight: 'bold', marginTop: 'auto' }}&gt;治&quot;漂&quot;·发现&lt;/Text&gt;&#10;        &lt;/Box&gt;&#10;    &lt;/Box&gt;&#10;    &lt;Box style={{ padding: '16px 40px 0px 40px', flexDirection: 'row', gap: 14 }}&gt;&#10;        &lt;Box style={{ flex: 1, minHeight: '158px', backgroundColor: '#F7F9FC', borderRadius: 6, padding: '16px 14px', flexDirection: 'column' }}&gt;&#10;            &lt;Text style={{ fontSize: 18, fontWeight: 'bold', color: '#1E4FA8' }}&gt;STEP 4&lt;/Text&gt;&#10;            &lt;Text style={{ fontSize: 23, fontWeight: 'bold', color: '#1A2230', marginTop: 7 }}&gt;局部 BA&lt;/Text&gt;&#10;            &lt;Text style={{ fontSize: 19, color: '#1A2230', lineHeight: 1.5, marginTop: 7 }}&gt;选 20 个高连通帧，GPU 上优化位姿&lt;/Text&gt;&#10;            &lt;Text style={{ fontSize: 18, color: '#1D5FC0', fontWeight: 'bold', marginTop: 'auto' }}&gt;治&quot;慢&quot;&lt;/Text&gt;&#10;        &lt;/Box&gt;&#10;        &lt;Box style={{ flex: 1, minHeight: '158px', backgroundColor: '#F7F9FC', borderRadius: 6, padding: '16px 14px', flexDirection: 'column' }}&gt;&#10;            &lt;Text style={{ fontSize: 18, fontWeight: 'bold', color: '#1E4FA8' }}&gt;STEP 5&lt;/Text&gt;&#10;            &lt;Text style={{ fontSize: 23, fontWeight: 'bold', color: '#1A2230', marginTop: 7 }}&gt;回环修正&lt;/Text&gt;&#10;            &lt;Text style={{ fontSize: 19, color: '#1A2230', lineHeight: 1.5, marginTop: 7 }}&gt;焊接 BA + 主干传播，位姿与高斯一起动&lt;/Text&gt;&#10;            &lt;Text style={{ fontSize: 18, color: '#1D5FC0', fontWeight: 'bold', marginTop: 'auto' }}&gt;治&quot;漂&quot;·修正&lt;/Text&gt;&#10;        &lt;/Box&gt;&#10;        &lt;Box style={{ flex: 1, minHeight: '158px', backgroundColor: '#F7F9FC', borderRadius: 6, padding: '16px 14px', flexDirection: 'column' }}&gt;&#10;            &lt;Text style={{ fontSize: 18, fontWeight: 'bold', color: '#1E4FA8' }}&gt;STEP 6&lt;/Text&gt;&#10;            &lt;Text style={{ fontSize: 23, fontWeight: 'bold', color: '#1A2230', marginTop: 7 }}&gt;投放与优化&lt;/Text&gt;&#10;            &lt;Text style={{ fontSize: 19, color: '#1A2230', lineHeight: 1.5, marginTop: 7 }}&gt;分块深度对齐投放，每帧固定 30 次迭代&lt;/Text&gt;&#10;            &lt;Text style={{ fontSize: 18, color: '#1D5FC0', fontWeight: 'bold', marginTop: 'auto' }}&gt;治&quot;爆&quot;（配层级）&lt;/Text&gt;&#10;        &lt;/Box&gt;&#10;    &lt;/Box&gt;&#10;    &lt;Box style={{ margin: '18px 40px 0px 40px', backgroundColor: '#F0F5FC', borderLeft: '5px solid #1E4FA8', padding: '15px 20px' }}&gt;&#10;        &lt;Text style={{ fontSize: 21, color: '#1A2230', lineHeight: 1.5 }}&gt;另有一处容错：匹配失败的帧先&quot;搁置&quot;，后续出现相似帧时再取出重试——乱序输入因此不必强求一次匹配成功。&lt;/Text&gt;&#10;    &lt;/Box&gt;&#10;    &lt;Box style={{ padding: '14px 40px 0px 40px' }}&gt;&#10;        &lt;Text style={{ fontSize: 17, color: '#8B97A8' }}&gt;六步中只有 STEP 3 与 STEP 5 是&quot;偶尔做一次的大事&quot;，其余每帧都跑；这也是实时性的来源。&lt;/Text&gt;&#10;    &lt;/Box&gt;&#10;&lt;/Slide&gt;&#10;"/>
+        <p:cNvPr id="263" name="" descr="&lt;Slide style={{ width: '1280px', height: '720px', backgroundColor: '#FFFFFF', padding: '0px', flexDirection: 'column' }}&gt;&#10;    &lt;Box style={{ width: '1280px', height: '8px', backgroundColor: '#1E4FA8' }} /&gt;&#10;    &lt;Box style={{ padding: '30px 40px 0px 40px', flexDirection: 'row', justifyContent: 'space-between', alignItems: 'flex-end' }}&gt;&#10;        &lt;Text style={{ fontSize: 34, fontWeight: 'bold', color: '#1E4FA8' }}&gt;方法总览：每来一个关键帧做六件事&lt;/Text&gt;&#10;        &lt;Text style={{ fontSize: 15, color: '#8B97A8' }}&gt;06 / 14&lt;/Text&gt;&#10;    &lt;/Box&gt;&#10;    &lt;Box style={{ padding: '14px 40px 0px 40px' }}&gt;&#10;        &lt;Text style={{ fontSize: 22, color: '#4A5568', lineHeight: 1.5 }}&gt;设计哲学一句话：&lt;b&gt;每帧做小事，偶尔做一次大事&lt;/b&gt;。前者保证实时，后者保证不漂。每一步都对应上一页四个问题中的一个。&lt;/Text&gt;&#10;    &lt;/Box&gt;&#10;    &lt;Box style={{ padding: '18px 40px 0px 40px', flexDirection: 'row', gap: 14 }}&gt;&#10;        &lt;Box style={{ flex: 1, minHeight: '158px', backgroundColor: '#F0F5FC', borderRadius: 6, padding: '16px 14px', flexDirection: 'column' }}&gt;&#10;            &lt;Text style={{ fontSize: 18, fontWeight: 'bold', color: '#1E4FA8' }}&gt;STEP 1&lt;/Text&gt;&#10;            &lt;Text style={{ fontSize: 23, fontWeight: 'bold', color: '#1A2230', marginTop: 7 }}&gt;两级匹配&lt;/Text&gt;&#10;            &lt;Text style={{ fontSize: 19, color: '#1A2230', lineHeight: 1.5, marginTop: 7 }}&gt;检索候选 → 局部特征 → 精验，得到可信帧对&lt;/Text&gt;&#10;            &lt;Text style={{ fontSize: 18, color: '#1D5FC0', fontWeight: 'bold', marginTop: 'auto' }}&gt;治&quot;乱&quot;&lt;/Text&gt;&#10;        &lt;/Box&gt;&#10;        &lt;Box style={{ flex: 1, minHeight: '158px', backgroundColor: '#F0F5FC', borderRadius: 6, padding: '16px 14px', flexDirection: 'column' }}&gt;&#10;            &lt;Text style={{ fontSize: 18, fontWeight: 'bold', color: '#1E4FA8' }}&gt;STEP 2&lt;/Text&gt;&#10;            &lt;Text style={{ fontSize: 23, fontWeight: 'bold', color: '#1A2230', marginTop: 7 }}&gt;更新协视图&lt;/Text&gt;&#10;            &lt;Text style={{ fontSize: 19, color: '#1A2230', lineHeight: 1.5, marginTop: 7 }}&gt;边权 = 内点数倒数，越可靠越&quot;近&quot;&lt;/Text&gt;&#10;            &lt;Text style={{ fontSize: 18, color: '#1D5FC0', fontWeight: 'bold', marginTop: 'auto' }}&gt;为后续提供&quot;距离&quot;&lt;/Text&gt;&#10;        &lt;/Box&gt;&#10;        &lt;Box style={{ flex: 1, minHeight: '158px', backgroundColor: '#F0F5FC', borderRadius: 6, padding: '16px 14px', flexDirection: 'column' }}&gt;&#10;            &lt;Text style={{ fontSize: 18, fontWeight: 'bold', color: '#1E4FA8' }}&gt;STEP 3&lt;/Text&gt;&#10;            &lt;Text style={{ fontSize: 23, fontWeight: 'bold', color: '#1A2230', marginTop: 7 }}&gt;回环检测&lt;/Text&gt;&#10;            &lt;Text style={{ fontSize: 19, color: '#1A2230', lineHeight: 1.5, marginTop: 7 }}&gt;簇间跳数 &amp;gt; 5 且有效对 &amp;gt; 2 才触发&lt;/Text&gt;&#10;            &lt;Text style={{ fontSize: 18, color: '#1D5FC0', fontWeight: 'bold', marginTop: 'auto' }}&gt;治&quot;漂&quot;·发现&lt;/Text&gt;&#10;        &lt;/Box&gt;&#10;    &lt;/Box&gt;&#10;    &lt;Box style={{ padding: '16px 40px 0px 40px', flexDirection: 'row', gap: 14 }}&gt;&#10;        &lt;Box style={{ flex: 1, minHeight: '158px', backgroundColor: '#F7F9FC', borderRadius: 6, padding: '16px 14px', flexDirection: 'column' }}&gt;&#10;            &lt;Text style={{ fontSize: 18, fontWeight: 'bold', color: '#1E4FA8' }}&gt;STEP 4&lt;/Text&gt;&#10;            &lt;Text style={{ fontSize: 23, fontWeight: 'bold', color: '#1A2230', marginTop: 7 }}&gt;局部 BA&lt;/Text&gt;&#10;            &lt;Text style={{ fontSize: 19, color: '#1A2230', lineHeight: 1.5, marginTop: 7 }}&gt;选 20 个高连通帧，GPU 上优化位姿&lt;/Text&gt;&#10;            &lt;Text style={{ fontSize: 18, color: '#1D5FC0', fontWeight: 'bold', marginTop: 'auto' }}&gt;治&quot;慢&quot;&lt;/Text&gt;&#10;        &lt;/Box&gt;&#10;        &lt;Box style={{ flex: 1, minHeight: '158px', backgroundColor: '#F7F9FC', borderRadius: 6, padding: '16px 14px', flexDirection: 'column' }}&gt;&#10;            &lt;Text style={{ fontSize: 18, fontWeight: 'bold', color: '#1E4FA8' }}&gt;STEP 5&lt;/Text&gt;&#10;            &lt;Text style={{ fontSize: 23, fontWeight: 'bold', color: '#1A2230', marginTop: 7 }}&gt;回环修正&lt;/Text&gt;&#10;            &lt;Text style={{ fontSize: 19, color: '#1A2230', lineHeight: 1.5, marginTop: 7 }}&gt;焊接 BA + 主干传播，位姿与高斯一起动&lt;/Text&gt;&#10;            &lt;Text style={{ fontSize: 18, color: '#1D5FC0', fontWeight: 'bold', marginTop: 'auto' }}&gt;治&quot;漂&quot;·修正&lt;/Text&gt;&#10;        &lt;/Box&gt;&#10;        &lt;Box style={{ flex: 1, minHeight: '158px', backgroundColor: '#F7F9FC', borderRadius: 6, padding: '16px 14px', flexDirection: 'column' }}&gt;&#10;            &lt;Text style={{ fontSize: 18, fontWeight: 'bold', color: '#1E4FA8' }}&gt;STEP 6&lt;/Text&gt;&#10;            &lt;Text style={{ fontSize: 23, fontWeight: 'bold', color: '#1A2230', marginTop: 7 }}&gt;投放与优化&lt;/Text&gt;&#10;            &lt;Text style={{ fontSize: 19, color: '#1A2230', lineHeight: 1.5, marginTop: 7 }}&gt;分块深度对齐投放，每帧固定 30 次迭代&lt;/Text&gt;&#10;            &lt;Text style={{ fontSize: 18, color: '#1D5FC0', fontWeight: 'bold', marginTop: 'auto' }}&gt;治&quot;爆&quot;（配层级）&lt;/Text&gt;&#10;        &lt;/Box&gt;&#10;    &lt;/Box&gt;&#10;    &lt;Box style={{ margin: '18px 40px 0px 40px', backgroundColor: '#F0F5FC', borderLeft: '5px solid #1E4FA8', padding: '15px 20px' }}&gt;&#10;        &lt;Text style={{ fontSize: 21, color: '#1A2230', lineHeight: 1.5 }}&gt;另有一处容错：匹配失败的帧先&quot;搁置&quot;，后续出现相似帧时再取出重试——乱序输入因此不必强求一次匹配成功。&lt;/Text&gt;&#10;    &lt;/Box&gt;&#10;    &lt;Box style={{ padding: '14px 40px 0px 40px' }}&gt;&#10;        &lt;Text style={{ fontSize: 17, color: '#8B97A8' }}&gt;六步中只有 STEP 3 与 STEP 5 是&quot;偶尔做一次的大事&quot;，其余每帧都跑；这也是实时性的来源。&lt;/Text&gt;&#10;    &lt;/Box&gt;&#10;&lt;/Slide&gt;&#10;"/>
         <p:cNvGrpSpPr/>
         <p:nvPr/>
       </p:nvGrpSpPr>
@@ -15612,7 +13108,7 @@
       </p:grpSpPr>
       <p:sp>
         <p:nvSpPr>
-          <p:cNvPr id="308" name=""/>
+          <p:cNvPr id="264" name=""/>
           <p:cNvSpPr/>
           <p:nvPr/>
         </p:nvSpPr>
@@ -15636,7 +13132,7 @@
       </p:sp>
       <p:sp>
         <p:nvSpPr>
-          <p:cNvPr id="309" name=""/>
+          <p:cNvPr id="265" name=""/>
           <p:cNvSpPr/>
           <p:nvPr/>
         </p:nvSpPr>
@@ -15660,7 +13156,7 @@
       </p:sp>
       <p:sp>
         <p:nvSpPr>
-          <p:cNvPr id="310" name="" descr="{&quot;isTemplate&quot;:true,&quot;type&quot;:&quot;text&quot;}"/>
+          <p:cNvPr id="266" name="" descr="{&quot;isTemplate&quot;:true,&quot;type&quot;:&quot;text&quot;}"/>
           <p:cNvSpPr txBox="1"/>
           <p:nvPr/>
         </p:nvSpPr>
@@ -15695,7 +13191,7 @@
       </p:sp>
       <p:sp>
         <p:nvSpPr>
-          <p:cNvPr id="311" name="" descr="{&quot;isTemplate&quot;:true,&quot;type&quot;:&quot;text&quot;}"/>
+          <p:cNvPr id="267" name="" descr="{&quot;isTemplate&quot;:true,&quot;type&quot;:&quot;text&quot;}"/>
           <p:cNvSpPr txBox="1"/>
           <p:nvPr/>
         </p:nvSpPr>
@@ -15722,15 +13218,15 @@
                 <a:latin typeface="Microsoft YaHei"/>
                 <a:ea typeface="Microsoft YaHei"/>
               </a:rPr>
-              <a:t>06 / 15</a:t>
-            </a:r>
-            <a:endParaRPr/>
-          </a:p>
-        </p:txBody>
-      </p:sp>
-      <p:sp>
-        <p:nvSpPr>
-          <p:cNvPr id="312" name="" descr="{&quot;isTemplate&quot;:true,&quot;type&quot;:&quot;text&quot;}"/>
+              <a:t>06 / 14</a:t>
+            </a:r>
+            <a:endParaRPr/>
+          </a:p>
+        </p:txBody>
+      </p:sp>
+      <p:sp>
+        <p:nvSpPr>
+          <p:cNvPr id="268" name="" descr="{&quot;isTemplate&quot;:true,&quot;type&quot;:&quot;text&quot;}"/>
           <p:cNvSpPr txBox="1"/>
           <p:nvPr/>
         </p:nvSpPr>
@@ -15785,7 +13281,7 @@
       </p:sp>
       <p:sp>
         <p:nvSpPr>
-          <p:cNvPr id="313" name=""/>
+          <p:cNvPr id="269" name=""/>
           <p:cNvSpPr/>
           <p:nvPr/>
         </p:nvSpPr>
@@ -15811,7 +13307,7 @@
       </p:sp>
       <p:sp>
         <p:nvSpPr>
-          <p:cNvPr id="314" name="" descr="{&quot;isTemplate&quot;:true,&quot;type&quot;:&quot;text&quot;}"/>
+          <p:cNvPr id="270" name="" descr="{&quot;isTemplate&quot;:true,&quot;type&quot;:&quot;text&quot;}"/>
           <p:cNvSpPr txBox="1"/>
           <p:nvPr/>
         </p:nvSpPr>
@@ -15846,7 +13342,7 @@
       </p:sp>
       <p:sp>
         <p:nvSpPr>
-          <p:cNvPr id="315" name="" descr="{&quot;isTemplate&quot;:true,&quot;type&quot;:&quot;text&quot;}"/>
+          <p:cNvPr id="271" name="" descr="{&quot;isTemplate&quot;:true,&quot;type&quot;:&quot;text&quot;}"/>
           <p:cNvSpPr txBox="1"/>
           <p:nvPr/>
         </p:nvSpPr>
@@ -15881,7 +13377,7 @@
       </p:sp>
       <p:sp>
         <p:nvSpPr>
-          <p:cNvPr id="316" name="" descr="{&quot;isTemplate&quot;:true,&quot;type&quot;:&quot;text&quot;}"/>
+          <p:cNvPr id="272" name="" descr="{&quot;isTemplate&quot;:true,&quot;type&quot;:&quot;text&quot;}"/>
           <p:cNvSpPr txBox="1"/>
           <p:nvPr/>
         </p:nvSpPr>
@@ -15958,7 +13454,7 @@
       </p:sp>
       <p:sp>
         <p:nvSpPr>
-          <p:cNvPr id="317" name="" descr="{&quot;isTemplate&quot;:true,&quot;type&quot;:&quot;text&quot;}"/>
+          <p:cNvPr id="273" name="" descr="{&quot;isTemplate&quot;:true,&quot;type&quot;:&quot;text&quot;}"/>
           <p:cNvSpPr txBox="1"/>
           <p:nvPr/>
         </p:nvSpPr>
@@ -16023,7 +13519,7 @@
       </p:sp>
       <p:sp>
         <p:nvSpPr>
-          <p:cNvPr id="318" name=""/>
+          <p:cNvPr id="274" name=""/>
           <p:cNvSpPr/>
           <p:nvPr/>
         </p:nvSpPr>
@@ -16049,7 +13545,7 @@
       </p:sp>
       <p:sp>
         <p:nvSpPr>
-          <p:cNvPr id="319" name="" descr="{&quot;isTemplate&quot;:true,&quot;type&quot;:&quot;text&quot;}"/>
+          <p:cNvPr id="275" name="" descr="{&quot;isTemplate&quot;:true,&quot;type&quot;:&quot;text&quot;}"/>
           <p:cNvSpPr txBox="1"/>
           <p:nvPr/>
         </p:nvSpPr>
@@ -16084,7 +13580,7 @@
       </p:sp>
       <p:sp>
         <p:nvSpPr>
-          <p:cNvPr id="320" name="" descr="{&quot;isTemplate&quot;:true,&quot;type&quot;:&quot;text&quot;}"/>
+          <p:cNvPr id="276" name="" descr="{&quot;isTemplate&quot;:true,&quot;type&quot;:&quot;text&quot;}"/>
           <p:cNvSpPr txBox="1"/>
           <p:nvPr/>
         </p:nvSpPr>
@@ -16119,7 +13615,7 @@
       </p:sp>
       <p:sp>
         <p:nvSpPr>
-          <p:cNvPr id="321" name="" descr="{&quot;isTemplate&quot;:true,&quot;type&quot;:&quot;text&quot;}"/>
+          <p:cNvPr id="277" name="" descr="{&quot;isTemplate&quot;:true,&quot;type&quot;:&quot;text&quot;}"/>
           <p:cNvSpPr txBox="1"/>
           <p:nvPr/>
         </p:nvSpPr>
@@ -16204,7 +13700,7 @@
       </p:sp>
       <p:sp>
         <p:nvSpPr>
-          <p:cNvPr id="322" name="" descr="{&quot;isTemplate&quot;:true,&quot;type&quot;:&quot;text&quot;}"/>
+          <p:cNvPr id="278" name="" descr="{&quot;isTemplate&quot;:true,&quot;type&quot;:&quot;text&quot;}"/>
           <p:cNvSpPr txBox="1"/>
           <p:nvPr/>
         </p:nvSpPr>
@@ -16269,7 +13765,7 @@
       </p:sp>
       <p:sp>
         <p:nvSpPr>
-          <p:cNvPr id="323" name=""/>
+          <p:cNvPr id="279" name=""/>
           <p:cNvSpPr/>
           <p:nvPr/>
         </p:nvSpPr>
@@ -16295,7 +13791,7 @@
       </p:sp>
       <p:sp>
         <p:nvSpPr>
-          <p:cNvPr id="324" name="" descr="{&quot;isTemplate&quot;:true,&quot;type&quot;:&quot;text&quot;}"/>
+          <p:cNvPr id="280" name="" descr="{&quot;isTemplate&quot;:true,&quot;type&quot;:&quot;text&quot;}"/>
           <p:cNvSpPr txBox="1"/>
           <p:nvPr/>
         </p:nvSpPr>
@@ -16330,7 +13826,7 @@
       </p:sp>
       <p:sp>
         <p:nvSpPr>
-          <p:cNvPr id="325" name="" descr="{&quot;isTemplate&quot;:true,&quot;type&quot;:&quot;text&quot;}"/>
+          <p:cNvPr id="281" name="" descr="{&quot;isTemplate&quot;:true,&quot;type&quot;:&quot;text&quot;}"/>
           <p:cNvSpPr txBox="1"/>
           <p:nvPr/>
         </p:nvSpPr>
@@ -16365,7 +13861,7 @@
       </p:sp>
       <p:sp>
         <p:nvSpPr>
-          <p:cNvPr id="326" name="" descr="{&quot;isTemplate&quot;:true,&quot;type&quot;:&quot;text&quot;}"/>
+          <p:cNvPr id="282" name="" descr="{&quot;isTemplate&quot;:true,&quot;type&quot;:&quot;text&quot;}"/>
           <p:cNvSpPr txBox="1"/>
           <p:nvPr/>
         </p:nvSpPr>
@@ -16440,7 +13936,7 @@
       </p:sp>
       <p:sp>
         <p:nvSpPr>
-          <p:cNvPr id="327" name="" descr="{&quot;isTemplate&quot;:true,&quot;type&quot;:&quot;text&quot;}"/>
+          <p:cNvPr id="283" name="" descr="{&quot;isTemplate&quot;:true,&quot;type&quot;:&quot;text&quot;}"/>
           <p:cNvSpPr txBox="1"/>
           <p:nvPr/>
         </p:nvSpPr>
@@ -16515,7 +14011,7 @@
       </p:sp>
       <p:sp>
         <p:nvSpPr>
-          <p:cNvPr id="328" name=""/>
+          <p:cNvPr id="284" name=""/>
           <p:cNvSpPr/>
           <p:nvPr/>
         </p:nvSpPr>
@@ -16541,7 +14037,7 @@
       </p:sp>
       <p:sp>
         <p:nvSpPr>
-          <p:cNvPr id="329" name="" descr="{&quot;isTemplate&quot;:true,&quot;type&quot;:&quot;text&quot;}"/>
+          <p:cNvPr id="285" name="" descr="{&quot;isTemplate&quot;:true,&quot;type&quot;:&quot;text&quot;}"/>
           <p:cNvSpPr txBox="1"/>
           <p:nvPr/>
         </p:nvSpPr>
@@ -16576,7 +14072,7 @@
       </p:sp>
       <p:sp>
         <p:nvSpPr>
-          <p:cNvPr id="330" name="" descr="{&quot;isTemplate&quot;:true,&quot;type&quot;:&quot;text&quot;}"/>
+          <p:cNvPr id="286" name="" descr="{&quot;isTemplate&quot;:true,&quot;type&quot;:&quot;text&quot;}"/>
           <p:cNvSpPr txBox="1"/>
           <p:nvPr/>
         </p:nvSpPr>
@@ -16621,7 +14117,7 @@
       </p:sp>
       <p:sp>
         <p:nvSpPr>
-          <p:cNvPr id="331" name="" descr="{&quot;isTemplate&quot;:true,&quot;type&quot;:&quot;text&quot;}"/>
+          <p:cNvPr id="287" name="" descr="{&quot;isTemplate&quot;:true,&quot;type&quot;:&quot;text&quot;}"/>
           <p:cNvSpPr txBox="1"/>
           <p:nvPr/>
         </p:nvSpPr>
@@ -16696,7 +14192,7 @@
       </p:sp>
       <p:sp>
         <p:nvSpPr>
-          <p:cNvPr id="332" name="" descr="{&quot;isTemplate&quot;:true,&quot;type&quot;:&quot;text&quot;}"/>
+          <p:cNvPr id="288" name="" descr="{&quot;isTemplate&quot;:true,&quot;type&quot;:&quot;text&quot;}"/>
           <p:cNvSpPr txBox="1"/>
           <p:nvPr/>
         </p:nvSpPr>
@@ -16761,7 +14257,7 @@
       </p:sp>
       <p:sp>
         <p:nvSpPr>
-          <p:cNvPr id="333" name=""/>
+          <p:cNvPr id="289" name=""/>
           <p:cNvSpPr/>
           <p:nvPr/>
         </p:nvSpPr>
@@ -16787,7 +14283,7 @@
       </p:sp>
       <p:sp>
         <p:nvSpPr>
-          <p:cNvPr id="334" name="" descr="{&quot;isTemplate&quot;:true,&quot;type&quot;:&quot;text&quot;}"/>
+          <p:cNvPr id="290" name="" descr="{&quot;isTemplate&quot;:true,&quot;type&quot;:&quot;text&quot;}"/>
           <p:cNvSpPr txBox="1"/>
           <p:nvPr/>
         </p:nvSpPr>
@@ -16822,7 +14318,7 @@
       </p:sp>
       <p:sp>
         <p:nvSpPr>
-          <p:cNvPr id="335" name="" descr="{&quot;isTemplate&quot;:true,&quot;type&quot;:&quot;text&quot;}"/>
+          <p:cNvPr id="291" name="" descr="{&quot;isTemplate&quot;:true,&quot;type&quot;:&quot;text&quot;}"/>
           <p:cNvSpPr txBox="1"/>
           <p:nvPr/>
         </p:nvSpPr>
@@ -16857,7 +14353,7 @@
       </p:sp>
       <p:sp>
         <p:nvSpPr>
-          <p:cNvPr id="336" name="" descr="{&quot;isTemplate&quot;:true,&quot;type&quot;:&quot;text&quot;}"/>
+          <p:cNvPr id="292" name="" descr="{&quot;isTemplate&quot;:true,&quot;type&quot;:&quot;text&quot;}"/>
           <p:cNvSpPr txBox="1"/>
           <p:nvPr/>
         </p:nvSpPr>
@@ -16912,7 +14408,7 @@
       </p:sp>
       <p:sp>
         <p:nvSpPr>
-          <p:cNvPr id="337" name="" descr="{&quot;isTemplate&quot;:true,&quot;type&quot;:&quot;text&quot;}"/>
+          <p:cNvPr id="293" name="" descr="{&quot;isTemplate&quot;:true,&quot;type&quot;:&quot;text&quot;}"/>
           <p:cNvSpPr txBox="1"/>
           <p:nvPr/>
         </p:nvSpPr>
@@ -16987,7 +14483,7 @@
       </p:sp>
       <p:sp>
         <p:nvSpPr>
-          <p:cNvPr id="338" name=""/>
+          <p:cNvPr id="294" name=""/>
           <p:cNvSpPr/>
           <p:nvPr/>
         </p:nvSpPr>
@@ -17013,7 +14509,7 @@
       </p:sp>
       <p:sp>
         <p:nvSpPr>
-          <p:cNvPr id="339" name="" descr="{&quot;isTemplate&quot;:true,&quot;type&quot;:&quot;text&quot;}"/>
+          <p:cNvPr id="295" name="" descr="{&quot;isTemplate&quot;:true,&quot;type&quot;:&quot;text&quot;}"/>
           <p:cNvSpPr txBox="1"/>
           <p:nvPr/>
         </p:nvSpPr>
@@ -17048,7 +14544,7 @@
       </p:sp>
       <p:sp>
         <p:nvSpPr>
-          <p:cNvPr id="340" name="" descr="{&quot;isTemplate&quot;:true,&quot;type&quot;:&quot;text&quot;}"/>
+          <p:cNvPr id="296" name="" descr="{&quot;isTemplate&quot;:true,&quot;type&quot;:&quot;text&quot;}"/>
           <p:cNvSpPr txBox="1"/>
           <p:nvPr/>
         </p:nvSpPr>
@@ -17083,7 +14579,7 @@
       </p:sp>
       <p:sp>
         <p:nvSpPr>
-          <p:cNvPr id="341" name="" descr="{&quot;isTemplate&quot;:true,&quot;type&quot;:&quot;text&quot;}"/>
+          <p:cNvPr id="297" name="" descr="{&quot;isTemplate&quot;:true,&quot;type&quot;:&quot;text&quot;}"/>
           <p:cNvSpPr txBox="1"/>
           <p:nvPr/>
         </p:nvSpPr>
@@ -17138,7 +14634,7 @@
       </p:sp>
       <p:sp>
         <p:nvSpPr>
-          <p:cNvPr id="342" name="" descr="{&quot;isTemplate&quot;:true,&quot;type&quot;:&quot;text&quot;}"/>
+          <p:cNvPr id="298" name="" descr="{&quot;isTemplate&quot;:true,&quot;type&quot;:&quot;text&quot;}"/>
           <p:cNvSpPr txBox="1"/>
           <p:nvPr/>
         </p:nvSpPr>
@@ -17213,7 +14709,7 @@
       </p:sp>
       <p:sp>
         <p:nvSpPr>
-          <p:cNvPr id="343" name=""/>
+          <p:cNvPr id="299" name=""/>
           <p:cNvSpPr/>
           <p:nvPr/>
         </p:nvSpPr>
@@ -17237,7 +14733,7 @@
       </p:sp>
       <p:sp>
         <p:nvSpPr>
-          <p:cNvPr id="344" name=""/>
+          <p:cNvPr id="300" name=""/>
           <p:cNvSpPr/>
           <p:nvPr/>
         </p:nvSpPr>
@@ -17277,7 +14773,7 @@
       </p:sp>
       <p:sp>
         <p:nvSpPr>
-          <p:cNvPr id="345" name="" descr="{&quot;isTemplate&quot;:true,&quot;type&quot;:&quot;text&quot;}"/>
+          <p:cNvPr id="301" name="" descr="{&quot;isTemplate&quot;:true,&quot;type&quot;:&quot;text&quot;}"/>
           <p:cNvSpPr txBox="1"/>
           <p:nvPr/>
         </p:nvSpPr>
@@ -17352,7 +14848,7 @@
       </p:sp>
       <p:sp>
         <p:nvSpPr>
-          <p:cNvPr id="346" name="" descr="{&quot;isTemplate&quot;:true,&quot;type&quot;:&quot;text&quot;}"/>
+          <p:cNvPr id="302" name="" descr="{&quot;isTemplate&quot;:true,&quot;type&quot;:&quot;text&quot;}"/>
           <p:cNvSpPr txBox="1"/>
           <p:nvPr/>
         </p:nvSpPr>
@@ -17475,7 +14971,7 @@
   <p:cSld>
     <p:spTree>
       <p:nvGrpSpPr>
-        <p:cNvPr id="347" name="" descr="&lt;Slide style={{ width: '1280px', height: '720px', backgroundColor: '#FFFFFF', padding: '0px', flexDirection: 'column' }}&gt;&#10;    &lt;Box style={{ width: '1280px', height: '8px', backgroundColor: '#1E4FA8' }} /&gt;&#10;    &lt;Box style={{ padding: '26px 40px 0px 40px', flexDirection: 'row', justifyContent: 'space-between', alignItems: 'flex-end' }}&gt;&#10;        &lt;Text style={{ fontSize: 34, fontWeight: 'bold', color: '#1E4FA8' }}&gt;算法地图：七步重建链，用在哪、算什么、管什么&lt;/Text&gt;&#10;        &lt;Text style={{ fontSize: 15, color: '#8B97A8' }}&gt;07 / 15&lt;/Text&gt;&#10;    &lt;/Box&gt;&#10;    &lt;Box style={{ padding: '10px 40px 0px 40px' }}&gt;&#10;        &lt;Text style={{ fontSize: 20, color: '#4A5568', lineHeight: 1.4 }}&gt;位姿重建真正发生在 &lt;b&gt;第 5 步&lt;/b&gt;：前三步只为它准备可信观测，第 4 步划定它的变量范围，第 6 步修它累积的漂移，第 7 步才轮到高斯。&lt;/Text&gt;&#10;    &lt;/Box&gt;&#10;&#10;    &lt;Box style={{ padding: '12px 40px 0px 40px', flexDirection: 'row', gap: 10 }}&gt;&#10;        &lt;Box style={{ flex: 1, height: 46, backgroundColor: '#F0F5FC', borderRadius: 4, alignItems: 'center', justifyContent: 'center' }}&gt;&#10;            &lt;Text style={{ fontSize: 19, fontWeight: 'bold', color: '#1E4FA8' }}&gt;① 检索&lt;/Text&gt;&#10;        &lt;/Box&gt;&#10;        &lt;Box style={{ flex: 1, height: 46, backgroundColor: '#F0F5FC', borderRadius: 4, alignItems: 'center', justifyContent: 'center' }}&gt;&#10;            &lt;Text style={{ fontSize: 19, fontWeight: 'bold', color: '#1E4FA8' }}&gt;② 粗筛&lt;/Text&gt;&#10;        &lt;/Box&gt;&#10;        &lt;Box style={{ flex: 1, height: 46, backgroundColor: '#F0F5FC', borderRadius: 4, alignItems: 'center', justifyContent: 'center' }}&gt;&#10;            &lt;Text style={{ fontSize: 19, fontWeight: 'bold', color: '#1E4FA8' }}&gt;③ 建边&lt;/Text&gt;&#10;        &lt;/Box&gt;&#10;        &lt;Box style={{ flex: 1, height: 46, backgroundColor: '#F0F5FC', borderRadius: 4, alignItems: 'center', justifyContent: 'center' }}&gt;&#10;            &lt;Text style={{ fontSize: 19, fontWeight: 'bold', color: '#1E4FA8' }}&gt;④ 选窗&lt;/Text&gt;&#10;        &lt;/Box&gt;&#10;        &lt;Box style={{ flex: 1, height: 46, backgroundColor: '#1E4FA8', borderRadius: 4, alignItems: 'center', justifyContent: 'center' }}&gt;&#10;            &lt;Text style={{ fontSize: 19, fontWeight: 'bold', color: '#FFFFFF' }}&gt;⑤ 局部 BA&lt;/Text&gt;&#10;        &lt;/Box&gt;&#10;        &lt;Box style={{ flex: 1, height: 46, backgroundColor: '#F0F5FC', borderRadius: 4, alignItems: 'center', justifyContent: 'center' }}&gt;&#10;            &lt;Text style={{ fontSize: 19, fontWeight: 'bold', color: '#1E4FA8' }}&gt;⑥ 纠偏&lt;/Text&gt;&#10;        &lt;/Box&gt;&#10;        &lt;Box style={{ flex: 1, height: 46, backgroundColor: '#F0F5FC', borderRadius: 4, alignItems: 'center', justifyContent: 'center' }}&gt;&#10;            &lt;Text style={{ fontSize: 19, fontWeight: 'bold', color: '#1E4FA8' }}&gt;⑦ 落位&lt;/Text&gt;&#10;        &lt;/Box&gt;&#10;    &lt;/Box&gt;&#10;&#10;    &lt;Box style={{ padding: '12px 40px 0px 40px', flexDirection: 'column' }}&gt;&#10;        &lt;Box style={{ flexDirection: 'row', backgroundColor: '#1E4FA8', padding: '10px 14px' }}&gt;&#10;            &lt;Text style={{ width: '44px', fontSize: 18, fontWeight: 'bold', color: '#FFFFFF' }}&gt;步&lt;/Text&gt;&#10;            &lt;Text style={{ width: '258px', fontSize: 18, fontWeight: 'bold', color: '#FFFFFF' }}&gt;算法&lt;/Text&gt;&#10;            &lt;Text style={{ flex: 2.2, fontSize: 18, fontWeight: 'bold', color: '#FFFFFF' }}&gt;核心公式 / 判据&lt;/Text&gt;&#10;            &lt;Text style={{ flex: 2.4, fontSize: 18, fontWeight: 'bold', color: '#FFFFFF' }}&gt;在重建中的作用&lt;/Text&gt;&#10;        &lt;/Box&gt;&#10;        &lt;Box style={{ flexDirection: 'row', alignItems: 'center', minHeight: 58, padding: '10px 14px', borderBottom: '1px solid #D6DCE5' }}&gt;&#10;            &lt;Text style={{ width: '44px', fontSize: 18, fontWeight: 'bold', color: '#1E4FA8' }}&gt;①&lt;/Text&gt;&#10;            &lt;Text style={{ width: '258px', fontSize: 18, color: '#1A2230' }}&gt;MegaLoc 全局描述子&lt;/Text&gt;&#10;            &lt;Text style={{ flex: 2.2, fontSize: 18, color: '#1A2230' }}&gt;s = d_i · d_j，取 top-K = 20&lt;/Text&gt;&#10;            &lt;Text style={{ flex: 2.4, fontSize: 18, color: '#1A2230' }}&gt;从全部历史帧里找&quot;可能同处&quot;的候选，与帧序无关&lt;/Text&gt;&#10;        &lt;/Box&gt;&#10;        &lt;Box style={{ flexDirection: 'row', alignItems: 'center', minHeight: 58, padding: '10px 14px', backgroundColor: '#F7F9FC', borderBottom: '1px solid #D6DCE5' }}&gt;&#10;            &lt;Text style={{ width: '44px', fontSize: 18, fontWeight: 'bold', color: '#1E4FA8' }}&gt;②&lt;/Text&gt;&#10;            &lt;Text style={{ width: '258px', fontSize: 18, color: '#1A2230' }}&gt;XFeat 局部特征穷举&lt;/Text&gt;&#10;            &lt;Text style={{ flex: 2.2, fontSize: 18, color: '#1A2230' }}&gt;K' = top-5 |M_ij|（按内点数）&lt;/Text&gt;&#10;            &lt;Text style={{ flex: 2.4, fontSize: 18, color: '#1A2230' }}&gt;淘汰&quot;外观像、但没对上点&quot;的候选&lt;/Text&gt;&#10;        &lt;/Box&gt;&#10;        &lt;Box style={{ flexDirection: 'row', alignItems: 'center', minHeight: 58, padding: '10px 14px', borderBottom: '1px solid #D6DCE5' }}&gt;&#10;            &lt;Text style={{ width: '44px', fontSize: 18, fontWeight: 'bold', color: '#1E4FA8' }}&gt;③&lt;/Text&gt;&#10;            &lt;Text style={{ width: '258px', fontSize: 18, color: '#1A2230' }}&gt;LightGlue + RANSAC&lt;/Text&gt;&#10;            &lt;Text style={{ flex: 2.2, fontSize: 18, color: '#1A2230' }}&gt;|M_ij| &amp;gt; τ_m = 500 才建边；w_ij = 1/|M_ij|&lt;/Text&gt;&#10;            &lt;Text style={{ flex: 2.4, fontSize: 18, color: '#1A2230' }}&gt;唯一产生共视约束的一步，结果写入协视图&lt;/Text&gt;&#10;        &lt;/Box&gt;&#10;        &lt;Box style={{ flexDirection: 'row', alignItems: 'center', minHeight: 58, padding: '10px 14px', backgroundColor: '#F7F9FC', borderBottom: '1px solid #D6DCE5' }}&gt;&#10;            &lt;Text style={{ width: '44px', fontSize: 18, fontWeight: 'bold', color: '#1E4FA8' }}&gt;④&lt;/Text&gt;&#10;            &lt;Text style={{ width: '258px', fontSize: 18, color: '#1A2230' }}&gt;协视图贪心扩张（式 1）&lt;/Text&gt;&#10;            &lt;Text style={{ flex: 2.2, fontSize: 18, color: '#1A2230' }}&gt;S ← S ∪ argmax Σ_j |M_ij|，至 20 帧&lt;/Text&gt;&#10;            &lt;Text style={{ flex: 2.4, fontSize: 18, color: '#1A2230' }}&gt;划定 BA 的变量范围：最该一起优化的 20 帧&lt;/Text&gt;&#10;        &lt;/Box&gt;&#10;        &lt;Box style={{ flexDirection: 'row', alignItems: 'center', minHeight: 58, padding: '10px 14px', backgroundColor: '#E8F0FB', borderTop: '1px solid #3D7BD9', borderBottom: '1px solid #3D7BD9' }}&gt;&#10;            &lt;Text style={{ width: '44px', fontSize: 18, fontWeight: 'bold', color: '#1E4FA8' }}&gt;⑤&lt;/Text&gt;&#10;            &lt;Text style={{ width: '258px', fontSize: 18, fontWeight: 'bold', color: '#1A2230' }}&gt;GPU 局部 BA（LM + Schur）&lt;/Text&gt;&#10;            &lt;Text style={{ flex: 2.2, fontSize: 18, fontWeight: 'bold', color: '#1A2230' }}&gt;min Σ ρ( ||u_ij − π(T_i, X_j)||² )&lt;/Text&gt;&#10;            &lt;Text style={{ flex: 2.4, fontSize: 18, fontWeight: 'bold', color: '#1A2230' }}&gt;真正解出位姿 T_i 与三维点 X_j——重建本体&lt;/Text&gt;&#10;        &lt;/Box&gt;&#10;        &lt;Box style={{ flexDirection: 'row', alignItems: 'center', minHeight: 58, padding: '10px 14px', borderBottom: '1px solid #D6DCE5' }}&gt;&#10;            &lt;Text style={{ width: '44px', fontSize: 18, fontWeight: 'bold', color: '#1E4FA8' }}&gt;⑥&lt;/Text&gt;&#10;            &lt;Text style={{ width: '258px', fontSize: 18, color: '#1A2230' }}&gt;簇级回环 + 图传播&lt;/Text&gt;&#10;            &lt;Text style={{ flex: 2.2, fontSize: 18, color: '#1A2230' }}&gt;跳数 &amp;gt; 5 触发；T_Δ = T_a^opt(T_a^init)^-1&lt;/Text&gt;&#10;            &lt;Text style={{ flex: 2.4, fontSize: 18, color: '#1A2230' }}&gt;两簇各扩 N/2 帧焊接，得 Sim(3) 后沿主干摊回&lt;/Text&gt;&#10;        &lt;/Box&gt;&#10;        &lt;Box style={{ flexDirection: 'row', alignItems: 'center', minHeight: 58, padding: '10px 14px', backgroundColor: '#F7F9FC' }}&gt;&#10;            &lt;Text style={{ width: '44px', fontSize: 18, fontWeight: 'bold', color: '#1E4FA8' }}&gt;⑦&lt;/Text&gt;&#10;            &lt;Text style={{ width: '258px', fontSize: 18, color: '#1A2230' }}&gt;分块深度对齐 + 渐进层级&lt;/Text&gt;&#10;            &lt;Text style={{ flex: 2.2, fontSize: 18, color: '#1A2230' }}&gt;size &amp;lt; τ_l 且占比 &amp;gt; 20% → KL 合并&lt;/Text&gt;&#10;            &lt;Text style={{ flex: 2.4, fontSize: 18, color: '#1A2230' }}&gt;位姿定后才投放高斯；层级只压显存，不改位姿&lt;/Text&gt;&#10;        &lt;/Box&gt;&#10;    &lt;/Box&gt;&#10;&#10;    &lt;Box style={{ padding: '12px 40px 0px 40px' }}&gt;&#10;        &lt;Text style={{ fontSize: 16, color: '#8B97A8', lineHeight: 1.45 }}&gt;加粗行是位姿求解本身，第 ⑥ 步会对已求出的位姿再整体修正一次。符号：u 像素观测、π 投影、ρ 鲁棒核、T 相机位姿、X 路标点。&lt;/Text&gt;&#10;        &lt;Text style={{ fontSize: 16, color: '#8B97A8', lineHeight: 1.45, marginTop: 3 }}&gt;① 的 VPR 论文写 MixVPR，开源代码因许可原因换为 MegaLoc；τ_m = 500，τ_l = 0.5 px，N = 20，K = 20。&lt;/Text&gt;&#10;    &lt;/Box&gt;&#10;&lt;/Slide&gt;&#10;"/>
+        <p:cNvPr id="303" name="" descr="&lt;Slide style={{ width: '1280px', height: '720px', backgroundColor: '#FFFFFF', padding: '0px', flexDirection: 'column' }}&gt;&#10;    &lt;Box style={{ width: '1280px', height: '8px', backgroundColor: '#1E4FA8' }} /&gt;&#10;    &lt;Box style={{ padding: '26px 40px 0px 40px', flexDirection: 'row', justifyContent: 'space-between', alignItems: 'flex-end' }}&gt;&#10;        &lt;Text style={{ fontSize: 34, fontWeight: 'bold', color: '#1E4FA8' }}&gt;算法地图：七步重建链，用在哪、算什么、管什么&lt;/Text&gt;&#10;        &lt;Text style={{ fontSize: 15, color: '#8B97A8' }}&gt;07 / 14&lt;/Text&gt;&#10;    &lt;/Box&gt;&#10;    &lt;Box style={{ padding: '10px 40px 0px 40px' }}&gt;&#10;        &lt;Text style={{ fontSize: 20, color: '#4A5568', lineHeight: 1.4 }}&gt;位姿重建真正发生在 &lt;b&gt;第 5 步&lt;/b&gt;：前三步只为它准备可信观测，第 4 步划定它的变量范围，第 6 步修它累积的漂移，第 7 步才轮到高斯。&lt;/Text&gt;&#10;    &lt;/Box&gt;&#10;&#10;    &lt;Box style={{ padding: '12px 40px 0px 40px', flexDirection: 'row', gap: 10 }}&gt;&#10;        &lt;Box style={{ flex: 1, height: 46, backgroundColor: '#F0F5FC', borderRadius: 4, alignItems: 'center', justifyContent: 'center' }}&gt;&#10;            &lt;Text style={{ fontSize: 19, fontWeight: 'bold', color: '#1E4FA8' }}&gt;① 检索&lt;/Text&gt;&#10;        &lt;/Box&gt;&#10;        &lt;Box style={{ flex: 1, height: 46, backgroundColor: '#F0F5FC', borderRadius: 4, alignItems: 'center', justifyContent: 'center' }}&gt;&#10;            &lt;Text style={{ fontSize: 19, fontWeight: 'bold', color: '#1E4FA8' }}&gt;② 粗筛&lt;/Text&gt;&#10;        &lt;/Box&gt;&#10;        &lt;Box style={{ flex: 1, height: 46, backgroundColor: '#F0F5FC', borderRadius: 4, alignItems: 'center', justifyContent: 'center' }}&gt;&#10;            &lt;Text style={{ fontSize: 19, fontWeight: 'bold', color: '#1E4FA8' }}&gt;③ 建边&lt;/Text&gt;&#10;        &lt;/Box&gt;&#10;        &lt;Box style={{ flex: 1, height: 46, backgroundColor: '#F0F5FC', borderRadius: 4, alignItems: 'center', justifyContent: 'center' }}&gt;&#10;            &lt;Text style={{ fontSize: 19, fontWeight: 'bold', color: '#1E4FA8' }}&gt;④ 选窗&lt;/Text&gt;&#10;        &lt;/Box&gt;&#10;        &lt;Box style={{ flex: 1, height: 46, backgroundColor: '#1E4FA8', borderRadius: 4, alignItems: 'center', justifyContent: 'center' }}&gt;&#10;            &lt;Text style={{ fontSize: 19, fontWeight: 'bold', color: '#FFFFFF' }}&gt;⑤ 局部 BA&lt;/Text&gt;&#10;        &lt;/Box&gt;&#10;        &lt;Box style={{ flex: 1, height: 46, backgroundColor: '#F0F5FC', borderRadius: 4, alignItems: 'center', justifyContent: 'center' }}&gt;&#10;            &lt;Text style={{ fontSize: 19, fontWeight: 'bold', color: '#1E4FA8' }}&gt;⑥ 纠偏&lt;/Text&gt;&#10;        &lt;/Box&gt;&#10;        &lt;Box style={{ flex: 1, height: 46, backgroundColor: '#F0F5FC', borderRadius: 4, alignItems: 'center', justifyContent: 'center' }}&gt;&#10;            &lt;Text style={{ fontSize: 19, fontWeight: 'bold', color: '#1E4FA8' }}&gt;⑦ 落位&lt;/Text&gt;&#10;        &lt;/Box&gt;&#10;    &lt;/Box&gt;&#10;&#10;    &lt;Box style={{ padding: '12px 40px 0px 40px', flexDirection: 'column' }}&gt;&#10;        &lt;Box style={{ flexDirection: 'row', backgroundColor: '#1E4FA8', padding: '10px 14px' }}&gt;&#10;            &lt;Text style={{ width: '44px', fontSize: 18, fontWeight: 'bold', color: '#FFFFFF' }}&gt;步&lt;/Text&gt;&#10;            &lt;Text style={{ width: '258px', fontSize: 18, fontWeight: 'bold', color: '#FFFFFF' }}&gt;算法&lt;/Text&gt;&#10;            &lt;Text style={{ flex: 2.2, fontSize: 18, fontWeight: 'bold', color: '#FFFFFF' }}&gt;核心公式 / 判据&lt;/Text&gt;&#10;            &lt;Text style={{ flex: 2.4, fontSize: 18, fontWeight: 'bold', color: '#FFFFFF' }}&gt;在重建中的作用&lt;/Text&gt;&#10;        &lt;/Box&gt;&#10;        &lt;Box style={{ flexDirection: 'row', alignItems: 'center', minHeight: 58, padding: '10px 14px', borderBottom: '1px solid #D6DCE5' }}&gt;&#10;            &lt;Text style={{ width: '44px', fontSize: 18, fontWeight: 'bold', color: '#1E4FA8' }}&gt;①&lt;/Text&gt;&#10;            &lt;Text style={{ width: '258px', fontSize: 18, color: '#1A2230' }}&gt;MegaLoc 全局描述子&lt;/Text&gt;&#10;            &lt;Text style={{ flex: 2.2, fontSize: 18, color: '#1A2230' }}&gt;s = d_i · d_j，取 top-K = 20&lt;/Text&gt;&#10;            &lt;Text style={{ flex: 2.4, fontSize: 18, color: '#1A2230' }}&gt;从全部历史帧里找&quot;可能同处&quot;的候选，与帧序无关&lt;/Text&gt;&#10;        &lt;/Box&gt;&#10;        &lt;Box style={{ flexDirection: 'row', alignItems: 'center', minHeight: 58, padding: '10px 14px', backgroundColor: '#F7F9FC', borderBottom: '1px solid #D6DCE5' }}&gt;&#10;            &lt;Text style={{ width: '44px', fontSize: 18, fontWeight: 'bold', color: '#1E4FA8' }}&gt;②&lt;/Text&gt;&#10;            &lt;Text style={{ width: '258px', fontSize: 18, color: '#1A2230' }}&gt;XFeat 局部特征穷举&lt;/Text&gt;&#10;            &lt;Text style={{ flex: 2.2, fontSize: 18, color: '#1A2230' }}&gt;K' = top-5 |M_ij|（按内点数）&lt;/Text&gt;&#10;            &lt;Text style={{ flex: 2.4, fontSize: 18, color: '#1A2230' }}&gt;淘汰&quot;外观像、但没对上点&quot;的候选&lt;/Text&gt;&#10;        &lt;/Box&gt;&#10;        &lt;Box style={{ flexDirection: 'row', alignItems: 'center', minHeight: 58, padding: '10px 14px', borderBottom: '1px solid #D6DCE5' }}&gt;&#10;            &lt;Text style={{ width: '44px', fontSize: 18, fontWeight: 'bold', color: '#1E4FA8' }}&gt;③&lt;/Text&gt;&#10;            &lt;Text style={{ width: '258px', fontSize: 18, color: '#1A2230' }}&gt;LightGlue + RANSAC&lt;/Text&gt;&#10;            &lt;Text style={{ flex: 2.2, fontSize: 18, color: '#1A2230' }}&gt;|M_ij| &amp;gt; τ_m = 500 才建边；w_ij = 1/|M_ij|&lt;/Text&gt;&#10;            &lt;Text style={{ flex: 2.4, fontSize: 18, color: '#1A2230' }}&gt;唯一产生共视约束的一步，结果写入协视图&lt;/Text&gt;&#10;        &lt;/Box&gt;&#10;        &lt;Box style={{ flexDirection: 'row', alignItems: 'center', minHeight: 58, padding: '10px 14px', backgroundColor: '#F7F9FC', borderBottom: '1px solid #D6DCE5' }}&gt;&#10;            &lt;Text style={{ width: '44px', fontSize: 18, fontWeight: 'bold', color: '#1E4FA8' }}&gt;④&lt;/Text&gt;&#10;            &lt;Text style={{ width: '258px', fontSize: 18, color: '#1A2230' }}&gt;协视图贪心扩张（式 1）&lt;/Text&gt;&#10;            &lt;Text style={{ flex: 2.2, fontSize: 18, color: '#1A2230' }}&gt;S ← S ∪ argmax Σ_j |M_ij|，至 20 帧&lt;/Text&gt;&#10;            &lt;Text style={{ flex: 2.4, fontSize: 18, color: '#1A2230' }}&gt;划定 BA 的变量范围：最该一起优化的 20 帧&lt;/Text&gt;&#10;        &lt;/Box&gt;&#10;        &lt;Box style={{ flexDirection: 'row', alignItems: 'center', minHeight: 58, padding: '10px 14px', backgroundColor: '#E8F0FB', borderTop: '1px solid #3D7BD9', borderBottom: '1px solid #3D7BD9' }}&gt;&#10;            &lt;Text style={{ width: '44px', fontSize: 18, fontWeight: 'bold', color: '#1E4FA8' }}&gt;⑤&lt;/Text&gt;&#10;            &lt;Text style={{ width: '258px', fontSize: 18, fontWeight: 'bold', color: '#1A2230' }}&gt;GPU 局部 BA（LM + Schur）&lt;/Text&gt;&#10;            &lt;Text style={{ flex: 2.2, fontSize: 18, fontWeight: 'bold', color: '#1A2230' }}&gt;min Σ ρ( ||u_ij − π(T_i, X_j)||² )&lt;/Text&gt;&#10;            &lt;Text style={{ flex: 2.4, fontSize: 18, fontWeight: 'bold', color: '#1A2230' }}&gt;真正解出位姿 T_i 与三维点 X_j——重建本体&lt;/Text&gt;&#10;        &lt;/Box&gt;&#10;        &lt;Box style={{ flexDirection: 'row', alignItems: 'center', minHeight: 58, padding: '10px 14px', borderBottom: '1px solid #D6DCE5' }}&gt;&#10;            &lt;Text style={{ width: '44px', fontSize: 18, fontWeight: 'bold', color: '#1E4FA8' }}&gt;⑥&lt;/Text&gt;&#10;            &lt;Text style={{ width: '258px', fontSize: 18, color: '#1A2230' }}&gt;簇级回环 + 图传播&lt;/Text&gt;&#10;            &lt;Text style={{ flex: 2.2, fontSize: 18, color: '#1A2230' }}&gt;跳数 &amp;gt; 5 触发；T_Δ = T_a^opt(T_a^init)^-1&lt;/Text&gt;&#10;            &lt;Text style={{ flex: 2.4, fontSize: 18, color: '#1A2230' }}&gt;两簇各扩 N/2 帧焊接，得 Sim(3) 后沿主干摊回&lt;/Text&gt;&#10;        &lt;/Box&gt;&#10;        &lt;Box style={{ flexDirection: 'row', alignItems: 'center', minHeight: 58, padding: '10px 14px', backgroundColor: '#F7F9FC' }}&gt;&#10;            &lt;Text style={{ width: '44px', fontSize: 18, fontWeight: 'bold', color: '#1E4FA8' }}&gt;⑦&lt;/Text&gt;&#10;            &lt;Text style={{ width: '258px', fontSize: 18, color: '#1A2230' }}&gt;分块深度对齐 + 渐进层级&lt;/Text&gt;&#10;            &lt;Text style={{ flex: 2.2, fontSize: 18, color: '#1A2230' }}&gt;size &amp;lt; τ_l 且占比 &amp;gt; 20% → KL 合并&lt;/Text&gt;&#10;            &lt;Text style={{ flex: 2.4, fontSize: 18, color: '#1A2230' }}&gt;位姿定后才投放高斯；层级只压显存，不改位姿&lt;/Text&gt;&#10;        &lt;/Box&gt;&#10;    &lt;/Box&gt;&#10;&#10;    &lt;Box style={{ padding: '12px 40px 0px 40px' }}&gt;&#10;        &lt;Text style={{ fontSize: 16, color: '#8B97A8', lineHeight: 1.45 }}&gt;加粗行是位姿求解本身，第 ⑥ 步会对已求出的位姿再整体修正一次。符号：u 像素观测、π 投影、ρ 鲁棒核、T 相机位姿、X 路标点。&lt;/Text&gt;&#10;        &lt;Text style={{ fontSize: 16, color: '#8B97A8', lineHeight: 1.45, marginTop: 3 }}&gt;① 的 VPR 论文写 MixVPR，开源代码因许可原因换为 MegaLoc；τ_m = 500，τ_l = 0.5 px，N = 20，K = 20。&lt;/Text&gt;&#10;    &lt;/Box&gt;&#10;&lt;/Slide&gt;&#10;"/>
         <p:cNvGrpSpPr/>
         <p:nvPr/>
       </p:nvGrpSpPr>
@@ -17489,7 +14985,7 @@
       </p:grpSpPr>
       <p:sp>
         <p:nvSpPr>
-          <p:cNvPr id="348" name=""/>
+          <p:cNvPr id="304" name=""/>
           <p:cNvSpPr/>
           <p:nvPr/>
         </p:nvSpPr>
@@ -17513,7 +15009,7 @@
       </p:sp>
       <p:sp>
         <p:nvSpPr>
-          <p:cNvPr id="349" name=""/>
+          <p:cNvPr id="305" name=""/>
           <p:cNvSpPr/>
           <p:nvPr/>
         </p:nvSpPr>
@@ -17537,7 +15033,7 @@
       </p:sp>
       <p:sp>
         <p:nvSpPr>
-          <p:cNvPr id="350" name="" descr="{&quot;isTemplate&quot;:true,&quot;type&quot;:&quot;text&quot;}"/>
+          <p:cNvPr id="306" name="" descr="{&quot;isTemplate&quot;:true,&quot;type&quot;:&quot;text&quot;}"/>
           <p:cNvSpPr txBox="1"/>
           <p:nvPr/>
         </p:nvSpPr>
@@ -17572,7 +15068,7 @@
       </p:sp>
       <p:sp>
         <p:nvSpPr>
-          <p:cNvPr id="351" name="" descr="{&quot;isTemplate&quot;:true,&quot;type&quot;:&quot;text&quot;}"/>
+          <p:cNvPr id="307" name="" descr="{&quot;isTemplate&quot;:true,&quot;type&quot;:&quot;text&quot;}"/>
           <p:cNvSpPr txBox="1"/>
           <p:nvPr/>
         </p:nvSpPr>
@@ -17599,15 +15095,15 @@
                 <a:latin typeface="Microsoft YaHei"/>
                 <a:ea typeface="Microsoft YaHei"/>
               </a:rPr>
-              <a:t>07 / 15</a:t>
-            </a:r>
-            <a:endParaRPr/>
-          </a:p>
-        </p:txBody>
-      </p:sp>
-      <p:sp>
-        <p:nvSpPr>
-          <p:cNvPr id="352" name="" descr="{&quot;isTemplate&quot;:true,&quot;type&quot;:&quot;text&quot;}"/>
+              <a:t>07 / 14</a:t>
+            </a:r>
+            <a:endParaRPr/>
+          </a:p>
+        </p:txBody>
+      </p:sp>
+      <p:sp>
+        <p:nvSpPr>
+          <p:cNvPr id="308" name="" descr="{&quot;isTemplate&quot;:true,&quot;type&quot;:&quot;text&quot;}"/>
           <p:cNvSpPr txBox="1"/>
           <p:nvPr/>
         </p:nvSpPr>
@@ -17752,7 +15248,7 @@
       </p:sp>
       <p:sp>
         <p:nvSpPr>
-          <p:cNvPr id="353" name=""/>
+          <p:cNvPr id="309" name=""/>
           <p:cNvSpPr/>
           <p:nvPr/>
         </p:nvSpPr>
@@ -17778,7 +15274,7 @@
       </p:sp>
       <p:sp>
         <p:nvSpPr>
-          <p:cNvPr id="354" name="" descr="{&quot;isTemplate&quot;:true,&quot;type&quot;:&quot;text&quot;}"/>
+          <p:cNvPr id="310" name="" descr="{&quot;isTemplate&quot;:true,&quot;type&quot;:&quot;text&quot;}"/>
           <p:cNvSpPr txBox="1"/>
           <p:nvPr/>
         </p:nvSpPr>
@@ -17823,7 +15319,7 @@
       </p:sp>
       <p:sp>
         <p:nvSpPr>
-          <p:cNvPr id="355" name=""/>
+          <p:cNvPr id="311" name=""/>
           <p:cNvSpPr/>
           <p:nvPr/>
         </p:nvSpPr>
@@ -17849,7 +15345,7 @@
       </p:sp>
       <p:sp>
         <p:nvSpPr>
-          <p:cNvPr id="356" name="" descr="{&quot;isTemplate&quot;:true,&quot;type&quot;:&quot;text&quot;}"/>
+          <p:cNvPr id="312" name="" descr="{&quot;isTemplate&quot;:true,&quot;type&quot;:&quot;text&quot;}"/>
           <p:cNvSpPr txBox="1"/>
           <p:nvPr/>
         </p:nvSpPr>
@@ -17894,7 +15390,7 @@
       </p:sp>
       <p:sp>
         <p:nvSpPr>
-          <p:cNvPr id="357" name=""/>
+          <p:cNvPr id="313" name=""/>
           <p:cNvSpPr/>
           <p:nvPr/>
         </p:nvSpPr>
@@ -17920,7 +15416,7 @@
       </p:sp>
       <p:sp>
         <p:nvSpPr>
-          <p:cNvPr id="358" name="" descr="{&quot;isTemplate&quot;:true,&quot;type&quot;:&quot;text&quot;}"/>
+          <p:cNvPr id="314" name="" descr="{&quot;isTemplate&quot;:true,&quot;type&quot;:&quot;text&quot;}"/>
           <p:cNvSpPr txBox="1"/>
           <p:nvPr/>
         </p:nvSpPr>
@@ -17965,7 +15461,7 @@
       </p:sp>
       <p:sp>
         <p:nvSpPr>
-          <p:cNvPr id="359" name=""/>
+          <p:cNvPr id="315" name=""/>
           <p:cNvSpPr/>
           <p:nvPr/>
         </p:nvSpPr>
@@ -17991,7 +15487,7 @@
       </p:sp>
       <p:sp>
         <p:nvSpPr>
-          <p:cNvPr id="360" name="" descr="{&quot;isTemplate&quot;:true,&quot;type&quot;:&quot;text&quot;}"/>
+          <p:cNvPr id="316" name="" descr="{&quot;isTemplate&quot;:true,&quot;type&quot;:&quot;text&quot;}"/>
           <p:cNvSpPr txBox="1"/>
           <p:nvPr/>
         </p:nvSpPr>
@@ -18036,7 +15532,7 @@
       </p:sp>
       <p:sp>
         <p:nvSpPr>
-          <p:cNvPr id="361" name=""/>
+          <p:cNvPr id="317" name=""/>
           <p:cNvSpPr/>
           <p:nvPr/>
         </p:nvSpPr>
@@ -18062,7 +15558,7 @@
       </p:sp>
       <p:sp>
         <p:nvSpPr>
-          <p:cNvPr id="362" name="" descr="{&quot;isTemplate&quot;:true,&quot;type&quot;:&quot;text&quot;}"/>
+          <p:cNvPr id="318" name="" descr="{&quot;isTemplate&quot;:true,&quot;type&quot;:&quot;text&quot;}"/>
           <p:cNvSpPr txBox="1"/>
           <p:nvPr/>
         </p:nvSpPr>
@@ -18117,7 +15613,7 @@
       </p:sp>
       <p:sp>
         <p:nvSpPr>
-          <p:cNvPr id="363" name=""/>
+          <p:cNvPr id="319" name=""/>
           <p:cNvSpPr/>
           <p:nvPr/>
         </p:nvSpPr>
@@ -18143,7 +15639,7 @@
       </p:sp>
       <p:sp>
         <p:nvSpPr>
-          <p:cNvPr id="364" name="" descr="{&quot;isTemplate&quot;:true,&quot;type&quot;:&quot;text&quot;}"/>
+          <p:cNvPr id="320" name="" descr="{&quot;isTemplate&quot;:true,&quot;type&quot;:&quot;text&quot;}"/>
           <p:cNvSpPr txBox="1"/>
           <p:nvPr/>
         </p:nvSpPr>
@@ -18188,7 +15684,7 @@
       </p:sp>
       <p:sp>
         <p:nvSpPr>
-          <p:cNvPr id="365" name=""/>
+          <p:cNvPr id="321" name=""/>
           <p:cNvSpPr/>
           <p:nvPr/>
         </p:nvSpPr>
@@ -18214,7 +15710,7 @@
       </p:sp>
       <p:sp>
         <p:nvSpPr>
-          <p:cNvPr id="366" name="" descr="{&quot;isTemplate&quot;:true,&quot;type&quot;:&quot;text&quot;}"/>
+          <p:cNvPr id="322" name="" descr="{&quot;isTemplate&quot;:true,&quot;type&quot;:&quot;text&quot;}"/>
           <p:cNvSpPr txBox="1"/>
           <p:nvPr/>
         </p:nvSpPr>
@@ -18259,7 +15755,7 @@
       </p:sp>
       <p:sp>
         <p:nvSpPr>
-          <p:cNvPr id="367" name=""/>
+          <p:cNvPr id="323" name=""/>
           <p:cNvSpPr/>
           <p:nvPr/>
         </p:nvSpPr>
@@ -18283,7 +15779,7 @@
       </p:sp>
       <p:sp>
         <p:nvSpPr>
-          <p:cNvPr id="368" name="" descr="{&quot;isTemplate&quot;:true,&quot;type&quot;:&quot;text&quot;}"/>
+          <p:cNvPr id="324" name="" descr="{&quot;isTemplate&quot;:true,&quot;type&quot;:&quot;text&quot;}"/>
           <p:cNvSpPr txBox="1"/>
           <p:nvPr/>
         </p:nvSpPr>
@@ -18318,7 +15814,7 @@
       </p:sp>
       <p:sp>
         <p:nvSpPr>
-          <p:cNvPr id="369" name="" descr="{&quot;isTemplate&quot;:true,&quot;type&quot;:&quot;text&quot;}"/>
+          <p:cNvPr id="325" name="" descr="{&quot;isTemplate&quot;:true,&quot;type&quot;:&quot;text&quot;}"/>
           <p:cNvSpPr txBox="1"/>
           <p:nvPr/>
         </p:nvSpPr>
@@ -18353,7 +15849,7 @@
       </p:sp>
       <p:sp>
         <p:nvSpPr>
-          <p:cNvPr id="370" name="" descr="{&quot;isTemplate&quot;:true,&quot;type&quot;:&quot;text&quot;}"/>
+          <p:cNvPr id="326" name="" descr="{&quot;isTemplate&quot;:true,&quot;type&quot;:&quot;text&quot;}"/>
           <p:cNvSpPr txBox="1"/>
           <p:nvPr/>
         </p:nvSpPr>
@@ -18408,7 +15904,7 @@
       </p:sp>
       <p:sp>
         <p:nvSpPr>
-          <p:cNvPr id="371" name="" descr="{&quot;isTemplate&quot;:true,&quot;type&quot;:&quot;text&quot;}"/>
+          <p:cNvPr id="327" name="" descr="{&quot;isTemplate&quot;:true,&quot;type&quot;:&quot;text&quot;}"/>
           <p:cNvSpPr txBox="1"/>
           <p:nvPr/>
         </p:nvSpPr>
@@ -18443,7 +15939,7 @@
       </p:sp>
       <p:sp>
         <p:nvSpPr>
-          <p:cNvPr id="372" name=""/>
+          <p:cNvPr id="328" name=""/>
           <p:cNvSpPr/>
           <p:nvPr/>
         </p:nvSpPr>
@@ -18483,7 +15979,7 @@
       </p:sp>
       <p:sp>
         <p:nvSpPr>
-          <p:cNvPr id="373" name="" descr="{&quot;isTemplate&quot;:true,&quot;type&quot;:&quot;text&quot;}"/>
+          <p:cNvPr id="329" name="" descr="{&quot;isTemplate&quot;:true,&quot;type&quot;:&quot;text&quot;}"/>
           <p:cNvSpPr txBox="1"/>
           <p:nvPr/>
         </p:nvSpPr>
@@ -18518,7 +16014,7 @@
       </p:sp>
       <p:sp>
         <p:nvSpPr>
-          <p:cNvPr id="374" name="" descr="{&quot;isTemplate&quot;:true,&quot;type&quot;:&quot;text&quot;}"/>
+          <p:cNvPr id="330" name="" descr="{&quot;isTemplate&quot;:true,&quot;type&quot;:&quot;text&quot;}"/>
           <p:cNvSpPr txBox="1"/>
           <p:nvPr/>
         </p:nvSpPr>
@@ -18563,7 +16059,7 @@
       </p:sp>
       <p:sp>
         <p:nvSpPr>
-          <p:cNvPr id="375" name="" descr="{&quot;isTemplate&quot;:true,&quot;type&quot;:&quot;text&quot;}"/>
+          <p:cNvPr id="331" name="" descr="{&quot;isTemplate&quot;:true,&quot;type&quot;:&quot;text&quot;}"/>
           <p:cNvSpPr txBox="1"/>
           <p:nvPr/>
         </p:nvSpPr>
@@ -18618,7 +16114,7 @@
       </p:sp>
       <p:sp>
         <p:nvSpPr>
-          <p:cNvPr id="376" name="" descr="{&quot;isTemplate&quot;:true,&quot;type&quot;:&quot;text&quot;}"/>
+          <p:cNvPr id="332" name="" descr="{&quot;isTemplate&quot;:true,&quot;type&quot;:&quot;text&quot;}"/>
           <p:cNvSpPr txBox="1"/>
           <p:nvPr/>
         </p:nvSpPr>
@@ -18693,7 +16189,7 @@
       </p:sp>
       <p:sp>
         <p:nvSpPr>
-          <p:cNvPr id="377" name=""/>
+          <p:cNvPr id="333" name=""/>
           <p:cNvSpPr/>
           <p:nvPr/>
         </p:nvSpPr>
@@ -18717,7 +16213,7 @@
       </p:sp>
       <p:sp>
         <p:nvSpPr>
-          <p:cNvPr id="378" name=""/>
+          <p:cNvPr id="334" name=""/>
           <p:cNvSpPr/>
           <p:nvPr/>
         </p:nvSpPr>
@@ -18757,7 +16253,7 @@
       </p:sp>
       <p:sp>
         <p:nvSpPr>
-          <p:cNvPr id="379" name="" descr="{&quot;isTemplate&quot;:true,&quot;type&quot;:&quot;text&quot;}"/>
+          <p:cNvPr id="335" name="" descr="{&quot;isTemplate&quot;:true,&quot;type&quot;:&quot;text&quot;}"/>
           <p:cNvSpPr txBox="1"/>
           <p:nvPr/>
         </p:nvSpPr>
@@ -18792,7 +16288,7 @@
       </p:sp>
       <p:sp>
         <p:nvSpPr>
-          <p:cNvPr id="380" name="" descr="{&quot;isTemplate&quot;:true,&quot;type&quot;:&quot;text&quot;}"/>
+          <p:cNvPr id="336" name="" descr="{&quot;isTemplate&quot;:true,&quot;type&quot;:&quot;text&quot;}"/>
           <p:cNvSpPr txBox="1"/>
           <p:nvPr/>
         </p:nvSpPr>
@@ -18837,7 +16333,7 @@
       </p:sp>
       <p:sp>
         <p:nvSpPr>
-          <p:cNvPr id="381" name="" descr="{&quot;isTemplate&quot;:true,&quot;type&quot;:&quot;text&quot;}"/>
+          <p:cNvPr id="337" name="" descr="{&quot;isTemplate&quot;:true,&quot;type&quot;:&quot;text&quot;}"/>
           <p:cNvSpPr txBox="1"/>
           <p:nvPr/>
         </p:nvSpPr>
@@ -18882,7 +16378,7 @@
       </p:sp>
       <p:sp>
         <p:nvSpPr>
-          <p:cNvPr id="382" name="" descr="{&quot;isTemplate&quot;:true,&quot;type&quot;:&quot;text&quot;}"/>
+          <p:cNvPr id="338" name="" descr="{&quot;isTemplate&quot;:true,&quot;type&quot;:&quot;text&quot;}"/>
           <p:cNvSpPr txBox="1"/>
           <p:nvPr/>
         </p:nvSpPr>
@@ -18957,7 +16453,7 @@
       </p:sp>
       <p:sp>
         <p:nvSpPr>
-          <p:cNvPr id="383" name=""/>
+          <p:cNvPr id="339" name=""/>
           <p:cNvSpPr/>
           <p:nvPr/>
         </p:nvSpPr>
@@ -18997,7 +16493,7 @@
       </p:sp>
       <p:sp>
         <p:nvSpPr>
-          <p:cNvPr id="384" name="" descr="{&quot;isTemplate&quot;:true,&quot;type&quot;:&quot;text&quot;}"/>
+          <p:cNvPr id="340" name="" descr="{&quot;isTemplate&quot;:true,&quot;type&quot;:&quot;text&quot;}"/>
           <p:cNvSpPr txBox="1"/>
           <p:nvPr/>
         </p:nvSpPr>
@@ -19032,7 +16528,7 @@
       </p:sp>
       <p:sp>
         <p:nvSpPr>
-          <p:cNvPr id="385" name="" descr="{&quot;isTemplate&quot;:true,&quot;type&quot;:&quot;text&quot;}"/>
+          <p:cNvPr id="341" name="" descr="{&quot;isTemplate&quot;:true,&quot;type&quot;:&quot;text&quot;}"/>
           <p:cNvSpPr txBox="1"/>
           <p:nvPr/>
         </p:nvSpPr>
@@ -19067,7 +16563,7 @@
       </p:sp>
       <p:sp>
         <p:nvSpPr>
-          <p:cNvPr id="386" name="" descr="{&quot;isTemplate&quot;:true,&quot;type&quot;:&quot;text&quot;}"/>
+          <p:cNvPr id="342" name="" descr="{&quot;isTemplate&quot;:true,&quot;type&quot;:&quot;text&quot;}"/>
           <p:cNvSpPr txBox="1"/>
           <p:nvPr/>
         </p:nvSpPr>
@@ -19122,7 +16618,7 @@
       </p:sp>
       <p:sp>
         <p:nvSpPr>
-          <p:cNvPr id="387" name="" descr="{&quot;isTemplate&quot;:true,&quot;type&quot;:&quot;text&quot;}"/>
+          <p:cNvPr id="343" name="" descr="{&quot;isTemplate&quot;:true,&quot;type&quot;:&quot;text&quot;}"/>
           <p:cNvSpPr txBox="1"/>
           <p:nvPr/>
         </p:nvSpPr>
@@ -19157,7 +16653,7 @@
       </p:sp>
       <p:sp>
         <p:nvSpPr>
-          <p:cNvPr id="388" name=""/>
+          <p:cNvPr id="344" name=""/>
           <p:cNvSpPr/>
           <p:nvPr/>
         </p:nvSpPr>
@@ -19181,7 +16677,7 @@
       </p:sp>
       <p:sp>
         <p:nvSpPr>
-          <p:cNvPr id="389" name=""/>
+          <p:cNvPr id="345" name=""/>
           <p:cNvSpPr/>
           <p:nvPr/>
         </p:nvSpPr>
@@ -19221,7 +16717,7 @@
       </p:sp>
       <p:sp>
         <p:nvSpPr>
-          <p:cNvPr id="390" name="" descr="{&quot;isTemplate&quot;:true,&quot;type&quot;:&quot;text&quot;}"/>
+          <p:cNvPr id="346" name="" descr="{&quot;isTemplate&quot;:true,&quot;type&quot;:&quot;text&quot;}"/>
           <p:cNvSpPr txBox="1"/>
           <p:nvPr/>
         </p:nvSpPr>
@@ -19256,7 +16752,7 @@
       </p:sp>
       <p:sp>
         <p:nvSpPr>
-          <p:cNvPr id="391" name="" descr="{&quot;isTemplate&quot;:true,&quot;type&quot;:&quot;text&quot;}"/>
+          <p:cNvPr id="347" name="" descr="{&quot;isTemplate&quot;:true,&quot;type&quot;:&quot;text&quot;}"/>
           <p:cNvSpPr txBox="1"/>
           <p:nvPr/>
         </p:nvSpPr>
@@ -19311,7 +16807,7 @@
       </p:sp>
       <p:sp>
         <p:nvSpPr>
-          <p:cNvPr id="392" name="" descr="{&quot;isTemplate&quot;:true,&quot;type&quot;:&quot;text&quot;}"/>
+          <p:cNvPr id="348" name="" descr="{&quot;isTemplate&quot;:true,&quot;type&quot;:&quot;text&quot;}"/>
           <p:cNvSpPr txBox="1"/>
           <p:nvPr/>
         </p:nvSpPr>
@@ -19376,7 +16872,7 @@
       </p:sp>
       <p:sp>
         <p:nvSpPr>
-          <p:cNvPr id="393" name="" descr="{&quot;isTemplate&quot;:true,&quot;type&quot;:&quot;text&quot;}"/>
+          <p:cNvPr id="349" name="" descr="{&quot;isTemplate&quot;:true,&quot;type&quot;:&quot;text&quot;}"/>
           <p:cNvSpPr txBox="1"/>
           <p:nvPr/>
         </p:nvSpPr>
@@ -19451,7 +16947,7 @@
       </p:sp>
       <p:sp>
         <p:nvSpPr>
-          <p:cNvPr id="394" name=""/>
+          <p:cNvPr id="350" name=""/>
           <p:cNvSpPr/>
           <p:nvPr/>
         </p:nvSpPr>
@@ -19475,7 +16971,7 @@
       </p:sp>
       <p:sp>
         <p:nvSpPr>
-          <p:cNvPr id="395" name=""/>
+          <p:cNvPr id="351" name=""/>
           <p:cNvSpPr/>
           <p:nvPr/>
         </p:nvSpPr>
@@ -19515,7 +17011,7 @@
       </p:sp>
       <p:sp>
         <p:nvSpPr>
-          <p:cNvPr id="396" name=""/>
+          <p:cNvPr id="352" name=""/>
           <p:cNvSpPr/>
           <p:nvPr/>
         </p:nvSpPr>
@@ -19555,7 +17051,7 @@
       </p:sp>
       <p:sp>
         <p:nvSpPr>
-          <p:cNvPr id="397" name="" descr="{&quot;isTemplate&quot;:true,&quot;type&quot;:&quot;text&quot;}"/>
+          <p:cNvPr id="353" name="" descr="{&quot;isTemplate&quot;:true,&quot;type&quot;:&quot;text&quot;}"/>
           <p:cNvSpPr txBox="1"/>
           <p:nvPr/>
         </p:nvSpPr>
@@ -19590,7 +17086,7 @@
       </p:sp>
       <p:sp>
         <p:nvSpPr>
-          <p:cNvPr id="398" name="" descr="{&quot;isTemplate&quot;:true,&quot;type&quot;:&quot;text&quot;}"/>
+          <p:cNvPr id="354" name="" descr="{&quot;isTemplate&quot;:true,&quot;type&quot;:&quot;text&quot;}"/>
           <p:cNvSpPr txBox="1"/>
           <p:nvPr/>
         </p:nvSpPr>
@@ -19675,7 +17171,7 @@
       </p:sp>
       <p:sp>
         <p:nvSpPr>
-          <p:cNvPr id="399" name="" descr="{&quot;isTemplate&quot;:true,&quot;type&quot;:&quot;text&quot;}"/>
+          <p:cNvPr id="355" name="" descr="{&quot;isTemplate&quot;:true,&quot;type&quot;:&quot;text&quot;}"/>
           <p:cNvSpPr txBox="1"/>
           <p:nvPr/>
         </p:nvSpPr>
@@ -19710,7 +17206,7 @@
       </p:sp>
       <p:sp>
         <p:nvSpPr>
-          <p:cNvPr id="400" name="" descr="{&quot;isTemplate&quot;:true,&quot;type&quot;:&quot;text&quot;}"/>
+          <p:cNvPr id="356" name="" descr="{&quot;isTemplate&quot;:true,&quot;type&quot;:&quot;text&quot;}"/>
           <p:cNvSpPr txBox="1"/>
           <p:nvPr/>
         </p:nvSpPr>
@@ -19785,7 +17281,7 @@
       </p:sp>
       <p:sp>
         <p:nvSpPr>
-          <p:cNvPr id="401" name=""/>
+          <p:cNvPr id="357" name=""/>
           <p:cNvSpPr/>
           <p:nvPr/>
         </p:nvSpPr>
@@ -19825,7 +17321,7 @@
       </p:sp>
       <p:sp>
         <p:nvSpPr>
-          <p:cNvPr id="402" name="" descr="{&quot;isTemplate&quot;:true,&quot;type&quot;:&quot;text&quot;}"/>
+          <p:cNvPr id="358" name="" descr="{&quot;isTemplate&quot;:true,&quot;type&quot;:&quot;text&quot;}"/>
           <p:cNvSpPr txBox="1"/>
           <p:nvPr/>
         </p:nvSpPr>
@@ -19860,7 +17356,7 @@
       </p:sp>
       <p:sp>
         <p:nvSpPr>
-          <p:cNvPr id="403" name="" descr="{&quot;isTemplate&quot;:true,&quot;type&quot;:&quot;text&quot;}"/>
+          <p:cNvPr id="359" name="" descr="{&quot;isTemplate&quot;:true,&quot;type&quot;:&quot;text&quot;}"/>
           <p:cNvSpPr txBox="1"/>
           <p:nvPr/>
         </p:nvSpPr>
@@ -19915,7 +17411,7 @@
       </p:sp>
       <p:sp>
         <p:nvSpPr>
-          <p:cNvPr id="404" name="" descr="{&quot;isTemplate&quot;:true,&quot;type&quot;:&quot;text&quot;}"/>
+          <p:cNvPr id="360" name="" descr="{&quot;isTemplate&quot;:true,&quot;type&quot;:&quot;text&quot;}"/>
           <p:cNvSpPr txBox="1"/>
           <p:nvPr/>
         </p:nvSpPr>
@@ -19980,7 +17476,7 @@
       </p:sp>
       <p:sp>
         <p:nvSpPr>
-          <p:cNvPr id="405" name="" descr="{&quot;isTemplate&quot;:true,&quot;type&quot;:&quot;text&quot;}"/>
+          <p:cNvPr id="361" name="" descr="{&quot;isTemplate&quot;:true,&quot;type&quot;:&quot;text&quot;}"/>
           <p:cNvSpPr txBox="1"/>
           <p:nvPr/>
         </p:nvSpPr>
@@ -20055,7 +17551,7 @@
       </p:sp>
       <p:sp>
         <p:nvSpPr>
-          <p:cNvPr id="406" name=""/>
+          <p:cNvPr id="362" name=""/>
           <p:cNvSpPr/>
           <p:nvPr/>
         </p:nvSpPr>
@@ -20079,7 +17575,7 @@
       </p:sp>
       <p:sp>
         <p:nvSpPr>
-          <p:cNvPr id="407" name="" descr="{&quot;isTemplate&quot;:true,&quot;type&quot;:&quot;text&quot;}"/>
+          <p:cNvPr id="363" name="" descr="{&quot;isTemplate&quot;:true,&quot;type&quot;:&quot;text&quot;}"/>
           <p:cNvSpPr txBox="1"/>
           <p:nvPr/>
         </p:nvSpPr>
@@ -20114,7 +17610,7 @@
       </p:sp>
       <p:sp>
         <p:nvSpPr>
-          <p:cNvPr id="408" name="" descr="{&quot;isTemplate&quot;:true,&quot;type&quot;:&quot;text&quot;}"/>
+          <p:cNvPr id="364" name="" descr="{&quot;isTemplate&quot;:true,&quot;type&quot;:&quot;text&quot;}"/>
           <p:cNvSpPr txBox="1"/>
           <p:nvPr/>
         </p:nvSpPr>
@@ -20169,7 +17665,7 @@
       </p:sp>
       <p:sp>
         <p:nvSpPr>
-          <p:cNvPr id="409" name="" descr="{&quot;isTemplate&quot;:true,&quot;type&quot;:&quot;text&quot;}"/>
+          <p:cNvPr id="365" name="" descr="{&quot;isTemplate&quot;:true,&quot;type&quot;:&quot;text&quot;}"/>
           <p:cNvSpPr txBox="1"/>
           <p:nvPr/>
         </p:nvSpPr>
@@ -20234,7 +17730,7 @@
       </p:sp>
       <p:sp>
         <p:nvSpPr>
-          <p:cNvPr id="410" name="" descr="{&quot;isTemplate&quot;:true,&quot;type&quot;:&quot;text&quot;}"/>
+          <p:cNvPr id="366" name="" descr="{&quot;isTemplate&quot;:true,&quot;type&quot;:&quot;text&quot;}"/>
           <p:cNvSpPr txBox="1"/>
           <p:nvPr/>
         </p:nvSpPr>
@@ -20269,7 +17765,7 @@
       </p:sp>
       <p:sp>
         <p:nvSpPr>
-          <p:cNvPr id="411" name="" descr="{&quot;isTemplate&quot;:true,&quot;type&quot;:&quot;text&quot;}"/>
+          <p:cNvPr id="367" name="" descr="{&quot;isTemplate&quot;:true,&quot;type&quot;:&quot;text&quot;}"/>
           <p:cNvSpPr txBox="1"/>
           <p:nvPr/>
         </p:nvSpPr>
@@ -20424,7 +17920,7 @@
       </p:sp>
       <p:sp>
         <p:nvSpPr>
-          <p:cNvPr id="412" name="" descr="{&quot;isTemplate&quot;:true,&quot;type&quot;:&quot;text&quot;}"/>
+          <p:cNvPr id="368" name="" descr="{&quot;isTemplate&quot;:true,&quot;type&quot;:&quot;text&quot;}"/>
           <p:cNvSpPr txBox="1"/>
           <p:nvPr/>
         </p:nvSpPr>
@@ -20617,7 +18113,7 @@
   <p:cSld>
     <p:spTree>
       <p:nvGrpSpPr>
-        <p:cNvPr id="413" name="" descr="&lt;Slide style={{ width: '1280px', height: '720px', backgroundColor: '#FFFFFF', padding: '0px', flexDirection: 'column' }}&gt;&#10;    &lt;Box style={{ width: '1280px', height: '8px', backgroundColor: '#1E4FA8' }} /&gt;&#10;    &lt;Box style={{ padding: '30px 40px 0px 40px', flexDirection: 'row', justifyContent: 'space-between', alignItems: 'flex-end' }}&gt;&#10;        &lt;Text style={{ fontSize: 34, fontWeight: 'bold', color: '#1E4FA8' }}&gt;关键方式①：两级匹配 + 加权协视图&lt;/Text&gt;&#10;        &lt;Text style={{ fontSize: 15, color: '#8B97A8' }}&gt;08 / 15&lt;/Text&gt;&#10;    &lt;/Box&gt;&#10;    &lt;Box style={{ padding: '18px 40px 0px 40px', flexDirection: 'column', gap: 0 }}&gt;&#10;        &lt;Box style={{ flexDirection: 'row', backgroundColor: '#1E4FA8', padding: '12px 16px' }}&gt;&#10;            &lt;Text style={{ width: '90px', fontSize: 20, fontWeight: 'bold', color: '#FFFFFF' }}&gt;层级&lt;/Text&gt;&#10;            &lt;Text style={{ flex: 2, fontSize: 20, fontWeight: 'bold', color: '#FFFFFF' }}&gt;方法&lt;/Text&gt;&#10;            &lt;Text style={{ flex: 3, fontSize: 20, fontWeight: 'bold', color: '#FFFFFF' }}&gt;作用&lt;/Text&gt;&#10;            &lt;Text style={{ flex: 1.6, fontSize: 20, fontWeight: 'bold', color: '#FFFFFF' }}&gt;代价&lt;/Text&gt;&#10;        &lt;/Box&gt;&#10;        &lt;Box style={{ flexDirection: 'row', padding: '13px 16px', borderBottom: '1px solid #D6DCE5' }}&gt;&#10;            &lt;Text style={{ width: '90px', fontSize: 20, fontWeight: 'bold', color: '#1E4FA8' }}&gt;1&lt;/Text&gt;&#10;            &lt;Text style={{ flex: 2, fontSize: 20, color: '#1A2230' }}&gt;视觉位置识别（全局描述子）&lt;/Text&gt;&#10;            &lt;Text style={{ flex: 3, fontSize: 20, color: '#1A2230' }}&gt;余弦相似度排序，取 top-20 候选&lt;/Text&gt;&#10;            &lt;Text style={{ flex: 1.6, fontSize: 20, color: '#1A2230' }}&gt;≈1 ms / 1000 对&lt;/Text&gt;&#10;        &lt;/Box&gt;&#10;        &lt;Box style={{ flexDirection: 'row', padding: '13px 16px', backgroundColor: '#F7F9FC', borderBottom: '1px solid #D6DCE5' }}&gt;&#10;            &lt;Text style={{ width: '90px', fontSize: 20, fontWeight: 'bold', color: '#1E4FA8' }}&gt;2&lt;/Text&gt;&#10;            &lt;Text style={{ flex: 2, fontSize: 20, color: '#1A2230' }}&gt;XFeat 轻量局部特征&lt;/Text&gt;&#10;            &lt;Text style={{ flex: 3, fontSize: 20, color: '#1A2230' }}&gt;按内点数从 20 中保留 5 个&lt;/Text&gt;&#10;            &lt;Text style={{ flex: 1.6, fontSize: 20, color: '#1A2230' }}&gt;≈0.5 ms / 对&lt;/Text&gt;&#10;        &lt;/Box&gt;&#10;        &lt;Box style={{ flexDirection: 'row', padding: '13px 16px', borderBottom: '1px solid #D6DCE5' }}&gt;&#10;            &lt;Text style={{ width: '90px', fontSize: 20, fontWeight: 'bold', color: '#1E4FA8' }}&gt;3&lt;/Text&gt;&#10;            &lt;Text style={{ flex: 2, fontSize: 20, color: '#1A2230' }}&gt;LightGlue + RANSAC&lt;/Text&gt;&#10;            &lt;Text style={{ flex: 3, fontSize: 20, color: '#1A2230' }}&gt;精确验证，内点数 &amp;gt; 500 才接受&lt;/Text&gt;&#10;            &lt;Text style={{ flex: 1.6, fontSize: 20, color: '#1A2230' }}&gt;≈4 ms / 对&lt;/Text&gt;&#10;        &lt;/Box&gt;&#10;    &lt;/Box&gt;&#10;    &lt;Box style={{ padding: '18px 40px 0px 40px', flexDirection: 'row', gap: 18 }}&gt;&#10;        &lt;Box style={{ flex: 1, backgroundColor: '#F0F5FC', borderRadius: 6, padding: '14px 18px', flexDirection: 'column' }}&gt;&#10;            &lt;Text style={{ fontSize: 22, fontWeight: 'bold', color: '#1E4FA8' }}&gt;加权协视图&lt;/Text&gt;&#10;            &lt;Text style={{ fontSize: 21, color: '#1A2230', lineHeight: 1.5, marginTop: 8 }}&gt;边权取内点数倒数 w = 1/#inliers：内点越多、边越&quot;短&quot;。于是图上的最短路 = 最可靠的位姿链。&lt;/Text&gt;&#10;        &lt;/Box&gt;&#10;        &lt;Box style={{ flex: 1, backgroundColor: '#F0F5FC', borderRadius: 6, padding: '14px 18px', flexDirection: 'column' }}&gt;&#10;            &lt;Text style={{ fontSize: 22, fontWeight: 'bold', color: '#1E4FA8' }}&gt;消融：这一环最关键&lt;/Text&gt;&#10;            &lt;Text style={{ fontSize: 21, color: '#1A2230', lineHeight: 1.5, marginTop: 8 }}&gt;去掉位置识别只比相邻 5 帧：PSNR 26.29 → &lt;b&gt;24.78 dB&lt;/b&gt;；改成优化最后 20 帧：→ &lt;b&gt;24.56 dB&lt;/b&gt;。&lt;/Text&gt;&#10;        &lt;/Box&gt;&#10;    &lt;/Box&gt;&#10;    &lt;Box style={{ padding: '12px 40px 0px 40px' }}&gt;&#10;        &lt;Text style={{ fontSize: 17, color: '#8B97A8' }}&gt;候选集逐级收缩：1000 对 → 20 → 5 → 1，精确匹配只作用在极小候选上，这是&quot;无序也能快&quot;的根本原因。&lt;/Text&gt;&#10;    &lt;/Box&gt;&#10;&lt;/Slide&gt;&#10;"/>
+        <p:cNvPr id="369" name="" descr="&lt;Slide style={{ width: '1280px', height: '720px', backgroundColor: '#FFFFFF', padding: '0px', flexDirection: 'column' }}&gt;&#10;    &lt;Box style={{ width: '1280px', height: '8px', backgroundColor: '#1E4FA8' }} /&gt;&#10;    &lt;Box style={{ padding: '30px 40px 0px 40px', flexDirection: 'row', justifyContent: 'space-between', alignItems: 'flex-end' }}&gt;&#10;        &lt;Text style={{ fontSize: 34, fontWeight: 'bold', color: '#1E4FA8' }}&gt;关键方式①：两级匹配 + 加权协视图&lt;/Text&gt;&#10;        &lt;Text style={{ fontSize: 15, color: '#8B97A8' }}&gt;08 / 14&lt;/Text&gt;&#10;    &lt;/Box&gt;&#10;    &lt;Box style={{ padding: '18px 40px 0px 40px', flexDirection: 'column', gap: 0 }}&gt;&#10;        &lt;Box style={{ flexDirection: 'row', backgroundColor: '#1E4FA8', padding: '12px 16px' }}&gt;&#10;            &lt;Text style={{ width: '90px', fontSize: 20, fontWeight: 'bold', color: '#FFFFFF' }}&gt;层级&lt;/Text&gt;&#10;            &lt;Text style={{ flex: 2, fontSize: 20, fontWeight: 'bold', color: '#FFFFFF' }}&gt;方法&lt;/Text&gt;&#10;            &lt;Text style={{ flex: 3, fontSize: 20, fontWeight: 'bold', color: '#FFFFFF' }}&gt;作用&lt;/Text&gt;&#10;            &lt;Text style={{ flex: 1.6, fontSize: 20, fontWeight: 'bold', color: '#FFFFFF' }}&gt;代价&lt;/Text&gt;&#10;        &lt;/Box&gt;&#10;        &lt;Box style={{ flexDirection: 'row', padding: '13px 16px', borderBottom: '1px solid #D6DCE5' }}&gt;&#10;            &lt;Text style={{ width: '90px', fontSize: 20, fontWeight: 'bold', color: '#1E4FA8' }}&gt;1&lt;/Text&gt;&#10;            &lt;Text style={{ flex: 2, fontSize: 20, color: '#1A2230' }}&gt;视觉位置识别（全局描述子）&lt;/Text&gt;&#10;            &lt;Text style={{ flex: 3, fontSize: 20, color: '#1A2230' }}&gt;余弦相似度排序，取 top-20 候选&lt;/Text&gt;&#10;            &lt;Text style={{ flex: 1.6, fontSize: 20, color: '#1A2230' }}&gt;≈1 ms / 1000 对&lt;/Text&gt;&#10;        &lt;/Box&gt;&#10;        &lt;Box style={{ flexDirection: 'row', padding: '13px 16px', backgroundColor: '#F7F9FC', borderBottom: '1px solid #D6DCE5' }}&gt;&#10;            &lt;Text style={{ width: '90px', fontSize: 20, fontWeight: 'bold', color: '#1E4FA8' }}&gt;2&lt;/Text&gt;&#10;            &lt;Text style={{ flex: 2, fontSize: 20, color: '#1A2230' }}&gt;XFeat 轻量局部特征&lt;/Text&gt;&#10;            &lt;Text style={{ flex: 3, fontSize: 20, color: '#1A2230' }}&gt;按内点数从 20 中保留 5 个&lt;/Text&gt;&#10;            &lt;Text style={{ flex: 1.6, fontSize: 20, color: '#1A2230' }}&gt;≈0.5 ms / 对&lt;/Text&gt;&#10;        &lt;/Box&gt;&#10;        &lt;Box style={{ flexDirection: 'row', padding: '13px 16px', borderBottom: '1px solid #D6DCE5' }}&gt;&#10;            &lt;Text style={{ width: '90px', fontSize: 20, fontWeight: 'bold', color: '#1E4FA8' }}&gt;3&lt;/Text&gt;&#10;            &lt;Text style={{ flex: 2, fontSize: 20, color: '#1A2230' }}&gt;LightGlue + RANSAC&lt;/Text&gt;&#10;            &lt;Text style={{ flex: 3, fontSize: 20, color: '#1A2230' }}&gt;精确验证，内点数 &amp;gt; 500 才接受&lt;/Text&gt;&#10;            &lt;Text style={{ flex: 1.6, fontSize: 20, color: '#1A2230' }}&gt;≈4 ms / 对&lt;/Text&gt;&#10;        &lt;/Box&gt;&#10;    &lt;/Box&gt;&#10;    &lt;Box style={{ padding: '18px 40px 0px 40px', flexDirection: 'row', gap: 18 }}&gt;&#10;        &lt;Box style={{ flex: 1, backgroundColor: '#F0F5FC', borderRadius: 6, padding: '14px 18px', flexDirection: 'column' }}&gt;&#10;            &lt;Text style={{ fontSize: 22, fontWeight: 'bold', color: '#1E4FA8' }}&gt;加权协视图&lt;/Text&gt;&#10;            &lt;Text style={{ fontSize: 21, color: '#1A2230', lineHeight: 1.5, marginTop: 8 }}&gt;边权取内点数倒数 w = 1/#inliers：内点越多、边越&quot;短&quot;。于是图上的最短路 = 最可靠的位姿链。&lt;/Text&gt;&#10;        &lt;/Box&gt;&#10;        &lt;Box style={{ flex: 1, backgroundColor: '#F0F5FC', borderRadius: 6, padding: '14px 18px', flexDirection: 'column' }}&gt;&#10;            &lt;Text style={{ fontSize: 22, fontWeight: 'bold', color: '#1E4FA8' }}&gt;消融：这一环最关键&lt;/Text&gt;&#10;            &lt;Text style={{ fontSize: 21, color: '#1A2230', lineHeight: 1.5, marginTop: 8 }}&gt;去掉位置识别只比相邻 5 帧：PSNR 26.29 → &lt;b&gt;24.78 dB&lt;/b&gt;；改成优化最后 20 帧：→ &lt;b&gt;24.56 dB&lt;/b&gt;。&lt;/Text&gt;&#10;        &lt;/Box&gt;&#10;    &lt;/Box&gt;&#10;    &lt;Box style={{ padding: '12px 40px 0px 40px' }}&gt;&#10;        &lt;Text style={{ fontSize: 17, color: '#8B97A8' }}&gt;候选集逐级收缩：1000 对 → 20 → 5 → 1，精确匹配只作用在极小候选上，这是&quot;无序也能快&quot;的根本原因。&lt;/Text&gt;&#10;    &lt;/Box&gt;&#10;&lt;/Slide&gt;&#10;"/>
         <p:cNvGrpSpPr/>
         <p:nvPr/>
       </p:nvGrpSpPr>
@@ -20631,7 +18127,7 @@
       </p:grpSpPr>
       <p:sp>
         <p:nvSpPr>
-          <p:cNvPr id="414" name=""/>
+          <p:cNvPr id="370" name=""/>
           <p:cNvSpPr/>
           <p:nvPr/>
         </p:nvSpPr>
@@ -20655,7 +18151,7 @@
       </p:sp>
       <p:sp>
         <p:nvSpPr>
-          <p:cNvPr id="415" name=""/>
+          <p:cNvPr id="371" name=""/>
           <p:cNvSpPr/>
           <p:nvPr/>
         </p:nvSpPr>
@@ -20679,7 +18175,7 @@
       </p:sp>
       <p:sp>
         <p:nvSpPr>
-          <p:cNvPr id="416" name="" descr="{&quot;isTemplate&quot;:true,&quot;type&quot;:&quot;text&quot;}"/>
+          <p:cNvPr id="372" name="" descr="{&quot;isTemplate&quot;:true,&quot;type&quot;:&quot;text&quot;}"/>
           <p:cNvSpPr txBox="1"/>
           <p:nvPr/>
         </p:nvSpPr>
@@ -20734,7 +18230,7 @@
       </p:sp>
       <p:sp>
         <p:nvSpPr>
-          <p:cNvPr id="417" name="" descr="{&quot;isTemplate&quot;:true,&quot;type&quot;:&quot;text&quot;}"/>
+          <p:cNvPr id="373" name="" descr="{&quot;isTemplate&quot;:true,&quot;type&quot;:&quot;text&quot;}"/>
           <p:cNvSpPr txBox="1"/>
           <p:nvPr/>
         </p:nvSpPr>
@@ -20761,15 +18257,15 @@
                 <a:latin typeface="Microsoft YaHei"/>
                 <a:ea typeface="Microsoft YaHei"/>
               </a:rPr>
-              <a:t>08 / 15</a:t>
-            </a:r>
-            <a:endParaRPr/>
-          </a:p>
-        </p:txBody>
-      </p:sp>
-      <p:sp>
-        <p:nvSpPr>
-          <p:cNvPr id="418" name=""/>
+              <a:t>08 / 14</a:t>
+            </a:r>
+            <a:endParaRPr/>
+          </a:p>
+        </p:txBody>
+      </p:sp>
+      <p:sp>
+        <p:nvSpPr>
+          <p:cNvPr id="374" name=""/>
           <p:cNvSpPr/>
           <p:nvPr/>
         </p:nvSpPr>
@@ -20793,7 +18289,7 @@
       </p:sp>
       <p:sp>
         <p:nvSpPr>
-          <p:cNvPr id="419" name="" descr="{&quot;isTemplate&quot;:true,&quot;type&quot;:&quot;text&quot;}"/>
+          <p:cNvPr id="375" name="" descr="{&quot;isTemplate&quot;:true,&quot;type&quot;:&quot;text&quot;}"/>
           <p:cNvSpPr txBox="1"/>
           <p:nvPr/>
         </p:nvSpPr>
@@ -20828,7 +18324,7 @@
       </p:sp>
       <p:sp>
         <p:nvSpPr>
-          <p:cNvPr id="420" name="" descr="{&quot;isTemplate&quot;:true,&quot;type&quot;:&quot;text&quot;}"/>
+          <p:cNvPr id="376" name="" descr="{&quot;isTemplate&quot;:true,&quot;type&quot;:&quot;text&quot;}"/>
           <p:cNvSpPr txBox="1"/>
           <p:nvPr/>
         </p:nvSpPr>
@@ -20863,7 +18359,7 @@
       </p:sp>
       <p:sp>
         <p:nvSpPr>
-          <p:cNvPr id="421" name="" descr="{&quot;isTemplate&quot;:true,&quot;type&quot;:&quot;text&quot;}"/>
+          <p:cNvPr id="377" name="" descr="{&quot;isTemplate&quot;:true,&quot;type&quot;:&quot;text&quot;}"/>
           <p:cNvSpPr txBox="1"/>
           <p:nvPr/>
         </p:nvSpPr>
@@ -20898,7 +18394,7 @@
       </p:sp>
       <p:sp>
         <p:nvSpPr>
-          <p:cNvPr id="422" name="" descr="{&quot;isTemplate&quot;:true,&quot;type&quot;:&quot;text&quot;}"/>
+          <p:cNvPr id="378" name="" descr="{&quot;isTemplate&quot;:true,&quot;type&quot;:&quot;text&quot;}"/>
           <p:cNvSpPr txBox="1"/>
           <p:nvPr/>
         </p:nvSpPr>
@@ -20933,7 +18429,7 @@
       </p:sp>
       <p:sp>
         <p:nvSpPr>
-          <p:cNvPr id="423" name=""/>
+          <p:cNvPr id="379" name=""/>
           <p:cNvSpPr/>
           <p:nvPr/>
         </p:nvSpPr>
@@ -20973,7 +18469,7 @@
       </p:sp>
       <p:sp>
         <p:nvSpPr>
-          <p:cNvPr id="424" name="" descr="{&quot;isTemplate&quot;:true,&quot;type&quot;:&quot;text&quot;}"/>
+          <p:cNvPr id="380" name="" descr="{&quot;isTemplate&quot;:true,&quot;type&quot;:&quot;text&quot;}"/>
           <p:cNvSpPr txBox="1"/>
           <p:nvPr/>
         </p:nvSpPr>
@@ -21008,7 +18504,7 @@
       </p:sp>
       <p:sp>
         <p:nvSpPr>
-          <p:cNvPr id="425" name="" descr="{&quot;isTemplate&quot;:true,&quot;type&quot;:&quot;text&quot;}"/>
+          <p:cNvPr id="381" name="" descr="{&quot;isTemplate&quot;:true,&quot;type&quot;:&quot;text&quot;}"/>
           <p:cNvSpPr txBox="1"/>
           <p:nvPr/>
         </p:nvSpPr>
@@ -21043,7 +18539,7 @@
       </p:sp>
       <p:sp>
         <p:nvSpPr>
-          <p:cNvPr id="426" name="" descr="{&quot;isTemplate&quot;:true,&quot;type&quot;:&quot;text&quot;}"/>
+          <p:cNvPr id="382" name="" descr="{&quot;isTemplate&quot;:true,&quot;type&quot;:&quot;text&quot;}"/>
           <p:cNvSpPr txBox="1"/>
           <p:nvPr/>
         </p:nvSpPr>
@@ -21098,7 +18594,7 @@
       </p:sp>
       <p:sp>
         <p:nvSpPr>
-          <p:cNvPr id="427" name="" descr="{&quot;isTemplate&quot;:true,&quot;type&quot;:&quot;text&quot;}"/>
+          <p:cNvPr id="383" name="" descr="{&quot;isTemplate&quot;:true,&quot;type&quot;:&quot;text&quot;}"/>
           <p:cNvSpPr txBox="1"/>
           <p:nvPr/>
         </p:nvSpPr>
@@ -21143,7 +18639,7 @@
       </p:sp>
       <p:sp>
         <p:nvSpPr>
-          <p:cNvPr id="428" name=""/>
+          <p:cNvPr id="384" name=""/>
           <p:cNvSpPr/>
           <p:nvPr/>
         </p:nvSpPr>
@@ -21167,7 +18663,7 @@
       </p:sp>
       <p:sp>
         <p:nvSpPr>
-          <p:cNvPr id="429" name=""/>
+          <p:cNvPr id="385" name=""/>
           <p:cNvSpPr/>
           <p:nvPr/>
         </p:nvSpPr>
@@ -21207,7 +18703,7 @@
       </p:sp>
       <p:sp>
         <p:nvSpPr>
-          <p:cNvPr id="430" name="" descr="{&quot;isTemplate&quot;:true,&quot;type&quot;:&quot;text&quot;}"/>
+          <p:cNvPr id="386" name="" descr="{&quot;isTemplate&quot;:true,&quot;type&quot;:&quot;text&quot;}"/>
           <p:cNvSpPr txBox="1"/>
           <p:nvPr/>
         </p:nvSpPr>
@@ -21242,7 +18738,7 @@
       </p:sp>
       <p:sp>
         <p:nvSpPr>
-          <p:cNvPr id="431" name="" descr="{&quot;isTemplate&quot;:true,&quot;type&quot;:&quot;text&quot;}"/>
+          <p:cNvPr id="387" name="" descr="{&quot;isTemplate&quot;:true,&quot;type&quot;:&quot;text&quot;}"/>
           <p:cNvSpPr txBox="1"/>
           <p:nvPr/>
         </p:nvSpPr>
@@ -21287,7 +18783,7 @@
       </p:sp>
       <p:sp>
         <p:nvSpPr>
-          <p:cNvPr id="432" name="" descr="{&quot;isTemplate&quot;:true,&quot;type&quot;:&quot;text&quot;}"/>
+          <p:cNvPr id="388" name="" descr="{&quot;isTemplate&quot;:true,&quot;type&quot;:&quot;text&quot;}"/>
           <p:cNvSpPr txBox="1"/>
           <p:nvPr/>
         </p:nvSpPr>
@@ -21362,7 +18858,7 @@
       </p:sp>
       <p:sp>
         <p:nvSpPr>
-          <p:cNvPr id="433" name="" descr="{&quot;isTemplate&quot;:true,&quot;type&quot;:&quot;text&quot;}"/>
+          <p:cNvPr id="389" name="" descr="{&quot;isTemplate&quot;:true,&quot;type&quot;:&quot;text&quot;}"/>
           <p:cNvSpPr txBox="1"/>
           <p:nvPr/>
         </p:nvSpPr>
@@ -21407,7 +18903,7 @@
       </p:sp>
       <p:sp>
         <p:nvSpPr>
-          <p:cNvPr id="434" name=""/>
+          <p:cNvPr id="390" name=""/>
           <p:cNvSpPr/>
           <p:nvPr/>
         </p:nvSpPr>
@@ -21447,7 +18943,7 @@
       </p:sp>
       <p:sp>
         <p:nvSpPr>
-          <p:cNvPr id="435" name="" descr="{&quot;isTemplate&quot;:true,&quot;type&quot;:&quot;text&quot;}"/>
+          <p:cNvPr id="391" name="" descr="{&quot;isTemplate&quot;:true,&quot;type&quot;:&quot;text&quot;}"/>
           <p:cNvSpPr txBox="1"/>
           <p:nvPr/>
         </p:nvSpPr>
@@ -21482,7 +18978,7 @@
       </p:sp>
       <p:sp>
         <p:nvSpPr>
-          <p:cNvPr id="436" name="" descr="{&quot;isTemplate&quot;:true,&quot;type&quot;:&quot;text&quot;}"/>
+          <p:cNvPr id="392" name="" descr="{&quot;isTemplate&quot;:true,&quot;type&quot;:&quot;text&quot;}"/>
           <p:cNvSpPr txBox="1"/>
           <p:nvPr/>
         </p:nvSpPr>
@@ -21517,7 +19013,7 @@
       </p:sp>
       <p:sp>
         <p:nvSpPr>
-          <p:cNvPr id="437" name="" descr="{&quot;isTemplate&quot;:true,&quot;type&quot;:&quot;text&quot;}"/>
+          <p:cNvPr id="393" name="" descr="{&quot;isTemplate&quot;:true,&quot;type&quot;:&quot;text&quot;}"/>
           <p:cNvSpPr txBox="1"/>
           <p:nvPr/>
         </p:nvSpPr>
@@ -21572,7 +19068,7 @@
       </p:sp>
       <p:sp>
         <p:nvSpPr>
-          <p:cNvPr id="438" name="" descr="{&quot;isTemplate&quot;:true,&quot;type&quot;:&quot;text&quot;}"/>
+          <p:cNvPr id="394" name="" descr="{&quot;isTemplate&quot;:true,&quot;type&quot;:&quot;text&quot;}"/>
           <p:cNvSpPr txBox="1"/>
           <p:nvPr/>
         </p:nvSpPr>
@@ -21617,7 +19113,7 @@
       </p:sp>
       <p:sp>
         <p:nvSpPr>
-          <p:cNvPr id="439" name=""/>
+          <p:cNvPr id="395" name=""/>
           <p:cNvSpPr/>
           <p:nvPr/>
         </p:nvSpPr>
@@ -21643,7 +19139,7 @@
       </p:sp>
       <p:sp>
         <p:nvSpPr>
-          <p:cNvPr id="440" name="" descr="{&quot;isTemplate&quot;:true,&quot;type&quot;:&quot;text&quot;}"/>
+          <p:cNvPr id="396" name="" descr="{&quot;isTemplate&quot;:true,&quot;type&quot;:&quot;text&quot;}"/>
           <p:cNvSpPr txBox="1"/>
           <p:nvPr/>
         </p:nvSpPr>
@@ -21678,7 +19174,7 @@
       </p:sp>
       <p:sp>
         <p:nvSpPr>
-          <p:cNvPr id="441" name="" descr="{&quot;isTemplate&quot;:true,&quot;type&quot;:&quot;text&quot;}"/>
+          <p:cNvPr id="397" name="" descr="{&quot;isTemplate&quot;:true,&quot;type&quot;:&quot;text&quot;}"/>
           <p:cNvSpPr txBox="1"/>
           <p:nvPr/>
         </p:nvSpPr>
@@ -21795,7 +19291,7 @@
       </p:sp>
       <p:sp>
         <p:nvSpPr>
-          <p:cNvPr id="442" name=""/>
+          <p:cNvPr id="398" name=""/>
           <p:cNvSpPr/>
           <p:nvPr/>
         </p:nvSpPr>
@@ -21821,7 +19317,7 @@
       </p:sp>
       <p:sp>
         <p:nvSpPr>
-          <p:cNvPr id="443" name="" descr="{&quot;isTemplate&quot;:true,&quot;type&quot;:&quot;text&quot;}"/>
+          <p:cNvPr id="399" name="" descr="{&quot;isTemplate&quot;:true,&quot;type&quot;:&quot;text&quot;}"/>
           <p:cNvSpPr txBox="1"/>
           <p:nvPr/>
         </p:nvSpPr>
@@ -21856,7 +19352,7 @@
       </p:sp>
       <p:sp>
         <p:nvSpPr>
-          <p:cNvPr id="444" name="" descr="{&quot;isTemplate&quot;:true,&quot;type&quot;:&quot;text&quot;}"/>
+          <p:cNvPr id="400" name="" descr="{&quot;isTemplate&quot;:true,&quot;type&quot;:&quot;text&quot;}"/>
           <p:cNvSpPr txBox="1"/>
           <p:nvPr/>
         </p:nvSpPr>
@@ -21993,7 +19489,7 @@
       </p:sp>
       <p:sp>
         <p:nvSpPr>
-          <p:cNvPr id="445" name="" descr="{&quot;isTemplate&quot;:true,&quot;type&quot;:&quot;text&quot;}"/>
+          <p:cNvPr id="401" name="" descr="{&quot;isTemplate&quot;:true,&quot;type&quot;:&quot;text&quot;}"/>
           <p:cNvSpPr txBox="1"/>
           <p:nvPr/>
         </p:nvSpPr>
@@ -22116,7 +19612,7 @@
   <p:cSld>
     <p:spTree>
       <p:nvGrpSpPr>
-        <p:cNvPr id="446" name="" descr="&lt;Slide style={{ width: '1280px', height: '720px', backgroundColor: '#FFFFFF', padding: '0px', flexDirection: 'column' }}&gt;&#10;    &lt;Box style={{ width: '1280px', height: '8px', backgroundColor: '#1E4FA8' }} /&gt;&#10;    &lt;Box style={{ padding: '30px 40px 0px 40px', flexDirection: 'row', justifyContent: 'space-between', alignItems: 'flex-end' }}&gt;&#10;        &lt;Text style={{ fontSize: 34, fontWeight: 'bold', color: '#1E4FA8' }}&gt;关键方式②③：局部 BA 与图传播回环&lt;/Text&gt;&#10;        &lt;Text style={{ fontSize: 15, color: '#8B97A8' }}&gt;09 / 15&lt;/Text&gt;&#10;    &lt;/Box&gt;&#10;    &lt;Box style={{ padding: '16px 40px 0px 40px', flexDirection: 'row', gap: 20 }}&gt;&#10;        &lt;Box style={{ flex: 1, backgroundColor: '#F7F9FC', border: '1px solid #D6DCE5', borderRadius: 6, padding: '16px 18px', flexDirection: 'column' }}&gt;&#10;            &lt;Text style={{ fontSize: 25, fontWeight: 'bold', color: '#1A2230' }}&gt;GPU 局部重建&lt;/Text&gt;&#10;            &lt;Text style={{ fontSize: 21, color: '#1A2230', lineHeight: 1.55, marginTop: 10 }}&gt;关键帧 &lt;b&gt;N=20&lt;/b&gt;（SLAM 通常只用 5 帧时间窗），路标点固定 &lt;b&gt;1 万&lt;/b&gt;，按被观测次数采样。&lt;/Text&gt;&#10;            &lt;Text style={{ fontSize: 21, color: '#1A2230', lineHeight: 1.55, marginTop: 8 }}&gt;每个路标只允许被协视性选出的固定子集观测，避免观测数随帧数二次增长。&lt;/Text&gt;&#10;            &lt;Text style={{ fontSize: 21, color: '#1A2230', lineHeight: 1.55, marginTop: 8 }}&gt;自写核函数算残差与雅可比，稠密 Schur 补求解。&lt;/Text&gt;&#10;            &lt;Text style={{ fontSize: 22, fontWeight: 'bold', color: '#1E4FA8', marginTop: 12 }}&gt;比 g2o / CUDA-BA 快约 5 倍&lt;/Text&gt;&#10;            &lt;Text style={{ fontSize: 21, color: '#1A2230', lineHeight: 1.55, marginTop: 10 }}&gt;高斯投放改为&lt;b&gt;分块估计深度尺度与偏移&lt;/b&gt;再插值上采样（消融 26.29 → 25.41 dB），落点更贴表面。&lt;/Text&gt;&#10;        &lt;/Box&gt;&#10;        &lt;Box style={{ flex: 1, backgroundColor: '#F0F5FC', border: '1px solid #3D7BD9', borderRadius: 6, padding: '16px 18px', flexDirection: 'column' }}&gt;&#10;            &lt;Text style={{ fontSize: 25, fontWeight: 'bold', color: '#1A2230' }}&gt;簇级回环 + 图传播&lt;/Text&gt;&#10;            &lt;Text style={{ fontSize: 21, color: '#1A2230', lineHeight: 1.55, marginTop: 10 }}&gt;检测：出现两组&quot;内部密、彼此疏&quot;的簇，图上跳数 &amp;gt; 5 且有效匹配对 &amp;gt; 2。&lt;/Text&gt;&#10;            &lt;Text style={{ fontSize: 21, color: '#1A2230', lineHeight: 1.55, marginTop: 8 }}&gt;求解：两簇各扩 N/2 帧组成焊接窗口做局部 BA，由锚点刚体变换与深度尺度得到 &lt;b&gt;Sim(3)&lt;/b&gt;。&lt;/Text&gt;&#10;            &lt;Text style={{ fontSize: 21, color: '#1A2230', lineHeight: 1.55, marginTop: 8 }}&gt;传播：Dijkstra 找累计权重最小的&lt;b&gt;主干路径&lt;/b&gt;，按测地距离比例插值（旋转用 6D、尺度取对数），对全图位姿与高斯套用同一变换。&lt;/Text&gt;&#10;            &lt;Text style={{ fontSize: 22, fontWeight: 'bold', color: '#D9534F', marginTop: 12 }}&gt;代价随场景规模近似线性&lt;/Text&gt;&#10;        &lt;/Box&gt;&#10;    &lt;/Box&gt;&#10;    &lt;Box style={{ margin: '18px 40px 0px 40px', backgroundColor: '#F0F5FC', borderLeft: '5px solid #1E4FA8', padding: '14px 20px' }}&gt;&#10;        &lt;Text style={{ fontSize: 21, color: '#1A2230', lineHeight: 1.5 }}&gt;用&quot;图上的距离&quot;替代&quot;全局优化的解&quot;——这是全文最值得借鉴的工程取舍：牺牲一点精度，换来数量级的实时性。&lt;/Text&gt;&#10;    &lt;/Box&gt;&#10;&lt;/Slide&gt;&#10;"/>
+        <p:cNvPr id="402" name="" descr="&lt;Slide style={{ width: '1280px', height: '720px', backgroundColor: '#FFFFFF', padding: '0px', flexDirection: 'column' }}&gt;&#10;    &lt;Box style={{ width: '1280px', height: '8px', backgroundColor: '#1E4FA8' }} /&gt;&#10;    &lt;Box style={{ padding: '30px 40px 0px 40px', flexDirection: 'row', justifyContent: 'space-between', alignItems: 'flex-end' }}&gt;&#10;        &lt;Text style={{ fontSize: 34, fontWeight: 'bold', color: '#1E4FA8' }}&gt;关键方式②③：局部 BA 与图传播回环&lt;/Text&gt;&#10;        &lt;Text style={{ fontSize: 15, color: '#8B97A8' }}&gt;09 / 14&lt;/Text&gt;&#10;    &lt;/Box&gt;&#10;    &lt;Box style={{ padding: '16px 40px 0px 40px', flexDirection: 'row', gap: 20 }}&gt;&#10;        &lt;Box style={{ flex: 1, backgroundColor: '#F7F9FC', border: '1px solid #D6DCE5', borderRadius: 6, padding: '16px 18px', flexDirection: 'column' }}&gt;&#10;            &lt;Text style={{ fontSize: 25, fontWeight: 'bold', color: '#1A2230' }}&gt;GPU 局部重建&lt;/Text&gt;&#10;            &lt;Text style={{ fontSize: 21, color: '#1A2230', lineHeight: 1.55, marginTop: 10 }}&gt;关键帧 &lt;b&gt;N=20&lt;/b&gt;（SLAM 通常只用 5 帧时间窗），路标点固定 &lt;b&gt;1 万&lt;/b&gt;，按被观测次数采样。&lt;/Text&gt;&#10;            &lt;Text style={{ fontSize: 21, color: '#1A2230', lineHeight: 1.55, marginTop: 8 }}&gt;每个路标只允许被协视性选出的固定子集观测，避免观测数随帧数二次增长。&lt;/Text&gt;&#10;            &lt;Text style={{ fontSize: 21, color: '#1A2230', lineHeight: 1.55, marginTop: 8 }}&gt;自写核函数算残差与雅可比，稠密 Schur 补求解。&lt;/Text&gt;&#10;            &lt;Text style={{ fontSize: 22, fontWeight: 'bold', color: '#1E4FA8', marginTop: 12 }}&gt;比 g2o / CUDA-BA 快约 5 倍&lt;/Text&gt;&#10;            &lt;Text style={{ fontSize: 21, color: '#1A2230', lineHeight: 1.55, marginTop: 10 }}&gt;高斯投放改为&lt;b&gt;分块估计深度尺度与偏移&lt;/b&gt;再插值上采样（消融 26.29 → 25.41 dB），落点更贴表面。&lt;/Text&gt;&#10;        &lt;/Box&gt;&#10;        &lt;Box style={{ flex: 1, backgroundColor: '#F0F5FC', border: '1px solid #3D7BD9', borderRadius: 6, padding: '16px 18px', flexDirection: 'column' }}&gt;&#10;            &lt;Text style={{ fontSize: 25, fontWeight: 'bold', color: '#1A2230' }}&gt;簇级回环 + 图传播&lt;/Text&gt;&#10;            &lt;Text style={{ fontSize: 21, color: '#1A2230', lineHeight: 1.55, marginTop: 10 }}&gt;检测：出现两组&quot;内部密、彼此疏&quot;的簇，图上跳数 &amp;gt; 5 且有效匹配对 &amp;gt; 2。&lt;/Text&gt;&#10;            &lt;Text style={{ fontSize: 21, color: '#1A2230', lineHeight: 1.55, marginTop: 8 }}&gt;求解：两簇各扩 N/2 帧组成焊接窗口做局部 BA，由锚点刚体变换与深度尺度得到 &lt;b&gt;Sim(3)&lt;/b&gt;。&lt;/Text&gt;&#10;            &lt;Text style={{ fontSize: 21, color: '#1A2230', lineHeight: 1.55, marginTop: 8 }}&gt;传播：Dijkstra 找累计权重最小的&lt;b&gt;主干路径&lt;/b&gt;，按测地距离比例插值（旋转用 6D、尺度取对数），对全图位姿与高斯套用同一变换。&lt;/Text&gt;&#10;            &lt;Text style={{ fontSize: 22, fontWeight: 'bold', color: '#D9534F', marginTop: 12 }}&gt;代价随场景规模近似线性&lt;/Text&gt;&#10;        &lt;/Box&gt;&#10;    &lt;/Box&gt;&#10;    &lt;Box style={{ margin: '18px 40px 0px 40px', backgroundColor: '#F0F5FC', borderLeft: '5px solid #1E4FA8', padding: '14px 20px' }}&gt;&#10;        &lt;Text style={{ fontSize: 21, color: '#1A2230', lineHeight: 1.5 }}&gt;用&quot;图上的距离&quot;替代&quot;全局优化的解&quot;——这是全文最值得借鉴的工程取舍：牺牲一点精度，换来数量级的实时性。&lt;/Text&gt;&#10;    &lt;/Box&gt;&#10;&lt;/Slide&gt;&#10;"/>
         <p:cNvGrpSpPr/>
         <p:nvPr/>
       </p:nvGrpSpPr>
@@ -22130,7 +19626,7 @@
       </p:grpSpPr>
       <p:sp>
         <p:nvSpPr>
-          <p:cNvPr id="447" name=""/>
+          <p:cNvPr id="403" name=""/>
           <p:cNvSpPr/>
           <p:nvPr/>
         </p:nvSpPr>
@@ -22154,7 +19650,7 @@
       </p:sp>
       <p:sp>
         <p:nvSpPr>
-          <p:cNvPr id="448" name=""/>
+          <p:cNvPr id="404" name=""/>
           <p:cNvSpPr/>
           <p:nvPr/>
         </p:nvSpPr>
@@ -22178,7 +19674,7 @@
       </p:sp>
       <p:sp>
         <p:nvSpPr>
-          <p:cNvPr id="449" name="" descr="{&quot;isTemplate&quot;:true,&quot;type&quot;:&quot;text&quot;}"/>
+          <p:cNvPr id="405" name="" descr="{&quot;isTemplate&quot;:true,&quot;type&quot;:&quot;text&quot;}"/>
           <p:cNvSpPr txBox="1"/>
           <p:nvPr/>
         </p:nvSpPr>
@@ -22233,7 +19729,7 @@
       </p:sp>
       <p:sp>
         <p:nvSpPr>
-          <p:cNvPr id="450" name="" descr="{&quot;isTemplate&quot;:true,&quot;type&quot;:&quot;text&quot;}"/>
+          <p:cNvPr id="406" name="" descr="{&quot;isTemplate&quot;:true,&quot;type&quot;:&quot;text&quot;}"/>
           <p:cNvSpPr txBox="1"/>
           <p:nvPr/>
         </p:nvSpPr>
@@ -22260,15 +19756,15 @@
                 <a:latin typeface="Microsoft YaHei"/>
                 <a:ea typeface="Microsoft YaHei"/>
               </a:rPr>
-              <a:t>09 / 15</a:t>
-            </a:r>
-            <a:endParaRPr/>
-          </a:p>
-        </p:txBody>
-      </p:sp>
-      <p:sp>
-        <p:nvSpPr>
-          <p:cNvPr id="451" name=""/>
+              <a:t>09 / 14</a:t>
+            </a:r>
+            <a:endParaRPr/>
+          </a:p>
+        </p:txBody>
+      </p:sp>
+      <p:sp>
+        <p:nvSpPr>
+          <p:cNvPr id="407" name=""/>
           <p:cNvSpPr/>
           <p:nvPr/>
         </p:nvSpPr>
@@ -22299,7 +19795,7 @@
       </p:sp>
       <p:sp>
         <p:nvSpPr>
-          <p:cNvPr id="452" name="" descr="{&quot;isTemplate&quot;:true,&quot;type&quot;:&quot;text&quot;}"/>
+          <p:cNvPr id="408" name="" descr="{&quot;isTemplate&quot;:true,&quot;type&quot;:&quot;text&quot;}"/>
           <p:cNvSpPr txBox="1"/>
           <p:nvPr/>
         </p:nvSpPr>
@@ -22344,7 +19840,7 @@
       </p:sp>
       <p:sp>
         <p:nvSpPr>
-          <p:cNvPr id="453" name="" descr="{&quot;isTemplate&quot;:true,&quot;type&quot;:&quot;text&quot;}"/>
+          <p:cNvPr id="409" name="" descr="{&quot;isTemplate&quot;:true,&quot;type&quot;:&quot;text&quot;}"/>
           <p:cNvSpPr txBox="1"/>
           <p:nvPr/>
         </p:nvSpPr>
@@ -22491,7 +19987,7 @@
       </p:sp>
       <p:sp>
         <p:nvSpPr>
-          <p:cNvPr id="454" name="" descr="{&quot;isTemplate&quot;:true,&quot;type&quot;:&quot;text&quot;}"/>
+          <p:cNvPr id="410" name="" descr="{&quot;isTemplate&quot;:true,&quot;type&quot;:&quot;text&quot;}"/>
           <p:cNvSpPr txBox="1"/>
           <p:nvPr/>
         </p:nvSpPr>
@@ -22528,7 +20024,7 @@
       </p:sp>
       <p:sp>
         <p:nvSpPr>
-          <p:cNvPr id="455" name="" descr="{&quot;isTemplate&quot;:true,&quot;type&quot;:&quot;text&quot;}"/>
+          <p:cNvPr id="411" name="" descr="{&quot;isTemplate&quot;:true,&quot;type&quot;:&quot;text&quot;}"/>
           <p:cNvSpPr txBox="1"/>
           <p:nvPr/>
         </p:nvSpPr>
@@ -22583,7 +20079,7 @@
       </p:sp>
       <p:sp>
         <p:nvSpPr>
-          <p:cNvPr id="456" name="" descr="{&quot;isTemplate&quot;:true,&quot;type&quot;:&quot;text&quot;}"/>
+          <p:cNvPr id="412" name="" descr="{&quot;isTemplate&quot;:true,&quot;type&quot;:&quot;text&quot;}"/>
           <p:cNvSpPr txBox="1"/>
           <p:nvPr/>
         </p:nvSpPr>
@@ -22658,7 +20154,7 @@
       </p:sp>
       <p:sp>
         <p:nvSpPr>
-          <p:cNvPr id="457" name="" descr="{&quot;isTemplate&quot;:true,&quot;type&quot;:&quot;text&quot;}"/>
+          <p:cNvPr id="413" name="" descr="{&quot;isTemplate&quot;:true,&quot;type&quot;:&quot;text&quot;}"/>
           <p:cNvSpPr txBox="1"/>
           <p:nvPr/>
         </p:nvSpPr>
@@ -22735,7 +20231,7 @@
       </p:sp>
       <p:sp>
         <p:nvSpPr>
-          <p:cNvPr id="458" name=""/>
+          <p:cNvPr id="414" name=""/>
           <p:cNvSpPr/>
           <p:nvPr/>
         </p:nvSpPr>
@@ -22766,7 +20262,7 @@
       </p:sp>
       <p:sp>
         <p:nvSpPr>
-          <p:cNvPr id="459" name="" descr="{&quot;isTemplate&quot;:true,&quot;type&quot;:&quot;text&quot;}"/>
+          <p:cNvPr id="415" name="" descr="{&quot;isTemplate&quot;:true,&quot;type&quot;:&quot;text&quot;}"/>
           <p:cNvSpPr txBox="1"/>
           <p:nvPr/>
         </p:nvSpPr>
@@ -22821,7 +20317,7 @@
       </p:sp>
       <p:sp>
         <p:nvSpPr>
-          <p:cNvPr id="460" name="" descr="{&quot;isTemplate&quot;:true,&quot;type&quot;:&quot;text&quot;}"/>
+          <p:cNvPr id="416" name="" descr="{&quot;isTemplate&quot;:true,&quot;type&quot;:&quot;text&quot;}"/>
           <p:cNvSpPr txBox="1"/>
           <p:nvPr/>
         </p:nvSpPr>
@@ -22938,7 +20434,7 @@
       </p:sp>
       <p:sp>
         <p:nvSpPr>
-          <p:cNvPr id="461" name="" descr="{&quot;isTemplate&quot;:true,&quot;type&quot;:&quot;text&quot;}"/>
+          <p:cNvPr id="417" name="" descr="{&quot;isTemplate&quot;:true,&quot;type&quot;:&quot;text&quot;}"/>
           <p:cNvSpPr txBox="1"/>
           <p:nvPr/>
         </p:nvSpPr>
@@ -23045,7 +20541,7 @@
       </p:sp>
       <p:sp>
         <p:nvSpPr>
-          <p:cNvPr id="462" name="" descr="{&quot;isTemplate&quot;:true,&quot;type&quot;:&quot;text&quot;}"/>
+          <p:cNvPr id="418" name="" descr="{&quot;isTemplate&quot;:true,&quot;type&quot;:&quot;text&quot;}"/>
           <p:cNvSpPr txBox="1"/>
           <p:nvPr/>
         </p:nvSpPr>
@@ -23142,7 +20638,7 @@
       </p:sp>
       <p:sp>
         <p:nvSpPr>
-          <p:cNvPr id="463" name="" descr="{&quot;isTemplate&quot;:true,&quot;type&quot;:&quot;text&quot;}"/>
+          <p:cNvPr id="419" name="" descr="{&quot;isTemplate&quot;:true,&quot;type&quot;:&quot;text&quot;}"/>
           <p:cNvSpPr txBox="1"/>
           <p:nvPr/>
         </p:nvSpPr>
@@ -23177,7 +20673,7 @@
       </p:sp>
       <p:sp>
         <p:nvSpPr>
-          <p:cNvPr id="464" name=""/>
+          <p:cNvPr id="420" name=""/>
           <p:cNvSpPr/>
           <p:nvPr/>
         </p:nvSpPr>
@@ -23201,7 +20697,7 @@
       </p:sp>
       <p:sp>
         <p:nvSpPr>
-          <p:cNvPr id="465" name=""/>
+          <p:cNvPr id="421" name=""/>
           <p:cNvSpPr/>
           <p:nvPr/>
         </p:nvSpPr>
@@ -23241,7 +20737,7 @@
       </p:sp>
       <p:sp>
         <p:nvSpPr>
-          <p:cNvPr id="466" name="" descr="{&quot;isTemplate&quot;:true,&quot;type&quot;:&quot;text&quot;}"/>
+          <p:cNvPr id="422" name="" descr="{&quot;isTemplate&quot;:true,&quot;type&quot;:&quot;text&quot;}"/>
           <p:cNvSpPr txBox="1"/>
           <p:nvPr/>
         </p:nvSpPr>

--- a/ecnu-cg/02-PPT/PPT-即时三维高斯泼溅重建.pptx
+++ b/ecnu-cg/02-PPT/PPT-即时三维高斯泼溅重建.pptx
@@ -5,7 +5,7 @@
     <p:sldMasterId id="2147483648" r:id="rId0"/>
   </p:sldMasterIdLst>
   <p:notesMasterIdLst>
-    <p:notesMasterId r:id="rId15"/>
+    <p:notesMasterId r:id="rId16"/>
   </p:notesMasterIdLst>
   <p:sldIdLst>
     <p:sldId id="256" r:id="rId1"/>
@@ -22,6 +22,7 @@
     <p:sldId id="267" r:id="rId12"/>
     <p:sldId id="268" r:id="rId13"/>
     <p:sldId id="269" r:id="rId14"/>
+    <p:sldId id="270" r:id="rId15"/>
   </p:sldIdLst>
   <p:sldSz cx="12192000" cy="6858000"/>
   <p:notesSz cx="6858000" cy="12192000"/>
@@ -1070,7 +1071,7 @@
   <p:cSld>
     <p:spTree>
       <p:nvGrpSpPr>
-        <p:cNvPr id="13" name="" descr="&lt;Slide style={{ width: '1280px', height: '720px', backgroundColor: '#FFFFFF', padding: '0px', flexDirection: 'column' }}&gt;&#10;    &lt;Box style={{ width: '1280px', height: '8px', backgroundColor: '#1E4FA8' }} /&gt;&#10;    &lt;Box style={{ padding: '30px 40px 0px 40px', flexDirection: 'row', justifyContent: 'space-between', alignItems: 'flex-end' }}&gt;&#10;        &lt;Text style={{ fontSize: 34, fontWeight: 'bold', color: '#1E4FA8' }}&gt;关键方式④：渐进式高斯层级控显存&lt;/Text&gt;&#10;        &lt;Text style={{ fontSize: 15, color: '#8B97A8' }}&gt;10 / 14&lt;/Text&gt;&#10;    &lt;/Box&gt;&#10;    &lt;Box style={{ padding: '20px 40px 0px 40px', flexDirection: 'row', gap: 26 }}&gt;&#10;        &lt;Box style={{ width: '380px', backgroundColor: '#F0F5FC', borderRadius: 6, padding: '22px 20px', flexDirection: 'column' }}&gt;&#10;            &lt;Text style={{ fontSize: 74, fontWeight: 'bold', color: '#1E4FA8', lineHeight: 1.1 }}&gt;0.5 px&lt;/Text&gt;&#10;            &lt;Text style={{ fontSize: 21, color: '#1A2230', lineHeight: 1.5, marginTop: 8 }}&gt;屏幕尺寸小于该值、且这类高斯占比超过 20% 时，触发合并&lt;/Text&gt;&#10;            &lt;Box style={{ width: '100%', height: '1px', backgroundColor: '#D6DCE5', marginTop: 16, marginBottom: 14 }} /&gt;&#10;            &lt;Text style={{ fontSize: 74, fontWeight: 'bold', color: '#1E4FA8', lineHeight: 1.1 }}&gt;1 px&lt;/Text&gt;&#10;            &lt;Text style={{ fontSize: 21, color: '#1A2230', lineHeight: 1.5, marginTop: 8 }}&gt;合并节点的贡献超过该值时，异步回取其子节点（双缓冲防卡顿）&lt;/Text&gt;&#10;        &lt;/Box&gt;&#10;        &lt;Box style={{ flex: 1, flexDirection: 'column', gap: 14 }}&gt;&#10;            &lt;Box style={{ backgroundColor: '#F7F9FC', border: '1px solid #D6DCE5', borderRadius: 6, padding: '14px 18px', flexDirection: 'column' }}&gt;&#10;                &lt;Text style={{ fontSize: 23, fontWeight: 'bold', color: '#1E4FA8' }}&gt;合并怎么做&lt;/Text&gt;&#10;                &lt;Text style={{ fontSize: 21, color: '#1A2230', lineHeight: 1.55, marginTop: 8 }}&gt;KNN 找 4 个最近高斯，按 KL 散度合并成一个父节点；叶节点参数卸载到 CPU 内存，显存只留活跃部分。&lt;/Text&gt;&#10;            &lt;/Box&gt;&#10;            &lt;Box style={{ backgroundColor: '#F7F9FC', border: '1px solid #D6DCE5', borderRadius: 6, padding: '14px 18px', flexDirection: 'column' }}&gt;&#10;                &lt;Text style={{ fontSize: 23, fontWeight: 'bold', color: '#1E4FA8' }}&gt;回环时怎么办&lt;/Text&gt;&#10;                &lt;Text style={{ fontSize: 21, color: '#1A2230', lineHeight: 1.55, marginTop: 8 }}&gt;每个高斯记录&quot;出生关键帧&quot;，回环修正时整棵子树按该关键帧的变换异步移动，不必逐个改。&lt;/Text&gt;&#10;            &lt;/Box&gt;&#10;            &lt;Box style={{ backgroundColor: '#F0F5FC', border: '1px solid #3D7BD9', borderRadius: 6, padding: '14px 18px', flexDirection: 'column' }}&gt;&#10;                &lt;Text style={{ fontSize: 23, fontWeight: 'bold', color: '#1E4FA8' }}&gt;实测效果（论文）&lt;/Text&gt;&#10;                &lt;Text style={{ fontSize: 21, color: '#1A2230', lineHeight: 1.55, marginTop: 8 }}&gt;CityWalk 不用层级：第 &lt;b&gt;795/4050&lt;/b&gt; 帧即 OOM；用后峰值高斯 &amp;lt; &lt;b&gt;370 万&lt;/b&gt;、显存 &amp;lt; &lt;b&gt;12.8 GB&lt;/b&gt;，层级达 &lt;b&gt;8 层&lt;/b&gt;。&lt;/Text&gt;&#10;            &lt;/Box&gt;&#10;        &lt;/Box&gt;&#10;    &lt;/Box&gt;&#10;&lt;/Slide&gt;&#10;"/>
+        <p:cNvPr id="13" name="" descr="&lt;Slide style={{ width: '1280px', height: '720px', backgroundColor: '#FFFFFF', padding: '0px', flexDirection: 'column' }}&gt;&#10;    &lt;Box style={{ width: '1280px', height: '8px', backgroundColor: '#1E4FA8' }} /&gt;&#10;    &lt;Box style={{ padding: '30px 40px 0px 40px', flexDirection: 'row', justifyContent: 'space-between', alignItems: 'flex-end' }}&gt;&#10;        &lt;Text style={{ fontSize: 34, fontWeight: 'bold', color: '#1E4FA8' }}&gt;关键方式④：渐进式高斯层级控显存&lt;/Text&gt;&#10;        &lt;Text style={{ fontSize: 15, color: '#8B97A8' }}&gt;10 / 15&lt;/Text&gt;&#10;    &lt;/Box&gt;&#10;    &lt;Box style={{ padding: '20px 40px 0px 40px', flexDirection: 'row', gap: 26 }}&gt;&#10;        &lt;Box style={{ width: '380px', backgroundColor: '#F0F5FC', borderRadius: 6, padding: '22px 20px', flexDirection: 'column' }}&gt;&#10;            &lt;Text style={{ fontSize: 74, fontWeight: 'bold', color: '#1E4FA8', lineHeight: 1.1 }}&gt;0.5 px&lt;/Text&gt;&#10;            &lt;Text style={{ fontSize: 21, color: '#1A2230', lineHeight: 1.5, marginTop: 8 }}&gt;屏幕尺寸小于该值、且这类高斯占比超过 20% 时，触发合并&lt;/Text&gt;&#10;            &lt;Box style={{ width: '100%', height: '1px', backgroundColor: '#D6DCE5', marginTop: 16, marginBottom: 14 }} /&gt;&#10;            &lt;Text style={{ fontSize: 74, fontWeight: 'bold', color: '#1E4FA8', lineHeight: 1.1 }}&gt;1 px&lt;/Text&gt;&#10;            &lt;Text style={{ fontSize: 21, color: '#1A2230', lineHeight: 1.5, marginTop: 8 }}&gt;合并节点的贡献超过该值时，异步回取其子节点（双缓冲防卡顿）&lt;/Text&gt;&#10;        &lt;/Box&gt;&#10;        &lt;Box style={{ flex: 1, flexDirection: 'column', gap: 14 }}&gt;&#10;            &lt;Box style={{ backgroundColor: '#F7F9FC', border: '1px solid #D6DCE5', borderRadius: 6, padding: '14px 18px', flexDirection: 'column' }}&gt;&#10;                &lt;Text style={{ fontSize: 23, fontWeight: 'bold', color: '#1E4FA8' }}&gt;合并怎么做&lt;/Text&gt;&#10;                &lt;Text style={{ fontSize: 21, color: '#1A2230', lineHeight: 1.55, marginTop: 8 }}&gt;KNN 找 4 个最近高斯，按 KL 散度合并成一个父节点；叶节点参数卸载到 CPU 内存，显存只留活跃部分。&lt;/Text&gt;&#10;            &lt;/Box&gt;&#10;            &lt;Box style={{ backgroundColor: '#F7F9FC', border: '1px solid #D6DCE5', borderRadius: 6, padding: '14px 18px', flexDirection: 'column' }}&gt;&#10;                &lt;Text style={{ fontSize: 23, fontWeight: 'bold', color: '#1E4FA8' }}&gt;回环时怎么办&lt;/Text&gt;&#10;                &lt;Text style={{ fontSize: 21, color: '#1A2230', lineHeight: 1.55, marginTop: 8 }}&gt;每个高斯记录&quot;出生关键帧&quot;，回环修正时整棵子树按该关键帧的变换异步移动，不必逐个改。&lt;/Text&gt;&#10;            &lt;/Box&gt;&#10;            &lt;Box style={{ backgroundColor: '#F0F5FC', border: '1px solid #3D7BD9', borderRadius: 6, padding: '14px 18px', flexDirection: 'column' }}&gt;&#10;                &lt;Text style={{ fontSize: 23, fontWeight: 'bold', color: '#1E4FA8' }}&gt;实测效果（论文）&lt;/Text&gt;&#10;                &lt;Text style={{ fontSize: 21, color: '#1A2230', lineHeight: 1.55, marginTop: 8 }}&gt;CityWalk 不用层级：第 &lt;b&gt;795/4050&lt;/b&gt; 帧即 OOM；用后峰值高斯 &amp;lt; &lt;b&gt;370 万&lt;/b&gt;、显存 &amp;lt; &lt;b&gt;12.8 GB&lt;/b&gt;，层级达 &lt;b&gt;8 层&lt;/b&gt;。&lt;/Text&gt;&#10;            &lt;/Box&gt;&#10;        &lt;/Box&gt;&#10;    &lt;/Box&gt;&#10;&lt;/Slide&gt;&#10;"/>
         <p:cNvGrpSpPr/>
         <p:nvPr/>
       </p:nvGrpSpPr>
@@ -1194,7 +1195,7 @@
                 <a:latin typeface="Microsoft YaHei"/>
                 <a:ea typeface="Microsoft YaHei"/>
               </a:rPr>
-              <a:t>10 / 14</a:t>
+              <a:t>10 / 15</a:t>
             </a:r>
             <a:endParaRPr/>
           </a:p>
@@ -2023,7 +2024,7 @@
   <p:cSld>
     <p:spTree>
       <p:nvGrpSpPr>
-        <p:cNvPr id="33" name="" descr="&lt;Slide style={{ width: '1280px', height: '720px', backgroundColor: '#FFFFFF', padding: '0px', flexDirection: 'column' }}&gt;&#10;    &lt;Box style={{ width: '1280px', height: '8px', backgroundColor: '#1E4FA8' }} /&gt;&#10;    &lt;Box style={{ padding: '30px 40px 0px 40px', flexDirection: 'row', justifyContent: 'space-between', alignItems: 'flex-end' }}&gt;&#10;        &lt;Text style={{ fontSize: 34, fontWeight: 'bold', color: '#1E4FA8' }}&gt;论文实验：快一个数量级，只差 1–2 dB&lt;/Text&gt;&#10;        &lt;Text style={{ fontSize: 15, color: '#8B97A8' }}&gt;11 / 14&lt;/Text&gt;&#10;    &lt;/Box&gt;&#10;    &lt;Box style={{ padding: '18px 40px 0px 40px', flexDirection: 'column' }}&gt;&#10;        &lt;Box style={{ flexDirection: 'row', backgroundColor: '#1E4FA8', padding: '11px 14px' }}&gt;&#10;            &lt;Text style={{ flex: 1.5, fontSize: 19, fontWeight: 'bold', color: '#FFFFFF' }}&gt;数据集（有序）&lt;/Text&gt;&#10;            &lt;Text style={{ flex: 1.4, fontSize: 19, fontWeight: 'bold', color: '#FFFFFF' }}&gt;本方法 PSNR / 时间&lt;/Text&gt;&#10;            &lt;Text style={{ flex: 1.7, fontSize: 19, fontWeight: 'bold', color: '#FFFFFF' }}&gt;离线参考 GLOMAP+3DGS(7k)&lt;/Text&gt;&#10;            &lt;Text style={{ flex: 1.4, fontSize: 19, fontWeight: 'bold', color: '#FFFFFF' }}&gt;结论&lt;/Text&gt;&#10;        &lt;/Box&gt;&#10;        &lt;Box style={{ flexDirection: 'row', padding: '11px 14px', borderBottom: '1px solid #D6DCE5' }}&gt;&#10;            &lt;Text style={{ flex: 1.5, fontSize: 19, color: '#1A2230' }}&gt;TUM&lt;/Text&gt;&#10;            &lt;Text style={{ flex: 1.4, fontSize: 19, fontWeight: 'bold', color: '#1E4FA8' }}&gt;24.77 / 1:22&lt;/Text&gt;&#10;            &lt;Text style={{ flex: 1.7, fontSize: 19, color: '#1A2230' }}&gt;25.29 / 3:33&lt;/Text&gt;&#10;            &lt;Text style={{ flex: 1.4, fontSize: 19, color: '#1A2230' }}&gt;比 LongSplat 快约 75×&lt;/Text&gt;&#10;        &lt;/Box&gt;&#10;        &lt;Box style={{ flexDirection: 'row', padding: '11px 14px', backgroundColor: '#F7F9FC', borderBottom: '1px solid #D6DCE5' }}&gt;&#10;            &lt;Text style={{ flex: 1.5, fontSize: 19, color: '#1A2230' }}&gt;MipNeRF360&lt;/Text&gt;&#10;            &lt;Text style={{ flex: 1.4, fontSize: 19, fontWeight: 'bold', color: '#1E4FA8' }}&gt;26.29 / 1:17&lt;/Text&gt;&#10;            &lt;Text style={{ flex: 1.7, fontSize: 19, color: '#1A2230' }}&gt;27.52 / 8:50&lt;/Text&gt;&#10;            &lt;Text style={{ flex: 1.4, fontSize: 19, color: '#1A2230' }}&gt;快 6.9×，差 1.23 dB&lt;/Text&gt;&#10;        &lt;/Box&gt;&#10;        &lt;Box style={{ flexDirection: 'row', padding: '11px 14px', borderBottom: '1px solid #D6DCE5' }}&gt;&#10;            &lt;Text style={{ flex: 1.5, fontSize: 19, color: '#1A2230' }}&gt;StaticHikes&lt;/Text&gt;&#10;            &lt;Text style={{ flex: 1.4, fontSize: 19, fontWeight: 'bold', color: '#1E4FA8' }}&gt;22.12 / 2:14&lt;/Text&gt;&#10;            &lt;Text style={{ flex: 1.7, fontSize: 19, color: '#1A2230' }}&gt;20.23 / 1:02:34&lt;/Text&gt;&#10;            &lt;Text style={{ flex: 1.4, fontSize: 19, color: '#1A2230' }}&gt;质量反超离线&lt;/Text&gt;&#10;        &lt;/Box&gt;&#10;        &lt;Box style={{ flexDirection: 'row', padding: '11px 14px', backgroundColor: '#F7F9FC', borderBottom: '1px solid #D6DCE5' }}&gt;&#10;            &lt;Text style={{ flex: 1.5, fontSize: 19, color: '#1A2230' }}&gt;CityWalk（4050 帧）&lt;/Text&gt;&#10;            &lt;Text style={{ flex: 1.4, fontSize: 19, fontWeight: 'bold', color: '#1E4FA8' }}&gt;22.03 / 29:38&lt;/Text&gt;&#10;            &lt;Text style={{ flex: 1.7, fontSize: 19, color: '#1A2230' }}&gt;Octree-GS 17.33 / 3:11:40&lt;/Text&gt;&#10;            &lt;Text style={{ flex: 1.4, fontSize: 19, color: '#1A2230' }}&gt;大场景最优&lt;/Text&gt;&#10;        &lt;/Box&gt;&#10;    &lt;/Box&gt;&#10;    &lt;Box style={{ padding: '16px 40px 0px 40px', flexDirection: 'row', gap: 16 }}&gt;&#10;        &lt;Box style={{ flex: 1, backgroundColor: '#F0F5FC', borderRadius: 6, padding: '13px 16px', flexDirection: 'column' }}&gt;&#10;            &lt;Text style={{ fontSize: 36, fontWeight: 'bold', color: '#1E4FA8' }}&gt;0.5 dB&lt;/Text&gt;&#10;            &lt;Text style={{ fontSize: 19, color: '#1A2230', lineHeight: 1.45, marginTop: 4 }}&gt;输入顺序打乱后 PSNR 26.29 → 25.73，&quot;无序&quot;不是门槛&lt;/Text&gt;&#10;        &lt;/Box&gt;&#10;        &lt;Box style={{ flex: 1, backgroundColor: '#F0F5FC', borderRadius: 6, padding: '13px 16px', flexDirection: 'column' }}&gt;&#10;            &lt;Text style={{ fontSize: 36, fontWeight: 'bold', color: '#1E4FA8' }}&gt;8.5&lt;/Text&gt;&#10;            &lt;Text style={{ fontSize: 19, color: '#1A2230', lineHeight: 1.45, marginTop: 4 }}&gt;MipNeRF360 平移 APE（对比 Photo-SLAM 161+）&lt;/Text&gt;&#10;        &lt;/Box&gt;&#10;        &lt;Box style={{ flex: 1, backgroundColor: '#F0F5FC', borderRadius: 6, padding: '13px 16px', flexDirection: 'column' }}&gt;&#10;            &lt;Text style={{ fontSize: 36, fontWeight: 'bold', color: '#1E4FA8' }}&gt;324 ms&lt;/Text&gt;&#10;            &lt;Text style={{ fontSize: 19, color: '#1A2230', lineHeight: 1.45, marginTop: 4 }}&gt;MipNeRF360 平均每帧延迟，具备&quot;即时反馈&quot;资格&lt;/Text&gt;&#10;        &lt;/Box&gt;&#10;    &lt;/Box&gt;&#10;&lt;/Slide&gt;&#10;"/>
+        <p:cNvPr id="33" name="" descr="&lt;Slide style={{ width: '1280px', height: '720px', backgroundColor: '#FFFFFF', padding: '0px', flexDirection: 'column' }}&gt;&#10;    &lt;Box style={{ width: '1280px', height: '8px', backgroundColor: '#1E4FA8' }} /&gt;&#10;    &lt;Box style={{ padding: '30px 40px 0px 40px', flexDirection: 'row', justifyContent: 'space-between', alignItems: 'flex-end' }}&gt;&#10;        &lt;Text style={{ fontSize: 34, fontWeight: 'bold', color: '#1E4FA8' }}&gt;论文实验：快一个数量级，只差 1–2 dB&lt;/Text&gt;&#10;        &lt;Text style={{ fontSize: 15, color: '#8B97A8' }}&gt;11 / 15&lt;/Text&gt;&#10;    &lt;/Box&gt;&#10;    &lt;Box style={{ padding: '18px 40px 0px 40px', flexDirection: 'column' }}&gt;&#10;        &lt;Box style={{ flexDirection: 'row', backgroundColor: '#1E4FA8', padding: '11px 14px' }}&gt;&#10;            &lt;Text style={{ flex: 1.5, fontSize: 19, fontWeight: 'bold', color: '#FFFFFF' }}&gt;数据集（有序）&lt;/Text&gt;&#10;            &lt;Text style={{ flex: 1.4, fontSize: 19, fontWeight: 'bold', color: '#FFFFFF' }}&gt;本方法 PSNR / 时间&lt;/Text&gt;&#10;            &lt;Text style={{ flex: 1.7, fontSize: 19, fontWeight: 'bold', color: '#FFFFFF' }}&gt;离线参考 GLOMAP+3DGS(7k)&lt;/Text&gt;&#10;            &lt;Text style={{ flex: 1.4, fontSize: 19, fontWeight: 'bold', color: '#FFFFFF' }}&gt;结论&lt;/Text&gt;&#10;        &lt;/Box&gt;&#10;        &lt;Box style={{ flexDirection: 'row', padding: '11px 14px', borderBottom: '1px solid #D6DCE5' }}&gt;&#10;            &lt;Text style={{ flex: 1.5, fontSize: 19, color: '#1A2230' }}&gt;TUM&lt;/Text&gt;&#10;            &lt;Text style={{ flex: 1.4, fontSize: 19, fontWeight: 'bold', color: '#1E4FA8' }}&gt;24.77 / 1:22&lt;/Text&gt;&#10;            &lt;Text style={{ flex: 1.7, fontSize: 19, color: '#1A2230' }}&gt;25.29 / 3:33&lt;/Text&gt;&#10;            &lt;Text style={{ flex: 1.4, fontSize: 19, color: '#1A2230' }}&gt;比 LongSplat 快约 75×&lt;/Text&gt;&#10;        &lt;/Box&gt;&#10;        &lt;Box style={{ flexDirection: 'row', padding: '11px 14px', backgroundColor: '#F7F9FC', borderBottom: '1px solid #D6DCE5' }}&gt;&#10;            &lt;Text style={{ flex: 1.5, fontSize: 19, color: '#1A2230' }}&gt;MipNeRF360&lt;/Text&gt;&#10;            &lt;Text style={{ flex: 1.4, fontSize: 19, fontWeight: 'bold', color: '#1E4FA8' }}&gt;26.29 / 1:17&lt;/Text&gt;&#10;            &lt;Text style={{ flex: 1.7, fontSize: 19, color: '#1A2230' }}&gt;27.52 / 8:50&lt;/Text&gt;&#10;            &lt;Text style={{ flex: 1.4, fontSize: 19, color: '#1A2230' }}&gt;快 6.9×，差 1.23 dB&lt;/Text&gt;&#10;        &lt;/Box&gt;&#10;        &lt;Box style={{ flexDirection: 'row', padding: '11px 14px', borderBottom: '1px solid #D6DCE5' }}&gt;&#10;            &lt;Text style={{ flex: 1.5, fontSize: 19, color: '#1A2230' }}&gt;StaticHikes&lt;/Text&gt;&#10;            &lt;Text style={{ flex: 1.4, fontSize: 19, fontWeight: 'bold', color: '#1E4FA8' }}&gt;22.12 / 2:14&lt;/Text&gt;&#10;            &lt;Text style={{ flex: 1.7, fontSize: 19, color: '#1A2230' }}&gt;20.23 / 1:02:34&lt;/Text&gt;&#10;            &lt;Text style={{ flex: 1.4, fontSize: 19, color: '#1A2230' }}&gt;质量反超离线&lt;/Text&gt;&#10;        &lt;/Box&gt;&#10;        &lt;Box style={{ flexDirection: 'row', padding: '11px 14px', backgroundColor: '#F7F9FC', borderBottom: '1px solid #D6DCE5' }}&gt;&#10;            &lt;Text style={{ flex: 1.5, fontSize: 19, color: '#1A2230' }}&gt;CityWalk（4050 帧）&lt;/Text&gt;&#10;            &lt;Text style={{ flex: 1.4, fontSize: 19, fontWeight: 'bold', color: '#1E4FA8' }}&gt;22.03 / 29:38&lt;/Text&gt;&#10;            &lt;Text style={{ flex: 1.7, fontSize: 19, color: '#1A2230' }}&gt;Octree-GS 17.33 / 3:11:40&lt;/Text&gt;&#10;            &lt;Text style={{ flex: 1.4, fontSize: 19, color: '#1A2230' }}&gt;大场景最优&lt;/Text&gt;&#10;        &lt;/Box&gt;&#10;    &lt;/Box&gt;&#10;    &lt;Box style={{ padding: '16px 40px 0px 40px', flexDirection: 'row', gap: 16 }}&gt;&#10;        &lt;Box style={{ flex: 1, backgroundColor: '#F0F5FC', borderRadius: 6, padding: '13px 16px', flexDirection: 'column' }}&gt;&#10;            &lt;Text style={{ fontSize: 36, fontWeight: 'bold', color: '#1E4FA8' }}&gt;0.5 dB&lt;/Text&gt;&#10;            &lt;Text style={{ fontSize: 19, color: '#1A2230', lineHeight: 1.45, marginTop: 4 }}&gt;输入顺序打乱后 PSNR 26.29 → 25.73，&quot;无序&quot;不是门槛&lt;/Text&gt;&#10;        &lt;/Box&gt;&#10;        &lt;Box style={{ flex: 1, backgroundColor: '#F0F5FC', borderRadius: 6, padding: '13px 16px', flexDirection: 'column' }}&gt;&#10;            &lt;Text style={{ fontSize: 36, fontWeight: 'bold', color: '#1E4FA8' }}&gt;8.5&lt;/Text&gt;&#10;            &lt;Text style={{ fontSize: 19, color: '#1A2230', lineHeight: 1.45, marginTop: 4 }}&gt;MipNeRF360 平移 APE（对比 Photo-SLAM 161+）&lt;/Text&gt;&#10;        &lt;/Box&gt;&#10;        &lt;Box style={{ flex: 1, backgroundColor: '#F0F5FC', borderRadius: 6, padding: '13px 16px', flexDirection: 'column' }}&gt;&#10;            &lt;Text style={{ fontSize: 36, fontWeight: 'bold', color: '#1E4FA8' }}&gt;324 ms&lt;/Text&gt;&#10;            &lt;Text style={{ fontSize: 19, color: '#1A2230', lineHeight: 1.45, marginTop: 4 }}&gt;MipNeRF360 平均每帧延迟，具备&quot;即时反馈&quot;资格&lt;/Text&gt;&#10;        &lt;/Box&gt;&#10;    &lt;/Box&gt;&#10;&lt;/Slide&gt;&#10;"/>
         <p:cNvGrpSpPr/>
         <p:nvPr/>
       </p:nvGrpSpPr>
@@ -2157,7 +2158,7 @@
                 <a:latin typeface="Microsoft YaHei"/>
                 <a:ea typeface="Microsoft YaHei"/>
               </a:rPr>
-              <a:t>11 / 14</a:t>
+              <a:t>11 / 15</a:t>
             </a:r>
             <a:endParaRPr/>
           </a:p>
@@ -3679,7 +3680,7 @@
   <p:cSld>
     <p:spTree>
       <p:nvGrpSpPr>
-        <p:cNvPr id="74" name="" descr="&lt;Slide style={{ width: '1280px', height: '720px', backgroundColor: '#FFFFFF', padding: '0px', flexDirection: 'column' }}&gt;&#10;    &lt;Box style={{ width: '1280px', height: '8px', backgroundColor: '#1E4FA8' }} /&gt;&#10;    &lt;Box style={{ padding: '30px 40px 0px 40px', flexDirection: 'row', justifyContent: 'space-between', alignItems: 'flex-end' }}&gt;&#10;        &lt;Text style={{ fontSize: 34, fontWeight: 'bold', color: '#1E4FA8' }}&gt;不足与改进：哪些是硬伤，哪些能补&lt;/Text&gt;&#10;        &lt;Text style={{ fontSize: 15, color: '#8B97A8' }}&gt;12 / 14&lt;/Text&gt;&#10;    &lt;/Box&gt;&#10;    &lt;Box style={{ padding: '18px 40px 0px 40px' }}&gt;&#10;        &lt;Text style={{ fontSize: 21, color: '#4A5568', lineHeight: 1.5 }}&gt;左栏是它现在的边界（①–④ 来自论文自述，⑤ 是我们复现的边界），右栏是对应的补法。&lt;/Text&gt;&#10;    &lt;/Box&gt;&#10;    &lt;Box style={{ padding: '12px 40px 0px 40px', flexDirection: 'row', gap: 26 }}&gt;&#10;        &lt;Box style={{ flex: 1, flexDirection: 'column' }}&gt;&#10;            &lt;Box style={{ flexDirection: 'row', alignItems: 'center', gap: 8 }}&gt;&#10;                &lt;Box style={{ width: '5px', height: '26px', backgroundColor: '#D9534F' }} /&gt;&#10;                &lt;Text style={{ fontSize: 26, fontWeight: 'bold', color: '#1A2230' }}&gt;目前方法的不足&lt;/Text&gt;&#10;            &lt;/Box&gt;&#10;            &lt;Text style={{ fontSize: 20, color: '#1A2230', lineHeight: 1.55, marginTop: 16 }}&gt;&lt;b&gt;① 低视差直接失效&lt;/b&gt;　纯旋转或平移太小，三角化不出深度，论文自述这类采集会失败。&lt;/Text&gt;&#10;            &lt;Text style={{ fontSize: 20, color: '#1A2230', lineHeight: 1.55, marginTop: 16 }}&gt;&lt;b&gt;② 精度有天花板&lt;/b&gt;　作者用 NoGraphProp 消融证明图传播不比全局 PGO 差，但同时承认仍不如全局 BA。&lt;/Text&gt;&#10;            &lt;Text style={{ fontSize: 20, color: '#1A2230', lineHeight: 1.55, marginTop: 16 }}&gt;&lt;b&gt;③ 上游依赖重&lt;/b&gt;　VPR + XFeat + LightGlue + Depth Anything 3 串成一条链，任一环失效整条断。&lt;/Text&gt;&#10;            &lt;Text style={{ fontSize: 20, color: '#1A2230', lineHeight: 1.55, marginTop: 16 }}&gt;&lt;b&gt;④ 阈值靠经验&lt;/b&gt;　合并 0.5 px / 占比 20%、跳数 5、建边 500 匹配，换场景需重调。&lt;/Text&gt;&#10;            &lt;Text style={{ fontSize: 20, color: '#1A2230', lineHeight: 1.55, marginTop: 16 }}&gt;&lt;b&gt;⑤ 我们的复现边界&lt;/b&gt;　只跑有序序列（未验真无序）、2 倍降采样、单场景。&lt;/Text&gt;&#10;        &lt;/Box&gt;&#10;        &lt;Box style={{ width: '1px', backgroundColor: '#D6DCE5' }} /&gt;&#10;        &lt;Box style={{ flex: 1, flexDirection: 'column' }}&gt;&#10;            &lt;Box style={{ flexDirection: 'row', alignItems: 'center', gap: 8 }}&gt;&#10;                &lt;Box style={{ width: '5px', height: '26px', backgroundColor: '#1E4FA8' }} /&gt;&#10;                &lt;Text style={{ fontSize: 26, fontWeight: 'bold', color: '#1A2230' }}&gt;以后的改进点&lt;/Text&gt;&#10;            &lt;/Box&gt;&#10;            &lt;Text style={{ fontSize: 20, color: '#1A2230', lineHeight: 1.55, marginTop: 16 }}&gt;&lt;b&gt;① 低视差帧降级&lt;/b&gt;　只参与渲染、不进位姿求解，避免污染轨迹。&lt;/Text&gt;&#10;            &lt;Text style={{ fontSize: 20, color: '#1A2230', lineHeight: 1.55, marginTop: 16 }}&gt;&lt;b&gt;② 在线粗 + 离线精&lt;/b&gt;　实时出预览，结束时用 GLOMAP 回填一次全局 BA，把 1.2 dB 补回来。&lt;/Text&gt;&#10;            &lt;Text style={{ fontSize: 20, color: '#1A2230', lineHeight: 1.55, marginTop: 16 }}&gt;&lt;b&gt;③ 采集端闭环&lt;/b&gt;　实时覆盖率与重投影误差热图，直接提示&quot;这块没拍&quot;——论文 motivation 的自然下一步。&lt;/Text&gt;&#10;            &lt;Text style={{ fontSize: 20, color: '#1A2230', lineHeight: 1.55, marginTop: 16 }}&gt;&lt;b&gt;④ 阈值自适应&lt;/b&gt;　按纹理强度与重叠度在线估计，替代固定常数。&lt;/Text&gt;&#10;            &lt;Text style={{ fontSize: 20, color: '#1A2230', lineHeight: 1.55, marginTop: 16 }}&gt;&lt;b&gt;⑤ 我们能立刻做的&lt;/b&gt;　打乱实验（--shuffle）、全分辨率重跑、再换 2–3 个场景。&lt;/Text&gt;&#10;        &lt;/Box&gt;&#10;    &lt;/Box&gt;&#10;    &lt;Box style={{ margin: '12px 40px 0px 40px', backgroundColor: '#F0F5FC', borderLeft: '5px solid #1E4FA8', padding: '15px 20px' }}&gt;&#10;        &lt;Text style={{ fontSize: 21, color: '#1A2230', lineHeight: 1.5 }}&gt;它把&quot;精度&quot;换成了&quot;时间&quot;。补回精度只有两条路：&lt;b&gt;要么离线回填，要么让采集端少犯错&lt;/b&gt;——后者才是它真正打开的方向。&lt;/Text&gt;&#10;    &lt;/Box&gt;&#10;&lt;/Slide&gt;&#10;"/>
+        <p:cNvPr id="74" name="" descr="&lt;Slide style={{ width: '1280px', height: '720px', backgroundColor: '#FFFFFF', padding: '0px', flexDirection: 'column' }}&gt;&#10;    &lt;Box style={{ width: '1280px', height: '8px', backgroundColor: '#1E4FA8' }} /&gt;&#10;    &lt;Box style={{ padding: '30px 40px 0px 40px', flexDirection: 'row', justifyContent: 'space-between', alignItems: 'flex-end' }}&gt;&#10;        &lt;Text style={{ fontSize: 34, fontWeight: 'bold', color: '#1E4FA8' }}&gt;不足与改进：哪些是硬伤，哪些能补&lt;/Text&gt;&#10;        &lt;Text style={{ fontSize: 15, color: '#8B97A8' }}&gt;12 / 15&lt;/Text&gt;&#10;    &lt;/Box&gt;&#10;    &lt;Box style={{ padding: '18px 40px 0px 40px' }}&gt;&#10;        &lt;Text style={{ fontSize: 21, color: '#4A5568', lineHeight: 1.5 }}&gt;左栏是它现在的边界（①–④ 来自论文自述，⑤ 是我们复现的边界），右栏是对应的补法。&lt;/Text&gt;&#10;    &lt;/Box&gt;&#10;    &lt;Box style={{ padding: '12px 40px 0px 40px', flexDirection: 'row', gap: 26 }}&gt;&#10;        &lt;Box style={{ flex: 1, flexDirection: 'column' }}&gt;&#10;            &lt;Box style={{ flexDirection: 'row', alignItems: 'center', gap: 8 }}&gt;&#10;                &lt;Box style={{ width: '5px', height: '26px', backgroundColor: '#D9534F' }} /&gt;&#10;                &lt;Text style={{ fontSize: 26, fontWeight: 'bold', color: '#1A2230' }}&gt;目前方法的不足&lt;/Text&gt;&#10;            &lt;/Box&gt;&#10;            &lt;Text style={{ fontSize: 20, color: '#1A2230', lineHeight: 1.55, marginTop: 16 }}&gt;&lt;b&gt;① 低视差直接失效&lt;/b&gt;　纯旋转或平移太小，三角化不出深度，论文自述这类采集会失败。&lt;/Text&gt;&#10;            &lt;Text style={{ fontSize: 20, color: '#1A2230', lineHeight: 1.55, marginTop: 16 }}&gt;&lt;b&gt;② 精度有天花板&lt;/b&gt;　作者用 NoGraphProp 消融证明图传播不比全局 PGO 差，但同时承认仍不如全局 BA。&lt;/Text&gt;&#10;            &lt;Text style={{ fontSize: 20, color: '#1A2230', lineHeight: 1.55, marginTop: 16 }}&gt;&lt;b&gt;③ 上游依赖重&lt;/b&gt;　VPR + XFeat + LightGlue + Depth Anything 3 串成一条链，任一环失效整条断。&lt;/Text&gt;&#10;            &lt;Text style={{ fontSize: 20, color: '#1A2230', lineHeight: 1.55, marginTop: 16 }}&gt;&lt;b&gt;④ 阈值靠经验&lt;/b&gt;　合并 0.5 px / 占比 20%、跳数 5、建边 500 匹配，换场景需重调。&lt;/Text&gt;&#10;            &lt;Text style={{ fontSize: 20, color: '#1A2230', lineHeight: 1.55, marginTop: 16 }}&gt;&lt;b&gt;⑤ 我们的复现边界&lt;/b&gt;　只跑有序序列（未验真无序）、2 倍降采样、单场景。&lt;/Text&gt;&#10;        &lt;/Box&gt;&#10;        &lt;Box style={{ width: '1px', backgroundColor: '#D6DCE5' }} /&gt;&#10;        &lt;Box style={{ flex: 1, flexDirection: 'column' }}&gt;&#10;            &lt;Box style={{ flexDirection: 'row', alignItems: 'center', gap: 8 }}&gt;&#10;                &lt;Box style={{ width: '5px', height: '26px', backgroundColor: '#1E4FA8' }} /&gt;&#10;                &lt;Text style={{ fontSize: 26, fontWeight: 'bold', color: '#1A2230' }}&gt;以后的改进点&lt;/Text&gt;&#10;            &lt;/Box&gt;&#10;            &lt;Text style={{ fontSize: 20, color: '#1A2230', lineHeight: 1.55, marginTop: 16 }}&gt;&lt;b&gt;① 低视差帧降级&lt;/b&gt;　只参与渲染、不进位姿求解，避免污染轨迹。&lt;/Text&gt;&#10;            &lt;Text style={{ fontSize: 20, color: '#1A2230', lineHeight: 1.55, marginTop: 16 }}&gt;&lt;b&gt;② 在线粗 + 离线精&lt;/b&gt;　实时出预览，结束时用 GLOMAP 回填一次全局 BA，把 1.2 dB 补回来。&lt;/Text&gt;&#10;            &lt;Text style={{ fontSize: 20, color: '#1A2230', lineHeight: 1.55, marginTop: 16 }}&gt;&lt;b&gt;③ 采集端闭环&lt;/b&gt;　实时覆盖率与重投影误差热图，直接提示&quot;这块没拍&quot;——论文 motivation 的自然下一步。&lt;/Text&gt;&#10;            &lt;Text style={{ fontSize: 20, color: '#1A2230', lineHeight: 1.55, marginTop: 16 }}&gt;&lt;b&gt;④ 阈值自适应&lt;/b&gt;　按纹理强度与重叠度在线估计，替代固定常数。&lt;/Text&gt;&#10;            &lt;Text style={{ fontSize: 20, color: '#1A2230', lineHeight: 1.55, marginTop: 16 }}&gt;&lt;b&gt;⑤ 我们能立刻做的&lt;/b&gt;　打乱实验（--shuffle）、全分辨率重跑、再换 2–3 个场景。&lt;/Text&gt;&#10;        &lt;/Box&gt;&#10;    &lt;/Box&gt;&#10;    &lt;Box style={{ margin: '12px 40px 0px 40px', backgroundColor: '#F0F5FC', borderLeft: '5px solid #1E4FA8', padding: '15px 20px' }}&gt;&#10;        &lt;Text style={{ fontSize: 21, color: '#1A2230', lineHeight: 1.5 }}&gt;它把&quot;精度&quot;换成了&quot;时间&quot;。补回精度只有两条路：&lt;b&gt;要么离线回填，要么让采集端少犯错&lt;/b&gt;——后者才是它真正打开的方向。&lt;/Text&gt;&#10;    &lt;/Box&gt;&#10;&lt;/Slide&gt;&#10;"/>
         <p:cNvGrpSpPr/>
         <p:nvPr/>
       </p:nvGrpSpPr>
@@ -3803,7 +3804,7 @@
                 <a:latin typeface="Microsoft YaHei"/>
                 <a:ea typeface="Microsoft YaHei"/>
               </a:rPr>
-              <a:t>12 / 14</a:t>
+              <a:t>12 / 15</a:t>
             </a:r>
             <a:endParaRPr/>
           </a:p>
@@ -5161,7 +5162,7 @@
   <p:cSld>
     <p:spTree>
       <p:nvGrpSpPr>
-        <p:cNvPr id="98" name="" descr="&lt;Slide style={{ width: '1280px', height: '720px', backgroundColor: '#FFFFFF', padding: '0px', flexDirection: 'column' }}&gt;&#10;    &lt;Box style={{ width: '1280px', height: '8px', backgroundColor: '#1E4FA8' }} /&gt;&#10;    &lt;Box style={{ padding: '30px 40px 0px 40px', flexDirection: 'row', justifyContent: 'space-between', alignItems: 'flex-end' }}&gt;&#10;        &lt;Text style={{ fontSize: 34, fontWeight: 'bold', color: '#1E4FA8' }}&gt;这条线怎么长出来的：三代工作&lt;/Text&gt;&#10;        &lt;Text style={{ fontSize: 15, color: '#8B97A8' }}&gt;13 / 14&lt;/Text&gt;&#10;    &lt;/Box&gt;&#10;    &lt;Box style={{ padding: '16px 40px 0px 40px' }}&gt;&#10;        &lt;Text style={{ fontSize: 21, color: '#4A5568', lineHeight: 1.5 }}&gt;本文不是孤立的一篇。同一团队三年做的是同一件事：&lt;b&gt;把辐射场重建变&quot;局部、渐进、免位姿&quot;&lt;/b&gt;，本文补上最后一块&quot;无序 + 全局一致&quot;。&lt;/Text&gt;&#10;    &lt;/Box&gt;&#10;&#10;    &lt;Box style={{ padding: '20px 40px 0px 40px', flexDirection: 'row', gap: 24 }}&gt;&#10;        &lt;Box style={{ width: '750px', flexDirection: 'column' }}&gt;&#10;            &lt;Box style={{ flexDirection: 'row', gap: 16 }}&gt;&#10;                &lt;Box style={{ width: '108px', backgroundColor: '#F0F5FC', borderRadius: 4, padding: '8px 8px', alignItems: 'center' }}&gt;&#10;                    &lt;Text style={{ fontSize: 20, fontWeight: 'bold', color: '#1E4FA8' }}&gt;2023&lt;/Text&gt;&#10;                    &lt;Text style={{ fontSize: 15, color: '#4A5568' }}&gt;CVPR&lt;/Text&gt;&#10;                &lt;/Box&gt;&#10;                &lt;Box style={{ flex: 1, flexDirection: 'column' }}&gt;&#10;                    &lt;Text style={{ fontSize: 22, fontWeight: 'bold', color: '#1A2230' }}&gt;渐进式局部辐射场&lt;/Text&gt;&#10;                    &lt;Text style={{ fontSize: 19, color: '#1A2230', lineHeight: 1.5, marginTop: 6 }}&gt;Progressively Optimized Local Radiance Fields：把场景切块、渐进而非一次性优化，是本文&quot;渐进层级&quot;的思想来源。&lt;/Text&gt;&#10;                &lt;/Box&gt;&#10;            &lt;/Box&gt;&#10;            &lt;Box style={{ height: '1px', backgroundColor: '#D6DCE5', marginTop: 16, marginBottom: 16 }} /&gt;&#10;            &lt;Box style={{ flexDirection: 'row', gap: 16 }}&gt;&#10;                &lt;Box style={{ width: '108px', backgroundColor: '#F0F5FC', borderRadius: 4, padding: '8px 8px', alignItems: 'center' }}&gt;&#10;                    &lt;Text style={{ fontSize: 20, fontWeight: 'bold', color: '#1E4FA8' }}&gt;2025&lt;/Text&gt;&#10;                    &lt;Text style={{ fontSize: 15, color: '#4A5568' }}&gt;ACM TOG&lt;/Text&gt;&#10;                &lt;/Box&gt;&#10;                &lt;Box style={{ flex: 1, flexDirection: 'column' }}&gt;&#10;                    &lt;Text style={{ fontSize: 22, fontWeight: 'bold', color: '#1A2230' }}&gt;免位姿的大场景即时重建（直接前作）&lt;/Text&gt;&#10;                    &lt;Text style={{ fontSize: 19, color: '#1A2230', lineHeight: 1.5, marginTop: 6 }}&gt;On-the-fly Reconstruction for Large-Scale NVS from Unposed Images：已做到&quot;不用 COLMAP + 大场景 + 即时&quot;，但&lt;b&gt;要求图像有序、且不做回环&lt;/b&gt;。&lt;/Text&gt;&#10;                &lt;/Box&gt;&#10;            &lt;/Box&gt;&#10;            &lt;Box style={{ height: '1px', backgroundColor: '#D6DCE5', marginTop: 16, marginBottom: 16 }} /&gt;&#10;            &lt;Box style={{ flexDirection: 'row', gap: 16 }}&gt;&#10;                &lt;Box style={{ width: '108px', backgroundColor: '#1E4FA8', borderRadius: 4, padding: '8px 8px', alignItems: 'center' }}&gt;&#10;                    &lt;Text style={{ fontSize: 20, fontWeight: 'bold', color: '#FFFFFF' }}&gt;2026&lt;/Text&gt;&#10;                    &lt;Text style={{ fontSize: 15, color: '#D6E4F7' }}&gt;SIGGRAPH&lt;/Text&gt;&#10;                &lt;/Box&gt;&#10;                &lt;Box style={{ flex: 1, flexDirection: 'column' }}&gt;&#10;                    &lt;Text style={{ fontSize: 22, fontWeight: 'bold', color: '#1A2230' }}&gt;本文：无序匹配 + 簇级回环&lt;/Text&gt;&#10;                    &lt;Text style={{ fontSize: 19, color: '#1A2230', lineHeight: 1.5, marginTop: 6 }}&gt;在前作之上只补两件事——在全部历史里检索重叠帧、用图传播做不重算的回环。增量不大，但恰好补在前作的假设上。&lt;/Text&gt;&#10;                &lt;/Box&gt;&#10;            &lt;/Box&gt;&#10;        &lt;/Box&gt;&#10;&#10;        &lt;Box style={{ flex: 1, backgroundColor: '#F7F9FC', border: '1px solid #D6DCE5', borderRadius: 6, padding: '18px 20px', flexDirection: 'column' }}&gt;&#10;            &lt;Text style={{ fontSize: 23, fontWeight: 'bold', color: '#1A2230' }}&gt;之后呢&lt;/Text&gt;&#10;            &lt;Text style={{ fontSize: 17, color: '#4A5568', lineHeight: 1.45, marginTop: 6 }}&gt;截至 2026-10-29 检索，未见正式发表的后续论文（本文 7 月才上线）。以下为按其脉络的判断：&lt;/Text&gt;&#10;            &lt;Text style={{ fontSize: 19, color: '#1A2230', lineHeight: 1.5, marginTop: 12 }}&gt;&lt;b&gt;① 走向采集端&lt;/b&gt;　从&quot;重建工具&quot;变成&quot;拍摄仪表盘&quot;。&lt;/Text&gt;&#10;            &lt;Text style={{ fontSize: 19, color: '#1A2230', lineHeight: 1.5, marginTop: 10 }}&gt;&lt;b&gt;② 精度回填&lt;/b&gt;　在线粗轨迹 + 收尾一次全局 BA。&lt;/Text&gt;&#10;            &lt;Text style={{ fontSize: 19, color: '#1A2230', lineHeight: 1.5, marginTop: 10 }}&gt;&lt;b&gt;③ 动态与大尺度&lt;/b&gt;　4050 帧已是当前上限，动态物体仍是空白。&lt;/Text&gt;&#10;            &lt;Text style={{ fontSize: 19, color: '#1A2230', lineHeight: 1.5, marginTop: 10 }}&gt;&lt;b&gt;④ 与离线并存&lt;/b&gt;　更可能被采集 App 吸收，而非取代离线流程。&lt;/Text&gt;&#10;        &lt;/Box&gt;&#10;    &lt;/Box&gt;&#10;&#10;    &lt;Box style={{ padding: '16px 40px 0px 40px' }}&gt;&#10;        &lt;Text style={{ fontSize: 16, color: '#8B97A8', lineHeight: 1.45 }}&gt;前两项工作引自本文参考文献（Meuleman et al. 2023 / 2025）；&quot;之后呢&quot;四条为汇报人判断，不代表作者观点，答辩时请按&quot;推测&quot;表述。&lt;/Text&gt;&#10;    &lt;/Box&gt;&#10;&lt;/Slide&gt;&#10;"/>
+        <p:cNvPr id="98" name="" descr="&lt;Slide style={{ width: '1280px', height: '720px', backgroundColor: '#FFFFFF', padding: '0px', flexDirection: 'column' }}&gt;&#10;    &lt;Box style={{ width: '1280px', height: '8px', backgroundColor: '#1E4FA8' }} /&gt;&#10;    &lt;Box style={{ padding: '30px 40px 0px 40px', flexDirection: 'row', justifyContent: 'space-between', alignItems: 'flex-end' }}&gt;&#10;        &lt;Text style={{ fontSize: 34, fontWeight: 'bold', color: '#1E4FA8' }}&gt;这条线怎么长出来的：三代工作&lt;/Text&gt;&#10;        &lt;Text style={{ fontSize: 15, color: '#8B97A8' }}&gt;13 / 15&lt;/Text&gt;&#10;    &lt;/Box&gt;&#10;    &lt;Box style={{ padding: '16px 40px 0px 40px' }}&gt;&#10;        &lt;Text style={{ fontSize: 21, color: '#4A5568', lineHeight: 1.5 }}&gt;本文不是孤立的一篇。同一团队三年做的是同一件事：&lt;b&gt;把辐射场重建变&quot;局部、渐进、免位姿&quot;&lt;/b&gt;，本文补上最后一块&quot;无序 + 全局一致&quot;。&lt;/Text&gt;&#10;    &lt;/Box&gt;&#10;&#10;    &lt;Box style={{ padding: '20px 40px 0px 40px', flexDirection: 'row', gap: 24 }}&gt;&#10;        &lt;Box style={{ width: '750px', flexDirection: 'column' }}&gt;&#10;            &lt;Box style={{ flexDirection: 'row', gap: 16 }}&gt;&#10;                &lt;Box style={{ width: '108px', backgroundColor: '#F0F5FC', borderRadius: 4, padding: '8px 8px', alignItems: 'center' }}&gt;&#10;                    &lt;Text style={{ fontSize: 20, fontWeight: 'bold', color: '#1E4FA8' }}&gt;2023&lt;/Text&gt;&#10;                    &lt;Text style={{ fontSize: 15, color: '#4A5568' }}&gt;CVPR&lt;/Text&gt;&#10;                &lt;/Box&gt;&#10;                &lt;Box style={{ flex: 1, flexDirection: 'column' }}&gt;&#10;                    &lt;Text style={{ fontSize: 22, fontWeight: 'bold', color: '#1A2230' }}&gt;渐进式局部辐射场&lt;/Text&gt;&#10;                    &lt;Text style={{ fontSize: 19, color: '#1A2230', lineHeight: 1.5, marginTop: 6 }}&gt;Progressively Optimized Local Radiance Fields：把场景切块、渐进而非一次性优化，是本文&quot;渐进层级&quot;的思想来源。&lt;/Text&gt;&#10;                &lt;/Box&gt;&#10;            &lt;/Box&gt;&#10;            &lt;Box style={{ height: '1px', backgroundColor: '#D6DCE5', marginTop: 16, marginBottom: 16 }} /&gt;&#10;            &lt;Box style={{ flexDirection: 'row', gap: 16 }}&gt;&#10;                &lt;Box style={{ width: '108px', backgroundColor: '#F0F5FC', borderRadius: 4, padding: '8px 8px', alignItems: 'center' }}&gt;&#10;                    &lt;Text style={{ fontSize: 20, fontWeight: 'bold', color: '#1E4FA8' }}&gt;2025&lt;/Text&gt;&#10;                    &lt;Text style={{ fontSize: 15, color: '#4A5568' }}&gt;ACM TOG&lt;/Text&gt;&#10;                &lt;/Box&gt;&#10;                &lt;Box style={{ flex: 1, flexDirection: 'column' }}&gt;&#10;                    &lt;Text style={{ fontSize: 22, fontWeight: 'bold', color: '#1A2230' }}&gt;免位姿的大场景即时重建（直接前作）&lt;/Text&gt;&#10;                    &lt;Text style={{ fontSize: 19, color: '#1A2230', lineHeight: 1.5, marginTop: 6 }}&gt;On-the-fly Reconstruction for Large-Scale NVS from Unposed Images：已做到&quot;不用 COLMAP + 大场景 + 即时&quot;，但&lt;b&gt;要求图像有序、且不做回环&lt;/b&gt;。&lt;/Text&gt;&#10;                &lt;/Box&gt;&#10;            &lt;/Box&gt;&#10;            &lt;Box style={{ height: '1px', backgroundColor: '#D6DCE5', marginTop: 16, marginBottom: 16 }} /&gt;&#10;            &lt;Box style={{ flexDirection: 'row', gap: 16 }}&gt;&#10;                &lt;Box style={{ width: '108px', backgroundColor: '#1E4FA8', borderRadius: 4, padding: '8px 8px', alignItems: 'center' }}&gt;&#10;                    &lt;Text style={{ fontSize: 20, fontWeight: 'bold', color: '#FFFFFF' }}&gt;2026&lt;/Text&gt;&#10;                    &lt;Text style={{ fontSize: 15, color: '#D6E4F7' }}&gt;SIGGRAPH&lt;/Text&gt;&#10;                &lt;/Box&gt;&#10;                &lt;Box style={{ flex: 1, flexDirection: 'column' }}&gt;&#10;                    &lt;Text style={{ fontSize: 22, fontWeight: 'bold', color: '#1A2230' }}&gt;本文：无序匹配 + 簇级回环&lt;/Text&gt;&#10;                    &lt;Text style={{ fontSize: 19, color: '#1A2230', lineHeight: 1.5, marginTop: 6 }}&gt;在前作之上只补两件事——在全部历史里检索重叠帧、用图传播做不重算的回环。增量不大，但恰好补在前作的假设上。&lt;/Text&gt;&#10;                &lt;/Box&gt;&#10;            &lt;/Box&gt;&#10;        &lt;/Box&gt;&#10;&#10;        &lt;Box style={{ flex: 1, backgroundColor: '#F7F9FC', border: '1px solid #D6DCE5', borderRadius: 6, padding: '18px 20px', flexDirection: 'column' }}&gt;&#10;            &lt;Text style={{ fontSize: 23, fontWeight: 'bold', color: '#1A2230' }}&gt;之后呢&lt;/Text&gt;&#10;            &lt;Text style={{ fontSize: 17, color: '#4A5568', lineHeight: 1.45, marginTop: 6 }}&gt;截至 2026-10-29 检索，未见正式发表的后续论文（本文 7 月才上线）。以下为按其脉络的判断：&lt;/Text&gt;&#10;            &lt;Text style={{ fontSize: 19, color: '#1A2230', lineHeight: 1.5, marginTop: 12 }}&gt;&lt;b&gt;① 走向采集端&lt;/b&gt;　从&quot;重建工具&quot;变成&quot;拍摄仪表盘&quot;。&lt;/Text&gt;&#10;            &lt;Text style={{ fontSize: 19, color: '#1A2230', lineHeight: 1.5, marginTop: 10 }}&gt;&lt;b&gt;② 精度回填&lt;/b&gt;　在线粗轨迹 + 收尾一次全局 BA。&lt;/Text&gt;&#10;            &lt;Text style={{ fontSize: 19, color: '#1A2230', lineHeight: 1.5, marginTop: 10 }}&gt;&lt;b&gt;③ 动态与大尺度&lt;/b&gt;　4050 帧已是当前上限，动态物体仍是空白。&lt;/Text&gt;&#10;            &lt;Text style={{ fontSize: 19, color: '#1A2230', lineHeight: 1.5, marginTop: 10 }}&gt;&lt;b&gt;④ 与离线并存&lt;/b&gt;　更可能被采集 App 吸收，而非取代离线流程。&lt;/Text&gt;&#10;        &lt;/Box&gt;&#10;    &lt;/Box&gt;&#10;&#10;    &lt;Box style={{ padding: '16px 40px 0px 40px' }}&gt;&#10;        &lt;Text style={{ fontSize: 16, color: '#8B97A8', lineHeight: 1.45 }}&gt;前两项工作引自本文参考文献（Meuleman et al. 2023 / 2025）；&quot;之后呢&quot;四条为汇报人判断，不代表作者观点，答辩时请按&quot;推测&quot;表述。&lt;/Text&gt;&#10;    &lt;/Box&gt;&#10;&lt;/Slide&gt;&#10;"/>
         <p:cNvGrpSpPr/>
         <p:nvPr/>
       </p:nvGrpSpPr>
@@ -5285,7 +5286,7 @@
                 <a:latin typeface="Microsoft YaHei"/>
                 <a:ea typeface="Microsoft YaHei"/>
               </a:rPr>
-              <a:t>13 / 14</a:t>
+              <a:t>13 / 15</a:t>
             </a:r>
             <a:endParaRPr/>
           </a:p>
@@ -6846,7 +6847,7 @@
   <p:cSld>
     <p:spTree>
       <p:nvGrpSpPr>
-        <p:cNvPr id="129" name="" descr="&lt;Slide style={{ width: '1280px', height: '720px', backgroundColor: '#FFFFFF', padding: '0px', flexDirection: 'column' }}&gt;&#10;    &lt;Box style={{ width: '1280px', height: '8px', backgroundColor: '#1E4FA8' }} /&gt;&#10;    &lt;Box style={{ padding: '30px 40px 0px 40px', flexDirection: 'row', justifyContent: 'space-between', alignItems: 'flex-end' }}&gt;&#10;        &lt;Text style={{ fontSize: 34, fontWeight: 'bold', color: '#1E4FA8' }}&gt;结论：三句话带走&lt;/Text&gt;&#10;        &lt;Text style={{ fontSize: 15, color: '#8B97A8' }}&gt;14 / 14&lt;/Text&gt;&#10;    &lt;/Box&gt;&#10;&#10;    &lt;Box style={{ padding: '24px 40px 0px 40px', flexDirection: 'column', gap: 20 }}&gt;&#10;        &lt;Box style={{ flexDirection: 'row', gap: 18, alignItems: 'flex-start' }}&gt;&#10;            &lt;Box style={{ width: '38px', height: '38px', backgroundColor: '#1E4FA8', borderRadius: 4, alignItems: 'center', justifyContent: 'center' }}&gt;&#10;                &lt;Text style={{ fontSize: 21, fontWeight: 'bold', color: '#FFFFFF' }}&gt;1&lt;/Text&gt;&#10;            &lt;/Box&gt;&#10;            &lt;Box style={{ flex: 1, flexDirection: 'column' }}&gt;&#10;                &lt;Text style={{ fontSize: 26, fontWeight: 'bold', color: '#1A2230' }}&gt;它填的是一块空格，不是&quot;更快的离线 SfM&quot;&lt;/Text&gt;&#10;                &lt;Text style={{ fontSize: 20, color: '#4A5568', lineHeight: 1.45, marginTop: 6 }}&gt;即时、无序、全局一致三者同时成立，此前没有方法做到。速度只是手段，&quot;现场可判断&quot;才是目的。&lt;/Text&gt;&#10;            &lt;/Box&gt;&#10;        &lt;/Box&gt;&#10;        &lt;Box style={{ flexDirection: 'row', gap: 18, alignItems: 'flex-start' }}&gt;&#10;            &lt;Box style={{ width: '38px', height: '38px', backgroundColor: '#1E4FA8', borderRadius: 4, alignItems: 'center', justifyContent: 'center' }}&gt;&#10;                &lt;Text style={{ fontSize: 21, fontWeight: 'bold', color: '#FFFFFF' }}&gt;2&lt;/Text&gt;&#10;            &lt;/Box&gt;&#10;            &lt;Box style={{ flex: 1, flexDirection: 'column' }}&gt;&#10;                &lt;Text style={{ fontSize: 26, fontWeight: 'bold', color: '#1A2230' }}&gt;题眼是用&quot;图上的距离&quot;替换&quot;全局优化的解&quot;&lt;/Text&gt;&#10;                &lt;Text style={{ fontSize: 20, color: '#4A5568', lineHeight: 1.45, marginTop: 6 }}&gt;判定看跳数不看时间，求解用焊接窗口得 Sim(3)，再把修正按测地距离摊给全图——回环不必重算第二遍。&lt;/Text&gt;&#10;            &lt;/Box&gt;&#10;        &lt;/Box&gt;&#10;        &lt;Box style={{ flexDirection: 'row', gap: 18, alignItems: 'flex-start' }}&gt;&#10;            &lt;Box style={{ width: '38px', height: '38px', backgroundColor: '#0E3F8C', borderRadius: 4, alignItems: 'center', justifyContent: 'center' }}&gt;&#10;                &lt;Text style={{ fontSize: 21, fontWeight: 'bold', color: '#FFFFFF' }}&gt;3&lt;/Text&gt;&#10;            &lt;/Box&gt;&#10;            &lt;Box style={{ flex: 1, flexDirection: 'column' }}&gt;&#10;                &lt;Text style={{ fontSize: 26, fontWeight: 'bold', color: '#1A2230' }}&gt;代价是真的：1.2 dB 与一条更重的依赖链&lt;/Text&gt;&#10;                &lt;Text style={{ fontSize: 20, color: '#4A5568', lineHeight: 1.45, marginTop: 6 }}&gt;精度上限低于全局 BA，低视差会失败，阈值靠经验。它换的是时间，不是免费午餐。&lt;/Text&gt;&#10;            &lt;/Box&gt;&#10;        &lt;/Box&gt;&#10;    &lt;/Box&gt;&#10;&#10;    &lt;Box style={{ padding: '22px 40px 0px 40px', flexDirection: 'row', gap: 16 }}&gt;&#10;        &lt;Box style={{ flex: 1, backgroundColor: '#F0F5FC', borderRadius: 6, padding: '12px 16px', flexDirection: 'row', alignItems: 'baseline', gap: 10 }}&gt;&#10;            &lt;Text style={{ fontSize: 32, fontWeight: 'bold', color: '#1E4FA8' }}&gt;26.29 dB&lt;/Text&gt;&#10;            &lt;Text style={{ fontSize: 17, color: '#1A2230' }}&gt;论文在 MipNeRF360 的成绩&lt;/Text&gt;&#10;        &lt;/Box&gt;&#10;        &lt;Box style={{ flex: 1, backgroundColor: '#F0F5FC', borderRadius: 6, padding: '12px 16px', flexDirection: 'row', alignItems: 'baseline', gap: 10 }}&gt;&#10;            &lt;Text style={{ fontSize: 32, fontWeight: 'bold', color: '#1E4FA8' }}&gt;0.5 dB&lt;/Text&gt;&#10;            &lt;Text style={{ fontSize: 17, color: '#1A2230' }}&gt;输入打乱后的代价&lt;/Text&gt;&#10;        &lt;/Box&gt;&#10;        &lt;Box style={{ flex: 1, backgroundColor: '#F0F5FC', borderRadius: 6, padding: '12px 16px', flexDirection: 'row', alignItems: 'baseline', gap: 10 }}&gt;&#10;            &lt;Text style={{ fontSize: 32, fontWeight: 'bold', color: '#1E4FA8' }}&gt;25.95 dB&lt;/Text&gt;&#10;            &lt;Text style={{ fontSize: 17, color: '#1A2230' }}&gt;我们自己跑出来的&lt;/Text&gt;&#10;        &lt;/Box&gt;&#10;    &lt;/Box&gt;&#10;&#10;    &lt;Box style={{ margin: '16px 40px 0px 40px', backgroundColor: '#1E4FA8', borderRadius: 6, padding: '15px 22px' }}&gt;&#10;        &lt;Text style={{ fontSize: 22, fontWeight: 'bold', color: '#FFFFFF', lineHeight: 1.45 }}&gt;一句话总结：它把 3DGS 从&quot;拍完再算的离线工具&quot;变成了&quot;拍摄现场的仪表盘&quot;，代价是让出一点精度。&lt;/Text&gt;&#10;    &lt;/Box&gt;&#10;&#10;    &lt;Box style={{ marginTop: 'auto', padding: '20px 40px 0px 40px', paddingBottom: '26px', flexDirection: 'row', justifyContent: 'space-between', alignItems: 'center' }}&gt;&#10;        &lt;Text style={{ fontSize: 26, fontWeight: 'bold', color: '#1E4FA8' }}&gt;谢谢，欢迎提问&lt;/Text&gt;&#10;        &lt;Text style={{ fontSize: 15, color: '#8B97A8' }}&gt;论文：SIGGRAPH 2026 / arXiv:2607.14481 · 代码：github.com/graphdeco-inria/i3dgs&lt;/Text&gt;&#10;    &lt;/Box&gt;&#10;&lt;/Slide&gt;&#10;"/>
+        <p:cNvPr id="129" name="" descr="&lt;Slide style={{ width: '1280px', height: '720px', backgroundColor: '#FFFFFF', padding: '0px', flexDirection: 'column' }}&gt;&#10;    &lt;Box style={{ width: '1280px', height: '8px', backgroundColor: '#1E4FA8' }} /&gt;&#10;    &lt;Box style={{ padding: '30px 40px 0px 40px', flexDirection: 'row', justifyContent: 'space-between', alignItems: 'flex-end' }}&gt;&#10;        &lt;Text style={{ fontSize: 34, fontWeight: 'bold', color: '#1E4FA8' }}&gt;结论：三句话带走&lt;/Text&gt;&#10;        &lt;Text style={{ fontSize: 15, color: '#8B97A8' }}&gt;14 / 15&lt;/Text&gt;&#10;    &lt;/Box&gt;&#10;&#10;    &lt;Box style={{ padding: '24px 40px 0px 40px', flexDirection: 'column', gap: 20 }}&gt;&#10;        &lt;Box style={{ flexDirection: 'row', gap: 18, alignItems: 'flex-start' }}&gt;&#10;            &lt;Box style={{ width: '38px', height: '38px', backgroundColor: '#1E4FA8', borderRadius: 4, alignItems: 'center', justifyContent: 'center' }}&gt;&#10;                &lt;Text style={{ fontSize: 21, fontWeight: 'bold', color: '#FFFFFF' }}&gt;1&lt;/Text&gt;&#10;            &lt;/Box&gt;&#10;            &lt;Box style={{ flex: 1, flexDirection: 'column' }}&gt;&#10;                &lt;Text style={{ fontSize: 26, fontWeight: 'bold', color: '#1A2230' }}&gt;它填的是一块空格，不是&quot;更快的离线 SfM&quot;&lt;/Text&gt;&#10;                &lt;Text style={{ fontSize: 20, color: '#4A5568', lineHeight: 1.45, marginTop: 6 }}&gt;即时、无序、全局一致三者同时成立，此前没有方法做到。速度只是手段，&quot;现场可判断&quot;才是目的。&lt;/Text&gt;&#10;            &lt;/Box&gt;&#10;        &lt;/Box&gt;&#10;        &lt;Box style={{ flexDirection: 'row', gap: 18, alignItems: 'flex-start' }}&gt;&#10;            &lt;Box style={{ width: '38px', height: '38px', backgroundColor: '#1E4FA8', borderRadius: 4, alignItems: 'center', justifyContent: 'center' }}&gt;&#10;                &lt;Text style={{ fontSize: 21, fontWeight: 'bold', color: '#FFFFFF' }}&gt;2&lt;/Text&gt;&#10;            &lt;/Box&gt;&#10;            &lt;Box style={{ flex: 1, flexDirection: 'column' }}&gt;&#10;                &lt;Text style={{ fontSize: 26, fontWeight: 'bold', color: '#1A2230' }}&gt;题眼是用&quot;图上的距离&quot;替换&quot;全局优化的解&quot;&lt;/Text&gt;&#10;                &lt;Text style={{ fontSize: 20, color: '#4A5568', lineHeight: 1.45, marginTop: 6 }}&gt;判定看跳数不看时间，求解用焊接窗口得 Sim(3)，再把修正按测地距离摊给全图——回环不必重算第二遍。&lt;/Text&gt;&#10;            &lt;/Box&gt;&#10;        &lt;/Box&gt;&#10;        &lt;Box style={{ flexDirection: 'row', gap: 18, alignItems: 'flex-start' }}&gt;&#10;            &lt;Box style={{ width: '38px', height: '38px', backgroundColor: '#0E3F8C', borderRadius: 4, alignItems: 'center', justifyContent: 'center' }}&gt;&#10;                &lt;Text style={{ fontSize: 21, fontWeight: 'bold', color: '#FFFFFF' }}&gt;3&lt;/Text&gt;&#10;            &lt;/Box&gt;&#10;            &lt;Box style={{ flex: 1, flexDirection: 'column' }}&gt;&#10;                &lt;Text style={{ fontSize: 26, fontWeight: 'bold', color: '#1A2230' }}&gt;代价是真的：1.2 dB 与一条更重的依赖链&lt;/Text&gt;&#10;                &lt;Text style={{ fontSize: 20, color: '#4A5568', lineHeight: 1.45, marginTop: 6 }}&gt;精度上限低于全局 BA，低视差会失败，阈值靠经验。它换的是时间，不是免费午餐。&lt;/Text&gt;&#10;            &lt;/Box&gt;&#10;        &lt;/Box&gt;&#10;    &lt;/Box&gt;&#10;&#10;    &lt;Box style={{ padding: '22px 40px 0px 40px', flexDirection: 'row', gap: 16 }}&gt;&#10;        &lt;Box style={{ flex: 1, backgroundColor: '#F0F5FC', borderRadius: 6, padding: '12px 16px', flexDirection: 'row', alignItems: 'baseline', gap: 10 }}&gt;&#10;            &lt;Text style={{ fontSize: 32, fontWeight: 'bold', color: '#1E4FA8' }}&gt;26.29 dB&lt;/Text&gt;&#10;            &lt;Text style={{ fontSize: 17, color: '#1A2230' }}&gt;论文在 MipNeRF360 的成绩&lt;/Text&gt;&#10;        &lt;/Box&gt;&#10;        &lt;Box style={{ flex: 1, backgroundColor: '#F0F5FC', borderRadius: 6, padding: '12px 16px', flexDirection: 'row', alignItems: 'baseline', gap: 10 }}&gt;&#10;            &lt;Text style={{ fontSize: 32, fontWeight: 'bold', color: '#1E4FA8' }}&gt;0.5 dB&lt;/Text&gt;&#10;            &lt;Text style={{ fontSize: 17, color: '#1A2230' }}&gt;输入打乱后的代价&lt;/Text&gt;&#10;        &lt;/Box&gt;&#10;        &lt;Box style={{ flex: 1, backgroundColor: '#F0F5FC', borderRadius: 6, padding: '12px 16px', flexDirection: 'row', alignItems: 'baseline', gap: 10 }}&gt;&#10;            &lt;Text style={{ fontSize: 32, fontWeight: 'bold', color: '#1E4FA8' }}&gt;25.95 dB&lt;/Text&gt;&#10;            &lt;Text style={{ fontSize: 17, color: '#1A2230' }}&gt;我们自己跑出来的&lt;/Text&gt;&#10;        &lt;/Box&gt;&#10;    &lt;/Box&gt;&#10;&#10;    &lt;Box style={{ margin: '16px 40px 0px 40px', backgroundColor: '#1E4FA8', borderRadius: 6, padding: '15px 22px' }}&gt;&#10;        &lt;Text style={{ fontSize: 22, fontWeight: 'bold', color: '#FFFFFF', lineHeight: 1.45 }}&gt;一句话总结：它把 3DGS 从&quot;拍完再算的离线工具&quot;变成了&quot;拍摄现场的仪表盘&quot;，代价是让出一点精度。&lt;/Text&gt;&#10;    &lt;/Box&gt;&#10;&#10;    &lt;Box style={{ marginTop: 'auto', padding: '20px 40px 0px 40px', paddingBottom: '26px', flexDirection: 'row', justifyContent: 'space-between', alignItems: 'center' }}&gt;&#10;        &lt;Text style={{ fontSize: 26, fontWeight: 'bold', color: '#1E4FA8' }}&gt;谢谢，欢迎提问&lt;/Text&gt;&#10;        &lt;Text style={{ fontSize: 15, color: '#8B97A8' }}&gt;论文：SIGGRAPH 2026 / arXiv:2607.14481 · 代码：github.com/graphdeco-inria/i3dgs&lt;/Text&gt;&#10;    &lt;/Box&gt;&#10;&lt;/Slide&gt;&#10;"/>
         <p:cNvGrpSpPr/>
         <p:nvPr/>
       </p:nvGrpSpPr>
@@ -6970,7 +6971,7 @@
                 <a:latin typeface="Microsoft YaHei"/>
                 <a:ea typeface="Microsoft YaHei"/>
               </a:rPr>
-              <a:t>14 / 14</a:t>
+              <a:t>14 / 15</a:t>
             </a:r>
             <a:endParaRPr/>
           </a:p>
@@ -8143,12 +8144,12 @@
 </p:sld>
 </file>
 
-<file path=ppt/slides/slide2.xml><?xml version="1.0" encoding="utf-8"?>
+<file path=ppt/slides/slide15.xml><?xml version="1.0" encoding="utf-8"?>
 <p:sld xmlns:p="http://schemas.openxmlformats.org/presentationml/2006/main" xmlns:a="http://schemas.openxmlformats.org/drawingml/2006/main">
   <p:cSld>
     <p:spTree>
       <p:nvGrpSpPr>
-        <p:cNvPr id="159" name="" descr="&lt;Slide style={{ width: '1280px', height: '720px', backgroundColor: '#FFFFFF', padding: '0px', flexDirection: 'column' }}&gt;&#10;    &lt;Box style={{ width: '1280px', height: '8px', backgroundColor: '#1E4FA8' }} /&gt;&#10;    &lt;Box style={{ padding: '34px 40px 0px 40px', flexDirection: 'row', justifyContent: 'space-between', alignItems: 'flex-end' }}&gt;&#10;        &lt;Text style={{ fontSize: 34, fontWeight: 'bold', color: '#1E4FA8' }}&gt;摘要&lt;/Text&gt;&#10;        &lt;Text style={{ fontSize: 15, color: '#8B97A8' }}&gt;02 / 14&lt;/Text&gt;&#10;    &lt;/Box&gt;&#10;    &lt;Box style={{ padding: '20px 40px 0px 40px', flexDirection: 'column', gap: 13 }}&gt;&#10;        &lt;Box style={{ backgroundColor: '#F0F5FC', borderLeft: '5px solid #1E4FA8', padding: '14px 20px', flexDirection: 'column' }}&gt;&#10;            &lt;Text style={{ fontSize: 22, fontWeight: 'bold', color: '#1E4FA8' }}&gt;问题&lt;/Text&gt;&#10;            &lt;Text style={{ fontSize: 22, color: '#1A2230', lineHeight: 1.5, marginTop: 6 }}&gt;3DGS 重建质量高、可实时渲染，但训练前必须由 SfM（COLMAP）离线解算相机位姿；SfM 要等&lt;b&gt;全部图像到齐&lt;/b&gt;，且对&lt;b&gt;乱序采集&lt;/b&gt;敏感。&lt;/Text&gt;&#10;        &lt;/Box&gt;&#10;        &lt;Box style={{ backgroundColor: '#F7F9FC', borderLeft: '5px solid #4A5568', padding: '14px 20px', flexDirection: 'column' }}&gt;&#10;            &lt;Text style={{ fontSize: 22, fontWeight: 'bold', color: '#4A5568' }}&gt;现状缺口&lt;/Text&gt;&#10;            &lt;Text style={{ fontSize: 22, color: '#1A2230', lineHeight: 1.5, marginTop: 6 }}&gt;离线 SfM + 3DGS 质量好、但慢且无现场反馈；SLAM 类增量重建能实时，却&lt;b&gt;假设图像有序&lt;/b&gt;——两者之间没人补齐。&lt;/Text&gt;&#10;        &lt;/Box&gt;&#10;        &lt;Box style={{ backgroundColor: '#F0F5FC', borderLeft: '5px solid #1E4FA8', padding: '14px 20px', flexDirection: 'column' }}&gt;&#10;            &lt;Text style={{ fontSize: 22, fontWeight: 'bold', color: '#1E4FA8' }}&gt;本文做法&lt;/Text&gt;&#10;            &lt;Text style={{ fontSize: 22, color: '#1A2230', lineHeight: 1.5, marginTop: 6 }}&gt;首个面向无序输入、具备全局一致性的即时反馈 3DGS 重建：两级快速匹配 + GPU 局部 BA + 簇级回环图传播 + 渐进式高斯层级。&lt;/Text&gt;&#10;        &lt;/Box&gt;&#10;        &lt;Box style={{ backgroundColor: '#F7F9FC', borderLeft: '5px solid #3D7BD9', padding: '14px 20px', flexDirection: 'column' }}&gt;&#10;            &lt;Text style={{ fontSize: 22, fontWeight: 'bold', color: '#3D7BD9' }}&gt;结果与复现&lt;/Text&gt;&#10;            &lt;Text style={{ fontSize: 22, color: '#1A2230', lineHeight: 1.5, marginTop: 6 }}&gt;MipNeRF360 上 &lt;b&gt;1 分 17 秒&lt;/b&gt;达到 &lt;b&gt;26.29 dB&lt;/b&gt;（离线参考 8 分 50 秒 / 27.52 dB）；输入打乱仅降 &lt;b&gt;0.5 dB&lt;/b&gt;。我们完成了端到端复现：&lt;b&gt;25.95 dB / 62.7 秒 / 185 帧&lt;/b&gt;。&lt;/Text&gt;&#10;        &lt;/Box&gt;&#10;    &lt;/Box&gt;&#10;    &lt;Box style={{ padding: '16px 40px 0px 40px' }}&gt;&#10;        &lt;Text style={{ fontSize: 16, color: '#4A5568' }}&gt;关键词：三维高斯泼溅 · 无序采集 · 即时重建 · 协视图 · 回环闭合 · 渐进式层级&lt;/Text&gt;&#10;    &lt;/Box&gt;&#10;&lt;/Slide&gt;&#10;"/>
+        <p:cNvPr id="159" name="" descr="&lt;Slide style={{ width: '1280px', height: '720px', backgroundColor: '#FFFFFF', padding: '0px', flexDirection: 'column' }}&gt;&#10;    &lt;Box style={{ width: '1280px', height: '8px', backgroundColor: '#1E4FA8' }} /&gt;&#10;    &lt;Box style={{ padding: '16px 40px 0px 40px', flexDirection: 'row', justifyContent: 'space-between', alignItems: 'flex-end' }}&gt;&#10;        &lt;Text style={{ fontSize: 32, fontWeight: 'bold', color: '#1E4FA8' }}&gt;附：七个步骤在源码里长什么样&lt;/Text&gt;&#10;        &lt;Text style={{ fontSize: 15, color: '#8B97A8' }}&gt;15 / 15&lt;/Text&gt;&#10;    &lt;/Box&gt;&#10;    &lt;Box style={{ padding: '6px 40px 0px 40px' }}&gt;&#10;        &lt;Text style={{ fontSize: 17, color: '#4A5568' }}&gt;真实源码片段，行号对应第 7 页七步链：&lt;b&gt;①②③ 定跟谁比、④ 定跟谁一起算、⑤ 才真解位姿、⑥⑦ 修漂移与压显存&lt;/b&gt;。&lt;/Text&gt;&#10;    &lt;/Box&gt;&#10;    &lt;Box style={{ padding: '9px 40px 0px 40px', flexDirection: 'row', gap: 14 }}&gt;&#10;        &lt;Box style={{ flex: 1, flexDirection: 'column', gap: 8 }}&gt;&#10;        &lt;Box style={{ backgroundColor: '#0F1D33', borderRadius: 5, padding: '6px 11px 6px 11px', flexDirection: 'column' }}&gt;&#10;            &lt;Text style={{ fontSize: 13, fontWeight: 'bold', color: '#8FBBFF', marginBottom: 1 }}&gt;① ② ③  检索 → 粗筛 → 建边&lt;/Text&gt;&#10;            &lt;Text style={{ fontFamily: 'Consolas', fontSize: 10, color: '#6D87AC', marginBottom: 3 }}&gt;scene/scene_model_loop_closure.py:179&lt;/Text&gt;&#10;            &lt;Text style={{ fontFamily: 'Consolas', fontSize: 13, color: '#D7E3F6', lineHeight: 1.28 }}&gt;cossim = self.vpr_features @ vpr_feature.T     # 全局描述子&lt;/Text&gt;&#10;            &lt;Text style={{ fontFamily: 'Consolas', fontSize: 13, color: '#D7E3F6', lineHeight: 1.28 }}&gt;_, cand = torch.topk(cossim_best, n_candidates)   # top-20&lt;/Text&gt;&#10;            &lt;Text style={{ fontFamily: 'Consolas', fontSize: 13, color: '#D7E3F6', lineHeight: 1.28 }}&gt;n_m = self.matcher.batched_evaluate_match(...)  # XFeat&lt;/Text&gt;&#10;            &lt;Text style={{ fontFamily: 'Consolas', fontSize: 13, color: '#D7E3F6', lineHeight: 1.28 }}&gt;_, best = torch.topk(n_m, n)                      # 留 top-5&lt;/Text&gt;&#10;            &lt;Text style={{ fontFamily: 'Consolas', fontSize: 13, color: '#D7E3F6', lineHeight: 1.28 }}&gt;self.matcher(..., remove_outliers=True, use_lightglue=True)  # 建边&lt;/Text&gt;&#10;        &lt;/Box&gt;&#10;        &lt;Box style={{ backgroundColor: '#0F1D33', borderRadius: 5, padding: '6px 11px 6px 11px', flexDirection: 'column' }}&gt;&#10;            &lt;Text style={{ fontSize: 13, fontWeight: 'bold', color: '#8FBBFF', marginBottom: 1 }}&gt;④  协视图贪心扩张（式 1）&lt;/Text&gt;&#10;            &lt;Text style={{ fontFamily: 'Consolas', fontSize: 10, color: '#6D87AC', marginBottom: 3 }}&gt;poses/ba_problem.py:648&lt;/Text&gt;&#10;            &lt;Text style={{ fontFamily: 'Consolas', fontSize: 13, color: '#D7E3F6', lineHeight: 1.28 }}&gt;while len(selected_ids) &amp;#60; get_n_keyframes:        # 扩到 20 帧&lt;/Text&gt;&#10;            &lt;Text style={{ fontFamily: 'Consolas', fontSize: 13, color: '#D7E3F6', lineHeight: 1.28 }}&gt;    for sid in selected_ids:&lt;/Text&gt;&#10;            &lt;Text style={{ fontFamily: 'Consolas', fontSize: 13, color: '#D7E3F6', lineHeight: 1.28 }}&gt;        for nb in self.pose_graph.neighbors(sid):&lt;/Text&gt;&#10;            &lt;Text style={{ fontFamily: 'Consolas', fontSize: 13, color: '#D7E3F6', lineHeight: 1.28 }}&gt;            if nb not in selected_ids:            # 边权 = 1/|M|&lt;/Text&gt;&#10;            &lt;Text style={{ fontFamily: 'Consolas', fontSize: 13, color: '#D7E3F6', lineHeight: 1.28 }}&gt;                neighbor_counts[nb] += 1.0 / w(sid, nb)&lt;/Text&gt;&#10;            &lt;Text style={{ fontFamily: 'Consolas', fontSize: 13, color: '#D7E3F6', lineHeight: 1.28 }}&gt;    selected_ids.add(neighbor_counts.most_common(1)[0][0])&lt;/Text&gt;&#10;        &lt;/Box&gt;&#10;        &lt;Box style={{ backgroundColor: '#0F1D33', borderRadius: 5, padding: '6px 11px 6px 11px', flexDirection: 'column' }}&gt;&#10;            &lt;Text style={{ fontSize: 13, fontWeight: 'bold', color: '#8FBBFF', marginBottom: 1 }}&gt;⑤  局部 BA：LM 迭代 + Schur 消元&lt;/Text&gt;&#10;            &lt;Text style={{ fontFamily: 'Consolas', fontSize: 10, color: '#6D87AC', marginBottom: 3 }}&gt;poses/mini_ba.py:285&lt;/Text&gt;&#10;            &lt;Text style={{ fontFamily: 'Consolas', fontSize: 13, color: '#D7E3F6', lineHeight: 1.28 }}&gt;for it in range(self.iters):&lt;/Text&gt;&#10;            &lt;Text style={{ fontFamily: 'Consolas', fontSize: 13, color: '#D7E3F6', lineHeight: 1.28 }}&gt;    jtj_cam, ..., resid = self._assemble_jtj(...)&lt;/Text&gt;&#10;            &lt;Text style={{ fontFamily: 'Consolas', fontSize: 13, color: '#D7E3F6', lineHeight: 1.28 }}&gt;    jtj_cam.diagonal().mul_(1 + lm)        # LM 阻尼&lt;/Text&gt;&#10;            &lt;Text style={{ fontFamily: 'Consolas', fontSize: 13, color: '#D7E3F6', lineHeight: 1.28 }}&gt;    jtj_xyz_inv = self.inv_3x3(jtj_xyz)    # C^-1&lt;/Text&gt;&#10;            &lt;Text style={{ fontFamily: 'Consolas', fontSize: 13, color: '#D7E3F6', lineHeight: 1.28 }}&gt;    S = jtj_cam - jtj_xyz_inv @ jtj_cam_xyz.T @ jtj_cam_xyz&lt;/Text&gt;&#10;            &lt;Text style={{ fontFamily: 'Consolas', fontSize: 13, color: '#D7E3F6', lineHeight: 1.28 }}&gt;    L = torch.linalg.cholesky_ex(S)[0]      # 舒尔补 S&lt;/Text&gt;&#10;            &lt;Text style={{ fontFamily: 'Consolas', fontSize: 13, color: '#D7E3F6', lineHeight: 1.28 }}&gt;    dcam = torch.linalg.solve_triangular(...)  # ΔT&lt;/Text&gt;&#10;            &lt;Text style={{ fontFamily: 'Consolas', fontSize: 13, color: '#D7E3F6', lineHeight: 1.28 }}&gt;    dxyz = torch.bmm(b.view(-1, 1, 3), jtj_xyz_inv)&lt;/Text&gt;&#10;        &lt;/Box&gt;&#10;        &lt;/Box&gt;&#10;        &lt;Box style={{ flex: 1, flexDirection: 'column', gap: 8 }}&gt;&#10;        &lt;Box style={{ backgroundColor: '#0F1D33', borderRadius: 5, padding: '6px 11px 6px 11px', flexDirection: 'column' }}&gt;&#10;            &lt;Text style={{ fontSize: 13, fontWeight: 'bold', color: '#8FBBFF', marginBottom: 1 }}&gt;⑥  回环检测与补边&lt;/Text&gt;&#10;            &lt;Text style={{ fontFamily: 'Consolas', fontSize: 10, color: '#6D87AC', marginBottom: 3 }}&gt;poses/ba_problem.py:1054&lt;/Text&gt;&#10;            &lt;Text style={{ fontFamily: 'Consolas', fontSize: 13, color: '#D7E3F6', lineHeight: 1.28 }}&gt;if dists.max() &amp;#62; self.min_loop_size:      # 图距 &amp;#62; 10&lt;/Text&gt;&#10;            &lt;Text style={{ fontFamily: 'Consolas', fontSize: 13, color: '#D7E3F6', lineHeight: 1.28 }}&gt;    clusters_t = split_into_clusters(dists)   # 分两簇&lt;/Text&gt;&#10;            &lt;Text style={{ fontFamily: 'Consolas', fontSize: 13, color: '#D7E3F6', lineHeight: 1.28 }}&gt;is_loop = (min(n_robust_pairs) &amp;#62; n // 2 and&lt;/Text&gt;&#10;            &lt;Text style={{ fontFamily: 'Consolas', fontSize: 13, color: '#D7E3F6', lineHeight: 1.28 }}&gt;           min(max_matches_robustness) &amp;#62; 0.5 * max(...))&lt;/Text&gt;&#10;            &lt;Text style={{ fontFamily: 'Consolas', fontSize: 13, color: '#D7E3F6', lineHeight: 1.28 }}&gt;if len(match.kpts) &amp;#62;= self.min_matches_edge:   # τm=500&lt;/Text&gt;&#10;            &lt;Text style={{ fontFamily: 'Consolas', fontSize: 13, color: '#D7E3F6', lineHeight: 1.28 }}&gt;    self.pose_graph.add_match(i, j, 1.0 / len(match.kpts))&lt;/Text&gt;&#10;        &lt;/Box&gt;&#10;        &lt;Box style={{ backgroundColor: '#0F1D33', borderRadius: 5, padding: '6px 11px 6px 11px', flexDirection: 'column' }}&gt;&#10;            &lt;Text style={{ fontSize: 13, fontWeight: 'bold', color: '#8FBBFF', marginBottom: 1 }}&gt;⑦-a  分块深度对齐&lt;/Text&gt;&#10;            &lt;Text style={{ fontFamily: 'Consolas', fontSize: 10, color: '#6D87AC', marginBottom: 3 }}&gt;scene/mono_depth.py:315&lt;/Text&gt;&#10;            &lt;Text style={{ fontFamily: 'Consolas', fontSize: 13, color: '#D7E3F6', lineHeight: 1.28 }}&gt;tri_idepth = 1 / (pts3d[has_pt3d] @ R.T + t)[..., -1]&lt;/Text&gt;&#10;            &lt;Text style={{ fontFamily: 'Consolas', fontSize: 13, color: '#D7E3F6', lineHeight: 1.28 }}&gt;mono_al, g_s, g_o = align_samples(tri_idepth, sampled)&lt;/Text&gt;&#10;            &lt;Text style={{ fontFamily: 'Consolas', fontSize: 13, color: '#D7E3F6', lineHeight: 1.28 }}&gt;valid = err &amp;#60; m_err + grid_outlier_mult * err_dev&lt;/Text&gt;&#10;            &lt;Text style={{ fontFamily: 'Consolas', fontSize: 13, color: '#D7E3F6', lineHeight: 1.28 }}&gt;return align_depth_grid(..., 4, g_s, g_o)   # 4x4 分块&lt;/Text&gt;&#10;        &lt;/Box&gt;&#10;        &lt;Box style={{ backgroundColor: '#0F1D33', borderRadius: 5, padding: '6px 11px 6px 11px', flexDirection: 'column' }}&gt;&#10;            &lt;Text style={{ fontSize: 13, fontWeight: 'bold', color: '#8FBBFF', marginBottom: 1 }}&gt;⑦-b  渐进层级与合并&lt;/Text&gt;&#10;            &lt;Text style={{ fontFamily: 'Consolas', fontSize: 10, color: '#6D87AC', marginBottom: 3 }}&gt;scene/hierarchy_cut.py:105&lt;/Text&gt;&#10;            &lt;Text style={{ fontFamily: 'Consolas', fontSize: 13, color: '#D7E3F6', lineHeight: 1.28 }}&gt;mask = screen_size &amp;#60; self.hierarchy_screen_size_threshold  # 0.5 px&lt;/Text&gt;&#10;            &lt;Text style={{ fontFamily: 'Consolas', fontSize: 13, color: '#D7E3F6', lineHeight: 1.28 }}&gt;if mask.sum() &amp;#62; max(len(self.xyz) * 0.1, 200_000):&lt;/Text&gt;&#10;            &lt;Text style={{ fontFamily: 'Consolas', fontSize: 13, color: '#D7E3F6', lineHeight: 1.28 }}&gt;    n_merged = self.create_hierarchy_level(cam_centre, mask)&lt;/Text&gt;&#10;            &lt;Text style={{ fontFamily: 'Consolas', fontSize: 13, color: '#D7E3F6', lineHeight: 1.28 }}&gt;# 合并权重 = opacity * screen_size^2（非 KL 投影）&lt;/Text&gt;&#10;            &lt;Text style={{ fontFamily: 'Consolas', fontSize: 13, color: '#D7E3F6', lineHeight: 1.28 }}&gt;weights = opa.sigmoid() * screen_size[selected] ** 2&lt;/Text&gt;&#10;        &lt;/Box&gt;&#10;        &lt;/Box&gt;&#10;    &lt;/Box&gt;&#10;    &lt;Box style={{ padding: '8px 40px 0px 40px' }}&gt;&#10;        &lt;Text style={{ fontSize: 14, color: '#8B97A8', lineHeight: 1.4 }}&gt;为排版做了换行与变量缩写（w = edge_weight），逻辑未改。第 7 页按源码默认值修正：回环触发为&lt;b&gt;加权图距 &amp;gt; 10&lt;/b&gt;；层级合并触发为&lt;b&gt;可并数 &amp;gt; max(10%, 20 万)&lt;/b&gt;，且是 &lt;b&gt;kNN 加权平均&lt;/b&gt;而非 KL。&lt;/Text&gt;&#10;    &lt;/Box&gt;&#10;&lt;/Slide&gt;&#10;"/>
         <p:cNvGrpSpPr/>
         <p:nvPr/>
       </p:nvGrpSpPr>
@@ -8216,6 +8217,2664 @@
         </p:nvSpPr>
         <p:spPr>
           <a:xfrm rot="0" flipH="0" flipV="0">
+            <a:off x="381000" y="228600"/>
+            <a:ext cx="4267200" cy="371475"/>
+          </a:xfrm>
+          <a:prstGeom prst="rect"/>
+        </p:spPr>
+        <p:txBody>
+          <a:bodyPr wrap="none" lIns="0" tIns="0" rIns="0" bIns="0"/>
+          <a:p>
+            <a:pPr>
+              <a:lnSpc>
+                <a:spcPct val="100000"/>
+              </a:lnSpc>
+            </a:pPr>
+            <a:r>
+              <a:rPr lang="zh-CN" sz="2400" b="1">
+                <a:solidFill>
+                  <a:srgbClr val="1E4FA8"/>
+                </a:solidFill>
+                <a:latin typeface="Microsoft YaHei"/>
+                <a:ea typeface="Microsoft YaHei"/>
+              </a:rPr>
+              <a:t>附：七个步骤在源码里长什么样</a:t>
+            </a:r>
+            <a:endParaRPr/>
+          </a:p>
+        </p:txBody>
+      </p:sp>
+      <p:sp>
+        <p:nvSpPr>
+          <p:cNvPr id="163" name="" descr="{&quot;isTemplate&quot;:true,&quot;type&quot;:&quot;text&quot;}"/>
+          <p:cNvSpPr txBox="1"/>
+          <p:nvPr/>
+        </p:nvSpPr>
+        <p:spPr>
+          <a:xfrm rot="0" flipH="0" flipV="0">
+            <a:off x="11325225" y="428625"/>
+            <a:ext cx="485775" cy="171450"/>
+          </a:xfrm>
+          <a:prstGeom prst="rect"/>
+        </p:spPr>
+        <p:txBody>
+          <a:bodyPr wrap="none" lIns="0" tIns="0" rIns="0" bIns="0"/>
+          <a:p>
+            <a:pPr>
+              <a:lnSpc>
+                <a:spcPct val="100000"/>
+              </a:lnSpc>
+            </a:pPr>
+            <a:r>
+              <a:rPr lang="en-US" sz="1125">
+                <a:solidFill>
+                  <a:srgbClr val="8B97A8"/>
+                </a:solidFill>
+                <a:latin typeface="Microsoft YaHei"/>
+                <a:ea typeface="Microsoft YaHei"/>
+              </a:rPr>
+              <a:t>15 / 15</a:t>
+            </a:r>
+            <a:endParaRPr/>
+          </a:p>
+        </p:txBody>
+      </p:sp>
+      <p:sp>
+        <p:nvSpPr>
+          <p:cNvPr id="164" name="" descr="{&quot;isTemplate&quot;:true,&quot;type&quot;:&quot;text&quot;}"/>
+          <p:cNvSpPr txBox="1"/>
+          <p:nvPr/>
+        </p:nvSpPr>
+        <p:spPr>
+          <a:xfrm rot="0" flipH="0" flipV="0">
+            <a:off x="381000" y="657225"/>
+            <a:ext cx="11430000" cy="200025"/>
+          </a:xfrm>
+          <a:prstGeom prst="rect"/>
+        </p:spPr>
+        <p:txBody>
+          <a:bodyPr wrap="none" lIns="0" tIns="0" rIns="0" bIns="0"/>
+          <a:p>
+            <a:pPr>
+              <a:lnSpc>
+                <a:spcPct val="100000"/>
+              </a:lnSpc>
+            </a:pPr>
+            <a:r>
+              <a:rPr lang="zh-CN" sz="1275">
+                <a:solidFill>
+                  <a:srgbClr val="4A5568"/>
+                </a:solidFill>
+                <a:latin typeface="Microsoft YaHei"/>
+                <a:ea typeface="Microsoft YaHei"/>
+              </a:rPr>
+              <a:t>真实源码片段，行号对应第</a:t>
+            </a:r>
+            <a:r>
+              <a:rPr lang="en-US" sz="1275">
+                <a:solidFill>
+                  <a:srgbClr val="4A5568"/>
+                </a:solidFill>
+                <a:latin typeface="Microsoft YaHei"/>
+                <a:ea typeface="Microsoft YaHei"/>
+              </a:rPr>
+              <a:t xml:space="preserve"> 7 </a:t>
+            </a:r>
+            <a:r>
+              <a:rPr lang="zh-CN" sz="1275">
+                <a:solidFill>
+                  <a:srgbClr val="4A5568"/>
+                </a:solidFill>
+                <a:latin typeface="Microsoft YaHei"/>
+                <a:ea typeface="Microsoft YaHei"/>
+              </a:rPr>
+              <a:t>页七步链：</a:t>
+            </a:r>
+            <a:r>
+              <a:rPr lang="en-US" sz="1275">
+                <a:solidFill>
+                  <a:srgbClr val="4A5568"/>
+                </a:solidFill>
+                <a:latin typeface="Microsoft YaHei"/>
+                <a:ea typeface="Microsoft YaHei"/>
+              </a:rPr>
+              <a:t xml:space="preserve">①②③ </a:t>
+            </a:r>
+            <a:r>
+              <a:rPr lang="zh-CN" sz="1275">
+                <a:solidFill>
+                  <a:srgbClr val="4A5568"/>
+                </a:solidFill>
+                <a:latin typeface="Microsoft YaHei"/>
+                <a:ea typeface="Microsoft YaHei"/>
+              </a:rPr>
+              <a:t>定跟谁比、④</a:t>
+            </a:r>
+            <a:r>
+              <a:rPr lang="en-US" sz="1275">
+                <a:solidFill>
+                  <a:srgbClr val="4A5568"/>
+                </a:solidFill>
+                <a:latin typeface="Microsoft YaHei"/>
+                <a:ea typeface="Microsoft YaHei"/>
+              </a:rPr>
+              <a:t xml:space="preserve"> </a:t>
+            </a:r>
+            <a:r>
+              <a:rPr lang="zh-CN" sz="1275">
+                <a:solidFill>
+                  <a:srgbClr val="4A5568"/>
+                </a:solidFill>
+                <a:latin typeface="Microsoft YaHei"/>
+                <a:ea typeface="Microsoft YaHei"/>
+              </a:rPr>
+              <a:t>定跟谁一起算、⑤</a:t>
+            </a:r>
+            <a:r>
+              <a:rPr lang="en-US" sz="1275">
+                <a:solidFill>
+                  <a:srgbClr val="4A5568"/>
+                </a:solidFill>
+                <a:latin typeface="Microsoft YaHei"/>
+                <a:ea typeface="Microsoft YaHei"/>
+              </a:rPr>
+              <a:t xml:space="preserve"> </a:t>
+            </a:r>
+            <a:r>
+              <a:rPr lang="zh-CN" sz="1275">
+                <a:solidFill>
+                  <a:srgbClr val="4A5568"/>
+                </a:solidFill>
+                <a:latin typeface="Microsoft YaHei"/>
+                <a:ea typeface="Microsoft YaHei"/>
+              </a:rPr>
+              <a:t>才真解位姿、⑥⑦</a:t>
+            </a:r>
+            <a:r>
+              <a:rPr lang="en-US" sz="1275">
+                <a:solidFill>
+                  <a:srgbClr val="4A5568"/>
+                </a:solidFill>
+                <a:latin typeface="Microsoft YaHei"/>
+                <a:ea typeface="Microsoft YaHei"/>
+              </a:rPr>
+              <a:t xml:space="preserve"> </a:t>
+            </a:r>
+            <a:r>
+              <a:rPr lang="zh-CN" sz="1275">
+                <a:solidFill>
+                  <a:srgbClr val="4A5568"/>
+                </a:solidFill>
+                <a:latin typeface="Microsoft YaHei"/>
+                <a:ea typeface="Microsoft YaHei"/>
+              </a:rPr>
+              <a:t>修漂移与压显存</a:t>
+            </a:r>
+            <a:r>
+              <a:rPr lang="zh-CN" sz="1275">
+                <a:solidFill>
+                  <a:srgbClr val="4A5568"/>
+                </a:solidFill>
+                <a:latin typeface="Microsoft YaHei"/>
+                <a:ea typeface="Microsoft YaHei"/>
+              </a:rPr>
+              <a:t>。</a:t>
+            </a:r>
+            <a:endParaRPr/>
+          </a:p>
+        </p:txBody>
+      </p:sp>
+      <p:sp>
+        <p:nvSpPr>
+          <p:cNvPr id="165" name=""/>
+          <p:cNvSpPr/>
+          <p:nvPr/>
+        </p:nvSpPr>
+        <p:spPr>
+          <a:xfrm rot="0" flipH="0" flipV="0">
+            <a:off x="381000" y="942975"/>
+            <a:ext cx="5648325" cy="1371600"/>
+          </a:xfrm>
+          <a:prstGeom prst="roundRect">
+            <a:avLst>
+              <a:gd name="adj" fmla="val 3472"/>
+            </a:avLst>
+          </a:prstGeom>
+          <a:solidFill>
+            <a:srgbClr val="0F1D33"/>
+          </a:solidFill>
+          <a:ln/>
+        </p:spPr>
+        <p:txBody>
+          <a:bodyPr/>
+          <a:p/>
+        </p:txBody>
+      </p:sp>
+      <p:sp>
+        <p:nvSpPr>
+          <p:cNvPr id="166" name="" descr="{&quot;isTemplate&quot;:true,&quot;type&quot;:&quot;text&quot;}"/>
+          <p:cNvSpPr txBox="1"/>
+          <p:nvPr/>
+        </p:nvSpPr>
+        <p:spPr>
+          <a:xfrm rot="0" flipH="0" flipV="0">
+            <a:off x="485775" y="1000125"/>
+            <a:ext cx="5438775" cy="152400"/>
+          </a:xfrm>
+          <a:prstGeom prst="rect"/>
+        </p:spPr>
+        <p:txBody>
+          <a:bodyPr wrap="none" lIns="0" tIns="0" rIns="0" bIns="0"/>
+          <a:p>
+            <a:pPr>
+              <a:lnSpc>
+                <a:spcPct val="100000"/>
+              </a:lnSpc>
+            </a:pPr>
+            <a:r>
+              <a:rPr lang="en-US" sz="975" b="1">
+                <a:solidFill>
+                  <a:srgbClr val="8FBBFF"/>
+                </a:solidFill>
+                <a:latin typeface="Microsoft YaHei"/>
+                <a:ea typeface="Microsoft YaHei"/>
+              </a:rPr>
+              <a:t xml:space="preserve">① ② ③  </a:t>
+            </a:r>
+            <a:r>
+              <a:rPr lang="zh-CN" sz="975" b="1">
+                <a:solidFill>
+                  <a:srgbClr val="8FBBFF"/>
+                </a:solidFill>
+                <a:latin typeface="Microsoft YaHei"/>
+                <a:ea typeface="Microsoft YaHei"/>
+              </a:rPr>
+              <a:t>检索</a:t>
+            </a:r>
+            <a:r>
+              <a:rPr lang="en-US" sz="975" b="1">
+                <a:solidFill>
+                  <a:srgbClr val="8FBBFF"/>
+                </a:solidFill>
+                <a:latin typeface="Microsoft YaHei"/>
+                <a:ea typeface="Microsoft YaHei"/>
+              </a:rPr>
+              <a:t xml:space="preserve"> → </a:t>
+            </a:r>
+            <a:r>
+              <a:rPr lang="zh-CN" sz="975" b="1">
+                <a:solidFill>
+                  <a:srgbClr val="8FBBFF"/>
+                </a:solidFill>
+                <a:latin typeface="Microsoft YaHei"/>
+                <a:ea typeface="Microsoft YaHei"/>
+              </a:rPr>
+              <a:t>粗筛</a:t>
+            </a:r>
+            <a:r>
+              <a:rPr lang="en-US" sz="975" b="1">
+                <a:solidFill>
+                  <a:srgbClr val="8FBBFF"/>
+                </a:solidFill>
+                <a:latin typeface="Microsoft YaHei"/>
+                <a:ea typeface="Microsoft YaHei"/>
+              </a:rPr>
+              <a:t xml:space="preserve"> → </a:t>
+            </a:r>
+            <a:r>
+              <a:rPr lang="zh-CN" sz="975" b="1">
+                <a:solidFill>
+                  <a:srgbClr val="8FBBFF"/>
+                </a:solidFill>
+                <a:latin typeface="Microsoft YaHei"/>
+                <a:ea typeface="Microsoft YaHei"/>
+              </a:rPr>
+              <a:t>建边</a:t>
+            </a:r>
+            <a:endParaRPr/>
+          </a:p>
+        </p:txBody>
+      </p:sp>
+      <p:sp>
+        <p:nvSpPr>
+          <p:cNvPr id="167" name="" descr="{&quot;isTemplate&quot;:true,&quot;type&quot;:&quot;text&quot;}"/>
+          <p:cNvSpPr txBox="1"/>
+          <p:nvPr/>
+        </p:nvSpPr>
+        <p:spPr>
+          <a:xfrm rot="0" flipH="0" flipV="0">
+            <a:off x="485775" y="1162050"/>
+            <a:ext cx="5438775" cy="114300"/>
+          </a:xfrm>
+          <a:prstGeom prst="rect"/>
+        </p:spPr>
+        <p:txBody>
+          <a:bodyPr wrap="none" lIns="0" tIns="0" rIns="0" bIns="0"/>
+          <a:p>
+            <a:pPr>
+              <a:lnSpc>
+                <a:spcPct val="100000"/>
+              </a:lnSpc>
+            </a:pPr>
+            <a:r>
+              <a:rPr lang="en-US" sz="750">
+                <a:solidFill>
+                  <a:srgbClr val="6D87AC"/>
+                </a:solidFill>
+                <a:latin typeface="Consolas"/>
+                <a:ea typeface="Consolas"/>
+              </a:rPr>
+              <a:t>scene/scene_model_loop_closure.py:179</a:t>
+            </a:r>
+            <a:endParaRPr/>
+          </a:p>
+        </p:txBody>
+      </p:sp>
+      <p:sp>
+        <p:nvSpPr>
+          <p:cNvPr id="168" name="" descr="{&quot;isTemplate&quot;:true,&quot;type&quot;:&quot;text&quot;}"/>
+          <p:cNvSpPr txBox="1"/>
+          <p:nvPr/>
+        </p:nvSpPr>
+        <p:spPr>
+          <a:xfrm rot="0" flipH="0" flipV="0">
+            <a:off x="485775" y="1304925"/>
+            <a:ext cx="5438775" cy="190500"/>
+          </a:xfrm>
+          <a:prstGeom prst="rect"/>
+        </p:spPr>
+        <p:txBody>
+          <a:bodyPr wrap="none" lIns="0" tIns="0" rIns="0" bIns="0"/>
+          <a:p>
+            <a:pPr>
+              <a:lnSpc>
+                <a:spcPct val="128000"/>
+              </a:lnSpc>
+            </a:pPr>
+            <a:r>
+              <a:rPr lang="en-US" sz="975">
+                <a:solidFill>
+                  <a:srgbClr val="D7E3F6"/>
+                </a:solidFill>
+                <a:latin typeface="Consolas"/>
+                <a:ea typeface="Consolas"/>
+              </a:rPr>
+              <a:t xml:space="preserve">cossim = self.vpr_features @ vpr_feature.T     # </a:t>
+            </a:r>
+            <a:r>
+              <a:rPr lang="zh-CN" sz="975">
+                <a:solidFill>
+                  <a:srgbClr val="D7E3F6"/>
+                </a:solidFill>
+                <a:latin typeface="Consolas"/>
+                <a:ea typeface="Consolas"/>
+              </a:rPr>
+              <a:t>全局描述子</a:t>
+            </a:r>
+            <a:endParaRPr/>
+          </a:p>
+        </p:txBody>
+      </p:sp>
+      <p:sp>
+        <p:nvSpPr>
+          <p:cNvPr id="169" name="" descr="{&quot;isTemplate&quot;:true,&quot;type&quot;:&quot;text&quot;}"/>
+          <p:cNvSpPr txBox="1"/>
+          <p:nvPr/>
+        </p:nvSpPr>
+        <p:spPr>
+          <a:xfrm rot="0" flipH="0" flipV="0">
+            <a:off x="485775" y="1495425"/>
+            <a:ext cx="5438775" cy="190500"/>
+          </a:xfrm>
+          <a:prstGeom prst="rect"/>
+        </p:spPr>
+        <p:txBody>
+          <a:bodyPr wrap="none" lIns="0" tIns="0" rIns="0" bIns="0"/>
+          <a:p>
+            <a:pPr>
+              <a:lnSpc>
+                <a:spcPct val="128000"/>
+              </a:lnSpc>
+            </a:pPr>
+            <a:r>
+              <a:rPr lang="en-US" sz="975">
+                <a:solidFill>
+                  <a:srgbClr val="D7E3F6"/>
+                </a:solidFill>
+                <a:latin typeface="Consolas"/>
+                <a:ea typeface="Consolas"/>
+              </a:rPr>
+              <a:t>_, cand = torch.topk(cossim_best, n_candidates)   # top-20</a:t>
+            </a:r>
+            <a:endParaRPr/>
+          </a:p>
+        </p:txBody>
+      </p:sp>
+      <p:sp>
+        <p:nvSpPr>
+          <p:cNvPr id="170" name="" descr="{&quot;isTemplate&quot;:true,&quot;type&quot;:&quot;text&quot;}"/>
+          <p:cNvSpPr txBox="1"/>
+          <p:nvPr/>
+        </p:nvSpPr>
+        <p:spPr>
+          <a:xfrm rot="0" flipH="0" flipV="0">
+            <a:off x="485775" y="1685925"/>
+            <a:ext cx="5438775" cy="190500"/>
+          </a:xfrm>
+          <a:prstGeom prst="rect"/>
+        </p:spPr>
+        <p:txBody>
+          <a:bodyPr wrap="none" lIns="0" tIns="0" rIns="0" bIns="0"/>
+          <a:p>
+            <a:pPr>
+              <a:lnSpc>
+                <a:spcPct val="128000"/>
+              </a:lnSpc>
+            </a:pPr>
+            <a:r>
+              <a:rPr lang="en-US" sz="975">
+                <a:solidFill>
+                  <a:srgbClr val="D7E3F6"/>
+                </a:solidFill>
+                <a:latin typeface="Consolas"/>
+                <a:ea typeface="Consolas"/>
+              </a:rPr>
+              <a:t>n_m = self.matcher.batched_evaluate_match(...)  # XFeat</a:t>
+            </a:r>
+            <a:endParaRPr/>
+          </a:p>
+        </p:txBody>
+      </p:sp>
+      <p:sp>
+        <p:nvSpPr>
+          <p:cNvPr id="171" name="" descr="{&quot;isTemplate&quot;:true,&quot;type&quot;:&quot;text&quot;}"/>
+          <p:cNvSpPr txBox="1"/>
+          <p:nvPr/>
+        </p:nvSpPr>
+        <p:spPr>
+          <a:xfrm rot="0" flipH="0" flipV="0">
+            <a:off x="485775" y="1876425"/>
+            <a:ext cx="5438775" cy="190500"/>
+          </a:xfrm>
+          <a:prstGeom prst="rect"/>
+        </p:spPr>
+        <p:txBody>
+          <a:bodyPr wrap="none" lIns="0" tIns="0" rIns="0" bIns="0"/>
+          <a:p>
+            <a:pPr>
+              <a:lnSpc>
+                <a:spcPct val="128000"/>
+              </a:lnSpc>
+            </a:pPr>
+            <a:r>
+              <a:rPr lang="en-US" sz="975">
+                <a:solidFill>
+                  <a:srgbClr val="D7E3F6"/>
+                </a:solidFill>
+                <a:latin typeface="Consolas"/>
+                <a:ea typeface="Consolas"/>
+              </a:rPr>
+              <a:t xml:space="preserve">_, best = torch.topk(n_m, n)                      # </a:t>
+            </a:r>
+            <a:r>
+              <a:rPr lang="zh-CN" sz="975">
+                <a:solidFill>
+                  <a:srgbClr val="D7E3F6"/>
+                </a:solidFill>
+                <a:latin typeface="Consolas"/>
+                <a:ea typeface="Consolas"/>
+              </a:rPr>
+              <a:t>留</a:t>
+            </a:r>
+            <a:r>
+              <a:rPr lang="en-US" sz="975">
+                <a:solidFill>
+                  <a:srgbClr val="D7E3F6"/>
+                </a:solidFill>
+                <a:latin typeface="Consolas"/>
+                <a:ea typeface="Consolas"/>
+              </a:rPr>
+              <a:t xml:space="preserve"> top-5</a:t>
+            </a:r>
+            <a:endParaRPr/>
+          </a:p>
+        </p:txBody>
+      </p:sp>
+      <p:sp>
+        <p:nvSpPr>
+          <p:cNvPr id="172" name="" descr="{&quot;isTemplate&quot;:true,&quot;type&quot;:&quot;text&quot;}"/>
+          <p:cNvSpPr txBox="1"/>
+          <p:nvPr/>
+        </p:nvSpPr>
+        <p:spPr>
+          <a:xfrm rot="0" flipH="0" flipV="0">
+            <a:off x="485775" y="2066925"/>
+            <a:ext cx="5438775" cy="190500"/>
+          </a:xfrm>
+          <a:prstGeom prst="rect"/>
+        </p:spPr>
+        <p:txBody>
+          <a:bodyPr wrap="none" lIns="0" tIns="0" rIns="0" bIns="0"/>
+          <a:p>
+            <a:pPr>
+              <a:lnSpc>
+                <a:spcPct val="128000"/>
+              </a:lnSpc>
+            </a:pPr>
+            <a:r>
+              <a:rPr lang="en-US" sz="975">
+                <a:solidFill>
+                  <a:srgbClr val="D7E3F6"/>
+                </a:solidFill>
+                <a:latin typeface="Consolas"/>
+                <a:ea typeface="Consolas"/>
+              </a:rPr>
+              <a:t xml:space="preserve">self.matcher(..., remove_outliers=True, use_lightglue=True)  # </a:t>
+            </a:r>
+            <a:r>
+              <a:rPr lang="zh-CN" sz="975">
+                <a:solidFill>
+                  <a:srgbClr val="D7E3F6"/>
+                </a:solidFill>
+                <a:latin typeface="Consolas"/>
+                <a:ea typeface="Consolas"/>
+              </a:rPr>
+              <a:t>建边</a:t>
+            </a:r>
+            <a:endParaRPr/>
+          </a:p>
+        </p:txBody>
+      </p:sp>
+      <p:sp>
+        <p:nvSpPr>
+          <p:cNvPr id="173" name=""/>
+          <p:cNvSpPr/>
+          <p:nvPr/>
+        </p:nvSpPr>
+        <p:spPr>
+          <a:xfrm rot="0" flipH="0" flipV="0">
+            <a:off x="381000" y="2390775"/>
+            <a:ext cx="5648325" cy="1562100"/>
+          </a:xfrm>
+          <a:prstGeom prst="roundRect">
+            <a:avLst>
+              <a:gd name="adj" fmla="val 3049"/>
+            </a:avLst>
+          </a:prstGeom>
+          <a:solidFill>
+            <a:srgbClr val="0F1D33"/>
+          </a:solidFill>
+          <a:ln/>
+        </p:spPr>
+        <p:txBody>
+          <a:bodyPr/>
+          <a:p/>
+        </p:txBody>
+      </p:sp>
+      <p:sp>
+        <p:nvSpPr>
+          <p:cNvPr id="174" name="" descr="{&quot;isTemplate&quot;:true,&quot;type&quot;:&quot;text&quot;}"/>
+          <p:cNvSpPr txBox="1"/>
+          <p:nvPr/>
+        </p:nvSpPr>
+        <p:spPr>
+          <a:xfrm rot="0" flipH="0" flipV="0">
+            <a:off x="485775" y="2447925"/>
+            <a:ext cx="5438775" cy="152400"/>
+          </a:xfrm>
+          <a:prstGeom prst="rect"/>
+        </p:spPr>
+        <p:txBody>
+          <a:bodyPr wrap="none" lIns="0" tIns="0" rIns="0" bIns="0"/>
+          <a:p>
+            <a:pPr>
+              <a:lnSpc>
+                <a:spcPct val="100000"/>
+              </a:lnSpc>
+            </a:pPr>
+            <a:r>
+              <a:rPr lang="en-US" sz="975" b="1">
+                <a:solidFill>
+                  <a:srgbClr val="8FBBFF"/>
+                </a:solidFill>
+                <a:latin typeface="Microsoft YaHei"/>
+                <a:ea typeface="Microsoft YaHei"/>
+              </a:rPr>
+              <a:t xml:space="preserve">④  </a:t>
+            </a:r>
+            <a:r>
+              <a:rPr lang="zh-CN" sz="975" b="1">
+                <a:solidFill>
+                  <a:srgbClr val="8FBBFF"/>
+                </a:solidFill>
+                <a:latin typeface="Microsoft YaHei"/>
+                <a:ea typeface="Microsoft YaHei"/>
+              </a:rPr>
+              <a:t>协视图贪心扩张（式</a:t>
+            </a:r>
+            <a:r>
+              <a:rPr lang="en-US" sz="975" b="1">
+                <a:solidFill>
+                  <a:srgbClr val="8FBBFF"/>
+                </a:solidFill>
+                <a:latin typeface="Microsoft YaHei"/>
+                <a:ea typeface="Microsoft YaHei"/>
+              </a:rPr>
+              <a:t xml:space="preserve"> 1</a:t>
+            </a:r>
+            <a:r>
+              <a:rPr lang="zh-CN" sz="975" b="1">
+                <a:solidFill>
+                  <a:srgbClr val="8FBBFF"/>
+                </a:solidFill>
+                <a:latin typeface="Microsoft YaHei"/>
+                <a:ea typeface="Microsoft YaHei"/>
+              </a:rPr>
+              <a:t>）</a:t>
+            </a:r>
+            <a:endParaRPr/>
+          </a:p>
+        </p:txBody>
+      </p:sp>
+      <p:sp>
+        <p:nvSpPr>
+          <p:cNvPr id="175" name="" descr="{&quot;isTemplate&quot;:true,&quot;type&quot;:&quot;text&quot;}"/>
+          <p:cNvSpPr txBox="1"/>
+          <p:nvPr/>
+        </p:nvSpPr>
+        <p:spPr>
+          <a:xfrm rot="0" flipH="0" flipV="0">
+            <a:off x="485775" y="2609850"/>
+            <a:ext cx="5438775" cy="114300"/>
+          </a:xfrm>
+          <a:prstGeom prst="rect"/>
+        </p:spPr>
+        <p:txBody>
+          <a:bodyPr wrap="none" lIns="0" tIns="0" rIns="0" bIns="0"/>
+          <a:p>
+            <a:pPr>
+              <a:lnSpc>
+                <a:spcPct val="100000"/>
+              </a:lnSpc>
+            </a:pPr>
+            <a:r>
+              <a:rPr lang="en-US" sz="750">
+                <a:solidFill>
+                  <a:srgbClr val="6D87AC"/>
+                </a:solidFill>
+                <a:latin typeface="Consolas"/>
+                <a:ea typeface="Consolas"/>
+              </a:rPr>
+              <a:t>poses/ba_problem.py:648</a:t>
+            </a:r>
+            <a:endParaRPr/>
+          </a:p>
+        </p:txBody>
+      </p:sp>
+      <p:sp>
+        <p:nvSpPr>
+          <p:cNvPr id="176" name="" descr="{&quot;isTemplate&quot;:true,&quot;type&quot;:&quot;text&quot;}"/>
+          <p:cNvSpPr txBox="1"/>
+          <p:nvPr/>
+        </p:nvSpPr>
+        <p:spPr>
+          <a:xfrm rot="0" flipH="0" flipV="0">
+            <a:off x="485775" y="2752725"/>
+            <a:ext cx="5438775" cy="190500"/>
+          </a:xfrm>
+          <a:prstGeom prst="rect"/>
+        </p:spPr>
+        <p:txBody>
+          <a:bodyPr wrap="none" lIns="0" tIns="0" rIns="0" bIns="0"/>
+          <a:p>
+            <a:pPr>
+              <a:lnSpc>
+                <a:spcPct val="128000"/>
+              </a:lnSpc>
+            </a:pPr>
+            <a:r>
+              <a:rPr lang="en-US" sz="975">
+                <a:solidFill>
+                  <a:srgbClr val="D7E3F6"/>
+                </a:solidFill>
+                <a:latin typeface="Consolas"/>
+                <a:ea typeface="Consolas"/>
+              </a:rPr>
+              <a:t xml:space="preserve">while len(selected_ids) &lt; get_n_keyframes:        # </a:t>
+            </a:r>
+            <a:r>
+              <a:rPr lang="zh-CN" sz="975">
+                <a:solidFill>
+                  <a:srgbClr val="D7E3F6"/>
+                </a:solidFill>
+                <a:latin typeface="Consolas"/>
+                <a:ea typeface="Consolas"/>
+              </a:rPr>
+              <a:t>扩到</a:t>
+            </a:r>
+            <a:r>
+              <a:rPr lang="en-US" sz="975">
+                <a:solidFill>
+                  <a:srgbClr val="D7E3F6"/>
+                </a:solidFill>
+                <a:latin typeface="Consolas"/>
+                <a:ea typeface="Consolas"/>
+              </a:rPr>
+              <a:t xml:space="preserve"> 20 </a:t>
+            </a:r>
+            <a:r>
+              <a:rPr lang="zh-CN" sz="975">
+                <a:solidFill>
+                  <a:srgbClr val="D7E3F6"/>
+                </a:solidFill>
+                <a:latin typeface="Consolas"/>
+                <a:ea typeface="Consolas"/>
+              </a:rPr>
+              <a:t>帧</a:t>
+            </a:r>
+            <a:endParaRPr/>
+          </a:p>
+        </p:txBody>
+      </p:sp>
+      <p:sp>
+        <p:nvSpPr>
+          <p:cNvPr id="177" name="" descr="{&quot;isTemplate&quot;:true,&quot;type&quot;:&quot;text&quot;}"/>
+          <p:cNvSpPr txBox="1"/>
+          <p:nvPr/>
+        </p:nvSpPr>
+        <p:spPr>
+          <a:xfrm rot="0" flipH="0" flipV="0">
+            <a:off x="485775" y="2943225"/>
+            <a:ext cx="5438775" cy="190500"/>
+          </a:xfrm>
+          <a:prstGeom prst="rect"/>
+        </p:spPr>
+        <p:txBody>
+          <a:bodyPr wrap="none" lIns="0" tIns="0" rIns="0" bIns="0"/>
+          <a:p>
+            <a:pPr>
+              <a:lnSpc>
+                <a:spcPct val="128000"/>
+              </a:lnSpc>
+            </a:pPr>
+            <a:r>
+              <a:rPr lang="en-US" sz="975">
+                <a:solidFill>
+                  <a:srgbClr val="D7E3F6"/>
+                </a:solidFill>
+                <a:latin typeface="Consolas"/>
+                <a:ea typeface="Consolas"/>
+              </a:rPr>
+              <a:t xml:space="preserve">    for sid in selected_ids:</a:t>
+            </a:r>
+            <a:endParaRPr/>
+          </a:p>
+        </p:txBody>
+      </p:sp>
+      <p:sp>
+        <p:nvSpPr>
+          <p:cNvPr id="178" name="" descr="{&quot;isTemplate&quot;:true,&quot;type&quot;:&quot;text&quot;}"/>
+          <p:cNvSpPr txBox="1"/>
+          <p:nvPr/>
+        </p:nvSpPr>
+        <p:spPr>
+          <a:xfrm rot="0" flipH="0" flipV="0">
+            <a:off x="485775" y="3133725"/>
+            <a:ext cx="5438775" cy="190500"/>
+          </a:xfrm>
+          <a:prstGeom prst="rect"/>
+        </p:spPr>
+        <p:txBody>
+          <a:bodyPr wrap="none" lIns="0" tIns="0" rIns="0" bIns="0"/>
+          <a:p>
+            <a:pPr>
+              <a:lnSpc>
+                <a:spcPct val="128000"/>
+              </a:lnSpc>
+            </a:pPr>
+            <a:r>
+              <a:rPr lang="en-US" sz="975">
+                <a:solidFill>
+                  <a:srgbClr val="D7E3F6"/>
+                </a:solidFill>
+                <a:latin typeface="Consolas"/>
+                <a:ea typeface="Consolas"/>
+              </a:rPr>
+              <a:t xml:space="preserve">        for nb in self.pose_graph.neighbors(sid):</a:t>
+            </a:r>
+            <a:endParaRPr/>
+          </a:p>
+        </p:txBody>
+      </p:sp>
+      <p:sp>
+        <p:nvSpPr>
+          <p:cNvPr id="179" name="" descr="{&quot;isTemplate&quot;:true,&quot;type&quot;:&quot;text&quot;}"/>
+          <p:cNvSpPr txBox="1"/>
+          <p:nvPr/>
+        </p:nvSpPr>
+        <p:spPr>
+          <a:xfrm rot="0" flipH="0" flipV="0">
+            <a:off x="485775" y="3324225"/>
+            <a:ext cx="5438775" cy="190500"/>
+          </a:xfrm>
+          <a:prstGeom prst="rect"/>
+        </p:spPr>
+        <p:txBody>
+          <a:bodyPr wrap="none" lIns="0" tIns="0" rIns="0" bIns="0"/>
+          <a:p>
+            <a:pPr>
+              <a:lnSpc>
+                <a:spcPct val="128000"/>
+              </a:lnSpc>
+            </a:pPr>
+            <a:r>
+              <a:rPr lang="en-US" sz="975">
+                <a:solidFill>
+                  <a:srgbClr val="D7E3F6"/>
+                </a:solidFill>
+                <a:latin typeface="Consolas"/>
+                <a:ea typeface="Consolas"/>
+              </a:rPr>
+              <a:t xml:space="preserve">            if nb not in selected_ids:            # </a:t>
+            </a:r>
+            <a:r>
+              <a:rPr lang="zh-CN" sz="975">
+                <a:solidFill>
+                  <a:srgbClr val="D7E3F6"/>
+                </a:solidFill>
+                <a:latin typeface="Consolas"/>
+                <a:ea typeface="Consolas"/>
+              </a:rPr>
+              <a:t>边权</a:t>
+            </a:r>
+            <a:r>
+              <a:rPr lang="en-US" sz="975">
+                <a:solidFill>
+                  <a:srgbClr val="D7E3F6"/>
+                </a:solidFill>
+                <a:latin typeface="Consolas"/>
+                <a:ea typeface="Consolas"/>
+              </a:rPr>
+              <a:t xml:space="preserve"> = 1/|M|</a:t>
+            </a:r>
+            <a:endParaRPr/>
+          </a:p>
+        </p:txBody>
+      </p:sp>
+      <p:sp>
+        <p:nvSpPr>
+          <p:cNvPr id="180" name="" descr="{&quot;isTemplate&quot;:true,&quot;type&quot;:&quot;text&quot;}"/>
+          <p:cNvSpPr txBox="1"/>
+          <p:nvPr/>
+        </p:nvSpPr>
+        <p:spPr>
+          <a:xfrm rot="0" flipH="0" flipV="0">
+            <a:off x="485775" y="3514725"/>
+            <a:ext cx="5438775" cy="190500"/>
+          </a:xfrm>
+          <a:prstGeom prst="rect"/>
+        </p:spPr>
+        <p:txBody>
+          <a:bodyPr wrap="none" lIns="0" tIns="0" rIns="0" bIns="0"/>
+          <a:p>
+            <a:pPr>
+              <a:lnSpc>
+                <a:spcPct val="128000"/>
+              </a:lnSpc>
+            </a:pPr>
+            <a:r>
+              <a:rPr lang="en-US" sz="975">
+                <a:solidFill>
+                  <a:srgbClr val="D7E3F6"/>
+                </a:solidFill>
+                <a:latin typeface="Consolas"/>
+                <a:ea typeface="Consolas"/>
+              </a:rPr>
+              <a:t xml:space="preserve">                neighbor_counts[nb] += 1.0 / w(sid, nb)</a:t>
+            </a:r>
+            <a:endParaRPr/>
+          </a:p>
+        </p:txBody>
+      </p:sp>
+      <p:sp>
+        <p:nvSpPr>
+          <p:cNvPr id="181" name="" descr="{&quot;isTemplate&quot;:true,&quot;type&quot;:&quot;text&quot;}"/>
+          <p:cNvSpPr txBox="1"/>
+          <p:nvPr/>
+        </p:nvSpPr>
+        <p:spPr>
+          <a:xfrm rot="0" flipH="0" flipV="0">
+            <a:off x="485775" y="3705225"/>
+            <a:ext cx="5438775" cy="190500"/>
+          </a:xfrm>
+          <a:prstGeom prst="rect"/>
+        </p:spPr>
+        <p:txBody>
+          <a:bodyPr wrap="none" lIns="0" tIns="0" rIns="0" bIns="0"/>
+          <a:p>
+            <a:pPr>
+              <a:lnSpc>
+                <a:spcPct val="128000"/>
+              </a:lnSpc>
+            </a:pPr>
+            <a:r>
+              <a:rPr lang="en-US" sz="975">
+                <a:solidFill>
+                  <a:srgbClr val="D7E3F6"/>
+                </a:solidFill>
+                <a:latin typeface="Consolas"/>
+                <a:ea typeface="Consolas"/>
+              </a:rPr>
+              <a:t xml:space="preserve">    selected_ids.add(neighbor_counts.most_common(1)[0][0])</a:t>
+            </a:r>
+            <a:endParaRPr/>
+          </a:p>
+        </p:txBody>
+      </p:sp>
+      <p:sp>
+        <p:nvSpPr>
+          <p:cNvPr id="182" name=""/>
+          <p:cNvSpPr/>
+          <p:nvPr/>
+        </p:nvSpPr>
+        <p:spPr>
+          <a:xfrm rot="0" flipH="0" flipV="0">
+            <a:off x="381000" y="4029075"/>
+            <a:ext cx="5648325" cy="1943100"/>
+          </a:xfrm>
+          <a:prstGeom prst="roundRect">
+            <a:avLst>
+              <a:gd name="adj" fmla="val 2451"/>
+            </a:avLst>
+          </a:prstGeom>
+          <a:solidFill>
+            <a:srgbClr val="0F1D33"/>
+          </a:solidFill>
+          <a:ln/>
+        </p:spPr>
+        <p:txBody>
+          <a:bodyPr/>
+          <a:p/>
+        </p:txBody>
+      </p:sp>
+      <p:sp>
+        <p:nvSpPr>
+          <p:cNvPr id="183" name="" descr="{&quot;isTemplate&quot;:true,&quot;type&quot;:&quot;text&quot;}"/>
+          <p:cNvSpPr txBox="1"/>
+          <p:nvPr/>
+        </p:nvSpPr>
+        <p:spPr>
+          <a:xfrm rot="0" flipH="0" flipV="0">
+            <a:off x="485775" y="4086225"/>
+            <a:ext cx="5438775" cy="152400"/>
+          </a:xfrm>
+          <a:prstGeom prst="rect"/>
+        </p:spPr>
+        <p:txBody>
+          <a:bodyPr wrap="none" lIns="0" tIns="0" rIns="0" bIns="0"/>
+          <a:p>
+            <a:pPr>
+              <a:lnSpc>
+                <a:spcPct val="100000"/>
+              </a:lnSpc>
+            </a:pPr>
+            <a:r>
+              <a:rPr lang="en-US" sz="975" b="1">
+                <a:solidFill>
+                  <a:srgbClr val="8FBBFF"/>
+                </a:solidFill>
+                <a:latin typeface="Microsoft YaHei"/>
+                <a:ea typeface="Microsoft YaHei"/>
+              </a:rPr>
+              <a:t xml:space="preserve">⑤  </a:t>
+            </a:r>
+            <a:r>
+              <a:rPr lang="zh-CN" sz="975" b="1">
+                <a:solidFill>
+                  <a:srgbClr val="8FBBFF"/>
+                </a:solidFill>
+                <a:latin typeface="Microsoft YaHei"/>
+                <a:ea typeface="Microsoft YaHei"/>
+              </a:rPr>
+              <a:t>局部</a:t>
+            </a:r>
+            <a:r>
+              <a:rPr lang="en-US" sz="975" b="1">
+                <a:solidFill>
+                  <a:srgbClr val="8FBBFF"/>
+                </a:solidFill>
+                <a:latin typeface="Microsoft YaHei"/>
+                <a:ea typeface="Microsoft YaHei"/>
+              </a:rPr>
+              <a:t xml:space="preserve"> BA</a:t>
+            </a:r>
+            <a:r>
+              <a:rPr lang="zh-CN" sz="975" b="1">
+                <a:solidFill>
+                  <a:srgbClr val="8FBBFF"/>
+                </a:solidFill>
+                <a:latin typeface="Microsoft YaHei"/>
+                <a:ea typeface="Microsoft YaHei"/>
+              </a:rPr>
+              <a:t>：</a:t>
+            </a:r>
+            <a:r>
+              <a:rPr lang="en-US" sz="975" b="1">
+                <a:solidFill>
+                  <a:srgbClr val="8FBBFF"/>
+                </a:solidFill>
+                <a:latin typeface="Microsoft YaHei"/>
+                <a:ea typeface="Microsoft YaHei"/>
+              </a:rPr>
+              <a:t xml:space="preserve">LM </a:t>
+            </a:r>
+            <a:r>
+              <a:rPr lang="zh-CN" sz="975" b="1">
+                <a:solidFill>
+                  <a:srgbClr val="8FBBFF"/>
+                </a:solidFill>
+                <a:latin typeface="Microsoft YaHei"/>
+                <a:ea typeface="Microsoft YaHei"/>
+              </a:rPr>
+              <a:t>迭代</a:t>
+            </a:r>
+            <a:r>
+              <a:rPr lang="en-US" sz="975" b="1">
+                <a:solidFill>
+                  <a:srgbClr val="8FBBFF"/>
+                </a:solidFill>
+                <a:latin typeface="Microsoft YaHei"/>
+                <a:ea typeface="Microsoft YaHei"/>
+              </a:rPr>
+              <a:t xml:space="preserve"> + Schur </a:t>
+            </a:r>
+            <a:r>
+              <a:rPr lang="zh-CN" sz="975" b="1">
+                <a:solidFill>
+                  <a:srgbClr val="8FBBFF"/>
+                </a:solidFill>
+                <a:latin typeface="Microsoft YaHei"/>
+                <a:ea typeface="Microsoft YaHei"/>
+              </a:rPr>
+              <a:t>消元</a:t>
+            </a:r>
+            <a:endParaRPr/>
+          </a:p>
+        </p:txBody>
+      </p:sp>
+      <p:sp>
+        <p:nvSpPr>
+          <p:cNvPr id="184" name="" descr="{&quot;isTemplate&quot;:true,&quot;type&quot;:&quot;text&quot;}"/>
+          <p:cNvSpPr txBox="1"/>
+          <p:nvPr/>
+        </p:nvSpPr>
+        <p:spPr>
+          <a:xfrm rot="0" flipH="0" flipV="0">
+            <a:off x="485775" y="4248150"/>
+            <a:ext cx="5438775" cy="114300"/>
+          </a:xfrm>
+          <a:prstGeom prst="rect"/>
+        </p:spPr>
+        <p:txBody>
+          <a:bodyPr wrap="none" lIns="0" tIns="0" rIns="0" bIns="0"/>
+          <a:p>
+            <a:pPr>
+              <a:lnSpc>
+                <a:spcPct val="100000"/>
+              </a:lnSpc>
+            </a:pPr>
+            <a:r>
+              <a:rPr lang="en-US" sz="750">
+                <a:solidFill>
+                  <a:srgbClr val="6D87AC"/>
+                </a:solidFill>
+                <a:latin typeface="Consolas"/>
+                <a:ea typeface="Consolas"/>
+              </a:rPr>
+              <a:t>poses/mini_ba.py:285</a:t>
+            </a:r>
+            <a:endParaRPr/>
+          </a:p>
+        </p:txBody>
+      </p:sp>
+      <p:sp>
+        <p:nvSpPr>
+          <p:cNvPr id="185" name="" descr="{&quot;isTemplate&quot;:true,&quot;type&quot;:&quot;text&quot;}"/>
+          <p:cNvSpPr txBox="1"/>
+          <p:nvPr/>
+        </p:nvSpPr>
+        <p:spPr>
+          <a:xfrm rot="0" flipH="0" flipV="0">
+            <a:off x="485775" y="4391025"/>
+            <a:ext cx="5438775" cy="190500"/>
+          </a:xfrm>
+          <a:prstGeom prst="rect"/>
+        </p:spPr>
+        <p:txBody>
+          <a:bodyPr wrap="none" lIns="0" tIns="0" rIns="0" bIns="0"/>
+          <a:p>
+            <a:pPr>
+              <a:lnSpc>
+                <a:spcPct val="128000"/>
+              </a:lnSpc>
+            </a:pPr>
+            <a:r>
+              <a:rPr lang="en-US" sz="975">
+                <a:solidFill>
+                  <a:srgbClr val="D7E3F6"/>
+                </a:solidFill>
+                <a:latin typeface="Consolas"/>
+                <a:ea typeface="Consolas"/>
+              </a:rPr>
+              <a:t>for it in range(self.iters):</a:t>
+            </a:r>
+            <a:endParaRPr/>
+          </a:p>
+        </p:txBody>
+      </p:sp>
+      <p:sp>
+        <p:nvSpPr>
+          <p:cNvPr id="186" name="" descr="{&quot;isTemplate&quot;:true,&quot;type&quot;:&quot;text&quot;}"/>
+          <p:cNvSpPr txBox="1"/>
+          <p:nvPr/>
+        </p:nvSpPr>
+        <p:spPr>
+          <a:xfrm rot="0" flipH="0" flipV="0">
+            <a:off x="485775" y="4581525"/>
+            <a:ext cx="5438775" cy="190500"/>
+          </a:xfrm>
+          <a:prstGeom prst="rect"/>
+        </p:spPr>
+        <p:txBody>
+          <a:bodyPr wrap="none" lIns="0" tIns="0" rIns="0" bIns="0"/>
+          <a:p>
+            <a:pPr>
+              <a:lnSpc>
+                <a:spcPct val="128000"/>
+              </a:lnSpc>
+            </a:pPr>
+            <a:r>
+              <a:rPr lang="en-US" sz="975">
+                <a:solidFill>
+                  <a:srgbClr val="D7E3F6"/>
+                </a:solidFill>
+                <a:latin typeface="Consolas"/>
+                <a:ea typeface="Consolas"/>
+              </a:rPr>
+              <a:t xml:space="preserve">    jtj_cam, ..., resid = self._assemble_jtj(...)</a:t>
+            </a:r>
+            <a:endParaRPr/>
+          </a:p>
+        </p:txBody>
+      </p:sp>
+      <p:sp>
+        <p:nvSpPr>
+          <p:cNvPr id="187" name="" descr="{&quot;isTemplate&quot;:true,&quot;type&quot;:&quot;text&quot;}"/>
+          <p:cNvSpPr txBox="1"/>
+          <p:nvPr/>
+        </p:nvSpPr>
+        <p:spPr>
+          <a:xfrm rot="0" flipH="0" flipV="0">
+            <a:off x="485775" y="4772025"/>
+            <a:ext cx="5438775" cy="190500"/>
+          </a:xfrm>
+          <a:prstGeom prst="rect"/>
+        </p:spPr>
+        <p:txBody>
+          <a:bodyPr wrap="none" lIns="0" tIns="0" rIns="0" bIns="0"/>
+          <a:p>
+            <a:pPr>
+              <a:lnSpc>
+                <a:spcPct val="128000"/>
+              </a:lnSpc>
+            </a:pPr>
+            <a:r>
+              <a:rPr lang="en-US" sz="975">
+                <a:solidFill>
+                  <a:srgbClr val="D7E3F6"/>
+                </a:solidFill>
+                <a:latin typeface="Consolas"/>
+                <a:ea typeface="Consolas"/>
+              </a:rPr>
+              <a:t xml:space="preserve">    jtj_cam.diagonal().mul_(1 + lm)        # LM </a:t>
+            </a:r>
+            <a:r>
+              <a:rPr lang="zh-CN" sz="975">
+                <a:solidFill>
+                  <a:srgbClr val="D7E3F6"/>
+                </a:solidFill>
+                <a:latin typeface="Consolas"/>
+                <a:ea typeface="Consolas"/>
+              </a:rPr>
+              <a:t>阻尼</a:t>
+            </a:r>
+            <a:endParaRPr/>
+          </a:p>
+        </p:txBody>
+      </p:sp>
+      <p:sp>
+        <p:nvSpPr>
+          <p:cNvPr id="188" name="" descr="{&quot;isTemplate&quot;:true,&quot;type&quot;:&quot;text&quot;}"/>
+          <p:cNvSpPr txBox="1"/>
+          <p:nvPr/>
+        </p:nvSpPr>
+        <p:spPr>
+          <a:xfrm rot="0" flipH="0" flipV="0">
+            <a:off x="485775" y="4962525"/>
+            <a:ext cx="5438775" cy="190500"/>
+          </a:xfrm>
+          <a:prstGeom prst="rect"/>
+        </p:spPr>
+        <p:txBody>
+          <a:bodyPr wrap="none" lIns="0" tIns="0" rIns="0" bIns="0"/>
+          <a:p>
+            <a:pPr>
+              <a:lnSpc>
+                <a:spcPct val="128000"/>
+              </a:lnSpc>
+            </a:pPr>
+            <a:r>
+              <a:rPr lang="en-US" sz="975">
+                <a:solidFill>
+                  <a:srgbClr val="D7E3F6"/>
+                </a:solidFill>
+                <a:latin typeface="Consolas"/>
+                <a:ea typeface="Consolas"/>
+              </a:rPr>
+              <a:t xml:space="preserve">    jtj_xyz_inv = self.inv_3x3(jtj_xyz)    # C^-1</a:t>
+            </a:r>
+            <a:endParaRPr/>
+          </a:p>
+        </p:txBody>
+      </p:sp>
+      <p:sp>
+        <p:nvSpPr>
+          <p:cNvPr id="189" name="" descr="{&quot;isTemplate&quot;:true,&quot;type&quot;:&quot;text&quot;}"/>
+          <p:cNvSpPr txBox="1"/>
+          <p:nvPr/>
+        </p:nvSpPr>
+        <p:spPr>
+          <a:xfrm rot="0" flipH="0" flipV="0">
+            <a:off x="485775" y="5153025"/>
+            <a:ext cx="5438775" cy="190500"/>
+          </a:xfrm>
+          <a:prstGeom prst="rect"/>
+        </p:spPr>
+        <p:txBody>
+          <a:bodyPr wrap="none" lIns="0" tIns="0" rIns="0" bIns="0"/>
+          <a:p>
+            <a:pPr>
+              <a:lnSpc>
+                <a:spcPct val="128000"/>
+              </a:lnSpc>
+            </a:pPr>
+            <a:r>
+              <a:rPr lang="en-US" sz="975">
+                <a:solidFill>
+                  <a:srgbClr val="D7E3F6"/>
+                </a:solidFill>
+                <a:latin typeface="Consolas"/>
+                <a:ea typeface="Consolas"/>
+              </a:rPr>
+              <a:t xml:space="preserve">    S = jtj_cam - jtj_xyz_inv @ jtj_cam_xyz.T @ jtj_cam_xyz</a:t>
+            </a:r>
+            <a:endParaRPr/>
+          </a:p>
+        </p:txBody>
+      </p:sp>
+      <p:sp>
+        <p:nvSpPr>
+          <p:cNvPr id="190" name="" descr="{&quot;isTemplate&quot;:true,&quot;type&quot;:&quot;text&quot;}"/>
+          <p:cNvSpPr txBox="1"/>
+          <p:nvPr/>
+        </p:nvSpPr>
+        <p:spPr>
+          <a:xfrm rot="0" flipH="0" flipV="0">
+            <a:off x="485775" y="5343525"/>
+            <a:ext cx="5438775" cy="190500"/>
+          </a:xfrm>
+          <a:prstGeom prst="rect"/>
+        </p:spPr>
+        <p:txBody>
+          <a:bodyPr wrap="none" lIns="0" tIns="0" rIns="0" bIns="0"/>
+          <a:p>
+            <a:pPr>
+              <a:lnSpc>
+                <a:spcPct val="128000"/>
+              </a:lnSpc>
+            </a:pPr>
+            <a:r>
+              <a:rPr lang="en-US" sz="975">
+                <a:solidFill>
+                  <a:srgbClr val="D7E3F6"/>
+                </a:solidFill>
+                <a:latin typeface="Consolas"/>
+                <a:ea typeface="Consolas"/>
+              </a:rPr>
+              <a:t xml:space="preserve">    L = torch.linalg.cholesky_ex(S)[0]      # </a:t>
+            </a:r>
+            <a:r>
+              <a:rPr lang="zh-CN" sz="975">
+                <a:solidFill>
+                  <a:srgbClr val="D7E3F6"/>
+                </a:solidFill>
+                <a:latin typeface="Consolas"/>
+                <a:ea typeface="Consolas"/>
+              </a:rPr>
+              <a:t>舒尔补</a:t>
+            </a:r>
+            <a:r>
+              <a:rPr lang="en-US" sz="975">
+                <a:solidFill>
+                  <a:srgbClr val="D7E3F6"/>
+                </a:solidFill>
+                <a:latin typeface="Consolas"/>
+                <a:ea typeface="Consolas"/>
+              </a:rPr>
+              <a:t xml:space="preserve"> S</a:t>
+            </a:r>
+            <a:endParaRPr/>
+          </a:p>
+        </p:txBody>
+      </p:sp>
+      <p:sp>
+        <p:nvSpPr>
+          <p:cNvPr id="191" name="" descr="{&quot;isTemplate&quot;:true,&quot;type&quot;:&quot;text&quot;}"/>
+          <p:cNvSpPr txBox="1"/>
+          <p:nvPr/>
+        </p:nvSpPr>
+        <p:spPr>
+          <a:xfrm rot="0" flipH="0" flipV="0">
+            <a:off x="485775" y="5534025"/>
+            <a:ext cx="5438775" cy="190500"/>
+          </a:xfrm>
+          <a:prstGeom prst="rect"/>
+        </p:spPr>
+        <p:txBody>
+          <a:bodyPr wrap="none" lIns="0" tIns="0" rIns="0" bIns="0"/>
+          <a:p>
+            <a:pPr>
+              <a:lnSpc>
+                <a:spcPct val="128000"/>
+              </a:lnSpc>
+            </a:pPr>
+            <a:r>
+              <a:rPr lang="en-US" sz="975">
+                <a:solidFill>
+                  <a:srgbClr val="D7E3F6"/>
+                </a:solidFill>
+                <a:latin typeface="Consolas"/>
+                <a:ea typeface="Consolas"/>
+              </a:rPr>
+              <a:t xml:space="preserve">    dcam = torch.linalg.solve_triangular(...)  # ΔT</a:t>
+            </a:r>
+            <a:endParaRPr/>
+          </a:p>
+        </p:txBody>
+      </p:sp>
+      <p:sp>
+        <p:nvSpPr>
+          <p:cNvPr id="192" name="" descr="{&quot;isTemplate&quot;:true,&quot;type&quot;:&quot;text&quot;}"/>
+          <p:cNvSpPr txBox="1"/>
+          <p:nvPr/>
+        </p:nvSpPr>
+        <p:spPr>
+          <a:xfrm rot="0" flipH="0" flipV="0">
+            <a:off x="485775" y="5724525"/>
+            <a:ext cx="5438775" cy="190500"/>
+          </a:xfrm>
+          <a:prstGeom prst="rect"/>
+        </p:spPr>
+        <p:txBody>
+          <a:bodyPr wrap="none" lIns="0" tIns="0" rIns="0" bIns="0"/>
+          <a:p>
+            <a:pPr>
+              <a:lnSpc>
+                <a:spcPct val="128000"/>
+              </a:lnSpc>
+            </a:pPr>
+            <a:r>
+              <a:rPr lang="en-US" sz="975">
+                <a:solidFill>
+                  <a:srgbClr val="D7E3F6"/>
+                </a:solidFill>
+                <a:latin typeface="Consolas"/>
+                <a:ea typeface="Consolas"/>
+              </a:rPr>
+              <a:t xml:space="preserve">    dxyz = torch.bmm(b.view(-1, 1, 3), jtj_xyz_inv)</a:t>
+            </a:r>
+            <a:endParaRPr/>
+          </a:p>
+        </p:txBody>
+      </p:sp>
+      <p:sp>
+        <p:nvSpPr>
+          <p:cNvPr id="193" name=""/>
+          <p:cNvSpPr/>
+          <p:nvPr/>
+        </p:nvSpPr>
+        <p:spPr>
+          <a:xfrm rot="0" flipH="0" flipV="0">
+            <a:off x="6162675" y="942975"/>
+            <a:ext cx="5648325" cy="1562100"/>
+          </a:xfrm>
+          <a:prstGeom prst="roundRect">
+            <a:avLst>
+              <a:gd name="adj" fmla="val 3049"/>
+            </a:avLst>
+          </a:prstGeom>
+          <a:solidFill>
+            <a:srgbClr val="0F1D33"/>
+          </a:solidFill>
+          <a:ln/>
+        </p:spPr>
+        <p:txBody>
+          <a:bodyPr/>
+          <a:p/>
+        </p:txBody>
+      </p:sp>
+      <p:sp>
+        <p:nvSpPr>
+          <p:cNvPr id="194" name="" descr="{&quot;isTemplate&quot;:true,&quot;type&quot;:&quot;text&quot;}"/>
+          <p:cNvSpPr txBox="1"/>
+          <p:nvPr/>
+        </p:nvSpPr>
+        <p:spPr>
+          <a:xfrm rot="0" flipH="0" flipV="0">
+            <a:off x="6267450" y="1000125"/>
+            <a:ext cx="5438775" cy="152400"/>
+          </a:xfrm>
+          <a:prstGeom prst="rect"/>
+        </p:spPr>
+        <p:txBody>
+          <a:bodyPr wrap="none" lIns="0" tIns="0" rIns="0" bIns="0"/>
+          <a:p>
+            <a:pPr>
+              <a:lnSpc>
+                <a:spcPct val="100000"/>
+              </a:lnSpc>
+            </a:pPr>
+            <a:r>
+              <a:rPr lang="en-US" sz="975" b="1">
+                <a:solidFill>
+                  <a:srgbClr val="8FBBFF"/>
+                </a:solidFill>
+                <a:latin typeface="Microsoft YaHei"/>
+                <a:ea typeface="Microsoft YaHei"/>
+              </a:rPr>
+              <a:t xml:space="preserve">⑥  </a:t>
+            </a:r>
+            <a:r>
+              <a:rPr lang="zh-CN" sz="975" b="1">
+                <a:solidFill>
+                  <a:srgbClr val="8FBBFF"/>
+                </a:solidFill>
+                <a:latin typeface="Microsoft YaHei"/>
+                <a:ea typeface="Microsoft YaHei"/>
+              </a:rPr>
+              <a:t>回环检测与补边</a:t>
+            </a:r>
+            <a:endParaRPr/>
+          </a:p>
+        </p:txBody>
+      </p:sp>
+      <p:sp>
+        <p:nvSpPr>
+          <p:cNvPr id="195" name="" descr="{&quot;isTemplate&quot;:true,&quot;type&quot;:&quot;text&quot;}"/>
+          <p:cNvSpPr txBox="1"/>
+          <p:nvPr/>
+        </p:nvSpPr>
+        <p:spPr>
+          <a:xfrm rot="0" flipH="0" flipV="0">
+            <a:off x="6267450" y="1162050"/>
+            <a:ext cx="5438775" cy="114300"/>
+          </a:xfrm>
+          <a:prstGeom prst="rect"/>
+        </p:spPr>
+        <p:txBody>
+          <a:bodyPr wrap="none" lIns="0" tIns="0" rIns="0" bIns="0"/>
+          <a:p>
+            <a:pPr>
+              <a:lnSpc>
+                <a:spcPct val="100000"/>
+              </a:lnSpc>
+            </a:pPr>
+            <a:r>
+              <a:rPr lang="en-US" sz="750">
+                <a:solidFill>
+                  <a:srgbClr val="6D87AC"/>
+                </a:solidFill>
+                <a:latin typeface="Consolas"/>
+                <a:ea typeface="Consolas"/>
+              </a:rPr>
+              <a:t>poses/ba_problem.py:1054</a:t>
+            </a:r>
+            <a:endParaRPr/>
+          </a:p>
+        </p:txBody>
+      </p:sp>
+      <p:sp>
+        <p:nvSpPr>
+          <p:cNvPr id="196" name="" descr="{&quot;isTemplate&quot;:true,&quot;type&quot;:&quot;text&quot;}"/>
+          <p:cNvSpPr txBox="1"/>
+          <p:nvPr/>
+        </p:nvSpPr>
+        <p:spPr>
+          <a:xfrm rot="0" flipH="0" flipV="0">
+            <a:off x="6267450" y="1304925"/>
+            <a:ext cx="5438775" cy="190500"/>
+          </a:xfrm>
+          <a:prstGeom prst="rect"/>
+        </p:spPr>
+        <p:txBody>
+          <a:bodyPr wrap="none" lIns="0" tIns="0" rIns="0" bIns="0"/>
+          <a:p>
+            <a:pPr>
+              <a:lnSpc>
+                <a:spcPct val="128000"/>
+              </a:lnSpc>
+            </a:pPr>
+            <a:r>
+              <a:rPr lang="en-US" sz="975">
+                <a:solidFill>
+                  <a:srgbClr val="D7E3F6"/>
+                </a:solidFill>
+                <a:latin typeface="Consolas"/>
+                <a:ea typeface="Consolas"/>
+              </a:rPr>
+              <a:t xml:space="preserve">if dists.max() &gt; self.min_loop_size:      # </a:t>
+            </a:r>
+            <a:r>
+              <a:rPr lang="zh-CN" sz="975">
+                <a:solidFill>
+                  <a:srgbClr val="D7E3F6"/>
+                </a:solidFill>
+                <a:latin typeface="Consolas"/>
+                <a:ea typeface="Consolas"/>
+              </a:rPr>
+              <a:t>图距</a:t>
+            </a:r>
+            <a:r>
+              <a:rPr lang="en-US" sz="975">
+                <a:solidFill>
+                  <a:srgbClr val="D7E3F6"/>
+                </a:solidFill>
+                <a:latin typeface="Consolas"/>
+                <a:ea typeface="Consolas"/>
+              </a:rPr>
+              <a:t xml:space="preserve"> &gt; 10</a:t>
+            </a:r>
+            <a:endParaRPr/>
+          </a:p>
+        </p:txBody>
+      </p:sp>
+      <p:sp>
+        <p:nvSpPr>
+          <p:cNvPr id="197" name="" descr="{&quot;isTemplate&quot;:true,&quot;type&quot;:&quot;text&quot;}"/>
+          <p:cNvSpPr txBox="1"/>
+          <p:nvPr/>
+        </p:nvSpPr>
+        <p:spPr>
+          <a:xfrm rot="0" flipH="0" flipV="0">
+            <a:off x="6267450" y="1495425"/>
+            <a:ext cx="5438775" cy="190500"/>
+          </a:xfrm>
+          <a:prstGeom prst="rect"/>
+        </p:spPr>
+        <p:txBody>
+          <a:bodyPr wrap="none" lIns="0" tIns="0" rIns="0" bIns="0"/>
+          <a:p>
+            <a:pPr>
+              <a:lnSpc>
+                <a:spcPct val="128000"/>
+              </a:lnSpc>
+            </a:pPr>
+            <a:r>
+              <a:rPr lang="en-US" sz="975">
+                <a:solidFill>
+                  <a:srgbClr val="D7E3F6"/>
+                </a:solidFill>
+                <a:latin typeface="Consolas"/>
+                <a:ea typeface="Consolas"/>
+              </a:rPr>
+              <a:t xml:space="preserve">    clusters_t = split_into_clusters(dists)   # </a:t>
+            </a:r>
+            <a:r>
+              <a:rPr lang="zh-CN" sz="975">
+                <a:solidFill>
+                  <a:srgbClr val="D7E3F6"/>
+                </a:solidFill>
+                <a:latin typeface="Consolas"/>
+                <a:ea typeface="Consolas"/>
+              </a:rPr>
+              <a:t>分两簇</a:t>
+            </a:r>
+            <a:endParaRPr/>
+          </a:p>
+        </p:txBody>
+      </p:sp>
+      <p:sp>
+        <p:nvSpPr>
+          <p:cNvPr id="198" name="" descr="{&quot;isTemplate&quot;:true,&quot;type&quot;:&quot;text&quot;}"/>
+          <p:cNvSpPr txBox="1"/>
+          <p:nvPr/>
+        </p:nvSpPr>
+        <p:spPr>
+          <a:xfrm rot="0" flipH="0" flipV="0">
+            <a:off x="6267450" y="1685925"/>
+            <a:ext cx="5438775" cy="190500"/>
+          </a:xfrm>
+          <a:prstGeom prst="rect"/>
+        </p:spPr>
+        <p:txBody>
+          <a:bodyPr wrap="none" lIns="0" tIns="0" rIns="0" bIns="0"/>
+          <a:p>
+            <a:pPr>
+              <a:lnSpc>
+                <a:spcPct val="128000"/>
+              </a:lnSpc>
+            </a:pPr>
+            <a:r>
+              <a:rPr lang="en-US" sz="975">
+                <a:solidFill>
+                  <a:srgbClr val="D7E3F6"/>
+                </a:solidFill>
+                <a:latin typeface="Consolas"/>
+                <a:ea typeface="Consolas"/>
+              </a:rPr>
+              <a:t>is_loop = (min(n_robust_pairs) &gt; n // 2 and</a:t>
+            </a:r>
+            <a:endParaRPr/>
+          </a:p>
+        </p:txBody>
+      </p:sp>
+      <p:sp>
+        <p:nvSpPr>
+          <p:cNvPr id="199" name="" descr="{&quot;isTemplate&quot;:true,&quot;type&quot;:&quot;text&quot;}"/>
+          <p:cNvSpPr txBox="1"/>
+          <p:nvPr/>
+        </p:nvSpPr>
+        <p:spPr>
+          <a:xfrm rot="0" flipH="0" flipV="0">
+            <a:off x="6267450" y="1876425"/>
+            <a:ext cx="5438775" cy="190500"/>
+          </a:xfrm>
+          <a:prstGeom prst="rect"/>
+        </p:spPr>
+        <p:txBody>
+          <a:bodyPr wrap="none" lIns="0" tIns="0" rIns="0" bIns="0"/>
+          <a:p>
+            <a:pPr>
+              <a:lnSpc>
+                <a:spcPct val="128000"/>
+              </a:lnSpc>
+            </a:pPr>
+            <a:r>
+              <a:rPr lang="en-US" sz="975">
+                <a:solidFill>
+                  <a:srgbClr val="D7E3F6"/>
+                </a:solidFill>
+                <a:latin typeface="Consolas"/>
+                <a:ea typeface="Consolas"/>
+              </a:rPr>
+              <a:t xml:space="preserve">           min(max_matches_robustness) &gt; 0.5 * max(...))</a:t>
+            </a:r>
+            <a:endParaRPr/>
+          </a:p>
+        </p:txBody>
+      </p:sp>
+      <p:sp>
+        <p:nvSpPr>
+          <p:cNvPr id="200" name="" descr="{&quot;isTemplate&quot;:true,&quot;type&quot;:&quot;text&quot;}"/>
+          <p:cNvSpPr txBox="1"/>
+          <p:nvPr/>
+        </p:nvSpPr>
+        <p:spPr>
+          <a:xfrm rot="0" flipH="0" flipV="0">
+            <a:off x="6267450" y="2066925"/>
+            <a:ext cx="5438775" cy="190500"/>
+          </a:xfrm>
+          <a:prstGeom prst="rect"/>
+        </p:spPr>
+        <p:txBody>
+          <a:bodyPr wrap="none" lIns="0" tIns="0" rIns="0" bIns="0"/>
+          <a:p>
+            <a:pPr>
+              <a:lnSpc>
+                <a:spcPct val="128000"/>
+              </a:lnSpc>
+            </a:pPr>
+            <a:r>
+              <a:rPr lang="en-US" sz="975">
+                <a:solidFill>
+                  <a:srgbClr val="D7E3F6"/>
+                </a:solidFill>
+                <a:latin typeface="Consolas"/>
+                <a:ea typeface="Consolas"/>
+              </a:rPr>
+              <a:t>if len(match.kpts) &gt;= self.min_matches_edge:   # τm=500</a:t>
+            </a:r>
+            <a:endParaRPr/>
+          </a:p>
+        </p:txBody>
+      </p:sp>
+      <p:sp>
+        <p:nvSpPr>
+          <p:cNvPr id="201" name="" descr="{&quot;isTemplate&quot;:true,&quot;type&quot;:&quot;text&quot;}"/>
+          <p:cNvSpPr txBox="1"/>
+          <p:nvPr/>
+        </p:nvSpPr>
+        <p:spPr>
+          <a:xfrm rot="0" flipH="0" flipV="0">
+            <a:off x="6267450" y="2257425"/>
+            <a:ext cx="5438775" cy="190500"/>
+          </a:xfrm>
+          <a:prstGeom prst="rect"/>
+        </p:spPr>
+        <p:txBody>
+          <a:bodyPr wrap="none" lIns="0" tIns="0" rIns="0" bIns="0"/>
+          <a:p>
+            <a:pPr>
+              <a:lnSpc>
+                <a:spcPct val="128000"/>
+              </a:lnSpc>
+            </a:pPr>
+            <a:r>
+              <a:rPr lang="en-US" sz="975">
+                <a:solidFill>
+                  <a:srgbClr val="D7E3F6"/>
+                </a:solidFill>
+                <a:latin typeface="Consolas"/>
+                <a:ea typeface="Consolas"/>
+              </a:rPr>
+              <a:t xml:space="preserve">    self.pose_graph.add_match(i, j, 1.0 / len(match.kpts))</a:t>
+            </a:r>
+            <a:endParaRPr/>
+          </a:p>
+        </p:txBody>
+      </p:sp>
+      <p:sp>
+        <p:nvSpPr>
+          <p:cNvPr id="202" name=""/>
+          <p:cNvSpPr/>
+          <p:nvPr/>
+        </p:nvSpPr>
+        <p:spPr>
+          <a:xfrm rot="0" flipH="0" flipV="0">
+            <a:off x="6162675" y="2581275"/>
+            <a:ext cx="5648325" cy="1181100"/>
+          </a:xfrm>
+          <a:prstGeom prst="roundRect">
+            <a:avLst>
+              <a:gd name="adj" fmla="val 4032"/>
+            </a:avLst>
+          </a:prstGeom>
+          <a:solidFill>
+            <a:srgbClr val="0F1D33"/>
+          </a:solidFill>
+          <a:ln/>
+        </p:spPr>
+        <p:txBody>
+          <a:bodyPr/>
+          <a:p/>
+        </p:txBody>
+      </p:sp>
+      <p:sp>
+        <p:nvSpPr>
+          <p:cNvPr id="203" name="" descr="{&quot;isTemplate&quot;:true,&quot;type&quot;:&quot;text&quot;}"/>
+          <p:cNvSpPr txBox="1"/>
+          <p:nvPr/>
+        </p:nvSpPr>
+        <p:spPr>
+          <a:xfrm rot="0" flipH="0" flipV="0">
+            <a:off x="6267450" y="2638425"/>
+            <a:ext cx="5438775" cy="152400"/>
+          </a:xfrm>
+          <a:prstGeom prst="rect"/>
+        </p:spPr>
+        <p:txBody>
+          <a:bodyPr wrap="none" lIns="0" tIns="0" rIns="0" bIns="0"/>
+          <a:p>
+            <a:pPr>
+              <a:lnSpc>
+                <a:spcPct val="100000"/>
+              </a:lnSpc>
+            </a:pPr>
+            <a:r>
+              <a:rPr lang="en-US" sz="975" b="1">
+                <a:solidFill>
+                  <a:srgbClr val="8FBBFF"/>
+                </a:solidFill>
+                <a:latin typeface="Microsoft YaHei"/>
+                <a:ea typeface="Microsoft YaHei"/>
+              </a:rPr>
+              <a:t xml:space="preserve">⑦-a  </a:t>
+            </a:r>
+            <a:r>
+              <a:rPr lang="zh-CN" sz="975" b="1">
+                <a:solidFill>
+                  <a:srgbClr val="8FBBFF"/>
+                </a:solidFill>
+                <a:latin typeface="Microsoft YaHei"/>
+                <a:ea typeface="Microsoft YaHei"/>
+              </a:rPr>
+              <a:t>分块深度对齐</a:t>
+            </a:r>
+            <a:endParaRPr/>
+          </a:p>
+        </p:txBody>
+      </p:sp>
+      <p:sp>
+        <p:nvSpPr>
+          <p:cNvPr id="204" name="" descr="{&quot;isTemplate&quot;:true,&quot;type&quot;:&quot;text&quot;}"/>
+          <p:cNvSpPr txBox="1"/>
+          <p:nvPr/>
+        </p:nvSpPr>
+        <p:spPr>
+          <a:xfrm rot="0" flipH="0" flipV="0">
+            <a:off x="6267450" y="2800350"/>
+            <a:ext cx="5438775" cy="114300"/>
+          </a:xfrm>
+          <a:prstGeom prst="rect"/>
+        </p:spPr>
+        <p:txBody>
+          <a:bodyPr wrap="none" lIns="0" tIns="0" rIns="0" bIns="0"/>
+          <a:p>
+            <a:pPr>
+              <a:lnSpc>
+                <a:spcPct val="100000"/>
+              </a:lnSpc>
+            </a:pPr>
+            <a:r>
+              <a:rPr lang="en-US" sz="750">
+                <a:solidFill>
+                  <a:srgbClr val="6D87AC"/>
+                </a:solidFill>
+                <a:latin typeface="Consolas"/>
+                <a:ea typeface="Consolas"/>
+              </a:rPr>
+              <a:t>scene/mono_depth.py:315</a:t>
+            </a:r>
+            <a:endParaRPr/>
+          </a:p>
+        </p:txBody>
+      </p:sp>
+      <p:sp>
+        <p:nvSpPr>
+          <p:cNvPr id="205" name="" descr="{&quot;isTemplate&quot;:true,&quot;type&quot;:&quot;text&quot;}"/>
+          <p:cNvSpPr txBox="1"/>
+          <p:nvPr/>
+        </p:nvSpPr>
+        <p:spPr>
+          <a:xfrm rot="0" flipH="0" flipV="0">
+            <a:off x="6267450" y="2943225"/>
+            <a:ext cx="5438775" cy="190500"/>
+          </a:xfrm>
+          <a:prstGeom prst="rect"/>
+        </p:spPr>
+        <p:txBody>
+          <a:bodyPr wrap="none" lIns="0" tIns="0" rIns="0" bIns="0"/>
+          <a:p>
+            <a:pPr>
+              <a:lnSpc>
+                <a:spcPct val="128000"/>
+              </a:lnSpc>
+            </a:pPr>
+            <a:r>
+              <a:rPr lang="en-US" sz="975">
+                <a:solidFill>
+                  <a:srgbClr val="D7E3F6"/>
+                </a:solidFill>
+                <a:latin typeface="Consolas"/>
+                <a:ea typeface="Consolas"/>
+              </a:rPr>
+              <a:t>tri_idepth = 1 / (pts3d[has_pt3d] @ R.T + t)[..., -1]</a:t>
+            </a:r>
+            <a:endParaRPr/>
+          </a:p>
+        </p:txBody>
+      </p:sp>
+      <p:sp>
+        <p:nvSpPr>
+          <p:cNvPr id="206" name="" descr="{&quot;isTemplate&quot;:true,&quot;type&quot;:&quot;text&quot;}"/>
+          <p:cNvSpPr txBox="1"/>
+          <p:nvPr/>
+        </p:nvSpPr>
+        <p:spPr>
+          <a:xfrm rot="0" flipH="0" flipV="0">
+            <a:off x="6267450" y="3133725"/>
+            <a:ext cx="5438775" cy="190500"/>
+          </a:xfrm>
+          <a:prstGeom prst="rect"/>
+        </p:spPr>
+        <p:txBody>
+          <a:bodyPr wrap="none" lIns="0" tIns="0" rIns="0" bIns="0"/>
+          <a:p>
+            <a:pPr>
+              <a:lnSpc>
+                <a:spcPct val="128000"/>
+              </a:lnSpc>
+            </a:pPr>
+            <a:r>
+              <a:rPr lang="en-US" sz="975">
+                <a:solidFill>
+                  <a:srgbClr val="D7E3F6"/>
+                </a:solidFill>
+                <a:latin typeface="Consolas"/>
+                <a:ea typeface="Consolas"/>
+              </a:rPr>
+              <a:t>mono_al, g_s, g_o = align_samples(tri_idepth, sampled)</a:t>
+            </a:r>
+            <a:endParaRPr/>
+          </a:p>
+        </p:txBody>
+      </p:sp>
+      <p:sp>
+        <p:nvSpPr>
+          <p:cNvPr id="207" name="" descr="{&quot;isTemplate&quot;:true,&quot;type&quot;:&quot;text&quot;}"/>
+          <p:cNvSpPr txBox="1"/>
+          <p:nvPr/>
+        </p:nvSpPr>
+        <p:spPr>
+          <a:xfrm rot="0" flipH="0" flipV="0">
+            <a:off x="6267450" y="3324225"/>
+            <a:ext cx="5438775" cy="190500"/>
+          </a:xfrm>
+          <a:prstGeom prst="rect"/>
+        </p:spPr>
+        <p:txBody>
+          <a:bodyPr wrap="none" lIns="0" tIns="0" rIns="0" bIns="0"/>
+          <a:p>
+            <a:pPr>
+              <a:lnSpc>
+                <a:spcPct val="128000"/>
+              </a:lnSpc>
+            </a:pPr>
+            <a:r>
+              <a:rPr lang="en-US" sz="975">
+                <a:solidFill>
+                  <a:srgbClr val="D7E3F6"/>
+                </a:solidFill>
+                <a:latin typeface="Consolas"/>
+                <a:ea typeface="Consolas"/>
+              </a:rPr>
+              <a:t>valid = err &lt; m_err + grid_outlier_mult * err_dev</a:t>
+            </a:r>
+            <a:endParaRPr/>
+          </a:p>
+        </p:txBody>
+      </p:sp>
+      <p:sp>
+        <p:nvSpPr>
+          <p:cNvPr id="208" name="" descr="{&quot;isTemplate&quot;:true,&quot;type&quot;:&quot;text&quot;}"/>
+          <p:cNvSpPr txBox="1"/>
+          <p:nvPr/>
+        </p:nvSpPr>
+        <p:spPr>
+          <a:xfrm rot="0" flipH="0" flipV="0">
+            <a:off x="6267450" y="3514725"/>
+            <a:ext cx="5438775" cy="190500"/>
+          </a:xfrm>
+          <a:prstGeom prst="rect"/>
+        </p:spPr>
+        <p:txBody>
+          <a:bodyPr wrap="none" lIns="0" tIns="0" rIns="0" bIns="0"/>
+          <a:p>
+            <a:pPr>
+              <a:lnSpc>
+                <a:spcPct val="128000"/>
+              </a:lnSpc>
+            </a:pPr>
+            <a:r>
+              <a:rPr lang="en-US" sz="975">
+                <a:solidFill>
+                  <a:srgbClr val="D7E3F6"/>
+                </a:solidFill>
+                <a:latin typeface="Consolas"/>
+                <a:ea typeface="Consolas"/>
+              </a:rPr>
+              <a:t xml:space="preserve">return align_depth_grid(..., 4, g_s, g_o)   # 4x4 </a:t>
+            </a:r>
+            <a:r>
+              <a:rPr lang="zh-CN" sz="975">
+                <a:solidFill>
+                  <a:srgbClr val="D7E3F6"/>
+                </a:solidFill>
+                <a:latin typeface="Consolas"/>
+                <a:ea typeface="Consolas"/>
+              </a:rPr>
+              <a:t>分块</a:t>
+            </a:r>
+            <a:endParaRPr/>
+          </a:p>
+        </p:txBody>
+      </p:sp>
+      <p:sp>
+        <p:nvSpPr>
+          <p:cNvPr id="209" name=""/>
+          <p:cNvSpPr/>
+          <p:nvPr/>
+        </p:nvSpPr>
+        <p:spPr>
+          <a:xfrm rot="0" flipH="0" flipV="0">
+            <a:off x="6162675" y="3838575"/>
+            <a:ext cx="5648325" cy="1371600"/>
+          </a:xfrm>
+          <a:prstGeom prst="roundRect">
+            <a:avLst>
+              <a:gd name="adj" fmla="val 3472"/>
+            </a:avLst>
+          </a:prstGeom>
+          <a:solidFill>
+            <a:srgbClr val="0F1D33"/>
+          </a:solidFill>
+          <a:ln/>
+        </p:spPr>
+        <p:txBody>
+          <a:bodyPr/>
+          <a:p/>
+        </p:txBody>
+      </p:sp>
+      <p:sp>
+        <p:nvSpPr>
+          <p:cNvPr id="210" name="" descr="{&quot;isTemplate&quot;:true,&quot;type&quot;:&quot;text&quot;}"/>
+          <p:cNvSpPr txBox="1"/>
+          <p:nvPr/>
+        </p:nvSpPr>
+        <p:spPr>
+          <a:xfrm rot="0" flipH="0" flipV="0">
+            <a:off x="6267450" y="3895725"/>
+            <a:ext cx="5438775" cy="152400"/>
+          </a:xfrm>
+          <a:prstGeom prst="rect"/>
+        </p:spPr>
+        <p:txBody>
+          <a:bodyPr wrap="none" lIns="0" tIns="0" rIns="0" bIns="0"/>
+          <a:p>
+            <a:pPr>
+              <a:lnSpc>
+                <a:spcPct val="100000"/>
+              </a:lnSpc>
+            </a:pPr>
+            <a:r>
+              <a:rPr lang="en-US" sz="975" b="1">
+                <a:solidFill>
+                  <a:srgbClr val="8FBBFF"/>
+                </a:solidFill>
+                <a:latin typeface="Microsoft YaHei"/>
+                <a:ea typeface="Microsoft YaHei"/>
+              </a:rPr>
+              <a:t xml:space="preserve">⑦-b  </a:t>
+            </a:r>
+            <a:r>
+              <a:rPr lang="zh-CN" sz="975" b="1">
+                <a:solidFill>
+                  <a:srgbClr val="8FBBFF"/>
+                </a:solidFill>
+                <a:latin typeface="Microsoft YaHei"/>
+                <a:ea typeface="Microsoft YaHei"/>
+              </a:rPr>
+              <a:t>渐进层级与合并</a:t>
+            </a:r>
+            <a:endParaRPr/>
+          </a:p>
+        </p:txBody>
+      </p:sp>
+      <p:sp>
+        <p:nvSpPr>
+          <p:cNvPr id="211" name="" descr="{&quot;isTemplate&quot;:true,&quot;type&quot;:&quot;text&quot;}"/>
+          <p:cNvSpPr txBox="1"/>
+          <p:nvPr/>
+        </p:nvSpPr>
+        <p:spPr>
+          <a:xfrm rot="0" flipH="0" flipV="0">
+            <a:off x="6267450" y="4057650"/>
+            <a:ext cx="5438775" cy="114300"/>
+          </a:xfrm>
+          <a:prstGeom prst="rect"/>
+        </p:spPr>
+        <p:txBody>
+          <a:bodyPr wrap="none" lIns="0" tIns="0" rIns="0" bIns="0"/>
+          <a:p>
+            <a:pPr>
+              <a:lnSpc>
+                <a:spcPct val="100000"/>
+              </a:lnSpc>
+            </a:pPr>
+            <a:r>
+              <a:rPr lang="en-US" sz="750">
+                <a:solidFill>
+                  <a:srgbClr val="6D87AC"/>
+                </a:solidFill>
+                <a:latin typeface="Consolas"/>
+                <a:ea typeface="Consolas"/>
+              </a:rPr>
+              <a:t>scene/hierarchy_cut.py:105</a:t>
+            </a:r>
+            <a:endParaRPr/>
+          </a:p>
+        </p:txBody>
+      </p:sp>
+      <p:sp>
+        <p:nvSpPr>
+          <p:cNvPr id="212" name="" descr="{&quot;isTemplate&quot;:true,&quot;type&quot;:&quot;text&quot;}"/>
+          <p:cNvSpPr txBox="1"/>
+          <p:nvPr/>
+        </p:nvSpPr>
+        <p:spPr>
+          <a:xfrm rot="0" flipH="0" flipV="0">
+            <a:off x="6267450" y="4200525"/>
+            <a:ext cx="5438775" cy="190500"/>
+          </a:xfrm>
+          <a:prstGeom prst="rect"/>
+        </p:spPr>
+        <p:txBody>
+          <a:bodyPr wrap="none" lIns="0" tIns="0" rIns="0" bIns="0"/>
+          <a:p>
+            <a:pPr>
+              <a:lnSpc>
+                <a:spcPct val="128000"/>
+              </a:lnSpc>
+            </a:pPr>
+            <a:r>
+              <a:rPr lang="en-US" sz="975">
+                <a:solidFill>
+                  <a:srgbClr val="D7E3F6"/>
+                </a:solidFill>
+                <a:latin typeface="Consolas"/>
+                <a:ea typeface="Consolas"/>
+              </a:rPr>
+              <a:t>mask = screen_size &lt; self.hierarchy_screen_size_threshold  # 0.5 px</a:t>
+            </a:r>
+            <a:endParaRPr/>
+          </a:p>
+        </p:txBody>
+      </p:sp>
+      <p:sp>
+        <p:nvSpPr>
+          <p:cNvPr id="213" name="" descr="{&quot;isTemplate&quot;:true,&quot;type&quot;:&quot;text&quot;}"/>
+          <p:cNvSpPr txBox="1"/>
+          <p:nvPr/>
+        </p:nvSpPr>
+        <p:spPr>
+          <a:xfrm rot="0" flipH="0" flipV="0">
+            <a:off x="6267450" y="4391025"/>
+            <a:ext cx="5438775" cy="190500"/>
+          </a:xfrm>
+          <a:prstGeom prst="rect"/>
+        </p:spPr>
+        <p:txBody>
+          <a:bodyPr wrap="none" lIns="0" tIns="0" rIns="0" bIns="0"/>
+          <a:p>
+            <a:pPr>
+              <a:lnSpc>
+                <a:spcPct val="128000"/>
+              </a:lnSpc>
+            </a:pPr>
+            <a:r>
+              <a:rPr lang="en-US" sz="975">
+                <a:solidFill>
+                  <a:srgbClr val="D7E3F6"/>
+                </a:solidFill>
+                <a:latin typeface="Consolas"/>
+                <a:ea typeface="Consolas"/>
+              </a:rPr>
+              <a:t>if mask.sum() &gt; max(len(self.xyz) * 0.1, 200_000):</a:t>
+            </a:r>
+            <a:endParaRPr/>
+          </a:p>
+        </p:txBody>
+      </p:sp>
+      <p:sp>
+        <p:nvSpPr>
+          <p:cNvPr id="214" name="" descr="{&quot;isTemplate&quot;:true,&quot;type&quot;:&quot;text&quot;}"/>
+          <p:cNvSpPr txBox="1"/>
+          <p:nvPr/>
+        </p:nvSpPr>
+        <p:spPr>
+          <a:xfrm rot="0" flipH="0" flipV="0">
+            <a:off x="6267450" y="4581525"/>
+            <a:ext cx="5438775" cy="190500"/>
+          </a:xfrm>
+          <a:prstGeom prst="rect"/>
+        </p:spPr>
+        <p:txBody>
+          <a:bodyPr wrap="none" lIns="0" tIns="0" rIns="0" bIns="0"/>
+          <a:p>
+            <a:pPr>
+              <a:lnSpc>
+                <a:spcPct val="128000"/>
+              </a:lnSpc>
+            </a:pPr>
+            <a:r>
+              <a:rPr lang="en-US" sz="975">
+                <a:solidFill>
+                  <a:srgbClr val="D7E3F6"/>
+                </a:solidFill>
+                <a:latin typeface="Consolas"/>
+                <a:ea typeface="Consolas"/>
+              </a:rPr>
+              <a:t xml:space="preserve">    n_merged = self.create_hierarchy_level(cam_centre, mask)</a:t>
+            </a:r>
+            <a:endParaRPr/>
+          </a:p>
+        </p:txBody>
+      </p:sp>
+      <p:sp>
+        <p:nvSpPr>
+          <p:cNvPr id="215" name="" descr="{&quot;isTemplate&quot;:true,&quot;type&quot;:&quot;text&quot;}"/>
+          <p:cNvSpPr txBox="1"/>
+          <p:nvPr/>
+        </p:nvSpPr>
+        <p:spPr>
+          <a:xfrm rot="0" flipH="0" flipV="0">
+            <a:off x="6267450" y="4772025"/>
+            <a:ext cx="5438775" cy="190500"/>
+          </a:xfrm>
+          <a:prstGeom prst="rect"/>
+        </p:spPr>
+        <p:txBody>
+          <a:bodyPr wrap="none" lIns="0" tIns="0" rIns="0" bIns="0"/>
+          <a:p>
+            <a:pPr>
+              <a:lnSpc>
+                <a:spcPct val="128000"/>
+              </a:lnSpc>
+            </a:pPr>
+            <a:r>
+              <a:rPr lang="en-US" sz="975">
+                <a:solidFill>
+                  <a:srgbClr val="D7E3F6"/>
+                </a:solidFill>
+                <a:latin typeface="Consolas"/>
+                <a:ea typeface="Consolas"/>
+              </a:rPr>
+              <a:t xml:space="preserve"># </a:t>
+            </a:r>
+            <a:r>
+              <a:rPr lang="zh-CN" sz="975">
+                <a:solidFill>
+                  <a:srgbClr val="D7E3F6"/>
+                </a:solidFill>
+                <a:latin typeface="Consolas"/>
+                <a:ea typeface="Consolas"/>
+              </a:rPr>
+              <a:t>合并权重</a:t>
+            </a:r>
+            <a:r>
+              <a:rPr lang="en-US" sz="975">
+                <a:solidFill>
+                  <a:srgbClr val="D7E3F6"/>
+                </a:solidFill>
+                <a:latin typeface="Consolas"/>
+                <a:ea typeface="Consolas"/>
+              </a:rPr>
+              <a:t xml:space="preserve"> = opacity * screen_size^2</a:t>
+            </a:r>
+            <a:r>
+              <a:rPr lang="zh-CN" sz="975">
+                <a:solidFill>
+                  <a:srgbClr val="D7E3F6"/>
+                </a:solidFill>
+                <a:latin typeface="Consolas"/>
+                <a:ea typeface="Consolas"/>
+              </a:rPr>
+              <a:t>（非</a:t>
+            </a:r>
+            <a:r>
+              <a:rPr lang="en-US" sz="975">
+                <a:solidFill>
+                  <a:srgbClr val="D7E3F6"/>
+                </a:solidFill>
+                <a:latin typeface="Consolas"/>
+                <a:ea typeface="Consolas"/>
+              </a:rPr>
+              <a:t xml:space="preserve"> KL </a:t>
+            </a:r>
+            <a:r>
+              <a:rPr lang="zh-CN" sz="975">
+                <a:solidFill>
+                  <a:srgbClr val="D7E3F6"/>
+                </a:solidFill>
+                <a:latin typeface="Consolas"/>
+                <a:ea typeface="Consolas"/>
+              </a:rPr>
+              <a:t>投影）</a:t>
+            </a:r>
+            <a:endParaRPr/>
+          </a:p>
+        </p:txBody>
+      </p:sp>
+      <p:sp>
+        <p:nvSpPr>
+          <p:cNvPr id="216" name="" descr="{&quot;isTemplate&quot;:true,&quot;type&quot;:&quot;text&quot;}"/>
+          <p:cNvSpPr txBox="1"/>
+          <p:nvPr/>
+        </p:nvSpPr>
+        <p:spPr>
+          <a:xfrm rot="0" flipH="0" flipV="0">
+            <a:off x="6267450" y="4962525"/>
+            <a:ext cx="5438775" cy="190500"/>
+          </a:xfrm>
+          <a:prstGeom prst="rect"/>
+        </p:spPr>
+        <p:txBody>
+          <a:bodyPr wrap="none" lIns="0" tIns="0" rIns="0" bIns="0"/>
+          <a:p>
+            <a:pPr>
+              <a:lnSpc>
+                <a:spcPct val="128000"/>
+              </a:lnSpc>
+            </a:pPr>
+            <a:r>
+              <a:rPr lang="en-US" sz="975">
+                <a:solidFill>
+                  <a:srgbClr val="D7E3F6"/>
+                </a:solidFill>
+                <a:latin typeface="Consolas"/>
+                <a:ea typeface="Consolas"/>
+              </a:rPr>
+              <a:t>weights = opa.sigmoid() * screen_size[selected] ** 2</a:t>
+            </a:r>
+            <a:endParaRPr/>
+          </a:p>
+        </p:txBody>
+      </p:sp>
+      <p:sp>
+        <p:nvSpPr>
+          <p:cNvPr id="217" name="" descr="{&quot;isTemplate&quot;:true,&quot;type&quot;:&quot;text&quot;}"/>
+          <p:cNvSpPr txBox="1"/>
+          <p:nvPr/>
+        </p:nvSpPr>
+        <p:spPr>
+          <a:xfrm rot="0" flipH="0" flipV="0">
+            <a:off x="381000" y="6048375"/>
+            <a:ext cx="11430000" cy="457200"/>
+          </a:xfrm>
+          <a:prstGeom prst="rect"/>
+        </p:spPr>
+        <p:txBody>
+          <a:bodyPr wrap="square" lIns="0" tIns="0" rIns="0" bIns="0">
+            <a:normAutofit/>
+          </a:bodyPr>
+          <a:p>
+            <a:pPr>
+              <a:lnSpc>
+                <a:spcPct val="140000"/>
+              </a:lnSpc>
+            </a:pPr>
+            <a:r>
+              <a:rPr lang="zh-CN" sz="1050">
+                <a:solidFill>
+                  <a:srgbClr val="8B97A8"/>
+                </a:solidFill>
+                <a:latin typeface="Microsoft YaHei"/>
+                <a:ea typeface="Microsoft YaHei"/>
+              </a:rPr>
+              <a:t>为排版做了换行与变量缩写（</a:t>
+            </a:r>
+            <a:r>
+              <a:rPr lang="en-US" sz="1050">
+                <a:solidFill>
+                  <a:srgbClr val="8B97A8"/>
+                </a:solidFill>
+                <a:latin typeface="Microsoft YaHei"/>
+                <a:ea typeface="Microsoft YaHei"/>
+              </a:rPr>
+              <a:t>w = edge_weight</a:t>
+            </a:r>
+            <a:r>
+              <a:rPr lang="zh-CN" sz="1050">
+                <a:solidFill>
+                  <a:srgbClr val="8B97A8"/>
+                </a:solidFill>
+                <a:latin typeface="Microsoft YaHei"/>
+                <a:ea typeface="Microsoft YaHei"/>
+              </a:rPr>
+              <a:t>），逻辑未改。第</a:t>
+            </a:r>
+            <a:r>
+              <a:rPr lang="en-US" sz="1050">
+                <a:solidFill>
+                  <a:srgbClr val="8B97A8"/>
+                </a:solidFill>
+                <a:latin typeface="Microsoft YaHei"/>
+                <a:ea typeface="Microsoft YaHei"/>
+              </a:rPr>
+              <a:t xml:space="preserve"> 7 </a:t>
+            </a:r>
+            <a:r>
+              <a:rPr lang="zh-CN" sz="1050">
+                <a:solidFill>
+                  <a:srgbClr val="8B97A8"/>
+                </a:solidFill>
+                <a:latin typeface="Microsoft YaHei"/>
+                <a:ea typeface="Microsoft YaHei"/>
+              </a:rPr>
+              <a:t>页按源码默认值修正：回环触发为</a:t>
+            </a:r>
+            <a:r>
+              <a:rPr lang="zh-CN" sz="1050">
+                <a:solidFill>
+                  <a:srgbClr val="8B97A8"/>
+                </a:solidFill>
+                <a:latin typeface="Microsoft YaHei"/>
+                <a:ea typeface="Microsoft YaHei"/>
+              </a:rPr>
+              <a:t>加权图距</a:t>
+            </a:r>
+            <a:r>
+              <a:rPr lang="en-US" sz="1050">
+                <a:solidFill>
+                  <a:srgbClr val="8B97A8"/>
+                </a:solidFill>
+                <a:latin typeface="Microsoft YaHei"/>
+                <a:ea typeface="Microsoft YaHei"/>
+              </a:rPr>
+              <a:t xml:space="preserve"> &gt; 10</a:t>
+            </a:r>
+            <a:r>
+              <a:rPr lang="zh-CN" sz="1050">
+                <a:solidFill>
+                  <a:srgbClr val="8B97A8"/>
+                </a:solidFill>
+                <a:latin typeface="Microsoft YaHei"/>
+                <a:ea typeface="Microsoft YaHei"/>
+              </a:rPr>
+              <a:t>；层级合并触发为</a:t>
+            </a:r>
+            <a:r>
+              <a:rPr lang="zh-CN" sz="1050">
+                <a:solidFill>
+                  <a:srgbClr val="8B97A8"/>
+                </a:solidFill>
+                <a:latin typeface="Microsoft YaHei"/>
+                <a:ea typeface="Microsoft YaHei"/>
+              </a:rPr>
+              <a:t>可并数</a:t>
+            </a:r>
+            <a:r>
+              <a:rPr lang="en-US" sz="1050">
+                <a:solidFill>
+                  <a:srgbClr val="8B97A8"/>
+                </a:solidFill>
+                <a:latin typeface="Microsoft YaHei"/>
+                <a:ea typeface="Microsoft YaHei"/>
+              </a:rPr>
+              <a:t xml:space="preserve"> &gt; max(10%, 20 </a:t>
+            </a:r>
+            <a:r>
+              <a:rPr lang="zh-CN" sz="1050">
+                <a:solidFill>
+                  <a:srgbClr val="8B97A8"/>
+                </a:solidFill>
+                <a:latin typeface="Microsoft YaHei"/>
+                <a:ea typeface="Microsoft YaHei"/>
+              </a:rPr>
+              <a:t>万</a:t>
+            </a:r>
+            <a:r>
+              <a:rPr lang="en-US" sz="1050">
+                <a:solidFill>
+                  <a:srgbClr val="8B97A8"/>
+                </a:solidFill>
+                <a:latin typeface="Microsoft YaHei"/>
+                <a:ea typeface="Microsoft YaHei"/>
+              </a:rPr>
+              <a:t>)</a:t>
+            </a:r>
+            <a:r>
+              <a:rPr lang="zh-CN" sz="1050">
+                <a:solidFill>
+                  <a:srgbClr val="8B97A8"/>
+                </a:solidFill>
+                <a:latin typeface="Microsoft YaHei"/>
+                <a:ea typeface="Microsoft YaHei"/>
+              </a:rPr>
+              <a:t>，且是</a:t>
+            </a:r>
+            <a:r>
+              <a:rPr lang="en-US" sz="1050">
+                <a:solidFill>
+                  <a:srgbClr val="8B97A8"/>
+                </a:solidFill>
+                <a:latin typeface="Microsoft YaHei"/>
+                <a:ea typeface="Microsoft YaHei"/>
+              </a:rPr>
+              <a:t xml:space="preserve"> </a:t>
+            </a:r>
+            <a:r>
+              <a:rPr lang="en-US" sz="1050">
+                <a:solidFill>
+                  <a:srgbClr val="8B97A8"/>
+                </a:solidFill>
+                <a:latin typeface="Microsoft YaHei"/>
+                <a:ea typeface="Microsoft YaHei"/>
+              </a:rPr>
+              <a:t xml:space="preserve">kNN </a:t>
+            </a:r>
+            <a:r>
+              <a:rPr lang="zh-CN" sz="1050">
+                <a:solidFill>
+                  <a:srgbClr val="8B97A8"/>
+                </a:solidFill>
+                <a:latin typeface="Microsoft YaHei"/>
+                <a:ea typeface="Microsoft YaHei"/>
+              </a:rPr>
+              <a:t>加权平均</a:t>
+            </a:r>
+            <a:r>
+              <a:rPr lang="zh-CN" sz="1050">
+                <a:solidFill>
+                  <a:srgbClr val="8B97A8"/>
+                </a:solidFill>
+                <a:latin typeface="Microsoft YaHei"/>
+                <a:ea typeface="Microsoft YaHei"/>
+              </a:rPr>
+              <a:t>而非</a:t>
+            </a:r>
+            <a:r>
+              <a:rPr lang="en-US" sz="1050">
+                <a:solidFill>
+                  <a:srgbClr val="8B97A8"/>
+                </a:solidFill>
+                <a:latin typeface="Microsoft YaHei"/>
+                <a:ea typeface="Microsoft YaHei"/>
+              </a:rPr>
+              <a:t xml:space="preserve"> KL</a:t>
+            </a:r>
+            <a:r>
+              <a:rPr lang="zh-CN" sz="1050">
+                <a:solidFill>
+                  <a:srgbClr val="8B97A8"/>
+                </a:solidFill>
+                <a:latin typeface="Microsoft YaHei"/>
+                <a:ea typeface="Microsoft YaHei"/>
+              </a:rPr>
+              <a:t>。</a:t>
+            </a:r>
+            <a:endParaRPr/>
+          </a:p>
+        </p:txBody>
+      </p:sp>
+    </p:spTree>
+  </p:cSld>
+</p:sld>
+</file>
+
+<file path=ppt/slides/slide2.xml><?xml version="1.0" encoding="utf-8"?>
+<p:sld xmlns:p="http://schemas.openxmlformats.org/presentationml/2006/main" xmlns:a="http://schemas.openxmlformats.org/drawingml/2006/main">
+  <p:cSld>
+    <p:spTree>
+      <p:nvGrpSpPr>
+        <p:cNvPr id="218" name="" descr="&lt;Slide style={{ width: '1280px', height: '720px', backgroundColor: '#FFFFFF', padding: '0px', flexDirection: 'column' }}&gt;&#10;    &lt;Box style={{ width: '1280px', height: '8px', backgroundColor: '#1E4FA8' }} /&gt;&#10;    &lt;Box style={{ padding: '34px 40px 0px 40px', flexDirection: 'row', justifyContent: 'space-between', alignItems: 'flex-end' }}&gt;&#10;        &lt;Text style={{ fontSize: 34, fontWeight: 'bold', color: '#1E4FA8' }}&gt;摘要&lt;/Text&gt;&#10;        &lt;Text style={{ fontSize: 15, color: '#8B97A8' }}&gt;02 / 15&lt;/Text&gt;&#10;    &lt;/Box&gt;&#10;    &lt;Box style={{ padding: '20px 40px 0px 40px', flexDirection: 'column', gap: 13 }}&gt;&#10;        &lt;Box style={{ backgroundColor: '#F0F5FC', borderLeft: '5px solid #1E4FA8', padding: '14px 20px', flexDirection: 'column' }}&gt;&#10;            &lt;Text style={{ fontSize: 22, fontWeight: 'bold', color: '#1E4FA8' }}&gt;问题&lt;/Text&gt;&#10;            &lt;Text style={{ fontSize: 22, color: '#1A2230', lineHeight: 1.5, marginTop: 6 }}&gt;3DGS 重建质量高、可实时渲染，但训练前必须由 SfM（COLMAP）离线解算相机位姿；SfM 要等&lt;b&gt;全部图像到齐&lt;/b&gt;，且对&lt;b&gt;乱序采集&lt;/b&gt;敏感。&lt;/Text&gt;&#10;        &lt;/Box&gt;&#10;        &lt;Box style={{ backgroundColor: '#F7F9FC', borderLeft: '5px solid #4A5568', padding: '14px 20px', flexDirection: 'column' }}&gt;&#10;            &lt;Text style={{ fontSize: 22, fontWeight: 'bold', color: '#4A5568' }}&gt;现状缺口&lt;/Text&gt;&#10;            &lt;Text style={{ fontSize: 22, color: '#1A2230', lineHeight: 1.5, marginTop: 6 }}&gt;离线 SfM + 3DGS 质量好、但慢且无现场反馈；SLAM 类增量重建能实时，却&lt;b&gt;假设图像有序&lt;/b&gt;——两者之间没人补齐。&lt;/Text&gt;&#10;        &lt;/Box&gt;&#10;        &lt;Box style={{ backgroundColor: '#F0F5FC', borderLeft: '5px solid #1E4FA8', padding: '14px 20px', flexDirection: 'column' }}&gt;&#10;            &lt;Text style={{ fontSize: 22, fontWeight: 'bold', color: '#1E4FA8' }}&gt;本文做法&lt;/Text&gt;&#10;            &lt;Text style={{ fontSize: 22, color: '#1A2230', lineHeight: 1.5, marginTop: 6 }}&gt;首个面向无序输入、具备全局一致性的即时反馈 3DGS 重建：两级快速匹配 + GPU 局部 BA + 簇级回环图传播 + 渐进式高斯层级。&lt;/Text&gt;&#10;        &lt;/Box&gt;&#10;        &lt;Box style={{ backgroundColor: '#F7F9FC', borderLeft: '5px solid #3D7BD9', padding: '14px 20px', flexDirection: 'column' }}&gt;&#10;            &lt;Text style={{ fontSize: 22, fontWeight: 'bold', color: '#3D7BD9' }}&gt;结果与复现&lt;/Text&gt;&#10;            &lt;Text style={{ fontSize: 22, color: '#1A2230', lineHeight: 1.5, marginTop: 6 }}&gt;MipNeRF360 上 &lt;b&gt;1 分 17 秒&lt;/b&gt;达到 &lt;b&gt;26.29 dB&lt;/b&gt;（离线参考 8 分 50 秒 / 27.52 dB）；输入打乱仅降 &lt;b&gt;0.5 dB&lt;/b&gt;。我们完成了端到端复现：&lt;b&gt;25.95 dB / 62.7 秒 / 185 帧&lt;/b&gt;。&lt;/Text&gt;&#10;        &lt;/Box&gt;&#10;    &lt;/Box&gt;&#10;    &lt;Box style={{ padding: '16px 40px 0px 40px' }}&gt;&#10;        &lt;Text style={{ fontSize: 16, color: '#4A5568' }}&gt;关键词：三维高斯泼溅 · 无序采集 · 即时重建 · 协视图 · 回环闭合 · 渐进式层级&lt;/Text&gt;&#10;    &lt;/Box&gt;&#10;&lt;/Slide&gt;&#10;"/>
+        <p:cNvGrpSpPr/>
+        <p:nvPr/>
+      </p:nvGrpSpPr>
+      <p:grpSpPr>
+        <a:xfrm>
+          <a:off x="0" y="0"/>
+          <a:ext cx="0" cy="0"/>
+          <a:chOff x="0" y="0"/>
+          <a:chExt cx="0" cy="0"/>
+        </a:xfrm>
+      </p:grpSpPr>
+      <p:sp>
+        <p:nvSpPr>
+          <p:cNvPr id="219" name=""/>
+          <p:cNvSpPr/>
+          <p:nvPr/>
+        </p:nvSpPr>
+        <p:spPr>
+          <a:xfrm rot="0" flipH="0" flipV="0">
+            <a:off x="0" y="0"/>
+            <a:ext cx="12192000" cy="6858000"/>
+          </a:xfrm>
+          <a:prstGeom prst="rect">
+            <a:avLst/>
+          </a:prstGeom>
+          <a:solidFill>
+            <a:srgbClr val="FFFFFF"/>
+          </a:solidFill>
+          <a:ln/>
+        </p:spPr>
+        <p:txBody>
+          <a:bodyPr/>
+          <a:p/>
+        </p:txBody>
+      </p:sp>
+      <p:sp>
+        <p:nvSpPr>
+          <p:cNvPr id="220" name=""/>
+          <p:cNvSpPr/>
+          <p:nvPr/>
+        </p:nvSpPr>
+        <p:spPr>
+          <a:xfrm rot="0" flipH="0" flipV="0">
+            <a:off x="0" y="0"/>
+            <a:ext cx="12192000" cy="76200"/>
+          </a:xfrm>
+          <a:prstGeom prst="rect">
+            <a:avLst/>
+          </a:prstGeom>
+          <a:solidFill>
+            <a:srgbClr val="1E4FA8"/>
+          </a:solidFill>
+          <a:ln/>
+        </p:spPr>
+        <p:txBody>
+          <a:bodyPr/>
+          <a:p/>
+        </p:txBody>
+      </p:sp>
+      <p:sp>
+        <p:nvSpPr>
+          <p:cNvPr id="221" name="" descr="{&quot;isTemplate&quot;:true,&quot;type&quot;:&quot;text&quot;}"/>
+          <p:cNvSpPr txBox="1"/>
+          <p:nvPr/>
+        </p:nvSpPr>
+        <p:spPr>
+          <a:xfrm rot="0" flipH="0" flipV="0">
             <a:off x="381000" y="400050"/>
             <a:ext cx="647700" cy="390525"/>
           </a:xfrm>
@@ -8245,7 +10904,7 @@
       </p:sp>
       <p:sp>
         <p:nvSpPr>
-          <p:cNvPr id="163" name="" descr="{&quot;isTemplate&quot;:true,&quot;type&quot;:&quot;text&quot;}"/>
+          <p:cNvPr id="222" name="" descr="{&quot;isTemplate&quot;:true,&quot;type&quot;:&quot;text&quot;}"/>
           <p:cNvSpPr txBox="1"/>
           <p:nvPr/>
         </p:nvSpPr>
@@ -8272,15 +10931,15 @@
                 <a:latin typeface="Microsoft YaHei"/>
                 <a:ea typeface="Microsoft YaHei"/>
               </a:rPr>
-              <a:t>02 / 14</a:t>
-            </a:r>
-            <a:endParaRPr/>
-          </a:p>
-        </p:txBody>
-      </p:sp>
-      <p:sp>
-        <p:nvSpPr>
-          <p:cNvPr id="164" name=""/>
+              <a:t>02 / 15</a:t>
+            </a:r>
+            <a:endParaRPr/>
+          </a:p>
+        </p:txBody>
+      </p:sp>
+      <p:sp>
+        <p:nvSpPr>
+          <p:cNvPr id="223" name=""/>
           <p:cNvSpPr/>
           <p:nvPr/>
         </p:nvSpPr>
@@ -8304,7 +10963,7 @@
       </p:sp>
       <p:sp>
         <p:nvSpPr>
-          <p:cNvPr id="165" name=""/>
+          <p:cNvPr id="224" name=""/>
           <p:cNvSpPr/>
           <p:nvPr/>
         </p:nvSpPr>
@@ -8344,7 +11003,7 @@
       </p:sp>
       <p:sp>
         <p:nvSpPr>
-          <p:cNvPr id="166" name="" descr="{&quot;isTemplate&quot;:true,&quot;type&quot;:&quot;text&quot;}"/>
+          <p:cNvPr id="225" name="" descr="{&quot;isTemplate&quot;:true,&quot;type&quot;:&quot;text&quot;}"/>
           <p:cNvSpPr txBox="1"/>
           <p:nvPr/>
         </p:nvSpPr>
@@ -8379,7 +11038,7 @@
       </p:sp>
       <p:sp>
         <p:nvSpPr>
-          <p:cNvPr id="167" name="" descr="{&quot;isTemplate&quot;:true,&quot;type&quot;:&quot;text&quot;}"/>
+          <p:cNvPr id="226" name="" descr="{&quot;isTemplate&quot;:true,&quot;type&quot;:&quot;text&quot;}"/>
           <p:cNvSpPr txBox="1"/>
           <p:nvPr/>
         </p:nvSpPr>
@@ -8526,7 +11185,7 @@
       </p:sp>
       <p:sp>
         <p:nvSpPr>
-          <p:cNvPr id="168" name=""/>
+          <p:cNvPr id="227" name=""/>
           <p:cNvSpPr/>
           <p:nvPr/>
         </p:nvSpPr>
@@ -8550,7 +11209,7 @@
       </p:sp>
       <p:sp>
         <p:nvSpPr>
-          <p:cNvPr id="169" name=""/>
+          <p:cNvPr id="228" name=""/>
           <p:cNvSpPr/>
           <p:nvPr/>
         </p:nvSpPr>
@@ -8590,7 +11249,7 @@
       </p:sp>
       <p:sp>
         <p:nvSpPr>
-          <p:cNvPr id="170" name="" descr="{&quot;isTemplate&quot;:true,&quot;type&quot;:&quot;text&quot;}"/>
+          <p:cNvPr id="229" name="" descr="{&quot;isTemplate&quot;:true,&quot;type&quot;:&quot;text&quot;}"/>
           <p:cNvSpPr txBox="1"/>
           <p:nvPr/>
         </p:nvSpPr>
@@ -8625,7 +11284,7 @@
       </p:sp>
       <p:sp>
         <p:nvSpPr>
-          <p:cNvPr id="171" name="" descr="{&quot;isTemplate&quot;:true,&quot;type&quot;:&quot;text&quot;}"/>
+          <p:cNvPr id="230" name="" descr="{&quot;isTemplate&quot;:true,&quot;type&quot;:&quot;text&quot;}"/>
           <p:cNvSpPr txBox="1"/>
           <p:nvPr/>
         </p:nvSpPr>
@@ -8720,7 +11379,7 @@
       </p:sp>
       <p:sp>
         <p:nvSpPr>
-          <p:cNvPr id="172" name=""/>
+          <p:cNvPr id="231" name=""/>
           <p:cNvSpPr/>
           <p:nvPr/>
         </p:nvSpPr>
@@ -8744,7 +11403,7 @@
       </p:sp>
       <p:sp>
         <p:nvSpPr>
-          <p:cNvPr id="173" name=""/>
+          <p:cNvPr id="232" name=""/>
           <p:cNvSpPr/>
           <p:nvPr/>
         </p:nvSpPr>
@@ -8784,7 +11443,7 @@
       </p:sp>
       <p:sp>
         <p:nvSpPr>
-          <p:cNvPr id="174" name="" descr="{&quot;isTemplate&quot;:true,&quot;type&quot;:&quot;text&quot;}"/>
+          <p:cNvPr id="233" name="" descr="{&quot;isTemplate&quot;:true,&quot;type&quot;:&quot;text&quot;}"/>
           <p:cNvSpPr txBox="1"/>
           <p:nvPr/>
         </p:nvSpPr>
@@ -8819,7 +11478,7 @@
       </p:sp>
       <p:sp>
         <p:nvSpPr>
-          <p:cNvPr id="175" name="" descr="{&quot;isTemplate&quot;:true,&quot;type&quot;:&quot;text&quot;}"/>
+          <p:cNvPr id="234" name="" descr="{&quot;isTemplate&quot;:true,&quot;type&quot;:&quot;text&quot;}"/>
           <p:cNvSpPr txBox="1"/>
           <p:nvPr/>
         </p:nvSpPr>
@@ -8936,7 +11595,7 @@
       </p:sp>
       <p:sp>
         <p:nvSpPr>
-          <p:cNvPr id="176" name=""/>
+          <p:cNvPr id="235" name=""/>
           <p:cNvSpPr/>
           <p:nvPr/>
         </p:nvSpPr>
@@ -8960,7 +11619,7 @@
       </p:sp>
       <p:sp>
         <p:nvSpPr>
-          <p:cNvPr id="177" name=""/>
+          <p:cNvPr id="236" name=""/>
           <p:cNvSpPr/>
           <p:nvPr/>
         </p:nvSpPr>
@@ -9000,7 +11659,7 @@
       </p:sp>
       <p:sp>
         <p:nvSpPr>
-          <p:cNvPr id="178" name="" descr="{&quot;isTemplate&quot;:true,&quot;type&quot;:&quot;text&quot;}"/>
+          <p:cNvPr id="237" name="" descr="{&quot;isTemplate&quot;:true,&quot;type&quot;:&quot;text&quot;}"/>
           <p:cNvSpPr txBox="1"/>
           <p:nvPr/>
         </p:nvSpPr>
@@ -9035,7 +11694,7 @@
       </p:sp>
       <p:sp>
         <p:nvSpPr>
-          <p:cNvPr id="179" name="" descr="{&quot;isTemplate&quot;:true,&quot;type&quot;:&quot;text&quot;}"/>
+          <p:cNvPr id="238" name="" descr="{&quot;isTemplate&quot;:true,&quot;type&quot;:&quot;text&quot;}"/>
           <p:cNvSpPr txBox="1"/>
           <p:nvPr/>
         </p:nvSpPr>
@@ -9312,7 +11971,7 @@
       </p:sp>
       <p:sp>
         <p:nvSpPr>
-          <p:cNvPr id="180" name="" descr="{&quot;isTemplate&quot;:true,&quot;type&quot;:&quot;text&quot;}"/>
+          <p:cNvPr id="239" name="" descr="{&quot;isTemplate&quot;:true,&quot;type&quot;:&quot;text&quot;}"/>
           <p:cNvSpPr txBox="1"/>
           <p:nvPr/>
         </p:nvSpPr>
@@ -9455,7 +12114,7 @@
   <p:cSld>
     <p:spTree>
       <p:nvGrpSpPr>
-        <p:cNvPr id="181" name="" descr="&lt;Slide style={{ width: '1280px', height: '720px', backgroundColor: '#FFFFFF', padding: '0px', flexDirection: 'column' }}&gt;&#10;    &lt;Box style={{ width: '1280px', height: '8px', backgroundColor: '#1E4FA8' }} /&gt;&#10;    &lt;Box style={{ padding: '34px 40px 0px 40px', flexDirection: 'row', justifyContent: 'space-between', alignItems: 'flex-end' }}&gt;&#10;        &lt;Text style={{ fontSize: 34, fontWeight: 'bold', color: '#1E4FA8' }}&gt;主要贡献点&lt;/Text&gt;&#10;        &lt;Text style={{ fontSize: 15, color: '#8B97A8' }}&gt;03 / 14&lt;/Text&gt;&#10;    &lt;/Box&gt;&#10;    &lt;Box style={{ padding: '22px 40px 0px 40px', flexDirection: 'row', gap: 20 }}&gt;&#10;        &lt;Box style={{ flex: 1, backgroundColor: '#F7F9FC', border: '1px solid #D6DCE5', borderRadius: 6, padding: '18px 20px', flexDirection: 'column' }}&gt;&#10;            &lt;Box style={{ flexDirection: 'row', alignItems: 'center', gap: 10 }}&gt;&#10;                &lt;Box style={{ width: '34px', height: '34px', backgroundColor: '#1E4FA8', borderRadius: 4, alignItems: 'center', justifyContent: 'center' }}&gt;&#10;                    &lt;Text style={{ fontSize: 20, fontWeight: 'bold', color: '#FFFFFF' }}&gt;1&lt;/Text&gt;&#10;                &lt;/Box&gt;&#10;                &lt;Text style={{ fontSize: 24, fontWeight: 'bold', color: '#1A2230' }}&gt;无序序列快速匹配&lt;/Text&gt;&#10;            &lt;/Box&gt;&#10;            &lt;Text style={{ fontSize: 22, color: '#1A2230', lineHeight: 1.55, marginTop: 12 }}&gt;视觉位置识别 → XFeat 粗筛 → LightGlue 精验，三级把匹配代价从 O(n²) 降到常数级。&lt;/Text&gt;&#10;            &lt;Text style={{ fontSize: 20, color: '#1E4FA8', fontWeight: 'bold', marginTop: 14 }}&gt;配加权协视图 + 高连通关键帧贪心选取&lt;/Text&gt;&#10;        &lt;/Box&gt;&#10;        &lt;Box style={{ flex: 1, backgroundColor: '#F7F9FC', border: '1px solid #D6DCE5', borderRadius: 6, padding: '18px 20px', flexDirection: 'column' }}&gt;&#10;            &lt;Box style={{ flexDirection: 'row', alignItems: 'center', gap: 10 }}&gt;&#10;                &lt;Box style={{ width: '34px', height: '34px', backgroundColor: '#1E4FA8', borderRadius: 4, alignItems: 'center', justifyContent: 'center' }}&gt;&#10;                    &lt;Text style={{ fontSize: 20, fontWeight: 'bold', color: '#FFFFFF' }}&gt;2&lt;/Text&gt;&#10;                &lt;/Box&gt;&#10;                &lt;Text style={{ fontSize: 24, fontWeight: 'bold', color: '#1A2230' }}&gt;GPU 局部重建&lt;/Text&gt;&#10;            &lt;/Box&gt;&#10;            &lt;Text style={{ fontSize: 22, color: '#1A2230', lineHeight: 1.55, marginTop: 12 }}&gt;自写 BA 核函数（稠密 Schur 补），20 关键帧 / 1 万路标点下比现有优化器快约 5 倍。&lt;/Text&gt;&#10;            &lt;Text style={{ fontSize: 20, color: '#1E4FA8', fontWeight: 'bold', marginTop: 14 }}&gt;分块深度对齐，让高斯贴住真实表面&lt;/Text&gt;&#10;        &lt;/Box&gt;&#10;    &lt;/Box&gt;&#10;    &lt;Box style={{ padding: '20px 40px 0px 40px', flexDirection: 'row', gap: 20 }}&gt;&#10;        &lt;Box style={{ flex: 1, backgroundColor: '#F7F9FC', border: '1px solid #D6DCE5', borderRadius: 6, padding: '18px 20px', flexDirection: 'column' }}&gt;&#10;            &lt;Box style={{ flexDirection: 'row', alignItems: 'center', gap: 10 }}&gt;&#10;                &lt;Box style={{ width: '34px', height: '34px', backgroundColor: '#1E4FA8', borderRadius: 4, alignItems: 'center', justifyContent: 'center' }}&gt;&#10;                    &lt;Text style={{ fontSize: 20, fontWeight: 'bold', color: '#FFFFFF' }}&gt;3&lt;/Text&gt;&#10;                &lt;/Box&gt;&#10;                &lt;Text style={{ fontSize: 24, fontWeight: 'bold', color: '#1A2230' }}&gt;簇级回环闭合&lt;/Text&gt;&#10;            &lt;/Box&gt;&#10;            &lt;Text style={{ fontSize: 22, color: '#1A2230', lineHeight: 1.55, marginTop: 12 }}&gt;用协视图&quot;跳数距离&quot;判回环；焊接窗口 BA + Dijkstra 主干路径测地插值，把 Sim(3) 修正传到全图。&lt;/Text&gt;&#10;            &lt;Text style={{ fontSize: 20, color: '#D9534F', fontWeight: 'bold', marginTop: 14 }}&gt;关键：无需第二次全局优化&lt;/Text&gt;&#10;        &lt;/Box&gt;&#10;        &lt;Box style={{ flex: 1, backgroundColor: '#F0F5FC', border: '1px solid #3D7BD9', borderRadius: 6, padding: '18px 20px', flexDirection: 'column' }}&gt;&#10;            &lt;Box style={{ flexDirection: 'row', alignItems: 'center', gap: 10 }}&gt;&#10;                &lt;Box style={{ width: '34px', height: '34px', backgroundColor: '#0E3F8C', borderRadius: 4, alignItems: 'center', justifyContent: 'center' }}&gt;&#10;                    &lt;Text style={{ fontSize: 20, fontWeight: 'bold', color: '#FFFFFF' }}&gt;4&lt;/Text&gt;&#10;                &lt;/Box&gt;&#10;                &lt;Text style={{ fontSize: 24, fontWeight: 'bold', color: '#1A2230' }}&gt;渐进式高斯层级&lt;/Text&gt;&#10;            &lt;/Box&gt;&#10;            &lt;Text style={{ fontSize: 22, color: '#1A2230', lineHeight: 1.55, marginTop: 12 }}&gt;按屏幕尺寸合并 / 回取，叶节点卸载到 CPU；4050 帧大场景显存仍控制在 12.8 GB 内。&lt;/Text&gt;&#10;            &lt;Text style={{ fontSize: 20, color: '#1E4FA8', fontWeight: 'bold', marginTop: 14 }}&gt;峰值高斯 &amp;lt; 370 万，层级达 8 层&lt;/Text&gt;&#10;        &lt;/Box&gt;&#10;    &lt;/Box&gt;&#10;&lt;/Slide&gt;&#10;"/>
+        <p:cNvPr id="240" name="" descr="&lt;Slide style={{ width: '1280px', height: '720px', backgroundColor: '#FFFFFF', padding: '0px', flexDirection: 'column' }}&gt;&#10;    &lt;Box style={{ width: '1280px', height: '8px', backgroundColor: '#1E4FA8' }} /&gt;&#10;    &lt;Box style={{ padding: '34px 40px 0px 40px', flexDirection: 'row', justifyContent: 'space-between', alignItems: 'flex-end' }}&gt;&#10;        &lt;Text style={{ fontSize: 34, fontWeight: 'bold', color: '#1E4FA8' }}&gt;主要贡献点&lt;/Text&gt;&#10;        &lt;Text style={{ fontSize: 15, color: '#8B97A8' }}&gt;03 / 15&lt;/Text&gt;&#10;    &lt;/Box&gt;&#10;    &lt;Box style={{ padding: '22px 40px 0px 40px', flexDirection: 'row', gap: 20 }}&gt;&#10;        &lt;Box style={{ flex: 1, backgroundColor: '#F7F9FC', border: '1px solid #D6DCE5', borderRadius: 6, padding: '18px 20px', flexDirection: 'column' }}&gt;&#10;            &lt;Box style={{ flexDirection: 'row', alignItems: 'center', gap: 10 }}&gt;&#10;                &lt;Box style={{ width: '34px', height: '34px', backgroundColor: '#1E4FA8', borderRadius: 4, alignItems: 'center', justifyContent: 'center' }}&gt;&#10;                    &lt;Text style={{ fontSize: 20, fontWeight: 'bold', color: '#FFFFFF' }}&gt;1&lt;/Text&gt;&#10;                &lt;/Box&gt;&#10;                &lt;Text style={{ fontSize: 24, fontWeight: 'bold', color: '#1A2230' }}&gt;无序序列快速匹配&lt;/Text&gt;&#10;            &lt;/Box&gt;&#10;            &lt;Text style={{ fontSize: 22, color: '#1A2230', lineHeight: 1.55, marginTop: 12 }}&gt;视觉位置识别 → XFeat 粗筛 → LightGlue 精验，三级把匹配代价从 O(n²) 降到常数级。&lt;/Text&gt;&#10;            &lt;Text style={{ fontSize: 20, color: '#1E4FA8', fontWeight: 'bold', marginTop: 14 }}&gt;配加权协视图 + 高连通关键帧贪心选取&lt;/Text&gt;&#10;        &lt;/Box&gt;&#10;        &lt;Box style={{ flex: 1, backgroundColor: '#F7F9FC', border: '1px solid #D6DCE5', borderRadius: 6, padding: '18px 20px', flexDirection: 'column' }}&gt;&#10;            &lt;Box style={{ flexDirection: 'row', alignItems: 'center', gap: 10 }}&gt;&#10;                &lt;Box style={{ width: '34px', height: '34px', backgroundColor: '#1E4FA8', borderRadius: 4, alignItems: 'center', justifyContent: 'center' }}&gt;&#10;                    &lt;Text style={{ fontSize: 20, fontWeight: 'bold', color: '#FFFFFF' }}&gt;2&lt;/Text&gt;&#10;                &lt;/Box&gt;&#10;                &lt;Text style={{ fontSize: 24, fontWeight: 'bold', color: '#1A2230' }}&gt;GPU 局部重建&lt;/Text&gt;&#10;            &lt;/Box&gt;&#10;            &lt;Text style={{ fontSize: 22, color: '#1A2230', lineHeight: 1.55, marginTop: 12 }}&gt;自写 BA 核函数（稠密 Schur 补），20 关键帧 / 1 万路标点下比现有优化器快约 5 倍。&lt;/Text&gt;&#10;            &lt;Text style={{ fontSize: 20, color: '#1E4FA8', fontWeight: 'bold', marginTop: 14 }}&gt;分块深度对齐，让高斯贴住真实表面&lt;/Text&gt;&#10;        &lt;/Box&gt;&#10;    &lt;/Box&gt;&#10;    &lt;Box style={{ padding: '20px 40px 0px 40px', flexDirection: 'row', gap: 20 }}&gt;&#10;        &lt;Box style={{ flex: 1, backgroundColor: '#F7F9FC', border: '1px solid #D6DCE5', borderRadius: 6, padding: '18px 20px', flexDirection: 'column' }}&gt;&#10;            &lt;Box style={{ flexDirection: 'row', alignItems: 'center', gap: 10 }}&gt;&#10;                &lt;Box style={{ width: '34px', height: '34px', backgroundColor: '#1E4FA8', borderRadius: 4, alignItems: 'center', justifyContent: 'center' }}&gt;&#10;                    &lt;Text style={{ fontSize: 20, fontWeight: 'bold', color: '#FFFFFF' }}&gt;3&lt;/Text&gt;&#10;                &lt;/Box&gt;&#10;                &lt;Text style={{ fontSize: 24, fontWeight: 'bold', color: '#1A2230' }}&gt;簇级回环闭合&lt;/Text&gt;&#10;            &lt;/Box&gt;&#10;            &lt;Text style={{ fontSize: 22, color: '#1A2230', lineHeight: 1.55, marginTop: 12 }}&gt;用协视图&quot;跳数距离&quot;判回环；焊接窗口 BA + Dijkstra 主干路径测地插值，把 Sim(3) 修正传到全图。&lt;/Text&gt;&#10;            &lt;Text style={{ fontSize: 20, color: '#D9534F', fontWeight: 'bold', marginTop: 14 }}&gt;关键：无需第二次全局优化&lt;/Text&gt;&#10;        &lt;/Box&gt;&#10;        &lt;Box style={{ flex: 1, backgroundColor: '#F0F5FC', border: '1px solid #3D7BD9', borderRadius: 6, padding: '18px 20px', flexDirection: 'column' }}&gt;&#10;            &lt;Box style={{ flexDirection: 'row', alignItems: 'center', gap: 10 }}&gt;&#10;                &lt;Box style={{ width: '34px', height: '34px', backgroundColor: '#0E3F8C', borderRadius: 4, alignItems: 'center', justifyContent: 'center' }}&gt;&#10;                    &lt;Text style={{ fontSize: 20, fontWeight: 'bold', color: '#FFFFFF' }}&gt;4&lt;/Text&gt;&#10;                &lt;/Box&gt;&#10;                &lt;Text style={{ fontSize: 24, fontWeight: 'bold', color: '#1A2230' }}&gt;渐进式高斯层级&lt;/Text&gt;&#10;            &lt;/Box&gt;&#10;            &lt;Text style={{ fontSize: 22, color: '#1A2230', lineHeight: 1.55, marginTop: 12 }}&gt;按屏幕尺寸合并 / 回取，叶节点卸载到 CPU；4050 帧大场景显存仍控制在 12.8 GB 内。&lt;/Text&gt;&#10;            &lt;Text style={{ fontSize: 20, color: '#1E4FA8', fontWeight: 'bold', marginTop: 14 }}&gt;峰值高斯 &amp;lt; 370 万，层级达 8 层&lt;/Text&gt;&#10;        &lt;/Box&gt;&#10;    &lt;/Box&gt;&#10;&lt;/Slide&gt;&#10;"/>
         <p:cNvGrpSpPr/>
         <p:nvPr/>
       </p:nvGrpSpPr>
@@ -9469,7 +12128,7 @@
       </p:grpSpPr>
       <p:sp>
         <p:nvSpPr>
-          <p:cNvPr id="182" name=""/>
+          <p:cNvPr id="241" name=""/>
           <p:cNvSpPr/>
           <p:nvPr/>
         </p:nvSpPr>
@@ -9493,7 +12152,7 @@
       </p:sp>
       <p:sp>
         <p:nvSpPr>
-          <p:cNvPr id="183" name=""/>
+          <p:cNvPr id="242" name=""/>
           <p:cNvSpPr/>
           <p:nvPr/>
         </p:nvSpPr>
@@ -9517,7 +12176,7 @@
       </p:sp>
       <p:sp>
         <p:nvSpPr>
-          <p:cNvPr id="184" name="" descr="{&quot;isTemplate&quot;:true,&quot;type&quot;:&quot;text&quot;}"/>
+          <p:cNvPr id="243" name="" descr="{&quot;isTemplate&quot;:true,&quot;type&quot;:&quot;text&quot;}"/>
           <p:cNvSpPr txBox="1"/>
           <p:nvPr/>
         </p:nvSpPr>
@@ -9552,7 +12211,7 @@
       </p:sp>
       <p:sp>
         <p:nvSpPr>
-          <p:cNvPr id="185" name="" descr="{&quot;isTemplate&quot;:true,&quot;type&quot;:&quot;text&quot;}"/>
+          <p:cNvPr id="244" name="" descr="{&quot;isTemplate&quot;:true,&quot;type&quot;:&quot;text&quot;}"/>
           <p:cNvSpPr txBox="1"/>
           <p:nvPr/>
         </p:nvSpPr>
@@ -9579,15 +12238,15 @@
                 <a:latin typeface="Microsoft YaHei"/>
                 <a:ea typeface="Microsoft YaHei"/>
               </a:rPr>
-              <a:t>03 / 14</a:t>
-            </a:r>
-            <a:endParaRPr/>
-          </a:p>
-        </p:txBody>
-      </p:sp>
-      <p:sp>
-        <p:nvSpPr>
-          <p:cNvPr id="186" name=""/>
+              <a:t>03 / 15</a:t>
+            </a:r>
+            <a:endParaRPr/>
+          </a:p>
+        </p:txBody>
+      </p:sp>
+      <p:sp>
+        <p:nvSpPr>
+          <p:cNvPr id="245" name=""/>
           <p:cNvSpPr/>
           <p:nvPr/>
         </p:nvSpPr>
@@ -9618,7 +12277,7 @@
       </p:sp>
       <p:sp>
         <p:nvSpPr>
-          <p:cNvPr id="187" name=""/>
+          <p:cNvPr id="246" name=""/>
           <p:cNvSpPr/>
           <p:nvPr/>
         </p:nvSpPr>
@@ -9644,7 +12303,7 @@
       </p:sp>
       <p:sp>
         <p:nvSpPr>
-          <p:cNvPr id="188" name="" descr="{&quot;isTemplate&quot;:true,&quot;type&quot;:&quot;text&quot;}"/>
+          <p:cNvPr id="247" name="" descr="{&quot;isTemplate&quot;:true,&quot;type&quot;:&quot;text&quot;}"/>
           <p:cNvSpPr txBox="1"/>
           <p:nvPr/>
         </p:nvSpPr>
@@ -9679,7 +12338,7 @@
       </p:sp>
       <p:sp>
         <p:nvSpPr>
-          <p:cNvPr id="189" name="" descr="{&quot;isTemplate&quot;:true,&quot;type&quot;:&quot;text&quot;}"/>
+          <p:cNvPr id="248" name="" descr="{&quot;isTemplate&quot;:true,&quot;type&quot;:&quot;text&quot;}"/>
           <p:cNvSpPr txBox="1"/>
           <p:nvPr/>
         </p:nvSpPr>
@@ -9714,7 +12373,7 @@
       </p:sp>
       <p:sp>
         <p:nvSpPr>
-          <p:cNvPr id="190" name="" descr="{&quot;isTemplate&quot;:true,&quot;type&quot;:&quot;text&quot;}"/>
+          <p:cNvPr id="249" name="" descr="{&quot;isTemplate&quot;:true,&quot;type&quot;:&quot;text&quot;}"/>
           <p:cNvSpPr txBox="1"/>
           <p:nvPr/>
         </p:nvSpPr>
@@ -9811,7 +12470,7 @@
       </p:sp>
       <p:sp>
         <p:nvSpPr>
-          <p:cNvPr id="191" name="" descr="{&quot;isTemplate&quot;:true,&quot;type&quot;:&quot;text&quot;}"/>
+          <p:cNvPr id="250" name="" descr="{&quot;isTemplate&quot;:true,&quot;type&quot;:&quot;text&quot;}"/>
           <p:cNvSpPr txBox="1"/>
           <p:nvPr/>
         </p:nvSpPr>
@@ -9866,7 +12525,7 @@
       </p:sp>
       <p:sp>
         <p:nvSpPr>
-          <p:cNvPr id="192" name=""/>
+          <p:cNvPr id="251" name=""/>
           <p:cNvSpPr/>
           <p:nvPr/>
         </p:nvSpPr>
@@ -9897,7 +12556,7 @@
       </p:sp>
       <p:sp>
         <p:nvSpPr>
-          <p:cNvPr id="193" name=""/>
+          <p:cNvPr id="252" name=""/>
           <p:cNvSpPr/>
           <p:nvPr/>
         </p:nvSpPr>
@@ -9923,7 +12582,7 @@
       </p:sp>
       <p:sp>
         <p:nvSpPr>
-          <p:cNvPr id="194" name="" descr="{&quot;isTemplate&quot;:true,&quot;type&quot;:&quot;text&quot;}"/>
+          <p:cNvPr id="253" name="" descr="{&quot;isTemplate&quot;:true,&quot;type&quot;:&quot;text&quot;}"/>
           <p:cNvSpPr txBox="1"/>
           <p:nvPr/>
         </p:nvSpPr>
@@ -9958,7 +12617,7 @@
       </p:sp>
       <p:sp>
         <p:nvSpPr>
-          <p:cNvPr id="195" name="" descr="{&quot;isTemplate&quot;:true,&quot;type&quot;:&quot;text&quot;}"/>
+          <p:cNvPr id="254" name="" descr="{&quot;isTemplate&quot;:true,&quot;type&quot;:&quot;text&quot;}"/>
           <p:cNvSpPr txBox="1"/>
           <p:nvPr/>
         </p:nvSpPr>
@@ -10003,7 +12662,7 @@
       </p:sp>
       <p:sp>
         <p:nvSpPr>
-          <p:cNvPr id="196" name="" descr="{&quot;isTemplate&quot;:true,&quot;type&quot;:&quot;text&quot;}"/>
+          <p:cNvPr id="255" name="" descr="{&quot;isTemplate&quot;:true,&quot;type&quot;:&quot;text&quot;}"/>
           <p:cNvSpPr txBox="1"/>
           <p:nvPr/>
         </p:nvSpPr>
@@ -10140,7 +12799,7 @@
       </p:sp>
       <p:sp>
         <p:nvSpPr>
-          <p:cNvPr id="197" name="" descr="{&quot;isTemplate&quot;:true,&quot;type&quot;:&quot;text&quot;}"/>
+          <p:cNvPr id="256" name="" descr="{&quot;isTemplate&quot;:true,&quot;type&quot;:&quot;text&quot;}"/>
           <p:cNvSpPr txBox="1"/>
           <p:nvPr/>
         </p:nvSpPr>
@@ -10175,7 +12834,7 @@
       </p:sp>
       <p:sp>
         <p:nvSpPr>
-          <p:cNvPr id="198" name=""/>
+          <p:cNvPr id="257" name=""/>
           <p:cNvSpPr/>
           <p:nvPr/>
         </p:nvSpPr>
@@ -10206,7 +12865,7 @@
       </p:sp>
       <p:sp>
         <p:nvSpPr>
-          <p:cNvPr id="199" name=""/>
+          <p:cNvPr id="258" name=""/>
           <p:cNvSpPr/>
           <p:nvPr/>
         </p:nvSpPr>
@@ -10232,7 +12891,7 @@
       </p:sp>
       <p:sp>
         <p:nvSpPr>
-          <p:cNvPr id="200" name="" descr="{&quot;isTemplate&quot;:true,&quot;type&quot;:&quot;text&quot;}"/>
+          <p:cNvPr id="259" name="" descr="{&quot;isTemplate&quot;:true,&quot;type&quot;:&quot;text&quot;}"/>
           <p:cNvSpPr txBox="1"/>
           <p:nvPr/>
         </p:nvSpPr>
@@ -10267,7 +12926,7 @@
       </p:sp>
       <p:sp>
         <p:nvSpPr>
-          <p:cNvPr id="201" name="" descr="{&quot;isTemplate&quot;:true,&quot;type&quot;:&quot;text&quot;}"/>
+          <p:cNvPr id="260" name="" descr="{&quot;isTemplate&quot;:true,&quot;type&quot;:&quot;text&quot;}"/>
           <p:cNvSpPr txBox="1"/>
           <p:nvPr/>
         </p:nvSpPr>
@@ -10302,7 +12961,7 @@
       </p:sp>
       <p:sp>
         <p:nvSpPr>
-          <p:cNvPr id="202" name="" descr="{&quot;isTemplate&quot;:true,&quot;type&quot;:&quot;text&quot;}"/>
+          <p:cNvPr id="261" name="" descr="{&quot;isTemplate&quot;:true,&quot;type&quot;:&quot;text&quot;}"/>
           <p:cNvSpPr txBox="1"/>
           <p:nvPr/>
         </p:nvSpPr>
@@ -10419,7 +13078,7 @@
       </p:sp>
       <p:sp>
         <p:nvSpPr>
-          <p:cNvPr id="203" name="" descr="{&quot;isTemplate&quot;:true,&quot;type&quot;:&quot;text&quot;}"/>
+          <p:cNvPr id="262" name="" descr="{&quot;isTemplate&quot;:true,&quot;type&quot;:&quot;text&quot;}"/>
           <p:cNvSpPr txBox="1"/>
           <p:nvPr/>
         </p:nvSpPr>
@@ -10454,7 +13113,7 @@
       </p:sp>
       <p:sp>
         <p:nvSpPr>
-          <p:cNvPr id="204" name=""/>
+          <p:cNvPr id="263" name=""/>
           <p:cNvSpPr/>
           <p:nvPr/>
         </p:nvSpPr>
@@ -10485,7 +13144,7 @@
       </p:sp>
       <p:sp>
         <p:nvSpPr>
-          <p:cNvPr id="205" name=""/>
+          <p:cNvPr id="264" name=""/>
           <p:cNvSpPr/>
           <p:nvPr/>
         </p:nvSpPr>
@@ -10511,7 +13170,7 @@
       </p:sp>
       <p:sp>
         <p:nvSpPr>
-          <p:cNvPr id="206" name="" descr="{&quot;isTemplate&quot;:true,&quot;type&quot;:&quot;text&quot;}"/>
+          <p:cNvPr id="265" name="" descr="{&quot;isTemplate&quot;:true,&quot;type&quot;:&quot;text&quot;}"/>
           <p:cNvSpPr txBox="1"/>
           <p:nvPr/>
         </p:nvSpPr>
@@ -10546,7 +13205,7 @@
       </p:sp>
       <p:sp>
         <p:nvSpPr>
-          <p:cNvPr id="207" name="" descr="{&quot;isTemplate&quot;:true,&quot;type&quot;:&quot;text&quot;}"/>
+          <p:cNvPr id="266" name="" descr="{&quot;isTemplate&quot;:true,&quot;type&quot;:&quot;text&quot;}"/>
           <p:cNvSpPr txBox="1"/>
           <p:nvPr/>
         </p:nvSpPr>
@@ -10581,7 +13240,7 @@
       </p:sp>
       <p:sp>
         <p:nvSpPr>
-          <p:cNvPr id="208" name="" descr="{&quot;isTemplate&quot;:true,&quot;type&quot;:&quot;text&quot;}"/>
+          <p:cNvPr id="267" name="" descr="{&quot;isTemplate&quot;:true,&quot;type&quot;:&quot;text&quot;}"/>
           <p:cNvSpPr txBox="1"/>
           <p:nvPr/>
         </p:nvSpPr>
@@ -10698,7 +13357,7 @@
       </p:sp>
       <p:sp>
         <p:nvSpPr>
-          <p:cNvPr id="209" name="" descr="{&quot;isTemplate&quot;:true,&quot;type&quot;:&quot;text&quot;}"/>
+          <p:cNvPr id="268" name="" descr="{&quot;isTemplate&quot;:true,&quot;type&quot;:&quot;text&quot;}"/>
           <p:cNvSpPr txBox="1"/>
           <p:nvPr/>
         </p:nvSpPr>
@@ -10781,7 +13440,7 @@
   <p:cSld>
     <p:spTree>
       <p:nvGrpSpPr>
-        <p:cNvPr id="210" name="" descr="&lt;Slide style={{ width: '1280px', height: '720px', backgroundColor: '#FFFFFF', padding: '0px', flexDirection: 'column' }}&gt;&#10;    &lt;Box style={{ width: '1280px', height: '8px', backgroundColor: '#1E4FA8' }} /&gt;&#10;    &lt;Box style={{ padding: '30px 40px 0px 40px', flexDirection: 'row', justifyContent: 'space-between', alignItems: 'flex-end' }}&gt;&#10;        &lt;Text style={{ fontSize: 34, fontWeight: 'bold', color: '#1E4FA8' }}&gt;研究背景：两条路线，各自卡在一个前提上&lt;/Text&gt;&#10;        &lt;Text style={{ fontSize: 15, color: '#8B97A8' }}&gt;04 / 14&lt;/Text&gt;&#10;    &lt;/Box&gt;&#10;    &lt;Box style={{ padding: '16px 40px 0px 40px' }}&gt;&#10;        &lt;Text style={{ fontSize: 21, color: '#4A5568', lineHeight: 1.5 }}&gt;拿到&quot;一组照片 → 一个可漫游的 3D 场景&quot;，过去只有两条路可走。它们的分歧不在算法细节，而在&lt;b&gt;什么时候允许开始计算&lt;/b&gt;。&lt;/Text&gt;&#10;    &lt;/Box&gt;&#10;    &lt;Box style={{ padding: '16px 40px 0px 40px', flexDirection: 'row', gap: 24 }}&gt;&#10;        &lt;Box style={{ flex: 1, backgroundColor: '#F7F9FC', border: '1px solid #D6DCE5', borderRadius: 6, padding: '16px 20px', flexDirection: 'column' }}&gt;&#10;            &lt;Text style={{ fontSize: 26, fontWeight: 'bold', color: '#1A2230' }}&gt;路线一　离线 SfM + 3DGS&lt;/Text&gt;&#10;            &lt;Text style={{ fontSize: 19, color: '#4A5568', marginTop: 6 }}&gt;COLMAP / GLOMAP + 3DGS、H3DGS、Octree-GS&lt;/Text&gt;&#10;            &lt;Text style={{ fontSize: 21, color: '#1A2230', lineHeight: 1.55, marginTop: 12 }}&gt;先把所有照片两两匹配、三角化、全局 BA 解出位姿，再训练高斯。质量最高、全局一致，但&lt;b&gt;必须等图全部到齐&lt;/b&gt;，耗时从分钟到小时。&lt;/Text&gt;&#10;            &lt;Text style={{ fontSize: 21, color: '#1E4FA8', fontWeight: 'bold', marginTop: 12 }}&gt;前提：先有完整的照片集合&lt;/Text&gt;&#10;            &lt;Text style={{ fontSize: 21, color: '#D9534F', fontWeight: 'bold', marginTop: 4 }}&gt;代价：现场给不出任何反馈&lt;/Text&gt;&#10;        &lt;/Box&gt;&#10;        &lt;Box style={{ flex: 1, backgroundColor: '#F0F5FC', border: '1px solid #3D7BD9', borderRadius: 6, padding: '16px 20px', flexDirection: 'column' }}&gt;&#10;            &lt;Text style={{ fontSize: 26, fontWeight: 'bold', color: '#1A2230' }}&gt;路线二　增量 / 类 SLAM&lt;/Text&gt;&#10;            &lt;Text style={{ fontSize: 19, color: '#4A5568', marginTop: 6 }}&gt;Photo-SLAM、MonoGS、DROID-Splat、LongSplat&lt;/Text&gt;&#10;            &lt;Text style={{ fontSize: 21, color: '#1A2230', lineHeight: 1.55, marginTop: 12 }}&gt;边收边建、可交互。但新帧只与&lt;b&gt;时间上相邻&lt;/b&gt;的少数帧匹配（通常 5 帧窗口），一旦转身回访、或把两段序列拼起来，匹配就断了。&lt;/Text&gt;&#10;            &lt;Text style={{ fontSize: 21, color: '#1E4FA8', fontWeight: 'bold', marginTop: 12 }}&gt;前提：输入必须是连续视频&lt;/Text&gt;&#10;            &lt;Text style={{ fontSize: 21, color: '#D9534F', fontWeight: 'bold', marginTop: 4 }}&gt;代价：离开时间邻域就失效&lt;/Text&gt;&#10;        &lt;/Box&gt;&#10;    &lt;/Box&gt;&#10;    &lt;Box style={{ margin: '20px 40px 0px 40px', backgroundColor: '#1E4FA8', borderRadius: 6, padding: '16px 24px' }}&gt;&#10;        &lt;Text style={{ fontSize: 24, fontWeight: 'bold', color: '#FFFFFF', lineHeight: 1.5 }}&gt;两条路的前提是同一个东西：&lt;b&gt;帧序&lt;/b&gt;。一条等它全部确定，一条假设它天然有序——而真实拍摄两样都不满足。&lt;/Text&gt;&#10;    &lt;/Box&gt;&#10;    &lt;Box style={{ padding: '12px 40px 0px 40px' }}&gt;&#10;        &lt;Text style={{ fontSize: 17, color: '#8B97A8' }}&gt;真实采集几乎总是无序的：绕行、转身、回头补拍角落，覆盖更好，但让匹配与全局优化的代价陡增。&lt;/Text&gt;&#10;    &lt;/Box&gt;&#10;&lt;/Slide&gt;&#10;"/>
+        <p:cNvPr id="269" name="" descr="&lt;Slide style={{ width: '1280px', height: '720px', backgroundColor: '#FFFFFF', padding: '0px', flexDirection: 'column' }}&gt;&#10;    &lt;Box style={{ width: '1280px', height: '8px', backgroundColor: '#1E4FA8' }} /&gt;&#10;    &lt;Box style={{ padding: '30px 40px 0px 40px', flexDirection: 'row', justifyContent: 'space-between', alignItems: 'flex-end' }}&gt;&#10;        &lt;Text style={{ fontSize: 34, fontWeight: 'bold', color: '#1E4FA8' }}&gt;研究背景：两条路线，各自卡在一个前提上&lt;/Text&gt;&#10;        &lt;Text style={{ fontSize: 15, color: '#8B97A8' }}&gt;04 / 15&lt;/Text&gt;&#10;    &lt;/Box&gt;&#10;    &lt;Box style={{ padding: '16px 40px 0px 40px' }}&gt;&#10;        &lt;Text style={{ fontSize: 21, color: '#4A5568', lineHeight: 1.5 }}&gt;拿到&quot;一组照片 → 一个可漫游的 3D 场景&quot;，过去只有两条路可走。它们的分歧不在算法细节，而在&lt;b&gt;什么时候允许开始计算&lt;/b&gt;。&lt;/Text&gt;&#10;    &lt;/Box&gt;&#10;    &lt;Box style={{ padding: '16px 40px 0px 40px', flexDirection: 'row', gap: 24 }}&gt;&#10;        &lt;Box style={{ flex: 1, backgroundColor: '#F7F9FC', border: '1px solid #D6DCE5', borderRadius: 6, padding: '16px 20px', flexDirection: 'column' }}&gt;&#10;            &lt;Text style={{ fontSize: 26, fontWeight: 'bold', color: '#1A2230' }}&gt;路线一　离线 SfM + 3DGS&lt;/Text&gt;&#10;            &lt;Text style={{ fontSize: 19, color: '#4A5568', marginTop: 6 }}&gt;COLMAP / GLOMAP + 3DGS、H3DGS、Octree-GS&lt;/Text&gt;&#10;            &lt;Text style={{ fontSize: 21, color: '#1A2230', lineHeight: 1.55, marginTop: 12 }}&gt;先把所有照片两两匹配、三角化、全局 BA 解出位姿，再训练高斯。质量最高、全局一致，但&lt;b&gt;必须等图全部到齐&lt;/b&gt;，耗时从分钟到小时。&lt;/Text&gt;&#10;            &lt;Text style={{ fontSize: 21, color: '#1E4FA8', fontWeight: 'bold', marginTop: 12 }}&gt;前提：先有完整的照片集合&lt;/Text&gt;&#10;            &lt;Text style={{ fontSize: 21, color: '#D9534F', fontWeight: 'bold', marginTop: 4 }}&gt;代价：现场给不出任何反馈&lt;/Text&gt;&#10;        &lt;/Box&gt;&#10;        &lt;Box style={{ flex: 1, backgroundColor: '#F0F5FC', border: '1px solid #3D7BD9', borderRadius: 6, padding: '16px 20px', flexDirection: 'column' }}&gt;&#10;            &lt;Text style={{ fontSize: 26, fontWeight: 'bold', color: '#1A2230' }}&gt;路线二　增量 / 类 SLAM&lt;/Text&gt;&#10;            &lt;Text style={{ fontSize: 19, color: '#4A5568', marginTop: 6 }}&gt;Photo-SLAM、MonoGS、DROID-Splat、LongSplat&lt;/Text&gt;&#10;            &lt;Text style={{ fontSize: 21, color: '#1A2230', lineHeight: 1.55, marginTop: 12 }}&gt;边收边建、可交互。但新帧只与&lt;b&gt;时间上相邻&lt;/b&gt;的少数帧匹配（通常 5 帧窗口），一旦转身回访、或把两段序列拼起来，匹配就断了。&lt;/Text&gt;&#10;            &lt;Text style={{ fontSize: 21, color: '#1E4FA8', fontWeight: 'bold', marginTop: 12 }}&gt;前提：输入必须是连续视频&lt;/Text&gt;&#10;            &lt;Text style={{ fontSize: 21, color: '#D9534F', fontWeight: 'bold', marginTop: 4 }}&gt;代价：离开时间邻域就失效&lt;/Text&gt;&#10;        &lt;/Box&gt;&#10;    &lt;/Box&gt;&#10;    &lt;Box style={{ margin: '20px 40px 0px 40px', backgroundColor: '#1E4FA8', borderRadius: 6, padding: '16px 24px' }}&gt;&#10;        &lt;Text style={{ fontSize: 24, fontWeight: 'bold', color: '#FFFFFF', lineHeight: 1.5 }}&gt;两条路的前提是同一个东西：&lt;b&gt;帧序&lt;/b&gt;。一条等它全部确定，一条假设它天然有序——而真实拍摄两样都不满足。&lt;/Text&gt;&#10;    &lt;/Box&gt;&#10;    &lt;Box style={{ padding: '12px 40px 0px 40px' }}&gt;&#10;        &lt;Text style={{ fontSize: 17, color: '#8B97A8' }}&gt;真实采集几乎总是无序的：绕行、转身、回头补拍角落，覆盖更好，但让匹配与全局优化的代价陡增。&lt;/Text&gt;&#10;    &lt;/Box&gt;&#10;&lt;/Slide&gt;&#10;"/>
         <p:cNvGrpSpPr/>
         <p:nvPr/>
       </p:nvGrpSpPr>
@@ -10795,7 +13454,7 @@
       </p:grpSpPr>
       <p:sp>
         <p:nvSpPr>
-          <p:cNvPr id="211" name=""/>
+          <p:cNvPr id="270" name=""/>
           <p:cNvSpPr/>
           <p:nvPr/>
         </p:nvSpPr>
@@ -10819,7 +13478,7 @@
       </p:sp>
       <p:sp>
         <p:nvSpPr>
-          <p:cNvPr id="212" name=""/>
+          <p:cNvPr id="271" name=""/>
           <p:cNvSpPr/>
           <p:nvPr/>
         </p:nvSpPr>
@@ -10843,7 +13502,7 @@
       </p:sp>
       <p:sp>
         <p:nvSpPr>
-          <p:cNvPr id="213" name="" descr="{&quot;isTemplate&quot;:true,&quot;type&quot;:&quot;text&quot;}"/>
+          <p:cNvPr id="272" name="" descr="{&quot;isTemplate&quot;:true,&quot;type&quot;:&quot;text&quot;}"/>
           <p:cNvSpPr txBox="1"/>
           <p:nvPr/>
         </p:nvSpPr>
@@ -10878,7 +13537,7 @@
       </p:sp>
       <p:sp>
         <p:nvSpPr>
-          <p:cNvPr id="214" name="" descr="{&quot;isTemplate&quot;:true,&quot;type&quot;:&quot;text&quot;}"/>
+          <p:cNvPr id="273" name="" descr="{&quot;isTemplate&quot;:true,&quot;type&quot;:&quot;text&quot;}"/>
           <p:cNvSpPr txBox="1"/>
           <p:nvPr/>
         </p:nvSpPr>
@@ -10905,15 +13564,15 @@
                 <a:latin typeface="Microsoft YaHei"/>
                 <a:ea typeface="Microsoft YaHei"/>
               </a:rPr>
-              <a:t>04 / 14</a:t>
-            </a:r>
-            <a:endParaRPr/>
-          </a:p>
-        </p:txBody>
-      </p:sp>
-      <p:sp>
-        <p:nvSpPr>
-          <p:cNvPr id="215" name="" descr="{&quot;isTemplate&quot;:true,&quot;type&quot;:&quot;text&quot;}"/>
+              <a:t>04 / 15</a:t>
+            </a:r>
+            <a:endParaRPr/>
+          </a:p>
+        </p:txBody>
+      </p:sp>
+      <p:sp>
+        <p:nvSpPr>
+          <p:cNvPr id="274" name="" descr="{&quot;isTemplate&quot;:true,&quot;type&quot;:&quot;text&quot;}"/>
           <p:cNvSpPr txBox="1"/>
           <p:nvPr/>
         </p:nvSpPr>
@@ -11048,7 +13707,7 @@
       </p:sp>
       <p:sp>
         <p:nvSpPr>
-          <p:cNvPr id="216" name=""/>
+          <p:cNvPr id="275" name=""/>
           <p:cNvSpPr/>
           <p:nvPr/>
         </p:nvSpPr>
@@ -11079,7 +13738,7 @@
       </p:sp>
       <p:sp>
         <p:nvSpPr>
-          <p:cNvPr id="217" name="" descr="{&quot;isTemplate&quot;:true,&quot;type&quot;:&quot;text&quot;}"/>
+          <p:cNvPr id="276" name="" descr="{&quot;isTemplate&quot;:true,&quot;type&quot;:&quot;text&quot;}"/>
           <p:cNvSpPr txBox="1"/>
           <p:nvPr/>
         </p:nvSpPr>
@@ -11124,7 +13783,7 @@
       </p:sp>
       <p:sp>
         <p:nvSpPr>
-          <p:cNvPr id="218" name="" descr="{&quot;isTemplate&quot;:true,&quot;type&quot;:&quot;text&quot;}"/>
+          <p:cNvPr id="277" name="" descr="{&quot;isTemplate&quot;:true,&quot;type&quot;:&quot;text&quot;}"/>
           <p:cNvSpPr txBox="1"/>
           <p:nvPr/>
         </p:nvSpPr>
@@ -11199,7 +13858,7 @@
       </p:sp>
       <p:sp>
         <p:nvSpPr>
-          <p:cNvPr id="219" name="" descr="{&quot;isTemplate&quot;:true,&quot;type&quot;:&quot;text&quot;}"/>
+          <p:cNvPr id="278" name="" descr="{&quot;isTemplate&quot;:true,&quot;type&quot;:&quot;text&quot;}"/>
           <p:cNvSpPr txBox="1"/>
           <p:nvPr/>
         </p:nvSpPr>
@@ -11276,7 +13935,7 @@
       </p:sp>
       <p:sp>
         <p:nvSpPr>
-          <p:cNvPr id="220" name="" descr="{&quot;isTemplate&quot;:true,&quot;type&quot;:&quot;text&quot;}"/>
+          <p:cNvPr id="279" name="" descr="{&quot;isTemplate&quot;:true,&quot;type&quot;:&quot;text&quot;}"/>
           <p:cNvSpPr txBox="1"/>
           <p:nvPr/>
         </p:nvSpPr>
@@ -11311,7 +13970,7 @@
       </p:sp>
       <p:sp>
         <p:nvSpPr>
-          <p:cNvPr id="221" name="" descr="{&quot;isTemplate&quot;:true,&quot;type&quot;:&quot;text&quot;}"/>
+          <p:cNvPr id="280" name="" descr="{&quot;isTemplate&quot;:true,&quot;type&quot;:&quot;text&quot;}"/>
           <p:cNvSpPr txBox="1"/>
           <p:nvPr/>
         </p:nvSpPr>
@@ -11346,7 +14005,7 @@
       </p:sp>
       <p:sp>
         <p:nvSpPr>
-          <p:cNvPr id="222" name=""/>
+          <p:cNvPr id="281" name=""/>
           <p:cNvSpPr/>
           <p:nvPr/>
         </p:nvSpPr>
@@ -11377,7 +14036,7 @@
       </p:sp>
       <p:sp>
         <p:nvSpPr>
-          <p:cNvPr id="223" name="" descr="{&quot;isTemplate&quot;:true,&quot;type&quot;:&quot;text&quot;}"/>
+          <p:cNvPr id="282" name="" descr="{&quot;isTemplate&quot;:true,&quot;type&quot;:&quot;text&quot;}"/>
           <p:cNvSpPr txBox="1"/>
           <p:nvPr/>
         </p:nvSpPr>
@@ -11442,7 +14101,7 @@
       </p:sp>
       <p:sp>
         <p:nvSpPr>
-          <p:cNvPr id="224" name="" descr="{&quot;isTemplate&quot;:true,&quot;type&quot;:&quot;text&quot;}"/>
+          <p:cNvPr id="283" name="" descr="{&quot;isTemplate&quot;:true,&quot;type&quot;:&quot;text&quot;}"/>
           <p:cNvSpPr txBox="1"/>
           <p:nvPr/>
         </p:nvSpPr>
@@ -11537,7 +14196,7 @@
       </p:sp>
       <p:sp>
         <p:nvSpPr>
-          <p:cNvPr id="225" name="" descr="{&quot;isTemplate&quot;:true,&quot;type&quot;:&quot;text&quot;}"/>
+          <p:cNvPr id="284" name="" descr="{&quot;isTemplate&quot;:true,&quot;type&quot;:&quot;text&quot;}"/>
           <p:cNvSpPr txBox="1"/>
           <p:nvPr/>
         </p:nvSpPr>
@@ -11614,7 +14273,7 @@
       </p:sp>
       <p:sp>
         <p:nvSpPr>
-          <p:cNvPr id="226" name="" descr="{&quot;isTemplate&quot;:true,&quot;type&quot;:&quot;text&quot;}"/>
+          <p:cNvPr id="285" name="" descr="{&quot;isTemplate&quot;:true,&quot;type&quot;:&quot;text&quot;}"/>
           <p:cNvSpPr txBox="1"/>
           <p:nvPr/>
         </p:nvSpPr>
@@ -11649,7 +14308,7 @@
       </p:sp>
       <p:sp>
         <p:nvSpPr>
-          <p:cNvPr id="227" name="" descr="{&quot;isTemplate&quot;:true,&quot;type&quot;:&quot;text&quot;}"/>
+          <p:cNvPr id="286" name="" descr="{&quot;isTemplate&quot;:true,&quot;type&quot;:&quot;text&quot;}"/>
           <p:cNvSpPr txBox="1"/>
           <p:nvPr/>
         </p:nvSpPr>
@@ -11684,7 +14343,7 @@
       </p:sp>
       <p:sp>
         <p:nvSpPr>
-          <p:cNvPr id="228" name=""/>
+          <p:cNvPr id="287" name=""/>
           <p:cNvSpPr/>
           <p:nvPr/>
         </p:nvSpPr>
@@ -11710,7 +14369,7 @@
       </p:sp>
       <p:sp>
         <p:nvSpPr>
-          <p:cNvPr id="229" name="" descr="{&quot;isTemplate&quot;:true,&quot;type&quot;:&quot;text&quot;}"/>
+          <p:cNvPr id="288" name="" descr="{&quot;isTemplate&quot;:true,&quot;type&quot;:&quot;text&quot;}"/>
           <p:cNvSpPr txBox="1"/>
           <p:nvPr/>
         </p:nvSpPr>
@@ -11767,7 +14426,7 @@
       </p:sp>
       <p:sp>
         <p:nvSpPr>
-          <p:cNvPr id="230" name="" descr="{&quot;isTemplate&quot;:true,&quot;type&quot;:&quot;text&quot;}"/>
+          <p:cNvPr id="289" name="" descr="{&quot;isTemplate&quot;:true,&quot;type&quot;:&quot;text&quot;}"/>
           <p:cNvSpPr txBox="1"/>
           <p:nvPr/>
         </p:nvSpPr>
@@ -11810,7 +14469,7 @@
   <p:cSld>
     <p:spTree>
       <p:nvGrpSpPr>
-        <p:cNvPr id="231" name="" descr="&lt;Slide style={{ width: '1280px', height: '720px', backgroundColor: '#FFFFFF', padding: '0px', flexDirection: 'column' }}&gt;&#10;    &lt;Box style={{ width: '1280px', height: '8px', backgroundColor: '#1E4FA8' }} /&gt;&#10;    &lt;Box style={{ padding: '30px 40px 0px 40px', flexDirection: 'row', justifyContent: 'space-between', alignItems: 'flex-end' }}&gt;&#10;        &lt;Text style={{ fontSize: 34, fontWeight: 'bold', color: '#1E4FA8' }}&gt;过去遇到的问题：等、乱、漂、爆&lt;/Text&gt;&#10;        &lt;Text style={{ fontSize: 15, color: '#8B97A8' }}&gt;05 / 14&lt;/Text&gt;&#10;    &lt;/Box&gt;&#10;    &lt;Box style={{ padding: '16px 40px 0px 40px' }}&gt;&#10;        &lt;Text style={{ fontSize: 21, color: '#4A5568', lineHeight: 1.5 }}&gt;如果拿手机去拍一个房间，这四件事几乎一定会遇到——它们不是算法&quot;不够准&quot;，而是&lt;b&gt;流程本身没有为现场反馈设计&lt;/b&gt;。&lt;/Text&gt;&#10;    &lt;/Box&gt;&#10;    &lt;Box style={{ padding: '16px 40px 0px 40px', flexDirection: 'row', gap: 20 }}&gt;&#10;        &lt;Box style={{ flex: 1, backgroundColor: '#F7F9FC', border: '1px solid #D6DCE5', borderRadius: 6, padding: '14px 18px', flexDirection: 'column' }}&gt;&#10;            &lt;Box style={{ flexDirection: 'row', alignItems: 'center', gap: 10 }}&gt;&#10;                &lt;Box style={{ width: '32px', height: '32px', backgroundColor: '#1E4FA8', borderRadius: 4, alignItems: 'center', justifyContent: 'center' }}&gt;&#10;                    &lt;Text style={{ fontSize: 19, fontWeight: 'bold', color: '#FFFFFF' }}&gt;1&lt;/Text&gt;&#10;                &lt;/Box&gt;&#10;                &lt;Text style={{ fontSize: 24, fontWeight: 'bold', color: '#1A2230' }}&gt;等：必须等图到齐&lt;/Text&gt;&#10;            &lt;/Box&gt;&#10;            &lt;Text style={{ fontSize: 20, color: '#1A2230', lineHeight: 1.5, marginTop: 10 }}&gt;离线流程要求全部图像就位才能开算。现场拍完不知道行不行，回家发现漏拍，只能整组重拍。&lt;/Text&gt;&#10;            &lt;Text style={{ fontSize: 19, color: '#D9534F', fontWeight: 'bold', marginTop: 10 }}&gt;返工成本最高&lt;/Text&gt;&#10;        &lt;/Box&gt;&#10;        &lt;Box style={{ flex: 1, backgroundColor: '#F7F9FC', border: '1px solid #D6DCE5', borderRadius: 6, padding: '14px 18px', flexDirection: 'column' }}&gt;&#10;            &lt;Box style={{ flexDirection: 'row', alignItems: 'center', gap: 10 }}&gt;&#10;                &lt;Box style={{ width: '32px', height: '32px', backgroundColor: '#1E4FA8', borderRadius: 4, alignItems: 'center', justifyContent: 'center' }}&gt;&#10;                    &lt;Text style={{ fontSize: 19, fontWeight: 'bold', color: '#FFFFFF' }}&gt;2&lt;/Text&gt;&#10;                &lt;/Box&gt;&#10;                &lt;Text style={{ fontSize: 24, fontWeight: 'bold', color: '#1A2230' }}&gt;乱：顺序不能用了&lt;/Text&gt;&#10;            &lt;/Box&gt;&#10;            &lt;Text style={{ fontSize: 20, color: '#1A2230', lineHeight: 1.5, marginTop: 10 }}&gt;随手拍的顺序与空间邻接无关，没法只比相邻帧，只能两两匹配：1000 张约 50 万对，耗时陡增。&lt;/Text&gt;&#10;            &lt;Text style={{ fontSize: 19, color: '#D9534F', fontWeight: 'bold', marginTop: 10 }}&gt;SfM 从分钟变小时&lt;/Text&gt;&#10;        &lt;/Box&gt;&#10;    &lt;/Box&gt;&#10;    &lt;Box style={{ padding: '14px 40px 0px 40px', flexDirection: 'row', gap: 20 }}&gt;&#10;        &lt;Box style={{ flex: 1, backgroundColor: '#F7F9FC', border: '1px solid #D6DCE5', borderRadius: 6, padding: '14px 18px', flexDirection: 'column' }}&gt;&#10;            &lt;Box style={{ flexDirection: 'row', alignItems: 'center', gap: 10 }}&gt;&#10;                &lt;Box style={{ width: '32px', height: '32px', backgroundColor: '#1E4FA8', borderRadius: 4, alignItems: 'center', justifyContent: 'center' }}&gt;&#10;                    &lt;Text style={{ fontSize: 19, fontWeight: 'bold', color: '#FFFFFF' }}&gt;3&lt;/Text&gt;&#10;                &lt;/Box&gt;&#10;                &lt;Text style={{ fontSize: 24, fontWeight: 'bold', color: '#1A2230' }}&gt;漂：回访时接不上&lt;/Text&gt;&#10;            &lt;/Box&gt;&#10;            &lt;Text style={{ fontSize: 20, color: '#1A2230', lineHeight: 1.5, marginTop: 10 }}&gt;边走边建误差累积，绕一圈回来发现首尾差半米。传统做法重跑一次全局 BA，几分钟起步。&lt;/Text&gt;&#10;            &lt;Text style={{ fontSize: 19, color: '#D9534F', fontWeight: 'bold', marginTop: 10 }}&gt;实时性当场归零&lt;/Text&gt;&#10;        &lt;/Box&gt;&#10;        &lt;Box style={{ flex: 1, backgroundColor: '#F7F9FC', border: '1px solid #D6DCE5', borderRadius: 6, padding: '14px 18px', flexDirection: 'column' }}&gt;&#10;            &lt;Box style={{ flexDirection: 'row', alignItems: 'center', gap: 10 }}&gt;&#10;                &lt;Box style={{ width: '32px', height: '32px', backgroundColor: '#1E4FA8', borderRadius: 4, alignItems: 'center', justifyContent: 'center' }}&gt;&#10;                    &lt;Text style={{ fontSize: 19, fontWeight: 'bold', color: '#FFFFFF' }}&gt;4&lt;/Text&gt;&#10;                &lt;/Box&gt;&#10;                &lt;Text style={{ fontSize: 24, fontWeight: 'bold', color: '#1A2230' }}&gt;爆：大场景显存&lt;/Text&gt;&#10;            &lt;/Box&gt;&#10;            &lt;Text style={{ fontSize: 20, color: '#1A2230', lineHeight: 1.5, marginTop: 10 }}&gt;高斯数随场景线性增长。论文实测：不开层级结构，CityWalk 到第 &lt;b&gt;795 / 4050&lt;/b&gt; 帧就 OOM。&lt;/Text&gt;&#10;            &lt;Text style={{ fontSize: 19, color: '#D9534F', fontWeight: 'bold', marginTop: 10 }}&gt;规模一上来就跑不完&lt;/Text&gt;&#10;        &lt;/Box&gt;&#10;    &lt;/Box&gt;&#10;    &lt;Box style={{ margin: '18px 40px 0px 40px', backgroundColor: '#1E4FA8', borderRadius: 6, padding: '14px 22px' }}&gt;&#10;        &lt;Text style={{ fontSize: 22, fontWeight: 'bold', color: '#FFFFFF', lineHeight: 1.5 }}&gt;四个现象收敛成三条必须同时成立的约束：即时（每帧数百毫秒）· 无序（不依赖帧序）· 全局一致（回环能修）。过去的方法最多同时满足两条。&lt;/Text&gt;&#10;    &lt;/Box&gt;&#10;&lt;/Slide&gt;&#10;"/>
+        <p:cNvPr id="290" name="" descr="&lt;Slide style={{ width: '1280px', height: '720px', backgroundColor: '#FFFFFF', padding: '0px', flexDirection: 'column' }}&gt;&#10;    &lt;Box style={{ width: '1280px', height: '8px', backgroundColor: '#1E4FA8' }} /&gt;&#10;    &lt;Box style={{ padding: '30px 40px 0px 40px', flexDirection: 'row', justifyContent: 'space-between', alignItems: 'flex-end' }}&gt;&#10;        &lt;Text style={{ fontSize: 34, fontWeight: 'bold', color: '#1E4FA8' }}&gt;过去遇到的问题：等、乱、漂、爆&lt;/Text&gt;&#10;        &lt;Text style={{ fontSize: 15, color: '#8B97A8' }}&gt;05 / 15&lt;/Text&gt;&#10;    &lt;/Box&gt;&#10;    &lt;Box style={{ padding: '16px 40px 0px 40px' }}&gt;&#10;        &lt;Text style={{ fontSize: 21, color: '#4A5568', lineHeight: 1.5 }}&gt;如果拿手机去拍一个房间，这四件事几乎一定会遇到——它们不是算法&quot;不够准&quot;，而是&lt;b&gt;流程本身没有为现场反馈设计&lt;/b&gt;。&lt;/Text&gt;&#10;    &lt;/Box&gt;&#10;    &lt;Box style={{ padding: '16px 40px 0px 40px', flexDirection: 'row', gap: 20 }}&gt;&#10;        &lt;Box style={{ flex: 1, backgroundColor: '#F7F9FC', border: '1px solid #D6DCE5', borderRadius: 6, padding: '14px 18px', flexDirection: 'column' }}&gt;&#10;            &lt;Box style={{ flexDirection: 'row', alignItems: 'center', gap: 10 }}&gt;&#10;                &lt;Box style={{ width: '32px', height: '32px', backgroundColor: '#1E4FA8', borderRadius: 4, alignItems: 'center', justifyContent: 'center' }}&gt;&#10;                    &lt;Text style={{ fontSize: 19, fontWeight: 'bold', color: '#FFFFFF' }}&gt;1&lt;/Text&gt;&#10;                &lt;/Box&gt;&#10;                &lt;Text style={{ fontSize: 24, fontWeight: 'bold', color: '#1A2230' }}&gt;等：必须等图到齐&lt;/Text&gt;&#10;            &lt;/Box&gt;&#10;            &lt;Text style={{ fontSize: 20, color: '#1A2230', lineHeight: 1.5, marginTop: 10 }}&gt;离线流程要求全部图像就位才能开算。现场拍完不知道行不行，回家发现漏拍，只能整组重拍。&lt;/Text&gt;&#10;            &lt;Text style={{ fontSize: 19, color: '#D9534F', fontWeight: 'bold', marginTop: 10 }}&gt;返工成本最高&lt;/Text&gt;&#10;        &lt;/Box&gt;&#10;        &lt;Box style={{ flex: 1, backgroundColor: '#F7F9FC', border: '1px solid #D6DCE5', borderRadius: 6, padding: '14px 18px', flexDirection: 'column' }}&gt;&#10;            &lt;Box style={{ flexDirection: 'row', alignItems: 'center', gap: 10 }}&gt;&#10;                &lt;Box style={{ width: '32px', height: '32px', backgroundColor: '#1E4FA8', borderRadius: 4, alignItems: 'center', justifyContent: 'center' }}&gt;&#10;                    &lt;Text style={{ fontSize: 19, fontWeight: 'bold', color: '#FFFFFF' }}&gt;2&lt;/Text&gt;&#10;                &lt;/Box&gt;&#10;                &lt;Text style={{ fontSize: 24, fontWeight: 'bold', color: '#1A2230' }}&gt;乱：顺序不能用了&lt;/Text&gt;&#10;            &lt;/Box&gt;&#10;            &lt;Text style={{ fontSize: 20, color: '#1A2230', lineHeight: 1.5, marginTop: 10 }}&gt;随手拍的顺序与空间邻接无关，没法只比相邻帧，只能两两匹配：1000 张约 50 万对，耗时陡增。&lt;/Text&gt;&#10;            &lt;Text style={{ fontSize: 19, color: '#D9534F', fontWeight: 'bold', marginTop: 10 }}&gt;SfM 从分钟变小时&lt;/Text&gt;&#10;        &lt;/Box&gt;&#10;    &lt;/Box&gt;&#10;    &lt;Box style={{ padding: '14px 40px 0px 40px', flexDirection: 'row', gap: 20 }}&gt;&#10;        &lt;Box style={{ flex: 1, backgroundColor: '#F7F9FC', border: '1px solid #D6DCE5', borderRadius: 6, padding: '14px 18px', flexDirection: 'column' }}&gt;&#10;            &lt;Box style={{ flexDirection: 'row', alignItems: 'center', gap: 10 }}&gt;&#10;                &lt;Box style={{ width: '32px', height: '32px', backgroundColor: '#1E4FA8', borderRadius: 4, alignItems: 'center', justifyContent: 'center' }}&gt;&#10;                    &lt;Text style={{ fontSize: 19, fontWeight: 'bold', color: '#FFFFFF' }}&gt;3&lt;/Text&gt;&#10;                &lt;/Box&gt;&#10;                &lt;Text style={{ fontSize: 24, fontWeight: 'bold', color: '#1A2230' }}&gt;漂：回访时接不上&lt;/Text&gt;&#10;            &lt;/Box&gt;&#10;            &lt;Text style={{ fontSize: 20, color: '#1A2230', lineHeight: 1.5, marginTop: 10 }}&gt;边走边建误差累积，绕一圈回来发现首尾差半米。传统做法重跑一次全局 BA，几分钟起步。&lt;/Text&gt;&#10;            &lt;Text style={{ fontSize: 19, color: '#D9534F', fontWeight: 'bold', marginTop: 10 }}&gt;实时性当场归零&lt;/Text&gt;&#10;        &lt;/Box&gt;&#10;        &lt;Box style={{ flex: 1, backgroundColor: '#F7F9FC', border: '1px solid #D6DCE5', borderRadius: 6, padding: '14px 18px', flexDirection: 'column' }}&gt;&#10;            &lt;Box style={{ flexDirection: 'row', alignItems: 'center', gap: 10 }}&gt;&#10;                &lt;Box style={{ width: '32px', height: '32px', backgroundColor: '#1E4FA8', borderRadius: 4, alignItems: 'center', justifyContent: 'center' }}&gt;&#10;                    &lt;Text style={{ fontSize: 19, fontWeight: 'bold', color: '#FFFFFF' }}&gt;4&lt;/Text&gt;&#10;                &lt;/Box&gt;&#10;                &lt;Text style={{ fontSize: 24, fontWeight: 'bold', color: '#1A2230' }}&gt;爆：大场景显存&lt;/Text&gt;&#10;            &lt;/Box&gt;&#10;            &lt;Text style={{ fontSize: 20, color: '#1A2230', lineHeight: 1.5, marginTop: 10 }}&gt;高斯数随场景线性增长。论文实测：不开层级结构，CityWalk 到第 &lt;b&gt;795 / 4050&lt;/b&gt; 帧就 OOM。&lt;/Text&gt;&#10;            &lt;Text style={{ fontSize: 19, color: '#D9534F', fontWeight: 'bold', marginTop: 10 }}&gt;规模一上来就跑不完&lt;/Text&gt;&#10;        &lt;/Box&gt;&#10;    &lt;/Box&gt;&#10;    &lt;Box style={{ margin: '18px 40px 0px 40px', backgroundColor: '#1E4FA8', borderRadius: 6, padding: '14px 22px' }}&gt;&#10;        &lt;Text style={{ fontSize: 22, fontWeight: 'bold', color: '#FFFFFF', lineHeight: 1.5 }}&gt;四个现象收敛成三条必须同时成立的约束：即时（每帧数百毫秒）· 无序（不依赖帧序）· 全局一致（回环能修）。过去的方法最多同时满足两条。&lt;/Text&gt;&#10;    &lt;/Box&gt;&#10;&lt;/Slide&gt;&#10;"/>
         <p:cNvGrpSpPr/>
         <p:nvPr/>
       </p:nvGrpSpPr>
@@ -11824,7 +14483,7 @@
       </p:grpSpPr>
       <p:sp>
         <p:nvSpPr>
-          <p:cNvPr id="232" name=""/>
+          <p:cNvPr id="291" name=""/>
           <p:cNvSpPr/>
           <p:nvPr/>
         </p:nvSpPr>
@@ -11848,7 +14507,7 @@
       </p:sp>
       <p:sp>
         <p:nvSpPr>
-          <p:cNvPr id="233" name=""/>
+          <p:cNvPr id="292" name=""/>
           <p:cNvSpPr/>
           <p:nvPr/>
         </p:nvSpPr>
@@ -11872,7 +14531,7 @@
       </p:sp>
       <p:sp>
         <p:nvSpPr>
-          <p:cNvPr id="234" name="" descr="{&quot;isTemplate&quot;:true,&quot;type&quot;:&quot;text&quot;}"/>
+          <p:cNvPr id="293" name="" descr="{&quot;isTemplate&quot;:true,&quot;type&quot;:&quot;text&quot;}"/>
           <p:cNvSpPr txBox="1"/>
           <p:nvPr/>
         </p:nvSpPr>
@@ -11907,7 +14566,7 @@
       </p:sp>
       <p:sp>
         <p:nvSpPr>
-          <p:cNvPr id="235" name="" descr="{&quot;isTemplate&quot;:true,&quot;type&quot;:&quot;text&quot;}"/>
+          <p:cNvPr id="294" name="" descr="{&quot;isTemplate&quot;:true,&quot;type&quot;:&quot;text&quot;}"/>
           <p:cNvSpPr txBox="1"/>
           <p:nvPr/>
         </p:nvSpPr>
@@ -11934,15 +14593,15 @@
                 <a:latin typeface="Microsoft YaHei"/>
                 <a:ea typeface="Microsoft YaHei"/>
               </a:rPr>
-              <a:t>05 / 14</a:t>
-            </a:r>
-            <a:endParaRPr/>
-          </a:p>
-        </p:txBody>
-      </p:sp>
-      <p:sp>
-        <p:nvSpPr>
-          <p:cNvPr id="236" name="" descr="{&quot;isTemplate&quot;:true,&quot;type&quot;:&quot;text&quot;}"/>
+              <a:t>05 / 15</a:t>
+            </a:r>
+            <a:endParaRPr/>
+          </a:p>
+        </p:txBody>
+      </p:sp>
+      <p:sp>
+        <p:nvSpPr>
+          <p:cNvPr id="295" name="" descr="{&quot;isTemplate&quot;:true,&quot;type&quot;:&quot;text&quot;}"/>
           <p:cNvSpPr txBox="1"/>
           <p:nvPr/>
         </p:nvSpPr>
@@ -12037,7 +14696,7 @@
       </p:sp>
       <p:sp>
         <p:nvSpPr>
-          <p:cNvPr id="237" name=""/>
+          <p:cNvPr id="296" name=""/>
           <p:cNvSpPr/>
           <p:nvPr/>
         </p:nvSpPr>
@@ -12068,7 +14727,7 @@
       </p:sp>
       <p:sp>
         <p:nvSpPr>
-          <p:cNvPr id="238" name=""/>
+          <p:cNvPr id="297" name=""/>
           <p:cNvSpPr/>
           <p:nvPr/>
         </p:nvSpPr>
@@ -12094,7 +14753,7 @@
       </p:sp>
       <p:sp>
         <p:nvSpPr>
-          <p:cNvPr id="239" name="" descr="{&quot;isTemplate&quot;:true,&quot;type&quot;:&quot;text&quot;}"/>
+          <p:cNvPr id="298" name="" descr="{&quot;isTemplate&quot;:true,&quot;type&quot;:&quot;text&quot;}"/>
           <p:cNvSpPr txBox="1"/>
           <p:nvPr/>
         </p:nvSpPr>
@@ -12129,7 +14788,7 @@
       </p:sp>
       <p:sp>
         <p:nvSpPr>
-          <p:cNvPr id="240" name="" descr="{&quot;isTemplate&quot;:true,&quot;type&quot;:&quot;text&quot;}"/>
+          <p:cNvPr id="299" name="" descr="{&quot;isTemplate&quot;:true,&quot;type&quot;:&quot;text&quot;}"/>
           <p:cNvSpPr txBox="1"/>
           <p:nvPr/>
         </p:nvSpPr>
@@ -12164,7 +14823,7 @@
       </p:sp>
       <p:sp>
         <p:nvSpPr>
-          <p:cNvPr id="241" name="" descr="{&quot;isTemplate&quot;:true,&quot;type&quot;:&quot;text&quot;}"/>
+          <p:cNvPr id="300" name="" descr="{&quot;isTemplate&quot;:true,&quot;type&quot;:&quot;text&quot;}"/>
           <p:cNvSpPr txBox="1"/>
           <p:nvPr/>
         </p:nvSpPr>
@@ -12201,7 +14860,7 @@
       </p:sp>
       <p:sp>
         <p:nvSpPr>
-          <p:cNvPr id="242" name="" descr="{&quot;isTemplate&quot;:true,&quot;type&quot;:&quot;text&quot;}"/>
+          <p:cNvPr id="301" name="" descr="{&quot;isTemplate&quot;:true,&quot;type&quot;:&quot;text&quot;}"/>
           <p:cNvSpPr txBox="1"/>
           <p:nvPr/>
         </p:nvSpPr>
@@ -12236,7 +14895,7 @@
       </p:sp>
       <p:sp>
         <p:nvSpPr>
-          <p:cNvPr id="243" name=""/>
+          <p:cNvPr id="302" name=""/>
           <p:cNvSpPr/>
           <p:nvPr/>
         </p:nvSpPr>
@@ -12267,7 +14926,7 @@
       </p:sp>
       <p:sp>
         <p:nvSpPr>
-          <p:cNvPr id="244" name=""/>
+          <p:cNvPr id="303" name=""/>
           <p:cNvSpPr/>
           <p:nvPr/>
         </p:nvSpPr>
@@ -12293,7 +14952,7 @@
       </p:sp>
       <p:sp>
         <p:nvSpPr>
-          <p:cNvPr id="245" name="" descr="{&quot;isTemplate&quot;:true,&quot;type&quot;:&quot;text&quot;}"/>
+          <p:cNvPr id="304" name="" descr="{&quot;isTemplate&quot;:true,&quot;type&quot;:&quot;text&quot;}"/>
           <p:cNvSpPr txBox="1"/>
           <p:nvPr/>
         </p:nvSpPr>
@@ -12328,7 +14987,7 @@
       </p:sp>
       <p:sp>
         <p:nvSpPr>
-          <p:cNvPr id="246" name="" descr="{&quot;isTemplate&quot;:true,&quot;type&quot;:&quot;text&quot;}"/>
+          <p:cNvPr id="305" name="" descr="{&quot;isTemplate&quot;:true,&quot;type&quot;:&quot;text&quot;}"/>
           <p:cNvSpPr txBox="1"/>
           <p:nvPr/>
         </p:nvSpPr>
@@ -12363,7 +15022,7 @@
       </p:sp>
       <p:sp>
         <p:nvSpPr>
-          <p:cNvPr id="247" name="" descr="{&quot;isTemplate&quot;:true,&quot;type&quot;:&quot;text&quot;}"/>
+          <p:cNvPr id="306" name="" descr="{&quot;isTemplate&quot;:true,&quot;type&quot;:&quot;text&quot;}"/>
           <p:cNvSpPr txBox="1"/>
           <p:nvPr/>
         </p:nvSpPr>
@@ -12440,7 +15099,7 @@
       </p:sp>
       <p:sp>
         <p:nvSpPr>
-          <p:cNvPr id="248" name="" descr="{&quot;isTemplate&quot;:true,&quot;type&quot;:&quot;text&quot;}"/>
+          <p:cNvPr id="307" name="" descr="{&quot;isTemplate&quot;:true,&quot;type&quot;:&quot;text&quot;}"/>
           <p:cNvSpPr txBox="1"/>
           <p:nvPr/>
         </p:nvSpPr>
@@ -12485,7 +15144,7 @@
       </p:sp>
       <p:sp>
         <p:nvSpPr>
-          <p:cNvPr id="249" name=""/>
+          <p:cNvPr id="308" name=""/>
           <p:cNvSpPr/>
           <p:nvPr/>
         </p:nvSpPr>
@@ -12516,7 +15175,7 @@
       </p:sp>
       <p:sp>
         <p:nvSpPr>
-          <p:cNvPr id="250" name=""/>
+          <p:cNvPr id="309" name=""/>
           <p:cNvSpPr/>
           <p:nvPr/>
         </p:nvSpPr>
@@ -12542,7 +15201,7 @@
       </p:sp>
       <p:sp>
         <p:nvSpPr>
-          <p:cNvPr id="251" name="" descr="{&quot;isTemplate&quot;:true,&quot;type&quot;:&quot;text&quot;}"/>
+          <p:cNvPr id="310" name="" descr="{&quot;isTemplate&quot;:true,&quot;type&quot;:&quot;text&quot;}"/>
           <p:cNvSpPr txBox="1"/>
           <p:nvPr/>
         </p:nvSpPr>
@@ -12577,7 +15236,7 @@
       </p:sp>
       <p:sp>
         <p:nvSpPr>
-          <p:cNvPr id="252" name="" descr="{&quot;isTemplate&quot;:true,&quot;type&quot;:&quot;text&quot;}"/>
+          <p:cNvPr id="311" name="" descr="{&quot;isTemplate&quot;:true,&quot;type&quot;:&quot;text&quot;}"/>
           <p:cNvSpPr txBox="1"/>
           <p:nvPr/>
         </p:nvSpPr>
@@ -12612,7 +15271,7 @@
       </p:sp>
       <p:sp>
         <p:nvSpPr>
-          <p:cNvPr id="253" name="" descr="{&quot;isTemplate&quot;:true,&quot;type&quot;:&quot;text&quot;}"/>
+          <p:cNvPr id="312" name="" descr="{&quot;isTemplate&quot;:true,&quot;type&quot;:&quot;text&quot;}"/>
           <p:cNvSpPr txBox="1"/>
           <p:nvPr/>
         </p:nvSpPr>
@@ -12669,7 +15328,7 @@
       </p:sp>
       <p:sp>
         <p:nvSpPr>
-          <p:cNvPr id="254" name="" descr="{&quot;isTemplate&quot;:true,&quot;type&quot;:&quot;text&quot;}"/>
+          <p:cNvPr id="313" name="" descr="{&quot;isTemplate&quot;:true,&quot;type&quot;:&quot;text&quot;}"/>
           <p:cNvSpPr txBox="1"/>
           <p:nvPr/>
         </p:nvSpPr>
@@ -12704,7 +15363,7 @@
       </p:sp>
       <p:sp>
         <p:nvSpPr>
-          <p:cNvPr id="255" name=""/>
+          <p:cNvPr id="314" name=""/>
           <p:cNvSpPr/>
           <p:nvPr/>
         </p:nvSpPr>
@@ -12735,7 +15394,7 @@
       </p:sp>
       <p:sp>
         <p:nvSpPr>
-          <p:cNvPr id="256" name=""/>
+          <p:cNvPr id="315" name=""/>
           <p:cNvSpPr/>
           <p:nvPr/>
         </p:nvSpPr>
@@ -12761,7 +15420,7 @@
       </p:sp>
       <p:sp>
         <p:nvSpPr>
-          <p:cNvPr id="257" name="" descr="{&quot;isTemplate&quot;:true,&quot;type&quot;:&quot;text&quot;}"/>
+          <p:cNvPr id="316" name="" descr="{&quot;isTemplate&quot;:true,&quot;type&quot;:&quot;text&quot;}"/>
           <p:cNvSpPr txBox="1"/>
           <p:nvPr/>
         </p:nvSpPr>
@@ -12796,7 +15455,7 @@
       </p:sp>
       <p:sp>
         <p:nvSpPr>
-          <p:cNvPr id="258" name="" descr="{&quot;isTemplate&quot;:true,&quot;type&quot;:&quot;text&quot;}"/>
+          <p:cNvPr id="317" name="" descr="{&quot;isTemplate&quot;:true,&quot;type&quot;:&quot;text&quot;}"/>
           <p:cNvSpPr txBox="1"/>
           <p:nvPr/>
         </p:nvSpPr>
@@ -12831,7 +15490,7 @@
       </p:sp>
       <p:sp>
         <p:nvSpPr>
-          <p:cNvPr id="259" name="" descr="{&quot;isTemplate&quot;:true,&quot;type&quot;:&quot;text&quot;}"/>
+          <p:cNvPr id="318" name="" descr="{&quot;isTemplate&quot;:true,&quot;type&quot;:&quot;text&quot;}"/>
           <p:cNvSpPr txBox="1"/>
           <p:nvPr/>
         </p:nvSpPr>
@@ -12948,7 +15607,7 @@
       </p:sp>
       <p:sp>
         <p:nvSpPr>
-          <p:cNvPr id="260" name="" descr="{&quot;isTemplate&quot;:true,&quot;type&quot;:&quot;text&quot;}"/>
+          <p:cNvPr id="319" name="" descr="{&quot;isTemplate&quot;:true,&quot;type&quot;:&quot;text&quot;}"/>
           <p:cNvSpPr txBox="1"/>
           <p:nvPr/>
         </p:nvSpPr>
@@ -12983,7 +15642,7 @@
       </p:sp>
       <p:sp>
         <p:nvSpPr>
-          <p:cNvPr id="261" name=""/>
+          <p:cNvPr id="320" name=""/>
           <p:cNvSpPr/>
           <p:nvPr/>
         </p:nvSpPr>
@@ -13009,7 +15668,7 @@
       </p:sp>
       <p:sp>
         <p:nvSpPr>
-          <p:cNvPr id="262" name="" descr="{&quot;isTemplate&quot;:true,&quot;type&quot;:&quot;text&quot;}"/>
+          <p:cNvPr id="321" name="" descr="{&quot;isTemplate&quot;:true,&quot;type&quot;:&quot;text&quot;}"/>
           <p:cNvSpPr txBox="1"/>
           <p:nvPr/>
         </p:nvSpPr>
@@ -13094,7 +15753,7 @@
   <p:cSld>
     <p:spTree>
       <p:nvGrpSpPr>
-        <p:cNvPr id="263" name="" descr="&lt;Slide style={{ width: '1280px', height: '720px', backgroundColor: '#FFFFFF', padding: '0px', flexDirection: 'column' }}&gt;&#10;    &lt;Box style={{ width: '1280px', height: '8px', backgroundColor: '#1E4FA8' }} /&gt;&#10;    &lt;Box style={{ padding: '30px 40px 0px 40px', flexDirection: 'row', justifyContent: 'space-between', alignItems: 'flex-end' }}&gt;&#10;        &lt;Text style={{ fontSize: 34, fontWeight: 'bold', color: '#1E4FA8' }}&gt;方法总览：每来一个关键帧做六件事&lt;/Text&gt;&#10;        &lt;Text style={{ fontSize: 15, color: '#8B97A8' }}&gt;06 / 14&lt;/Text&gt;&#10;    &lt;/Box&gt;&#10;    &lt;Box style={{ padding: '14px 40px 0px 40px' }}&gt;&#10;        &lt;Text style={{ fontSize: 22, color: '#4A5568', lineHeight: 1.5 }}&gt;设计哲学一句话：&lt;b&gt;每帧做小事，偶尔做一次大事&lt;/b&gt;。前者保证实时，后者保证不漂。每一步都对应上一页四个问题中的一个。&lt;/Text&gt;&#10;    &lt;/Box&gt;&#10;    &lt;Box style={{ padding: '18px 40px 0px 40px', flexDirection: 'row', gap: 14 }}&gt;&#10;        &lt;Box style={{ flex: 1, minHeight: '158px', backgroundColor: '#F0F5FC', borderRadius: 6, padding: '16px 14px', flexDirection: 'column' }}&gt;&#10;            &lt;Text style={{ fontSize: 18, fontWeight: 'bold', color: '#1E4FA8' }}&gt;STEP 1&lt;/Text&gt;&#10;            &lt;Text style={{ fontSize: 23, fontWeight: 'bold', color: '#1A2230', marginTop: 7 }}&gt;两级匹配&lt;/Text&gt;&#10;            &lt;Text style={{ fontSize: 19, color: '#1A2230', lineHeight: 1.5, marginTop: 7 }}&gt;检索候选 → 局部特征 → 精验，得到可信帧对&lt;/Text&gt;&#10;            &lt;Text style={{ fontSize: 18, color: '#1D5FC0', fontWeight: 'bold', marginTop: 'auto' }}&gt;治&quot;乱&quot;&lt;/Text&gt;&#10;        &lt;/Box&gt;&#10;        &lt;Box style={{ flex: 1, minHeight: '158px', backgroundColor: '#F0F5FC', borderRadius: 6, padding: '16px 14px', flexDirection: 'column' }}&gt;&#10;            &lt;Text style={{ fontSize: 18, fontWeight: 'bold', color: '#1E4FA8' }}&gt;STEP 2&lt;/Text&gt;&#10;            &lt;Text style={{ fontSize: 23, fontWeight: 'bold', color: '#1A2230', marginTop: 7 }}&gt;更新协视图&lt;/Text&gt;&#10;            &lt;Text style={{ fontSize: 19, color: '#1A2230', lineHeight: 1.5, marginTop: 7 }}&gt;边权 = 内点数倒数，越可靠越&quot;近&quot;&lt;/Text&gt;&#10;            &lt;Text style={{ fontSize: 18, color: '#1D5FC0', fontWeight: 'bold', marginTop: 'auto' }}&gt;为后续提供&quot;距离&quot;&lt;/Text&gt;&#10;        &lt;/Box&gt;&#10;        &lt;Box style={{ flex: 1, minHeight: '158px', backgroundColor: '#F0F5FC', borderRadius: 6, padding: '16px 14px', flexDirection: 'column' }}&gt;&#10;            &lt;Text style={{ fontSize: 18, fontWeight: 'bold', color: '#1E4FA8' }}&gt;STEP 3&lt;/Text&gt;&#10;            &lt;Text style={{ fontSize: 23, fontWeight: 'bold', color: '#1A2230', marginTop: 7 }}&gt;回环检测&lt;/Text&gt;&#10;            &lt;Text style={{ fontSize: 19, color: '#1A2230', lineHeight: 1.5, marginTop: 7 }}&gt;簇间跳数 &amp;gt; 5 且有效对 &amp;gt; 2 才触发&lt;/Text&gt;&#10;            &lt;Text style={{ fontSize: 18, color: '#1D5FC0', fontWeight: 'bold', marginTop: 'auto' }}&gt;治&quot;漂&quot;·发现&lt;/Text&gt;&#10;        &lt;/Box&gt;&#10;    &lt;/Box&gt;&#10;    &lt;Box style={{ padding: '16px 40px 0px 40px', flexDirection: 'row', gap: 14 }}&gt;&#10;        &lt;Box style={{ flex: 1, minHeight: '158px', backgroundColor: '#F7F9FC', borderRadius: 6, padding: '16px 14px', flexDirection: 'column' }}&gt;&#10;            &lt;Text style={{ fontSize: 18, fontWeight: 'bold', color: '#1E4FA8' }}&gt;STEP 4&lt;/Text&gt;&#10;            &lt;Text style={{ fontSize: 23, fontWeight: 'bold', color: '#1A2230', marginTop: 7 }}&gt;局部 BA&lt;/Text&gt;&#10;            &lt;Text style={{ fontSize: 19, color: '#1A2230', lineHeight: 1.5, marginTop: 7 }}&gt;选 20 个高连通帧，GPU 上优化位姿&lt;/Text&gt;&#10;            &lt;Text style={{ fontSize: 18, color: '#1D5FC0', fontWeight: 'bold', marginTop: 'auto' }}&gt;治&quot;慢&quot;&lt;/Text&gt;&#10;        &lt;/Box&gt;&#10;        &lt;Box style={{ flex: 1, minHeight: '158px', backgroundColor: '#F7F9FC', borderRadius: 6, padding: '16px 14px', flexDirection: 'column' }}&gt;&#10;            &lt;Text style={{ fontSize: 18, fontWeight: 'bold', color: '#1E4FA8' }}&gt;STEP 5&lt;/Text&gt;&#10;            &lt;Text style={{ fontSize: 23, fontWeight: 'bold', color: '#1A2230', marginTop: 7 }}&gt;回环修正&lt;/Text&gt;&#10;            &lt;Text style={{ fontSize: 19, color: '#1A2230', lineHeight: 1.5, marginTop: 7 }}&gt;焊接 BA + 主干传播，位姿与高斯一起动&lt;/Text&gt;&#10;            &lt;Text style={{ fontSize: 18, color: '#1D5FC0', fontWeight: 'bold', marginTop: 'auto' }}&gt;治&quot;漂&quot;·修正&lt;/Text&gt;&#10;        &lt;/Box&gt;&#10;        &lt;Box style={{ flex: 1, minHeight: '158px', backgroundColor: '#F7F9FC', borderRadius: 6, padding: '16px 14px', flexDirection: 'column' }}&gt;&#10;            &lt;Text style={{ fontSize: 18, fontWeight: 'bold', color: '#1E4FA8' }}&gt;STEP 6&lt;/Text&gt;&#10;            &lt;Text style={{ fontSize: 23, fontWeight: 'bold', color: '#1A2230', marginTop: 7 }}&gt;投放与优化&lt;/Text&gt;&#10;            &lt;Text style={{ fontSize: 19, color: '#1A2230', lineHeight: 1.5, marginTop: 7 }}&gt;分块深度对齐投放，每帧固定 30 次迭代&lt;/Text&gt;&#10;            &lt;Text style={{ fontSize: 18, color: '#1D5FC0', fontWeight: 'bold', marginTop: 'auto' }}&gt;治&quot;爆&quot;（配层级）&lt;/Text&gt;&#10;        &lt;/Box&gt;&#10;    &lt;/Box&gt;&#10;    &lt;Box style={{ margin: '18px 40px 0px 40px', backgroundColor: '#F0F5FC', borderLeft: '5px solid #1E4FA8', padding: '15px 20px' }}&gt;&#10;        &lt;Text style={{ fontSize: 21, color: '#1A2230', lineHeight: 1.5 }}&gt;另有一处容错：匹配失败的帧先&quot;搁置&quot;，后续出现相似帧时再取出重试——乱序输入因此不必强求一次匹配成功。&lt;/Text&gt;&#10;    &lt;/Box&gt;&#10;    &lt;Box style={{ padding: '14px 40px 0px 40px' }}&gt;&#10;        &lt;Text style={{ fontSize: 17, color: '#8B97A8' }}&gt;六步中只有 STEP 3 与 STEP 5 是&quot;偶尔做一次的大事&quot;，其余每帧都跑；这也是实时性的来源。&lt;/Text&gt;&#10;    &lt;/Box&gt;&#10;&lt;/Slide&gt;&#10;"/>
+        <p:cNvPr id="322" name="" descr="&lt;Slide style={{ width: '1280px', height: '720px', backgroundColor: '#FFFFFF', padding: '0px', flexDirection: 'column' }}&gt;&#10;    &lt;Box style={{ width: '1280px', height: '8px', backgroundColor: '#1E4FA8' }} /&gt;&#10;    &lt;Box style={{ padding: '30px 40px 0px 40px', flexDirection: 'row', justifyContent: 'space-between', alignItems: 'flex-end' }}&gt;&#10;        &lt;Text style={{ fontSize: 34, fontWeight: 'bold', color: '#1E4FA8' }}&gt;方法总览：每来一个关键帧做六件事&lt;/Text&gt;&#10;        &lt;Text style={{ fontSize: 15, color: '#8B97A8' }}&gt;06 / 15&lt;/Text&gt;&#10;    &lt;/Box&gt;&#10;    &lt;Box style={{ padding: '14px 40px 0px 40px' }}&gt;&#10;        &lt;Text style={{ fontSize: 22, color: '#4A5568', lineHeight: 1.5 }}&gt;设计哲学一句话：&lt;b&gt;每帧做小事，偶尔做一次大事&lt;/b&gt;。前者保证实时，后者保证不漂。每一步都对应上一页四个问题中的一个。&lt;/Text&gt;&#10;    &lt;/Box&gt;&#10;    &lt;Box style={{ padding: '18px 40px 0px 40px', flexDirection: 'row', gap: 14 }}&gt;&#10;        &lt;Box style={{ flex: 1, minHeight: '158px', backgroundColor: '#F0F5FC', borderRadius: 6, padding: '16px 14px', flexDirection: 'column' }}&gt;&#10;            &lt;Text style={{ fontSize: 18, fontWeight: 'bold', color: '#1E4FA8' }}&gt;STEP 1&lt;/Text&gt;&#10;            &lt;Text style={{ fontSize: 23, fontWeight: 'bold', color: '#1A2230', marginTop: 7 }}&gt;两级匹配&lt;/Text&gt;&#10;            &lt;Text style={{ fontSize: 19, color: '#1A2230', lineHeight: 1.5, marginTop: 7 }}&gt;检索候选 → 局部特征 → 精验，得到可信帧对&lt;/Text&gt;&#10;            &lt;Text style={{ fontSize: 18, color: '#1D5FC0', fontWeight: 'bold', marginTop: 'auto' }}&gt;治&quot;乱&quot;&lt;/Text&gt;&#10;        &lt;/Box&gt;&#10;        &lt;Box style={{ flex: 1, minHeight: '158px', backgroundColor: '#F0F5FC', borderRadius: 6, padding: '16px 14px', flexDirection: 'column' }}&gt;&#10;            &lt;Text style={{ fontSize: 18, fontWeight: 'bold', color: '#1E4FA8' }}&gt;STEP 2&lt;/Text&gt;&#10;            &lt;Text style={{ fontSize: 23, fontWeight: 'bold', color: '#1A2230', marginTop: 7 }}&gt;更新协视图&lt;/Text&gt;&#10;            &lt;Text style={{ fontSize: 19, color: '#1A2230', lineHeight: 1.5, marginTop: 7 }}&gt;边权 = 内点数倒数，越可靠越&quot;近&quot;&lt;/Text&gt;&#10;            &lt;Text style={{ fontSize: 18, color: '#1D5FC0', fontWeight: 'bold', marginTop: 'auto' }}&gt;为后续提供&quot;距离&quot;&lt;/Text&gt;&#10;        &lt;/Box&gt;&#10;        &lt;Box style={{ flex: 1, minHeight: '158px', backgroundColor: '#F0F5FC', borderRadius: 6, padding: '16px 14px', flexDirection: 'column' }}&gt;&#10;            &lt;Text style={{ fontSize: 18, fontWeight: 'bold', color: '#1E4FA8' }}&gt;STEP 3&lt;/Text&gt;&#10;            &lt;Text style={{ fontSize: 23, fontWeight: 'bold', color: '#1A2230', marginTop: 7 }}&gt;回环检测&lt;/Text&gt;&#10;            &lt;Text style={{ fontSize: 19, color: '#1A2230', lineHeight: 1.5, marginTop: 7 }}&gt;簇间跳数 &amp;gt; 5 且有效对 &amp;gt; 2 才触发&lt;/Text&gt;&#10;            &lt;Text style={{ fontSize: 18, color: '#1D5FC0', fontWeight: 'bold', marginTop: 'auto' }}&gt;治&quot;漂&quot;·发现&lt;/Text&gt;&#10;        &lt;/Box&gt;&#10;    &lt;/Box&gt;&#10;    &lt;Box style={{ padding: '16px 40px 0px 40px', flexDirection: 'row', gap: 14 }}&gt;&#10;        &lt;Box style={{ flex: 1, minHeight: '158px', backgroundColor: '#F7F9FC', borderRadius: 6, padding: '16px 14px', flexDirection: 'column' }}&gt;&#10;            &lt;Text style={{ fontSize: 18, fontWeight: 'bold', color: '#1E4FA8' }}&gt;STEP 4&lt;/Text&gt;&#10;            &lt;Text style={{ fontSize: 23, fontWeight: 'bold', color: '#1A2230', marginTop: 7 }}&gt;局部 BA&lt;/Text&gt;&#10;            &lt;Text style={{ fontSize: 19, color: '#1A2230', lineHeight: 1.5, marginTop: 7 }}&gt;选 20 个高连通帧，GPU 上优化位姿&lt;/Text&gt;&#10;            &lt;Text style={{ fontSize: 18, color: '#1D5FC0', fontWeight: 'bold', marginTop: 'auto' }}&gt;治&quot;慢&quot;&lt;/Text&gt;&#10;        &lt;/Box&gt;&#10;        &lt;Box style={{ flex: 1, minHeight: '158px', backgroundColor: '#F7F9FC', borderRadius: 6, padding: '16px 14px', flexDirection: 'column' }}&gt;&#10;            &lt;Text style={{ fontSize: 18, fontWeight: 'bold', color: '#1E4FA8' }}&gt;STEP 5&lt;/Text&gt;&#10;            &lt;Text style={{ fontSize: 23, fontWeight: 'bold', color: '#1A2230', marginTop: 7 }}&gt;回环修正&lt;/Text&gt;&#10;            &lt;Text style={{ fontSize: 19, color: '#1A2230', lineHeight: 1.5, marginTop: 7 }}&gt;焊接 BA + 主干传播，位姿与高斯一起动&lt;/Text&gt;&#10;            &lt;Text style={{ fontSize: 18, color: '#1D5FC0', fontWeight: 'bold', marginTop: 'auto' }}&gt;治&quot;漂&quot;·修正&lt;/Text&gt;&#10;        &lt;/Box&gt;&#10;        &lt;Box style={{ flex: 1, minHeight: '158px', backgroundColor: '#F7F9FC', borderRadius: 6, padding: '16px 14px', flexDirection: 'column' }}&gt;&#10;            &lt;Text style={{ fontSize: 18, fontWeight: 'bold', color: '#1E4FA8' }}&gt;STEP 6&lt;/Text&gt;&#10;            &lt;Text style={{ fontSize: 23, fontWeight: 'bold', color: '#1A2230', marginTop: 7 }}&gt;投放与优化&lt;/Text&gt;&#10;            &lt;Text style={{ fontSize: 19, color: '#1A2230', lineHeight: 1.5, marginTop: 7 }}&gt;分块深度对齐投放，每帧固定 30 次迭代&lt;/Text&gt;&#10;            &lt;Text style={{ fontSize: 18, color: '#1D5FC0', fontWeight: 'bold', marginTop: 'auto' }}&gt;治&quot;爆&quot;（配层级）&lt;/Text&gt;&#10;        &lt;/Box&gt;&#10;    &lt;/Box&gt;&#10;    &lt;Box style={{ margin: '18px 40px 0px 40px', backgroundColor: '#F0F5FC', borderLeft: '5px solid #1E4FA8', padding: '15px 20px' }}&gt;&#10;        &lt;Text style={{ fontSize: 21, color: '#1A2230', lineHeight: 1.5 }}&gt;另有一处容错：匹配失败的帧先&quot;搁置&quot;，后续出现相似帧时再取出重试——乱序输入因此不必强求一次匹配成功。&lt;/Text&gt;&#10;    &lt;/Box&gt;&#10;    &lt;Box style={{ padding: '14px 40px 0px 40px' }}&gt;&#10;        &lt;Text style={{ fontSize: 17, color: '#8B97A8' }}&gt;六步中只有 STEP 3 与 STEP 5 是&quot;偶尔做一次的大事&quot;，其余每帧都跑；这也是实时性的来源。&lt;/Text&gt;&#10;    &lt;/Box&gt;&#10;&lt;/Slide&gt;&#10;"/>
         <p:cNvGrpSpPr/>
         <p:nvPr/>
       </p:nvGrpSpPr>
@@ -13108,7 +15767,7 @@
       </p:grpSpPr>
       <p:sp>
         <p:nvSpPr>
-          <p:cNvPr id="264" name=""/>
+          <p:cNvPr id="323" name=""/>
           <p:cNvSpPr/>
           <p:nvPr/>
         </p:nvSpPr>
@@ -13132,7 +15791,7 @@
       </p:sp>
       <p:sp>
         <p:nvSpPr>
-          <p:cNvPr id="265" name=""/>
+          <p:cNvPr id="324" name=""/>
           <p:cNvSpPr/>
           <p:nvPr/>
         </p:nvSpPr>
@@ -13156,7 +15815,7 @@
       </p:sp>
       <p:sp>
         <p:nvSpPr>
-          <p:cNvPr id="266" name="" descr="{&quot;isTemplate&quot;:true,&quot;type&quot;:&quot;text&quot;}"/>
+          <p:cNvPr id="325" name="" descr="{&quot;isTemplate&quot;:true,&quot;type&quot;:&quot;text&quot;}"/>
           <p:cNvSpPr txBox="1"/>
           <p:nvPr/>
         </p:nvSpPr>
@@ -13191,7 +15850,7 @@
       </p:sp>
       <p:sp>
         <p:nvSpPr>
-          <p:cNvPr id="267" name="" descr="{&quot;isTemplate&quot;:true,&quot;type&quot;:&quot;text&quot;}"/>
+          <p:cNvPr id="326" name="" descr="{&quot;isTemplate&quot;:true,&quot;type&quot;:&quot;text&quot;}"/>
           <p:cNvSpPr txBox="1"/>
           <p:nvPr/>
         </p:nvSpPr>
@@ -13218,15 +15877,15 @@
                 <a:latin typeface="Microsoft YaHei"/>
                 <a:ea typeface="Microsoft YaHei"/>
               </a:rPr>
-              <a:t>06 / 14</a:t>
-            </a:r>
-            <a:endParaRPr/>
-          </a:p>
-        </p:txBody>
-      </p:sp>
-      <p:sp>
-        <p:nvSpPr>
-          <p:cNvPr id="268" name="" descr="{&quot;isTemplate&quot;:true,&quot;type&quot;:&quot;text&quot;}"/>
+              <a:t>06 / 15</a:t>
+            </a:r>
+            <a:endParaRPr/>
+          </a:p>
+        </p:txBody>
+      </p:sp>
+      <p:sp>
+        <p:nvSpPr>
+          <p:cNvPr id="327" name="" descr="{&quot;isTemplate&quot;:true,&quot;type&quot;:&quot;text&quot;}"/>
           <p:cNvSpPr txBox="1"/>
           <p:nvPr/>
         </p:nvSpPr>
@@ -13281,7 +15940,7 @@
       </p:sp>
       <p:sp>
         <p:nvSpPr>
-          <p:cNvPr id="269" name=""/>
+          <p:cNvPr id="328" name=""/>
           <p:cNvSpPr/>
           <p:nvPr/>
         </p:nvSpPr>
@@ -13307,7 +15966,7 @@
       </p:sp>
       <p:sp>
         <p:nvSpPr>
-          <p:cNvPr id="270" name="" descr="{&quot;isTemplate&quot;:true,&quot;type&quot;:&quot;text&quot;}"/>
+          <p:cNvPr id="329" name="" descr="{&quot;isTemplate&quot;:true,&quot;type&quot;:&quot;text&quot;}"/>
           <p:cNvSpPr txBox="1"/>
           <p:nvPr/>
         </p:nvSpPr>
@@ -13342,7 +16001,7 @@
       </p:sp>
       <p:sp>
         <p:nvSpPr>
-          <p:cNvPr id="271" name="" descr="{&quot;isTemplate&quot;:true,&quot;type&quot;:&quot;text&quot;}"/>
+          <p:cNvPr id="330" name="" descr="{&quot;isTemplate&quot;:true,&quot;type&quot;:&quot;text&quot;}"/>
           <p:cNvSpPr txBox="1"/>
           <p:nvPr/>
         </p:nvSpPr>
@@ -13377,7 +16036,7 @@
       </p:sp>
       <p:sp>
         <p:nvSpPr>
-          <p:cNvPr id="272" name="" descr="{&quot;isTemplate&quot;:true,&quot;type&quot;:&quot;text&quot;}"/>
+          <p:cNvPr id="331" name="" descr="{&quot;isTemplate&quot;:true,&quot;type&quot;:&quot;text&quot;}"/>
           <p:cNvSpPr txBox="1"/>
           <p:nvPr/>
         </p:nvSpPr>
@@ -13454,7 +16113,7 @@
       </p:sp>
       <p:sp>
         <p:nvSpPr>
-          <p:cNvPr id="273" name="" descr="{&quot;isTemplate&quot;:true,&quot;type&quot;:&quot;text&quot;}"/>
+          <p:cNvPr id="332" name="" descr="{&quot;isTemplate&quot;:true,&quot;type&quot;:&quot;text&quot;}"/>
           <p:cNvSpPr txBox="1"/>
           <p:nvPr/>
         </p:nvSpPr>
@@ -13519,7 +16178,7 @@
       </p:sp>
       <p:sp>
         <p:nvSpPr>
-          <p:cNvPr id="274" name=""/>
+          <p:cNvPr id="333" name=""/>
           <p:cNvSpPr/>
           <p:nvPr/>
         </p:nvSpPr>
@@ -13545,7 +16204,7 @@
       </p:sp>
       <p:sp>
         <p:nvSpPr>
-          <p:cNvPr id="275" name="" descr="{&quot;isTemplate&quot;:true,&quot;type&quot;:&quot;text&quot;}"/>
+          <p:cNvPr id="334" name="" descr="{&quot;isTemplate&quot;:true,&quot;type&quot;:&quot;text&quot;}"/>
           <p:cNvSpPr txBox="1"/>
           <p:nvPr/>
         </p:nvSpPr>
@@ -13580,7 +16239,7 @@
       </p:sp>
       <p:sp>
         <p:nvSpPr>
-          <p:cNvPr id="276" name="" descr="{&quot;isTemplate&quot;:true,&quot;type&quot;:&quot;text&quot;}"/>
+          <p:cNvPr id="335" name="" descr="{&quot;isTemplate&quot;:true,&quot;type&quot;:&quot;text&quot;}"/>
           <p:cNvSpPr txBox="1"/>
           <p:nvPr/>
         </p:nvSpPr>
@@ -13615,7 +16274,7 @@
       </p:sp>
       <p:sp>
         <p:nvSpPr>
-          <p:cNvPr id="277" name="" descr="{&quot;isTemplate&quot;:true,&quot;type&quot;:&quot;text&quot;}"/>
+          <p:cNvPr id="336" name="" descr="{&quot;isTemplate&quot;:true,&quot;type&quot;:&quot;text&quot;}"/>
           <p:cNvSpPr txBox="1"/>
           <p:nvPr/>
         </p:nvSpPr>
@@ -13700,7 +16359,7 @@
       </p:sp>
       <p:sp>
         <p:nvSpPr>
-          <p:cNvPr id="278" name="" descr="{&quot;isTemplate&quot;:true,&quot;type&quot;:&quot;text&quot;}"/>
+          <p:cNvPr id="337" name="" descr="{&quot;isTemplate&quot;:true,&quot;type&quot;:&quot;text&quot;}"/>
           <p:cNvSpPr txBox="1"/>
           <p:nvPr/>
         </p:nvSpPr>
@@ -13765,7 +16424,7 @@
       </p:sp>
       <p:sp>
         <p:nvSpPr>
-          <p:cNvPr id="279" name=""/>
+          <p:cNvPr id="338" name=""/>
           <p:cNvSpPr/>
           <p:nvPr/>
         </p:nvSpPr>
@@ -13791,7 +16450,7 @@
       </p:sp>
       <p:sp>
         <p:nvSpPr>
-          <p:cNvPr id="280" name="" descr="{&quot;isTemplate&quot;:true,&quot;type&quot;:&quot;text&quot;}"/>
+          <p:cNvPr id="339" name="" descr="{&quot;isTemplate&quot;:true,&quot;type&quot;:&quot;text&quot;}"/>
           <p:cNvSpPr txBox="1"/>
           <p:nvPr/>
         </p:nvSpPr>
@@ -13826,7 +16485,7 @@
       </p:sp>
       <p:sp>
         <p:nvSpPr>
-          <p:cNvPr id="281" name="" descr="{&quot;isTemplate&quot;:true,&quot;type&quot;:&quot;text&quot;}"/>
+          <p:cNvPr id="340" name="" descr="{&quot;isTemplate&quot;:true,&quot;type&quot;:&quot;text&quot;}"/>
           <p:cNvSpPr txBox="1"/>
           <p:nvPr/>
         </p:nvSpPr>
@@ -13861,7 +16520,7 @@
       </p:sp>
       <p:sp>
         <p:nvSpPr>
-          <p:cNvPr id="282" name="" descr="{&quot;isTemplate&quot;:true,&quot;type&quot;:&quot;text&quot;}"/>
+          <p:cNvPr id="341" name="" descr="{&quot;isTemplate&quot;:true,&quot;type&quot;:&quot;text&quot;}"/>
           <p:cNvSpPr txBox="1"/>
           <p:nvPr/>
         </p:nvSpPr>
@@ -13936,7 +16595,7 @@
       </p:sp>
       <p:sp>
         <p:nvSpPr>
-          <p:cNvPr id="283" name="" descr="{&quot;isTemplate&quot;:true,&quot;type&quot;:&quot;text&quot;}"/>
+          <p:cNvPr id="342" name="" descr="{&quot;isTemplate&quot;:true,&quot;type&quot;:&quot;text&quot;}"/>
           <p:cNvSpPr txBox="1"/>
           <p:nvPr/>
         </p:nvSpPr>
@@ -14011,7 +16670,7 @@
       </p:sp>
       <p:sp>
         <p:nvSpPr>
-          <p:cNvPr id="284" name=""/>
+          <p:cNvPr id="343" name=""/>
           <p:cNvSpPr/>
           <p:nvPr/>
         </p:nvSpPr>
@@ -14037,7 +16696,7 @@
       </p:sp>
       <p:sp>
         <p:nvSpPr>
-          <p:cNvPr id="285" name="" descr="{&quot;isTemplate&quot;:true,&quot;type&quot;:&quot;text&quot;}"/>
+          <p:cNvPr id="344" name="" descr="{&quot;isTemplate&quot;:true,&quot;type&quot;:&quot;text&quot;}"/>
           <p:cNvSpPr txBox="1"/>
           <p:nvPr/>
         </p:nvSpPr>
@@ -14072,7 +16731,7 @@
       </p:sp>
       <p:sp>
         <p:nvSpPr>
-          <p:cNvPr id="286" name="" descr="{&quot;isTemplate&quot;:true,&quot;type&quot;:&quot;text&quot;}"/>
+          <p:cNvPr id="345" name="" descr="{&quot;isTemplate&quot;:true,&quot;type&quot;:&quot;text&quot;}"/>
           <p:cNvSpPr txBox="1"/>
           <p:nvPr/>
         </p:nvSpPr>
@@ -14117,7 +16776,7 @@
       </p:sp>
       <p:sp>
         <p:nvSpPr>
-          <p:cNvPr id="287" name="" descr="{&quot;isTemplate&quot;:true,&quot;type&quot;:&quot;text&quot;}"/>
+          <p:cNvPr id="346" name="" descr="{&quot;isTemplate&quot;:true,&quot;type&quot;:&quot;text&quot;}"/>
           <p:cNvSpPr txBox="1"/>
           <p:nvPr/>
         </p:nvSpPr>
@@ -14192,7 +16851,7 @@
       </p:sp>
       <p:sp>
         <p:nvSpPr>
-          <p:cNvPr id="288" name="" descr="{&quot;isTemplate&quot;:true,&quot;type&quot;:&quot;text&quot;}"/>
+          <p:cNvPr id="347" name="" descr="{&quot;isTemplate&quot;:true,&quot;type&quot;:&quot;text&quot;}"/>
           <p:cNvSpPr txBox="1"/>
           <p:nvPr/>
         </p:nvSpPr>
@@ -14257,7 +16916,7 @@
       </p:sp>
       <p:sp>
         <p:nvSpPr>
-          <p:cNvPr id="289" name=""/>
+          <p:cNvPr id="348" name=""/>
           <p:cNvSpPr/>
           <p:nvPr/>
         </p:nvSpPr>
@@ -14283,7 +16942,7 @@
       </p:sp>
       <p:sp>
         <p:nvSpPr>
-          <p:cNvPr id="290" name="" descr="{&quot;isTemplate&quot;:true,&quot;type&quot;:&quot;text&quot;}"/>
+          <p:cNvPr id="349" name="" descr="{&quot;isTemplate&quot;:true,&quot;type&quot;:&quot;text&quot;}"/>
           <p:cNvSpPr txBox="1"/>
           <p:nvPr/>
         </p:nvSpPr>
@@ -14318,7 +16977,7 @@
       </p:sp>
       <p:sp>
         <p:nvSpPr>
-          <p:cNvPr id="291" name="" descr="{&quot;isTemplate&quot;:true,&quot;type&quot;:&quot;text&quot;}"/>
+          <p:cNvPr id="350" name="" descr="{&quot;isTemplate&quot;:true,&quot;type&quot;:&quot;text&quot;}"/>
           <p:cNvSpPr txBox="1"/>
           <p:nvPr/>
         </p:nvSpPr>
@@ -14353,7 +17012,7 @@
       </p:sp>
       <p:sp>
         <p:nvSpPr>
-          <p:cNvPr id="292" name="" descr="{&quot;isTemplate&quot;:true,&quot;type&quot;:&quot;text&quot;}"/>
+          <p:cNvPr id="351" name="" descr="{&quot;isTemplate&quot;:true,&quot;type&quot;:&quot;text&quot;}"/>
           <p:cNvSpPr txBox="1"/>
           <p:nvPr/>
         </p:nvSpPr>
@@ -14408,7 +17067,7 @@
       </p:sp>
       <p:sp>
         <p:nvSpPr>
-          <p:cNvPr id="293" name="" descr="{&quot;isTemplate&quot;:true,&quot;type&quot;:&quot;text&quot;}"/>
+          <p:cNvPr id="352" name="" descr="{&quot;isTemplate&quot;:true,&quot;type&quot;:&quot;text&quot;}"/>
           <p:cNvSpPr txBox="1"/>
           <p:nvPr/>
         </p:nvSpPr>
@@ -14483,7 +17142,7 @@
       </p:sp>
       <p:sp>
         <p:nvSpPr>
-          <p:cNvPr id="294" name=""/>
+          <p:cNvPr id="353" name=""/>
           <p:cNvSpPr/>
           <p:nvPr/>
         </p:nvSpPr>
@@ -14509,7 +17168,7 @@
       </p:sp>
       <p:sp>
         <p:nvSpPr>
-          <p:cNvPr id="295" name="" descr="{&quot;isTemplate&quot;:true,&quot;type&quot;:&quot;text&quot;}"/>
+          <p:cNvPr id="354" name="" descr="{&quot;isTemplate&quot;:true,&quot;type&quot;:&quot;text&quot;}"/>
           <p:cNvSpPr txBox="1"/>
           <p:nvPr/>
         </p:nvSpPr>
@@ -14544,7 +17203,7 @@
       </p:sp>
       <p:sp>
         <p:nvSpPr>
-          <p:cNvPr id="296" name="" descr="{&quot;isTemplate&quot;:true,&quot;type&quot;:&quot;text&quot;}"/>
+          <p:cNvPr id="355" name="" descr="{&quot;isTemplate&quot;:true,&quot;type&quot;:&quot;text&quot;}"/>
           <p:cNvSpPr txBox="1"/>
           <p:nvPr/>
         </p:nvSpPr>
@@ -14579,7 +17238,7 @@
       </p:sp>
       <p:sp>
         <p:nvSpPr>
-          <p:cNvPr id="297" name="" descr="{&quot;isTemplate&quot;:true,&quot;type&quot;:&quot;text&quot;}"/>
+          <p:cNvPr id="356" name="" descr="{&quot;isTemplate&quot;:true,&quot;type&quot;:&quot;text&quot;}"/>
           <p:cNvSpPr txBox="1"/>
           <p:nvPr/>
         </p:nvSpPr>
@@ -14634,7 +17293,7 @@
       </p:sp>
       <p:sp>
         <p:nvSpPr>
-          <p:cNvPr id="298" name="" descr="{&quot;isTemplate&quot;:true,&quot;type&quot;:&quot;text&quot;}"/>
+          <p:cNvPr id="357" name="" descr="{&quot;isTemplate&quot;:true,&quot;type&quot;:&quot;text&quot;}"/>
           <p:cNvSpPr txBox="1"/>
           <p:nvPr/>
         </p:nvSpPr>
@@ -14709,7 +17368,7 @@
       </p:sp>
       <p:sp>
         <p:nvSpPr>
-          <p:cNvPr id="299" name=""/>
+          <p:cNvPr id="358" name=""/>
           <p:cNvSpPr/>
           <p:nvPr/>
         </p:nvSpPr>
@@ -14733,7 +17392,7 @@
       </p:sp>
       <p:sp>
         <p:nvSpPr>
-          <p:cNvPr id="300" name=""/>
+          <p:cNvPr id="359" name=""/>
           <p:cNvSpPr/>
           <p:nvPr/>
         </p:nvSpPr>
@@ -14773,7 +17432,7 @@
       </p:sp>
       <p:sp>
         <p:nvSpPr>
-          <p:cNvPr id="301" name="" descr="{&quot;isTemplate&quot;:true,&quot;type&quot;:&quot;text&quot;}"/>
+          <p:cNvPr id="360" name="" descr="{&quot;isTemplate&quot;:true,&quot;type&quot;:&quot;text&quot;}"/>
           <p:cNvSpPr txBox="1"/>
           <p:nvPr/>
         </p:nvSpPr>
@@ -14848,7 +17507,7 @@
       </p:sp>
       <p:sp>
         <p:nvSpPr>
-          <p:cNvPr id="302" name="" descr="{&quot;isTemplate&quot;:true,&quot;type&quot;:&quot;text&quot;}"/>
+          <p:cNvPr id="361" name="" descr="{&quot;isTemplate&quot;:true,&quot;type&quot;:&quot;text&quot;}"/>
           <p:cNvSpPr txBox="1"/>
           <p:nvPr/>
         </p:nvSpPr>
@@ -14971,7 +17630,7 @@
   <p:cSld>
     <p:spTree>
       <p:nvGrpSpPr>
-        <p:cNvPr id="303" name="" descr="&lt;Slide style={{ width: '1280px', height: '720px', backgroundColor: '#FFFFFF', padding: '0px', flexDirection: 'column' }}&gt;&#10;    &lt;Box style={{ width: '1280px', height: '8px', backgroundColor: '#1E4FA8' }} /&gt;&#10;    &lt;Box style={{ padding: '26px 40px 0px 40px', flexDirection: 'row', justifyContent: 'space-between', alignItems: 'flex-end' }}&gt;&#10;        &lt;Text style={{ fontSize: 34, fontWeight: 'bold', color: '#1E4FA8' }}&gt;算法地图：七步重建链，用在哪、算什么、管什么&lt;/Text&gt;&#10;        &lt;Text style={{ fontSize: 15, color: '#8B97A8' }}&gt;07 / 14&lt;/Text&gt;&#10;    &lt;/Box&gt;&#10;    &lt;Box style={{ padding: '10px 40px 0px 40px' }}&gt;&#10;        &lt;Text style={{ fontSize: 20, color: '#4A5568', lineHeight: 1.4 }}&gt;位姿重建真正发生在 &lt;b&gt;第 5 步&lt;/b&gt;：前三步只为它准备可信观测，第 4 步划定它的变量范围，第 6 步修它累积的漂移，第 7 步才轮到高斯。&lt;/Text&gt;&#10;    &lt;/Box&gt;&#10;&#10;    &lt;Box style={{ padding: '12px 40px 0px 40px', flexDirection: 'row', gap: 10 }}&gt;&#10;        &lt;Box style={{ flex: 1, height: 46, backgroundColor: '#F0F5FC', borderRadius: 4, alignItems: 'center', justifyContent: 'center' }}&gt;&#10;            &lt;Text style={{ fontSize: 19, fontWeight: 'bold', color: '#1E4FA8' }}&gt;① 检索&lt;/Text&gt;&#10;        &lt;/Box&gt;&#10;        &lt;Box style={{ flex: 1, height: 46, backgroundColor: '#F0F5FC', borderRadius: 4, alignItems: 'center', justifyContent: 'center' }}&gt;&#10;            &lt;Text style={{ fontSize: 19, fontWeight: 'bold', color: '#1E4FA8' }}&gt;② 粗筛&lt;/Text&gt;&#10;        &lt;/Box&gt;&#10;        &lt;Box style={{ flex: 1, height: 46, backgroundColor: '#F0F5FC', borderRadius: 4, alignItems: 'center', justifyContent: 'center' }}&gt;&#10;            &lt;Text style={{ fontSize: 19, fontWeight: 'bold', color: '#1E4FA8' }}&gt;③ 建边&lt;/Text&gt;&#10;        &lt;/Box&gt;&#10;        &lt;Box style={{ flex: 1, height: 46, backgroundColor: '#F0F5FC', borderRadius: 4, alignItems: 'center', justifyContent: 'center' }}&gt;&#10;            &lt;Text style={{ fontSize: 19, fontWeight: 'bold', color: '#1E4FA8' }}&gt;④ 选窗&lt;/Text&gt;&#10;        &lt;/Box&gt;&#10;        &lt;Box style={{ flex: 1, height: 46, backgroundColor: '#1E4FA8', borderRadius: 4, alignItems: 'center', justifyContent: 'center' }}&gt;&#10;            &lt;Text style={{ fontSize: 19, fontWeight: 'bold', color: '#FFFFFF' }}&gt;⑤ 局部 BA&lt;/Text&gt;&#10;        &lt;/Box&gt;&#10;        &lt;Box style={{ flex: 1, height: 46, backgroundColor: '#F0F5FC', borderRadius: 4, alignItems: 'center', justifyContent: 'center' }}&gt;&#10;            &lt;Text style={{ fontSize: 19, fontWeight: 'bold', color: '#1E4FA8' }}&gt;⑥ 纠偏&lt;/Text&gt;&#10;        &lt;/Box&gt;&#10;        &lt;Box style={{ flex: 1, height: 46, backgroundColor: '#F0F5FC', borderRadius: 4, alignItems: 'center', justifyContent: 'center' }}&gt;&#10;            &lt;Text style={{ fontSize: 19, fontWeight: 'bold', color: '#1E4FA8' }}&gt;⑦ 落位&lt;/Text&gt;&#10;        &lt;/Box&gt;&#10;    &lt;/Box&gt;&#10;&#10;    &lt;Box style={{ padding: '12px 40px 0px 40px', flexDirection: 'column' }}&gt;&#10;        &lt;Box style={{ flexDirection: 'row', backgroundColor: '#1E4FA8', padding: '10px 14px' }}&gt;&#10;            &lt;Text style={{ width: '44px', fontSize: 18, fontWeight: 'bold', color: '#FFFFFF' }}&gt;步&lt;/Text&gt;&#10;            &lt;Text style={{ width: '258px', fontSize: 18, fontWeight: 'bold', color: '#FFFFFF' }}&gt;算法&lt;/Text&gt;&#10;            &lt;Text style={{ flex: 2.2, fontSize: 18, fontWeight: 'bold', color: '#FFFFFF' }}&gt;核心公式 / 判据&lt;/Text&gt;&#10;            &lt;Text style={{ flex: 2.4, fontSize: 18, fontWeight: 'bold', color: '#FFFFFF' }}&gt;在重建中的作用&lt;/Text&gt;&#10;        &lt;/Box&gt;&#10;        &lt;Box style={{ flexDirection: 'row', alignItems: 'center', minHeight: 58, padding: '10px 14px', borderBottom: '1px solid #D6DCE5' }}&gt;&#10;            &lt;Text style={{ width: '44px', fontSize: 18, fontWeight: 'bold', color: '#1E4FA8' }}&gt;①&lt;/Text&gt;&#10;            &lt;Text style={{ width: '258px', fontSize: 18, color: '#1A2230' }}&gt;MegaLoc 全局描述子&lt;/Text&gt;&#10;            &lt;Text style={{ flex: 2.2, fontSize: 18, color: '#1A2230' }}&gt;s = d_i · d_j，取 top-K = 20&lt;/Text&gt;&#10;            &lt;Text style={{ flex: 2.4, fontSize: 18, color: '#1A2230' }}&gt;从全部历史帧里找&quot;可能同处&quot;的候选，与帧序无关&lt;/Text&gt;&#10;        &lt;/Box&gt;&#10;        &lt;Box style={{ flexDirection: 'row', alignItems: 'center', minHeight: 58, padding: '10px 14px', backgroundColor: '#F7F9FC', borderBottom: '1px solid #D6DCE5' }}&gt;&#10;            &lt;Text style={{ width: '44px', fontSize: 18, fontWeight: 'bold', color: '#1E4FA8' }}&gt;②&lt;/Text&gt;&#10;            &lt;Text style={{ width: '258px', fontSize: 18, color: '#1A2230' }}&gt;XFeat 局部特征穷举&lt;/Text&gt;&#10;            &lt;Text style={{ flex: 2.2, fontSize: 18, color: '#1A2230' }}&gt;K' = top-5 |M_ij|（按内点数）&lt;/Text&gt;&#10;            &lt;Text style={{ flex: 2.4, fontSize: 18, color: '#1A2230' }}&gt;淘汰&quot;外观像、但没对上点&quot;的候选&lt;/Text&gt;&#10;        &lt;/Box&gt;&#10;        &lt;Box style={{ flexDirection: 'row', alignItems: 'center', minHeight: 58, padding: '10px 14px', borderBottom: '1px solid #D6DCE5' }}&gt;&#10;            &lt;Text style={{ width: '44px', fontSize: 18, fontWeight: 'bold', color: '#1E4FA8' }}&gt;③&lt;/Text&gt;&#10;            &lt;Text style={{ width: '258px', fontSize: 18, color: '#1A2230' }}&gt;LightGlue + RANSAC&lt;/Text&gt;&#10;            &lt;Text style={{ flex: 2.2, fontSize: 18, color: '#1A2230' }}&gt;|M_ij| &amp;gt; τ_m = 500 才建边；w_ij = 1/|M_ij|&lt;/Text&gt;&#10;            &lt;Text style={{ flex: 2.4, fontSize: 18, color: '#1A2230' }}&gt;唯一产生共视约束的一步，结果写入协视图&lt;/Text&gt;&#10;        &lt;/Box&gt;&#10;        &lt;Box style={{ flexDirection: 'row', alignItems: 'center', minHeight: 58, padding: '10px 14px', backgroundColor: '#F7F9FC', borderBottom: '1px solid #D6DCE5' }}&gt;&#10;            &lt;Text style={{ width: '44px', fontSize: 18, fontWeight: 'bold', color: '#1E4FA8' }}&gt;④&lt;/Text&gt;&#10;            &lt;Text style={{ width: '258px', fontSize: 18, color: '#1A2230' }}&gt;协视图贪心扩张（式 1）&lt;/Text&gt;&#10;            &lt;Text style={{ flex: 2.2, fontSize: 18, color: '#1A2230' }}&gt;S ← S ∪ argmax Σ_j |M_ij|，至 20 帧&lt;/Text&gt;&#10;            &lt;Text style={{ flex: 2.4, fontSize: 18, color: '#1A2230' }}&gt;划定 BA 的变量范围：最该一起优化的 20 帧&lt;/Text&gt;&#10;        &lt;/Box&gt;&#10;        &lt;Box style={{ flexDirection: 'row', alignItems: 'center', minHeight: 58, padding: '10px 14px', backgroundColor: '#E8F0FB', borderTop: '1px solid #3D7BD9', borderBottom: '1px solid #3D7BD9' }}&gt;&#10;            &lt;Text style={{ width: '44px', fontSize: 18, fontWeight: 'bold', color: '#1E4FA8' }}&gt;⑤&lt;/Text&gt;&#10;            &lt;Text style={{ width: '258px', fontSize: 18, fontWeight: 'bold', color: '#1A2230' }}&gt;GPU 局部 BA（LM + Schur）&lt;/Text&gt;&#10;            &lt;Text style={{ flex: 2.2, fontSize: 18, fontWeight: 'bold', color: '#1A2230' }}&gt;min Σ ρ( ||u_ij − π(T_i, X_j)||² )&lt;/Text&gt;&#10;            &lt;Text style={{ flex: 2.4, fontSize: 18, fontWeight: 'bold', color: '#1A2230' }}&gt;真正解出位姿 T_i 与三维点 X_j——重建本体&lt;/Text&gt;&#10;        &lt;/Box&gt;&#10;        &lt;Box style={{ flexDirection: 'row', alignItems: 'center', minHeight: 58, padding: '10px 14px', borderBottom: '1px solid #D6DCE5' }}&gt;&#10;            &lt;Text style={{ width: '44px', fontSize: 18, fontWeight: 'bold', color: '#1E4FA8' }}&gt;⑥&lt;/Text&gt;&#10;            &lt;Text style={{ width: '258px', fontSize: 18, color: '#1A2230' }}&gt;簇级回环 + 图传播&lt;/Text&gt;&#10;            &lt;Text style={{ flex: 2.2, fontSize: 18, color: '#1A2230' }}&gt;跳数 &amp;gt; 5 触发；T_Δ = T_a^opt(T_a^init)^-1&lt;/Text&gt;&#10;            &lt;Text style={{ flex: 2.4, fontSize: 18, color: '#1A2230' }}&gt;两簇各扩 N/2 帧焊接，得 Sim(3) 后沿主干摊回&lt;/Text&gt;&#10;        &lt;/Box&gt;&#10;        &lt;Box style={{ flexDirection: 'row', alignItems: 'center', minHeight: 58, padding: '10px 14px', backgroundColor: '#F7F9FC' }}&gt;&#10;            &lt;Text style={{ width: '44px', fontSize: 18, fontWeight: 'bold', color: '#1E4FA8' }}&gt;⑦&lt;/Text&gt;&#10;            &lt;Text style={{ width: '258px', fontSize: 18, color: '#1A2230' }}&gt;分块深度对齐 + 渐进层级&lt;/Text&gt;&#10;            &lt;Text style={{ flex: 2.2, fontSize: 18, color: '#1A2230' }}&gt;size &amp;lt; τ_l 且占比 &amp;gt; 20% → KL 合并&lt;/Text&gt;&#10;            &lt;Text style={{ flex: 2.4, fontSize: 18, color: '#1A2230' }}&gt;位姿定后才投放高斯；层级只压显存，不改位姿&lt;/Text&gt;&#10;        &lt;/Box&gt;&#10;    &lt;/Box&gt;&#10;&#10;    &lt;Box style={{ padding: '12px 40px 0px 40px' }}&gt;&#10;        &lt;Text style={{ fontSize: 16, color: '#8B97A8', lineHeight: 1.45 }}&gt;加粗行是位姿求解本身，第 ⑥ 步会对已求出的位姿再整体修正一次。符号：u 像素观测、π 投影、ρ 鲁棒核、T 相机位姿、X 路标点。&lt;/Text&gt;&#10;        &lt;Text style={{ fontSize: 16, color: '#8B97A8', lineHeight: 1.45, marginTop: 3 }}&gt;① 的 VPR 论文写 MixVPR，开源代码因许可原因换为 MegaLoc；τ_m = 500，τ_l = 0.5 px，N = 20，K = 20。&lt;/Text&gt;&#10;    &lt;/Box&gt;&#10;&lt;/Slide&gt;&#10;"/>
+        <p:cNvPr id="362" name="" descr="&lt;Slide style={{ width: '1280px', height: '720px', backgroundColor: '#FFFFFF', padding: '0px', flexDirection: 'column' }}&gt;&#10;    &lt;Box style={{ width: '1280px', height: '8px', backgroundColor: '#1E4FA8' }} /&gt;&#10;    &lt;Box style={{ padding: '26px 40px 0px 40px', flexDirection: 'row', justifyContent: 'space-between', alignItems: 'flex-end' }}&gt;&#10;        &lt;Text style={{ fontSize: 34, fontWeight: 'bold', color: '#1E4FA8' }}&gt;算法地图：七步重建链，用在哪、算什么、管什么&lt;/Text&gt;&#10;        &lt;Text style={{ fontSize: 15, color: '#8B97A8' }}&gt;07 / 15&lt;/Text&gt;&#10;    &lt;/Box&gt;&#10;    &lt;Box style={{ padding: '10px 40px 0px 40px' }}&gt;&#10;        &lt;Text style={{ fontSize: 20, color: '#4A5568', lineHeight: 1.4 }}&gt;位姿重建真正发生在 &lt;b&gt;第 5 步&lt;/b&gt;：前三步只为它准备可信观测，第 4 步划定它的变量范围，第 6 步修它累积的漂移，第 7 步才轮到高斯。&lt;/Text&gt;&#10;    &lt;/Box&gt;&#10;&#10;    &lt;Box style={{ padding: '12px 40px 0px 40px', flexDirection: 'row', gap: 10 }}&gt;&#10;        &lt;Box style={{ flex: 1, height: 46, backgroundColor: '#F0F5FC', borderRadius: 4, alignItems: 'center', justifyContent: 'center' }}&gt;&#10;            &lt;Text style={{ fontSize: 19, fontWeight: 'bold', color: '#1E4FA8' }}&gt;① 检索&lt;/Text&gt;&#10;        &lt;/Box&gt;&#10;        &lt;Box style={{ flex: 1, height: 46, backgroundColor: '#F0F5FC', borderRadius: 4, alignItems: 'center', justifyContent: 'center' }}&gt;&#10;            &lt;Text style={{ fontSize: 19, fontWeight: 'bold', color: '#1E4FA8' }}&gt;② 粗筛&lt;/Text&gt;&#10;        &lt;/Box&gt;&#10;        &lt;Box style={{ flex: 1, height: 46, backgroundColor: '#F0F5FC', borderRadius: 4, alignItems: 'center', justifyContent: 'center' }}&gt;&#10;            &lt;Text style={{ fontSize: 19, fontWeight: 'bold', color: '#1E4FA8' }}&gt;③ 建边&lt;/Text&gt;&#10;        &lt;/Box&gt;&#10;        &lt;Box style={{ flex: 1, height: 46, backgroundColor: '#F0F5FC', borderRadius: 4, alignItems: 'center', justifyContent: 'center' }}&gt;&#10;            &lt;Text style={{ fontSize: 19, fontWeight: 'bold', color: '#1E4FA8' }}&gt;④ 选窗&lt;/Text&gt;&#10;        &lt;/Box&gt;&#10;        &lt;Box style={{ flex: 1, height: 46, backgroundColor: '#1E4FA8', borderRadius: 4, alignItems: 'center', justifyContent: 'center' }}&gt;&#10;            &lt;Text style={{ fontSize: 19, fontWeight: 'bold', color: '#FFFFFF' }}&gt;⑤ 局部 BA&lt;/Text&gt;&#10;        &lt;/Box&gt;&#10;        &lt;Box style={{ flex: 1, height: 46, backgroundColor: '#F0F5FC', borderRadius: 4, alignItems: 'center', justifyContent: 'center' }}&gt;&#10;            &lt;Text style={{ fontSize: 19, fontWeight: 'bold', color: '#1E4FA8' }}&gt;⑥ 纠偏&lt;/Text&gt;&#10;        &lt;/Box&gt;&#10;        &lt;Box style={{ flex: 1, height: 46, backgroundColor: '#F0F5FC', borderRadius: 4, alignItems: 'center', justifyContent: 'center' }}&gt;&#10;            &lt;Text style={{ fontSize: 19, fontWeight: 'bold', color: '#1E4FA8' }}&gt;⑦ 落位&lt;/Text&gt;&#10;        &lt;/Box&gt;&#10;    &lt;/Box&gt;&#10;&#10;    &lt;Box style={{ padding: '12px 40px 0px 40px', flexDirection: 'column' }}&gt;&#10;        &lt;Box style={{ flexDirection: 'row', backgroundColor: '#1E4FA8', padding: '10px 14px' }}&gt;&#10;            &lt;Text style={{ width: '44px', fontSize: 18, fontWeight: 'bold', color: '#FFFFFF' }}&gt;步&lt;/Text&gt;&#10;            &lt;Text style={{ width: '258px', fontSize: 18, fontWeight: 'bold', color: '#FFFFFF' }}&gt;算法&lt;/Text&gt;&#10;            &lt;Text style={{ flex: 2.2, fontSize: 18, fontWeight: 'bold', color: '#FFFFFF' }}&gt;核心公式 / 判据&lt;/Text&gt;&#10;            &lt;Text style={{ flex: 2.4, fontSize: 18, fontWeight: 'bold', color: '#FFFFFF' }}&gt;在重建中的作用&lt;/Text&gt;&#10;        &lt;/Box&gt;&#10;        &lt;Box style={{ flexDirection: 'row', alignItems: 'center', minHeight: 58, padding: '10px 14px', borderBottom: '1px solid #D6DCE5' }}&gt;&#10;            &lt;Text style={{ width: '44px', fontSize: 18, fontWeight: 'bold', color: '#1E4FA8' }}&gt;①&lt;/Text&gt;&#10;            &lt;Text style={{ width: '258px', fontSize: 18, color: '#1A2230' }}&gt;MegaLoc 全局描述子&lt;/Text&gt;&#10;            &lt;Text style={{ flex: 2.2, fontSize: 18, color: '#1A2230' }}&gt;s = d_i · d_j，取 top-K = 20&lt;/Text&gt;&#10;            &lt;Text style={{ flex: 2.4, fontSize: 18, color: '#1A2230' }}&gt;从全部历史帧里找&quot;可能同处&quot;的候选，与帧序无关&lt;/Text&gt;&#10;        &lt;/Box&gt;&#10;        &lt;Box style={{ flexDirection: 'row', alignItems: 'center', minHeight: 58, padding: '10px 14px', backgroundColor: '#F7F9FC', borderBottom: '1px solid #D6DCE5' }}&gt;&#10;            &lt;Text style={{ width: '44px', fontSize: 18, fontWeight: 'bold', color: '#1E4FA8' }}&gt;②&lt;/Text&gt;&#10;            &lt;Text style={{ width: '258px', fontSize: 18, color: '#1A2230' }}&gt;XFeat 局部特征穷举&lt;/Text&gt;&#10;            &lt;Text style={{ flex: 2.2, fontSize: 18, color: '#1A2230' }}&gt;K' = top-5 |M_ij|（按内点数）&lt;/Text&gt;&#10;            &lt;Text style={{ flex: 2.4, fontSize: 18, color: '#1A2230' }}&gt;淘汰&quot;外观像、但没对上点&quot;的候选&lt;/Text&gt;&#10;        &lt;/Box&gt;&#10;        &lt;Box style={{ flexDirection: 'row', alignItems: 'center', minHeight: 58, padding: '10px 14px', borderBottom: '1px solid #D6DCE5' }}&gt;&#10;            &lt;Text style={{ width: '44px', fontSize: 18, fontWeight: 'bold', color: '#1E4FA8' }}&gt;③&lt;/Text&gt;&#10;            &lt;Text style={{ width: '258px', fontSize: 18, color: '#1A2230' }}&gt;LightGlue + RANSAC&lt;/Text&gt;&#10;            &lt;Text style={{ flex: 2.2, fontSize: 18, color: '#1A2230' }}&gt;|M_ij| &amp;gt; τ_m = 500 才建边；w_ij = 1/|M_ij|&lt;/Text&gt;&#10;            &lt;Text style={{ flex: 2.4, fontSize: 18, color: '#1A2230' }}&gt;唯一产生共视约束的一步，结果写入协视图&lt;/Text&gt;&#10;        &lt;/Box&gt;&#10;        &lt;Box style={{ flexDirection: 'row', alignItems: 'center', minHeight: 58, padding: '10px 14px', backgroundColor: '#F7F9FC', borderBottom: '1px solid #D6DCE5' }}&gt;&#10;            &lt;Text style={{ width: '44px', fontSize: 18, fontWeight: 'bold', color: '#1E4FA8' }}&gt;④&lt;/Text&gt;&#10;            &lt;Text style={{ width: '258px', fontSize: 18, color: '#1A2230' }}&gt;协视图贪心扩张（式 1）&lt;/Text&gt;&#10;            &lt;Text style={{ flex: 2.2, fontSize: 18, color: '#1A2230' }}&gt;S ← S ∪ argmax Σ_j |M_ij|，至 20 帧&lt;/Text&gt;&#10;            &lt;Text style={{ flex: 2.4, fontSize: 18, color: '#1A2230' }}&gt;划定 BA 的变量范围：最该一起优化的 20 帧&lt;/Text&gt;&#10;        &lt;/Box&gt;&#10;        &lt;Box style={{ flexDirection: 'row', alignItems: 'center', minHeight: 58, padding: '10px 14px', backgroundColor: '#E8F0FB', borderTop: '1px solid #3D7BD9', borderBottom: '1px solid #3D7BD9' }}&gt;&#10;            &lt;Text style={{ width: '44px', fontSize: 18, fontWeight: 'bold', color: '#1E4FA8' }}&gt;⑤&lt;/Text&gt;&#10;            &lt;Text style={{ width: '258px', fontSize: 18, fontWeight: 'bold', color: '#1A2230' }}&gt;GPU 局部 BA（LM + Schur）&lt;/Text&gt;&#10;            &lt;Text style={{ flex: 2.2, fontSize: 18, fontWeight: 'bold', color: '#1A2230' }}&gt;min Σ ρ( ||u_ij − π(T_i, X_j)||² )&lt;/Text&gt;&#10;            &lt;Text style={{ flex: 2.4, fontSize: 18, fontWeight: 'bold', color: '#1A2230' }}&gt;真正解出位姿 T_i 与三维点 X_j——重建本体&lt;/Text&gt;&#10;        &lt;/Box&gt;&#10;        &lt;Box style={{ flexDirection: 'row', alignItems: 'center', minHeight: 58, padding: '10px 14px', borderBottom: '1px solid #D6DCE5' }}&gt;&#10;            &lt;Text style={{ width: '44px', fontSize: 18, fontWeight: 'bold', color: '#1E4FA8' }}&gt;⑥&lt;/Text&gt;&#10;            &lt;Text style={{ width: '258px', fontSize: 18, color: '#1A2230' }}&gt;簇级回环 + 图传播&lt;/Text&gt;&#10;            &lt;Text style={{ flex: 2.2, fontSize: 18, color: '#1A2230' }}&gt;跳数 = 加权图距 &amp;gt; 10 触发；T_Δ = T_a^opt(T_a^init)^-1&lt;/Text&gt;&#10;            &lt;Text style={{ flex: 2.4, fontSize: 18, color: '#1A2230' }}&gt;两簇各扩 N/2 帧焊接，得 Sim(3) 后沿主干摊回&lt;/Text&gt;&#10;        &lt;/Box&gt;&#10;        &lt;Box style={{ flexDirection: 'row', alignItems: 'center', minHeight: 58, padding: '10px 14px', backgroundColor: '#F7F9FC' }}&gt;&#10;            &lt;Text style={{ width: '44px', fontSize: 18, fontWeight: 'bold', color: '#1E4FA8' }}&gt;⑦&lt;/Text&gt;&#10;            &lt;Text style={{ width: '258px', fontSize: 18, color: '#1A2230' }}&gt;分块深度对齐 + 渐进层级&lt;/Text&gt;&#10;            &lt;Text style={{ flex: 2.2, fontSize: 18, color: '#1A2230' }}&gt;size &amp;lt; τ_l 且可并数 &amp;gt; max(10%, 20 万) → kNN 加权合并&lt;/Text&gt;&#10;            &lt;Text style={{ flex: 2.4, fontSize: 18, color: '#1A2230' }}&gt;位姿定后才投放高斯；层级只压显存，不改位姿&lt;/Text&gt;&#10;        &lt;/Box&gt;&#10;    &lt;/Box&gt;&#10;&#10;    &lt;Box style={{ padding: '12px 40px 0px 40px' }}&gt;&#10;        &lt;Text style={{ fontSize: 16, color: '#8B97A8', lineHeight: 1.45 }}&gt;加粗行是位姿求解本身，第 ⑥ 步会对已求出的位姿再整体修正一次。符号：u 像素观测、π 投影、ρ 鲁棒核、T 相机位姿、X 路标点。&lt;/Text&gt;&#10;        &lt;Text style={{ fontSize: 16, color: '#8B97A8', lineHeight: 1.45, marginTop: 3 }}&gt;① 的 VPR 论文写 MixVPR，开源代码因许可原因换为 MegaLoc；τ_m = 500，τ_l = 0.5 px，N = 20，K = 20。&lt;/Text&gt;&#10;    &lt;/Box&gt;&#10;&lt;/Slide&gt;&#10;"/>
         <p:cNvGrpSpPr/>
         <p:nvPr/>
       </p:nvGrpSpPr>
@@ -14985,7 +17644,7 @@
       </p:grpSpPr>
       <p:sp>
         <p:nvSpPr>
-          <p:cNvPr id="304" name=""/>
+          <p:cNvPr id="363" name=""/>
           <p:cNvSpPr/>
           <p:nvPr/>
         </p:nvSpPr>
@@ -15009,7 +17668,7 @@
       </p:sp>
       <p:sp>
         <p:nvSpPr>
-          <p:cNvPr id="305" name=""/>
+          <p:cNvPr id="364" name=""/>
           <p:cNvSpPr/>
           <p:nvPr/>
         </p:nvSpPr>
@@ -15033,7 +17692,7 @@
       </p:sp>
       <p:sp>
         <p:nvSpPr>
-          <p:cNvPr id="306" name="" descr="{&quot;isTemplate&quot;:true,&quot;type&quot;:&quot;text&quot;}"/>
+          <p:cNvPr id="365" name="" descr="{&quot;isTemplate&quot;:true,&quot;type&quot;:&quot;text&quot;}"/>
           <p:cNvSpPr txBox="1"/>
           <p:nvPr/>
         </p:nvSpPr>
@@ -15068,7 +17727,7 @@
       </p:sp>
       <p:sp>
         <p:nvSpPr>
-          <p:cNvPr id="307" name="" descr="{&quot;isTemplate&quot;:true,&quot;type&quot;:&quot;text&quot;}"/>
+          <p:cNvPr id="366" name="" descr="{&quot;isTemplate&quot;:true,&quot;type&quot;:&quot;text&quot;}"/>
           <p:cNvSpPr txBox="1"/>
           <p:nvPr/>
         </p:nvSpPr>
@@ -15095,15 +17754,15 @@
                 <a:latin typeface="Microsoft YaHei"/>
                 <a:ea typeface="Microsoft YaHei"/>
               </a:rPr>
-              <a:t>07 / 14</a:t>
-            </a:r>
-            <a:endParaRPr/>
-          </a:p>
-        </p:txBody>
-      </p:sp>
-      <p:sp>
-        <p:nvSpPr>
-          <p:cNvPr id="308" name="" descr="{&quot;isTemplate&quot;:true,&quot;type&quot;:&quot;text&quot;}"/>
+              <a:t>07 / 15</a:t>
+            </a:r>
+            <a:endParaRPr/>
+          </a:p>
+        </p:txBody>
+      </p:sp>
+      <p:sp>
+        <p:nvSpPr>
+          <p:cNvPr id="367" name="" descr="{&quot;isTemplate&quot;:true,&quot;type&quot;:&quot;text&quot;}"/>
           <p:cNvSpPr txBox="1"/>
           <p:nvPr/>
         </p:nvSpPr>
@@ -15248,7 +17907,7 @@
       </p:sp>
       <p:sp>
         <p:nvSpPr>
-          <p:cNvPr id="309" name=""/>
+          <p:cNvPr id="368" name=""/>
           <p:cNvSpPr/>
           <p:nvPr/>
         </p:nvSpPr>
@@ -15274,7 +17933,7 @@
       </p:sp>
       <p:sp>
         <p:nvSpPr>
-          <p:cNvPr id="310" name="" descr="{&quot;isTemplate&quot;:true,&quot;type&quot;:&quot;text&quot;}"/>
+          <p:cNvPr id="369" name="" descr="{&quot;isTemplate&quot;:true,&quot;type&quot;:&quot;text&quot;}"/>
           <p:cNvSpPr txBox="1"/>
           <p:nvPr/>
         </p:nvSpPr>
@@ -15319,7 +17978,7 @@
       </p:sp>
       <p:sp>
         <p:nvSpPr>
-          <p:cNvPr id="311" name=""/>
+          <p:cNvPr id="370" name=""/>
           <p:cNvSpPr/>
           <p:nvPr/>
         </p:nvSpPr>
@@ -15345,7 +18004,7 @@
       </p:sp>
       <p:sp>
         <p:nvSpPr>
-          <p:cNvPr id="312" name="" descr="{&quot;isTemplate&quot;:true,&quot;type&quot;:&quot;text&quot;}"/>
+          <p:cNvPr id="371" name="" descr="{&quot;isTemplate&quot;:true,&quot;type&quot;:&quot;text&quot;}"/>
           <p:cNvSpPr txBox="1"/>
           <p:nvPr/>
         </p:nvSpPr>
@@ -15390,7 +18049,7 @@
       </p:sp>
       <p:sp>
         <p:nvSpPr>
-          <p:cNvPr id="313" name=""/>
+          <p:cNvPr id="372" name=""/>
           <p:cNvSpPr/>
           <p:nvPr/>
         </p:nvSpPr>
@@ -15416,7 +18075,7 @@
       </p:sp>
       <p:sp>
         <p:nvSpPr>
-          <p:cNvPr id="314" name="" descr="{&quot;isTemplate&quot;:true,&quot;type&quot;:&quot;text&quot;}"/>
+          <p:cNvPr id="373" name="" descr="{&quot;isTemplate&quot;:true,&quot;type&quot;:&quot;text&quot;}"/>
           <p:cNvSpPr txBox="1"/>
           <p:nvPr/>
         </p:nvSpPr>
@@ -15461,7 +18120,7 @@
       </p:sp>
       <p:sp>
         <p:nvSpPr>
-          <p:cNvPr id="315" name=""/>
+          <p:cNvPr id="374" name=""/>
           <p:cNvSpPr/>
           <p:nvPr/>
         </p:nvSpPr>
@@ -15487,7 +18146,7 @@
       </p:sp>
       <p:sp>
         <p:nvSpPr>
-          <p:cNvPr id="316" name="" descr="{&quot;isTemplate&quot;:true,&quot;type&quot;:&quot;text&quot;}"/>
+          <p:cNvPr id="375" name="" descr="{&quot;isTemplate&quot;:true,&quot;type&quot;:&quot;text&quot;}"/>
           <p:cNvSpPr txBox="1"/>
           <p:nvPr/>
         </p:nvSpPr>
@@ -15532,7 +18191,7 @@
       </p:sp>
       <p:sp>
         <p:nvSpPr>
-          <p:cNvPr id="317" name=""/>
+          <p:cNvPr id="376" name=""/>
           <p:cNvSpPr/>
           <p:nvPr/>
         </p:nvSpPr>
@@ -15558,7 +18217,7 @@
       </p:sp>
       <p:sp>
         <p:nvSpPr>
-          <p:cNvPr id="318" name="" descr="{&quot;isTemplate&quot;:true,&quot;type&quot;:&quot;text&quot;}"/>
+          <p:cNvPr id="377" name="" descr="{&quot;isTemplate&quot;:true,&quot;type&quot;:&quot;text&quot;}"/>
           <p:cNvSpPr txBox="1"/>
           <p:nvPr/>
         </p:nvSpPr>
@@ -15613,7 +18272,7 @@
       </p:sp>
       <p:sp>
         <p:nvSpPr>
-          <p:cNvPr id="319" name=""/>
+          <p:cNvPr id="378" name=""/>
           <p:cNvSpPr/>
           <p:nvPr/>
         </p:nvSpPr>
@@ -15639,7 +18298,7 @@
       </p:sp>
       <p:sp>
         <p:nvSpPr>
-          <p:cNvPr id="320" name="" descr="{&quot;isTemplate&quot;:true,&quot;type&quot;:&quot;text&quot;}"/>
+          <p:cNvPr id="379" name="" descr="{&quot;isTemplate&quot;:true,&quot;type&quot;:&quot;text&quot;}"/>
           <p:cNvSpPr txBox="1"/>
           <p:nvPr/>
         </p:nvSpPr>
@@ -15684,7 +18343,7 @@
       </p:sp>
       <p:sp>
         <p:nvSpPr>
-          <p:cNvPr id="321" name=""/>
+          <p:cNvPr id="380" name=""/>
           <p:cNvSpPr/>
           <p:nvPr/>
         </p:nvSpPr>
@@ -15710,7 +18369,7 @@
       </p:sp>
       <p:sp>
         <p:nvSpPr>
-          <p:cNvPr id="322" name="" descr="{&quot;isTemplate&quot;:true,&quot;type&quot;:&quot;text&quot;}"/>
+          <p:cNvPr id="381" name="" descr="{&quot;isTemplate&quot;:true,&quot;type&quot;:&quot;text&quot;}"/>
           <p:cNvSpPr txBox="1"/>
           <p:nvPr/>
         </p:nvSpPr>
@@ -15755,7 +18414,7 @@
       </p:sp>
       <p:sp>
         <p:nvSpPr>
-          <p:cNvPr id="323" name=""/>
+          <p:cNvPr id="382" name=""/>
           <p:cNvSpPr/>
           <p:nvPr/>
         </p:nvSpPr>
@@ -15779,7 +18438,7 @@
       </p:sp>
       <p:sp>
         <p:nvSpPr>
-          <p:cNvPr id="324" name="" descr="{&quot;isTemplate&quot;:true,&quot;type&quot;:&quot;text&quot;}"/>
+          <p:cNvPr id="383" name="" descr="{&quot;isTemplate&quot;:true,&quot;type&quot;:&quot;text&quot;}"/>
           <p:cNvSpPr txBox="1"/>
           <p:nvPr/>
         </p:nvSpPr>
@@ -15814,7 +18473,7 @@
       </p:sp>
       <p:sp>
         <p:nvSpPr>
-          <p:cNvPr id="325" name="" descr="{&quot;isTemplate&quot;:true,&quot;type&quot;:&quot;text&quot;}"/>
+          <p:cNvPr id="384" name="" descr="{&quot;isTemplate&quot;:true,&quot;type&quot;:&quot;text&quot;}"/>
           <p:cNvSpPr txBox="1"/>
           <p:nvPr/>
         </p:nvSpPr>
@@ -15849,7 +18508,7 @@
       </p:sp>
       <p:sp>
         <p:nvSpPr>
-          <p:cNvPr id="326" name="" descr="{&quot;isTemplate&quot;:true,&quot;type&quot;:&quot;text&quot;}"/>
+          <p:cNvPr id="385" name="" descr="{&quot;isTemplate&quot;:true,&quot;type&quot;:&quot;text&quot;}"/>
           <p:cNvSpPr txBox="1"/>
           <p:nvPr/>
         </p:nvSpPr>
@@ -15904,7 +18563,7 @@
       </p:sp>
       <p:sp>
         <p:nvSpPr>
-          <p:cNvPr id="327" name="" descr="{&quot;isTemplate&quot;:true,&quot;type&quot;:&quot;text&quot;}"/>
+          <p:cNvPr id="386" name="" descr="{&quot;isTemplate&quot;:true,&quot;type&quot;:&quot;text&quot;}"/>
           <p:cNvSpPr txBox="1"/>
           <p:nvPr/>
         </p:nvSpPr>
@@ -15939,7 +18598,7 @@
       </p:sp>
       <p:sp>
         <p:nvSpPr>
-          <p:cNvPr id="328" name=""/>
+          <p:cNvPr id="387" name=""/>
           <p:cNvSpPr/>
           <p:nvPr/>
         </p:nvSpPr>
@@ -15979,7 +18638,7 @@
       </p:sp>
       <p:sp>
         <p:nvSpPr>
-          <p:cNvPr id="329" name="" descr="{&quot;isTemplate&quot;:true,&quot;type&quot;:&quot;text&quot;}"/>
+          <p:cNvPr id="388" name="" descr="{&quot;isTemplate&quot;:true,&quot;type&quot;:&quot;text&quot;}"/>
           <p:cNvSpPr txBox="1"/>
           <p:nvPr/>
         </p:nvSpPr>
@@ -16014,7 +18673,7 @@
       </p:sp>
       <p:sp>
         <p:nvSpPr>
-          <p:cNvPr id="330" name="" descr="{&quot;isTemplate&quot;:true,&quot;type&quot;:&quot;text&quot;}"/>
+          <p:cNvPr id="389" name="" descr="{&quot;isTemplate&quot;:true,&quot;type&quot;:&quot;text&quot;}"/>
           <p:cNvSpPr txBox="1"/>
           <p:nvPr/>
         </p:nvSpPr>
@@ -16059,7 +18718,7 @@
       </p:sp>
       <p:sp>
         <p:nvSpPr>
-          <p:cNvPr id="331" name="" descr="{&quot;isTemplate&quot;:true,&quot;type&quot;:&quot;text&quot;}"/>
+          <p:cNvPr id="390" name="" descr="{&quot;isTemplate&quot;:true,&quot;type&quot;:&quot;text&quot;}"/>
           <p:cNvSpPr txBox="1"/>
           <p:nvPr/>
         </p:nvSpPr>
@@ -16114,7 +18773,7 @@
       </p:sp>
       <p:sp>
         <p:nvSpPr>
-          <p:cNvPr id="332" name="" descr="{&quot;isTemplate&quot;:true,&quot;type&quot;:&quot;text&quot;}"/>
+          <p:cNvPr id="391" name="" descr="{&quot;isTemplate&quot;:true,&quot;type&quot;:&quot;text&quot;}"/>
           <p:cNvSpPr txBox="1"/>
           <p:nvPr/>
         </p:nvSpPr>
@@ -16189,7 +18848,7 @@
       </p:sp>
       <p:sp>
         <p:nvSpPr>
-          <p:cNvPr id="333" name=""/>
+          <p:cNvPr id="392" name=""/>
           <p:cNvSpPr/>
           <p:nvPr/>
         </p:nvSpPr>
@@ -16213,7 +18872,7 @@
       </p:sp>
       <p:sp>
         <p:nvSpPr>
-          <p:cNvPr id="334" name=""/>
+          <p:cNvPr id="393" name=""/>
           <p:cNvSpPr/>
           <p:nvPr/>
         </p:nvSpPr>
@@ -16253,7 +18912,7 @@
       </p:sp>
       <p:sp>
         <p:nvSpPr>
-          <p:cNvPr id="335" name="" descr="{&quot;isTemplate&quot;:true,&quot;type&quot;:&quot;text&quot;}"/>
+          <p:cNvPr id="394" name="" descr="{&quot;isTemplate&quot;:true,&quot;type&quot;:&quot;text&quot;}"/>
           <p:cNvSpPr txBox="1"/>
           <p:nvPr/>
         </p:nvSpPr>
@@ -16288,7 +18947,7 @@
       </p:sp>
       <p:sp>
         <p:nvSpPr>
-          <p:cNvPr id="336" name="" descr="{&quot;isTemplate&quot;:true,&quot;type&quot;:&quot;text&quot;}"/>
+          <p:cNvPr id="395" name="" descr="{&quot;isTemplate&quot;:true,&quot;type&quot;:&quot;text&quot;}"/>
           <p:cNvSpPr txBox="1"/>
           <p:nvPr/>
         </p:nvSpPr>
@@ -16333,7 +18992,7 @@
       </p:sp>
       <p:sp>
         <p:nvSpPr>
-          <p:cNvPr id="337" name="" descr="{&quot;isTemplate&quot;:true,&quot;type&quot;:&quot;text&quot;}"/>
+          <p:cNvPr id="396" name="" descr="{&quot;isTemplate&quot;:true,&quot;type&quot;:&quot;text&quot;}"/>
           <p:cNvSpPr txBox="1"/>
           <p:nvPr/>
         </p:nvSpPr>
@@ -16378,7 +19037,7 @@
       </p:sp>
       <p:sp>
         <p:nvSpPr>
-          <p:cNvPr id="338" name="" descr="{&quot;isTemplate&quot;:true,&quot;type&quot;:&quot;text&quot;}"/>
+          <p:cNvPr id="397" name="" descr="{&quot;isTemplate&quot;:true,&quot;type&quot;:&quot;text&quot;}"/>
           <p:cNvSpPr txBox="1"/>
           <p:nvPr/>
         </p:nvSpPr>
@@ -16453,7 +19112,7 @@
       </p:sp>
       <p:sp>
         <p:nvSpPr>
-          <p:cNvPr id="339" name=""/>
+          <p:cNvPr id="398" name=""/>
           <p:cNvSpPr/>
           <p:nvPr/>
         </p:nvSpPr>
@@ -16493,7 +19152,7 @@
       </p:sp>
       <p:sp>
         <p:nvSpPr>
-          <p:cNvPr id="340" name="" descr="{&quot;isTemplate&quot;:true,&quot;type&quot;:&quot;text&quot;}"/>
+          <p:cNvPr id="399" name="" descr="{&quot;isTemplate&quot;:true,&quot;type&quot;:&quot;text&quot;}"/>
           <p:cNvSpPr txBox="1"/>
           <p:nvPr/>
         </p:nvSpPr>
@@ -16528,7 +19187,7 @@
       </p:sp>
       <p:sp>
         <p:nvSpPr>
-          <p:cNvPr id="341" name="" descr="{&quot;isTemplate&quot;:true,&quot;type&quot;:&quot;text&quot;}"/>
+          <p:cNvPr id="400" name="" descr="{&quot;isTemplate&quot;:true,&quot;type&quot;:&quot;text&quot;}"/>
           <p:cNvSpPr txBox="1"/>
           <p:nvPr/>
         </p:nvSpPr>
@@ -16563,7 +19222,7 @@
       </p:sp>
       <p:sp>
         <p:nvSpPr>
-          <p:cNvPr id="342" name="" descr="{&quot;isTemplate&quot;:true,&quot;type&quot;:&quot;text&quot;}"/>
+          <p:cNvPr id="401" name="" descr="{&quot;isTemplate&quot;:true,&quot;type&quot;:&quot;text&quot;}"/>
           <p:cNvSpPr txBox="1"/>
           <p:nvPr/>
         </p:nvSpPr>
@@ -16618,7 +19277,7 @@
       </p:sp>
       <p:sp>
         <p:nvSpPr>
-          <p:cNvPr id="343" name="" descr="{&quot;isTemplate&quot;:true,&quot;type&quot;:&quot;text&quot;}"/>
+          <p:cNvPr id="402" name="" descr="{&quot;isTemplate&quot;:true,&quot;type&quot;:&quot;text&quot;}"/>
           <p:cNvSpPr txBox="1"/>
           <p:nvPr/>
         </p:nvSpPr>
@@ -16653,7 +19312,7 @@
       </p:sp>
       <p:sp>
         <p:nvSpPr>
-          <p:cNvPr id="344" name=""/>
+          <p:cNvPr id="403" name=""/>
           <p:cNvSpPr/>
           <p:nvPr/>
         </p:nvSpPr>
@@ -16677,7 +19336,7 @@
       </p:sp>
       <p:sp>
         <p:nvSpPr>
-          <p:cNvPr id="345" name=""/>
+          <p:cNvPr id="404" name=""/>
           <p:cNvSpPr/>
           <p:nvPr/>
         </p:nvSpPr>
@@ -16717,7 +19376,7 @@
       </p:sp>
       <p:sp>
         <p:nvSpPr>
-          <p:cNvPr id="346" name="" descr="{&quot;isTemplate&quot;:true,&quot;type&quot;:&quot;text&quot;}"/>
+          <p:cNvPr id="405" name="" descr="{&quot;isTemplate&quot;:true,&quot;type&quot;:&quot;text&quot;}"/>
           <p:cNvSpPr txBox="1"/>
           <p:nvPr/>
         </p:nvSpPr>
@@ -16752,7 +19411,7 @@
       </p:sp>
       <p:sp>
         <p:nvSpPr>
-          <p:cNvPr id="347" name="" descr="{&quot;isTemplate&quot;:true,&quot;type&quot;:&quot;text&quot;}"/>
+          <p:cNvPr id="406" name="" descr="{&quot;isTemplate&quot;:true,&quot;type&quot;:&quot;text&quot;}"/>
           <p:cNvSpPr txBox="1"/>
           <p:nvPr/>
         </p:nvSpPr>
@@ -16807,7 +19466,7 @@
       </p:sp>
       <p:sp>
         <p:nvSpPr>
-          <p:cNvPr id="348" name="" descr="{&quot;isTemplate&quot;:true,&quot;type&quot;:&quot;text&quot;}"/>
+          <p:cNvPr id="407" name="" descr="{&quot;isTemplate&quot;:true,&quot;type&quot;:&quot;text&quot;}"/>
           <p:cNvSpPr txBox="1"/>
           <p:nvPr/>
         </p:nvSpPr>
@@ -16872,7 +19531,7 @@
       </p:sp>
       <p:sp>
         <p:nvSpPr>
-          <p:cNvPr id="349" name="" descr="{&quot;isTemplate&quot;:true,&quot;type&quot;:&quot;text&quot;}"/>
+          <p:cNvPr id="408" name="" descr="{&quot;isTemplate&quot;:true,&quot;type&quot;:&quot;text&quot;}"/>
           <p:cNvSpPr txBox="1"/>
           <p:nvPr/>
         </p:nvSpPr>
@@ -16947,7 +19606,7 @@
       </p:sp>
       <p:sp>
         <p:nvSpPr>
-          <p:cNvPr id="350" name=""/>
+          <p:cNvPr id="409" name=""/>
           <p:cNvSpPr/>
           <p:nvPr/>
         </p:nvSpPr>
@@ -16971,7 +19630,7 @@
       </p:sp>
       <p:sp>
         <p:nvSpPr>
-          <p:cNvPr id="351" name=""/>
+          <p:cNvPr id="410" name=""/>
           <p:cNvSpPr/>
           <p:nvPr/>
         </p:nvSpPr>
@@ -17011,7 +19670,7 @@
       </p:sp>
       <p:sp>
         <p:nvSpPr>
-          <p:cNvPr id="352" name=""/>
+          <p:cNvPr id="411" name=""/>
           <p:cNvSpPr/>
           <p:nvPr/>
         </p:nvSpPr>
@@ -17051,7 +19710,7 @@
       </p:sp>
       <p:sp>
         <p:nvSpPr>
-          <p:cNvPr id="353" name="" descr="{&quot;isTemplate&quot;:true,&quot;type&quot;:&quot;text&quot;}"/>
+          <p:cNvPr id="412" name="" descr="{&quot;isTemplate&quot;:true,&quot;type&quot;:&quot;text&quot;}"/>
           <p:cNvSpPr txBox="1"/>
           <p:nvPr/>
         </p:nvSpPr>
@@ -17086,7 +19745,7 @@
       </p:sp>
       <p:sp>
         <p:nvSpPr>
-          <p:cNvPr id="354" name="" descr="{&quot;isTemplate&quot;:true,&quot;type&quot;:&quot;text&quot;}"/>
+          <p:cNvPr id="413" name="" descr="{&quot;isTemplate&quot;:true,&quot;type&quot;:&quot;text&quot;}"/>
           <p:cNvSpPr txBox="1"/>
           <p:nvPr/>
         </p:nvSpPr>
@@ -17171,7 +19830,7 @@
       </p:sp>
       <p:sp>
         <p:nvSpPr>
-          <p:cNvPr id="355" name="" descr="{&quot;isTemplate&quot;:true,&quot;type&quot;:&quot;text&quot;}"/>
+          <p:cNvPr id="414" name="" descr="{&quot;isTemplate&quot;:true,&quot;type&quot;:&quot;text&quot;}"/>
           <p:cNvSpPr txBox="1"/>
           <p:nvPr/>
         </p:nvSpPr>
@@ -17206,7 +19865,7 @@
       </p:sp>
       <p:sp>
         <p:nvSpPr>
-          <p:cNvPr id="356" name="" descr="{&quot;isTemplate&quot;:true,&quot;type&quot;:&quot;text&quot;}"/>
+          <p:cNvPr id="415" name="" descr="{&quot;isTemplate&quot;:true,&quot;type&quot;:&quot;text&quot;}"/>
           <p:cNvSpPr txBox="1"/>
           <p:nvPr/>
         </p:nvSpPr>
@@ -17281,29 +19940,29 @@
       </p:sp>
       <p:sp>
         <p:nvSpPr>
-          <p:cNvPr id="357" name=""/>
+          <p:cNvPr id="416" name=""/>
           <p:cNvSpPr/>
           <p:nvPr/>
         </p:nvSpPr>
         <p:spPr>
           <a:xfrm rot="0" flipH="0" flipV="0">
             <a:off x="381000" y="4962525"/>
-            <a:ext cx="11430000" cy="561975"/>
+            <a:ext cx="11430000" cy="628650"/>
           </a:xfrm>
           <a:custGeom>
             <a:pathLst>
-              <a:path w="1200" h="59">
+              <a:path w="1200" h="66">
                 <a:moveTo>
-                  <a:pt x="0" y="58"/>
+                  <a:pt x="0" y="65"/>
                 </a:moveTo>
                 <a:lnTo>
-                  <a:pt x="1200" y="58"/>
+                  <a:pt x="1200" y="65"/>
                 </a:lnTo>
                 <a:lnTo>
-                  <a:pt x="1200" y="59"/>
+                  <a:pt x="1200" y="66"/>
                 </a:lnTo>
                 <a:lnTo>
-                  <a:pt x="0" y="59"/>
+                  <a:pt x="0" y="66"/>
                 </a:lnTo>
                 <a:close/>
               </a:path>
@@ -17321,13 +19980,13 @@
       </p:sp>
       <p:sp>
         <p:nvSpPr>
-          <p:cNvPr id="358" name="" descr="{&quot;isTemplate&quot;:true,&quot;type&quot;:&quot;text&quot;}"/>
-          <p:cNvSpPr txBox="1"/>
-          <p:nvPr/>
-        </p:nvSpPr>
-        <p:spPr>
-          <a:xfrm rot="0" flipH="0" flipV="0">
-            <a:off x="514350" y="5133975"/>
+          <p:cNvPr id="417" name="" descr="{&quot;isTemplate&quot;:true,&quot;type&quot;:&quot;text&quot;}"/>
+          <p:cNvSpPr txBox="1"/>
+          <p:nvPr/>
+        </p:nvSpPr>
+        <p:spPr>
+          <a:xfrm rot="0" flipH="0" flipV="0">
+            <a:off x="514350" y="5162550"/>
             <a:ext cx="419100" cy="209550"/>
           </a:xfrm>
           <a:prstGeom prst="rect"/>
@@ -17356,13 +20015,13 @@
       </p:sp>
       <p:sp>
         <p:nvSpPr>
-          <p:cNvPr id="359" name="" descr="{&quot;isTemplate&quot;:true,&quot;type&quot;:&quot;text&quot;}"/>
-          <p:cNvSpPr txBox="1"/>
-          <p:nvPr/>
-        </p:nvSpPr>
-        <p:spPr>
-          <a:xfrm rot="0" flipH="0" flipV="0">
-            <a:off x="933450" y="5133975"/>
+          <p:cNvPr id="418" name="" descr="{&quot;isTemplate&quot;:true,&quot;type&quot;:&quot;text&quot;}"/>
+          <p:cNvSpPr txBox="1"/>
+          <p:nvPr/>
+        </p:nvSpPr>
+        <p:spPr>
+          <a:xfrm rot="0" flipH="0" flipV="0">
+            <a:off x="933450" y="5162550"/>
             <a:ext cx="2457450" cy="209550"/>
           </a:xfrm>
           <a:prstGeom prst="rect"/>
@@ -17411,19 +20070,21 @@
       </p:sp>
       <p:sp>
         <p:nvSpPr>
-          <p:cNvPr id="360" name="" descr="{&quot;isTemplate&quot;:true,&quot;type&quot;:&quot;text&quot;}"/>
-          <p:cNvSpPr txBox="1"/>
-          <p:nvPr/>
-        </p:nvSpPr>
-        <p:spPr>
-          <a:xfrm rot="0" flipH="0" flipV="0">
-            <a:off x="3390900" y="5133975"/>
-            <a:ext cx="3962400" cy="209550"/>
-          </a:xfrm>
-          <a:prstGeom prst="rect"/>
-        </p:spPr>
-        <p:txBody>
-          <a:bodyPr wrap="none" lIns="0" tIns="0" rIns="0" bIns="0"/>
+          <p:cNvPr id="419" name="" descr="{&quot;isTemplate&quot;:true,&quot;type&quot;:&quot;text&quot;}"/>
+          <p:cNvSpPr txBox="1"/>
+          <p:nvPr/>
+        </p:nvSpPr>
+        <p:spPr>
+          <a:xfrm rot="0" flipH="0" flipV="0">
+            <a:off x="3390900" y="5057775"/>
+            <a:ext cx="3962400" cy="419100"/>
+          </a:xfrm>
+          <a:prstGeom prst="rect"/>
+        </p:spPr>
+        <p:txBody>
+          <a:bodyPr wrap="square" lIns="0" tIns="0" rIns="0" bIns="0">
+            <a:normAutofit/>
+          </a:bodyPr>
           <a:p>
             <a:pPr>
               <a:lnSpc>
@@ -17448,7 +20109,7 @@
                 <a:latin typeface="Microsoft YaHei"/>
                 <a:ea typeface="Microsoft YaHei"/>
               </a:rPr>
-              <a:t xml:space="preserve"> &gt; 5 </a:t>
+              <a:t xml:space="preserve"> = </a:t>
             </a:r>
             <a:r>
               <a:rPr lang="zh-CN" sz="1350">
@@ -17458,6 +20119,26 @@
                 <a:latin typeface="Microsoft YaHei"/>
                 <a:ea typeface="Microsoft YaHei"/>
               </a:rPr>
+              <a:t>加权图距</a:t>
+            </a:r>
+            <a:r>
+              <a:rPr lang="en-US" sz="1350">
+                <a:solidFill>
+                  <a:srgbClr val="1A2230"/>
+                </a:solidFill>
+                <a:latin typeface="Microsoft YaHei"/>
+                <a:ea typeface="Microsoft YaHei"/>
+              </a:rPr>
+              <a:t xml:space="preserve"> &gt; 10 </a:t>
+            </a:r>
+            <a:r>
+              <a:rPr lang="zh-CN" sz="1350">
+                <a:solidFill>
+                  <a:srgbClr val="1A2230"/>
+                </a:solidFill>
+                <a:latin typeface="Microsoft YaHei"/>
+                <a:ea typeface="Microsoft YaHei"/>
+              </a:rPr>
               <a:t>触发；</a:t>
             </a:r>
             <a:r>
@@ -17476,13 +20157,13 @@
       </p:sp>
       <p:sp>
         <p:nvSpPr>
-          <p:cNvPr id="361" name="" descr="{&quot;isTemplate&quot;:true,&quot;type&quot;:&quot;text&quot;}"/>
-          <p:cNvSpPr txBox="1"/>
-          <p:nvPr/>
-        </p:nvSpPr>
-        <p:spPr>
-          <a:xfrm rot="0" flipH="0" flipV="0">
-            <a:off x="7353300" y="5133975"/>
+          <p:cNvPr id="420" name="" descr="{&quot;isTemplate&quot;:true,&quot;type&quot;:&quot;text&quot;}"/>
+          <p:cNvSpPr txBox="1"/>
+          <p:nvPr/>
+        </p:nvSpPr>
+        <p:spPr>
+          <a:xfrm rot="0" flipH="0" flipV="0">
+            <a:off x="7353300" y="5162550"/>
             <a:ext cx="4324350" cy="209550"/>
           </a:xfrm>
           <a:prstGeom prst="rect"/>
@@ -17551,14 +20232,14 @@
       </p:sp>
       <p:sp>
         <p:nvSpPr>
-          <p:cNvPr id="362" name=""/>
+          <p:cNvPr id="421" name=""/>
           <p:cNvSpPr/>
           <p:nvPr/>
         </p:nvSpPr>
         <p:spPr>
           <a:xfrm rot="0" flipH="0" flipV="0">
-            <a:off x="381000" y="5514975"/>
-            <a:ext cx="11430000" cy="552450"/>
+            <a:off x="381000" y="5581650"/>
+            <a:ext cx="11430000" cy="609600"/>
           </a:xfrm>
           <a:prstGeom prst="rect">
             <a:avLst/>
@@ -17575,13 +20256,13 @@
       </p:sp>
       <p:sp>
         <p:nvSpPr>
-          <p:cNvPr id="363" name="" descr="{&quot;isTemplate&quot;:true,&quot;type&quot;:&quot;text&quot;}"/>
-          <p:cNvSpPr txBox="1"/>
-          <p:nvPr/>
-        </p:nvSpPr>
-        <p:spPr>
-          <a:xfrm rot="0" flipH="0" flipV="0">
-            <a:off x="514350" y="5686425"/>
+          <p:cNvPr id="422" name="" descr="{&quot;isTemplate&quot;:true,&quot;type&quot;:&quot;text&quot;}"/>
+          <p:cNvSpPr txBox="1"/>
+          <p:nvPr/>
+        </p:nvSpPr>
+        <p:spPr>
+          <a:xfrm rot="0" flipH="0" flipV="0">
+            <a:off x="514350" y="5781675"/>
             <a:ext cx="419100" cy="209550"/>
           </a:xfrm>
           <a:prstGeom prst="rect"/>
@@ -17610,13 +20291,13 @@
       </p:sp>
       <p:sp>
         <p:nvSpPr>
-          <p:cNvPr id="364" name="" descr="{&quot;isTemplate&quot;:true,&quot;type&quot;:&quot;text&quot;}"/>
-          <p:cNvSpPr txBox="1"/>
-          <p:nvPr/>
-        </p:nvSpPr>
-        <p:spPr>
-          <a:xfrm rot="0" flipH="0" flipV="0">
-            <a:off x="933450" y="5686425"/>
+          <p:cNvPr id="423" name="" descr="{&quot;isTemplate&quot;:true,&quot;type&quot;:&quot;text&quot;}"/>
+          <p:cNvSpPr txBox="1"/>
+          <p:nvPr/>
+        </p:nvSpPr>
+        <p:spPr>
+          <a:xfrm rot="0" flipH="0" flipV="0">
+            <a:off x="933450" y="5781675"/>
             <a:ext cx="2457450" cy="209550"/>
           </a:xfrm>
           <a:prstGeom prst="rect"/>
@@ -17665,19 +20346,21 @@
       </p:sp>
       <p:sp>
         <p:nvSpPr>
-          <p:cNvPr id="365" name="" descr="{&quot;isTemplate&quot;:true,&quot;type&quot;:&quot;text&quot;}"/>
-          <p:cNvSpPr txBox="1"/>
-          <p:nvPr/>
-        </p:nvSpPr>
-        <p:spPr>
-          <a:xfrm rot="0" flipH="0" flipV="0">
-            <a:off x="3390900" y="5686425"/>
-            <a:ext cx="3962400" cy="209550"/>
-          </a:xfrm>
-          <a:prstGeom prst="rect"/>
-        </p:spPr>
-        <p:txBody>
-          <a:bodyPr wrap="none" lIns="0" tIns="0" rIns="0" bIns="0"/>
+          <p:cNvPr id="424" name="" descr="{&quot;isTemplate&quot;:true,&quot;type&quot;:&quot;text&quot;}"/>
+          <p:cNvSpPr txBox="1"/>
+          <p:nvPr/>
+        </p:nvSpPr>
+        <p:spPr>
+          <a:xfrm rot="0" flipH="0" flipV="0">
+            <a:off x="3390900" y="5676900"/>
+            <a:ext cx="3962400" cy="419100"/>
+          </a:xfrm>
+          <a:prstGeom prst="rect"/>
+        </p:spPr>
+        <p:txBody>
+          <a:bodyPr wrap="square" lIns="0" tIns="0" rIns="0" bIns="0">
+            <a:normAutofit/>
+          </a:bodyPr>
           <a:p>
             <a:pPr>
               <a:lnSpc>
@@ -17702,7 +20385,7 @@
                 <a:latin typeface="Microsoft YaHei"/>
                 <a:ea typeface="Microsoft YaHei"/>
               </a:rPr>
-              <a:t>且占比</a:t>
+              <a:t>且可并数</a:t>
             </a:r>
             <a:r>
               <a:rPr lang="en-US" sz="1350">
@@ -17712,7 +20395,7 @@
                 <a:latin typeface="Microsoft YaHei"/>
                 <a:ea typeface="Microsoft YaHei"/>
               </a:rPr>
-              <a:t xml:space="preserve"> &gt; 20% → KL </a:t>
+              <a:t xml:space="preserve"> &gt; max(10%, 20 </a:t>
             </a:r>
             <a:r>
               <a:rPr lang="zh-CN" sz="1350">
@@ -17722,21 +20405,41 @@
                 <a:latin typeface="Microsoft YaHei"/>
                 <a:ea typeface="Microsoft YaHei"/>
               </a:rPr>
-              <a:t>合并</a:t>
-            </a:r>
-            <a:endParaRPr/>
-          </a:p>
-        </p:txBody>
-      </p:sp>
-      <p:sp>
-        <p:nvSpPr>
-          <p:cNvPr id="366" name="" descr="{&quot;isTemplate&quot;:true,&quot;type&quot;:&quot;text&quot;}"/>
-          <p:cNvSpPr txBox="1"/>
-          <p:nvPr/>
-        </p:nvSpPr>
-        <p:spPr>
-          <a:xfrm rot="0" flipH="0" flipV="0">
-            <a:off x="7353300" y="5686425"/>
+              <a:t>万</a:t>
+            </a:r>
+            <a:r>
+              <a:rPr lang="en-US" sz="1350">
+                <a:solidFill>
+                  <a:srgbClr val="1A2230"/>
+                </a:solidFill>
+                <a:latin typeface="Microsoft YaHei"/>
+                <a:ea typeface="Microsoft YaHei"/>
+              </a:rPr>
+              <a:t xml:space="preserve">) → kNN </a:t>
+            </a:r>
+            <a:r>
+              <a:rPr lang="zh-CN" sz="1350">
+                <a:solidFill>
+                  <a:srgbClr val="1A2230"/>
+                </a:solidFill>
+                <a:latin typeface="Microsoft YaHei"/>
+                <a:ea typeface="Microsoft YaHei"/>
+              </a:rPr>
+              <a:t>加权合并</a:t>
+            </a:r>
+            <a:endParaRPr/>
+          </a:p>
+        </p:txBody>
+      </p:sp>
+      <p:sp>
+        <p:nvSpPr>
+          <p:cNvPr id="425" name="" descr="{&quot;isTemplate&quot;:true,&quot;type&quot;:&quot;text&quot;}"/>
+          <p:cNvSpPr txBox="1"/>
+          <p:nvPr/>
+        </p:nvSpPr>
+        <p:spPr>
+          <a:xfrm rot="0" flipH="0" flipV="0">
+            <a:off x="7353300" y="5781675"/>
             <a:ext cx="4324350" cy="209550"/>
           </a:xfrm>
           <a:prstGeom prst="rect"/>
@@ -17765,13 +20468,13 @@
       </p:sp>
       <p:sp>
         <p:nvSpPr>
-          <p:cNvPr id="367" name="" descr="{&quot;isTemplate&quot;:true,&quot;type&quot;:&quot;text&quot;}"/>
-          <p:cNvSpPr txBox="1"/>
-          <p:nvPr/>
-        </p:nvSpPr>
-        <p:spPr>
-          <a:xfrm rot="0" flipH="0" flipV="0">
-            <a:off x="381000" y="6181725"/>
+          <p:cNvPr id="426" name="" descr="{&quot;isTemplate&quot;:true,&quot;type&quot;:&quot;text&quot;}"/>
+          <p:cNvSpPr txBox="1"/>
+          <p:nvPr/>
+        </p:nvSpPr>
+        <p:spPr>
+          <a:xfrm rot="0" flipH="0" flipV="0">
+            <a:off x="381000" y="6305550"/>
             <a:ext cx="11430000" cy="266700"/>
           </a:xfrm>
           <a:prstGeom prst="rect"/>
@@ -17920,13 +20623,13 @@
       </p:sp>
       <p:sp>
         <p:nvSpPr>
-          <p:cNvPr id="368" name="" descr="{&quot;isTemplate&quot;:true,&quot;type&quot;:&quot;text&quot;}"/>
-          <p:cNvSpPr txBox="1"/>
-          <p:nvPr/>
-        </p:nvSpPr>
-        <p:spPr>
-          <a:xfrm rot="0" flipH="0" flipV="0">
-            <a:off x="381000" y="6477000"/>
+          <p:cNvPr id="427" name="" descr="{&quot;isTemplate&quot;:true,&quot;type&quot;:&quot;text&quot;}"/>
+          <p:cNvSpPr txBox="1"/>
+          <p:nvPr/>
+        </p:nvSpPr>
+        <p:spPr>
+          <a:xfrm rot="0" flipH="0" flipV="0">
+            <a:off x="381000" y="6600825"/>
             <a:ext cx="11430000" cy="266700"/>
           </a:xfrm>
           <a:prstGeom prst="rect"/>
@@ -18113,7 +20816,7 @@
   <p:cSld>
     <p:spTree>
       <p:nvGrpSpPr>
-        <p:cNvPr id="369" name="" descr="&lt;Slide style={{ width: '1280px', height: '720px', backgroundColor: '#FFFFFF', padding: '0px', flexDirection: 'column' }}&gt;&#10;    &lt;Box style={{ width: '1280px', height: '8px', backgroundColor: '#1E4FA8' }} /&gt;&#10;    &lt;Box style={{ padding: '30px 40px 0px 40px', flexDirection: 'row', justifyContent: 'space-between', alignItems: 'flex-end' }}&gt;&#10;        &lt;Text style={{ fontSize: 34, fontWeight: 'bold', color: '#1E4FA8' }}&gt;关键方式①：两级匹配 + 加权协视图&lt;/Text&gt;&#10;        &lt;Text style={{ fontSize: 15, color: '#8B97A8' }}&gt;08 / 14&lt;/Text&gt;&#10;    &lt;/Box&gt;&#10;    &lt;Box style={{ padding: '18px 40px 0px 40px', flexDirection: 'column', gap: 0 }}&gt;&#10;        &lt;Box style={{ flexDirection: 'row', backgroundColor: '#1E4FA8', padding: '12px 16px' }}&gt;&#10;            &lt;Text style={{ width: '90px', fontSize: 20, fontWeight: 'bold', color: '#FFFFFF' }}&gt;层级&lt;/Text&gt;&#10;            &lt;Text style={{ flex: 2, fontSize: 20, fontWeight: 'bold', color: '#FFFFFF' }}&gt;方法&lt;/Text&gt;&#10;            &lt;Text style={{ flex: 3, fontSize: 20, fontWeight: 'bold', color: '#FFFFFF' }}&gt;作用&lt;/Text&gt;&#10;            &lt;Text style={{ flex: 1.6, fontSize: 20, fontWeight: 'bold', color: '#FFFFFF' }}&gt;代价&lt;/Text&gt;&#10;        &lt;/Box&gt;&#10;        &lt;Box style={{ flexDirection: 'row', padding: '13px 16px', borderBottom: '1px solid #D6DCE5' }}&gt;&#10;            &lt;Text style={{ width: '90px', fontSize: 20, fontWeight: 'bold', color: '#1E4FA8' }}&gt;1&lt;/Text&gt;&#10;            &lt;Text style={{ flex: 2, fontSize: 20, color: '#1A2230' }}&gt;视觉位置识别（全局描述子）&lt;/Text&gt;&#10;            &lt;Text style={{ flex: 3, fontSize: 20, color: '#1A2230' }}&gt;余弦相似度排序，取 top-20 候选&lt;/Text&gt;&#10;            &lt;Text style={{ flex: 1.6, fontSize: 20, color: '#1A2230' }}&gt;≈1 ms / 1000 对&lt;/Text&gt;&#10;        &lt;/Box&gt;&#10;        &lt;Box style={{ flexDirection: 'row', padding: '13px 16px', backgroundColor: '#F7F9FC', borderBottom: '1px solid #D6DCE5' }}&gt;&#10;            &lt;Text style={{ width: '90px', fontSize: 20, fontWeight: 'bold', color: '#1E4FA8' }}&gt;2&lt;/Text&gt;&#10;            &lt;Text style={{ flex: 2, fontSize: 20, color: '#1A2230' }}&gt;XFeat 轻量局部特征&lt;/Text&gt;&#10;            &lt;Text style={{ flex: 3, fontSize: 20, color: '#1A2230' }}&gt;按内点数从 20 中保留 5 个&lt;/Text&gt;&#10;            &lt;Text style={{ flex: 1.6, fontSize: 20, color: '#1A2230' }}&gt;≈0.5 ms / 对&lt;/Text&gt;&#10;        &lt;/Box&gt;&#10;        &lt;Box style={{ flexDirection: 'row', padding: '13px 16px', borderBottom: '1px solid #D6DCE5' }}&gt;&#10;            &lt;Text style={{ width: '90px', fontSize: 20, fontWeight: 'bold', color: '#1E4FA8' }}&gt;3&lt;/Text&gt;&#10;            &lt;Text style={{ flex: 2, fontSize: 20, color: '#1A2230' }}&gt;LightGlue + RANSAC&lt;/Text&gt;&#10;            &lt;Text style={{ flex: 3, fontSize: 20, color: '#1A2230' }}&gt;精确验证，内点数 &amp;gt; 500 才接受&lt;/Text&gt;&#10;            &lt;Text style={{ flex: 1.6, fontSize: 20, color: '#1A2230' }}&gt;≈4 ms / 对&lt;/Text&gt;&#10;        &lt;/Box&gt;&#10;    &lt;/Box&gt;&#10;    &lt;Box style={{ padding: '18px 40px 0px 40px', flexDirection: 'row', gap: 18 }}&gt;&#10;        &lt;Box style={{ flex: 1, backgroundColor: '#F0F5FC', borderRadius: 6, padding: '14px 18px', flexDirection: 'column' }}&gt;&#10;            &lt;Text style={{ fontSize: 22, fontWeight: 'bold', color: '#1E4FA8' }}&gt;加权协视图&lt;/Text&gt;&#10;            &lt;Text style={{ fontSize: 21, color: '#1A2230', lineHeight: 1.5, marginTop: 8 }}&gt;边权取内点数倒数 w = 1/#inliers：内点越多、边越&quot;短&quot;。于是图上的最短路 = 最可靠的位姿链。&lt;/Text&gt;&#10;        &lt;/Box&gt;&#10;        &lt;Box style={{ flex: 1, backgroundColor: '#F0F5FC', borderRadius: 6, padding: '14px 18px', flexDirection: 'column' }}&gt;&#10;            &lt;Text style={{ fontSize: 22, fontWeight: 'bold', color: '#1E4FA8' }}&gt;消融：这一环最关键&lt;/Text&gt;&#10;            &lt;Text style={{ fontSize: 21, color: '#1A2230', lineHeight: 1.5, marginTop: 8 }}&gt;去掉位置识别只比相邻 5 帧：PSNR 26.29 → &lt;b&gt;24.78 dB&lt;/b&gt;；改成优化最后 20 帧：→ &lt;b&gt;24.56 dB&lt;/b&gt;。&lt;/Text&gt;&#10;        &lt;/Box&gt;&#10;    &lt;/Box&gt;&#10;    &lt;Box style={{ padding: '12px 40px 0px 40px' }}&gt;&#10;        &lt;Text style={{ fontSize: 17, color: '#8B97A8' }}&gt;候选集逐级收缩：1000 对 → 20 → 5 → 1，精确匹配只作用在极小候选上，这是&quot;无序也能快&quot;的根本原因。&lt;/Text&gt;&#10;    &lt;/Box&gt;&#10;&lt;/Slide&gt;&#10;"/>
+        <p:cNvPr id="428" name="" descr="&lt;Slide style={{ width: '1280px', height: '720px', backgroundColor: '#FFFFFF', padding: '0px', flexDirection: 'column' }}&gt;&#10;    &lt;Box style={{ width: '1280px', height: '8px', backgroundColor: '#1E4FA8' }} /&gt;&#10;    &lt;Box style={{ padding: '30px 40px 0px 40px', flexDirection: 'row', justifyContent: 'space-between', alignItems: 'flex-end' }}&gt;&#10;        &lt;Text style={{ fontSize: 34, fontWeight: 'bold', color: '#1E4FA8' }}&gt;关键方式①：两级匹配 + 加权协视图&lt;/Text&gt;&#10;        &lt;Text style={{ fontSize: 15, color: '#8B97A8' }}&gt;08 / 15&lt;/Text&gt;&#10;    &lt;/Box&gt;&#10;    &lt;Box style={{ padding: '18px 40px 0px 40px', flexDirection: 'column', gap: 0 }}&gt;&#10;        &lt;Box style={{ flexDirection: 'row', backgroundColor: '#1E4FA8', padding: '12px 16px' }}&gt;&#10;            &lt;Text style={{ width: '90px', fontSize: 20, fontWeight: 'bold', color: '#FFFFFF' }}&gt;层级&lt;/Text&gt;&#10;            &lt;Text style={{ flex: 2, fontSize: 20, fontWeight: 'bold', color: '#FFFFFF' }}&gt;方法&lt;/Text&gt;&#10;            &lt;Text style={{ flex: 3, fontSize: 20, fontWeight: 'bold', color: '#FFFFFF' }}&gt;作用&lt;/Text&gt;&#10;            &lt;Text style={{ flex: 1.6, fontSize: 20, fontWeight: 'bold', color: '#FFFFFF' }}&gt;代价&lt;/Text&gt;&#10;        &lt;/Box&gt;&#10;        &lt;Box style={{ flexDirection: 'row', padding: '13px 16px', borderBottom: '1px solid #D6DCE5' }}&gt;&#10;            &lt;Text style={{ width: '90px', fontSize: 20, fontWeight: 'bold', color: '#1E4FA8' }}&gt;1&lt;/Text&gt;&#10;            &lt;Text style={{ flex: 2, fontSize: 20, color: '#1A2230' }}&gt;视觉位置识别（全局描述子）&lt;/Text&gt;&#10;            &lt;Text style={{ flex: 3, fontSize: 20, color: '#1A2230' }}&gt;余弦相似度排序，取 top-20 候选&lt;/Text&gt;&#10;            &lt;Text style={{ flex: 1.6, fontSize: 20, color: '#1A2230' }}&gt;≈1 ms / 1000 对&lt;/Text&gt;&#10;        &lt;/Box&gt;&#10;        &lt;Box style={{ flexDirection: 'row', padding: '13px 16px', backgroundColor: '#F7F9FC', borderBottom: '1px solid #D6DCE5' }}&gt;&#10;            &lt;Text style={{ width: '90px', fontSize: 20, fontWeight: 'bold', color: '#1E4FA8' }}&gt;2&lt;/Text&gt;&#10;            &lt;Text style={{ flex: 2, fontSize: 20, color: '#1A2230' }}&gt;XFeat 轻量局部特征&lt;/Text&gt;&#10;            &lt;Text style={{ flex: 3, fontSize: 20, color: '#1A2230' }}&gt;按内点数从 20 中保留 5 个&lt;/Text&gt;&#10;            &lt;Text style={{ flex: 1.6, fontSize: 20, color: '#1A2230' }}&gt;≈0.5 ms / 对&lt;/Text&gt;&#10;        &lt;/Box&gt;&#10;        &lt;Box style={{ flexDirection: 'row', padding: '13px 16px', borderBottom: '1px solid #D6DCE5' }}&gt;&#10;            &lt;Text style={{ width: '90px', fontSize: 20, fontWeight: 'bold', color: '#1E4FA8' }}&gt;3&lt;/Text&gt;&#10;            &lt;Text style={{ flex: 2, fontSize: 20, color: '#1A2230' }}&gt;LightGlue + RANSAC&lt;/Text&gt;&#10;            &lt;Text style={{ flex: 3, fontSize: 20, color: '#1A2230' }}&gt;精确验证，内点数 &amp;gt; 500 才接受&lt;/Text&gt;&#10;            &lt;Text style={{ flex: 1.6, fontSize: 20, color: '#1A2230' }}&gt;≈4 ms / 对&lt;/Text&gt;&#10;        &lt;/Box&gt;&#10;    &lt;/Box&gt;&#10;    &lt;Box style={{ padding: '18px 40px 0px 40px', flexDirection: 'row', gap: 18 }}&gt;&#10;        &lt;Box style={{ flex: 1, backgroundColor: '#F0F5FC', borderRadius: 6, padding: '14px 18px', flexDirection: 'column' }}&gt;&#10;            &lt;Text style={{ fontSize: 22, fontWeight: 'bold', color: '#1E4FA8' }}&gt;加权协视图&lt;/Text&gt;&#10;            &lt;Text style={{ fontSize: 21, color: '#1A2230', lineHeight: 1.5, marginTop: 8 }}&gt;边权取内点数倒数 w = 1/#inliers：内点越多、边越&quot;短&quot;。于是图上的最短路 = 最可靠的位姿链。&lt;/Text&gt;&#10;        &lt;/Box&gt;&#10;        &lt;Box style={{ flex: 1, backgroundColor: '#F0F5FC', borderRadius: 6, padding: '14px 18px', flexDirection: 'column' }}&gt;&#10;            &lt;Text style={{ fontSize: 22, fontWeight: 'bold', color: '#1E4FA8' }}&gt;消融：这一环最关键&lt;/Text&gt;&#10;            &lt;Text style={{ fontSize: 21, color: '#1A2230', lineHeight: 1.5, marginTop: 8 }}&gt;去掉位置识别只比相邻 5 帧：PSNR 26.29 → &lt;b&gt;24.78 dB&lt;/b&gt;；改成优化最后 20 帧：→ &lt;b&gt;24.56 dB&lt;/b&gt;。&lt;/Text&gt;&#10;        &lt;/Box&gt;&#10;    &lt;/Box&gt;&#10;    &lt;Box style={{ padding: '12px 40px 0px 40px' }}&gt;&#10;        &lt;Text style={{ fontSize: 17, color: '#8B97A8' }}&gt;候选集逐级收缩：1000 对 → 20 → 5 → 1，精确匹配只作用在极小候选上，这是&quot;无序也能快&quot;的根本原因。&lt;/Text&gt;&#10;    &lt;/Box&gt;&#10;&lt;/Slide&gt;&#10;"/>
         <p:cNvGrpSpPr/>
         <p:nvPr/>
       </p:nvGrpSpPr>
@@ -18127,7 +20830,7 @@
       </p:grpSpPr>
       <p:sp>
         <p:nvSpPr>
-          <p:cNvPr id="370" name=""/>
+          <p:cNvPr id="429" name=""/>
           <p:cNvSpPr/>
           <p:nvPr/>
         </p:nvSpPr>
@@ -18151,7 +20854,7 @@
       </p:sp>
       <p:sp>
         <p:nvSpPr>
-          <p:cNvPr id="371" name=""/>
+          <p:cNvPr id="430" name=""/>
           <p:cNvSpPr/>
           <p:nvPr/>
         </p:nvSpPr>
@@ -18175,7 +20878,7 @@
       </p:sp>
       <p:sp>
         <p:nvSpPr>
-          <p:cNvPr id="372" name="" descr="{&quot;isTemplate&quot;:true,&quot;type&quot;:&quot;text&quot;}"/>
+          <p:cNvPr id="431" name="" descr="{&quot;isTemplate&quot;:true,&quot;type&quot;:&quot;text&quot;}"/>
           <p:cNvSpPr txBox="1"/>
           <p:nvPr/>
         </p:nvSpPr>
@@ -18230,7 +20933,7 @@
       </p:sp>
       <p:sp>
         <p:nvSpPr>
-          <p:cNvPr id="373" name="" descr="{&quot;isTemplate&quot;:true,&quot;type&quot;:&quot;text&quot;}"/>
+          <p:cNvPr id="432" name="" descr="{&quot;isTemplate&quot;:true,&quot;type&quot;:&quot;text&quot;}"/>
           <p:cNvSpPr txBox="1"/>
           <p:nvPr/>
         </p:nvSpPr>
@@ -18257,15 +20960,15 @@
                 <a:latin typeface="Microsoft YaHei"/>
                 <a:ea typeface="Microsoft YaHei"/>
               </a:rPr>
-              <a:t>08 / 14</a:t>
-            </a:r>
-            <a:endParaRPr/>
-          </a:p>
-        </p:txBody>
-      </p:sp>
-      <p:sp>
-        <p:nvSpPr>
-          <p:cNvPr id="374" name=""/>
+              <a:t>08 / 15</a:t>
+            </a:r>
+            <a:endParaRPr/>
+          </a:p>
+        </p:txBody>
+      </p:sp>
+      <p:sp>
+        <p:nvSpPr>
+          <p:cNvPr id="433" name=""/>
           <p:cNvSpPr/>
           <p:nvPr/>
         </p:nvSpPr>
@@ -18289,7 +20992,7 @@
       </p:sp>
       <p:sp>
         <p:nvSpPr>
-          <p:cNvPr id="375" name="" descr="{&quot;isTemplate&quot;:true,&quot;type&quot;:&quot;text&quot;}"/>
+          <p:cNvPr id="434" name="" descr="{&quot;isTemplate&quot;:true,&quot;type&quot;:&quot;text&quot;}"/>
           <p:cNvSpPr txBox="1"/>
           <p:nvPr/>
         </p:nvSpPr>
@@ -18324,7 +21027,7 @@
       </p:sp>
       <p:sp>
         <p:nvSpPr>
-          <p:cNvPr id="376" name="" descr="{&quot;isTemplate&quot;:true,&quot;type&quot;:&quot;text&quot;}"/>
+          <p:cNvPr id="435" name="" descr="{&quot;isTemplate&quot;:true,&quot;type&quot;:&quot;text&quot;}"/>
           <p:cNvSpPr txBox="1"/>
           <p:nvPr/>
         </p:nvSpPr>
@@ -18359,7 +21062,7 @@
       </p:sp>
       <p:sp>
         <p:nvSpPr>
-          <p:cNvPr id="377" name="" descr="{&quot;isTemplate&quot;:true,&quot;type&quot;:&quot;text&quot;}"/>
+          <p:cNvPr id="436" name="" descr="{&quot;isTemplate&quot;:true,&quot;type&quot;:&quot;text&quot;}"/>
           <p:cNvSpPr txBox="1"/>
           <p:nvPr/>
         </p:nvSpPr>
@@ -18394,7 +21097,7 @@
       </p:sp>
       <p:sp>
         <p:nvSpPr>
-          <p:cNvPr id="378" name="" descr="{&quot;isTemplate&quot;:true,&quot;type&quot;:&quot;text&quot;}"/>
+          <p:cNvPr id="437" name="" descr="{&quot;isTemplate&quot;:true,&quot;type&quot;:&quot;text&quot;}"/>
           <p:cNvSpPr txBox="1"/>
           <p:nvPr/>
         </p:nvSpPr>
@@ -18429,7 +21132,7 @@
       </p:sp>
       <p:sp>
         <p:nvSpPr>
-          <p:cNvPr id="379" name=""/>
+          <p:cNvPr id="438" name=""/>
           <p:cNvSpPr/>
           <p:nvPr/>
         </p:nvSpPr>
@@ -18469,7 +21172,7 @@
       </p:sp>
       <p:sp>
         <p:nvSpPr>
-          <p:cNvPr id="380" name="" descr="{&quot;isTemplate&quot;:true,&quot;type&quot;:&quot;text&quot;}"/>
+          <p:cNvPr id="439" name="" descr="{&quot;isTemplate&quot;:true,&quot;type&quot;:&quot;text&quot;}"/>
           <p:cNvSpPr txBox="1"/>
           <p:nvPr/>
         </p:nvSpPr>
@@ -18504,7 +21207,7 @@
       </p:sp>
       <p:sp>
         <p:nvSpPr>
-          <p:cNvPr id="381" name="" descr="{&quot;isTemplate&quot;:true,&quot;type&quot;:&quot;text&quot;}"/>
+          <p:cNvPr id="440" name="" descr="{&quot;isTemplate&quot;:true,&quot;type&quot;:&quot;text&quot;}"/>
           <p:cNvSpPr txBox="1"/>
           <p:nvPr/>
         </p:nvSpPr>
@@ -18539,7 +21242,7 @@
       </p:sp>
       <p:sp>
         <p:nvSpPr>
-          <p:cNvPr id="382" name="" descr="{&quot;isTemplate&quot;:true,&quot;type&quot;:&quot;text&quot;}"/>
+          <p:cNvPr id="441" name="" descr="{&quot;isTemplate&quot;:true,&quot;type&quot;:&quot;text&quot;}"/>
           <p:cNvSpPr txBox="1"/>
           <p:nvPr/>
         </p:nvSpPr>
@@ -18594,7 +21297,7 @@
       </p:sp>
       <p:sp>
         <p:nvSpPr>
-          <p:cNvPr id="383" name="" descr="{&quot;isTemplate&quot;:true,&quot;type&quot;:&quot;text&quot;}"/>
+          <p:cNvPr id="442" name="" descr="{&quot;isTemplate&quot;:true,&quot;type&quot;:&quot;text&quot;}"/>
           <p:cNvSpPr txBox="1"/>
           <p:nvPr/>
         </p:nvSpPr>
@@ -18639,7 +21342,7 @@
       </p:sp>
       <p:sp>
         <p:nvSpPr>
-          <p:cNvPr id="384" name=""/>
+          <p:cNvPr id="443" name=""/>
           <p:cNvSpPr/>
           <p:nvPr/>
         </p:nvSpPr>
@@ -18663,7 +21366,7 @@
       </p:sp>
       <p:sp>
         <p:nvSpPr>
-          <p:cNvPr id="385" name=""/>
+          <p:cNvPr id="444" name=""/>
           <p:cNvSpPr/>
           <p:nvPr/>
         </p:nvSpPr>
@@ -18703,7 +21406,7 @@
       </p:sp>
       <p:sp>
         <p:nvSpPr>
-          <p:cNvPr id="386" name="" descr="{&quot;isTemplate&quot;:true,&quot;type&quot;:&quot;text&quot;}"/>
+          <p:cNvPr id="445" name="" descr="{&quot;isTemplate&quot;:true,&quot;type&quot;:&quot;text&quot;}"/>
           <p:cNvSpPr txBox="1"/>
           <p:nvPr/>
         </p:nvSpPr>
@@ -18738,7 +21441,7 @@
       </p:sp>
       <p:sp>
         <p:nvSpPr>
-          <p:cNvPr id="387" name="" descr="{&quot;isTemplate&quot;:true,&quot;type&quot;:&quot;text&quot;}"/>
+          <p:cNvPr id="446" name="" descr="{&quot;isTemplate&quot;:true,&quot;type&quot;:&quot;text&quot;}"/>
           <p:cNvSpPr txBox="1"/>
           <p:nvPr/>
         </p:nvSpPr>
@@ -18783,7 +21486,7 @@
       </p:sp>
       <p:sp>
         <p:nvSpPr>
-          <p:cNvPr id="388" name="" descr="{&quot;isTemplate&quot;:true,&quot;type&quot;:&quot;text&quot;}"/>
+          <p:cNvPr id="447" name="" descr="{&quot;isTemplate&quot;:true,&quot;type&quot;:&quot;text&quot;}"/>
           <p:cNvSpPr txBox="1"/>
           <p:nvPr/>
         </p:nvSpPr>
@@ -18858,7 +21561,7 @@
       </p:sp>
       <p:sp>
         <p:nvSpPr>
-          <p:cNvPr id="389" name="" descr="{&quot;isTemplate&quot;:true,&quot;type&quot;:&quot;text&quot;}"/>
+          <p:cNvPr id="448" name="" descr="{&quot;isTemplate&quot;:true,&quot;type&quot;:&quot;text&quot;}"/>
           <p:cNvSpPr txBox="1"/>
           <p:nvPr/>
         </p:nvSpPr>
@@ -18903,7 +21606,7 @@
       </p:sp>
       <p:sp>
         <p:nvSpPr>
-          <p:cNvPr id="390" name=""/>
+          <p:cNvPr id="449" name=""/>
           <p:cNvSpPr/>
           <p:nvPr/>
         </p:nvSpPr>
@@ -18943,7 +21646,7 @@
       </p:sp>
       <p:sp>
         <p:nvSpPr>
-          <p:cNvPr id="391" name="" descr="{&quot;isTemplate&quot;:true,&quot;type&quot;:&quot;text&quot;}"/>
+          <p:cNvPr id="450" name="" descr="{&quot;isTemplate&quot;:true,&quot;type&quot;:&quot;text&quot;}"/>
           <p:cNvSpPr txBox="1"/>
           <p:nvPr/>
         </p:nvSpPr>
@@ -18978,7 +21681,7 @@
       </p:sp>
       <p:sp>
         <p:nvSpPr>
-          <p:cNvPr id="392" name="" descr="{&quot;isTemplate&quot;:true,&quot;type&quot;:&quot;text&quot;}"/>
+          <p:cNvPr id="451" name="" descr="{&quot;isTemplate&quot;:true,&quot;type&quot;:&quot;text&quot;}"/>
           <p:cNvSpPr txBox="1"/>
           <p:nvPr/>
         </p:nvSpPr>
@@ -19013,7 +21716,7 @@
       </p:sp>
       <p:sp>
         <p:nvSpPr>
-          <p:cNvPr id="393" name="" descr="{&quot;isTemplate&quot;:true,&quot;type&quot;:&quot;text&quot;}"/>
+          <p:cNvPr id="452" name="" descr="{&quot;isTemplate&quot;:true,&quot;type&quot;:&quot;text&quot;}"/>
           <p:cNvSpPr txBox="1"/>
           <p:nvPr/>
         </p:nvSpPr>
@@ -19068,7 +21771,7 @@
       </p:sp>
       <p:sp>
         <p:nvSpPr>
-          <p:cNvPr id="394" name="" descr="{&quot;isTemplate&quot;:true,&quot;type&quot;:&quot;text&quot;}"/>
+          <p:cNvPr id="453" name="" descr="{&quot;isTemplate&quot;:true,&quot;type&quot;:&quot;text&quot;}"/>
           <p:cNvSpPr txBox="1"/>
           <p:nvPr/>
         </p:nvSpPr>
@@ -19113,7 +21816,7 @@
       </p:sp>
       <p:sp>
         <p:nvSpPr>
-          <p:cNvPr id="395" name=""/>
+          <p:cNvPr id="454" name=""/>
           <p:cNvSpPr/>
           <p:nvPr/>
         </p:nvSpPr>
@@ -19139,7 +21842,7 @@
       </p:sp>
       <p:sp>
         <p:nvSpPr>
-          <p:cNvPr id="396" name="" descr="{&quot;isTemplate&quot;:true,&quot;type&quot;:&quot;text&quot;}"/>
+          <p:cNvPr id="455" name="" descr="{&quot;isTemplate&quot;:true,&quot;type&quot;:&quot;text&quot;}"/>
           <p:cNvSpPr txBox="1"/>
           <p:nvPr/>
         </p:nvSpPr>
@@ -19174,7 +21877,7 @@
       </p:sp>
       <p:sp>
         <p:nvSpPr>
-          <p:cNvPr id="397" name="" descr="{&quot;isTemplate&quot;:true,&quot;type&quot;:&quot;text&quot;}"/>
+          <p:cNvPr id="456" name="" descr="{&quot;isTemplate&quot;:true,&quot;type&quot;:&quot;text&quot;}"/>
           <p:cNvSpPr txBox="1"/>
           <p:nvPr/>
         </p:nvSpPr>
@@ -19291,7 +21994,7 @@
       </p:sp>
       <p:sp>
         <p:nvSpPr>
-          <p:cNvPr id="398" name=""/>
+          <p:cNvPr id="457" name=""/>
           <p:cNvSpPr/>
           <p:nvPr/>
         </p:nvSpPr>
@@ -19317,7 +22020,7 @@
       </p:sp>
       <p:sp>
         <p:nvSpPr>
-          <p:cNvPr id="399" name="" descr="{&quot;isTemplate&quot;:true,&quot;type&quot;:&quot;text&quot;}"/>
+          <p:cNvPr id="458" name="" descr="{&quot;isTemplate&quot;:true,&quot;type&quot;:&quot;text&quot;}"/>
           <p:cNvSpPr txBox="1"/>
           <p:nvPr/>
         </p:nvSpPr>
@@ -19352,7 +22055,7 @@
       </p:sp>
       <p:sp>
         <p:nvSpPr>
-          <p:cNvPr id="400" name="" descr="{&quot;isTemplate&quot;:true,&quot;type&quot;:&quot;text&quot;}"/>
+          <p:cNvPr id="459" name="" descr="{&quot;isTemplate&quot;:true,&quot;type&quot;:&quot;text&quot;}"/>
           <p:cNvSpPr txBox="1"/>
           <p:nvPr/>
         </p:nvSpPr>
@@ -19489,7 +22192,7 @@
       </p:sp>
       <p:sp>
         <p:nvSpPr>
-          <p:cNvPr id="401" name="" descr="{&quot;isTemplate&quot;:true,&quot;type&quot;:&quot;text&quot;}"/>
+          <p:cNvPr id="460" name="" descr="{&quot;isTemplate&quot;:true,&quot;type&quot;:&quot;text&quot;}"/>
           <p:cNvSpPr txBox="1"/>
           <p:nvPr/>
         </p:nvSpPr>
@@ -19612,7 +22315,7 @@
   <p:cSld>
     <p:spTree>
       <p:nvGrpSpPr>
-        <p:cNvPr id="402" name="" descr="&lt;Slide style={{ width: '1280px', height: '720px', backgroundColor: '#FFFFFF', padding: '0px', flexDirection: 'column' }}&gt;&#10;    &lt;Box style={{ width: '1280px', height: '8px', backgroundColor: '#1E4FA8' }} /&gt;&#10;    &lt;Box style={{ padding: '30px 40px 0px 40px', flexDirection: 'row', justifyContent: 'space-between', alignItems: 'flex-end' }}&gt;&#10;        &lt;Text style={{ fontSize: 34, fontWeight: 'bold', color: '#1E4FA8' }}&gt;关键方式②③：局部 BA 与图传播回环&lt;/Text&gt;&#10;        &lt;Text style={{ fontSize: 15, color: '#8B97A8' }}&gt;09 / 14&lt;/Text&gt;&#10;    &lt;/Box&gt;&#10;    &lt;Box style={{ padding: '16px 40px 0px 40px', flexDirection: 'row', gap: 20 }}&gt;&#10;        &lt;Box style={{ flex: 1, backgroundColor: '#F7F9FC', border: '1px solid #D6DCE5', borderRadius: 6, padding: '16px 18px', flexDirection: 'column' }}&gt;&#10;            &lt;Text style={{ fontSize: 25, fontWeight: 'bold', color: '#1A2230' }}&gt;GPU 局部重建&lt;/Text&gt;&#10;            &lt;Text style={{ fontSize: 21, color: '#1A2230', lineHeight: 1.55, marginTop: 10 }}&gt;关键帧 &lt;b&gt;N=20&lt;/b&gt;（SLAM 通常只用 5 帧时间窗），路标点固定 &lt;b&gt;1 万&lt;/b&gt;，按被观测次数采样。&lt;/Text&gt;&#10;            &lt;Text style={{ fontSize: 21, color: '#1A2230', lineHeight: 1.55, marginTop: 8 }}&gt;每个路标只允许被协视性选出的固定子集观测，避免观测数随帧数二次增长。&lt;/Text&gt;&#10;            &lt;Text style={{ fontSize: 21, color: '#1A2230', lineHeight: 1.55, marginTop: 8 }}&gt;自写核函数算残差与雅可比，稠密 Schur 补求解。&lt;/Text&gt;&#10;            &lt;Text style={{ fontSize: 22, fontWeight: 'bold', color: '#1E4FA8', marginTop: 12 }}&gt;比 g2o / CUDA-BA 快约 5 倍&lt;/Text&gt;&#10;            &lt;Text style={{ fontSize: 21, color: '#1A2230', lineHeight: 1.55, marginTop: 10 }}&gt;高斯投放改为&lt;b&gt;分块估计深度尺度与偏移&lt;/b&gt;再插值上采样（消融 26.29 → 25.41 dB），落点更贴表面。&lt;/Text&gt;&#10;        &lt;/Box&gt;&#10;        &lt;Box style={{ flex: 1, backgroundColor: '#F0F5FC', border: '1px solid #3D7BD9', borderRadius: 6, padding: '16px 18px', flexDirection: 'column' }}&gt;&#10;            &lt;Text style={{ fontSize: 25, fontWeight: 'bold', color: '#1A2230' }}&gt;簇级回环 + 图传播&lt;/Text&gt;&#10;            &lt;Text style={{ fontSize: 21, color: '#1A2230', lineHeight: 1.55, marginTop: 10 }}&gt;检测：出现两组&quot;内部密、彼此疏&quot;的簇，图上跳数 &amp;gt; 5 且有效匹配对 &amp;gt; 2。&lt;/Text&gt;&#10;            &lt;Text style={{ fontSize: 21, color: '#1A2230', lineHeight: 1.55, marginTop: 8 }}&gt;求解：两簇各扩 N/2 帧组成焊接窗口做局部 BA，由锚点刚体变换与深度尺度得到 &lt;b&gt;Sim(3)&lt;/b&gt;。&lt;/Text&gt;&#10;            &lt;Text style={{ fontSize: 21, color: '#1A2230', lineHeight: 1.55, marginTop: 8 }}&gt;传播：Dijkstra 找累计权重最小的&lt;b&gt;主干路径&lt;/b&gt;，按测地距离比例插值（旋转用 6D、尺度取对数），对全图位姿与高斯套用同一变换。&lt;/Text&gt;&#10;            &lt;Text style={{ fontSize: 22, fontWeight: 'bold', color: '#D9534F', marginTop: 12 }}&gt;代价随场景规模近似线性&lt;/Text&gt;&#10;        &lt;/Box&gt;&#10;    &lt;/Box&gt;&#10;    &lt;Box style={{ margin: '18px 40px 0px 40px', backgroundColor: '#F0F5FC', borderLeft: '5px solid #1E4FA8', padding: '14px 20px' }}&gt;&#10;        &lt;Text style={{ fontSize: 21, color: '#1A2230', lineHeight: 1.5 }}&gt;用&quot;图上的距离&quot;替代&quot;全局优化的解&quot;——这是全文最值得借鉴的工程取舍：牺牲一点精度，换来数量级的实时性。&lt;/Text&gt;&#10;    &lt;/Box&gt;&#10;&lt;/Slide&gt;&#10;"/>
+        <p:cNvPr id="461" name="" descr="&lt;Slide style={{ width: '1280px', height: '720px', backgroundColor: '#FFFFFF', padding: '0px', flexDirection: 'column' }}&gt;&#10;    &lt;Box style={{ width: '1280px', height: '8px', backgroundColor: '#1E4FA8' }} /&gt;&#10;    &lt;Box style={{ padding: '30px 40px 0px 40px', flexDirection: 'row', justifyContent: 'space-between', alignItems: 'flex-end' }}&gt;&#10;        &lt;Text style={{ fontSize: 34, fontWeight: 'bold', color: '#1E4FA8' }}&gt;关键方式②③：局部 BA 与图传播回环&lt;/Text&gt;&#10;        &lt;Text style={{ fontSize: 15, color: '#8B97A8' }}&gt;09 / 15&lt;/Text&gt;&#10;    &lt;/Box&gt;&#10;    &lt;Box style={{ padding: '16px 40px 0px 40px', flexDirection: 'row', gap: 20 }}&gt;&#10;        &lt;Box style={{ flex: 1, backgroundColor: '#F7F9FC', border: '1px solid #D6DCE5', borderRadius: 6, padding: '16px 18px', flexDirection: 'column' }}&gt;&#10;            &lt;Text style={{ fontSize: 25, fontWeight: 'bold', color: '#1A2230' }}&gt;GPU 局部重建&lt;/Text&gt;&#10;            &lt;Text style={{ fontSize: 21, color: '#1A2230', lineHeight: 1.55, marginTop: 10 }}&gt;关键帧 &lt;b&gt;N=20&lt;/b&gt;（SLAM 通常只用 5 帧时间窗），路标点固定 &lt;b&gt;1 万&lt;/b&gt;，按被观测次数采样。&lt;/Text&gt;&#10;            &lt;Text style={{ fontSize: 21, color: '#1A2230', lineHeight: 1.55, marginTop: 8 }}&gt;每个路标只允许被协视性选出的固定子集观测，避免观测数随帧数二次增长。&lt;/Text&gt;&#10;            &lt;Text style={{ fontSize: 21, color: '#1A2230', lineHeight: 1.55, marginTop: 8 }}&gt;自写核函数算残差与雅可比，稠密 Schur 补求解。&lt;/Text&gt;&#10;            &lt;Text style={{ fontSize: 22, fontWeight: 'bold', color: '#1E4FA8', marginTop: 12 }}&gt;比 g2o / CUDA-BA 快约 5 倍&lt;/Text&gt;&#10;            &lt;Text style={{ fontSize: 21, color: '#1A2230', lineHeight: 1.55, marginTop: 10 }}&gt;高斯投放改为&lt;b&gt;分块估计深度尺度与偏移&lt;/b&gt;再插值上采样（消融 26.29 → 25.41 dB），落点更贴表面。&lt;/Text&gt;&#10;        &lt;/Box&gt;&#10;        &lt;Box style={{ flex: 1, backgroundColor: '#F0F5FC', border: '1px solid #3D7BD9', borderRadius: 6, padding: '16px 18px', flexDirection: 'column' }}&gt;&#10;            &lt;Text style={{ fontSize: 25, fontWeight: 'bold', color: '#1A2230' }}&gt;簇级回环 + 图传播&lt;/Text&gt;&#10;            &lt;Text style={{ fontSize: 21, color: '#1A2230', lineHeight: 1.55, marginTop: 10 }}&gt;检测：出现两组&quot;内部密、彼此疏&quot;的簇，图上跳数 &amp;gt; 5 且有效匹配对 &amp;gt; 2。&lt;/Text&gt;&#10;            &lt;Text style={{ fontSize: 21, color: '#1A2230', lineHeight: 1.55, marginTop: 8 }}&gt;求解：两簇各扩 N/2 帧组成焊接窗口做局部 BA，由锚点刚体变换与深度尺度得到 &lt;b&gt;Sim(3)&lt;/b&gt;。&lt;/Text&gt;&#10;            &lt;Text style={{ fontSize: 21, color: '#1A2230', lineHeight: 1.55, marginTop: 8 }}&gt;传播：Dijkstra 找累计权重最小的&lt;b&gt;主干路径&lt;/b&gt;，按测地距离比例插值（旋转用 6D、尺度取对数），对全图位姿与高斯套用同一变换。&lt;/Text&gt;&#10;            &lt;Text style={{ fontSize: 22, fontWeight: 'bold', color: '#D9534F', marginTop: 12 }}&gt;代价随场景规模近似线性&lt;/Text&gt;&#10;        &lt;/Box&gt;&#10;    &lt;/Box&gt;&#10;    &lt;Box style={{ margin: '18px 40px 0px 40px', backgroundColor: '#F0F5FC', borderLeft: '5px solid #1E4FA8', padding: '14px 20px' }}&gt;&#10;        &lt;Text style={{ fontSize: 21, color: '#1A2230', lineHeight: 1.5 }}&gt;用&quot;图上的距离&quot;替代&quot;全局优化的解&quot;——这是全文最值得借鉴的工程取舍：牺牲一点精度，换来数量级的实时性。&lt;/Text&gt;&#10;    &lt;/Box&gt;&#10;&lt;/Slide&gt;&#10;"/>
         <p:cNvGrpSpPr/>
         <p:nvPr/>
       </p:nvGrpSpPr>
@@ -19626,7 +22329,7 @@
       </p:grpSpPr>
       <p:sp>
         <p:nvSpPr>
-          <p:cNvPr id="403" name=""/>
+          <p:cNvPr id="462" name=""/>
           <p:cNvSpPr/>
           <p:nvPr/>
         </p:nvSpPr>
@@ -19650,7 +22353,7 @@
       </p:sp>
       <p:sp>
         <p:nvSpPr>
-          <p:cNvPr id="404" name=""/>
+          <p:cNvPr id="463" name=""/>
           <p:cNvSpPr/>
           <p:nvPr/>
         </p:nvSpPr>
@@ -19674,7 +22377,7 @@
       </p:sp>
       <p:sp>
         <p:nvSpPr>
-          <p:cNvPr id="405" name="" descr="{&quot;isTemplate&quot;:true,&quot;type&quot;:&quot;text&quot;}"/>
+          <p:cNvPr id="464" name="" descr="{&quot;isTemplate&quot;:true,&quot;type&quot;:&quot;text&quot;}"/>
           <p:cNvSpPr txBox="1"/>
           <p:nvPr/>
         </p:nvSpPr>
@@ -19729,7 +22432,7 @@
       </p:sp>
       <p:sp>
         <p:nvSpPr>
-          <p:cNvPr id="406" name="" descr="{&quot;isTemplate&quot;:true,&quot;type&quot;:&quot;text&quot;}"/>
+          <p:cNvPr id="465" name="" descr="{&quot;isTemplate&quot;:true,&quot;type&quot;:&quot;text&quot;}"/>
           <p:cNvSpPr txBox="1"/>
           <p:nvPr/>
         </p:nvSpPr>
@@ -19756,15 +22459,15 @@
                 <a:latin typeface="Microsoft YaHei"/>
                 <a:ea typeface="Microsoft YaHei"/>
               </a:rPr>
-              <a:t>09 / 14</a:t>
-            </a:r>
-            <a:endParaRPr/>
-          </a:p>
-        </p:txBody>
-      </p:sp>
-      <p:sp>
-        <p:nvSpPr>
-          <p:cNvPr id="407" name=""/>
+              <a:t>09 / 15</a:t>
+            </a:r>
+            <a:endParaRPr/>
+          </a:p>
+        </p:txBody>
+      </p:sp>
+      <p:sp>
+        <p:nvSpPr>
+          <p:cNvPr id="466" name=""/>
           <p:cNvSpPr/>
           <p:nvPr/>
         </p:nvSpPr>
@@ -19795,7 +22498,7 @@
       </p:sp>
       <p:sp>
         <p:nvSpPr>
-          <p:cNvPr id="408" name="" descr="{&quot;isTemplate&quot;:true,&quot;type&quot;:&quot;text&quot;}"/>
+          <p:cNvPr id="467" name="" descr="{&quot;isTemplate&quot;:true,&quot;type&quot;:&quot;text&quot;}"/>
           <p:cNvSpPr txBox="1"/>
           <p:nvPr/>
         </p:nvSpPr>
@@ -19840,7 +22543,7 @@
       </p:sp>
       <p:sp>
         <p:nvSpPr>
-          <p:cNvPr id="409" name="" descr="{&quot;isTemplate&quot;:true,&quot;type&quot;:&quot;text&quot;}"/>
+          <p:cNvPr id="468" name="" descr="{&quot;isTemplate&quot;:true,&quot;type&quot;:&quot;text&quot;}"/>
           <p:cNvSpPr txBox="1"/>
           <p:nvPr/>
         </p:nvSpPr>
@@ -19987,7 +22690,7 @@
       </p:sp>
       <p:sp>
         <p:nvSpPr>
-          <p:cNvPr id="410" name="" descr="{&quot;isTemplate&quot;:true,&quot;type&quot;:&quot;text&quot;}"/>
+          <p:cNvPr id="469" name="" descr="{&quot;isTemplate&quot;:true,&quot;type&quot;:&quot;text&quot;}"/>
           <p:cNvSpPr txBox="1"/>
           <p:nvPr/>
         </p:nvSpPr>
@@ -20024,7 +22727,7 @@
       </p:sp>
       <p:sp>
         <p:nvSpPr>
-          <p:cNvPr id="411" name="" descr="{&quot;isTemplate&quot;:true,&quot;type&quot;:&quot;text&quot;}"/>
+          <p:cNvPr id="470" name="" descr="{&quot;isTemplate&quot;:true,&quot;type&quot;:&quot;text&quot;}"/>
           <p:cNvSpPr txBox="1"/>
           <p:nvPr/>
         </p:nvSpPr>
@@ -20079,7 +22782,7 @@
       </p:sp>
       <p:sp>
         <p:nvSpPr>
-          <p:cNvPr id="412" name="" descr="{&quot;isTemplate&quot;:true,&quot;type&quot;:&quot;text&quot;}"/>
+          <p:cNvPr id="471" name="" descr="{&quot;isTemplate&quot;:true,&quot;type&quot;:&quot;text&quot;}"/>
           <p:cNvSpPr txBox="1"/>
           <p:nvPr/>
         </p:nvSpPr>
@@ -20154,7 +22857,7 @@
       </p:sp>
       <p:sp>
         <p:nvSpPr>
-          <p:cNvPr id="413" name="" descr="{&quot;isTemplate&quot;:true,&quot;type&quot;:&quot;text&quot;}"/>
+          <p:cNvPr id="472" name="" descr="{&quot;isTemplate&quot;:true,&quot;type&quot;:&quot;text&quot;}"/>
           <p:cNvSpPr txBox="1"/>
           <p:nvPr/>
         </p:nvSpPr>
@@ -20231,7 +22934,7 @@
       </p:sp>
       <p:sp>
         <p:nvSpPr>
-          <p:cNvPr id="414" name=""/>
+          <p:cNvPr id="473" name=""/>
           <p:cNvSpPr/>
           <p:nvPr/>
         </p:nvSpPr>
@@ -20262,7 +22965,7 @@
       </p:sp>
       <p:sp>
         <p:nvSpPr>
-          <p:cNvPr id="415" name="" descr="{&quot;isTemplate&quot;:true,&quot;type&quot;:&quot;text&quot;}"/>
+          <p:cNvPr id="474" name="" descr="{&quot;isTemplate&quot;:true,&quot;type&quot;:&quot;text&quot;}"/>
           <p:cNvSpPr txBox="1"/>
           <p:nvPr/>
         </p:nvSpPr>
@@ -20317,7 +23020,7 @@
       </p:sp>
       <p:sp>
         <p:nvSpPr>
-          <p:cNvPr id="416" name="" descr="{&quot;isTemplate&quot;:true,&quot;type&quot;:&quot;text&quot;}"/>
+          <p:cNvPr id="475" name="" descr="{&quot;isTemplate&quot;:true,&quot;type&quot;:&quot;text&quot;}"/>
           <p:cNvSpPr txBox="1"/>
           <p:nvPr/>
         </p:nvSpPr>
@@ -20434,7 +23137,7 @@
       </p:sp>
       <p:sp>
         <p:nvSpPr>
-          <p:cNvPr id="417" name="" descr="{&quot;isTemplate&quot;:true,&quot;type&quot;:&quot;text&quot;}"/>
+          <p:cNvPr id="476" name="" descr="{&quot;isTemplate&quot;:true,&quot;type&quot;:&quot;text&quot;}"/>
           <p:cNvSpPr txBox="1"/>
           <p:nvPr/>
         </p:nvSpPr>
@@ -20541,7 +23244,7 @@
       </p:sp>
       <p:sp>
         <p:nvSpPr>
-          <p:cNvPr id="418" name="" descr="{&quot;isTemplate&quot;:true,&quot;type&quot;:&quot;text&quot;}"/>
+          <p:cNvPr id="477" name="" descr="{&quot;isTemplate&quot;:true,&quot;type&quot;:&quot;text&quot;}"/>
           <p:cNvSpPr txBox="1"/>
           <p:nvPr/>
         </p:nvSpPr>
@@ -20638,7 +23341,7 @@
       </p:sp>
       <p:sp>
         <p:nvSpPr>
-          <p:cNvPr id="419" name="" descr="{&quot;isTemplate&quot;:true,&quot;type&quot;:&quot;text&quot;}"/>
+          <p:cNvPr id="478" name="" descr="{&quot;isTemplate&quot;:true,&quot;type&quot;:&quot;text&quot;}"/>
           <p:cNvSpPr txBox="1"/>
           <p:nvPr/>
         </p:nvSpPr>
@@ -20673,7 +23376,7 @@
       </p:sp>
       <p:sp>
         <p:nvSpPr>
-          <p:cNvPr id="420" name=""/>
+          <p:cNvPr id="479" name=""/>
           <p:cNvSpPr/>
           <p:nvPr/>
         </p:nvSpPr>
@@ -20697,7 +23400,7 @@
       </p:sp>
       <p:sp>
         <p:nvSpPr>
-          <p:cNvPr id="421" name=""/>
+          <p:cNvPr id="480" name=""/>
           <p:cNvSpPr/>
           <p:nvPr/>
         </p:nvSpPr>
@@ -20737,7 +23440,7 @@
       </p:sp>
       <p:sp>
         <p:nvSpPr>
-          <p:cNvPr id="422" name="" descr="{&quot;isTemplate&quot;:true,&quot;type&quot;:&quot;text&quot;}"/>
+          <p:cNvPr id="481" name="" descr="{&quot;isTemplate&quot;:true,&quot;type&quot;:&quot;text&quot;}"/>
           <p:cNvSpPr txBox="1"/>
           <p:nvPr/>
         </p:nvSpPr>

--- a/ecnu-cg/02-PPT/PPT-即时三维高斯泼溅重建.pptx
+++ b/ecnu-cg/02-PPT/PPT-即时三维高斯泼溅重建.pptx
@@ -8145,11 +8145,11 @@
 </file>
 
 <file path=ppt/slides/slide15.xml><?xml version="1.0" encoding="utf-8"?>
-<p:sld xmlns:p="http://schemas.openxmlformats.org/presentationml/2006/main" xmlns:a="http://schemas.openxmlformats.org/drawingml/2006/main">
+<p:sld xmlns:p="http://schemas.openxmlformats.org/presentationml/2006/main" xmlns:a="http://schemas.openxmlformats.org/drawingml/2006/main" xmlns:r="http://schemas.openxmlformats.org/officeDocument/2006/relationships">
   <p:cSld>
     <p:spTree>
       <p:nvGrpSpPr>
-        <p:cNvPr id="159" name="" descr="&lt;Slide style={{ width: '1280px', height: '720px', backgroundColor: '#FFFFFF', padding: '0px', flexDirection: 'column' }}&gt;&#10;    &lt;Box style={{ width: '1280px', height: '8px', backgroundColor: '#1E4FA8' }} /&gt;&#10;    &lt;Box style={{ padding: '16px 40px 0px 40px', flexDirection: 'row', justifyContent: 'space-between', alignItems: 'flex-end' }}&gt;&#10;        &lt;Text style={{ fontSize: 32, fontWeight: 'bold', color: '#1E4FA8' }}&gt;附：七个步骤在源码里长什么样&lt;/Text&gt;&#10;        &lt;Text style={{ fontSize: 15, color: '#8B97A8' }}&gt;15 / 15&lt;/Text&gt;&#10;    &lt;/Box&gt;&#10;    &lt;Box style={{ padding: '6px 40px 0px 40px' }}&gt;&#10;        &lt;Text style={{ fontSize: 17, color: '#4A5568' }}&gt;真实源码片段，行号对应第 7 页七步链：&lt;b&gt;①②③ 定跟谁比、④ 定跟谁一起算、⑤ 才真解位姿、⑥⑦ 修漂移与压显存&lt;/b&gt;。&lt;/Text&gt;&#10;    &lt;/Box&gt;&#10;    &lt;Box style={{ padding: '9px 40px 0px 40px', flexDirection: 'row', gap: 14 }}&gt;&#10;        &lt;Box style={{ flex: 1, flexDirection: 'column', gap: 8 }}&gt;&#10;        &lt;Box style={{ backgroundColor: '#0F1D33', borderRadius: 5, padding: '6px 11px 6px 11px', flexDirection: 'column' }}&gt;&#10;            &lt;Text style={{ fontSize: 13, fontWeight: 'bold', color: '#8FBBFF', marginBottom: 1 }}&gt;① ② ③  检索 → 粗筛 → 建边&lt;/Text&gt;&#10;            &lt;Text style={{ fontFamily: 'Consolas', fontSize: 10, color: '#6D87AC', marginBottom: 3 }}&gt;scene/scene_model_loop_closure.py:179&lt;/Text&gt;&#10;            &lt;Text style={{ fontFamily: 'Consolas', fontSize: 13, color: '#D7E3F6', lineHeight: 1.28 }}&gt;cossim = self.vpr_features @ vpr_feature.T     # 全局描述子&lt;/Text&gt;&#10;            &lt;Text style={{ fontFamily: 'Consolas', fontSize: 13, color: '#D7E3F6', lineHeight: 1.28 }}&gt;_, cand = torch.topk(cossim_best, n_candidates)   # top-20&lt;/Text&gt;&#10;            &lt;Text style={{ fontFamily: 'Consolas', fontSize: 13, color: '#D7E3F6', lineHeight: 1.28 }}&gt;n_m = self.matcher.batched_evaluate_match(...)  # XFeat&lt;/Text&gt;&#10;            &lt;Text style={{ fontFamily: 'Consolas', fontSize: 13, color: '#D7E3F6', lineHeight: 1.28 }}&gt;_, best = torch.topk(n_m, n)                      # 留 top-5&lt;/Text&gt;&#10;            &lt;Text style={{ fontFamily: 'Consolas', fontSize: 13, color: '#D7E3F6', lineHeight: 1.28 }}&gt;self.matcher(..., remove_outliers=True, use_lightglue=True)  # 建边&lt;/Text&gt;&#10;        &lt;/Box&gt;&#10;        &lt;Box style={{ backgroundColor: '#0F1D33', borderRadius: 5, padding: '6px 11px 6px 11px', flexDirection: 'column' }}&gt;&#10;            &lt;Text style={{ fontSize: 13, fontWeight: 'bold', color: '#8FBBFF', marginBottom: 1 }}&gt;④  协视图贪心扩张（式 1）&lt;/Text&gt;&#10;            &lt;Text style={{ fontFamily: 'Consolas', fontSize: 10, color: '#6D87AC', marginBottom: 3 }}&gt;poses/ba_problem.py:648&lt;/Text&gt;&#10;            &lt;Text style={{ fontFamily: 'Consolas', fontSize: 13, color: '#D7E3F6', lineHeight: 1.28 }}&gt;while len(selected_ids) &amp;#60; get_n_keyframes:        # 扩到 20 帧&lt;/Text&gt;&#10;            &lt;Text style={{ fontFamily: 'Consolas', fontSize: 13, color: '#D7E3F6', lineHeight: 1.28 }}&gt;    for sid in selected_ids:&lt;/Text&gt;&#10;            &lt;Text style={{ fontFamily: 'Consolas', fontSize: 13, color: '#D7E3F6', lineHeight: 1.28 }}&gt;        for nb in self.pose_graph.neighbors(sid):&lt;/Text&gt;&#10;            &lt;Text style={{ fontFamily: 'Consolas', fontSize: 13, color: '#D7E3F6', lineHeight: 1.28 }}&gt;            if nb not in selected_ids:            # 边权 = 1/|M|&lt;/Text&gt;&#10;            &lt;Text style={{ fontFamily: 'Consolas', fontSize: 13, color: '#D7E3F6', lineHeight: 1.28 }}&gt;                neighbor_counts[nb] += 1.0 / w(sid, nb)&lt;/Text&gt;&#10;            &lt;Text style={{ fontFamily: 'Consolas', fontSize: 13, color: '#D7E3F6', lineHeight: 1.28 }}&gt;    selected_ids.add(neighbor_counts.most_common(1)[0][0])&lt;/Text&gt;&#10;        &lt;/Box&gt;&#10;        &lt;Box style={{ backgroundColor: '#0F1D33', borderRadius: 5, padding: '6px 11px 6px 11px', flexDirection: 'column' }}&gt;&#10;            &lt;Text style={{ fontSize: 13, fontWeight: 'bold', color: '#8FBBFF', marginBottom: 1 }}&gt;⑤  局部 BA：LM 迭代 + Schur 消元&lt;/Text&gt;&#10;            &lt;Text style={{ fontFamily: 'Consolas', fontSize: 10, color: '#6D87AC', marginBottom: 3 }}&gt;poses/mini_ba.py:285&lt;/Text&gt;&#10;            &lt;Text style={{ fontFamily: 'Consolas', fontSize: 13, color: '#D7E3F6', lineHeight: 1.28 }}&gt;for it in range(self.iters):&lt;/Text&gt;&#10;            &lt;Text style={{ fontFamily: 'Consolas', fontSize: 13, color: '#D7E3F6', lineHeight: 1.28 }}&gt;    jtj_cam, ..., resid = self._assemble_jtj(...)&lt;/Text&gt;&#10;            &lt;Text style={{ fontFamily: 'Consolas', fontSize: 13, color: '#D7E3F6', lineHeight: 1.28 }}&gt;    jtj_cam.diagonal().mul_(1 + lm)        # LM 阻尼&lt;/Text&gt;&#10;            &lt;Text style={{ fontFamily: 'Consolas', fontSize: 13, color: '#D7E3F6', lineHeight: 1.28 }}&gt;    jtj_xyz_inv = self.inv_3x3(jtj_xyz)    # C^-1&lt;/Text&gt;&#10;            &lt;Text style={{ fontFamily: 'Consolas', fontSize: 13, color: '#D7E3F6', lineHeight: 1.28 }}&gt;    S = jtj_cam - jtj_xyz_inv @ jtj_cam_xyz.T @ jtj_cam_xyz&lt;/Text&gt;&#10;            &lt;Text style={{ fontFamily: 'Consolas', fontSize: 13, color: '#D7E3F6', lineHeight: 1.28 }}&gt;    L = torch.linalg.cholesky_ex(S)[0]      # 舒尔补 S&lt;/Text&gt;&#10;            &lt;Text style={{ fontFamily: 'Consolas', fontSize: 13, color: '#D7E3F6', lineHeight: 1.28 }}&gt;    dcam = torch.linalg.solve_triangular(...)  # ΔT&lt;/Text&gt;&#10;            &lt;Text style={{ fontFamily: 'Consolas', fontSize: 13, color: '#D7E3F6', lineHeight: 1.28 }}&gt;    dxyz = torch.bmm(b.view(-1, 1, 3), jtj_xyz_inv)&lt;/Text&gt;&#10;        &lt;/Box&gt;&#10;        &lt;/Box&gt;&#10;        &lt;Box style={{ flex: 1, flexDirection: 'column', gap: 8 }}&gt;&#10;        &lt;Box style={{ backgroundColor: '#0F1D33', borderRadius: 5, padding: '6px 11px 6px 11px', flexDirection: 'column' }}&gt;&#10;            &lt;Text style={{ fontSize: 13, fontWeight: 'bold', color: '#8FBBFF', marginBottom: 1 }}&gt;⑥  回环检测与补边&lt;/Text&gt;&#10;            &lt;Text style={{ fontFamily: 'Consolas', fontSize: 10, color: '#6D87AC', marginBottom: 3 }}&gt;poses/ba_problem.py:1054&lt;/Text&gt;&#10;            &lt;Text style={{ fontFamily: 'Consolas', fontSize: 13, color: '#D7E3F6', lineHeight: 1.28 }}&gt;if dists.max() &amp;#62; self.min_loop_size:      # 图距 &amp;#62; 10&lt;/Text&gt;&#10;            &lt;Text style={{ fontFamily: 'Consolas', fontSize: 13, color: '#D7E3F6', lineHeight: 1.28 }}&gt;    clusters_t = split_into_clusters(dists)   # 分两簇&lt;/Text&gt;&#10;            &lt;Text style={{ fontFamily: 'Consolas', fontSize: 13, color: '#D7E3F6', lineHeight: 1.28 }}&gt;is_loop = (min(n_robust_pairs) &amp;#62; n // 2 and&lt;/Text&gt;&#10;            &lt;Text style={{ fontFamily: 'Consolas', fontSize: 13, color: '#D7E3F6', lineHeight: 1.28 }}&gt;           min(max_matches_robustness) &amp;#62; 0.5 * max(...))&lt;/Text&gt;&#10;            &lt;Text style={{ fontFamily: 'Consolas', fontSize: 13, color: '#D7E3F6', lineHeight: 1.28 }}&gt;if len(match.kpts) &amp;#62;= self.min_matches_edge:   # τm=500&lt;/Text&gt;&#10;            &lt;Text style={{ fontFamily: 'Consolas', fontSize: 13, color: '#D7E3F6', lineHeight: 1.28 }}&gt;    self.pose_graph.add_match(i, j, 1.0 / len(match.kpts))&lt;/Text&gt;&#10;        &lt;/Box&gt;&#10;        &lt;Box style={{ backgroundColor: '#0F1D33', borderRadius: 5, padding: '6px 11px 6px 11px', flexDirection: 'column' }}&gt;&#10;            &lt;Text style={{ fontSize: 13, fontWeight: 'bold', color: '#8FBBFF', marginBottom: 1 }}&gt;⑦-a  分块深度对齐&lt;/Text&gt;&#10;            &lt;Text style={{ fontFamily: 'Consolas', fontSize: 10, color: '#6D87AC', marginBottom: 3 }}&gt;scene/mono_depth.py:315&lt;/Text&gt;&#10;            &lt;Text style={{ fontFamily: 'Consolas', fontSize: 13, color: '#D7E3F6', lineHeight: 1.28 }}&gt;tri_idepth = 1 / (pts3d[has_pt3d] @ R.T + t)[..., -1]&lt;/Text&gt;&#10;            &lt;Text style={{ fontFamily: 'Consolas', fontSize: 13, color: '#D7E3F6', lineHeight: 1.28 }}&gt;mono_al, g_s, g_o = align_samples(tri_idepth, sampled)&lt;/Text&gt;&#10;            &lt;Text style={{ fontFamily: 'Consolas', fontSize: 13, color: '#D7E3F6', lineHeight: 1.28 }}&gt;valid = err &amp;#60; m_err + grid_outlier_mult * err_dev&lt;/Text&gt;&#10;            &lt;Text style={{ fontFamily: 'Consolas', fontSize: 13, color: '#D7E3F6', lineHeight: 1.28 }}&gt;return align_depth_grid(..., 4, g_s, g_o)   # 4x4 分块&lt;/Text&gt;&#10;        &lt;/Box&gt;&#10;        &lt;Box style={{ backgroundColor: '#0F1D33', borderRadius: 5, padding: '6px 11px 6px 11px', flexDirection: 'column' }}&gt;&#10;            &lt;Text style={{ fontSize: 13, fontWeight: 'bold', color: '#8FBBFF', marginBottom: 1 }}&gt;⑦-b  渐进层级与合并&lt;/Text&gt;&#10;            &lt;Text style={{ fontFamily: 'Consolas', fontSize: 10, color: '#6D87AC', marginBottom: 3 }}&gt;scene/hierarchy_cut.py:105&lt;/Text&gt;&#10;            &lt;Text style={{ fontFamily: 'Consolas', fontSize: 13, color: '#D7E3F6', lineHeight: 1.28 }}&gt;mask = screen_size &amp;#60; self.hierarchy_screen_size_threshold  # 0.5 px&lt;/Text&gt;&#10;            &lt;Text style={{ fontFamily: 'Consolas', fontSize: 13, color: '#D7E3F6', lineHeight: 1.28 }}&gt;if mask.sum() &amp;#62; max(len(self.xyz) * 0.1, 200_000):&lt;/Text&gt;&#10;            &lt;Text style={{ fontFamily: 'Consolas', fontSize: 13, color: '#D7E3F6', lineHeight: 1.28 }}&gt;    n_merged = self.create_hierarchy_level(cam_centre, mask)&lt;/Text&gt;&#10;            &lt;Text style={{ fontFamily: 'Consolas', fontSize: 13, color: '#D7E3F6', lineHeight: 1.28 }}&gt;# 合并权重 = opacity * screen_size^2（非 KL 投影）&lt;/Text&gt;&#10;            &lt;Text style={{ fontFamily: 'Consolas', fontSize: 13, color: '#D7E3F6', lineHeight: 1.28 }}&gt;weights = opa.sigmoid() * screen_size[selected] ** 2&lt;/Text&gt;&#10;        &lt;/Box&gt;&#10;        &lt;/Box&gt;&#10;    &lt;/Box&gt;&#10;    &lt;Box style={{ padding: '8px 40px 0px 40px' }}&gt;&#10;        &lt;Text style={{ fontSize: 14, color: '#8B97A8', lineHeight: 1.4 }}&gt;为排版做了换行与变量缩写（w = edge_weight），逻辑未改。第 7 页按源码默认值修正：回环触发为&lt;b&gt;加权图距 &amp;gt; 10&lt;/b&gt;；层级合并触发为&lt;b&gt;可并数 &amp;gt; max(10%, 20 万)&lt;/b&gt;，且是 &lt;b&gt;kNN 加权平均&lt;/b&gt;而非 KL。&lt;/Text&gt;&#10;    &lt;/Box&gt;&#10;&lt;/Slide&gt;&#10;"/>
+        <p:cNvPr id="159" name="" descr="&lt;Slide style={{ width: '1280px', height: '720px', backgroundColor: '#FFFFFF', padding: '0px', flexDirection: 'column' }}&gt;&#10;    &lt;Box style={{ width: '1280px', height: '8px', backgroundColor: '#1E4FA8' }} /&gt;&#10;    &lt;Box style={{ padding: '14px 40px 0px 40px', flexDirection: 'row', justifyContent: 'space-between', alignItems: 'flex-end' }}&gt;&#10;        &lt;Text style={{ fontSize: 32, fontWeight: 'bold', color: '#1E4FA8' }}&gt;附：七个步骤在源码里长什么样&lt;/Text&gt;&#10;        &lt;Text style={{ fontSize: 15, color: '#8B97A8' }}&gt;15 / 15&lt;/Text&gt;&#10;    &lt;/Box&gt;&#10;    &lt;Box style={{ padding: '5px 40px 0px 40px' }}&gt;&#10;        &lt;Text style={{ fontSize: 17, color: '#4A5568' }}&gt;真实源码截图，行号对应第 7 页七步链：&lt;b&gt;①②③ 定跟谁比、④ 定跟谁一起算、⑤ 才真解位姿、⑥⑦ 修漂移与压显存&lt;/b&gt;。&lt;/Text&gt;&#10;    &lt;/Box&gt;&#10;    &lt;Box style={{ padding: '8px 40px 0px 40px', flexDirection: 'row', gap: 14 }}&gt;&#10;        &lt;Box style={{ flex: 1, flexDirection: 'column', gap: 10 }}&gt;&#10;        &lt;Box style={{ backgroundColor: '#1E1E1E', borderRadius: 5, padding: '5px 11px 5px 11px', flexDirection: 'column' }}&gt;&#10;            &lt;Text style={{ fontSize: 13, fontWeight: 'bold', color: '#8FBBFF', marginBottom: 0 }}&gt;① ② ③  检索 → 粗筛 → 建边&lt;/Text&gt;&#10;            &lt;Text style={{ fontFamily: 'Consolas', fontSize: 10, color: '#7F8C9F', marginBottom: 2 }}&gt;scene/scene_model_loop_closure.py:179&lt;/Text&gt;&#10;            &lt;Image src=&quot;code_png/01.png&quot; style={{ width: 568, height: 104.5 }} /&gt;&#10;        &lt;/Box&gt;&#10;        &lt;Box style={{ backgroundColor: '#1E1E1E', borderRadius: 5, padding: '5px 11px 5px 11px', flexDirection: 'column' }}&gt;&#10;            &lt;Text style={{ fontSize: 13, fontWeight: 'bold', color: '#8FBBFF', marginBottom: 0 }}&gt;④  协视图贪心扩张（式 1）&lt;/Text&gt;&#10;            &lt;Text style={{ fontFamily: 'Consolas', fontSize: 10, color: '#7F8C9F', marginBottom: 2 }}&gt;poses/ba_problem.py:648&lt;/Text&gt;&#10;            &lt;Image src=&quot;code_png/02.png&quot; style={{ width: 568, height: 123.0 }} /&gt;&#10;        &lt;/Box&gt;&#10;        &lt;Box style={{ backgroundColor: '#1E1E1E', borderRadius: 5, padding: '5px 11px 5px 11px', flexDirection: 'column' }}&gt;&#10;            &lt;Text style={{ fontSize: 13, fontWeight: 'bold', color: '#8FBBFF', marginBottom: 0 }}&gt;⑤  局部 BA：LM 迭代 + Schur 消元&lt;/Text&gt;&#10;            &lt;Text style={{ fontFamily: 'Consolas', fontSize: 10, color: '#7F8C9F', marginBottom: 2 }}&gt;poses/mini_ba.py:285&lt;/Text&gt;&#10;            &lt;Image src=&quot;code_png/03.png&quot; style={{ width: 568, height: 160.0 }} /&gt;&#10;        &lt;/Box&gt;&#10;        &lt;/Box&gt;&#10;        &lt;Box style={{ flex: 1, flexDirection: 'column', gap: 10 }}&gt;&#10;        &lt;Box style={{ backgroundColor: '#1E1E1E', borderRadius: 5, padding: '5px 11px 5px 11px', flexDirection: 'column' }}&gt;&#10;            &lt;Text style={{ fontSize: 13, fontWeight: 'bold', color: '#8FBBFF', marginBottom: 0 }}&gt;⑥  回环检测与补边&lt;/Text&gt;&#10;            &lt;Text style={{ fontFamily: 'Consolas', fontSize: 10, color: '#7F8C9F', marginBottom: 2 }}&gt;poses/ba_problem.py:1054&lt;/Text&gt;&#10;            &lt;Image src=&quot;code_png/04.png&quot; style={{ width: 568, height: 123.0 }} /&gt;&#10;        &lt;/Box&gt;&#10;        &lt;Box style={{ backgroundColor: '#1E1E1E', borderRadius: 5, padding: '5px 11px 5px 11px', flexDirection: 'column' }}&gt;&#10;            &lt;Text style={{ fontSize: 13, fontWeight: 'bold', color: '#8FBBFF', marginBottom: 0 }}&gt;⑦-a  分块深度对齐&lt;/Text&gt;&#10;            &lt;Text style={{ fontFamily: 'Consolas', fontSize: 10, color: '#7F8C9F', marginBottom: 2 }}&gt;scene/mono_depth.py:315&lt;/Text&gt;&#10;            &lt;Image src=&quot;code_png/05.png&quot; style={{ width: 568, height: 86.0 }} /&gt;&#10;        &lt;/Box&gt;&#10;        &lt;Box style={{ backgroundColor: '#1E1E1E', borderRadius: 5, padding: '5px 11px 5px 11px', flexDirection: 'column' }}&gt;&#10;            &lt;Text style={{ fontSize: 13, fontWeight: 'bold', color: '#8FBBFF', marginBottom: 0 }}&gt;⑦-b  渐进层级与合并&lt;/Text&gt;&#10;            &lt;Text style={{ fontFamily: 'Consolas', fontSize: 10, color: '#7F8C9F', marginBottom: 2 }}&gt;scene/hierarchy_cut.py:105&lt;/Text&gt;&#10;            &lt;Image src=&quot;code_png/06.png&quot; style={{ width: 568, height: 104.5 }} /&gt;&#10;        &lt;/Box&gt;&#10;        &lt;/Box&gt;&#10;    &lt;/Box&gt;&#10;    &lt;Box style={{ padding: '7px 40px 0px 40px' }}&gt;&#10;        &lt;Text style={{ fontSize: 13.5, color: '#8B97A8', lineHeight: 1.35 }}&gt;行号指向片段起点；为投影宽度做了换行与变量缩写（w = edge_weight），逻辑未改。第 7 页已按源码默认值修正：回环触发为&lt;b&gt;加权图距 &amp;gt; 10&lt;/b&gt;；层级合并触发为&lt;b&gt;可并数 &amp;gt; max(10%, 20 万)&lt;/b&gt;，且是 &lt;b&gt;kNN 加权平均&lt;/b&gt;而非 KL。&lt;/Text&gt;&#10;    &lt;/Box&gt;&#10;&lt;/Slide&gt;&#10;"/>
         <p:cNvGrpSpPr/>
         <p:nvPr/>
       </p:nvGrpSpPr>
@@ -8217,7 +8217,7 @@
         </p:nvSpPr>
         <p:spPr>
           <a:xfrm rot="0" flipH="0" flipV="0">
-            <a:off x="381000" y="228600"/>
+            <a:off x="381000" y="209550"/>
             <a:ext cx="4267200" cy="371475"/>
           </a:xfrm>
           <a:prstGeom prst="rect"/>
@@ -8252,7 +8252,7 @@
         </p:nvSpPr>
         <p:spPr>
           <a:xfrm rot="0" flipH="0" flipV="0">
-            <a:off x="11325225" y="428625"/>
+            <a:off x="11325225" y="409575"/>
             <a:ext cx="485775" cy="171450"/>
           </a:xfrm>
           <a:prstGeom prst="rect"/>
@@ -8287,7 +8287,7 @@
         </p:nvSpPr>
         <p:spPr>
           <a:xfrm rot="0" flipH="0" flipV="0">
-            <a:off x="381000" y="657225"/>
+            <a:off x="381000" y="628650"/>
             <a:ext cx="11430000" cy="200025"/>
           </a:xfrm>
           <a:prstGeom prst="rect"/>
@@ -8308,7 +8308,7 @@
                 <a:latin typeface="Microsoft YaHei"/>
                 <a:ea typeface="Microsoft YaHei"/>
               </a:rPr>
-              <a:t>真实源码片段，行号对应第</a:t>
+              <a:t>真实源码截图，行号对应第</a:t>
             </a:r>
             <a:r>
               <a:rPr lang="en-US" sz="1275">
@@ -8432,16 +8432,16 @@
         </p:nvSpPr>
         <p:spPr>
           <a:xfrm rot="0" flipH="0" flipV="0">
-            <a:off x="381000" y="942975"/>
-            <a:ext cx="5648325" cy="1371600"/>
+            <a:off x="381000" y="904875"/>
+            <a:ext cx="5648325" cy="1381125"/>
           </a:xfrm>
           <a:prstGeom prst="roundRect">
             <a:avLst>
-              <a:gd name="adj" fmla="val 3472"/>
+              <a:gd name="adj" fmla="val 3448"/>
             </a:avLst>
           </a:prstGeom>
           <a:solidFill>
-            <a:srgbClr val="0F1D33"/>
+            <a:srgbClr val="1E1E1E"/>
           </a:solidFill>
           <a:ln/>
         </p:spPr>
@@ -8458,7 +8458,7 @@
         </p:nvSpPr>
         <p:spPr>
           <a:xfrm rot="0" flipH="0" flipV="0">
-            <a:off x="485775" y="1000125"/>
+            <a:off x="485775" y="952500"/>
             <a:ext cx="5438775" cy="152400"/>
           </a:xfrm>
           <a:prstGeom prst="rect"/>
@@ -8543,7 +8543,7 @@
         </p:nvSpPr>
         <p:spPr>
           <a:xfrm rot="0" flipH="0" flipV="0">
-            <a:off x="485775" y="1162050"/>
+            <a:off x="485775" y="1104900"/>
             <a:ext cx="5438775" cy="114300"/>
           </a:xfrm>
           <a:prstGeom prst="rect"/>
@@ -8559,7 +8559,7 @@
             <a:r>
               <a:rPr lang="en-US" sz="750">
                 <a:solidFill>
-                  <a:srgbClr val="6D87AC"/>
+                  <a:srgbClr val="7F8C9F"/>
                 </a:solidFill>
                 <a:latin typeface="Consolas"/>
                 <a:ea typeface="Consolas"/>
@@ -8570,239 +8570,50 @@
           </a:p>
         </p:txBody>
       </p:sp>
-      <p:sp>
-        <p:nvSpPr>
-          <p:cNvPr id="168" name="" descr="{&quot;isTemplate&quot;:true,&quot;type&quot;:&quot;text&quot;}"/>
-          <p:cNvSpPr txBox="1"/>
-          <p:nvPr/>
-        </p:nvSpPr>
-        <p:spPr>
-          <a:xfrm rot="0" flipH="0" flipV="0">
-            <a:off x="485775" y="1304925"/>
-            <a:ext cx="5438775" cy="190500"/>
-          </a:xfrm>
-          <a:prstGeom prst="rect"/>
-        </p:spPr>
-        <p:txBody>
-          <a:bodyPr wrap="none" lIns="0" tIns="0" rIns="0" bIns="0"/>
-          <a:p>
-            <a:pPr>
-              <a:lnSpc>
-                <a:spcPct val="128000"/>
-              </a:lnSpc>
-            </a:pPr>
-            <a:r>
-              <a:rPr lang="en-US" sz="975">
-                <a:solidFill>
-                  <a:srgbClr val="D7E3F6"/>
-                </a:solidFill>
-                <a:latin typeface="Consolas"/>
-                <a:ea typeface="Consolas"/>
-              </a:rPr>
-              <a:t xml:space="preserve">cossim = self.vpr_features @ vpr_feature.T     # </a:t>
-            </a:r>
-            <a:r>
-              <a:rPr lang="zh-CN" sz="975">
-                <a:solidFill>
-                  <a:srgbClr val="D7E3F6"/>
-                </a:solidFill>
-                <a:latin typeface="Consolas"/>
-                <a:ea typeface="Consolas"/>
-              </a:rPr>
-              <a:t>全局描述子</a:t>
-            </a:r>
-            <a:endParaRPr/>
-          </a:p>
-        </p:txBody>
-      </p:sp>
-      <p:sp>
-        <p:nvSpPr>
-          <p:cNvPr id="169" name="" descr="{&quot;isTemplate&quot;:true,&quot;type&quot;:&quot;text&quot;}"/>
-          <p:cNvSpPr txBox="1"/>
-          <p:nvPr/>
-        </p:nvSpPr>
-        <p:spPr>
-          <a:xfrm rot="0" flipH="0" flipV="0">
-            <a:off x="485775" y="1495425"/>
-            <a:ext cx="5438775" cy="190500"/>
-          </a:xfrm>
-          <a:prstGeom prst="rect"/>
-        </p:spPr>
-        <p:txBody>
-          <a:bodyPr wrap="none" lIns="0" tIns="0" rIns="0" bIns="0"/>
-          <a:p>
-            <a:pPr>
-              <a:lnSpc>
-                <a:spcPct val="128000"/>
-              </a:lnSpc>
-            </a:pPr>
-            <a:r>
-              <a:rPr lang="en-US" sz="975">
-                <a:solidFill>
-                  <a:srgbClr val="D7E3F6"/>
-                </a:solidFill>
-                <a:latin typeface="Consolas"/>
-                <a:ea typeface="Consolas"/>
-              </a:rPr>
-              <a:t>_, cand = torch.topk(cossim_best, n_candidates)   # top-20</a:t>
-            </a:r>
-            <a:endParaRPr/>
-          </a:p>
-        </p:txBody>
-      </p:sp>
-      <p:sp>
-        <p:nvSpPr>
-          <p:cNvPr id="170" name="" descr="{&quot;isTemplate&quot;:true,&quot;type&quot;:&quot;text&quot;}"/>
-          <p:cNvSpPr txBox="1"/>
-          <p:nvPr/>
-        </p:nvSpPr>
-        <p:spPr>
-          <a:xfrm rot="0" flipH="0" flipV="0">
-            <a:off x="485775" y="1685925"/>
-            <a:ext cx="5438775" cy="190500"/>
-          </a:xfrm>
-          <a:prstGeom prst="rect"/>
-        </p:spPr>
-        <p:txBody>
-          <a:bodyPr wrap="none" lIns="0" tIns="0" rIns="0" bIns="0"/>
-          <a:p>
-            <a:pPr>
-              <a:lnSpc>
-                <a:spcPct val="128000"/>
-              </a:lnSpc>
-            </a:pPr>
-            <a:r>
-              <a:rPr lang="en-US" sz="975">
-                <a:solidFill>
-                  <a:srgbClr val="D7E3F6"/>
-                </a:solidFill>
-                <a:latin typeface="Consolas"/>
-                <a:ea typeface="Consolas"/>
-              </a:rPr>
-              <a:t>n_m = self.matcher.batched_evaluate_match(...)  # XFeat</a:t>
-            </a:r>
-            <a:endParaRPr/>
-          </a:p>
-        </p:txBody>
-      </p:sp>
-      <p:sp>
-        <p:nvSpPr>
-          <p:cNvPr id="171" name="" descr="{&quot;isTemplate&quot;:true,&quot;type&quot;:&quot;text&quot;}"/>
-          <p:cNvSpPr txBox="1"/>
-          <p:nvPr/>
-        </p:nvSpPr>
-        <p:spPr>
-          <a:xfrm rot="0" flipH="0" flipV="0">
-            <a:off x="485775" y="1876425"/>
-            <a:ext cx="5438775" cy="190500"/>
-          </a:xfrm>
-          <a:prstGeom prst="rect"/>
-        </p:spPr>
-        <p:txBody>
-          <a:bodyPr wrap="none" lIns="0" tIns="0" rIns="0" bIns="0"/>
-          <a:p>
-            <a:pPr>
-              <a:lnSpc>
-                <a:spcPct val="128000"/>
-              </a:lnSpc>
-            </a:pPr>
-            <a:r>
-              <a:rPr lang="en-US" sz="975">
-                <a:solidFill>
-                  <a:srgbClr val="D7E3F6"/>
-                </a:solidFill>
-                <a:latin typeface="Consolas"/>
-                <a:ea typeface="Consolas"/>
-              </a:rPr>
-              <a:t xml:space="preserve">_, best = torch.topk(n_m, n)                      # </a:t>
-            </a:r>
-            <a:r>
-              <a:rPr lang="zh-CN" sz="975">
-                <a:solidFill>
-                  <a:srgbClr val="D7E3F6"/>
-                </a:solidFill>
-                <a:latin typeface="Consolas"/>
-                <a:ea typeface="Consolas"/>
-              </a:rPr>
-              <a:t>留</a:t>
-            </a:r>
-            <a:r>
-              <a:rPr lang="en-US" sz="975">
-                <a:solidFill>
-                  <a:srgbClr val="D7E3F6"/>
-                </a:solidFill>
-                <a:latin typeface="Consolas"/>
-                <a:ea typeface="Consolas"/>
-              </a:rPr>
-              <a:t xml:space="preserve"> top-5</a:t>
-            </a:r>
-            <a:endParaRPr/>
-          </a:p>
-        </p:txBody>
-      </p:sp>
-      <p:sp>
-        <p:nvSpPr>
-          <p:cNvPr id="172" name="" descr="{&quot;isTemplate&quot;:true,&quot;type&quot;:&quot;text&quot;}"/>
-          <p:cNvSpPr txBox="1"/>
-          <p:nvPr/>
-        </p:nvSpPr>
-        <p:spPr>
-          <a:xfrm rot="0" flipH="0" flipV="0">
-            <a:off x="485775" y="2066925"/>
-            <a:ext cx="5438775" cy="190500"/>
-          </a:xfrm>
-          <a:prstGeom prst="rect"/>
-        </p:spPr>
-        <p:txBody>
-          <a:bodyPr wrap="none" lIns="0" tIns="0" rIns="0" bIns="0"/>
-          <a:p>
-            <a:pPr>
-              <a:lnSpc>
-                <a:spcPct val="128000"/>
-              </a:lnSpc>
-            </a:pPr>
-            <a:r>
-              <a:rPr lang="en-US" sz="975">
-                <a:solidFill>
-                  <a:srgbClr val="D7E3F6"/>
-                </a:solidFill>
-                <a:latin typeface="Consolas"/>
-                <a:ea typeface="Consolas"/>
-              </a:rPr>
-              <a:t xml:space="preserve">self.matcher(..., remove_outliers=True, use_lightglue=True)  # </a:t>
-            </a:r>
-            <a:r>
-              <a:rPr lang="zh-CN" sz="975">
-                <a:solidFill>
-                  <a:srgbClr val="D7E3F6"/>
-                </a:solidFill>
-                <a:latin typeface="Consolas"/>
-                <a:ea typeface="Consolas"/>
-              </a:rPr>
-              <a:t>建边</a:t>
-            </a:r>
-            <a:endParaRPr/>
-          </a:p>
-        </p:txBody>
-      </p:sp>
-      <p:sp>
-        <p:nvSpPr>
-          <p:cNvPr id="173" name=""/>
+      <p:pic>
+        <p:nvPicPr>
+          <p:cNvPr id="168" name=""/>
+          <p:cNvPicPr>
+            <a:picLocks noChangeAspect="1"/>
+          </p:cNvPicPr>
+          <p:nvPr/>
+        </p:nvPicPr>
+        <p:blipFill>
+          <a:blip r:embed="rId1"/>
+          <a:srcRect l="238" t="0" r="238" b="0"/>
+          <a:stretch>
+            <a:fillRect/>
+          </a:stretch>
+        </p:blipFill>
+        <p:spPr>
+          <a:xfrm rot="0" flipH="0" flipV="0">
+            <a:off x="485775" y="1238250"/>
+            <a:ext cx="5410200" cy="1000125"/>
+          </a:xfrm>
+          <a:prstGeom prst="rect">
+            <a:avLst/>
+          </a:prstGeom>
+          <a:ln/>
+        </p:spPr>
+      </p:pic>
+      <p:sp>
+        <p:nvSpPr>
+          <p:cNvPr id="169" name=""/>
           <p:cNvSpPr/>
           <p:nvPr/>
         </p:nvSpPr>
         <p:spPr>
           <a:xfrm rot="0" flipH="0" flipV="0">
-            <a:off x="381000" y="2390775"/>
-            <a:ext cx="5648325" cy="1562100"/>
+            <a:off x="381000" y="2381250"/>
+            <a:ext cx="5648325" cy="1552575"/>
           </a:xfrm>
           <a:prstGeom prst="roundRect">
             <a:avLst>
-              <a:gd name="adj" fmla="val 3049"/>
+              <a:gd name="adj" fmla="val 3067"/>
             </a:avLst>
           </a:prstGeom>
           <a:solidFill>
-            <a:srgbClr val="0F1D33"/>
+            <a:srgbClr val="1E1E1E"/>
           </a:solidFill>
           <a:ln/>
         </p:spPr>
@@ -8813,13 +8624,13 @@
       </p:sp>
       <p:sp>
         <p:nvSpPr>
-          <p:cNvPr id="174" name="" descr="{&quot;isTemplate&quot;:true,&quot;type&quot;:&quot;text&quot;}"/>
-          <p:cNvSpPr txBox="1"/>
-          <p:nvPr/>
-        </p:nvSpPr>
-        <p:spPr>
-          <a:xfrm rot="0" flipH="0" flipV="0">
-            <a:off x="485775" y="2447925"/>
+          <p:cNvPr id="170" name="" descr="{&quot;isTemplate&quot;:true,&quot;type&quot;:&quot;text&quot;}"/>
+          <p:cNvSpPr txBox="1"/>
+          <p:nvPr/>
+        </p:nvSpPr>
+        <p:spPr>
+          <a:xfrm rot="0" flipH="0" flipV="0">
+            <a:off x="485775" y="2428875"/>
             <a:ext cx="5438775" cy="152400"/>
           </a:xfrm>
           <a:prstGeom prst="rect"/>
@@ -8878,13 +8689,13 @@
       </p:sp>
       <p:sp>
         <p:nvSpPr>
-          <p:cNvPr id="175" name="" descr="{&quot;isTemplate&quot;:true,&quot;type&quot;:&quot;text&quot;}"/>
-          <p:cNvSpPr txBox="1"/>
-          <p:nvPr/>
-        </p:nvSpPr>
-        <p:spPr>
-          <a:xfrm rot="0" flipH="0" flipV="0">
-            <a:off x="485775" y="2609850"/>
+          <p:cNvPr id="171" name="" descr="{&quot;isTemplate&quot;:true,&quot;type&quot;:&quot;text&quot;}"/>
+          <p:cNvSpPr txBox="1"/>
+          <p:nvPr/>
+        </p:nvSpPr>
+        <p:spPr>
+          <a:xfrm rot="0" flipH="0" flipV="0">
+            <a:off x="485775" y="2581275"/>
             <a:ext cx="5438775" cy="114300"/>
           </a:xfrm>
           <a:prstGeom prst="rect"/>
@@ -8900,7 +8711,7 @@
             <a:r>
               <a:rPr lang="en-US" sz="750">
                 <a:solidFill>
-                  <a:srgbClr val="6D87AC"/>
+                  <a:srgbClr val="7F8C9F"/>
                 </a:solidFill>
                 <a:latin typeface="Consolas"/>
                 <a:ea typeface="Consolas"/>
@@ -8911,284 +8722,49 @@
           </a:p>
         </p:txBody>
       </p:sp>
-      <p:sp>
-        <p:nvSpPr>
-          <p:cNvPr id="176" name="" descr="{&quot;isTemplate&quot;:true,&quot;type&quot;:&quot;text&quot;}"/>
-          <p:cNvSpPr txBox="1"/>
-          <p:nvPr/>
-        </p:nvSpPr>
-        <p:spPr>
-          <a:xfrm rot="0" flipH="0" flipV="0">
-            <a:off x="485775" y="2752725"/>
-            <a:ext cx="5438775" cy="190500"/>
-          </a:xfrm>
-          <a:prstGeom prst="rect"/>
-        </p:spPr>
-        <p:txBody>
-          <a:bodyPr wrap="none" lIns="0" tIns="0" rIns="0" bIns="0"/>
-          <a:p>
-            <a:pPr>
-              <a:lnSpc>
-                <a:spcPct val="128000"/>
-              </a:lnSpc>
-            </a:pPr>
-            <a:r>
-              <a:rPr lang="en-US" sz="975">
-                <a:solidFill>
-                  <a:srgbClr val="D7E3F6"/>
-                </a:solidFill>
-                <a:latin typeface="Consolas"/>
-                <a:ea typeface="Consolas"/>
-              </a:rPr>
-              <a:t xml:space="preserve">while len(selected_ids) &lt; get_n_keyframes:        # </a:t>
-            </a:r>
-            <a:r>
-              <a:rPr lang="zh-CN" sz="975">
-                <a:solidFill>
-                  <a:srgbClr val="D7E3F6"/>
-                </a:solidFill>
-                <a:latin typeface="Consolas"/>
-                <a:ea typeface="Consolas"/>
-              </a:rPr>
-              <a:t>扩到</a:t>
-            </a:r>
-            <a:r>
-              <a:rPr lang="en-US" sz="975">
-                <a:solidFill>
-                  <a:srgbClr val="D7E3F6"/>
-                </a:solidFill>
-                <a:latin typeface="Consolas"/>
-                <a:ea typeface="Consolas"/>
-              </a:rPr>
-              <a:t xml:space="preserve"> 20 </a:t>
-            </a:r>
-            <a:r>
-              <a:rPr lang="zh-CN" sz="975">
-                <a:solidFill>
-                  <a:srgbClr val="D7E3F6"/>
-                </a:solidFill>
-                <a:latin typeface="Consolas"/>
-                <a:ea typeface="Consolas"/>
-              </a:rPr>
-              <a:t>帧</a:t>
-            </a:r>
-            <a:endParaRPr/>
-          </a:p>
-        </p:txBody>
-      </p:sp>
-      <p:sp>
-        <p:nvSpPr>
-          <p:cNvPr id="177" name="" descr="{&quot;isTemplate&quot;:true,&quot;type&quot;:&quot;text&quot;}"/>
-          <p:cNvSpPr txBox="1"/>
-          <p:nvPr/>
-        </p:nvSpPr>
-        <p:spPr>
-          <a:xfrm rot="0" flipH="0" flipV="0">
-            <a:off x="485775" y="2943225"/>
-            <a:ext cx="5438775" cy="190500"/>
-          </a:xfrm>
-          <a:prstGeom prst="rect"/>
-        </p:spPr>
-        <p:txBody>
-          <a:bodyPr wrap="none" lIns="0" tIns="0" rIns="0" bIns="0"/>
-          <a:p>
-            <a:pPr>
-              <a:lnSpc>
-                <a:spcPct val="128000"/>
-              </a:lnSpc>
-            </a:pPr>
-            <a:r>
-              <a:rPr lang="en-US" sz="975">
-                <a:solidFill>
-                  <a:srgbClr val="D7E3F6"/>
-                </a:solidFill>
-                <a:latin typeface="Consolas"/>
-                <a:ea typeface="Consolas"/>
-              </a:rPr>
-              <a:t xml:space="preserve">    for sid in selected_ids:</a:t>
-            </a:r>
-            <a:endParaRPr/>
-          </a:p>
-        </p:txBody>
-      </p:sp>
-      <p:sp>
-        <p:nvSpPr>
-          <p:cNvPr id="178" name="" descr="{&quot;isTemplate&quot;:true,&quot;type&quot;:&quot;text&quot;}"/>
-          <p:cNvSpPr txBox="1"/>
-          <p:nvPr/>
-        </p:nvSpPr>
-        <p:spPr>
-          <a:xfrm rot="0" flipH="0" flipV="0">
-            <a:off x="485775" y="3133725"/>
-            <a:ext cx="5438775" cy="190500"/>
-          </a:xfrm>
-          <a:prstGeom prst="rect"/>
-        </p:spPr>
-        <p:txBody>
-          <a:bodyPr wrap="none" lIns="0" tIns="0" rIns="0" bIns="0"/>
-          <a:p>
-            <a:pPr>
-              <a:lnSpc>
-                <a:spcPct val="128000"/>
-              </a:lnSpc>
-            </a:pPr>
-            <a:r>
-              <a:rPr lang="en-US" sz="975">
-                <a:solidFill>
-                  <a:srgbClr val="D7E3F6"/>
-                </a:solidFill>
-                <a:latin typeface="Consolas"/>
-                <a:ea typeface="Consolas"/>
-              </a:rPr>
-              <a:t xml:space="preserve">        for nb in self.pose_graph.neighbors(sid):</a:t>
-            </a:r>
-            <a:endParaRPr/>
-          </a:p>
-        </p:txBody>
-      </p:sp>
-      <p:sp>
-        <p:nvSpPr>
-          <p:cNvPr id="179" name="" descr="{&quot;isTemplate&quot;:true,&quot;type&quot;:&quot;text&quot;}"/>
-          <p:cNvSpPr txBox="1"/>
-          <p:nvPr/>
-        </p:nvSpPr>
-        <p:spPr>
-          <a:xfrm rot="0" flipH="0" flipV="0">
-            <a:off x="485775" y="3324225"/>
-            <a:ext cx="5438775" cy="190500"/>
-          </a:xfrm>
-          <a:prstGeom prst="rect"/>
-        </p:spPr>
-        <p:txBody>
-          <a:bodyPr wrap="none" lIns="0" tIns="0" rIns="0" bIns="0"/>
-          <a:p>
-            <a:pPr>
-              <a:lnSpc>
-                <a:spcPct val="128000"/>
-              </a:lnSpc>
-            </a:pPr>
-            <a:r>
-              <a:rPr lang="en-US" sz="975">
-                <a:solidFill>
-                  <a:srgbClr val="D7E3F6"/>
-                </a:solidFill>
-                <a:latin typeface="Consolas"/>
-                <a:ea typeface="Consolas"/>
-              </a:rPr>
-              <a:t xml:space="preserve">            if nb not in selected_ids:            # </a:t>
-            </a:r>
-            <a:r>
-              <a:rPr lang="zh-CN" sz="975">
-                <a:solidFill>
-                  <a:srgbClr val="D7E3F6"/>
-                </a:solidFill>
-                <a:latin typeface="Consolas"/>
-                <a:ea typeface="Consolas"/>
-              </a:rPr>
-              <a:t>边权</a:t>
-            </a:r>
-            <a:r>
-              <a:rPr lang="en-US" sz="975">
-                <a:solidFill>
-                  <a:srgbClr val="D7E3F6"/>
-                </a:solidFill>
-                <a:latin typeface="Consolas"/>
-                <a:ea typeface="Consolas"/>
-              </a:rPr>
-              <a:t xml:space="preserve"> = 1/|M|</a:t>
-            </a:r>
-            <a:endParaRPr/>
-          </a:p>
-        </p:txBody>
-      </p:sp>
-      <p:sp>
-        <p:nvSpPr>
-          <p:cNvPr id="180" name="" descr="{&quot;isTemplate&quot;:true,&quot;type&quot;:&quot;text&quot;}"/>
-          <p:cNvSpPr txBox="1"/>
-          <p:nvPr/>
-        </p:nvSpPr>
-        <p:spPr>
-          <a:xfrm rot="0" flipH="0" flipV="0">
-            <a:off x="485775" y="3514725"/>
-            <a:ext cx="5438775" cy="190500"/>
-          </a:xfrm>
-          <a:prstGeom prst="rect"/>
-        </p:spPr>
-        <p:txBody>
-          <a:bodyPr wrap="none" lIns="0" tIns="0" rIns="0" bIns="0"/>
-          <a:p>
-            <a:pPr>
-              <a:lnSpc>
-                <a:spcPct val="128000"/>
-              </a:lnSpc>
-            </a:pPr>
-            <a:r>
-              <a:rPr lang="en-US" sz="975">
-                <a:solidFill>
-                  <a:srgbClr val="D7E3F6"/>
-                </a:solidFill>
-                <a:latin typeface="Consolas"/>
-                <a:ea typeface="Consolas"/>
-              </a:rPr>
-              <a:t xml:space="preserve">                neighbor_counts[nb] += 1.0 / w(sid, nb)</a:t>
-            </a:r>
-            <a:endParaRPr/>
-          </a:p>
-        </p:txBody>
-      </p:sp>
-      <p:sp>
-        <p:nvSpPr>
-          <p:cNvPr id="181" name="" descr="{&quot;isTemplate&quot;:true,&quot;type&quot;:&quot;text&quot;}"/>
-          <p:cNvSpPr txBox="1"/>
-          <p:nvPr/>
-        </p:nvSpPr>
-        <p:spPr>
-          <a:xfrm rot="0" flipH="0" flipV="0">
-            <a:off x="485775" y="3705225"/>
-            <a:ext cx="5438775" cy="190500"/>
-          </a:xfrm>
-          <a:prstGeom prst="rect"/>
-        </p:spPr>
-        <p:txBody>
-          <a:bodyPr wrap="none" lIns="0" tIns="0" rIns="0" bIns="0"/>
-          <a:p>
-            <a:pPr>
-              <a:lnSpc>
-                <a:spcPct val="128000"/>
-              </a:lnSpc>
-            </a:pPr>
-            <a:r>
-              <a:rPr lang="en-US" sz="975">
-                <a:solidFill>
-                  <a:srgbClr val="D7E3F6"/>
-                </a:solidFill>
-                <a:latin typeface="Consolas"/>
-                <a:ea typeface="Consolas"/>
-              </a:rPr>
-              <a:t xml:space="preserve">    selected_ids.add(neighbor_counts.most_common(1)[0][0])</a:t>
-            </a:r>
-            <a:endParaRPr/>
-          </a:p>
-        </p:txBody>
-      </p:sp>
-      <p:sp>
-        <p:nvSpPr>
-          <p:cNvPr id="182" name=""/>
+      <p:pic>
+        <p:nvPicPr>
+          <p:cNvPr id="172" name=""/>
+          <p:cNvPicPr>
+            <a:picLocks noChangeAspect="1"/>
+          </p:cNvPicPr>
+          <p:nvPr/>
+        </p:nvPicPr>
+        <p:blipFill>
+          <a:blip r:embed="rId2"/>
+          <a:stretch>
+            <a:fillRect/>
+          </a:stretch>
+        </p:blipFill>
+        <p:spPr>
+          <a:xfrm rot="0" flipH="0" flipV="0">
+            <a:off x="485775" y="2714625"/>
+            <a:ext cx="5410200" cy="1171575"/>
+          </a:xfrm>
+          <a:prstGeom prst="rect">
+            <a:avLst/>
+          </a:prstGeom>
+          <a:ln/>
+        </p:spPr>
+      </p:pic>
+      <p:sp>
+        <p:nvSpPr>
+          <p:cNvPr id="173" name=""/>
           <p:cNvSpPr/>
           <p:nvPr/>
         </p:nvSpPr>
         <p:spPr>
           <a:xfrm rot="0" flipH="0" flipV="0">
             <a:off x="381000" y="4029075"/>
-            <a:ext cx="5648325" cy="1943100"/>
+            <a:ext cx="5648325" cy="1905000"/>
           </a:xfrm>
           <a:prstGeom prst="roundRect">
             <a:avLst>
-              <a:gd name="adj" fmla="val 2451"/>
+              <a:gd name="adj" fmla="val 2500"/>
             </a:avLst>
           </a:prstGeom>
           <a:solidFill>
-            <a:srgbClr val="0F1D33"/>
+            <a:srgbClr val="1E1E1E"/>
           </a:solidFill>
           <a:ln/>
         </p:spPr>
@@ -9199,13 +8775,13 @@
       </p:sp>
       <p:sp>
         <p:nvSpPr>
-          <p:cNvPr id="183" name="" descr="{&quot;isTemplate&quot;:true,&quot;type&quot;:&quot;text&quot;}"/>
-          <p:cNvSpPr txBox="1"/>
-          <p:nvPr/>
-        </p:nvSpPr>
-        <p:spPr>
-          <a:xfrm rot="0" flipH="0" flipV="0">
-            <a:off x="485775" y="4086225"/>
+          <p:cNvPr id="174" name="" descr="{&quot;isTemplate&quot;:true,&quot;type&quot;:&quot;text&quot;}"/>
+          <p:cNvSpPr txBox="1"/>
+          <p:nvPr/>
+        </p:nvSpPr>
+        <p:spPr>
+          <a:xfrm rot="0" flipH="0" flipV="0">
+            <a:off x="485775" y="4076700"/>
             <a:ext cx="5438775" cy="152400"/>
           </a:xfrm>
           <a:prstGeom prst="rect"/>
@@ -9304,13 +8880,13 @@
       </p:sp>
       <p:sp>
         <p:nvSpPr>
-          <p:cNvPr id="184" name="" descr="{&quot;isTemplate&quot;:true,&quot;type&quot;:&quot;text&quot;}"/>
-          <p:cNvSpPr txBox="1"/>
-          <p:nvPr/>
-        </p:nvSpPr>
-        <p:spPr>
-          <a:xfrm rot="0" flipH="0" flipV="0">
-            <a:off x="485775" y="4248150"/>
+          <p:cNvPr id="175" name="" descr="{&quot;isTemplate&quot;:true,&quot;type&quot;:&quot;text&quot;}"/>
+          <p:cNvSpPr txBox="1"/>
+          <p:nvPr/>
+        </p:nvSpPr>
+        <p:spPr>
+          <a:xfrm rot="0" flipH="0" flipV="0">
+            <a:off x="485775" y="4229100"/>
             <a:ext cx="5438775" cy="114300"/>
           </a:xfrm>
           <a:prstGeom prst="rect"/>
@@ -9326,7 +8902,7 @@
             <a:r>
               <a:rPr lang="en-US" sz="750">
                 <a:solidFill>
-                  <a:srgbClr val="6D87AC"/>
+                  <a:srgbClr val="7F8C9F"/>
                 </a:solidFill>
                 <a:latin typeface="Consolas"/>
                 <a:ea typeface="Consolas"/>
@@ -9337,334 +8913,49 @@
           </a:p>
         </p:txBody>
       </p:sp>
-      <p:sp>
-        <p:nvSpPr>
-          <p:cNvPr id="185" name="" descr="{&quot;isTemplate&quot;:true,&quot;type&quot;:&quot;text&quot;}"/>
-          <p:cNvSpPr txBox="1"/>
-          <p:nvPr/>
-        </p:nvSpPr>
-        <p:spPr>
-          <a:xfrm rot="0" flipH="0" flipV="0">
-            <a:off x="485775" y="4391025"/>
-            <a:ext cx="5438775" cy="190500"/>
-          </a:xfrm>
-          <a:prstGeom prst="rect"/>
-        </p:spPr>
-        <p:txBody>
-          <a:bodyPr wrap="none" lIns="0" tIns="0" rIns="0" bIns="0"/>
-          <a:p>
-            <a:pPr>
-              <a:lnSpc>
-                <a:spcPct val="128000"/>
-              </a:lnSpc>
-            </a:pPr>
-            <a:r>
-              <a:rPr lang="en-US" sz="975">
-                <a:solidFill>
-                  <a:srgbClr val="D7E3F6"/>
-                </a:solidFill>
-                <a:latin typeface="Consolas"/>
-                <a:ea typeface="Consolas"/>
-              </a:rPr>
-              <a:t>for it in range(self.iters):</a:t>
-            </a:r>
-            <a:endParaRPr/>
-          </a:p>
-        </p:txBody>
-      </p:sp>
-      <p:sp>
-        <p:nvSpPr>
-          <p:cNvPr id="186" name="" descr="{&quot;isTemplate&quot;:true,&quot;type&quot;:&quot;text&quot;}"/>
-          <p:cNvSpPr txBox="1"/>
-          <p:nvPr/>
-        </p:nvSpPr>
-        <p:spPr>
-          <a:xfrm rot="0" flipH="0" flipV="0">
-            <a:off x="485775" y="4581525"/>
-            <a:ext cx="5438775" cy="190500"/>
-          </a:xfrm>
-          <a:prstGeom prst="rect"/>
-        </p:spPr>
-        <p:txBody>
-          <a:bodyPr wrap="none" lIns="0" tIns="0" rIns="0" bIns="0"/>
-          <a:p>
-            <a:pPr>
-              <a:lnSpc>
-                <a:spcPct val="128000"/>
-              </a:lnSpc>
-            </a:pPr>
-            <a:r>
-              <a:rPr lang="en-US" sz="975">
-                <a:solidFill>
-                  <a:srgbClr val="D7E3F6"/>
-                </a:solidFill>
-                <a:latin typeface="Consolas"/>
-                <a:ea typeface="Consolas"/>
-              </a:rPr>
-              <a:t xml:space="preserve">    jtj_cam, ..., resid = self._assemble_jtj(...)</a:t>
-            </a:r>
-            <a:endParaRPr/>
-          </a:p>
-        </p:txBody>
-      </p:sp>
-      <p:sp>
-        <p:nvSpPr>
-          <p:cNvPr id="187" name="" descr="{&quot;isTemplate&quot;:true,&quot;type&quot;:&quot;text&quot;}"/>
-          <p:cNvSpPr txBox="1"/>
-          <p:nvPr/>
-        </p:nvSpPr>
-        <p:spPr>
-          <a:xfrm rot="0" flipH="0" flipV="0">
-            <a:off x="485775" y="4772025"/>
-            <a:ext cx="5438775" cy="190500"/>
-          </a:xfrm>
-          <a:prstGeom prst="rect"/>
-        </p:spPr>
-        <p:txBody>
-          <a:bodyPr wrap="none" lIns="0" tIns="0" rIns="0" bIns="0"/>
-          <a:p>
-            <a:pPr>
-              <a:lnSpc>
-                <a:spcPct val="128000"/>
-              </a:lnSpc>
-            </a:pPr>
-            <a:r>
-              <a:rPr lang="en-US" sz="975">
-                <a:solidFill>
-                  <a:srgbClr val="D7E3F6"/>
-                </a:solidFill>
-                <a:latin typeface="Consolas"/>
-                <a:ea typeface="Consolas"/>
-              </a:rPr>
-              <a:t xml:space="preserve">    jtj_cam.diagonal().mul_(1 + lm)        # LM </a:t>
-            </a:r>
-            <a:r>
-              <a:rPr lang="zh-CN" sz="975">
-                <a:solidFill>
-                  <a:srgbClr val="D7E3F6"/>
-                </a:solidFill>
-                <a:latin typeface="Consolas"/>
-                <a:ea typeface="Consolas"/>
-              </a:rPr>
-              <a:t>阻尼</a:t>
-            </a:r>
-            <a:endParaRPr/>
-          </a:p>
-        </p:txBody>
-      </p:sp>
-      <p:sp>
-        <p:nvSpPr>
-          <p:cNvPr id="188" name="" descr="{&quot;isTemplate&quot;:true,&quot;type&quot;:&quot;text&quot;}"/>
-          <p:cNvSpPr txBox="1"/>
-          <p:nvPr/>
-        </p:nvSpPr>
-        <p:spPr>
-          <a:xfrm rot="0" flipH="0" flipV="0">
-            <a:off x="485775" y="4962525"/>
-            <a:ext cx="5438775" cy="190500"/>
-          </a:xfrm>
-          <a:prstGeom prst="rect"/>
-        </p:spPr>
-        <p:txBody>
-          <a:bodyPr wrap="none" lIns="0" tIns="0" rIns="0" bIns="0"/>
-          <a:p>
-            <a:pPr>
-              <a:lnSpc>
-                <a:spcPct val="128000"/>
-              </a:lnSpc>
-            </a:pPr>
-            <a:r>
-              <a:rPr lang="en-US" sz="975">
-                <a:solidFill>
-                  <a:srgbClr val="D7E3F6"/>
-                </a:solidFill>
-                <a:latin typeface="Consolas"/>
-                <a:ea typeface="Consolas"/>
-              </a:rPr>
-              <a:t xml:space="preserve">    jtj_xyz_inv = self.inv_3x3(jtj_xyz)    # C^-1</a:t>
-            </a:r>
-            <a:endParaRPr/>
-          </a:p>
-        </p:txBody>
-      </p:sp>
-      <p:sp>
-        <p:nvSpPr>
-          <p:cNvPr id="189" name="" descr="{&quot;isTemplate&quot;:true,&quot;type&quot;:&quot;text&quot;}"/>
-          <p:cNvSpPr txBox="1"/>
-          <p:nvPr/>
-        </p:nvSpPr>
-        <p:spPr>
-          <a:xfrm rot="0" flipH="0" flipV="0">
-            <a:off x="485775" y="5153025"/>
-            <a:ext cx="5438775" cy="190500"/>
-          </a:xfrm>
-          <a:prstGeom prst="rect"/>
-        </p:spPr>
-        <p:txBody>
-          <a:bodyPr wrap="none" lIns="0" tIns="0" rIns="0" bIns="0"/>
-          <a:p>
-            <a:pPr>
-              <a:lnSpc>
-                <a:spcPct val="128000"/>
-              </a:lnSpc>
-            </a:pPr>
-            <a:r>
-              <a:rPr lang="en-US" sz="975">
-                <a:solidFill>
-                  <a:srgbClr val="D7E3F6"/>
-                </a:solidFill>
-                <a:latin typeface="Consolas"/>
-                <a:ea typeface="Consolas"/>
-              </a:rPr>
-              <a:t xml:space="preserve">    S = jtj_cam - jtj_xyz_inv @ jtj_cam_xyz.T @ jtj_cam_xyz</a:t>
-            </a:r>
-            <a:endParaRPr/>
-          </a:p>
-        </p:txBody>
-      </p:sp>
-      <p:sp>
-        <p:nvSpPr>
-          <p:cNvPr id="190" name="" descr="{&quot;isTemplate&quot;:true,&quot;type&quot;:&quot;text&quot;}"/>
-          <p:cNvSpPr txBox="1"/>
-          <p:nvPr/>
-        </p:nvSpPr>
-        <p:spPr>
-          <a:xfrm rot="0" flipH="0" flipV="0">
-            <a:off x="485775" y="5343525"/>
-            <a:ext cx="5438775" cy="190500"/>
-          </a:xfrm>
-          <a:prstGeom prst="rect"/>
-        </p:spPr>
-        <p:txBody>
-          <a:bodyPr wrap="none" lIns="0" tIns="0" rIns="0" bIns="0"/>
-          <a:p>
-            <a:pPr>
-              <a:lnSpc>
-                <a:spcPct val="128000"/>
-              </a:lnSpc>
-            </a:pPr>
-            <a:r>
-              <a:rPr lang="en-US" sz="975">
-                <a:solidFill>
-                  <a:srgbClr val="D7E3F6"/>
-                </a:solidFill>
-                <a:latin typeface="Consolas"/>
-                <a:ea typeface="Consolas"/>
-              </a:rPr>
-              <a:t xml:space="preserve">    L = torch.linalg.cholesky_ex(S)[0]      # </a:t>
-            </a:r>
-            <a:r>
-              <a:rPr lang="zh-CN" sz="975">
-                <a:solidFill>
-                  <a:srgbClr val="D7E3F6"/>
-                </a:solidFill>
-                <a:latin typeface="Consolas"/>
-                <a:ea typeface="Consolas"/>
-              </a:rPr>
-              <a:t>舒尔补</a:t>
-            </a:r>
-            <a:r>
-              <a:rPr lang="en-US" sz="975">
-                <a:solidFill>
-                  <a:srgbClr val="D7E3F6"/>
-                </a:solidFill>
-                <a:latin typeface="Consolas"/>
-                <a:ea typeface="Consolas"/>
-              </a:rPr>
-              <a:t xml:space="preserve"> S</a:t>
-            </a:r>
-            <a:endParaRPr/>
-          </a:p>
-        </p:txBody>
-      </p:sp>
-      <p:sp>
-        <p:nvSpPr>
-          <p:cNvPr id="191" name="" descr="{&quot;isTemplate&quot;:true,&quot;type&quot;:&quot;text&quot;}"/>
-          <p:cNvSpPr txBox="1"/>
-          <p:nvPr/>
-        </p:nvSpPr>
-        <p:spPr>
-          <a:xfrm rot="0" flipH="0" flipV="0">
-            <a:off x="485775" y="5534025"/>
-            <a:ext cx="5438775" cy="190500"/>
-          </a:xfrm>
-          <a:prstGeom prst="rect"/>
-        </p:spPr>
-        <p:txBody>
-          <a:bodyPr wrap="none" lIns="0" tIns="0" rIns="0" bIns="0"/>
-          <a:p>
-            <a:pPr>
-              <a:lnSpc>
-                <a:spcPct val="128000"/>
-              </a:lnSpc>
-            </a:pPr>
-            <a:r>
-              <a:rPr lang="en-US" sz="975">
-                <a:solidFill>
-                  <a:srgbClr val="D7E3F6"/>
-                </a:solidFill>
-                <a:latin typeface="Consolas"/>
-                <a:ea typeface="Consolas"/>
-              </a:rPr>
-              <a:t xml:space="preserve">    dcam = torch.linalg.solve_triangular(...)  # ΔT</a:t>
-            </a:r>
-            <a:endParaRPr/>
-          </a:p>
-        </p:txBody>
-      </p:sp>
-      <p:sp>
-        <p:nvSpPr>
-          <p:cNvPr id="192" name="" descr="{&quot;isTemplate&quot;:true,&quot;type&quot;:&quot;text&quot;}"/>
-          <p:cNvSpPr txBox="1"/>
-          <p:nvPr/>
-        </p:nvSpPr>
-        <p:spPr>
-          <a:xfrm rot="0" flipH="0" flipV="0">
-            <a:off x="485775" y="5724525"/>
-            <a:ext cx="5438775" cy="190500"/>
-          </a:xfrm>
-          <a:prstGeom prst="rect"/>
-        </p:spPr>
-        <p:txBody>
-          <a:bodyPr wrap="none" lIns="0" tIns="0" rIns="0" bIns="0"/>
-          <a:p>
-            <a:pPr>
-              <a:lnSpc>
-                <a:spcPct val="128000"/>
-              </a:lnSpc>
-            </a:pPr>
-            <a:r>
-              <a:rPr lang="en-US" sz="975">
-                <a:solidFill>
-                  <a:srgbClr val="D7E3F6"/>
-                </a:solidFill>
-                <a:latin typeface="Consolas"/>
-                <a:ea typeface="Consolas"/>
-              </a:rPr>
-              <a:t xml:space="preserve">    dxyz = torch.bmm(b.view(-1, 1, 3), jtj_xyz_inv)</a:t>
-            </a:r>
-            <a:endParaRPr/>
-          </a:p>
-        </p:txBody>
-      </p:sp>
-      <p:sp>
-        <p:nvSpPr>
-          <p:cNvPr id="193" name=""/>
+      <p:pic>
+        <p:nvPicPr>
+          <p:cNvPr id="176" name=""/>
+          <p:cNvPicPr>
+            <a:picLocks noChangeAspect="1"/>
+          </p:cNvPicPr>
+          <p:nvPr/>
+        </p:nvPicPr>
+        <p:blipFill>
+          <a:blip r:embed="rId3"/>
+          <a:stretch>
+            <a:fillRect/>
+          </a:stretch>
+        </p:blipFill>
+        <p:spPr>
+          <a:xfrm rot="0" flipH="0" flipV="0">
+            <a:off x="485775" y="4362450"/>
+            <a:ext cx="5410200" cy="1524000"/>
+          </a:xfrm>
+          <a:prstGeom prst="rect">
+            <a:avLst/>
+          </a:prstGeom>
+          <a:ln/>
+        </p:spPr>
+      </p:pic>
+      <p:sp>
+        <p:nvSpPr>
+          <p:cNvPr id="177" name=""/>
           <p:cNvSpPr/>
           <p:nvPr/>
         </p:nvSpPr>
         <p:spPr>
           <a:xfrm rot="0" flipH="0" flipV="0">
-            <a:off x="6162675" y="942975"/>
-            <a:ext cx="5648325" cy="1562100"/>
+            <a:off x="6162675" y="904875"/>
+            <a:ext cx="5648325" cy="1552575"/>
           </a:xfrm>
           <a:prstGeom prst="roundRect">
             <a:avLst>
-              <a:gd name="adj" fmla="val 3049"/>
+              <a:gd name="adj" fmla="val 3067"/>
             </a:avLst>
           </a:prstGeom>
           <a:solidFill>
-            <a:srgbClr val="0F1D33"/>
+            <a:srgbClr val="1E1E1E"/>
           </a:solidFill>
           <a:ln/>
         </p:spPr>
@@ -9675,13 +8966,13 @@
       </p:sp>
       <p:sp>
         <p:nvSpPr>
-          <p:cNvPr id="194" name="" descr="{&quot;isTemplate&quot;:true,&quot;type&quot;:&quot;text&quot;}"/>
-          <p:cNvSpPr txBox="1"/>
-          <p:nvPr/>
-        </p:nvSpPr>
-        <p:spPr>
-          <a:xfrm rot="0" flipH="0" flipV="0">
-            <a:off x="6267450" y="1000125"/>
+          <p:cNvPr id="178" name="" descr="{&quot;isTemplate&quot;:true,&quot;type&quot;:&quot;text&quot;}"/>
+          <p:cNvSpPr txBox="1"/>
+          <p:nvPr/>
+        </p:nvSpPr>
+        <p:spPr>
+          <a:xfrm rot="0" flipH="0" flipV="0">
+            <a:off x="6267450" y="952500"/>
             <a:ext cx="5438775" cy="152400"/>
           </a:xfrm>
           <a:prstGeom prst="rect"/>
@@ -9720,13 +9011,13 @@
       </p:sp>
       <p:sp>
         <p:nvSpPr>
-          <p:cNvPr id="195" name="" descr="{&quot;isTemplate&quot;:true,&quot;type&quot;:&quot;text&quot;}"/>
-          <p:cNvSpPr txBox="1"/>
-          <p:nvPr/>
-        </p:nvSpPr>
-        <p:spPr>
-          <a:xfrm rot="0" flipH="0" flipV="0">
-            <a:off x="6267450" y="1162050"/>
+          <p:cNvPr id="179" name="" descr="{&quot;isTemplate&quot;:true,&quot;type&quot;:&quot;text&quot;}"/>
+          <p:cNvSpPr txBox="1"/>
+          <p:nvPr/>
+        </p:nvSpPr>
+        <p:spPr>
+          <a:xfrm rot="0" flipH="0" flipV="0">
+            <a:off x="6267450" y="1104900"/>
             <a:ext cx="5438775" cy="114300"/>
           </a:xfrm>
           <a:prstGeom prst="rect"/>
@@ -9742,7 +9033,7 @@
             <a:r>
               <a:rPr lang="en-US" sz="750">
                 <a:solidFill>
-                  <a:srgbClr val="6D87AC"/>
+                  <a:srgbClr val="7F8C9F"/>
                 </a:solidFill>
                 <a:latin typeface="Consolas"/>
                 <a:ea typeface="Consolas"/>
@@ -9753,264 +9044,49 @@
           </a:p>
         </p:txBody>
       </p:sp>
-      <p:sp>
-        <p:nvSpPr>
-          <p:cNvPr id="196" name="" descr="{&quot;isTemplate&quot;:true,&quot;type&quot;:&quot;text&quot;}"/>
-          <p:cNvSpPr txBox="1"/>
-          <p:nvPr/>
-        </p:nvSpPr>
-        <p:spPr>
-          <a:xfrm rot="0" flipH="0" flipV="0">
-            <a:off x="6267450" y="1304925"/>
-            <a:ext cx="5438775" cy="190500"/>
-          </a:xfrm>
-          <a:prstGeom prst="rect"/>
-        </p:spPr>
-        <p:txBody>
-          <a:bodyPr wrap="none" lIns="0" tIns="0" rIns="0" bIns="0"/>
-          <a:p>
-            <a:pPr>
-              <a:lnSpc>
-                <a:spcPct val="128000"/>
-              </a:lnSpc>
-            </a:pPr>
-            <a:r>
-              <a:rPr lang="en-US" sz="975">
-                <a:solidFill>
-                  <a:srgbClr val="D7E3F6"/>
-                </a:solidFill>
-                <a:latin typeface="Consolas"/>
-                <a:ea typeface="Consolas"/>
-              </a:rPr>
-              <a:t xml:space="preserve">if dists.max() &gt; self.min_loop_size:      # </a:t>
-            </a:r>
-            <a:r>
-              <a:rPr lang="zh-CN" sz="975">
-                <a:solidFill>
-                  <a:srgbClr val="D7E3F6"/>
-                </a:solidFill>
-                <a:latin typeface="Consolas"/>
-                <a:ea typeface="Consolas"/>
-              </a:rPr>
-              <a:t>图距</a:t>
-            </a:r>
-            <a:r>
-              <a:rPr lang="en-US" sz="975">
-                <a:solidFill>
-                  <a:srgbClr val="D7E3F6"/>
-                </a:solidFill>
-                <a:latin typeface="Consolas"/>
-                <a:ea typeface="Consolas"/>
-              </a:rPr>
-              <a:t xml:space="preserve"> &gt; 10</a:t>
-            </a:r>
-            <a:endParaRPr/>
-          </a:p>
-        </p:txBody>
-      </p:sp>
-      <p:sp>
-        <p:nvSpPr>
-          <p:cNvPr id="197" name="" descr="{&quot;isTemplate&quot;:true,&quot;type&quot;:&quot;text&quot;}"/>
-          <p:cNvSpPr txBox="1"/>
-          <p:nvPr/>
-        </p:nvSpPr>
-        <p:spPr>
-          <a:xfrm rot="0" flipH="0" flipV="0">
-            <a:off x="6267450" y="1495425"/>
-            <a:ext cx="5438775" cy="190500"/>
-          </a:xfrm>
-          <a:prstGeom prst="rect"/>
-        </p:spPr>
-        <p:txBody>
-          <a:bodyPr wrap="none" lIns="0" tIns="0" rIns="0" bIns="0"/>
-          <a:p>
-            <a:pPr>
-              <a:lnSpc>
-                <a:spcPct val="128000"/>
-              </a:lnSpc>
-            </a:pPr>
-            <a:r>
-              <a:rPr lang="en-US" sz="975">
-                <a:solidFill>
-                  <a:srgbClr val="D7E3F6"/>
-                </a:solidFill>
-                <a:latin typeface="Consolas"/>
-                <a:ea typeface="Consolas"/>
-              </a:rPr>
-              <a:t xml:space="preserve">    clusters_t = split_into_clusters(dists)   # </a:t>
-            </a:r>
-            <a:r>
-              <a:rPr lang="zh-CN" sz="975">
-                <a:solidFill>
-                  <a:srgbClr val="D7E3F6"/>
-                </a:solidFill>
-                <a:latin typeface="Consolas"/>
-                <a:ea typeface="Consolas"/>
-              </a:rPr>
-              <a:t>分两簇</a:t>
-            </a:r>
-            <a:endParaRPr/>
-          </a:p>
-        </p:txBody>
-      </p:sp>
-      <p:sp>
-        <p:nvSpPr>
-          <p:cNvPr id="198" name="" descr="{&quot;isTemplate&quot;:true,&quot;type&quot;:&quot;text&quot;}"/>
-          <p:cNvSpPr txBox="1"/>
-          <p:nvPr/>
-        </p:nvSpPr>
-        <p:spPr>
-          <a:xfrm rot="0" flipH="0" flipV="0">
-            <a:off x="6267450" y="1685925"/>
-            <a:ext cx="5438775" cy="190500"/>
-          </a:xfrm>
-          <a:prstGeom prst="rect"/>
-        </p:spPr>
-        <p:txBody>
-          <a:bodyPr wrap="none" lIns="0" tIns="0" rIns="0" bIns="0"/>
-          <a:p>
-            <a:pPr>
-              <a:lnSpc>
-                <a:spcPct val="128000"/>
-              </a:lnSpc>
-            </a:pPr>
-            <a:r>
-              <a:rPr lang="en-US" sz="975">
-                <a:solidFill>
-                  <a:srgbClr val="D7E3F6"/>
-                </a:solidFill>
-                <a:latin typeface="Consolas"/>
-                <a:ea typeface="Consolas"/>
-              </a:rPr>
-              <a:t>is_loop = (min(n_robust_pairs) &gt; n // 2 and</a:t>
-            </a:r>
-            <a:endParaRPr/>
-          </a:p>
-        </p:txBody>
-      </p:sp>
-      <p:sp>
-        <p:nvSpPr>
-          <p:cNvPr id="199" name="" descr="{&quot;isTemplate&quot;:true,&quot;type&quot;:&quot;text&quot;}"/>
-          <p:cNvSpPr txBox="1"/>
-          <p:nvPr/>
-        </p:nvSpPr>
-        <p:spPr>
-          <a:xfrm rot="0" flipH="0" flipV="0">
-            <a:off x="6267450" y="1876425"/>
-            <a:ext cx="5438775" cy="190500"/>
-          </a:xfrm>
-          <a:prstGeom prst="rect"/>
-        </p:spPr>
-        <p:txBody>
-          <a:bodyPr wrap="none" lIns="0" tIns="0" rIns="0" bIns="0"/>
-          <a:p>
-            <a:pPr>
-              <a:lnSpc>
-                <a:spcPct val="128000"/>
-              </a:lnSpc>
-            </a:pPr>
-            <a:r>
-              <a:rPr lang="en-US" sz="975">
-                <a:solidFill>
-                  <a:srgbClr val="D7E3F6"/>
-                </a:solidFill>
-                <a:latin typeface="Consolas"/>
-                <a:ea typeface="Consolas"/>
-              </a:rPr>
-              <a:t xml:space="preserve">           min(max_matches_robustness) &gt; 0.5 * max(...))</a:t>
-            </a:r>
-            <a:endParaRPr/>
-          </a:p>
-        </p:txBody>
-      </p:sp>
-      <p:sp>
-        <p:nvSpPr>
-          <p:cNvPr id="200" name="" descr="{&quot;isTemplate&quot;:true,&quot;type&quot;:&quot;text&quot;}"/>
-          <p:cNvSpPr txBox="1"/>
-          <p:nvPr/>
-        </p:nvSpPr>
-        <p:spPr>
-          <a:xfrm rot="0" flipH="0" flipV="0">
-            <a:off x="6267450" y="2066925"/>
-            <a:ext cx="5438775" cy="190500"/>
-          </a:xfrm>
-          <a:prstGeom prst="rect"/>
-        </p:spPr>
-        <p:txBody>
-          <a:bodyPr wrap="none" lIns="0" tIns="0" rIns="0" bIns="0"/>
-          <a:p>
-            <a:pPr>
-              <a:lnSpc>
-                <a:spcPct val="128000"/>
-              </a:lnSpc>
-            </a:pPr>
-            <a:r>
-              <a:rPr lang="en-US" sz="975">
-                <a:solidFill>
-                  <a:srgbClr val="D7E3F6"/>
-                </a:solidFill>
-                <a:latin typeface="Consolas"/>
-                <a:ea typeface="Consolas"/>
-              </a:rPr>
-              <a:t>if len(match.kpts) &gt;= self.min_matches_edge:   # τm=500</a:t>
-            </a:r>
-            <a:endParaRPr/>
-          </a:p>
-        </p:txBody>
-      </p:sp>
-      <p:sp>
-        <p:nvSpPr>
-          <p:cNvPr id="201" name="" descr="{&quot;isTemplate&quot;:true,&quot;type&quot;:&quot;text&quot;}"/>
-          <p:cNvSpPr txBox="1"/>
-          <p:nvPr/>
-        </p:nvSpPr>
-        <p:spPr>
-          <a:xfrm rot="0" flipH="0" flipV="0">
-            <a:off x="6267450" y="2257425"/>
-            <a:ext cx="5438775" cy="190500"/>
-          </a:xfrm>
-          <a:prstGeom prst="rect"/>
-        </p:spPr>
-        <p:txBody>
-          <a:bodyPr wrap="none" lIns="0" tIns="0" rIns="0" bIns="0"/>
-          <a:p>
-            <a:pPr>
-              <a:lnSpc>
-                <a:spcPct val="128000"/>
-              </a:lnSpc>
-            </a:pPr>
-            <a:r>
-              <a:rPr lang="en-US" sz="975">
-                <a:solidFill>
-                  <a:srgbClr val="D7E3F6"/>
-                </a:solidFill>
-                <a:latin typeface="Consolas"/>
-                <a:ea typeface="Consolas"/>
-              </a:rPr>
-              <a:t xml:space="preserve">    self.pose_graph.add_match(i, j, 1.0 / len(match.kpts))</a:t>
-            </a:r>
-            <a:endParaRPr/>
-          </a:p>
-        </p:txBody>
-      </p:sp>
-      <p:sp>
-        <p:nvSpPr>
-          <p:cNvPr id="202" name=""/>
+      <p:pic>
+        <p:nvPicPr>
+          <p:cNvPr id="180" name=""/>
+          <p:cNvPicPr>
+            <a:picLocks noChangeAspect="1"/>
+          </p:cNvPicPr>
+          <p:nvPr/>
+        </p:nvPicPr>
+        <p:blipFill>
+          <a:blip r:embed="rId4"/>
+          <a:stretch>
+            <a:fillRect/>
+          </a:stretch>
+        </p:blipFill>
+        <p:spPr>
+          <a:xfrm rot="0" flipH="0" flipV="0">
+            <a:off x="6267450" y="1238250"/>
+            <a:ext cx="5410200" cy="1171575"/>
+          </a:xfrm>
+          <a:prstGeom prst="rect">
+            <a:avLst/>
+          </a:prstGeom>
+          <a:ln/>
+        </p:spPr>
+      </p:pic>
+      <p:sp>
+        <p:nvSpPr>
+          <p:cNvPr id="181" name=""/>
           <p:cNvSpPr/>
           <p:nvPr/>
         </p:nvSpPr>
         <p:spPr>
           <a:xfrm rot="0" flipH="0" flipV="0">
-            <a:off x="6162675" y="2581275"/>
-            <a:ext cx="5648325" cy="1181100"/>
+            <a:off x="6162675" y="2552700"/>
+            <a:ext cx="5648325" cy="1200150"/>
           </a:xfrm>
           <a:prstGeom prst="roundRect">
             <a:avLst>
-              <a:gd name="adj" fmla="val 4032"/>
+              <a:gd name="adj" fmla="val 3968"/>
             </a:avLst>
           </a:prstGeom>
           <a:solidFill>
-            <a:srgbClr val="0F1D33"/>
+            <a:srgbClr val="1E1E1E"/>
           </a:solidFill>
           <a:ln/>
         </p:spPr>
@@ -10021,13 +9097,13 @@
       </p:sp>
       <p:sp>
         <p:nvSpPr>
-          <p:cNvPr id="203" name="" descr="{&quot;isTemplate&quot;:true,&quot;type&quot;:&quot;text&quot;}"/>
-          <p:cNvSpPr txBox="1"/>
-          <p:nvPr/>
-        </p:nvSpPr>
-        <p:spPr>
-          <a:xfrm rot="0" flipH="0" flipV="0">
-            <a:off x="6267450" y="2638425"/>
+          <p:cNvPr id="182" name="" descr="{&quot;isTemplate&quot;:true,&quot;type&quot;:&quot;text&quot;}"/>
+          <p:cNvSpPr txBox="1"/>
+          <p:nvPr/>
+        </p:nvSpPr>
+        <p:spPr>
+          <a:xfrm rot="0" flipH="0" flipV="0">
+            <a:off x="6267450" y="2600325"/>
             <a:ext cx="5438775" cy="152400"/>
           </a:xfrm>
           <a:prstGeom prst="rect"/>
@@ -10066,13 +9142,13 @@
       </p:sp>
       <p:sp>
         <p:nvSpPr>
-          <p:cNvPr id="204" name="" descr="{&quot;isTemplate&quot;:true,&quot;type&quot;:&quot;text&quot;}"/>
-          <p:cNvSpPr txBox="1"/>
-          <p:nvPr/>
-        </p:nvSpPr>
-        <p:spPr>
-          <a:xfrm rot="0" flipH="0" flipV="0">
-            <a:off x="6267450" y="2800350"/>
+          <p:cNvPr id="183" name="" descr="{&quot;isTemplate&quot;:true,&quot;type&quot;:&quot;text&quot;}"/>
+          <p:cNvSpPr txBox="1"/>
+          <p:nvPr/>
+        </p:nvSpPr>
+        <p:spPr>
+          <a:xfrm rot="0" flipH="0" flipV="0">
+            <a:off x="6267450" y="2752725"/>
             <a:ext cx="5438775" cy="114300"/>
           </a:xfrm>
           <a:prstGeom prst="rect"/>
@@ -10088,7 +9164,7 @@
             <a:r>
               <a:rPr lang="en-US" sz="750">
                 <a:solidFill>
-                  <a:srgbClr val="6D87AC"/>
+                  <a:srgbClr val="7F8C9F"/>
                 </a:solidFill>
                 <a:latin typeface="Consolas"/>
                 <a:ea typeface="Consolas"/>
@@ -10099,174 +9175,49 @@
           </a:p>
         </p:txBody>
       </p:sp>
-      <p:sp>
-        <p:nvSpPr>
-          <p:cNvPr id="205" name="" descr="{&quot;isTemplate&quot;:true,&quot;type&quot;:&quot;text&quot;}"/>
-          <p:cNvSpPr txBox="1"/>
-          <p:nvPr/>
-        </p:nvSpPr>
-        <p:spPr>
-          <a:xfrm rot="0" flipH="0" flipV="0">
-            <a:off x="6267450" y="2943225"/>
-            <a:ext cx="5438775" cy="190500"/>
-          </a:xfrm>
-          <a:prstGeom prst="rect"/>
-        </p:spPr>
-        <p:txBody>
-          <a:bodyPr wrap="none" lIns="0" tIns="0" rIns="0" bIns="0"/>
-          <a:p>
-            <a:pPr>
-              <a:lnSpc>
-                <a:spcPct val="128000"/>
-              </a:lnSpc>
-            </a:pPr>
-            <a:r>
-              <a:rPr lang="en-US" sz="975">
-                <a:solidFill>
-                  <a:srgbClr val="D7E3F6"/>
-                </a:solidFill>
-                <a:latin typeface="Consolas"/>
-                <a:ea typeface="Consolas"/>
-              </a:rPr>
-              <a:t>tri_idepth = 1 / (pts3d[has_pt3d] @ R.T + t)[..., -1]</a:t>
-            </a:r>
-            <a:endParaRPr/>
-          </a:p>
-        </p:txBody>
-      </p:sp>
-      <p:sp>
-        <p:nvSpPr>
-          <p:cNvPr id="206" name="" descr="{&quot;isTemplate&quot;:true,&quot;type&quot;:&quot;text&quot;}"/>
-          <p:cNvSpPr txBox="1"/>
-          <p:nvPr/>
-        </p:nvSpPr>
-        <p:spPr>
-          <a:xfrm rot="0" flipH="0" flipV="0">
-            <a:off x="6267450" y="3133725"/>
-            <a:ext cx="5438775" cy="190500"/>
-          </a:xfrm>
-          <a:prstGeom prst="rect"/>
-        </p:spPr>
-        <p:txBody>
-          <a:bodyPr wrap="none" lIns="0" tIns="0" rIns="0" bIns="0"/>
-          <a:p>
-            <a:pPr>
-              <a:lnSpc>
-                <a:spcPct val="128000"/>
-              </a:lnSpc>
-            </a:pPr>
-            <a:r>
-              <a:rPr lang="en-US" sz="975">
-                <a:solidFill>
-                  <a:srgbClr val="D7E3F6"/>
-                </a:solidFill>
-                <a:latin typeface="Consolas"/>
-                <a:ea typeface="Consolas"/>
-              </a:rPr>
-              <a:t>mono_al, g_s, g_o = align_samples(tri_idepth, sampled)</a:t>
-            </a:r>
-            <a:endParaRPr/>
-          </a:p>
-        </p:txBody>
-      </p:sp>
-      <p:sp>
-        <p:nvSpPr>
-          <p:cNvPr id="207" name="" descr="{&quot;isTemplate&quot;:true,&quot;type&quot;:&quot;text&quot;}"/>
-          <p:cNvSpPr txBox="1"/>
-          <p:nvPr/>
-        </p:nvSpPr>
-        <p:spPr>
-          <a:xfrm rot="0" flipH="0" flipV="0">
-            <a:off x="6267450" y="3324225"/>
-            <a:ext cx="5438775" cy="190500"/>
-          </a:xfrm>
-          <a:prstGeom prst="rect"/>
-        </p:spPr>
-        <p:txBody>
-          <a:bodyPr wrap="none" lIns="0" tIns="0" rIns="0" bIns="0"/>
-          <a:p>
-            <a:pPr>
-              <a:lnSpc>
-                <a:spcPct val="128000"/>
-              </a:lnSpc>
-            </a:pPr>
-            <a:r>
-              <a:rPr lang="en-US" sz="975">
-                <a:solidFill>
-                  <a:srgbClr val="D7E3F6"/>
-                </a:solidFill>
-                <a:latin typeface="Consolas"/>
-                <a:ea typeface="Consolas"/>
-              </a:rPr>
-              <a:t>valid = err &lt; m_err + grid_outlier_mult * err_dev</a:t>
-            </a:r>
-            <a:endParaRPr/>
-          </a:p>
-        </p:txBody>
-      </p:sp>
-      <p:sp>
-        <p:nvSpPr>
-          <p:cNvPr id="208" name="" descr="{&quot;isTemplate&quot;:true,&quot;type&quot;:&quot;text&quot;}"/>
-          <p:cNvSpPr txBox="1"/>
-          <p:nvPr/>
-        </p:nvSpPr>
-        <p:spPr>
-          <a:xfrm rot="0" flipH="0" flipV="0">
-            <a:off x="6267450" y="3514725"/>
-            <a:ext cx="5438775" cy="190500"/>
-          </a:xfrm>
-          <a:prstGeom prst="rect"/>
-        </p:spPr>
-        <p:txBody>
-          <a:bodyPr wrap="none" lIns="0" tIns="0" rIns="0" bIns="0"/>
-          <a:p>
-            <a:pPr>
-              <a:lnSpc>
-                <a:spcPct val="128000"/>
-              </a:lnSpc>
-            </a:pPr>
-            <a:r>
-              <a:rPr lang="en-US" sz="975">
-                <a:solidFill>
-                  <a:srgbClr val="D7E3F6"/>
-                </a:solidFill>
-                <a:latin typeface="Consolas"/>
-                <a:ea typeface="Consolas"/>
-              </a:rPr>
-              <a:t xml:space="preserve">return align_depth_grid(..., 4, g_s, g_o)   # 4x4 </a:t>
-            </a:r>
-            <a:r>
-              <a:rPr lang="zh-CN" sz="975">
-                <a:solidFill>
-                  <a:srgbClr val="D7E3F6"/>
-                </a:solidFill>
-                <a:latin typeface="Consolas"/>
-                <a:ea typeface="Consolas"/>
-              </a:rPr>
-              <a:t>分块</a:t>
-            </a:r>
-            <a:endParaRPr/>
-          </a:p>
-        </p:txBody>
-      </p:sp>
-      <p:sp>
-        <p:nvSpPr>
-          <p:cNvPr id="209" name=""/>
+      <p:pic>
+        <p:nvPicPr>
+          <p:cNvPr id="184" name=""/>
+          <p:cNvPicPr>
+            <a:picLocks noChangeAspect="1"/>
+          </p:cNvPicPr>
+          <p:nvPr/>
+        </p:nvPicPr>
+        <p:blipFill>
+          <a:blip r:embed="rId5"/>
+          <a:stretch>
+            <a:fillRect/>
+          </a:stretch>
+        </p:blipFill>
+        <p:spPr>
+          <a:xfrm rot="0" flipH="0" flipV="0">
+            <a:off x="6267450" y="2886075"/>
+            <a:ext cx="5410200" cy="819150"/>
+          </a:xfrm>
+          <a:prstGeom prst="rect">
+            <a:avLst/>
+          </a:prstGeom>
+          <a:ln/>
+        </p:spPr>
+      </p:pic>
+      <p:sp>
+        <p:nvSpPr>
+          <p:cNvPr id="185" name=""/>
           <p:cNvSpPr/>
           <p:nvPr/>
         </p:nvSpPr>
         <p:spPr>
           <a:xfrm rot="0" flipH="0" flipV="0">
-            <a:off x="6162675" y="3838575"/>
-            <a:ext cx="5648325" cy="1371600"/>
+            <a:off x="6162675" y="3848100"/>
+            <a:ext cx="5648325" cy="1381125"/>
           </a:xfrm>
           <a:prstGeom prst="roundRect">
             <a:avLst>
-              <a:gd name="adj" fmla="val 3472"/>
+              <a:gd name="adj" fmla="val 3448"/>
             </a:avLst>
           </a:prstGeom>
           <a:solidFill>
-            <a:srgbClr val="0F1D33"/>
+            <a:srgbClr val="1E1E1E"/>
           </a:solidFill>
           <a:ln/>
         </p:spPr>
@@ -10277,7 +9228,7 @@
       </p:sp>
       <p:sp>
         <p:nvSpPr>
-          <p:cNvPr id="210" name="" descr="{&quot;isTemplate&quot;:true,&quot;type&quot;:&quot;text&quot;}"/>
+          <p:cNvPr id="186" name="" descr="{&quot;isTemplate&quot;:true,&quot;type&quot;:&quot;text&quot;}"/>
           <p:cNvSpPr txBox="1"/>
           <p:nvPr/>
         </p:nvSpPr>
@@ -10322,13 +9273,13 @@
       </p:sp>
       <p:sp>
         <p:nvSpPr>
-          <p:cNvPr id="211" name="" descr="{&quot;isTemplate&quot;:true,&quot;type&quot;:&quot;text&quot;}"/>
-          <p:cNvSpPr txBox="1"/>
-          <p:nvPr/>
-        </p:nvSpPr>
-        <p:spPr>
-          <a:xfrm rot="0" flipH="0" flipV="0">
-            <a:off x="6267450" y="4057650"/>
+          <p:cNvPr id="187" name="" descr="{&quot;isTemplate&quot;:true,&quot;type&quot;:&quot;text&quot;}"/>
+          <p:cNvSpPr txBox="1"/>
+          <p:nvPr/>
+        </p:nvSpPr>
+        <p:spPr>
+          <a:xfrm rot="0" flipH="0" flipV="0">
+            <a:off x="6267450" y="4048125"/>
             <a:ext cx="5438775" cy="114300"/>
           </a:xfrm>
           <a:prstGeom prst="rect"/>
@@ -10344,7 +9295,7 @@
             <a:r>
               <a:rPr lang="en-US" sz="750">
                 <a:solidFill>
-                  <a:srgbClr val="6D87AC"/>
+                  <a:srgbClr val="7F8C9F"/>
                 </a:solidFill>
                 <a:latin typeface="Consolas"/>
                 <a:ea typeface="Consolas"/>
@@ -10355,241 +9306,42 @@
           </a:p>
         </p:txBody>
       </p:sp>
-      <p:sp>
-        <p:nvSpPr>
-          <p:cNvPr id="212" name="" descr="{&quot;isTemplate&quot;:true,&quot;type&quot;:&quot;text&quot;}"/>
-          <p:cNvSpPr txBox="1"/>
-          <p:nvPr/>
-        </p:nvSpPr>
-        <p:spPr>
-          <a:xfrm rot="0" flipH="0" flipV="0">
-            <a:off x="6267450" y="4200525"/>
-            <a:ext cx="5438775" cy="190500"/>
-          </a:xfrm>
-          <a:prstGeom prst="rect"/>
-        </p:spPr>
-        <p:txBody>
-          <a:bodyPr wrap="none" lIns="0" tIns="0" rIns="0" bIns="0"/>
-          <a:p>
-            <a:pPr>
-              <a:lnSpc>
-                <a:spcPct val="128000"/>
-              </a:lnSpc>
-            </a:pPr>
-            <a:r>
-              <a:rPr lang="en-US" sz="975">
-                <a:solidFill>
-                  <a:srgbClr val="D7E3F6"/>
-                </a:solidFill>
-                <a:latin typeface="Consolas"/>
-                <a:ea typeface="Consolas"/>
-              </a:rPr>
-              <a:t>mask = screen_size &lt; self.hierarchy_screen_size_threshold  # 0.5 px</a:t>
-            </a:r>
-            <a:endParaRPr/>
-          </a:p>
-        </p:txBody>
-      </p:sp>
-      <p:sp>
-        <p:nvSpPr>
-          <p:cNvPr id="213" name="" descr="{&quot;isTemplate&quot;:true,&quot;type&quot;:&quot;text&quot;}"/>
-          <p:cNvSpPr txBox="1"/>
-          <p:nvPr/>
-        </p:nvSpPr>
-        <p:spPr>
-          <a:xfrm rot="0" flipH="0" flipV="0">
-            <a:off x="6267450" y="4391025"/>
-            <a:ext cx="5438775" cy="190500"/>
-          </a:xfrm>
-          <a:prstGeom prst="rect"/>
-        </p:spPr>
-        <p:txBody>
-          <a:bodyPr wrap="none" lIns="0" tIns="0" rIns="0" bIns="0"/>
-          <a:p>
-            <a:pPr>
-              <a:lnSpc>
-                <a:spcPct val="128000"/>
-              </a:lnSpc>
-            </a:pPr>
-            <a:r>
-              <a:rPr lang="en-US" sz="975">
-                <a:solidFill>
-                  <a:srgbClr val="D7E3F6"/>
-                </a:solidFill>
-                <a:latin typeface="Consolas"/>
-                <a:ea typeface="Consolas"/>
-              </a:rPr>
-              <a:t>if mask.sum() &gt; max(len(self.xyz) * 0.1, 200_000):</a:t>
-            </a:r>
-            <a:endParaRPr/>
-          </a:p>
-        </p:txBody>
-      </p:sp>
-      <p:sp>
-        <p:nvSpPr>
-          <p:cNvPr id="214" name="" descr="{&quot;isTemplate&quot;:true,&quot;type&quot;:&quot;text&quot;}"/>
-          <p:cNvSpPr txBox="1"/>
-          <p:nvPr/>
-        </p:nvSpPr>
-        <p:spPr>
-          <a:xfrm rot="0" flipH="0" flipV="0">
-            <a:off x="6267450" y="4581525"/>
-            <a:ext cx="5438775" cy="190500"/>
-          </a:xfrm>
-          <a:prstGeom prst="rect"/>
-        </p:spPr>
-        <p:txBody>
-          <a:bodyPr wrap="none" lIns="0" tIns="0" rIns="0" bIns="0"/>
-          <a:p>
-            <a:pPr>
-              <a:lnSpc>
-                <a:spcPct val="128000"/>
-              </a:lnSpc>
-            </a:pPr>
-            <a:r>
-              <a:rPr lang="en-US" sz="975">
-                <a:solidFill>
-                  <a:srgbClr val="D7E3F6"/>
-                </a:solidFill>
-                <a:latin typeface="Consolas"/>
-                <a:ea typeface="Consolas"/>
-              </a:rPr>
-              <a:t xml:space="preserve">    n_merged = self.create_hierarchy_level(cam_centre, mask)</a:t>
-            </a:r>
-            <a:endParaRPr/>
-          </a:p>
-        </p:txBody>
-      </p:sp>
-      <p:sp>
-        <p:nvSpPr>
-          <p:cNvPr id="215" name="" descr="{&quot;isTemplate&quot;:true,&quot;type&quot;:&quot;text&quot;}"/>
-          <p:cNvSpPr txBox="1"/>
-          <p:nvPr/>
-        </p:nvSpPr>
-        <p:spPr>
-          <a:xfrm rot="0" flipH="0" flipV="0">
-            <a:off x="6267450" y="4772025"/>
-            <a:ext cx="5438775" cy="190500"/>
-          </a:xfrm>
-          <a:prstGeom prst="rect"/>
-        </p:spPr>
-        <p:txBody>
-          <a:bodyPr wrap="none" lIns="0" tIns="0" rIns="0" bIns="0"/>
-          <a:p>
-            <a:pPr>
-              <a:lnSpc>
-                <a:spcPct val="128000"/>
-              </a:lnSpc>
-            </a:pPr>
-            <a:r>
-              <a:rPr lang="en-US" sz="975">
-                <a:solidFill>
-                  <a:srgbClr val="D7E3F6"/>
-                </a:solidFill>
-                <a:latin typeface="Consolas"/>
-                <a:ea typeface="Consolas"/>
-              </a:rPr>
-              <a:t xml:space="preserve"># </a:t>
-            </a:r>
-            <a:r>
-              <a:rPr lang="zh-CN" sz="975">
-                <a:solidFill>
-                  <a:srgbClr val="D7E3F6"/>
-                </a:solidFill>
-                <a:latin typeface="Consolas"/>
-                <a:ea typeface="Consolas"/>
-              </a:rPr>
-              <a:t>合并权重</a:t>
-            </a:r>
-            <a:r>
-              <a:rPr lang="en-US" sz="975">
-                <a:solidFill>
-                  <a:srgbClr val="D7E3F6"/>
-                </a:solidFill>
-                <a:latin typeface="Consolas"/>
-                <a:ea typeface="Consolas"/>
-              </a:rPr>
-              <a:t xml:space="preserve"> = opacity * screen_size^2</a:t>
-            </a:r>
-            <a:r>
-              <a:rPr lang="zh-CN" sz="975">
-                <a:solidFill>
-                  <a:srgbClr val="D7E3F6"/>
-                </a:solidFill>
-                <a:latin typeface="Consolas"/>
-                <a:ea typeface="Consolas"/>
-              </a:rPr>
-              <a:t>（非</a:t>
-            </a:r>
-            <a:r>
-              <a:rPr lang="en-US" sz="975">
-                <a:solidFill>
-                  <a:srgbClr val="D7E3F6"/>
-                </a:solidFill>
-                <a:latin typeface="Consolas"/>
-                <a:ea typeface="Consolas"/>
-              </a:rPr>
-              <a:t xml:space="preserve"> KL </a:t>
-            </a:r>
-            <a:r>
-              <a:rPr lang="zh-CN" sz="975">
-                <a:solidFill>
-                  <a:srgbClr val="D7E3F6"/>
-                </a:solidFill>
-                <a:latin typeface="Consolas"/>
-                <a:ea typeface="Consolas"/>
-              </a:rPr>
-              <a:t>投影）</a:t>
-            </a:r>
-            <a:endParaRPr/>
-          </a:p>
-        </p:txBody>
-      </p:sp>
-      <p:sp>
-        <p:nvSpPr>
-          <p:cNvPr id="216" name="" descr="{&quot;isTemplate&quot;:true,&quot;type&quot;:&quot;text&quot;}"/>
-          <p:cNvSpPr txBox="1"/>
-          <p:nvPr/>
-        </p:nvSpPr>
-        <p:spPr>
-          <a:xfrm rot="0" flipH="0" flipV="0">
-            <a:off x="6267450" y="4962525"/>
-            <a:ext cx="5438775" cy="190500"/>
-          </a:xfrm>
-          <a:prstGeom prst="rect"/>
-        </p:spPr>
-        <p:txBody>
-          <a:bodyPr wrap="none" lIns="0" tIns="0" rIns="0" bIns="0"/>
-          <a:p>
-            <a:pPr>
-              <a:lnSpc>
-                <a:spcPct val="128000"/>
-              </a:lnSpc>
-            </a:pPr>
-            <a:r>
-              <a:rPr lang="en-US" sz="975">
-                <a:solidFill>
-                  <a:srgbClr val="D7E3F6"/>
-                </a:solidFill>
-                <a:latin typeface="Consolas"/>
-                <a:ea typeface="Consolas"/>
-              </a:rPr>
-              <a:t>weights = opa.sigmoid() * screen_size[selected] ** 2</a:t>
-            </a:r>
-            <a:endParaRPr/>
-          </a:p>
-        </p:txBody>
-      </p:sp>
-      <p:sp>
-        <p:nvSpPr>
-          <p:cNvPr id="217" name="" descr="{&quot;isTemplate&quot;:true,&quot;type&quot;:&quot;text&quot;}"/>
-          <p:cNvSpPr txBox="1"/>
-          <p:nvPr/>
-        </p:nvSpPr>
-        <p:spPr>
-          <a:xfrm rot="0" flipH="0" flipV="0">
-            <a:off x="381000" y="6048375"/>
-            <a:ext cx="11430000" cy="457200"/>
+      <p:pic>
+        <p:nvPicPr>
+          <p:cNvPr id="188" name=""/>
+          <p:cNvPicPr>
+            <a:picLocks noChangeAspect="1"/>
+          </p:cNvPicPr>
+          <p:nvPr/>
+        </p:nvPicPr>
+        <p:blipFill>
+          <a:blip r:embed="rId6"/>
+          <a:srcRect l="238" t="0" r="238" b="0"/>
+          <a:stretch>
+            <a:fillRect/>
+          </a:stretch>
+        </p:blipFill>
+        <p:spPr>
+          <a:xfrm rot="0" flipH="0" flipV="0">
+            <a:off x="6267450" y="4181475"/>
+            <a:ext cx="5410200" cy="1000125"/>
+          </a:xfrm>
+          <a:prstGeom prst="rect">
+            <a:avLst/>
+          </a:prstGeom>
+          <a:ln/>
+        </p:spPr>
+      </p:pic>
+      <p:sp>
+        <p:nvSpPr>
+          <p:cNvPr id="189" name="" descr="{&quot;isTemplate&quot;:true,&quot;type&quot;:&quot;text&quot;}"/>
+          <p:cNvSpPr txBox="1"/>
+          <p:nvPr/>
+        </p:nvSpPr>
+        <p:spPr>
+          <a:xfrm rot="0" flipH="0" flipV="0">
+            <a:off x="381000" y="6000750"/>
+            <a:ext cx="11430000" cy="419100"/>
           </a:xfrm>
           <a:prstGeom prst="rect"/>
         </p:spPr>
@@ -10600,21 +9352,21 @@
           <a:p>
             <a:pPr>
               <a:lnSpc>
-                <a:spcPct val="140000"/>
-              </a:lnSpc>
-            </a:pPr>
-            <a:r>
-              <a:rPr lang="zh-CN" sz="1050">
+                <a:spcPct val="135000"/>
+              </a:lnSpc>
+            </a:pPr>
+            <a:r>
+              <a:rPr lang="zh-CN" sz="1013">
                 <a:solidFill>
                   <a:srgbClr val="8B97A8"/>
                 </a:solidFill>
                 <a:latin typeface="Microsoft YaHei"/>
                 <a:ea typeface="Microsoft YaHei"/>
               </a:rPr>
-              <a:t>为排版做了换行与变量缩写（</a:t>
-            </a:r>
-            <a:r>
-              <a:rPr lang="en-US" sz="1050">
+              <a:t>行号指向片段起点；为投影宽度做了换行与变量缩写（</a:t>
+            </a:r>
+            <a:r>
+              <a:rPr lang="en-US" sz="1013">
                 <a:solidFill>
                   <a:srgbClr val="8B97A8"/>
                 </a:solidFill>
@@ -10624,7 +9376,7 @@
               <a:t>w = edge_weight</a:t>
             </a:r>
             <a:r>
-              <a:rPr lang="zh-CN" sz="1050">
+              <a:rPr lang="zh-CN" sz="1013">
                 <a:solidFill>
                   <a:srgbClr val="8B97A8"/>
                 </a:solidFill>
@@ -10634,7 +9386,7 @@
               <a:t>），逻辑未改。第</a:t>
             </a:r>
             <a:r>
-              <a:rPr lang="en-US" sz="1050">
+              <a:rPr lang="en-US" sz="1013">
                 <a:solidFill>
                   <a:srgbClr val="8B97A8"/>
                 </a:solidFill>
@@ -10644,17 +9396,17 @@
               <a:t xml:space="preserve"> 7 </a:t>
             </a:r>
             <a:r>
-              <a:rPr lang="zh-CN" sz="1050">
+              <a:rPr lang="zh-CN" sz="1013">
                 <a:solidFill>
                   <a:srgbClr val="8B97A8"/>
                 </a:solidFill>
                 <a:latin typeface="Microsoft YaHei"/>
                 <a:ea typeface="Microsoft YaHei"/>
               </a:rPr>
-              <a:t>页按源码默认值修正：回环触发为</a:t>
-            </a:r>
-            <a:r>
-              <a:rPr lang="zh-CN" sz="1050">
+              <a:t>页已按源码默认值修正：回环触发为</a:t>
+            </a:r>
+            <a:r>
+              <a:rPr lang="zh-CN" sz="1013">
                 <a:solidFill>
                   <a:srgbClr val="8B97A8"/>
                 </a:solidFill>
@@ -10664,7 +9416,7 @@
               <a:t>加权图距</a:t>
             </a:r>
             <a:r>
-              <a:rPr lang="en-US" sz="1050">
+              <a:rPr lang="en-US" sz="1013">
                 <a:solidFill>
                   <a:srgbClr val="8B97A8"/>
                 </a:solidFill>
@@ -10674,7 +9426,7 @@
               <a:t xml:space="preserve"> &gt; 10</a:t>
             </a:r>
             <a:r>
-              <a:rPr lang="zh-CN" sz="1050">
+              <a:rPr lang="zh-CN" sz="1013">
                 <a:solidFill>
                   <a:srgbClr val="8B97A8"/>
                 </a:solidFill>
@@ -10684,7 +9436,7 @@
               <a:t>；层级合并触发为</a:t>
             </a:r>
             <a:r>
-              <a:rPr lang="zh-CN" sz="1050">
+              <a:rPr lang="zh-CN" sz="1013">
                 <a:solidFill>
                   <a:srgbClr val="8B97A8"/>
                 </a:solidFill>
@@ -10694,7 +9446,7 @@
               <a:t>可并数</a:t>
             </a:r>
             <a:r>
-              <a:rPr lang="en-US" sz="1050">
+              <a:rPr lang="en-US" sz="1013">
                 <a:solidFill>
                   <a:srgbClr val="8B97A8"/>
                 </a:solidFill>
@@ -10704,7 +9456,7 @@
               <a:t xml:space="preserve"> &gt; max(10%, 20 </a:t>
             </a:r>
             <a:r>
-              <a:rPr lang="zh-CN" sz="1050">
+              <a:rPr lang="zh-CN" sz="1013">
                 <a:solidFill>
                   <a:srgbClr val="8B97A8"/>
                 </a:solidFill>
@@ -10714,7 +9466,7 @@
               <a:t>万</a:t>
             </a:r>
             <a:r>
-              <a:rPr lang="en-US" sz="1050">
+              <a:rPr lang="en-US" sz="1013">
                 <a:solidFill>
                   <a:srgbClr val="8B97A8"/>
                 </a:solidFill>
@@ -10724,7 +9476,7 @@
               <a:t>)</a:t>
             </a:r>
             <a:r>
-              <a:rPr lang="zh-CN" sz="1050">
+              <a:rPr lang="zh-CN" sz="1013">
                 <a:solidFill>
                   <a:srgbClr val="8B97A8"/>
                 </a:solidFill>
@@ -10734,7 +9486,7 @@
               <a:t>，且是</a:t>
             </a:r>
             <a:r>
-              <a:rPr lang="en-US" sz="1050">
+              <a:rPr lang="en-US" sz="1013">
                 <a:solidFill>
                   <a:srgbClr val="8B97A8"/>
                 </a:solidFill>
@@ -10744,7 +9496,7 @@
               <a:t xml:space="preserve"> </a:t>
             </a:r>
             <a:r>
-              <a:rPr lang="en-US" sz="1050">
+              <a:rPr lang="en-US" sz="1013">
                 <a:solidFill>
                   <a:srgbClr val="8B97A8"/>
                 </a:solidFill>
@@ -10754,7 +9506,7 @@
               <a:t xml:space="preserve">kNN </a:t>
             </a:r>
             <a:r>
-              <a:rPr lang="zh-CN" sz="1050">
+              <a:rPr lang="zh-CN" sz="1013">
                 <a:solidFill>
                   <a:srgbClr val="8B97A8"/>
                 </a:solidFill>
@@ -10764,7 +9516,7 @@
               <a:t>加权平均</a:t>
             </a:r>
             <a:r>
-              <a:rPr lang="zh-CN" sz="1050">
+              <a:rPr lang="zh-CN" sz="1013">
                 <a:solidFill>
                   <a:srgbClr val="8B97A8"/>
                 </a:solidFill>
@@ -10774,7 +9526,7 @@
               <a:t>而非</a:t>
             </a:r>
             <a:r>
-              <a:rPr lang="en-US" sz="1050">
+              <a:rPr lang="en-US" sz="1013">
                 <a:solidFill>
                   <a:srgbClr val="8B97A8"/>
                 </a:solidFill>
@@ -10784,7 +9536,7 @@
               <a:t xml:space="preserve"> KL</a:t>
             </a:r>
             <a:r>
-              <a:rPr lang="zh-CN" sz="1050">
+              <a:rPr lang="zh-CN" sz="1013">
                 <a:solidFill>
                   <a:srgbClr val="8B97A8"/>
                 </a:solidFill>
@@ -10807,7 +9559,7 @@
   <p:cSld>
     <p:spTree>
       <p:nvGrpSpPr>
-        <p:cNvPr id="218" name="" descr="&lt;Slide style={{ width: '1280px', height: '720px', backgroundColor: '#FFFFFF', padding: '0px', flexDirection: 'column' }}&gt;&#10;    &lt;Box style={{ width: '1280px', height: '8px', backgroundColor: '#1E4FA8' }} /&gt;&#10;    &lt;Box style={{ padding: '34px 40px 0px 40px', flexDirection: 'row', justifyContent: 'space-between', alignItems: 'flex-end' }}&gt;&#10;        &lt;Text style={{ fontSize: 34, fontWeight: 'bold', color: '#1E4FA8' }}&gt;摘要&lt;/Text&gt;&#10;        &lt;Text style={{ fontSize: 15, color: '#8B97A8' }}&gt;02 / 15&lt;/Text&gt;&#10;    &lt;/Box&gt;&#10;    &lt;Box style={{ padding: '20px 40px 0px 40px', flexDirection: 'column', gap: 13 }}&gt;&#10;        &lt;Box style={{ backgroundColor: '#F0F5FC', borderLeft: '5px solid #1E4FA8', padding: '14px 20px', flexDirection: 'column' }}&gt;&#10;            &lt;Text style={{ fontSize: 22, fontWeight: 'bold', color: '#1E4FA8' }}&gt;问题&lt;/Text&gt;&#10;            &lt;Text style={{ fontSize: 22, color: '#1A2230', lineHeight: 1.5, marginTop: 6 }}&gt;3DGS 重建质量高、可实时渲染，但训练前必须由 SfM（COLMAP）离线解算相机位姿；SfM 要等&lt;b&gt;全部图像到齐&lt;/b&gt;，且对&lt;b&gt;乱序采集&lt;/b&gt;敏感。&lt;/Text&gt;&#10;        &lt;/Box&gt;&#10;        &lt;Box style={{ backgroundColor: '#F7F9FC', borderLeft: '5px solid #4A5568', padding: '14px 20px', flexDirection: 'column' }}&gt;&#10;            &lt;Text style={{ fontSize: 22, fontWeight: 'bold', color: '#4A5568' }}&gt;现状缺口&lt;/Text&gt;&#10;            &lt;Text style={{ fontSize: 22, color: '#1A2230', lineHeight: 1.5, marginTop: 6 }}&gt;离线 SfM + 3DGS 质量好、但慢且无现场反馈；SLAM 类增量重建能实时，却&lt;b&gt;假设图像有序&lt;/b&gt;——两者之间没人补齐。&lt;/Text&gt;&#10;        &lt;/Box&gt;&#10;        &lt;Box style={{ backgroundColor: '#F0F5FC', borderLeft: '5px solid #1E4FA8', padding: '14px 20px', flexDirection: 'column' }}&gt;&#10;            &lt;Text style={{ fontSize: 22, fontWeight: 'bold', color: '#1E4FA8' }}&gt;本文做法&lt;/Text&gt;&#10;            &lt;Text style={{ fontSize: 22, color: '#1A2230', lineHeight: 1.5, marginTop: 6 }}&gt;首个面向无序输入、具备全局一致性的即时反馈 3DGS 重建：两级快速匹配 + GPU 局部 BA + 簇级回环图传播 + 渐进式高斯层级。&lt;/Text&gt;&#10;        &lt;/Box&gt;&#10;        &lt;Box style={{ backgroundColor: '#F7F9FC', borderLeft: '5px solid #3D7BD9', padding: '14px 20px', flexDirection: 'column' }}&gt;&#10;            &lt;Text style={{ fontSize: 22, fontWeight: 'bold', color: '#3D7BD9' }}&gt;结果与复现&lt;/Text&gt;&#10;            &lt;Text style={{ fontSize: 22, color: '#1A2230', lineHeight: 1.5, marginTop: 6 }}&gt;MipNeRF360 上 &lt;b&gt;1 分 17 秒&lt;/b&gt;达到 &lt;b&gt;26.29 dB&lt;/b&gt;（离线参考 8 分 50 秒 / 27.52 dB）；输入打乱仅降 &lt;b&gt;0.5 dB&lt;/b&gt;。我们完成了端到端复现：&lt;b&gt;25.95 dB / 62.7 秒 / 185 帧&lt;/b&gt;。&lt;/Text&gt;&#10;        &lt;/Box&gt;&#10;    &lt;/Box&gt;&#10;    &lt;Box style={{ padding: '16px 40px 0px 40px' }}&gt;&#10;        &lt;Text style={{ fontSize: 16, color: '#4A5568' }}&gt;关键词：三维高斯泼溅 · 无序采集 · 即时重建 · 协视图 · 回环闭合 · 渐进式层级&lt;/Text&gt;&#10;    &lt;/Box&gt;&#10;&lt;/Slide&gt;&#10;"/>
+        <p:cNvPr id="190" name="" descr="&lt;Slide style={{ width: '1280px', height: '720px', backgroundColor: '#FFFFFF', padding: '0px', flexDirection: 'column' }}&gt;&#10;    &lt;Box style={{ width: '1280px', height: '8px', backgroundColor: '#1E4FA8' }} /&gt;&#10;    &lt;Box style={{ padding: '34px 40px 0px 40px', flexDirection: 'row', justifyContent: 'space-between', alignItems: 'flex-end' }}&gt;&#10;        &lt;Text style={{ fontSize: 34, fontWeight: 'bold', color: '#1E4FA8' }}&gt;摘要&lt;/Text&gt;&#10;        &lt;Text style={{ fontSize: 15, color: '#8B97A8' }}&gt;02 / 15&lt;/Text&gt;&#10;    &lt;/Box&gt;&#10;    &lt;Box style={{ padding: '20px 40px 0px 40px', flexDirection: 'column', gap: 13 }}&gt;&#10;        &lt;Box style={{ backgroundColor: '#F0F5FC', borderLeft: '5px solid #1E4FA8', padding: '14px 20px', flexDirection: 'column' }}&gt;&#10;            &lt;Text style={{ fontSize: 22, fontWeight: 'bold', color: '#1E4FA8' }}&gt;问题&lt;/Text&gt;&#10;            &lt;Text style={{ fontSize: 22, color: '#1A2230', lineHeight: 1.5, marginTop: 6 }}&gt;3DGS 重建质量高、可实时渲染，但训练前必须由 SfM（COLMAP）离线解算相机位姿；SfM 要等&lt;b&gt;全部图像到齐&lt;/b&gt;，且对&lt;b&gt;乱序采集&lt;/b&gt;敏感。&lt;/Text&gt;&#10;        &lt;/Box&gt;&#10;        &lt;Box style={{ backgroundColor: '#F7F9FC', borderLeft: '5px solid #4A5568', padding: '14px 20px', flexDirection: 'column' }}&gt;&#10;            &lt;Text style={{ fontSize: 22, fontWeight: 'bold', color: '#4A5568' }}&gt;现状缺口&lt;/Text&gt;&#10;            &lt;Text style={{ fontSize: 22, color: '#1A2230', lineHeight: 1.5, marginTop: 6 }}&gt;离线 SfM + 3DGS 质量好、但慢且无现场反馈；SLAM 类增量重建能实时，却&lt;b&gt;假设图像有序&lt;/b&gt;——两者之间没人补齐。&lt;/Text&gt;&#10;        &lt;/Box&gt;&#10;        &lt;Box style={{ backgroundColor: '#F0F5FC', borderLeft: '5px solid #1E4FA8', padding: '14px 20px', flexDirection: 'column' }}&gt;&#10;            &lt;Text style={{ fontSize: 22, fontWeight: 'bold', color: '#1E4FA8' }}&gt;本文做法&lt;/Text&gt;&#10;            &lt;Text style={{ fontSize: 22, color: '#1A2230', lineHeight: 1.5, marginTop: 6 }}&gt;首个面向无序输入、具备全局一致性的即时反馈 3DGS 重建：两级快速匹配 + GPU 局部 BA + 簇级回环图传播 + 渐进式高斯层级。&lt;/Text&gt;&#10;        &lt;/Box&gt;&#10;        &lt;Box style={{ backgroundColor: '#F7F9FC', borderLeft: '5px solid #3D7BD9', padding: '14px 20px', flexDirection: 'column' }}&gt;&#10;            &lt;Text style={{ fontSize: 22, fontWeight: 'bold', color: '#3D7BD9' }}&gt;结果与复现&lt;/Text&gt;&#10;            &lt;Text style={{ fontSize: 22, color: '#1A2230', lineHeight: 1.5, marginTop: 6 }}&gt;MipNeRF360 上 &lt;b&gt;1 分 17 秒&lt;/b&gt;达到 &lt;b&gt;26.29 dB&lt;/b&gt;（离线参考 8 分 50 秒 / 27.52 dB）；输入打乱仅降 &lt;b&gt;0.5 dB&lt;/b&gt;。我们完成了端到端复现：&lt;b&gt;25.95 dB / 62.7 秒 / 185 帧&lt;/b&gt;。&lt;/Text&gt;&#10;        &lt;/Box&gt;&#10;    &lt;/Box&gt;&#10;    &lt;Box style={{ padding: '16px 40px 0px 40px' }}&gt;&#10;        &lt;Text style={{ fontSize: 16, color: '#4A5568' }}&gt;关键词：三维高斯泼溅 · 无序采集 · 即时重建 · 协视图 · 回环闭合 · 渐进式层级&lt;/Text&gt;&#10;    &lt;/Box&gt;&#10;&lt;/Slide&gt;&#10;"/>
         <p:cNvGrpSpPr/>
         <p:nvPr/>
       </p:nvGrpSpPr>
@@ -10821,7 +9573,7 @@
       </p:grpSpPr>
       <p:sp>
         <p:nvSpPr>
-          <p:cNvPr id="219" name=""/>
+          <p:cNvPr id="191" name=""/>
           <p:cNvSpPr/>
           <p:nvPr/>
         </p:nvSpPr>
@@ -10845,7 +9597,7 @@
       </p:sp>
       <p:sp>
         <p:nvSpPr>
-          <p:cNvPr id="220" name=""/>
+          <p:cNvPr id="192" name=""/>
           <p:cNvSpPr/>
           <p:nvPr/>
         </p:nvSpPr>
@@ -10869,7 +9621,7 @@
       </p:sp>
       <p:sp>
         <p:nvSpPr>
-          <p:cNvPr id="221" name="" descr="{&quot;isTemplate&quot;:true,&quot;type&quot;:&quot;text&quot;}"/>
+          <p:cNvPr id="193" name="" descr="{&quot;isTemplate&quot;:true,&quot;type&quot;:&quot;text&quot;}"/>
           <p:cNvSpPr txBox="1"/>
           <p:nvPr/>
         </p:nvSpPr>
@@ -10904,7 +9656,7 @@
       </p:sp>
       <p:sp>
         <p:nvSpPr>
-          <p:cNvPr id="222" name="" descr="{&quot;isTemplate&quot;:true,&quot;type&quot;:&quot;text&quot;}"/>
+          <p:cNvPr id="194" name="" descr="{&quot;isTemplate&quot;:true,&quot;type&quot;:&quot;text&quot;}"/>
           <p:cNvSpPr txBox="1"/>
           <p:nvPr/>
         </p:nvSpPr>
@@ -10939,7 +9691,7 @@
       </p:sp>
       <p:sp>
         <p:nvSpPr>
-          <p:cNvPr id="223" name=""/>
+          <p:cNvPr id="195" name=""/>
           <p:cNvSpPr/>
           <p:nvPr/>
         </p:nvSpPr>
@@ -10963,7 +9715,7 @@
       </p:sp>
       <p:sp>
         <p:nvSpPr>
-          <p:cNvPr id="224" name=""/>
+          <p:cNvPr id="196" name=""/>
           <p:cNvSpPr/>
           <p:nvPr/>
         </p:nvSpPr>
@@ -11003,7 +9755,7 @@
       </p:sp>
       <p:sp>
         <p:nvSpPr>
-          <p:cNvPr id="225" name="" descr="{&quot;isTemplate&quot;:true,&quot;type&quot;:&quot;text&quot;}"/>
+          <p:cNvPr id="197" name="" descr="{&quot;isTemplate&quot;:true,&quot;type&quot;:&quot;text&quot;}"/>
           <p:cNvSpPr txBox="1"/>
           <p:nvPr/>
         </p:nvSpPr>
@@ -11038,7 +9790,7 @@
       </p:sp>
       <p:sp>
         <p:nvSpPr>
-          <p:cNvPr id="226" name="" descr="{&quot;isTemplate&quot;:true,&quot;type&quot;:&quot;text&quot;}"/>
+          <p:cNvPr id="198" name="" descr="{&quot;isTemplate&quot;:true,&quot;type&quot;:&quot;text&quot;}"/>
           <p:cNvSpPr txBox="1"/>
           <p:nvPr/>
         </p:nvSpPr>
@@ -11185,7 +9937,7 @@
       </p:sp>
       <p:sp>
         <p:nvSpPr>
-          <p:cNvPr id="227" name=""/>
+          <p:cNvPr id="199" name=""/>
           <p:cNvSpPr/>
           <p:nvPr/>
         </p:nvSpPr>
@@ -11209,7 +9961,7 @@
       </p:sp>
       <p:sp>
         <p:nvSpPr>
-          <p:cNvPr id="228" name=""/>
+          <p:cNvPr id="200" name=""/>
           <p:cNvSpPr/>
           <p:nvPr/>
         </p:nvSpPr>
@@ -11249,7 +10001,7 @@
       </p:sp>
       <p:sp>
         <p:nvSpPr>
-          <p:cNvPr id="229" name="" descr="{&quot;isTemplate&quot;:true,&quot;type&quot;:&quot;text&quot;}"/>
+          <p:cNvPr id="201" name="" descr="{&quot;isTemplate&quot;:true,&quot;type&quot;:&quot;text&quot;}"/>
           <p:cNvSpPr txBox="1"/>
           <p:nvPr/>
         </p:nvSpPr>
@@ -11284,7 +10036,7 @@
       </p:sp>
       <p:sp>
         <p:nvSpPr>
-          <p:cNvPr id="230" name="" descr="{&quot;isTemplate&quot;:true,&quot;type&quot;:&quot;text&quot;}"/>
+          <p:cNvPr id="202" name="" descr="{&quot;isTemplate&quot;:true,&quot;type&quot;:&quot;text&quot;}"/>
           <p:cNvSpPr txBox="1"/>
           <p:nvPr/>
         </p:nvSpPr>
@@ -11379,7 +10131,7 @@
       </p:sp>
       <p:sp>
         <p:nvSpPr>
-          <p:cNvPr id="231" name=""/>
+          <p:cNvPr id="203" name=""/>
           <p:cNvSpPr/>
           <p:nvPr/>
         </p:nvSpPr>
@@ -11403,7 +10155,7 @@
       </p:sp>
       <p:sp>
         <p:nvSpPr>
-          <p:cNvPr id="232" name=""/>
+          <p:cNvPr id="204" name=""/>
           <p:cNvSpPr/>
           <p:nvPr/>
         </p:nvSpPr>
@@ -11443,7 +10195,7 @@
       </p:sp>
       <p:sp>
         <p:nvSpPr>
-          <p:cNvPr id="233" name="" descr="{&quot;isTemplate&quot;:true,&quot;type&quot;:&quot;text&quot;}"/>
+          <p:cNvPr id="205" name="" descr="{&quot;isTemplate&quot;:true,&quot;type&quot;:&quot;text&quot;}"/>
           <p:cNvSpPr txBox="1"/>
           <p:nvPr/>
         </p:nvSpPr>
@@ -11478,7 +10230,7 @@
       </p:sp>
       <p:sp>
         <p:nvSpPr>
-          <p:cNvPr id="234" name="" descr="{&quot;isTemplate&quot;:true,&quot;type&quot;:&quot;text&quot;}"/>
+          <p:cNvPr id="206" name="" descr="{&quot;isTemplate&quot;:true,&quot;type&quot;:&quot;text&quot;}"/>
           <p:cNvSpPr txBox="1"/>
           <p:nvPr/>
         </p:nvSpPr>
@@ -11595,7 +10347,7 @@
       </p:sp>
       <p:sp>
         <p:nvSpPr>
-          <p:cNvPr id="235" name=""/>
+          <p:cNvPr id="207" name=""/>
           <p:cNvSpPr/>
           <p:nvPr/>
         </p:nvSpPr>
@@ -11619,7 +10371,7 @@
       </p:sp>
       <p:sp>
         <p:nvSpPr>
-          <p:cNvPr id="236" name=""/>
+          <p:cNvPr id="208" name=""/>
           <p:cNvSpPr/>
           <p:nvPr/>
         </p:nvSpPr>
@@ -11659,7 +10411,7 @@
       </p:sp>
       <p:sp>
         <p:nvSpPr>
-          <p:cNvPr id="237" name="" descr="{&quot;isTemplate&quot;:true,&quot;type&quot;:&quot;text&quot;}"/>
+          <p:cNvPr id="209" name="" descr="{&quot;isTemplate&quot;:true,&quot;type&quot;:&quot;text&quot;}"/>
           <p:cNvSpPr txBox="1"/>
           <p:nvPr/>
         </p:nvSpPr>
@@ -11694,7 +10446,7 @@
       </p:sp>
       <p:sp>
         <p:nvSpPr>
-          <p:cNvPr id="238" name="" descr="{&quot;isTemplate&quot;:true,&quot;type&quot;:&quot;text&quot;}"/>
+          <p:cNvPr id="210" name="" descr="{&quot;isTemplate&quot;:true,&quot;type&quot;:&quot;text&quot;}"/>
           <p:cNvSpPr txBox="1"/>
           <p:nvPr/>
         </p:nvSpPr>
@@ -11971,7 +10723,7 @@
       </p:sp>
       <p:sp>
         <p:nvSpPr>
-          <p:cNvPr id="239" name="" descr="{&quot;isTemplate&quot;:true,&quot;type&quot;:&quot;text&quot;}"/>
+          <p:cNvPr id="211" name="" descr="{&quot;isTemplate&quot;:true,&quot;type&quot;:&quot;text&quot;}"/>
           <p:cNvSpPr txBox="1"/>
           <p:nvPr/>
         </p:nvSpPr>
@@ -12114,7 +10866,7 @@
   <p:cSld>
     <p:spTree>
       <p:nvGrpSpPr>
-        <p:cNvPr id="240" name="" descr="&lt;Slide style={{ width: '1280px', height: '720px', backgroundColor: '#FFFFFF', padding: '0px', flexDirection: 'column' }}&gt;&#10;    &lt;Box style={{ width: '1280px', height: '8px', backgroundColor: '#1E4FA8' }} /&gt;&#10;    &lt;Box style={{ padding: '34px 40px 0px 40px', flexDirection: 'row', justifyContent: 'space-between', alignItems: 'flex-end' }}&gt;&#10;        &lt;Text style={{ fontSize: 34, fontWeight: 'bold', color: '#1E4FA8' }}&gt;主要贡献点&lt;/Text&gt;&#10;        &lt;Text style={{ fontSize: 15, color: '#8B97A8' }}&gt;03 / 15&lt;/Text&gt;&#10;    &lt;/Box&gt;&#10;    &lt;Box style={{ padding: '22px 40px 0px 40px', flexDirection: 'row', gap: 20 }}&gt;&#10;        &lt;Box style={{ flex: 1, backgroundColor: '#F7F9FC', border: '1px solid #D6DCE5', borderRadius: 6, padding: '18px 20px', flexDirection: 'column' }}&gt;&#10;            &lt;Box style={{ flexDirection: 'row', alignItems: 'center', gap: 10 }}&gt;&#10;                &lt;Box style={{ width: '34px', height: '34px', backgroundColor: '#1E4FA8', borderRadius: 4, alignItems: 'center', justifyContent: 'center' }}&gt;&#10;                    &lt;Text style={{ fontSize: 20, fontWeight: 'bold', color: '#FFFFFF' }}&gt;1&lt;/Text&gt;&#10;                &lt;/Box&gt;&#10;                &lt;Text style={{ fontSize: 24, fontWeight: 'bold', color: '#1A2230' }}&gt;无序序列快速匹配&lt;/Text&gt;&#10;            &lt;/Box&gt;&#10;            &lt;Text style={{ fontSize: 22, color: '#1A2230', lineHeight: 1.55, marginTop: 12 }}&gt;视觉位置识别 → XFeat 粗筛 → LightGlue 精验，三级把匹配代价从 O(n²) 降到常数级。&lt;/Text&gt;&#10;            &lt;Text style={{ fontSize: 20, color: '#1E4FA8', fontWeight: 'bold', marginTop: 14 }}&gt;配加权协视图 + 高连通关键帧贪心选取&lt;/Text&gt;&#10;        &lt;/Box&gt;&#10;        &lt;Box style={{ flex: 1, backgroundColor: '#F7F9FC', border: '1px solid #D6DCE5', borderRadius: 6, padding: '18px 20px', flexDirection: 'column' }}&gt;&#10;            &lt;Box style={{ flexDirection: 'row', alignItems: 'center', gap: 10 }}&gt;&#10;                &lt;Box style={{ width: '34px', height: '34px', backgroundColor: '#1E4FA8', borderRadius: 4, alignItems: 'center', justifyContent: 'center' }}&gt;&#10;                    &lt;Text style={{ fontSize: 20, fontWeight: 'bold', color: '#FFFFFF' }}&gt;2&lt;/Text&gt;&#10;                &lt;/Box&gt;&#10;                &lt;Text style={{ fontSize: 24, fontWeight: 'bold', color: '#1A2230' }}&gt;GPU 局部重建&lt;/Text&gt;&#10;            &lt;/Box&gt;&#10;            &lt;Text style={{ fontSize: 22, color: '#1A2230', lineHeight: 1.55, marginTop: 12 }}&gt;自写 BA 核函数（稠密 Schur 补），20 关键帧 / 1 万路标点下比现有优化器快约 5 倍。&lt;/Text&gt;&#10;            &lt;Text style={{ fontSize: 20, color: '#1E4FA8', fontWeight: 'bold', marginTop: 14 }}&gt;分块深度对齐，让高斯贴住真实表面&lt;/Text&gt;&#10;        &lt;/Box&gt;&#10;    &lt;/Box&gt;&#10;    &lt;Box style={{ padding: '20px 40px 0px 40px', flexDirection: 'row', gap: 20 }}&gt;&#10;        &lt;Box style={{ flex: 1, backgroundColor: '#F7F9FC', border: '1px solid #D6DCE5', borderRadius: 6, padding: '18px 20px', flexDirection: 'column' }}&gt;&#10;            &lt;Box style={{ flexDirection: 'row', alignItems: 'center', gap: 10 }}&gt;&#10;                &lt;Box style={{ width: '34px', height: '34px', backgroundColor: '#1E4FA8', borderRadius: 4, alignItems: 'center', justifyContent: 'center' }}&gt;&#10;                    &lt;Text style={{ fontSize: 20, fontWeight: 'bold', color: '#FFFFFF' }}&gt;3&lt;/Text&gt;&#10;                &lt;/Box&gt;&#10;                &lt;Text style={{ fontSize: 24, fontWeight: 'bold', color: '#1A2230' }}&gt;簇级回环闭合&lt;/Text&gt;&#10;            &lt;/Box&gt;&#10;            &lt;Text style={{ fontSize: 22, color: '#1A2230', lineHeight: 1.55, marginTop: 12 }}&gt;用协视图&quot;跳数距离&quot;判回环；焊接窗口 BA + Dijkstra 主干路径测地插值，把 Sim(3) 修正传到全图。&lt;/Text&gt;&#10;            &lt;Text style={{ fontSize: 20, color: '#D9534F', fontWeight: 'bold', marginTop: 14 }}&gt;关键：无需第二次全局优化&lt;/Text&gt;&#10;        &lt;/Box&gt;&#10;        &lt;Box style={{ flex: 1, backgroundColor: '#F0F5FC', border: '1px solid #3D7BD9', borderRadius: 6, padding: '18px 20px', flexDirection: 'column' }}&gt;&#10;            &lt;Box style={{ flexDirection: 'row', alignItems: 'center', gap: 10 }}&gt;&#10;                &lt;Box style={{ width: '34px', height: '34px', backgroundColor: '#0E3F8C', borderRadius: 4, alignItems: 'center', justifyContent: 'center' }}&gt;&#10;                    &lt;Text style={{ fontSize: 20, fontWeight: 'bold', color: '#FFFFFF' }}&gt;4&lt;/Text&gt;&#10;                &lt;/Box&gt;&#10;                &lt;Text style={{ fontSize: 24, fontWeight: 'bold', color: '#1A2230' }}&gt;渐进式高斯层级&lt;/Text&gt;&#10;            &lt;/Box&gt;&#10;            &lt;Text style={{ fontSize: 22, color: '#1A2230', lineHeight: 1.55, marginTop: 12 }}&gt;按屏幕尺寸合并 / 回取，叶节点卸载到 CPU；4050 帧大场景显存仍控制在 12.8 GB 内。&lt;/Text&gt;&#10;            &lt;Text style={{ fontSize: 20, color: '#1E4FA8', fontWeight: 'bold', marginTop: 14 }}&gt;峰值高斯 &amp;lt; 370 万，层级达 8 层&lt;/Text&gt;&#10;        &lt;/Box&gt;&#10;    &lt;/Box&gt;&#10;&lt;/Slide&gt;&#10;"/>
+        <p:cNvPr id="212" name="" descr="&lt;Slide style={{ width: '1280px', height: '720px', backgroundColor: '#FFFFFF', padding: '0px', flexDirection: 'column' }}&gt;&#10;    &lt;Box style={{ width: '1280px', height: '8px', backgroundColor: '#1E4FA8' }} /&gt;&#10;    &lt;Box style={{ padding: '34px 40px 0px 40px', flexDirection: 'row', justifyContent: 'space-between', alignItems: 'flex-end' }}&gt;&#10;        &lt;Text style={{ fontSize: 34, fontWeight: 'bold', color: '#1E4FA8' }}&gt;主要贡献点&lt;/Text&gt;&#10;        &lt;Text style={{ fontSize: 15, color: '#8B97A8' }}&gt;03 / 15&lt;/Text&gt;&#10;    &lt;/Box&gt;&#10;    &lt;Box style={{ padding: '22px 40px 0px 40px', flexDirection: 'row', gap: 20 }}&gt;&#10;        &lt;Box style={{ flex: 1, backgroundColor: '#F7F9FC', border: '1px solid #D6DCE5', borderRadius: 6, padding: '18px 20px', flexDirection: 'column' }}&gt;&#10;            &lt;Box style={{ flexDirection: 'row', alignItems: 'center', gap: 10 }}&gt;&#10;                &lt;Box style={{ width: '34px', height: '34px', backgroundColor: '#1E4FA8', borderRadius: 4, alignItems: 'center', justifyContent: 'center' }}&gt;&#10;                    &lt;Text style={{ fontSize: 20, fontWeight: 'bold', color: '#FFFFFF' }}&gt;1&lt;/Text&gt;&#10;                &lt;/Box&gt;&#10;                &lt;Text style={{ fontSize: 24, fontWeight: 'bold', color: '#1A2230' }}&gt;无序序列快速匹配&lt;/Text&gt;&#10;            &lt;/Box&gt;&#10;            &lt;Text style={{ fontSize: 22, color: '#1A2230', lineHeight: 1.55, marginTop: 12 }}&gt;视觉位置识别 → XFeat 粗筛 → LightGlue 精验，三级把匹配代价从 O(n²) 降到常数级。&lt;/Text&gt;&#10;            &lt;Text style={{ fontSize: 20, color: '#1E4FA8', fontWeight: 'bold', marginTop: 14 }}&gt;配加权协视图 + 高连通关键帧贪心选取&lt;/Text&gt;&#10;        &lt;/Box&gt;&#10;        &lt;Box style={{ flex: 1, backgroundColor: '#F7F9FC', border: '1px solid #D6DCE5', borderRadius: 6, padding: '18px 20px', flexDirection: 'column' }}&gt;&#10;            &lt;Box style={{ flexDirection: 'row', alignItems: 'center', gap: 10 }}&gt;&#10;                &lt;Box style={{ width: '34px', height: '34px', backgroundColor: '#1E4FA8', borderRadius: 4, alignItems: 'center', justifyContent: 'center' }}&gt;&#10;                    &lt;Text style={{ fontSize: 20, fontWeight: 'bold', color: '#FFFFFF' }}&gt;2&lt;/Text&gt;&#10;                &lt;/Box&gt;&#10;                &lt;Text style={{ fontSize: 24, fontWeight: 'bold', color: '#1A2230' }}&gt;GPU 局部重建&lt;/Text&gt;&#10;            &lt;/Box&gt;&#10;            &lt;Text style={{ fontSize: 22, color: '#1A2230', lineHeight: 1.55, marginTop: 12 }}&gt;自写 BA 核函数（稠密 Schur 补），20 关键帧 / 1 万路标点下比现有优化器快约 5 倍。&lt;/Text&gt;&#10;            &lt;Text style={{ fontSize: 20, color: '#1E4FA8', fontWeight: 'bold', marginTop: 14 }}&gt;分块深度对齐，让高斯贴住真实表面&lt;/Text&gt;&#10;        &lt;/Box&gt;&#10;    &lt;/Box&gt;&#10;    &lt;Box style={{ padding: '20px 40px 0px 40px', flexDirection: 'row', gap: 20 }}&gt;&#10;        &lt;Box style={{ flex: 1, backgroundColor: '#F7F9FC', border: '1px solid #D6DCE5', borderRadius: 6, padding: '18px 20px', flexDirection: 'column' }}&gt;&#10;            &lt;Box style={{ flexDirection: 'row', alignItems: 'center', gap: 10 }}&gt;&#10;                &lt;Box style={{ width: '34px', height: '34px', backgroundColor: '#1E4FA8', borderRadius: 4, alignItems: 'center', justifyContent: 'center' }}&gt;&#10;                    &lt;Text style={{ fontSize: 20, fontWeight: 'bold', color: '#FFFFFF' }}&gt;3&lt;/Text&gt;&#10;                &lt;/Box&gt;&#10;                &lt;Text style={{ fontSize: 24, fontWeight: 'bold', color: '#1A2230' }}&gt;簇级回环闭合&lt;/Text&gt;&#10;            &lt;/Box&gt;&#10;            &lt;Text style={{ fontSize: 22, color: '#1A2230', lineHeight: 1.55, marginTop: 12 }}&gt;用协视图&quot;跳数距离&quot;判回环；焊接窗口 BA + Dijkstra 主干路径测地插值，把 Sim(3) 修正传到全图。&lt;/Text&gt;&#10;            &lt;Text style={{ fontSize: 20, color: '#D9534F', fontWeight: 'bold', marginTop: 14 }}&gt;关键：无需第二次全局优化&lt;/Text&gt;&#10;        &lt;/Box&gt;&#10;        &lt;Box style={{ flex: 1, backgroundColor: '#F0F5FC', border: '1px solid #3D7BD9', borderRadius: 6, padding: '18px 20px', flexDirection: 'column' }}&gt;&#10;            &lt;Box style={{ flexDirection: 'row', alignItems: 'center', gap: 10 }}&gt;&#10;                &lt;Box style={{ width: '34px', height: '34px', backgroundColor: '#0E3F8C', borderRadius: 4, alignItems: 'center', justifyContent: 'center' }}&gt;&#10;                    &lt;Text style={{ fontSize: 20, fontWeight: 'bold', color: '#FFFFFF' }}&gt;4&lt;/Text&gt;&#10;                &lt;/Box&gt;&#10;                &lt;Text style={{ fontSize: 24, fontWeight: 'bold', color: '#1A2230' }}&gt;渐进式高斯层级&lt;/Text&gt;&#10;            &lt;/Box&gt;&#10;            &lt;Text style={{ fontSize: 22, color: '#1A2230', lineHeight: 1.55, marginTop: 12 }}&gt;按屏幕尺寸合并 / 回取，叶节点卸载到 CPU；4050 帧大场景显存仍控制在 12.8 GB 内。&lt;/Text&gt;&#10;            &lt;Text style={{ fontSize: 20, color: '#1E4FA8', fontWeight: 'bold', marginTop: 14 }}&gt;峰值高斯 &amp;lt; 370 万，层级达 8 层&lt;/Text&gt;&#10;        &lt;/Box&gt;&#10;    &lt;/Box&gt;&#10;&lt;/Slide&gt;&#10;"/>
         <p:cNvGrpSpPr/>
         <p:nvPr/>
       </p:nvGrpSpPr>
@@ -12128,7 +10880,7 @@
       </p:grpSpPr>
       <p:sp>
         <p:nvSpPr>
-          <p:cNvPr id="241" name=""/>
+          <p:cNvPr id="213" name=""/>
           <p:cNvSpPr/>
           <p:nvPr/>
         </p:nvSpPr>
@@ -12152,7 +10904,7 @@
       </p:sp>
       <p:sp>
         <p:nvSpPr>
-          <p:cNvPr id="242" name=""/>
+          <p:cNvPr id="214" name=""/>
           <p:cNvSpPr/>
           <p:nvPr/>
         </p:nvSpPr>
@@ -12176,7 +10928,7 @@
       </p:sp>
       <p:sp>
         <p:nvSpPr>
-          <p:cNvPr id="243" name="" descr="{&quot;isTemplate&quot;:true,&quot;type&quot;:&quot;text&quot;}"/>
+          <p:cNvPr id="215" name="" descr="{&quot;isTemplate&quot;:true,&quot;type&quot;:&quot;text&quot;}"/>
           <p:cNvSpPr txBox="1"/>
           <p:nvPr/>
         </p:nvSpPr>
@@ -12211,7 +10963,7 @@
       </p:sp>
       <p:sp>
         <p:nvSpPr>
-          <p:cNvPr id="244" name="" descr="{&quot;isTemplate&quot;:true,&quot;type&quot;:&quot;text&quot;}"/>
+          <p:cNvPr id="216" name="" descr="{&quot;isTemplate&quot;:true,&quot;type&quot;:&quot;text&quot;}"/>
           <p:cNvSpPr txBox="1"/>
           <p:nvPr/>
         </p:nvSpPr>
@@ -12246,7 +10998,7 @@
       </p:sp>
       <p:sp>
         <p:nvSpPr>
-          <p:cNvPr id="245" name=""/>
+          <p:cNvPr id="217" name=""/>
           <p:cNvSpPr/>
           <p:nvPr/>
         </p:nvSpPr>
@@ -12277,7 +11029,7 @@
       </p:sp>
       <p:sp>
         <p:nvSpPr>
-          <p:cNvPr id="246" name=""/>
+          <p:cNvPr id="218" name=""/>
           <p:cNvSpPr/>
           <p:nvPr/>
         </p:nvSpPr>
@@ -12303,7 +11055,7 @@
       </p:sp>
       <p:sp>
         <p:nvSpPr>
-          <p:cNvPr id="247" name="" descr="{&quot;isTemplate&quot;:true,&quot;type&quot;:&quot;text&quot;}"/>
+          <p:cNvPr id="219" name="" descr="{&quot;isTemplate&quot;:true,&quot;type&quot;:&quot;text&quot;}"/>
           <p:cNvSpPr txBox="1"/>
           <p:nvPr/>
         </p:nvSpPr>
@@ -12338,7 +11090,7 @@
       </p:sp>
       <p:sp>
         <p:nvSpPr>
-          <p:cNvPr id="248" name="" descr="{&quot;isTemplate&quot;:true,&quot;type&quot;:&quot;text&quot;}"/>
+          <p:cNvPr id="220" name="" descr="{&quot;isTemplate&quot;:true,&quot;type&quot;:&quot;text&quot;}"/>
           <p:cNvSpPr txBox="1"/>
           <p:nvPr/>
         </p:nvSpPr>
@@ -12373,7 +11125,7 @@
       </p:sp>
       <p:sp>
         <p:nvSpPr>
-          <p:cNvPr id="249" name="" descr="{&quot;isTemplate&quot;:true,&quot;type&quot;:&quot;text&quot;}"/>
+          <p:cNvPr id="221" name="" descr="{&quot;isTemplate&quot;:true,&quot;type&quot;:&quot;text&quot;}"/>
           <p:cNvSpPr txBox="1"/>
           <p:nvPr/>
         </p:nvSpPr>
@@ -12470,7 +11222,7 @@
       </p:sp>
       <p:sp>
         <p:nvSpPr>
-          <p:cNvPr id="250" name="" descr="{&quot;isTemplate&quot;:true,&quot;type&quot;:&quot;text&quot;}"/>
+          <p:cNvPr id="222" name="" descr="{&quot;isTemplate&quot;:true,&quot;type&quot;:&quot;text&quot;}"/>
           <p:cNvSpPr txBox="1"/>
           <p:nvPr/>
         </p:nvSpPr>
@@ -12525,7 +11277,7 @@
       </p:sp>
       <p:sp>
         <p:nvSpPr>
-          <p:cNvPr id="251" name=""/>
+          <p:cNvPr id="223" name=""/>
           <p:cNvSpPr/>
           <p:nvPr/>
         </p:nvSpPr>
@@ -12556,7 +11308,7 @@
       </p:sp>
       <p:sp>
         <p:nvSpPr>
-          <p:cNvPr id="252" name=""/>
+          <p:cNvPr id="224" name=""/>
           <p:cNvSpPr/>
           <p:nvPr/>
         </p:nvSpPr>
@@ -12582,7 +11334,7 @@
       </p:sp>
       <p:sp>
         <p:nvSpPr>
-          <p:cNvPr id="253" name="" descr="{&quot;isTemplate&quot;:true,&quot;type&quot;:&quot;text&quot;}"/>
+          <p:cNvPr id="225" name="" descr="{&quot;isTemplate&quot;:true,&quot;type&quot;:&quot;text&quot;}"/>
           <p:cNvSpPr txBox="1"/>
           <p:nvPr/>
         </p:nvSpPr>
@@ -12617,7 +11369,7 @@
       </p:sp>
       <p:sp>
         <p:nvSpPr>
-          <p:cNvPr id="254" name="" descr="{&quot;isTemplate&quot;:true,&quot;type&quot;:&quot;text&quot;}"/>
+          <p:cNvPr id="226" name="" descr="{&quot;isTemplate&quot;:true,&quot;type&quot;:&quot;text&quot;}"/>
           <p:cNvSpPr txBox="1"/>
           <p:nvPr/>
         </p:nvSpPr>
@@ -12662,7 +11414,7 @@
       </p:sp>
       <p:sp>
         <p:nvSpPr>
-          <p:cNvPr id="255" name="" descr="{&quot;isTemplate&quot;:true,&quot;type&quot;:&quot;text&quot;}"/>
+          <p:cNvPr id="227" name="" descr="{&quot;isTemplate&quot;:true,&quot;type&quot;:&quot;text&quot;}"/>
           <p:cNvSpPr txBox="1"/>
           <p:nvPr/>
         </p:nvSpPr>
@@ -12799,7 +11551,7 @@
       </p:sp>
       <p:sp>
         <p:nvSpPr>
-          <p:cNvPr id="256" name="" descr="{&quot;isTemplate&quot;:true,&quot;type&quot;:&quot;text&quot;}"/>
+          <p:cNvPr id="228" name="" descr="{&quot;isTemplate&quot;:true,&quot;type&quot;:&quot;text&quot;}"/>
           <p:cNvSpPr txBox="1"/>
           <p:nvPr/>
         </p:nvSpPr>
@@ -12834,7 +11586,7 @@
       </p:sp>
       <p:sp>
         <p:nvSpPr>
-          <p:cNvPr id="257" name=""/>
+          <p:cNvPr id="229" name=""/>
           <p:cNvSpPr/>
           <p:nvPr/>
         </p:nvSpPr>
@@ -12865,7 +11617,7 @@
       </p:sp>
       <p:sp>
         <p:nvSpPr>
-          <p:cNvPr id="258" name=""/>
+          <p:cNvPr id="230" name=""/>
           <p:cNvSpPr/>
           <p:nvPr/>
         </p:nvSpPr>
@@ -12891,7 +11643,7 @@
       </p:sp>
       <p:sp>
         <p:nvSpPr>
-          <p:cNvPr id="259" name="" descr="{&quot;isTemplate&quot;:true,&quot;type&quot;:&quot;text&quot;}"/>
+          <p:cNvPr id="231" name="" descr="{&quot;isTemplate&quot;:true,&quot;type&quot;:&quot;text&quot;}"/>
           <p:cNvSpPr txBox="1"/>
           <p:nvPr/>
         </p:nvSpPr>
@@ -12926,7 +11678,7 @@
       </p:sp>
       <p:sp>
         <p:nvSpPr>
-          <p:cNvPr id="260" name="" descr="{&quot;isTemplate&quot;:true,&quot;type&quot;:&quot;text&quot;}"/>
+          <p:cNvPr id="232" name="" descr="{&quot;isTemplate&quot;:true,&quot;type&quot;:&quot;text&quot;}"/>
           <p:cNvSpPr txBox="1"/>
           <p:nvPr/>
         </p:nvSpPr>
@@ -12961,7 +11713,7 @@
       </p:sp>
       <p:sp>
         <p:nvSpPr>
-          <p:cNvPr id="261" name="" descr="{&quot;isTemplate&quot;:true,&quot;type&quot;:&quot;text&quot;}"/>
+          <p:cNvPr id="233" name="" descr="{&quot;isTemplate&quot;:true,&quot;type&quot;:&quot;text&quot;}"/>
           <p:cNvSpPr txBox="1"/>
           <p:nvPr/>
         </p:nvSpPr>
@@ -13078,7 +11830,7 @@
       </p:sp>
       <p:sp>
         <p:nvSpPr>
-          <p:cNvPr id="262" name="" descr="{&quot;isTemplate&quot;:true,&quot;type&quot;:&quot;text&quot;}"/>
+          <p:cNvPr id="234" name="" descr="{&quot;isTemplate&quot;:true,&quot;type&quot;:&quot;text&quot;}"/>
           <p:cNvSpPr txBox="1"/>
           <p:nvPr/>
         </p:nvSpPr>
@@ -13113,7 +11865,7 @@
       </p:sp>
       <p:sp>
         <p:nvSpPr>
-          <p:cNvPr id="263" name=""/>
+          <p:cNvPr id="235" name=""/>
           <p:cNvSpPr/>
           <p:nvPr/>
         </p:nvSpPr>
@@ -13144,7 +11896,7 @@
       </p:sp>
       <p:sp>
         <p:nvSpPr>
-          <p:cNvPr id="264" name=""/>
+          <p:cNvPr id="236" name=""/>
           <p:cNvSpPr/>
           <p:nvPr/>
         </p:nvSpPr>
@@ -13170,7 +11922,7 @@
       </p:sp>
       <p:sp>
         <p:nvSpPr>
-          <p:cNvPr id="265" name="" descr="{&quot;isTemplate&quot;:true,&quot;type&quot;:&quot;text&quot;}"/>
+          <p:cNvPr id="237" name="" descr="{&quot;isTemplate&quot;:true,&quot;type&quot;:&quot;text&quot;}"/>
           <p:cNvSpPr txBox="1"/>
           <p:nvPr/>
         </p:nvSpPr>
@@ -13205,7 +11957,7 @@
       </p:sp>
       <p:sp>
         <p:nvSpPr>
-          <p:cNvPr id="266" name="" descr="{&quot;isTemplate&quot;:true,&quot;type&quot;:&quot;text&quot;}"/>
+          <p:cNvPr id="238" name="" descr="{&quot;isTemplate&quot;:true,&quot;type&quot;:&quot;text&quot;}"/>
           <p:cNvSpPr txBox="1"/>
           <p:nvPr/>
         </p:nvSpPr>
@@ -13240,7 +11992,7 @@
       </p:sp>
       <p:sp>
         <p:nvSpPr>
-          <p:cNvPr id="267" name="" descr="{&quot;isTemplate&quot;:true,&quot;type&quot;:&quot;text&quot;}"/>
+          <p:cNvPr id="239" name="" descr="{&quot;isTemplate&quot;:true,&quot;type&quot;:&quot;text&quot;}"/>
           <p:cNvSpPr txBox="1"/>
           <p:nvPr/>
         </p:nvSpPr>
@@ -13357,7 +12109,7 @@
       </p:sp>
       <p:sp>
         <p:nvSpPr>
-          <p:cNvPr id="268" name="" descr="{&quot;isTemplate&quot;:true,&quot;type&quot;:&quot;text&quot;}"/>
+          <p:cNvPr id="240" name="" descr="{&quot;isTemplate&quot;:true,&quot;type&quot;:&quot;text&quot;}"/>
           <p:cNvSpPr txBox="1"/>
           <p:nvPr/>
         </p:nvSpPr>
@@ -13440,7 +12192,7 @@
   <p:cSld>
     <p:spTree>
       <p:nvGrpSpPr>
-        <p:cNvPr id="269" name="" descr="&lt;Slide style={{ width: '1280px', height: '720px', backgroundColor: '#FFFFFF', padding: '0px', flexDirection: 'column' }}&gt;&#10;    &lt;Box style={{ width: '1280px', height: '8px', backgroundColor: '#1E4FA8' }} /&gt;&#10;    &lt;Box style={{ padding: '30px 40px 0px 40px', flexDirection: 'row', justifyContent: 'space-between', alignItems: 'flex-end' }}&gt;&#10;        &lt;Text style={{ fontSize: 34, fontWeight: 'bold', color: '#1E4FA8' }}&gt;研究背景：两条路线，各自卡在一个前提上&lt;/Text&gt;&#10;        &lt;Text style={{ fontSize: 15, color: '#8B97A8' }}&gt;04 / 15&lt;/Text&gt;&#10;    &lt;/Box&gt;&#10;    &lt;Box style={{ padding: '16px 40px 0px 40px' }}&gt;&#10;        &lt;Text style={{ fontSize: 21, color: '#4A5568', lineHeight: 1.5 }}&gt;拿到&quot;一组照片 → 一个可漫游的 3D 场景&quot;，过去只有两条路可走。它们的分歧不在算法细节，而在&lt;b&gt;什么时候允许开始计算&lt;/b&gt;。&lt;/Text&gt;&#10;    &lt;/Box&gt;&#10;    &lt;Box style={{ padding: '16px 40px 0px 40px', flexDirection: 'row', gap: 24 }}&gt;&#10;        &lt;Box style={{ flex: 1, backgroundColor: '#F7F9FC', border: '1px solid #D6DCE5', borderRadius: 6, padding: '16px 20px', flexDirection: 'column' }}&gt;&#10;            &lt;Text style={{ fontSize: 26, fontWeight: 'bold', color: '#1A2230' }}&gt;路线一　离线 SfM + 3DGS&lt;/Text&gt;&#10;            &lt;Text style={{ fontSize: 19, color: '#4A5568', marginTop: 6 }}&gt;COLMAP / GLOMAP + 3DGS、H3DGS、Octree-GS&lt;/Text&gt;&#10;            &lt;Text style={{ fontSize: 21, color: '#1A2230', lineHeight: 1.55, marginTop: 12 }}&gt;先把所有照片两两匹配、三角化、全局 BA 解出位姿，再训练高斯。质量最高、全局一致，但&lt;b&gt;必须等图全部到齐&lt;/b&gt;，耗时从分钟到小时。&lt;/Text&gt;&#10;            &lt;Text style={{ fontSize: 21, color: '#1E4FA8', fontWeight: 'bold', marginTop: 12 }}&gt;前提：先有完整的照片集合&lt;/Text&gt;&#10;            &lt;Text style={{ fontSize: 21, color: '#D9534F', fontWeight: 'bold', marginTop: 4 }}&gt;代价：现场给不出任何反馈&lt;/Text&gt;&#10;        &lt;/Box&gt;&#10;        &lt;Box style={{ flex: 1, backgroundColor: '#F0F5FC', border: '1px solid #3D7BD9', borderRadius: 6, padding: '16px 20px', flexDirection: 'column' }}&gt;&#10;            &lt;Text style={{ fontSize: 26, fontWeight: 'bold', color: '#1A2230' }}&gt;路线二　增量 / 类 SLAM&lt;/Text&gt;&#10;            &lt;Text style={{ fontSize: 19, color: '#4A5568', marginTop: 6 }}&gt;Photo-SLAM、MonoGS、DROID-Splat、LongSplat&lt;/Text&gt;&#10;            &lt;Text style={{ fontSize: 21, color: '#1A2230', lineHeight: 1.55, marginTop: 12 }}&gt;边收边建、可交互。但新帧只与&lt;b&gt;时间上相邻&lt;/b&gt;的少数帧匹配（通常 5 帧窗口），一旦转身回访、或把两段序列拼起来，匹配就断了。&lt;/Text&gt;&#10;            &lt;Text style={{ fontSize: 21, color: '#1E4FA8', fontWeight: 'bold', marginTop: 12 }}&gt;前提：输入必须是连续视频&lt;/Text&gt;&#10;            &lt;Text style={{ fontSize: 21, color: '#D9534F', fontWeight: 'bold', marginTop: 4 }}&gt;代价：离开时间邻域就失效&lt;/Text&gt;&#10;        &lt;/Box&gt;&#10;    &lt;/Box&gt;&#10;    &lt;Box style={{ margin: '20px 40px 0px 40px', backgroundColor: '#1E4FA8', borderRadius: 6, padding: '16px 24px' }}&gt;&#10;        &lt;Text style={{ fontSize: 24, fontWeight: 'bold', color: '#FFFFFF', lineHeight: 1.5 }}&gt;两条路的前提是同一个东西：&lt;b&gt;帧序&lt;/b&gt;。一条等它全部确定，一条假设它天然有序——而真实拍摄两样都不满足。&lt;/Text&gt;&#10;    &lt;/Box&gt;&#10;    &lt;Box style={{ padding: '12px 40px 0px 40px' }}&gt;&#10;        &lt;Text style={{ fontSize: 17, color: '#8B97A8' }}&gt;真实采集几乎总是无序的：绕行、转身、回头补拍角落，覆盖更好，但让匹配与全局优化的代价陡增。&lt;/Text&gt;&#10;    &lt;/Box&gt;&#10;&lt;/Slide&gt;&#10;"/>
+        <p:cNvPr id="241" name="" descr="&lt;Slide style={{ width: '1280px', height: '720px', backgroundColor: '#FFFFFF', padding: '0px', flexDirection: 'column' }}&gt;&#10;    &lt;Box style={{ width: '1280px', height: '8px', backgroundColor: '#1E4FA8' }} /&gt;&#10;    &lt;Box style={{ padding: '30px 40px 0px 40px', flexDirection: 'row', justifyContent: 'space-between', alignItems: 'flex-end' }}&gt;&#10;        &lt;Text style={{ fontSize: 34, fontWeight: 'bold', color: '#1E4FA8' }}&gt;研究背景：两条路线，各自卡在一个前提上&lt;/Text&gt;&#10;        &lt;Text style={{ fontSize: 15, color: '#8B97A8' }}&gt;04 / 15&lt;/Text&gt;&#10;    &lt;/Box&gt;&#10;    &lt;Box style={{ padding: '16px 40px 0px 40px' }}&gt;&#10;        &lt;Text style={{ fontSize: 21, color: '#4A5568', lineHeight: 1.5 }}&gt;拿到&quot;一组照片 → 一个可漫游的 3D 场景&quot;，过去只有两条路可走。它们的分歧不在算法细节，而在&lt;b&gt;什么时候允许开始计算&lt;/b&gt;。&lt;/Text&gt;&#10;    &lt;/Box&gt;&#10;    &lt;Box style={{ padding: '16px 40px 0px 40px', flexDirection: 'row', gap: 24 }}&gt;&#10;        &lt;Box style={{ flex: 1, backgroundColor: '#F7F9FC', border: '1px solid #D6DCE5', borderRadius: 6, padding: '16px 20px', flexDirection: 'column' }}&gt;&#10;            &lt;Text style={{ fontSize: 26, fontWeight: 'bold', color: '#1A2230' }}&gt;路线一　离线 SfM + 3DGS&lt;/Text&gt;&#10;            &lt;Text style={{ fontSize: 19, color: '#4A5568', marginTop: 6 }}&gt;COLMAP / GLOMAP + 3DGS、H3DGS、Octree-GS&lt;/Text&gt;&#10;            &lt;Text style={{ fontSize: 21, color: '#1A2230', lineHeight: 1.55, marginTop: 12 }}&gt;先把所有照片两两匹配、三角化、全局 BA 解出位姿，再训练高斯。质量最高、全局一致，但&lt;b&gt;必须等图全部到齐&lt;/b&gt;，耗时从分钟到小时。&lt;/Text&gt;&#10;            &lt;Text style={{ fontSize: 21, color: '#1E4FA8', fontWeight: 'bold', marginTop: 12 }}&gt;前提：先有完整的照片集合&lt;/Text&gt;&#10;            &lt;Text style={{ fontSize: 21, color: '#D9534F', fontWeight: 'bold', marginTop: 4 }}&gt;代价：现场给不出任何反馈&lt;/Text&gt;&#10;        &lt;/Box&gt;&#10;        &lt;Box style={{ flex: 1, backgroundColor: '#F0F5FC', border: '1px solid #3D7BD9', borderRadius: 6, padding: '16px 20px', flexDirection: 'column' }}&gt;&#10;            &lt;Text style={{ fontSize: 26, fontWeight: 'bold', color: '#1A2230' }}&gt;路线二　增量 / 类 SLAM&lt;/Text&gt;&#10;            &lt;Text style={{ fontSize: 19, color: '#4A5568', marginTop: 6 }}&gt;Photo-SLAM、MonoGS、DROID-Splat、LongSplat&lt;/Text&gt;&#10;            &lt;Text style={{ fontSize: 21, color: '#1A2230', lineHeight: 1.55, marginTop: 12 }}&gt;边收边建、可交互。但新帧只与&lt;b&gt;时间上相邻&lt;/b&gt;的少数帧匹配（通常 5 帧窗口），一旦转身回访、或把两段序列拼起来，匹配就断了。&lt;/Text&gt;&#10;            &lt;Text style={{ fontSize: 21, color: '#1E4FA8', fontWeight: 'bold', marginTop: 12 }}&gt;前提：输入必须是连续视频&lt;/Text&gt;&#10;            &lt;Text style={{ fontSize: 21, color: '#D9534F', fontWeight: 'bold', marginTop: 4 }}&gt;代价：离开时间邻域就失效&lt;/Text&gt;&#10;        &lt;/Box&gt;&#10;    &lt;/Box&gt;&#10;    &lt;Box style={{ margin: '20px 40px 0px 40px', backgroundColor: '#1E4FA8', borderRadius: 6, padding: '16px 24px' }}&gt;&#10;        &lt;Text style={{ fontSize: 24, fontWeight: 'bold', color: '#FFFFFF', lineHeight: 1.5 }}&gt;两条路的前提是同一个东西：&lt;b&gt;帧序&lt;/b&gt;。一条等它全部确定，一条假设它天然有序——而真实拍摄两样都不满足。&lt;/Text&gt;&#10;    &lt;/Box&gt;&#10;    &lt;Box style={{ padding: '12px 40px 0px 40px' }}&gt;&#10;        &lt;Text style={{ fontSize: 17, color: '#8B97A8' }}&gt;真实采集几乎总是无序的：绕行、转身、回头补拍角落，覆盖更好，但让匹配与全局优化的代价陡增。&lt;/Text&gt;&#10;    &lt;/Box&gt;&#10;&lt;/Slide&gt;&#10;"/>
         <p:cNvGrpSpPr/>
         <p:nvPr/>
       </p:nvGrpSpPr>
@@ -13454,7 +12206,7 @@
       </p:grpSpPr>
       <p:sp>
         <p:nvSpPr>
-          <p:cNvPr id="270" name=""/>
+          <p:cNvPr id="242" name=""/>
           <p:cNvSpPr/>
           <p:nvPr/>
         </p:nvSpPr>
@@ -13478,7 +12230,7 @@
       </p:sp>
       <p:sp>
         <p:nvSpPr>
-          <p:cNvPr id="271" name=""/>
+          <p:cNvPr id="243" name=""/>
           <p:cNvSpPr/>
           <p:nvPr/>
         </p:nvSpPr>
@@ -13502,7 +12254,7 @@
       </p:sp>
       <p:sp>
         <p:nvSpPr>
-          <p:cNvPr id="272" name="" descr="{&quot;isTemplate&quot;:true,&quot;type&quot;:&quot;text&quot;}"/>
+          <p:cNvPr id="244" name="" descr="{&quot;isTemplate&quot;:true,&quot;type&quot;:&quot;text&quot;}"/>
           <p:cNvSpPr txBox="1"/>
           <p:nvPr/>
         </p:nvSpPr>
@@ -13537,7 +12289,7 @@
       </p:sp>
       <p:sp>
         <p:nvSpPr>
-          <p:cNvPr id="273" name="" descr="{&quot;isTemplate&quot;:true,&quot;type&quot;:&quot;text&quot;}"/>
+          <p:cNvPr id="245" name="" descr="{&quot;isTemplate&quot;:true,&quot;type&quot;:&quot;text&quot;}"/>
           <p:cNvSpPr txBox="1"/>
           <p:nvPr/>
         </p:nvSpPr>
@@ -13572,7 +12324,7 @@
       </p:sp>
       <p:sp>
         <p:nvSpPr>
-          <p:cNvPr id="274" name="" descr="{&quot;isTemplate&quot;:true,&quot;type&quot;:&quot;text&quot;}"/>
+          <p:cNvPr id="246" name="" descr="{&quot;isTemplate&quot;:true,&quot;type&quot;:&quot;text&quot;}"/>
           <p:cNvSpPr txBox="1"/>
           <p:nvPr/>
         </p:nvSpPr>
@@ -13707,7 +12459,7 @@
       </p:sp>
       <p:sp>
         <p:nvSpPr>
-          <p:cNvPr id="275" name=""/>
+          <p:cNvPr id="247" name=""/>
           <p:cNvSpPr/>
           <p:nvPr/>
         </p:nvSpPr>
@@ -13738,7 +12490,7 @@
       </p:sp>
       <p:sp>
         <p:nvSpPr>
-          <p:cNvPr id="276" name="" descr="{&quot;isTemplate&quot;:true,&quot;type&quot;:&quot;text&quot;}"/>
+          <p:cNvPr id="248" name="" descr="{&quot;isTemplate&quot;:true,&quot;type&quot;:&quot;text&quot;}"/>
           <p:cNvSpPr txBox="1"/>
           <p:nvPr/>
         </p:nvSpPr>
@@ -13783,7 +12535,7 @@
       </p:sp>
       <p:sp>
         <p:nvSpPr>
-          <p:cNvPr id="277" name="" descr="{&quot;isTemplate&quot;:true,&quot;type&quot;:&quot;text&quot;}"/>
+          <p:cNvPr id="249" name="" descr="{&quot;isTemplate&quot;:true,&quot;type&quot;:&quot;text&quot;}"/>
           <p:cNvSpPr txBox="1"/>
           <p:nvPr/>
         </p:nvSpPr>
@@ -13858,7 +12610,7 @@
       </p:sp>
       <p:sp>
         <p:nvSpPr>
-          <p:cNvPr id="278" name="" descr="{&quot;isTemplate&quot;:true,&quot;type&quot;:&quot;text&quot;}"/>
+          <p:cNvPr id="250" name="" descr="{&quot;isTemplate&quot;:true,&quot;type&quot;:&quot;text&quot;}"/>
           <p:cNvSpPr txBox="1"/>
           <p:nvPr/>
         </p:nvSpPr>
@@ -13935,7 +12687,7 @@
       </p:sp>
       <p:sp>
         <p:nvSpPr>
-          <p:cNvPr id="279" name="" descr="{&quot;isTemplate&quot;:true,&quot;type&quot;:&quot;text&quot;}"/>
+          <p:cNvPr id="251" name="" descr="{&quot;isTemplate&quot;:true,&quot;type&quot;:&quot;text&quot;}"/>
           <p:cNvSpPr txBox="1"/>
           <p:nvPr/>
         </p:nvSpPr>
@@ -13970,7 +12722,7 @@
       </p:sp>
       <p:sp>
         <p:nvSpPr>
-          <p:cNvPr id="280" name="" descr="{&quot;isTemplate&quot;:true,&quot;type&quot;:&quot;text&quot;}"/>
+          <p:cNvPr id="252" name="" descr="{&quot;isTemplate&quot;:true,&quot;type&quot;:&quot;text&quot;}"/>
           <p:cNvSpPr txBox="1"/>
           <p:nvPr/>
         </p:nvSpPr>
@@ -14005,7 +12757,7 @@
       </p:sp>
       <p:sp>
         <p:nvSpPr>
-          <p:cNvPr id="281" name=""/>
+          <p:cNvPr id="253" name=""/>
           <p:cNvSpPr/>
           <p:nvPr/>
         </p:nvSpPr>
@@ -14036,7 +12788,7 @@
       </p:sp>
       <p:sp>
         <p:nvSpPr>
-          <p:cNvPr id="282" name="" descr="{&quot;isTemplate&quot;:true,&quot;type&quot;:&quot;text&quot;}"/>
+          <p:cNvPr id="254" name="" descr="{&quot;isTemplate&quot;:true,&quot;type&quot;:&quot;text&quot;}"/>
           <p:cNvSpPr txBox="1"/>
           <p:nvPr/>
         </p:nvSpPr>
@@ -14101,7 +12853,7 @@
       </p:sp>
       <p:sp>
         <p:nvSpPr>
-          <p:cNvPr id="283" name="" descr="{&quot;isTemplate&quot;:true,&quot;type&quot;:&quot;text&quot;}"/>
+          <p:cNvPr id="255" name="" descr="{&quot;isTemplate&quot;:true,&quot;type&quot;:&quot;text&quot;}"/>
           <p:cNvSpPr txBox="1"/>
           <p:nvPr/>
         </p:nvSpPr>
@@ -14196,7 +12948,7 @@
       </p:sp>
       <p:sp>
         <p:nvSpPr>
-          <p:cNvPr id="284" name="" descr="{&quot;isTemplate&quot;:true,&quot;type&quot;:&quot;text&quot;}"/>
+          <p:cNvPr id="256" name="" descr="{&quot;isTemplate&quot;:true,&quot;type&quot;:&quot;text&quot;}"/>
           <p:cNvSpPr txBox="1"/>
           <p:nvPr/>
         </p:nvSpPr>
@@ -14273,7 +13025,7 @@
       </p:sp>
       <p:sp>
         <p:nvSpPr>
-          <p:cNvPr id="285" name="" descr="{&quot;isTemplate&quot;:true,&quot;type&quot;:&quot;text&quot;}"/>
+          <p:cNvPr id="257" name="" descr="{&quot;isTemplate&quot;:true,&quot;type&quot;:&quot;text&quot;}"/>
           <p:cNvSpPr txBox="1"/>
           <p:nvPr/>
         </p:nvSpPr>
@@ -14308,7 +13060,7 @@
       </p:sp>
       <p:sp>
         <p:nvSpPr>
-          <p:cNvPr id="286" name="" descr="{&quot;isTemplate&quot;:true,&quot;type&quot;:&quot;text&quot;}"/>
+          <p:cNvPr id="258" name="" descr="{&quot;isTemplate&quot;:true,&quot;type&quot;:&quot;text&quot;}"/>
           <p:cNvSpPr txBox="1"/>
           <p:nvPr/>
         </p:nvSpPr>
@@ -14343,7 +13095,7 @@
       </p:sp>
       <p:sp>
         <p:nvSpPr>
-          <p:cNvPr id="287" name=""/>
+          <p:cNvPr id="259" name=""/>
           <p:cNvSpPr/>
           <p:nvPr/>
         </p:nvSpPr>
@@ -14369,7 +13121,7 @@
       </p:sp>
       <p:sp>
         <p:nvSpPr>
-          <p:cNvPr id="288" name="" descr="{&quot;isTemplate&quot;:true,&quot;type&quot;:&quot;text&quot;}"/>
+          <p:cNvPr id="260" name="" descr="{&quot;isTemplate&quot;:true,&quot;type&quot;:&quot;text&quot;}"/>
           <p:cNvSpPr txBox="1"/>
           <p:nvPr/>
         </p:nvSpPr>
@@ -14426,7 +13178,7 @@
       </p:sp>
       <p:sp>
         <p:nvSpPr>
-          <p:cNvPr id="289" name="" descr="{&quot;isTemplate&quot;:true,&quot;type&quot;:&quot;text&quot;}"/>
+          <p:cNvPr id="261" name="" descr="{&quot;isTemplate&quot;:true,&quot;type&quot;:&quot;text&quot;}"/>
           <p:cNvSpPr txBox="1"/>
           <p:nvPr/>
         </p:nvSpPr>
@@ -14469,7 +13221,7 @@
   <p:cSld>
     <p:spTree>
       <p:nvGrpSpPr>
-        <p:cNvPr id="290" name="" descr="&lt;Slide style={{ width: '1280px', height: '720px', backgroundColor: '#FFFFFF', padding: '0px', flexDirection: 'column' }}&gt;&#10;    &lt;Box style={{ width: '1280px', height: '8px', backgroundColor: '#1E4FA8' }} /&gt;&#10;    &lt;Box style={{ padding: '30px 40px 0px 40px', flexDirection: 'row', justifyContent: 'space-between', alignItems: 'flex-end' }}&gt;&#10;        &lt;Text style={{ fontSize: 34, fontWeight: 'bold', color: '#1E4FA8' }}&gt;过去遇到的问题：等、乱、漂、爆&lt;/Text&gt;&#10;        &lt;Text style={{ fontSize: 15, color: '#8B97A8' }}&gt;05 / 15&lt;/Text&gt;&#10;    &lt;/Box&gt;&#10;    &lt;Box style={{ padding: '16px 40px 0px 40px' }}&gt;&#10;        &lt;Text style={{ fontSize: 21, color: '#4A5568', lineHeight: 1.5 }}&gt;如果拿手机去拍一个房间，这四件事几乎一定会遇到——它们不是算法&quot;不够准&quot;，而是&lt;b&gt;流程本身没有为现场反馈设计&lt;/b&gt;。&lt;/Text&gt;&#10;    &lt;/Box&gt;&#10;    &lt;Box style={{ padding: '16px 40px 0px 40px', flexDirection: 'row', gap: 20 }}&gt;&#10;        &lt;Box style={{ flex: 1, backgroundColor: '#F7F9FC', border: '1px solid #D6DCE5', borderRadius: 6, padding: '14px 18px', flexDirection: 'column' }}&gt;&#10;            &lt;Box style={{ flexDirection: 'row', alignItems: 'center', gap: 10 }}&gt;&#10;                &lt;Box style={{ width: '32px', height: '32px', backgroundColor: '#1E4FA8', borderRadius: 4, alignItems: 'center', justifyContent: 'center' }}&gt;&#10;                    &lt;Text style={{ fontSize: 19, fontWeight: 'bold', color: '#FFFFFF' }}&gt;1&lt;/Text&gt;&#10;                &lt;/Box&gt;&#10;                &lt;Text style={{ fontSize: 24, fontWeight: 'bold', color: '#1A2230' }}&gt;等：必须等图到齐&lt;/Text&gt;&#10;            &lt;/Box&gt;&#10;            &lt;Text style={{ fontSize: 20, color: '#1A2230', lineHeight: 1.5, marginTop: 10 }}&gt;离线流程要求全部图像就位才能开算。现场拍完不知道行不行，回家发现漏拍，只能整组重拍。&lt;/Text&gt;&#10;            &lt;Text style={{ fontSize: 19, color: '#D9534F', fontWeight: 'bold', marginTop: 10 }}&gt;返工成本最高&lt;/Text&gt;&#10;        &lt;/Box&gt;&#10;        &lt;Box style={{ flex: 1, backgroundColor: '#F7F9FC', border: '1px solid #D6DCE5', borderRadius: 6, padding: '14px 18px', flexDirection: 'column' }}&gt;&#10;            &lt;Box style={{ flexDirection: 'row', alignItems: 'center', gap: 10 }}&gt;&#10;                &lt;Box style={{ width: '32px', height: '32px', backgroundColor: '#1E4FA8', borderRadius: 4, alignItems: 'center', justifyContent: 'center' }}&gt;&#10;                    &lt;Text style={{ fontSize: 19, fontWeight: 'bold', color: '#FFFFFF' }}&gt;2&lt;/Text&gt;&#10;                &lt;/Box&gt;&#10;                &lt;Text style={{ fontSize: 24, fontWeight: 'bold', color: '#1A2230' }}&gt;乱：顺序不能用了&lt;/Text&gt;&#10;            &lt;/Box&gt;&#10;            &lt;Text style={{ fontSize: 20, color: '#1A2230', lineHeight: 1.5, marginTop: 10 }}&gt;随手拍的顺序与空间邻接无关，没法只比相邻帧，只能两两匹配：1000 张约 50 万对，耗时陡增。&lt;/Text&gt;&#10;            &lt;Text style={{ fontSize: 19, color: '#D9534F', fontWeight: 'bold', marginTop: 10 }}&gt;SfM 从分钟变小时&lt;/Text&gt;&#10;        &lt;/Box&gt;&#10;    &lt;/Box&gt;&#10;    &lt;Box style={{ padding: '14px 40px 0px 40px', flexDirection: 'row', gap: 20 }}&gt;&#10;        &lt;Box style={{ flex: 1, backgroundColor: '#F7F9FC', border: '1px solid #D6DCE5', borderRadius: 6, padding: '14px 18px', flexDirection: 'column' }}&gt;&#10;            &lt;Box style={{ flexDirection: 'row', alignItems: 'center', gap: 10 }}&gt;&#10;                &lt;Box style={{ width: '32px', height: '32px', backgroundColor: '#1E4FA8', borderRadius: 4, alignItems: 'center', justifyContent: 'center' }}&gt;&#10;                    &lt;Text style={{ fontSize: 19, fontWeight: 'bold', color: '#FFFFFF' }}&gt;3&lt;/Text&gt;&#10;                &lt;/Box&gt;&#10;                &lt;Text style={{ fontSize: 24, fontWeight: 'bold', color: '#1A2230' }}&gt;漂：回访时接不上&lt;/Text&gt;&#10;            &lt;/Box&gt;&#10;            &lt;Text style={{ fontSize: 20, color: '#1A2230', lineHeight: 1.5, marginTop: 10 }}&gt;边走边建误差累积，绕一圈回来发现首尾差半米。传统做法重跑一次全局 BA，几分钟起步。&lt;/Text&gt;&#10;            &lt;Text style={{ fontSize: 19, color: '#D9534F', fontWeight: 'bold', marginTop: 10 }}&gt;实时性当场归零&lt;/Text&gt;&#10;        &lt;/Box&gt;&#10;        &lt;Box style={{ flex: 1, backgroundColor: '#F7F9FC', border: '1px solid #D6DCE5', borderRadius: 6, padding: '14px 18px', flexDirection: 'column' }}&gt;&#10;            &lt;Box style={{ flexDirection: 'row', alignItems: 'center', gap: 10 }}&gt;&#10;                &lt;Box style={{ width: '32px', height: '32px', backgroundColor: '#1E4FA8', borderRadius: 4, alignItems: 'center', justifyContent: 'center' }}&gt;&#10;                    &lt;Text style={{ fontSize: 19, fontWeight: 'bold', color: '#FFFFFF' }}&gt;4&lt;/Text&gt;&#10;                &lt;/Box&gt;&#10;                &lt;Text style={{ fontSize: 24, fontWeight: 'bold', color: '#1A2230' }}&gt;爆：大场景显存&lt;/Text&gt;&#10;            &lt;/Box&gt;&#10;            &lt;Text style={{ fontSize: 20, color: '#1A2230', lineHeight: 1.5, marginTop: 10 }}&gt;高斯数随场景线性增长。论文实测：不开层级结构，CityWalk 到第 &lt;b&gt;795 / 4050&lt;/b&gt; 帧就 OOM。&lt;/Text&gt;&#10;            &lt;Text style={{ fontSize: 19, color: '#D9534F', fontWeight: 'bold', marginTop: 10 }}&gt;规模一上来就跑不完&lt;/Text&gt;&#10;        &lt;/Box&gt;&#10;    &lt;/Box&gt;&#10;    &lt;Box style={{ margin: '18px 40px 0px 40px', backgroundColor: '#1E4FA8', borderRadius: 6, padding: '14px 22px' }}&gt;&#10;        &lt;Text style={{ fontSize: 22, fontWeight: 'bold', color: '#FFFFFF', lineHeight: 1.5 }}&gt;四个现象收敛成三条必须同时成立的约束：即时（每帧数百毫秒）· 无序（不依赖帧序）· 全局一致（回环能修）。过去的方法最多同时满足两条。&lt;/Text&gt;&#10;    &lt;/Box&gt;&#10;&lt;/Slide&gt;&#10;"/>
+        <p:cNvPr id="262" name="" descr="&lt;Slide style={{ width: '1280px', height: '720px', backgroundColor: '#FFFFFF', padding: '0px', flexDirection: 'column' }}&gt;&#10;    &lt;Box style={{ width: '1280px', height: '8px', backgroundColor: '#1E4FA8' }} /&gt;&#10;    &lt;Box style={{ padding: '30px 40px 0px 40px', flexDirection: 'row', justifyContent: 'space-between', alignItems: 'flex-end' }}&gt;&#10;        &lt;Text style={{ fontSize: 34, fontWeight: 'bold', color: '#1E4FA8' }}&gt;过去遇到的问题：等、乱、漂、爆&lt;/Text&gt;&#10;        &lt;Text style={{ fontSize: 15, color: '#8B97A8' }}&gt;05 / 15&lt;/Text&gt;&#10;    &lt;/Box&gt;&#10;    &lt;Box style={{ padding: '16px 40px 0px 40px' }}&gt;&#10;        &lt;Text style={{ fontSize: 21, color: '#4A5568', lineHeight: 1.5 }}&gt;如果拿手机去拍一个房间，这四件事几乎一定会遇到——它们不是算法&quot;不够准&quot;，而是&lt;b&gt;流程本身没有为现场反馈设计&lt;/b&gt;。&lt;/Text&gt;&#10;    &lt;/Box&gt;&#10;    &lt;Box style={{ padding: '16px 40px 0px 40px', flexDirection: 'row', gap: 20 }}&gt;&#10;        &lt;Box style={{ flex: 1, backgroundColor: '#F7F9FC', border: '1px solid #D6DCE5', borderRadius: 6, padding: '14px 18px', flexDirection: 'column' }}&gt;&#10;            &lt;Box style={{ flexDirection: 'row', alignItems: 'center', gap: 10 }}&gt;&#10;                &lt;Box style={{ width: '32px', height: '32px', backgroundColor: '#1E4FA8', borderRadius: 4, alignItems: 'center', justifyContent: 'center' }}&gt;&#10;                    &lt;Text style={{ fontSize: 19, fontWeight: 'bold', color: '#FFFFFF' }}&gt;1&lt;/Text&gt;&#10;                &lt;/Box&gt;&#10;                &lt;Text style={{ fontSize: 24, fontWeight: 'bold', color: '#1A2230' }}&gt;等：必须等图到齐&lt;/Text&gt;&#10;            &lt;/Box&gt;&#10;            &lt;Text style={{ fontSize: 20, color: '#1A2230', lineHeight: 1.5, marginTop: 10 }}&gt;离线流程要求全部图像就位才能开算。现场拍完不知道行不行，回家发现漏拍，只能整组重拍。&lt;/Text&gt;&#10;            &lt;Text style={{ fontSize: 19, color: '#D9534F', fontWeight: 'bold', marginTop: 10 }}&gt;返工成本最高&lt;/Text&gt;&#10;        &lt;/Box&gt;&#10;        &lt;Box style={{ flex: 1, backgroundColor: '#F7F9FC', border: '1px solid #D6DCE5', borderRadius: 6, padding: '14px 18px', flexDirection: 'column' }}&gt;&#10;            &lt;Box style={{ flexDirection: 'row', alignItems: 'center', gap: 10 }}&gt;&#10;                &lt;Box style={{ width: '32px', height: '32px', backgroundColor: '#1E4FA8', borderRadius: 4, alignItems: 'center', justifyContent: 'center' }}&gt;&#10;                    &lt;Text style={{ fontSize: 19, fontWeight: 'bold', color: '#FFFFFF' }}&gt;2&lt;/Text&gt;&#10;                &lt;/Box&gt;&#10;                &lt;Text style={{ fontSize: 24, fontWeight: 'bold', color: '#1A2230' }}&gt;乱：顺序不能用了&lt;/Text&gt;&#10;            &lt;/Box&gt;&#10;            &lt;Text style={{ fontSize: 20, color: '#1A2230', lineHeight: 1.5, marginTop: 10 }}&gt;随手拍的顺序与空间邻接无关，没法只比相邻帧，只能两两匹配：1000 张约 50 万对，耗时陡增。&lt;/Text&gt;&#10;            &lt;Text style={{ fontSize: 19, color: '#D9534F', fontWeight: 'bold', marginTop: 10 }}&gt;SfM 从分钟变小时&lt;/Text&gt;&#10;        &lt;/Box&gt;&#10;    &lt;/Box&gt;&#10;    &lt;Box style={{ padding: '14px 40px 0px 40px', flexDirection: 'row', gap: 20 }}&gt;&#10;        &lt;Box style={{ flex: 1, backgroundColor: '#F7F9FC', border: '1px solid #D6DCE5', borderRadius: 6, padding: '14px 18px', flexDirection: 'column' }}&gt;&#10;            &lt;Box style={{ flexDirection: 'row', alignItems: 'center', gap: 10 }}&gt;&#10;                &lt;Box style={{ width: '32px', height: '32px', backgroundColor: '#1E4FA8', borderRadius: 4, alignItems: 'center', justifyContent: 'center' }}&gt;&#10;                    &lt;Text style={{ fontSize: 19, fontWeight: 'bold', color: '#FFFFFF' }}&gt;3&lt;/Text&gt;&#10;                &lt;/Box&gt;&#10;                &lt;Text style={{ fontSize: 24, fontWeight: 'bold', color: '#1A2230' }}&gt;漂：回访时接不上&lt;/Text&gt;&#10;            &lt;/Box&gt;&#10;            &lt;Text style={{ fontSize: 20, color: '#1A2230', lineHeight: 1.5, marginTop: 10 }}&gt;边走边建误差累积，绕一圈回来发现首尾差半米。传统做法重跑一次全局 BA，几分钟起步。&lt;/Text&gt;&#10;            &lt;Text style={{ fontSize: 19, color: '#D9534F', fontWeight: 'bold', marginTop: 10 }}&gt;实时性当场归零&lt;/Text&gt;&#10;        &lt;/Box&gt;&#10;        &lt;Box style={{ flex: 1, backgroundColor: '#F7F9FC', border: '1px solid #D6DCE5', borderRadius: 6, padding: '14px 18px', flexDirection: 'column' }}&gt;&#10;            &lt;Box style={{ flexDirection: 'row', alignItems: 'center', gap: 10 }}&gt;&#10;                &lt;Box style={{ width: '32px', height: '32px', backgroundColor: '#1E4FA8', borderRadius: 4, alignItems: 'center', justifyContent: 'center' }}&gt;&#10;                    &lt;Text style={{ fontSize: 19, fontWeight: 'bold', color: '#FFFFFF' }}&gt;4&lt;/Text&gt;&#10;                &lt;/Box&gt;&#10;                &lt;Text style={{ fontSize: 24, fontWeight: 'bold', color: '#1A2230' }}&gt;爆：大场景显存&lt;/Text&gt;&#10;            &lt;/Box&gt;&#10;            &lt;Text style={{ fontSize: 20, color: '#1A2230', lineHeight: 1.5, marginTop: 10 }}&gt;高斯数随场景线性增长。论文实测：不开层级结构，CityWalk 到第 &lt;b&gt;795 / 4050&lt;/b&gt; 帧就 OOM。&lt;/Text&gt;&#10;            &lt;Text style={{ fontSize: 19, color: '#D9534F', fontWeight: 'bold', marginTop: 10 }}&gt;规模一上来就跑不完&lt;/Text&gt;&#10;        &lt;/Box&gt;&#10;    &lt;/Box&gt;&#10;    &lt;Box style={{ margin: '18px 40px 0px 40px', backgroundColor: '#1E4FA8', borderRadius: 6, padding: '14px 22px' }}&gt;&#10;        &lt;Text style={{ fontSize: 22, fontWeight: 'bold', color: '#FFFFFF', lineHeight: 1.5 }}&gt;四个现象收敛成三条必须同时成立的约束：即时（每帧数百毫秒）· 无序（不依赖帧序）· 全局一致（回环能修）。过去的方法最多同时满足两条。&lt;/Text&gt;&#10;    &lt;/Box&gt;&#10;&lt;/Slide&gt;&#10;"/>
         <p:cNvGrpSpPr/>
         <p:nvPr/>
       </p:nvGrpSpPr>
@@ -14483,7 +13235,7 @@
       </p:grpSpPr>
       <p:sp>
         <p:nvSpPr>
-          <p:cNvPr id="291" name=""/>
+          <p:cNvPr id="263" name=""/>
           <p:cNvSpPr/>
           <p:nvPr/>
         </p:nvSpPr>
@@ -14507,7 +13259,7 @@
       </p:sp>
       <p:sp>
         <p:nvSpPr>
-          <p:cNvPr id="292" name=""/>
+          <p:cNvPr id="264" name=""/>
           <p:cNvSpPr/>
           <p:nvPr/>
         </p:nvSpPr>
@@ -14531,7 +13283,7 @@
       </p:sp>
       <p:sp>
         <p:nvSpPr>
-          <p:cNvPr id="293" name="" descr="{&quot;isTemplate&quot;:true,&quot;type&quot;:&quot;text&quot;}"/>
+          <p:cNvPr id="265" name="" descr="{&quot;isTemplate&quot;:true,&quot;type&quot;:&quot;text&quot;}"/>
           <p:cNvSpPr txBox="1"/>
           <p:nvPr/>
         </p:nvSpPr>
@@ -14566,7 +13318,7 @@
       </p:sp>
       <p:sp>
         <p:nvSpPr>
-          <p:cNvPr id="294" name="" descr="{&quot;isTemplate&quot;:true,&quot;type&quot;:&quot;text&quot;}"/>
+          <p:cNvPr id="266" name="" descr="{&quot;isTemplate&quot;:true,&quot;type&quot;:&quot;text&quot;}"/>
           <p:cNvSpPr txBox="1"/>
           <p:nvPr/>
         </p:nvSpPr>
@@ -14601,7 +13353,7 @@
       </p:sp>
       <p:sp>
         <p:nvSpPr>
-          <p:cNvPr id="295" name="" descr="{&quot;isTemplate&quot;:true,&quot;type&quot;:&quot;text&quot;}"/>
+          <p:cNvPr id="267" name="" descr="{&quot;isTemplate&quot;:true,&quot;type&quot;:&quot;text&quot;}"/>
           <p:cNvSpPr txBox="1"/>
           <p:nvPr/>
         </p:nvSpPr>
@@ -14696,7 +13448,7 @@
       </p:sp>
       <p:sp>
         <p:nvSpPr>
-          <p:cNvPr id="296" name=""/>
+          <p:cNvPr id="268" name=""/>
           <p:cNvSpPr/>
           <p:nvPr/>
         </p:nvSpPr>
@@ -14727,7 +13479,7 @@
       </p:sp>
       <p:sp>
         <p:nvSpPr>
-          <p:cNvPr id="297" name=""/>
+          <p:cNvPr id="269" name=""/>
           <p:cNvSpPr/>
           <p:nvPr/>
         </p:nvSpPr>
@@ -14753,7 +13505,7 @@
       </p:sp>
       <p:sp>
         <p:nvSpPr>
-          <p:cNvPr id="298" name="" descr="{&quot;isTemplate&quot;:true,&quot;type&quot;:&quot;text&quot;}"/>
+          <p:cNvPr id="270" name="" descr="{&quot;isTemplate&quot;:true,&quot;type&quot;:&quot;text&quot;}"/>
           <p:cNvSpPr txBox="1"/>
           <p:nvPr/>
         </p:nvSpPr>
@@ -14788,7 +13540,7 @@
       </p:sp>
       <p:sp>
         <p:nvSpPr>
-          <p:cNvPr id="299" name="" descr="{&quot;isTemplate&quot;:true,&quot;type&quot;:&quot;text&quot;}"/>
+          <p:cNvPr id="271" name="" descr="{&quot;isTemplate&quot;:true,&quot;type&quot;:&quot;text&quot;}"/>
           <p:cNvSpPr txBox="1"/>
           <p:nvPr/>
         </p:nvSpPr>
@@ -14823,7 +13575,7 @@
       </p:sp>
       <p:sp>
         <p:nvSpPr>
-          <p:cNvPr id="300" name="" descr="{&quot;isTemplate&quot;:true,&quot;type&quot;:&quot;text&quot;}"/>
+          <p:cNvPr id="272" name="" descr="{&quot;isTemplate&quot;:true,&quot;type&quot;:&quot;text&quot;}"/>
           <p:cNvSpPr txBox="1"/>
           <p:nvPr/>
         </p:nvSpPr>
@@ -14860,7 +13612,7 @@
       </p:sp>
       <p:sp>
         <p:nvSpPr>
-          <p:cNvPr id="301" name="" descr="{&quot;isTemplate&quot;:true,&quot;type&quot;:&quot;text&quot;}"/>
+          <p:cNvPr id="273" name="" descr="{&quot;isTemplate&quot;:true,&quot;type&quot;:&quot;text&quot;}"/>
           <p:cNvSpPr txBox="1"/>
           <p:nvPr/>
         </p:nvSpPr>
@@ -14895,7 +13647,7 @@
       </p:sp>
       <p:sp>
         <p:nvSpPr>
-          <p:cNvPr id="302" name=""/>
+          <p:cNvPr id="274" name=""/>
           <p:cNvSpPr/>
           <p:nvPr/>
         </p:nvSpPr>
@@ -14926,7 +13678,7 @@
       </p:sp>
       <p:sp>
         <p:nvSpPr>
-          <p:cNvPr id="303" name=""/>
+          <p:cNvPr id="275" name=""/>
           <p:cNvSpPr/>
           <p:nvPr/>
         </p:nvSpPr>
@@ -14952,7 +13704,7 @@
       </p:sp>
       <p:sp>
         <p:nvSpPr>
-          <p:cNvPr id="304" name="" descr="{&quot;isTemplate&quot;:true,&quot;type&quot;:&quot;text&quot;}"/>
+          <p:cNvPr id="276" name="" descr="{&quot;isTemplate&quot;:true,&quot;type&quot;:&quot;text&quot;}"/>
           <p:cNvSpPr txBox="1"/>
           <p:nvPr/>
         </p:nvSpPr>
@@ -14987,7 +13739,7 @@
       </p:sp>
       <p:sp>
         <p:nvSpPr>
-          <p:cNvPr id="305" name="" descr="{&quot;isTemplate&quot;:true,&quot;type&quot;:&quot;text&quot;}"/>
+          <p:cNvPr id="277" name="" descr="{&quot;isTemplate&quot;:true,&quot;type&quot;:&quot;text&quot;}"/>
           <p:cNvSpPr txBox="1"/>
           <p:nvPr/>
         </p:nvSpPr>
@@ -15022,7 +13774,7 @@
       </p:sp>
       <p:sp>
         <p:nvSpPr>
-          <p:cNvPr id="306" name="" descr="{&quot;isTemplate&quot;:true,&quot;type&quot;:&quot;text&quot;}"/>
+          <p:cNvPr id="278" name="" descr="{&quot;isTemplate&quot;:true,&quot;type&quot;:&quot;text&quot;}"/>
           <p:cNvSpPr txBox="1"/>
           <p:nvPr/>
         </p:nvSpPr>
@@ -15099,7 +13851,7 @@
       </p:sp>
       <p:sp>
         <p:nvSpPr>
-          <p:cNvPr id="307" name="" descr="{&quot;isTemplate&quot;:true,&quot;type&quot;:&quot;text&quot;}"/>
+          <p:cNvPr id="279" name="" descr="{&quot;isTemplate&quot;:true,&quot;type&quot;:&quot;text&quot;}"/>
           <p:cNvSpPr txBox="1"/>
           <p:nvPr/>
         </p:nvSpPr>
@@ -15144,7 +13896,7 @@
       </p:sp>
       <p:sp>
         <p:nvSpPr>
-          <p:cNvPr id="308" name=""/>
+          <p:cNvPr id="280" name=""/>
           <p:cNvSpPr/>
           <p:nvPr/>
         </p:nvSpPr>
@@ -15175,7 +13927,7 @@
       </p:sp>
       <p:sp>
         <p:nvSpPr>
-          <p:cNvPr id="309" name=""/>
+          <p:cNvPr id="281" name=""/>
           <p:cNvSpPr/>
           <p:nvPr/>
         </p:nvSpPr>
@@ -15201,7 +13953,7 @@
       </p:sp>
       <p:sp>
         <p:nvSpPr>
-          <p:cNvPr id="310" name="" descr="{&quot;isTemplate&quot;:true,&quot;type&quot;:&quot;text&quot;}"/>
+          <p:cNvPr id="282" name="" descr="{&quot;isTemplate&quot;:true,&quot;type&quot;:&quot;text&quot;}"/>
           <p:cNvSpPr txBox="1"/>
           <p:nvPr/>
         </p:nvSpPr>
@@ -15236,7 +13988,7 @@
       </p:sp>
       <p:sp>
         <p:nvSpPr>
-          <p:cNvPr id="311" name="" descr="{&quot;isTemplate&quot;:true,&quot;type&quot;:&quot;text&quot;}"/>
+          <p:cNvPr id="283" name="" descr="{&quot;isTemplate&quot;:true,&quot;type&quot;:&quot;text&quot;}"/>
           <p:cNvSpPr txBox="1"/>
           <p:nvPr/>
         </p:nvSpPr>
@@ -15271,7 +14023,7 @@
       </p:sp>
       <p:sp>
         <p:nvSpPr>
-          <p:cNvPr id="312" name="" descr="{&quot;isTemplate&quot;:true,&quot;type&quot;:&quot;text&quot;}"/>
+          <p:cNvPr id="284" name="" descr="{&quot;isTemplate&quot;:true,&quot;type&quot;:&quot;text&quot;}"/>
           <p:cNvSpPr txBox="1"/>
           <p:nvPr/>
         </p:nvSpPr>
@@ -15328,7 +14080,7 @@
       </p:sp>
       <p:sp>
         <p:nvSpPr>
-          <p:cNvPr id="313" name="" descr="{&quot;isTemplate&quot;:true,&quot;type&quot;:&quot;text&quot;}"/>
+          <p:cNvPr id="285" name="" descr="{&quot;isTemplate&quot;:true,&quot;type&quot;:&quot;text&quot;}"/>
           <p:cNvSpPr txBox="1"/>
           <p:nvPr/>
         </p:nvSpPr>
@@ -15363,7 +14115,7 @@
       </p:sp>
       <p:sp>
         <p:nvSpPr>
-          <p:cNvPr id="314" name=""/>
+          <p:cNvPr id="286" name=""/>
           <p:cNvSpPr/>
           <p:nvPr/>
         </p:nvSpPr>
@@ -15394,7 +14146,7 @@
       </p:sp>
       <p:sp>
         <p:nvSpPr>
-          <p:cNvPr id="315" name=""/>
+          <p:cNvPr id="287" name=""/>
           <p:cNvSpPr/>
           <p:nvPr/>
         </p:nvSpPr>
@@ -15420,7 +14172,7 @@
       </p:sp>
       <p:sp>
         <p:nvSpPr>
-          <p:cNvPr id="316" name="" descr="{&quot;isTemplate&quot;:true,&quot;type&quot;:&quot;text&quot;}"/>
+          <p:cNvPr id="288" name="" descr="{&quot;isTemplate&quot;:true,&quot;type&quot;:&quot;text&quot;}"/>
           <p:cNvSpPr txBox="1"/>
           <p:nvPr/>
         </p:nvSpPr>
@@ -15455,7 +14207,7 @@
       </p:sp>
       <p:sp>
         <p:nvSpPr>
-          <p:cNvPr id="317" name="" descr="{&quot;isTemplate&quot;:true,&quot;type&quot;:&quot;text&quot;}"/>
+          <p:cNvPr id="289" name="" descr="{&quot;isTemplate&quot;:true,&quot;type&quot;:&quot;text&quot;}"/>
           <p:cNvSpPr txBox="1"/>
           <p:nvPr/>
         </p:nvSpPr>
@@ -15490,7 +14242,7 @@
       </p:sp>
       <p:sp>
         <p:nvSpPr>
-          <p:cNvPr id="318" name="" descr="{&quot;isTemplate&quot;:true,&quot;type&quot;:&quot;text&quot;}"/>
+          <p:cNvPr id="290" name="" descr="{&quot;isTemplate&quot;:true,&quot;type&quot;:&quot;text&quot;}"/>
           <p:cNvSpPr txBox="1"/>
           <p:nvPr/>
         </p:nvSpPr>
@@ -15607,7 +14359,7 @@
       </p:sp>
       <p:sp>
         <p:nvSpPr>
-          <p:cNvPr id="319" name="" descr="{&quot;isTemplate&quot;:true,&quot;type&quot;:&quot;text&quot;}"/>
+          <p:cNvPr id="291" name="" descr="{&quot;isTemplate&quot;:true,&quot;type&quot;:&quot;text&quot;}"/>
           <p:cNvSpPr txBox="1"/>
           <p:nvPr/>
         </p:nvSpPr>
@@ -15642,7 +14394,7 @@
       </p:sp>
       <p:sp>
         <p:nvSpPr>
-          <p:cNvPr id="320" name=""/>
+          <p:cNvPr id="292" name=""/>
           <p:cNvSpPr/>
           <p:nvPr/>
         </p:nvSpPr>
@@ -15668,7 +14420,7 @@
       </p:sp>
       <p:sp>
         <p:nvSpPr>
-          <p:cNvPr id="321" name="" descr="{&quot;isTemplate&quot;:true,&quot;type&quot;:&quot;text&quot;}"/>
+          <p:cNvPr id="293" name="" descr="{&quot;isTemplate&quot;:true,&quot;type&quot;:&quot;text&quot;}"/>
           <p:cNvSpPr txBox="1"/>
           <p:nvPr/>
         </p:nvSpPr>
@@ -15753,7 +14505,7 @@
   <p:cSld>
     <p:spTree>
       <p:nvGrpSpPr>
-        <p:cNvPr id="322" name="" descr="&lt;Slide style={{ width: '1280px', height: '720px', backgroundColor: '#FFFFFF', padding: '0px', flexDirection: 'column' }}&gt;&#10;    &lt;Box style={{ width: '1280px', height: '8px', backgroundColor: '#1E4FA8' }} /&gt;&#10;    &lt;Box style={{ padding: '30px 40px 0px 40px', flexDirection: 'row', justifyContent: 'space-between', alignItems: 'flex-end' }}&gt;&#10;        &lt;Text style={{ fontSize: 34, fontWeight: 'bold', color: '#1E4FA8' }}&gt;方法总览：每来一个关键帧做六件事&lt;/Text&gt;&#10;        &lt;Text style={{ fontSize: 15, color: '#8B97A8' }}&gt;06 / 15&lt;/Text&gt;&#10;    &lt;/Box&gt;&#10;    &lt;Box style={{ padding: '14px 40px 0px 40px' }}&gt;&#10;        &lt;Text style={{ fontSize: 22, color: '#4A5568', lineHeight: 1.5 }}&gt;设计哲学一句话：&lt;b&gt;每帧做小事，偶尔做一次大事&lt;/b&gt;。前者保证实时，后者保证不漂。每一步都对应上一页四个问题中的一个。&lt;/Text&gt;&#10;    &lt;/Box&gt;&#10;    &lt;Box style={{ padding: '18px 40px 0px 40px', flexDirection: 'row', gap: 14 }}&gt;&#10;        &lt;Box style={{ flex: 1, minHeight: '158px', backgroundColor: '#F0F5FC', borderRadius: 6, padding: '16px 14px', flexDirection: 'column' }}&gt;&#10;            &lt;Text style={{ fontSize: 18, fontWeight: 'bold', color: '#1E4FA8' }}&gt;STEP 1&lt;/Text&gt;&#10;            &lt;Text style={{ fontSize: 23, fontWeight: 'bold', color: '#1A2230', marginTop: 7 }}&gt;两级匹配&lt;/Text&gt;&#10;            &lt;Text style={{ fontSize: 19, color: '#1A2230', lineHeight: 1.5, marginTop: 7 }}&gt;检索候选 → 局部特征 → 精验，得到可信帧对&lt;/Text&gt;&#10;            &lt;Text style={{ fontSize: 18, color: '#1D5FC0', fontWeight: 'bold', marginTop: 'auto' }}&gt;治&quot;乱&quot;&lt;/Text&gt;&#10;        &lt;/Box&gt;&#10;        &lt;Box style={{ flex: 1, minHeight: '158px', backgroundColor: '#F0F5FC', borderRadius: 6, padding: '16px 14px', flexDirection: 'column' }}&gt;&#10;            &lt;Text style={{ fontSize: 18, fontWeight: 'bold', color: '#1E4FA8' }}&gt;STEP 2&lt;/Text&gt;&#10;            &lt;Text style={{ fontSize: 23, fontWeight: 'bold', color: '#1A2230', marginTop: 7 }}&gt;更新协视图&lt;/Text&gt;&#10;            &lt;Text style={{ fontSize: 19, color: '#1A2230', lineHeight: 1.5, marginTop: 7 }}&gt;边权 = 内点数倒数，越可靠越&quot;近&quot;&lt;/Text&gt;&#10;            &lt;Text style={{ fontSize: 18, color: '#1D5FC0', fontWeight: 'bold', marginTop: 'auto' }}&gt;为后续提供&quot;距离&quot;&lt;/Text&gt;&#10;        &lt;/Box&gt;&#10;        &lt;Box style={{ flex: 1, minHeight: '158px', backgroundColor: '#F0F5FC', borderRadius: 6, padding: '16px 14px', flexDirection: 'column' }}&gt;&#10;            &lt;Text style={{ fontSize: 18, fontWeight: 'bold', color: '#1E4FA8' }}&gt;STEP 3&lt;/Text&gt;&#10;            &lt;Text style={{ fontSize: 23, fontWeight: 'bold', color: '#1A2230', marginTop: 7 }}&gt;回环检测&lt;/Text&gt;&#10;            &lt;Text style={{ fontSize: 19, color: '#1A2230', lineHeight: 1.5, marginTop: 7 }}&gt;簇间跳数 &amp;gt; 5 且有效对 &amp;gt; 2 才触发&lt;/Text&gt;&#10;            &lt;Text style={{ fontSize: 18, color: '#1D5FC0', fontWeight: 'bold', marginTop: 'auto' }}&gt;治&quot;漂&quot;·发现&lt;/Text&gt;&#10;        &lt;/Box&gt;&#10;    &lt;/Box&gt;&#10;    &lt;Box style={{ padding: '16px 40px 0px 40px', flexDirection: 'row', gap: 14 }}&gt;&#10;        &lt;Box style={{ flex: 1, minHeight: '158px', backgroundColor: '#F7F9FC', borderRadius: 6, padding: '16px 14px', flexDirection: 'column' }}&gt;&#10;            &lt;Text style={{ fontSize: 18, fontWeight: 'bold', color: '#1E4FA8' }}&gt;STEP 4&lt;/Text&gt;&#10;            &lt;Text style={{ fontSize: 23, fontWeight: 'bold', color: '#1A2230', marginTop: 7 }}&gt;局部 BA&lt;/Text&gt;&#10;            &lt;Text style={{ fontSize: 19, color: '#1A2230', lineHeight: 1.5, marginTop: 7 }}&gt;选 20 个高连通帧，GPU 上优化位姿&lt;/Text&gt;&#10;            &lt;Text style={{ fontSize: 18, color: '#1D5FC0', fontWeight: 'bold', marginTop: 'auto' }}&gt;治&quot;慢&quot;&lt;/Text&gt;&#10;        &lt;/Box&gt;&#10;        &lt;Box style={{ flex: 1, minHeight: '158px', backgroundColor: '#F7F9FC', borderRadius: 6, padding: '16px 14px', flexDirection: 'column' }}&gt;&#10;            &lt;Text style={{ fontSize: 18, fontWeight: 'bold', color: '#1E4FA8' }}&gt;STEP 5&lt;/Text&gt;&#10;            &lt;Text style={{ fontSize: 23, fontWeight: 'bold', color: '#1A2230', marginTop: 7 }}&gt;回环修正&lt;/Text&gt;&#10;            &lt;Text style={{ fontSize: 19, color: '#1A2230', lineHeight: 1.5, marginTop: 7 }}&gt;焊接 BA + 主干传播，位姿与高斯一起动&lt;/Text&gt;&#10;            &lt;Text style={{ fontSize: 18, color: '#1D5FC0', fontWeight: 'bold', marginTop: 'auto' }}&gt;治&quot;漂&quot;·修正&lt;/Text&gt;&#10;        &lt;/Box&gt;&#10;        &lt;Box style={{ flex: 1, minHeight: '158px', backgroundColor: '#F7F9FC', borderRadius: 6, padding: '16px 14px', flexDirection: 'column' }}&gt;&#10;            &lt;Text style={{ fontSize: 18, fontWeight: 'bold', color: '#1E4FA8' }}&gt;STEP 6&lt;/Text&gt;&#10;            &lt;Text style={{ fontSize: 23, fontWeight: 'bold', color: '#1A2230', marginTop: 7 }}&gt;投放与优化&lt;/Text&gt;&#10;            &lt;Text style={{ fontSize: 19, color: '#1A2230', lineHeight: 1.5, marginTop: 7 }}&gt;分块深度对齐投放，每帧固定 30 次迭代&lt;/Text&gt;&#10;            &lt;Text style={{ fontSize: 18, color: '#1D5FC0', fontWeight: 'bold', marginTop: 'auto' }}&gt;治&quot;爆&quot;（配层级）&lt;/Text&gt;&#10;        &lt;/Box&gt;&#10;    &lt;/Box&gt;&#10;    &lt;Box style={{ margin: '18px 40px 0px 40px', backgroundColor: '#F0F5FC', borderLeft: '5px solid #1E4FA8', padding: '15px 20px' }}&gt;&#10;        &lt;Text style={{ fontSize: 21, color: '#1A2230', lineHeight: 1.5 }}&gt;另有一处容错：匹配失败的帧先&quot;搁置&quot;，后续出现相似帧时再取出重试——乱序输入因此不必强求一次匹配成功。&lt;/Text&gt;&#10;    &lt;/Box&gt;&#10;    &lt;Box style={{ padding: '14px 40px 0px 40px' }}&gt;&#10;        &lt;Text style={{ fontSize: 17, color: '#8B97A8' }}&gt;六步中只有 STEP 3 与 STEP 5 是&quot;偶尔做一次的大事&quot;，其余每帧都跑；这也是实时性的来源。&lt;/Text&gt;&#10;    &lt;/Box&gt;&#10;&lt;/Slide&gt;&#10;"/>
+        <p:cNvPr id="294" name="" descr="&lt;Slide style={{ width: '1280px', height: '720px', backgroundColor: '#FFFFFF', padding: '0px', flexDirection: 'column' }}&gt;&#10;    &lt;Box style={{ width: '1280px', height: '8px', backgroundColor: '#1E4FA8' }} /&gt;&#10;    &lt;Box style={{ padding: '30px 40px 0px 40px', flexDirection: 'row', justifyContent: 'space-between', alignItems: 'flex-end' }}&gt;&#10;        &lt;Text style={{ fontSize: 34, fontWeight: 'bold', color: '#1E4FA8' }}&gt;方法总览：每来一个关键帧做六件事&lt;/Text&gt;&#10;        &lt;Text style={{ fontSize: 15, color: '#8B97A8' }}&gt;06 / 15&lt;/Text&gt;&#10;    &lt;/Box&gt;&#10;    &lt;Box style={{ padding: '14px 40px 0px 40px' }}&gt;&#10;        &lt;Text style={{ fontSize: 22, color: '#4A5568', lineHeight: 1.5 }}&gt;设计哲学一句话：&lt;b&gt;每帧做小事，偶尔做一次大事&lt;/b&gt;。前者保证实时，后者保证不漂。每一步都对应上一页四个问题中的一个。&lt;/Text&gt;&#10;    &lt;/Box&gt;&#10;    &lt;Box style={{ padding: '18px 40px 0px 40px', flexDirection: 'row', gap: 14 }}&gt;&#10;        &lt;Box style={{ flex: 1, minHeight: '158px', backgroundColor: '#F0F5FC', borderRadius: 6, padding: '16px 14px', flexDirection: 'column' }}&gt;&#10;            &lt;Text style={{ fontSize: 18, fontWeight: 'bold', color: '#1E4FA8' }}&gt;STEP 1&lt;/Text&gt;&#10;            &lt;Text style={{ fontSize: 23, fontWeight: 'bold', color: '#1A2230', marginTop: 7 }}&gt;两级匹配&lt;/Text&gt;&#10;            &lt;Text style={{ fontSize: 19, color: '#1A2230', lineHeight: 1.5, marginTop: 7 }}&gt;检索候选 → 局部特征 → 精验，得到可信帧对&lt;/Text&gt;&#10;            &lt;Text style={{ fontSize: 18, color: '#1D5FC0', fontWeight: 'bold', marginTop: 'auto' }}&gt;治&quot;乱&quot;&lt;/Text&gt;&#10;        &lt;/Box&gt;&#10;        &lt;Box style={{ flex: 1, minHeight: '158px', backgroundColor: '#F0F5FC', borderRadius: 6, padding: '16px 14px', flexDirection: 'column' }}&gt;&#10;            &lt;Text style={{ fontSize: 18, fontWeight: 'bold', color: '#1E4FA8' }}&gt;STEP 2&lt;/Text&gt;&#10;            &lt;Text style={{ fontSize: 23, fontWeight: 'bold', color: '#1A2230', marginTop: 7 }}&gt;更新协视图&lt;/Text&gt;&#10;            &lt;Text style={{ fontSize: 19, color: '#1A2230', lineHeight: 1.5, marginTop: 7 }}&gt;边权 = 内点数倒数，越可靠越&quot;近&quot;&lt;/Text&gt;&#10;            &lt;Text style={{ fontSize: 18, color: '#1D5FC0', fontWeight: 'bold', marginTop: 'auto' }}&gt;为后续提供&quot;距离&quot;&lt;/Text&gt;&#10;        &lt;/Box&gt;&#10;        &lt;Box style={{ flex: 1, minHeight: '158px', backgroundColor: '#F0F5FC', borderRadius: 6, padding: '16px 14px', flexDirection: 'column' }}&gt;&#10;            &lt;Text style={{ fontSize: 18, fontWeight: 'bold', color: '#1E4FA8' }}&gt;STEP 3&lt;/Text&gt;&#10;            &lt;Text style={{ fontSize: 23, fontWeight: 'bold', color: '#1A2230', marginTop: 7 }}&gt;回环检测&lt;/Text&gt;&#10;            &lt;Text style={{ fontSize: 19, color: '#1A2230', lineHeight: 1.5, marginTop: 7 }}&gt;簇间跳数 &amp;gt; 5 且有效对 &amp;gt; 2 才触发&lt;/Text&gt;&#10;            &lt;Text style={{ fontSize: 18, color: '#1D5FC0', fontWeight: 'bold', marginTop: 'auto' }}&gt;治&quot;漂&quot;·发现&lt;/Text&gt;&#10;        &lt;/Box&gt;&#10;    &lt;/Box&gt;&#10;    &lt;Box style={{ padding: '16px 40px 0px 40px', flexDirection: 'row', gap: 14 }}&gt;&#10;        &lt;Box style={{ flex: 1, minHeight: '158px', backgroundColor: '#F7F9FC', borderRadius: 6, padding: '16px 14px', flexDirection: 'column' }}&gt;&#10;            &lt;Text style={{ fontSize: 18, fontWeight: 'bold', color: '#1E4FA8' }}&gt;STEP 4&lt;/Text&gt;&#10;            &lt;Text style={{ fontSize: 23, fontWeight: 'bold', color: '#1A2230', marginTop: 7 }}&gt;局部 BA&lt;/Text&gt;&#10;            &lt;Text style={{ fontSize: 19, color: '#1A2230', lineHeight: 1.5, marginTop: 7 }}&gt;选 20 个高连通帧，GPU 上优化位姿&lt;/Text&gt;&#10;            &lt;Text style={{ fontSize: 18, color: '#1D5FC0', fontWeight: 'bold', marginTop: 'auto' }}&gt;治&quot;慢&quot;&lt;/Text&gt;&#10;        &lt;/Box&gt;&#10;        &lt;Box style={{ flex: 1, minHeight: '158px', backgroundColor: '#F7F9FC', borderRadius: 6, padding: '16px 14px', flexDirection: 'column' }}&gt;&#10;            &lt;Text style={{ fontSize: 18, fontWeight: 'bold', color: '#1E4FA8' }}&gt;STEP 5&lt;/Text&gt;&#10;            &lt;Text style={{ fontSize: 23, fontWeight: 'bold', color: '#1A2230', marginTop: 7 }}&gt;回环修正&lt;/Text&gt;&#10;            &lt;Text style={{ fontSize: 19, color: '#1A2230', lineHeight: 1.5, marginTop: 7 }}&gt;焊接 BA + 主干传播，位姿与高斯一起动&lt;/Text&gt;&#10;            &lt;Text style={{ fontSize: 18, color: '#1D5FC0', fontWeight: 'bold', marginTop: 'auto' }}&gt;治&quot;漂&quot;·修正&lt;/Text&gt;&#10;        &lt;/Box&gt;&#10;        &lt;Box style={{ flex: 1, minHeight: '158px', backgroundColor: '#F7F9FC', borderRadius: 6, padding: '16px 14px', flexDirection: 'column' }}&gt;&#10;            &lt;Text style={{ fontSize: 18, fontWeight: 'bold', color: '#1E4FA8' }}&gt;STEP 6&lt;/Text&gt;&#10;            &lt;Text style={{ fontSize: 23, fontWeight: 'bold', color: '#1A2230', marginTop: 7 }}&gt;投放与优化&lt;/Text&gt;&#10;            &lt;Text style={{ fontSize: 19, color: '#1A2230', lineHeight: 1.5, marginTop: 7 }}&gt;分块深度对齐投放，每帧固定 30 次迭代&lt;/Text&gt;&#10;            &lt;Text style={{ fontSize: 18, color: '#1D5FC0', fontWeight: 'bold', marginTop: 'auto' }}&gt;治&quot;爆&quot;（配层级）&lt;/Text&gt;&#10;        &lt;/Box&gt;&#10;    &lt;/Box&gt;&#10;    &lt;Box style={{ margin: '18px 40px 0px 40px', backgroundColor: '#F0F5FC', borderLeft: '5px solid #1E4FA8', padding: '15px 20px' }}&gt;&#10;        &lt;Text style={{ fontSize: 21, color: '#1A2230', lineHeight: 1.5 }}&gt;另有一处容错：匹配失败的帧先&quot;搁置&quot;，后续出现相似帧时再取出重试——乱序输入因此不必强求一次匹配成功。&lt;/Text&gt;&#10;    &lt;/Box&gt;&#10;    &lt;Box style={{ padding: '14px 40px 0px 40px' }}&gt;&#10;        &lt;Text style={{ fontSize: 17, color: '#8B97A8' }}&gt;六步中只有 STEP 3 与 STEP 5 是&quot;偶尔做一次的大事&quot;，其余每帧都跑；这也是实时性的来源。&lt;/Text&gt;&#10;    &lt;/Box&gt;&#10;&lt;/Slide&gt;&#10;"/>
         <p:cNvGrpSpPr/>
         <p:nvPr/>
       </p:nvGrpSpPr>
@@ -15767,7 +14519,7 @@
       </p:grpSpPr>
       <p:sp>
         <p:nvSpPr>
-          <p:cNvPr id="323" name=""/>
+          <p:cNvPr id="295" name=""/>
           <p:cNvSpPr/>
           <p:nvPr/>
         </p:nvSpPr>
@@ -15791,7 +14543,7 @@
       </p:sp>
       <p:sp>
         <p:nvSpPr>
-          <p:cNvPr id="324" name=""/>
+          <p:cNvPr id="296" name=""/>
           <p:cNvSpPr/>
           <p:nvPr/>
         </p:nvSpPr>
@@ -15815,7 +14567,7 @@
       </p:sp>
       <p:sp>
         <p:nvSpPr>
-          <p:cNvPr id="325" name="" descr="{&quot;isTemplate&quot;:true,&quot;type&quot;:&quot;text&quot;}"/>
+          <p:cNvPr id="297" name="" descr="{&quot;isTemplate&quot;:true,&quot;type&quot;:&quot;text&quot;}"/>
           <p:cNvSpPr txBox="1"/>
           <p:nvPr/>
         </p:nvSpPr>
@@ -15850,7 +14602,7 @@
       </p:sp>
       <p:sp>
         <p:nvSpPr>
-          <p:cNvPr id="326" name="" descr="{&quot;isTemplate&quot;:true,&quot;type&quot;:&quot;text&quot;}"/>
+          <p:cNvPr id="298" name="" descr="{&quot;isTemplate&quot;:true,&quot;type&quot;:&quot;text&quot;}"/>
           <p:cNvSpPr txBox="1"/>
           <p:nvPr/>
         </p:nvSpPr>
@@ -15885,7 +14637,7 @@
       </p:sp>
       <p:sp>
         <p:nvSpPr>
-          <p:cNvPr id="327" name="" descr="{&quot;isTemplate&quot;:true,&quot;type&quot;:&quot;text&quot;}"/>
+          <p:cNvPr id="299" name="" descr="{&quot;isTemplate&quot;:true,&quot;type&quot;:&quot;text&quot;}"/>
           <p:cNvSpPr txBox="1"/>
           <p:nvPr/>
         </p:nvSpPr>
@@ -15940,7 +14692,7 @@
       </p:sp>
       <p:sp>
         <p:nvSpPr>
-          <p:cNvPr id="328" name=""/>
+          <p:cNvPr id="300" name=""/>
           <p:cNvSpPr/>
           <p:nvPr/>
         </p:nvSpPr>
@@ -15966,7 +14718,7 @@
       </p:sp>
       <p:sp>
         <p:nvSpPr>
-          <p:cNvPr id="329" name="" descr="{&quot;isTemplate&quot;:true,&quot;type&quot;:&quot;text&quot;}"/>
+          <p:cNvPr id="301" name="" descr="{&quot;isTemplate&quot;:true,&quot;type&quot;:&quot;text&quot;}"/>
           <p:cNvSpPr txBox="1"/>
           <p:nvPr/>
         </p:nvSpPr>
@@ -16001,7 +14753,7 @@
       </p:sp>
       <p:sp>
         <p:nvSpPr>
-          <p:cNvPr id="330" name="" descr="{&quot;isTemplate&quot;:true,&quot;type&quot;:&quot;text&quot;}"/>
+          <p:cNvPr id="302" name="" descr="{&quot;isTemplate&quot;:true,&quot;type&quot;:&quot;text&quot;}"/>
           <p:cNvSpPr txBox="1"/>
           <p:nvPr/>
         </p:nvSpPr>
@@ -16036,7 +14788,7 @@
       </p:sp>
       <p:sp>
         <p:nvSpPr>
-          <p:cNvPr id="331" name="" descr="{&quot;isTemplate&quot;:true,&quot;type&quot;:&quot;text&quot;}"/>
+          <p:cNvPr id="303" name="" descr="{&quot;isTemplate&quot;:true,&quot;type&quot;:&quot;text&quot;}"/>
           <p:cNvSpPr txBox="1"/>
           <p:nvPr/>
         </p:nvSpPr>
@@ -16113,7 +14865,7 @@
       </p:sp>
       <p:sp>
         <p:nvSpPr>
-          <p:cNvPr id="332" name="" descr="{&quot;isTemplate&quot;:true,&quot;type&quot;:&quot;text&quot;}"/>
+          <p:cNvPr id="304" name="" descr="{&quot;isTemplate&quot;:true,&quot;type&quot;:&quot;text&quot;}"/>
           <p:cNvSpPr txBox="1"/>
           <p:nvPr/>
         </p:nvSpPr>
@@ -16178,7 +14930,7 @@
       </p:sp>
       <p:sp>
         <p:nvSpPr>
-          <p:cNvPr id="333" name=""/>
+          <p:cNvPr id="305" name=""/>
           <p:cNvSpPr/>
           <p:nvPr/>
         </p:nvSpPr>
@@ -16204,7 +14956,7 @@
       </p:sp>
       <p:sp>
         <p:nvSpPr>
-          <p:cNvPr id="334" name="" descr="{&quot;isTemplate&quot;:true,&quot;type&quot;:&quot;text&quot;}"/>
+          <p:cNvPr id="306" name="" descr="{&quot;isTemplate&quot;:true,&quot;type&quot;:&quot;text&quot;}"/>
           <p:cNvSpPr txBox="1"/>
           <p:nvPr/>
         </p:nvSpPr>
@@ -16239,7 +14991,7 @@
       </p:sp>
       <p:sp>
         <p:nvSpPr>
-          <p:cNvPr id="335" name="" descr="{&quot;isTemplate&quot;:true,&quot;type&quot;:&quot;text&quot;}"/>
+          <p:cNvPr id="307" name="" descr="{&quot;isTemplate&quot;:true,&quot;type&quot;:&quot;text&quot;}"/>
           <p:cNvSpPr txBox="1"/>
           <p:nvPr/>
         </p:nvSpPr>
@@ -16274,7 +15026,7 @@
       </p:sp>
       <p:sp>
         <p:nvSpPr>
-          <p:cNvPr id="336" name="" descr="{&quot;isTemplate&quot;:true,&quot;type&quot;:&quot;text&quot;}"/>
+          <p:cNvPr id="308" name="" descr="{&quot;isTemplate&quot;:true,&quot;type&quot;:&quot;text&quot;}"/>
           <p:cNvSpPr txBox="1"/>
           <p:nvPr/>
         </p:nvSpPr>
@@ -16359,7 +15111,7 @@
       </p:sp>
       <p:sp>
         <p:nvSpPr>
-          <p:cNvPr id="337" name="" descr="{&quot;isTemplate&quot;:true,&quot;type&quot;:&quot;text&quot;}"/>
+          <p:cNvPr id="309" name="" descr="{&quot;isTemplate&quot;:true,&quot;type&quot;:&quot;text&quot;}"/>
           <p:cNvSpPr txBox="1"/>
           <p:nvPr/>
         </p:nvSpPr>
@@ -16424,7 +15176,7 @@
       </p:sp>
       <p:sp>
         <p:nvSpPr>
-          <p:cNvPr id="338" name=""/>
+          <p:cNvPr id="310" name=""/>
           <p:cNvSpPr/>
           <p:nvPr/>
         </p:nvSpPr>
@@ -16450,7 +15202,7 @@
       </p:sp>
       <p:sp>
         <p:nvSpPr>
-          <p:cNvPr id="339" name="" descr="{&quot;isTemplate&quot;:true,&quot;type&quot;:&quot;text&quot;}"/>
+          <p:cNvPr id="311" name="" descr="{&quot;isTemplate&quot;:true,&quot;type&quot;:&quot;text&quot;}"/>
           <p:cNvSpPr txBox="1"/>
           <p:nvPr/>
         </p:nvSpPr>
@@ -16485,7 +15237,7 @@
       </p:sp>
       <p:sp>
         <p:nvSpPr>
-          <p:cNvPr id="340" name="" descr="{&quot;isTemplate&quot;:true,&quot;type&quot;:&quot;text&quot;}"/>
+          <p:cNvPr id="312" name="" descr="{&quot;isTemplate&quot;:true,&quot;type&quot;:&quot;text&quot;}"/>
           <p:cNvSpPr txBox="1"/>
           <p:nvPr/>
         </p:nvSpPr>
@@ -16520,7 +15272,7 @@
       </p:sp>
       <p:sp>
         <p:nvSpPr>
-          <p:cNvPr id="341" name="" descr="{&quot;isTemplate&quot;:true,&quot;type&quot;:&quot;text&quot;}"/>
+          <p:cNvPr id="313" name="" descr="{&quot;isTemplate&quot;:true,&quot;type&quot;:&quot;text&quot;}"/>
           <p:cNvSpPr txBox="1"/>
           <p:nvPr/>
         </p:nvSpPr>
@@ -16595,7 +15347,7 @@
       </p:sp>
       <p:sp>
         <p:nvSpPr>
-          <p:cNvPr id="342" name="" descr="{&quot;isTemplate&quot;:true,&quot;type&quot;:&quot;text&quot;}"/>
+          <p:cNvPr id="314" name="" descr="{&quot;isTemplate&quot;:true,&quot;type&quot;:&quot;text&quot;}"/>
           <p:cNvSpPr txBox="1"/>
           <p:nvPr/>
         </p:nvSpPr>
@@ -16670,7 +15422,7 @@
       </p:sp>
       <p:sp>
         <p:nvSpPr>
-          <p:cNvPr id="343" name=""/>
+          <p:cNvPr id="315" name=""/>
           <p:cNvSpPr/>
           <p:nvPr/>
         </p:nvSpPr>
@@ -16696,7 +15448,7 @@
       </p:sp>
       <p:sp>
         <p:nvSpPr>
-          <p:cNvPr id="344" name="" descr="{&quot;isTemplate&quot;:true,&quot;type&quot;:&quot;text&quot;}"/>
+          <p:cNvPr id="316" name="" descr="{&quot;isTemplate&quot;:true,&quot;type&quot;:&quot;text&quot;}"/>
           <p:cNvSpPr txBox="1"/>
           <p:nvPr/>
         </p:nvSpPr>
@@ -16731,7 +15483,7 @@
       </p:sp>
       <p:sp>
         <p:nvSpPr>
-          <p:cNvPr id="345" name="" descr="{&quot;isTemplate&quot;:true,&quot;type&quot;:&quot;text&quot;}"/>
+          <p:cNvPr id="317" name="" descr="{&quot;isTemplate&quot;:true,&quot;type&quot;:&quot;text&quot;}"/>
           <p:cNvSpPr txBox="1"/>
           <p:nvPr/>
         </p:nvSpPr>
@@ -16776,7 +15528,7 @@
       </p:sp>
       <p:sp>
         <p:nvSpPr>
-          <p:cNvPr id="346" name="" descr="{&quot;isTemplate&quot;:true,&quot;type&quot;:&quot;text&quot;}"/>
+          <p:cNvPr id="318" name="" descr="{&quot;isTemplate&quot;:true,&quot;type&quot;:&quot;text&quot;}"/>
           <p:cNvSpPr txBox="1"/>
           <p:nvPr/>
         </p:nvSpPr>
@@ -16851,7 +15603,7 @@
       </p:sp>
       <p:sp>
         <p:nvSpPr>
-          <p:cNvPr id="347" name="" descr="{&quot;isTemplate&quot;:true,&quot;type&quot;:&quot;text&quot;}"/>
+          <p:cNvPr id="319" name="" descr="{&quot;isTemplate&quot;:true,&quot;type&quot;:&quot;text&quot;}"/>
           <p:cNvSpPr txBox="1"/>
           <p:nvPr/>
         </p:nvSpPr>
@@ -16916,7 +15668,7 @@
       </p:sp>
       <p:sp>
         <p:nvSpPr>
-          <p:cNvPr id="348" name=""/>
+          <p:cNvPr id="320" name=""/>
           <p:cNvSpPr/>
           <p:nvPr/>
         </p:nvSpPr>
@@ -16942,7 +15694,7 @@
       </p:sp>
       <p:sp>
         <p:nvSpPr>
-          <p:cNvPr id="349" name="" descr="{&quot;isTemplate&quot;:true,&quot;type&quot;:&quot;text&quot;}"/>
+          <p:cNvPr id="321" name="" descr="{&quot;isTemplate&quot;:true,&quot;type&quot;:&quot;text&quot;}"/>
           <p:cNvSpPr txBox="1"/>
           <p:nvPr/>
         </p:nvSpPr>
@@ -16977,7 +15729,7 @@
       </p:sp>
       <p:sp>
         <p:nvSpPr>
-          <p:cNvPr id="350" name="" descr="{&quot;isTemplate&quot;:true,&quot;type&quot;:&quot;text&quot;}"/>
+          <p:cNvPr id="322" name="" descr="{&quot;isTemplate&quot;:true,&quot;type&quot;:&quot;text&quot;}"/>
           <p:cNvSpPr txBox="1"/>
           <p:nvPr/>
         </p:nvSpPr>
@@ -17012,7 +15764,7 @@
       </p:sp>
       <p:sp>
         <p:nvSpPr>
-          <p:cNvPr id="351" name="" descr="{&quot;isTemplate&quot;:true,&quot;type&quot;:&quot;text&quot;}"/>
+          <p:cNvPr id="323" name="" descr="{&quot;isTemplate&quot;:true,&quot;type&quot;:&quot;text&quot;}"/>
           <p:cNvSpPr txBox="1"/>
           <p:nvPr/>
         </p:nvSpPr>
@@ -17067,7 +15819,7 @@
       </p:sp>
       <p:sp>
         <p:nvSpPr>
-          <p:cNvPr id="352" name="" descr="{&quot;isTemplate&quot;:true,&quot;type&quot;:&quot;text&quot;}"/>
+          <p:cNvPr id="324" name="" descr="{&quot;isTemplate&quot;:true,&quot;type&quot;:&quot;text&quot;}"/>
           <p:cNvSpPr txBox="1"/>
           <p:nvPr/>
         </p:nvSpPr>
@@ -17142,7 +15894,7 @@
       </p:sp>
       <p:sp>
         <p:nvSpPr>
-          <p:cNvPr id="353" name=""/>
+          <p:cNvPr id="325" name=""/>
           <p:cNvSpPr/>
           <p:nvPr/>
         </p:nvSpPr>
@@ -17168,7 +15920,7 @@
       </p:sp>
       <p:sp>
         <p:nvSpPr>
-          <p:cNvPr id="354" name="" descr="{&quot;isTemplate&quot;:true,&quot;type&quot;:&quot;text&quot;}"/>
+          <p:cNvPr id="326" name="" descr="{&quot;isTemplate&quot;:true,&quot;type&quot;:&quot;text&quot;}"/>
           <p:cNvSpPr txBox="1"/>
           <p:nvPr/>
         </p:nvSpPr>
@@ -17203,7 +15955,7 @@
       </p:sp>
       <p:sp>
         <p:nvSpPr>
-          <p:cNvPr id="355" name="" descr="{&quot;isTemplate&quot;:true,&quot;type&quot;:&quot;text&quot;}"/>
+          <p:cNvPr id="327" name="" descr="{&quot;isTemplate&quot;:true,&quot;type&quot;:&quot;text&quot;}"/>
           <p:cNvSpPr txBox="1"/>
           <p:nvPr/>
         </p:nvSpPr>
@@ -17238,7 +15990,7 @@
       </p:sp>
       <p:sp>
         <p:nvSpPr>
-          <p:cNvPr id="356" name="" descr="{&quot;isTemplate&quot;:true,&quot;type&quot;:&quot;text&quot;}"/>
+          <p:cNvPr id="328" name="" descr="{&quot;isTemplate&quot;:true,&quot;type&quot;:&quot;text&quot;}"/>
           <p:cNvSpPr txBox="1"/>
           <p:nvPr/>
         </p:nvSpPr>
@@ -17293,7 +16045,7 @@
       </p:sp>
       <p:sp>
         <p:nvSpPr>
-          <p:cNvPr id="357" name="" descr="{&quot;isTemplate&quot;:true,&quot;type&quot;:&quot;text&quot;}"/>
+          <p:cNvPr id="329" name="" descr="{&quot;isTemplate&quot;:true,&quot;type&quot;:&quot;text&quot;}"/>
           <p:cNvSpPr txBox="1"/>
           <p:nvPr/>
         </p:nvSpPr>
@@ -17368,7 +16120,7 @@
       </p:sp>
       <p:sp>
         <p:nvSpPr>
-          <p:cNvPr id="358" name=""/>
+          <p:cNvPr id="330" name=""/>
           <p:cNvSpPr/>
           <p:nvPr/>
         </p:nvSpPr>
@@ -17392,7 +16144,7 @@
       </p:sp>
       <p:sp>
         <p:nvSpPr>
-          <p:cNvPr id="359" name=""/>
+          <p:cNvPr id="331" name=""/>
           <p:cNvSpPr/>
           <p:nvPr/>
         </p:nvSpPr>
@@ -17432,7 +16184,7 @@
       </p:sp>
       <p:sp>
         <p:nvSpPr>
-          <p:cNvPr id="360" name="" descr="{&quot;isTemplate&quot;:true,&quot;type&quot;:&quot;text&quot;}"/>
+          <p:cNvPr id="332" name="" descr="{&quot;isTemplate&quot;:true,&quot;type&quot;:&quot;text&quot;}"/>
           <p:cNvSpPr txBox="1"/>
           <p:nvPr/>
         </p:nvSpPr>
@@ -17507,7 +16259,7 @@
       </p:sp>
       <p:sp>
         <p:nvSpPr>
-          <p:cNvPr id="361" name="" descr="{&quot;isTemplate&quot;:true,&quot;type&quot;:&quot;text&quot;}"/>
+          <p:cNvPr id="333" name="" descr="{&quot;isTemplate&quot;:true,&quot;type&quot;:&quot;text&quot;}"/>
           <p:cNvSpPr txBox="1"/>
           <p:nvPr/>
         </p:nvSpPr>
@@ -17630,7 +16382,7 @@
   <p:cSld>
     <p:spTree>
       <p:nvGrpSpPr>
-        <p:cNvPr id="362" name="" descr="&lt;Slide style={{ width: '1280px', height: '720px', backgroundColor: '#FFFFFF', padding: '0px', flexDirection: 'column' }}&gt;&#10;    &lt;Box style={{ width: '1280px', height: '8px', backgroundColor: '#1E4FA8' }} /&gt;&#10;    &lt;Box style={{ padding: '26px 40px 0px 40px', flexDirection: 'row', justifyContent: 'space-between', alignItems: 'flex-end' }}&gt;&#10;        &lt;Text style={{ fontSize: 34, fontWeight: 'bold', color: '#1E4FA8' }}&gt;算法地图：七步重建链，用在哪、算什么、管什么&lt;/Text&gt;&#10;        &lt;Text style={{ fontSize: 15, color: '#8B97A8' }}&gt;07 / 15&lt;/Text&gt;&#10;    &lt;/Box&gt;&#10;    &lt;Box style={{ padding: '10px 40px 0px 40px' }}&gt;&#10;        &lt;Text style={{ fontSize: 20, color: '#4A5568', lineHeight: 1.4 }}&gt;位姿重建真正发生在 &lt;b&gt;第 5 步&lt;/b&gt;：前三步只为它准备可信观测，第 4 步划定它的变量范围，第 6 步修它累积的漂移，第 7 步才轮到高斯。&lt;/Text&gt;&#10;    &lt;/Box&gt;&#10;&#10;    &lt;Box style={{ padding: '12px 40px 0px 40px', flexDirection: 'row', gap: 10 }}&gt;&#10;        &lt;Box style={{ flex: 1, height: 46, backgroundColor: '#F0F5FC', borderRadius: 4, alignItems: 'center', justifyContent: 'center' }}&gt;&#10;            &lt;Text style={{ fontSize: 19, fontWeight: 'bold', color: '#1E4FA8' }}&gt;① 检索&lt;/Text&gt;&#10;        &lt;/Box&gt;&#10;        &lt;Box style={{ flex: 1, height: 46, backgroundColor: '#F0F5FC', borderRadius: 4, alignItems: 'center', justifyContent: 'center' }}&gt;&#10;            &lt;Text style={{ fontSize: 19, fontWeight: 'bold', color: '#1E4FA8' }}&gt;② 粗筛&lt;/Text&gt;&#10;        &lt;/Box&gt;&#10;        &lt;Box style={{ flex: 1, height: 46, backgroundColor: '#F0F5FC', borderRadius: 4, alignItems: 'center', justifyContent: 'center' }}&gt;&#10;            &lt;Text style={{ fontSize: 19, fontWeight: 'bold', color: '#1E4FA8' }}&gt;③ 建边&lt;/Text&gt;&#10;        &lt;/Box&gt;&#10;        &lt;Box style={{ flex: 1, height: 46, backgroundColor: '#F0F5FC', borderRadius: 4, alignItems: 'center', justifyContent: 'center' }}&gt;&#10;            &lt;Text style={{ fontSize: 19, fontWeight: 'bold', color: '#1E4FA8' }}&gt;④ 选窗&lt;/Text&gt;&#10;        &lt;/Box&gt;&#10;        &lt;Box style={{ flex: 1, height: 46, backgroundColor: '#1E4FA8', borderRadius: 4, alignItems: 'center', justifyContent: 'center' }}&gt;&#10;            &lt;Text style={{ fontSize: 19, fontWeight: 'bold', color: '#FFFFFF' }}&gt;⑤ 局部 BA&lt;/Text&gt;&#10;        &lt;/Box&gt;&#10;        &lt;Box style={{ flex: 1, height: 46, backgroundColor: '#F0F5FC', borderRadius: 4, alignItems: 'center', justifyContent: 'center' }}&gt;&#10;            &lt;Text style={{ fontSize: 19, fontWeight: 'bold', color: '#1E4FA8' }}&gt;⑥ 纠偏&lt;/Text&gt;&#10;        &lt;/Box&gt;&#10;        &lt;Box style={{ flex: 1, height: 46, backgroundColor: '#F0F5FC', borderRadius: 4, alignItems: 'center', justifyContent: 'center' }}&gt;&#10;            &lt;Text style={{ fontSize: 19, fontWeight: 'bold', color: '#1E4FA8' }}&gt;⑦ 落位&lt;/Text&gt;&#10;        &lt;/Box&gt;&#10;    &lt;/Box&gt;&#10;&#10;    &lt;Box style={{ padding: '12px 40px 0px 40px', flexDirection: 'column' }}&gt;&#10;        &lt;Box style={{ flexDirection: 'row', backgroundColor: '#1E4FA8', padding: '10px 14px' }}&gt;&#10;            &lt;Text style={{ width: '44px', fontSize: 18, fontWeight: 'bold', color: '#FFFFFF' }}&gt;步&lt;/Text&gt;&#10;            &lt;Text style={{ width: '258px', fontSize: 18, fontWeight: 'bold', color: '#FFFFFF' }}&gt;算法&lt;/Text&gt;&#10;            &lt;Text style={{ flex: 2.2, fontSize: 18, fontWeight: 'bold', color: '#FFFFFF' }}&gt;核心公式 / 判据&lt;/Text&gt;&#10;            &lt;Text style={{ flex: 2.4, fontSize: 18, fontWeight: 'bold', color: '#FFFFFF' }}&gt;在重建中的作用&lt;/Text&gt;&#10;        &lt;/Box&gt;&#10;        &lt;Box style={{ flexDirection: 'row', alignItems: 'center', minHeight: 58, padding: '10px 14px', borderBottom: '1px solid #D6DCE5' }}&gt;&#10;            &lt;Text style={{ width: '44px', fontSize: 18, fontWeight: 'bold', color: '#1E4FA8' }}&gt;①&lt;/Text&gt;&#10;            &lt;Text style={{ width: '258px', fontSize: 18, color: '#1A2230' }}&gt;MegaLoc 全局描述子&lt;/Text&gt;&#10;            &lt;Text style={{ flex: 2.2, fontSize: 18, color: '#1A2230' }}&gt;s = d_i · d_j，取 top-K = 20&lt;/Text&gt;&#10;            &lt;Text style={{ flex: 2.4, fontSize: 18, color: '#1A2230' }}&gt;从全部历史帧里找&quot;可能同处&quot;的候选，与帧序无关&lt;/Text&gt;&#10;        &lt;/Box&gt;&#10;        &lt;Box style={{ flexDirection: 'row', alignItems: 'center', minHeight: 58, padding: '10px 14px', backgroundColor: '#F7F9FC', borderBottom: '1px solid #D6DCE5' }}&gt;&#10;            &lt;Text style={{ width: '44px', fontSize: 18, fontWeight: 'bold', color: '#1E4FA8' }}&gt;②&lt;/Text&gt;&#10;            &lt;Text style={{ width: '258px', fontSize: 18, color: '#1A2230' }}&gt;XFeat 局部特征穷举&lt;/Text&gt;&#10;            &lt;Text style={{ flex: 2.2, fontSize: 18, color: '#1A2230' }}&gt;K' = top-5 |M_ij|（按内点数）&lt;/Text&gt;&#10;            &lt;Text style={{ flex: 2.4, fontSize: 18, color: '#1A2230' }}&gt;淘汰&quot;外观像、但没对上点&quot;的候选&lt;/Text&gt;&#10;        &lt;/Box&gt;&#10;        &lt;Box style={{ flexDirection: 'row', alignItems: 'center', minHeight: 58, padding: '10px 14px', borderBottom: '1px solid #D6DCE5' }}&gt;&#10;            &lt;Text style={{ width: '44px', fontSize: 18, fontWeight: 'bold', color: '#1E4FA8' }}&gt;③&lt;/Text&gt;&#10;            &lt;Text style={{ width: '258px', fontSize: 18, color: '#1A2230' }}&gt;LightGlue + RANSAC&lt;/Text&gt;&#10;            &lt;Text style={{ flex: 2.2, fontSize: 18, color: '#1A2230' }}&gt;|M_ij| &amp;gt; τ_m = 500 才建边；w_ij = 1/|M_ij|&lt;/Text&gt;&#10;            &lt;Text style={{ flex: 2.4, fontSize: 18, color: '#1A2230' }}&gt;唯一产生共视约束的一步，结果写入协视图&lt;/Text&gt;&#10;        &lt;/Box&gt;&#10;        &lt;Box style={{ flexDirection: 'row', alignItems: 'center', minHeight: 58, padding: '10px 14px', backgroundColor: '#F7F9FC', borderBottom: '1px solid #D6DCE5' }}&gt;&#10;            &lt;Text style={{ width: '44px', fontSize: 18, fontWeight: 'bold', color: '#1E4FA8' }}&gt;④&lt;/Text&gt;&#10;            &lt;Text style={{ width: '258px', fontSize: 18, color: '#1A2230' }}&gt;协视图贪心扩张（式 1）&lt;/Text&gt;&#10;            &lt;Text style={{ flex: 2.2, fontSize: 18, color: '#1A2230' }}&gt;S ← S ∪ argmax Σ_j |M_ij|，至 20 帧&lt;/Text&gt;&#10;            &lt;Text style={{ flex: 2.4, fontSize: 18, color: '#1A2230' }}&gt;划定 BA 的变量范围：最该一起优化的 20 帧&lt;/Text&gt;&#10;        &lt;/Box&gt;&#10;        &lt;Box style={{ flexDirection: 'row', alignItems: 'center', minHeight: 58, padding: '10px 14px', backgroundColor: '#E8F0FB', borderTop: '1px solid #3D7BD9', borderBottom: '1px solid #3D7BD9' }}&gt;&#10;            &lt;Text style={{ width: '44px', fontSize: 18, fontWeight: 'bold', color: '#1E4FA8' }}&gt;⑤&lt;/Text&gt;&#10;            &lt;Text style={{ width: '258px', fontSize: 18, fontWeight: 'bold', color: '#1A2230' }}&gt;GPU 局部 BA（LM + Schur）&lt;/Text&gt;&#10;            &lt;Text style={{ flex: 2.2, fontSize: 18, fontWeight: 'bold', color: '#1A2230' }}&gt;min Σ ρ( ||u_ij − π(T_i, X_j)||² )&lt;/Text&gt;&#10;            &lt;Text style={{ flex: 2.4, fontSize: 18, fontWeight: 'bold', color: '#1A2230' }}&gt;真正解出位姿 T_i 与三维点 X_j——重建本体&lt;/Text&gt;&#10;        &lt;/Box&gt;&#10;        &lt;Box style={{ flexDirection: 'row', alignItems: 'center', minHeight: 58, padding: '10px 14px', borderBottom: '1px solid #D6DCE5' }}&gt;&#10;            &lt;Text style={{ width: '44px', fontSize: 18, fontWeight: 'bold', color: '#1E4FA8' }}&gt;⑥&lt;/Text&gt;&#10;            &lt;Text style={{ width: '258px', fontSize: 18, color: '#1A2230' }}&gt;簇级回环 + 图传播&lt;/Text&gt;&#10;            &lt;Text style={{ flex: 2.2, fontSize: 18, color: '#1A2230' }}&gt;跳数 = 加权图距 &amp;gt; 10 触发；T_Δ = T_a^opt(T_a^init)^-1&lt;/Text&gt;&#10;            &lt;Text style={{ flex: 2.4, fontSize: 18, color: '#1A2230' }}&gt;两簇各扩 N/2 帧焊接，得 Sim(3) 后沿主干摊回&lt;/Text&gt;&#10;        &lt;/Box&gt;&#10;        &lt;Box style={{ flexDirection: 'row', alignItems: 'center', minHeight: 58, padding: '10px 14px', backgroundColor: '#F7F9FC' }}&gt;&#10;            &lt;Text style={{ width: '44px', fontSize: 18, fontWeight: 'bold', color: '#1E4FA8' }}&gt;⑦&lt;/Text&gt;&#10;            &lt;Text style={{ width: '258px', fontSize: 18, color: '#1A2230' }}&gt;分块深度对齐 + 渐进层级&lt;/Text&gt;&#10;            &lt;Text style={{ flex: 2.2, fontSize: 18, color: '#1A2230' }}&gt;size &amp;lt; τ_l 且可并数 &amp;gt; max(10%, 20 万) → kNN 加权合并&lt;/Text&gt;&#10;            &lt;Text style={{ flex: 2.4, fontSize: 18, color: '#1A2230' }}&gt;位姿定后才投放高斯；层级只压显存，不改位姿&lt;/Text&gt;&#10;        &lt;/Box&gt;&#10;    &lt;/Box&gt;&#10;&#10;    &lt;Box style={{ padding: '12px 40px 0px 40px' }}&gt;&#10;        &lt;Text style={{ fontSize: 16, color: '#8B97A8', lineHeight: 1.45 }}&gt;加粗行是位姿求解本身，第 ⑥ 步会对已求出的位姿再整体修正一次。符号：u 像素观测、π 投影、ρ 鲁棒核、T 相机位姿、X 路标点。&lt;/Text&gt;&#10;        &lt;Text style={{ fontSize: 16, color: '#8B97A8', lineHeight: 1.45, marginTop: 3 }}&gt;① 的 VPR 论文写 MixVPR，开源代码因许可原因换为 MegaLoc；τ_m = 500，τ_l = 0.5 px，N = 20，K = 20。&lt;/Text&gt;&#10;    &lt;/Box&gt;&#10;&lt;/Slide&gt;&#10;"/>
+        <p:cNvPr id="334" name="" descr="&lt;Slide style={{ width: '1280px', height: '720px', backgroundColor: '#FFFFFF', padding: '0px', flexDirection: 'column' }}&gt;&#10;    &lt;Box style={{ width: '1280px', height: '8px', backgroundColor: '#1E4FA8' }} /&gt;&#10;    &lt;Box style={{ padding: '26px 40px 0px 40px', flexDirection: 'row', justifyContent: 'space-between', alignItems: 'flex-end' }}&gt;&#10;        &lt;Text style={{ fontSize: 34, fontWeight: 'bold', color: '#1E4FA8' }}&gt;算法地图：七步重建链，用在哪、算什么、管什么&lt;/Text&gt;&#10;        &lt;Text style={{ fontSize: 15, color: '#8B97A8' }}&gt;07 / 15&lt;/Text&gt;&#10;    &lt;/Box&gt;&#10;    &lt;Box style={{ padding: '10px 40px 0px 40px' }}&gt;&#10;        &lt;Text style={{ fontSize: 20, color: '#4A5568', lineHeight: 1.4 }}&gt;位姿重建真正发生在 &lt;b&gt;第 5 步&lt;/b&gt;：前三步只为它准备可信观测，第 4 步划定它的变量范围，第 6 步修它累积的漂移，第 7 步才轮到高斯。&lt;/Text&gt;&#10;    &lt;/Box&gt;&#10;&#10;    &lt;Box style={{ padding: '12px 40px 0px 40px', flexDirection: 'row', gap: 10 }}&gt;&#10;        &lt;Box style={{ flex: 1, height: 46, backgroundColor: '#F0F5FC', borderRadius: 4, alignItems: 'center', justifyContent: 'center' }}&gt;&#10;            &lt;Text style={{ fontSize: 19, fontWeight: 'bold', color: '#1E4FA8' }}&gt;① 检索&lt;/Text&gt;&#10;        &lt;/Box&gt;&#10;        &lt;Box style={{ flex: 1, height: 46, backgroundColor: '#F0F5FC', borderRadius: 4, alignItems: 'center', justifyContent: 'center' }}&gt;&#10;            &lt;Text style={{ fontSize: 19, fontWeight: 'bold', color: '#1E4FA8' }}&gt;② 粗筛&lt;/Text&gt;&#10;        &lt;/Box&gt;&#10;        &lt;Box style={{ flex: 1, height: 46, backgroundColor: '#F0F5FC', borderRadius: 4, alignItems: 'center', justifyContent: 'center' }}&gt;&#10;            &lt;Text style={{ fontSize: 19, fontWeight: 'bold', color: '#1E4FA8' }}&gt;③ 建边&lt;/Text&gt;&#10;        &lt;/Box&gt;&#10;        &lt;Box style={{ flex: 1, height: 46, backgroundColor: '#F0F5FC', borderRadius: 4, alignItems: 'center', justifyContent: 'center' }}&gt;&#10;            &lt;Text style={{ fontSize: 19, fontWeight: 'bold', color: '#1E4FA8' }}&gt;④ 选窗&lt;/Text&gt;&#10;        &lt;/Box&gt;&#10;        &lt;Box style={{ flex: 1, height: 46, backgroundColor: '#1E4FA8', borderRadius: 4, alignItems: 'center', justifyContent: 'center' }}&gt;&#10;            &lt;Text style={{ fontSize: 19, fontWeight: 'bold', color: '#FFFFFF' }}&gt;⑤ 局部 BA&lt;/Text&gt;&#10;        &lt;/Box&gt;&#10;        &lt;Box style={{ flex: 1, height: 46, backgroundColor: '#F0F5FC', borderRadius: 4, alignItems: 'center', justifyContent: 'center' }}&gt;&#10;            &lt;Text style={{ fontSize: 19, fontWeight: 'bold', color: '#1E4FA8' }}&gt;⑥ 纠偏&lt;/Text&gt;&#10;        &lt;/Box&gt;&#10;        &lt;Box style={{ flex: 1, height: 46, backgroundColor: '#F0F5FC', borderRadius: 4, alignItems: 'center', justifyContent: 'center' }}&gt;&#10;            &lt;Text style={{ fontSize: 19, fontWeight: 'bold', color: '#1E4FA8' }}&gt;⑦ 落位&lt;/Text&gt;&#10;        &lt;/Box&gt;&#10;    &lt;/Box&gt;&#10;&#10;    &lt;Box style={{ padding: '12px 40px 0px 40px', flexDirection: 'column' }}&gt;&#10;        &lt;Box style={{ flexDirection: 'row', backgroundColor: '#1E4FA8', padding: '10px 14px' }}&gt;&#10;            &lt;Text style={{ width: '44px', fontSize: 18, fontWeight: 'bold', color: '#FFFFFF' }}&gt;步&lt;/Text&gt;&#10;            &lt;Text style={{ width: '258px', fontSize: 18, fontWeight: 'bold', color: '#FFFFFF' }}&gt;算法&lt;/Text&gt;&#10;            &lt;Text style={{ flex: 2.2, fontSize: 18, fontWeight: 'bold', color: '#FFFFFF' }}&gt;核心公式 / 判据&lt;/Text&gt;&#10;            &lt;Text style={{ flex: 2.4, fontSize: 18, fontWeight: 'bold', color: '#FFFFFF' }}&gt;在重建中的作用&lt;/Text&gt;&#10;        &lt;/Box&gt;&#10;        &lt;Box style={{ flexDirection: 'row', alignItems: 'center', minHeight: 58, padding: '10px 14px', borderBottom: '1px solid #D6DCE5' }}&gt;&#10;            &lt;Text style={{ width: '44px', fontSize: 18, fontWeight: 'bold', color: '#1E4FA8' }}&gt;①&lt;/Text&gt;&#10;            &lt;Text style={{ width: '258px', fontSize: 18, color: '#1A2230' }}&gt;MegaLoc 全局描述子&lt;/Text&gt;&#10;            &lt;Text style={{ flex: 2.2, fontSize: 18, color: '#1A2230' }}&gt;s = d_i · d_j，取 top-K = 20&lt;/Text&gt;&#10;            &lt;Text style={{ flex: 2.4, fontSize: 18, color: '#1A2230' }}&gt;从全部历史帧里找&quot;可能同处&quot;的候选，与帧序无关&lt;/Text&gt;&#10;        &lt;/Box&gt;&#10;        &lt;Box style={{ flexDirection: 'row', alignItems: 'center', minHeight: 58, padding: '10px 14px', backgroundColor: '#F7F9FC', borderBottom: '1px solid #D6DCE5' }}&gt;&#10;            &lt;Text style={{ width: '44px', fontSize: 18, fontWeight: 'bold', color: '#1E4FA8' }}&gt;②&lt;/Text&gt;&#10;            &lt;Text style={{ width: '258px', fontSize: 18, color: '#1A2230' }}&gt;XFeat 局部特征穷举&lt;/Text&gt;&#10;            &lt;Text style={{ flex: 2.2, fontSize: 18, color: '#1A2230' }}&gt;K' = top-5 |M_ij|（按内点数）&lt;/Text&gt;&#10;            &lt;Text style={{ flex: 2.4, fontSize: 18, color: '#1A2230' }}&gt;淘汰&quot;外观像、但没对上点&quot;的候选&lt;/Text&gt;&#10;        &lt;/Box&gt;&#10;        &lt;Box style={{ flexDirection: 'row', alignItems: 'center', minHeight: 58, padding: '10px 14px', borderBottom: '1px solid #D6DCE5' }}&gt;&#10;            &lt;Text style={{ width: '44px', fontSize: 18, fontWeight: 'bold', color: '#1E4FA8' }}&gt;③&lt;/Text&gt;&#10;            &lt;Text style={{ width: '258px', fontSize: 18, color: '#1A2230' }}&gt;LightGlue + RANSAC&lt;/Text&gt;&#10;            &lt;Text style={{ flex: 2.2, fontSize: 18, color: '#1A2230' }}&gt;|M_ij| &amp;gt; τ_m = 500 才建边；w_ij = 1/|M_ij|&lt;/Text&gt;&#10;            &lt;Text style={{ flex: 2.4, fontSize: 18, color: '#1A2230' }}&gt;唯一产生共视约束的一步，结果写入协视图&lt;/Text&gt;&#10;        &lt;/Box&gt;&#10;        &lt;Box style={{ flexDirection: 'row', alignItems: 'center', minHeight: 58, padding: '10px 14px', backgroundColor: '#F7F9FC', borderBottom: '1px solid #D6DCE5' }}&gt;&#10;            &lt;Text style={{ width: '44px', fontSize: 18, fontWeight: 'bold', color: '#1E4FA8' }}&gt;④&lt;/Text&gt;&#10;            &lt;Text style={{ width: '258px', fontSize: 18, color: '#1A2230' }}&gt;协视图贪心扩张（式 1）&lt;/Text&gt;&#10;            &lt;Text style={{ flex: 2.2, fontSize: 18, color: '#1A2230' }}&gt;S ← S ∪ argmax Σ_j |M_ij|，至 20 帧&lt;/Text&gt;&#10;            &lt;Text style={{ flex: 2.4, fontSize: 18, color: '#1A2230' }}&gt;划定 BA 的变量范围：最该一起优化的 20 帧&lt;/Text&gt;&#10;        &lt;/Box&gt;&#10;        &lt;Box style={{ flexDirection: 'row', alignItems: 'center', minHeight: 58, padding: '10px 14px', backgroundColor: '#E8F0FB', borderTop: '1px solid #3D7BD9', borderBottom: '1px solid #3D7BD9' }}&gt;&#10;            &lt;Text style={{ width: '44px', fontSize: 18, fontWeight: 'bold', color: '#1E4FA8' }}&gt;⑤&lt;/Text&gt;&#10;            &lt;Text style={{ width: '258px', fontSize: 18, fontWeight: 'bold', color: '#1A2230' }}&gt;GPU 局部 BA（LM + Schur）&lt;/Text&gt;&#10;            &lt;Text style={{ flex: 2.2, fontSize: 18, fontWeight: 'bold', color: '#1A2230' }}&gt;min Σ ρ( ||u_ij − π(T_i, X_j)||² )&lt;/Text&gt;&#10;            &lt;Text style={{ flex: 2.4, fontSize: 18, fontWeight: 'bold', color: '#1A2230' }}&gt;真正解出位姿 T_i 与三维点 X_j——重建本体&lt;/Text&gt;&#10;        &lt;/Box&gt;&#10;        &lt;Box style={{ flexDirection: 'row', alignItems: 'center', minHeight: 58, padding: '10px 14px', borderBottom: '1px solid #D6DCE5' }}&gt;&#10;            &lt;Text style={{ width: '44px', fontSize: 18, fontWeight: 'bold', color: '#1E4FA8' }}&gt;⑥&lt;/Text&gt;&#10;            &lt;Text style={{ width: '258px', fontSize: 18, color: '#1A2230' }}&gt;簇级回环 + 图传播&lt;/Text&gt;&#10;            &lt;Text style={{ flex: 2.2, fontSize: 18, color: '#1A2230' }}&gt;跳数 = 加权图距 &amp;gt; 10 触发；T_Δ = T_a^opt(T_a^init)^-1&lt;/Text&gt;&#10;            &lt;Text style={{ flex: 2.4, fontSize: 18, color: '#1A2230' }}&gt;两簇各扩 N/2 帧焊接，得 Sim(3) 后沿主干摊回&lt;/Text&gt;&#10;        &lt;/Box&gt;&#10;        &lt;Box style={{ flexDirection: 'row', alignItems: 'center', minHeight: 58, padding: '10px 14px', backgroundColor: '#F7F9FC' }}&gt;&#10;            &lt;Text style={{ width: '44px', fontSize: 18, fontWeight: 'bold', color: '#1E4FA8' }}&gt;⑦&lt;/Text&gt;&#10;            &lt;Text style={{ width: '258px', fontSize: 18, color: '#1A2230' }}&gt;分块深度对齐 + 渐进层级&lt;/Text&gt;&#10;            &lt;Text style={{ flex: 2.2, fontSize: 18, color: '#1A2230' }}&gt;size &amp;lt; τ_l 且可并数 &amp;gt; max(10%, 20 万) → kNN 加权合并&lt;/Text&gt;&#10;            &lt;Text style={{ flex: 2.4, fontSize: 18, color: '#1A2230' }}&gt;位姿定后才投放高斯；层级只压显存，不改位姿&lt;/Text&gt;&#10;        &lt;/Box&gt;&#10;    &lt;/Box&gt;&#10;&#10;    &lt;Box style={{ padding: '12px 40px 0px 40px' }}&gt;&#10;        &lt;Text style={{ fontSize: 16, color: '#8B97A8', lineHeight: 1.45 }}&gt;加粗行是位姿求解本身，第 ⑥ 步会对已求出的位姿再整体修正一次。符号：u 像素观测、π 投影、ρ 鲁棒核、T 相机位姿、X 路标点。&lt;/Text&gt;&#10;        &lt;Text style={{ fontSize: 16, color: '#8B97A8', lineHeight: 1.45, marginTop: 3 }}&gt;① 的 VPR 论文写 MixVPR，开源代码因许可原因换为 MegaLoc；τ_m = 500，τ_l = 0.5 px，N = 20，K = 20。&lt;/Text&gt;&#10;    &lt;/Box&gt;&#10;&lt;/Slide&gt;&#10;"/>
         <p:cNvGrpSpPr/>
         <p:nvPr/>
       </p:nvGrpSpPr>
@@ -17644,7 +16396,7 @@
       </p:grpSpPr>
       <p:sp>
         <p:nvSpPr>
-          <p:cNvPr id="363" name=""/>
+          <p:cNvPr id="335" name=""/>
           <p:cNvSpPr/>
           <p:nvPr/>
         </p:nvSpPr>
@@ -17668,7 +16420,7 @@
       </p:sp>
       <p:sp>
         <p:nvSpPr>
-          <p:cNvPr id="364" name=""/>
+          <p:cNvPr id="336" name=""/>
           <p:cNvSpPr/>
           <p:nvPr/>
         </p:nvSpPr>
@@ -17692,7 +16444,7 @@
       </p:sp>
       <p:sp>
         <p:nvSpPr>
-          <p:cNvPr id="365" name="" descr="{&quot;isTemplate&quot;:true,&quot;type&quot;:&quot;text&quot;}"/>
+          <p:cNvPr id="337" name="" descr="{&quot;isTemplate&quot;:true,&quot;type&quot;:&quot;text&quot;}"/>
           <p:cNvSpPr txBox="1"/>
           <p:nvPr/>
         </p:nvSpPr>
@@ -17727,7 +16479,7 @@
       </p:sp>
       <p:sp>
         <p:nvSpPr>
-          <p:cNvPr id="366" name="" descr="{&quot;isTemplate&quot;:true,&quot;type&quot;:&quot;text&quot;}"/>
+          <p:cNvPr id="338" name="" descr="{&quot;isTemplate&quot;:true,&quot;type&quot;:&quot;text&quot;}"/>
           <p:cNvSpPr txBox="1"/>
           <p:nvPr/>
         </p:nvSpPr>
@@ -17762,7 +16514,7 @@
       </p:sp>
       <p:sp>
         <p:nvSpPr>
-          <p:cNvPr id="367" name="" descr="{&quot;isTemplate&quot;:true,&quot;type&quot;:&quot;text&quot;}"/>
+          <p:cNvPr id="339" name="" descr="{&quot;isTemplate&quot;:true,&quot;type&quot;:&quot;text&quot;}"/>
           <p:cNvSpPr txBox="1"/>
           <p:nvPr/>
         </p:nvSpPr>
@@ -17907,7 +16659,7 @@
       </p:sp>
       <p:sp>
         <p:nvSpPr>
-          <p:cNvPr id="368" name=""/>
+          <p:cNvPr id="340" name=""/>
           <p:cNvSpPr/>
           <p:nvPr/>
         </p:nvSpPr>
@@ -17933,7 +16685,7 @@
       </p:sp>
       <p:sp>
         <p:nvSpPr>
-          <p:cNvPr id="369" name="" descr="{&quot;isTemplate&quot;:true,&quot;type&quot;:&quot;text&quot;}"/>
+          <p:cNvPr id="341" name="" descr="{&quot;isTemplate&quot;:true,&quot;type&quot;:&quot;text&quot;}"/>
           <p:cNvSpPr txBox="1"/>
           <p:nvPr/>
         </p:nvSpPr>
@@ -17978,7 +16730,7 @@
       </p:sp>
       <p:sp>
         <p:nvSpPr>
-          <p:cNvPr id="370" name=""/>
+          <p:cNvPr id="342" name=""/>
           <p:cNvSpPr/>
           <p:nvPr/>
         </p:nvSpPr>
@@ -18004,7 +16756,7 @@
       </p:sp>
       <p:sp>
         <p:nvSpPr>
-          <p:cNvPr id="371" name="" descr="{&quot;isTemplate&quot;:true,&quot;type&quot;:&quot;text&quot;}"/>
+          <p:cNvPr id="343" name="" descr="{&quot;isTemplate&quot;:true,&quot;type&quot;:&quot;text&quot;}"/>
           <p:cNvSpPr txBox="1"/>
           <p:nvPr/>
         </p:nvSpPr>
@@ -18049,7 +16801,7 @@
       </p:sp>
       <p:sp>
         <p:nvSpPr>
-          <p:cNvPr id="372" name=""/>
+          <p:cNvPr id="344" name=""/>
           <p:cNvSpPr/>
           <p:nvPr/>
         </p:nvSpPr>
@@ -18075,7 +16827,7 @@
       </p:sp>
       <p:sp>
         <p:nvSpPr>
-          <p:cNvPr id="373" name="" descr="{&quot;isTemplate&quot;:true,&quot;type&quot;:&quot;text&quot;}"/>
+          <p:cNvPr id="345" name="" descr="{&quot;isTemplate&quot;:true,&quot;type&quot;:&quot;text&quot;}"/>
           <p:cNvSpPr txBox="1"/>
           <p:nvPr/>
         </p:nvSpPr>
@@ -18120,7 +16872,7 @@
       </p:sp>
       <p:sp>
         <p:nvSpPr>
-          <p:cNvPr id="374" name=""/>
+          <p:cNvPr id="346" name=""/>
           <p:cNvSpPr/>
           <p:nvPr/>
         </p:nvSpPr>
@@ -18146,7 +16898,7 @@
       </p:sp>
       <p:sp>
         <p:nvSpPr>
-          <p:cNvPr id="375" name="" descr="{&quot;isTemplate&quot;:true,&quot;type&quot;:&quot;text&quot;}"/>
+          <p:cNvPr id="347" name="" descr="{&quot;isTemplate&quot;:true,&quot;type&quot;:&quot;text&quot;}"/>
           <p:cNvSpPr txBox="1"/>
           <p:nvPr/>
         </p:nvSpPr>
@@ -18191,7 +16943,7 @@
       </p:sp>
       <p:sp>
         <p:nvSpPr>
-          <p:cNvPr id="376" name=""/>
+          <p:cNvPr id="348" name=""/>
           <p:cNvSpPr/>
           <p:nvPr/>
         </p:nvSpPr>
@@ -18217,7 +16969,7 @@
       </p:sp>
       <p:sp>
         <p:nvSpPr>
-          <p:cNvPr id="377" name="" descr="{&quot;isTemplate&quot;:true,&quot;type&quot;:&quot;text&quot;}"/>
+          <p:cNvPr id="349" name="" descr="{&quot;isTemplate&quot;:true,&quot;type&quot;:&quot;text&quot;}"/>
           <p:cNvSpPr txBox="1"/>
           <p:nvPr/>
         </p:nvSpPr>
@@ -18272,7 +17024,7 @@
       </p:sp>
       <p:sp>
         <p:nvSpPr>
-          <p:cNvPr id="378" name=""/>
+          <p:cNvPr id="350" name=""/>
           <p:cNvSpPr/>
           <p:nvPr/>
         </p:nvSpPr>
@@ -18298,7 +17050,7 @@
       </p:sp>
       <p:sp>
         <p:nvSpPr>
-          <p:cNvPr id="379" name="" descr="{&quot;isTemplate&quot;:true,&quot;type&quot;:&quot;text&quot;}"/>
+          <p:cNvPr id="351" name="" descr="{&quot;isTemplate&quot;:true,&quot;type&quot;:&quot;text&quot;}"/>
           <p:cNvSpPr txBox="1"/>
           <p:nvPr/>
         </p:nvSpPr>
@@ -18343,7 +17095,7 @@
       </p:sp>
       <p:sp>
         <p:nvSpPr>
-          <p:cNvPr id="380" name=""/>
+          <p:cNvPr id="352" name=""/>
           <p:cNvSpPr/>
           <p:nvPr/>
         </p:nvSpPr>
@@ -18369,7 +17121,7 @@
       </p:sp>
       <p:sp>
         <p:nvSpPr>
-          <p:cNvPr id="381" name="" descr="{&quot;isTemplate&quot;:true,&quot;type&quot;:&quot;text&quot;}"/>
+          <p:cNvPr id="353" name="" descr="{&quot;isTemplate&quot;:true,&quot;type&quot;:&quot;text&quot;}"/>
           <p:cNvSpPr txBox="1"/>
           <p:nvPr/>
         </p:nvSpPr>
@@ -18414,7 +17166,7 @@
       </p:sp>
       <p:sp>
         <p:nvSpPr>
-          <p:cNvPr id="382" name=""/>
+          <p:cNvPr id="354" name=""/>
           <p:cNvSpPr/>
           <p:nvPr/>
         </p:nvSpPr>
@@ -18438,7 +17190,7 @@
       </p:sp>
       <p:sp>
         <p:nvSpPr>
-          <p:cNvPr id="383" name="" descr="{&quot;isTemplate&quot;:true,&quot;type&quot;:&quot;text&quot;}"/>
+          <p:cNvPr id="355" name="" descr="{&quot;isTemplate&quot;:true,&quot;type&quot;:&quot;text&quot;}"/>
           <p:cNvSpPr txBox="1"/>
           <p:nvPr/>
         </p:nvSpPr>
@@ -18473,7 +17225,7 @@
       </p:sp>
       <p:sp>
         <p:nvSpPr>
-          <p:cNvPr id="384" name="" descr="{&quot;isTemplate&quot;:true,&quot;type&quot;:&quot;text&quot;}"/>
+          <p:cNvPr id="356" name="" descr="{&quot;isTemplate&quot;:true,&quot;type&quot;:&quot;text&quot;}"/>
           <p:cNvSpPr txBox="1"/>
           <p:nvPr/>
         </p:nvSpPr>
@@ -18508,7 +17260,7 @@
       </p:sp>
       <p:sp>
         <p:nvSpPr>
-          <p:cNvPr id="385" name="" descr="{&quot;isTemplate&quot;:true,&quot;type&quot;:&quot;text&quot;}"/>
+          <p:cNvPr id="357" name="" descr="{&quot;isTemplate&quot;:true,&quot;type&quot;:&quot;text&quot;}"/>
           <p:cNvSpPr txBox="1"/>
           <p:nvPr/>
         </p:nvSpPr>
@@ -18563,7 +17315,7 @@
       </p:sp>
       <p:sp>
         <p:nvSpPr>
-          <p:cNvPr id="386" name="" descr="{&quot;isTemplate&quot;:true,&quot;type&quot;:&quot;text&quot;}"/>
+          <p:cNvPr id="358" name="" descr="{&quot;isTemplate&quot;:true,&quot;type&quot;:&quot;text&quot;}"/>
           <p:cNvSpPr txBox="1"/>
           <p:nvPr/>
         </p:nvSpPr>
@@ -18598,7 +17350,7 @@
       </p:sp>
       <p:sp>
         <p:nvSpPr>
-          <p:cNvPr id="387" name=""/>
+          <p:cNvPr id="359" name=""/>
           <p:cNvSpPr/>
           <p:nvPr/>
         </p:nvSpPr>
@@ -18638,7 +17390,7 @@
       </p:sp>
       <p:sp>
         <p:nvSpPr>
-          <p:cNvPr id="388" name="" descr="{&quot;isTemplate&quot;:true,&quot;type&quot;:&quot;text&quot;}"/>
+          <p:cNvPr id="360" name="" descr="{&quot;isTemplate&quot;:true,&quot;type&quot;:&quot;text&quot;}"/>
           <p:cNvSpPr txBox="1"/>
           <p:nvPr/>
         </p:nvSpPr>
@@ -18673,7 +17425,7 @@
       </p:sp>
       <p:sp>
         <p:nvSpPr>
-          <p:cNvPr id="389" name="" descr="{&quot;isTemplate&quot;:true,&quot;type&quot;:&quot;text&quot;}"/>
+          <p:cNvPr id="361" name="" descr="{&quot;isTemplate&quot;:true,&quot;type&quot;:&quot;text&quot;}"/>
           <p:cNvSpPr txBox="1"/>
           <p:nvPr/>
         </p:nvSpPr>
@@ -18718,7 +17470,7 @@
       </p:sp>
       <p:sp>
         <p:nvSpPr>
-          <p:cNvPr id="390" name="" descr="{&quot;isTemplate&quot;:true,&quot;type&quot;:&quot;text&quot;}"/>
+          <p:cNvPr id="362" name="" descr="{&quot;isTemplate&quot;:true,&quot;type&quot;:&quot;text&quot;}"/>
           <p:cNvSpPr txBox="1"/>
           <p:nvPr/>
         </p:nvSpPr>
@@ -18773,7 +17525,7 @@
       </p:sp>
       <p:sp>
         <p:nvSpPr>
-          <p:cNvPr id="391" name="" descr="{&quot;isTemplate&quot;:true,&quot;type&quot;:&quot;text&quot;}"/>
+          <p:cNvPr id="363" name="" descr="{&quot;isTemplate&quot;:true,&quot;type&quot;:&quot;text&quot;}"/>
           <p:cNvSpPr txBox="1"/>
           <p:nvPr/>
         </p:nvSpPr>
@@ -18848,7 +17600,7 @@
       </p:sp>
       <p:sp>
         <p:nvSpPr>
-          <p:cNvPr id="392" name=""/>
+          <p:cNvPr id="364" name=""/>
           <p:cNvSpPr/>
           <p:nvPr/>
         </p:nvSpPr>
@@ -18872,7 +17624,7 @@
       </p:sp>
       <p:sp>
         <p:nvSpPr>
-          <p:cNvPr id="393" name=""/>
+          <p:cNvPr id="365" name=""/>
           <p:cNvSpPr/>
           <p:nvPr/>
         </p:nvSpPr>
@@ -18912,7 +17664,7 @@
       </p:sp>
       <p:sp>
         <p:nvSpPr>
-          <p:cNvPr id="394" name="" descr="{&quot;isTemplate&quot;:true,&quot;type&quot;:&quot;text&quot;}"/>
+          <p:cNvPr id="366" name="" descr="{&quot;isTemplate&quot;:true,&quot;type&quot;:&quot;text&quot;}"/>
           <p:cNvSpPr txBox="1"/>
           <p:nvPr/>
         </p:nvSpPr>
@@ -18947,7 +17699,7 @@
       </p:sp>
       <p:sp>
         <p:nvSpPr>
-          <p:cNvPr id="395" name="" descr="{&quot;isTemplate&quot;:true,&quot;type&quot;:&quot;text&quot;}"/>
+          <p:cNvPr id="367" name="" descr="{&quot;isTemplate&quot;:true,&quot;type&quot;:&quot;text&quot;}"/>
           <p:cNvSpPr txBox="1"/>
           <p:nvPr/>
         </p:nvSpPr>
@@ -18992,7 +17744,7 @@
       </p:sp>
       <p:sp>
         <p:nvSpPr>
-          <p:cNvPr id="396" name="" descr="{&quot;isTemplate&quot;:true,&quot;type&quot;:&quot;text&quot;}"/>
+          <p:cNvPr id="368" name="" descr="{&quot;isTemplate&quot;:true,&quot;type&quot;:&quot;text&quot;}"/>
           <p:cNvSpPr txBox="1"/>
           <p:nvPr/>
         </p:nvSpPr>
@@ -19037,7 +17789,7 @@
       </p:sp>
       <p:sp>
         <p:nvSpPr>
-          <p:cNvPr id="397" name="" descr="{&quot;isTemplate&quot;:true,&quot;type&quot;:&quot;text&quot;}"/>
+          <p:cNvPr id="369" name="" descr="{&quot;isTemplate&quot;:true,&quot;type&quot;:&quot;text&quot;}"/>
           <p:cNvSpPr txBox="1"/>
           <p:nvPr/>
         </p:nvSpPr>
@@ -19112,7 +17864,7 @@
       </p:sp>
       <p:sp>
         <p:nvSpPr>
-          <p:cNvPr id="398" name=""/>
+          <p:cNvPr id="370" name=""/>
           <p:cNvSpPr/>
           <p:nvPr/>
         </p:nvSpPr>
@@ -19152,7 +17904,7 @@
       </p:sp>
       <p:sp>
         <p:nvSpPr>
-          <p:cNvPr id="399" name="" descr="{&quot;isTemplate&quot;:true,&quot;type&quot;:&quot;text&quot;}"/>
+          <p:cNvPr id="371" name="" descr="{&quot;isTemplate&quot;:true,&quot;type&quot;:&quot;text&quot;}"/>
           <p:cNvSpPr txBox="1"/>
           <p:nvPr/>
         </p:nvSpPr>
@@ -19187,7 +17939,7 @@
       </p:sp>
       <p:sp>
         <p:nvSpPr>
-          <p:cNvPr id="400" name="" descr="{&quot;isTemplate&quot;:true,&quot;type&quot;:&quot;text&quot;}"/>
+          <p:cNvPr id="372" name="" descr="{&quot;isTemplate&quot;:true,&quot;type&quot;:&quot;text&quot;}"/>
           <p:cNvSpPr txBox="1"/>
           <p:nvPr/>
         </p:nvSpPr>
@@ -19222,7 +17974,7 @@
       </p:sp>
       <p:sp>
         <p:nvSpPr>
-          <p:cNvPr id="401" name="" descr="{&quot;isTemplate&quot;:true,&quot;type&quot;:&quot;text&quot;}"/>
+          <p:cNvPr id="373" name="" descr="{&quot;isTemplate&quot;:true,&quot;type&quot;:&quot;text&quot;}"/>
           <p:cNvSpPr txBox="1"/>
           <p:nvPr/>
         </p:nvSpPr>
@@ -19277,7 +18029,7 @@
       </p:sp>
       <p:sp>
         <p:nvSpPr>
-          <p:cNvPr id="402" name="" descr="{&quot;isTemplate&quot;:true,&quot;type&quot;:&quot;text&quot;}"/>
+          <p:cNvPr id="374" name="" descr="{&quot;isTemplate&quot;:true,&quot;type&quot;:&quot;text&quot;}"/>
           <p:cNvSpPr txBox="1"/>
           <p:nvPr/>
         </p:nvSpPr>
@@ -19312,7 +18064,7 @@
       </p:sp>
       <p:sp>
         <p:nvSpPr>
-          <p:cNvPr id="403" name=""/>
+          <p:cNvPr id="375" name=""/>
           <p:cNvSpPr/>
           <p:nvPr/>
         </p:nvSpPr>
@@ -19336,7 +18088,7 @@
       </p:sp>
       <p:sp>
         <p:nvSpPr>
-          <p:cNvPr id="404" name=""/>
+          <p:cNvPr id="376" name=""/>
           <p:cNvSpPr/>
           <p:nvPr/>
         </p:nvSpPr>
@@ -19376,7 +18128,7 @@
       </p:sp>
       <p:sp>
         <p:nvSpPr>
-          <p:cNvPr id="405" name="" descr="{&quot;isTemplate&quot;:true,&quot;type&quot;:&quot;text&quot;}"/>
+          <p:cNvPr id="377" name="" descr="{&quot;isTemplate&quot;:true,&quot;type&quot;:&quot;text&quot;}"/>
           <p:cNvSpPr txBox="1"/>
           <p:nvPr/>
         </p:nvSpPr>
@@ -19411,7 +18163,7 @@
       </p:sp>
       <p:sp>
         <p:nvSpPr>
-          <p:cNvPr id="406" name="" descr="{&quot;isTemplate&quot;:true,&quot;type&quot;:&quot;text&quot;}"/>
+          <p:cNvPr id="378" name="" descr="{&quot;isTemplate&quot;:true,&quot;type&quot;:&quot;text&quot;}"/>
           <p:cNvSpPr txBox="1"/>
           <p:nvPr/>
         </p:nvSpPr>
@@ -19466,7 +18218,7 @@
       </p:sp>
       <p:sp>
         <p:nvSpPr>
-          <p:cNvPr id="407" name="" descr="{&quot;isTemplate&quot;:true,&quot;type&quot;:&quot;text&quot;}"/>
+          <p:cNvPr id="379" name="" descr="{&quot;isTemplate&quot;:true,&quot;type&quot;:&quot;text&quot;}"/>
           <p:cNvSpPr txBox="1"/>
           <p:nvPr/>
         </p:nvSpPr>
@@ -19531,7 +18283,7 @@
       </p:sp>
       <p:sp>
         <p:nvSpPr>
-          <p:cNvPr id="408" name="" descr="{&quot;isTemplate&quot;:true,&quot;type&quot;:&quot;text&quot;}"/>
+          <p:cNvPr id="380" name="" descr="{&quot;isTemplate&quot;:true,&quot;type&quot;:&quot;text&quot;}"/>
           <p:cNvSpPr txBox="1"/>
           <p:nvPr/>
         </p:nvSpPr>
@@ -19606,7 +18358,7 @@
       </p:sp>
       <p:sp>
         <p:nvSpPr>
-          <p:cNvPr id="409" name=""/>
+          <p:cNvPr id="381" name=""/>
           <p:cNvSpPr/>
           <p:nvPr/>
         </p:nvSpPr>
@@ -19630,7 +18382,7 @@
       </p:sp>
       <p:sp>
         <p:nvSpPr>
-          <p:cNvPr id="410" name=""/>
+          <p:cNvPr id="382" name=""/>
           <p:cNvSpPr/>
           <p:nvPr/>
         </p:nvSpPr>
@@ -19670,7 +18422,7 @@
       </p:sp>
       <p:sp>
         <p:nvSpPr>
-          <p:cNvPr id="411" name=""/>
+          <p:cNvPr id="383" name=""/>
           <p:cNvSpPr/>
           <p:nvPr/>
         </p:nvSpPr>
@@ -19710,7 +18462,7 @@
       </p:sp>
       <p:sp>
         <p:nvSpPr>
-          <p:cNvPr id="412" name="" descr="{&quot;isTemplate&quot;:true,&quot;type&quot;:&quot;text&quot;}"/>
+          <p:cNvPr id="384" name="" descr="{&quot;isTemplate&quot;:true,&quot;type&quot;:&quot;text&quot;}"/>
           <p:cNvSpPr txBox="1"/>
           <p:nvPr/>
         </p:nvSpPr>
@@ -19745,7 +18497,7 @@
       </p:sp>
       <p:sp>
         <p:nvSpPr>
-          <p:cNvPr id="413" name="" descr="{&quot;isTemplate&quot;:true,&quot;type&quot;:&quot;text&quot;}"/>
+          <p:cNvPr id="385" name="" descr="{&quot;isTemplate&quot;:true,&quot;type&quot;:&quot;text&quot;}"/>
           <p:cNvSpPr txBox="1"/>
           <p:nvPr/>
         </p:nvSpPr>
@@ -19830,7 +18582,7 @@
       </p:sp>
       <p:sp>
         <p:nvSpPr>
-          <p:cNvPr id="414" name="" descr="{&quot;isTemplate&quot;:true,&quot;type&quot;:&quot;text&quot;}"/>
+          <p:cNvPr id="386" name="" descr="{&quot;isTemplate&quot;:true,&quot;type&quot;:&quot;text&quot;}"/>
           <p:cNvSpPr txBox="1"/>
           <p:nvPr/>
         </p:nvSpPr>
@@ -19865,7 +18617,7 @@
       </p:sp>
       <p:sp>
         <p:nvSpPr>
-          <p:cNvPr id="415" name="" descr="{&quot;isTemplate&quot;:true,&quot;type&quot;:&quot;text&quot;}"/>
+          <p:cNvPr id="387" name="" descr="{&quot;isTemplate&quot;:true,&quot;type&quot;:&quot;text&quot;}"/>
           <p:cNvSpPr txBox="1"/>
           <p:nvPr/>
         </p:nvSpPr>
@@ -19940,7 +18692,7 @@
       </p:sp>
       <p:sp>
         <p:nvSpPr>
-          <p:cNvPr id="416" name=""/>
+          <p:cNvPr id="388" name=""/>
           <p:cNvSpPr/>
           <p:nvPr/>
         </p:nvSpPr>
@@ -19980,7 +18732,7 @@
       </p:sp>
       <p:sp>
         <p:nvSpPr>
-          <p:cNvPr id="417" name="" descr="{&quot;isTemplate&quot;:true,&quot;type&quot;:&quot;text&quot;}"/>
+          <p:cNvPr id="389" name="" descr="{&quot;isTemplate&quot;:true,&quot;type&quot;:&quot;text&quot;}"/>
           <p:cNvSpPr txBox="1"/>
           <p:nvPr/>
         </p:nvSpPr>
@@ -20015,7 +18767,7 @@
       </p:sp>
       <p:sp>
         <p:nvSpPr>
-          <p:cNvPr id="418" name="" descr="{&quot;isTemplate&quot;:true,&quot;type&quot;:&quot;text&quot;}"/>
+          <p:cNvPr id="390" name="" descr="{&quot;isTemplate&quot;:true,&quot;type&quot;:&quot;text&quot;}"/>
           <p:cNvSpPr txBox="1"/>
           <p:nvPr/>
         </p:nvSpPr>
@@ -20070,7 +18822,7 @@
       </p:sp>
       <p:sp>
         <p:nvSpPr>
-          <p:cNvPr id="419" name="" descr="{&quot;isTemplate&quot;:true,&quot;type&quot;:&quot;text&quot;}"/>
+          <p:cNvPr id="391" name="" descr="{&quot;isTemplate&quot;:true,&quot;type&quot;:&quot;text&quot;}"/>
           <p:cNvSpPr txBox="1"/>
           <p:nvPr/>
         </p:nvSpPr>
@@ -20157,7 +18909,7 @@
       </p:sp>
       <p:sp>
         <p:nvSpPr>
-          <p:cNvPr id="420" name="" descr="{&quot;isTemplate&quot;:true,&quot;type&quot;:&quot;text&quot;}"/>
+          <p:cNvPr id="392" name="" descr="{&quot;isTemplate&quot;:true,&quot;type&quot;:&quot;text&quot;}"/>
           <p:cNvSpPr txBox="1"/>
           <p:nvPr/>
         </p:nvSpPr>
@@ -20232,7 +18984,7 @@
       </p:sp>
       <p:sp>
         <p:nvSpPr>
-          <p:cNvPr id="421" name=""/>
+          <p:cNvPr id="393" name=""/>
           <p:cNvSpPr/>
           <p:nvPr/>
         </p:nvSpPr>
@@ -20256,7 +19008,7 @@
       </p:sp>
       <p:sp>
         <p:nvSpPr>
-          <p:cNvPr id="422" name="" descr="{&quot;isTemplate&quot;:true,&quot;type&quot;:&quot;text&quot;}"/>
+          <p:cNvPr id="394" name="" descr="{&quot;isTemplate&quot;:true,&quot;type&quot;:&quot;text&quot;}"/>
           <p:cNvSpPr txBox="1"/>
           <p:nvPr/>
         </p:nvSpPr>
@@ -20291,7 +19043,7 @@
       </p:sp>
       <p:sp>
         <p:nvSpPr>
-          <p:cNvPr id="423" name="" descr="{&quot;isTemplate&quot;:true,&quot;type&quot;:&quot;text&quot;}"/>
+          <p:cNvPr id="395" name="" descr="{&quot;isTemplate&quot;:true,&quot;type&quot;:&quot;text&quot;}"/>
           <p:cNvSpPr txBox="1"/>
           <p:nvPr/>
         </p:nvSpPr>
@@ -20346,7 +19098,7 @@
       </p:sp>
       <p:sp>
         <p:nvSpPr>
-          <p:cNvPr id="424" name="" descr="{&quot;isTemplate&quot;:true,&quot;type&quot;:&quot;text&quot;}"/>
+          <p:cNvPr id="396" name="" descr="{&quot;isTemplate&quot;:true,&quot;type&quot;:&quot;text&quot;}"/>
           <p:cNvSpPr txBox="1"/>
           <p:nvPr/>
         </p:nvSpPr>
@@ -20433,7 +19185,7 @@
       </p:sp>
       <p:sp>
         <p:nvSpPr>
-          <p:cNvPr id="425" name="" descr="{&quot;isTemplate&quot;:true,&quot;type&quot;:&quot;text&quot;}"/>
+          <p:cNvPr id="397" name="" descr="{&quot;isTemplate&quot;:true,&quot;type&quot;:&quot;text&quot;}"/>
           <p:cNvSpPr txBox="1"/>
           <p:nvPr/>
         </p:nvSpPr>
@@ -20468,7 +19220,7 @@
       </p:sp>
       <p:sp>
         <p:nvSpPr>
-          <p:cNvPr id="426" name="" descr="{&quot;isTemplate&quot;:true,&quot;type&quot;:&quot;text&quot;}"/>
+          <p:cNvPr id="398" name="" descr="{&quot;isTemplate&quot;:true,&quot;type&quot;:&quot;text&quot;}"/>
           <p:cNvSpPr txBox="1"/>
           <p:nvPr/>
         </p:nvSpPr>
@@ -20623,7 +19375,7 @@
       </p:sp>
       <p:sp>
         <p:nvSpPr>
-          <p:cNvPr id="427" name="" descr="{&quot;isTemplate&quot;:true,&quot;type&quot;:&quot;text&quot;}"/>
+          <p:cNvPr id="399" name="" descr="{&quot;isTemplate&quot;:true,&quot;type&quot;:&quot;text&quot;}"/>
           <p:cNvSpPr txBox="1"/>
           <p:nvPr/>
         </p:nvSpPr>
@@ -20816,7 +19568,7 @@
   <p:cSld>
     <p:spTree>
       <p:nvGrpSpPr>
-        <p:cNvPr id="428" name="" descr="&lt;Slide style={{ width: '1280px', height: '720px', backgroundColor: '#FFFFFF', padding: '0px', flexDirection: 'column' }}&gt;&#10;    &lt;Box style={{ width: '1280px', height: '8px', backgroundColor: '#1E4FA8' }} /&gt;&#10;    &lt;Box style={{ padding: '30px 40px 0px 40px', flexDirection: 'row', justifyContent: 'space-between', alignItems: 'flex-end' }}&gt;&#10;        &lt;Text style={{ fontSize: 34, fontWeight: 'bold', color: '#1E4FA8' }}&gt;关键方式①：两级匹配 + 加权协视图&lt;/Text&gt;&#10;        &lt;Text style={{ fontSize: 15, color: '#8B97A8' }}&gt;08 / 15&lt;/Text&gt;&#10;    &lt;/Box&gt;&#10;    &lt;Box style={{ padding: '18px 40px 0px 40px', flexDirection: 'column', gap: 0 }}&gt;&#10;        &lt;Box style={{ flexDirection: 'row', backgroundColor: '#1E4FA8', padding: '12px 16px' }}&gt;&#10;            &lt;Text style={{ width: '90px', fontSize: 20, fontWeight: 'bold', color: '#FFFFFF' }}&gt;层级&lt;/Text&gt;&#10;            &lt;Text style={{ flex: 2, fontSize: 20, fontWeight: 'bold', color: '#FFFFFF' }}&gt;方法&lt;/Text&gt;&#10;            &lt;Text style={{ flex: 3, fontSize: 20, fontWeight: 'bold', color: '#FFFFFF' }}&gt;作用&lt;/Text&gt;&#10;            &lt;Text style={{ flex: 1.6, fontSize: 20, fontWeight: 'bold', color: '#FFFFFF' }}&gt;代价&lt;/Text&gt;&#10;        &lt;/Box&gt;&#10;        &lt;Box style={{ flexDirection: 'row', padding: '13px 16px', borderBottom: '1px solid #D6DCE5' }}&gt;&#10;            &lt;Text style={{ width: '90px', fontSize: 20, fontWeight: 'bold', color: '#1E4FA8' }}&gt;1&lt;/Text&gt;&#10;            &lt;Text style={{ flex: 2, fontSize: 20, color: '#1A2230' }}&gt;视觉位置识别（全局描述子）&lt;/Text&gt;&#10;            &lt;Text style={{ flex: 3, fontSize: 20, color: '#1A2230' }}&gt;余弦相似度排序，取 top-20 候选&lt;/Text&gt;&#10;            &lt;Text style={{ flex: 1.6, fontSize: 20, color: '#1A2230' }}&gt;≈1 ms / 1000 对&lt;/Text&gt;&#10;        &lt;/Box&gt;&#10;        &lt;Box style={{ flexDirection: 'row', padding: '13px 16px', backgroundColor: '#F7F9FC', borderBottom: '1px solid #D6DCE5' }}&gt;&#10;            &lt;Text style={{ width: '90px', fontSize: 20, fontWeight: 'bold', color: '#1E4FA8' }}&gt;2&lt;/Text&gt;&#10;            &lt;Text style={{ flex: 2, fontSize: 20, color: '#1A2230' }}&gt;XFeat 轻量局部特征&lt;/Text&gt;&#10;            &lt;Text style={{ flex: 3, fontSize: 20, color: '#1A2230' }}&gt;按内点数从 20 中保留 5 个&lt;/Text&gt;&#10;            &lt;Text style={{ flex: 1.6, fontSize: 20, color: '#1A2230' }}&gt;≈0.5 ms / 对&lt;/Text&gt;&#10;        &lt;/Box&gt;&#10;        &lt;Box style={{ flexDirection: 'row', padding: '13px 16px', borderBottom: '1px solid #D6DCE5' }}&gt;&#10;            &lt;Text style={{ width: '90px', fontSize: 20, fontWeight: 'bold', color: '#1E4FA8' }}&gt;3&lt;/Text&gt;&#10;            &lt;Text style={{ flex: 2, fontSize: 20, color: '#1A2230' }}&gt;LightGlue + RANSAC&lt;/Text&gt;&#10;            &lt;Text style={{ flex: 3, fontSize: 20, color: '#1A2230' }}&gt;精确验证，内点数 &amp;gt; 500 才接受&lt;/Text&gt;&#10;            &lt;Text style={{ flex: 1.6, fontSize: 20, color: '#1A2230' }}&gt;≈4 ms / 对&lt;/Text&gt;&#10;        &lt;/Box&gt;&#10;    &lt;/Box&gt;&#10;    &lt;Box style={{ padding: '18px 40px 0px 40px', flexDirection: 'row', gap: 18 }}&gt;&#10;        &lt;Box style={{ flex: 1, backgroundColor: '#F0F5FC', borderRadius: 6, padding: '14px 18px', flexDirection: 'column' }}&gt;&#10;            &lt;Text style={{ fontSize: 22, fontWeight: 'bold', color: '#1E4FA8' }}&gt;加权协视图&lt;/Text&gt;&#10;            &lt;Text style={{ fontSize: 21, color: '#1A2230', lineHeight: 1.5, marginTop: 8 }}&gt;边权取内点数倒数 w = 1/#inliers：内点越多、边越&quot;短&quot;。于是图上的最短路 = 最可靠的位姿链。&lt;/Text&gt;&#10;        &lt;/Box&gt;&#10;        &lt;Box style={{ flex: 1, backgroundColor: '#F0F5FC', borderRadius: 6, padding: '14px 18px', flexDirection: 'column' }}&gt;&#10;            &lt;Text style={{ fontSize: 22, fontWeight: 'bold', color: '#1E4FA8' }}&gt;消融：这一环最关键&lt;/Text&gt;&#10;            &lt;Text style={{ fontSize: 21, color: '#1A2230', lineHeight: 1.5, marginTop: 8 }}&gt;去掉位置识别只比相邻 5 帧：PSNR 26.29 → &lt;b&gt;24.78 dB&lt;/b&gt;；改成优化最后 20 帧：→ &lt;b&gt;24.56 dB&lt;/b&gt;。&lt;/Text&gt;&#10;        &lt;/Box&gt;&#10;    &lt;/Box&gt;&#10;    &lt;Box style={{ padding: '12px 40px 0px 40px' }}&gt;&#10;        &lt;Text style={{ fontSize: 17, color: '#8B97A8' }}&gt;候选集逐级收缩：1000 对 → 20 → 5 → 1，精确匹配只作用在极小候选上，这是&quot;无序也能快&quot;的根本原因。&lt;/Text&gt;&#10;    &lt;/Box&gt;&#10;&lt;/Slide&gt;&#10;"/>
+        <p:cNvPr id="400" name="" descr="&lt;Slide style={{ width: '1280px', height: '720px', backgroundColor: '#FFFFFF', padding: '0px', flexDirection: 'column' }}&gt;&#10;    &lt;Box style={{ width: '1280px', height: '8px', backgroundColor: '#1E4FA8' }} /&gt;&#10;    &lt;Box style={{ padding: '30px 40px 0px 40px', flexDirection: 'row', justifyContent: 'space-between', alignItems: 'flex-end' }}&gt;&#10;        &lt;Text style={{ fontSize: 34, fontWeight: 'bold', color: '#1E4FA8' }}&gt;关键方式①：两级匹配 + 加权协视图&lt;/Text&gt;&#10;        &lt;Text style={{ fontSize: 15, color: '#8B97A8' }}&gt;08 / 15&lt;/Text&gt;&#10;    &lt;/Box&gt;&#10;    &lt;Box style={{ padding: '18px 40px 0px 40px', flexDirection: 'column', gap: 0 }}&gt;&#10;        &lt;Box style={{ flexDirection: 'row', backgroundColor: '#1E4FA8', padding: '12px 16px' }}&gt;&#10;            &lt;Text style={{ width: '90px', fontSize: 20, fontWeight: 'bold', color: '#FFFFFF' }}&gt;层级&lt;/Text&gt;&#10;            &lt;Text style={{ flex: 2, fontSize: 20, fontWeight: 'bold', color: '#FFFFFF' }}&gt;方法&lt;/Text&gt;&#10;            &lt;Text style={{ flex: 3, fontSize: 20, fontWeight: 'bold', color: '#FFFFFF' }}&gt;作用&lt;/Text&gt;&#10;            &lt;Text style={{ flex: 1.6, fontSize: 20, fontWeight: 'bold', color: '#FFFFFF' }}&gt;代价&lt;/Text&gt;&#10;        &lt;/Box&gt;&#10;        &lt;Box style={{ flexDirection: 'row', padding: '13px 16px', borderBottom: '1px solid #D6DCE5' }}&gt;&#10;            &lt;Text style={{ width: '90px', fontSize: 20, fontWeight: 'bold', color: '#1E4FA8' }}&gt;1&lt;/Text&gt;&#10;            &lt;Text style={{ flex: 2, fontSize: 20, color: '#1A2230' }}&gt;视觉位置识别（全局描述子）&lt;/Text&gt;&#10;            &lt;Text style={{ flex: 3, fontSize: 20, color: '#1A2230' }}&gt;余弦相似度排序，取 top-20 候选&lt;/Text&gt;&#10;            &lt;Text style={{ flex: 1.6, fontSize: 20, color: '#1A2230' }}&gt;≈1 ms / 1000 对&lt;/Text&gt;&#10;        &lt;/Box&gt;&#10;        &lt;Box style={{ flexDirection: 'row', padding: '13px 16px', backgroundColor: '#F7F9FC', borderBottom: '1px solid #D6DCE5' }}&gt;&#10;            &lt;Text style={{ width: '90px', fontSize: 20, fontWeight: 'bold', color: '#1E4FA8' }}&gt;2&lt;/Text&gt;&#10;            &lt;Text style={{ flex: 2, fontSize: 20, color: '#1A2230' }}&gt;XFeat 轻量局部特征&lt;/Text&gt;&#10;            &lt;Text style={{ flex: 3, fontSize: 20, color: '#1A2230' }}&gt;按内点数从 20 中保留 5 个&lt;/Text&gt;&#10;            &lt;Text style={{ flex: 1.6, fontSize: 20, color: '#1A2230' }}&gt;≈0.5 ms / 对&lt;/Text&gt;&#10;        &lt;/Box&gt;&#10;        &lt;Box style={{ flexDirection: 'row', padding: '13px 16px', borderBottom: '1px solid #D6DCE5' }}&gt;&#10;            &lt;Text style={{ width: '90px', fontSize: 20, fontWeight: 'bold', color: '#1E4FA8' }}&gt;3&lt;/Text&gt;&#10;            &lt;Text style={{ flex: 2, fontSize: 20, color: '#1A2230' }}&gt;LightGlue + RANSAC&lt;/Text&gt;&#10;            &lt;Text style={{ flex: 3, fontSize: 20, color: '#1A2230' }}&gt;精确验证，内点数 &amp;gt; 500 才接受&lt;/Text&gt;&#10;            &lt;Text style={{ flex: 1.6, fontSize: 20, color: '#1A2230' }}&gt;≈4 ms / 对&lt;/Text&gt;&#10;        &lt;/Box&gt;&#10;    &lt;/Box&gt;&#10;    &lt;Box style={{ padding: '18px 40px 0px 40px', flexDirection: 'row', gap: 18 }}&gt;&#10;        &lt;Box style={{ flex: 1, backgroundColor: '#F0F5FC', borderRadius: 6, padding: '14px 18px', flexDirection: 'column' }}&gt;&#10;            &lt;Text style={{ fontSize: 22, fontWeight: 'bold', color: '#1E4FA8' }}&gt;加权协视图&lt;/Text&gt;&#10;            &lt;Text style={{ fontSize: 21, color: '#1A2230', lineHeight: 1.5, marginTop: 8 }}&gt;边权取内点数倒数 w = 1/#inliers：内点越多、边越&quot;短&quot;。于是图上的最短路 = 最可靠的位姿链。&lt;/Text&gt;&#10;        &lt;/Box&gt;&#10;        &lt;Box style={{ flex: 1, backgroundColor: '#F0F5FC', borderRadius: 6, padding: '14px 18px', flexDirection: 'column' }}&gt;&#10;            &lt;Text style={{ fontSize: 22, fontWeight: 'bold', color: '#1E4FA8' }}&gt;消融：这一环最关键&lt;/Text&gt;&#10;            &lt;Text style={{ fontSize: 21, color: '#1A2230', lineHeight: 1.5, marginTop: 8 }}&gt;去掉位置识别只比相邻 5 帧：PSNR 26.29 → &lt;b&gt;24.78 dB&lt;/b&gt;；改成优化最后 20 帧：→ &lt;b&gt;24.56 dB&lt;/b&gt;。&lt;/Text&gt;&#10;        &lt;/Box&gt;&#10;    &lt;/Box&gt;&#10;    &lt;Box style={{ padding: '12px 40px 0px 40px' }}&gt;&#10;        &lt;Text style={{ fontSize: 17, color: '#8B97A8' }}&gt;候选集逐级收缩：1000 对 → 20 → 5 → 1，精确匹配只作用在极小候选上，这是&quot;无序也能快&quot;的根本原因。&lt;/Text&gt;&#10;    &lt;/Box&gt;&#10;&lt;/Slide&gt;&#10;"/>
         <p:cNvGrpSpPr/>
         <p:nvPr/>
       </p:nvGrpSpPr>
@@ -20830,7 +19582,7 @@
       </p:grpSpPr>
       <p:sp>
         <p:nvSpPr>
-          <p:cNvPr id="429" name=""/>
+          <p:cNvPr id="401" name=""/>
           <p:cNvSpPr/>
           <p:nvPr/>
         </p:nvSpPr>
@@ -20854,7 +19606,7 @@
       </p:sp>
       <p:sp>
         <p:nvSpPr>
-          <p:cNvPr id="430" name=""/>
+          <p:cNvPr id="402" name=""/>
           <p:cNvSpPr/>
           <p:nvPr/>
         </p:nvSpPr>
@@ -20878,7 +19630,7 @@
       </p:sp>
       <p:sp>
         <p:nvSpPr>
-          <p:cNvPr id="431" name="" descr="{&quot;isTemplate&quot;:true,&quot;type&quot;:&quot;text&quot;}"/>
+          <p:cNvPr id="403" name="" descr="{&quot;isTemplate&quot;:true,&quot;type&quot;:&quot;text&quot;}"/>
           <p:cNvSpPr txBox="1"/>
           <p:nvPr/>
         </p:nvSpPr>
@@ -20933,7 +19685,7 @@
       </p:sp>
       <p:sp>
         <p:nvSpPr>
-          <p:cNvPr id="432" name="" descr="{&quot;isTemplate&quot;:true,&quot;type&quot;:&quot;text&quot;}"/>
+          <p:cNvPr id="404" name="" descr="{&quot;isTemplate&quot;:true,&quot;type&quot;:&quot;text&quot;}"/>
           <p:cNvSpPr txBox="1"/>
           <p:nvPr/>
         </p:nvSpPr>
@@ -20968,7 +19720,7 @@
       </p:sp>
       <p:sp>
         <p:nvSpPr>
-          <p:cNvPr id="433" name=""/>
+          <p:cNvPr id="405" name=""/>
           <p:cNvSpPr/>
           <p:nvPr/>
         </p:nvSpPr>
@@ -20992,7 +19744,7 @@
       </p:sp>
       <p:sp>
         <p:nvSpPr>
-          <p:cNvPr id="434" name="" descr="{&quot;isTemplate&quot;:true,&quot;type&quot;:&quot;text&quot;}"/>
+          <p:cNvPr id="406" name="" descr="{&quot;isTemplate&quot;:true,&quot;type&quot;:&quot;text&quot;}"/>
           <p:cNvSpPr txBox="1"/>
           <p:nvPr/>
         </p:nvSpPr>
@@ -21027,7 +19779,7 @@
       </p:sp>
       <p:sp>
         <p:nvSpPr>
-          <p:cNvPr id="435" name="" descr="{&quot;isTemplate&quot;:true,&quot;type&quot;:&quot;text&quot;}"/>
+          <p:cNvPr id="407" name="" descr="{&quot;isTemplate&quot;:true,&quot;type&quot;:&quot;text&quot;}"/>
           <p:cNvSpPr txBox="1"/>
           <p:nvPr/>
         </p:nvSpPr>
@@ -21062,7 +19814,7 @@
       </p:sp>
       <p:sp>
         <p:nvSpPr>
-          <p:cNvPr id="436" name="" descr="{&quot;isTemplate&quot;:true,&quot;type&quot;:&quot;text&quot;}"/>
+          <p:cNvPr id="408" name="" descr="{&quot;isTemplate&quot;:true,&quot;type&quot;:&quot;text&quot;}"/>
           <p:cNvSpPr txBox="1"/>
           <p:nvPr/>
         </p:nvSpPr>
@@ -21097,7 +19849,7 @@
       </p:sp>
       <p:sp>
         <p:nvSpPr>
-          <p:cNvPr id="437" name="" descr="{&quot;isTemplate&quot;:true,&quot;type&quot;:&quot;text&quot;}"/>
+          <p:cNvPr id="409" name="" descr="{&quot;isTemplate&quot;:true,&quot;type&quot;:&quot;text&quot;}"/>
           <p:cNvSpPr txBox="1"/>
           <p:nvPr/>
         </p:nvSpPr>
@@ -21132,7 +19884,7 @@
       </p:sp>
       <p:sp>
         <p:nvSpPr>
-          <p:cNvPr id="438" name=""/>
+          <p:cNvPr id="410" name=""/>
           <p:cNvSpPr/>
           <p:nvPr/>
         </p:nvSpPr>
@@ -21172,7 +19924,7 @@
       </p:sp>
       <p:sp>
         <p:nvSpPr>
-          <p:cNvPr id="439" name="" descr="{&quot;isTemplate&quot;:true,&quot;type&quot;:&quot;text&quot;}"/>
+          <p:cNvPr id="411" name="" descr="{&quot;isTemplate&quot;:true,&quot;type&quot;:&quot;text&quot;}"/>
           <p:cNvSpPr txBox="1"/>
           <p:nvPr/>
         </p:nvSpPr>
@@ -21207,7 +19959,7 @@
       </p:sp>
       <p:sp>
         <p:nvSpPr>
-          <p:cNvPr id="440" name="" descr="{&quot;isTemplate&quot;:true,&quot;type&quot;:&quot;text&quot;}"/>
+          <p:cNvPr id="412" name="" descr="{&quot;isTemplate&quot;:true,&quot;type&quot;:&quot;text&quot;}"/>
           <p:cNvSpPr txBox="1"/>
           <p:nvPr/>
         </p:nvSpPr>
@@ -21242,7 +19994,7 @@
       </p:sp>
       <p:sp>
         <p:nvSpPr>
-          <p:cNvPr id="441" name="" descr="{&quot;isTemplate&quot;:true,&quot;type&quot;:&quot;text&quot;}"/>
+          <p:cNvPr id="413" name="" descr="{&quot;isTemplate&quot;:true,&quot;type&quot;:&quot;text&quot;}"/>
           <p:cNvSpPr txBox="1"/>
           <p:nvPr/>
         </p:nvSpPr>
@@ -21297,7 +20049,7 @@
       </p:sp>
       <p:sp>
         <p:nvSpPr>
-          <p:cNvPr id="442" name="" descr="{&quot;isTemplate&quot;:true,&quot;type&quot;:&quot;text&quot;}"/>
+          <p:cNvPr id="414" name="" descr="{&quot;isTemplate&quot;:true,&quot;type&quot;:&quot;text&quot;}"/>
           <p:cNvSpPr txBox="1"/>
           <p:nvPr/>
         </p:nvSpPr>
@@ -21342,7 +20094,7 @@
       </p:sp>
       <p:sp>
         <p:nvSpPr>
-          <p:cNvPr id="443" name=""/>
+          <p:cNvPr id="415" name=""/>
           <p:cNvSpPr/>
           <p:nvPr/>
         </p:nvSpPr>
@@ -21366,7 +20118,7 @@
       </p:sp>
       <p:sp>
         <p:nvSpPr>
-          <p:cNvPr id="444" name=""/>
+          <p:cNvPr id="416" name=""/>
           <p:cNvSpPr/>
           <p:nvPr/>
         </p:nvSpPr>
@@ -21406,7 +20158,7 @@
       </p:sp>
       <p:sp>
         <p:nvSpPr>
-          <p:cNvPr id="445" name="" descr="{&quot;isTemplate&quot;:true,&quot;type&quot;:&quot;text&quot;}"/>
+          <p:cNvPr id="417" name="" descr="{&quot;isTemplate&quot;:true,&quot;type&quot;:&quot;text&quot;}"/>
           <p:cNvSpPr txBox="1"/>
           <p:nvPr/>
         </p:nvSpPr>
@@ -21441,7 +20193,7 @@
       </p:sp>
       <p:sp>
         <p:nvSpPr>
-          <p:cNvPr id="446" name="" descr="{&quot;isTemplate&quot;:true,&quot;type&quot;:&quot;text&quot;}"/>
+          <p:cNvPr id="418" name="" descr="{&quot;isTemplate&quot;:true,&quot;type&quot;:&quot;text&quot;}"/>
           <p:cNvSpPr txBox="1"/>
           <p:nvPr/>
         </p:nvSpPr>
@@ -21486,7 +20238,7 @@
       </p:sp>
       <p:sp>
         <p:nvSpPr>
-          <p:cNvPr id="447" name="" descr="{&quot;isTemplate&quot;:true,&quot;type&quot;:&quot;text&quot;}"/>
+          <p:cNvPr id="419" name="" descr="{&quot;isTemplate&quot;:true,&quot;type&quot;:&quot;text&quot;}"/>
           <p:cNvSpPr txBox="1"/>
           <p:nvPr/>
         </p:nvSpPr>
@@ -21561,7 +20313,7 @@
       </p:sp>
       <p:sp>
         <p:nvSpPr>
-          <p:cNvPr id="448" name="" descr="{&quot;isTemplate&quot;:true,&quot;type&quot;:&quot;text&quot;}"/>
+          <p:cNvPr id="420" name="" descr="{&quot;isTemplate&quot;:true,&quot;type&quot;:&quot;text&quot;}"/>
           <p:cNvSpPr txBox="1"/>
           <p:nvPr/>
         </p:nvSpPr>
@@ -21606,7 +20358,7 @@
       </p:sp>
       <p:sp>
         <p:nvSpPr>
-          <p:cNvPr id="449" name=""/>
+          <p:cNvPr id="421" name=""/>
           <p:cNvSpPr/>
           <p:nvPr/>
         </p:nvSpPr>
@@ -21646,7 +20398,7 @@
       </p:sp>
       <p:sp>
         <p:nvSpPr>
-          <p:cNvPr id="450" name="" descr="{&quot;isTemplate&quot;:true,&quot;type&quot;:&quot;text&quot;}"/>
+          <p:cNvPr id="422" name="" descr="{&quot;isTemplate&quot;:true,&quot;type&quot;:&quot;text&quot;}"/>
           <p:cNvSpPr txBox="1"/>
           <p:nvPr/>
         </p:nvSpPr>
@@ -21681,7 +20433,7 @@
       </p:sp>
       <p:sp>
         <p:nvSpPr>
-          <p:cNvPr id="451" name="" descr="{&quot;isTemplate&quot;:true,&quot;type&quot;:&quot;text&quot;}"/>
+          <p:cNvPr id="423" name="" descr="{&quot;isTemplate&quot;:true,&quot;type&quot;:&quot;text&quot;}"/>
           <p:cNvSpPr txBox="1"/>
           <p:nvPr/>
         </p:nvSpPr>
@@ -21716,7 +20468,7 @@
       </p:sp>
       <p:sp>
         <p:nvSpPr>
-          <p:cNvPr id="452" name="" descr="{&quot;isTemplate&quot;:true,&quot;type&quot;:&quot;text&quot;}"/>
+          <p:cNvPr id="424" name="" descr="{&quot;isTemplate&quot;:true,&quot;type&quot;:&quot;text&quot;}"/>
           <p:cNvSpPr txBox="1"/>
           <p:nvPr/>
         </p:nvSpPr>
@@ -21771,7 +20523,7 @@
       </p:sp>
       <p:sp>
         <p:nvSpPr>
-          <p:cNvPr id="453" name="" descr="{&quot;isTemplate&quot;:true,&quot;type&quot;:&quot;text&quot;}"/>
+          <p:cNvPr id="425" name="" descr="{&quot;isTemplate&quot;:true,&quot;type&quot;:&quot;text&quot;}"/>
           <p:cNvSpPr txBox="1"/>
           <p:nvPr/>
         </p:nvSpPr>
@@ -21816,7 +20568,7 @@
       </p:sp>
       <p:sp>
         <p:nvSpPr>
-          <p:cNvPr id="454" name=""/>
+          <p:cNvPr id="426" name=""/>
           <p:cNvSpPr/>
           <p:nvPr/>
         </p:nvSpPr>
@@ -21842,7 +20594,7 @@
       </p:sp>
       <p:sp>
         <p:nvSpPr>
-          <p:cNvPr id="455" name="" descr="{&quot;isTemplate&quot;:true,&quot;type&quot;:&quot;text&quot;}"/>
+          <p:cNvPr id="427" name="" descr="{&quot;isTemplate&quot;:true,&quot;type&quot;:&quot;text&quot;}"/>
           <p:cNvSpPr txBox="1"/>
           <p:nvPr/>
         </p:nvSpPr>
@@ -21877,7 +20629,7 @@
       </p:sp>
       <p:sp>
         <p:nvSpPr>
-          <p:cNvPr id="456" name="" descr="{&quot;isTemplate&quot;:true,&quot;type&quot;:&quot;text&quot;}"/>
+          <p:cNvPr id="428" name="" descr="{&quot;isTemplate&quot;:true,&quot;type&quot;:&quot;text&quot;}"/>
           <p:cNvSpPr txBox="1"/>
           <p:nvPr/>
         </p:nvSpPr>
@@ -21994,7 +20746,7 @@
       </p:sp>
       <p:sp>
         <p:nvSpPr>
-          <p:cNvPr id="457" name=""/>
+          <p:cNvPr id="429" name=""/>
           <p:cNvSpPr/>
           <p:nvPr/>
         </p:nvSpPr>
@@ -22020,7 +20772,7 @@
       </p:sp>
       <p:sp>
         <p:nvSpPr>
-          <p:cNvPr id="458" name="" descr="{&quot;isTemplate&quot;:true,&quot;type&quot;:&quot;text&quot;}"/>
+          <p:cNvPr id="430" name="" descr="{&quot;isTemplate&quot;:true,&quot;type&quot;:&quot;text&quot;}"/>
           <p:cNvSpPr txBox="1"/>
           <p:nvPr/>
         </p:nvSpPr>
@@ -22055,7 +20807,7 @@
       </p:sp>
       <p:sp>
         <p:nvSpPr>
-          <p:cNvPr id="459" name="" descr="{&quot;isTemplate&quot;:true,&quot;type&quot;:&quot;text&quot;}"/>
+          <p:cNvPr id="431" name="" descr="{&quot;isTemplate&quot;:true,&quot;type&quot;:&quot;text&quot;}"/>
           <p:cNvSpPr txBox="1"/>
           <p:nvPr/>
         </p:nvSpPr>
@@ -22192,7 +20944,7 @@
       </p:sp>
       <p:sp>
         <p:nvSpPr>
-          <p:cNvPr id="460" name="" descr="{&quot;isTemplate&quot;:true,&quot;type&quot;:&quot;text&quot;}"/>
+          <p:cNvPr id="432" name="" descr="{&quot;isTemplate&quot;:true,&quot;type&quot;:&quot;text&quot;}"/>
           <p:cNvSpPr txBox="1"/>
           <p:nvPr/>
         </p:nvSpPr>
@@ -22315,7 +21067,7 @@
   <p:cSld>
     <p:spTree>
       <p:nvGrpSpPr>
-        <p:cNvPr id="461" name="" descr="&lt;Slide style={{ width: '1280px', height: '720px', backgroundColor: '#FFFFFF', padding: '0px', flexDirection: 'column' }}&gt;&#10;    &lt;Box style={{ width: '1280px', height: '8px', backgroundColor: '#1E4FA8' }} /&gt;&#10;    &lt;Box style={{ padding: '30px 40px 0px 40px', flexDirection: 'row', justifyContent: 'space-between', alignItems: 'flex-end' }}&gt;&#10;        &lt;Text style={{ fontSize: 34, fontWeight: 'bold', color: '#1E4FA8' }}&gt;关键方式②③：局部 BA 与图传播回环&lt;/Text&gt;&#10;        &lt;Text style={{ fontSize: 15, color: '#8B97A8' }}&gt;09 / 15&lt;/Text&gt;&#10;    &lt;/Box&gt;&#10;    &lt;Box style={{ padding: '16px 40px 0px 40px', flexDirection: 'row', gap: 20 }}&gt;&#10;        &lt;Box style={{ flex: 1, backgroundColor: '#F7F9FC', border: '1px solid #D6DCE5', borderRadius: 6, padding: '16px 18px', flexDirection: 'column' }}&gt;&#10;            &lt;Text style={{ fontSize: 25, fontWeight: 'bold', color: '#1A2230' }}&gt;GPU 局部重建&lt;/Text&gt;&#10;            &lt;Text style={{ fontSize: 21, color: '#1A2230', lineHeight: 1.55, marginTop: 10 }}&gt;关键帧 &lt;b&gt;N=20&lt;/b&gt;（SLAM 通常只用 5 帧时间窗），路标点固定 &lt;b&gt;1 万&lt;/b&gt;，按被观测次数采样。&lt;/Text&gt;&#10;            &lt;Text style={{ fontSize: 21, color: '#1A2230', lineHeight: 1.55, marginTop: 8 }}&gt;每个路标只允许被协视性选出的固定子集观测，避免观测数随帧数二次增长。&lt;/Text&gt;&#10;            &lt;Text style={{ fontSize: 21, color: '#1A2230', lineHeight: 1.55, marginTop: 8 }}&gt;自写核函数算残差与雅可比，稠密 Schur 补求解。&lt;/Text&gt;&#10;            &lt;Text style={{ fontSize: 22, fontWeight: 'bold', color: '#1E4FA8', marginTop: 12 }}&gt;比 g2o / CUDA-BA 快约 5 倍&lt;/Text&gt;&#10;            &lt;Text style={{ fontSize: 21, color: '#1A2230', lineHeight: 1.55, marginTop: 10 }}&gt;高斯投放改为&lt;b&gt;分块估计深度尺度与偏移&lt;/b&gt;再插值上采样（消融 26.29 → 25.41 dB），落点更贴表面。&lt;/Text&gt;&#10;        &lt;/Box&gt;&#10;        &lt;Box style={{ flex: 1, backgroundColor: '#F0F5FC', border: '1px solid #3D7BD9', borderRadius: 6, padding: '16px 18px', flexDirection: 'column' }}&gt;&#10;            &lt;Text style={{ fontSize: 25, fontWeight: 'bold', color: '#1A2230' }}&gt;簇级回环 + 图传播&lt;/Text&gt;&#10;            &lt;Text style={{ fontSize: 21, color: '#1A2230', lineHeight: 1.55, marginTop: 10 }}&gt;检测：出现两组&quot;内部密、彼此疏&quot;的簇，图上跳数 &amp;gt; 5 且有效匹配对 &amp;gt; 2。&lt;/Text&gt;&#10;            &lt;Text style={{ fontSize: 21, color: '#1A2230', lineHeight: 1.55, marginTop: 8 }}&gt;求解：两簇各扩 N/2 帧组成焊接窗口做局部 BA，由锚点刚体变换与深度尺度得到 &lt;b&gt;Sim(3)&lt;/b&gt;。&lt;/Text&gt;&#10;            &lt;Text style={{ fontSize: 21, color: '#1A2230', lineHeight: 1.55, marginTop: 8 }}&gt;传播：Dijkstra 找累计权重最小的&lt;b&gt;主干路径&lt;/b&gt;，按测地距离比例插值（旋转用 6D、尺度取对数），对全图位姿与高斯套用同一变换。&lt;/Text&gt;&#10;            &lt;Text style={{ fontSize: 22, fontWeight: 'bold', color: '#D9534F', marginTop: 12 }}&gt;代价随场景规模近似线性&lt;/Text&gt;&#10;        &lt;/Box&gt;&#10;    &lt;/Box&gt;&#10;    &lt;Box style={{ margin: '18px 40px 0px 40px', backgroundColor: '#F0F5FC', borderLeft: '5px solid #1E4FA8', padding: '14px 20px' }}&gt;&#10;        &lt;Text style={{ fontSize: 21, color: '#1A2230', lineHeight: 1.5 }}&gt;用&quot;图上的距离&quot;替代&quot;全局优化的解&quot;——这是全文最值得借鉴的工程取舍：牺牲一点精度，换来数量级的实时性。&lt;/Text&gt;&#10;    &lt;/Box&gt;&#10;&lt;/Slide&gt;&#10;"/>
+        <p:cNvPr id="433" name="" descr="&lt;Slide style={{ width: '1280px', height: '720px', backgroundColor: '#FFFFFF', padding: '0px', flexDirection: 'column' }}&gt;&#10;    &lt;Box style={{ width: '1280px', height: '8px', backgroundColor: '#1E4FA8' }} /&gt;&#10;    &lt;Box style={{ padding: '30px 40px 0px 40px', flexDirection: 'row', justifyContent: 'space-between', alignItems: 'flex-end' }}&gt;&#10;        &lt;Text style={{ fontSize: 34, fontWeight: 'bold', color: '#1E4FA8' }}&gt;关键方式②③：局部 BA 与图传播回环&lt;/Text&gt;&#10;        &lt;Text style={{ fontSize: 15, color: '#8B97A8' }}&gt;09 / 15&lt;/Text&gt;&#10;    &lt;/Box&gt;&#10;    &lt;Box style={{ padding: '16px 40px 0px 40px', flexDirection: 'row', gap: 20 }}&gt;&#10;        &lt;Box style={{ flex: 1, backgroundColor: '#F7F9FC', border: '1px solid #D6DCE5', borderRadius: 6, padding: '16px 18px', flexDirection: 'column' }}&gt;&#10;            &lt;Text style={{ fontSize: 25, fontWeight: 'bold', color: '#1A2230' }}&gt;GPU 局部重建&lt;/Text&gt;&#10;            &lt;Text style={{ fontSize: 21, color: '#1A2230', lineHeight: 1.55, marginTop: 10 }}&gt;关键帧 &lt;b&gt;N=20&lt;/b&gt;（SLAM 通常只用 5 帧时间窗），路标点固定 &lt;b&gt;1 万&lt;/b&gt;，按被观测次数采样。&lt;/Text&gt;&#10;            &lt;Text style={{ fontSize: 21, color: '#1A2230', lineHeight: 1.55, marginTop: 8 }}&gt;每个路标只允许被协视性选出的固定子集观测，避免观测数随帧数二次增长。&lt;/Text&gt;&#10;            &lt;Text style={{ fontSize: 21, color: '#1A2230', lineHeight: 1.55, marginTop: 8 }}&gt;自写核函数算残差与雅可比，稠密 Schur 补求解。&lt;/Text&gt;&#10;            &lt;Text style={{ fontSize: 22, fontWeight: 'bold', color: '#1E4FA8', marginTop: 12 }}&gt;比 g2o / CUDA-BA 快约 5 倍&lt;/Text&gt;&#10;            &lt;Text style={{ fontSize: 21, color: '#1A2230', lineHeight: 1.55, marginTop: 10 }}&gt;高斯投放改为&lt;b&gt;分块估计深度尺度与偏移&lt;/b&gt;再插值上采样（消融 26.29 → 25.41 dB），落点更贴表面。&lt;/Text&gt;&#10;        &lt;/Box&gt;&#10;        &lt;Box style={{ flex: 1, backgroundColor: '#F0F5FC', border: '1px solid #3D7BD9', borderRadius: 6, padding: '16px 18px', flexDirection: 'column' }}&gt;&#10;            &lt;Text style={{ fontSize: 25, fontWeight: 'bold', color: '#1A2230' }}&gt;簇级回环 + 图传播&lt;/Text&gt;&#10;            &lt;Text style={{ fontSize: 21, color: '#1A2230', lineHeight: 1.55, marginTop: 10 }}&gt;检测：出现两组&quot;内部密、彼此疏&quot;的簇，图上跳数 &amp;gt; 5 且有效匹配对 &amp;gt; 2。&lt;/Text&gt;&#10;            &lt;Text style={{ fontSize: 21, color: '#1A2230', lineHeight: 1.55, marginTop: 8 }}&gt;求解：两簇各扩 N/2 帧组成焊接窗口做局部 BA，由锚点刚体变换与深度尺度得到 &lt;b&gt;Sim(3)&lt;/b&gt;。&lt;/Text&gt;&#10;            &lt;Text style={{ fontSize: 21, color: '#1A2230', lineHeight: 1.55, marginTop: 8 }}&gt;传播：Dijkstra 找累计权重最小的&lt;b&gt;主干路径&lt;/b&gt;，按测地距离比例插值（旋转用 6D、尺度取对数），对全图位姿与高斯套用同一变换。&lt;/Text&gt;&#10;            &lt;Text style={{ fontSize: 22, fontWeight: 'bold', color: '#D9534F', marginTop: 12 }}&gt;代价随场景规模近似线性&lt;/Text&gt;&#10;        &lt;/Box&gt;&#10;    &lt;/Box&gt;&#10;    &lt;Box style={{ margin: '18px 40px 0px 40px', backgroundColor: '#F0F5FC', borderLeft: '5px solid #1E4FA8', padding: '14px 20px' }}&gt;&#10;        &lt;Text style={{ fontSize: 21, color: '#1A2230', lineHeight: 1.5 }}&gt;用&quot;图上的距离&quot;替代&quot;全局优化的解&quot;——这是全文最值得借鉴的工程取舍：牺牲一点精度，换来数量级的实时性。&lt;/Text&gt;&#10;    &lt;/Box&gt;&#10;&lt;/Slide&gt;&#10;"/>
         <p:cNvGrpSpPr/>
         <p:nvPr/>
       </p:nvGrpSpPr>
@@ -22329,7 +21081,7 @@
       </p:grpSpPr>
       <p:sp>
         <p:nvSpPr>
-          <p:cNvPr id="462" name=""/>
+          <p:cNvPr id="434" name=""/>
           <p:cNvSpPr/>
           <p:nvPr/>
         </p:nvSpPr>
@@ -22353,7 +21105,7 @@
       </p:sp>
       <p:sp>
         <p:nvSpPr>
-          <p:cNvPr id="463" name=""/>
+          <p:cNvPr id="435" name=""/>
           <p:cNvSpPr/>
           <p:nvPr/>
         </p:nvSpPr>
@@ -22377,7 +21129,7 @@
       </p:sp>
       <p:sp>
         <p:nvSpPr>
-          <p:cNvPr id="464" name="" descr="{&quot;isTemplate&quot;:true,&quot;type&quot;:&quot;text&quot;}"/>
+          <p:cNvPr id="436" name="" descr="{&quot;isTemplate&quot;:true,&quot;type&quot;:&quot;text&quot;}"/>
           <p:cNvSpPr txBox="1"/>
           <p:nvPr/>
         </p:nvSpPr>
@@ -22432,7 +21184,7 @@
       </p:sp>
       <p:sp>
         <p:nvSpPr>
-          <p:cNvPr id="465" name="" descr="{&quot;isTemplate&quot;:true,&quot;type&quot;:&quot;text&quot;}"/>
+          <p:cNvPr id="437" name="" descr="{&quot;isTemplate&quot;:true,&quot;type&quot;:&quot;text&quot;}"/>
           <p:cNvSpPr txBox="1"/>
           <p:nvPr/>
         </p:nvSpPr>
@@ -22467,7 +21219,7 @@
       </p:sp>
       <p:sp>
         <p:nvSpPr>
-          <p:cNvPr id="466" name=""/>
+          <p:cNvPr id="438" name=""/>
           <p:cNvSpPr/>
           <p:nvPr/>
         </p:nvSpPr>
@@ -22498,7 +21250,7 @@
       </p:sp>
       <p:sp>
         <p:nvSpPr>
-          <p:cNvPr id="467" name="" descr="{&quot;isTemplate&quot;:true,&quot;type&quot;:&quot;text&quot;}"/>
+          <p:cNvPr id="439" name="" descr="{&quot;isTemplate&quot;:true,&quot;type&quot;:&quot;text&quot;}"/>
           <p:cNvSpPr txBox="1"/>
           <p:nvPr/>
         </p:nvSpPr>
@@ -22543,7 +21295,7 @@
       </p:sp>
       <p:sp>
         <p:nvSpPr>
-          <p:cNvPr id="468" name="" descr="{&quot;isTemplate&quot;:true,&quot;type&quot;:&quot;text&quot;}"/>
+          <p:cNvPr id="440" name="" descr="{&quot;isTemplate&quot;:true,&quot;type&quot;:&quot;text&quot;}"/>
           <p:cNvSpPr txBox="1"/>
           <p:nvPr/>
         </p:nvSpPr>
@@ -22690,7 +21442,7 @@
       </p:sp>
       <p:sp>
         <p:nvSpPr>
-          <p:cNvPr id="469" name="" descr="{&quot;isTemplate&quot;:true,&quot;type&quot;:&quot;text&quot;}"/>
+          <p:cNvPr id="441" name="" descr="{&quot;isTemplate&quot;:true,&quot;type&quot;:&quot;text&quot;}"/>
           <p:cNvSpPr txBox="1"/>
           <p:nvPr/>
         </p:nvSpPr>
@@ -22727,7 +21479,7 @@
       </p:sp>
       <p:sp>
         <p:nvSpPr>
-          <p:cNvPr id="470" name="" descr="{&quot;isTemplate&quot;:true,&quot;type&quot;:&quot;text&quot;}"/>
+          <p:cNvPr id="442" name="" descr="{&quot;isTemplate&quot;:true,&quot;type&quot;:&quot;text&quot;}"/>
           <p:cNvSpPr txBox="1"/>
           <p:nvPr/>
         </p:nvSpPr>
@@ -22782,7 +21534,7 @@
       </p:sp>
       <p:sp>
         <p:nvSpPr>
-          <p:cNvPr id="471" name="" descr="{&quot;isTemplate&quot;:true,&quot;type&quot;:&quot;text&quot;}"/>
+          <p:cNvPr id="443" name="" descr="{&quot;isTemplate&quot;:true,&quot;type&quot;:&quot;text&quot;}"/>
           <p:cNvSpPr txBox="1"/>
           <p:nvPr/>
         </p:nvSpPr>
@@ -22857,7 +21609,7 @@
       </p:sp>
       <p:sp>
         <p:nvSpPr>
-          <p:cNvPr id="472" name="" descr="{&quot;isTemplate&quot;:true,&quot;type&quot;:&quot;text&quot;}"/>
+          <p:cNvPr id="444" name="" descr="{&quot;isTemplate&quot;:true,&quot;type&quot;:&quot;text&quot;}"/>
           <p:cNvSpPr txBox="1"/>
           <p:nvPr/>
         </p:nvSpPr>
@@ -22934,7 +21686,7 @@
       </p:sp>
       <p:sp>
         <p:nvSpPr>
-          <p:cNvPr id="473" name=""/>
+          <p:cNvPr id="445" name=""/>
           <p:cNvSpPr/>
           <p:nvPr/>
         </p:nvSpPr>
@@ -22965,7 +21717,7 @@
       </p:sp>
       <p:sp>
         <p:nvSpPr>
-          <p:cNvPr id="474" name="" descr="{&quot;isTemplate&quot;:true,&quot;type&quot;:&quot;text&quot;}"/>
+          <p:cNvPr id="446" name="" descr="{&quot;isTemplate&quot;:true,&quot;type&quot;:&quot;text&quot;}"/>
           <p:cNvSpPr txBox="1"/>
           <p:nvPr/>
         </p:nvSpPr>
@@ -23020,7 +21772,7 @@
       </p:sp>
       <p:sp>
         <p:nvSpPr>
-          <p:cNvPr id="475" name="" descr="{&quot;isTemplate&quot;:true,&quot;type&quot;:&quot;text&quot;}"/>
+          <p:cNvPr id="447" name="" descr="{&quot;isTemplate&quot;:true,&quot;type&quot;:&quot;text&quot;}"/>
           <p:cNvSpPr txBox="1"/>
           <p:nvPr/>
         </p:nvSpPr>
@@ -23137,7 +21889,7 @@
       </p:sp>
       <p:sp>
         <p:nvSpPr>
-          <p:cNvPr id="476" name="" descr="{&quot;isTemplate&quot;:true,&quot;type&quot;:&quot;text&quot;}"/>
+          <p:cNvPr id="448" name="" descr="{&quot;isTemplate&quot;:true,&quot;type&quot;:&quot;text&quot;}"/>
           <p:cNvSpPr txBox="1"/>
           <p:nvPr/>
         </p:nvSpPr>
@@ -23244,7 +21996,7 @@
       </p:sp>
       <p:sp>
         <p:nvSpPr>
-          <p:cNvPr id="477" name="" descr="{&quot;isTemplate&quot;:true,&quot;type&quot;:&quot;text&quot;}"/>
+          <p:cNvPr id="449" name="" descr="{&quot;isTemplate&quot;:true,&quot;type&quot;:&quot;text&quot;}"/>
           <p:cNvSpPr txBox="1"/>
           <p:nvPr/>
         </p:nvSpPr>
@@ -23341,7 +22093,7 @@
       </p:sp>
       <p:sp>
         <p:nvSpPr>
-          <p:cNvPr id="478" name="" descr="{&quot;isTemplate&quot;:true,&quot;type&quot;:&quot;text&quot;}"/>
+          <p:cNvPr id="450" name="" descr="{&quot;isTemplate&quot;:true,&quot;type&quot;:&quot;text&quot;}"/>
           <p:cNvSpPr txBox="1"/>
           <p:nvPr/>
         </p:nvSpPr>
@@ -23376,7 +22128,7 @@
       </p:sp>
       <p:sp>
         <p:nvSpPr>
-          <p:cNvPr id="479" name=""/>
+          <p:cNvPr id="451" name=""/>
           <p:cNvSpPr/>
           <p:nvPr/>
         </p:nvSpPr>
@@ -23400,7 +22152,7 @@
       </p:sp>
       <p:sp>
         <p:nvSpPr>
-          <p:cNvPr id="480" name=""/>
+          <p:cNvPr id="452" name=""/>
           <p:cNvSpPr/>
           <p:nvPr/>
         </p:nvSpPr>
@@ -23440,7 +22192,7 @@
       </p:sp>
       <p:sp>
         <p:nvSpPr>
-          <p:cNvPr id="481" name="" descr="{&quot;isTemplate&quot;:true,&quot;type&quot;:&quot;text&quot;}"/>
+          <p:cNvPr id="453" name="" descr="{&quot;isTemplate&quot;:true,&quot;type&quot;:&quot;text&quot;}"/>
           <p:cNvSpPr txBox="1"/>
           <p:nvPr/>
         </p:nvSpPr>

--- a/ecnu-cg/02-PPT/PPT-即时三维高斯泼溅重建.pptx
+++ b/ecnu-cg/02-PPT/PPT-即时三维高斯泼溅重建.pptx
@@ -5854,11 +5854,11 @@
 </file>
 
 <file path=ppt/slides/slide13.xml><?xml version="1.0" encoding="utf-8"?>
-<p:sld xmlns:p="http://schemas.openxmlformats.org/presentationml/2006/main" xmlns:a="http://schemas.openxmlformats.org/drawingml/2006/main">
+<p:sld xmlns:p="http://schemas.openxmlformats.org/presentationml/2006/main" xmlns:a="http://schemas.openxmlformats.org/drawingml/2006/main" xmlns:r="http://schemas.openxmlformats.org/officeDocument/2006/relationships">
   <p:cSld>
     <p:spTree>
       <p:nvGrpSpPr>
-        <p:cNvPr id="117" name="" descr="&lt;Slide style={{ width: '1280px', height: '720px', backgroundColor: '#FFFFFF', padding: '0px', flexDirection: 'column' }}&gt;&#13;&#10;    &lt;Box style={{ width: '1280px', height: '8px', backgroundColor: '#1E4FA8' }} /&gt;&#13;&#10;    &lt;Box style={{ padding: '30px 40px 0px 40px', flexDirection: 'row', justifyContent: 'space-between', alignItems: 'flex-end' }}&gt;&#13;&#10;        &lt;Text style={{ fontSize: 34, fontWeight: 'bold', color: '#1E4FA8' }}&gt;不足与改进：哪些是硬伤，哪些能补&lt;/Text&gt;&#13;&#10;        &lt;Text style={{ fontSize: 15, color: '#8B97A8' }}&gt;13 / 15&lt;/Text&gt;&#13;&#10;    &lt;/Box&gt;&#13;&#10;    &lt;Box style={{ padding: '18px 40px 0px 40px' }}&gt;&#13;&#10;        &lt;Text style={{ fontSize: 21, color: '#4A5568', lineHeight: 1.5 }}&gt;左栏是它现在的边界（均来自论文自述），右栏是对应的补法。&lt;/Text&gt;&#13;&#10;    &lt;/Box&gt;&#13;&#10;    &lt;Box style={{ padding: '12px 40px 0px 40px', flexDirection: 'row', gap: 26 }}&gt;&#13;&#10;        &lt;Box style={{ flex: 1, flexDirection: 'column' }}&gt;&#13;&#10;            &lt;Box style={{ flexDirection: 'row', alignItems: 'center', gap: 8 }}&gt;&#13;&#10;                &lt;Box style={{ width: '5px', height: '26px', backgroundColor: '#D9534F' }} /&gt;&#13;&#10;                &lt;Text style={{ fontSize: 26, fontWeight: 'bold', color: '#1A2230' }}&gt;目前方法的不足&lt;/Text&gt;&#13;&#10;            &lt;/Box&gt;&#13;&#10;            &lt;Text style={{ fontSize: 20, color: '#1A2230', lineHeight: 1.55, marginTop: 16 }}&gt;&lt;b&gt;① 低视差直接失效&lt;/b&gt;　纯旋转或平移太小，三角化不出深度，论文自述这类采集会失败。&lt;/Text&gt;&#13;&#10;            &lt;Text style={{ fontSize: 20, color: '#1A2230', lineHeight: 1.55, marginTop: 16 }}&gt;&lt;b&gt;② 精度有天花板&lt;/b&gt;　作者用 NoGraphProp 消融证明图传播不比全局 PGO 差，但同时承认仍不如全局 BA。&lt;/Text&gt;&#13;&#10;            &lt;Text style={{ fontSize: 20, color: '#1A2230', lineHeight: 1.55, marginTop: 16 }}&gt;&lt;b&gt;③ 上游依赖重&lt;/b&gt;　VPR + XFeat + LightGlue + Depth Anything 3 串成一条链，任一环失效整条断。&lt;/Text&gt;&#13;&#10;            &lt;Text style={{ fontSize: 20, color: '#1A2230', lineHeight: 1.55, marginTop: 16 }}&gt;&lt;b&gt;④ 阈值靠经验&lt;/b&gt;　合并 0.5 px / 占比 10%、加权图距 10、建边 500 匹配，换场景需重调。&lt;/Text&gt;&#13;&#10;            &#13;&#10;        &lt;/Box&gt;&#13;&#10;        &lt;Box style={{ width: '1px', backgroundColor: '#D6DCE5' }} /&gt;&#13;&#10;        &lt;Box style={{ flex: 1, flexDirection: 'column' }}&gt;&#13;&#10;            &lt;Box style={{ flexDirection: 'row', alignItems: 'center', gap: 8 }}&gt;&#13;&#10;                &lt;Box style={{ width: '5px', height: '26px', backgroundColor: '#1E4FA8' }} /&gt;&#13;&#10;                &lt;Text style={{ fontSize: 26, fontWeight: 'bold', color: '#1A2230' }}&gt;以后的改进点&lt;/Text&gt;&#13;&#10;            &lt;/Box&gt;&#13;&#10;            &lt;Text style={{ fontSize: 20, color: '#1A2230', lineHeight: 1.55, marginTop: 16 }}&gt;&lt;b&gt;① 低视差帧降级&lt;/b&gt;　只参与渲染、不进位姿求解，避免污染轨迹。&lt;/Text&gt;&#13;&#10;            &lt;Text style={{ fontSize: 20, color: '#1A2230', lineHeight: 1.55, marginTop: 16 }}&gt;&lt;b&gt;② 在线粗 + 离线精&lt;/b&gt;　实时出预览，结束时用 GLOMAP 回填一次全局 BA，把 1.2 dB 补回来。&lt;/Text&gt;&#13;&#10;            &lt;Text style={{ fontSize: 20, color: '#1A2230', lineHeight: 1.55, marginTop: 16 }}&gt;&lt;b&gt;③ 采集端闭环&lt;/b&gt;　实时覆盖率与重投影误差热图，直接提示&quot;这块没拍&quot;——论文 motivation 的自然下一步。&lt;/Text&gt;&#13;&#10;            &lt;Text style={{ fontSize: 20, color: '#1A2230', lineHeight: 1.55, marginTop: 16 }}&gt;&lt;b&gt;④ 阈值自适应&lt;/b&gt;　按纹理强度与重叠度在线估计，替代固定常数。&lt;/Text&gt;&#13;&#10;            &lt;Text style={{ fontSize: 20, color: '#1A2230', lineHeight: 1.55, marginTop: 16 }}&gt;&lt;b&gt;⑤ 验证还可扩展&lt;/b&gt;　打乱输入顺序（--shuffle）、全分辨率重跑、换 2–3 个场景验证阈值是否稳定。&lt;/Text&gt;&#13;&#10;        &lt;/Box&gt;&#13;&#10;    &lt;/Box&gt;&#13;&#10;    &lt;Box style={{ margin: '12px 40px 0px 40px', backgroundColor: '#F0F5FC', borderLeft: '5px solid #1E4FA8', padding: '15px 20px' }}&gt;&#13;&#10;        &lt;Text style={{ fontSize: 21, color: '#1A2230', lineHeight: 1.5 }}&gt;它把&quot;精度&quot;换成了&quot;时间&quot;。补回精度只有两条路：&lt;b&gt;要么离线回填，要么让采集端少犯错&lt;/b&gt;——后者才是它真正打开的方向。&lt;/Text&gt;&#13;&#10;    &lt;/Box&gt;&#13;&#10;&lt;/Slide&gt;&#13;&#10;"/>
+        <p:cNvPr id="117" name="" descr="&lt;Slide style={{ width: '1280px', height: '720px', backgroundColor: '#FFFFFF', padding: '0px', flexDirection: 'column' }}&gt;&#13;&#10;    &lt;Box style={{ width: '1280px', height: '8px', backgroundColor: '#1E4FA8' }} /&gt;&#13;&#10;    &lt;Box style={{ padding: '13px 40px 0px 40px', flexDirection: 'row', justifyContent: 'space-between', alignItems: 'flex-end' }}&gt;&#13;&#10;        &lt;Text style={{ fontSize: 31, fontWeight: 'bold', color: '#1E4FA8' }}&gt;核心优化：位姿求解是作者自己写的 GPU 核&lt;/Text&gt;&#13;&#10;        &lt;Text style={{ fontSize: 15, color: '#8B97A8' }}&gt;13 / 15&lt;/Text&gt;&#13;&#10;    &lt;/Box&gt;&#13;&#10;    &lt;Box style={{ padding: '5px 40px 0px 40px' }}&gt;&#13;&#10;        &lt;Text style={{ fontSize: 17, color: '#4A5568' }}&gt;论文没有调用 g2o / Ceres / CUDA-BA，第 ⑤ 步的 BA 从残差到求解全是自己写的：&lt;b&gt;雅可比解析、LM 迭代、Schur 消元、位姿更新，四步都留在显存里&lt;/b&gt;。&lt;/Text&gt;&#13;&#10;    &lt;/Box&gt;&#13;&#10;    &lt;Box style={{ padding: '7px 40px 0px 40px', flexDirection: 'row', gap: 14 }}&gt;&#13;&#10;        &lt;Box style={{ flex: 1, flexDirection: 'column', gap: 10 }}&gt;&#13;&#10;            &lt;Box style={{ backgroundColor: '#1E1E1E', borderRadius: 5, padding: '5px 10px', flexDirection: 'column' }}&gt;&#13;&#10;                &lt;Text style={{ fontSize: 13.5, fontWeight: 'bold', color: '#8FBBFF' }}&gt;优化 1　手写解析雅可比，废掉 autograd&lt;/Text&gt;&#13;&#10;                &lt;Text style={{ fontFamily: 'Consolas', fontSize: 10, color: '#7F8C9F', marginBottom: 2 }}&gt;poses/mini_ba_utils.cu:133&lt;/Text&gt;&#13;&#10;                &lt;Image src=&quot;opt_png/01.png&quot; style={{ width: 579, height: 173 }} /&gt;&#13;&#10;            &lt;/Box&gt;&#13;&#10;            &lt;Box style={{ backgroundColor: '#1E1E1E', borderRadius: 5, padding: '5px 10px', flexDirection: 'column' }}&gt;&#13;&#10;                &lt;Text style={{ fontSize: 13.5, fontWeight: 'bold', color: '#8FBBFF' }}&gt;优化 2　手写 se(3) 指数映射，更新融成一个核&lt;/Text&gt;&#13;&#10;                &lt;Text style={{ fontFamily: 'Consolas', fontSize: 10, color: '#7F8C9F', marginBottom: 2 }}&gt;poses/mini_ba_utils.cu:186&lt;/Text&gt;&#13;&#10;                &lt;Image src=&quot;opt_png/02.png&quot; style={{ width: 579, height: 173 }} /&gt;&#13;&#10;            &lt;/Box&gt;&#13;&#10;        &lt;/Box&gt;&#13;&#10;        &lt;Box style={{ flex: 1, flexDirection: 'column', gap: 10 }}&gt;&#13;&#10;            &lt;Box style={{ backgroundColor: '#1E1E1E', borderRadius: 5, padding: '5px 10px', flexDirection: 'column' }}&gt;&#13;&#10;                &lt;Text style={{ fontSize: 13.5, fontWeight: 'bold', color: '#8FBBFF' }}&gt;优化 3　Schur 补与 Cholesky 不落回 CPU&lt;/Text&gt;&#13;&#10;                &lt;Text style={{ fontFamily: 'Consolas', fontSize: 10, color: '#7F8C9F', marginBottom: 2 }}&gt;poses/mini_ba.py:296&lt;/Text&gt;&#13;&#10;                &lt;Image src=&quot;opt_png/03.png&quot; style={{ width: 579, height: 191 }} /&gt;&#13;&#10;            &lt;/Box&gt;&#13;&#10;            &lt;Box style={{ backgroundColor: '#1E1E1E', borderRadius: 5, padding: '5px 10px', flexDirection: 'column' }}&gt;&#13;&#10;                &lt;Text style={{ fontSize: 13.5, fontWeight: 'bold', color: '#8FBBFF' }}&gt;优化 4　整轮 LM 压成一张 CUDA Graph&lt;/Text&gt;&#13;&#10;                &lt;Text style={{ fontFamily: 'Consolas', fontSize: 10, color: '#7F8C9F', marginBottom: 2 }}&gt;poses/mini_ba.py:506（无分支写法见 :391）&lt;/Text&gt;&#13;&#10;                &lt;Image src=&quot;opt_png/04.png&quot; style={{ width: 579, height: 191 }} /&gt;&#13;&#10;            &lt;/Box&gt;&#13;&#10;        &lt;/Box&gt;&#13;&#10;    &lt;/Box&gt;&#13;&#10;    &lt;Box style={{ margin: '9px 40px 0px 40px', backgroundColor: '#F0F5FC', borderLeft: '5px solid #1E4FA8', padding: '9px 18px', flexDirection: 'row', gap: 22 }}&gt;&#13;&#10;        &lt;Box style={{ flex: 1, flexDirection: 'column' }}&gt;&#13;&#10;            &lt;Text style={{ fontSize: 15.5, fontWeight: 'bold', color: '#1E4FA8' }}&gt;省掉反向图&lt;/Text&gt;&#13;&#10;            &lt;Text style={{ fontSize: 15, color: '#1A2230', lineHeight: 1.35 }}&gt;雅可比手推成解析式，残差与 J 一核同出。&lt;/Text&gt;&#13;&#10;        &lt;/Box&gt;&#13;&#10;        &lt;Box style={{ flex: 1, flexDirection: 'column' }}&gt;&#13;&#10;            &lt;Text style={{ fontSize: 15.5, fontWeight: 'bold', color: '#1E4FA8' }}&gt;省掉主机同步&lt;/Text&gt;&#13;&#10;            &lt;Text style={{ fontSize: 15, color: '#1A2230', lineHeight: 1.35 }}&gt;观测追加 atomicAdd 抢 slot，不等 CPU 派号。&lt;/Text&gt;&#13;&#10;        &lt;/Box&gt;&#13;&#10;        &lt;Box style={{ flex: 1, flexDirection: 'column' }}&gt;&#13;&#10;            &lt;Text style={{ fontSize: 15.5, fontWeight: 'bold', color: '#1E4FA8' }}&gt;省掉启动开销&lt;/Text&gt;&#13;&#10;            &lt;Text style={{ fontSize: 15, color: '#1A2230', lineHeight: 1.35 }}&gt;上百次 LM 迭代提交一次图，不许有分支。&lt;/Text&gt;&#13;&#10;        &lt;/Box&gt;&#13;&#10;    &lt;/Box&gt;&#13;&#10;    &lt;Box style={{ marginTop: 'auto', padding: '6px 40px 10px 40px' }}&gt;&#13;&#10;        &lt;Text style={{ fontSize: 13, color: '#8B97A8', lineHeight: 1.4 }}&gt;行号指向片段起点；为投影宽度做了换行与变量缩写（v = jacxr_cam − BD @ jacxr_xyz），逻辑未改。共同点不是算法更聪明，而是&lt;b&gt;把每一步都做成 GPU 原生的形状&lt;/b&gt;——这才是「普通显卡上实时」的落点。&lt;/Text&gt;&#13;&#10;    &lt;/Box&gt;&#13;&#10;&lt;/Slide&gt;&#13;&#10;"/>
         <p:cNvGrpSpPr/>
         <p:nvPr/>
       </p:nvGrpSpPr>
@@ -5926,8 +5926,8 @@
         </p:nvSpPr>
         <p:spPr>
           <a:xfrm rot="0" flipH="0" flipV="0">
-            <a:off x="381000" y="361950"/>
-            <a:ext cx="5181600" cy="390525"/>
+            <a:off x="381000" y="200025"/>
+            <a:ext cx="5848350" cy="361950"/>
           </a:xfrm>
           <a:prstGeom prst="rect"/>
         </p:spPr>
@@ -5940,14 +5940,34 @@
               </a:lnSpc>
             </a:pPr>
             <a:r>
-              <a:rPr lang="zh-CN" sz="2550" b="1">
+              <a:rPr lang="zh-CN" sz="2325" b="1">
                 <a:solidFill>
                   <a:srgbClr val="1E4FA8"/>
                 </a:solidFill>
                 <a:latin typeface="Microsoft YaHei"/>
                 <a:ea typeface="Microsoft YaHei"/>
               </a:rPr>
-              <a:t>不足与改进：哪些是硬伤，哪些能补</a:t>
+              <a:t>核心优化：位姿求解是作者自己写的</a:t>
+            </a:r>
+            <a:r>
+              <a:rPr lang="en-US" sz="2325" b="1">
+                <a:solidFill>
+                  <a:srgbClr val="1E4FA8"/>
+                </a:solidFill>
+                <a:latin typeface="Microsoft YaHei"/>
+                <a:ea typeface="Microsoft YaHei"/>
+              </a:rPr>
+              <a:t xml:space="preserve"> GPU </a:t>
+            </a:r>
+            <a:r>
+              <a:rPr lang="zh-CN" sz="2325" b="1">
+                <a:solidFill>
+                  <a:srgbClr val="1E4FA8"/>
+                </a:solidFill>
+                <a:latin typeface="Microsoft YaHei"/>
+                <a:ea typeface="Microsoft YaHei"/>
+              </a:rPr>
+              <a:t>核</a:t>
             </a:r>
             <a:endParaRPr/>
           </a:p>
@@ -5961,7 +5981,7 @@
         </p:nvSpPr>
         <p:spPr>
           <a:xfrm rot="0" flipH="0" flipV="0">
-            <a:off x="11325225" y="581025"/>
+            <a:off x="11325225" y="390525"/>
             <a:ext cx="485775" cy="171450"/>
           </a:xfrm>
           <a:prstGeom prst="rect"/>
@@ -5996,28 +6016,148 @@
         </p:nvSpPr>
         <p:spPr>
           <a:xfrm rot="0" flipH="0" flipV="0">
-            <a:off x="381000" y="923925"/>
-            <a:ext cx="11430000" cy="361950"/>
-          </a:xfrm>
-          <a:prstGeom prst="rect"/>
-        </p:spPr>
-        <p:txBody>
-          <a:bodyPr wrap="none" lIns="0" tIns="0" rIns="0" bIns="0"/>
-          <a:p>
-            <a:pPr>
-              <a:lnSpc>
-                <a:spcPct val="150000"/>
-              </a:lnSpc>
-            </a:pPr>
-            <a:r>
-              <a:rPr lang="zh-CN" sz="1575">
+            <a:off x="381000" y="609600"/>
+            <a:ext cx="11430000" cy="200025"/>
+          </a:xfrm>
+          <a:prstGeom prst="rect"/>
+        </p:spPr>
+        <p:txBody>
+          <a:bodyPr wrap="none" lIns="0" tIns="0" rIns="0" bIns="0"/>
+          <a:p>
+            <a:pPr>
+              <a:lnSpc>
+                <a:spcPct val="100000"/>
+              </a:lnSpc>
+            </a:pPr>
+            <a:r>
+              <a:rPr lang="zh-CN" sz="1275">
                 <a:solidFill>
                   <a:srgbClr val="4A5568"/>
                 </a:solidFill>
                 <a:latin typeface="Microsoft YaHei"/>
                 <a:ea typeface="Microsoft YaHei"/>
               </a:rPr>
-              <a:t>左栏是它现在的边界（均来自论文自述），右栏是对应的补法。</a:t>
+              <a:t>论文没有调用</a:t>
+            </a:r>
+            <a:r>
+              <a:rPr lang="en-US" sz="1275">
+                <a:solidFill>
+                  <a:srgbClr val="4A5568"/>
+                </a:solidFill>
+                <a:latin typeface="Microsoft YaHei"/>
+                <a:ea typeface="Microsoft YaHei"/>
+              </a:rPr>
+              <a:t xml:space="preserve"> g2o / Ceres / CUDA-BA</a:t>
+            </a:r>
+            <a:r>
+              <a:rPr lang="zh-CN" sz="1275">
+                <a:solidFill>
+                  <a:srgbClr val="4A5568"/>
+                </a:solidFill>
+                <a:latin typeface="Microsoft YaHei"/>
+                <a:ea typeface="Microsoft YaHei"/>
+              </a:rPr>
+              <a:t>，第</a:t>
+            </a:r>
+            <a:r>
+              <a:rPr lang="en-US" sz="1275">
+                <a:solidFill>
+                  <a:srgbClr val="4A5568"/>
+                </a:solidFill>
+                <a:latin typeface="Microsoft YaHei"/>
+                <a:ea typeface="Microsoft YaHei"/>
+              </a:rPr>
+              <a:t xml:space="preserve"> ⑤ </a:t>
+            </a:r>
+            <a:r>
+              <a:rPr lang="zh-CN" sz="1275">
+                <a:solidFill>
+                  <a:srgbClr val="4A5568"/>
+                </a:solidFill>
+                <a:latin typeface="Microsoft YaHei"/>
+                <a:ea typeface="Microsoft YaHei"/>
+              </a:rPr>
+              <a:t>步的</a:t>
+            </a:r>
+            <a:r>
+              <a:rPr lang="en-US" sz="1275">
+                <a:solidFill>
+                  <a:srgbClr val="4A5568"/>
+                </a:solidFill>
+                <a:latin typeface="Microsoft YaHei"/>
+                <a:ea typeface="Microsoft YaHei"/>
+              </a:rPr>
+              <a:t xml:space="preserve"> BA </a:t>
+            </a:r>
+            <a:r>
+              <a:rPr lang="zh-CN" sz="1275">
+                <a:solidFill>
+                  <a:srgbClr val="4A5568"/>
+                </a:solidFill>
+                <a:latin typeface="Microsoft YaHei"/>
+                <a:ea typeface="Microsoft YaHei"/>
+              </a:rPr>
+              <a:t>从残差到求解全是自己写的：</a:t>
+            </a:r>
+            <a:r>
+              <a:rPr lang="zh-CN" sz="1275">
+                <a:solidFill>
+                  <a:srgbClr val="4A5568"/>
+                </a:solidFill>
+                <a:latin typeface="Microsoft YaHei"/>
+                <a:ea typeface="Microsoft YaHei"/>
+              </a:rPr>
+              <a:t>雅可比解析、</a:t>
+            </a:r>
+            <a:r>
+              <a:rPr lang="en-US" sz="1275">
+                <a:solidFill>
+                  <a:srgbClr val="4A5568"/>
+                </a:solidFill>
+                <a:latin typeface="Microsoft YaHei"/>
+                <a:ea typeface="Microsoft YaHei"/>
+              </a:rPr>
+              <a:t xml:space="preserve">LM </a:t>
+            </a:r>
+            <a:r>
+              <a:rPr lang="zh-CN" sz="1275">
+                <a:solidFill>
+                  <a:srgbClr val="4A5568"/>
+                </a:solidFill>
+                <a:latin typeface="Microsoft YaHei"/>
+                <a:ea typeface="Microsoft YaHei"/>
+              </a:rPr>
+              <a:t>迭代、</a:t>
+            </a:r>
+            <a:r>
+              <a:rPr lang="en-US" sz="1275">
+                <a:solidFill>
+                  <a:srgbClr val="4A5568"/>
+                </a:solidFill>
+                <a:latin typeface="Microsoft YaHei"/>
+                <a:ea typeface="Microsoft YaHei"/>
+              </a:rPr>
+              <a:t xml:space="preserve">Schur </a:t>
+            </a:r>
+            <a:r>
+              <a:rPr lang="zh-CN" sz="1275">
+                <a:solidFill>
+                  <a:srgbClr val="4A5568"/>
+                </a:solidFill>
+                <a:latin typeface="Microsoft YaHei"/>
+                <a:ea typeface="Microsoft YaHei"/>
+              </a:rPr>
+              <a:t>消元、位姿更新，四步都留在显存里</a:t>
+            </a:r>
+            <a:r>
+              <a:rPr lang="zh-CN" sz="1275">
+                <a:solidFill>
+                  <a:srgbClr val="4A5568"/>
+                </a:solidFill>
+                <a:latin typeface="Microsoft YaHei"/>
+                <a:ea typeface="Microsoft YaHei"/>
+              </a:rPr>
+              <a:t>。</a:t>
             </a:r>
             <a:endParaRPr/>
           </a:p>
@@ -6031,14 +6171,167 @@
         </p:nvSpPr>
         <p:spPr>
           <a:xfrm rot="0" flipH="0" flipV="0">
-            <a:off x="381000" y="1428750"/>
-            <a:ext cx="47625" cy="247650"/>
+            <a:off x="381000" y="876300"/>
+            <a:ext cx="5648325" cy="2038350"/>
+          </a:xfrm>
+          <a:prstGeom prst="roundRect">
+            <a:avLst>
+              <a:gd name="adj" fmla="val 2336"/>
+            </a:avLst>
+          </a:prstGeom>
+          <a:solidFill>
+            <a:srgbClr val="1E1E1E"/>
+          </a:solidFill>
+          <a:ln/>
+        </p:spPr>
+        <p:txBody>
+          <a:bodyPr/>
+          <a:p/>
+        </p:txBody>
+      </p:sp>
+      <p:sp>
+        <p:nvSpPr>
+          <p:cNvPr id="124" name="" descr="{&quot;isTemplate&quot;:true,&quot;type&quot;:&quot;text&quot;}"/>
+          <p:cNvSpPr txBox="1"/>
+          <p:nvPr/>
+        </p:nvSpPr>
+        <p:spPr>
+          <a:xfrm rot="0" flipH="0" flipV="0">
+            <a:off x="476250" y="923925"/>
+            <a:ext cx="5457825" cy="161925"/>
+          </a:xfrm>
+          <a:prstGeom prst="rect"/>
+        </p:spPr>
+        <p:txBody>
+          <a:bodyPr wrap="none" lIns="0" tIns="0" rIns="0" bIns="0"/>
+          <a:p>
+            <a:pPr>
+              <a:lnSpc>
+                <a:spcPct val="100000"/>
+              </a:lnSpc>
+            </a:pPr>
+            <a:r>
+              <a:rPr lang="zh-CN" sz="1013" b="1">
+                <a:solidFill>
+                  <a:srgbClr val="8FBBFF"/>
+                </a:solidFill>
+                <a:latin typeface="Microsoft YaHei"/>
+                <a:ea typeface="Microsoft YaHei"/>
+              </a:rPr>
+              <a:t>优化</a:t>
+            </a:r>
+            <a:r>
+              <a:rPr lang="en-US" sz="1013" b="1">
+                <a:solidFill>
+                  <a:srgbClr val="8FBBFF"/>
+                </a:solidFill>
+                <a:latin typeface="Microsoft YaHei"/>
+                <a:ea typeface="Microsoft YaHei"/>
+              </a:rPr>
+              <a:t xml:space="preserve"> 1</a:t>
+            </a:r>
+            <a:r>
+              <a:rPr lang="zh-CN" sz="1013" b="1">
+                <a:solidFill>
+                  <a:srgbClr val="8FBBFF"/>
+                </a:solidFill>
+                <a:latin typeface="Microsoft YaHei"/>
+                <a:ea typeface="Microsoft YaHei"/>
+              </a:rPr>
+              <a:t>　手写解析雅可比，废掉</a:t>
+            </a:r>
+            <a:r>
+              <a:rPr lang="en-US" sz="1013" b="1">
+                <a:solidFill>
+                  <a:srgbClr val="8FBBFF"/>
+                </a:solidFill>
+                <a:latin typeface="Microsoft YaHei"/>
+                <a:ea typeface="Microsoft YaHei"/>
+              </a:rPr>
+              <a:t xml:space="preserve"> autograd</a:t>
+            </a:r>
+            <a:endParaRPr/>
+          </a:p>
+        </p:txBody>
+      </p:sp>
+      <p:sp>
+        <p:nvSpPr>
+          <p:cNvPr id="125" name="" descr="{&quot;isTemplate&quot;:true,&quot;type&quot;:&quot;text&quot;}"/>
+          <p:cNvSpPr txBox="1"/>
+          <p:nvPr/>
+        </p:nvSpPr>
+        <p:spPr>
+          <a:xfrm rot="0" flipH="0" flipV="0">
+            <a:off x="476250" y="1085850"/>
+            <a:ext cx="5457825" cy="114300"/>
+          </a:xfrm>
+          <a:prstGeom prst="rect"/>
+        </p:spPr>
+        <p:txBody>
+          <a:bodyPr wrap="none" lIns="0" tIns="0" rIns="0" bIns="0"/>
+          <a:p>
+            <a:pPr>
+              <a:lnSpc>
+                <a:spcPct val="100000"/>
+              </a:lnSpc>
+            </a:pPr>
+            <a:r>
+              <a:rPr lang="en-US" sz="750">
+                <a:solidFill>
+                  <a:srgbClr val="7F8C9F"/>
+                </a:solidFill>
+                <a:latin typeface="Consolas"/>
+                <a:ea typeface="Consolas"/>
+              </a:rPr>
+              <a:t>poses/mini_ba_utils.cu:133</a:t>
+            </a:r>
+            <a:endParaRPr/>
+          </a:p>
+        </p:txBody>
+      </p:sp>
+      <p:pic>
+        <p:nvPicPr>
+          <p:cNvPr id="126" name=""/>
+          <p:cNvPicPr>
+            <a:picLocks noChangeAspect="1"/>
+          </p:cNvPicPr>
+          <p:nvPr/>
+        </p:nvPicPr>
+        <p:blipFill>
+          <a:blip r:embed="rId1"/>
+          <a:stretch>
+            <a:fillRect/>
+          </a:stretch>
+        </p:blipFill>
+        <p:spPr>
+          <a:xfrm rot="0" flipH="0" flipV="0">
+            <a:off x="476250" y="1219200"/>
+            <a:ext cx="5514975" cy="1647825"/>
           </a:xfrm>
           <a:prstGeom prst="rect">
             <a:avLst/>
           </a:prstGeom>
+          <a:ln/>
+        </p:spPr>
+      </p:pic>
+      <p:sp>
+        <p:nvSpPr>
+          <p:cNvPr id="127" name=""/>
+          <p:cNvSpPr/>
+          <p:nvPr/>
+        </p:nvSpPr>
+        <p:spPr>
+          <a:xfrm rot="0" flipH="0" flipV="0">
+            <a:off x="381000" y="3009900"/>
+            <a:ext cx="5648325" cy="2038350"/>
+          </a:xfrm>
+          <a:prstGeom prst="roundRect">
+            <a:avLst>
+              <a:gd name="adj" fmla="val 2336"/>
+            </a:avLst>
+          </a:prstGeom>
           <a:solidFill>
-            <a:srgbClr val="D9534F"/>
+            <a:srgbClr val="1E1E1E"/>
           </a:solidFill>
           <a:ln/>
         </p:spPr>
@@ -6049,14 +6342,14 @@
       </p:sp>
       <p:sp>
         <p:nvSpPr>
-          <p:cNvPr id="124" name="" descr="{&quot;isTemplate&quot;:true,&quot;type&quot;:&quot;text&quot;}"/>
-          <p:cNvSpPr txBox="1"/>
-          <p:nvPr/>
-        </p:nvSpPr>
-        <p:spPr>
-          <a:xfrm rot="0" flipH="0" flipV="0">
-            <a:off x="504825" y="1400175"/>
-            <a:ext cx="1733550" cy="304800"/>
+          <p:cNvPr id="128" name="" descr="{&quot;isTemplate&quot;:true,&quot;type&quot;:&quot;text&quot;}"/>
+          <p:cNvSpPr txBox="1"/>
+          <p:nvPr/>
+        </p:nvSpPr>
+        <p:spPr>
+          <a:xfrm rot="0" flipH="0" flipV="0">
+            <a:off x="476250" y="3057525"/>
+            <a:ext cx="5457825" cy="161925"/>
           </a:xfrm>
           <a:prstGeom prst="rect"/>
         </p:spPr>
@@ -6069,423 +6362,137 @@
               </a:lnSpc>
             </a:pPr>
             <a:r>
-              <a:rPr lang="zh-CN" sz="1950" b="1">
-                <a:solidFill>
-                  <a:srgbClr val="1A2230"/>
-                </a:solidFill>
-                <a:latin typeface="Microsoft YaHei"/>
-                <a:ea typeface="Microsoft YaHei"/>
-              </a:rPr>
-              <a:t>目前方法的不足</a:t>
-            </a:r>
-            <a:endParaRPr/>
-          </a:p>
-        </p:txBody>
-      </p:sp>
-      <p:sp>
-        <p:nvSpPr>
-          <p:cNvPr id="125" name="" descr="{&quot;isTemplate&quot;:true,&quot;type&quot;:&quot;text&quot;}"/>
-          <p:cNvSpPr txBox="1"/>
-          <p:nvPr/>
-        </p:nvSpPr>
-        <p:spPr>
-          <a:xfrm rot="0" flipH="0" flipV="0">
-            <a:off x="381000" y="1857375"/>
-            <a:ext cx="5467350" cy="714375"/>
-          </a:xfrm>
-          <a:prstGeom prst="rect"/>
-        </p:spPr>
-        <p:txBody>
-          <a:bodyPr wrap="square" lIns="0" tIns="0" rIns="0" bIns="0">
-            <a:normAutofit/>
-          </a:bodyPr>
-          <a:p>
-            <a:pPr>
-              <a:lnSpc>
-                <a:spcPct val="155000"/>
-              </a:lnSpc>
-            </a:pPr>
-            <a:r>
-              <a:rPr lang="en-US" sz="1500">
-                <a:solidFill>
-                  <a:srgbClr val="1A2230"/>
-                </a:solidFill>
-                <a:latin typeface="Microsoft YaHei"/>
-                <a:ea typeface="Microsoft YaHei"/>
-              </a:rPr>
-              <a:t xml:space="preserve">① </a:t>
-            </a:r>
-            <a:r>
-              <a:rPr lang="zh-CN" sz="1500">
-                <a:solidFill>
-                  <a:srgbClr val="1A2230"/>
-                </a:solidFill>
-                <a:latin typeface="Microsoft YaHei"/>
-                <a:ea typeface="Microsoft YaHei"/>
-              </a:rPr>
-              <a:t>低视差直接失效</a:t>
-            </a:r>
-            <a:r>
-              <a:rPr lang="zh-CN" sz="1500">
-                <a:solidFill>
-                  <a:srgbClr val="1A2230"/>
-                </a:solidFill>
-                <a:latin typeface="Microsoft YaHei"/>
-                <a:ea typeface="Microsoft YaHei"/>
-              </a:rPr>
-              <a:t>　纯旋转或平移太小，三角化不出深度，论文自述这类采集会失败。</a:t>
-            </a:r>
-            <a:endParaRPr/>
-          </a:p>
-        </p:txBody>
-      </p:sp>
-      <p:sp>
-        <p:nvSpPr>
-          <p:cNvPr id="126" name="" descr="{&quot;isTemplate&quot;:true,&quot;type&quot;:&quot;text&quot;}"/>
-          <p:cNvSpPr txBox="1"/>
-          <p:nvPr/>
-        </p:nvSpPr>
-        <p:spPr>
-          <a:xfrm rot="0" flipH="0" flipV="0">
-            <a:off x="381000" y="2724150"/>
-            <a:ext cx="5467350" cy="714375"/>
-          </a:xfrm>
-          <a:prstGeom prst="rect"/>
-        </p:spPr>
-        <p:txBody>
-          <a:bodyPr wrap="square" lIns="0" tIns="0" rIns="0" bIns="0">
-            <a:normAutofit/>
-          </a:bodyPr>
-          <a:p>
-            <a:pPr>
-              <a:lnSpc>
-                <a:spcPct val="155000"/>
-              </a:lnSpc>
-            </a:pPr>
-            <a:r>
-              <a:rPr lang="en-US" sz="1500">
-                <a:solidFill>
-                  <a:srgbClr val="1A2230"/>
-                </a:solidFill>
-                <a:latin typeface="Microsoft YaHei"/>
-                <a:ea typeface="Microsoft YaHei"/>
-              </a:rPr>
-              <a:t xml:space="preserve">② </a:t>
-            </a:r>
-            <a:r>
-              <a:rPr lang="zh-CN" sz="1500">
-                <a:solidFill>
-                  <a:srgbClr val="1A2230"/>
-                </a:solidFill>
-                <a:latin typeface="Microsoft YaHei"/>
-                <a:ea typeface="Microsoft YaHei"/>
-              </a:rPr>
-              <a:t>精度有天花板</a:t>
-            </a:r>
-            <a:r>
-              <a:rPr lang="zh-CN" sz="1500">
-                <a:solidFill>
-                  <a:srgbClr val="1A2230"/>
-                </a:solidFill>
-                <a:latin typeface="Microsoft YaHei"/>
-                <a:ea typeface="Microsoft YaHei"/>
-              </a:rPr>
-              <a:t>　作者用</a:t>
-            </a:r>
-            <a:r>
-              <a:rPr lang="en-US" sz="1500">
-                <a:solidFill>
-                  <a:srgbClr val="1A2230"/>
-                </a:solidFill>
-                <a:latin typeface="Microsoft YaHei"/>
-                <a:ea typeface="Microsoft YaHei"/>
-              </a:rPr>
-              <a:t xml:space="preserve"> NoGraphProp </a:t>
-            </a:r>
-            <a:r>
-              <a:rPr lang="zh-CN" sz="1500">
-                <a:solidFill>
-                  <a:srgbClr val="1A2230"/>
-                </a:solidFill>
-                <a:latin typeface="Microsoft YaHei"/>
-                <a:ea typeface="Microsoft YaHei"/>
-              </a:rPr>
-              <a:t>消融证明图传播不比全局</a:t>
-            </a:r>
-            <a:r>
-              <a:rPr lang="en-US" sz="1500">
-                <a:solidFill>
-                  <a:srgbClr val="1A2230"/>
-                </a:solidFill>
-                <a:latin typeface="Microsoft YaHei"/>
-                <a:ea typeface="Microsoft YaHei"/>
-              </a:rPr>
-              <a:t xml:space="preserve"> PGO </a:t>
-            </a:r>
-            <a:r>
-              <a:rPr lang="zh-CN" sz="1500">
-                <a:solidFill>
-                  <a:srgbClr val="1A2230"/>
-                </a:solidFill>
-                <a:latin typeface="Microsoft YaHei"/>
-                <a:ea typeface="Microsoft YaHei"/>
-              </a:rPr>
-              <a:t>差，但同时承认仍不如全局</a:t>
-            </a:r>
-            <a:r>
-              <a:rPr lang="en-US" sz="1500">
-                <a:solidFill>
-                  <a:srgbClr val="1A2230"/>
-                </a:solidFill>
-                <a:latin typeface="Microsoft YaHei"/>
-                <a:ea typeface="Microsoft YaHei"/>
-              </a:rPr>
-              <a:t xml:space="preserve"> BA</a:t>
-            </a:r>
-            <a:r>
-              <a:rPr lang="zh-CN" sz="1500">
-                <a:solidFill>
-                  <a:srgbClr val="1A2230"/>
-                </a:solidFill>
-                <a:latin typeface="Microsoft YaHei"/>
-                <a:ea typeface="Microsoft YaHei"/>
-              </a:rPr>
-              <a:t>。</a:t>
-            </a:r>
-            <a:endParaRPr/>
-          </a:p>
-        </p:txBody>
-      </p:sp>
-      <p:sp>
-        <p:nvSpPr>
-          <p:cNvPr id="127" name="" descr="{&quot;isTemplate&quot;:true,&quot;type&quot;:&quot;text&quot;}"/>
-          <p:cNvSpPr txBox="1"/>
-          <p:nvPr/>
-        </p:nvSpPr>
-        <p:spPr>
-          <a:xfrm rot="0" flipH="0" flipV="0">
-            <a:off x="381000" y="3590925"/>
-            <a:ext cx="5467350" cy="714375"/>
-          </a:xfrm>
-          <a:prstGeom prst="rect"/>
-        </p:spPr>
-        <p:txBody>
-          <a:bodyPr wrap="square" lIns="0" tIns="0" rIns="0" bIns="0">
-            <a:normAutofit/>
-          </a:bodyPr>
-          <a:p>
-            <a:pPr>
-              <a:lnSpc>
-                <a:spcPct val="155000"/>
-              </a:lnSpc>
-            </a:pPr>
-            <a:r>
-              <a:rPr lang="en-US" sz="1500">
-                <a:solidFill>
-                  <a:srgbClr val="1A2230"/>
-                </a:solidFill>
-                <a:latin typeface="Microsoft YaHei"/>
-                <a:ea typeface="Microsoft YaHei"/>
-              </a:rPr>
-              <a:t xml:space="preserve">③ </a:t>
-            </a:r>
-            <a:r>
-              <a:rPr lang="zh-CN" sz="1500">
-                <a:solidFill>
-                  <a:srgbClr val="1A2230"/>
-                </a:solidFill>
-                <a:latin typeface="Microsoft YaHei"/>
-                <a:ea typeface="Microsoft YaHei"/>
-              </a:rPr>
-              <a:t>上游依赖重</a:t>
-            </a:r>
-            <a:r>
-              <a:rPr lang="zh-CN" sz="1500">
-                <a:solidFill>
-                  <a:srgbClr val="1A2230"/>
-                </a:solidFill>
-                <a:latin typeface="Microsoft YaHei"/>
-                <a:ea typeface="Microsoft YaHei"/>
-              </a:rPr>
-              <a:t>　</a:t>
-            </a:r>
-            <a:r>
-              <a:rPr lang="en-US" sz="1500">
-                <a:solidFill>
-                  <a:srgbClr val="1A2230"/>
-                </a:solidFill>
-                <a:latin typeface="Microsoft YaHei"/>
-                <a:ea typeface="Microsoft YaHei"/>
-              </a:rPr>
-              <a:t xml:space="preserve">VPR + XFeat + LightGlue + Depth Anything 3 </a:t>
-            </a:r>
-            <a:r>
-              <a:rPr lang="zh-CN" sz="1500">
-                <a:solidFill>
-                  <a:srgbClr val="1A2230"/>
-                </a:solidFill>
-                <a:latin typeface="Microsoft YaHei"/>
-                <a:ea typeface="Microsoft YaHei"/>
-              </a:rPr>
-              <a:t>串成一条链，任一环失效整条断。</a:t>
-            </a:r>
-            <a:endParaRPr/>
-          </a:p>
-        </p:txBody>
-      </p:sp>
-      <p:sp>
-        <p:nvSpPr>
-          <p:cNvPr id="128" name="" descr="{&quot;isTemplate&quot;:true,&quot;type&quot;:&quot;text&quot;}"/>
-          <p:cNvSpPr txBox="1"/>
-          <p:nvPr/>
-        </p:nvSpPr>
-        <p:spPr>
-          <a:xfrm rot="0" flipH="0" flipV="0">
-            <a:off x="381000" y="4457700"/>
-            <a:ext cx="5467350" cy="714375"/>
-          </a:xfrm>
-          <a:prstGeom prst="rect"/>
-        </p:spPr>
-        <p:txBody>
-          <a:bodyPr wrap="square" lIns="0" tIns="0" rIns="0" bIns="0">
-            <a:normAutofit/>
-          </a:bodyPr>
-          <a:p>
-            <a:pPr>
-              <a:lnSpc>
-                <a:spcPct val="155000"/>
-              </a:lnSpc>
-            </a:pPr>
-            <a:r>
-              <a:rPr lang="en-US" sz="1500">
-                <a:solidFill>
-                  <a:srgbClr val="1A2230"/>
-                </a:solidFill>
-                <a:latin typeface="Microsoft YaHei"/>
-                <a:ea typeface="Microsoft YaHei"/>
-              </a:rPr>
-              <a:t xml:space="preserve">④ </a:t>
-            </a:r>
-            <a:r>
-              <a:rPr lang="zh-CN" sz="1500">
-                <a:solidFill>
-                  <a:srgbClr val="1A2230"/>
-                </a:solidFill>
-                <a:latin typeface="Microsoft YaHei"/>
-                <a:ea typeface="Microsoft YaHei"/>
-              </a:rPr>
-              <a:t>阈值靠经验</a:t>
-            </a:r>
-            <a:r>
-              <a:rPr lang="zh-CN" sz="1500">
-                <a:solidFill>
-                  <a:srgbClr val="1A2230"/>
-                </a:solidFill>
-                <a:latin typeface="Microsoft YaHei"/>
-                <a:ea typeface="Microsoft YaHei"/>
-              </a:rPr>
-              <a:t>　合并</a:t>
-            </a:r>
-            <a:r>
-              <a:rPr lang="en-US" sz="1500">
-                <a:solidFill>
-                  <a:srgbClr val="1A2230"/>
-                </a:solidFill>
-                <a:latin typeface="Microsoft YaHei"/>
-                <a:ea typeface="Microsoft YaHei"/>
-              </a:rPr>
-              <a:t xml:space="preserve"> 0.5 px / </a:t>
-            </a:r>
-            <a:r>
-              <a:rPr lang="zh-CN" sz="1500">
-                <a:solidFill>
-                  <a:srgbClr val="1A2230"/>
-                </a:solidFill>
-                <a:latin typeface="Microsoft YaHei"/>
-                <a:ea typeface="Microsoft YaHei"/>
-              </a:rPr>
-              <a:t>占比</a:t>
-            </a:r>
-            <a:r>
-              <a:rPr lang="en-US" sz="1500">
-                <a:solidFill>
-                  <a:srgbClr val="1A2230"/>
-                </a:solidFill>
-                <a:latin typeface="Microsoft YaHei"/>
-                <a:ea typeface="Microsoft YaHei"/>
-              </a:rPr>
-              <a:t xml:space="preserve"> 10%</a:t>
-            </a:r>
-            <a:r>
-              <a:rPr lang="zh-CN" sz="1500">
-                <a:solidFill>
-                  <a:srgbClr val="1A2230"/>
-                </a:solidFill>
-                <a:latin typeface="Microsoft YaHei"/>
-                <a:ea typeface="Microsoft YaHei"/>
-              </a:rPr>
-              <a:t>、加权图距</a:t>
-            </a:r>
-            <a:r>
-              <a:rPr lang="en-US" sz="1500">
-                <a:solidFill>
-                  <a:srgbClr val="1A2230"/>
-                </a:solidFill>
-                <a:latin typeface="Microsoft YaHei"/>
-                <a:ea typeface="Microsoft YaHei"/>
-              </a:rPr>
-              <a:t xml:space="preserve"> 10</a:t>
-            </a:r>
-            <a:r>
-              <a:rPr lang="zh-CN" sz="1500">
-                <a:solidFill>
-                  <a:srgbClr val="1A2230"/>
-                </a:solidFill>
-                <a:latin typeface="Microsoft YaHei"/>
-                <a:ea typeface="Microsoft YaHei"/>
-              </a:rPr>
-              <a:t>、建边</a:t>
-            </a:r>
-            <a:r>
-              <a:rPr lang="en-US" sz="1500">
-                <a:solidFill>
-                  <a:srgbClr val="1A2230"/>
-                </a:solidFill>
-                <a:latin typeface="Microsoft YaHei"/>
-                <a:ea typeface="Microsoft YaHei"/>
-              </a:rPr>
-              <a:t xml:space="preserve"> 500 </a:t>
-            </a:r>
-            <a:r>
-              <a:rPr lang="zh-CN" sz="1500">
-                <a:solidFill>
-                  <a:srgbClr val="1A2230"/>
-                </a:solidFill>
-                <a:latin typeface="Microsoft YaHei"/>
-                <a:ea typeface="Microsoft YaHei"/>
-              </a:rPr>
-              <a:t>匹配，换场景需重调。</a:t>
-            </a:r>
-            <a:endParaRPr/>
-          </a:p>
-        </p:txBody>
-      </p:sp>
-      <p:sp>
-        <p:nvSpPr>
-          <p:cNvPr id="129" name=""/>
-          <p:cNvSpPr/>
-          <p:nvPr/>
-        </p:nvSpPr>
-        <p:spPr>
-          <a:xfrm rot="0" flipH="0" flipV="0">
-            <a:off x="6096000" y="1400175"/>
-            <a:ext cx="9525" cy="3933825"/>
+              <a:rPr lang="zh-CN" sz="1013" b="1">
+                <a:solidFill>
+                  <a:srgbClr val="8FBBFF"/>
+                </a:solidFill>
+                <a:latin typeface="Microsoft YaHei"/>
+                <a:ea typeface="Microsoft YaHei"/>
+              </a:rPr>
+              <a:t>优化</a:t>
+            </a:r>
+            <a:r>
+              <a:rPr lang="en-US" sz="1013" b="1">
+                <a:solidFill>
+                  <a:srgbClr val="8FBBFF"/>
+                </a:solidFill>
+                <a:latin typeface="Microsoft YaHei"/>
+                <a:ea typeface="Microsoft YaHei"/>
+              </a:rPr>
+              <a:t xml:space="preserve"> 2</a:t>
+            </a:r>
+            <a:r>
+              <a:rPr lang="zh-CN" sz="1013" b="1">
+                <a:solidFill>
+                  <a:srgbClr val="8FBBFF"/>
+                </a:solidFill>
+                <a:latin typeface="Microsoft YaHei"/>
+                <a:ea typeface="Microsoft YaHei"/>
+              </a:rPr>
+              <a:t>　手写</a:t>
+            </a:r>
+            <a:r>
+              <a:rPr lang="en-US" sz="1013" b="1">
+                <a:solidFill>
+                  <a:srgbClr val="8FBBFF"/>
+                </a:solidFill>
+                <a:latin typeface="Microsoft YaHei"/>
+                <a:ea typeface="Microsoft YaHei"/>
+              </a:rPr>
+              <a:t xml:space="preserve"> se(3) </a:t>
+            </a:r>
+            <a:r>
+              <a:rPr lang="zh-CN" sz="1013" b="1">
+                <a:solidFill>
+                  <a:srgbClr val="8FBBFF"/>
+                </a:solidFill>
+                <a:latin typeface="Microsoft YaHei"/>
+                <a:ea typeface="Microsoft YaHei"/>
+              </a:rPr>
+              <a:t>指数映射，更新融成一个核</a:t>
+            </a:r>
+            <a:endParaRPr/>
+          </a:p>
+        </p:txBody>
+      </p:sp>
+      <p:sp>
+        <p:nvSpPr>
+          <p:cNvPr id="129" name="" descr="{&quot;isTemplate&quot;:true,&quot;type&quot;:&quot;text&quot;}"/>
+          <p:cNvSpPr txBox="1"/>
+          <p:nvPr/>
+        </p:nvSpPr>
+        <p:spPr>
+          <a:xfrm rot="0" flipH="0" flipV="0">
+            <a:off x="476250" y="3219450"/>
+            <a:ext cx="5457825" cy="114300"/>
+          </a:xfrm>
+          <a:prstGeom prst="rect"/>
+        </p:spPr>
+        <p:txBody>
+          <a:bodyPr wrap="none" lIns="0" tIns="0" rIns="0" bIns="0"/>
+          <a:p>
+            <a:pPr>
+              <a:lnSpc>
+                <a:spcPct val="100000"/>
+              </a:lnSpc>
+            </a:pPr>
+            <a:r>
+              <a:rPr lang="en-US" sz="750">
+                <a:solidFill>
+                  <a:srgbClr val="7F8C9F"/>
+                </a:solidFill>
+                <a:latin typeface="Consolas"/>
+                <a:ea typeface="Consolas"/>
+              </a:rPr>
+              <a:t>poses/mini_ba_utils.cu:186</a:t>
+            </a:r>
+            <a:endParaRPr/>
+          </a:p>
+        </p:txBody>
+      </p:sp>
+      <p:pic>
+        <p:nvPicPr>
+          <p:cNvPr id="130" name=""/>
+          <p:cNvPicPr>
+            <a:picLocks noChangeAspect="1"/>
+          </p:cNvPicPr>
+          <p:nvPr/>
+        </p:nvPicPr>
+        <p:blipFill>
+          <a:blip r:embed="rId2"/>
+          <a:stretch>
+            <a:fillRect/>
+          </a:stretch>
+        </p:blipFill>
+        <p:spPr>
+          <a:xfrm rot="0" flipH="0" flipV="0">
+            <a:off x="476250" y="3352800"/>
+            <a:ext cx="5514975" cy="1647825"/>
           </a:xfrm>
           <a:prstGeom prst="rect">
             <a:avLst/>
           </a:prstGeom>
+          <a:ln/>
+        </p:spPr>
+      </p:pic>
+      <p:sp>
+        <p:nvSpPr>
+          <p:cNvPr id="131" name=""/>
+          <p:cNvSpPr/>
+          <p:nvPr/>
+        </p:nvSpPr>
+        <p:spPr>
+          <a:xfrm rot="0" flipH="0" flipV="0">
+            <a:off x="6162675" y="876300"/>
+            <a:ext cx="5648325" cy="2209800"/>
+          </a:xfrm>
+          <a:prstGeom prst="roundRect">
+            <a:avLst>
+              <a:gd name="adj" fmla="val 2155"/>
+            </a:avLst>
+          </a:prstGeom>
           <a:solidFill>
-            <a:srgbClr val="D6DCE5"/>
+            <a:srgbClr val="1E1E1E"/>
           </a:solidFill>
           <a:ln/>
         </p:spPr>
@@ -6496,20 +6503,187 @@
       </p:sp>
       <p:sp>
         <p:nvSpPr>
-          <p:cNvPr id="130" name=""/>
-          <p:cNvSpPr/>
-          <p:nvPr/>
-        </p:nvSpPr>
-        <p:spPr>
-          <a:xfrm rot="0" flipH="0" flipV="0">
-            <a:off x="6353175" y="1428750"/>
-            <a:ext cx="47625" cy="247650"/>
+          <p:cNvPr id="132" name="" descr="{&quot;isTemplate&quot;:true,&quot;type&quot;:&quot;text&quot;}"/>
+          <p:cNvSpPr txBox="1"/>
+          <p:nvPr/>
+        </p:nvSpPr>
+        <p:spPr>
+          <a:xfrm rot="0" flipH="0" flipV="0">
+            <a:off x="6257925" y="923925"/>
+            <a:ext cx="5457825" cy="161925"/>
+          </a:xfrm>
+          <a:prstGeom prst="rect"/>
+        </p:spPr>
+        <p:txBody>
+          <a:bodyPr wrap="none" lIns="0" tIns="0" rIns="0" bIns="0"/>
+          <a:p>
+            <a:pPr>
+              <a:lnSpc>
+                <a:spcPct val="100000"/>
+              </a:lnSpc>
+            </a:pPr>
+            <a:r>
+              <a:rPr lang="zh-CN" sz="1013" b="1">
+                <a:solidFill>
+                  <a:srgbClr val="8FBBFF"/>
+                </a:solidFill>
+                <a:latin typeface="Microsoft YaHei"/>
+                <a:ea typeface="Microsoft YaHei"/>
+              </a:rPr>
+              <a:t>优化</a:t>
+            </a:r>
+            <a:r>
+              <a:rPr lang="en-US" sz="1013" b="1">
+                <a:solidFill>
+                  <a:srgbClr val="8FBBFF"/>
+                </a:solidFill>
+                <a:latin typeface="Microsoft YaHei"/>
+                <a:ea typeface="Microsoft YaHei"/>
+              </a:rPr>
+              <a:t xml:space="preserve"> 3</a:t>
+            </a:r>
+            <a:r>
+              <a:rPr lang="zh-CN" sz="1013" b="1">
+                <a:solidFill>
+                  <a:srgbClr val="8FBBFF"/>
+                </a:solidFill>
+                <a:latin typeface="Microsoft YaHei"/>
+                <a:ea typeface="Microsoft YaHei"/>
+              </a:rPr>
+              <a:t>　</a:t>
+            </a:r>
+            <a:r>
+              <a:rPr lang="en-US" sz="1013" b="1">
+                <a:solidFill>
+                  <a:srgbClr val="8FBBFF"/>
+                </a:solidFill>
+                <a:latin typeface="Microsoft YaHei"/>
+                <a:ea typeface="Microsoft YaHei"/>
+              </a:rPr>
+              <a:t xml:space="preserve">Schur </a:t>
+            </a:r>
+            <a:r>
+              <a:rPr lang="zh-CN" sz="1013" b="1">
+                <a:solidFill>
+                  <a:srgbClr val="8FBBFF"/>
+                </a:solidFill>
+                <a:latin typeface="Microsoft YaHei"/>
+                <a:ea typeface="Microsoft YaHei"/>
+              </a:rPr>
+              <a:t>补与</a:t>
+            </a:r>
+            <a:r>
+              <a:rPr lang="en-US" sz="1013" b="1">
+                <a:solidFill>
+                  <a:srgbClr val="8FBBFF"/>
+                </a:solidFill>
+                <a:latin typeface="Microsoft YaHei"/>
+                <a:ea typeface="Microsoft YaHei"/>
+              </a:rPr>
+              <a:t xml:space="preserve"> Cholesky </a:t>
+            </a:r>
+            <a:r>
+              <a:rPr lang="zh-CN" sz="1013" b="1">
+                <a:solidFill>
+                  <a:srgbClr val="8FBBFF"/>
+                </a:solidFill>
+                <a:latin typeface="Microsoft YaHei"/>
+                <a:ea typeface="Microsoft YaHei"/>
+              </a:rPr>
+              <a:t>不落回</a:t>
+            </a:r>
+            <a:r>
+              <a:rPr lang="en-US" sz="1013" b="1">
+                <a:solidFill>
+                  <a:srgbClr val="8FBBFF"/>
+                </a:solidFill>
+                <a:latin typeface="Microsoft YaHei"/>
+                <a:ea typeface="Microsoft YaHei"/>
+              </a:rPr>
+              <a:t xml:space="preserve"> CPU</a:t>
+            </a:r>
+            <a:endParaRPr/>
+          </a:p>
+        </p:txBody>
+      </p:sp>
+      <p:sp>
+        <p:nvSpPr>
+          <p:cNvPr id="133" name="" descr="{&quot;isTemplate&quot;:true,&quot;type&quot;:&quot;text&quot;}"/>
+          <p:cNvSpPr txBox="1"/>
+          <p:nvPr/>
+        </p:nvSpPr>
+        <p:spPr>
+          <a:xfrm rot="0" flipH="0" flipV="0">
+            <a:off x="6257925" y="1085850"/>
+            <a:ext cx="5457825" cy="114300"/>
+          </a:xfrm>
+          <a:prstGeom prst="rect"/>
+        </p:spPr>
+        <p:txBody>
+          <a:bodyPr wrap="none" lIns="0" tIns="0" rIns="0" bIns="0"/>
+          <a:p>
+            <a:pPr>
+              <a:lnSpc>
+                <a:spcPct val="100000"/>
+              </a:lnSpc>
+            </a:pPr>
+            <a:r>
+              <a:rPr lang="en-US" sz="750">
+                <a:solidFill>
+                  <a:srgbClr val="7F8C9F"/>
+                </a:solidFill>
+                <a:latin typeface="Consolas"/>
+                <a:ea typeface="Consolas"/>
+              </a:rPr>
+              <a:t>poses/mini_ba.py:296</a:t>
+            </a:r>
+            <a:endParaRPr/>
+          </a:p>
+        </p:txBody>
+      </p:sp>
+      <p:pic>
+        <p:nvPicPr>
+          <p:cNvPr id="134" name=""/>
+          <p:cNvPicPr>
+            <a:picLocks noChangeAspect="1"/>
+          </p:cNvPicPr>
+          <p:nvPr/>
+        </p:nvPicPr>
+        <p:blipFill>
+          <a:blip r:embed="rId3"/>
+          <a:stretch>
+            <a:fillRect/>
+          </a:stretch>
+        </p:blipFill>
+        <p:spPr>
+          <a:xfrm rot="0" flipH="0" flipV="0">
+            <a:off x="6257925" y="1219200"/>
+            <a:ext cx="5514975" cy="1819275"/>
           </a:xfrm>
           <a:prstGeom prst="rect">
             <a:avLst/>
           </a:prstGeom>
+          <a:ln/>
+        </p:spPr>
+      </p:pic>
+      <p:sp>
+        <p:nvSpPr>
+          <p:cNvPr id="135" name=""/>
+          <p:cNvSpPr/>
+          <p:nvPr/>
+        </p:nvSpPr>
+        <p:spPr>
+          <a:xfrm rot="0" flipH="0" flipV="0">
+            <a:off x="6162675" y="3181350"/>
+            <a:ext cx="5648325" cy="2209800"/>
+          </a:xfrm>
+          <a:prstGeom prst="roundRect">
+            <a:avLst>
+              <a:gd name="adj" fmla="val 2155"/>
+            </a:avLst>
+          </a:prstGeom>
           <a:solidFill>
-            <a:srgbClr val="1E4FA8"/>
+            <a:srgbClr val="1E1E1E"/>
           </a:solidFill>
           <a:ln/>
         </p:spPr>
@@ -6520,14 +6694,14 @@
       </p:sp>
       <p:sp>
         <p:nvSpPr>
-          <p:cNvPr id="131" name="" descr="{&quot;isTemplate&quot;:true,&quot;type&quot;:&quot;text&quot;}"/>
-          <p:cNvSpPr txBox="1"/>
-          <p:nvPr/>
-        </p:nvSpPr>
-        <p:spPr>
-          <a:xfrm rot="0" flipH="0" flipV="0">
-            <a:off x="6477000" y="1400175"/>
-            <a:ext cx="1485900" cy="304800"/>
+          <p:cNvPr id="136" name="" descr="{&quot;isTemplate&quot;:true,&quot;type&quot;:&quot;text&quot;}"/>
+          <p:cNvSpPr txBox="1"/>
+          <p:nvPr/>
+        </p:nvSpPr>
+        <p:spPr>
+          <a:xfrm rot="0" flipH="0" flipV="0">
+            <a:off x="6257925" y="3228975"/>
+            <a:ext cx="5457825" cy="161925"/>
           </a:xfrm>
           <a:prstGeom prst="rect"/>
         </p:spPr>
@@ -6540,490 +6714,169 @@
               </a:lnSpc>
             </a:pPr>
             <a:r>
-              <a:rPr lang="zh-CN" sz="1950" b="1">
-                <a:solidFill>
-                  <a:srgbClr val="1A2230"/>
-                </a:solidFill>
-                <a:latin typeface="Microsoft YaHei"/>
-                <a:ea typeface="Microsoft YaHei"/>
-              </a:rPr>
-              <a:t>以后的改进点</a:t>
-            </a:r>
-            <a:endParaRPr/>
-          </a:p>
-        </p:txBody>
-      </p:sp>
-      <p:sp>
-        <p:nvSpPr>
-          <p:cNvPr id="132" name="" descr="{&quot;isTemplate&quot;:true,&quot;type&quot;:&quot;text&quot;}"/>
-          <p:cNvSpPr txBox="1"/>
-          <p:nvPr/>
-        </p:nvSpPr>
-        <p:spPr>
-          <a:xfrm rot="0" flipH="0" flipV="0">
-            <a:off x="6353175" y="1857375"/>
-            <a:ext cx="5457825" cy="361950"/>
-          </a:xfrm>
-          <a:prstGeom prst="rect"/>
-        </p:spPr>
-        <p:txBody>
-          <a:bodyPr wrap="none" lIns="0" tIns="0" rIns="0" bIns="0"/>
-          <a:p>
-            <a:pPr>
-              <a:lnSpc>
-                <a:spcPct val="155000"/>
-              </a:lnSpc>
-            </a:pPr>
-            <a:r>
-              <a:rPr lang="en-US" sz="1500">
-                <a:solidFill>
-                  <a:srgbClr val="1A2230"/>
-                </a:solidFill>
-                <a:latin typeface="Microsoft YaHei"/>
-                <a:ea typeface="Microsoft YaHei"/>
-              </a:rPr>
-              <a:t xml:space="preserve">① </a:t>
-            </a:r>
-            <a:r>
-              <a:rPr lang="zh-CN" sz="1500">
-                <a:solidFill>
-                  <a:srgbClr val="1A2230"/>
-                </a:solidFill>
-                <a:latin typeface="Microsoft YaHei"/>
-                <a:ea typeface="Microsoft YaHei"/>
-              </a:rPr>
-              <a:t>低视差帧降级</a:t>
-            </a:r>
-            <a:r>
-              <a:rPr lang="zh-CN" sz="1500">
-                <a:solidFill>
-                  <a:srgbClr val="1A2230"/>
-                </a:solidFill>
-                <a:latin typeface="Microsoft YaHei"/>
-                <a:ea typeface="Microsoft YaHei"/>
-              </a:rPr>
-              <a:t>　只参与渲染、不进位姿求解，避免污染轨迹。</a:t>
-            </a:r>
-            <a:endParaRPr/>
-          </a:p>
-        </p:txBody>
-      </p:sp>
-      <p:sp>
-        <p:nvSpPr>
-          <p:cNvPr id="133" name="" descr="{&quot;isTemplate&quot;:true,&quot;type&quot;:&quot;text&quot;}"/>
-          <p:cNvSpPr txBox="1"/>
-          <p:nvPr/>
-        </p:nvSpPr>
-        <p:spPr>
-          <a:xfrm rot="0" flipH="0" flipV="0">
-            <a:off x="6353175" y="2371725"/>
-            <a:ext cx="5457825" cy="714375"/>
-          </a:xfrm>
-          <a:prstGeom prst="rect"/>
-        </p:spPr>
-        <p:txBody>
-          <a:bodyPr wrap="square" lIns="0" tIns="0" rIns="0" bIns="0">
-            <a:normAutofit/>
-          </a:bodyPr>
-          <a:p>
-            <a:pPr>
-              <a:lnSpc>
-                <a:spcPct val="155000"/>
-              </a:lnSpc>
-            </a:pPr>
-            <a:r>
-              <a:rPr lang="en-US" sz="1500">
-                <a:solidFill>
-                  <a:srgbClr val="1A2230"/>
-                </a:solidFill>
-                <a:latin typeface="Microsoft YaHei"/>
-                <a:ea typeface="Microsoft YaHei"/>
-              </a:rPr>
-              <a:t xml:space="preserve">② </a:t>
-            </a:r>
-            <a:r>
-              <a:rPr lang="zh-CN" sz="1500">
-                <a:solidFill>
-                  <a:srgbClr val="1A2230"/>
-                </a:solidFill>
-                <a:latin typeface="Microsoft YaHei"/>
-                <a:ea typeface="Microsoft YaHei"/>
-              </a:rPr>
-              <a:t>在线粗</a:t>
-            </a:r>
-            <a:r>
-              <a:rPr lang="en-US" sz="1500">
-                <a:solidFill>
-                  <a:srgbClr val="1A2230"/>
-                </a:solidFill>
-                <a:latin typeface="Microsoft YaHei"/>
-                <a:ea typeface="Microsoft YaHei"/>
-              </a:rPr>
-              <a:t xml:space="preserve"> + </a:t>
-            </a:r>
-            <a:r>
-              <a:rPr lang="zh-CN" sz="1500">
-                <a:solidFill>
-                  <a:srgbClr val="1A2230"/>
-                </a:solidFill>
-                <a:latin typeface="Microsoft YaHei"/>
-                <a:ea typeface="Microsoft YaHei"/>
-              </a:rPr>
-              <a:t>离线精</a:t>
-            </a:r>
-            <a:r>
-              <a:rPr lang="zh-CN" sz="1500">
-                <a:solidFill>
-                  <a:srgbClr val="1A2230"/>
-                </a:solidFill>
-                <a:latin typeface="Microsoft YaHei"/>
-                <a:ea typeface="Microsoft YaHei"/>
-              </a:rPr>
-              <a:t>　实时出预览，结束时用</a:t>
-            </a:r>
-            <a:r>
-              <a:rPr lang="en-US" sz="1500">
-                <a:solidFill>
-                  <a:srgbClr val="1A2230"/>
-                </a:solidFill>
-                <a:latin typeface="Microsoft YaHei"/>
-                <a:ea typeface="Microsoft YaHei"/>
-              </a:rPr>
-              <a:t xml:space="preserve"> GLOMAP </a:t>
-            </a:r>
-            <a:r>
-              <a:rPr lang="zh-CN" sz="1500">
-                <a:solidFill>
-                  <a:srgbClr val="1A2230"/>
-                </a:solidFill>
-                <a:latin typeface="Microsoft YaHei"/>
-                <a:ea typeface="Microsoft YaHei"/>
-              </a:rPr>
-              <a:t>回填一次全局</a:t>
-            </a:r>
-            <a:r>
-              <a:rPr lang="en-US" sz="1500">
-                <a:solidFill>
-                  <a:srgbClr val="1A2230"/>
-                </a:solidFill>
-                <a:latin typeface="Microsoft YaHei"/>
-                <a:ea typeface="Microsoft YaHei"/>
-              </a:rPr>
-              <a:t xml:space="preserve"> BA</a:t>
-            </a:r>
-            <a:r>
-              <a:rPr lang="zh-CN" sz="1500">
-                <a:solidFill>
-                  <a:srgbClr val="1A2230"/>
-                </a:solidFill>
-                <a:latin typeface="Microsoft YaHei"/>
-                <a:ea typeface="Microsoft YaHei"/>
-              </a:rPr>
-              <a:t>，把</a:t>
-            </a:r>
-            <a:r>
-              <a:rPr lang="en-US" sz="1500">
-                <a:solidFill>
-                  <a:srgbClr val="1A2230"/>
-                </a:solidFill>
-                <a:latin typeface="Microsoft YaHei"/>
-                <a:ea typeface="Microsoft YaHei"/>
-              </a:rPr>
-              <a:t xml:space="preserve"> 1.2 dB </a:t>
-            </a:r>
-            <a:r>
-              <a:rPr lang="zh-CN" sz="1500">
-                <a:solidFill>
-                  <a:srgbClr val="1A2230"/>
-                </a:solidFill>
-                <a:latin typeface="Microsoft YaHei"/>
-                <a:ea typeface="Microsoft YaHei"/>
-              </a:rPr>
-              <a:t>补回来。</a:t>
-            </a:r>
-            <a:endParaRPr/>
-          </a:p>
-        </p:txBody>
-      </p:sp>
-      <p:sp>
-        <p:nvSpPr>
-          <p:cNvPr id="134" name="" descr="{&quot;isTemplate&quot;:true,&quot;type&quot;:&quot;text&quot;}"/>
-          <p:cNvSpPr txBox="1"/>
-          <p:nvPr/>
-        </p:nvSpPr>
-        <p:spPr>
-          <a:xfrm rot="0" flipH="0" flipV="0">
-            <a:off x="6353175" y="3238500"/>
-            <a:ext cx="5457825" cy="714375"/>
-          </a:xfrm>
-          <a:prstGeom prst="rect"/>
-        </p:spPr>
-        <p:txBody>
-          <a:bodyPr wrap="square" lIns="0" tIns="0" rIns="0" bIns="0">
-            <a:normAutofit/>
-          </a:bodyPr>
-          <a:p>
-            <a:pPr>
-              <a:lnSpc>
-                <a:spcPct val="155000"/>
-              </a:lnSpc>
-            </a:pPr>
-            <a:r>
-              <a:rPr lang="en-US" sz="1500">
-                <a:solidFill>
-                  <a:srgbClr val="1A2230"/>
-                </a:solidFill>
-                <a:latin typeface="Microsoft YaHei"/>
-                <a:ea typeface="Microsoft YaHei"/>
-              </a:rPr>
-              <a:t xml:space="preserve">③ </a:t>
-            </a:r>
-            <a:r>
-              <a:rPr lang="zh-CN" sz="1500">
-                <a:solidFill>
-                  <a:srgbClr val="1A2230"/>
-                </a:solidFill>
-                <a:latin typeface="Microsoft YaHei"/>
-                <a:ea typeface="Microsoft YaHei"/>
-              </a:rPr>
-              <a:t>采集端闭环</a:t>
-            </a:r>
-            <a:r>
-              <a:rPr lang="zh-CN" sz="1500">
-                <a:solidFill>
-                  <a:srgbClr val="1A2230"/>
-                </a:solidFill>
-                <a:latin typeface="Microsoft YaHei"/>
-                <a:ea typeface="Microsoft YaHei"/>
-              </a:rPr>
-              <a:t>　实时覆盖率与重投影误差热图，直接提示</a:t>
-            </a:r>
-            <a:r>
-              <a:rPr lang="en-US" sz="1500">
-                <a:solidFill>
-                  <a:srgbClr val="1A2230"/>
-                </a:solidFill>
-                <a:latin typeface="Microsoft YaHei"/>
-                <a:ea typeface="Microsoft YaHei"/>
-              </a:rPr>
-              <a:t>"</a:t>
-            </a:r>
-            <a:r>
-              <a:rPr lang="zh-CN" sz="1500">
-                <a:solidFill>
-                  <a:srgbClr val="1A2230"/>
-                </a:solidFill>
-                <a:latin typeface="Microsoft YaHei"/>
-                <a:ea typeface="Microsoft YaHei"/>
-              </a:rPr>
-              <a:t>这块没拍</a:t>
-            </a:r>
-            <a:r>
-              <a:rPr lang="en-US" sz="1500">
-                <a:solidFill>
-                  <a:srgbClr val="1A2230"/>
-                </a:solidFill>
-                <a:latin typeface="Microsoft YaHei"/>
-                <a:ea typeface="Microsoft YaHei"/>
-              </a:rPr>
-              <a:t>"——</a:t>
-            </a:r>
-            <a:r>
-              <a:rPr lang="zh-CN" sz="1500">
-                <a:solidFill>
-                  <a:srgbClr val="1A2230"/>
-                </a:solidFill>
-                <a:latin typeface="Microsoft YaHei"/>
-                <a:ea typeface="Microsoft YaHei"/>
-              </a:rPr>
-              <a:t>论文</a:t>
-            </a:r>
-            <a:r>
-              <a:rPr lang="en-US" sz="1500">
-                <a:solidFill>
-                  <a:srgbClr val="1A2230"/>
-                </a:solidFill>
-                <a:latin typeface="Microsoft YaHei"/>
-                <a:ea typeface="Microsoft YaHei"/>
-              </a:rPr>
-              <a:t xml:space="preserve"> motivation </a:t>
-            </a:r>
-            <a:r>
-              <a:rPr lang="zh-CN" sz="1500">
-                <a:solidFill>
-                  <a:srgbClr val="1A2230"/>
-                </a:solidFill>
-                <a:latin typeface="Microsoft YaHei"/>
-                <a:ea typeface="Microsoft YaHei"/>
-              </a:rPr>
-              <a:t>的自然下一步。</a:t>
-            </a:r>
-            <a:endParaRPr/>
-          </a:p>
-        </p:txBody>
-      </p:sp>
-      <p:sp>
-        <p:nvSpPr>
-          <p:cNvPr id="135" name="" descr="{&quot;isTemplate&quot;:true,&quot;type&quot;:&quot;text&quot;}"/>
-          <p:cNvSpPr txBox="1"/>
-          <p:nvPr/>
-        </p:nvSpPr>
-        <p:spPr>
-          <a:xfrm rot="0" flipH="0" flipV="0">
-            <a:off x="6353175" y="4105275"/>
-            <a:ext cx="5457825" cy="361950"/>
-          </a:xfrm>
-          <a:prstGeom prst="rect"/>
-        </p:spPr>
-        <p:txBody>
-          <a:bodyPr wrap="none" lIns="0" tIns="0" rIns="0" bIns="0"/>
-          <a:p>
-            <a:pPr>
-              <a:lnSpc>
-                <a:spcPct val="155000"/>
-              </a:lnSpc>
-            </a:pPr>
-            <a:r>
-              <a:rPr lang="en-US" sz="1500">
-                <a:solidFill>
-                  <a:srgbClr val="1A2230"/>
-                </a:solidFill>
-                <a:latin typeface="Microsoft YaHei"/>
-                <a:ea typeface="Microsoft YaHei"/>
-              </a:rPr>
-              <a:t xml:space="preserve">④ </a:t>
-            </a:r>
-            <a:r>
-              <a:rPr lang="zh-CN" sz="1500">
-                <a:solidFill>
-                  <a:srgbClr val="1A2230"/>
-                </a:solidFill>
-                <a:latin typeface="Microsoft YaHei"/>
-                <a:ea typeface="Microsoft YaHei"/>
-              </a:rPr>
-              <a:t>阈值自适应</a:t>
-            </a:r>
-            <a:r>
-              <a:rPr lang="zh-CN" sz="1500">
-                <a:solidFill>
-                  <a:srgbClr val="1A2230"/>
-                </a:solidFill>
-                <a:latin typeface="Microsoft YaHei"/>
-                <a:ea typeface="Microsoft YaHei"/>
-              </a:rPr>
-              <a:t>　按纹理强度与重叠度在线估计，替代固定常数。</a:t>
-            </a:r>
-            <a:endParaRPr/>
-          </a:p>
-        </p:txBody>
-      </p:sp>
-      <p:sp>
-        <p:nvSpPr>
-          <p:cNvPr id="136" name="" descr="{&quot;isTemplate&quot;:true,&quot;type&quot;:&quot;text&quot;}"/>
-          <p:cNvSpPr txBox="1"/>
-          <p:nvPr/>
-        </p:nvSpPr>
-        <p:spPr>
-          <a:xfrm rot="0" flipH="0" flipV="0">
-            <a:off x="6353175" y="4619625"/>
-            <a:ext cx="5457825" cy="714375"/>
-          </a:xfrm>
-          <a:prstGeom prst="rect"/>
-        </p:spPr>
-        <p:txBody>
-          <a:bodyPr wrap="square" lIns="0" tIns="0" rIns="0" bIns="0">
-            <a:normAutofit/>
-          </a:bodyPr>
-          <a:p>
-            <a:pPr>
-              <a:lnSpc>
-                <a:spcPct val="155000"/>
-              </a:lnSpc>
-            </a:pPr>
-            <a:r>
-              <a:rPr lang="en-US" sz="1500">
-                <a:solidFill>
-                  <a:srgbClr val="1A2230"/>
-                </a:solidFill>
-                <a:latin typeface="Microsoft YaHei"/>
-                <a:ea typeface="Microsoft YaHei"/>
-              </a:rPr>
-              <a:t xml:space="preserve">⑤ </a:t>
-            </a:r>
-            <a:r>
-              <a:rPr lang="zh-CN" sz="1500">
-                <a:solidFill>
-                  <a:srgbClr val="1A2230"/>
-                </a:solidFill>
-                <a:latin typeface="Microsoft YaHei"/>
-                <a:ea typeface="Microsoft YaHei"/>
-              </a:rPr>
-              <a:t>验证还可扩展</a:t>
-            </a:r>
-            <a:r>
-              <a:rPr lang="zh-CN" sz="1500">
-                <a:solidFill>
-                  <a:srgbClr val="1A2230"/>
-                </a:solidFill>
-                <a:latin typeface="Microsoft YaHei"/>
-                <a:ea typeface="Microsoft YaHei"/>
-              </a:rPr>
-              <a:t>　打乱输入顺序（</a:t>
-            </a:r>
-            <a:r>
-              <a:rPr lang="en-US" sz="1500">
-                <a:solidFill>
-                  <a:srgbClr val="1A2230"/>
-                </a:solidFill>
-                <a:latin typeface="Microsoft YaHei"/>
-                <a:ea typeface="Microsoft YaHei"/>
-              </a:rPr>
-              <a:t>--shuffle</a:t>
-            </a:r>
-            <a:r>
-              <a:rPr lang="zh-CN" sz="1500">
-                <a:solidFill>
-                  <a:srgbClr val="1A2230"/>
-                </a:solidFill>
-                <a:latin typeface="Microsoft YaHei"/>
-                <a:ea typeface="Microsoft YaHei"/>
-              </a:rPr>
-              <a:t>）、全分辨率重跑、换</a:t>
-            </a:r>
-            <a:r>
-              <a:rPr lang="en-US" sz="1500">
-                <a:solidFill>
-                  <a:srgbClr val="1A2230"/>
-                </a:solidFill>
-                <a:latin typeface="Microsoft YaHei"/>
-                <a:ea typeface="Microsoft YaHei"/>
-              </a:rPr>
-              <a:t xml:space="preserve"> 2–3 </a:t>
-            </a:r>
-            <a:r>
-              <a:rPr lang="zh-CN" sz="1500">
-                <a:solidFill>
-                  <a:srgbClr val="1A2230"/>
-                </a:solidFill>
-                <a:latin typeface="Microsoft YaHei"/>
-                <a:ea typeface="Microsoft YaHei"/>
-              </a:rPr>
-              <a:t>个场景验证阈值是否稳定。</a:t>
-            </a:r>
-            <a:endParaRPr/>
-          </a:p>
-        </p:txBody>
-      </p:sp>
-      <p:sp>
-        <p:nvSpPr>
-          <p:cNvPr id="137" name=""/>
+              <a:rPr lang="zh-CN" sz="1013" b="1">
+                <a:solidFill>
+                  <a:srgbClr val="8FBBFF"/>
+                </a:solidFill>
+                <a:latin typeface="Microsoft YaHei"/>
+                <a:ea typeface="Microsoft YaHei"/>
+              </a:rPr>
+              <a:t>优化</a:t>
+            </a:r>
+            <a:r>
+              <a:rPr lang="en-US" sz="1013" b="1">
+                <a:solidFill>
+                  <a:srgbClr val="8FBBFF"/>
+                </a:solidFill>
+                <a:latin typeface="Microsoft YaHei"/>
+                <a:ea typeface="Microsoft YaHei"/>
+              </a:rPr>
+              <a:t xml:space="preserve"> 4</a:t>
+            </a:r>
+            <a:r>
+              <a:rPr lang="zh-CN" sz="1013" b="1">
+                <a:solidFill>
+                  <a:srgbClr val="8FBBFF"/>
+                </a:solidFill>
+                <a:latin typeface="Microsoft YaHei"/>
+                <a:ea typeface="Microsoft YaHei"/>
+              </a:rPr>
+              <a:t>　整轮</a:t>
+            </a:r>
+            <a:r>
+              <a:rPr lang="en-US" sz="1013" b="1">
+                <a:solidFill>
+                  <a:srgbClr val="8FBBFF"/>
+                </a:solidFill>
+                <a:latin typeface="Microsoft YaHei"/>
+                <a:ea typeface="Microsoft YaHei"/>
+              </a:rPr>
+              <a:t xml:space="preserve"> LM </a:t>
+            </a:r>
+            <a:r>
+              <a:rPr lang="zh-CN" sz="1013" b="1">
+                <a:solidFill>
+                  <a:srgbClr val="8FBBFF"/>
+                </a:solidFill>
+                <a:latin typeface="Microsoft YaHei"/>
+                <a:ea typeface="Microsoft YaHei"/>
+              </a:rPr>
+              <a:t>压成一张</a:t>
+            </a:r>
+            <a:r>
+              <a:rPr lang="en-US" sz="1013" b="1">
+                <a:solidFill>
+                  <a:srgbClr val="8FBBFF"/>
+                </a:solidFill>
+                <a:latin typeface="Microsoft YaHei"/>
+                <a:ea typeface="Microsoft YaHei"/>
+              </a:rPr>
+              <a:t xml:space="preserve"> CUDA Graph</a:t>
+            </a:r>
+            <a:endParaRPr/>
+          </a:p>
+        </p:txBody>
+      </p:sp>
+      <p:sp>
+        <p:nvSpPr>
+          <p:cNvPr id="137" name="" descr="{&quot;isTemplate&quot;:true,&quot;type&quot;:&quot;text&quot;}"/>
+          <p:cNvSpPr txBox="1"/>
+          <p:nvPr/>
+        </p:nvSpPr>
+        <p:spPr>
+          <a:xfrm rot="0" flipH="0" flipV="0">
+            <a:off x="6257925" y="3390900"/>
+            <a:ext cx="5457825" cy="114300"/>
+          </a:xfrm>
+          <a:prstGeom prst="rect"/>
+        </p:spPr>
+        <p:txBody>
+          <a:bodyPr wrap="none" lIns="0" tIns="0" rIns="0" bIns="0"/>
+          <a:p>
+            <a:pPr>
+              <a:lnSpc>
+                <a:spcPct val="100000"/>
+              </a:lnSpc>
+            </a:pPr>
+            <a:r>
+              <a:rPr lang="en-US" sz="750">
+                <a:solidFill>
+                  <a:srgbClr val="7F8C9F"/>
+                </a:solidFill>
+                <a:latin typeface="Consolas"/>
+                <a:ea typeface="Consolas"/>
+              </a:rPr>
+              <a:t>poses/mini_ba.py:506</a:t>
+            </a:r>
+            <a:r>
+              <a:rPr lang="zh-CN" sz="750">
+                <a:solidFill>
+                  <a:srgbClr val="7F8C9F"/>
+                </a:solidFill>
+                <a:latin typeface="Consolas"/>
+                <a:ea typeface="Consolas"/>
+              </a:rPr>
+              <a:t>（无分支写法见</a:t>
+            </a:r>
+            <a:r>
+              <a:rPr lang="en-US" sz="750">
+                <a:solidFill>
+                  <a:srgbClr val="7F8C9F"/>
+                </a:solidFill>
+                <a:latin typeface="Consolas"/>
+                <a:ea typeface="Consolas"/>
+              </a:rPr>
+              <a:t xml:space="preserve"> :391</a:t>
+            </a:r>
+            <a:r>
+              <a:rPr lang="zh-CN" sz="750">
+                <a:solidFill>
+                  <a:srgbClr val="7F8C9F"/>
+                </a:solidFill>
+                <a:latin typeface="Consolas"/>
+                <a:ea typeface="Consolas"/>
+              </a:rPr>
+              <a:t>）</a:t>
+            </a:r>
+            <a:endParaRPr/>
+          </a:p>
+        </p:txBody>
+      </p:sp>
+      <p:pic>
+        <p:nvPicPr>
+          <p:cNvPr id="138" name=""/>
+          <p:cNvPicPr>
+            <a:picLocks noChangeAspect="1"/>
+          </p:cNvPicPr>
+          <p:nvPr/>
+        </p:nvPicPr>
+        <p:blipFill>
+          <a:blip r:embed="rId4"/>
+          <a:stretch>
+            <a:fillRect/>
+          </a:stretch>
+        </p:blipFill>
+        <p:spPr>
+          <a:xfrm rot="0" flipH="0" flipV="0">
+            <a:off x="6257925" y="3524250"/>
+            <a:ext cx="5514975" cy="1819275"/>
+          </a:xfrm>
+          <a:prstGeom prst="rect">
+            <a:avLst/>
+          </a:prstGeom>
+          <a:ln/>
+        </p:spPr>
+      </p:pic>
+      <p:sp>
+        <p:nvSpPr>
+          <p:cNvPr id="139" name=""/>
           <p:cNvSpPr/>
           <p:nvPr/>
         </p:nvSpPr>
         <p:spPr>
           <a:xfrm rot="0" flipH="0" flipV="0">
-            <a:off x="428625" y="5448300"/>
-            <a:ext cx="11430000" cy="647700"/>
+            <a:off x="428625" y="5476875"/>
+            <a:ext cx="11430000" cy="590550"/>
           </a:xfrm>
           <a:prstGeom prst="rect">
             <a:avLst/>
@@ -7040,18 +6893,18 @@
       </p:sp>
       <p:sp>
         <p:nvSpPr>
-          <p:cNvPr id="138" name=""/>
+          <p:cNvPr id="140" name=""/>
           <p:cNvSpPr/>
           <p:nvPr/>
         </p:nvSpPr>
         <p:spPr>
           <a:xfrm rot="0" flipH="0" flipV="0">
-            <a:off x="381000" y="5448300"/>
-            <a:ext cx="11477625" cy="647700"/>
+            <a:off x="381000" y="5476875"/>
+            <a:ext cx="11477625" cy="590550"/>
           </a:xfrm>
           <a:custGeom>
             <a:pathLst>
-              <a:path w="1205" h="68">
+              <a:path w="1205" h="62">
                 <a:moveTo>
                   <a:pt x="0" y="0"/>
                 </a:moveTo>
@@ -7059,10 +6912,10 @@
                   <a:pt x="5" y="0"/>
                 </a:lnTo>
                 <a:lnTo>
-                  <a:pt x="5" y="68"/>
+                  <a:pt x="5" y="62"/>
                 </a:lnTo>
                 <a:lnTo>
-                  <a:pt x="0" y="68"/>
+                  <a:pt x="0" y="62"/>
                 </a:lnTo>
                 <a:close/>
               </a:path>
@@ -7080,134 +6933,404 @@
       </p:sp>
       <p:sp>
         <p:nvSpPr>
-          <p:cNvPr id="139" name="" descr="{&quot;isTemplate&quot;:true,&quot;type&quot;:&quot;text&quot;}"/>
-          <p:cNvSpPr txBox="1"/>
-          <p:nvPr/>
-        </p:nvSpPr>
-        <p:spPr>
-          <a:xfrm rot="0" flipH="0" flipV="0">
-            <a:off x="619125" y="5591175"/>
-            <a:ext cx="11001375" cy="361950"/>
-          </a:xfrm>
-          <a:prstGeom prst="rect"/>
-        </p:spPr>
-        <p:txBody>
-          <a:bodyPr wrap="none" lIns="0" tIns="0" rIns="0" bIns="0"/>
-          <a:p>
-            <a:pPr>
-              <a:lnSpc>
-                <a:spcPct val="150000"/>
-              </a:lnSpc>
-            </a:pPr>
-            <a:r>
-              <a:rPr lang="zh-CN" sz="1575">
-                <a:solidFill>
-                  <a:srgbClr val="1A2230"/>
-                </a:solidFill>
-                <a:latin typeface="Microsoft YaHei"/>
-                <a:ea typeface="Microsoft YaHei"/>
-              </a:rPr>
-              <a:t>它把</a:t>
-            </a:r>
-            <a:r>
-              <a:rPr lang="en-US" sz="1575">
-                <a:solidFill>
-                  <a:srgbClr val="1A2230"/>
-                </a:solidFill>
-                <a:latin typeface="Microsoft YaHei"/>
-                <a:ea typeface="Microsoft YaHei"/>
-              </a:rPr>
-              <a:t>"</a:t>
-            </a:r>
-            <a:r>
-              <a:rPr lang="zh-CN" sz="1575">
-                <a:solidFill>
-                  <a:srgbClr val="1A2230"/>
-                </a:solidFill>
-                <a:latin typeface="Microsoft YaHei"/>
-                <a:ea typeface="Microsoft YaHei"/>
-              </a:rPr>
-              <a:t>精度</a:t>
-            </a:r>
-            <a:r>
-              <a:rPr lang="en-US" sz="1575">
-                <a:solidFill>
-                  <a:srgbClr val="1A2230"/>
-                </a:solidFill>
-                <a:latin typeface="Microsoft YaHei"/>
-                <a:ea typeface="Microsoft YaHei"/>
-              </a:rPr>
-              <a:t>"</a:t>
-            </a:r>
-            <a:r>
-              <a:rPr lang="zh-CN" sz="1575">
-                <a:solidFill>
-                  <a:srgbClr val="1A2230"/>
-                </a:solidFill>
-                <a:latin typeface="Microsoft YaHei"/>
-                <a:ea typeface="Microsoft YaHei"/>
-              </a:rPr>
-              <a:t>换成了</a:t>
-            </a:r>
-            <a:r>
-              <a:rPr lang="en-US" sz="1575">
-                <a:solidFill>
-                  <a:srgbClr val="1A2230"/>
-                </a:solidFill>
-                <a:latin typeface="Microsoft YaHei"/>
-                <a:ea typeface="Microsoft YaHei"/>
-              </a:rPr>
-              <a:t>"</a:t>
-            </a:r>
-            <a:r>
-              <a:rPr lang="zh-CN" sz="1575">
-                <a:solidFill>
-                  <a:srgbClr val="1A2230"/>
-                </a:solidFill>
-                <a:latin typeface="Microsoft YaHei"/>
-                <a:ea typeface="Microsoft YaHei"/>
-              </a:rPr>
-              <a:t>时间</a:t>
-            </a:r>
-            <a:r>
-              <a:rPr lang="en-US" sz="1575">
-                <a:solidFill>
-                  <a:srgbClr val="1A2230"/>
-                </a:solidFill>
-                <a:latin typeface="Microsoft YaHei"/>
-                <a:ea typeface="Microsoft YaHei"/>
-              </a:rPr>
-              <a:t>"</a:t>
-            </a:r>
-            <a:r>
-              <a:rPr lang="zh-CN" sz="1575">
-                <a:solidFill>
-                  <a:srgbClr val="1A2230"/>
-                </a:solidFill>
-                <a:latin typeface="Microsoft YaHei"/>
-                <a:ea typeface="Microsoft YaHei"/>
-              </a:rPr>
-              <a:t>。补回精度只有两条路：</a:t>
-            </a:r>
-            <a:r>
-              <a:rPr lang="zh-CN" sz="1575">
-                <a:solidFill>
-                  <a:srgbClr val="1A2230"/>
-                </a:solidFill>
-                <a:latin typeface="Microsoft YaHei"/>
-                <a:ea typeface="Microsoft YaHei"/>
-              </a:rPr>
-              <a:t>要么离线回填，要么让采集端少犯错</a:t>
-            </a:r>
-            <a:r>
-              <a:rPr lang="zh-CN" sz="1575">
-                <a:solidFill>
-                  <a:srgbClr val="1A2230"/>
-                </a:solidFill>
-                <a:latin typeface="Microsoft YaHei"/>
-                <a:ea typeface="Microsoft YaHei"/>
-              </a:rPr>
-              <a:t>——后者才是它真正打开的方向。</a:t>
+          <p:cNvPr id="141" name="" descr="{&quot;isTemplate&quot;:true,&quot;type&quot;:&quot;text&quot;}"/>
+          <p:cNvSpPr txBox="1"/>
+          <p:nvPr/>
+        </p:nvSpPr>
+        <p:spPr>
+          <a:xfrm rot="0" flipH="0" flipV="0">
+            <a:off x="600075" y="5562600"/>
+            <a:ext cx="3543300" cy="180975"/>
+          </a:xfrm>
+          <a:prstGeom prst="rect"/>
+        </p:spPr>
+        <p:txBody>
+          <a:bodyPr wrap="none" lIns="0" tIns="0" rIns="0" bIns="0"/>
+          <a:p>
+            <a:pPr>
+              <a:lnSpc>
+                <a:spcPct val="100000"/>
+              </a:lnSpc>
+            </a:pPr>
+            <a:r>
+              <a:rPr lang="zh-CN" sz="1163" b="1">
+                <a:solidFill>
+                  <a:srgbClr val="1E4FA8"/>
+                </a:solidFill>
+                <a:latin typeface="Microsoft YaHei"/>
+                <a:ea typeface="Microsoft YaHei"/>
+              </a:rPr>
+              <a:t>省掉反向图</a:t>
+            </a:r>
+            <a:endParaRPr/>
+          </a:p>
+        </p:txBody>
+      </p:sp>
+      <p:sp>
+        <p:nvSpPr>
+          <p:cNvPr id="142" name="" descr="{&quot;isTemplate&quot;:true,&quot;type&quot;:&quot;text&quot;}"/>
+          <p:cNvSpPr txBox="1"/>
+          <p:nvPr/>
+        </p:nvSpPr>
+        <p:spPr>
+          <a:xfrm rot="0" flipH="0" flipV="0">
+            <a:off x="600075" y="5743575"/>
+            <a:ext cx="3543300" cy="238125"/>
+          </a:xfrm>
+          <a:prstGeom prst="rect"/>
+        </p:spPr>
+        <p:txBody>
+          <a:bodyPr wrap="none" lIns="0" tIns="0" rIns="0" bIns="0"/>
+          <a:p>
+            <a:pPr>
+              <a:lnSpc>
+                <a:spcPct val="135000"/>
+              </a:lnSpc>
+            </a:pPr>
+            <a:r>
+              <a:rPr lang="zh-CN" sz="1125">
+                <a:solidFill>
+                  <a:srgbClr val="1A2230"/>
+                </a:solidFill>
+                <a:latin typeface="Microsoft YaHei"/>
+                <a:ea typeface="Microsoft YaHei"/>
+              </a:rPr>
+              <a:t>雅可比手推成解析式，残差与</a:t>
+            </a:r>
+            <a:r>
+              <a:rPr lang="en-US" sz="1125">
+                <a:solidFill>
+                  <a:srgbClr val="1A2230"/>
+                </a:solidFill>
+                <a:latin typeface="Microsoft YaHei"/>
+                <a:ea typeface="Microsoft YaHei"/>
+              </a:rPr>
+              <a:t xml:space="preserve"> J </a:t>
+            </a:r>
+            <a:r>
+              <a:rPr lang="zh-CN" sz="1125">
+                <a:solidFill>
+                  <a:srgbClr val="1A2230"/>
+                </a:solidFill>
+                <a:latin typeface="Microsoft YaHei"/>
+                <a:ea typeface="Microsoft YaHei"/>
+              </a:rPr>
+              <a:t>一核同出。</a:t>
+            </a:r>
+            <a:endParaRPr/>
+          </a:p>
+        </p:txBody>
+      </p:sp>
+      <p:sp>
+        <p:nvSpPr>
+          <p:cNvPr id="143" name="" descr="{&quot;isTemplate&quot;:true,&quot;type&quot;:&quot;text&quot;}"/>
+          <p:cNvSpPr txBox="1"/>
+          <p:nvPr/>
+        </p:nvSpPr>
+        <p:spPr>
+          <a:xfrm rot="0" flipH="0" flipV="0">
+            <a:off x="4352925" y="5562600"/>
+            <a:ext cx="3533775" cy="180975"/>
+          </a:xfrm>
+          <a:prstGeom prst="rect"/>
+        </p:spPr>
+        <p:txBody>
+          <a:bodyPr wrap="none" lIns="0" tIns="0" rIns="0" bIns="0"/>
+          <a:p>
+            <a:pPr>
+              <a:lnSpc>
+                <a:spcPct val="100000"/>
+              </a:lnSpc>
+            </a:pPr>
+            <a:r>
+              <a:rPr lang="zh-CN" sz="1163" b="1">
+                <a:solidFill>
+                  <a:srgbClr val="1E4FA8"/>
+                </a:solidFill>
+                <a:latin typeface="Microsoft YaHei"/>
+                <a:ea typeface="Microsoft YaHei"/>
+              </a:rPr>
+              <a:t>省掉主机同步</a:t>
+            </a:r>
+            <a:endParaRPr/>
+          </a:p>
+        </p:txBody>
+      </p:sp>
+      <p:sp>
+        <p:nvSpPr>
+          <p:cNvPr id="144" name="" descr="{&quot;isTemplate&quot;:true,&quot;type&quot;:&quot;text&quot;}"/>
+          <p:cNvSpPr txBox="1"/>
+          <p:nvPr/>
+        </p:nvSpPr>
+        <p:spPr>
+          <a:xfrm rot="0" flipH="0" flipV="0">
+            <a:off x="4352925" y="5743575"/>
+            <a:ext cx="3533775" cy="238125"/>
+          </a:xfrm>
+          <a:prstGeom prst="rect"/>
+        </p:spPr>
+        <p:txBody>
+          <a:bodyPr wrap="none" lIns="0" tIns="0" rIns="0" bIns="0"/>
+          <a:p>
+            <a:pPr>
+              <a:lnSpc>
+                <a:spcPct val="135000"/>
+              </a:lnSpc>
+            </a:pPr>
+            <a:r>
+              <a:rPr lang="zh-CN" sz="1125">
+                <a:solidFill>
+                  <a:srgbClr val="1A2230"/>
+                </a:solidFill>
+                <a:latin typeface="Microsoft YaHei"/>
+                <a:ea typeface="Microsoft YaHei"/>
+              </a:rPr>
+              <a:t>观测追加</a:t>
+            </a:r>
+            <a:r>
+              <a:rPr lang="en-US" sz="1125">
+                <a:solidFill>
+                  <a:srgbClr val="1A2230"/>
+                </a:solidFill>
+                <a:latin typeface="Microsoft YaHei"/>
+                <a:ea typeface="Microsoft YaHei"/>
+              </a:rPr>
+              <a:t xml:space="preserve"> atomicAdd </a:t>
+            </a:r>
+            <a:r>
+              <a:rPr lang="zh-CN" sz="1125">
+                <a:solidFill>
+                  <a:srgbClr val="1A2230"/>
+                </a:solidFill>
+                <a:latin typeface="Microsoft YaHei"/>
+                <a:ea typeface="Microsoft YaHei"/>
+              </a:rPr>
+              <a:t>抢</a:t>
+            </a:r>
+            <a:r>
+              <a:rPr lang="en-US" sz="1125">
+                <a:solidFill>
+                  <a:srgbClr val="1A2230"/>
+                </a:solidFill>
+                <a:latin typeface="Microsoft YaHei"/>
+                <a:ea typeface="Microsoft YaHei"/>
+              </a:rPr>
+              <a:t xml:space="preserve"> slot</a:t>
+            </a:r>
+            <a:r>
+              <a:rPr lang="zh-CN" sz="1125">
+                <a:solidFill>
+                  <a:srgbClr val="1A2230"/>
+                </a:solidFill>
+                <a:latin typeface="Microsoft YaHei"/>
+                <a:ea typeface="Microsoft YaHei"/>
+              </a:rPr>
+              <a:t>，不等</a:t>
+            </a:r>
+            <a:r>
+              <a:rPr lang="en-US" sz="1125">
+                <a:solidFill>
+                  <a:srgbClr val="1A2230"/>
+                </a:solidFill>
+                <a:latin typeface="Microsoft YaHei"/>
+                <a:ea typeface="Microsoft YaHei"/>
+              </a:rPr>
+              <a:t xml:space="preserve"> CPU </a:t>
+            </a:r>
+            <a:r>
+              <a:rPr lang="zh-CN" sz="1125">
+                <a:solidFill>
+                  <a:srgbClr val="1A2230"/>
+                </a:solidFill>
+                <a:latin typeface="Microsoft YaHei"/>
+                <a:ea typeface="Microsoft YaHei"/>
+              </a:rPr>
+              <a:t>派号。</a:t>
+            </a:r>
+            <a:endParaRPr/>
+          </a:p>
+        </p:txBody>
+      </p:sp>
+      <p:sp>
+        <p:nvSpPr>
+          <p:cNvPr id="145" name="" descr="{&quot;isTemplate&quot;:true,&quot;type&quot;:&quot;text&quot;}"/>
+          <p:cNvSpPr txBox="1"/>
+          <p:nvPr/>
+        </p:nvSpPr>
+        <p:spPr>
+          <a:xfrm rot="0" flipH="0" flipV="0">
+            <a:off x="8096250" y="5562600"/>
+            <a:ext cx="3543300" cy="180975"/>
+          </a:xfrm>
+          <a:prstGeom prst="rect"/>
+        </p:spPr>
+        <p:txBody>
+          <a:bodyPr wrap="none" lIns="0" tIns="0" rIns="0" bIns="0"/>
+          <a:p>
+            <a:pPr>
+              <a:lnSpc>
+                <a:spcPct val="100000"/>
+              </a:lnSpc>
+            </a:pPr>
+            <a:r>
+              <a:rPr lang="zh-CN" sz="1163" b="1">
+                <a:solidFill>
+                  <a:srgbClr val="1E4FA8"/>
+                </a:solidFill>
+                <a:latin typeface="Microsoft YaHei"/>
+                <a:ea typeface="Microsoft YaHei"/>
+              </a:rPr>
+              <a:t>省掉启动开销</a:t>
+            </a:r>
+            <a:endParaRPr/>
+          </a:p>
+        </p:txBody>
+      </p:sp>
+      <p:sp>
+        <p:nvSpPr>
+          <p:cNvPr id="146" name="" descr="{&quot;isTemplate&quot;:true,&quot;type&quot;:&quot;text&quot;}"/>
+          <p:cNvSpPr txBox="1"/>
+          <p:nvPr/>
+        </p:nvSpPr>
+        <p:spPr>
+          <a:xfrm rot="0" flipH="0" flipV="0">
+            <a:off x="8096250" y="5743575"/>
+            <a:ext cx="3543300" cy="238125"/>
+          </a:xfrm>
+          <a:prstGeom prst="rect"/>
+        </p:spPr>
+        <p:txBody>
+          <a:bodyPr wrap="none" lIns="0" tIns="0" rIns="0" bIns="0"/>
+          <a:p>
+            <a:pPr>
+              <a:lnSpc>
+                <a:spcPct val="135000"/>
+              </a:lnSpc>
+            </a:pPr>
+            <a:r>
+              <a:rPr lang="zh-CN" sz="1125">
+                <a:solidFill>
+                  <a:srgbClr val="1A2230"/>
+                </a:solidFill>
+                <a:latin typeface="Microsoft YaHei"/>
+                <a:ea typeface="Microsoft YaHei"/>
+              </a:rPr>
+              <a:t>上百次</a:t>
+            </a:r>
+            <a:r>
+              <a:rPr lang="en-US" sz="1125">
+                <a:solidFill>
+                  <a:srgbClr val="1A2230"/>
+                </a:solidFill>
+                <a:latin typeface="Microsoft YaHei"/>
+                <a:ea typeface="Microsoft YaHei"/>
+              </a:rPr>
+              <a:t xml:space="preserve"> LM </a:t>
+            </a:r>
+            <a:r>
+              <a:rPr lang="zh-CN" sz="1125">
+                <a:solidFill>
+                  <a:srgbClr val="1A2230"/>
+                </a:solidFill>
+                <a:latin typeface="Microsoft YaHei"/>
+                <a:ea typeface="Microsoft YaHei"/>
+              </a:rPr>
+              <a:t>迭代提交一次图，不许有分支。</a:t>
+            </a:r>
+            <a:endParaRPr/>
+          </a:p>
+        </p:txBody>
+      </p:sp>
+      <p:sp>
+        <p:nvSpPr>
+          <p:cNvPr id="147" name="" descr="{&quot;isTemplate&quot;:true,&quot;type&quot;:&quot;text&quot;}"/>
+          <p:cNvSpPr txBox="1"/>
+          <p:nvPr/>
+        </p:nvSpPr>
+        <p:spPr>
+          <a:xfrm rot="0" flipH="0" flipV="0">
+            <a:off x="381000" y="6553200"/>
+            <a:ext cx="11430000" cy="209550"/>
+          </a:xfrm>
+          <a:prstGeom prst="rect"/>
+        </p:spPr>
+        <p:txBody>
+          <a:bodyPr wrap="none" lIns="0" tIns="0" rIns="0" bIns="0"/>
+          <a:p>
+            <a:pPr>
+              <a:lnSpc>
+                <a:spcPct val="140000"/>
+              </a:lnSpc>
+            </a:pPr>
+            <a:r>
+              <a:rPr lang="zh-CN" sz="975">
+                <a:solidFill>
+                  <a:srgbClr val="8B97A8"/>
+                </a:solidFill>
+                <a:latin typeface="Microsoft YaHei"/>
+                <a:ea typeface="Microsoft YaHei"/>
+              </a:rPr>
+              <a:t>行号指向片段起点；为投影宽度做了换行与变量缩写（</a:t>
+            </a:r>
+            <a:r>
+              <a:rPr lang="en-US" sz="975">
+                <a:solidFill>
+                  <a:srgbClr val="8B97A8"/>
+                </a:solidFill>
+                <a:latin typeface="Microsoft YaHei"/>
+                <a:ea typeface="Microsoft YaHei"/>
+              </a:rPr>
+              <a:t>v = jacxr_cam − BD @ jacxr_xyz</a:t>
+            </a:r>
+            <a:r>
+              <a:rPr lang="zh-CN" sz="975">
+                <a:solidFill>
+                  <a:srgbClr val="8B97A8"/>
+                </a:solidFill>
+                <a:latin typeface="Microsoft YaHei"/>
+                <a:ea typeface="Microsoft YaHei"/>
+              </a:rPr>
+              <a:t>），逻辑未改。共同点不是算法更聪明，而是</a:t>
+            </a:r>
+            <a:r>
+              <a:rPr lang="zh-CN" sz="975">
+                <a:solidFill>
+                  <a:srgbClr val="8B97A8"/>
+                </a:solidFill>
+                <a:latin typeface="Microsoft YaHei"/>
+                <a:ea typeface="Microsoft YaHei"/>
+              </a:rPr>
+              <a:t>把每一步都做成</a:t>
+            </a:r>
+            <a:r>
+              <a:rPr lang="en-US" sz="975">
+                <a:solidFill>
+                  <a:srgbClr val="8B97A8"/>
+                </a:solidFill>
+                <a:latin typeface="Microsoft YaHei"/>
+                <a:ea typeface="Microsoft YaHei"/>
+              </a:rPr>
+              <a:t xml:space="preserve"> GPU </a:t>
+            </a:r>
+            <a:r>
+              <a:rPr lang="zh-CN" sz="975">
+                <a:solidFill>
+                  <a:srgbClr val="8B97A8"/>
+                </a:solidFill>
+                <a:latin typeface="Microsoft YaHei"/>
+                <a:ea typeface="Microsoft YaHei"/>
+              </a:rPr>
+              <a:t>原生的形状</a:t>
+            </a:r>
+            <a:r>
+              <a:rPr lang="zh-CN" sz="975">
+                <a:solidFill>
+                  <a:srgbClr val="8B97A8"/>
+                </a:solidFill>
+                <a:latin typeface="Microsoft YaHei"/>
+                <a:ea typeface="Microsoft YaHei"/>
+              </a:rPr>
+              <a:t>——这才是「普通显卡上实时」的落点。</a:t>
             </a:r>
             <a:endParaRPr/>
           </a:p>
@@ -7223,7 +7346,7 @@
   <p:cSld>
     <p:spTree>
       <p:nvGrpSpPr>
-        <p:cNvPr id="140" name="" descr="&lt;Slide style={{ width: '1280px', height: '720px', backgroundColor: '#FFFFFF', padding: '0px', flexDirection: 'column' }}&gt;&#10;    &lt;Box style={{ width: '1280px', height: '8px', backgroundColor: '#1E4FA8' }} /&gt;&#10;    &lt;Box style={{ padding: '30px 40px 0px 40px', flexDirection: 'row', justifyContent: 'space-between', alignItems: 'flex-end' }}&gt;&#10;        &lt;Text style={{ fontSize: 34, fontWeight: 'bold', color: '#1E4FA8' }}&gt;结论：三句话带走&lt;/Text&gt;&#10;        &lt;Text style={{ fontSize: 15, color: '#8B97A8' }}&gt;14 / 15&lt;/Text&gt;&#10;    &lt;/Box&gt;&#10;&#10;    &lt;Box style={{ padding: '24px 40px 0px 40px', flexDirection: 'column', gap: 20 }}&gt;&#10;        &lt;Box style={{ flexDirection: 'row', gap: 18, alignItems: 'flex-start' }}&gt;&#10;            &lt;Box style={{ width: '38px', height: '38px', backgroundColor: '#1E4FA8', borderRadius: 4, alignItems: 'center', justifyContent: 'center' }}&gt;&#10;                &lt;Text style={{ fontSize: 21, fontWeight: 'bold', color: '#FFFFFF' }}&gt;1&lt;/Text&gt;&#10;            &lt;/Box&gt;&#10;            &lt;Box style={{ flex: 1, flexDirection: 'column' }}&gt;&#10;                &lt;Text style={{ fontSize: 26, fontWeight: 'bold', color: '#1A2230' }}&gt;它填的是一块空格，不是&quot;更快的离线 SfM&quot;&lt;/Text&gt;&#10;                &lt;Text style={{ fontSize: 20, color: '#4A5568', lineHeight: 1.45, marginTop: 6 }}&gt;即时、无序、全局一致三者同时成立，此前没有方法做到。速度只是手段，&quot;现场可判断&quot;才是目的。&lt;/Text&gt;&#10;            &lt;/Box&gt;&#10;        &lt;/Box&gt;&#10;        &lt;Box style={{ flexDirection: 'row', gap: 18, alignItems: 'flex-start' }}&gt;&#10;            &lt;Box style={{ width: '38px', height: '38px', backgroundColor: '#1E4FA8', borderRadius: 4, alignItems: 'center', justifyContent: 'center' }}&gt;&#10;                &lt;Text style={{ fontSize: 21, fontWeight: 'bold', color: '#FFFFFF' }}&gt;2&lt;/Text&gt;&#10;            &lt;/Box&gt;&#10;            &lt;Box style={{ flex: 1, flexDirection: 'column' }}&gt;&#10;                &lt;Text style={{ fontSize: 26, fontWeight: 'bold', color: '#1A2230' }}&gt;题眼是用&quot;图上的距离&quot;替换&quot;全局优化的解&quot;&lt;/Text&gt;&#10;                &lt;Text style={{ fontSize: 20, color: '#4A5568', lineHeight: 1.45, marginTop: 6 }}&gt;判定看加权图距、不看时间，求解用焊接窗口得 Sim(3)，再把修正按测地距离摊给全图——回环不必重算第二遍。&lt;/Text&gt;&#10;            &lt;/Box&gt;&#10;        &lt;/Box&gt;&#10;        &lt;Box style={{ flexDirection: 'row', gap: 18, alignItems: 'flex-start' }}&gt;&#10;            &lt;Box style={{ width: '38px', height: '38px', backgroundColor: '#0E3F8C', borderRadius: 4, alignItems: 'center', justifyContent: 'center' }}&gt;&#10;                &lt;Text style={{ fontSize: 21, fontWeight: 'bold', color: '#FFFFFF' }}&gt;3&lt;/Text&gt;&#10;            &lt;/Box&gt;&#10;            &lt;Box style={{ flex: 1, flexDirection: 'column' }}&gt;&#10;                &lt;Text style={{ fontSize: 26, fontWeight: 'bold', color: '#1A2230' }}&gt;代价是真的：1.2 dB 与一条更重的依赖链&lt;/Text&gt;&#10;                &lt;Text style={{ fontSize: 20, color: '#4A5568', lineHeight: 1.45, marginTop: 6 }}&gt;精度上限低于全局 BA，低视差会失败，阈值靠经验。它换的是时间，不是免费午餐。&lt;/Text&gt;&#10;            &lt;/Box&gt;&#10;        &lt;/Box&gt;&#10;    &lt;/Box&gt;&#10;&#10;    &lt;Box style={{ padding: '22px 40px 0px 40px', flexDirection: 'row', gap: 16 }}&gt;&#10;        &lt;Box style={{ flex: 1, backgroundColor: '#F0F5FC', borderRadius: 6, padding: '12px 16px', flexDirection: 'row', alignItems: 'baseline', gap: 10 }}&gt;&#10;            &lt;Text style={{ fontSize: 32, fontWeight: 'bold', color: '#1E4FA8' }}&gt;26.29 dB&lt;/Text&gt;&#10;            &lt;Text style={{ fontSize: 17, color: '#1A2230' }}&gt;论文在 MipNeRF360 的成绩&lt;/Text&gt;&#10;        &lt;/Box&gt;&#10;        &lt;Box style={{ flex: 1, backgroundColor: '#F0F5FC', borderRadius: 6, padding: '12px 16px', flexDirection: 'row', alignItems: 'baseline', gap: 10 }}&gt;&#10;            &lt;Text style={{ fontSize: 32, fontWeight: 'bold', color: '#1E4FA8' }}&gt;0.5 dB&lt;/Text&gt;&#10;            &lt;Text style={{ fontSize: 17, color: '#1A2230' }}&gt;输入打乱后的代价&lt;/Text&gt;&#10;        &lt;/Box&gt;&#10;        &lt;Box style={{ flex: 1, backgroundColor: '#F0F5FC', borderRadius: 6, padding: '12px 16px', flexDirection: 'row', alignItems: 'baseline', gap: 10 }}&gt;&#10;            &lt;Text style={{ fontSize: 32, fontWeight: 'bold', color: '#1E4FA8' }}&gt;25.95 dB&lt;/Text&gt;&#10;            &lt;Text style={{ fontSize: 17, color: '#1A2230' }}&gt;我们自己跑出来的&lt;/Text&gt;&#10;        &lt;/Box&gt;&#10;    &lt;/Box&gt;&#10;&#10;    &lt;Box style={{ margin: '16px 40px 0px 40px', backgroundColor: '#1E4FA8', borderRadius: 6, padding: '15px 22px' }}&gt;&#10;        &lt;Text style={{ fontSize: 22, fontWeight: 'bold', color: '#FFFFFF', lineHeight: 1.45 }}&gt;一句话总结：它把 3DGS 从&quot;拍完再算的离线工具&quot;变成了&quot;拍摄现场的仪表盘&quot;，代价是让出一点精度。&lt;/Text&gt;&#10;    &lt;/Box&gt;&#10;&#10;    &lt;Box style={{ marginTop: 'auto', padding: '20px 40px 0px 40px', paddingBottom: '26px', flexDirection: 'row', justifyContent: 'space-between', alignItems: 'center' }}&gt;&#10;        &lt;Text style={{ fontSize: 26, fontWeight: 'bold', color: '#1E4FA8' }}&gt;谢谢，欢迎提问&lt;/Text&gt;&#10;        &lt;Text style={{ fontSize: 15, color: '#8B97A8' }}&gt;论文：SIGGRAPH 2026 / arXiv:2607.14481 · 代码：github.com/graphdeco-inria/i3dgs&lt;/Text&gt;&#10;    &lt;/Box&gt;&#10;&lt;/Slide&gt;&#10;"/>
+        <p:cNvPr id="148" name="" descr="&lt;Slide style={{ width: '1280px', height: '720px', backgroundColor: '#FFFFFF', padding: '0px', flexDirection: 'column' }}&gt;&#13;&#10;    &lt;Box style={{ width: '1280px', height: '8px', backgroundColor: '#1E4FA8' }} /&gt;&#13;&#10;    &lt;Box style={{ padding: '18px 40px 0px 40px', flexDirection: 'row', justifyContent: 'space-between', alignItems: 'flex-end' }}&gt;&#13;&#10;        &lt;Text style={{ fontSize: 32, fontWeight: 'bold', color: '#1E4FA8' }}&gt;结论：三句话带走，加一张边界清单&lt;/Text&gt;&#13;&#10;        &lt;Text style={{ fontSize: 15, color: '#8B97A8' }}&gt;14 / 15&lt;/Text&gt;&#13;&#10;    &lt;/Box&gt;&#13;&#10;&#13;&#10;    &lt;Box style={{ padding: '15px 40px 0px 40px', flexDirection: 'column', gap: 18 }}&gt;&#13;&#10;        &lt;Box style={{ flexDirection: 'row', gap: 16, alignItems: 'flex-start' }}&gt;&#13;&#10;            &lt;Box style={{ width: '34px', height: '34px', backgroundColor: '#1E4FA8', borderRadius: 4, alignItems: 'center', justifyContent: 'center' }}&gt;&#13;&#10;                &lt;Text style={{ fontSize: 19, fontWeight: 'bold', color: '#FFFFFF' }}&gt;1&lt;/Text&gt;&#13;&#10;            &lt;/Box&gt;&#13;&#10;            &lt;Box style={{ flex: 1, flexDirection: 'column' }}&gt;&#13;&#10;                &lt;Text style={{ fontSize: 23, fontWeight: 'bold', color: '#1A2230' }}&gt;它填的是一块空格，不是&quot;更快的离线 SfM&quot;&lt;/Text&gt;&#13;&#10;                &lt;Text style={{ fontSize: 18, color: '#4A5568', lineHeight: 1.4, marginTop: 4 }}&gt;即时、无序、全局一致三者同时成立，此前没有方法做到。速度是手段，&quot;现场可判断&quot;才是目的。&lt;/Text&gt;&#13;&#10;            &lt;/Box&gt;&#13;&#10;        &lt;/Box&gt;&#13;&#10;        &lt;Box style={{ flexDirection: 'row', gap: 16, alignItems: 'flex-start' }}&gt;&#13;&#10;            &lt;Box style={{ width: '34px', height: '34px', backgroundColor: '#1E4FA8', borderRadius: 4, alignItems: 'center', justifyContent: 'center' }}&gt;&#13;&#10;                &lt;Text style={{ fontSize: 19, fontWeight: 'bold', color: '#FFFFFF' }}&gt;2&lt;/Text&gt;&#13;&#10;            &lt;/Box&gt;&#13;&#10;            &lt;Box style={{ flex: 1, flexDirection: 'column' }}&gt;&#13;&#10;                &lt;Text style={{ fontSize: 23, fontWeight: 'bold', color: '#1A2230' }}&gt;题眼是用&quot;图上的距离&quot;替换&quot;全局优化的解&quot;&lt;/Text&gt;&#13;&#10;                &lt;Text style={{ fontSize: 18, color: '#4A5568', lineHeight: 1.4, marginTop: 4 }}&gt;判定看加权图距、不看时间，求解用焊接窗口得 Sim(3)，再把修正按测地距离摊给全图——回环不必重算第二遍。&lt;/Text&gt;&#13;&#10;            &lt;/Box&gt;&#13;&#10;        &lt;/Box&gt;&#13;&#10;        &lt;Box style={{ flexDirection: 'row', gap: 16, alignItems: 'flex-start' }}&gt;&#13;&#10;            &lt;Box style={{ width: '34px', height: '34px', backgroundColor: '#0E3F8C', borderRadius: 4, alignItems: 'center', justifyContent: 'center' }}&gt;&#13;&#10;                &lt;Text style={{ fontSize: 19, fontWeight: 'bold', color: '#FFFFFF' }}&gt;3&lt;/Text&gt;&#13;&#10;            &lt;/Box&gt;&#13;&#10;            &lt;Box style={{ flex: 1, flexDirection: 'column' }}&gt;&#13;&#10;                &lt;Text style={{ fontSize: 23, fontWeight: 'bold', color: '#1A2230' }}&gt;代价是真的：让出 1.2 dB，换来一条自写的 GPU 求解栈&lt;/Text&gt;&#13;&#10;                &lt;Text style={{ fontSize: 18, color: '#4A5568', lineHeight: 1.4, marginTop: 4 }}&gt;不调 g2o / Ceres，雅可比、Schur 消元、迭代更新自己写成核——精度上限低于全局 BA，但换来了时间。&lt;/Text&gt;&#13;&#10;            &lt;/Box&gt;&#13;&#10;        &lt;/Box&gt;&#13;&#10;    &lt;/Box&gt;&#13;&#10;&#13;&#10;    &lt;Box style={{ margin: '17px 40px 0px 40px', backgroundColor: '#F7F9FC', border: '1px solid #D6DCE5', borderRadius: 6, padding: '9px 16px', flexDirection: 'column' }}&gt;&#13;&#10;        &lt;Box style={{ flexDirection: 'row', justifyContent: 'space-between', alignItems: 'baseline' }}&gt;&#13;&#10;            &lt;Text style={{ fontSize: 16, fontWeight: 'bold', color: '#1A2230' }}&gt;它现在的边界　→　对应的补法&lt;/Text&gt;&#13;&#10;            &lt;Text style={{ fontSize: 14, color: '#8B97A8' }}&gt;论文自述的局限，非我们的复现问题&lt;/Text&gt;&#13;&#10;        &lt;/Box&gt;&#13;&#10;        &lt;Box style={{ flexDirection: 'row', gap: 14, marginTop: 7 }}&gt;&#13;&#10;            &lt;Box style={{ flex: 1, flexDirection: 'column' }}&gt;&#13;&#10;                &lt;Text style={{ fontSize: 14.5, fontWeight: 'bold', color: '#B03A37' }}&gt;① 低视差直接失效&lt;/Text&gt;&#13;&#10;                &lt;Text style={{ fontSize: 14, color: '#1A2230', lineHeight: 1.35, marginTop: 2 }}&gt;低视差帧只参与渲染、不进位姿求解，避免污染轨迹&lt;/Text&gt;&#13;&#10;            &lt;/Box&gt;&#13;&#10;            &lt;Box style={{ flex: 1, flexDirection: 'column' }}&gt;&#13;&#10;                &lt;Text style={{ fontSize: 14.5, fontWeight: 'bold', color: '#B03A37' }}&gt;② 精度低于全局 BA&lt;/Text&gt;&#13;&#10;                &lt;Text style={{ fontSize: 14, color: '#1A2230', lineHeight: 1.35, marginTop: 2 }}&gt;在线出预览，结束时 GLOMAP 回填一次全局 BA，补回 1.2 dB&lt;/Text&gt;&#13;&#10;            &lt;/Box&gt;&#13;&#10;            &lt;Box style={{ flex: 1, flexDirection: 'column' }}&gt;&#13;&#10;                &lt;Text style={{ fontSize: 14.5, fontWeight: 'bold', color: '#B03A37' }}&gt;③ 上游依赖链太重&lt;/Text&gt;&#13;&#10;                &lt;Text style={{ fontSize: 14, color: '#1A2230', lineHeight: 1.35, marginTop: 2 }}&gt;采集端给实时覆盖率与误差热图，直接提示&quot;这块没拍&quot;&lt;/Text&gt;&#13;&#10;            &lt;/Box&gt;&#13;&#10;            &lt;Box style={{ flex: 1, flexDirection: 'column' }}&gt;&#13;&#10;                &lt;Text style={{ fontSize: 14.5, fontWeight: 'bold', color: '#B03A37' }}&gt;④ 阈值靠经验&lt;/Text&gt;&#13;&#10;                &lt;Text style={{ fontSize: 14, color: '#1A2230', lineHeight: 1.35, marginTop: 2 }}&gt;按纹理强度与重叠度在线估计，替代固定常数&lt;/Text&gt;&#13;&#10;            &lt;/Box&gt;&#13;&#10;        &lt;/Box&gt;&#13;&#10;    &lt;/Box&gt;&#13;&#10;&#13;&#10;    &lt;Box style={{ margin: '16px 40px 0px 40px', backgroundColor: '#FAFBFD', border: '1px solid #E3E8F0', borderRadius: 6, padding: '10px 16px 12px 16px', flexDirection: 'row' }}&gt;&#13;&#10;        &lt;Box style={{ flex: 1, borderTop: '2px solid #C8D4E4', padding: '9px 14px 0px 14px', flexDirection: 'column' }}&gt;&#13;&#10;            &lt;Text style={{ fontSize: 15, fontWeight: 'bold', color: '#3D7BD9' }}&gt;2019&lt;/Text&gt;&#13;&#10;            &lt;Text style={{ fontSize: 17.5, fontWeight: 'bold', color: '#1A2230', marginTop: 2 }}&gt;NeRF&lt;/Text&gt;&#13;&#10;            &lt;Text style={{ fontSize: 14, color: '#4A5568', lineHeight: 1.35, marginTop: 4 }}&gt;离线、必须有序输入&lt;/Text&gt;&#13;&#10;            &lt;Text style={{ fontSize: 13.5, color: '#8B97A8', lineHeight: 1.35, marginTop: 3 }}&gt;一次训练以小时计&lt;/Text&gt;&#13;&#10;        &lt;/Box&gt;&#13;&#10;        &lt;Box style={{ flex: 1, borderTop: '2px solid #C8D4E4', padding: '9px 14px 0px 14px', flexDirection: 'column' }}&gt;&#13;&#10;            &lt;Text style={{ fontSize: 15, fontWeight: 'bold', color: '#3D7BD9' }}&gt;2023&lt;/Text&gt;&#13;&#10;            &lt;Text style={{ fontSize: 17.5, fontWeight: 'bold', color: '#1A2230', marginTop: 2 }}&gt;3DGS&lt;/Text&gt;&#13;&#10;            &lt;Text style={{ fontSize: 14, color: '#4A5568', lineHeight: 1.35, marginTop: 4 }}&gt;渲染快了，位姿仍靠 COLMAP&lt;/Text&gt;&#13;&#10;            &lt;Text style={{ fontSize: 13.5, color: '#8B97A8', lineHeight: 1.35, marginTop: 3 }}&gt;前置步骤还是离线 SfM&lt;/Text&gt;&#13;&#10;        &lt;/Box&gt;&#13;&#10;        &lt;Box style={{ flex: 1, borderTop: '2px solid #C8D4E4', padding: '9px 14px 0px 14px', flexDirection: 'column' }}&gt;&#13;&#10;            &lt;Text style={{ fontSize: 15, fontWeight: 'bold', color: '#3D7BD9' }}&gt;2024–25&lt;/Text&gt;&#13;&#10;            &lt;Text style={{ fontSize: 17.5, fontWeight: 'bold', color: '#1A2230', marginTop: 2 }}&gt;增量 / 无位姿重建&lt;/Text&gt;&#13;&#10;            &lt;Text style={{ fontSize: 14, color: '#4A5568', lineHeight: 1.35, marginTop: 4 }}&gt;要么依赖有序，要么非全局&lt;/Text&gt;&#13;&#10;            &lt;Text style={{ fontSize: 13.5, color: '#8B97A8', lineHeight: 1.35, marginTop: 3 }}&gt;两条路各缺一条&lt;/Text&gt;&#13;&#10;        &lt;/Box&gt;&#13;&#10;        &lt;Box style={{ flex: 1, borderTop: '2px solid #1E4FA8', padding: '9px 14px 0px 14px', flexDirection: 'column' }}&gt;&#13;&#10;            &lt;Text style={{ fontSize: 15, fontWeight: 'bold', color: '#1E4FA8' }}&gt;2026&lt;/Text&gt;&#13;&#10;            &lt;Text style={{ fontSize: 17.5, fontWeight: 'bold', color: '#1E4FA8', marginTop: 2 }}&gt;i3dgs（本文）&lt;/Text&gt;&#13;&#10;            &lt;Text style={{ fontSize: 14, fontWeight: 'bold', color: '#1E4FA8', lineHeight: 1.35, marginTop: 4 }}&gt;即时 · 无序 · 全局一致&lt;/Text&gt;&#13;&#10;            &lt;Text style={{ fontSize: 13.5, fontWeight: 'bold', color: '#3D7BD9', lineHeight: 1.35, marginTop: 3 }}&gt;三者首次同时成立&lt;/Text&gt;&#13;&#10;        &lt;/Box&gt;&#13;&#10;    &lt;/Box&gt;&#13;&#10;&#13;&#10;    &lt;Box style={{ margin: '11px 40px 0px 40px', backgroundColor: '#1E4FA8', borderRadius: 6, padding: '14px 22px', flexDirection: 'row', alignItems: 'center', gap: 26 }}&gt;&#13;&#10;        &lt;Text style={{ fontSize: 20, fontWeight: 'bold', color: '#FFFFFF', lineHeight: 1.4, flex: 1 }}&gt;一句话总结：它把 3DGS 从&quot;拍完再算的离线工具&quot;变成了&quot;拍摄现场的仪表盘&quot;。&lt;/Text&gt;&#13;&#10;        &lt;Box style={{ flexDirection: 'column' }}&gt;&#13;&#10;            &lt;Text style={{ fontSize: 15, color: '#C3D5EF' }}&gt;论文 / 我们&lt;/Text&gt;&#13;&#10;            &lt;Text style={{ fontSize: 19, fontWeight: 'bold', color: '#FFFFFF' }}&gt;26.29 → 25.95 dB&lt;/Text&gt;&#13;&#10;        &lt;/Box&gt;&#13;&#10;    &lt;/Box&gt;&#13;&#10;&#13;&#10;    &lt;Box style={{ marginTop: 'auto', padding: '10px 40px 16px 40px', flexDirection: 'row', justifyContent: 'space-between', alignItems: 'center' }}&gt;&#13;&#10;        &lt;Text style={{ fontSize: 24, fontWeight: 'bold', color: '#1E4FA8' }}&gt;谢谢，欢迎提问&lt;/Text&gt;&#13;&#10;        &lt;Text style={{ fontSize: 14, color: '#8B97A8' }}&gt;论文：SIGGRAPH 2026 / arXiv:2607.14481 · 代码：github.com/graphdeco-inria/i3dgs&lt;/Text&gt;&#13;&#10;    &lt;/Box&gt;&#13;&#10;&lt;/Slide&gt;&#13;&#10;"/>
         <p:cNvGrpSpPr/>
         <p:nvPr/>
       </p:nvGrpSpPr>
@@ -7237,7 +7360,7 @@
       </p:grpSpPr>
       <p:sp>
         <p:nvSpPr>
-          <p:cNvPr id="141" name=""/>
+          <p:cNvPr id="149" name=""/>
           <p:cNvSpPr/>
           <p:nvPr/>
         </p:nvSpPr>
@@ -7261,7 +7384,7 @@
       </p:sp>
       <p:sp>
         <p:nvSpPr>
-          <p:cNvPr id="142" name=""/>
+          <p:cNvPr id="150" name=""/>
           <p:cNvSpPr/>
           <p:nvPr/>
         </p:nvSpPr>
@@ -7285,14 +7408,14 @@
       </p:sp>
       <p:sp>
         <p:nvSpPr>
-          <p:cNvPr id="143" name="" descr="{&quot;isTemplate&quot;:true,&quot;type&quot;:&quot;text&quot;}"/>
-          <p:cNvSpPr txBox="1"/>
-          <p:nvPr/>
-        </p:nvSpPr>
-        <p:spPr>
-          <a:xfrm rot="0" flipH="0" flipV="0">
-            <a:off x="381000" y="361950"/>
-            <a:ext cx="2590800" cy="390525"/>
+          <p:cNvPr id="151" name="" descr="{&quot;isTemplate&quot;:true,&quot;type&quot;:&quot;text&quot;}"/>
+          <p:cNvSpPr txBox="1"/>
+          <p:nvPr/>
+        </p:nvSpPr>
+        <p:spPr>
+          <a:xfrm rot="0" flipH="0" flipV="0">
+            <a:off x="381000" y="247650"/>
+            <a:ext cx="4876800" cy="371475"/>
           </a:xfrm>
           <a:prstGeom prst="rect"/>
         </p:spPr>
@@ -7305,28 +7428,28 @@
               </a:lnSpc>
             </a:pPr>
             <a:r>
-              <a:rPr lang="zh-CN" sz="2550" b="1">
+              <a:rPr lang="zh-CN" sz="2400" b="1">
                 <a:solidFill>
                   <a:srgbClr val="1E4FA8"/>
                 </a:solidFill>
                 <a:latin typeface="Microsoft YaHei"/>
                 <a:ea typeface="Microsoft YaHei"/>
               </a:rPr>
-              <a:t>结论：三句话带走</a:t>
-            </a:r>
-            <a:endParaRPr/>
-          </a:p>
-        </p:txBody>
-      </p:sp>
-      <p:sp>
-        <p:nvSpPr>
-          <p:cNvPr id="144" name="" descr="{&quot;isTemplate&quot;:true,&quot;type&quot;:&quot;text&quot;}"/>
-          <p:cNvSpPr txBox="1"/>
-          <p:nvPr/>
-        </p:nvSpPr>
-        <p:spPr>
-          <a:xfrm rot="0" flipH="0" flipV="0">
-            <a:off x="11325225" y="581025"/>
+              <a:t>结论：三句话带走，加一张边界清单</a:t>
+            </a:r>
+            <a:endParaRPr/>
+          </a:p>
+        </p:txBody>
+      </p:sp>
+      <p:sp>
+        <p:nvSpPr>
+          <p:cNvPr id="152" name="" descr="{&quot;isTemplate&quot;:true,&quot;type&quot;:&quot;text&quot;}"/>
+          <p:cNvSpPr txBox="1"/>
+          <p:nvPr/>
+        </p:nvSpPr>
+        <p:spPr>
+          <a:xfrm rot="0" flipH="0" flipV="0">
+            <a:off x="11325225" y="447675"/>
             <a:ext cx="485775" cy="171450"/>
           </a:xfrm>
           <a:prstGeom prst="rect"/>
@@ -7355,18 +7478,18 @@
       </p:sp>
       <p:sp>
         <p:nvSpPr>
-          <p:cNvPr id="145" name=""/>
+          <p:cNvPr id="153" name=""/>
           <p:cNvSpPr/>
           <p:nvPr/>
         </p:nvSpPr>
         <p:spPr>
           <a:xfrm rot="0" flipH="0" flipV="0">
-            <a:off x="381000" y="981075"/>
-            <a:ext cx="361950" cy="361950"/>
+            <a:off x="381000" y="762000"/>
+            <a:ext cx="323850" cy="323850"/>
           </a:xfrm>
           <a:prstGeom prst="roundRect">
             <a:avLst>
-              <a:gd name="adj" fmla="val 10526"/>
+              <a:gd name="adj" fmla="val 11765"/>
             </a:avLst>
           </a:prstGeom>
           <a:solidFill>
@@ -7381,14 +7504,14 @@
       </p:sp>
       <p:sp>
         <p:nvSpPr>
-          <p:cNvPr id="146" name="" descr="{&quot;isTemplate&quot;:true,&quot;type&quot;:&quot;text&quot;}"/>
-          <p:cNvSpPr txBox="1"/>
-          <p:nvPr/>
-        </p:nvSpPr>
-        <p:spPr>
-          <a:xfrm rot="0" flipH="0" flipV="0">
-            <a:off x="504825" y="1038225"/>
-            <a:ext cx="123825" cy="247650"/>
+          <p:cNvPr id="154" name="" descr="{&quot;isTemplate&quot;:true,&quot;type&quot;:&quot;text&quot;}"/>
+          <p:cNvSpPr txBox="1"/>
+          <p:nvPr/>
+        </p:nvSpPr>
+        <p:spPr>
+          <a:xfrm rot="0" flipH="0" flipV="0">
+            <a:off x="485775" y="819150"/>
+            <a:ext cx="114300" cy="219075"/>
           </a:xfrm>
           <a:prstGeom prst="rect"/>
         </p:spPr>
@@ -7401,7 +7524,7 @@
               </a:lnSpc>
             </a:pPr>
             <a:r>
-              <a:rPr lang="en-US" sz="1575" b="1">
+              <a:rPr lang="en-US" sz="1425" b="1">
                 <a:solidFill>
                   <a:srgbClr val="FFFFFF"/>
                 </a:solidFill>
@@ -7416,14 +7539,14 @@
       </p:sp>
       <p:sp>
         <p:nvSpPr>
-          <p:cNvPr id="147" name="" descr="{&quot;isTemplate&quot;:true,&quot;type&quot;:&quot;text&quot;}"/>
-          <p:cNvSpPr txBox="1"/>
-          <p:nvPr/>
-        </p:nvSpPr>
-        <p:spPr>
-          <a:xfrm rot="0" flipH="0" flipV="0">
-            <a:off x="914400" y="981075"/>
-            <a:ext cx="10896600" cy="304800"/>
+          <p:cNvPr id="155" name="" descr="{&quot;isTemplate&quot;:true,&quot;type&quot;:&quot;text&quot;}"/>
+          <p:cNvSpPr txBox="1"/>
+          <p:nvPr/>
+        </p:nvSpPr>
+        <p:spPr>
+          <a:xfrm rot="0" flipH="0" flipV="0">
+            <a:off x="857250" y="762000"/>
+            <a:ext cx="10953750" cy="266700"/>
           </a:xfrm>
           <a:prstGeom prst="rect"/>
         </p:spPr>
@@ -7436,7 +7559,7 @@
               </a:lnSpc>
             </a:pPr>
             <a:r>
-              <a:rPr lang="zh-CN" sz="1950" b="1">
+              <a:rPr lang="zh-CN" sz="1725" b="1">
                 <a:solidFill>
                   <a:srgbClr val="1A2230"/>
                 </a:solidFill>
@@ -7446,7 +7569,7 @@
               <a:t>它填的是一块空格，不是</a:t>
             </a:r>
             <a:r>
-              <a:rPr lang="en-US" sz="1950" b="1">
+              <a:rPr lang="en-US" sz="1725" b="1">
                 <a:solidFill>
                   <a:srgbClr val="1A2230"/>
                 </a:solidFill>
@@ -7456,7 +7579,7 @@
               <a:t>"</a:t>
             </a:r>
             <a:r>
-              <a:rPr lang="zh-CN" sz="1950" b="1">
+              <a:rPr lang="zh-CN" sz="1725" b="1">
                 <a:solidFill>
                   <a:srgbClr val="1A2230"/>
                 </a:solidFill>
@@ -7466,7 +7589,7 @@
               <a:t>更快的离线</a:t>
             </a:r>
             <a:r>
-              <a:rPr lang="en-US" sz="1950" b="1">
+              <a:rPr lang="en-US" sz="1725" b="1">
                 <a:solidFill>
                   <a:srgbClr val="1A2230"/>
                 </a:solidFill>
@@ -7481,37 +7604,37 @@
       </p:sp>
       <p:sp>
         <p:nvSpPr>
-          <p:cNvPr id="148" name="" descr="{&quot;isTemplate&quot;:true,&quot;type&quot;:&quot;text&quot;}"/>
-          <p:cNvSpPr txBox="1"/>
-          <p:nvPr/>
-        </p:nvSpPr>
-        <p:spPr>
-          <a:xfrm rot="0" flipH="0" flipV="0">
-            <a:off x="914400" y="1343025"/>
-            <a:ext cx="10896600" cy="333375"/>
-          </a:xfrm>
-          <a:prstGeom prst="rect"/>
-        </p:spPr>
-        <p:txBody>
-          <a:bodyPr wrap="none" lIns="0" tIns="0" rIns="0" bIns="0"/>
-          <a:p>
-            <a:pPr>
-              <a:lnSpc>
-                <a:spcPct val="145000"/>
-              </a:lnSpc>
-            </a:pPr>
-            <a:r>
-              <a:rPr lang="zh-CN" sz="1500">
+          <p:cNvPr id="156" name="" descr="{&quot;isTemplate&quot;:true,&quot;type&quot;:&quot;text&quot;}"/>
+          <p:cNvSpPr txBox="1"/>
+          <p:nvPr/>
+        </p:nvSpPr>
+        <p:spPr>
+          <a:xfrm rot="0" flipH="0" flipV="0">
+            <a:off x="857250" y="1066800"/>
+            <a:ext cx="10953750" cy="295275"/>
+          </a:xfrm>
+          <a:prstGeom prst="rect"/>
+        </p:spPr>
+        <p:txBody>
+          <a:bodyPr wrap="none" lIns="0" tIns="0" rIns="0" bIns="0"/>
+          <a:p>
+            <a:pPr>
+              <a:lnSpc>
+                <a:spcPct val="140000"/>
+              </a:lnSpc>
+            </a:pPr>
+            <a:r>
+              <a:rPr lang="zh-CN" sz="1350">
                 <a:solidFill>
                   <a:srgbClr val="4A5568"/>
                 </a:solidFill>
                 <a:latin typeface="Microsoft YaHei"/>
                 <a:ea typeface="Microsoft YaHei"/>
               </a:rPr>
-              <a:t>即时、无序、全局一致三者同时成立，此前没有方法做到。速度只是手段，</a:t>
-            </a:r>
-            <a:r>
-              <a:rPr lang="en-US" sz="1500">
+              <a:t>即时、无序、全局一致三者同时成立，此前没有方法做到。速度是手段，</a:t>
+            </a:r>
+            <a:r>
+              <a:rPr lang="en-US" sz="1350">
                 <a:solidFill>
                   <a:srgbClr val="4A5568"/>
                 </a:solidFill>
@@ -7521,7 +7644,7 @@
               <a:t>"</a:t>
             </a:r>
             <a:r>
-              <a:rPr lang="zh-CN" sz="1500">
+              <a:rPr lang="zh-CN" sz="1350">
                 <a:solidFill>
                   <a:srgbClr val="4A5568"/>
                 </a:solidFill>
@@ -7531,7 +7654,7 @@
               <a:t>现场可判断</a:t>
             </a:r>
             <a:r>
-              <a:rPr lang="en-US" sz="1500">
+              <a:rPr lang="en-US" sz="1350">
                 <a:solidFill>
                   <a:srgbClr val="4A5568"/>
                 </a:solidFill>
@@ -7541,7 +7664,7 @@
               <a:t>"</a:t>
             </a:r>
             <a:r>
-              <a:rPr lang="zh-CN" sz="1500">
+              <a:rPr lang="zh-CN" sz="1350">
                 <a:solidFill>
                   <a:srgbClr val="4A5568"/>
                 </a:solidFill>
@@ -7556,18 +7679,18 @@
       </p:sp>
       <p:sp>
         <p:nvSpPr>
-          <p:cNvPr id="149" name=""/>
+          <p:cNvPr id="157" name=""/>
           <p:cNvSpPr/>
           <p:nvPr/>
         </p:nvSpPr>
         <p:spPr>
           <a:xfrm rot="0" flipH="0" flipV="0">
-            <a:off x="381000" y="1866900"/>
-            <a:ext cx="361950" cy="361950"/>
+            <a:off x="381000" y="1533525"/>
+            <a:ext cx="323850" cy="323850"/>
           </a:xfrm>
           <a:prstGeom prst="roundRect">
             <a:avLst>
-              <a:gd name="adj" fmla="val 10526"/>
+              <a:gd name="adj" fmla="val 11765"/>
             </a:avLst>
           </a:prstGeom>
           <a:solidFill>
@@ -7582,14 +7705,14 @@
       </p:sp>
       <p:sp>
         <p:nvSpPr>
-          <p:cNvPr id="150" name="" descr="{&quot;isTemplate&quot;:true,&quot;type&quot;:&quot;text&quot;}"/>
-          <p:cNvSpPr txBox="1"/>
-          <p:nvPr/>
-        </p:nvSpPr>
-        <p:spPr>
-          <a:xfrm rot="0" flipH="0" flipV="0">
-            <a:off x="504825" y="1924050"/>
-            <a:ext cx="123825" cy="247650"/>
+          <p:cNvPr id="158" name="" descr="{&quot;isTemplate&quot;:true,&quot;type&quot;:&quot;text&quot;}"/>
+          <p:cNvSpPr txBox="1"/>
+          <p:nvPr/>
+        </p:nvSpPr>
+        <p:spPr>
+          <a:xfrm rot="0" flipH="0" flipV="0">
+            <a:off x="485775" y="1590675"/>
+            <a:ext cx="114300" cy="219075"/>
           </a:xfrm>
           <a:prstGeom prst="rect"/>
         </p:spPr>
@@ -7602,7 +7725,7 @@
               </a:lnSpc>
             </a:pPr>
             <a:r>
-              <a:rPr lang="en-US" sz="1575" b="1">
+              <a:rPr lang="en-US" sz="1425" b="1">
                 <a:solidFill>
                   <a:srgbClr val="FFFFFF"/>
                 </a:solidFill>
@@ -7617,14 +7740,14 @@
       </p:sp>
       <p:sp>
         <p:nvSpPr>
-          <p:cNvPr id="151" name="" descr="{&quot;isTemplate&quot;:true,&quot;type&quot;:&quot;text&quot;}"/>
-          <p:cNvSpPr txBox="1"/>
-          <p:nvPr/>
-        </p:nvSpPr>
-        <p:spPr>
-          <a:xfrm rot="0" flipH="0" flipV="0">
-            <a:off x="914400" y="1866900"/>
-            <a:ext cx="10896600" cy="304800"/>
+          <p:cNvPr id="159" name="" descr="{&quot;isTemplate&quot;:true,&quot;type&quot;:&quot;text&quot;}"/>
+          <p:cNvSpPr txBox="1"/>
+          <p:nvPr/>
+        </p:nvSpPr>
+        <p:spPr>
+          <a:xfrm rot="0" flipH="0" flipV="0">
+            <a:off x="857250" y="1533525"/>
+            <a:ext cx="10953750" cy="266700"/>
           </a:xfrm>
           <a:prstGeom prst="rect"/>
         </p:spPr>
@@ -7637,7 +7760,7 @@
               </a:lnSpc>
             </a:pPr>
             <a:r>
-              <a:rPr lang="zh-CN" sz="1950" b="1">
+              <a:rPr lang="zh-CN" sz="1725" b="1">
                 <a:solidFill>
                   <a:srgbClr val="1A2230"/>
                 </a:solidFill>
@@ -7647,7 +7770,7 @@
               <a:t>题眼是用</a:t>
             </a:r>
             <a:r>
-              <a:rPr lang="en-US" sz="1950" b="1">
+              <a:rPr lang="en-US" sz="1725" b="1">
                 <a:solidFill>
                   <a:srgbClr val="1A2230"/>
                 </a:solidFill>
@@ -7657,7 +7780,7 @@
               <a:t>"</a:t>
             </a:r>
             <a:r>
-              <a:rPr lang="zh-CN" sz="1950" b="1">
+              <a:rPr lang="zh-CN" sz="1725" b="1">
                 <a:solidFill>
                   <a:srgbClr val="1A2230"/>
                 </a:solidFill>
@@ -7667,7 +7790,7 @@
               <a:t>图上的距离</a:t>
             </a:r>
             <a:r>
-              <a:rPr lang="en-US" sz="1950" b="1">
+              <a:rPr lang="en-US" sz="1725" b="1">
                 <a:solidFill>
                   <a:srgbClr val="1A2230"/>
                 </a:solidFill>
@@ -7677,7 +7800,7 @@
               <a:t>"</a:t>
             </a:r>
             <a:r>
-              <a:rPr lang="zh-CN" sz="1950" b="1">
+              <a:rPr lang="zh-CN" sz="1725" b="1">
                 <a:solidFill>
                   <a:srgbClr val="1A2230"/>
                 </a:solidFill>
@@ -7687,7 +7810,7 @@
               <a:t>替换</a:t>
             </a:r>
             <a:r>
-              <a:rPr lang="en-US" sz="1950" b="1">
+              <a:rPr lang="en-US" sz="1725" b="1">
                 <a:solidFill>
                   <a:srgbClr val="1A2230"/>
                 </a:solidFill>
@@ -7697,7 +7820,7 @@
               <a:t>"</a:t>
             </a:r>
             <a:r>
-              <a:rPr lang="zh-CN" sz="1950" b="1">
+              <a:rPr lang="zh-CN" sz="1725" b="1">
                 <a:solidFill>
                   <a:srgbClr val="1A2230"/>
                 </a:solidFill>
@@ -7707,7 +7830,7 @@
               <a:t>全局优化的解</a:t>
             </a:r>
             <a:r>
-              <a:rPr lang="en-US" sz="1950" b="1">
+              <a:rPr lang="en-US" sz="1725" b="1">
                 <a:solidFill>
                   <a:srgbClr val="1A2230"/>
                 </a:solidFill>
@@ -7722,27 +7845,27 @@
       </p:sp>
       <p:sp>
         <p:nvSpPr>
-          <p:cNvPr id="152" name="" descr="{&quot;isTemplate&quot;:true,&quot;type&quot;:&quot;text&quot;}"/>
-          <p:cNvSpPr txBox="1"/>
-          <p:nvPr/>
-        </p:nvSpPr>
-        <p:spPr>
-          <a:xfrm rot="0" flipH="0" flipV="0">
-            <a:off x="914400" y="2228850"/>
-            <a:ext cx="10896600" cy="333375"/>
-          </a:xfrm>
-          <a:prstGeom prst="rect"/>
-        </p:spPr>
-        <p:txBody>
-          <a:bodyPr wrap="none" lIns="0" tIns="0" rIns="0" bIns="0"/>
-          <a:p>
-            <a:pPr>
-              <a:lnSpc>
-                <a:spcPct val="145000"/>
-              </a:lnSpc>
-            </a:pPr>
-            <a:r>
-              <a:rPr lang="zh-CN" sz="1500">
+          <p:cNvPr id="160" name="" descr="{&quot;isTemplate&quot;:true,&quot;type&quot;:&quot;text&quot;}"/>
+          <p:cNvSpPr txBox="1"/>
+          <p:nvPr/>
+        </p:nvSpPr>
+        <p:spPr>
+          <a:xfrm rot="0" flipH="0" flipV="0">
+            <a:off x="857250" y="1838325"/>
+            <a:ext cx="10953750" cy="295275"/>
+          </a:xfrm>
+          <a:prstGeom prst="rect"/>
+        </p:spPr>
+        <p:txBody>
+          <a:bodyPr wrap="none" lIns="0" tIns="0" rIns="0" bIns="0"/>
+          <a:p>
+            <a:pPr>
+              <a:lnSpc>
+                <a:spcPct val="140000"/>
+              </a:lnSpc>
+            </a:pPr>
+            <a:r>
+              <a:rPr lang="zh-CN" sz="1350">
                 <a:solidFill>
                   <a:srgbClr val="4A5568"/>
                 </a:solidFill>
@@ -7752,7 +7875,7 @@
               <a:t>判定看加权图距、不看时间，求解用焊接窗口得</a:t>
             </a:r>
             <a:r>
-              <a:rPr lang="en-US" sz="1500">
+              <a:rPr lang="en-US" sz="1350">
                 <a:solidFill>
                   <a:srgbClr val="4A5568"/>
                 </a:solidFill>
@@ -7762,7 +7885,7 @@
               <a:t xml:space="preserve"> Sim(3)</a:t>
             </a:r>
             <a:r>
-              <a:rPr lang="zh-CN" sz="1500">
+              <a:rPr lang="zh-CN" sz="1350">
                 <a:solidFill>
                   <a:srgbClr val="4A5568"/>
                 </a:solidFill>
@@ -7777,18 +7900,18 @@
       </p:sp>
       <p:sp>
         <p:nvSpPr>
-          <p:cNvPr id="153" name=""/>
+          <p:cNvPr id="161" name=""/>
           <p:cNvSpPr/>
           <p:nvPr/>
         </p:nvSpPr>
         <p:spPr>
           <a:xfrm rot="0" flipH="0" flipV="0">
-            <a:off x="381000" y="2752725"/>
-            <a:ext cx="361950" cy="361950"/>
+            <a:off x="381000" y="2305050"/>
+            <a:ext cx="323850" cy="323850"/>
           </a:xfrm>
           <a:prstGeom prst="roundRect">
             <a:avLst>
-              <a:gd name="adj" fmla="val 10526"/>
+              <a:gd name="adj" fmla="val 11765"/>
             </a:avLst>
           </a:prstGeom>
           <a:solidFill>
@@ -7803,14 +7926,14 @@
       </p:sp>
       <p:sp>
         <p:nvSpPr>
-          <p:cNvPr id="154" name="" descr="{&quot;isTemplate&quot;:true,&quot;type&quot;:&quot;text&quot;}"/>
-          <p:cNvSpPr txBox="1"/>
-          <p:nvPr/>
-        </p:nvSpPr>
-        <p:spPr>
-          <a:xfrm rot="0" flipH="0" flipV="0">
-            <a:off x="504825" y="2809875"/>
-            <a:ext cx="123825" cy="247650"/>
+          <p:cNvPr id="162" name="" descr="{&quot;isTemplate&quot;:true,&quot;type&quot;:&quot;text&quot;}"/>
+          <p:cNvSpPr txBox="1"/>
+          <p:nvPr/>
+        </p:nvSpPr>
+        <p:spPr>
+          <a:xfrm rot="0" flipH="0" flipV="0">
+            <a:off x="485775" y="2362200"/>
+            <a:ext cx="114300" cy="219075"/>
           </a:xfrm>
           <a:prstGeom prst="rect"/>
         </p:spPr>
@@ -7823,7 +7946,7 @@
               </a:lnSpc>
             </a:pPr>
             <a:r>
-              <a:rPr lang="en-US" sz="1575" b="1">
+              <a:rPr lang="en-US" sz="1425" b="1">
                 <a:solidFill>
                   <a:srgbClr val="FFFFFF"/>
                 </a:solidFill>
@@ -7838,14 +7961,14 @@
       </p:sp>
       <p:sp>
         <p:nvSpPr>
-          <p:cNvPr id="155" name="" descr="{&quot;isTemplate&quot;:true,&quot;type&quot;:&quot;text&quot;}"/>
-          <p:cNvSpPr txBox="1"/>
-          <p:nvPr/>
-        </p:nvSpPr>
-        <p:spPr>
-          <a:xfrm rot="0" flipH="0" flipV="0">
-            <a:off x="914400" y="2752725"/>
-            <a:ext cx="10896600" cy="304800"/>
+          <p:cNvPr id="163" name="" descr="{&quot;isTemplate&quot;:true,&quot;type&quot;:&quot;text&quot;}"/>
+          <p:cNvSpPr txBox="1"/>
+          <p:nvPr/>
+        </p:nvSpPr>
+        <p:spPr>
+          <a:xfrm rot="0" flipH="0" flipV="0">
+            <a:off x="857250" y="2305050"/>
+            <a:ext cx="10953750" cy="266700"/>
           </a:xfrm>
           <a:prstGeom prst="rect"/>
         </p:spPr>
@@ -7858,114 +7981,179 @@
               </a:lnSpc>
             </a:pPr>
             <a:r>
-              <a:rPr lang="zh-CN" sz="1950" b="1">
-                <a:solidFill>
-                  <a:srgbClr val="1A2230"/>
-                </a:solidFill>
-                <a:latin typeface="Microsoft YaHei"/>
-                <a:ea typeface="Microsoft YaHei"/>
-              </a:rPr>
-              <a:t>代价是真的：</a:t>
-            </a:r>
-            <a:r>
-              <a:rPr lang="en-US" sz="1950" b="1">
-                <a:solidFill>
-                  <a:srgbClr val="1A2230"/>
-                </a:solidFill>
-                <a:latin typeface="Microsoft YaHei"/>
-                <a:ea typeface="Microsoft YaHei"/>
-              </a:rPr>
-              <a:t xml:space="preserve">1.2 dB </a:t>
-            </a:r>
-            <a:r>
-              <a:rPr lang="zh-CN" sz="1950" b="1">
-                <a:solidFill>
-                  <a:srgbClr val="1A2230"/>
-                </a:solidFill>
-                <a:latin typeface="Microsoft YaHei"/>
-                <a:ea typeface="Microsoft YaHei"/>
-              </a:rPr>
-              <a:t>与一条更重的依赖链</a:t>
-            </a:r>
-            <a:endParaRPr/>
-          </a:p>
-        </p:txBody>
-      </p:sp>
-      <p:sp>
-        <p:nvSpPr>
-          <p:cNvPr id="156" name="" descr="{&quot;isTemplate&quot;:true,&quot;type&quot;:&quot;text&quot;}"/>
-          <p:cNvSpPr txBox="1"/>
-          <p:nvPr/>
-        </p:nvSpPr>
-        <p:spPr>
-          <a:xfrm rot="0" flipH="0" flipV="0">
-            <a:off x="914400" y="3114675"/>
-            <a:ext cx="10896600" cy="333375"/>
-          </a:xfrm>
-          <a:prstGeom prst="rect"/>
-        </p:spPr>
-        <p:txBody>
-          <a:bodyPr wrap="none" lIns="0" tIns="0" rIns="0" bIns="0"/>
-          <a:p>
-            <a:pPr>
-              <a:lnSpc>
-                <a:spcPct val="145000"/>
-              </a:lnSpc>
-            </a:pPr>
-            <a:r>
-              <a:rPr lang="zh-CN" sz="1500">
+              <a:rPr lang="zh-CN" sz="1725" b="1">
+                <a:solidFill>
+                  <a:srgbClr val="1A2230"/>
+                </a:solidFill>
+                <a:latin typeface="Microsoft YaHei"/>
+                <a:ea typeface="Microsoft YaHei"/>
+              </a:rPr>
+              <a:t>代价是真的：让出</a:t>
+            </a:r>
+            <a:r>
+              <a:rPr lang="en-US" sz="1725" b="1">
+                <a:solidFill>
+                  <a:srgbClr val="1A2230"/>
+                </a:solidFill>
+                <a:latin typeface="Microsoft YaHei"/>
+                <a:ea typeface="Microsoft YaHei"/>
+              </a:rPr>
+              <a:t xml:space="preserve"> 1.2 dB</a:t>
+            </a:r>
+            <a:r>
+              <a:rPr lang="zh-CN" sz="1725" b="1">
+                <a:solidFill>
+                  <a:srgbClr val="1A2230"/>
+                </a:solidFill>
+                <a:latin typeface="Microsoft YaHei"/>
+                <a:ea typeface="Microsoft YaHei"/>
+              </a:rPr>
+              <a:t>，换来一条自写的</a:t>
+            </a:r>
+            <a:r>
+              <a:rPr lang="en-US" sz="1725" b="1">
+                <a:solidFill>
+                  <a:srgbClr val="1A2230"/>
+                </a:solidFill>
+                <a:latin typeface="Microsoft YaHei"/>
+                <a:ea typeface="Microsoft YaHei"/>
+              </a:rPr>
+              <a:t xml:space="preserve"> GPU </a:t>
+            </a:r>
+            <a:r>
+              <a:rPr lang="zh-CN" sz="1725" b="1">
+                <a:solidFill>
+                  <a:srgbClr val="1A2230"/>
+                </a:solidFill>
+                <a:latin typeface="Microsoft YaHei"/>
+                <a:ea typeface="Microsoft YaHei"/>
+              </a:rPr>
+              <a:t>求解栈</a:t>
+            </a:r>
+            <a:endParaRPr/>
+          </a:p>
+        </p:txBody>
+      </p:sp>
+      <p:sp>
+        <p:nvSpPr>
+          <p:cNvPr id="164" name="" descr="{&quot;isTemplate&quot;:true,&quot;type&quot;:&quot;text&quot;}"/>
+          <p:cNvSpPr txBox="1"/>
+          <p:nvPr/>
+        </p:nvSpPr>
+        <p:spPr>
+          <a:xfrm rot="0" flipH="0" flipV="0">
+            <a:off x="857250" y="2609850"/>
+            <a:ext cx="10953750" cy="295275"/>
+          </a:xfrm>
+          <a:prstGeom prst="rect"/>
+        </p:spPr>
+        <p:txBody>
+          <a:bodyPr wrap="none" lIns="0" tIns="0" rIns="0" bIns="0"/>
+          <a:p>
+            <a:pPr>
+              <a:lnSpc>
+                <a:spcPct val="140000"/>
+              </a:lnSpc>
+            </a:pPr>
+            <a:r>
+              <a:rPr lang="zh-CN" sz="1350">
                 <a:solidFill>
                   <a:srgbClr val="4A5568"/>
                 </a:solidFill>
                 <a:latin typeface="Microsoft YaHei"/>
                 <a:ea typeface="Microsoft YaHei"/>
               </a:rPr>
-              <a:t>精度上限低于全局</a:t>
-            </a:r>
-            <a:r>
-              <a:rPr lang="en-US" sz="1500">
+              <a:t>不调</a:t>
+            </a:r>
+            <a:r>
+              <a:rPr lang="en-US" sz="1350">
                 <a:solidFill>
                   <a:srgbClr val="4A5568"/>
                 </a:solidFill>
                 <a:latin typeface="Microsoft YaHei"/>
                 <a:ea typeface="Microsoft YaHei"/>
               </a:rPr>
+              <a:t xml:space="preserve"> g2o / Ceres</a:t>
+            </a:r>
+            <a:r>
+              <a:rPr lang="zh-CN" sz="1350">
+                <a:solidFill>
+                  <a:srgbClr val="4A5568"/>
+                </a:solidFill>
+                <a:latin typeface="Microsoft YaHei"/>
+                <a:ea typeface="Microsoft YaHei"/>
+              </a:rPr>
+              <a:t>，雅可比、</a:t>
+            </a:r>
+            <a:r>
+              <a:rPr lang="en-US" sz="1350">
+                <a:solidFill>
+                  <a:srgbClr val="4A5568"/>
+                </a:solidFill>
+                <a:latin typeface="Microsoft YaHei"/>
+                <a:ea typeface="Microsoft YaHei"/>
+              </a:rPr>
+              <a:t xml:space="preserve">Schur </a:t>
+            </a:r>
+            <a:r>
+              <a:rPr lang="zh-CN" sz="1350">
+                <a:solidFill>
+                  <a:srgbClr val="4A5568"/>
+                </a:solidFill>
+                <a:latin typeface="Microsoft YaHei"/>
+                <a:ea typeface="Microsoft YaHei"/>
+              </a:rPr>
+              <a:t>消元、迭代更新自己写成核——精度上限低于全局</a:t>
+            </a:r>
+            <a:r>
+              <a:rPr lang="en-US" sz="1350">
+                <a:solidFill>
+                  <a:srgbClr val="4A5568"/>
+                </a:solidFill>
+                <a:latin typeface="Microsoft YaHei"/>
+                <a:ea typeface="Microsoft YaHei"/>
+              </a:rPr>
               <a:t xml:space="preserve"> BA</a:t>
             </a:r>
             <a:r>
-              <a:rPr lang="zh-CN" sz="1500">
+              <a:rPr lang="zh-CN" sz="1350">
                 <a:solidFill>
                   <a:srgbClr val="4A5568"/>
                 </a:solidFill>
                 <a:latin typeface="Microsoft YaHei"/>
                 <a:ea typeface="Microsoft YaHei"/>
               </a:rPr>
-              <a:t>，低视差会失败，阈值靠经验。它换的是时间，不是免费午餐。</a:t>
-            </a:r>
-            <a:endParaRPr/>
-          </a:p>
-        </p:txBody>
-      </p:sp>
-      <p:sp>
-        <p:nvSpPr>
-          <p:cNvPr id="157" name=""/>
+              <a:t>，但换来了时间。</a:t>
+            </a:r>
+            <a:endParaRPr/>
+          </a:p>
+        </p:txBody>
+      </p:sp>
+      <p:sp>
+        <p:nvSpPr>
+          <p:cNvPr id="165" name=""/>
           <p:cNvSpPr/>
           <p:nvPr/>
         </p:nvSpPr>
         <p:spPr>
           <a:xfrm rot="0" flipH="0" flipV="0">
-            <a:off x="381000" y="3657600"/>
-            <a:ext cx="3705225" cy="600075"/>
+            <a:off x="381000" y="3067050"/>
+            <a:ext cx="11430000" cy="1057275"/>
           </a:xfrm>
           <a:prstGeom prst="roundRect">
             <a:avLst>
-              <a:gd name="adj" fmla="val 9524"/>
+              <a:gd name="adj" fmla="val 5405"/>
             </a:avLst>
           </a:prstGeom>
           <a:solidFill>
-            <a:srgbClr val="F0F5FC"/>
+            <a:srgbClr val="F7F9FC"/>
           </a:solidFill>
-          <a:ln/>
+          <a:ln w="12700">
+            <a:solidFill>
+              <a:srgbClr val="D6DCE5"/>
+            </a:solidFill>
+            <a:prstDash val="solid"/>
+          </a:ln>
         </p:spPr>
         <p:txBody>
           <a:bodyPr/>
@@ -7974,14 +8162,14 @@
       </p:sp>
       <p:sp>
         <p:nvSpPr>
-          <p:cNvPr id="158" name="" descr="{&quot;isTemplate&quot;:true,&quot;type&quot;:&quot;text&quot;}"/>
-          <p:cNvSpPr txBox="1"/>
-          <p:nvPr/>
-        </p:nvSpPr>
-        <p:spPr>
-          <a:xfrm rot="0" flipH="0" flipV="0">
-            <a:off x="533400" y="3771900"/>
-            <a:ext cx="1295400" cy="371475"/>
+          <p:cNvPr id="166" name="" descr="{&quot;isTemplate&quot;:true,&quot;type&quot;:&quot;text&quot;}"/>
+          <p:cNvSpPr txBox="1"/>
+          <p:nvPr/>
+        </p:nvSpPr>
+        <p:spPr>
+          <a:xfrm rot="0" flipH="0" flipV="0">
+            <a:off x="533400" y="3152775"/>
+            <a:ext cx="2133600" cy="190500"/>
           </a:xfrm>
           <a:prstGeom prst="rect"/>
         </p:spPr>
@@ -7994,29 +8182,29 @@
               </a:lnSpc>
             </a:pPr>
             <a:r>
-              <a:rPr lang="en-US" sz="2400" b="1">
-                <a:solidFill>
-                  <a:srgbClr val="1E4FA8"/>
-                </a:solidFill>
-                <a:latin typeface="Microsoft YaHei"/>
-                <a:ea typeface="Microsoft YaHei"/>
-              </a:rPr>
-              <a:t>26.29 dB</a:t>
-            </a:r>
-            <a:endParaRPr/>
-          </a:p>
-        </p:txBody>
-      </p:sp>
-      <p:sp>
-        <p:nvSpPr>
-          <p:cNvPr id="159" name="" descr="{&quot;isTemplate&quot;:true,&quot;type&quot;:&quot;text&quot;}"/>
-          <p:cNvSpPr txBox="1"/>
-          <p:nvPr/>
-        </p:nvSpPr>
-        <p:spPr>
-          <a:xfrm rot="0" flipH="0" flipV="0">
-            <a:off x="1924050" y="3771900"/>
-            <a:ext cx="2009775" cy="371475"/>
+              <a:rPr lang="zh-CN" sz="1200" b="1">
+                <a:solidFill>
+                  <a:srgbClr val="1A2230"/>
+                </a:solidFill>
+                <a:latin typeface="Microsoft YaHei"/>
+                <a:ea typeface="Microsoft YaHei"/>
+              </a:rPr>
+              <a:t>它现在的边界　→　对应的补法</a:t>
+            </a:r>
+            <a:endParaRPr/>
+          </a:p>
+        </p:txBody>
+      </p:sp>
+      <p:sp>
+        <p:nvSpPr>
+          <p:cNvPr id="167" name="" descr="{&quot;isTemplate&quot;:true,&quot;type&quot;:&quot;text&quot;}"/>
+          <p:cNvSpPr txBox="1"/>
+          <p:nvPr/>
+        </p:nvSpPr>
+        <p:spPr>
+          <a:xfrm rot="0" flipH="0" flipV="0">
+            <a:off x="9525000" y="3152775"/>
+            <a:ext cx="2133600" cy="190500"/>
           </a:xfrm>
           <a:prstGeom prst="rect"/>
         </p:spPr>
@@ -8029,57 +8217,498 @@
               </a:lnSpc>
             </a:pPr>
             <a:r>
-              <a:rPr lang="zh-CN" sz="1275">
-                <a:solidFill>
-                  <a:srgbClr val="1A2230"/>
-                </a:solidFill>
-                <a:latin typeface="Microsoft YaHei"/>
-                <a:ea typeface="Microsoft YaHei"/>
-              </a:rPr>
-              <a:t>论文在</a:t>
-            </a:r>
-            <a:r>
-              <a:rPr lang="en-US" sz="1275">
-                <a:solidFill>
-                  <a:srgbClr val="1A2230"/>
-                </a:solidFill>
-                <a:latin typeface="Microsoft YaHei"/>
-                <a:ea typeface="Microsoft YaHei"/>
-              </a:rPr>
-              <a:t xml:space="preserve"> MipNeRF360 </a:t>
-            </a:r>
-            <a:r>
-              <a:rPr lang="zh-CN" sz="1275">
-                <a:solidFill>
-                  <a:srgbClr val="1A2230"/>
-                </a:solidFill>
-                <a:latin typeface="Microsoft YaHei"/>
-                <a:ea typeface="Microsoft YaHei"/>
-              </a:rPr>
-              <a:t>的成绩</a:t>
-            </a:r>
-            <a:endParaRPr/>
-          </a:p>
-        </p:txBody>
-      </p:sp>
-      <p:sp>
-        <p:nvSpPr>
-          <p:cNvPr id="160" name=""/>
+              <a:rPr lang="zh-CN" sz="1050">
+                <a:solidFill>
+                  <a:srgbClr val="8B97A8"/>
+                </a:solidFill>
+                <a:latin typeface="Microsoft YaHei"/>
+                <a:ea typeface="Microsoft YaHei"/>
+              </a:rPr>
+              <a:t>论文自述的局限，非我们的复现问题</a:t>
+            </a:r>
+            <a:endParaRPr/>
+          </a:p>
+        </p:txBody>
+      </p:sp>
+      <p:sp>
+        <p:nvSpPr>
+          <p:cNvPr id="168" name="" descr="{&quot;isTemplate&quot;:true,&quot;type&quot;:&quot;text&quot;}"/>
+          <p:cNvSpPr txBox="1"/>
+          <p:nvPr/>
+        </p:nvSpPr>
+        <p:spPr>
+          <a:xfrm rot="0" flipH="0" flipV="0">
+            <a:off x="533400" y="3409950"/>
+            <a:ext cx="2686050" cy="171450"/>
+          </a:xfrm>
+          <a:prstGeom prst="rect"/>
+        </p:spPr>
+        <p:txBody>
+          <a:bodyPr wrap="none" lIns="0" tIns="0" rIns="0" bIns="0"/>
+          <a:p>
+            <a:pPr>
+              <a:lnSpc>
+                <a:spcPct val="100000"/>
+              </a:lnSpc>
+            </a:pPr>
+            <a:r>
+              <a:rPr lang="en-US" sz="1088" b="1">
+                <a:solidFill>
+                  <a:srgbClr val="B03A37"/>
+                </a:solidFill>
+                <a:latin typeface="Microsoft YaHei"/>
+                <a:ea typeface="Microsoft YaHei"/>
+              </a:rPr>
+              <a:t xml:space="preserve">① </a:t>
+            </a:r>
+            <a:r>
+              <a:rPr lang="zh-CN" sz="1088" b="1">
+                <a:solidFill>
+                  <a:srgbClr val="B03A37"/>
+                </a:solidFill>
+                <a:latin typeface="Microsoft YaHei"/>
+                <a:ea typeface="Microsoft YaHei"/>
+              </a:rPr>
+              <a:t>低视差直接失效</a:t>
+            </a:r>
+            <a:endParaRPr/>
+          </a:p>
+        </p:txBody>
+      </p:sp>
+      <p:sp>
+        <p:nvSpPr>
+          <p:cNvPr id="169" name="" descr="{&quot;isTemplate&quot;:true,&quot;type&quot;:&quot;text&quot;}"/>
+          <p:cNvSpPr txBox="1"/>
+          <p:nvPr/>
+        </p:nvSpPr>
+        <p:spPr>
+          <a:xfrm rot="0" flipH="0" flipV="0">
+            <a:off x="533400" y="3600450"/>
+            <a:ext cx="2686050" cy="438150"/>
+          </a:xfrm>
+          <a:prstGeom prst="rect"/>
+        </p:spPr>
+        <p:txBody>
+          <a:bodyPr wrap="square" lIns="0" tIns="0" rIns="0" bIns="0">
+            <a:normAutofit/>
+          </a:bodyPr>
+          <a:p>
+            <a:pPr>
+              <a:lnSpc>
+                <a:spcPct val="135000"/>
+              </a:lnSpc>
+            </a:pPr>
+            <a:r>
+              <a:rPr lang="zh-CN" sz="1050">
+                <a:solidFill>
+                  <a:srgbClr val="1A2230"/>
+                </a:solidFill>
+                <a:latin typeface="Microsoft YaHei"/>
+                <a:ea typeface="Microsoft YaHei"/>
+              </a:rPr>
+              <a:t>低视差帧只参与渲染、不进位姿求解，避免污染轨迹</a:t>
+            </a:r>
+            <a:endParaRPr/>
+          </a:p>
+        </p:txBody>
+      </p:sp>
+      <p:sp>
+        <p:nvSpPr>
+          <p:cNvPr id="170" name="" descr="{&quot;isTemplate&quot;:true,&quot;type&quot;:&quot;text&quot;}"/>
+          <p:cNvSpPr txBox="1"/>
+          <p:nvPr/>
+        </p:nvSpPr>
+        <p:spPr>
+          <a:xfrm rot="0" flipH="0" flipV="0">
+            <a:off x="3352800" y="3409950"/>
+            <a:ext cx="2676525" cy="171450"/>
+          </a:xfrm>
+          <a:prstGeom prst="rect"/>
+        </p:spPr>
+        <p:txBody>
+          <a:bodyPr wrap="none" lIns="0" tIns="0" rIns="0" bIns="0"/>
+          <a:p>
+            <a:pPr>
+              <a:lnSpc>
+                <a:spcPct val="100000"/>
+              </a:lnSpc>
+            </a:pPr>
+            <a:r>
+              <a:rPr lang="en-US" sz="1088" b="1">
+                <a:solidFill>
+                  <a:srgbClr val="B03A37"/>
+                </a:solidFill>
+                <a:latin typeface="Microsoft YaHei"/>
+                <a:ea typeface="Microsoft YaHei"/>
+              </a:rPr>
+              <a:t xml:space="preserve">② </a:t>
+            </a:r>
+            <a:r>
+              <a:rPr lang="zh-CN" sz="1088" b="1">
+                <a:solidFill>
+                  <a:srgbClr val="B03A37"/>
+                </a:solidFill>
+                <a:latin typeface="Microsoft YaHei"/>
+                <a:ea typeface="Microsoft YaHei"/>
+              </a:rPr>
+              <a:t>精度低于全局</a:t>
+            </a:r>
+            <a:r>
+              <a:rPr lang="en-US" sz="1088" b="1">
+                <a:solidFill>
+                  <a:srgbClr val="B03A37"/>
+                </a:solidFill>
+                <a:latin typeface="Microsoft YaHei"/>
+                <a:ea typeface="Microsoft YaHei"/>
+              </a:rPr>
+              <a:t xml:space="preserve"> BA</a:t>
+            </a:r>
+            <a:endParaRPr/>
+          </a:p>
+        </p:txBody>
+      </p:sp>
+      <p:sp>
+        <p:nvSpPr>
+          <p:cNvPr id="171" name="" descr="{&quot;isTemplate&quot;:true,&quot;type&quot;:&quot;text&quot;}"/>
+          <p:cNvSpPr txBox="1"/>
+          <p:nvPr/>
+        </p:nvSpPr>
+        <p:spPr>
+          <a:xfrm rot="0" flipH="0" flipV="0">
+            <a:off x="3352800" y="3600450"/>
+            <a:ext cx="2676525" cy="438150"/>
+          </a:xfrm>
+          <a:prstGeom prst="rect"/>
+        </p:spPr>
+        <p:txBody>
+          <a:bodyPr wrap="square" lIns="0" tIns="0" rIns="0" bIns="0">
+            <a:normAutofit/>
+          </a:bodyPr>
+          <a:p>
+            <a:pPr>
+              <a:lnSpc>
+                <a:spcPct val="135000"/>
+              </a:lnSpc>
+            </a:pPr>
+            <a:r>
+              <a:rPr lang="zh-CN" sz="1050">
+                <a:solidFill>
+                  <a:srgbClr val="1A2230"/>
+                </a:solidFill>
+                <a:latin typeface="Microsoft YaHei"/>
+                <a:ea typeface="Microsoft YaHei"/>
+              </a:rPr>
+              <a:t>在线出预览，结束时</a:t>
+            </a:r>
+            <a:r>
+              <a:rPr lang="en-US" sz="1050">
+                <a:solidFill>
+                  <a:srgbClr val="1A2230"/>
+                </a:solidFill>
+                <a:latin typeface="Microsoft YaHei"/>
+                <a:ea typeface="Microsoft YaHei"/>
+              </a:rPr>
+              <a:t xml:space="preserve"> GLOMAP </a:t>
+            </a:r>
+            <a:r>
+              <a:rPr lang="zh-CN" sz="1050">
+                <a:solidFill>
+                  <a:srgbClr val="1A2230"/>
+                </a:solidFill>
+                <a:latin typeface="Microsoft YaHei"/>
+                <a:ea typeface="Microsoft YaHei"/>
+              </a:rPr>
+              <a:t>回填一次全局</a:t>
+            </a:r>
+            <a:r>
+              <a:rPr lang="en-US" sz="1050">
+                <a:solidFill>
+                  <a:srgbClr val="1A2230"/>
+                </a:solidFill>
+                <a:latin typeface="Microsoft YaHei"/>
+                <a:ea typeface="Microsoft YaHei"/>
+              </a:rPr>
+              <a:t xml:space="preserve"> BA</a:t>
+            </a:r>
+            <a:r>
+              <a:rPr lang="zh-CN" sz="1050">
+                <a:solidFill>
+                  <a:srgbClr val="1A2230"/>
+                </a:solidFill>
+                <a:latin typeface="Microsoft YaHei"/>
+                <a:ea typeface="Microsoft YaHei"/>
+              </a:rPr>
+              <a:t>，补回</a:t>
+            </a:r>
+            <a:r>
+              <a:rPr lang="en-US" sz="1050">
+                <a:solidFill>
+                  <a:srgbClr val="1A2230"/>
+                </a:solidFill>
+                <a:latin typeface="Microsoft YaHei"/>
+                <a:ea typeface="Microsoft YaHei"/>
+              </a:rPr>
+              <a:t xml:space="preserve"> 1.2 dB</a:t>
+            </a:r>
+            <a:endParaRPr/>
+          </a:p>
+        </p:txBody>
+      </p:sp>
+      <p:sp>
+        <p:nvSpPr>
+          <p:cNvPr id="172" name="" descr="{&quot;isTemplate&quot;:true,&quot;type&quot;:&quot;text&quot;}"/>
+          <p:cNvSpPr txBox="1"/>
+          <p:nvPr/>
+        </p:nvSpPr>
+        <p:spPr>
+          <a:xfrm rot="0" flipH="0" flipV="0">
+            <a:off x="6162675" y="3409950"/>
+            <a:ext cx="2686050" cy="171450"/>
+          </a:xfrm>
+          <a:prstGeom prst="rect"/>
+        </p:spPr>
+        <p:txBody>
+          <a:bodyPr wrap="none" lIns="0" tIns="0" rIns="0" bIns="0"/>
+          <a:p>
+            <a:pPr>
+              <a:lnSpc>
+                <a:spcPct val="100000"/>
+              </a:lnSpc>
+            </a:pPr>
+            <a:r>
+              <a:rPr lang="en-US" sz="1088" b="1">
+                <a:solidFill>
+                  <a:srgbClr val="B03A37"/>
+                </a:solidFill>
+                <a:latin typeface="Microsoft YaHei"/>
+                <a:ea typeface="Microsoft YaHei"/>
+              </a:rPr>
+              <a:t xml:space="preserve">③ </a:t>
+            </a:r>
+            <a:r>
+              <a:rPr lang="zh-CN" sz="1088" b="1">
+                <a:solidFill>
+                  <a:srgbClr val="B03A37"/>
+                </a:solidFill>
+                <a:latin typeface="Microsoft YaHei"/>
+                <a:ea typeface="Microsoft YaHei"/>
+              </a:rPr>
+              <a:t>上游依赖链太重</a:t>
+            </a:r>
+            <a:endParaRPr/>
+          </a:p>
+        </p:txBody>
+      </p:sp>
+      <p:sp>
+        <p:nvSpPr>
+          <p:cNvPr id="173" name="" descr="{&quot;isTemplate&quot;:true,&quot;type&quot;:&quot;text&quot;}"/>
+          <p:cNvSpPr txBox="1"/>
+          <p:nvPr/>
+        </p:nvSpPr>
+        <p:spPr>
+          <a:xfrm rot="0" flipH="0" flipV="0">
+            <a:off x="6162675" y="3600450"/>
+            <a:ext cx="2686050" cy="438150"/>
+          </a:xfrm>
+          <a:prstGeom prst="rect"/>
+        </p:spPr>
+        <p:txBody>
+          <a:bodyPr wrap="square" lIns="0" tIns="0" rIns="0" bIns="0">
+            <a:normAutofit/>
+          </a:bodyPr>
+          <a:p>
+            <a:pPr>
+              <a:lnSpc>
+                <a:spcPct val="135000"/>
+              </a:lnSpc>
+            </a:pPr>
+            <a:r>
+              <a:rPr lang="zh-CN" sz="1050">
+                <a:solidFill>
+                  <a:srgbClr val="1A2230"/>
+                </a:solidFill>
+                <a:latin typeface="Microsoft YaHei"/>
+                <a:ea typeface="Microsoft YaHei"/>
+              </a:rPr>
+              <a:t>采集端给实时覆盖率与误差热图，直接提示</a:t>
+            </a:r>
+            <a:r>
+              <a:rPr lang="en-US" sz="1050">
+                <a:solidFill>
+                  <a:srgbClr val="1A2230"/>
+                </a:solidFill>
+                <a:latin typeface="Microsoft YaHei"/>
+                <a:ea typeface="Microsoft YaHei"/>
+              </a:rPr>
+              <a:t>"</a:t>
+            </a:r>
+            <a:r>
+              <a:rPr lang="zh-CN" sz="1050">
+                <a:solidFill>
+                  <a:srgbClr val="1A2230"/>
+                </a:solidFill>
+                <a:latin typeface="Microsoft YaHei"/>
+                <a:ea typeface="Microsoft YaHei"/>
+              </a:rPr>
+              <a:t>这块没拍</a:t>
+            </a:r>
+            <a:r>
+              <a:rPr lang="en-US" sz="1050">
+                <a:solidFill>
+                  <a:srgbClr val="1A2230"/>
+                </a:solidFill>
+                <a:latin typeface="Microsoft YaHei"/>
+                <a:ea typeface="Microsoft YaHei"/>
+              </a:rPr>
+              <a:t>"</a:t>
+            </a:r>
+            <a:endParaRPr/>
+          </a:p>
+        </p:txBody>
+      </p:sp>
+      <p:sp>
+        <p:nvSpPr>
+          <p:cNvPr id="174" name="" descr="{&quot;isTemplate&quot;:true,&quot;type&quot;:&quot;text&quot;}"/>
+          <p:cNvSpPr txBox="1"/>
+          <p:nvPr/>
+        </p:nvSpPr>
+        <p:spPr>
+          <a:xfrm rot="0" flipH="0" flipV="0">
+            <a:off x="8982075" y="3409950"/>
+            <a:ext cx="2676525" cy="171450"/>
+          </a:xfrm>
+          <a:prstGeom prst="rect"/>
+        </p:spPr>
+        <p:txBody>
+          <a:bodyPr wrap="none" lIns="0" tIns="0" rIns="0" bIns="0"/>
+          <a:p>
+            <a:pPr>
+              <a:lnSpc>
+                <a:spcPct val="100000"/>
+              </a:lnSpc>
+            </a:pPr>
+            <a:r>
+              <a:rPr lang="en-US" sz="1088" b="1">
+                <a:solidFill>
+                  <a:srgbClr val="B03A37"/>
+                </a:solidFill>
+                <a:latin typeface="Microsoft YaHei"/>
+                <a:ea typeface="Microsoft YaHei"/>
+              </a:rPr>
+              <a:t xml:space="preserve">④ </a:t>
+            </a:r>
+            <a:r>
+              <a:rPr lang="zh-CN" sz="1088" b="1">
+                <a:solidFill>
+                  <a:srgbClr val="B03A37"/>
+                </a:solidFill>
+                <a:latin typeface="Microsoft YaHei"/>
+                <a:ea typeface="Microsoft YaHei"/>
+              </a:rPr>
+              <a:t>阈值靠经验</a:t>
+            </a:r>
+            <a:endParaRPr/>
+          </a:p>
+        </p:txBody>
+      </p:sp>
+      <p:sp>
+        <p:nvSpPr>
+          <p:cNvPr id="175" name="" descr="{&quot;isTemplate&quot;:true,&quot;type&quot;:&quot;text&quot;}"/>
+          <p:cNvSpPr txBox="1"/>
+          <p:nvPr/>
+        </p:nvSpPr>
+        <p:spPr>
+          <a:xfrm rot="0" flipH="0" flipV="0">
+            <a:off x="8982075" y="3600450"/>
+            <a:ext cx="2676525" cy="219075"/>
+          </a:xfrm>
+          <a:prstGeom prst="rect"/>
+        </p:spPr>
+        <p:txBody>
+          <a:bodyPr wrap="none" lIns="0" tIns="0" rIns="0" bIns="0"/>
+          <a:p>
+            <a:pPr>
+              <a:lnSpc>
+                <a:spcPct val="135000"/>
+              </a:lnSpc>
+            </a:pPr>
+            <a:r>
+              <a:rPr lang="zh-CN" sz="1050">
+                <a:solidFill>
+                  <a:srgbClr val="1A2230"/>
+                </a:solidFill>
+                <a:latin typeface="Microsoft YaHei"/>
+                <a:ea typeface="Microsoft YaHei"/>
+              </a:rPr>
+              <a:t>按纹理强度与重叠度在线估计，替代固定常数</a:t>
+            </a:r>
+            <a:endParaRPr/>
+          </a:p>
+        </p:txBody>
+      </p:sp>
+      <p:sp>
+        <p:nvSpPr>
+          <p:cNvPr id="176" name=""/>
           <p:cNvSpPr/>
           <p:nvPr/>
         </p:nvSpPr>
         <p:spPr>
           <a:xfrm rot="0" flipH="0" flipV="0">
-            <a:off x="4238625" y="3657600"/>
-            <a:ext cx="3714750" cy="600075"/>
+            <a:off x="381000" y="4276725"/>
+            <a:ext cx="11430000" cy="1200150"/>
           </a:xfrm>
           <a:prstGeom prst="roundRect">
             <a:avLst>
-              <a:gd name="adj" fmla="val 9524"/>
+              <a:gd name="adj" fmla="val 4762"/>
             </a:avLst>
           </a:prstGeom>
           <a:solidFill>
-            <a:srgbClr val="F0F5FC"/>
+            <a:srgbClr val="FAFBFD"/>
+          </a:solidFill>
+          <a:ln w="12700">
+            <a:solidFill>
+              <a:srgbClr val="E3E8F0"/>
+            </a:solidFill>
+            <a:prstDash val="solid"/>
+          </a:ln>
+        </p:spPr>
+        <p:txBody>
+          <a:bodyPr/>
+          <a:p/>
+        </p:txBody>
+      </p:sp>
+      <p:sp>
+        <p:nvSpPr>
+          <p:cNvPr id="177" name=""/>
+          <p:cNvSpPr/>
+          <p:nvPr/>
+        </p:nvSpPr>
+        <p:spPr>
+          <a:xfrm rot="0" flipH="0" flipV="0">
+            <a:off x="533400" y="4371975"/>
+            <a:ext cx="2781300" cy="1009650"/>
+          </a:xfrm>
+          <a:custGeom>
+            <a:pathLst>
+              <a:path w="292" h="106">
+                <a:moveTo>
+                  <a:pt x="0" y="0"/>
+                </a:moveTo>
+                <a:lnTo>
+                  <a:pt x="292" y="0"/>
+                </a:lnTo>
+                <a:lnTo>
+                  <a:pt x="292" y="2"/>
+                </a:lnTo>
+                <a:lnTo>
+                  <a:pt x="0" y="2"/>
+                </a:lnTo>
+                <a:close/>
+              </a:path>
+            </a:pathLst>
+          </a:custGeom>
+          <a:solidFill>
+            <a:srgbClr val="C8D4E4"/>
           </a:solidFill>
           <a:ln/>
         </p:spPr>
@@ -8090,14 +8719,14 @@
       </p:sp>
       <p:sp>
         <p:nvSpPr>
-          <p:cNvPr id="161" name="" descr="{&quot;isTemplate&quot;:true,&quot;type&quot;:&quot;text&quot;}"/>
-          <p:cNvSpPr txBox="1"/>
-          <p:nvPr/>
-        </p:nvSpPr>
-        <p:spPr>
-          <a:xfrm rot="0" flipH="0" flipV="0">
-            <a:off x="4391025" y="3771900"/>
-            <a:ext cx="971550" cy="371475"/>
+          <p:cNvPr id="178" name="" descr="{&quot;isTemplate&quot;:true,&quot;type&quot;:&quot;text&quot;}"/>
+          <p:cNvSpPr txBox="1"/>
+          <p:nvPr/>
+        </p:nvSpPr>
+        <p:spPr>
+          <a:xfrm rot="0" flipH="0" flipV="0">
+            <a:off x="666750" y="4476750"/>
+            <a:ext cx="2514600" cy="171450"/>
           </a:xfrm>
           <a:prstGeom prst="rect"/>
         </p:spPr>
@@ -8110,29 +8739,29 @@
               </a:lnSpc>
             </a:pPr>
             <a:r>
-              <a:rPr lang="en-US" sz="2400" b="1">
-                <a:solidFill>
-                  <a:srgbClr val="1E4FA8"/>
-                </a:solidFill>
-                <a:latin typeface="Microsoft YaHei"/>
-                <a:ea typeface="Microsoft YaHei"/>
-              </a:rPr>
-              <a:t>0.5 dB</a:t>
-            </a:r>
-            <a:endParaRPr/>
-          </a:p>
-        </p:txBody>
-      </p:sp>
-      <p:sp>
-        <p:nvSpPr>
-          <p:cNvPr id="162" name="" descr="{&quot;isTemplate&quot;:true,&quot;type&quot;:&quot;text&quot;}"/>
-          <p:cNvSpPr txBox="1"/>
-          <p:nvPr/>
-        </p:nvSpPr>
-        <p:spPr>
-          <a:xfrm rot="0" flipH="0" flipV="0">
-            <a:off x="5457825" y="3771900"/>
-            <a:ext cx="1295400" cy="371475"/>
+              <a:rPr lang="en-US" sz="1125" b="1">
+                <a:solidFill>
+                  <a:srgbClr val="3D7BD9"/>
+                </a:solidFill>
+                <a:latin typeface="Microsoft YaHei"/>
+                <a:ea typeface="Microsoft YaHei"/>
+              </a:rPr>
+              <a:t>2019</a:t>
+            </a:r>
+            <a:endParaRPr/>
+          </a:p>
+        </p:txBody>
+      </p:sp>
+      <p:sp>
+        <p:nvSpPr>
+          <p:cNvPr id="179" name="" descr="{&quot;isTemplate&quot;:true,&quot;type&quot;:&quot;text&quot;}"/>
+          <p:cNvSpPr txBox="1"/>
+          <p:nvPr/>
+        </p:nvSpPr>
+        <p:spPr>
+          <a:xfrm rot="0" flipH="0" flipV="0">
+            <a:off x="666750" y="4667250"/>
+            <a:ext cx="2514600" cy="200025"/>
           </a:xfrm>
           <a:prstGeom prst="rect"/>
         </p:spPr>
@@ -8145,37 +8774,121 @@
               </a:lnSpc>
             </a:pPr>
             <a:r>
-              <a:rPr lang="zh-CN" sz="1275">
-                <a:solidFill>
-                  <a:srgbClr val="1A2230"/>
-                </a:solidFill>
-                <a:latin typeface="Microsoft YaHei"/>
-                <a:ea typeface="Microsoft YaHei"/>
-              </a:rPr>
-              <a:t>输入打乱后的代价</a:t>
-            </a:r>
-            <a:endParaRPr/>
-          </a:p>
-        </p:txBody>
-      </p:sp>
-      <p:sp>
-        <p:nvSpPr>
-          <p:cNvPr id="163" name=""/>
+              <a:rPr lang="en-US" sz="1313" b="1">
+                <a:solidFill>
+                  <a:srgbClr val="1A2230"/>
+                </a:solidFill>
+                <a:latin typeface="Microsoft YaHei"/>
+                <a:ea typeface="Microsoft YaHei"/>
+              </a:rPr>
+              <a:t>NeRF</a:t>
+            </a:r>
+            <a:endParaRPr/>
+          </a:p>
+        </p:txBody>
+      </p:sp>
+      <p:sp>
+        <p:nvSpPr>
+          <p:cNvPr id="180" name="" descr="{&quot;isTemplate&quot;:true,&quot;type&quot;:&quot;text&quot;}"/>
+          <p:cNvSpPr txBox="1"/>
+          <p:nvPr/>
+        </p:nvSpPr>
+        <p:spPr>
+          <a:xfrm rot="0" flipH="0" flipV="0">
+            <a:off x="666750" y="4905375"/>
+            <a:ext cx="2514600" cy="219075"/>
+          </a:xfrm>
+          <a:prstGeom prst="rect"/>
+        </p:spPr>
+        <p:txBody>
+          <a:bodyPr wrap="none" lIns="0" tIns="0" rIns="0" bIns="0"/>
+          <a:p>
+            <a:pPr>
+              <a:lnSpc>
+                <a:spcPct val="135000"/>
+              </a:lnSpc>
+            </a:pPr>
+            <a:r>
+              <a:rPr lang="zh-CN" sz="1050">
+                <a:solidFill>
+                  <a:srgbClr val="4A5568"/>
+                </a:solidFill>
+                <a:latin typeface="Microsoft YaHei"/>
+                <a:ea typeface="Microsoft YaHei"/>
+              </a:rPr>
+              <a:t>离线、必须有序输入</a:t>
+            </a:r>
+            <a:endParaRPr/>
+          </a:p>
+        </p:txBody>
+      </p:sp>
+      <p:sp>
+        <p:nvSpPr>
+          <p:cNvPr id="181" name="" descr="{&quot;isTemplate&quot;:true,&quot;type&quot;:&quot;text&quot;}"/>
+          <p:cNvSpPr txBox="1"/>
+          <p:nvPr/>
+        </p:nvSpPr>
+        <p:spPr>
+          <a:xfrm rot="0" flipH="0" flipV="0">
+            <a:off x="666750" y="5153025"/>
+            <a:ext cx="2514600" cy="209550"/>
+          </a:xfrm>
+          <a:prstGeom prst="rect"/>
+        </p:spPr>
+        <p:txBody>
+          <a:bodyPr wrap="none" lIns="0" tIns="0" rIns="0" bIns="0"/>
+          <a:p>
+            <a:pPr>
+              <a:lnSpc>
+                <a:spcPct val="135000"/>
+              </a:lnSpc>
+            </a:pPr>
+            <a:r>
+              <a:rPr lang="zh-CN" sz="1013">
+                <a:solidFill>
+                  <a:srgbClr val="8B97A8"/>
+                </a:solidFill>
+                <a:latin typeface="Microsoft YaHei"/>
+                <a:ea typeface="Microsoft YaHei"/>
+              </a:rPr>
+              <a:t>一次训练以小时计</a:t>
+            </a:r>
+            <a:endParaRPr/>
+          </a:p>
+        </p:txBody>
+      </p:sp>
+      <p:sp>
+        <p:nvSpPr>
+          <p:cNvPr id="182" name=""/>
           <p:cNvSpPr/>
           <p:nvPr/>
         </p:nvSpPr>
         <p:spPr>
           <a:xfrm rot="0" flipH="0" flipV="0">
-            <a:off x="8105775" y="3657600"/>
-            <a:ext cx="3705225" cy="600075"/>
-          </a:xfrm>
-          <a:prstGeom prst="roundRect">
-            <a:avLst>
-              <a:gd name="adj" fmla="val 9524"/>
-            </a:avLst>
-          </a:prstGeom>
+            <a:off x="3314700" y="4371975"/>
+            <a:ext cx="2781300" cy="1009650"/>
+          </a:xfrm>
+          <a:custGeom>
+            <a:pathLst>
+              <a:path w="292" h="106">
+                <a:moveTo>
+                  <a:pt x="0" y="0"/>
+                </a:moveTo>
+                <a:lnTo>
+                  <a:pt x="292" y="0"/>
+                </a:lnTo>
+                <a:lnTo>
+                  <a:pt x="292" y="2"/>
+                </a:lnTo>
+                <a:lnTo>
+                  <a:pt x="0" y="2"/>
+                </a:lnTo>
+                <a:close/>
+              </a:path>
+            </a:pathLst>
+          </a:custGeom>
           <a:solidFill>
-            <a:srgbClr val="F0F5FC"/>
+            <a:srgbClr val="C8D4E4"/>
           </a:solidFill>
           <a:ln/>
         </p:spPr>
@@ -8186,14 +8899,14 @@
       </p:sp>
       <p:sp>
         <p:nvSpPr>
-          <p:cNvPr id="164" name="" descr="{&quot;isTemplate&quot;:true,&quot;type&quot;:&quot;text&quot;}"/>
-          <p:cNvSpPr txBox="1"/>
-          <p:nvPr/>
-        </p:nvSpPr>
-        <p:spPr>
-          <a:xfrm rot="0" flipH="0" flipV="0">
-            <a:off x="8258175" y="3771900"/>
-            <a:ext cx="1343025" cy="371475"/>
+          <p:cNvPr id="183" name="" descr="{&quot;isTemplate&quot;:true,&quot;type&quot;:&quot;text&quot;}"/>
+          <p:cNvSpPr txBox="1"/>
+          <p:nvPr/>
+        </p:nvSpPr>
+        <p:spPr>
+          <a:xfrm rot="0" flipH="0" flipV="0">
+            <a:off x="3448050" y="4476750"/>
+            <a:ext cx="2514600" cy="171450"/>
           </a:xfrm>
           <a:prstGeom prst="rect"/>
         </p:spPr>
@@ -8206,29 +8919,429 @@
               </a:lnSpc>
             </a:pPr>
             <a:r>
-              <a:rPr lang="en-US" sz="2400" b="1">
+              <a:rPr lang="en-US" sz="1125" b="1">
+                <a:solidFill>
+                  <a:srgbClr val="3D7BD9"/>
+                </a:solidFill>
+                <a:latin typeface="Microsoft YaHei"/>
+                <a:ea typeface="Microsoft YaHei"/>
+              </a:rPr>
+              <a:t>2023</a:t>
+            </a:r>
+            <a:endParaRPr/>
+          </a:p>
+        </p:txBody>
+      </p:sp>
+      <p:sp>
+        <p:nvSpPr>
+          <p:cNvPr id="184" name="" descr="{&quot;isTemplate&quot;:true,&quot;type&quot;:&quot;text&quot;}"/>
+          <p:cNvSpPr txBox="1"/>
+          <p:nvPr/>
+        </p:nvSpPr>
+        <p:spPr>
+          <a:xfrm rot="0" flipH="0" flipV="0">
+            <a:off x="3448050" y="4667250"/>
+            <a:ext cx="2514600" cy="200025"/>
+          </a:xfrm>
+          <a:prstGeom prst="rect"/>
+        </p:spPr>
+        <p:txBody>
+          <a:bodyPr wrap="none" lIns="0" tIns="0" rIns="0" bIns="0"/>
+          <a:p>
+            <a:pPr>
+              <a:lnSpc>
+                <a:spcPct val="100000"/>
+              </a:lnSpc>
+            </a:pPr>
+            <a:r>
+              <a:rPr lang="en-US" sz="1313" b="1">
+                <a:solidFill>
+                  <a:srgbClr val="1A2230"/>
+                </a:solidFill>
+                <a:latin typeface="Microsoft YaHei"/>
+                <a:ea typeface="Microsoft YaHei"/>
+              </a:rPr>
+              <a:t>3DGS</a:t>
+            </a:r>
+            <a:endParaRPr/>
+          </a:p>
+        </p:txBody>
+      </p:sp>
+      <p:sp>
+        <p:nvSpPr>
+          <p:cNvPr id="185" name="" descr="{&quot;isTemplate&quot;:true,&quot;type&quot;:&quot;text&quot;}"/>
+          <p:cNvSpPr txBox="1"/>
+          <p:nvPr/>
+        </p:nvSpPr>
+        <p:spPr>
+          <a:xfrm rot="0" flipH="0" flipV="0">
+            <a:off x="3448050" y="4905375"/>
+            <a:ext cx="2514600" cy="219075"/>
+          </a:xfrm>
+          <a:prstGeom prst="rect"/>
+        </p:spPr>
+        <p:txBody>
+          <a:bodyPr wrap="none" lIns="0" tIns="0" rIns="0" bIns="0"/>
+          <a:p>
+            <a:pPr>
+              <a:lnSpc>
+                <a:spcPct val="135000"/>
+              </a:lnSpc>
+            </a:pPr>
+            <a:r>
+              <a:rPr lang="zh-CN" sz="1050">
+                <a:solidFill>
+                  <a:srgbClr val="4A5568"/>
+                </a:solidFill>
+                <a:latin typeface="Microsoft YaHei"/>
+                <a:ea typeface="Microsoft YaHei"/>
+              </a:rPr>
+              <a:t>渲染快了，位姿仍靠</a:t>
+            </a:r>
+            <a:r>
+              <a:rPr lang="en-US" sz="1050">
+                <a:solidFill>
+                  <a:srgbClr val="4A5568"/>
+                </a:solidFill>
+                <a:latin typeface="Microsoft YaHei"/>
+                <a:ea typeface="Microsoft YaHei"/>
+              </a:rPr>
+              <a:t xml:space="preserve"> COLMAP</a:t>
+            </a:r>
+            <a:endParaRPr/>
+          </a:p>
+        </p:txBody>
+      </p:sp>
+      <p:sp>
+        <p:nvSpPr>
+          <p:cNvPr id="186" name="" descr="{&quot;isTemplate&quot;:true,&quot;type&quot;:&quot;text&quot;}"/>
+          <p:cNvSpPr txBox="1"/>
+          <p:nvPr/>
+        </p:nvSpPr>
+        <p:spPr>
+          <a:xfrm rot="0" flipH="0" flipV="0">
+            <a:off x="3448050" y="5153025"/>
+            <a:ext cx="2514600" cy="209550"/>
+          </a:xfrm>
+          <a:prstGeom prst="rect"/>
+        </p:spPr>
+        <p:txBody>
+          <a:bodyPr wrap="none" lIns="0" tIns="0" rIns="0" bIns="0"/>
+          <a:p>
+            <a:pPr>
+              <a:lnSpc>
+                <a:spcPct val="135000"/>
+              </a:lnSpc>
+            </a:pPr>
+            <a:r>
+              <a:rPr lang="zh-CN" sz="1013">
+                <a:solidFill>
+                  <a:srgbClr val="8B97A8"/>
+                </a:solidFill>
+                <a:latin typeface="Microsoft YaHei"/>
+                <a:ea typeface="Microsoft YaHei"/>
+              </a:rPr>
+              <a:t>前置步骤还是离线</a:t>
+            </a:r>
+            <a:r>
+              <a:rPr lang="en-US" sz="1013">
+                <a:solidFill>
+                  <a:srgbClr val="8B97A8"/>
+                </a:solidFill>
+                <a:latin typeface="Microsoft YaHei"/>
+                <a:ea typeface="Microsoft YaHei"/>
+              </a:rPr>
+              <a:t xml:space="preserve"> SfM</a:t>
+            </a:r>
+            <a:endParaRPr/>
+          </a:p>
+        </p:txBody>
+      </p:sp>
+      <p:sp>
+        <p:nvSpPr>
+          <p:cNvPr id="187" name=""/>
+          <p:cNvSpPr/>
+          <p:nvPr/>
+        </p:nvSpPr>
+        <p:spPr>
+          <a:xfrm rot="0" flipH="0" flipV="0">
+            <a:off x="6096000" y="4371975"/>
+            <a:ext cx="2781300" cy="1009650"/>
+          </a:xfrm>
+          <a:custGeom>
+            <a:pathLst>
+              <a:path w="292" h="106">
+                <a:moveTo>
+                  <a:pt x="0" y="0"/>
+                </a:moveTo>
+                <a:lnTo>
+                  <a:pt x="292" y="0"/>
+                </a:lnTo>
+                <a:lnTo>
+                  <a:pt x="292" y="2"/>
+                </a:lnTo>
+                <a:lnTo>
+                  <a:pt x="0" y="2"/>
+                </a:lnTo>
+                <a:close/>
+              </a:path>
+            </a:pathLst>
+          </a:custGeom>
+          <a:solidFill>
+            <a:srgbClr val="C8D4E4"/>
+          </a:solidFill>
+          <a:ln/>
+        </p:spPr>
+        <p:txBody>
+          <a:bodyPr/>
+          <a:p/>
+        </p:txBody>
+      </p:sp>
+      <p:sp>
+        <p:nvSpPr>
+          <p:cNvPr id="188" name="" descr="{&quot;isTemplate&quot;:true,&quot;type&quot;:&quot;text&quot;}"/>
+          <p:cNvSpPr txBox="1"/>
+          <p:nvPr/>
+        </p:nvSpPr>
+        <p:spPr>
+          <a:xfrm rot="0" flipH="0" flipV="0">
+            <a:off x="6229350" y="4476750"/>
+            <a:ext cx="2514600" cy="171450"/>
+          </a:xfrm>
+          <a:prstGeom prst="rect"/>
+        </p:spPr>
+        <p:txBody>
+          <a:bodyPr wrap="none" lIns="0" tIns="0" rIns="0" bIns="0"/>
+          <a:p>
+            <a:pPr>
+              <a:lnSpc>
+                <a:spcPct val="100000"/>
+              </a:lnSpc>
+            </a:pPr>
+            <a:r>
+              <a:rPr lang="en-US" sz="1125" b="1">
+                <a:solidFill>
+                  <a:srgbClr val="3D7BD9"/>
+                </a:solidFill>
+                <a:latin typeface="Microsoft YaHei"/>
+                <a:ea typeface="Microsoft YaHei"/>
+              </a:rPr>
+              <a:t>2024–25</a:t>
+            </a:r>
+            <a:endParaRPr/>
+          </a:p>
+        </p:txBody>
+      </p:sp>
+      <p:sp>
+        <p:nvSpPr>
+          <p:cNvPr id="189" name="" descr="{&quot;isTemplate&quot;:true,&quot;type&quot;:&quot;text&quot;}"/>
+          <p:cNvSpPr txBox="1"/>
+          <p:nvPr/>
+        </p:nvSpPr>
+        <p:spPr>
+          <a:xfrm rot="0" flipH="0" flipV="0">
+            <a:off x="6229350" y="4667250"/>
+            <a:ext cx="2514600" cy="200025"/>
+          </a:xfrm>
+          <a:prstGeom prst="rect"/>
+        </p:spPr>
+        <p:txBody>
+          <a:bodyPr wrap="none" lIns="0" tIns="0" rIns="0" bIns="0"/>
+          <a:p>
+            <a:pPr>
+              <a:lnSpc>
+                <a:spcPct val="100000"/>
+              </a:lnSpc>
+            </a:pPr>
+            <a:r>
+              <a:rPr lang="zh-CN" sz="1313" b="1">
+                <a:solidFill>
+                  <a:srgbClr val="1A2230"/>
+                </a:solidFill>
+                <a:latin typeface="Microsoft YaHei"/>
+                <a:ea typeface="Microsoft YaHei"/>
+              </a:rPr>
+              <a:t>增量</a:t>
+            </a:r>
+            <a:r>
+              <a:rPr lang="en-US" sz="1313" b="1">
+                <a:solidFill>
+                  <a:srgbClr val="1A2230"/>
+                </a:solidFill>
+                <a:latin typeface="Microsoft YaHei"/>
+                <a:ea typeface="Microsoft YaHei"/>
+              </a:rPr>
+              <a:t xml:space="preserve"> / </a:t>
+            </a:r>
+            <a:r>
+              <a:rPr lang="zh-CN" sz="1313" b="1">
+                <a:solidFill>
+                  <a:srgbClr val="1A2230"/>
+                </a:solidFill>
+                <a:latin typeface="Microsoft YaHei"/>
+                <a:ea typeface="Microsoft YaHei"/>
+              </a:rPr>
+              <a:t>无位姿重建</a:t>
+            </a:r>
+            <a:endParaRPr/>
+          </a:p>
+        </p:txBody>
+      </p:sp>
+      <p:sp>
+        <p:nvSpPr>
+          <p:cNvPr id="190" name="" descr="{&quot;isTemplate&quot;:true,&quot;type&quot;:&quot;text&quot;}"/>
+          <p:cNvSpPr txBox="1"/>
+          <p:nvPr/>
+        </p:nvSpPr>
+        <p:spPr>
+          <a:xfrm rot="0" flipH="0" flipV="0">
+            <a:off x="6229350" y="4905375"/>
+            <a:ext cx="2514600" cy="219075"/>
+          </a:xfrm>
+          <a:prstGeom prst="rect"/>
+        </p:spPr>
+        <p:txBody>
+          <a:bodyPr wrap="none" lIns="0" tIns="0" rIns="0" bIns="0"/>
+          <a:p>
+            <a:pPr>
+              <a:lnSpc>
+                <a:spcPct val="135000"/>
+              </a:lnSpc>
+            </a:pPr>
+            <a:r>
+              <a:rPr lang="zh-CN" sz="1050">
+                <a:solidFill>
+                  <a:srgbClr val="4A5568"/>
+                </a:solidFill>
+                <a:latin typeface="Microsoft YaHei"/>
+                <a:ea typeface="Microsoft YaHei"/>
+              </a:rPr>
+              <a:t>要么依赖有序，要么非全局</a:t>
+            </a:r>
+            <a:endParaRPr/>
+          </a:p>
+        </p:txBody>
+      </p:sp>
+      <p:sp>
+        <p:nvSpPr>
+          <p:cNvPr id="191" name="" descr="{&quot;isTemplate&quot;:true,&quot;type&quot;:&quot;text&quot;}"/>
+          <p:cNvSpPr txBox="1"/>
+          <p:nvPr/>
+        </p:nvSpPr>
+        <p:spPr>
+          <a:xfrm rot="0" flipH="0" flipV="0">
+            <a:off x="6229350" y="5153025"/>
+            <a:ext cx="2514600" cy="209550"/>
+          </a:xfrm>
+          <a:prstGeom prst="rect"/>
+        </p:spPr>
+        <p:txBody>
+          <a:bodyPr wrap="none" lIns="0" tIns="0" rIns="0" bIns="0"/>
+          <a:p>
+            <a:pPr>
+              <a:lnSpc>
+                <a:spcPct val="135000"/>
+              </a:lnSpc>
+            </a:pPr>
+            <a:r>
+              <a:rPr lang="zh-CN" sz="1013">
+                <a:solidFill>
+                  <a:srgbClr val="8B97A8"/>
+                </a:solidFill>
+                <a:latin typeface="Microsoft YaHei"/>
+                <a:ea typeface="Microsoft YaHei"/>
+              </a:rPr>
+              <a:t>两条路各缺一条</a:t>
+            </a:r>
+            <a:endParaRPr/>
+          </a:p>
+        </p:txBody>
+      </p:sp>
+      <p:sp>
+        <p:nvSpPr>
+          <p:cNvPr id="192" name=""/>
+          <p:cNvSpPr/>
+          <p:nvPr/>
+        </p:nvSpPr>
+        <p:spPr>
+          <a:xfrm rot="0" flipH="0" flipV="0">
+            <a:off x="8877300" y="4371975"/>
+            <a:ext cx="2781300" cy="1009650"/>
+          </a:xfrm>
+          <a:custGeom>
+            <a:pathLst>
+              <a:path w="292" h="106">
+                <a:moveTo>
+                  <a:pt x="0" y="0"/>
+                </a:moveTo>
+                <a:lnTo>
+                  <a:pt x="292" y="0"/>
+                </a:lnTo>
+                <a:lnTo>
+                  <a:pt x="292" y="2"/>
+                </a:lnTo>
+                <a:lnTo>
+                  <a:pt x="0" y="2"/>
+                </a:lnTo>
+                <a:close/>
+              </a:path>
+            </a:pathLst>
+          </a:custGeom>
+          <a:solidFill>
+            <a:srgbClr val="1E4FA8"/>
+          </a:solidFill>
+          <a:ln/>
+        </p:spPr>
+        <p:txBody>
+          <a:bodyPr/>
+          <a:p/>
+        </p:txBody>
+      </p:sp>
+      <p:sp>
+        <p:nvSpPr>
+          <p:cNvPr id="193" name="" descr="{&quot;isTemplate&quot;:true,&quot;type&quot;:&quot;text&quot;}"/>
+          <p:cNvSpPr txBox="1"/>
+          <p:nvPr/>
+        </p:nvSpPr>
+        <p:spPr>
+          <a:xfrm rot="0" flipH="0" flipV="0">
+            <a:off x="9010650" y="4476750"/>
+            <a:ext cx="2514600" cy="171450"/>
+          </a:xfrm>
+          <a:prstGeom prst="rect"/>
+        </p:spPr>
+        <p:txBody>
+          <a:bodyPr wrap="none" lIns="0" tIns="0" rIns="0" bIns="0"/>
+          <a:p>
+            <a:pPr>
+              <a:lnSpc>
+                <a:spcPct val="100000"/>
+              </a:lnSpc>
+            </a:pPr>
+            <a:r>
+              <a:rPr lang="en-US" sz="1125" b="1">
                 <a:solidFill>
                   <a:srgbClr val="1E4FA8"/>
                 </a:solidFill>
                 <a:latin typeface="Microsoft YaHei"/>
                 <a:ea typeface="Microsoft YaHei"/>
               </a:rPr>
-              <a:t>25.95 dB</a:t>
-            </a:r>
-            <a:endParaRPr/>
-          </a:p>
-        </p:txBody>
-      </p:sp>
-      <p:sp>
-        <p:nvSpPr>
-          <p:cNvPr id="165" name="" descr="{&quot;isTemplate&quot;:true,&quot;type&quot;:&quot;text&quot;}"/>
-          <p:cNvSpPr txBox="1"/>
-          <p:nvPr/>
-        </p:nvSpPr>
-        <p:spPr>
-          <a:xfrm rot="0" flipH="0" flipV="0">
-            <a:off x="9696450" y="3771900"/>
-            <a:ext cx="1295400" cy="371475"/>
+              <a:t>2026</a:t>
+            </a:r>
+            <a:endParaRPr/>
+          </a:p>
+        </p:txBody>
+      </p:sp>
+      <p:sp>
+        <p:nvSpPr>
+          <p:cNvPr id="194" name="" descr="{&quot;isTemplate&quot;:true,&quot;type&quot;:&quot;text&quot;}"/>
+          <p:cNvSpPr txBox="1"/>
+          <p:nvPr/>
+        </p:nvSpPr>
+        <p:spPr>
+          <a:xfrm rot="0" flipH="0" flipV="0">
+            <a:off x="9010650" y="4667250"/>
+            <a:ext cx="2514600" cy="200025"/>
           </a:xfrm>
           <a:prstGeom prst="rect"/>
         </p:spPr>
@@ -8241,28 +9354,148 @@
               </a:lnSpc>
             </a:pPr>
             <a:r>
-              <a:rPr lang="zh-CN" sz="1275">
-                <a:solidFill>
-                  <a:srgbClr val="1A2230"/>
-                </a:solidFill>
-                <a:latin typeface="Microsoft YaHei"/>
-                <a:ea typeface="Microsoft YaHei"/>
-              </a:rPr>
-              <a:t>我们自己跑出来的</a:t>
-            </a:r>
-            <a:endParaRPr/>
-          </a:p>
-        </p:txBody>
-      </p:sp>
-      <p:sp>
-        <p:nvSpPr>
-          <p:cNvPr id="166" name=""/>
+              <a:rPr lang="en-US" sz="1313" b="1">
+                <a:solidFill>
+                  <a:srgbClr val="1E4FA8"/>
+                </a:solidFill>
+                <a:latin typeface="Microsoft YaHei"/>
+                <a:ea typeface="Microsoft YaHei"/>
+              </a:rPr>
+              <a:t>i3dgs</a:t>
+            </a:r>
+            <a:r>
+              <a:rPr lang="zh-CN" sz="1313" b="1">
+                <a:solidFill>
+                  <a:srgbClr val="1E4FA8"/>
+                </a:solidFill>
+                <a:latin typeface="Microsoft YaHei"/>
+                <a:ea typeface="Microsoft YaHei"/>
+              </a:rPr>
+              <a:t>（本文）</a:t>
+            </a:r>
+            <a:endParaRPr/>
+          </a:p>
+        </p:txBody>
+      </p:sp>
+      <p:sp>
+        <p:nvSpPr>
+          <p:cNvPr id="195" name="" descr="{&quot;isTemplate&quot;:true,&quot;type&quot;:&quot;text&quot;}"/>
+          <p:cNvSpPr txBox="1"/>
+          <p:nvPr/>
+        </p:nvSpPr>
+        <p:spPr>
+          <a:xfrm rot="0" flipH="0" flipV="0">
+            <a:off x="9010650" y="4905375"/>
+            <a:ext cx="2514600" cy="219075"/>
+          </a:xfrm>
+          <a:prstGeom prst="rect"/>
+        </p:spPr>
+        <p:txBody>
+          <a:bodyPr wrap="none" lIns="0" tIns="0" rIns="0" bIns="0"/>
+          <a:p>
+            <a:pPr>
+              <a:lnSpc>
+                <a:spcPct val="135000"/>
+              </a:lnSpc>
+            </a:pPr>
+            <a:r>
+              <a:rPr lang="zh-CN" sz="1050" b="1">
+                <a:solidFill>
+                  <a:srgbClr val="1E4FA8"/>
+                </a:solidFill>
+                <a:latin typeface="Microsoft YaHei"/>
+                <a:ea typeface="Microsoft YaHei"/>
+              </a:rPr>
+              <a:t>即时</a:t>
+            </a:r>
+            <a:r>
+              <a:rPr lang="en-US" sz="1050" b="1">
+                <a:solidFill>
+                  <a:srgbClr val="1E4FA8"/>
+                </a:solidFill>
+                <a:latin typeface="Microsoft YaHei"/>
+                <a:ea typeface="Microsoft YaHei"/>
+              </a:rPr>
+              <a:t xml:space="preserve"> · </a:t>
+            </a:r>
+            <a:r>
+              <a:rPr lang="zh-CN" sz="1050" b="1">
+                <a:solidFill>
+                  <a:srgbClr val="1E4FA8"/>
+                </a:solidFill>
+                <a:latin typeface="Microsoft YaHei"/>
+                <a:ea typeface="Microsoft YaHei"/>
+              </a:rPr>
+              <a:t>无序</a:t>
+            </a:r>
+            <a:r>
+              <a:rPr lang="en-US" sz="1050" b="1">
+                <a:solidFill>
+                  <a:srgbClr val="1E4FA8"/>
+                </a:solidFill>
+                <a:latin typeface="Microsoft YaHei"/>
+                <a:ea typeface="Microsoft YaHei"/>
+              </a:rPr>
+              <a:t xml:space="preserve"> · </a:t>
+            </a:r>
+            <a:r>
+              <a:rPr lang="zh-CN" sz="1050" b="1">
+                <a:solidFill>
+                  <a:srgbClr val="1E4FA8"/>
+                </a:solidFill>
+                <a:latin typeface="Microsoft YaHei"/>
+                <a:ea typeface="Microsoft YaHei"/>
+              </a:rPr>
+              <a:t>全局一致</a:t>
+            </a:r>
+            <a:endParaRPr/>
+          </a:p>
+        </p:txBody>
+      </p:sp>
+      <p:sp>
+        <p:nvSpPr>
+          <p:cNvPr id="196" name="" descr="{&quot;isTemplate&quot;:true,&quot;type&quot;:&quot;text&quot;}"/>
+          <p:cNvSpPr txBox="1"/>
+          <p:nvPr/>
+        </p:nvSpPr>
+        <p:spPr>
+          <a:xfrm rot="0" flipH="0" flipV="0">
+            <a:off x="9010650" y="5153025"/>
+            <a:ext cx="2514600" cy="209550"/>
+          </a:xfrm>
+          <a:prstGeom prst="rect"/>
+        </p:spPr>
+        <p:txBody>
+          <a:bodyPr wrap="none" lIns="0" tIns="0" rIns="0" bIns="0"/>
+          <a:p>
+            <a:pPr>
+              <a:lnSpc>
+                <a:spcPct val="135000"/>
+              </a:lnSpc>
+            </a:pPr>
+            <a:r>
+              <a:rPr lang="zh-CN" sz="1013" b="1">
+                <a:solidFill>
+                  <a:srgbClr val="3D7BD9"/>
+                </a:solidFill>
+                <a:latin typeface="Microsoft YaHei"/>
+                <a:ea typeface="Microsoft YaHei"/>
+              </a:rPr>
+              <a:t>三者首次同时成立</a:t>
+            </a:r>
+            <a:endParaRPr/>
+          </a:p>
+        </p:txBody>
+      </p:sp>
+      <p:sp>
+        <p:nvSpPr>
+          <p:cNvPr id="197" name=""/>
           <p:cNvSpPr/>
           <p:nvPr/>
         </p:nvSpPr>
         <p:spPr>
           <a:xfrm rot="0" flipH="0" flipV="0">
-            <a:off x="381000" y="4410075"/>
+            <a:off x="381000" y="5581650"/>
             <a:ext cx="11430000" cy="657225"/>
           </a:xfrm>
           <a:prstGeom prst="roundRect">
@@ -8282,27 +9515,27 @@
       </p:sp>
       <p:sp>
         <p:nvSpPr>
-          <p:cNvPr id="167" name="" descr="{&quot;isTemplate&quot;:true,&quot;type&quot;:&quot;text&quot;}"/>
-          <p:cNvSpPr txBox="1"/>
-          <p:nvPr/>
-        </p:nvSpPr>
-        <p:spPr>
-          <a:xfrm rot="0" flipH="0" flipV="0">
-            <a:off x="590550" y="4552950"/>
-            <a:ext cx="11010900" cy="371475"/>
-          </a:xfrm>
-          <a:prstGeom prst="rect"/>
-        </p:spPr>
-        <p:txBody>
-          <a:bodyPr wrap="none" lIns="0" tIns="0" rIns="0" bIns="0"/>
-          <a:p>
-            <a:pPr>
-              <a:lnSpc>
-                <a:spcPct val="145000"/>
-              </a:lnSpc>
-            </a:pPr>
-            <a:r>
-              <a:rPr lang="zh-CN" sz="1650" b="1">
+          <p:cNvPr id="198" name="" descr="{&quot;isTemplate&quot;:true,&quot;type&quot;:&quot;text&quot;}"/>
+          <p:cNvSpPr txBox="1"/>
+          <p:nvPr/>
+        </p:nvSpPr>
+        <p:spPr>
+          <a:xfrm rot="0" flipH="0" flipV="0">
+            <a:off x="590550" y="5753100"/>
+            <a:ext cx="9172575" cy="323850"/>
+          </a:xfrm>
+          <a:prstGeom prst="rect"/>
+        </p:spPr>
+        <p:txBody>
+          <a:bodyPr wrap="none" lIns="0" tIns="0" rIns="0" bIns="0"/>
+          <a:p>
+            <a:pPr>
+              <a:lnSpc>
+                <a:spcPct val="140000"/>
+              </a:lnSpc>
+            </a:pPr>
+            <a:r>
+              <a:rPr lang="zh-CN" sz="1500" b="1">
                 <a:solidFill>
                   <a:srgbClr val="FFFFFF"/>
                 </a:solidFill>
@@ -8312,7 +9545,7 @@
               <a:t>一句话总结：它把</a:t>
             </a:r>
             <a:r>
-              <a:rPr lang="en-US" sz="1650" b="1">
+              <a:rPr lang="en-US" sz="1500" b="1">
                 <a:solidFill>
                   <a:srgbClr val="FFFFFF"/>
                 </a:solidFill>
@@ -8322,7 +9555,7 @@
               <a:t xml:space="preserve"> 3DGS </a:t>
             </a:r>
             <a:r>
-              <a:rPr lang="zh-CN" sz="1650" b="1">
+              <a:rPr lang="zh-CN" sz="1500" b="1">
                 <a:solidFill>
                   <a:srgbClr val="FFFFFF"/>
                 </a:solidFill>
@@ -8332,7 +9565,7 @@
               <a:t>从</a:t>
             </a:r>
             <a:r>
-              <a:rPr lang="en-US" sz="1650" b="1">
+              <a:rPr lang="en-US" sz="1500" b="1">
                 <a:solidFill>
                   <a:srgbClr val="FFFFFF"/>
                 </a:solidFill>
@@ -8342,7 +9575,7 @@
               <a:t>"</a:t>
             </a:r>
             <a:r>
-              <a:rPr lang="zh-CN" sz="1650" b="1">
+              <a:rPr lang="zh-CN" sz="1500" b="1">
                 <a:solidFill>
                   <a:srgbClr val="FFFFFF"/>
                 </a:solidFill>
@@ -8352,7 +9585,7 @@
               <a:t>拍完再算的离线工具</a:t>
             </a:r>
             <a:r>
-              <a:rPr lang="en-US" sz="1650" b="1">
+              <a:rPr lang="en-US" sz="1500" b="1">
                 <a:solidFill>
                   <a:srgbClr val="FFFFFF"/>
                 </a:solidFill>
@@ -8362,7 +9595,7 @@
               <a:t>"</a:t>
             </a:r>
             <a:r>
-              <a:rPr lang="zh-CN" sz="1650" b="1">
+              <a:rPr lang="zh-CN" sz="1500" b="1">
                 <a:solidFill>
                   <a:srgbClr val="FFFFFF"/>
                 </a:solidFill>
@@ -8372,7 +9605,7 @@
               <a:t>变成了</a:t>
             </a:r>
             <a:r>
-              <a:rPr lang="en-US" sz="1650" b="1">
+              <a:rPr lang="en-US" sz="1500" b="1">
                 <a:solidFill>
                   <a:srgbClr val="FFFFFF"/>
                 </a:solidFill>
@@ -8382,7 +9615,7 @@
               <a:t>"</a:t>
             </a:r>
             <a:r>
-              <a:rPr lang="zh-CN" sz="1650" b="1">
+              <a:rPr lang="zh-CN" sz="1500" b="1">
                 <a:solidFill>
                   <a:srgbClr val="FFFFFF"/>
                 </a:solidFill>
@@ -8392,7 +9625,7 @@
               <a:t>拍摄现场的仪表盘</a:t>
             </a:r>
             <a:r>
-              <a:rPr lang="en-US" sz="1650" b="1">
+              <a:rPr lang="en-US" sz="1500" b="1">
                 <a:solidFill>
                   <a:srgbClr val="FFFFFF"/>
                 </a:solidFill>
@@ -8402,29 +9635,29 @@
               <a:t>"</a:t>
             </a:r>
             <a:r>
-              <a:rPr lang="zh-CN" sz="1650" b="1">
+              <a:rPr lang="zh-CN" sz="1500" b="1">
                 <a:solidFill>
                   <a:srgbClr val="FFFFFF"/>
                 </a:solidFill>
                 <a:latin typeface="Microsoft YaHei"/>
                 <a:ea typeface="Microsoft YaHei"/>
               </a:rPr>
-              <a:t>，代价是让出一点精度。</a:t>
-            </a:r>
-            <a:endParaRPr/>
-          </a:p>
-        </p:txBody>
-      </p:sp>
-      <p:sp>
-        <p:nvSpPr>
-          <p:cNvPr id="168" name="" descr="{&quot;isTemplate&quot;:true,&quot;type&quot;:&quot;text&quot;}"/>
-          <p:cNvSpPr txBox="1"/>
-          <p:nvPr/>
-        </p:nvSpPr>
-        <p:spPr>
-          <a:xfrm rot="0" flipH="0" flipV="0">
-            <a:off x="381000" y="6305550"/>
-            <a:ext cx="1733550" cy="304800"/>
+              <a:t>。</a:t>
+            </a:r>
+            <a:endParaRPr/>
+          </a:p>
+        </p:txBody>
+      </p:sp>
+      <p:sp>
+        <p:nvSpPr>
+          <p:cNvPr id="199" name="" descr="{&quot;isTemplate&quot;:true,&quot;type&quot;:&quot;text&quot;}"/>
+          <p:cNvSpPr txBox="1"/>
+          <p:nvPr/>
+        </p:nvSpPr>
+        <p:spPr>
+          <a:xfrm rot="0" flipH="0" flipV="0">
+            <a:off x="10010775" y="5715000"/>
+            <a:ext cx="1590675" cy="171450"/>
           </a:xfrm>
           <a:prstGeom prst="rect"/>
         </p:spPr>
@@ -8437,7 +9670,97 @@
               </a:lnSpc>
             </a:pPr>
             <a:r>
-              <a:rPr lang="zh-CN" sz="1950" b="1">
+              <a:rPr lang="zh-CN" sz="1125">
+                <a:solidFill>
+                  <a:srgbClr val="C3D5EF"/>
+                </a:solidFill>
+                <a:latin typeface="Microsoft YaHei"/>
+                <a:ea typeface="Microsoft YaHei"/>
+              </a:rPr>
+              <a:t>论文</a:t>
+            </a:r>
+            <a:r>
+              <a:rPr lang="en-US" sz="1125">
+                <a:solidFill>
+                  <a:srgbClr val="C3D5EF"/>
+                </a:solidFill>
+                <a:latin typeface="Microsoft YaHei"/>
+                <a:ea typeface="Microsoft YaHei"/>
+              </a:rPr>
+              <a:t xml:space="preserve"> / </a:t>
+            </a:r>
+            <a:r>
+              <a:rPr lang="zh-CN" sz="1125">
+                <a:solidFill>
+                  <a:srgbClr val="C3D5EF"/>
+                </a:solidFill>
+                <a:latin typeface="Microsoft YaHei"/>
+                <a:ea typeface="Microsoft YaHei"/>
+              </a:rPr>
+              <a:t>我们</a:t>
+            </a:r>
+            <a:endParaRPr/>
+          </a:p>
+        </p:txBody>
+      </p:sp>
+      <p:sp>
+        <p:nvSpPr>
+          <p:cNvPr id="200" name="" descr="{&quot;isTemplate&quot;:true,&quot;type&quot;:&quot;text&quot;}"/>
+          <p:cNvSpPr txBox="1"/>
+          <p:nvPr/>
+        </p:nvSpPr>
+        <p:spPr>
+          <a:xfrm rot="0" flipH="0" flipV="0">
+            <a:off x="10010775" y="5886450"/>
+            <a:ext cx="1590675" cy="219075"/>
+          </a:xfrm>
+          <a:prstGeom prst="rect"/>
+        </p:spPr>
+        <p:txBody>
+          <a:bodyPr wrap="none" lIns="0" tIns="0" rIns="0" bIns="0"/>
+          <a:p>
+            <a:pPr>
+              <a:lnSpc>
+                <a:spcPct val="100000"/>
+              </a:lnSpc>
+            </a:pPr>
+            <a:r>
+              <a:rPr lang="en-US" sz="1425" b="1">
+                <a:solidFill>
+                  <a:srgbClr val="FFFFFF"/>
+                </a:solidFill>
+                <a:latin typeface="Microsoft YaHei"/>
+                <a:ea typeface="Microsoft YaHei"/>
+              </a:rPr>
+              <a:t>26.29 → 25.95 dB</a:t>
+            </a:r>
+            <a:endParaRPr/>
+          </a:p>
+        </p:txBody>
+      </p:sp>
+      <p:sp>
+        <p:nvSpPr>
+          <p:cNvPr id="201" name="" descr="{&quot;isTemplate&quot;:true,&quot;type&quot;:&quot;text&quot;}"/>
+          <p:cNvSpPr txBox="1"/>
+          <p:nvPr/>
+        </p:nvSpPr>
+        <p:spPr>
+          <a:xfrm rot="0" flipH="0" flipV="0">
+            <a:off x="381000" y="6429375"/>
+            <a:ext cx="1600200" cy="276225"/>
+          </a:xfrm>
+          <a:prstGeom prst="rect"/>
+        </p:spPr>
+        <p:txBody>
+          <a:bodyPr wrap="none" lIns="0" tIns="0" rIns="0" bIns="0"/>
+          <a:p>
+            <a:pPr>
+              <a:lnSpc>
+                <a:spcPct val="100000"/>
+              </a:lnSpc>
+            </a:pPr>
+            <a:r>
+              <a:rPr lang="zh-CN" sz="1800" b="1">
                 <a:solidFill>
                   <a:srgbClr val="1E4FA8"/>
                 </a:solidFill>
@@ -8452,14 +9775,14 @@
       </p:sp>
       <p:sp>
         <p:nvSpPr>
-          <p:cNvPr id="169" name="" descr="{&quot;isTemplate&quot;:true,&quot;type&quot;:&quot;text&quot;}"/>
-          <p:cNvSpPr txBox="1"/>
-          <p:nvPr/>
-        </p:nvSpPr>
-        <p:spPr>
-          <a:xfrm rot="0" flipH="0" flipV="0">
-            <a:off x="6048375" y="6372225"/>
-            <a:ext cx="5762625" cy="171450"/>
+          <p:cNvPr id="202" name="" descr="{&quot;isTemplate&quot;:true,&quot;type&quot;:&quot;text&quot;}"/>
+          <p:cNvSpPr txBox="1"/>
+          <p:nvPr/>
+        </p:nvSpPr>
+        <p:spPr>
+          <a:xfrm rot="0" flipH="0" flipV="0">
+            <a:off x="6429375" y="6486525"/>
+            <a:ext cx="5381625" cy="161925"/>
           </a:xfrm>
           <a:prstGeom prst="rect"/>
         </p:spPr>
@@ -8472,7 +9795,7 @@
               </a:lnSpc>
             </a:pPr>
             <a:r>
-              <a:rPr lang="zh-CN" sz="1125">
+              <a:rPr lang="zh-CN" sz="1050">
                 <a:solidFill>
                   <a:srgbClr val="8B97A8"/>
                 </a:solidFill>
@@ -8482,7 +9805,7 @@
               <a:t>论文：</a:t>
             </a:r>
             <a:r>
-              <a:rPr lang="en-US" sz="1125">
+              <a:rPr lang="en-US" sz="1050">
                 <a:solidFill>
                   <a:srgbClr val="8B97A8"/>
                 </a:solidFill>
@@ -8492,7 +9815,7 @@
               <a:t xml:space="preserve">SIGGRAPH 2026 / arXiv:2607.14481 · </a:t>
             </a:r>
             <a:r>
-              <a:rPr lang="zh-CN" sz="1125">
+              <a:rPr lang="zh-CN" sz="1050">
                 <a:solidFill>
                   <a:srgbClr val="8B97A8"/>
                 </a:solidFill>
@@ -8502,7 +9825,7 @@
               <a:t>代码：</a:t>
             </a:r>
             <a:r>
-              <a:rPr lang="en-US" sz="1125">
+              <a:rPr lang="en-US" sz="1050">
                 <a:solidFill>
                   <a:srgbClr val="8B97A8"/>
                 </a:solidFill>
@@ -8525,7 +9848,7 @@
   <p:cSld>
     <p:spTree>
       <p:nvGrpSpPr>
-        <p:cNvPr id="170" name="" descr="&lt;Slide style={{ width: '1280px', height: '720px', backgroundColor: '#FFFFFF', padding: '0px', flexDirection: 'column' }}&gt;&#13;&#10;    &lt;Box style={{ width: '1280px', height: '8px', backgroundColor: '#1E4FA8' }} /&gt;&#13;&#10;    &lt;Box style={{ padding: '14px 40px 0px 40px', flexDirection: 'row', justifyContent: 'space-between', alignItems: 'flex-end' }}&gt;&#13;&#10;        &lt;Text style={{ fontSize: 32, fontWeight: 'bold', color: '#1E4FA8' }}&gt;附：七个步骤在源码里长什么样&lt;/Text&gt;&#13;&#10;        &lt;Text style={{ fontSize: 15, color: '#8B97A8' }}&gt;15 / 15&lt;/Text&gt;&#13;&#10;    &lt;/Box&gt;&#13;&#10;    &lt;Box style={{ padding: '5px 40px 0px 40px' }}&gt;&#13;&#10;        &lt;Text style={{ fontSize: 17, color: '#4A5568' }}&gt;真实源码截图，与第 04 页七步链、第 05–11 页逐页对应：&lt;b&gt;①②③ 定跟谁比、④ 定跟谁一起算、⑤ 才真解位姿、⑥⑦ 修漂移与压显存&lt;/b&gt;。&lt;/Text&gt;&#13;&#10;    &lt;/Box&gt;&#13;&#10;    &lt;Box style={{ padding: '8px 40px 0px 40px', flexDirection: 'row', gap: 14 }}&gt;&#13;&#10;        &lt;Box style={{ flex: 1, flexDirection: 'column', gap: 10 }}&gt;&#13;&#10;        &lt;Box style={{ backgroundColor: '#1E1E1E', borderRadius: 5, padding: '5px 11px 5px 11px', flexDirection: 'column' }}&gt;&#13;&#10;            &lt;Text style={{ fontSize: 13, fontWeight: 'bold', color: '#8FBBFF', marginBottom: 0 }}&gt;① ② ③  检索 → 粗筛 → 建边&lt;/Text&gt;&#13;&#10;            &lt;Text style={{ fontFamily: 'Consolas', fontSize: 10, color: '#7F8C9F', marginBottom: 2 }}&gt;scene/scene_model_loop_closure.py:179&lt;/Text&gt;&#13;&#10;            &lt;Image src=&quot;code_png/01.png&quot; style={{ width: 568, height: 104.5 }} /&gt;&#13;&#10;        &lt;/Box&gt;&#13;&#10;        &lt;Box style={{ backgroundColor: '#1E1E1E', borderRadius: 5, padding: '5px 11px 5px 11px', flexDirection: 'column' }}&gt;&#13;&#10;            &lt;Text style={{ fontSize: 13, fontWeight: 'bold', color: '#8FBBFF', marginBottom: 0 }}&gt;④  协视图贪心扩张（式 1）&lt;/Text&gt;&#13;&#10;            &lt;Text style={{ fontFamily: 'Consolas', fontSize: 10, color: '#7F8C9F', marginBottom: 2 }}&gt;poses/ba_problem.py:648&lt;/Text&gt;&#13;&#10;            &lt;Image src=&quot;code_png/02.png&quot; style={{ width: 568, height: 123.0 }} /&gt;&#13;&#10;        &lt;/Box&gt;&#13;&#10;        &lt;Box style={{ backgroundColor: '#1E1E1E', borderRadius: 5, padding: '5px 11px 5px 11px', flexDirection: 'column' }}&gt;&#13;&#10;            &lt;Text style={{ fontSize: 13, fontWeight: 'bold', color: '#8FBBFF', marginBottom: 0 }}&gt;⑤  局部 BA：LM 迭代 + Schur 消元&lt;/Text&gt;&#13;&#10;            &lt;Text style={{ fontFamily: 'Consolas', fontSize: 10, color: '#7F8C9F', marginBottom: 2 }}&gt;poses/mini_ba.py:285&lt;/Text&gt;&#13;&#10;            &lt;Image src=&quot;code_png/03.png&quot; style={{ width: 568, height: 160.0 }} /&gt;&#13;&#10;        &lt;/Box&gt;&#13;&#10;        &lt;/Box&gt;&#13;&#10;        &lt;Box style={{ flex: 1, flexDirection: 'column', gap: 10 }}&gt;&#13;&#10;        &lt;Box style={{ backgroundColor: '#1E1E1E', borderRadius: 5, padding: '5px 11px 5px 11px', flexDirection: 'column' }}&gt;&#13;&#10;            &lt;Text style={{ fontSize: 13, fontWeight: 'bold', color: '#8FBBFF', marginBottom: 0 }}&gt;⑥  回环检测与补边&lt;/Text&gt;&#13;&#10;            &lt;Text style={{ fontFamily: 'Consolas', fontSize: 10, color: '#7F8C9F', marginBottom: 2 }}&gt;poses/ba_problem.py:1054&lt;/Text&gt;&#13;&#10;            &lt;Image src=&quot;code_png/04.png&quot; style={{ width: 568, height: 123.0 }} /&gt;&#13;&#10;        &lt;/Box&gt;&#13;&#10;        &lt;Box style={{ backgroundColor: '#1E1E1E', borderRadius: 5, padding: '5px 11px 5px 11px', flexDirection: 'column' }}&gt;&#13;&#10;            &lt;Text style={{ fontSize: 13, fontWeight: 'bold', color: '#8FBBFF', marginBottom: 0 }}&gt;⑦-a  分块深度对齐&lt;/Text&gt;&#13;&#10;            &lt;Text style={{ fontFamily: 'Consolas', fontSize: 10, color: '#7F8C9F', marginBottom: 2 }}&gt;scene/mono_depth.py:315&lt;/Text&gt;&#13;&#10;            &lt;Image src=&quot;code_png/05.png&quot; style={{ width: 568, height: 86.0 }} /&gt;&#13;&#10;        &lt;/Box&gt;&#13;&#10;        &lt;Box style={{ backgroundColor: '#1E1E1E', borderRadius: 5, padding: '5px 11px 5px 11px', flexDirection: 'column' }}&gt;&#13;&#10;            &lt;Text style={{ fontSize: 13, fontWeight: 'bold', color: '#8FBBFF', marginBottom: 0 }}&gt;⑦-b  渐进层级与合并&lt;/Text&gt;&#13;&#10;            &lt;Text style={{ fontFamily: 'Consolas', fontSize: 10, color: '#7F8C9F', marginBottom: 2 }}&gt;scene/hierarchy_cut.py:105&lt;/Text&gt;&#13;&#10;            &lt;Image src=&quot;code_png/06.png&quot; style={{ width: 568, height: 104.5 }} /&gt;&#13;&#10;        &lt;/Box&gt;&#13;&#10;        &lt;/Box&gt;&#13;&#10;    &lt;/Box&gt;&#13;&#10;    &lt;Box style={{ padding: '7px 40px 0px 40px' }}&gt;&#13;&#10;        &lt;Text style={{ fontSize: 13.5, color: '#8B97A8', lineHeight: 1.35 }}&gt;行号指向片段起点；为投影宽度做了换行与变量缩写（w = edge_weight），逻辑未改。第 04、05–11 页已按源码默认值修正：回环触发为&lt;b&gt;加权图距 &amp;gt; 10&lt;/b&gt;；层级合并触发为&lt;b&gt;可并数 &amp;gt; max(10%, 20 万)&lt;/b&gt;，且是 &lt;b&gt;kNN 加权平均&lt;/b&gt;而非 KL。&lt;/Text&gt;&#13;&#10;    &lt;/Box&gt;&#13;&#10;&lt;/Slide&gt;&#13;&#10;"/>
+        <p:cNvPr id="203" name="" descr="&lt;Slide style={{ width: '1280px', height: '720px', backgroundColor: '#FFFFFF', padding: '0px', flexDirection: 'column' }}&gt;&#13;&#10;    &lt;Box style={{ width: '1280px', height: '8px', backgroundColor: '#1E4FA8' }} /&gt;&#13;&#10;    &lt;Box style={{ padding: '14px 40px 0px 40px', flexDirection: 'row', justifyContent: 'space-between', alignItems: 'flex-end' }}&gt;&#13;&#10;        &lt;Text style={{ fontSize: 32, fontWeight: 'bold', color: '#1E4FA8' }}&gt;附：七个步骤在源码里长什么样&lt;/Text&gt;&#13;&#10;        &lt;Text style={{ fontSize: 15, color: '#8B97A8' }}&gt;15 / 15&lt;/Text&gt;&#13;&#10;    &lt;/Box&gt;&#13;&#10;    &lt;Box style={{ padding: '5px 40px 0px 40px' }}&gt;&#13;&#10;        &lt;Text style={{ fontSize: 17, color: '#4A5568' }}&gt;真实源码截图，与第 04 页七步链、第 05–11 页逐页对应：&lt;b&gt;①②③ 定跟谁比、④ 定跟谁一起算、⑤ 才真解位姿、⑥⑦ 修漂移与压显存&lt;/b&gt;。&lt;/Text&gt;&#13;&#10;    &lt;/Box&gt;&#13;&#10;    &lt;Box style={{ padding: '8px 40px 0px 40px', flexDirection: 'row', gap: 14 }}&gt;&#13;&#10;        &lt;Box style={{ flex: 1, flexDirection: 'column', gap: 10 }}&gt;&#13;&#10;        &lt;Box style={{ backgroundColor: '#1E1E1E', borderRadius: 5, padding: '5px 11px 5px 11px', flexDirection: 'column' }}&gt;&#13;&#10;            &lt;Text style={{ fontSize: 13, fontWeight: 'bold', color: '#8FBBFF', marginBottom: 0 }}&gt;① ② ③  检索 → 粗筛 → 建边&lt;/Text&gt;&#13;&#10;            &lt;Text style={{ fontFamily: 'Consolas', fontSize: 10, color: '#7F8C9F', marginBottom: 2 }}&gt;scene/scene_model_loop_closure.py:179&lt;/Text&gt;&#13;&#10;            &lt;Image src=&quot;code_png/01.png&quot; style={{ width: 568, height: 104.5 }} /&gt;&#13;&#10;        &lt;/Box&gt;&#13;&#10;        &lt;Box style={{ backgroundColor: '#1E1E1E', borderRadius: 5, padding: '5px 11px 5px 11px', flexDirection: 'column' }}&gt;&#13;&#10;            &lt;Text style={{ fontSize: 13, fontWeight: 'bold', color: '#8FBBFF', marginBottom: 0 }}&gt;④  协视图贪心扩张（式 1）&lt;/Text&gt;&#13;&#10;            &lt;Text style={{ fontFamily: 'Consolas', fontSize: 10, color: '#7F8C9F', marginBottom: 2 }}&gt;poses/ba_problem.py:648&lt;/Text&gt;&#13;&#10;            &lt;Image src=&quot;code_png/02.png&quot; style={{ width: 568, height: 123.0 }} /&gt;&#13;&#10;        &lt;/Box&gt;&#13;&#10;        &lt;Box style={{ backgroundColor: '#1E1E1E', borderRadius: 5, padding: '5px 11px 5px 11px', flexDirection: 'column' }}&gt;&#13;&#10;            &lt;Text style={{ fontSize: 13, fontWeight: 'bold', color: '#8FBBFF', marginBottom: 0 }}&gt;⑤  局部 BA：LM 迭代 + Schur 消元&lt;/Text&gt;&#13;&#10;            &lt;Text style={{ fontFamily: 'Consolas', fontSize: 10, color: '#7F8C9F', marginBottom: 2 }}&gt;poses/mini_ba.py:285&lt;/Text&gt;&#13;&#10;            &lt;Image src=&quot;code_png/03.png&quot; style={{ width: 568, height: 160.0 }} /&gt;&#13;&#10;        &lt;/Box&gt;&#13;&#10;        &lt;/Box&gt;&#13;&#10;        &lt;Box style={{ flex: 1, flexDirection: 'column', gap: 10 }}&gt;&#13;&#10;        &lt;Box style={{ backgroundColor: '#1E1E1E', borderRadius: 5, padding: '5px 11px 5px 11px', flexDirection: 'column' }}&gt;&#13;&#10;            &lt;Text style={{ fontSize: 13, fontWeight: 'bold', color: '#8FBBFF', marginBottom: 0 }}&gt;⑥  回环检测与补边&lt;/Text&gt;&#13;&#10;            &lt;Text style={{ fontFamily: 'Consolas', fontSize: 10, color: '#7F8C9F', marginBottom: 2 }}&gt;poses/ba_problem.py:1054&lt;/Text&gt;&#13;&#10;            &lt;Image src=&quot;code_png/04.png&quot; style={{ width: 568, height: 123.0 }} /&gt;&#13;&#10;        &lt;/Box&gt;&#13;&#10;        &lt;Box style={{ backgroundColor: '#1E1E1E', borderRadius: 5, padding: '5px 11px 5px 11px', flexDirection: 'column' }}&gt;&#13;&#10;            &lt;Text style={{ fontSize: 13, fontWeight: 'bold', color: '#8FBBFF', marginBottom: 0 }}&gt;⑦-a  分块深度对齐&lt;/Text&gt;&#13;&#10;            &lt;Text style={{ fontFamily: 'Consolas', fontSize: 10, color: '#7F8C9F', marginBottom: 2 }}&gt;scene/mono_depth.py:315&lt;/Text&gt;&#13;&#10;            &lt;Image src=&quot;code_png/05.png&quot; style={{ width: 568, height: 86.0 }} /&gt;&#13;&#10;        &lt;/Box&gt;&#13;&#10;        &lt;Box style={{ backgroundColor: '#1E1E1E', borderRadius: 5, padding: '5px 11px 5px 11px', flexDirection: 'column' }}&gt;&#13;&#10;            &lt;Text style={{ fontSize: 13, fontWeight: 'bold', color: '#8FBBFF', marginBottom: 0 }}&gt;⑦-b  渐进层级与合并&lt;/Text&gt;&#13;&#10;            &lt;Text style={{ fontFamily: 'Consolas', fontSize: 10, color: '#7F8C9F', marginBottom: 2 }}&gt;scene/hierarchy_cut.py:105&lt;/Text&gt;&#13;&#10;            &lt;Image src=&quot;code_png/06.png&quot; style={{ width: 568, height: 104.5 }} /&gt;&#13;&#10;        &lt;/Box&gt;&#13;&#10;        &lt;/Box&gt;&#13;&#10;    &lt;/Box&gt;&#13;&#10;    &lt;Box style={{ padding: '7px 40px 0px 40px' }}&gt;&#13;&#10;        &lt;Text style={{ fontSize: 13.5, color: '#8B97A8', lineHeight: 1.35 }}&gt;行号指向片段起点；为投影宽度做了换行与变量缩写（w = edge_weight），逻辑未改。第 04、05–11 页已按源码默认值修正：回环触发为&lt;b&gt;加权图距 &amp;gt; 10&lt;/b&gt;；层级合并触发为&lt;b&gt;可并数 &amp;gt; max(10%, 20 万)&lt;/b&gt;，且是 &lt;b&gt;kNN 加权平均&lt;/b&gt;而非 KL。&lt;/Text&gt;&#13;&#10;    &lt;/Box&gt;&#13;&#10;&lt;/Slide&gt;&#13;&#10;"/>
         <p:cNvGrpSpPr/>
         <p:nvPr/>
       </p:nvGrpSpPr>
@@ -8539,7 +9862,7 @@
       </p:grpSpPr>
       <p:sp>
         <p:nvSpPr>
-          <p:cNvPr id="171" name=""/>
+          <p:cNvPr id="204" name=""/>
           <p:cNvSpPr/>
           <p:nvPr/>
         </p:nvSpPr>
@@ -8563,7 +9886,7 @@
       </p:sp>
       <p:sp>
         <p:nvSpPr>
-          <p:cNvPr id="172" name=""/>
+          <p:cNvPr id="205" name=""/>
           <p:cNvSpPr/>
           <p:nvPr/>
         </p:nvSpPr>
@@ -8587,7 +9910,7 @@
       </p:sp>
       <p:sp>
         <p:nvSpPr>
-          <p:cNvPr id="173" name="" descr="{&quot;isTemplate&quot;:true,&quot;type&quot;:&quot;text&quot;}"/>
+          <p:cNvPr id="206" name="" descr="{&quot;isTemplate&quot;:true,&quot;type&quot;:&quot;text&quot;}"/>
           <p:cNvSpPr txBox="1"/>
           <p:nvPr/>
         </p:nvSpPr>
@@ -8622,7 +9945,7 @@
       </p:sp>
       <p:sp>
         <p:nvSpPr>
-          <p:cNvPr id="174" name="" descr="{&quot;isTemplate&quot;:true,&quot;type&quot;:&quot;text&quot;}"/>
+          <p:cNvPr id="207" name="" descr="{&quot;isTemplate&quot;:true,&quot;type&quot;:&quot;text&quot;}"/>
           <p:cNvSpPr txBox="1"/>
           <p:nvPr/>
         </p:nvSpPr>
@@ -8657,7 +9980,7 @@
       </p:sp>
       <p:sp>
         <p:nvSpPr>
-          <p:cNvPr id="175" name="" descr="{&quot;isTemplate&quot;:true,&quot;type&quot;:&quot;text&quot;}"/>
+          <p:cNvPr id="208" name="" descr="{&quot;isTemplate&quot;:true,&quot;type&quot;:&quot;text&quot;}"/>
           <p:cNvSpPr txBox="1"/>
           <p:nvPr/>
         </p:nvSpPr>
@@ -8822,7 +10145,7 @@
       </p:sp>
       <p:sp>
         <p:nvSpPr>
-          <p:cNvPr id="176" name=""/>
+          <p:cNvPr id="209" name=""/>
           <p:cNvSpPr/>
           <p:nvPr/>
         </p:nvSpPr>
@@ -8848,7 +10171,7 @@
       </p:sp>
       <p:sp>
         <p:nvSpPr>
-          <p:cNvPr id="177" name="" descr="{&quot;isTemplate&quot;:true,&quot;type&quot;:&quot;text&quot;}"/>
+          <p:cNvPr id="210" name="" descr="{&quot;isTemplate&quot;:true,&quot;type&quot;:&quot;text&quot;}"/>
           <p:cNvSpPr txBox="1"/>
           <p:nvPr/>
         </p:nvSpPr>
@@ -8933,7 +10256,7 @@
       </p:sp>
       <p:sp>
         <p:nvSpPr>
-          <p:cNvPr id="178" name="" descr="{&quot;isTemplate&quot;:true,&quot;type&quot;:&quot;text&quot;}"/>
+          <p:cNvPr id="211" name="" descr="{&quot;isTemplate&quot;:true,&quot;type&quot;:&quot;text&quot;}"/>
           <p:cNvSpPr txBox="1"/>
           <p:nvPr/>
         </p:nvSpPr>
@@ -8968,7 +10291,7 @@
       </p:sp>
       <p:pic>
         <p:nvPicPr>
-          <p:cNvPr id="179" name=""/>
+          <p:cNvPr id="212" name=""/>
           <p:cNvPicPr>
             <a:picLocks noChangeAspect="1"/>
           </p:cNvPicPr>
@@ -8994,7 +10317,7 @@
       </p:pic>
       <p:sp>
         <p:nvSpPr>
-          <p:cNvPr id="180" name=""/>
+          <p:cNvPr id="213" name=""/>
           <p:cNvSpPr/>
           <p:nvPr/>
         </p:nvSpPr>
@@ -9020,7 +10343,7 @@
       </p:sp>
       <p:sp>
         <p:nvSpPr>
-          <p:cNvPr id="181" name="" descr="{&quot;isTemplate&quot;:true,&quot;type&quot;:&quot;text&quot;}"/>
+          <p:cNvPr id="214" name="" descr="{&quot;isTemplate&quot;:true,&quot;type&quot;:&quot;text&quot;}"/>
           <p:cNvSpPr txBox="1"/>
           <p:nvPr/>
         </p:nvSpPr>
@@ -9085,7 +10408,7 @@
       </p:sp>
       <p:sp>
         <p:nvSpPr>
-          <p:cNvPr id="182" name="" descr="{&quot;isTemplate&quot;:true,&quot;type&quot;:&quot;text&quot;}"/>
+          <p:cNvPr id="215" name="" descr="{&quot;isTemplate&quot;:true,&quot;type&quot;:&quot;text&quot;}"/>
           <p:cNvSpPr txBox="1"/>
           <p:nvPr/>
         </p:nvSpPr>
@@ -9120,7 +10443,7 @@
       </p:sp>
       <p:pic>
         <p:nvPicPr>
-          <p:cNvPr id="183" name=""/>
+          <p:cNvPr id="216" name=""/>
           <p:cNvPicPr>
             <a:picLocks noChangeAspect="1"/>
           </p:cNvPicPr>
@@ -9145,7 +10468,7 @@
       </p:pic>
       <p:sp>
         <p:nvSpPr>
-          <p:cNvPr id="184" name=""/>
+          <p:cNvPr id="217" name=""/>
           <p:cNvSpPr/>
           <p:nvPr/>
         </p:nvSpPr>
@@ -9171,7 +10494,7 @@
       </p:sp>
       <p:sp>
         <p:nvSpPr>
-          <p:cNvPr id="185" name="" descr="{&quot;isTemplate&quot;:true,&quot;type&quot;:&quot;text&quot;}"/>
+          <p:cNvPr id="218" name="" descr="{&quot;isTemplate&quot;:true,&quot;type&quot;:&quot;text&quot;}"/>
           <p:cNvSpPr txBox="1"/>
           <p:nvPr/>
         </p:nvSpPr>
@@ -9276,7 +10599,7 @@
       </p:sp>
       <p:sp>
         <p:nvSpPr>
-          <p:cNvPr id="186" name="" descr="{&quot;isTemplate&quot;:true,&quot;type&quot;:&quot;text&quot;}"/>
+          <p:cNvPr id="219" name="" descr="{&quot;isTemplate&quot;:true,&quot;type&quot;:&quot;text&quot;}"/>
           <p:cNvSpPr txBox="1"/>
           <p:nvPr/>
         </p:nvSpPr>
@@ -9311,7 +10634,7 @@
       </p:sp>
       <p:pic>
         <p:nvPicPr>
-          <p:cNvPr id="187" name=""/>
+          <p:cNvPr id="220" name=""/>
           <p:cNvPicPr>
             <a:picLocks noChangeAspect="1"/>
           </p:cNvPicPr>
@@ -9336,7 +10659,7 @@
       </p:pic>
       <p:sp>
         <p:nvSpPr>
-          <p:cNvPr id="188" name=""/>
+          <p:cNvPr id="221" name=""/>
           <p:cNvSpPr/>
           <p:nvPr/>
         </p:nvSpPr>
@@ -9362,7 +10685,7 @@
       </p:sp>
       <p:sp>
         <p:nvSpPr>
-          <p:cNvPr id="189" name="" descr="{&quot;isTemplate&quot;:true,&quot;type&quot;:&quot;text&quot;}"/>
+          <p:cNvPr id="222" name="" descr="{&quot;isTemplate&quot;:true,&quot;type&quot;:&quot;text&quot;}"/>
           <p:cNvSpPr txBox="1"/>
           <p:nvPr/>
         </p:nvSpPr>
@@ -9407,7 +10730,7 @@
       </p:sp>
       <p:sp>
         <p:nvSpPr>
-          <p:cNvPr id="190" name="" descr="{&quot;isTemplate&quot;:true,&quot;type&quot;:&quot;text&quot;}"/>
+          <p:cNvPr id="223" name="" descr="{&quot;isTemplate&quot;:true,&quot;type&quot;:&quot;text&quot;}"/>
           <p:cNvSpPr txBox="1"/>
           <p:nvPr/>
         </p:nvSpPr>
@@ -9442,7 +10765,7 @@
       </p:sp>
       <p:pic>
         <p:nvPicPr>
-          <p:cNvPr id="191" name=""/>
+          <p:cNvPr id="224" name=""/>
           <p:cNvPicPr>
             <a:picLocks noChangeAspect="1"/>
           </p:cNvPicPr>
@@ -9467,7 +10790,7 @@
       </p:pic>
       <p:sp>
         <p:nvSpPr>
-          <p:cNvPr id="192" name=""/>
+          <p:cNvPr id="225" name=""/>
           <p:cNvSpPr/>
           <p:nvPr/>
         </p:nvSpPr>
@@ -9493,7 +10816,7 @@
       </p:sp>
       <p:sp>
         <p:nvSpPr>
-          <p:cNvPr id="193" name="" descr="{&quot;isTemplate&quot;:true,&quot;type&quot;:&quot;text&quot;}"/>
+          <p:cNvPr id="226" name="" descr="{&quot;isTemplate&quot;:true,&quot;type&quot;:&quot;text&quot;}"/>
           <p:cNvSpPr txBox="1"/>
           <p:nvPr/>
         </p:nvSpPr>
@@ -9538,7 +10861,7 @@
       </p:sp>
       <p:sp>
         <p:nvSpPr>
-          <p:cNvPr id="194" name="" descr="{&quot;isTemplate&quot;:true,&quot;type&quot;:&quot;text&quot;}"/>
+          <p:cNvPr id="227" name="" descr="{&quot;isTemplate&quot;:true,&quot;type&quot;:&quot;text&quot;}"/>
           <p:cNvSpPr txBox="1"/>
           <p:nvPr/>
         </p:nvSpPr>
@@ -9573,7 +10896,7 @@
       </p:sp>
       <p:pic>
         <p:nvPicPr>
-          <p:cNvPr id="195" name=""/>
+          <p:cNvPr id="228" name=""/>
           <p:cNvPicPr>
             <a:picLocks noChangeAspect="1"/>
           </p:cNvPicPr>
@@ -9598,7 +10921,7 @@
       </p:pic>
       <p:sp>
         <p:nvSpPr>
-          <p:cNvPr id="196" name=""/>
+          <p:cNvPr id="229" name=""/>
           <p:cNvSpPr/>
           <p:nvPr/>
         </p:nvSpPr>
@@ -9624,7 +10947,7 @@
       </p:sp>
       <p:sp>
         <p:nvSpPr>
-          <p:cNvPr id="197" name="" descr="{&quot;isTemplate&quot;:true,&quot;type&quot;:&quot;text&quot;}"/>
+          <p:cNvPr id="230" name="" descr="{&quot;isTemplate&quot;:true,&quot;type&quot;:&quot;text&quot;}"/>
           <p:cNvSpPr txBox="1"/>
           <p:nvPr/>
         </p:nvSpPr>
@@ -9669,7 +10992,7 @@
       </p:sp>
       <p:sp>
         <p:nvSpPr>
-          <p:cNvPr id="198" name="" descr="{&quot;isTemplate&quot;:true,&quot;type&quot;:&quot;text&quot;}"/>
+          <p:cNvPr id="231" name="" descr="{&quot;isTemplate&quot;:true,&quot;type&quot;:&quot;text&quot;}"/>
           <p:cNvSpPr txBox="1"/>
           <p:nvPr/>
         </p:nvSpPr>
@@ -9704,7 +11027,7 @@
       </p:sp>
       <p:pic>
         <p:nvPicPr>
-          <p:cNvPr id="199" name=""/>
+          <p:cNvPr id="232" name=""/>
           <p:cNvPicPr>
             <a:picLocks noChangeAspect="1"/>
           </p:cNvPicPr>
@@ -9730,7 +11053,7 @@
       </p:pic>
       <p:sp>
         <p:nvSpPr>
-          <p:cNvPr id="200" name="" descr="{&quot;isTemplate&quot;:true,&quot;type&quot;:&quot;text&quot;}"/>
+          <p:cNvPr id="233" name="" descr="{&quot;isTemplate&quot;:true,&quot;type&quot;:&quot;text&quot;}"/>
           <p:cNvSpPr txBox="1"/>
           <p:nvPr/>
         </p:nvSpPr>
@@ -9975,7 +11298,7 @@
   <p:cSld>
     <p:spTree>
       <p:nvGrpSpPr>
-        <p:cNvPr id="201" name="" descr="&lt;Slide style={{ width: '1280px', height: '720px', backgroundColor: '#FFFFFF', padding: '0px', flexDirection: 'column' }}&gt;&#10;    &lt;Box style={{ width: '1280px', height: '8px', backgroundColor: '#1E4FA8' }} /&gt;&#10;    &lt;Box style={{ padding: '24px 40px 0px 40px', flexDirection: 'row', justifyContent: 'space-between', alignItems: 'flex-end' }}&gt;&#10;        &lt;Text style={{ fontSize: 33, fontWeight: 'bold', color: '#1E4FA8' }}&gt;研究背景：两条路都卡在同一个前提上&lt;/Text&gt;&#10;        &lt;Text style={{ fontSize: 15, color: '#8B97A8' }}&gt;02 / 15&lt;/Text&gt;&#10;    &lt;/Box&gt;&#10;    &lt;Box style={{ padding: '8px 40px 0px 40px' }}&gt;&#10;        &lt;Text style={{ fontSize: 20, color: '#4A5568', lineHeight: 1.4 }}&gt;拿到“一组照片 → 一个可漫游的 3D 场景”，过去只有两条路。它们的分歧不在算法细节，而在&lt;b&gt;什么时候允许开始计算&lt;/b&gt;。&lt;/Text&gt;&#10;    &lt;/Box&gt;&#10;&#10;    &lt;Box style={{ padding: '14px 40px 0px 40px', flexDirection: 'row', gap: 22 }}&gt;&#10;        &lt;Box style={{ flex: 1, backgroundColor: '#F7F9FC', border: '1px solid #D6DCE5', borderRadius: 6, padding: '13px 18px', flexDirection: 'column' }}&gt;&#10;            &lt;Text style={{ fontSize: 24, fontWeight: 'bold', color: '#1A2230' }}&gt;路线一　离线 SfM + 3DGS&lt;/Text&gt;&#10;            &lt;Text style={{ fontSize: 16, color: '#4A5568', marginTop: 4 }}&gt;COLMAP / GLOMAP ＋ 3DGS、H3DGS、Octree-GS&lt;/Text&gt;&#10;            &lt;Text style={{ fontSize: 19, color: '#1A2230', lineHeight: 1.5, marginTop: 9 }}&gt;先把所有照片两两匹配、三角化、全局 BA 解出位姿，再训练高斯。质量最高、全局一致，但&lt;b&gt;必须等图全部到齐&lt;/b&gt;。&lt;/Text&gt;&#10;            &lt;Text style={{ fontSize: 19, color: '#1E4FA8', fontWeight: 'bold', marginTop: 8 }}&gt;前提：先有完整的照片集合&lt;/Text&gt;&#10;            &lt;Text style={{ fontSize: 19, color: '#D9534F', fontWeight: 'bold', marginTop: 2 }}&gt;代价：现场给不出任何反馈&lt;/Text&gt;&#10;        &lt;/Box&gt;&#10;        &lt;Box style={{ flex: 1, backgroundColor: '#F0F5FC', border: '1px solid #3D7BD9', borderRadius: 6, padding: '13px 18px', flexDirection: 'column' }}&gt;&#10;            &lt;Text style={{ fontSize: 24, fontWeight: 'bold', color: '#1A2230' }}&gt;路线二　增量 / 类 SLAM&lt;/Text&gt;&#10;            &lt;Text style={{ fontSize: 16, color: '#4A5568', marginTop: 4 }}&gt;Photo-SLAM、MonoGS、Droid-Splat、LongSplat&lt;/Text&gt;&#10;            &lt;Text style={{ fontSize: 19, color: '#1A2230', lineHeight: 1.5, marginTop: 9 }}&gt;边收边建、可交互，但新帧只与&lt;b&gt;时间上相邻&lt;/b&gt;的少数帧匹配（通常 5 帧窗口），转身回访、拼接两段序列就断了。&lt;/Text&gt;&#10;            &lt;Text style={{ fontSize: 19, color: '#1E4FA8', fontWeight: 'bold', marginTop: 8 }}&gt;前提：输入必须是连续视频&lt;/Text&gt;&#10;            &lt;Text style={{ fontSize: 19, color: '#D9534F', fontWeight: 'bold', marginTop: 2 }}&gt;代价：离开时间邻域就失效&lt;/Text&gt;&#10;        &lt;/Box&gt;&#10;    &lt;/Box&gt;&#10;&#10;    &lt;Box style={{ margin: '12px 40px 0px 40px', backgroundColor: '#1E4FA8', borderRadius: 6, padding: '11px 22px' }}&gt;&#10;        &lt;Text style={{ fontSize: 21, fontWeight: 'bold', color: '#FFFFFF', lineHeight: 1.4 }}&gt;两条路的前提是同一个东西：&lt;b&gt;帧序&lt;/b&gt;——一条等它全部确定，一条假设它天然有序，而真实拍摄两样都不满足。&lt;/Text&gt;&#10;    &lt;/Box&gt;&#10;&#10;    &lt;Box style={{ padding: '12px 40px 0px 40px', flexDirection: 'row', gap: 14 }}&gt;&#10;        &lt;Box style={{ flex: 1, backgroundColor: '#F7F9FC', border: '1px solid #D6DCE5', borderRadius: 6, padding: '10px 14px', flexDirection: 'column' }}&gt;&#10;            &lt;Text style={{ fontSize: 21, fontWeight: 'bold', color: '#1A2230' }}&gt;① 等&lt;/Text&gt;&#10;            &lt;Text style={{ fontSize: 16.5, color: '#1A2230', lineHeight: 1.4, marginTop: 5 }}&gt;全部图像就位才能开算，拍完不知道行不行，回家发现漏拍只能重拍。&lt;/Text&gt;&#10;            &lt;Text style={{ fontSize: 15, color: '#D9534F', fontWeight: 'bold', marginTop: 4 }}&gt;返工成本最高&lt;/Text&gt;&#10;        &lt;/Box&gt;&#10;        &lt;Box style={{ flex: 1, backgroundColor: '#F7F9FC', border: '1px solid #D6DCE5', borderRadius: 6, padding: '10px 14px', flexDirection: 'column' }}&gt;&#10;            &lt;Text style={{ fontSize: 21, fontWeight: 'bold', color: '#1A2230' }}&gt;② 乱&lt;/Text&gt;&#10;            &lt;Text style={{ fontSize: 16.5, color: '#1A2230', lineHeight: 1.4, marginTop: 5 }}&gt;随手拍的顺序与空间邻接无关，只能两两匹配：1000 张约 50 万对。&lt;/Text&gt;&#10;            &lt;Text style={{ fontSize: 15, color: '#D9534F', fontWeight: 'bold', marginTop: 4 }}&gt;SfM 从分钟变小时&lt;/Text&gt;&#10;        &lt;/Box&gt;&#10;        &lt;Box style={{ flex: 1, backgroundColor: '#F7F9FC', border: '1px solid #D6DCE5', borderRadius: 6, padding: '10px 14px', flexDirection: 'column' }}&gt;&#10;            &lt;Text style={{ fontSize: 21, fontWeight: 'bold', color: '#1A2230' }}&gt;③ 漂&lt;/Text&gt;&#10;            &lt;Text style={{ fontSize: 16.5, color: '#1A2230', lineHeight: 1.4, marginTop: 5 }}&gt;边走边建误差累积，绕一圈回来首尾差半米；传统做法重跑全局 BA。&lt;/Text&gt;&#10;            &lt;Text style={{ fontSize: 15, color: '#D9534F', fontWeight: 'bold', marginTop: 4 }}&gt;实时性当场归零&lt;/Text&gt;&#10;        &lt;/Box&gt;&#10;        &lt;Box style={{ flex: 1, backgroundColor: '#F7F9FC', border: '1px solid #D6DCE5', borderRadius: 6, padding: '10px 14px', flexDirection: 'column' }}&gt;&#10;            &lt;Text style={{ fontSize: 21, fontWeight: 'bold', color: '#1A2230' }}&gt;④ 爆&lt;/Text&gt;&#10;            &lt;Text style={{ fontSize: 16.5, color: '#1A2230', lineHeight: 1.4, marginTop: 5 }}&gt;高斯数随场景线性增长：不开层级，CityWalk 到第 795 / 4050 帧就 OOM。&lt;/Text&gt;&#10;            &lt;Text style={{ fontSize: 15, color: '#D9534F', fontWeight: 'bold', marginTop: 4 }}&gt;规模一上来就跑不完&lt;/Text&gt;&#10;        &lt;/Box&gt;&#10;    &lt;/Box&gt;&#10;&#10;    &lt;Box style={{ marginTop: 'auto', margin: '10px 40px 12px 40px', backgroundColor: '#F0F5FC', borderLeft: '5px solid #1E4FA8', padding: '9px 18px' }}&gt;&#10;        &lt;Text style={{ fontSize: 18, color: '#1A2230', lineHeight: 1.4 }}&gt;四个现象收敛成三条必须&lt;b&gt;同时&lt;/b&gt;成立的约束：即时（每帧数百毫秒）· 无序（不依赖帧序）· 全局一致（回环能修）——过去的方法最多同时满足两条。&lt;/Text&gt;&#10;    &lt;/Box&gt;&#10;&lt;/Slide&gt;&#10;"/>
+        <p:cNvPr id="234" name="" descr="&lt;Slide style={{ width: '1280px', height: '720px', backgroundColor: '#FFFFFF', padding: '0px', flexDirection: 'column' }}&gt;&#10;    &lt;Box style={{ width: '1280px', height: '8px', backgroundColor: '#1E4FA8' }} /&gt;&#10;    &lt;Box style={{ padding: '24px 40px 0px 40px', flexDirection: 'row', justifyContent: 'space-between', alignItems: 'flex-end' }}&gt;&#10;        &lt;Text style={{ fontSize: 33, fontWeight: 'bold', color: '#1E4FA8' }}&gt;研究背景：两条路都卡在同一个前提上&lt;/Text&gt;&#10;        &lt;Text style={{ fontSize: 15, color: '#8B97A8' }}&gt;02 / 15&lt;/Text&gt;&#10;    &lt;/Box&gt;&#10;    &lt;Box style={{ padding: '8px 40px 0px 40px' }}&gt;&#10;        &lt;Text style={{ fontSize: 20, color: '#4A5568', lineHeight: 1.4 }}&gt;拿到“一组照片 → 一个可漫游的 3D 场景”，过去只有两条路。它们的分歧不在算法细节，而在&lt;b&gt;什么时候允许开始计算&lt;/b&gt;。&lt;/Text&gt;&#10;    &lt;/Box&gt;&#10;&#10;    &lt;Box style={{ padding: '14px 40px 0px 40px', flexDirection: 'row', gap: 22 }}&gt;&#10;        &lt;Box style={{ flex: 1, backgroundColor: '#F7F9FC', border: '1px solid #D6DCE5', borderRadius: 6, padding: '13px 18px', flexDirection: 'column' }}&gt;&#10;            &lt;Text style={{ fontSize: 24, fontWeight: 'bold', color: '#1A2230' }}&gt;路线一　离线 SfM + 3DGS&lt;/Text&gt;&#10;            &lt;Text style={{ fontSize: 16, color: '#4A5568', marginTop: 4 }}&gt;COLMAP / GLOMAP ＋ 3DGS、H3DGS、Octree-GS&lt;/Text&gt;&#10;            &lt;Text style={{ fontSize: 19, color: '#1A2230', lineHeight: 1.5, marginTop: 9 }}&gt;先把所有照片两两匹配、三角化、全局 BA 解出位姿，再训练高斯。质量最高、全局一致，但&lt;b&gt;必须等图全部到齐&lt;/b&gt;。&lt;/Text&gt;&#10;            &lt;Text style={{ fontSize: 19, color: '#1E4FA8', fontWeight: 'bold', marginTop: 8 }}&gt;前提：先有完整的照片集合&lt;/Text&gt;&#10;            &lt;Text style={{ fontSize: 19, color: '#D9534F', fontWeight: 'bold', marginTop: 2 }}&gt;代价：现场给不出任何反馈&lt;/Text&gt;&#10;        &lt;/Box&gt;&#10;        &lt;Box style={{ flex: 1, backgroundColor: '#F0F5FC', border: '1px solid #3D7BD9', borderRadius: 6, padding: '13px 18px', flexDirection: 'column' }}&gt;&#10;            &lt;Text style={{ fontSize: 24, fontWeight: 'bold', color: '#1A2230' }}&gt;路线二　增量 / 类 SLAM&lt;/Text&gt;&#10;            &lt;Text style={{ fontSize: 16, color: '#4A5568', marginTop: 4 }}&gt;Photo-SLAM、MonoGS、Droid-Splat、LongSplat&lt;/Text&gt;&#10;            &lt;Text style={{ fontSize: 19, color: '#1A2230', lineHeight: 1.5, marginTop: 9 }}&gt;边收边建、可交互，但新帧只与&lt;b&gt;时间上相邻&lt;/b&gt;的少数帧匹配（通常 5 帧窗口），转身回访、拼接两段序列就断了。&lt;/Text&gt;&#10;            &lt;Text style={{ fontSize: 19, color: '#1E4FA8', fontWeight: 'bold', marginTop: 8 }}&gt;前提：输入必须是连续视频&lt;/Text&gt;&#10;            &lt;Text style={{ fontSize: 19, color: '#D9534F', fontWeight: 'bold', marginTop: 2 }}&gt;代价：离开时间邻域就失效&lt;/Text&gt;&#10;        &lt;/Box&gt;&#10;    &lt;/Box&gt;&#10;&#10;    &lt;Box style={{ margin: '12px 40px 0px 40px', backgroundColor: '#1E4FA8', borderRadius: 6, padding: '11px 22px' }}&gt;&#10;        &lt;Text style={{ fontSize: 21, fontWeight: 'bold', color: '#FFFFFF', lineHeight: 1.4 }}&gt;两条路的前提是同一个东西：&lt;b&gt;帧序&lt;/b&gt;——一条等它全部确定，一条假设它天然有序，而真实拍摄两样都不满足。&lt;/Text&gt;&#10;    &lt;/Box&gt;&#10;&#10;    &lt;Box style={{ padding: '12px 40px 0px 40px', flexDirection: 'row', gap: 14 }}&gt;&#10;        &lt;Box style={{ flex: 1, backgroundColor: '#F7F9FC', border: '1px solid #D6DCE5', borderRadius: 6, padding: '10px 14px', flexDirection: 'column' }}&gt;&#10;            &lt;Text style={{ fontSize: 21, fontWeight: 'bold', color: '#1A2230' }}&gt;① 等&lt;/Text&gt;&#10;            &lt;Text style={{ fontSize: 16.5, color: '#1A2230', lineHeight: 1.4, marginTop: 5 }}&gt;全部图像就位才能开算，拍完不知道行不行，回家发现漏拍只能重拍。&lt;/Text&gt;&#10;            &lt;Text style={{ fontSize: 15, color: '#D9534F', fontWeight: 'bold', marginTop: 4 }}&gt;返工成本最高&lt;/Text&gt;&#10;        &lt;/Box&gt;&#10;        &lt;Box style={{ flex: 1, backgroundColor: '#F7F9FC', border: '1px solid #D6DCE5', borderRadius: 6, padding: '10px 14px', flexDirection: 'column' }}&gt;&#10;            &lt;Text style={{ fontSize: 21, fontWeight: 'bold', color: '#1A2230' }}&gt;② 乱&lt;/Text&gt;&#10;            &lt;Text style={{ fontSize: 16.5, color: '#1A2230', lineHeight: 1.4, marginTop: 5 }}&gt;随手拍的顺序与空间邻接无关，只能两两匹配：1000 张约 50 万对。&lt;/Text&gt;&#10;            &lt;Text style={{ fontSize: 15, color: '#D9534F', fontWeight: 'bold', marginTop: 4 }}&gt;SfM 从分钟变小时&lt;/Text&gt;&#10;        &lt;/Box&gt;&#10;        &lt;Box style={{ flex: 1, backgroundColor: '#F7F9FC', border: '1px solid #D6DCE5', borderRadius: 6, padding: '10px 14px', flexDirection: 'column' }}&gt;&#10;            &lt;Text style={{ fontSize: 21, fontWeight: 'bold', color: '#1A2230' }}&gt;③ 漂&lt;/Text&gt;&#10;            &lt;Text style={{ fontSize: 16.5, color: '#1A2230', lineHeight: 1.4, marginTop: 5 }}&gt;边走边建误差累积，绕一圈回来首尾差半米；传统做法重跑全局 BA。&lt;/Text&gt;&#10;            &lt;Text style={{ fontSize: 15, color: '#D9534F', fontWeight: 'bold', marginTop: 4 }}&gt;实时性当场归零&lt;/Text&gt;&#10;        &lt;/Box&gt;&#10;        &lt;Box style={{ flex: 1, backgroundColor: '#F7F9FC', border: '1px solid #D6DCE5', borderRadius: 6, padding: '10px 14px', flexDirection: 'column' }}&gt;&#10;            &lt;Text style={{ fontSize: 21, fontWeight: 'bold', color: '#1A2230' }}&gt;④ 爆&lt;/Text&gt;&#10;            &lt;Text style={{ fontSize: 16.5, color: '#1A2230', lineHeight: 1.4, marginTop: 5 }}&gt;高斯数随场景线性增长：不开层级，CityWalk 到第 795 / 4050 帧就 OOM。&lt;/Text&gt;&#10;            &lt;Text style={{ fontSize: 15, color: '#D9534F', fontWeight: 'bold', marginTop: 4 }}&gt;规模一上来就跑不完&lt;/Text&gt;&#10;        &lt;/Box&gt;&#10;    &lt;/Box&gt;&#10;&#10;    &lt;Box style={{ marginTop: 'auto', margin: '10px 40px 12px 40px', backgroundColor: '#F0F5FC', borderLeft: '5px solid #1E4FA8', padding: '9px 18px' }}&gt;&#10;        &lt;Text style={{ fontSize: 18, color: '#1A2230', lineHeight: 1.4 }}&gt;四个现象收敛成三条必须&lt;b&gt;同时&lt;/b&gt;成立的约束：即时（每帧数百毫秒）· 无序（不依赖帧序）· 全局一致（回环能修）——过去的方法最多同时满足两条。&lt;/Text&gt;&#10;    &lt;/Box&gt;&#10;&lt;/Slide&gt;&#10;"/>
         <p:cNvGrpSpPr/>
         <p:nvPr/>
       </p:nvGrpSpPr>
@@ -9989,7 +11312,7 @@
       </p:grpSpPr>
       <p:sp>
         <p:nvSpPr>
-          <p:cNvPr id="202" name=""/>
+          <p:cNvPr id="235" name=""/>
           <p:cNvSpPr/>
           <p:nvPr/>
         </p:nvSpPr>
@@ -10013,7 +11336,7 @@
       </p:sp>
       <p:sp>
         <p:nvSpPr>
-          <p:cNvPr id="203" name=""/>
+          <p:cNvPr id="236" name=""/>
           <p:cNvSpPr/>
           <p:nvPr/>
         </p:nvSpPr>
@@ -10037,7 +11360,7 @@
       </p:sp>
       <p:sp>
         <p:nvSpPr>
-          <p:cNvPr id="204" name="" descr="{&quot;isTemplate&quot;:true,&quot;type&quot;:&quot;text&quot;}"/>
+          <p:cNvPr id="237" name="" descr="{&quot;isTemplate&quot;:true,&quot;type&quot;:&quot;text&quot;}"/>
           <p:cNvSpPr txBox="1"/>
           <p:nvPr/>
         </p:nvSpPr>
@@ -10072,7 +11395,7 @@
       </p:sp>
       <p:sp>
         <p:nvSpPr>
-          <p:cNvPr id="205" name="" descr="{&quot;isTemplate&quot;:true,&quot;type&quot;:&quot;text&quot;}"/>
+          <p:cNvPr id="238" name="" descr="{&quot;isTemplate&quot;:true,&quot;type&quot;:&quot;text&quot;}"/>
           <p:cNvSpPr txBox="1"/>
           <p:nvPr/>
         </p:nvSpPr>
@@ -10107,7 +11430,7 @@
       </p:sp>
       <p:sp>
         <p:nvSpPr>
-          <p:cNvPr id="206" name="" descr="{&quot;isTemplate&quot;:true,&quot;type&quot;:&quot;text&quot;}"/>
+          <p:cNvPr id="239" name="" descr="{&quot;isTemplate&quot;:true,&quot;type&quot;:&quot;text&quot;}"/>
           <p:cNvSpPr txBox="1"/>
           <p:nvPr/>
         </p:nvSpPr>
@@ -10202,7 +11525,7 @@
       </p:sp>
       <p:sp>
         <p:nvSpPr>
-          <p:cNvPr id="207" name=""/>
+          <p:cNvPr id="240" name=""/>
           <p:cNvSpPr/>
           <p:nvPr/>
         </p:nvSpPr>
@@ -10233,7 +11556,7 @@
       </p:sp>
       <p:sp>
         <p:nvSpPr>
-          <p:cNvPr id="208" name="" descr="{&quot;isTemplate&quot;:true,&quot;type&quot;:&quot;text&quot;}"/>
+          <p:cNvPr id="241" name="" descr="{&quot;isTemplate&quot;:true,&quot;type&quot;:&quot;text&quot;}"/>
           <p:cNvSpPr txBox="1"/>
           <p:nvPr/>
         </p:nvSpPr>
@@ -10278,7 +11601,7 @@
       </p:sp>
       <p:sp>
         <p:nvSpPr>
-          <p:cNvPr id="209" name="" descr="{&quot;isTemplate&quot;:true,&quot;type&quot;:&quot;text&quot;}"/>
+          <p:cNvPr id="242" name="" descr="{&quot;isTemplate&quot;:true,&quot;type&quot;:&quot;text&quot;}"/>
           <p:cNvSpPr txBox="1"/>
           <p:nvPr/>
         </p:nvSpPr>
@@ -10373,7 +11696,7 @@
       </p:sp>
       <p:sp>
         <p:nvSpPr>
-          <p:cNvPr id="210" name="" descr="{&quot;isTemplate&quot;:true,&quot;type&quot;:&quot;text&quot;}"/>
+          <p:cNvPr id="243" name="" descr="{&quot;isTemplate&quot;:true,&quot;type&quot;:&quot;text&quot;}"/>
           <p:cNvSpPr txBox="1"/>
           <p:nvPr/>
         </p:nvSpPr>
@@ -10450,7 +11773,7 @@
       </p:sp>
       <p:sp>
         <p:nvSpPr>
-          <p:cNvPr id="211" name="" descr="{&quot;isTemplate&quot;:true,&quot;type&quot;:&quot;text&quot;}"/>
+          <p:cNvPr id="244" name="" descr="{&quot;isTemplate&quot;:true,&quot;type&quot;:&quot;text&quot;}"/>
           <p:cNvSpPr txBox="1"/>
           <p:nvPr/>
         </p:nvSpPr>
@@ -10485,7 +11808,7 @@
       </p:sp>
       <p:sp>
         <p:nvSpPr>
-          <p:cNvPr id="212" name="" descr="{&quot;isTemplate&quot;:true,&quot;type&quot;:&quot;text&quot;}"/>
+          <p:cNvPr id="245" name="" descr="{&quot;isTemplate&quot;:true,&quot;type&quot;:&quot;text&quot;}"/>
           <p:cNvSpPr txBox="1"/>
           <p:nvPr/>
         </p:nvSpPr>
@@ -10520,7 +11843,7 @@
       </p:sp>
       <p:sp>
         <p:nvSpPr>
-          <p:cNvPr id="213" name=""/>
+          <p:cNvPr id="246" name=""/>
           <p:cNvSpPr/>
           <p:nvPr/>
         </p:nvSpPr>
@@ -10551,7 +11874,7 @@
       </p:sp>
       <p:sp>
         <p:nvSpPr>
-          <p:cNvPr id="214" name="" descr="{&quot;isTemplate&quot;:true,&quot;type&quot;:&quot;text&quot;}"/>
+          <p:cNvPr id="247" name="" descr="{&quot;isTemplate&quot;:true,&quot;type&quot;:&quot;text&quot;}"/>
           <p:cNvSpPr txBox="1"/>
           <p:nvPr/>
         </p:nvSpPr>
@@ -10616,7 +11939,7 @@
       </p:sp>
       <p:sp>
         <p:nvSpPr>
-          <p:cNvPr id="215" name="" descr="{&quot;isTemplate&quot;:true,&quot;type&quot;:&quot;text&quot;}"/>
+          <p:cNvPr id="248" name="" descr="{&quot;isTemplate&quot;:true,&quot;type&quot;:&quot;text&quot;}"/>
           <p:cNvSpPr txBox="1"/>
           <p:nvPr/>
         </p:nvSpPr>
@@ -10711,7 +12034,7 @@
       </p:sp>
       <p:sp>
         <p:nvSpPr>
-          <p:cNvPr id="216" name="" descr="{&quot;isTemplate&quot;:true,&quot;type&quot;:&quot;text&quot;}"/>
+          <p:cNvPr id="249" name="" descr="{&quot;isTemplate&quot;:true,&quot;type&quot;:&quot;text&quot;}"/>
           <p:cNvSpPr txBox="1"/>
           <p:nvPr/>
         </p:nvSpPr>
@@ -10788,7 +12111,7 @@
       </p:sp>
       <p:sp>
         <p:nvSpPr>
-          <p:cNvPr id="217" name="" descr="{&quot;isTemplate&quot;:true,&quot;type&quot;:&quot;text&quot;}"/>
+          <p:cNvPr id="250" name="" descr="{&quot;isTemplate&quot;:true,&quot;type&quot;:&quot;text&quot;}"/>
           <p:cNvSpPr txBox="1"/>
           <p:nvPr/>
         </p:nvSpPr>
@@ -10823,7 +12146,7 @@
       </p:sp>
       <p:sp>
         <p:nvSpPr>
-          <p:cNvPr id="218" name="" descr="{&quot;isTemplate&quot;:true,&quot;type&quot;:&quot;text&quot;}"/>
+          <p:cNvPr id="251" name="" descr="{&quot;isTemplate&quot;:true,&quot;type&quot;:&quot;text&quot;}"/>
           <p:cNvSpPr txBox="1"/>
           <p:nvPr/>
         </p:nvSpPr>
@@ -10858,7 +12181,7 @@
       </p:sp>
       <p:sp>
         <p:nvSpPr>
-          <p:cNvPr id="219" name=""/>
+          <p:cNvPr id="252" name=""/>
           <p:cNvSpPr/>
           <p:nvPr/>
         </p:nvSpPr>
@@ -10884,7 +12207,7 @@
       </p:sp>
       <p:sp>
         <p:nvSpPr>
-          <p:cNvPr id="220" name="" descr="{&quot;isTemplate&quot;:true,&quot;type&quot;:&quot;text&quot;}"/>
+          <p:cNvPr id="253" name="" descr="{&quot;isTemplate&quot;:true,&quot;type&quot;:&quot;text&quot;}"/>
           <p:cNvSpPr txBox="1"/>
           <p:nvPr/>
         </p:nvSpPr>
@@ -10939,7 +12262,7 @@
       </p:sp>
       <p:sp>
         <p:nvSpPr>
-          <p:cNvPr id="221" name=""/>
+          <p:cNvPr id="254" name=""/>
           <p:cNvSpPr/>
           <p:nvPr/>
         </p:nvSpPr>
@@ -10970,7 +12293,7 @@
       </p:sp>
       <p:sp>
         <p:nvSpPr>
-          <p:cNvPr id="222" name="" descr="{&quot;isTemplate&quot;:true,&quot;type&quot;:&quot;text&quot;}"/>
+          <p:cNvPr id="255" name="" descr="{&quot;isTemplate&quot;:true,&quot;type&quot;:&quot;text&quot;}"/>
           <p:cNvSpPr txBox="1"/>
           <p:nvPr/>
         </p:nvSpPr>
@@ -11015,7 +12338,7 @@
       </p:sp>
       <p:sp>
         <p:nvSpPr>
-          <p:cNvPr id="223" name="" descr="{&quot;isTemplate&quot;:true,&quot;type&quot;:&quot;text&quot;}"/>
+          <p:cNvPr id="256" name="" descr="{&quot;isTemplate&quot;:true,&quot;type&quot;:&quot;text&quot;}"/>
           <p:cNvSpPr txBox="1"/>
           <p:nvPr/>
         </p:nvSpPr>
@@ -11052,7 +12375,7 @@
       </p:sp>
       <p:sp>
         <p:nvSpPr>
-          <p:cNvPr id="224" name="" descr="{&quot;isTemplate&quot;:true,&quot;type&quot;:&quot;text&quot;}"/>
+          <p:cNvPr id="257" name="" descr="{&quot;isTemplate&quot;:true,&quot;type&quot;:&quot;text&quot;}"/>
           <p:cNvSpPr txBox="1"/>
           <p:nvPr/>
         </p:nvSpPr>
@@ -11087,7 +12410,7 @@
       </p:sp>
       <p:sp>
         <p:nvSpPr>
-          <p:cNvPr id="225" name=""/>
+          <p:cNvPr id="258" name=""/>
           <p:cNvSpPr/>
           <p:nvPr/>
         </p:nvSpPr>
@@ -11118,7 +12441,7 @@
       </p:sp>
       <p:sp>
         <p:nvSpPr>
-          <p:cNvPr id="226" name="" descr="{&quot;isTemplate&quot;:true,&quot;type&quot;:&quot;text&quot;}"/>
+          <p:cNvPr id="259" name="" descr="{&quot;isTemplate&quot;:true,&quot;type&quot;:&quot;text&quot;}"/>
           <p:cNvSpPr txBox="1"/>
           <p:nvPr/>
         </p:nvSpPr>
@@ -11163,7 +12486,7 @@
       </p:sp>
       <p:sp>
         <p:nvSpPr>
-          <p:cNvPr id="227" name="" descr="{&quot;isTemplate&quot;:true,&quot;type&quot;:&quot;text&quot;}"/>
+          <p:cNvPr id="260" name="" descr="{&quot;isTemplate&quot;:true,&quot;type&quot;:&quot;text&quot;}"/>
           <p:cNvSpPr txBox="1"/>
           <p:nvPr/>
         </p:nvSpPr>
@@ -11240,7 +12563,7 @@
       </p:sp>
       <p:sp>
         <p:nvSpPr>
-          <p:cNvPr id="228" name="" descr="{&quot;isTemplate&quot;:true,&quot;type&quot;:&quot;text&quot;}"/>
+          <p:cNvPr id="261" name="" descr="{&quot;isTemplate&quot;:true,&quot;type&quot;:&quot;text&quot;}"/>
           <p:cNvSpPr txBox="1"/>
           <p:nvPr/>
         </p:nvSpPr>
@@ -11285,7 +12608,7 @@
       </p:sp>
       <p:sp>
         <p:nvSpPr>
-          <p:cNvPr id="229" name=""/>
+          <p:cNvPr id="262" name=""/>
           <p:cNvSpPr/>
           <p:nvPr/>
         </p:nvSpPr>
@@ -11316,7 +12639,7 @@
       </p:sp>
       <p:sp>
         <p:nvSpPr>
-          <p:cNvPr id="230" name="" descr="{&quot;isTemplate&quot;:true,&quot;type&quot;:&quot;text&quot;}"/>
+          <p:cNvPr id="263" name="" descr="{&quot;isTemplate&quot;:true,&quot;type&quot;:&quot;text&quot;}"/>
           <p:cNvSpPr txBox="1"/>
           <p:nvPr/>
         </p:nvSpPr>
@@ -11361,7 +12684,7 @@
       </p:sp>
       <p:sp>
         <p:nvSpPr>
-          <p:cNvPr id="231" name="" descr="{&quot;isTemplate&quot;:true,&quot;type&quot;:&quot;text&quot;}"/>
+          <p:cNvPr id="264" name="" descr="{&quot;isTemplate&quot;:true,&quot;type&quot;:&quot;text&quot;}"/>
           <p:cNvSpPr txBox="1"/>
           <p:nvPr/>
         </p:nvSpPr>
@@ -11418,7 +12741,7 @@
       </p:sp>
       <p:sp>
         <p:nvSpPr>
-          <p:cNvPr id="232" name="" descr="{&quot;isTemplate&quot;:true,&quot;type&quot;:&quot;text&quot;}"/>
+          <p:cNvPr id="265" name="" descr="{&quot;isTemplate&quot;:true,&quot;type&quot;:&quot;text&quot;}"/>
           <p:cNvSpPr txBox="1"/>
           <p:nvPr/>
         </p:nvSpPr>
@@ -11453,7 +12776,7 @@
       </p:sp>
       <p:sp>
         <p:nvSpPr>
-          <p:cNvPr id="233" name=""/>
+          <p:cNvPr id="266" name=""/>
           <p:cNvSpPr/>
           <p:nvPr/>
         </p:nvSpPr>
@@ -11484,7 +12807,7 @@
       </p:sp>
       <p:sp>
         <p:nvSpPr>
-          <p:cNvPr id="234" name="" descr="{&quot;isTemplate&quot;:true,&quot;type&quot;:&quot;text&quot;}"/>
+          <p:cNvPr id="267" name="" descr="{&quot;isTemplate&quot;:true,&quot;type&quot;:&quot;text&quot;}"/>
           <p:cNvSpPr txBox="1"/>
           <p:nvPr/>
         </p:nvSpPr>
@@ -11529,7 +12852,7 @@
       </p:sp>
       <p:sp>
         <p:nvSpPr>
-          <p:cNvPr id="235" name="" descr="{&quot;isTemplate&quot;:true,&quot;type&quot;:&quot;text&quot;}"/>
+          <p:cNvPr id="268" name="" descr="{&quot;isTemplate&quot;:true,&quot;type&quot;:&quot;text&quot;}"/>
           <p:cNvSpPr txBox="1"/>
           <p:nvPr/>
         </p:nvSpPr>
@@ -11626,7 +12949,7 @@
       </p:sp>
       <p:sp>
         <p:nvSpPr>
-          <p:cNvPr id="236" name="" descr="{&quot;isTemplate&quot;:true,&quot;type&quot;:&quot;text&quot;}"/>
+          <p:cNvPr id="269" name="" descr="{&quot;isTemplate&quot;:true,&quot;type&quot;:&quot;text&quot;}"/>
           <p:cNvSpPr txBox="1"/>
           <p:nvPr/>
         </p:nvSpPr>
@@ -11661,7 +12984,7 @@
       </p:sp>
       <p:sp>
         <p:nvSpPr>
-          <p:cNvPr id="237" name=""/>
+          <p:cNvPr id="270" name=""/>
           <p:cNvSpPr/>
           <p:nvPr/>
         </p:nvSpPr>
@@ -11685,7 +13008,7 @@
       </p:sp>
       <p:sp>
         <p:nvSpPr>
-          <p:cNvPr id="238" name=""/>
+          <p:cNvPr id="271" name=""/>
           <p:cNvSpPr/>
           <p:nvPr/>
         </p:nvSpPr>
@@ -11725,7 +13048,7 @@
       </p:sp>
       <p:sp>
         <p:nvSpPr>
-          <p:cNvPr id="239" name="" descr="{&quot;isTemplate&quot;:true,&quot;type&quot;:&quot;text&quot;}"/>
+          <p:cNvPr id="272" name="" descr="{&quot;isTemplate&quot;:true,&quot;type&quot;:&quot;text&quot;}"/>
           <p:cNvSpPr txBox="1"/>
           <p:nvPr/>
         </p:nvSpPr>
@@ -11830,7 +13153,7 @@
   <p:cSld>
     <p:spTree>
       <p:nvGrpSpPr>
-        <p:cNvPr id="240" name="" descr="&lt;Slide style={{ width: '1280px', height: '720px', backgroundColor: '#FFFFFF', padding: '0px', flexDirection: 'column' }}&gt;&#13;&#10;    &lt;Box style={{ width: '1280px', height: '8px', backgroundColor: '#1E4FA8' }} /&gt;&#13;&#10;    &lt;Box style={{ padding: '24px 40px 0px 40px', flexDirection: 'row', justifyContent: 'space-between', alignItems: 'flex-end' }}&gt;&#13;&#10;        &lt;Text style={{ fontSize: 33, fontWeight: 'bold', color: '#1E4FA8' }}&gt;摘要与贡献：它把哪件事第一次做成了&lt;/Text&gt;&#13;&#10;        &lt;Text style={{ fontSize: 15, color: '#8B97A8' }}&gt;03 / 15&lt;/Text&gt;&#13;&#10;    &lt;/Box&gt;&#13;&#10;&#13;&#10;    &lt;Box style={{ padding: '20px 40px 0px 40px', flexDirection: 'row', gap: 22 }}&gt;&#13;&#10;        &lt;Box style={{ width: 438, flexDirection: 'column', gap: 13 }}&gt;&#13;&#10;            &lt;Box style={{ backgroundColor: '#F0F5FC', borderLeft: '4px solid #1E4FA8', padding: '12px 15px', flexDirection: 'column' }}&gt;&#13;&#10;                &lt;Text style={{ fontSize: 19, fontWeight: 'bold', color: '#1E4FA8' }}&gt;问题&lt;/Text&gt;&#13;&#10;                &lt;Text style={{ fontSize: 18, color: '#1A2230', lineHeight: 1.45, marginTop: 4 }}&gt;3DGS 质量高、可实时渲染，但训练前必须由 SfM 离线解位姿；SfM 要等图到齐，且对乱序敏感。&lt;/Text&gt;&#13;&#10;            &lt;/Box&gt;&#13;&#10;            &lt;Box style={{ backgroundColor: '#F7F9FC', borderLeft: '4px solid #4A5568', padding: '12px 15px', flexDirection: 'column' }}&gt;&#13;&#10;                &lt;Text style={{ fontSize: 19, fontWeight: 'bold', color: '#4A5568' }}&gt;做法&lt;/Text&gt;&#13;&#10;                &lt;Text style={{ fontSize: 18, color: '#1A2230', lineHeight: 1.45, marginTop: 4 }}&gt;首个面向无序输入、具备全局一致性的即时 3DGS 重建：两级快速匹配 ＋ GPU 局部 BA ＋ 簇级回环图传播 ＋ 渐进式层级。&lt;/Text&gt;&#13;&#10;            &lt;/Box&gt;&#13;&#10;            &lt;Box style={{ backgroundColor: '#F0F5FC', borderLeft: '4px solid #3D7BD9', padding: '12px 15px', flexDirection: 'column' }}&gt;&#13;&#10;                &lt;Text style={{ fontSize: 19, fontWeight: 'bold', color: '#3D7BD9' }}&gt;结果&lt;/Text&gt;&#13;&#10;                &lt;Text style={{ fontSize: 18, color: '#1A2230', lineHeight: 1.45, marginTop: 4 }}&gt;MipNeRF360 上 &lt;b&gt;1 分 17 秒&lt;/b&gt;达 &lt;b&gt;26.29 dB&lt;/b&gt;（离线参考 8 分 50 秒 / 27.52 dB）；输入打乱只掉 &lt;b&gt;0.5 dB&lt;/b&gt;。&lt;/Text&gt;&#13;&#10;            &lt;/Box&gt;&#13;&#10;            &lt;Text style={{ fontSize: 15, color: '#8B97A8', lineHeight: 1.35 }}&gt;关键词：三维高斯泼溅 · 无序采集 · 即时重建 · 协视图 · 回环闭合 · 渐进式层级&lt;/Text&gt;&#13;&#10;        &lt;/Box&gt;&#13;&#10;&#13;&#10;        &lt;Box style={{ flex: 1, flexDirection: 'column', gap: 13 }}&gt;&#13;&#10;            &lt;Box style={{ flexDirection: 'row', gap: 13 }}&gt;&#13;&#10;                &lt;Box style={{ flex: 1, backgroundColor: '#F7F9FC', border: '1px solid #D6DCE5', borderRadius: 6, padding: '13px 15px', flexDirection: 'column' }}&gt;&#13;&#10;                    &lt;Box style={{ flexDirection: 'row', alignItems: 'center', gap: 8 }}&gt;&#13;&#10;                        &lt;Box style={{ width: 26, height: 26, backgroundColor: '#1E4FA8', borderRadius: 4, alignItems: 'center', justifyContent: 'center' }}&gt;&#13;&#10;                            &lt;Text style={{ fontSize: 16, fontWeight: 'bold', color: '#FFFFFF' }}&gt;1&lt;/Text&gt;&#13;&#10;                        &lt;/Box&gt;&#13;&#10;                        &lt;Text style={{ fontSize: 21, fontWeight: 'bold', color: '#1A2230' }}&gt;无序序列快速匹配&lt;/Text&gt;&#13;&#10;                    &lt;/Box&gt;&#13;&#10;                    &lt;Text style={{ fontSize: 17.5, color: '#1A2230', lineHeight: 1.45, marginTop: 7 }}&gt;三级串联把候选从 1000 收到 1；配加权协视图 ＋ 高连通贪心选窗。&lt;/Text&gt;&#13;&#10;                    &lt;Text style={{ fontSize: 15.5, color: '#1E4FA8', fontWeight: 'bold', marginTop: 7 }}&gt;治“乱” · 步骤 ①–④&lt;/Text&gt;&#13;&#10;                &lt;/Box&gt;&#13;&#10;                &lt;Box style={{ flex: 1, backgroundColor: '#F7F9FC', border: '1px solid #D6DCE5', borderRadius: 6, padding: '13px 15px', flexDirection: 'column' }}&gt;&#13;&#10;                    &lt;Box style={{ flexDirection: 'row', alignItems: 'center', gap: 8 }}&gt;&#13;&#10;                        &lt;Box style={{ width: 26, height: 26, backgroundColor: '#1E4FA8', borderRadius: 4, alignItems: 'center', justifyContent: 'center' }}&gt;&#13;&#10;                            &lt;Text style={{ fontSize: 16, fontWeight: 'bold', color: '#FFFFFF' }}&gt;2&lt;/Text&gt;&#13;&#10;                        &lt;/Box&gt;&#13;&#10;                        &lt;Text style={{ fontSize: 21, fontWeight: 'bold', color: '#1A2230' }}&gt;GPU 局部重建&lt;/Text&gt;&#13;&#10;                    &lt;/Box&gt;&#13;&#10;                    &lt;Text style={{ fontSize: 17.5, color: '#1A2230', lineHeight: 1.45, marginTop: 7 }}&gt;自写 BA 核函数（稠密 Schur 补），比现有优化器快约 5 倍；分块深度对齐。&lt;/Text&gt;&#13;&#10;                    &lt;Text style={{ fontSize: 15.5, color: '#1E4FA8', fontWeight: 'bold', marginTop: 7 }}&gt;治“慢” · 步骤 ⑤、⑦&lt;/Text&gt;&#13;&#10;                &lt;/Box&gt;&#13;&#10;            &lt;/Box&gt;&#13;&#10;            &lt;Box style={{ flexDirection: 'row', gap: 13 }}&gt;&#13;&#10;                &lt;Box style={{ flex: 1, backgroundColor: '#F7F9FC', border: '1px solid #D6DCE5', borderRadius: 6, padding: '13px 15px', flexDirection: 'column' }}&gt;&#13;&#10;                    &lt;Box style={{ flexDirection: 'row', alignItems: 'center', gap: 8 }}&gt;&#13;&#10;                        &lt;Box style={{ width: 26, height: 26, backgroundColor: '#1E4FA8', borderRadius: 4, alignItems: 'center', justifyContent: 'center' }}&gt;&#13;&#10;                            &lt;Text style={{ fontSize: 16, fontWeight: 'bold', color: '#FFFFFF' }}&gt;3&lt;/Text&gt;&#13;&#10;                        &lt;/Box&gt;&#13;&#10;                        &lt;Text style={{ fontSize: 21, fontWeight: 'bold', color: '#1A2230' }}&gt;簇级回环闭合&lt;/Text&gt;&#13;&#10;                    &lt;/Box&gt;&#13;&#10;                    &lt;Text style={{ fontSize: 17.5, color: '#1A2230', lineHeight: 1.45, marginTop: 7 }}&gt;焊接窗口 BA ＋ Dijkstra 主干测地插值，把 Sim(3) 摊到全图，不跑第二次全局优化。&lt;/Text&gt;&#13;&#10;                    &lt;Text style={{ fontSize: 15.5, color: '#D9534F', fontWeight: 'bold', marginTop: 7 }}&gt;治“漂” · 步骤 ⑥&lt;/Text&gt;&#13;&#10;                &lt;/Box&gt;&#13;&#10;                &lt;Box style={{ flex: 1, backgroundColor: '#F0F5FC', border: '1px solid #3D7BD9', borderRadius: 6, padding: '13px 15px', flexDirection: 'column' }}&gt;&#13;&#10;                    &lt;Box style={{ flexDirection: 'row', alignItems: 'center', gap: 8 }}&gt;&#13;&#10;                        &lt;Box style={{ width: 26, height: 26, backgroundColor: '#0E3F8C', borderRadius: 4, alignItems: 'center', justifyContent: 'center' }}&gt;&#13;&#10;                            &lt;Text style={{ fontSize: 16, fontWeight: 'bold', color: '#FFFFFF' }}&gt;4&lt;/Text&gt;&#13;&#10;                        &lt;/Box&gt;&#13;&#10;                        &lt;Text style={{ fontSize: 21, fontWeight: 'bold', color: '#1A2230' }}&gt;渐进式高斯层级&lt;/Text&gt;&#13;&#10;                    &lt;/Box&gt;&#13;&#10;                    &lt;Text style={{ fontSize: 17.5, color: '#1A2230', lineHeight: 1.45, marginTop: 7 }}&gt;按屏幕投影尺寸合并 / 回取，叶节点卸载到 CPU；4050 帧显存仍控在 12.8 GB 内。&lt;/Text&gt;&#13;&#10;                    &lt;Text style={{ fontSize: 15.5, color: '#1E4FA8', fontWeight: 'bold', marginTop: 7 }}&gt;治“爆” · 步骤 ⑦&lt;/Text&gt;&#13;&#10;                &lt;/Box&gt;&#13;&#10;            &lt;/Box&gt;&#13;&#10;            &lt;Box style={{ backgroundColor: '#FFFFFF', border: '1px solid #D6DCE5', borderRadius: 6, padding: '12px 15px' }}&gt;&#13;&#10;                &lt;Text style={{ fontSize: 17, color: '#4A5568', lineHeight: 1.45 }}&gt;报告里的实测（我们的复现）：MipNeRF360 &lt;b&gt;garden&lt;/b&gt; 2× 降采样 &lt;b&gt;25.95 dB / 62.7 s / 19.5 GB&lt;/b&gt;，185 帧。差距来自分辨率与测试协议，不是方法失效。&lt;/Text&gt;&#13;&#10;            &lt;/Box&gt;&#13;&#10;        &lt;/Box&gt;&#13;&#10;    &lt;/Box&gt;&#13;&#10;&#13;&#10;    &lt;Box style={{ marginTop: 'auto', margin: '12px 40px 12px 40px', backgroundColor: '#1E4FA8', borderRadius: 6, padding: '11px 22px', flexDirection: 'column' }}&gt;&#13;&#10;        &lt;Text style={{ fontSize: 19, fontWeight: 'bold', color: '#FFFFFF', lineHeight: 1.4 }}&gt;创新在哪：&lt;b&gt;不是从零发明&lt;/b&gt;。2025 的直接前作已做到“免位姿 ＋ 大场景 ＋ 即时”，但要求图像有序、且不做回环。&lt;/Text&gt;&#13;&#10;        &lt;Text style={{ fontSize: 19, color: '#D6E4F7', lineHeight: 1.4, marginTop: 3 }}&gt;本文只补这两个假设——在&lt;b&gt;全部历史&lt;/b&gt;里检索重叠帧，用&lt;b&gt;图传播&lt;/b&gt;做不重算的回环。增量不大，但恰好补在前作的假设上。&lt;/Text&gt;&#13;&#10;    &lt;/Box&gt;&#13;&#10;&lt;/Slide&gt;&#13;&#10;"/>
+        <p:cNvPr id="273" name="" descr="&lt;Slide style={{ width: '1280px', height: '720px', backgroundColor: '#FFFFFF', padding: '0px', flexDirection: 'column' }}&gt;&#13;&#10;    &lt;Box style={{ width: '1280px', height: '8px', backgroundColor: '#1E4FA8' }} /&gt;&#13;&#10;    &lt;Box style={{ padding: '24px 40px 0px 40px', flexDirection: 'row', justifyContent: 'space-between', alignItems: 'flex-end' }}&gt;&#13;&#10;        &lt;Text style={{ fontSize: 33, fontWeight: 'bold', color: '#1E4FA8' }}&gt;摘要与贡献：它把哪件事第一次做成了&lt;/Text&gt;&#13;&#10;        &lt;Text style={{ fontSize: 15, color: '#8B97A8' }}&gt;03 / 15&lt;/Text&gt;&#13;&#10;    &lt;/Box&gt;&#13;&#10;&#13;&#10;    &lt;Box style={{ padding: '20px 40px 0px 40px', flexDirection: 'row', gap: 22 }}&gt;&#13;&#10;        &lt;Box style={{ width: 438, flexDirection: 'column', gap: 13 }}&gt;&#13;&#10;            &lt;Box style={{ backgroundColor: '#F0F5FC', borderLeft: '4px solid #1E4FA8', padding: '12px 15px', flexDirection: 'column' }}&gt;&#13;&#10;                &lt;Text style={{ fontSize: 19, fontWeight: 'bold', color: '#1E4FA8' }}&gt;问题&lt;/Text&gt;&#13;&#10;                &lt;Text style={{ fontSize: 18, color: '#1A2230', lineHeight: 1.45, marginTop: 4 }}&gt;3DGS 质量高、可实时渲染，但训练前必须由 SfM 离线解位姿；SfM 要等图到齐，且对乱序敏感。&lt;/Text&gt;&#13;&#10;            &lt;/Box&gt;&#13;&#10;            &lt;Box style={{ backgroundColor: '#F7F9FC', borderLeft: '4px solid #4A5568', padding: '12px 15px', flexDirection: 'column' }}&gt;&#13;&#10;                &lt;Text style={{ fontSize: 19, fontWeight: 'bold', color: '#4A5568' }}&gt;做法&lt;/Text&gt;&#13;&#10;                &lt;Text style={{ fontSize: 18, color: '#1A2230', lineHeight: 1.45, marginTop: 4 }}&gt;首个面向无序输入、具备全局一致性的即时 3DGS 重建：两级快速匹配 ＋ GPU 局部 BA ＋ 簇级回环图传播 ＋ 渐进式层级。&lt;/Text&gt;&#13;&#10;            &lt;/Box&gt;&#13;&#10;            &lt;Box style={{ backgroundColor: '#F0F5FC', borderLeft: '4px solid #3D7BD9', padding: '12px 15px', flexDirection: 'column' }}&gt;&#13;&#10;                &lt;Text style={{ fontSize: 19, fontWeight: 'bold', color: '#3D7BD9' }}&gt;结果&lt;/Text&gt;&#13;&#10;                &lt;Text style={{ fontSize: 18, color: '#1A2230', lineHeight: 1.45, marginTop: 4 }}&gt;MipNeRF360 上 &lt;b&gt;1 分 17 秒&lt;/b&gt;达 &lt;b&gt;26.29 dB&lt;/b&gt;（离线参考 8 分 50 秒 / 27.52 dB）；输入打乱只掉 &lt;b&gt;0.5 dB&lt;/b&gt;。&lt;/Text&gt;&#13;&#10;            &lt;/Box&gt;&#13;&#10;            &lt;Text style={{ fontSize: 15, color: '#8B97A8', lineHeight: 1.35 }}&gt;关键词：三维高斯泼溅 · 无序采集 · 即时重建 · 协视图 · 回环闭合 · 渐进式层级&lt;/Text&gt;&#13;&#10;        &lt;/Box&gt;&#13;&#10;&#13;&#10;        &lt;Box style={{ flex: 1, flexDirection: 'column', gap: 13 }}&gt;&#13;&#10;            &lt;Box style={{ flexDirection: 'row', gap: 13 }}&gt;&#13;&#10;                &lt;Box style={{ flex: 1, backgroundColor: '#F7F9FC', border: '1px solid #D6DCE5', borderRadius: 6, padding: '13px 15px', flexDirection: 'column' }}&gt;&#13;&#10;                    &lt;Box style={{ flexDirection: 'row', alignItems: 'center', gap: 8 }}&gt;&#13;&#10;                        &lt;Box style={{ width: 26, height: 26, backgroundColor: '#1E4FA8', borderRadius: 4, alignItems: 'center', justifyContent: 'center' }}&gt;&#13;&#10;                            &lt;Text style={{ fontSize: 16, fontWeight: 'bold', color: '#FFFFFF' }}&gt;1&lt;/Text&gt;&#13;&#10;                        &lt;/Box&gt;&#13;&#10;                        &lt;Text style={{ fontSize: 21, fontWeight: 'bold', color: '#1A2230' }}&gt;无序序列快速匹配&lt;/Text&gt;&#13;&#10;                    &lt;/Box&gt;&#13;&#10;                    &lt;Text style={{ fontSize: 17.5, color: '#1A2230', lineHeight: 1.45, marginTop: 7 }}&gt;三级串联把候选从 1000 收到 1；配加权协视图 ＋ 高连通贪心选窗。&lt;/Text&gt;&#13;&#10;                    &lt;Text style={{ fontSize: 15.5, color: '#1E4FA8', fontWeight: 'bold', marginTop: 7 }}&gt;治“乱” · 步骤 ①–④&lt;/Text&gt;&#13;&#10;                &lt;/Box&gt;&#13;&#10;                &lt;Box style={{ flex: 1, backgroundColor: '#F7F9FC', border: '1px solid #D6DCE5', borderRadius: 6, padding: '13px 15px', flexDirection: 'column' }}&gt;&#13;&#10;                    &lt;Box style={{ flexDirection: 'row', alignItems: 'center', gap: 8 }}&gt;&#13;&#10;                        &lt;Box style={{ width: 26, height: 26, backgroundColor: '#1E4FA8', borderRadius: 4, alignItems: 'center', justifyContent: 'center' }}&gt;&#13;&#10;                            &lt;Text style={{ fontSize: 16, fontWeight: 'bold', color: '#FFFFFF' }}&gt;2&lt;/Text&gt;&#13;&#10;                        &lt;/Box&gt;&#13;&#10;                        &lt;Text style={{ fontSize: 21, fontWeight: 'bold', color: '#1A2230' }}&gt;GPU 局部重建&lt;/Text&gt;&#13;&#10;                    &lt;/Box&gt;&#13;&#10;                    &lt;Text style={{ fontSize: 17.5, color: '#1A2230', lineHeight: 1.45, marginTop: 7 }}&gt;自写 BA 核函数（稠密 Schur 补），比现有优化器快约 5 倍；分块深度对齐。&lt;/Text&gt;&#13;&#10;                    &lt;Text style={{ fontSize: 15.5, color: '#1E4FA8', fontWeight: 'bold', marginTop: 7 }}&gt;治“慢” · 步骤 ⑤、⑦&lt;/Text&gt;&#13;&#10;                &lt;/Box&gt;&#13;&#10;            &lt;/Box&gt;&#13;&#10;            &lt;Box style={{ flexDirection: 'row', gap: 13 }}&gt;&#13;&#10;                &lt;Box style={{ flex: 1, backgroundColor: '#F7F9FC', border: '1px solid #D6DCE5', borderRadius: 6, padding: '13px 15px', flexDirection: 'column' }}&gt;&#13;&#10;                    &lt;Box style={{ flexDirection: 'row', alignItems: 'center', gap: 8 }}&gt;&#13;&#10;                        &lt;Box style={{ width: 26, height: 26, backgroundColor: '#1E4FA8', borderRadius: 4, alignItems: 'center', justifyContent: 'center' }}&gt;&#13;&#10;                            &lt;Text style={{ fontSize: 16, fontWeight: 'bold', color: '#FFFFFF' }}&gt;3&lt;/Text&gt;&#13;&#10;                        &lt;/Box&gt;&#13;&#10;                        &lt;Text style={{ fontSize: 21, fontWeight: 'bold', color: '#1A2230' }}&gt;簇级回环闭合&lt;/Text&gt;&#13;&#10;                    &lt;/Box&gt;&#13;&#10;                    &lt;Text style={{ fontSize: 17.5, color: '#1A2230', lineHeight: 1.45, marginTop: 7 }}&gt;焊接窗口 BA ＋ Dijkstra 主干测地插值，把 Sim(3) 摊到全图，不跑第二次全局优化。&lt;/Text&gt;&#13;&#10;                    &lt;Text style={{ fontSize: 15.5, color: '#D9534F', fontWeight: 'bold', marginTop: 7 }}&gt;治“漂” · 步骤 ⑥&lt;/Text&gt;&#13;&#10;                &lt;/Box&gt;&#13;&#10;                &lt;Box style={{ flex: 1, backgroundColor: '#F0F5FC', border: '1px solid #3D7BD9', borderRadius: 6, padding: '13px 15px', flexDirection: 'column' }}&gt;&#13;&#10;                    &lt;Box style={{ flexDirection: 'row', alignItems: 'center', gap: 8 }}&gt;&#13;&#10;                        &lt;Box style={{ width: 26, height: 26, backgroundColor: '#0E3F8C', borderRadius: 4, alignItems: 'center', justifyContent: 'center' }}&gt;&#13;&#10;                            &lt;Text style={{ fontSize: 16, fontWeight: 'bold', color: '#FFFFFF' }}&gt;4&lt;/Text&gt;&#13;&#10;                        &lt;/Box&gt;&#13;&#10;                        &lt;Text style={{ fontSize: 21, fontWeight: 'bold', color: '#1A2230' }}&gt;渐进式高斯层级&lt;/Text&gt;&#13;&#10;                    &lt;/Box&gt;&#13;&#10;                    &lt;Text style={{ fontSize: 17.5, color: '#1A2230', lineHeight: 1.45, marginTop: 7 }}&gt;按屏幕投影尺寸合并 / 回取，叶节点卸载到 CPU；4050 帧显存仍控在 12.8 GB 内。&lt;/Text&gt;&#13;&#10;                    &lt;Text style={{ fontSize: 15.5, color: '#1E4FA8', fontWeight: 'bold', marginTop: 7 }}&gt;治“爆” · 步骤 ⑦&lt;/Text&gt;&#13;&#10;                &lt;/Box&gt;&#13;&#10;            &lt;/Box&gt;&#13;&#10;            &lt;Box style={{ backgroundColor: '#FFFFFF', border: '1px solid #D6DCE5', borderRadius: 6, padding: '12px 15px' }}&gt;&#13;&#10;                &lt;Text style={{ fontSize: 17, color: '#4A5568', lineHeight: 1.45 }}&gt;报告里的实测（我们的复现）：MipNeRF360 &lt;b&gt;garden&lt;/b&gt; 2× 降采样 &lt;b&gt;25.95 dB / 62.7 s / 19.5 GB&lt;/b&gt;，185 帧。差距来自分辨率与测试协议，不是方法失效。&lt;/Text&gt;&#13;&#10;            &lt;/Box&gt;&#13;&#10;        &lt;/Box&gt;&#13;&#10;    &lt;/Box&gt;&#13;&#10;&#13;&#10;    &lt;Box style={{ marginTop: 'auto', margin: '12px 40px 12px 40px', backgroundColor: '#1E4FA8', borderRadius: 6, padding: '11px 22px', flexDirection: 'column' }}&gt;&#13;&#10;        &lt;Text style={{ fontSize: 19, fontWeight: 'bold', color: '#FFFFFF', lineHeight: 1.4 }}&gt;创新在哪：&lt;b&gt;不是从零发明&lt;/b&gt;。2025 的直接前作已做到“免位姿 ＋ 大场景 ＋ 即时”，但要求图像有序、且不做回环。&lt;/Text&gt;&#13;&#10;        &lt;Text style={{ fontSize: 19, color: '#D6E4F7', lineHeight: 1.4, marginTop: 3 }}&gt;本文只补这两个假设——在&lt;b&gt;全部历史&lt;/b&gt;里检索重叠帧，用&lt;b&gt;图传播&lt;/b&gt;做不重算的回环。增量不大，但恰好补在前作的假设上。&lt;/Text&gt;&#13;&#10;    &lt;/Box&gt;&#13;&#10;&lt;/Slide&gt;&#13;&#10;"/>
         <p:cNvGrpSpPr/>
         <p:nvPr/>
       </p:nvGrpSpPr>
@@ -11844,7 +13167,7 @@
       </p:grpSpPr>
       <p:sp>
         <p:nvSpPr>
-          <p:cNvPr id="241" name=""/>
+          <p:cNvPr id="274" name=""/>
           <p:cNvSpPr/>
           <p:nvPr/>
         </p:nvSpPr>
@@ -11868,7 +13191,7 @@
       </p:sp>
       <p:sp>
         <p:nvSpPr>
-          <p:cNvPr id="242" name=""/>
+          <p:cNvPr id="275" name=""/>
           <p:cNvSpPr/>
           <p:nvPr/>
         </p:nvSpPr>
@@ -11892,7 +13215,7 @@
       </p:sp>
       <p:sp>
         <p:nvSpPr>
-          <p:cNvPr id="243" name="" descr="{&quot;isTemplate&quot;:true,&quot;type&quot;:&quot;text&quot;}"/>
+          <p:cNvPr id="276" name="" descr="{&quot;isTemplate&quot;:true,&quot;type&quot;:&quot;text&quot;}"/>
           <p:cNvSpPr txBox="1"/>
           <p:nvPr/>
         </p:nvSpPr>
@@ -11927,7 +13250,7 @@
       </p:sp>
       <p:sp>
         <p:nvSpPr>
-          <p:cNvPr id="244" name="" descr="{&quot;isTemplate&quot;:true,&quot;type&quot;:&quot;text&quot;}"/>
+          <p:cNvPr id="277" name="" descr="{&quot;isTemplate&quot;:true,&quot;type&quot;:&quot;text&quot;}"/>
           <p:cNvSpPr txBox="1"/>
           <p:nvPr/>
         </p:nvSpPr>
@@ -11962,7 +13285,7 @@
       </p:sp>
       <p:sp>
         <p:nvSpPr>
-          <p:cNvPr id="245" name=""/>
+          <p:cNvPr id="278" name=""/>
           <p:cNvSpPr/>
           <p:nvPr/>
         </p:nvSpPr>
@@ -11986,7 +13309,7 @@
       </p:sp>
       <p:sp>
         <p:nvSpPr>
-          <p:cNvPr id="246" name=""/>
+          <p:cNvPr id="279" name=""/>
           <p:cNvSpPr/>
           <p:nvPr/>
         </p:nvSpPr>
@@ -12026,7 +13349,7 @@
       </p:sp>
       <p:sp>
         <p:nvSpPr>
-          <p:cNvPr id="247" name="" descr="{&quot;isTemplate&quot;:true,&quot;type&quot;:&quot;text&quot;}"/>
+          <p:cNvPr id="280" name="" descr="{&quot;isTemplate&quot;:true,&quot;type&quot;:&quot;text&quot;}"/>
           <p:cNvSpPr txBox="1"/>
           <p:nvPr/>
         </p:nvSpPr>
@@ -12061,7 +13384,7 @@
       </p:sp>
       <p:sp>
         <p:nvSpPr>
-          <p:cNvPr id="248" name="" descr="{&quot;isTemplate&quot;:true,&quot;type&quot;:&quot;text&quot;}"/>
+          <p:cNvPr id="281" name="" descr="{&quot;isTemplate&quot;:true,&quot;type&quot;:&quot;text&quot;}"/>
           <p:cNvSpPr txBox="1"/>
           <p:nvPr/>
         </p:nvSpPr>
@@ -12148,7 +13471,7 @@
       </p:sp>
       <p:sp>
         <p:nvSpPr>
-          <p:cNvPr id="249" name=""/>
+          <p:cNvPr id="282" name=""/>
           <p:cNvSpPr/>
           <p:nvPr/>
         </p:nvSpPr>
@@ -12172,7 +13495,7 @@
       </p:sp>
       <p:sp>
         <p:nvSpPr>
-          <p:cNvPr id="250" name=""/>
+          <p:cNvPr id="283" name=""/>
           <p:cNvSpPr/>
           <p:nvPr/>
         </p:nvSpPr>
@@ -12212,7 +13535,7 @@
       </p:sp>
       <p:sp>
         <p:nvSpPr>
-          <p:cNvPr id="251" name="" descr="{&quot;isTemplate&quot;:true,&quot;type&quot;:&quot;text&quot;}"/>
+          <p:cNvPr id="284" name="" descr="{&quot;isTemplate&quot;:true,&quot;type&quot;:&quot;text&quot;}"/>
           <p:cNvSpPr txBox="1"/>
           <p:nvPr/>
         </p:nvSpPr>
@@ -12247,7 +13570,7 @@
       </p:sp>
       <p:sp>
         <p:nvSpPr>
-          <p:cNvPr id="252" name="" descr="{&quot;isTemplate&quot;:true,&quot;type&quot;:&quot;text&quot;}"/>
+          <p:cNvPr id="285" name="" descr="{&quot;isTemplate&quot;:true,&quot;type&quot;:&quot;text&quot;}"/>
           <p:cNvSpPr txBox="1"/>
           <p:nvPr/>
         </p:nvSpPr>
@@ -12424,7 +13747,7 @@
       </p:sp>
       <p:sp>
         <p:nvSpPr>
-          <p:cNvPr id="253" name=""/>
+          <p:cNvPr id="286" name=""/>
           <p:cNvSpPr/>
           <p:nvPr/>
         </p:nvSpPr>
@@ -12448,7 +13771,7 @@
       </p:sp>
       <p:sp>
         <p:nvSpPr>
-          <p:cNvPr id="254" name=""/>
+          <p:cNvPr id="287" name=""/>
           <p:cNvSpPr/>
           <p:nvPr/>
         </p:nvSpPr>
@@ -12488,7 +13811,7 @@
       </p:sp>
       <p:sp>
         <p:nvSpPr>
-          <p:cNvPr id="255" name="" descr="{&quot;isTemplate&quot;:true,&quot;type&quot;:&quot;text&quot;}"/>
+          <p:cNvPr id="288" name="" descr="{&quot;isTemplate&quot;:true,&quot;type&quot;:&quot;text&quot;}"/>
           <p:cNvSpPr txBox="1"/>
           <p:nvPr/>
         </p:nvSpPr>
@@ -12523,7 +13846,7 @@
       </p:sp>
       <p:sp>
         <p:nvSpPr>
-          <p:cNvPr id="256" name="" descr="{&quot;isTemplate&quot;:true,&quot;type&quot;:&quot;text&quot;}"/>
+          <p:cNvPr id="289" name="" descr="{&quot;isTemplate&quot;:true,&quot;type&quot;:&quot;text&quot;}"/>
           <p:cNvSpPr txBox="1"/>
           <p:nvPr/>
         </p:nvSpPr>
@@ -12750,7 +14073,7 @@
       </p:sp>
       <p:sp>
         <p:nvSpPr>
-          <p:cNvPr id="257" name="" descr="{&quot;isTemplate&quot;:true,&quot;type&quot;:&quot;text&quot;}"/>
+          <p:cNvPr id="290" name="" descr="{&quot;isTemplate&quot;:true,&quot;type&quot;:&quot;text&quot;}"/>
           <p:cNvSpPr txBox="1"/>
           <p:nvPr/>
         </p:nvSpPr>
@@ -12887,7 +14210,7 @@
       </p:sp>
       <p:sp>
         <p:nvSpPr>
-          <p:cNvPr id="258" name=""/>
+          <p:cNvPr id="291" name=""/>
           <p:cNvSpPr/>
           <p:nvPr/>
         </p:nvSpPr>
@@ -12918,7 +14241,7 @@
       </p:sp>
       <p:sp>
         <p:nvSpPr>
-          <p:cNvPr id="259" name=""/>
+          <p:cNvPr id="292" name=""/>
           <p:cNvSpPr/>
           <p:nvPr/>
         </p:nvSpPr>
@@ -12944,7 +14267,7 @@
       </p:sp>
       <p:sp>
         <p:nvSpPr>
-          <p:cNvPr id="260" name="" descr="{&quot;isTemplate&quot;:true,&quot;type&quot;:&quot;text&quot;}"/>
+          <p:cNvPr id="293" name="" descr="{&quot;isTemplate&quot;:true,&quot;type&quot;:&quot;text&quot;}"/>
           <p:cNvSpPr txBox="1"/>
           <p:nvPr/>
         </p:nvSpPr>
@@ -12979,7 +14302,7 @@
       </p:sp>
       <p:sp>
         <p:nvSpPr>
-          <p:cNvPr id="261" name="" descr="{&quot;isTemplate&quot;:true,&quot;type&quot;:&quot;text&quot;}"/>
+          <p:cNvPr id="294" name="" descr="{&quot;isTemplate&quot;:true,&quot;type&quot;:&quot;text&quot;}"/>
           <p:cNvSpPr txBox="1"/>
           <p:nvPr/>
         </p:nvSpPr>
@@ -13014,7 +14337,7 @@
       </p:sp>
       <p:sp>
         <p:nvSpPr>
-          <p:cNvPr id="262" name="" descr="{&quot;isTemplate&quot;:true,&quot;type&quot;:&quot;text&quot;}"/>
+          <p:cNvPr id="295" name="" descr="{&quot;isTemplate&quot;:true,&quot;type&quot;:&quot;text&quot;}"/>
           <p:cNvSpPr txBox="1"/>
           <p:nvPr/>
         </p:nvSpPr>
@@ -13131,7 +14454,7 @@
       </p:sp>
       <p:sp>
         <p:nvSpPr>
-          <p:cNvPr id="263" name="" descr="{&quot;isTemplate&quot;:true,&quot;type&quot;:&quot;text&quot;}"/>
+          <p:cNvPr id="296" name="" descr="{&quot;isTemplate&quot;:true,&quot;type&quot;:&quot;text&quot;}"/>
           <p:cNvSpPr txBox="1"/>
           <p:nvPr/>
         </p:nvSpPr>
@@ -13196,7 +14519,7 @@
       </p:sp>
       <p:sp>
         <p:nvSpPr>
-          <p:cNvPr id="264" name=""/>
+          <p:cNvPr id="297" name=""/>
           <p:cNvSpPr/>
           <p:nvPr/>
         </p:nvSpPr>
@@ -13227,7 +14550,7 @@
       </p:sp>
       <p:sp>
         <p:nvSpPr>
-          <p:cNvPr id="265" name=""/>
+          <p:cNvPr id="298" name=""/>
           <p:cNvSpPr/>
           <p:nvPr/>
         </p:nvSpPr>
@@ -13253,7 +14576,7 @@
       </p:sp>
       <p:sp>
         <p:nvSpPr>
-          <p:cNvPr id="266" name="" descr="{&quot;isTemplate&quot;:true,&quot;type&quot;:&quot;text&quot;}"/>
+          <p:cNvPr id="299" name="" descr="{&quot;isTemplate&quot;:true,&quot;type&quot;:&quot;text&quot;}"/>
           <p:cNvSpPr txBox="1"/>
           <p:nvPr/>
         </p:nvSpPr>
@@ -13288,7 +14611,7 @@
       </p:sp>
       <p:sp>
         <p:nvSpPr>
-          <p:cNvPr id="267" name="" descr="{&quot;isTemplate&quot;:true,&quot;type&quot;:&quot;text&quot;}"/>
+          <p:cNvPr id="300" name="" descr="{&quot;isTemplate&quot;:true,&quot;type&quot;:&quot;text&quot;}"/>
           <p:cNvSpPr txBox="1"/>
           <p:nvPr/>
         </p:nvSpPr>
@@ -13333,7 +14656,7 @@
       </p:sp>
       <p:sp>
         <p:nvSpPr>
-          <p:cNvPr id="268" name="" descr="{&quot;isTemplate&quot;:true,&quot;type&quot;:&quot;text&quot;}"/>
+          <p:cNvPr id="301" name="" descr="{&quot;isTemplate&quot;:true,&quot;type&quot;:&quot;text&quot;}"/>
           <p:cNvSpPr txBox="1"/>
           <p:nvPr/>
         </p:nvSpPr>
@@ -13430,7 +14753,7 @@
       </p:sp>
       <p:sp>
         <p:nvSpPr>
-          <p:cNvPr id="269" name="" descr="{&quot;isTemplate&quot;:true,&quot;type&quot;:&quot;text&quot;}"/>
+          <p:cNvPr id="302" name="" descr="{&quot;isTemplate&quot;:true,&quot;type&quot;:&quot;text&quot;}"/>
           <p:cNvSpPr txBox="1"/>
           <p:nvPr/>
         </p:nvSpPr>
@@ -13505,7 +14828,7 @@
       </p:sp>
       <p:sp>
         <p:nvSpPr>
-          <p:cNvPr id="270" name=""/>
+          <p:cNvPr id="303" name=""/>
           <p:cNvSpPr/>
           <p:nvPr/>
         </p:nvSpPr>
@@ -13536,7 +14859,7 @@
       </p:sp>
       <p:sp>
         <p:nvSpPr>
-          <p:cNvPr id="271" name=""/>
+          <p:cNvPr id="304" name=""/>
           <p:cNvSpPr/>
           <p:nvPr/>
         </p:nvSpPr>
@@ -13562,7 +14885,7 @@
       </p:sp>
       <p:sp>
         <p:nvSpPr>
-          <p:cNvPr id="272" name="" descr="{&quot;isTemplate&quot;:true,&quot;type&quot;:&quot;text&quot;}"/>
+          <p:cNvPr id="305" name="" descr="{&quot;isTemplate&quot;:true,&quot;type&quot;:&quot;text&quot;}"/>
           <p:cNvSpPr txBox="1"/>
           <p:nvPr/>
         </p:nvSpPr>
@@ -13597,7 +14920,7 @@
       </p:sp>
       <p:sp>
         <p:nvSpPr>
-          <p:cNvPr id="273" name="" descr="{&quot;isTemplate&quot;:true,&quot;type&quot;:&quot;text&quot;}"/>
+          <p:cNvPr id="306" name="" descr="{&quot;isTemplate&quot;:true,&quot;type&quot;:&quot;text&quot;}"/>
           <p:cNvSpPr txBox="1"/>
           <p:nvPr/>
         </p:nvSpPr>
@@ -13632,7 +14955,7 @@
       </p:sp>
       <p:sp>
         <p:nvSpPr>
-          <p:cNvPr id="274" name="" descr="{&quot;isTemplate&quot;:true,&quot;type&quot;:&quot;text&quot;}"/>
+          <p:cNvPr id="307" name="" descr="{&quot;isTemplate&quot;:true,&quot;type&quot;:&quot;text&quot;}"/>
           <p:cNvSpPr txBox="1"/>
           <p:nvPr/>
         </p:nvSpPr>
@@ -13729,7 +15052,7 @@
       </p:sp>
       <p:sp>
         <p:nvSpPr>
-          <p:cNvPr id="275" name="" descr="{&quot;isTemplate&quot;:true,&quot;type&quot;:&quot;text&quot;}"/>
+          <p:cNvPr id="308" name="" descr="{&quot;isTemplate&quot;:true,&quot;type&quot;:&quot;text&quot;}"/>
           <p:cNvSpPr txBox="1"/>
           <p:nvPr/>
         </p:nvSpPr>
@@ -13794,7 +15117,7 @@
       </p:sp>
       <p:sp>
         <p:nvSpPr>
-          <p:cNvPr id="276" name=""/>
+          <p:cNvPr id="309" name=""/>
           <p:cNvSpPr/>
           <p:nvPr/>
         </p:nvSpPr>
@@ -13825,7 +15148,7 @@
       </p:sp>
       <p:sp>
         <p:nvSpPr>
-          <p:cNvPr id="277" name=""/>
+          <p:cNvPr id="310" name=""/>
           <p:cNvSpPr/>
           <p:nvPr/>
         </p:nvSpPr>
@@ -13851,7 +15174,7 @@
       </p:sp>
       <p:sp>
         <p:nvSpPr>
-          <p:cNvPr id="278" name="" descr="{&quot;isTemplate&quot;:true,&quot;type&quot;:&quot;text&quot;}"/>
+          <p:cNvPr id="311" name="" descr="{&quot;isTemplate&quot;:true,&quot;type&quot;:&quot;text&quot;}"/>
           <p:cNvSpPr txBox="1"/>
           <p:nvPr/>
         </p:nvSpPr>
@@ -13886,7 +15209,7 @@
       </p:sp>
       <p:sp>
         <p:nvSpPr>
-          <p:cNvPr id="279" name="" descr="{&quot;isTemplate&quot;:true,&quot;type&quot;:&quot;text&quot;}"/>
+          <p:cNvPr id="312" name="" descr="{&quot;isTemplate&quot;:true,&quot;type&quot;:&quot;text&quot;}"/>
           <p:cNvSpPr txBox="1"/>
           <p:nvPr/>
         </p:nvSpPr>
@@ -13921,7 +15244,7 @@
       </p:sp>
       <p:sp>
         <p:nvSpPr>
-          <p:cNvPr id="280" name="" descr="{&quot;isTemplate&quot;:true,&quot;type&quot;:&quot;text&quot;}"/>
+          <p:cNvPr id="313" name="" descr="{&quot;isTemplate&quot;:true,&quot;type&quot;:&quot;text&quot;}"/>
           <p:cNvSpPr txBox="1"/>
           <p:nvPr/>
         </p:nvSpPr>
@@ -14038,7 +15361,7 @@
       </p:sp>
       <p:sp>
         <p:nvSpPr>
-          <p:cNvPr id="281" name="" descr="{&quot;isTemplate&quot;:true,&quot;type&quot;:&quot;text&quot;}"/>
+          <p:cNvPr id="314" name="" descr="{&quot;isTemplate&quot;:true,&quot;type&quot;:&quot;text&quot;}"/>
           <p:cNvSpPr txBox="1"/>
           <p:nvPr/>
         </p:nvSpPr>
@@ -14103,7 +15426,7 @@
       </p:sp>
       <p:sp>
         <p:nvSpPr>
-          <p:cNvPr id="282" name=""/>
+          <p:cNvPr id="315" name=""/>
           <p:cNvSpPr/>
           <p:nvPr/>
         </p:nvSpPr>
@@ -14134,7 +15457,7 @@
       </p:sp>
       <p:sp>
         <p:nvSpPr>
-          <p:cNvPr id="283" name="" descr="{&quot;isTemplate&quot;:true,&quot;type&quot;:&quot;text&quot;}"/>
+          <p:cNvPr id="316" name="" descr="{&quot;isTemplate&quot;:true,&quot;type&quot;:&quot;text&quot;}"/>
           <p:cNvSpPr txBox="1"/>
           <p:nvPr/>
         </p:nvSpPr>
@@ -14261,7 +15584,7 @@
       </p:sp>
       <p:sp>
         <p:nvSpPr>
-          <p:cNvPr id="284" name=""/>
+          <p:cNvPr id="317" name=""/>
           <p:cNvSpPr/>
           <p:nvPr/>
         </p:nvSpPr>
@@ -14287,7 +15610,7 @@
       </p:sp>
       <p:sp>
         <p:nvSpPr>
-          <p:cNvPr id="285" name="" descr="{&quot;isTemplate&quot;:true,&quot;type&quot;:&quot;text&quot;}"/>
+          <p:cNvPr id="318" name="" descr="{&quot;isTemplate&quot;:true,&quot;type&quot;:&quot;text&quot;}"/>
           <p:cNvSpPr txBox="1"/>
           <p:nvPr/>
         </p:nvSpPr>
@@ -14442,7 +15765,7 @@
       </p:sp>
       <p:sp>
         <p:nvSpPr>
-          <p:cNvPr id="286" name="" descr="{&quot;isTemplate&quot;:true,&quot;type&quot;:&quot;text&quot;}"/>
+          <p:cNvPr id="319" name="" descr="{&quot;isTemplate&quot;:true,&quot;type&quot;:&quot;text&quot;}"/>
           <p:cNvSpPr txBox="1"/>
           <p:nvPr/>
         </p:nvSpPr>
@@ -14525,7 +15848,7 @@
   <p:cSld>
     <p:spTree>
       <p:nvGrpSpPr>
-        <p:cNvPr id="287" name="" descr="&lt;Slide style={{ width: '1280px', height: '720px', backgroundColor: '#FFFFFF', padding: '0px', flexDirection: 'column' }}&gt;&#13;&#10;    &lt;Box style={{ width: '1280px', height: '8px', backgroundColor: '#1E4FA8' }} /&gt;&#13;&#10;    &lt;Box style={{ padding: '24px 40px 0px 40px', flexDirection: 'row', justifyContent: 'space-between', alignItems: 'flex-end' }}&gt;&#13;&#10;        &lt;Text style={{ fontSize: 33, fontWeight: 'bold', color: '#1E4FA8' }}&gt;方法总览：一帧进来，走完七步&lt;/Text&gt;&#13;&#10;        &lt;Text style={{ fontSize: 15, color: '#8B97A8' }}&gt;04 / 15&lt;/Text&gt;&#13;&#10;    &lt;/Box&gt;&#13;&#10;    &lt;Box style={{ padding: '8px 40px 0px 40px' }}&gt;&#13;&#10;        &lt;Text style={{ fontSize: 20, color: '#4A5568', lineHeight: 1.4 }}&gt;设计哲学一句话：&lt;b&gt;每帧做小事，偶尔做一次大事&lt;/b&gt;。前者保证实时，后者保证不漂；每一步都对应上一页的一个病症。&lt;/Text&gt;&#13;&#10;    &lt;/Box&gt;&#13;&#10;&#13;&#10;    &lt;Box style={{ padding: '16px 40px 0px 40px', flexDirection: 'row', gap: 10 }}&gt;&#13;&#10;        &lt;Box style={{ flex: 1, backgroundColor: '#F0F5FC', borderRadius: 6, padding: '13px 11px', flexDirection: 'column' }}&gt;&#13;&#10;            &lt;Text style={{ fontSize: 29, fontWeight: 'bold', color: '#1E4FA8' }}&gt;①&lt;/Text&gt;&#13;&#10;            &lt;Text style={{ fontSize: 20, fontWeight: 'bold', color: '#1A2230', marginTop: 3 }}&gt;全局检索&lt;/Text&gt;&#13;&#10;            &lt;Text style={{ fontSize: 16.5, color: '#1A2230', lineHeight: 1.45, marginTop: 6 }}&gt;全局描述子算余弦，取 top-20 候选&lt;/Text&gt;&#13;&#10;            &lt;Text style={{ fontSize: 15.5, color: '#1D5FC0', fontWeight: 'bold', marginTop: 10 }}&gt;治“乱”&lt;/Text&gt;&#13;&#10;        &lt;/Box&gt;&#13;&#10;        &lt;Box style={{ flex: 1, backgroundColor: '#F0F5FC', borderRadius: 6, padding: '13px 11px', flexDirection: 'column' }}&gt;&#13;&#10;            &lt;Text style={{ fontSize: 29, fontWeight: 'bold', color: '#1E4FA8' }}&gt;②&lt;/Text&gt;&#13;&#10;            &lt;Text style={{ fontSize: 20, fontWeight: 'bold', color: '#1A2230', marginTop: 3 }}&gt;局部粗筛&lt;/Text&gt;&#13;&#10;            &lt;Text style={{ fontSize: 16.5, color: '#1A2230', lineHeight: 1.45, marginTop: 6 }}&gt;XFeat 比内点数，20 → 5&lt;/Text&gt;&#13;&#10;            &lt;Text style={{ fontSize: 15.5, color: '#1D5FC0', fontWeight: 'bold', marginTop: 10 }}&gt;治“乱”&lt;/Text&gt;&#13;&#10;        &lt;/Box&gt;&#13;&#10;        &lt;Box style={{ flex: 1, backgroundColor: '#F0F5FC', borderRadius: 6, padding: '13px 11px', flexDirection: 'column' }}&gt;&#13;&#10;            &lt;Text style={{ fontSize: 29, fontWeight: 'bold', color: '#1E4FA8' }}&gt;③&lt;/Text&gt;&#13;&#10;            &lt;Text style={{ fontSize: 20, fontWeight: 'bold', color: '#1A2230', marginTop: 3 }}&gt;精验建边&lt;/Text&gt;&#13;&#10;            &lt;Text style={{ fontSize: 16.5, color: '#1A2230', lineHeight: 1.45, marginTop: 6 }}&gt;LightGlue ＋ RANSAC，内点 &amp;gt; 500 才建边&lt;/Text&gt;&#13;&#10;            &lt;Text style={{ fontSize: 15.5, color: '#1D5FC0', fontWeight: 'bold', marginTop: 10 }}&gt;治“乱”&lt;/Text&gt;&#13;&#10;        &lt;/Box&gt;&#13;&#10;        &lt;Box style={{ flex: 1, backgroundColor: '#F7F9FC', borderRadius: 6, padding: '13px 11px', flexDirection: 'column' }}&gt;&#13;&#10;            &lt;Text style={{ fontSize: 29, fontWeight: 'bold', color: '#1E4FA8' }}&gt;④&lt;/Text&gt;&#13;&#10;            &lt;Text style={{ fontSize: 20, fontWeight: 'bold', color: '#1A2230', marginTop: 3 }}&gt;贪心选窗&lt;/Text&gt;&#13;&#10;            &lt;Text style={{ fontSize: 16.5, color: '#1A2230', lineHeight: 1.45, marginTop: 6 }}&gt;式 1 贪心扩张到 N = 20 帧&lt;/Text&gt;&#13;&#10;            &lt;Text style={{ fontSize: 15.5, color: '#1D5FC0', fontWeight: 'bold', marginTop: 10 }}&gt;定变量范围&lt;/Text&gt;&#13;&#10;        &lt;/Box&gt;&#13;&#10;        &lt;Box style={{ flex: 1, backgroundColor: '#1E4FA8', borderRadius: 6, padding: '13px 11px', flexDirection: 'column' }}&gt;&#13;&#10;            &lt;Text style={{ fontSize: 29, fontWeight: 'bold', color: '#FFFFFF' }}&gt;⑤&lt;/Text&gt;&#13;&#10;            &lt;Text style={{ fontSize: 20, fontWeight: 'bold', color: '#FFFFFF', marginTop: 3 }}&gt;局部 BA&lt;/Text&gt;&#13;&#10;            &lt;Text style={{ fontSize: 16.5, color: '#D6E4F7', lineHeight: 1.45, marginTop: 6 }}&gt;LM ＋ Schur 补，解出位姿与三维点&lt;/Text&gt;&#13;&#10;            &lt;Text style={{ fontSize: 15.5, color: '#FFFFFF', fontWeight: 'bold', marginTop: 10 }}&gt;重建本体&lt;/Text&gt;&#13;&#10;        &lt;/Box&gt;&#13;&#10;        &lt;Box style={{ flex: 1, backgroundColor: '#F7F9FC', borderRadius: 6, padding: '13px 11px', flexDirection: 'column' }}&gt;&#13;&#10;            &lt;Text style={{ fontSize: 29, fontWeight: 'bold', color: '#1E4FA8' }}&gt;⑥&lt;/Text&gt;&#13;&#10;            &lt;Text style={{ fontSize: 20, fontWeight: 'bold', color: '#1A2230', marginTop: 3 }}&gt;回环修正&lt;/Text&gt;&#13;&#10;            &lt;Text style={{ fontSize: 16.5, color: '#1A2230', lineHeight: 1.45, marginTop: 6 }}&gt;图距 &amp;gt; 10 触发，Sim(3) 沿主干摊开&lt;/Text&gt;&#13;&#10;            &lt;Text style={{ fontSize: 15.5, color: '#D9534F', fontWeight: 'bold', marginTop: 10 }}&gt;治“漂”&lt;/Text&gt;&#13;&#10;        &lt;/Box&gt;&#13;&#10;        &lt;Box style={{ flex: 1, backgroundColor: '#F7F9FC', borderRadius: 6, padding: '13px 11px', flexDirection: 'column' }}&gt;&#13;&#10;            &lt;Text style={{ fontSize: 29, fontWeight: 'bold', color: '#1E4FA8' }}&gt;⑦&lt;/Text&gt;&#13;&#10;            &lt;Text style={{ fontSize: 20, fontWeight: 'bold', color: '#1A2230', marginTop: 3 }}&gt;高斯落位&lt;/Text&gt;&#13;&#10;            &lt;Text style={{ fontSize: 16.5, color: '#1A2230', lineHeight: 1.45, marginTop: 6 }}&gt;分块深度对齐 ＋ 层级按屏幕尺寸合并&lt;/Text&gt;&#13;&#10;            &lt;Text style={{ fontSize: 15.5, color: '#1D5FC0', fontWeight: 'bold', marginTop: 10 }}&gt;治“爆”&lt;/Text&gt;&#13;&#10;        &lt;/Box&gt;&#13;&#10;    &lt;/Box&gt;&#13;&#10;&#13;&#10;    &lt;Box style={{ padding: '20px 40px 0px 40px', flexDirection: 'column' }}&gt;&#13;&#10;        &lt;Text style={{ fontSize: 20, color: '#1A2230', lineHeight: 1.5 }}&gt;数据流：&lt;b&gt;关键帧图像&lt;/b&gt;　→　&lt;b&gt;加权协视图 G&lt;/b&gt;　→　&lt;b&gt;位姿 T_i / 三维点 X_j&lt;/b&gt;　→　&lt;b&gt;高斯集合&lt;/b&gt;　→　&lt;b&gt;渐进层级&lt;/b&gt;&lt;/Text&gt;&#13;&#10;        &lt;Text style={{ fontSize: 17, color: '#4A5568', lineHeight: 1.4, marginTop: 4 }}&gt;前三步只产出“约束”，第四五步只产出“位姿”，第六步修位姿，第七步才碰辐射场。&lt;/Text&gt;&#13;&#10;    &lt;/Box&gt;&#13;&#10;&#13;&#10;    &lt;Box style={{ padding: '16px 40px 0px 40px', flexDirection: 'row', gap: 10, alignItems: 'center' }}&gt;&#13;&#10;        &lt;Box style={{ backgroundColor: '#1E4FA8', borderRadius: 4, padding: '6px 12px' }}&gt;&#13;&#10;            &lt;Text style={{ fontSize: 16, fontWeight: 'bold', color: '#FFFFFF' }}&gt;时间账&lt;/Text&gt;&#13;&#10;        &lt;/Box&gt;&#13;&#10;        &lt;Text style={{ fontSize: 17.5, color: '#1A2230', lineHeight: 1.4 }}&gt;视觉前端 &lt;b&gt;27.8 ms&lt;/b&gt;　·　局部 BA &lt;b&gt;40.5 ms&lt;/b&gt;　·　回环摊销 &lt;b&gt;121.6 ms&lt;/b&gt;（仅绕回起点时）　·　渲染 &lt;b&gt;480 fps&lt;/b&gt;&lt;/Text&gt;&#13;&#10;    &lt;/Box&gt;&#13;&#10;    &lt;Box style={{ padding: '4px 40px 0px 40px' }}&gt;&#13;&#10;        &lt;Text style={{ fontSize: 15.5, color: '#8B97A8' }}&gt;以上为论文单关键帧摊销实测；②③ 的候选数已压到 20 / 5，所以前端不是瓶颈——瓶颈是一次回环后的全局修正。&lt;/Text&gt;&#13;&#10;    &lt;/Box&gt;&#13;&#10;&#13;&#10;    &lt;Box style={{ padding: '16px 40px 0px 40px', flexDirection: 'column', gap: 8 }}&gt;&#13;&#10;        &lt;Box style={{ backgroundColor: '#F7F9FC', borderLeft: '5px solid #1E4FA8', padding: '9px 16px' }}&gt;&#13;&#10;            &lt;Text style={{ fontSize: 17.5, color: '#1A2230', lineHeight: 1.4 }}&gt;&lt;b&gt;节奏&lt;/b&gt;　①–⑤ 与 ⑦ 每个关键帧都跑；&lt;b&gt;⑥ 只在检测到回环时跑&lt;/b&gt;——“每帧做小事、偶尔做一次大事”的具体分工。&lt;/Text&gt;&#13;&#10;        &lt;/Box&gt;&#13;&#10;        &lt;Box style={{ backgroundColor: '#F7F9FC', borderLeft: '5px solid #D6DCE5', padding: '9px 16px' }}&gt;&#13;&#10;            &lt;Text style={{ fontSize: 17.5, color: '#1A2230', lineHeight: 1.4 }}&gt;&lt;b&gt;容错&lt;/b&gt;　匹配失败的帧先“搁置”，后续出现相似帧时再取出重试——乱序输入因此不必强求一次成功。&lt;/Text&gt;&#13;&#10;        &lt;/Box&gt;&#13;&#10;    &lt;/Box&gt;&#13;&#10;&#13;&#10;    &lt;Box style={{ marginTop: 'auto', padding: '6px 40px 12px 40px' }}&gt;&#13;&#10;        &lt;Text style={{ fontSize: 15, color: '#8B97A8' }}&gt;接下来七页，一步一页：每页都是「这步在做什么 → 长什么样 → 核心公式 → 超参取值 → 为什么这么做」。&lt;/Text&gt;&#13;&#10;    &lt;/Box&gt;&#13;&#10;&lt;/Slide&gt;&#13;&#10;"/>
+        <p:cNvPr id="320" name="" descr="&lt;Slide style={{ width: '1280px', height: '720px', backgroundColor: '#FFFFFF', padding: '0px', flexDirection: 'column' }}&gt;&#13;&#10;    &lt;Box style={{ width: '1280px', height: '8px', backgroundColor: '#1E4FA8' }} /&gt;&#13;&#10;    &lt;Box style={{ padding: '24px 40px 0px 40px', flexDirection: 'row', justifyContent: 'space-between', alignItems: 'flex-end' }}&gt;&#13;&#10;        &lt;Text style={{ fontSize: 33, fontWeight: 'bold', color: '#1E4FA8' }}&gt;方法总览：一帧进来，走完七步&lt;/Text&gt;&#13;&#10;        &lt;Text style={{ fontSize: 15, color: '#8B97A8' }}&gt;04 / 15&lt;/Text&gt;&#13;&#10;    &lt;/Box&gt;&#13;&#10;    &lt;Box style={{ padding: '8px 40px 0px 40px' }}&gt;&#13;&#10;        &lt;Text style={{ fontSize: 20, color: '#4A5568', lineHeight: 1.4 }}&gt;设计哲学一句话：&lt;b&gt;每帧做小事，偶尔做一次大事&lt;/b&gt;。前者保证实时，后者保证不漂；每一步都对应上一页的一个病症。&lt;/Text&gt;&#13;&#10;    &lt;/Box&gt;&#13;&#10;&#13;&#10;    &lt;Box style={{ padding: '16px 40px 0px 40px', flexDirection: 'row', gap: 10 }}&gt;&#13;&#10;        &lt;Box style={{ flex: 1, backgroundColor: '#F0F5FC', borderRadius: 6, padding: '13px 11px', flexDirection: 'column' }}&gt;&#13;&#10;            &lt;Text style={{ fontSize: 29, fontWeight: 'bold', color: '#1E4FA8' }}&gt;①&lt;/Text&gt;&#13;&#10;            &lt;Text style={{ fontSize: 20, fontWeight: 'bold', color: '#1A2230', marginTop: 3 }}&gt;全局检索&lt;/Text&gt;&#13;&#10;            &lt;Text style={{ fontSize: 16.5, color: '#1A2230', lineHeight: 1.45, marginTop: 6 }}&gt;全局描述子算余弦，取 top-20 候选&lt;/Text&gt;&#13;&#10;            &lt;Text style={{ fontSize: 15.5, color: '#1D5FC0', fontWeight: 'bold', marginTop: 10 }}&gt;治“乱”&lt;/Text&gt;&#13;&#10;        &lt;/Box&gt;&#13;&#10;        &lt;Box style={{ flex: 1, backgroundColor: '#F0F5FC', borderRadius: 6, padding: '13px 11px', flexDirection: 'column' }}&gt;&#13;&#10;            &lt;Text style={{ fontSize: 29, fontWeight: 'bold', color: '#1E4FA8' }}&gt;②&lt;/Text&gt;&#13;&#10;            &lt;Text style={{ fontSize: 20, fontWeight: 'bold', color: '#1A2230', marginTop: 3 }}&gt;局部粗筛&lt;/Text&gt;&#13;&#10;            &lt;Text style={{ fontSize: 16.5, color: '#1A2230', lineHeight: 1.45, marginTop: 6 }}&gt;XFeat 比内点数，20 → 5&lt;/Text&gt;&#13;&#10;            &lt;Text style={{ fontSize: 15.5, color: '#1D5FC0', fontWeight: 'bold', marginTop: 10 }}&gt;治“乱”&lt;/Text&gt;&#13;&#10;        &lt;/Box&gt;&#13;&#10;        &lt;Box style={{ flex: 1, backgroundColor: '#F0F5FC', borderRadius: 6, padding: '13px 11px', flexDirection: 'column' }}&gt;&#13;&#10;            &lt;Text style={{ fontSize: 29, fontWeight: 'bold', color: '#1E4FA8' }}&gt;③&lt;/Text&gt;&#13;&#10;            &lt;Text style={{ fontSize: 20, fontWeight: 'bold', color: '#1A2230', marginTop: 3 }}&gt;精验建边&lt;/Text&gt;&#13;&#10;            &lt;Text style={{ fontSize: 16.5, color: '#1A2230', lineHeight: 1.45, marginTop: 6 }}&gt;LightGlue ＋ RANSAC，内点 &amp;gt; 500 才建边&lt;/Text&gt;&#13;&#10;            &lt;Text style={{ fontSize: 15.5, color: '#1D5FC0', fontWeight: 'bold', marginTop: 10 }}&gt;治“乱”&lt;/Text&gt;&#13;&#10;        &lt;/Box&gt;&#13;&#10;        &lt;Box style={{ flex: 1, backgroundColor: '#F7F9FC', borderRadius: 6, padding: '13px 11px', flexDirection: 'column' }}&gt;&#13;&#10;            &lt;Text style={{ fontSize: 29, fontWeight: 'bold', color: '#1E4FA8' }}&gt;④&lt;/Text&gt;&#13;&#10;            &lt;Text style={{ fontSize: 20, fontWeight: 'bold', color: '#1A2230', marginTop: 3 }}&gt;贪心选窗&lt;/Text&gt;&#13;&#10;            &lt;Text style={{ fontSize: 16.5, color: '#1A2230', lineHeight: 1.45, marginTop: 6 }}&gt;式 1 贪心扩张到 N = 20 帧&lt;/Text&gt;&#13;&#10;            &lt;Text style={{ fontSize: 15.5, color: '#1D5FC0', fontWeight: 'bold', marginTop: 10 }}&gt;定变量范围&lt;/Text&gt;&#13;&#10;        &lt;/Box&gt;&#13;&#10;        &lt;Box style={{ flex: 1, backgroundColor: '#1E4FA8', borderRadius: 6, padding: '13px 11px', flexDirection: 'column' }}&gt;&#13;&#10;            &lt;Text style={{ fontSize: 29, fontWeight: 'bold', color: '#FFFFFF' }}&gt;⑤&lt;/Text&gt;&#13;&#10;            &lt;Text style={{ fontSize: 20, fontWeight: 'bold', color: '#FFFFFF', marginTop: 3 }}&gt;局部 BA&lt;/Text&gt;&#13;&#10;            &lt;Text style={{ fontSize: 16.5, color: '#D6E4F7', lineHeight: 1.45, marginTop: 6 }}&gt;LM ＋ Schur 补，解出位姿与三维点&lt;/Text&gt;&#13;&#10;            &lt;Text style={{ fontSize: 15.5, color: '#FFFFFF', fontWeight: 'bold', marginTop: 10 }}&gt;重建本体&lt;/Text&gt;&#13;&#10;        &lt;/Box&gt;&#13;&#10;        &lt;Box style={{ flex: 1, backgroundColor: '#F7F9FC', borderRadius: 6, padding: '13px 11px', flexDirection: 'column' }}&gt;&#13;&#10;            &lt;Text style={{ fontSize: 29, fontWeight: 'bold', color: '#1E4FA8' }}&gt;⑥&lt;/Text&gt;&#13;&#10;            &lt;Text style={{ fontSize: 20, fontWeight: 'bold', color: '#1A2230', marginTop: 3 }}&gt;回环修正&lt;/Text&gt;&#13;&#10;            &lt;Text style={{ fontSize: 16.5, color: '#1A2230', lineHeight: 1.45, marginTop: 6 }}&gt;图距 &amp;gt; 10 触发，Sim(3) 沿主干摊开&lt;/Text&gt;&#13;&#10;            &lt;Text style={{ fontSize: 15.5, color: '#D9534F', fontWeight: 'bold', marginTop: 10 }}&gt;治“漂”&lt;/Text&gt;&#13;&#10;        &lt;/Box&gt;&#13;&#10;        &lt;Box style={{ flex: 1, backgroundColor: '#F7F9FC', borderRadius: 6, padding: '13px 11px', flexDirection: 'column' }}&gt;&#13;&#10;            &lt;Text style={{ fontSize: 29, fontWeight: 'bold', color: '#1E4FA8' }}&gt;⑦&lt;/Text&gt;&#13;&#10;            &lt;Text style={{ fontSize: 20, fontWeight: 'bold', color: '#1A2230', marginTop: 3 }}&gt;高斯落位&lt;/Text&gt;&#13;&#10;            &lt;Text style={{ fontSize: 16.5, color: '#1A2230', lineHeight: 1.45, marginTop: 6 }}&gt;分块深度对齐 ＋ 层级按屏幕尺寸合并&lt;/Text&gt;&#13;&#10;            &lt;Text style={{ fontSize: 15.5, color: '#1D5FC0', fontWeight: 'bold', marginTop: 10 }}&gt;治“爆”&lt;/Text&gt;&#13;&#10;        &lt;/Box&gt;&#13;&#10;    &lt;/Box&gt;&#13;&#10;&#13;&#10;    &lt;Box style={{ padding: '20px 40px 0px 40px', flexDirection: 'column' }}&gt;&#13;&#10;        &lt;Text style={{ fontSize: 20, color: '#1A2230', lineHeight: 1.5 }}&gt;数据流：&lt;b&gt;关键帧图像&lt;/b&gt;　→　&lt;b&gt;加权协视图 G&lt;/b&gt;　→　&lt;b&gt;位姿 T_i / 三维点 X_j&lt;/b&gt;　→　&lt;b&gt;高斯集合&lt;/b&gt;　→　&lt;b&gt;渐进层级&lt;/b&gt;&lt;/Text&gt;&#13;&#10;        &lt;Text style={{ fontSize: 17, color: '#4A5568', lineHeight: 1.4, marginTop: 4 }}&gt;前三步只产出“约束”，第四五步只产出“位姿”，第六步修位姿，第七步才碰辐射场。&lt;/Text&gt;&#13;&#10;    &lt;/Box&gt;&#13;&#10;&#13;&#10;    &lt;Box style={{ padding: '16px 40px 0px 40px', flexDirection: 'row', gap: 10, alignItems: 'center' }}&gt;&#13;&#10;        &lt;Box style={{ backgroundColor: '#1E4FA8', borderRadius: 4, padding: '6px 12px' }}&gt;&#13;&#10;            &lt;Text style={{ fontSize: 16, fontWeight: 'bold', color: '#FFFFFF' }}&gt;时间账&lt;/Text&gt;&#13;&#10;        &lt;/Box&gt;&#13;&#10;        &lt;Text style={{ fontSize: 17.5, color: '#1A2230', lineHeight: 1.4 }}&gt;视觉前端 &lt;b&gt;27.8 ms&lt;/b&gt;　·　局部 BA &lt;b&gt;40.5 ms&lt;/b&gt;　·　回环摊销 &lt;b&gt;121.6 ms&lt;/b&gt;（仅绕回起点时）　·　渲染 &lt;b&gt;480 fps&lt;/b&gt;&lt;/Text&gt;&#13;&#10;    &lt;/Box&gt;&#13;&#10;    &lt;Box style={{ padding: '4px 40px 0px 40px' }}&gt;&#13;&#10;        &lt;Text style={{ fontSize: 15.5, color: '#8B97A8' }}&gt;以上为论文单关键帧摊销实测；②③ 的候选数已压到 20 / 5，所以前端不是瓶颈——瓶颈是一次回环后的全局修正。&lt;/Text&gt;&#13;&#10;    &lt;/Box&gt;&#13;&#10;&#13;&#10;    &lt;Box style={{ padding: '16px 40px 0px 40px', flexDirection: 'column', gap: 8 }}&gt;&#13;&#10;        &lt;Box style={{ backgroundColor: '#F7F9FC', borderLeft: '5px solid #1E4FA8', padding: '9px 16px' }}&gt;&#13;&#10;            &lt;Text style={{ fontSize: 17.5, color: '#1A2230', lineHeight: 1.4 }}&gt;&lt;b&gt;节奏&lt;/b&gt;　①–⑤ 与 ⑦ 每个关键帧都跑；&lt;b&gt;⑥ 只在检测到回环时跑&lt;/b&gt;——“每帧做小事、偶尔做一次大事”的具体分工。&lt;/Text&gt;&#13;&#10;        &lt;/Box&gt;&#13;&#10;        &lt;Box style={{ backgroundColor: '#F7F9FC', borderLeft: '5px solid #D6DCE5', padding: '9px 16px' }}&gt;&#13;&#10;            &lt;Text style={{ fontSize: 17.5, color: '#1A2230', lineHeight: 1.4 }}&gt;&lt;b&gt;容错&lt;/b&gt;　匹配失败的帧先“搁置”，后续出现相似帧时再取出重试——乱序输入因此不必强求一次成功。&lt;/Text&gt;&#13;&#10;        &lt;/Box&gt;&#13;&#10;    &lt;/Box&gt;&#13;&#10;&#13;&#10;    &lt;Box style={{ marginTop: 'auto', padding: '6px 40px 12px 40px' }}&gt;&#13;&#10;        &lt;Text style={{ fontSize: 15, color: '#8B97A8' }}&gt;接下来七页，一步一页：每页都是「这步在做什么 → 长什么样 → 核心公式 → 超参取值 → 为什么这么做」。&lt;/Text&gt;&#13;&#10;    &lt;/Box&gt;&#13;&#10;&lt;/Slide&gt;&#13;&#10;"/>
         <p:cNvGrpSpPr/>
         <p:nvPr/>
       </p:nvGrpSpPr>
@@ -14539,7 +15862,7 @@
       </p:grpSpPr>
       <p:sp>
         <p:nvSpPr>
-          <p:cNvPr id="288" name=""/>
+          <p:cNvPr id="321" name=""/>
           <p:cNvSpPr/>
           <p:nvPr/>
         </p:nvSpPr>
@@ -14563,7 +15886,7 @@
       </p:sp>
       <p:sp>
         <p:nvSpPr>
-          <p:cNvPr id="289" name=""/>
+          <p:cNvPr id="322" name=""/>
           <p:cNvSpPr/>
           <p:nvPr/>
         </p:nvSpPr>
@@ -14587,7 +15910,7 @@
       </p:sp>
       <p:sp>
         <p:nvSpPr>
-          <p:cNvPr id="290" name="" descr="{&quot;isTemplate&quot;:true,&quot;type&quot;:&quot;text&quot;}"/>
+          <p:cNvPr id="323" name="" descr="{&quot;isTemplate&quot;:true,&quot;type&quot;:&quot;text&quot;}"/>
           <p:cNvSpPr txBox="1"/>
           <p:nvPr/>
         </p:nvSpPr>
@@ -14622,7 +15945,7 @@
       </p:sp>
       <p:sp>
         <p:nvSpPr>
-          <p:cNvPr id="291" name="" descr="{&quot;isTemplate&quot;:true,&quot;type&quot;:&quot;text&quot;}"/>
+          <p:cNvPr id="324" name="" descr="{&quot;isTemplate&quot;:true,&quot;type&quot;:&quot;text&quot;}"/>
           <p:cNvSpPr txBox="1"/>
           <p:nvPr/>
         </p:nvSpPr>
@@ -14657,7 +15980,7 @@
       </p:sp>
       <p:sp>
         <p:nvSpPr>
-          <p:cNvPr id="292" name="" descr="{&quot;isTemplate&quot;:true,&quot;type&quot;:&quot;text&quot;}"/>
+          <p:cNvPr id="325" name="" descr="{&quot;isTemplate&quot;:true,&quot;type&quot;:&quot;text&quot;}"/>
           <p:cNvSpPr txBox="1"/>
           <p:nvPr/>
         </p:nvSpPr>
@@ -14712,7 +16035,7 @@
       </p:sp>
       <p:sp>
         <p:nvSpPr>
-          <p:cNvPr id="293" name=""/>
+          <p:cNvPr id="326" name=""/>
           <p:cNvSpPr/>
           <p:nvPr/>
         </p:nvSpPr>
@@ -14738,7 +16061,7 @@
       </p:sp>
       <p:sp>
         <p:nvSpPr>
-          <p:cNvPr id="294" name="" descr="{&quot;isTemplate&quot;:true,&quot;type&quot;:&quot;text&quot;}"/>
+          <p:cNvPr id="327" name="" descr="{&quot;isTemplate&quot;:true,&quot;type&quot;:&quot;text&quot;}"/>
           <p:cNvSpPr txBox="1"/>
           <p:nvPr/>
         </p:nvSpPr>
@@ -14773,7 +16096,7 @@
       </p:sp>
       <p:sp>
         <p:nvSpPr>
-          <p:cNvPr id="295" name="" descr="{&quot;isTemplate&quot;:true,&quot;type&quot;:&quot;text&quot;}"/>
+          <p:cNvPr id="328" name="" descr="{&quot;isTemplate&quot;:true,&quot;type&quot;:&quot;text&quot;}"/>
           <p:cNvSpPr txBox="1"/>
           <p:nvPr/>
         </p:nvSpPr>
@@ -14808,7 +16131,7 @@
       </p:sp>
       <p:sp>
         <p:nvSpPr>
-          <p:cNvPr id="296" name="" descr="{&quot;isTemplate&quot;:true,&quot;type&quot;:&quot;text&quot;}"/>
+          <p:cNvPr id="329" name="" descr="{&quot;isTemplate&quot;:true,&quot;type&quot;:&quot;text&quot;}"/>
           <p:cNvSpPr txBox="1"/>
           <p:nvPr/>
         </p:nvSpPr>
@@ -14865,7 +16188,7 @@
       </p:sp>
       <p:sp>
         <p:nvSpPr>
-          <p:cNvPr id="297" name="" descr="{&quot;isTemplate&quot;:true,&quot;type&quot;:&quot;text&quot;}"/>
+          <p:cNvPr id="330" name="" descr="{&quot;isTemplate&quot;:true,&quot;type&quot;:&quot;text&quot;}"/>
           <p:cNvSpPr txBox="1"/>
           <p:nvPr/>
         </p:nvSpPr>
@@ -14900,7 +16223,7 @@
       </p:sp>
       <p:sp>
         <p:nvSpPr>
-          <p:cNvPr id="298" name=""/>
+          <p:cNvPr id="331" name=""/>
           <p:cNvSpPr/>
           <p:nvPr/>
         </p:nvSpPr>
@@ -14926,7 +16249,7 @@
       </p:sp>
       <p:sp>
         <p:nvSpPr>
-          <p:cNvPr id="299" name="" descr="{&quot;isTemplate&quot;:true,&quot;type&quot;:&quot;text&quot;}"/>
+          <p:cNvPr id="332" name="" descr="{&quot;isTemplate&quot;:true,&quot;type&quot;:&quot;text&quot;}"/>
           <p:cNvSpPr txBox="1"/>
           <p:nvPr/>
         </p:nvSpPr>
@@ -14961,7 +16284,7 @@
       </p:sp>
       <p:sp>
         <p:nvSpPr>
-          <p:cNvPr id="300" name="" descr="{&quot;isTemplate&quot;:true,&quot;type&quot;:&quot;text&quot;}"/>
+          <p:cNvPr id="333" name="" descr="{&quot;isTemplate&quot;:true,&quot;type&quot;:&quot;text&quot;}"/>
           <p:cNvSpPr txBox="1"/>
           <p:nvPr/>
         </p:nvSpPr>
@@ -14996,7 +16319,7 @@
       </p:sp>
       <p:sp>
         <p:nvSpPr>
-          <p:cNvPr id="301" name="" descr="{&quot;isTemplate&quot;:true,&quot;type&quot;:&quot;text&quot;}"/>
+          <p:cNvPr id="334" name="" descr="{&quot;isTemplate&quot;:true,&quot;type&quot;:&quot;text&quot;}"/>
           <p:cNvSpPr txBox="1"/>
           <p:nvPr/>
         </p:nvSpPr>
@@ -15053,7 +16376,7 @@
       </p:sp>
       <p:sp>
         <p:nvSpPr>
-          <p:cNvPr id="302" name="" descr="{&quot;isTemplate&quot;:true,&quot;type&quot;:&quot;text&quot;}"/>
+          <p:cNvPr id="335" name="" descr="{&quot;isTemplate&quot;:true,&quot;type&quot;:&quot;text&quot;}"/>
           <p:cNvSpPr txBox="1"/>
           <p:nvPr/>
         </p:nvSpPr>
@@ -15088,7 +16411,7 @@
       </p:sp>
       <p:sp>
         <p:nvSpPr>
-          <p:cNvPr id="303" name=""/>
+          <p:cNvPr id="336" name=""/>
           <p:cNvSpPr/>
           <p:nvPr/>
         </p:nvSpPr>
@@ -15114,7 +16437,7 @@
       </p:sp>
       <p:sp>
         <p:nvSpPr>
-          <p:cNvPr id="304" name="" descr="{&quot;isTemplate&quot;:true,&quot;type&quot;:&quot;text&quot;}"/>
+          <p:cNvPr id="337" name="" descr="{&quot;isTemplate&quot;:true,&quot;type&quot;:&quot;text&quot;}"/>
           <p:cNvSpPr txBox="1"/>
           <p:nvPr/>
         </p:nvSpPr>
@@ -15149,7 +16472,7 @@
       </p:sp>
       <p:sp>
         <p:nvSpPr>
-          <p:cNvPr id="305" name="" descr="{&quot;isTemplate&quot;:true,&quot;type&quot;:&quot;text&quot;}"/>
+          <p:cNvPr id="338" name="" descr="{&quot;isTemplate&quot;:true,&quot;type&quot;:&quot;text&quot;}"/>
           <p:cNvSpPr txBox="1"/>
           <p:nvPr/>
         </p:nvSpPr>
@@ -15184,7 +16507,7 @@
       </p:sp>
       <p:sp>
         <p:nvSpPr>
-          <p:cNvPr id="306" name="" descr="{&quot;isTemplate&quot;:true,&quot;type&quot;:&quot;text&quot;}"/>
+          <p:cNvPr id="339" name="" descr="{&quot;isTemplate&quot;:true,&quot;type&quot;:&quot;text&quot;}"/>
           <p:cNvSpPr txBox="1"/>
           <p:nvPr/>
         </p:nvSpPr>
@@ -15271,7 +16594,7 @@
       </p:sp>
       <p:sp>
         <p:nvSpPr>
-          <p:cNvPr id="307" name="" descr="{&quot;isTemplate&quot;:true,&quot;type&quot;:&quot;text&quot;}"/>
+          <p:cNvPr id="340" name="" descr="{&quot;isTemplate&quot;:true,&quot;type&quot;:&quot;text&quot;}"/>
           <p:cNvSpPr txBox="1"/>
           <p:nvPr/>
         </p:nvSpPr>
@@ -15306,7 +16629,7 @@
       </p:sp>
       <p:sp>
         <p:nvSpPr>
-          <p:cNvPr id="308" name=""/>
+          <p:cNvPr id="341" name=""/>
           <p:cNvSpPr/>
           <p:nvPr/>
         </p:nvSpPr>
@@ -15332,7 +16655,7 @@
       </p:sp>
       <p:sp>
         <p:nvSpPr>
-          <p:cNvPr id="309" name="" descr="{&quot;isTemplate&quot;:true,&quot;type&quot;:&quot;text&quot;}"/>
+          <p:cNvPr id="342" name="" descr="{&quot;isTemplate&quot;:true,&quot;type&quot;:&quot;text&quot;}"/>
           <p:cNvSpPr txBox="1"/>
           <p:nvPr/>
         </p:nvSpPr>
@@ -15367,7 +16690,7 @@
       </p:sp>
       <p:sp>
         <p:nvSpPr>
-          <p:cNvPr id="310" name="" descr="{&quot;isTemplate&quot;:true,&quot;type&quot;:&quot;text&quot;}"/>
+          <p:cNvPr id="343" name="" descr="{&quot;isTemplate&quot;:true,&quot;type&quot;:&quot;text&quot;}"/>
           <p:cNvSpPr txBox="1"/>
           <p:nvPr/>
         </p:nvSpPr>
@@ -15402,7 +16725,7 @@
       </p:sp>
       <p:sp>
         <p:nvSpPr>
-          <p:cNvPr id="311" name="" descr="{&quot;isTemplate&quot;:true,&quot;type&quot;:&quot;text&quot;}"/>
+          <p:cNvPr id="344" name="" descr="{&quot;isTemplate&quot;:true,&quot;type&quot;:&quot;text&quot;}"/>
           <p:cNvSpPr txBox="1"/>
           <p:nvPr/>
         </p:nvSpPr>
@@ -15479,7 +16802,7 @@
       </p:sp>
       <p:sp>
         <p:nvSpPr>
-          <p:cNvPr id="312" name="" descr="{&quot;isTemplate&quot;:true,&quot;type&quot;:&quot;text&quot;}"/>
+          <p:cNvPr id="345" name="" descr="{&quot;isTemplate&quot;:true,&quot;type&quot;:&quot;text&quot;}"/>
           <p:cNvSpPr txBox="1"/>
           <p:nvPr/>
         </p:nvSpPr>
@@ -15514,7 +16837,7 @@
       </p:sp>
       <p:sp>
         <p:nvSpPr>
-          <p:cNvPr id="313" name=""/>
+          <p:cNvPr id="346" name=""/>
           <p:cNvSpPr/>
           <p:nvPr/>
         </p:nvSpPr>
@@ -15540,7 +16863,7 @@
       </p:sp>
       <p:sp>
         <p:nvSpPr>
-          <p:cNvPr id="314" name="" descr="{&quot;isTemplate&quot;:true,&quot;type&quot;:&quot;text&quot;}"/>
+          <p:cNvPr id="347" name="" descr="{&quot;isTemplate&quot;:true,&quot;type&quot;:&quot;text&quot;}"/>
           <p:cNvSpPr txBox="1"/>
           <p:nvPr/>
         </p:nvSpPr>
@@ -15575,7 +16898,7 @@
       </p:sp>
       <p:sp>
         <p:nvSpPr>
-          <p:cNvPr id="315" name="" descr="{&quot;isTemplate&quot;:true,&quot;type&quot;:&quot;text&quot;}"/>
+          <p:cNvPr id="348" name="" descr="{&quot;isTemplate&quot;:true,&quot;type&quot;:&quot;text&quot;}"/>
           <p:cNvSpPr txBox="1"/>
           <p:nvPr/>
         </p:nvSpPr>
@@ -15620,7 +16943,7 @@
       </p:sp>
       <p:sp>
         <p:nvSpPr>
-          <p:cNvPr id="316" name="" descr="{&quot;isTemplate&quot;:true,&quot;type&quot;:&quot;text&quot;}"/>
+          <p:cNvPr id="349" name="" descr="{&quot;isTemplate&quot;:true,&quot;type&quot;:&quot;text&quot;}"/>
           <p:cNvSpPr txBox="1"/>
           <p:nvPr/>
         </p:nvSpPr>
@@ -15687,7 +17010,7 @@
       </p:sp>
       <p:sp>
         <p:nvSpPr>
-          <p:cNvPr id="317" name="" descr="{&quot;isTemplate&quot;:true,&quot;type&quot;:&quot;text&quot;}"/>
+          <p:cNvPr id="350" name="" descr="{&quot;isTemplate&quot;:true,&quot;type&quot;:&quot;text&quot;}"/>
           <p:cNvSpPr txBox="1"/>
           <p:nvPr/>
         </p:nvSpPr>
@@ -15722,7 +17045,7 @@
       </p:sp>
       <p:sp>
         <p:nvSpPr>
-          <p:cNvPr id="318" name=""/>
+          <p:cNvPr id="351" name=""/>
           <p:cNvSpPr/>
           <p:nvPr/>
         </p:nvSpPr>
@@ -15748,7 +17071,7 @@
       </p:sp>
       <p:sp>
         <p:nvSpPr>
-          <p:cNvPr id="319" name="" descr="{&quot;isTemplate&quot;:true,&quot;type&quot;:&quot;text&quot;}"/>
+          <p:cNvPr id="352" name="" descr="{&quot;isTemplate&quot;:true,&quot;type&quot;:&quot;text&quot;}"/>
           <p:cNvSpPr txBox="1"/>
           <p:nvPr/>
         </p:nvSpPr>
@@ -15783,7 +17106,7 @@
       </p:sp>
       <p:sp>
         <p:nvSpPr>
-          <p:cNvPr id="320" name="" descr="{&quot;isTemplate&quot;:true,&quot;type&quot;:&quot;text&quot;}"/>
+          <p:cNvPr id="353" name="" descr="{&quot;isTemplate&quot;:true,&quot;type&quot;:&quot;text&quot;}"/>
           <p:cNvSpPr txBox="1"/>
           <p:nvPr/>
         </p:nvSpPr>
@@ -15818,7 +17141,7 @@
       </p:sp>
       <p:sp>
         <p:nvSpPr>
-          <p:cNvPr id="321" name="" descr="{&quot;isTemplate&quot;:true,&quot;type&quot;:&quot;text&quot;}"/>
+          <p:cNvPr id="354" name="" descr="{&quot;isTemplate&quot;:true,&quot;type&quot;:&quot;text&quot;}"/>
           <p:cNvSpPr txBox="1"/>
           <p:nvPr/>
         </p:nvSpPr>
@@ -15895,7 +17218,7 @@
       </p:sp>
       <p:sp>
         <p:nvSpPr>
-          <p:cNvPr id="322" name="" descr="{&quot;isTemplate&quot;:true,&quot;type&quot;:&quot;text&quot;}"/>
+          <p:cNvPr id="355" name="" descr="{&quot;isTemplate&quot;:true,&quot;type&quot;:&quot;text&quot;}"/>
           <p:cNvSpPr txBox="1"/>
           <p:nvPr/>
         </p:nvSpPr>
@@ -15930,7 +17253,7 @@
       </p:sp>
       <p:sp>
         <p:nvSpPr>
-          <p:cNvPr id="323" name=""/>
+          <p:cNvPr id="356" name=""/>
           <p:cNvSpPr/>
           <p:nvPr/>
         </p:nvSpPr>
@@ -15956,7 +17279,7 @@
       </p:sp>
       <p:sp>
         <p:nvSpPr>
-          <p:cNvPr id="324" name="" descr="{&quot;isTemplate&quot;:true,&quot;type&quot;:&quot;text&quot;}"/>
+          <p:cNvPr id="357" name="" descr="{&quot;isTemplate&quot;:true,&quot;type&quot;:&quot;text&quot;}"/>
           <p:cNvSpPr txBox="1"/>
           <p:nvPr/>
         </p:nvSpPr>
@@ -15991,7 +17314,7 @@
       </p:sp>
       <p:sp>
         <p:nvSpPr>
-          <p:cNvPr id="325" name="" descr="{&quot;isTemplate&quot;:true,&quot;type&quot;:&quot;text&quot;}"/>
+          <p:cNvPr id="358" name="" descr="{&quot;isTemplate&quot;:true,&quot;type&quot;:&quot;text&quot;}"/>
           <p:cNvSpPr txBox="1"/>
           <p:nvPr/>
         </p:nvSpPr>
@@ -16026,7 +17349,7 @@
       </p:sp>
       <p:sp>
         <p:nvSpPr>
-          <p:cNvPr id="326" name="" descr="{&quot;isTemplate&quot;:true,&quot;type&quot;:&quot;text&quot;}"/>
+          <p:cNvPr id="359" name="" descr="{&quot;isTemplate&quot;:true,&quot;type&quot;:&quot;text&quot;}"/>
           <p:cNvSpPr txBox="1"/>
           <p:nvPr/>
         </p:nvSpPr>
@@ -16103,7 +17426,7 @@
       </p:sp>
       <p:sp>
         <p:nvSpPr>
-          <p:cNvPr id="327" name="" descr="{&quot;isTemplate&quot;:true,&quot;type&quot;:&quot;text&quot;}"/>
+          <p:cNvPr id="360" name="" descr="{&quot;isTemplate&quot;:true,&quot;type&quot;:&quot;text&quot;}"/>
           <p:cNvSpPr txBox="1"/>
           <p:nvPr/>
         </p:nvSpPr>
@@ -16138,7 +17461,7 @@
       </p:sp>
       <p:sp>
         <p:nvSpPr>
-          <p:cNvPr id="328" name="" descr="{&quot;isTemplate&quot;:true,&quot;type&quot;:&quot;text&quot;}"/>
+          <p:cNvPr id="361" name="" descr="{&quot;isTemplate&quot;:true,&quot;type&quot;:&quot;text&quot;}"/>
           <p:cNvSpPr txBox="1"/>
           <p:nvPr/>
         </p:nvSpPr>
@@ -16303,7 +17626,7 @@
       </p:sp>
       <p:sp>
         <p:nvSpPr>
-          <p:cNvPr id="329" name="" descr="{&quot;isTemplate&quot;:true,&quot;type&quot;:&quot;text&quot;}"/>
+          <p:cNvPr id="362" name="" descr="{&quot;isTemplate&quot;:true,&quot;type&quot;:&quot;text&quot;}"/>
           <p:cNvSpPr txBox="1"/>
           <p:nvPr/>
         </p:nvSpPr>
@@ -16338,7 +17661,7 @@
       </p:sp>
       <p:sp>
         <p:nvSpPr>
-          <p:cNvPr id="330" name=""/>
+          <p:cNvPr id="363" name=""/>
           <p:cNvSpPr/>
           <p:nvPr/>
         </p:nvSpPr>
@@ -16364,7 +17687,7 @@
       </p:sp>
       <p:sp>
         <p:nvSpPr>
-          <p:cNvPr id="331" name="" descr="{&quot;isTemplate&quot;:true,&quot;type&quot;:&quot;text&quot;}"/>
+          <p:cNvPr id="364" name="" descr="{&quot;isTemplate&quot;:true,&quot;type&quot;:&quot;text&quot;}"/>
           <p:cNvSpPr txBox="1"/>
           <p:nvPr/>
         </p:nvSpPr>
@@ -16399,7 +17722,7 @@
       </p:sp>
       <p:sp>
         <p:nvSpPr>
-          <p:cNvPr id="332" name="" descr="{&quot;isTemplate&quot;:true,&quot;type&quot;:&quot;text&quot;}"/>
+          <p:cNvPr id="365" name="" descr="{&quot;isTemplate&quot;:true,&quot;type&quot;:&quot;text&quot;}"/>
           <p:cNvSpPr txBox="1"/>
           <p:nvPr/>
         </p:nvSpPr>
@@ -16544,7 +17867,7 @@
       </p:sp>
       <p:sp>
         <p:nvSpPr>
-          <p:cNvPr id="333" name="" descr="{&quot;isTemplate&quot;:true,&quot;type&quot;:&quot;text&quot;}"/>
+          <p:cNvPr id="366" name="" descr="{&quot;isTemplate&quot;:true,&quot;type&quot;:&quot;text&quot;}"/>
           <p:cNvSpPr txBox="1"/>
           <p:nvPr/>
         </p:nvSpPr>
@@ -16619,7 +17942,7 @@
       </p:sp>
       <p:sp>
         <p:nvSpPr>
-          <p:cNvPr id="334" name=""/>
+          <p:cNvPr id="367" name=""/>
           <p:cNvSpPr/>
           <p:nvPr/>
         </p:nvSpPr>
@@ -16643,7 +17966,7 @@
       </p:sp>
       <p:sp>
         <p:nvSpPr>
-          <p:cNvPr id="335" name=""/>
+          <p:cNvPr id="368" name=""/>
           <p:cNvSpPr/>
           <p:nvPr/>
         </p:nvSpPr>
@@ -16683,7 +18006,7 @@
       </p:sp>
       <p:sp>
         <p:nvSpPr>
-          <p:cNvPr id="336" name="" descr="{&quot;isTemplate&quot;:true,&quot;type&quot;:&quot;text&quot;}"/>
+          <p:cNvPr id="369" name="" descr="{&quot;isTemplate&quot;:true,&quot;type&quot;:&quot;text&quot;}"/>
           <p:cNvSpPr txBox="1"/>
           <p:nvPr/>
         </p:nvSpPr>
@@ -16798,7 +18121,7 @@
       </p:sp>
       <p:sp>
         <p:nvSpPr>
-          <p:cNvPr id="337" name=""/>
+          <p:cNvPr id="370" name=""/>
           <p:cNvSpPr/>
           <p:nvPr/>
         </p:nvSpPr>
@@ -16822,7 +18145,7 @@
       </p:sp>
       <p:sp>
         <p:nvSpPr>
-          <p:cNvPr id="338" name=""/>
+          <p:cNvPr id="371" name=""/>
           <p:cNvSpPr/>
           <p:nvPr/>
         </p:nvSpPr>
@@ -16862,7 +18185,7 @@
       </p:sp>
       <p:sp>
         <p:nvSpPr>
-          <p:cNvPr id="339" name="" descr="{&quot;isTemplate&quot;:true,&quot;type&quot;:&quot;text&quot;}"/>
+          <p:cNvPr id="372" name="" descr="{&quot;isTemplate&quot;:true,&quot;type&quot;:&quot;text&quot;}"/>
           <p:cNvSpPr txBox="1"/>
           <p:nvPr/>
         </p:nvSpPr>
@@ -16907,7 +18230,7 @@
       </p:sp>
       <p:sp>
         <p:nvSpPr>
-          <p:cNvPr id="340" name="" descr="{&quot;isTemplate&quot;:true,&quot;type&quot;:&quot;text&quot;}"/>
+          <p:cNvPr id="373" name="" descr="{&quot;isTemplate&quot;:true,&quot;type&quot;:&quot;text&quot;}"/>
           <p:cNvSpPr txBox="1"/>
           <p:nvPr/>
         </p:nvSpPr>
@@ -17030,7 +18353,7 @@
   <p:cSld>
     <p:spTree>
       <p:nvGrpSpPr>
-        <p:cNvPr id="341" name="" descr="&lt;Slide style={{ width: '1280px', height: '720px', backgroundColor: '#FFFFFF', padding: '0px', flexDirection: 'column' }}&gt;&#13;&#10;    &lt;Box style={{ width: '1280px', height: '8px', backgroundColor: '#1E4FA8' }} /&gt;&#13;&#10;    &lt;Box style={{ padding: '26px 40px 0px 40px', flexDirection: 'row', justifyContent: 'space-between', alignItems: 'flex-end' }}&gt;&#13;&#10;        &lt;Text style={{ fontSize: 33, fontWeight: 'bold', color: '#1E4FA8' }}&gt;全局检索：先不问“在哪”，只问“像不像”&lt;/Text&gt;&#13;&#10;        &lt;Text style={{ fontSize: 15, color: '#8B97A8' }}&gt;05 / 15&lt;/Text&gt;&#13;&#10;    &lt;/Box&gt;&#13;&#10;    &lt;Box style={{ padding: '8px 40px 0px 40px' }}&gt;&#13;&#10;        &lt;Text style={{ fontSize: 20, color: '#4A5568', lineHeight: 1.4 }}&gt;每来一个关键帧，先用一个全局描述子和全部历史帧比一次，取出 20 个“可能同处”的候选——这一步完全不看拍摄顺序。&lt;/Text&gt;&#13;&#10;    &lt;/Box&gt;&#13;&#10;    &lt;Box style={{ padding: '14px 40px 0px 40px', flexDirection: 'row', gap: 20 }}&gt;&#13;&#10;        &lt;Box style={{ width: 600, flexDirection: 'column', gap: 11 }}&gt;&#13;&#10;            &lt;Box style={{ backgroundColor: '#F7F9FC', border: '1px solid #D6DCE5', borderRadius: 6, padding: '9px 16px' }}&gt;&#13;&#10;                &lt;Text style={{ fontSize: 18, color: '#1A2230', lineHeight: 1.45 }}&gt;&lt;b&gt;输入&lt;/b&gt;　新帧图像 ＋ 已收下的历史关键帧库&lt;/Text&gt;&#13;&#10;            &lt;/Box&gt;&#13;&#10;            &lt;Box style={{ backgroundColor: '#F7F9FC', border: '1px solid #D6DCE5', borderRadius: 6, padding: '9px 16px' }}&gt;&#13;&#10;                &lt;Text style={{ fontSize: 18, color: '#1A2230', lineHeight: 1.45 }}&gt;&lt;b&gt;做法&lt;/b&gt;　MegaLoc 输出 4096 维描述子；与库内全部描述子算余弦相似度，排序取前 20&lt;/Text&gt;&#13;&#10;            &lt;/Box&gt;&#13;&#10;            &lt;Box style={{ backgroundColor: '#F7F9FC', border: '1px solid #D6DCE5', borderRadius: 6, padding: '9px 16px' }}&gt;&#13;&#10;                &lt;Text style={{ fontSize: 18, color: '#1A2230', lineHeight: 1.45 }}&gt;&lt;b&gt;输出&lt;/b&gt;　20 个候选帧（只是“像”，还不保证几何对得上）&lt;/Text&gt;&#13;&#10;            &lt;/Box&gt;&#13;&#10;            &lt;Box style={{ backgroundColor: '#F0F5FC', border: '1px solid #3D7BD9', borderRadius: 6, padding: '10px 16px', flexDirection: 'column' }}&gt;&#13;&#10;                &lt;Text style={{ fontSize: 18, color: '#1A2230', lineHeight: 1.45 }}&gt;&lt;b&gt;关键取值&lt;/b&gt;　K = 20 个候选　·　num_prev_keyframes_check = 20&lt;/Text&gt;&#13;&#10;                &lt;Text style={{ fontSize: 16, color: '#4A5568', lineHeight: 1.4, marginTop: 4 }}&gt;论文写 MixVPR，开源代码因许可换成 MegaLoc；两者都是“一帧 → 一个向量”&lt;/Text&gt;&#13;&#10;            &lt;/Box&gt;&#13;&#10;        &lt;/Box&gt;&#13;&#10;        &lt;Box style={{ width: 580, flexDirection: 'column' }}&gt;&#13;&#10;            &lt;Image src=&quot;figs/fig1_vpr.png&quot; style={{ width: 580, height: 362 }} /&gt;&#13;&#10;            &lt;Text style={{ fontSize: 14.5, color: '#8B97A8', marginTop: 5 }}&gt;图 1　检索与帧序无关：n 帧只做 n 次比对，不做 n² 次。&lt;/Text&gt;&#13;&#10;        &lt;/Box&gt;&#13;&#10;    &lt;/Box&gt;&#13;&#10;    &lt;Box style={{ margin: '12px 40px 0px 40px', backgroundColor: '#F7F9FC', borderLeft: '5px solid #1E4FA8', padding: '10px 18px', flexDirection: 'column' }}&gt;&#13;&#10;        &lt;Image src=&quot;formula/f05.png&quot; style={{ width: 149.5, height: 50.0 }} /&gt;&#13;&#10;        &lt;Text style={{ fontSize: 16.5, color: '#4A5568', lineHeight: 1.4, marginTop: 3 }}&gt;相似度只看外观、不看时间——乱序输入在这里第一次被“原谅”；代价 ≈ 1 ms / 1000 对，是整条链里最便宜的一步。&lt;/Text&gt;&#13;&#10;    &lt;/Box&gt;&#13;&#10;    &lt;Box style={{ marginTop: 'auto', padding: '10px 40px 12px 40px' }}&gt;&#13;&#10;        &lt;Text style={{ fontSize: 15, color: '#8B97A8' }}&gt;治的是“乱”：不再假设新帧只和上一帧有关，而是和全部历史都有关。&lt;/Text&gt;&#13;&#10;    &lt;/Box&gt;&#13;&#10;&lt;/Slide&gt;&#13;&#10;"/>
+        <p:cNvPr id="374" name="" descr="&lt;Slide style={{ width: '1280px', height: '720px', backgroundColor: '#FFFFFF', padding: '0px', flexDirection: 'column' }}&gt;&#13;&#10;    &lt;Box style={{ width: '1280px', height: '8px', backgroundColor: '#1E4FA8' }} /&gt;&#13;&#10;    &lt;Box style={{ padding: '26px 40px 0px 40px', flexDirection: 'row', justifyContent: 'space-between', alignItems: 'flex-end' }}&gt;&#13;&#10;        &lt;Text style={{ fontSize: 33, fontWeight: 'bold', color: '#1E4FA8' }}&gt;全局检索：先不问“在哪”，只问“像不像”&lt;/Text&gt;&#13;&#10;        &lt;Text style={{ fontSize: 15, color: '#8B97A8' }}&gt;05 / 15&lt;/Text&gt;&#13;&#10;    &lt;/Box&gt;&#13;&#10;    &lt;Box style={{ padding: '8px 40px 0px 40px' }}&gt;&#13;&#10;        &lt;Text style={{ fontSize: 20, color: '#4A5568', lineHeight: 1.4 }}&gt;每来一个关键帧，先用一个全局描述子和全部历史帧比一次，取出 20 个“可能同处”的候选——这一步完全不看拍摄顺序。&lt;/Text&gt;&#13;&#10;    &lt;/Box&gt;&#13;&#10;    &lt;Box style={{ padding: '14px 40px 0px 40px', flexDirection: 'row', gap: 20 }}&gt;&#13;&#10;        &lt;Box style={{ width: 600, flexDirection: 'column', gap: 11 }}&gt;&#13;&#10;            &lt;Box style={{ backgroundColor: '#F7F9FC', border: '1px solid #D6DCE5', borderRadius: 6, padding: '9px 16px' }}&gt;&#13;&#10;                &lt;Text style={{ fontSize: 18, color: '#1A2230', lineHeight: 1.45 }}&gt;&lt;b&gt;输入&lt;/b&gt;　新帧图像 ＋ 已收下的历史关键帧库&lt;/Text&gt;&#13;&#10;            &lt;/Box&gt;&#13;&#10;            &lt;Box style={{ backgroundColor: '#F7F9FC', border: '1px solid #D6DCE5', borderRadius: 6, padding: '9px 16px' }}&gt;&#13;&#10;                &lt;Text style={{ fontSize: 18, color: '#1A2230', lineHeight: 1.45 }}&gt;&lt;b&gt;做法&lt;/b&gt;　MegaLoc 输出 4096 维描述子；与库内全部描述子算余弦相似度，排序取前 20&lt;/Text&gt;&#13;&#10;            &lt;/Box&gt;&#13;&#10;            &lt;Box style={{ backgroundColor: '#F7F9FC', border: '1px solid #D6DCE5', borderRadius: 6, padding: '9px 16px' }}&gt;&#13;&#10;                &lt;Text style={{ fontSize: 18, color: '#1A2230', lineHeight: 1.45 }}&gt;&lt;b&gt;输出&lt;/b&gt;　20 个候选帧（只是“像”，还不保证几何对得上）&lt;/Text&gt;&#13;&#10;            &lt;/Box&gt;&#13;&#10;            &lt;Box style={{ backgroundColor: '#F0F5FC', border: '1px solid #3D7BD9', borderRadius: 6, padding: '10px 16px', flexDirection: 'column' }}&gt;&#13;&#10;                &lt;Text style={{ fontSize: 18, color: '#1A2230', lineHeight: 1.45 }}&gt;&lt;b&gt;关键取值&lt;/b&gt;　K = 20 个候选　·　num_prev_keyframes_check = 20&lt;/Text&gt;&#13;&#10;                &lt;Text style={{ fontSize: 16, color: '#4A5568', lineHeight: 1.4, marginTop: 4 }}&gt;论文写 MixVPR，开源代码因许可换成 MegaLoc；两者都是“一帧 → 一个向量”&lt;/Text&gt;&#13;&#10;            &lt;/Box&gt;&#13;&#10;        &lt;/Box&gt;&#13;&#10;        &lt;Box style={{ width: 580, flexDirection: 'column' }}&gt;&#13;&#10;            &lt;Image src=&quot;figs/fig1_vpr.png&quot; style={{ width: 580, height: 362 }} /&gt;&#13;&#10;            &lt;Text style={{ fontSize: 14.5, color: '#8B97A8', marginTop: 5 }}&gt;图 1　检索与帧序无关：n 帧只做 n 次比对，不做 n² 次。&lt;/Text&gt;&#13;&#10;        &lt;/Box&gt;&#13;&#10;    &lt;/Box&gt;&#13;&#10;    &lt;Box style={{ margin: '12px 40px 0px 40px', backgroundColor: '#F7F9FC', borderLeft: '5px solid #1E4FA8', padding: '10px 18px', flexDirection: 'column' }}&gt;&#13;&#10;        &lt;Image src=&quot;formula/f05.png&quot; style={{ width: 149.5, height: 50.0 }} /&gt;&#13;&#10;        &lt;Text style={{ fontSize: 16.5, color: '#4A5568', lineHeight: 1.4, marginTop: 3 }}&gt;相似度只看外观、不看时间——乱序输入在这里第一次被“原谅”；代价 ≈ 1 ms / 1000 对，是整条链里最便宜的一步。&lt;/Text&gt;&#13;&#10;    &lt;/Box&gt;&#13;&#10;    &lt;Box style={{ marginTop: 'auto', padding: '10px 40px 12px 40px' }}&gt;&#13;&#10;        &lt;Text style={{ fontSize: 15, color: '#8B97A8' }}&gt;治的是“乱”：不再假设新帧只和上一帧有关，而是和全部历史都有关。&lt;/Text&gt;&#13;&#10;    &lt;/Box&gt;&#13;&#10;&lt;/Slide&gt;&#13;&#10;"/>
         <p:cNvGrpSpPr/>
         <p:nvPr/>
       </p:nvGrpSpPr>
@@ -17044,7 +18367,7 @@
       </p:grpSpPr>
       <p:sp>
         <p:nvSpPr>
-          <p:cNvPr id="342" name=""/>
+          <p:cNvPr id="375" name=""/>
           <p:cNvSpPr/>
           <p:nvPr/>
         </p:nvSpPr>
@@ -17068,7 +18391,7 @@
       </p:sp>
       <p:sp>
         <p:nvSpPr>
-          <p:cNvPr id="343" name=""/>
+          <p:cNvPr id="376" name=""/>
           <p:cNvSpPr/>
           <p:nvPr/>
         </p:nvSpPr>
@@ -17092,7 +18415,7 @@
       </p:sp>
       <p:sp>
         <p:nvSpPr>
-          <p:cNvPr id="344" name="" descr="{&quot;isTemplate&quot;:true,&quot;type&quot;:&quot;text&quot;}"/>
+          <p:cNvPr id="377" name="" descr="{&quot;isTemplate&quot;:true,&quot;type&quot;:&quot;text&quot;}"/>
           <p:cNvSpPr txBox="1"/>
           <p:nvPr/>
         </p:nvSpPr>
@@ -17127,7 +18450,7 @@
       </p:sp>
       <p:sp>
         <p:nvSpPr>
-          <p:cNvPr id="345" name="" descr="{&quot;isTemplate&quot;:true,&quot;type&quot;:&quot;text&quot;}"/>
+          <p:cNvPr id="378" name="" descr="{&quot;isTemplate&quot;:true,&quot;type&quot;:&quot;text&quot;}"/>
           <p:cNvSpPr txBox="1"/>
           <p:nvPr/>
         </p:nvSpPr>
@@ -17162,7 +18485,7 @@
       </p:sp>
       <p:sp>
         <p:nvSpPr>
-          <p:cNvPr id="346" name="" descr="{&quot;isTemplate&quot;:true,&quot;type&quot;:&quot;text&quot;}"/>
+          <p:cNvPr id="379" name="" descr="{&quot;isTemplate&quot;:true,&quot;type&quot;:&quot;text&quot;}"/>
           <p:cNvSpPr txBox="1"/>
           <p:nvPr/>
         </p:nvSpPr>
@@ -17217,7 +18540,7 @@
       </p:sp>
       <p:sp>
         <p:nvSpPr>
-          <p:cNvPr id="347" name=""/>
+          <p:cNvPr id="380" name=""/>
           <p:cNvSpPr/>
           <p:nvPr/>
         </p:nvSpPr>
@@ -17248,7 +18571,7 @@
       </p:sp>
       <p:sp>
         <p:nvSpPr>
-          <p:cNvPr id="348" name="" descr="{&quot;isTemplate&quot;:true,&quot;type&quot;:&quot;text&quot;}"/>
+          <p:cNvPr id="381" name="" descr="{&quot;isTemplate&quot;:true,&quot;type&quot;:&quot;text&quot;}"/>
           <p:cNvSpPr txBox="1"/>
           <p:nvPr/>
         </p:nvSpPr>
@@ -17333,7 +18656,7 @@
       </p:sp>
       <p:sp>
         <p:nvSpPr>
-          <p:cNvPr id="349" name=""/>
+          <p:cNvPr id="382" name=""/>
           <p:cNvSpPr/>
           <p:nvPr/>
         </p:nvSpPr>
@@ -17364,7 +18687,7 @@
       </p:sp>
       <p:sp>
         <p:nvSpPr>
-          <p:cNvPr id="350" name="" descr="{&quot;isTemplate&quot;:true,&quot;type&quot;:&quot;text&quot;}"/>
+          <p:cNvPr id="383" name="" descr="{&quot;isTemplate&quot;:true,&quot;type&quot;:&quot;text&quot;}"/>
           <p:cNvSpPr txBox="1"/>
           <p:nvPr/>
         </p:nvSpPr>
@@ -17461,7 +18784,7 @@
       </p:sp>
       <p:sp>
         <p:nvSpPr>
-          <p:cNvPr id="351" name=""/>
+          <p:cNvPr id="384" name=""/>
           <p:cNvSpPr/>
           <p:nvPr/>
         </p:nvSpPr>
@@ -17492,7 +18815,7 @@
       </p:sp>
       <p:sp>
         <p:nvSpPr>
-          <p:cNvPr id="352" name="" descr="{&quot;isTemplate&quot;:true,&quot;type&quot;:&quot;text&quot;}"/>
+          <p:cNvPr id="385" name="" descr="{&quot;isTemplate&quot;:true,&quot;type&quot;:&quot;text&quot;}"/>
           <p:cNvSpPr txBox="1"/>
           <p:nvPr/>
         </p:nvSpPr>
@@ -17557,7 +18880,7 @@
       </p:sp>
       <p:sp>
         <p:nvSpPr>
-          <p:cNvPr id="353" name=""/>
+          <p:cNvPr id="386" name=""/>
           <p:cNvSpPr/>
           <p:nvPr/>
         </p:nvSpPr>
@@ -17588,7 +18911,7 @@
       </p:sp>
       <p:sp>
         <p:nvSpPr>
-          <p:cNvPr id="354" name="" descr="{&quot;isTemplate&quot;:true,&quot;type&quot;:&quot;text&quot;}"/>
+          <p:cNvPr id="387" name="" descr="{&quot;isTemplate&quot;:true,&quot;type&quot;:&quot;text&quot;}"/>
           <p:cNvSpPr txBox="1"/>
           <p:nvPr/>
         </p:nvSpPr>
@@ -17663,7 +18986,7 @@
       </p:sp>
       <p:sp>
         <p:nvSpPr>
-          <p:cNvPr id="355" name="" descr="{&quot;isTemplate&quot;:true,&quot;type&quot;:&quot;text&quot;}"/>
+          <p:cNvPr id="388" name="" descr="{&quot;isTemplate&quot;:true,&quot;type&quot;:&quot;text&quot;}"/>
           <p:cNvSpPr txBox="1"/>
           <p:nvPr/>
         </p:nvSpPr>
@@ -17760,7 +19083,7 @@
       </p:sp>
       <p:pic>
         <p:nvPicPr>
-          <p:cNvPr id="356" name=""/>
+          <p:cNvPr id="389" name=""/>
           <p:cNvPicPr>
             <a:picLocks noChangeAspect="1"/>
           </p:cNvPicPr>
@@ -17786,7 +19109,7 @@
       </p:pic>
       <p:sp>
         <p:nvSpPr>
-          <p:cNvPr id="357" name="" descr="{&quot;isTemplate&quot;:true,&quot;type&quot;:&quot;text&quot;}"/>
+          <p:cNvPr id="390" name="" descr="{&quot;isTemplate&quot;:true,&quot;type&quot;:&quot;text&quot;}"/>
           <p:cNvSpPr txBox="1"/>
           <p:nvPr/>
         </p:nvSpPr>
@@ -17901,7 +19224,7 @@
       </p:sp>
       <p:sp>
         <p:nvSpPr>
-          <p:cNvPr id="358" name=""/>
+          <p:cNvPr id="391" name=""/>
           <p:cNvSpPr/>
           <p:nvPr/>
         </p:nvSpPr>
@@ -17925,7 +19248,7 @@
       </p:sp>
       <p:sp>
         <p:nvSpPr>
-          <p:cNvPr id="359" name=""/>
+          <p:cNvPr id="392" name=""/>
           <p:cNvSpPr/>
           <p:nvPr/>
         </p:nvSpPr>
@@ -17965,7 +19288,7 @@
       </p:sp>
       <p:pic>
         <p:nvPicPr>
-          <p:cNvPr id="360" name=""/>
+          <p:cNvPr id="393" name=""/>
           <p:cNvPicPr>
             <a:picLocks noChangeAspect="1"/>
           </p:cNvPicPr>
@@ -17991,7 +19314,7 @@
       </p:pic>
       <p:sp>
         <p:nvSpPr>
-          <p:cNvPr id="361" name="" descr="{&quot;isTemplate&quot;:true,&quot;type&quot;:&quot;text&quot;}"/>
+          <p:cNvPr id="394" name="" descr="{&quot;isTemplate&quot;:true,&quot;type&quot;:&quot;text&quot;}"/>
           <p:cNvSpPr txBox="1"/>
           <p:nvPr/>
         </p:nvSpPr>
@@ -18046,7 +19369,7 @@
       </p:sp>
       <p:sp>
         <p:nvSpPr>
-          <p:cNvPr id="362" name="" descr="{&quot;isTemplate&quot;:true,&quot;type&quot;:&quot;text&quot;}"/>
+          <p:cNvPr id="395" name="" descr="{&quot;isTemplate&quot;:true,&quot;type&quot;:&quot;text&quot;}"/>
           <p:cNvSpPr txBox="1"/>
           <p:nvPr/>
         </p:nvSpPr>
@@ -18089,7 +19412,7 @@
   <p:cSld>
     <p:spTree>
       <p:nvGrpSpPr>
-        <p:cNvPr id="363" name="" descr="&lt;Slide style={{ width: '1280px', height: '720px', backgroundColor: '#FFFFFF', padding: '0px', flexDirection: 'column' }}&gt;&#13;&#10;    &lt;Box style={{ width: '1280px', height: '8px', backgroundColor: '#1E4FA8' }} /&gt;&#13;&#10;    &lt;Box style={{ padding: '26px 40px 0px 40px', flexDirection: 'row', justifyContent: 'space-between', alignItems: 'flex-end' }}&gt;&#13;&#10;        &lt;Text style={{ fontSize: 33, fontWeight: 'bold', color: '#1E4FA8' }}&gt;局部粗筛：砍掉“看着像、其实没对上”的候选&lt;/Text&gt;&#13;&#10;        &lt;Text style={{ fontSize: 15, color: '#8B97A8' }}&gt;06 / 15&lt;/Text&gt;&#13;&#10;    &lt;/Box&gt;&#13;&#10;    &lt;Box style={{ padding: '8px 40px 0px 40px' }}&gt;&#13;&#10;        &lt;Text style={{ fontSize: 20, color: '#4A5568', lineHeight: 1.4 }}&gt;对 20 个候选各跑一次轻量局部匹配，按能对上的关键点数排序，只把前 5 个留给精确匹配。&lt;/Text&gt;&#13;&#10;    &lt;/Box&gt;&#13;&#10;    &lt;Box style={{ padding: '14px 40px 0px 40px', flexDirection: 'row', gap: 20 }}&gt;&#13;&#10;        &lt;Box style={{ width: 600, flexDirection: 'column', gap: 11 }}&gt;&#13;&#10;            &lt;Box style={{ backgroundColor: '#F7F9FC', border: '1px solid #D6DCE5', borderRadius: 6, padding: '9px 16px' }}&gt;&#13;&#10;                &lt;Text style={{ fontSize: 18, color: '#1A2230', lineHeight: 1.45 }}&gt;&lt;b&gt;输入&lt;/b&gt;　① 给出的 20 个候选帧&lt;/Text&gt;&#13;&#10;            &lt;/Box&gt;&#13;&#10;            &lt;Box style={{ backgroundColor: '#F7F9FC', border: '1px solid #D6DCE5', borderRadius: 6, padding: '9px 16px' }}&gt;&#13;&#10;                &lt;Text style={{ fontSize: 18, color: '#1A2230', lineHeight: 1.45 }}&gt;&lt;b&gt;做法&lt;/b&gt;　XFeat 提稀疏关键点，只比坐标一致性，得到内点对数 |M_ij|&lt;/Text&gt;&#13;&#10;            &lt;/Box&gt;&#13;&#10;            &lt;Box style={{ backgroundColor: '#F7F9FC', border: '1px solid #D6DCE5', borderRadius: 6, padding: '9px 16px' }}&gt;&#13;&#10;                &lt;Text style={{ fontSize: 18, color: '#1A2230', lineHeight: 1.45 }}&gt;&lt;b&gt;输出&lt;/b&gt;　5 个候选（外观像 ＋ 确实对上了点）&lt;/Text&gt;&#13;&#10;            &lt;/Box&gt;&#13;&#10;            &lt;Box style={{ backgroundColor: '#F0F5FC', border: '1px solid #3D7BD9', borderRadius: 6, padding: '10px 16px', flexDirection: 'column' }}&gt;&#13;&#10;                &lt;Text style={{ fontSize: 18, color: '#1A2230', lineHeight: 1.45 }}&gt;&lt;b&gt;关键取值&lt;/b&gt;　保留 K′ = 5 个　·　约 0.5 ms / 对&lt;/Text&gt;&#13;&#10;                &lt;Text style={{ fontSize: 16, color: '#4A5568', lineHeight: 1.4, marginTop: 4 }}&gt;这一步故意用“便宜但粗糙”的特征：它的任务只是排序，不是定论&lt;/Text&gt;&#13;&#10;            &lt;/Box&gt;&#13;&#10;        &lt;/Box&gt;&#13;&#10;        &lt;Box style={{ width: 580, flexDirection: 'column' }}&gt;&#13;&#10;            &lt;Image src=&quot;figs/fig2_xfeat.png&quot; style={{ width: 580, height: 362 }} /&gt;&#13;&#10;            &lt;Text style={{ fontSize: 14.5, color: '#8B97A8', marginTop: 5 }}&gt;图 2　20 个候选按内点数排序，只有前 5 个进入下一级。&lt;/Text&gt;&#13;&#10;        &lt;/Box&gt;&#13;&#10;    &lt;/Box&gt;&#13;&#10;    &lt;Box style={{ margin: '12px 40px 0px 40px', backgroundColor: '#F7F9FC', borderLeft: '5px solid #1E4FA8', padding: '10px 18px', flexDirection: 'column' }}&gt;&#13;&#10;        &lt;Image src=&quot;formula/f06.png&quot; style={{ width: 197.5, height: 30.5 }} /&gt;&#13;&#10;        &lt;Text style={{ fontSize: 16.5, color: '#4A5568', lineHeight: 1.4, marginTop: 3 }}&gt;淘汰的正是纯外观检索的典型假阳性：两个角落都“长得像窗台”，但一个点都对不上。&lt;/Text&gt;&#13;&#10;    &lt;/Box&gt;&#13;&#10;    &lt;Box style={{ marginTop: 'auto', padding: '10px 40px 12px 40px' }}&gt;&#13;&#10;        &lt;Text style={{ fontSize: 15, color: '#8B97A8' }}&gt;三级串联的意义：候选集 1000 → 20 → 5 → 1，贵的操作只作用在极小的集合上。&lt;/Text&gt;&#13;&#10;    &lt;/Box&gt;&#13;&#10;&lt;/Slide&gt;&#13;&#10;"/>
+        <p:cNvPr id="396" name="" descr="&lt;Slide style={{ width: '1280px', height: '720px', backgroundColor: '#FFFFFF', padding: '0px', flexDirection: 'column' }}&gt;&#13;&#10;    &lt;Box style={{ width: '1280px', height: '8px', backgroundColor: '#1E4FA8' }} /&gt;&#13;&#10;    &lt;Box style={{ padding: '26px 40px 0px 40px', flexDirection: 'row', justifyContent: 'space-between', alignItems: 'flex-end' }}&gt;&#13;&#10;        &lt;Text style={{ fontSize: 33, fontWeight: 'bold', color: '#1E4FA8' }}&gt;局部粗筛：砍掉“看着像、其实没对上”的候选&lt;/Text&gt;&#13;&#10;        &lt;Text style={{ fontSize: 15, color: '#8B97A8' }}&gt;06 / 15&lt;/Text&gt;&#13;&#10;    &lt;/Box&gt;&#13;&#10;    &lt;Box style={{ padding: '8px 40px 0px 40px' }}&gt;&#13;&#10;        &lt;Text style={{ fontSize: 20, color: '#4A5568', lineHeight: 1.4 }}&gt;对 20 个候选各跑一次轻量局部匹配，按能对上的关键点数排序，只把前 5 个留给精确匹配。&lt;/Text&gt;&#13;&#10;    &lt;/Box&gt;&#13;&#10;    &lt;Box style={{ padding: '14px 40px 0px 40px', flexDirection: 'row', gap: 20 }}&gt;&#13;&#10;        &lt;Box style={{ width: 600, flexDirection: 'column', gap: 11 }}&gt;&#13;&#10;            &lt;Box style={{ backgroundColor: '#F7F9FC', border: '1px solid #D6DCE5', borderRadius: 6, padding: '9px 16px' }}&gt;&#13;&#10;                &lt;Text style={{ fontSize: 18, color: '#1A2230', lineHeight: 1.45 }}&gt;&lt;b&gt;输入&lt;/b&gt;　① 给出的 20 个候选帧&lt;/Text&gt;&#13;&#10;            &lt;/Box&gt;&#13;&#10;            &lt;Box style={{ backgroundColor: '#F7F9FC', border: '1px solid #D6DCE5', borderRadius: 6, padding: '9px 16px' }}&gt;&#13;&#10;                &lt;Text style={{ fontSize: 18, color: '#1A2230', lineHeight: 1.45 }}&gt;&lt;b&gt;做法&lt;/b&gt;　XFeat 提稀疏关键点，只比坐标一致性，得到内点对数 |M_ij|&lt;/Text&gt;&#13;&#10;            &lt;/Box&gt;&#13;&#10;            &lt;Box style={{ backgroundColor: '#F7F9FC', border: '1px solid #D6DCE5', borderRadius: 6, padding: '9px 16px' }}&gt;&#13;&#10;                &lt;Text style={{ fontSize: 18, color: '#1A2230', lineHeight: 1.45 }}&gt;&lt;b&gt;输出&lt;/b&gt;　5 个候选（外观像 ＋ 确实对上了点）&lt;/Text&gt;&#13;&#10;            &lt;/Box&gt;&#13;&#10;            &lt;Box style={{ backgroundColor: '#F0F5FC', border: '1px solid #3D7BD9', borderRadius: 6, padding: '10px 16px', flexDirection: 'column' }}&gt;&#13;&#10;                &lt;Text style={{ fontSize: 18, color: '#1A2230', lineHeight: 1.45 }}&gt;&lt;b&gt;关键取值&lt;/b&gt;　保留 K′ = 5 个　·　约 0.5 ms / 对&lt;/Text&gt;&#13;&#10;                &lt;Text style={{ fontSize: 16, color: '#4A5568', lineHeight: 1.4, marginTop: 4 }}&gt;这一步故意用“便宜但粗糙”的特征：它的任务只是排序，不是定论&lt;/Text&gt;&#13;&#10;            &lt;/Box&gt;&#13;&#10;        &lt;/Box&gt;&#13;&#10;        &lt;Box style={{ width: 580, flexDirection: 'column' }}&gt;&#13;&#10;            &lt;Image src=&quot;figs/fig2_xfeat.png&quot; style={{ width: 580, height: 362 }} /&gt;&#13;&#10;            &lt;Text style={{ fontSize: 14.5, color: '#8B97A8', marginTop: 5 }}&gt;图 2　20 个候选按内点数排序，只有前 5 个进入下一级。&lt;/Text&gt;&#13;&#10;        &lt;/Box&gt;&#13;&#10;    &lt;/Box&gt;&#13;&#10;    &lt;Box style={{ margin: '12px 40px 0px 40px', backgroundColor: '#F7F9FC', borderLeft: '5px solid #1E4FA8', padding: '10px 18px', flexDirection: 'column' }}&gt;&#13;&#10;        &lt;Image src=&quot;formula/f06.png&quot; style={{ width: 197.5, height: 30.5 }} /&gt;&#13;&#10;        &lt;Text style={{ fontSize: 16.5, color: '#4A5568', lineHeight: 1.4, marginTop: 3 }}&gt;淘汰的正是纯外观检索的典型假阳性：两个角落都“长得像窗台”，但一个点都对不上。&lt;/Text&gt;&#13;&#10;    &lt;/Box&gt;&#13;&#10;    &lt;Box style={{ marginTop: 'auto', padding: '10px 40px 12px 40px' }}&gt;&#13;&#10;        &lt;Text style={{ fontSize: 15, color: '#8B97A8' }}&gt;三级串联的意义：候选集 1000 → 20 → 5 → 1，贵的操作只作用在极小的集合上。&lt;/Text&gt;&#13;&#10;    &lt;/Box&gt;&#13;&#10;&lt;/Slide&gt;&#13;&#10;"/>
         <p:cNvGrpSpPr/>
         <p:nvPr/>
       </p:nvGrpSpPr>
@@ -18103,7 +19426,7 @@
       </p:grpSpPr>
       <p:sp>
         <p:nvSpPr>
-          <p:cNvPr id="364" name=""/>
+          <p:cNvPr id="397" name=""/>
           <p:cNvSpPr/>
           <p:nvPr/>
         </p:nvSpPr>
@@ -18127,7 +19450,7 @@
       </p:sp>
       <p:sp>
         <p:nvSpPr>
-          <p:cNvPr id="365" name=""/>
+          <p:cNvPr id="398" name=""/>
           <p:cNvSpPr/>
           <p:nvPr/>
         </p:nvSpPr>
@@ -18151,7 +19474,7 @@
       </p:sp>
       <p:sp>
         <p:nvSpPr>
-          <p:cNvPr id="366" name="" descr="{&quot;isTemplate&quot;:true,&quot;type&quot;:&quot;text&quot;}"/>
+          <p:cNvPr id="399" name="" descr="{&quot;isTemplate&quot;:true,&quot;type&quot;:&quot;text&quot;}"/>
           <p:cNvSpPr txBox="1"/>
           <p:nvPr/>
         </p:nvSpPr>
@@ -18186,7 +19509,7 @@
       </p:sp>
       <p:sp>
         <p:nvSpPr>
-          <p:cNvPr id="367" name="" descr="{&quot;isTemplate&quot;:true,&quot;type&quot;:&quot;text&quot;}"/>
+          <p:cNvPr id="400" name="" descr="{&quot;isTemplate&quot;:true,&quot;type&quot;:&quot;text&quot;}"/>
           <p:cNvSpPr txBox="1"/>
           <p:nvPr/>
         </p:nvSpPr>
@@ -18221,7 +19544,7 @@
       </p:sp>
       <p:sp>
         <p:nvSpPr>
-          <p:cNvPr id="368" name="" descr="{&quot;isTemplate&quot;:true,&quot;type&quot;:&quot;text&quot;}"/>
+          <p:cNvPr id="401" name="" descr="{&quot;isTemplate&quot;:true,&quot;type&quot;:&quot;text&quot;}"/>
           <p:cNvSpPr txBox="1"/>
           <p:nvPr/>
         </p:nvSpPr>
@@ -18296,7 +19619,7 @@
       </p:sp>
       <p:sp>
         <p:nvSpPr>
-          <p:cNvPr id="369" name=""/>
+          <p:cNvPr id="402" name=""/>
           <p:cNvSpPr/>
           <p:nvPr/>
         </p:nvSpPr>
@@ -18327,7 +19650,7 @@
       </p:sp>
       <p:sp>
         <p:nvSpPr>
-          <p:cNvPr id="370" name="" descr="{&quot;isTemplate&quot;:true,&quot;type&quot;:&quot;text&quot;}"/>
+          <p:cNvPr id="403" name="" descr="{&quot;isTemplate&quot;:true,&quot;type&quot;:&quot;text&quot;}"/>
           <p:cNvSpPr txBox="1"/>
           <p:nvPr/>
         </p:nvSpPr>
@@ -18412,7 +19735,7 @@
       </p:sp>
       <p:sp>
         <p:nvSpPr>
-          <p:cNvPr id="371" name=""/>
+          <p:cNvPr id="404" name=""/>
           <p:cNvSpPr/>
           <p:nvPr/>
         </p:nvSpPr>
@@ -18443,7 +19766,7 @@
       </p:sp>
       <p:sp>
         <p:nvSpPr>
-          <p:cNvPr id="372" name="" descr="{&quot;isTemplate&quot;:true,&quot;type&quot;:&quot;text&quot;}"/>
+          <p:cNvPr id="405" name="" descr="{&quot;isTemplate&quot;:true,&quot;type&quot;:&quot;text&quot;}"/>
           <p:cNvSpPr txBox="1"/>
           <p:nvPr/>
         </p:nvSpPr>
@@ -18518,7 +19841,7 @@
       </p:sp>
       <p:sp>
         <p:nvSpPr>
-          <p:cNvPr id="373" name=""/>
+          <p:cNvPr id="406" name=""/>
           <p:cNvSpPr/>
           <p:nvPr/>
         </p:nvSpPr>
@@ -18549,7 +19872,7 @@
       </p:sp>
       <p:sp>
         <p:nvSpPr>
-          <p:cNvPr id="374" name="" descr="{&quot;isTemplate&quot;:true,&quot;type&quot;:&quot;text&quot;}"/>
+          <p:cNvPr id="407" name="" descr="{&quot;isTemplate&quot;:true,&quot;type&quot;:&quot;text&quot;}"/>
           <p:cNvSpPr txBox="1"/>
           <p:nvPr/>
         </p:nvSpPr>
@@ -18654,7 +19977,7 @@
       </p:sp>
       <p:sp>
         <p:nvSpPr>
-          <p:cNvPr id="375" name=""/>
+          <p:cNvPr id="408" name=""/>
           <p:cNvSpPr/>
           <p:nvPr/>
         </p:nvSpPr>
@@ -18685,7 +20008,7 @@
       </p:sp>
       <p:sp>
         <p:nvSpPr>
-          <p:cNvPr id="376" name="" descr="{&quot;isTemplate&quot;:true,&quot;type&quot;:&quot;text&quot;}"/>
+          <p:cNvPr id="409" name="" descr="{&quot;isTemplate&quot;:true,&quot;type&quot;:&quot;text&quot;}"/>
           <p:cNvSpPr txBox="1"/>
           <p:nvPr/>
         </p:nvSpPr>
@@ -18770,7 +20093,7 @@
       </p:sp>
       <p:sp>
         <p:nvSpPr>
-          <p:cNvPr id="377" name="" descr="{&quot;isTemplate&quot;:true,&quot;type&quot;:&quot;text&quot;}"/>
+          <p:cNvPr id="410" name="" descr="{&quot;isTemplate&quot;:true,&quot;type&quot;:&quot;text&quot;}"/>
           <p:cNvSpPr txBox="1"/>
           <p:nvPr/>
         </p:nvSpPr>
@@ -18805,7 +20128,7 @@
       </p:sp>
       <p:pic>
         <p:nvPicPr>
-          <p:cNvPr id="378" name=""/>
+          <p:cNvPr id="411" name=""/>
           <p:cNvPicPr>
             <a:picLocks noChangeAspect="1"/>
           </p:cNvPicPr>
@@ -18831,7 +20154,7 @@
       </p:pic>
       <p:sp>
         <p:nvSpPr>
-          <p:cNvPr id="379" name="" descr="{&quot;isTemplate&quot;:true,&quot;type&quot;:&quot;text&quot;}"/>
+          <p:cNvPr id="412" name="" descr="{&quot;isTemplate&quot;:true,&quot;type&quot;:&quot;text&quot;}"/>
           <p:cNvSpPr txBox="1"/>
           <p:nvPr/>
         </p:nvSpPr>
@@ -18926,7 +20249,7 @@
       </p:sp>
       <p:sp>
         <p:nvSpPr>
-          <p:cNvPr id="380" name=""/>
+          <p:cNvPr id="413" name=""/>
           <p:cNvSpPr/>
           <p:nvPr/>
         </p:nvSpPr>
@@ -18950,7 +20273,7 @@
       </p:sp>
       <p:sp>
         <p:nvSpPr>
-          <p:cNvPr id="381" name=""/>
+          <p:cNvPr id="414" name=""/>
           <p:cNvSpPr/>
           <p:nvPr/>
         </p:nvSpPr>
@@ -18990,7 +20313,7 @@
       </p:sp>
       <p:pic>
         <p:nvPicPr>
-          <p:cNvPr id="382" name=""/>
+          <p:cNvPr id="415" name=""/>
           <p:cNvPicPr>
             <a:picLocks noChangeAspect="1"/>
           </p:cNvPicPr>
@@ -19016,7 +20339,7 @@
       </p:pic>
       <p:sp>
         <p:nvSpPr>
-          <p:cNvPr id="383" name="" descr="{&quot;isTemplate&quot;:true,&quot;type&quot;:&quot;text&quot;}"/>
+          <p:cNvPr id="416" name="" descr="{&quot;isTemplate&quot;:true,&quot;type&quot;:&quot;text&quot;}"/>
           <p:cNvSpPr txBox="1"/>
           <p:nvPr/>
         </p:nvSpPr>
@@ -19051,7 +20374,7 @@
       </p:sp>
       <p:sp>
         <p:nvSpPr>
-          <p:cNvPr id="384" name="" descr="{&quot;isTemplate&quot;:true,&quot;type&quot;:&quot;text&quot;}"/>
+          <p:cNvPr id="417" name="" descr="{&quot;isTemplate&quot;:true,&quot;type&quot;:&quot;text&quot;}"/>
           <p:cNvSpPr txBox="1"/>
           <p:nvPr/>
         </p:nvSpPr>
@@ -19114,7 +20437,7 @@
   <p:cSld>
     <p:spTree>
       <p:nvGrpSpPr>
-        <p:cNvPr id="385" name="" descr="&lt;Slide style={{ width: '1280px', height: '720px', backgroundColor: '#FFFFFF', padding: '0px', flexDirection: 'column' }}&gt;&#13;&#10;    &lt;Box style={{ width: '1280px', height: '8px', backgroundColor: '#1E4FA8' }} /&gt;&#13;&#10;    &lt;Box style={{ padding: '26px 40px 0px 40px', flexDirection: 'row', justifyContent: 'space-between', alignItems: 'flex-end' }}&gt;&#13;&#10;        &lt;Text style={{ fontSize: 33, fontWeight: 'bold', color: '#1E4FA8' }}&gt;精确验证：通过才建边，边就是后面一切判断的依据&lt;/Text&gt;&#13;&#10;        &lt;Text style={{ fontSize: 15, color: '#8B97A8' }}&gt;07 / 15&lt;/Text&gt;&#13;&#10;    &lt;/Box&gt;&#13;&#10;    &lt;Box style={{ padding: '8px 40px 0px 40px' }}&gt;&#13;&#10;        &lt;Text style={{ fontSize: 20, color: '#4A5568', lineHeight: 1.4 }}&gt;对 5 个候选跑 LightGlue 精确配对，RANSAC 剔除外点，内点数超过 500 才写进协视图。&lt;/Text&gt;&#13;&#10;    &lt;/Box&gt;&#13;&#10;    &lt;Box style={{ padding: '14px 40px 0px 40px', flexDirection: 'row', gap: 20 }}&gt;&#13;&#10;        &lt;Box style={{ width: 600, flexDirection: 'column', gap: 11 }}&gt;&#13;&#10;            &lt;Box style={{ backgroundColor: '#F7F9FC', border: '1px solid #D6DCE5', borderRadius: 6, padding: '9px 16px' }}&gt;&#13;&#10;                &lt;Text style={{ fontSize: 18, color: '#1A2230', lineHeight: 1.45 }}&gt;&lt;b&gt;输入&lt;/b&gt;　② 留下的 5 个候选帧&lt;/Text&gt;&#13;&#10;            &lt;/Box&gt;&#13;&#10;            &lt;Box style={{ backgroundColor: '#F7F9FC', border: '1px solid #D6DCE5', borderRadius: 6, padding: '9px 16px' }}&gt;&#13;&#10;                &lt;Text style={{ fontSize: 18, color: '#1A2230', lineHeight: 1.45 }}&gt;&lt;b&gt;做法&lt;/b&gt;　LightGlue 精确配对 ＋ RANSAC 剔外点；内点数 |M_ij| 即“这条边有多可信”&lt;/Text&gt;&#13;&#10;            &lt;/Box&gt;&#13;&#10;            &lt;Box style={{ backgroundColor: '#F7F9FC', border: '1px solid #D6DCE5', borderRadius: 6, padding: '9px 16px' }}&gt;&#13;&#10;                &lt;Text style={{ fontSize: 18, color: '#1A2230', lineHeight: 1.45 }}&gt;&lt;b&gt;输出&lt;/b&gt;　加权协视图 G = (M, E, W)，边权 w_ij = 1/|M_ij|&lt;/Text&gt;&#13;&#10;            &lt;/Box&gt;&#13;&#10;            &lt;Box style={{ backgroundColor: '#F0F5FC', border: '1px solid #3D7BD9', borderRadius: 6, padding: '10px 16px', flexDirection: 'column' }}&gt;&#13;&#10;                &lt;Text style={{ fontSize: 18, color: '#1A2230', lineHeight: 1.45 }}&gt;&lt;b&gt;关键取值&lt;/b&gt;　τ_m = 500 内点　·　min_matches_edge = 500&lt;/Text&gt;&#13;&#10;                &lt;Text style={{ fontSize: 16, color: '#4A5568', lineHeight: 1.4, marginTop: 4 }}&gt;边权取内点数倒数：内点越多边越短，于是图上“最短路”= 最可靠的位姿链&lt;/Text&gt;&#13;&#10;            &lt;/Box&gt;&#13;&#10;        &lt;/Box&gt;&#13;&#10;        &lt;Box style={{ width: 580, flexDirection: 'column' }}&gt;&#13;&#10;            &lt;Image src=&quot;figs/fig3_lightglue.png&quot; style={{ width: 580, height: 362 }} /&gt;&#13;&#10;            &lt;Text style={{ fontSize: 14.5, color: '#8B97A8', marginTop: 5 }}&gt;图 3　绿=内点、红叉=被 RANSAC 剔除；通过的帧对才成为图上的一条边。&lt;/Text&gt;&#13;&#10;        &lt;/Box&gt;&#13;&#10;    &lt;/Box&gt;&#13;&#10;    &lt;Box style={{ margin: '12px 40px 0px 40px', backgroundColor: '#F7F9FC', borderLeft: '5px solid #1E4FA8', padding: '10px 18px', flexDirection: 'column' }}&gt;&#13;&#10;        &lt;Image src=&quot;formula/f07.png&quot; style={{ width: 498.0, height: 30.5 }} /&gt;&#13;&#10;        &lt;Text style={{ fontSize: 16.5, color: '#4A5568', lineHeight: 1.4, marginTop: 3 }}&gt;这是全链唯一产生“共视约束”的地方——后面所有位姿都由这些点对推出来，边建错，后面全歪。&lt;/Text&gt;&#13;&#10;    &lt;/Box&gt;&#13;&#10;    &lt;Box style={{ marginTop: 'auto', padding: '10px 40px 12px 40px' }}&gt;&#13;&#10;        &lt;Text style={{ fontSize: 15, color: '#8B97A8' }}&gt;到这一步为止，一张图还没解；但“谁和谁能一起算”已经确定下来了。&lt;/Text&gt;&#13;&#10;    &lt;/Box&gt;&#13;&#10;&lt;/Slide&gt;&#13;&#10;"/>
+        <p:cNvPr id="418" name="" descr="&lt;Slide style={{ width: '1280px', height: '720px', backgroundColor: '#FFFFFF', padding: '0px', flexDirection: 'column' }}&gt;&#13;&#10;    &lt;Box style={{ width: '1280px', height: '8px', backgroundColor: '#1E4FA8' }} /&gt;&#13;&#10;    &lt;Box style={{ padding: '26px 40px 0px 40px', flexDirection: 'row', justifyContent: 'space-between', alignItems: 'flex-end' }}&gt;&#13;&#10;        &lt;Text style={{ fontSize: 33, fontWeight: 'bold', color: '#1E4FA8' }}&gt;精确验证：通过才建边，边就是后面一切判断的依据&lt;/Text&gt;&#13;&#10;        &lt;Text style={{ fontSize: 15, color: '#8B97A8' }}&gt;07 / 15&lt;/Text&gt;&#13;&#10;    &lt;/Box&gt;&#13;&#10;    &lt;Box style={{ padding: '8px 40px 0px 40px' }}&gt;&#13;&#10;        &lt;Text style={{ fontSize: 20, color: '#4A5568', lineHeight: 1.4 }}&gt;对 5 个候选跑 LightGlue 精确配对，RANSAC 剔除外点，内点数超过 500 才写进协视图。&lt;/Text&gt;&#13;&#10;    &lt;/Box&gt;&#13;&#10;    &lt;Box style={{ padding: '14px 40px 0px 40px', flexDirection: 'row', gap: 20 }}&gt;&#13;&#10;        &lt;Box style={{ width: 600, flexDirection: 'column', gap: 11 }}&gt;&#13;&#10;            &lt;Box style={{ backgroundColor: '#F7F9FC', border: '1px solid #D6DCE5', borderRadius: 6, padding: '9px 16px' }}&gt;&#13;&#10;                &lt;Text style={{ fontSize: 18, color: '#1A2230', lineHeight: 1.45 }}&gt;&lt;b&gt;输入&lt;/b&gt;　② 留下的 5 个候选帧&lt;/Text&gt;&#13;&#10;            &lt;/Box&gt;&#13;&#10;            &lt;Box style={{ backgroundColor: '#F7F9FC', border: '1px solid #D6DCE5', borderRadius: 6, padding: '9px 16px' }}&gt;&#13;&#10;                &lt;Text style={{ fontSize: 18, color: '#1A2230', lineHeight: 1.45 }}&gt;&lt;b&gt;做法&lt;/b&gt;　LightGlue 精确配对 ＋ RANSAC 剔外点；内点数 |M_ij| 即“这条边有多可信”&lt;/Text&gt;&#13;&#10;            &lt;/Box&gt;&#13;&#10;            &lt;Box style={{ backgroundColor: '#F7F9FC', border: '1px solid #D6DCE5', borderRadius: 6, padding: '9px 16px' }}&gt;&#13;&#10;                &lt;Text style={{ fontSize: 18, color: '#1A2230', lineHeight: 1.45 }}&gt;&lt;b&gt;输出&lt;/b&gt;　加权协视图 G = (M, E, W)，边权 w_ij = 1/|M_ij|&lt;/Text&gt;&#13;&#10;            &lt;/Box&gt;&#13;&#10;            &lt;Box style={{ backgroundColor: '#F0F5FC', border: '1px solid #3D7BD9', borderRadius: 6, padding: '10px 16px', flexDirection: 'column' }}&gt;&#13;&#10;                &lt;Text style={{ fontSize: 18, color: '#1A2230', lineHeight: 1.45 }}&gt;&lt;b&gt;关键取值&lt;/b&gt;　τ_m = 500 内点　·　min_matches_edge = 500&lt;/Text&gt;&#13;&#10;                &lt;Text style={{ fontSize: 16, color: '#4A5568', lineHeight: 1.4, marginTop: 4 }}&gt;边权取内点数倒数：内点越多边越短，于是图上“最短路”= 最可靠的位姿链&lt;/Text&gt;&#13;&#10;            &lt;/Box&gt;&#13;&#10;        &lt;/Box&gt;&#13;&#10;        &lt;Box style={{ width: 580, flexDirection: 'column' }}&gt;&#13;&#10;            &lt;Image src=&quot;figs/fig3_lightglue.png&quot; style={{ width: 580, height: 362 }} /&gt;&#13;&#10;            &lt;Text style={{ fontSize: 14.5, color: '#8B97A8', marginTop: 5 }}&gt;图 3　绿=内点、红叉=被 RANSAC 剔除；通过的帧对才成为图上的一条边。&lt;/Text&gt;&#13;&#10;        &lt;/Box&gt;&#13;&#10;    &lt;/Box&gt;&#13;&#10;    &lt;Box style={{ margin: '12px 40px 0px 40px', backgroundColor: '#F7F9FC', borderLeft: '5px solid #1E4FA8', padding: '10px 18px', flexDirection: 'column' }}&gt;&#13;&#10;        &lt;Image src=&quot;formula/f07.png&quot; style={{ width: 498.0, height: 30.5 }} /&gt;&#13;&#10;        &lt;Text style={{ fontSize: 16.5, color: '#4A5568', lineHeight: 1.4, marginTop: 3 }}&gt;这是全链唯一产生“共视约束”的地方——后面所有位姿都由这些点对推出来，边建错，后面全歪。&lt;/Text&gt;&#13;&#10;    &lt;/Box&gt;&#13;&#10;    &lt;Box style={{ marginTop: 'auto', padding: '10px 40px 12px 40px' }}&gt;&#13;&#10;        &lt;Text style={{ fontSize: 15, color: '#8B97A8' }}&gt;到这一步为止，一张图还没解；但“谁和谁能一起算”已经确定下来了。&lt;/Text&gt;&#13;&#10;    &lt;/Box&gt;&#13;&#10;&lt;/Slide&gt;&#13;&#10;"/>
         <p:cNvGrpSpPr/>
         <p:nvPr/>
       </p:nvGrpSpPr>
@@ -19128,7 +20451,7 @@
       </p:grpSpPr>
       <p:sp>
         <p:nvSpPr>
-          <p:cNvPr id="386" name=""/>
+          <p:cNvPr id="419" name=""/>
           <p:cNvSpPr/>
           <p:nvPr/>
         </p:nvSpPr>
@@ -19152,7 +20475,7 @@
       </p:sp>
       <p:sp>
         <p:nvSpPr>
-          <p:cNvPr id="387" name=""/>
+          <p:cNvPr id="420" name=""/>
           <p:cNvSpPr/>
           <p:nvPr/>
         </p:nvSpPr>
@@ -19176,7 +20499,7 @@
       </p:sp>
       <p:sp>
         <p:nvSpPr>
-          <p:cNvPr id="388" name="" descr="{&quot;isTemplate&quot;:true,&quot;type&quot;:&quot;text&quot;}"/>
+          <p:cNvPr id="421" name="" descr="{&quot;isTemplate&quot;:true,&quot;type&quot;:&quot;text&quot;}"/>
           <p:cNvSpPr txBox="1"/>
           <p:nvPr/>
         </p:nvSpPr>
@@ -19211,7 +20534,7 @@
       </p:sp>
       <p:sp>
         <p:nvSpPr>
-          <p:cNvPr id="389" name="" descr="{&quot;isTemplate&quot;:true,&quot;type&quot;:&quot;text&quot;}"/>
+          <p:cNvPr id="422" name="" descr="{&quot;isTemplate&quot;:true,&quot;type&quot;:&quot;text&quot;}"/>
           <p:cNvSpPr txBox="1"/>
           <p:nvPr/>
         </p:nvSpPr>
@@ -19246,7 +20569,7 @@
       </p:sp>
       <p:sp>
         <p:nvSpPr>
-          <p:cNvPr id="390" name="" descr="{&quot;isTemplate&quot;:true,&quot;type&quot;:&quot;text&quot;}"/>
+          <p:cNvPr id="423" name="" descr="{&quot;isTemplate&quot;:true,&quot;type&quot;:&quot;text&quot;}"/>
           <p:cNvSpPr txBox="1"/>
           <p:nvPr/>
         </p:nvSpPr>
@@ -19361,7 +20684,7 @@
       </p:sp>
       <p:sp>
         <p:nvSpPr>
-          <p:cNvPr id="391" name=""/>
+          <p:cNvPr id="424" name=""/>
           <p:cNvSpPr/>
           <p:nvPr/>
         </p:nvSpPr>
@@ -19392,7 +20715,7 @@
       </p:sp>
       <p:sp>
         <p:nvSpPr>
-          <p:cNvPr id="392" name="" descr="{&quot;isTemplate&quot;:true,&quot;type&quot;:&quot;text&quot;}"/>
+          <p:cNvPr id="425" name="" descr="{&quot;isTemplate&quot;:true,&quot;type&quot;:&quot;text&quot;}"/>
           <p:cNvSpPr txBox="1"/>
           <p:nvPr/>
         </p:nvSpPr>
@@ -19477,7 +20800,7 @@
       </p:sp>
       <p:sp>
         <p:nvSpPr>
-          <p:cNvPr id="393" name=""/>
+          <p:cNvPr id="426" name=""/>
           <p:cNvSpPr/>
           <p:nvPr/>
         </p:nvSpPr>
@@ -19508,7 +20831,7 @@
       </p:sp>
       <p:sp>
         <p:nvSpPr>
-          <p:cNvPr id="394" name="" descr="{&quot;isTemplate&quot;:true,&quot;type&quot;:&quot;text&quot;}"/>
+          <p:cNvPr id="427" name="" descr="{&quot;isTemplate&quot;:true,&quot;type&quot;:&quot;text&quot;}"/>
           <p:cNvSpPr txBox="1"/>
           <p:nvPr/>
         </p:nvSpPr>
@@ -19635,7 +20958,7 @@
       </p:sp>
       <p:sp>
         <p:nvSpPr>
-          <p:cNvPr id="395" name=""/>
+          <p:cNvPr id="428" name=""/>
           <p:cNvSpPr/>
           <p:nvPr/>
         </p:nvSpPr>
@@ -19666,7 +20989,7 @@
       </p:sp>
       <p:sp>
         <p:nvSpPr>
-          <p:cNvPr id="396" name="" descr="{&quot;isTemplate&quot;:true,&quot;type&quot;:&quot;text&quot;}"/>
+          <p:cNvPr id="429" name="" descr="{&quot;isTemplate&quot;:true,&quot;type&quot;:&quot;text&quot;}"/>
           <p:cNvSpPr txBox="1"/>
           <p:nvPr/>
         </p:nvSpPr>
@@ -19741,7 +21064,7 @@
       </p:sp>
       <p:sp>
         <p:nvSpPr>
-          <p:cNvPr id="397" name=""/>
+          <p:cNvPr id="430" name=""/>
           <p:cNvSpPr/>
           <p:nvPr/>
         </p:nvSpPr>
@@ -19772,7 +21095,7 @@
       </p:sp>
       <p:sp>
         <p:nvSpPr>
-          <p:cNvPr id="398" name="" descr="{&quot;isTemplate&quot;:true,&quot;type&quot;:&quot;text&quot;}"/>
+          <p:cNvPr id="431" name="" descr="{&quot;isTemplate&quot;:true,&quot;type&quot;:&quot;text&quot;}"/>
           <p:cNvSpPr txBox="1"/>
           <p:nvPr/>
         </p:nvSpPr>
@@ -19847,7 +21170,7 @@
       </p:sp>
       <p:sp>
         <p:nvSpPr>
-          <p:cNvPr id="399" name="" descr="{&quot;isTemplate&quot;:true,&quot;type&quot;:&quot;text&quot;}"/>
+          <p:cNvPr id="432" name="" descr="{&quot;isTemplate&quot;:true,&quot;type&quot;:&quot;text&quot;}"/>
           <p:cNvSpPr txBox="1"/>
           <p:nvPr/>
         </p:nvSpPr>
@@ -19902,7 +21225,7 @@
       </p:sp>
       <p:pic>
         <p:nvPicPr>
-          <p:cNvPr id="400" name=""/>
+          <p:cNvPr id="433" name=""/>
           <p:cNvPicPr>
             <a:picLocks noChangeAspect="1"/>
           </p:cNvPicPr>
@@ -19928,7 +21251,7 @@
       </p:pic>
       <p:sp>
         <p:nvSpPr>
-          <p:cNvPr id="401" name="" descr="{&quot;isTemplate&quot;:true,&quot;type&quot;:&quot;text&quot;}"/>
+          <p:cNvPr id="434" name="" descr="{&quot;isTemplate&quot;:true,&quot;type&quot;:&quot;text&quot;}"/>
           <p:cNvSpPr txBox="1"/>
           <p:nvPr/>
         </p:nvSpPr>
@@ -20043,7 +21366,7 @@
       </p:sp>
       <p:sp>
         <p:nvSpPr>
-          <p:cNvPr id="402" name=""/>
+          <p:cNvPr id="435" name=""/>
           <p:cNvSpPr/>
           <p:nvPr/>
         </p:nvSpPr>
@@ -20067,7 +21390,7 @@
       </p:sp>
       <p:sp>
         <p:nvSpPr>
-          <p:cNvPr id="403" name=""/>
+          <p:cNvPr id="436" name=""/>
           <p:cNvSpPr/>
           <p:nvPr/>
         </p:nvSpPr>
@@ -20107,7 +21430,7 @@
       </p:sp>
       <p:pic>
         <p:nvPicPr>
-          <p:cNvPr id="404" name=""/>
+          <p:cNvPr id="437" name=""/>
           <p:cNvPicPr>
             <a:picLocks noChangeAspect="1"/>
           </p:cNvPicPr>
@@ -20133,7 +21456,7 @@
       </p:pic>
       <p:sp>
         <p:nvSpPr>
-          <p:cNvPr id="405" name="" descr="{&quot;isTemplate&quot;:true,&quot;type&quot;:&quot;text&quot;}"/>
+          <p:cNvPr id="438" name="" descr="{&quot;isTemplate&quot;:true,&quot;type&quot;:&quot;text&quot;}"/>
           <p:cNvSpPr txBox="1"/>
           <p:nvPr/>
         </p:nvSpPr>
@@ -20168,7 +21491,7 @@
       </p:sp>
       <p:sp>
         <p:nvSpPr>
-          <p:cNvPr id="406" name="" descr="{&quot;isTemplate&quot;:true,&quot;type&quot;:&quot;text&quot;}"/>
+          <p:cNvPr id="439" name="" descr="{&quot;isTemplate&quot;:true,&quot;type&quot;:&quot;text&quot;}"/>
           <p:cNvSpPr txBox="1"/>
           <p:nvPr/>
         </p:nvSpPr>
@@ -20211,7 +21534,7 @@
   <p:cSld>
     <p:spTree>
       <p:nvGrpSpPr>
-        <p:cNvPr id="407" name="" descr="&lt;Slide style={{ width: '1280px', height: '720px', backgroundColor: '#FFFFFF', padding: '0px', flexDirection: 'column' }}&gt;&#13;&#10;    &lt;Box style={{ width: '1280px', height: '8px', backgroundColor: '#1E4FA8' }} /&gt;&#13;&#10;    &lt;Box style={{ padding: '26px 40px 0px 40px', flexDirection: 'row', justifyContent: 'space-between', alignItems: 'flex-end' }}&gt;&#13;&#10;        &lt;Text style={{ fontSize: 33, fontWeight: 'bold', color: '#1E4FA8' }}&gt;选窗：从图里挑出最该一起优化的 20 帧&lt;/Text&gt;&#13;&#10;        &lt;Text style={{ fontSize: 15, color: '#8B97A8' }}&gt;08 / 15&lt;/Text&gt;&#13;&#10;    &lt;/Box&gt;&#13;&#10;    &lt;Box style={{ padding: '8px 40px 0px 40px' }}&gt;&#13;&#10;        &lt;Text style={{ fontSize: 20, color: '#4A5568', lineHeight: 1.4 }}&gt;不是“最近 20 帧”，而是“和当前集合连接最强的那个”——一次加一个，贪心扩张到 20 个。&lt;/Text&gt;&#13;&#10;    &lt;/Box&gt;&#13;&#10;    &lt;Box style={{ padding: '14px 40px 0px 40px', flexDirection: 'row', gap: 20 }}&gt;&#13;&#10;        &lt;Box style={{ width: 600, flexDirection: 'column', gap: 11 }}&gt;&#13;&#10;            &lt;Box style={{ backgroundColor: '#F7F9FC', border: '1px solid #D6DCE5', borderRadius: 6, padding: '9px 16px' }}&gt;&#13;&#10;                &lt;Text style={{ fontSize: 18, color: '#1A2230', lineHeight: 1.45 }}&gt;&lt;b&gt;输入&lt;/b&gt;　③ 更新后的加权协视图&lt;/Text&gt;&#13;&#10;            &lt;/Box&gt;&#13;&#10;            &lt;Box style={{ backgroundColor: '#F7F9FC', border: '1px solid #D6DCE5', borderRadius: 6, padding: '9px 16px' }}&gt;&#13;&#10;                &lt;Text style={{ fontSize: 18, color: '#1A2230', lineHeight: 1.45 }}&gt;&lt;b&gt;做法&lt;/b&gt;　每步选“与已选集合累计内点数最大”的节点加入，直到凑满 N&lt;/Text&gt;&#13;&#10;            &lt;/Box&gt;&#13;&#10;            &lt;Box style={{ backgroundColor: '#F7F9FC', border: '1px solid #D6DCE5', borderRadius: 6, padding: '9px 16px' }}&gt;&#13;&#10;                &lt;Text style={{ fontSize: 18, color: '#1A2230', lineHeight: 1.45 }}&gt;&lt;b&gt;输出&lt;/b&gt;　局部 BA 的变量集合 S（这一步只决定“算谁”，不动数值）&lt;/Text&gt;&#13;&#10;            &lt;/Box&gt;&#13;&#10;            &lt;Box style={{ backgroundColor: '#F0F5FC', border: '1px solid #3D7BD9', borderRadius: 6, padding: '10px 16px', flexDirection: 'column' }}&gt;&#13;&#10;                &lt;Text style={{ fontSize: 18, color: '#1A2230', lineHeight: 1.45 }}&gt;&lt;b&gt;关键取值&lt;/b&gt;　N = 20 帧　·　num_prev_keyframes_miniba_incr = 5&lt;/Text&gt;&#13;&#10;                &lt;Text style={{ fontSize: 16, color: '#4A5568', lineHeight: 1.4, marginTop: 4 }}&gt;每个节点平均只有约 10 条边，所以一次 argmax 的开销可以忽略&lt;/Text&gt;&#13;&#10;            &lt;/Box&gt;&#13;&#10;        &lt;/Box&gt;&#13;&#10;        &lt;Box style={{ width: 580, flexDirection: 'column' }}&gt;&#13;&#10;            &lt;Image src=&quot;figs/fig4_window.png&quot; style={{ width: 580, height: 362 }} /&gt;&#13;&#10;            &lt;Text style={{ fontSize: 14.5, color: '#8B97A8', marginTop: 5 }}&gt;图 4　实心=已选，红圈=本轮 argmax；贪心比全局最优便宜得多。&lt;/Text&gt;&#13;&#10;        &lt;/Box&gt;&#13;&#10;    &lt;/Box&gt;&#13;&#10;    &lt;Box style={{ margin: '12px 40px 0px 40px', backgroundColor: '#F7F9FC', borderLeft: '5px solid #1E4FA8', padding: '10px 18px', flexDirection: 'column' }}&gt;&#13;&#10;        &lt;Image src=&quot;formula/f08.png&quot; style={{ width: 437.0, height: 67.5 }} /&gt;&#13;&#10;        &lt;Text style={{ fontSize: 16.5, color: '#4A5568', lineHeight: 1.4, marginTop: 3 }}&gt;消融 NoKFSelection：PSNR 26.29 → 24.56 dB。选窗比匹配本身更影响最终质量——窗选错，后面怎么优化都救不回。&lt;/Text&gt;&#13;&#10;    &lt;/Box&gt;&#13;&#10;    &lt;Box style={{ marginTop: 'auto', padding: '10px 40px 12px 40px' }}&gt;&#13;&#10;        &lt;Text style={{ fontSize: 15, color: '#8B97A8' }}&gt;前四步合起来只回答一件事：哪些帧该放到同一张桌子上一起算。&lt;/Text&gt;&#13;&#10;    &lt;/Box&gt;&#13;&#10;&lt;/Slide&gt;&#13;&#10;"/>
+        <p:cNvPr id="440" name="" descr="&lt;Slide style={{ width: '1280px', height: '720px', backgroundColor: '#FFFFFF', padding: '0px', flexDirection: 'column' }}&gt;&#13;&#10;    &lt;Box style={{ width: '1280px', height: '8px', backgroundColor: '#1E4FA8' }} /&gt;&#13;&#10;    &lt;Box style={{ padding: '26px 40px 0px 40px', flexDirection: 'row', justifyContent: 'space-between', alignItems: 'flex-end' }}&gt;&#13;&#10;        &lt;Text style={{ fontSize: 33, fontWeight: 'bold', color: '#1E4FA8' }}&gt;选窗：从图里挑出最该一起优化的 20 帧&lt;/Text&gt;&#13;&#10;        &lt;Text style={{ fontSize: 15, color: '#8B97A8' }}&gt;08 / 15&lt;/Text&gt;&#13;&#10;    &lt;/Box&gt;&#13;&#10;    &lt;Box style={{ padding: '8px 40px 0px 40px' }}&gt;&#13;&#10;        &lt;Text style={{ fontSize: 20, color: '#4A5568', lineHeight: 1.4 }}&gt;不是“最近 20 帧”，而是“和当前集合连接最强的那个”——一次加一个，贪心扩张到 20 个。&lt;/Text&gt;&#13;&#10;    &lt;/Box&gt;&#13;&#10;    &lt;Box style={{ padding: '14px 40px 0px 40px', flexDirection: 'row', gap: 20 }}&gt;&#13;&#10;        &lt;Box style={{ width: 600, flexDirection: 'column', gap: 11 }}&gt;&#13;&#10;            &lt;Box style={{ backgroundColor: '#F7F9FC', border: '1px solid #D6DCE5', borderRadius: 6, padding: '9px 16px' }}&gt;&#13;&#10;                &lt;Text style={{ fontSize: 18, color: '#1A2230', lineHeight: 1.45 }}&gt;&lt;b&gt;输入&lt;/b&gt;　③ 更新后的加权协视图&lt;/Text&gt;&#13;&#10;            &lt;/Box&gt;&#13;&#10;            &lt;Box style={{ backgroundColor: '#F7F9FC', border: '1px solid #D6DCE5', borderRadius: 6, padding: '9px 16px' }}&gt;&#13;&#10;                &lt;Text style={{ fontSize: 18, color: '#1A2230', lineHeight: 1.45 }}&gt;&lt;b&gt;做法&lt;/b&gt;　每步选“与已选集合累计内点数最大”的节点加入，直到凑满 N&lt;/Text&gt;&#13;&#10;            &lt;/Box&gt;&#13;&#10;            &lt;Box style={{ backgroundColor: '#F7F9FC', border: '1px solid #D6DCE5', borderRadius: 6, padding: '9px 16px' }}&gt;&#13;&#10;                &lt;Text style={{ fontSize: 18, color: '#1A2230', lineHeight: 1.45 }}&gt;&lt;b&gt;输出&lt;/b&gt;　局部 BA 的变量集合 S（这一步只决定“算谁”，不动数值）&lt;/Text&gt;&#13;&#10;            &lt;/Box&gt;&#13;&#10;            &lt;Box style={{ backgroundColor: '#F0F5FC', border: '1px solid #3D7BD9', borderRadius: 6, padding: '10px 16px', flexDirection: 'column' }}&gt;&#13;&#10;                &lt;Text style={{ fontSize: 18, color: '#1A2230', lineHeight: 1.45 }}&gt;&lt;b&gt;关键取值&lt;/b&gt;　N = 20 帧　·　num_prev_keyframes_miniba_incr = 5&lt;/Text&gt;&#13;&#10;                &lt;Text style={{ fontSize: 16, color: '#4A5568', lineHeight: 1.4, marginTop: 4 }}&gt;每个节点平均只有约 10 条边，所以一次 argmax 的开销可以忽略&lt;/Text&gt;&#13;&#10;            &lt;/Box&gt;&#13;&#10;        &lt;/Box&gt;&#13;&#10;        &lt;Box style={{ width: 580, flexDirection: 'column' }}&gt;&#13;&#10;            &lt;Image src=&quot;figs/fig4_window.png&quot; style={{ width: 580, height: 362 }} /&gt;&#13;&#10;            &lt;Text style={{ fontSize: 14.5, color: '#8B97A8', marginTop: 5 }}&gt;图 4　实心=已选，红圈=本轮 argmax；贪心比全局最优便宜得多。&lt;/Text&gt;&#13;&#10;        &lt;/Box&gt;&#13;&#10;    &lt;/Box&gt;&#13;&#10;    &lt;Box style={{ margin: '12px 40px 0px 40px', backgroundColor: '#F7F9FC', borderLeft: '5px solid #1E4FA8', padding: '10px 18px', flexDirection: 'column' }}&gt;&#13;&#10;        &lt;Image src=&quot;formula/f08.png&quot; style={{ width: 437.0, height: 67.5 }} /&gt;&#13;&#10;        &lt;Text style={{ fontSize: 16.5, color: '#4A5568', lineHeight: 1.4, marginTop: 3 }}&gt;消融 NoKFSelection：PSNR 26.29 → 24.56 dB。选窗比匹配本身更影响最终质量——窗选错，后面怎么优化都救不回。&lt;/Text&gt;&#13;&#10;    &lt;/Box&gt;&#13;&#10;    &lt;Box style={{ marginTop: 'auto', padding: '10px 40px 12px 40px' }}&gt;&#13;&#10;        &lt;Text style={{ fontSize: 15, color: '#8B97A8' }}&gt;前四步合起来只回答一件事：哪些帧该放到同一张桌子上一起算。&lt;/Text&gt;&#13;&#10;    &lt;/Box&gt;&#13;&#10;&lt;/Slide&gt;&#13;&#10;"/>
         <p:cNvGrpSpPr/>
         <p:nvPr/>
       </p:nvGrpSpPr>
@@ -20225,7 +21548,7 @@
       </p:grpSpPr>
       <p:sp>
         <p:nvSpPr>
-          <p:cNvPr id="408" name=""/>
+          <p:cNvPr id="441" name=""/>
           <p:cNvSpPr/>
           <p:nvPr/>
         </p:nvSpPr>
@@ -20249,7 +21572,7 @@
       </p:sp>
       <p:sp>
         <p:nvSpPr>
-          <p:cNvPr id="409" name=""/>
+          <p:cNvPr id="442" name=""/>
           <p:cNvSpPr/>
           <p:nvPr/>
         </p:nvSpPr>
@@ -20273,7 +21596,7 @@
       </p:sp>
       <p:sp>
         <p:nvSpPr>
-          <p:cNvPr id="410" name="" descr="{&quot;isTemplate&quot;:true,&quot;type&quot;:&quot;text&quot;}"/>
+          <p:cNvPr id="443" name="" descr="{&quot;isTemplate&quot;:true,&quot;type&quot;:&quot;text&quot;}"/>
           <p:cNvSpPr txBox="1"/>
           <p:nvPr/>
         </p:nvSpPr>
@@ -20328,7 +21651,7 @@
       </p:sp>
       <p:sp>
         <p:nvSpPr>
-          <p:cNvPr id="411" name="" descr="{&quot;isTemplate&quot;:true,&quot;type&quot;:&quot;text&quot;}"/>
+          <p:cNvPr id="444" name="" descr="{&quot;isTemplate&quot;:true,&quot;type&quot;:&quot;text&quot;}"/>
           <p:cNvSpPr txBox="1"/>
           <p:nvPr/>
         </p:nvSpPr>
@@ -20363,7 +21686,7 @@
       </p:sp>
       <p:sp>
         <p:nvSpPr>
-          <p:cNvPr id="412" name="" descr="{&quot;isTemplate&quot;:true,&quot;type&quot;:&quot;text&quot;}"/>
+          <p:cNvPr id="445" name="" descr="{&quot;isTemplate&quot;:true,&quot;type&quot;:&quot;text&quot;}"/>
           <p:cNvSpPr txBox="1"/>
           <p:nvPr/>
         </p:nvSpPr>
@@ -20438,7 +21761,7 @@
       </p:sp>
       <p:sp>
         <p:nvSpPr>
-          <p:cNvPr id="413" name=""/>
+          <p:cNvPr id="446" name=""/>
           <p:cNvSpPr/>
           <p:nvPr/>
         </p:nvSpPr>
@@ -20469,7 +21792,7 @@
       </p:sp>
       <p:sp>
         <p:nvSpPr>
-          <p:cNvPr id="414" name="" descr="{&quot;isTemplate&quot;:true,&quot;type&quot;:&quot;text&quot;}"/>
+          <p:cNvPr id="447" name="" descr="{&quot;isTemplate&quot;:true,&quot;type&quot;:&quot;text&quot;}"/>
           <p:cNvSpPr txBox="1"/>
           <p:nvPr/>
         </p:nvSpPr>
@@ -20534,7 +21857,7 @@
       </p:sp>
       <p:sp>
         <p:nvSpPr>
-          <p:cNvPr id="415" name=""/>
+          <p:cNvPr id="448" name=""/>
           <p:cNvSpPr/>
           <p:nvPr/>
         </p:nvSpPr>
@@ -20565,7 +21888,7 @@
       </p:sp>
       <p:sp>
         <p:nvSpPr>
-          <p:cNvPr id="416" name="" descr="{&quot;isTemplate&quot;:true,&quot;type&quot;:&quot;text&quot;}"/>
+          <p:cNvPr id="449" name="" descr="{&quot;isTemplate&quot;:true,&quot;type&quot;:&quot;text&quot;}"/>
           <p:cNvSpPr txBox="1"/>
           <p:nvPr/>
         </p:nvSpPr>
@@ -20620,7 +21943,7 @@
       </p:sp>
       <p:sp>
         <p:nvSpPr>
-          <p:cNvPr id="417" name=""/>
+          <p:cNvPr id="450" name=""/>
           <p:cNvSpPr/>
           <p:nvPr/>
         </p:nvSpPr>
@@ -20651,7 +21974,7 @@
       </p:sp>
       <p:sp>
         <p:nvSpPr>
-          <p:cNvPr id="418" name="" descr="{&quot;isTemplate&quot;:true,&quot;type&quot;:&quot;text&quot;}"/>
+          <p:cNvPr id="451" name="" descr="{&quot;isTemplate&quot;:true,&quot;type&quot;:&quot;text&quot;}"/>
           <p:cNvSpPr txBox="1"/>
           <p:nvPr/>
         </p:nvSpPr>
@@ -20736,7 +22059,7 @@
       </p:sp>
       <p:sp>
         <p:nvSpPr>
-          <p:cNvPr id="419" name=""/>
+          <p:cNvPr id="452" name=""/>
           <p:cNvSpPr/>
           <p:nvPr/>
         </p:nvSpPr>
@@ -20767,7 +22090,7 @@
       </p:sp>
       <p:sp>
         <p:nvSpPr>
-          <p:cNvPr id="420" name="" descr="{&quot;isTemplate&quot;:true,&quot;type&quot;:&quot;text&quot;}"/>
+          <p:cNvPr id="453" name="" descr="{&quot;isTemplate&quot;:true,&quot;type&quot;:&quot;text&quot;}"/>
           <p:cNvSpPr txBox="1"/>
           <p:nvPr/>
         </p:nvSpPr>
@@ -20842,7 +22165,7 @@
       </p:sp>
       <p:sp>
         <p:nvSpPr>
-          <p:cNvPr id="421" name="" descr="{&quot;isTemplate&quot;:true,&quot;type&quot;:&quot;text&quot;}"/>
+          <p:cNvPr id="454" name="" descr="{&quot;isTemplate&quot;:true,&quot;type&quot;:&quot;text&quot;}"/>
           <p:cNvSpPr txBox="1"/>
           <p:nvPr/>
         </p:nvSpPr>
@@ -20917,7 +22240,7 @@
       </p:sp>
       <p:pic>
         <p:nvPicPr>
-          <p:cNvPr id="422" name=""/>
+          <p:cNvPr id="455" name=""/>
           <p:cNvPicPr>
             <a:picLocks noChangeAspect="1"/>
           </p:cNvPicPr>
@@ -20943,7 +22266,7 @@
       </p:pic>
       <p:sp>
         <p:nvSpPr>
-          <p:cNvPr id="423" name="" descr="{&quot;isTemplate&quot;:true,&quot;type&quot;:&quot;text&quot;}"/>
+          <p:cNvPr id="456" name="" descr="{&quot;isTemplate&quot;:true,&quot;type&quot;:&quot;text&quot;}"/>
           <p:cNvSpPr txBox="1"/>
           <p:nvPr/>
         </p:nvSpPr>
@@ -21058,7 +22381,7 @@
       </p:sp>
       <p:sp>
         <p:nvSpPr>
-          <p:cNvPr id="424" name=""/>
+          <p:cNvPr id="457" name=""/>
           <p:cNvSpPr/>
           <p:nvPr/>
         </p:nvSpPr>
@@ -21082,7 +22405,7 @@
       </p:sp>
       <p:sp>
         <p:nvSpPr>
-          <p:cNvPr id="425" name=""/>
+          <p:cNvPr id="458" name=""/>
           <p:cNvSpPr/>
           <p:nvPr/>
         </p:nvSpPr>
@@ -21122,7 +22445,7 @@
       </p:sp>
       <p:pic>
         <p:nvPicPr>
-          <p:cNvPr id="426" name=""/>
+          <p:cNvPr id="459" name=""/>
           <p:cNvPicPr>
             <a:picLocks noChangeAspect="1"/>
           </p:cNvPicPr>
@@ -21148,7 +22471,7 @@
       </p:pic>
       <p:sp>
         <p:nvSpPr>
-          <p:cNvPr id="427" name="" descr="{&quot;isTemplate&quot;:true,&quot;type&quot;:&quot;text&quot;}"/>
+          <p:cNvPr id="460" name="" descr="{&quot;isTemplate&quot;:true,&quot;type&quot;:&quot;text&quot;}"/>
           <p:cNvSpPr txBox="1"/>
           <p:nvPr/>
         </p:nvSpPr>
@@ -21223,7 +22546,7 @@
       </p:sp>
       <p:sp>
         <p:nvSpPr>
-          <p:cNvPr id="428" name="" descr="{&quot;isTemplate&quot;:true,&quot;type&quot;:&quot;text&quot;}"/>
+          <p:cNvPr id="461" name="" descr="{&quot;isTemplate&quot;:true,&quot;type&quot;:&quot;text&quot;}"/>
           <p:cNvSpPr txBox="1"/>
           <p:nvPr/>
         </p:nvSpPr>
@@ -21266,7 +22589,7 @@
   <p:cSld>
     <p:spTree>
       <p:nvGrpSpPr>
-        <p:cNvPr id="429" name="" descr="&lt;Slide style={{ width: '1280px', height: '720px', backgroundColor: '#FFFFFF', padding: '0px', flexDirection: 'column' }}&gt;&#13;&#10;    &lt;Box style={{ width: '1280px', height: '8px', backgroundColor: '#1E4FA8' }} /&gt;&#13;&#10;    &lt;Box style={{ padding: '26px 40px 0px 40px', flexDirection: 'row', justifyContent: 'space-between', alignItems: 'flex-end' }}&gt;&#13;&#10;        &lt;Text style={{ fontSize: 33, fontWeight: 'bold', color: '#1E4FA8' }}&gt;局部 BA：真正把位姿解出来的唯一一步&lt;/Text&gt;&#13;&#10;        &lt;Text style={{ fontSize: 15, color: '#8B97A8' }}&gt;09 / 15&lt;/Text&gt;&#13;&#10;    &lt;/Box&gt;&#13;&#10;    &lt;Box style={{ padding: '8px 40px 0px 40px' }}&gt;&#13;&#10;        &lt;Text style={{ fontSize: 20, color: '#4A5568', lineHeight: 1.4 }}&gt;在选出的 20 帧上解一次带鲁棒核的最小二乘，用 Schur 补把问题压到“只解相机”。&lt;/Text&gt;&#13;&#10;    &lt;/Box&gt;&#13;&#10;    &lt;Box style={{ padding: '14px 40px 0px 40px', flexDirection: 'row', gap: 20 }}&gt;&#13;&#10;        &lt;Box style={{ width: 600, flexDirection: 'column', gap: 11 }}&gt;&#13;&#10;            &lt;Box style={{ backgroundColor: '#F7F9FC', border: '1px solid #D6DCE5', borderRadius: 6, padding: '9px 16px' }}&gt;&#13;&#10;                &lt;Text style={{ fontSize: 18, color: '#1A2230', lineHeight: 1.45 }}&gt;&lt;b&gt;输入&lt;/b&gt;　S 内 20 个关键帧 ＋ 约 1 万路标点（按被观测次数采样）&lt;/Text&gt;&#13;&#10;            &lt;/Box&gt;&#13;&#10;            &lt;Box style={{ backgroundColor: '#F7F9FC', border: '1px solid #D6DCE5', borderRadius: 6, padding: '9px 16px' }}&gt;&#13;&#10;                &lt;Text style={{ fontSize: 18, color: '#1A2230', lineHeight: 1.45 }}&gt;&lt;b&gt;做法&lt;/b&gt;　LM 迭代：残差 = 重投影误差；构造正规方程后做稠密 Schur 消元，Cholesky 解相机&lt;/Text&gt;&#13;&#10;            &lt;/Box&gt;&#13;&#10;            &lt;Box style={{ backgroundColor: '#F7F9FC', border: '1px solid #D6DCE5', borderRadius: 6, padding: '9px 16px' }}&gt;&#13;&#10;                &lt;Text style={{ fontSize: 18, color: '#1A2230', lineHeight: 1.45 }}&gt;&lt;b&gt;输出&lt;/b&gt;　相机位姿 T_i 与三维路标点 X_j —— 重建本体&lt;/Text&gt;&#13;&#10;            &lt;/Box&gt;&#13;&#10;            &lt;Box style={{ backgroundColor: '#F0F5FC', border: '1px solid #3D7BD9', borderRadius: 6, padding: '10px 16px', flexDirection: 'column' }}&gt;&#13;&#10;                &lt;Text style={{ fontSize: 18, color: '#1A2230', lineHeight: 1.45 }}&gt;&lt;b&gt;关键取值&lt;/b&gt;　N = 20、K ≈ 1e4　·　LM 阻尼按 mul_(1 + lm) 自适应&lt;/Text&gt;&#13;&#10;                &lt;Text style={{ fontSize: 16, color: '#4A5568', lineHeight: 1.4, marginTop: 4 }}&gt;每个路标只允许被协视性选出的固定子集观测，避免观测数随帧数二次增长&lt;/Text&gt;&#13;&#10;            &lt;/Box&gt;&#13;&#10;        &lt;/Box&gt;&#13;&#10;        &lt;Box style={{ width: 580, flexDirection: 'column' }}&gt;&#13;&#10;            &lt;Image src=&quot;figs/fig5_ba.png&quot; style={{ width: 580, height: 362 }} /&gt;&#13;&#10;            &lt;Text style={{ fontSize: 14.5, color: '#8B97A8', marginTop: 5 }}&gt;图 5　二部图求解 + 分块矩阵：C 对角可逐点求逆，B 稀疏只解相机。&lt;/Text&gt;&#13;&#10;        &lt;/Box&gt;&#13;&#10;    &lt;/Box&gt;&#13;&#10;    &lt;Box style={{ margin: '12px 40px 0px 40px', backgroundColor: '#F7F9FC', borderLeft: '5px solid #1E4FA8', padding: '10px 18px', flexDirection: 'column' }}&gt;&#13;&#10;        &lt;Image src=&quot;formula/f09.png&quot; style={{ width: 596.5, height: 55.5 }} /&gt;&#13;&#10;        &lt;Text style={{ fontSize: 16.5, color: '#4A5568', lineHeight: 1.4, marginTop: 3 }}&gt;SLAM 通常只用 5 帧时间窗；这里用 20 帧并把核函数写到 GPU 上，比 g2o / CUDA-BA 快约 5 倍。&lt;/Text&gt;&#13;&#10;    &lt;/Box&gt;&#13;&#10;    &lt;Box style={{ marginTop: 'auto', padding: '10px 40px 12px 40px' }}&gt;&#13;&#10;        &lt;Text style={{ fontSize: 15, color: '#8B97A8' }}&gt;前四步是“准备”，第六步是“纠错”，只有这一步在解——位姿重建真正发生在这里。&lt;/Text&gt;&#13;&#10;    &lt;/Box&gt;&#13;&#10;&lt;/Slide&gt;&#13;&#10;"/>
+        <p:cNvPr id="462" name="" descr="&lt;Slide style={{ width: '1280px', height: '720px', backgroundColor: '#FFFFFF', padding: '0px', flexDirection: 'column' }}&gt;&#13;&#10;    &lt;Box style={{ width: '1280px', height: '8px', backgroundColor: '#1E4FA8' }} /&gt;&#13;&#10;    &lt;Box style={{ padding: '26px 40px 0px 40px', flexDirection: 'row', justifyContent: 'space-between', alignItems: 'flex-end' }}&gt;&#13;&#10;        &lt;Text style={{ fontSize: 33, fontWeight: 'bold', color: '#1E4FA8' }}&gt;局部 BA：真正把位姿解出来的唯一一步&lt;/Text&gt;&#13;&#10;        &lt;Text style={{ fontSize: 15, color: '#8B97A8' }}&gt;09 / 15&lt;/Text&gt;&#13;&#10;    &lt;/Box&gt;&#13;&#10;    &lt;Box style={{ padding: '8px 40px 0px 40px' }}&gt;&#13;&#10;        &lt;Text style={{ fontSize: 20, color: '#4A5568', lineHeight: 1.4 }}&gt;在选出的 20 帧上解一次带鲁棒核的最小二乘，用 Schur 补把问题压到“只解相机”。&lt;/Text&gt;&#13;&#10;    &lt;/Box&gt;&#13;&#10;    &lt;Box style={{ padding: '14px 40px 0px 40px', flexDirection: 'row', gap: 20 }}&gt;&#13;&#10;        &lt;Box style={{ width: 600, flexDirection: 'column', gap: 11 }}&gt;&#13;&#10;            &lt;Box style={{ backgroundColor: '#F7F9FC', border: '1px solid #D6DCE5', borderRadius: 6, padding: '9px 16px' }}&gt;&#13;&#10;                &lt;Text style={{ fontSize: 18, color: '#1A2230', lineHeight: 1.45 }}&gt;&lt;b&gt;输入&lt;/b&gt;　S 内 20 个关键帧 ＋ 约 1 万路标点（按被观测次数采样）&lt;/Text&gt;&#13;&#10;            &lt;/Box&gt;&#13;&#10;            &lt;Box style={{ backgroundColor: '#F7F9FC', border: '1px solid #D6DCE5', borderRadius: 6, padding: '9px 16px' }}&gt;&#13;&#10;                &lt;Text style={{ fontSize: 18, color: '#1A2230', lineHeight: 1.45 }}&gt;&lt;b&gt;做法&lt;/b&gt;　LM 迭代：残差 = 重投影误差；构造正规方程后做稠密 Schur 消元，Cholesky 解相机&lt;/Text&gt;&#13;&#10;            &lt;/Box&gt;&#13;&#10;            &lt;Box style={{ backgroundColor: '#F7F9FC', border: '1px solid #D6DCE5', borderRadius: 6, padding: '9px 16px' }}&gt;&#13;&#10;                &lt;Text style={{ fontSize: 18, color: '#1A2230', lineHeight: 1.45 }}&gt;&lt;b&gt;输出&lt;/b&gt;　相机位姿 T_i 与三维路标点 X_j —— 重建本体&lt;/Text&gt;&#13;&#10;            &lt;/Box&gt;&#13;&#10;            &lt;Box style={{ backgroundColor: '#F0F5FC', border: '1px solid #3D7BD9', borderRadius: 6, padding: '10px 16px', flexDirection: 'column' }}&gt;&#13;&#10;                &lt;Text style={{ fontSize: 18, color: '#1A2230', lineHeight: 1.45 }}&gt;&lt;b&gt;关键取值&lt;/b&gt;　N = 20、K ≈ 1e4　·　LM 阻尼按 mul_(1 + lm) 自适应&lt;/Text&gt;&#13;&#10;                &lt;Text style={{ fontSize: 16, color: '#4A5568', lineHeight: 1.4, marginTop: 4 }}&gt;每个路标只允许被协视性选出的固定子集观测，避免观测数随帧数二次增长&lt;/Text&gt;&#13;&#10;            &lt;/Box&gt;&#13;&#10;        &lt;/Box&gt;&#13;&#10;        &lt;Box style={{ width: 580, flexDirection: 'column' }}&gt;&#13;&#10;            &lt;Image src=&quot;figs/fig5_ba.png&quot; style={{ width: 580, height: 362 }} /&gt;&#13;&#10;            &lt;Text style={{ fontSize: 14.5, color: '#8B97A8', marginTop: 5 }}&gt;图 5　二部图求解 + 分块矩阵：C 对角可逐点求逆，B 稀疏只解相机。&lt;/Text&gt;&#13;&#10;        &lt;/Box&gt;&#13;&#10;    &lt;/Box&gt;&#13;&#10;    &lt;Box style={{ margin: '12px 40px 0px 40px', backgroundColor: '#F7F9FC', borderLeft: '5px solid #1E4FA8', padding: '10px 18px', flexDirection: 'column' }}&gt;&#13;&#10;        &lt;Image src=&quot;formula/f09.png&quot; style={{ width: 596.5, height: 55.5 }} /&gt;&#13;&#10;        &lt;Text style={{ fontSize: 16.5, color: '#4A5568', lineHeight: 1.4, marginTop: 3 }}&gt;SLAM 通常只用 5 帧时间窗；这里用 20 帧并把核函数写到 GPU 上，比 g2o / CUDA-BA 快约 5 倍。&lt;/Text&gt;&#13;&#10;    &lt;/Box&gt;&#13;&#10;    &lt;Box style={{ marginTop: 'auto', padding: '10px 40px 12px 40px' }}&gt;&#13;&#10;        &lt;Text style={{ fontSize: 15, color: '#8B97A8' }}&gt;前四步是“准备”，第六步是“纠错”，只有这一步在解——位姿重建真正发生在这里。&lt;/Text&gt;&#13;&#10;    &lt;/Box&gt;&#13;&#10;&lt;/Slide&gt;&#13;&#10;"/>
         <p:cNvGrpSpPr/>
         <p:nvPr/>
       </p:nvGrpSpPr>
@@ -21280,7 +22603,7 @@
       </p:grpSpPr>
       <p:sp>
         <p:nvSpPr>
-          <p:cNvPr id="430" name=""/>
+          <p:cNvPr id="463" name=""/>
           <p:cNvSpPr/>
           <p:nvPr/>
         </p:nvSpPr>
@@ -21304,7 +22627,7 @@
       </p:sp>
       <p:sp>
         <p:nvSpPr>
-          <p:cNvPr id="431" name=""/>
+          <p:cNvPr id="464" name=""/>
           <p:cNvSpPr/>
           <p:nvPr/>
         </p:nvSpPr>
@@ -21328,7 +22651,7 @@
       </p:sp>
       <p:sp>
         <p:nvSpPr>
-          <p:cNvPr id="432" name="" descr="{&quot;isTemplate&quot;:true,&quot;type&quot;:&quot;text&quot;}"/>
+          <p:cNvPr id="465" name="" descr="{&quot;isTemplate&quot;:true,&quot;type&quot;:&quot;text&quot;}"/>
           <p:cNvSpPr txBox="1"/>
           <p:nvPr/>
         </p:nvSpPr>
@@ -21383,7 +22706,7 @@
       </p:sp>
       <p:sp>
         <p:nvSpPr>
-          <p:cNvPr id="433" name="" descr="{&quot;isTemplate&quot;:true,&quot;type&quot;:&quot;text&quot;}"/>
+          <p:cNvPr id="466" name="" descr="{&quot;isTemplate&quot;:true,&quot;type&quot;:&quot;text&quot;}"/>
           <p:cNvSpPr txBox="1"/>
           <p:nvPr/>
         </p:nvSpPr>
@@ -21418,7 +22741,7 @@
       </p:sp>
       <p:sp>
         <p:nvSpPr>
-          <p:cNvPr id="434" name="" descr="{&quot;isTemplate&quot;:true,&quot;type&quot;:&quot;text&quot;}"/>
+          <p:cNvPr id="467" name="" descr="{&quot;isTemplate&quot;:true,&quot;type&quot;:&quot;text&quot;}"/>
           <p:cNvSpPr txBox="1"/>
           <p:nvPr/>
         </p:nvSpPr>
@@ -21493,7 +22816,7 @@
       </p:sp>
       <p:sp>
         <p:nvSpPr>
-          <p:cNvPr id="435" name=""/>
+          <p:cNvPr id="468" name=""/>
           <p:cNvSpPr/>
           <p:nvPr/>
         </p:nvSpPr>
@@ -21524,7 +22847,7 @@
       </p:sp>
       <p:sp>
         <p:nvSpPr>
-          <p:cNvPr id="436" name="" descr="{&quot;isTemplate&quot;:true,&quot;type&quot;:&quot;text&quot;}"/>
+          <p:cNvPr id="469" name="" descr="{&quot;isTemplate&quot;:true,&quot;type&quot;:&quot;text&quot;}"/>
           <p:cNvSpPr txBox="1"/>
           <p:nvPr/>
         </p:nvSpPr>
@@ -21669,7 +22992,7 @@
       </p:sp>
       <p:sp>
         <p:nvSpPr>
-          <p:cNvPr id="437" name=""/>
+          <p:cNvPr id="470" name=""/>
           <p:cNvSpPr/>
           <p:nvPr/>
         </p:nvSpPr>
@@ -21700,7 +23023,7 @@
       </p:sp>
       <p:sp>
         <p:nvSpPr>
-          <p:cNvPr id="438" name="" descr="{&quot;isTemplate&quot;:true,&quot;type&quot;:&quot;text&quot;}"/>
+          <p:cNvPr id="471" name="" descr="{&quot;isTemplate&quot;:true,&quot;type&quot;:&quot;text&quot;}"/>
           <p:cNvSpPr txBox="1"/>
           <p:nvPr/>
         </p:nvSpPr>
@@ -21827,7 +23150,7 @@
       </p:sp>
       <p:sp>
         <p:nvSpPr>
-          <p:cNvPr id="439" name=""/>
+          <p:cNvPr id="472" name=""/>
           <p:cNvSpPr/>
           <p:nvPr/>
         </p:nvSpPr>
@@ -21858,7 +23181,7 @@
       </p:sp>
       <p:sp>
         <p:nvSpPr>
-          <p:cNvPr id="440" name="" descr="{&quot;isTemplate&quot;:true,&quot;type&quot;:&quot;text&quot;}"/>
+          <p:cNvPr id="473" name="" descr="{&quot;isTemplate&quot;:true,&quot;type&quot;:&quot;text&quot;}"/>
           <p:cNvSpPr txBox="1"/>
           <p:nvPr/>
         </p:nvSpPr>
@@ -21943,7 +23266,7 @@
       </p:sp>
       <p:sp>
         <p:nvSpPr>
-          <p:cNvPr id="441" name=""/>
+          <p:cNvPr id="474" name=""/>
           <p:cNvSpPr/>
           <p:nvPr/>
         </p:nvSpPr>
@@ -21974,7 +23297,7 @@
       </p:sp>
       <p:sp>
         <p:nvSpPr>
-          <p:cNvPr id="442" name="" descr="{&quot;isTemplate&quot;:true,&quot;type&quot;:&quot;text&quot;}"/>
+          <p:cNvPr id="475" name="" descr="{&quot;isTemplate&quot;:true,&quot;type&quot;:&quot;text&quot;}"/>
           <p:cNvSpPr txBox="1"/>
           <p:nvPr/>
         </p:nvSpPr>
@@ -22099,7 +23422,7 @@
       </p:sp>
       <p:sp>
         <p:nvSpPr>
-          <p:cNvPr id="443" name="" descr="{&quot;isTemplate&quot;:true,&quot;type&quot;:&quot;text&quot;}"/>
+          <p:cNvPr id="476" name="" descr="{&quot;isTemplate&quot;:true,&quot;type&quot;:&quot;text&quot;}"/>
           <p:cNvSpPr txBox="1"/>
           <p:nvPr/>
         </p:nvSpPr>
@@ -22134,7 +23457,7 @@
       </p:sp>
       <p:pic>
         <p:nvPicPr>
-          <p:cNvPr id="444" name=""/>
+          <p:cNvPr id="477" name=""/>
           <p:cNvPicPr>
             <a:picLocks noChangeAspect="1"/>
           </p:cNvPicPr>
@@ -22160,7 +23483,7 @@
       </p:pic>
       <p:sp>
         <p:nvSpPr>
-          <p:cNvPr id="445" name="" descr="{&quot;isTemplate&quot;:true,&quot;type&quot;:&quot;text&quot;}"/>
+          <p:cNvPr id="478" name="" descr="{&quot;isTemplate&quot;:true,&quot;type&quot;:&quot;text&quot;}"/>
           <p:cNvSpPr txBox="1"/>
           <p:nvPr/>
         </p:nvSpPr>
@@ -22275,7 +23598,7 @@
       </p:sp>
       <p:sp>
         <p:nvSpPr>
-          <p:cNvPr id="446" name=""/>
+          <p:cNvPr id="479" name=""/>
           <p:cNvSpPr/>
           <p:nvPr/>
         </p:nvSpPr>
@@ -22299,7 +23622,7 @@
       </p:sp>
       <p:sp>
         <p:nvSpPr>
-          <p:cNvPr id="447" name=""/>
+          <p:cNvPr id="480" name=""/>
           <p:cNvSpPr/>
           <p:nvPr/>
         </p:nvSpPr>
@@ -22339,7 +23662,7 @@
       </p:sp>
       <p:pic>
         <p:nvPicPr>
-          <p:cNvPr id="448" name=""/>
+          <p:cNvPr id="481" name=""/>
           <p:cNvPicPr>
             <a:picLocks noChangeAspect="1"/>
           </p:cNvPicPr>
@@ -22365,7 +23688,7 @@
       </p:pic>
       <p:sp>
         <p:nvSpPr>
-          <p:cNvPr id="449" name="" descr="{&quot;isTemplate&quot;:true,&quot;type&quot;:&quot;text&quot;}"/>
+          <p:cNvPr id="482" name="" descr="{&quot;isTemplate&quot;:true,&quot;type&quot;:&quot;text&quot;}"/>
           <p:cNvSpPr txBox="1"/>
           <p:nvPr/>
         </p:nvSpPr>
@@ -22510,7 +23833,7 @@
       </p:sp>
       <p:sp>
         <p:nvSpPr>
-          <p:cNvPr id="450" name="" descr="{&quot;isTemplate&quot;:true,&quot;type&quot;:&quot;text&quot;}"/>
+          <p:cNvPr id="483" name="" descr="{&quot;isTemplate&quot;:true,&quot;type&quot;:&quot;text&quot;}"/>
           <p:cNvSpPr txBox="1"/>
           <p:nvPr/>
         </p:nvSpPr>

--- a/ecnu-cg/02-PPT/PPT-即时三维高斯泼溅重建.pptx
+++ b/ecnu-cg/02-PPT/PPT-即时三维高斯泼溅重建.pptx
@@ -15848,7 +15848,7 @@
   <p:cSld>
     <p:spTree>
       <p:nvGrpSpPr>
-        <p:cNvPr id="320" name="" descr="&lt;Slide style={{ width: '1280px', height: '720px', backgroundColor: '#FFFFFF', padding: '0px', flexDirection: 'column' }}&gt;&#13;&#10;    &lt;Box style={{ width: '1280px', height: '8px', backgroundColor: '#1E4FA8' }} /&gt;&#13;&#10;    &lt;Box style={{ padding: '24px 40px 0px 40px', flexDirection: 'row', justifyContent: 'space-between', alignItems: 'flex-end' }}&gt;&#13;&#10;        &lt;Text style={{ fontSize: 33, fontWeight: 'bold', color: '#1E4FA8' }}&gt;方法总览：一帧进来，走完七步&lt;/Text&gt;&#13;&#10;        &lt;Text style={{ fontSize: 15, color: '#8B97A8' }}&gt;04 / 15&lt;/Text&gt;&#13;&#10;    &lt;/Box&gt;&#13;&#10;    &lt;Box style={{ padding: '8px 40px 0px 40px' }}&gt;&#13;&#10;        &lt;Text style={{ fontSize: 20, color: '#4A5568', lineHeight: 1.4 }}&gt;设计哲学一句话：&lt;b&gt;每帧做小事，偶尔做一次大事&lt;/b&gt;。前者保证实时，后者保证不漂；每一步都对应上一页的一个病症。&lt;/Text&gt;&#13;&#10;    &lt;/Box&gt;&#13;&#10;&#13;&#10;    &lt;Box style={{ padding: '16px 40px 0px 40px', flexDirection: 'row', gap: 10 }}&gt;&#13;&#10;        &lt;Box style={{ flex: 1, backgroundColor: '#F0F5FC', borderRadius: 6, padding: '13px 11px', flexDirection: 'column' }}&gt;&#13;&#10;            &lt;Text style={{ fontSize: 29, fontWeight: 'bold', color: '#1E4FA8' }}&gt;①&lt;/Text&gt;&#13;&#10;            &lt;Text style={{ fontSize: 20, fontWeight: 'bold', color: '#1A2230', marginTop: 3 }}&gt;全局检索&lt;/Text&gt;&#13;&#10;            &lt;Text style={{ fontSize: 16.5, color: '#1A2230', lineHeight: 1.45, marginTop: 6 }}&gt;全局描述子算余弦，取 top-20 候选&lt;/Text&gt;&#13;&#10;            &lt;Text style={{ fontSize: 15.5, color: '#1D5FC0', fontWeight: 'bold', marginTop: 10 }}&gt;治“乱”&lt;/Text&gt;&#13;&#10;        &lt;/Box&gt;&#13;&#10;        &lt;Box style={{ flex: 1, backgroundColor: '#F0F5FC', borderRadius: 6, padding: '13px 11px', flexDirection: 'column' }}&gt;&#13;&#10;            &lt;Text style={{ fontSize: 29, fontWeight: 'bold', color: '#1E4FA8' }}&gt;②&lt;/Text&gt;&#13;&#10;            &lt;Text style={{ fontSize: 20, fontWeight: 'bold', color: '#1A2230', marginTop: 3 }}&gt;局部粗筛&lt;/Text&gt;&#13;&#10;            &lt;Text style={{ fontSize: 16.5, color: '#1A2230', lineHeight: 1.45, marginTop: 6 }}&gt;XFeat 比内点数，20 → 5&lt;/Text&gt;&#13;&#10;            &lt;Text style={{ fontSize: 15.5, color: '#1D5FC0', fontWeight: 'bold', marginTop: 10 }}&gt;治“乱”&lt;/Text&gt;&#13;&#10;        &lt;/Box&gt;&#13;&#10;        &lt;Box style={{ flex: 1, backgroundColor: '#F0F5FC', borderRadius: 6, padding: '13px 11px', flexDirection: 'column' }}&gt;&#13;&#10;            &lt;Text style={{ fontSize: 29, fontWeight: 'bold', color: '#1E4FA8' }}&gt;③&lt;/Text&gt;&#13;&#10;            &lt;Text style={{ fontSize: 20, fontWeight: 'bold', color: '#1A2230', marginTop: 3 }}&gt;精验建边&lt;/Text&gt;&#13;&#10;            &lt;Text style={{ fontSize: 16.5, color: '#1A2230', lineHeight: 1.45, marginTop: 6 }}&gt;LightGlue ＋ RANSAC，内点 &amp;gt; 500 才建边&lt;/Text&gt;&#13;&#10;            &lt;Text style={{ fontSize: 15.5, color: '#1D5FC0', fontWeight: 'bold', marginTop: 10 }}&gt;治“乱”&lt;/Text&gt;&#13;&#10;        &lt;/Box&gt;&#13;&#10;        &lt;Box style={{ flex: 1, backgroundColor: '#F7F9FC', borderRadius: 6, padding: '13px 11px', flexDirection: 'column' }}&gt;&#13;&#10;            &lt;Text style={{ fontSize: 29, fontWeight: 'bold', color: '#1E4FA8' }}&gt;④&lt;/Text&gt;&#13;&#10;            &lt;Text style={{ fontSize: 20, fontWeight: 'bold', color: '#1A2230', marginTop: 3 }}&gt;贪心选窗&lt;/Text&gt;&#13;&#10;            &lt;Text style={{ fontSize: 16.5, color: '#1A2230', lineHeight: 1.45, marginTop: 6 }}&gt;式 1 贪心扩张到 N = 20 帧&lt;/Text&gt;&#13;&#10;            &lt;Text style={{ fontSize: 15.5, color: '#1D5FC0', fontWeight: 'bold', marginTop: 10 }}&gt;定变量范围&lt;/Text&gt;&#13;&#10;        &lt;/Box&gt;&#13;&#10;        &lt;Box style={{ flex: 1, backgroundColor: '#1E4FA8', borderRadius: 6, padding: '13px 11px', flexDirection: 'column' }}&gt;&#13;&#10;            &lt;Text style={{ fontSize: 29, fontWeight: 'bold', color: '#FFFFFF' }}&gt;⑤&lt;/Text&gt;&#13;&#10;            &lt;Text style={{ fontSize: 20, fontWeight: 'bold', color: '#FFFFFF', marginTop: 3 }}&gt;局部 BA&lt;/Text&gt;&#13;&#10;            &lt;Text style={{ fontSize: 16.5, color: '#D6E4F7', lineHeight: 1.45, marginTop: 6 }}&gt;LM ＋ Schur 补，解出位姿与三维点&lt;/Text&gt;&#13;&#10;            &lt;Text style={{ fontSize: 15.5, color: '#FFFFFF', fontWeight: 'bold', marginTop: 10 }}&gt;重建本体&lt;/Text&gt;&#13;&#10;        &lt;/Box&gt;&#13;&#10;        &lt;Box style={{ flex: 1, backgroundColor: '#F7F9FC', borderRadius: 6, padding: '13px 11px', flexDirection: 'column' }}&gt;&#13;&#10;            &lt;Text style={{ fontSize: 29, fontWeight: 'bold', color: '#1E4FA8' }}&gt;⑥&lt;/Text&gt;&#13;&#10;            &lt;Text style={{ fontSize: 20, fontWeight: 'bold', color: '#1A2230', marginTop: 3 }}&gt;回环修正&lt;/Text&gt;&#13;&#10;            &lt;Text style={{ fontSize: 16.5, color: '#1A2230', lineHeight: 1.45, marginTop: 6 }}&gt;图距 &amp;gt; 10 触发，Sim(3) 沿主干摊开&lt;/Text&gt;&#13;&#10;            &lt;Text style={{ fontSize: 15.5, color: '#D9534F', fontWeight: 'bold', marginTop: 10 }}&gt;治“漂”&lt;/Text&gt;&#13;&#10;        &lt;/Box&gt;&#13;&#10;        &lt;Box style={{ flex: 1, backgroundColor: '#F7F9FC', borderRadius: 6, padding: '13px 11px', flexDirection: 'column' }}&gt;&#13;&#10;            &lt;Text style={{ fontSize: 29, fontWeight: 'bold', color: '#1E4FA8' }}&gt;⑦&lt;/Text&gt;&#13;&#10;            &lt;Text style={{ fontSize: 20, fontWeight: 'bold', color: '#1A2230', marginTop: 3 }}&gt;高斯落位&lt;/Text&gt;&#13;&#10;            &lt;Text style={{ fontSize: 16.5, color: '#1A2230', lineHeight: 1.45, marginTop: 6 }}&gt;分块深度对齐 ＋ 层级按屏幕尺寸合并&lt;/Text&gt;&#13;&#10;            &lt;Text style={{ fontSize: 15.5, color: '#1D5FC0', fontWeight: 'bold', marginTop: 10 }}&gt;治“爆”&lt;/Text&gt;&#13;&#10;        &lt;/Box&gt;&#13;&#10;    &lt;/Box&gt;&#13;&#10;&#13;&#10;    &lt;Box style={{ padding: '20px 40px 0px 40px', flexDirection: 'column' }}&gt;&#13;&#10;        &lt;Text style={{ fontSize: 20, color: '#1A2230', lineHeight: 1.5 }}&gt;数据流：&lt;b&gt;关键帧图像&lt;/b&gt;　→　&lt;b&gt;加权协视图 G&lt;/b&gt;　→　&lt;b&gt;位姿 T_i / 三维点 X_j&lt;/b&gt;　→　&lt;b&gt;高斯集合&lt;/b&gt;　→　&lt;b&gt;渐进层级&lt;/b&gt;&lt;/Text&gt;&#13;&#10;        &lt;Text style={{ fontSize: 17, color: '#4A5568', lineHeight: 1.4, marginTop: 4 }}&gt;前三步只产出“约束”，第四五步只产出“位姿”，第六步修位姿，第七步才碰辐射场。&lt;/Text&gt;&#13;&#10;    &lt;/Box&gt;&#13;&#10;&#13;&#10;    &lt;Box style={{ padding: '16px 40px 0px 40px', flexDirection: 'row', gap: 10, alignItems: 'center' }}&gt;&#13;&#10;        &lt;Box style={{ backgroundColor: '#1E4FA8', borderRadius: 4, padding: '6px 12px' }}&gt;&#13;&#10;            &lt;Text style={{ fontSize: 16, fontWeight: 'bold', color: '#FFFFFF' }}&gt;时间账&lt;/Text&gt;&#13;&#10;        &lt;/Box&gt;&#13;&#10;        &lt;Text style={{ fontSize: 17.5, color: '#1A2230', lineHeight: 1.4 }}&gt;视觉前端 &lt;b&gt;27.8 ms&lt;/b&gt;　·　局部 BA &lt;b&gt;40.5 ms&lt;/b&gt;　·　回环摊销 &lt;b&gt;121.6 ms&lt;/b&gt;（仅绕回起点时）　·　渲染 &lt;b&gt;480 fps&lt;/b&gt;&lt;/Text&gt;&#13;&#10;    &lt;/Box&gt;&#13;&#10;    &lt;Box style={{ padding: '4px 40px 0px 40px' }}&gt;&#13;&#10;        &lt;Text style={{ fontSize: 15.5, color: '#8B97A8' }}&gt;以上为论文单关键帧摊销实测；②③ 的候选数已压到 20 / 5，所以前端不是瓶颈——瓶颈是一次回环后的全局修正。&lt;/Text&gt;&#13;&#10;    &lt;/Box&gt;&#13;&#10;&#13;&#10;    &lt;Box style={{ padding: '16px 40px 0px 40px', flexDirection: 'column', gap: 8 }}&gt;&#13;&#10;        &lt;Box style={{ backgroundColor: '#F7F9FC', borderLeft: '5px solid #1E4FA8', padding: '9px 16px' }}&gt;&#13;&#10;            &lt;Text style={{ fontSize: 17.5, color: '#1A2230', lineHeight: 1.4 }}&gt;&lt;b&gt;节奏&lt;/b&gt;　①–⑤ 与 ⑦ 每个关键帧都跑；&lt;b&gt;⑥ 只在检测到回环时跑&lt;/b&gt;——“每帧做小事、偶尔做一次大事”的具体分工。&lt;/Text&gt;&#13;&#10;        &lt;/Box&gt;&#13;&#10;        &lt;Box style={{ backgroundColor: '#F7F9FC', borderLeft: '5px solid #D6DCE5', padding: '9px 16px' }}&gt;&#13;&#10;            &lt;Text style={{ fontSize: 17.5, color: '#1A2230', lineHeight: 1.4 }}&gt;&lt;b&gt;容错&lt;/b&gt;　匹配失败的帧先“搁置”，后续出现相似帧时再取出重试——乱序输入因此不必强求一次成功。&lt;/Text&gt;&#13;&#10;        &lt;/Box&gt;&#13;&#10;    &lt;/Box&gt;&#13;&#10;&#13;&#10;    &lt;Box style={{ marginTop: 'auto', padding: '6px 40px 12px 40px' }}&gt;&#13;&#10;        &lt;Text style={{ fontSize: 15, color: '#8B97A8' }}&gt;接下来七页，一步一页：每页都是「这步在做什么 → 长什么样 → 核心公式 → 超参取值 → 为什么这么做」。&lt;/Text&gt;&#13;&#10;    &lt;/Box&gt;&#13;&#10;&lt;/Slide&gt;&#13;&#10;"/>
+        <p:cNvPr id="320" name="" descr="&lt;Slide style={{ width: '1280px', height: '720px', backgroundColor: '#FFFFFF', padding: '0px', flexDirection: 'column' }}&gt;&#13;&#10;    &lt;Box style={{ width: '1280px', height: '8px', backgroundColor: '#1E4FA8' }} /&gt;&#13;&#10;    &lt;Box style={{ padding: '24px 40px 0px 40px', flexDirection: 'row', justifyContent: 'space-between', alignItems: 'flex-end' }}&gt;&#13;&#10;        &lt;Text style={{ fontSize: 33, fontWeight: 'bold', color: '#1E4FA8' }}&gt;方法总览：一帧进来，走完七步&lt;/Text&gt;&#13;&#10;        &lt;Text style={{ fontSize: 15, color: '#8B97A8' }}&gt;04 / 15&lt;/Text&gt;&#13;&#10;    &lt;/Box&gt;&#13;&#10;    &lt;Box style={{ padding: '8px 40px 0px 40px' }}&gt;&#13;&#10;        &lt;Text style={{ fontSize: 20, color: '#4A5568', lineHeight: 1.4 }}&gt;设计哲学一句话：&lt;b&gt;每帧做小事，偶尔做一次大事&lt;/b&gt;。前者保证实时，后者保证不漂；每一步都对应上一页的一个病症。&lt;/Text&gt;&#13;&#10;    &lt;/Box&gt;&#13;&#10;&#13;&#10;    &lt;Box style={{ padding: '16px 40px 0px 40px', flexDirection: 'row', gap: 10 }}&gt;&#13;&#10;        &lt;Box style={{ flex: 1, backgroundColor: '#F0F5FC', borderRadius: 6, padding: '13px 11px', flexDirection: 'column' }}&gt;&#13;&#10;            &lt;Text style={{ fontSize: 29, fontWeight: 'bold', color: '#1E4FA8' }}&gt;①&lt;/Text&gt;&#13;&#10;            &lt;Text style={{ fontSize: 20, fontWeight: 'bold', color: '#1A2230', marginTop: 3 }}&gt;全局检索&lt;/Text&gt;&#13;&#10;            &lt;Text style={{ fontSize: 16.5, color: '#1A2230', lineHeight: 1.45, marginTop: 6 }}&gt;全局描述子算余弦，取 top-20 候选帧&lt;/Text&gt;&#13;&#10;            &lt;Text style={{ fontSize: 15.5, color: '#1D5FC0', fontWeight: 'bold', marginTop: 10 }}&gt;治“乱”&lt;/Text&gt;&#13;&#10;        &lt;/Box&gt;&#13;&#10;        &lt;Box style={{ flex: 1, backgroundColor: '#F0F5FC', borderRadius: 6, padding: '13px 11px', flexDirection: 'column' }}&gt;&#13;&#10;            &lt;Text style={{ fontSize: 29, fontWeight: 'bold', color: '#1E4FA8' }}&gt;②&lt;/Text&gt;&#13;&#10;            &lt;Text style={{ fontSize: 20, fontWeight: 'bold', color: '#1A2230', marginTop: 3 }}&gt;局部粗筛&lt;/Text&gt;&#13;&#10;            &lt;Text style={{ fontSize: 16.5, color: '#1A2230', lineHeight: 1.45, marginTop: 6 }}&gt;XFeat 比内点数，20 → 5 个候选&lt;/Text&gt;&#13;&#10;            &lt;Text style={{ fontSize: 15.5, color: '#1D5FC0', fontWeight: 'bold', marginTop: 10 }}&gt;治“乱”&lt;/Text&gt;&#13;&#10;        &lt;/Box&gt;&#13;&#10;        &lt;Box style={{ flex: 1, backgroundColor: '#F0F5FC', borderRadius: 6, padding: '13px 11px', flexDirection: 'column' }}&gt;&#13;&#10;            &lt;Text style={{ fontSize: 29, fontWeight: 'bold', color: '#1E4FA8' }}&gt;③&lt;/Text&gt;&#13;&#10;            &lt;Text style={{ fontSize: 20, fontWeight: 'bold', color: '#1A2230', marginTop: 3 }}&gt;精验建边&lt;/Text&gt;&#13;&#10;            &lt;Text style={{ fontSize: 16.5, color: '#1A2230', lineHeight: 1.45, marginTop: 6 }}&gt;LightGlue ＋ RANSAC，内点 &amp;gt; 500 才建边&lt;/Text&gt;&#13;&#10;            &lt;Text style={{ fontSize: 15.5, color: '#1D5FC0', fontWeight: 'bold', marginTop: 10 }}&gt;治“乱”&lt;/Text&gt;&#13;&#10;        &lt;/Box&gt;&#13;&#10;        &lt;Box style={{ flex: 1, backgroundColor: '#F7F9FC', borderRadius: 6, padding: '13px 11px', flexDirection: 'column' }}&gt;&#13;&#10;            &lt;Text style={{ fontSize: 29, fontWeight: 'bold', color: '#1E4FA8' }}&gt;④&lt;/Text&gt;&#13;&#10;            &lt;Text style={{ fontSize: 20, fontWeight: 'bold', color: '#1A2230', marginTop: 3 }}&gt;贪心选窗&lt;/Text&gt;&#13;&#10;            &lt;Text style={{ fontSize: 16.5, color: '#1A2230', lineHeight: 1.45, marginTop: 6 }}&gt;式 1 贪心扩张到 N = 20 帧&lt;/Text&gt;&#13;&#10;            &lt;Text style={{ fontSize: 15.5, color: '#1D5FC0', fontWeight: 'bold', marginTop: 10 }}&gt;定变量范围&lt;/Text&gt;&#13;&#10;        &lt;/Box&gt;&#13;&#10;        &lt;Box style={{ flex: 1, backgroundColor: '#1E4FA8', borderRadius: 6, padding: '13px 11px', flexDirection: 'column' }}&gt;&#13;&#10;            &lt;Text style={{ fontSize: 29, fontWeight: 'bold', color: '#FFFFFF' }}&gt;⑤&lt;/Text&gt;&#13;&#10;            &lt;Text style={{ fontSize: 20, fontWeight: 'bold', color: '#FFFFFF', marginTop: 3 }}&gt;局部 BA&lt;/Text&gt;&#13;&#10;            &lt;Text style={{ fontSize: 16.5, color: '#D6E4F7', lineHeight: 1.45, marginTop: 6 }}&gt;LM ＋ Schur 补，解出位姿与三维点&lt;/Text&gt;&#13;&#10;            &lt;Text style={{ fontSize: 15.5, color: '#FFFFFF', fontWeight: 'bold', marginTop: 10 }}&gt;重建本体&lt;/Text&gt;&#13;&#10;        &lt;/Box&gt;&#13;&#10;        &lt;Box style={{ flex: 1, backgroundColor: '#F7F9FC', borderRadius: 6, padding: '13px 11px', flexDirection: 'column' }}&gt;&#13;&#10;            &lt;Text style={{ fontSize: 29, fontWeight: 'bold', color: '#1E4FA8' }}&gt;⑥&lt;/Text&gt;&#13;&#10;            &lt;Text style={{ fontSize: 20, fontWeight: 'bold', color: '#1A2230', marginTop: 3 }}&gt;回环修正&lt;/Text&gt;&#13;&#10;            &lt;Text style={{ fontSize: 16.5, color: '#1A2230', lineHeight: 1.45, marginTop: 6 }}&gt;图距 &amp;gt; 10 触发，Sim(3) 沿主干摊开&lt;/Text&gt;&#13;&#10;            &lt;Text style={{ fontSize: 15.5, color: '#D9534F', fontWeight: 'bold', marginTop: 10 }}&gt;治“漂”&lt;/Text&gt;&#13;&#10;        &lt;/Box&gt;&#13;&#10;        &lt;Box style={{ flex: 1, backgroundColor: '#F7F9FC', borderRadius: 6, padding: '13px 11px', flexDirection: 'column' }}&gt;&#13;&#10;            &lt;Text style={{ fontSize: 29, fontWeight: 'bold', color: '#1E4FA8' }}&gt;⑦&lt;/Text&gt;&#13;&#10;            &lt;Text style={{ fontSize: 20, fontWeight: 'bold', color: '#1A2230', marginTop: 3 }}&gt;高斯落位&lt;/Text&gt;&#13;&#10;            &lt;Text style={{ fontSize: 16.5, color: '#1A2230', lineHeight: 1.45, marginTop: 6 }}&gt;分块深度对齐 ＋ 层级按屏幕尺寸合并&lt;/Text&gt;&#13;&#10;            &lt;Text style={{ fontSize: 15.5, color: '#1D5FC0', fontWeight: 'bold', marginTop: 10 }}&gt;治“爆”&lt;/Text&gt;&#13;&#10;        &lt;/Box&gt;&#13;&#10;    &lt;/Box&gt;&#13;&#10;&#13;&#10;    &lt;Box style={{ padding: '20px 40px 0px 40px', flexDirection: 'column' }}&gt;&#13;&#10;        &lt;Text style={{ fontSize: 20, color: '#1A2230', lineHeight: 1.5 }}&gt;数据流：&lt;b&gt;关键帧图像&lt;/b&gt;　→　&lt;b&gt;加权协视图 G&lt;/b&gt;　→　&lt;b&gt;位姿 T_i / 三维点 X_j&lt;/b&gt;　→　&lt;b&gt;高斯集合&lt;/b&gt;　→　&lt;b&gt;渐进层级&lt;/b&gt;&lt;/Text&gt;&#13;&#10;        &lt;Text style={{ fontSize: 17, color: '#4A5568', lineHeight: 1.4, marginTop: 4 }}&gt;前三步只产出“约束”，第四五步只产出“位姿”，第六步修位姿，第七步才碰辐射场。&lt;/Text&gt;&#13;&#10;    &lt;/Box&gt;&#13;&#10;&#13;&#10;    &lt;Box style={{ padding: '16px 40px 0px 40px', flexDirection: 'row', gap: 10, alignItems: 'flex-start' }}&gt;&#13;&#10;        &lt;Box style={{ backgroundColor: '#1E4FA8', borderRadius: 4, padding: '5px 12px', marginTop: 3 }}&gt;&#13;&#10;            &lt;Text style={{ fontSize: 16, fontWeight: 'bold', color: '#FFFFFF' }}&gt;时间账&lt;/Text&gt;&#13;&#10;        &lt;/Box&gt;&#13;&#10;        &lt;Box style={{ flex: 1, flexDirection: 'column', gap: 5 }}&gt;&#13;&#10;            &lt;Text style={{ fontSize: 16.5, color: '#1A2230', lineHeight: 1.35 }}&gt;&lt;b&gt;单帧预算&lt;/b&gt;　前端 27.8 ＋ 局部 BA 40.5 ＋ 高斯/层级更新 → 论文实测 &lt;b&gt;324 ms&lt;/b&gt;（峰值 386）·　本次复现 &lt;b&gt;668 ms&lt;/b&gt;&lt;/Text&gt;&#13;&#10;            &lt;Text style={{ fontSize: 16.5, color: '#1A2230', lineHeight: 1.35 }}&gt;&lt;b&gt;全流程&lt;/b&gt;　85 张 &lt;b&gt;54 s&lt;/b&gt;（ds=1）/ 30.9 s（ds=2）　←　离线 COLMAP＋3DGS 同场景 &lt;b&gt;8 min 50 s&lt;/b&gt;，本文 1 min 17 s，&lt;b&gt;快 6.9×&lt;/b&gt;&lt;/Text&gt;&#13;&#10;            &lt;Text style={{ fontSize: 16.5, color: '#4A5568', lineHeight: 1.35 }}&gt;&lt;b&gt;immediate 的含义&lt;/b&gt;　单帧 &amp;lt; 1 秒，够边拍边判断要不要补拍；&lt;b&gt;不是&lt;/b&gt; 30 fps 视频——渲染 480 fps 是 3DGS 自带的，不算本文贡献&lt;/Text&gt;&#13;&#10;        &lt;/Box&gt;&#13;&#10;    &lt;/Box&gt;&#13;&#10;&#13;&#10;    &lt;Box style={{ padding: '16px 40px 0px 40px', flexDirection: 'column', gap: 8 }}&gt;&#13;&#10;        &lt;Box style={{ backgroundColor: '#F7F9FC', borderLeft: '5px solid #1E4FA8', padding: '9px 16px' }}&gt;&#13;&#10;            &lt;Text style={{ fontSize: 17.5, color: '#1A2230', lineHeight: 1.4 }}&gt;&lt;b&gt;节奏&lt;/b&gt;　①–⑤ 与 ⑦ 每个关键帧都跑；&lt;b&gt;⑥ 只在检测到回环时跑&lt;/b&gt;——“每帧做小事、偶尔做一次大事”的具体分工。&lt;/Text&gt;&#13;&#10;        &lt;/Box&gt;&#13;&#10;        &lt;Box style={{ backgroundColor: '#F7F9FC', borderLeft: '5px solid #D6DCE5', padding: '9px 16px' }}&gt;&#13;&#10;            &lt;Text style={{ fontSize: 17.5, color: '#1A2230', lineHeight: 1.4 }}&gt;&lt;b&gt;容错&lt;/b&gt;　匹配失败的帧先“搁置”，后续出现相似帧时再取出重试——乱序输入因此不必强求一次成功。&lt;/Text&gt;&#13;&#10;        &lt;/Box&gt;&#13;&#10;    &lt;/Box&gt;&#13;&#10;&#13;&#10;    &lt;Box style={{ marginTop: 'auto', padding: '6px 40px 12px 40px' }}&gt;&#13;&#10;        &lt;Text style={{ fontSize: 15, color: '#8B97A8' }}&gt;接下来七页，一步一页：每页都是「这步在做什么 → 长什么样 → 核心公式 → 超参取值 → 为什么这么做」。&lt;/Text&gt;&#13;&#10;    &lt;/Box&gt;&#13;&#10;&lt;/Slide&gt;&#13;&#10;"/>
         <p:cNvGrpSpPr/>
         <p:nvPr/>
       </p:nvGrpSpPr>
@@ -16180,7 +16180,7 @@
                 <a:latin typeface="Microsoft YaHei"/>
                 <a:ea typeface="Microsoft YaHei"/>
               </a:rPr>
-              <a:t>候选</a:t>
+              <a:t>候选帧</a:t>
             </a:r>
             <a:endParaRPr/>
           </a:p>
@@ -16368,7 +16368,17 @@
                 <a:latin typeface="Microsoft YaHei"/>
                 <a:ea typeface="Microsoft YaHei"/>
               </a:rPr>
-              <a:t>20 → 5</a:t>
+              <a:t xml:space="preserve">20 → 5 </a:t>
+            </a:r>
+            <a:r>
+              <a:rPr lang="zh-CN" sz="1238">
+                <a:solidFill>
+                  <a:srgbClr val="1A2230"/>
+                </a:solidFill>
+                <a:latin typeface="Microsoft YaHei"/>
+                <a:ea typeface="Microsoft YaHei"/>
+              </a:rPr>
+              <a:t>个候选</a:t>
             </a:r>
             <a:endParaRPr/>
           </a:p>
@@ -17667,12 +17677,12 @@
         </p:nvSpPr>
         <p:spPr>
           <a:xfrm rot="0" flipH="0" flipV="0">
-            <a:off x="381000" y="4238625"/>
-            <a:ext cx="685800" cy="304800"/>
+            <a:off x="381000" y="4267200"/>
+            <a:ext cx="685800" cy="285750"/>
           </a:xfrm>
           <a:prstGeom prst="roundRect">
             <a:avLst>
-              <a:gd name="adj" fmla="val 12500"/>
+              <a:gd name="adj" fmla="val 13333"/>
             </a:avLst>
           </a:prstGeom>
           <a:solidFill>
@@ -17693,7 +17703,7 @@
         </p:nvSpPr>
         <p:spPr>
           <a:xfrm rot="0" flipH="0" flipV="0">
-            <a:off x="495300" y="4295775"/>
+            <a:off x="495300" y="4314825"/>
             <a:ext cx="457200" cy="190500"/>
           </a:xfrm>
           <a:prstGeom prst="rect"/>
@@ -17728,31 +17738,61 @@
         </p:nvSpPr>
         <p:spPr>
           <a:xfrm rot="0" flipH="0" flipV="0">
-            <a:off x="1162050" y="4248150"/>
-            <a:ext cx="7458075" cy="285750"/>
-          </a:xfrm>
-          <a:prstGeom prst="rect"/>
-        </p:spPr>
-        <p:txBody>
-          <a:bodyPr wrap="none" lIns="0" tIns="0" rIns="0" bIns="0"/>
-          <a:p>
-            <a:pPr>
-              <a:lnSpc>
-                <a:spcPct val="140000"/>
-              </a:lnSpc>
-            </a:pPr>
-            <a:r>
-              <a:rPr lang="zh-CN" sz="1313">
-                <a:solidFill>
-                  <a:srgbClr val="1A2230"/>
-                </a:solidFill>
-                <a:latin typeface="Microsoft YaHei"/>
-                <a:ea typeface="Microsoft YaHei"/>
-              </a:rPr>
-              <a:t>视觉前端</a:t>
-            </a:r>
-            <a:r>
-              <a:rPr lang="en-US" sz="1313">
+            <a:off x="1162050" y="4238625"/>
+            <a:ext cx="10648950" cy="257175"/>
+          </a:xfrm>
+          <a:prstGeom prst="rect"/>
+        </p:spPr>
+        <p:txBody>
+          <a:bodyPr wrap="none" lIns="0" tIns="0" rIns="0" bIns="0"/>
+          <a:p>
+            <a:pPr>
+              <a:lnSpc>
+                <a:spcPct val="135000"/>
+              </a:lnSpc>
+            </a:pPr>
+            <a:r>
+              <a:rPr lang="zh-CN" sz="1238">
+                <a:solidFill>
+                  <a:srgbClr val="1A2230"/>
+                </a:solidFill>
+                <a:latin typeface="Microsoft YaHei"/>
+                <a:ea typeface="Microsoft YaHei"/>
+              </a:rPr>
+              <a:t>单帧预算</a:t>
+            </a:r>
+            <a:r>
+              <a:rPr lang="zh-CN" sz="1238">
+                <a:solidFill>
+                  <a:srgbClr val="1A2230"/>
+                </a:solidFill>
+                <a:latin typeface="Microsoft YaHei"/>
+                <a:ea typeface="Microsoft YaHei"/>
+              </a:rPr>
+              <a:t>　前端</a:t>
+            </a:r>
+            <a:r>
+              <a:rPr lang="en-US" sz="1238">
+                <a:solidFill>
+                  <a:srgbClr val="1A2230"/>
+                </a:solidFill>
+                <a:latin typeface="Microsoft YaHei"/>
+                <a:ea typeface="Microsoft YaHei"/>
+              </a:rPr>
+              <a:t xml:space="preserve"> 27.8 </a:t>
+            </a:r>
+            <a:r>
+              <a:rPr lang="zh-CN" sz="1238">
+                <a:solidFill>
+                  <a:srgbClr val="1A2230"/>
+                </a:solidFill>
+                <a:latin typeface="Microsoft YaHei"/>
+                <a:ea typeface="Microsoft YaHei"/>
+              </a:rPr>
+              <a:t>＋</a:t>
+            </a:r>
+            <a:r>
+              <a:rPr lang="en-US" sz="1238">
                 <a:solidFill>
                   <a:srgbClr val="1A2230"/>
                 </a:solidFill>
@@ -17762,57 +17802,37 @@
               <a:t xml:space="preserve"> </a:t>
             </a:r>
             <a:r>
-              <a:rPr lang="en-US" sz="1313">
-                <a:solidFill>
-                  <a:srgbClr val="1A2230"/>
-                </a:solidFill>
-                <a:latin typeface="Microsoft YaHei"/>
-                <a:ea typeface="Microsoft YaHei"/>
-              </a:rPr>
-              <a:t>27.8 ms</a:t>
-            </a:r>
-            <a:r>
-              <a:rPr lang="zh-CN" sz="1313">
-                <a:solidFill>
-                  <a:srgbClr val="1A2230"/>
-                </a:solidFill>
-                <a:latin typeface="Microsoft YaHei"/>
-                <a:ea typeface="Microsoft YaHei"/>
-              </a:rPr>
-              <a:t>　·　局部</a:t>
-            </a:r>
-            <a:r>
-              <a:rPr lang="en-US" sz="1313">
-                <a:solidFill>
-                  <a:srgbClr val="1A2230"/>
-                </a:solidFill>
-                <a:latin typeface="Microsoft YaHei"/>
-                <a:ea typeface="Microsoft YaHei"/>
-              </a:rPr>
-              <a:t xml:space="preserve"> BA </a:t>
-            </a:r>
-            <a:r>
-              <a:rPr lang="en-US" sz="1313">
-                <a:solidFill>
-                  <a:srgbClr val="1A2230"/>
-                </a:solidFill>
-                <a:latin typeface="Microsoft YaHei"/>
-                <a:ea typeface="Microsoft YaHei"/>
-              </a:rPr>
-              <a:t>40.5 ms</a:t>
-            </a:r>
-            <a:r>
-              <a:rPr lang="zh-CN" sz="1313">
-                <a:solidFill>
-                  <a:srgbClr val="1A2230"/>
-                </a:solidFill>
-                <a:latin typeface="Microsoft YaHei"/>
-                <a:ea typeface="Microsoft YaHei"/>
-              </a:rPr>
-              <a:t>　·　回环摊销</a:t>
-            </a:r>
-            <a:r>
-              <a:rPr lang="en-US" sz="1313">
+              <a:rPr lang="zh-CN" sz="1238">
+                <a:solidFill>
+                  <a:srgbClr val="1A2230"/>
+                </a:solidFill>
+                <a:latin typeface="Microsoft YaHei"/>
+                <a:ea typeface="Microsoft YaHei"/>
+              </a:rPr>
+              <a:t>局部</a:t>
+            </a:r>
+            <a:r>
+              <a:rPr lang="en-US" sz="1238">
+                <a:solidFill>
+                  <a:srgbClr val="1A2230"/>
+                </a:solidFill>
+                <a:latin typeface="Microsoft YaHei"/>
+                <a:ea typeface="Microsoft YaHei"/>
+              </a:rPr>
+              <a:t xml:space="preserve"> BA 40.5 </a:t>
+            </a:r>
+            <a:r>
+              <a:rPr lang="zh-CN" sz="1238">
+                <a:solidFill>
+                  <a:srgbClr val="1A2230"/>
+                </a:solidFill>
+                <a:latin typeface="Microsoft YaHei"/>
+                <a:ea typeface="Microsoft YaHei"/>
+              </a:rPr>
+              <a:t>＋</a:t>
+            </a:r>
+            <a:r>
+              <a:rPr lang="en-US" sz="1238">
                 <a:solidFill>
                   <a:srgbClr val="1A2230"/>
                 </a:solidFill>
@@ -17822,27 +17842,57 @@
               <a:t xml:space="preserve"> </a:t>
             </a:r>
             <a:r>
-              <a:rPr lang="en-US" sz="1313">
-                <a:solidFill>
-                  <a:srgbClr val="1A2230"/>
-                </a:solidFill>
-                <a:latin typeface="Microsoft YaHei"/>
-                <a:ea typeface="Microsoft YaHei"/>
-              </a:rPr>
-              <a:t>121.6 ms</a:t>
-            </a:r>
-            <a:r>
-              <a:rPr lang="zh-CN" sz="1313">
-                <a:solidFill>
-                  <a:srgbClr val="1A2230"/>
-                </a:solidFill>
-                <a:latin typeface="Microsoft YaHei"/>
-                <a:ea typeface="Microsoft YaHei"/>
-              </a:rPr>
-              <a:t>（仅绕回起点时）　·　渲染</a:t>
-            </a:r>
-            <a:r>
-              <a:rPr lang="en-US" sz="1313">
+              <a:rPr lang="zh-CN" sz="1238">
+                <a:solidFill>
+                  <a:srgbClr val="1A2230"/>
+                </a:solidFill>
+                <a:latin typeface="Microsoft YaHei"/>
+                <a:ea typeface="Microsoft YaHei"/>
+              </a:rPr>
+              <a:t>高斯</a:t>
+            </a:r>
+            <a:r>
+              <a:rPr lang="en-US" sz="1238">
+                <a:solidFill>
+                  <a:srgbClr val="1A2230"/>
+                </a:solidFill>
+                <a:latin typeface="Microsoft YaHei"/>
+                <a:ea typeface="Microsoft YaHei"/>
+              </a:rPr>
+              <a:t>/</a:t>
+            </a:r>
+            <a:r>
+              <a:rPr lang="zh-CN" sz="1238">
+                <a:solidFill>
+                  <a:srgbClr val="1A2230"/>
+                </a:solidFill>
+                <a:latin typeface="Microsoft YaHei"/>
+                <a:ea typeface="Microsoft YaHei"/>
+              </a:rPr>
+              <a:t>层级更新</a:t>
+            </a:r>
+            <a:r>
+              <a:rPr lang="en-US" sz="1238">
+                <a:solidFill>
+                  <a:srgbClr val="1A2230"/>
+                </a:solidFill>
+                <a:latin typeface="Microsoft YaHei"/>
+                <a:ea typeface="Microsoft YaHei"/>
+              </a:rPr>
+              <a:t xml:space="preserve"> → </a:t>
+            </a:r>
+            <a:r>
+              <a:rPr lang="zh-CN" sz="1238">
+                <a:solidFill>
+                  <a:srgbClr val="1A2230"/>
+                </a:solidFill>
+                <a:latin typeface="Microsoft YaHei"/>
+                <a:ea typeface="Microsoft YaHei"/>
+              </a:rPr>
+              <a:t>论文实测</a:t>
+            </a:r>
+            <a:r>
+              <a:rPr lang="en-US" sz="1238">
                 <a:solidFill>
                   <a:srgbClr val="1A2230"/>
                 </a:solidFill>
@@ -17852,14 +17902,64 @@
               <a:t xml:space="preserve"> </a:t>
             </a:r>
             <a:r>
-              <a:rPr lang="en-US" sz="1313">
-                <a:solidFill>
-                  <a:srgbClr val="1A2230"/>
-                </a:solidFill>
-                <a:latin typeface="Microsoft YaHei"/>
-                <a:ea typeface="Microsoft YaHei"/>
-              </a:rPr>
-              <a:t>480 fps</a:t>
+              <a:rPr lang="en-US" sz="1238">
+                <a:solidFill>
+                  <a:srgbClr val="1A2230"/>
+                </a:solidFill>
+                <a:latin typeface="Microsoft YaHei"/>
+                <a:ea typeface="Microsoft YaHei"/>
+              </a:rPr>
+              <a:t>324 ms</a:t>
+            </a:r>
+            <a:r>
+              <a:rPr lang="zh-CN" sz="1238">
+                <a:solidFill>
+                  <a:srgbClr val="1A2230"/>
+                </a:solidFill>
+                <a:latin typeface="Microsoft YaHei"/>
+                <a:ea typeface="Microsoft YaHei"/>
+              </a:rPr>
+              <a:t>（峰值</a:t>
+            </a:r>
+            <a:r>
+              <a:rPr lang="en-US" sz="1238">
+                <a:solidFill>
+                  <a:srgbClr val="1A2230"/>
+                </a:solidFill>
+                <a:latin typeface="Microsoft YaHei"/>
+                <a:ea typeface="Microsoft YaHei"/>
+              </a:rPr>
+              <a:t xml:space="preserve"> 386</a:t>
+            </a:r>
+            <a:r>
+              <a:rPr lang="zh-CN" sz="1238">
+                <a:solidFill>
+                  <a:srgbClr val="1A2230"/>
+                </a:solidFill>
+                <a:latin typeface="Microsoft YaHei"/>
+                <a:ea typeface="Microsoft YaHei"/>
+              </a:rPr>
+              <a:t>）·　本次复现</a:t>
+            </a:r>
+            <a:r>
+              <a:rPr lang="en-US" sz="1238">
+                <a:solidFill>
+                  <a:srgbClr val="1A2230"/>
+                </a:solidFill>
+                <a:latin typeface="Microsoft YaHei"/>
+                <a:ea typeface="Microsoft YaHei"/>
+              </a:rPr>
+              <a:t xml:space="preserve"> </a:t>
+            </a:r>
+            <a:r>
+              <a:rPr lang="en-US" sz="1238">
+                <a:solidFill>
+                  <a:srgbClr val="1A2230"/>
+                </a:solidFill>
+                <a:latin typeface="Microsoft YaHei"/>
+                <a:ea typeface="Microsoft YaHei"/>
+              </a:rPr>
+              <a:t>668 ms</a:t>
             </a:r>
             <a:endParaRPr/>
           </a:p>
@@ -17873,33 +17973,63 @@
         </p:nvSpPr>
         <p:spPr>
           <a:xfrm rot="0" flipH="0" flipV="0">
-            <a:off x="381000" y="4581525"/>
-            <a:ext cx="11430000" cy="180975"/>
-          </a:xfrm>
-          <a:prstGeom prst="rect"/>
-        </p:spPr>
-        <p:txBody>
-          <a:bodyPr wrap="none" lIns="0" tIns="0" rIns="0" bIns="0"/>
-          <a:p>
-            <a:pPr>
-              <a:lnSpc>
-                <a:spcPct val="100000"/>
-              </a:lnSpc>
-            </a:pPr>
-            <a:r>
-              <a:rPr lang="zh-CN" sz="1163">
-                <a:solidFill>
-                  <a:srgbClr val="8B97A8"/>
-                </a:solidFill>
-                <a:latin typeface="Microsoft YaHei"/>
-                <a:ea typeface="Microsoft YaHei"/>
-              </a:rPr>
-              <a:t>以上为论文单关键帧摊销实测；②③</a:t>
-            </a:r>
-            <a:r>
-              <a:rPr lang="en-US" sz="1163">
-                <a:solidFill>
-                  <a:srgbClr val="8B97A8"/>
+            <a:off x="1162050" y="4543425"/>
+            <a:ext cx="10648950" cy="257175"/>
+          </a:xfrm>
+          <a:prstGeom prst="rect"/>
+        </p:spPr>
+        <p:txBody>
+          <a:bodyPr wrap="none" lIns="0" tIns="0" rIns="0" bIns="0"/>
+          <a:p>
+            <a:pPr>
+              <a:lnSpc>
+                <a:spcPct val="135000"/>
+              </a:lnSpc>
+            </a:pPr>
+            <a:r>
+              <a:rPr lang="zh-CN" sz="1238">
+                <a:solidFill>
+                  <a:srgbClr val="1A2230"/>
+                </a:solidFill>
+                <a:latin typeface="Microsoft YaHei"/>
+                <a:ea typeface="Microsoft YaHei"/>
+              </a:rPr>
+              <a:t>全流程</a:t>
+            </a:r>
+            <a:r>
+              <a:rPr lang="zh-CN" sz="1238">
+                <a:solidFill>
+                  <a:srgbClr val="1A2230"/>
+                </a:solidFill>
+                <a:latin typeface="Microsoft YaHei"/>
+                <a:ea typeface="Microsoft YaHei"/>
+              </a:rPr>
+              <a:t>　</a:t>
+            </a:r>
+            <a:r>
+              <a:rPr lang="en-US" sz="1238">
+                <a:solidFill>
+                  <a:srgbClr val="1A2230"/>
+                </a:solidFill>
+                <a:latin typeface="Microsoft YaHei"/>
+                <a:ea typeface="Microsoft YaHei"/>
+              </a:rPr>
+              <a:t xml:space="preserve">85 </a:t>
+            </a:r>
+            <a:r>
+              <a:rPr lang="zh-CN" sz="1238">
+                <a:solidFill>
+                  <a:srgbClr val="1A2230"/>
+                </a:solidFill>
+                <a:latin typeface="Microsoft YaHei"/>
+                <a:ea typeface="Microsoft YaHei"/>
+              </a:rPr>
+              <a:t>张</a:t>
+            </a:r>
+            <a:r>
+              <a:rPr lang="en-US" sz="1238">
+                <a:solidFill>
+                  <a:srgbClr val="1A2230"/>
                 </a:solidFill>
                 <a:latin typeface="Microsoft YaHei"/>
                 <a:ea typeface="Microsoft YaHei"/>
@@ -17907,48 +18037,353 @@
               <a:t xml:space="preserve"> </a:t>
             </a:r>
             <a:r>
-              <a:rPr lang="zh-CN" sz="1163">
-                <a:solidFill>
-                  <a:srgbClr val="8B97A8"/>
-                </a:solidFill>
-                <a:latin typeface="Microsoft YaHei"/>
-                <a:ea typeface="Microsoft YaHei"/>
-              </a:rPr>
-              <a:t>的候选数已压到</a:t>
-            </a:r>
-            <a:r>
-              <a:rPr lang="en-US" sz="1163">
-                <a:solidFill>
-                  <a:srgbClr val="8B97A8"/>
-                </a:solidFill>
-                <a:latin typeface="Microsoft YaHei"/>
-                <a:ea typeface="Microsoft YaHei"/>
-              </a:rPr>
-              <a:t xml:space="preserve"> 20 / 5</a:t>
-            </a:r>
-            <a:r>
-              <a:rPr lang="zh-CN" sz="1163">
-                <a:solidFill>
-                  <a:srgbClr val="8B97A8"/>
-                </a:solidFill>
-                <a:latin typeface="Microsoft YaHei"/>
-                <a:ea typeface="Microsoft YaHei"/>
-              </a:rPr>
-              <a:t>，所以前端不是瓶颈——瓶颈是一次回环后的全局修正。</a:t>
-            </a:r>
-            <a:endParaRPr/>
-          </a:p>
-        </p:txBody>
-      </p:sp>
-      <p:sp>
-        <p:nvSpPr>
-          <p:cNvPr id="367" name=""/>
+              <a:rPr lang="en-US" sz="1238">
+                <a:solidFill>
+                  <a:srgbClr val="1A2230"/>
+                </a:solidFill>
+                <a:latin typeface="Microsoft YaHei"/>
+                <a:ea typeface="Microsoft YaHei"/>
+              </a:rPr>
+              <a:t>54 s</a:t>
+            </a:r>
+            <a:r>
+              <a:rPr lang="zh-CN" sz="1238">
+                <a:solidFill>
+                  <a:srgbClr val="1A2230"/>
+                </a:solidFill>
+                <a:latin typeface="Microsoft YaHei"/>
+                <a:ea typeface="Microsoft YaHei"/>
+              </a:rPr>
+              <a:t>（</a:t>
+            </a:r>
+            <a:r>
+              <a:rPr lang="en-US" sz="1238">
+                <a:solidFill>
+                  <a:srgbClr val="1A2230"/>
+                </a:solidFill>
+                <a:latin typeface="Microsoft YaHei"/>
+                <a:ea typeface="Microsoft YaHei"/>
+              </a:rPr>
+              <a:t>ds=1</a:t>
+            </a:r>
+            <a:r>
+              <a:rPr lang="zh-CN" sz="1238">
+                <a:solidFill>
+                  <a:srgbClr val="1A2230"/>
+                </a:solidFill>
+                <a:latin typeface="Microsoft YaHei"/>
+                <a:ea typeface="Microsoft YaHei"/>
+              </a:rPr>
+              <a:t>）</a:t>
+            </a:r>
+            <a:r>
+              <a:rPr lang="en-US" sz="1238">
+                <a:solidFill>
+                  <a:srgbClr val="1A2230"/>
+                </a:solidFill>
+                <a:latin typeface="Microsoft YaHei"/>
+                <a:ea typeface="Microsoft YaHei"/>
+              </a:rPr>
+              <a:t>/ 30.9 s</a:t>
+            </a:r>
+            <a:r>
+              <a:rPr lang="zh-CN" sz="1238">
+                <a:solidFill>
+                  <a:srgbClr val="1A2230"/>
+                </a:solidFill>
+                <a:latin typeface="Microsoft YaHei"/>
+                <a:ea typeface="Microsoft YaHei"/>
+              </a:rPr>
+              <a:t>（</a:t>
+            </a:r>
+            <a:r>
+              <a:rPr lang="en-US" sz="1238">
+                <a:solidFill>
+                  <a:srgbClr val="1A2230"/>
+                </a:solidFill>
+                <a:latin typeface="Microsoft YaHei"/>
+                <a:ea typeface="Microsoft YaHei"/>
+              </a:rPr>
+              <a:t>ds=2</a:t>
+            </a:r>
+            <a:r>
+              <a:rPr lang="zh-CN" sz="1238">
+                <a:solidFill>
+                  <a:srgbClr val="1A2230"/>
+                </a:solidFill>
+                <a:latin typeface="Microsoft YaHei"/>
+                <a:ea typeface="Microsoft YaHei"/>
+              </a:rPr>
+              <a:t>）　←　离线</a:t>
+            </a:r>
+            <a:r>
+              <a:rPr lang="en-US" sz="1238">
+                <a:solidFill>
+                  <a:srgbClr val="1A2230"/>
+                </a:solidFill>
+                <a:latin typeface="Microsoft YaHei"/>
+                <a:ea typeface="Microsoft YaHei"/>
+              </a:rPr>
+              <a:t xml:space="preserve"> COLMAP</a:t>
+            </a:r>
+            <a:r>
+              <a:rPr lang="zh-CN" sz="1238">
+                <a:solidFill>
+                  <a:srgbClr val="1A2230"/>
+                </a:solidFill>
+                <a:latin typeface="Microsoft YaHei"/>
+                <a:ea typeface="Microsoft YaHei"/>
+              </a:rPr>
+              <a:t>＋</a:t>
+            </a:r>
+            <a:r>
+              <a:rPr lang="en-US" sz="1238">
+                <a:solidFill>
+                  <a:srgbClr val="1A2230"/>
+                </a:solidFill>
+                <a:latin typeface="Microsoft YaHei"/>
+                <a:ea typeface="Microsoft YaHei"/>
+              </a:rPr>
+              <a:t xml:space="preserve">3DGS </a:t>
+            </a:r>
+            <a:r>
+              <a:rPr lang="zh-CN" sz="1238">
+                <a:solidFill>
+                  <a:srgbClr val="1A2230"/>
+                </a:solidFill>
+                <a:latin typeface="Microsoft YaHei"/>
+                <a:ea typeface="Microsoft YaHei"/>
+              </a:rPr>
+              <a:t>同场景</a:t>
+            </a:r>
+            <a:r>
+              <a:rPr lang="en-US" sz="1238">
+                <a:solidFill>
+                  <a:srgbClr val="1A2230"/>
+                </a:solidFill>
+                <a:latin typeface="Microsoft YaHei"/>
+                <a:ea typeface="Microsoft YaHei"/>
+              </a:rPr>
+              <a:t xml:space="preserve"> </a:t>
+            </a:r>
+            <a:r>
+              <a:rPr lang="en-US" sz="1238">
+                <a:solidFill>
+                  <a:srgbClr val="1A2230"/>
+                </a:solidFill>
+                <a:latin typeface="Microsoft YaHei"/>
+                <a:ea typeface="Microsoft YaHei"/>
+              </a:rPr>
+              <a:t>8 min 50 s</a:t>
+            </a:r>
+            <a:r>
+              <a:rPr lang="zh-CN" sz="1238">
+                <a:solidFill>
+                  <a:srgbClr val="1A2230"/>
+                </a:solidFill>
+                <a:latin typeface="Microsoft YaHei"/>
+                <a:ea typeface="Microsoft YaHei"/>
+              </a:rPr>
+              <a:t>，本文</a:t>
+            </a:r>
+            <a:r>
+              <a:rPr lang="en-US" sz="1238">
+                <a:solidFill>
+                  <a:srgbClr val="1A2230"/>
+                </a:solidFill>
+                <a:latin typeface="Microsoft YaHei"/>
+                <a:ea typeface="Microsoft YaHei"/>
+              </a:rPr>
+              <a:t xml:space="preserve"> 1 min 17 s</a:t>
+            </a:r>
+            <a:r>
+              <a:rPr lang="zh-CN" sz="1238">
+                <a:solidFill>
+                  <a:srgbClr val="1A2230"/>
+                </a:solidFill>
+                <a:latin typeface="Microsoft YaHei"/>
+                <a:ea typeface="Microsoft YaHei"/>
+              </a:rPr>
+              <a:t>，</a:t>
+            </a:r>
+            <a:r>
+              <a:rPr lang="zh-CN" sz="1238">
+                <a:solidFill>
+                  <a:srgbClr val="1A2230"/>
+                </a:solidFill>
+                <a:latin typeface="Microsoft YaHei"/>
+                <a:ea typeface="Microsoft YaHei"/>
+              </a:rPr>
+              <a:t>快</a:t>
+            </a:r>
+            <a:r>
+              <a:rPr lang="en-US" sz="1238">
+                <a:solidFill>
+                  <a:srgbClr val="1A2230"/>
+                </a:solidFill>
+                <a:latin typeface="Microsoft YaHei"/>
+                <a:ea typeface="Microsoft YaHei"/>
+              </a:rPr>
+              <a:t xml:space="preserve"> 6.9×</a:t>
+            </a:r>
+            <a:endParaRPr/>
+          </a:p>
+        </p:txBody>
+      </p:sp>
+      <p:sp>
+        <p:nvSpPr>
+          <p:cNvPr id="367" name="" descr="{&quot;isTemplate&quot;:true,&quot;type&quot;:&quot;text&quot;}"/>
+          <p:cNvSpPr txBox="1"/>
+          <p:nvPr/>
+        </p:nvSpPr>
+        <p:spPr>
+          <a:xfrm rot="0" flipH="0" flipV="0">
+            <a:off x="1162050" y="4848225"/>
+            <a:ext cx="10648950" cy="257175"/>
+          </a:xfrm>
+          <a:prstGeom prst="rect"/>
+        </p:spPr>
+        <p:txBody>
+          <a:bodyPr wrap="none" lIns="0" tIns="0" rIns="0" bIns="0"/>
+          <a:p>
+            <a:pPr>
+              <a:lnSpc>
+                <a:spcPct val="135000"/>
+              </a:lnSpc>
+            </a:pPr>
+            <a:r>
+              <a:rPr lang="en-US" sz="1238">
+                <a:solidFill>
+                  <a:srgbClr val="4A5568"/>
+                </a:solidFill>
+                <a:latin typeface="Microsoft YaHei"/>
+                <a:ea typeface="Microsoft YaHei"/>
+              </a:rPr>
+              <a:t xml:space="preserve">immediate </a:t>
+            </a:r>
+            <a:r>
+              <a:rPr lang="zh-CN" sz="1238">
+                <a:solidFill>
+                  <a:srgbClr val="4A5568"/>
+                </a:solidFill>
+                <a:latin typeface="Microsoft YaHei"/>
+                <a:ea typeface="Microsoft YaHei"/>
+              </a:rPr>
+              <a:t>的含义</a:t>
+            </a:r>
+            <a:r>
+              <a:rPr lang="zh-CN" sz="1238">
+                <a:solidFill>
+                  <a:srgbClr val="4A5568"/>
+                </a:solidFill>
+                <a:latin typeface="Microsoft YaHei"/>
+                <a:ea typeface="Microsoft YaHei"/>
+              </a:rPr>
+              <a:t>　单帧</a:t>
+            </a:r>
+            <a:r>
+              <a:rPr lang="en-US" sz="1238">
+                <a:solidFill>
+                  <a:srgbClr val="4A5568"/>
+                </a:solidFill>
+                <a:latin typeface="Microsoft YaHei"/>
+                <a:ea typeface="Microsoft YaHei"/>
+              </a:rPr>
+              <a:t xml:space="preserve"> &lt; 1 </a:t>
+            </a:r>
+            <a:r>
+              <a:rPr lang="zh-CN" sz="1238">
+                <a:solidFill>
+                  <a:srgbClr val="4A5568"/>
+                </a:solidFill>
+                <a:latin typeface="Microsoft YaHei"/>
+                <a:ea typeface="Microsoft YaHei"/>
+              </a:rPr>
+              <a:t>秒，够边拍边判断要不要补拍；</a:t>
+            </a:r>
+            <a:r>
+              <a:rPr lang="zh-CN" sz="1238">
+                <a:solidFill>
+                  <a:srgbClr val="4A5568"/>
+                </a:solidFill>
+                <a:latin typeface="Microsoft YaHei"/>
+                <a:ea typeface="Microsoft YaHei"/>
+              </a:rPr>
+              <a:t>不是</a:t>
+            </a:r>
+            <a:r>
+              <a:rPr lang="en-US" sz="1238">
+                <a:solidFill>
+                  <a:srgbClr val="4A5568"/>
+                </a:solidFill>
+                <a:latin typeface="Microsoft YaHei"/>
+                <a:ea typeface="Microsoft YaHei"/>
+              </a:rPr>
+              <a:t xml:space="preserve"> 30 fps </a:t>
+            </a:r>
+            <a:r>
+              <a:rPr lang="zh-CN" sz="1238">
+                <a:solidFill>
+                  <a:srgbClr val="4A5568"/>
+                </a:solidFill>
+                <a:latin typeface="Microsoft YaHei"/>
+                <a:ea typeface="Microsoft YaHei"/>
+              </a:rPr>
+              <a:t>视频——渲染</a:t>
+            </a:r>
+            <a:r>
+              <a:rPr lang="en-US" sz="1238">
+                <a:solidFill>
+                  <a:srgbClr val="4A5568"/>
+                </a:solidFill>
+                <a:latin typeface="Microsoft YaHei"/>
+                <a:ea typeface="Microsoft YaHei"/>
+              </a:rPr>
+              <a:t xml:space="preserve"> 480 fps </a:t>
+            </a:r>
+            <a:r>
+              <a:rPr lang="zh-CN" sz="1238">
+                <a:solidFill>
+                  <a:srgbClr val="4A5568"/>
+                </a:solidFill>
+                <a:latin typeface="Microsoft YaHei"/>
+                <a:ea typeface="Microsoft YaHei"/>
+              </a:rPr>
+              <a:t>是</a:t>
+            </a:r>
+            <a:r>
+              <a:rPr lang="en-US" sz="1238">
+                <a:solidFill>
+                  <a:srgbClr val="4A5568"/>
+                </a:solidFill>
+                <a:latin typeface="Microsoft YaHei"/>
+                <a:ea typeface="Microsoft YaHei"/>
+              </a:rPr>
+              <a:t xml:space="preserve"> 3DGS </a:t>
+            </a:r>
+            <a:r>
+              <a:rPr lang="zh-CN" sz="1238">
+                <a:solidFill>
+                  <a:srgbClr val="4A5568"/>
+                </a:solidFill>
+                <a:latin typeface="Microsoft YaHei"/>
+                <a:ea typeface="Microsoft YaHei"/>
+              </a:rPr>
+              <a:t>自带的，不算本文贡献</a:t>
+            </a:r>
+            <a:endParaRPr/>
+          </a:p>
+        </p:txBody>
+      </p:sp>
+      <p:sp>
+        <p:nvSpPr>
+          <p:cNvPr id="368" name=""/>
           <p:cNvSpPr/>
           <p:nvPr/>
         </p:nvSpPr>
         <p:spPr>
           <a:xfrm rot="0" flipH="0" flipV="0">
-            <a:off x="428625" y="4914900"/>
+            <a:off x="428625" y="5257800"/>
             <a:ext cx="11430000" cy="457200"/>
           </a:xfrm>
           <a:prstGeom prst="rect">
@@ -17966,13 +18401,13 @@
       </p:sp>
       <p:sp>
         <p:nvSpPr>
-          <p:cNvPr id="368" name=""/>
+          <p:cNvPr id="369" name=""/>
           <p:cNvSpPr/>
           <p:nvPr/>
         </p:nvSpPr>
         <p:spPr>
           <a:xfrm rot="0" flipH="0" flipV="0">
-            <a:off x="381000" y="4914900"/>
+            <a:off x="381000" y="5257800"/>
             <a:ext cx="11477625" cy="457200"/>
           </a:xfrm>
           <a:custGeom>
@@ -18006,13 +18441,13 @@
       </p:sp>
       <p:sp>
         <p:nvSpPr>
-          <p:cNvPr id="369" name="" descr="{&quot;isTemplate&quot;:true,&quot;type&quot;:&quot;text&quot;}"/>
-          <p:cNvSpPr txBox="1"/>
-          <p:nvPr/>
-        </p:nvSpPr>
-        <p:spPr>
-          <a:xfrm rot="0" flipH="0" flipV="0">
-            <a:off x="581025" y="5000625"/>
+          <p:cNvPr id="370" name="" descr="{&quot;isTemplate&quot;:true,&quot;type&quot;:&quot;text&quot;}"/>
+          <p:cNvSpPr txBox="1"/>
+          <p:nvPr/>
+        </p:nvSpPr>
+        <p:spPr>
+          <a:xfrm rot="0" flipH="0" flipV="0">
+            <a:off x="581025" y="5343525"/>
             <a:ext cx="11077575" cy="285750"/>
           </a:xfrm>
           <a:prstGeom prst="rect"/>
@@ -18121,13 +18556,13 @@
       </p:sp>
       <p:sp>
         <p:nvSpPr>
-          <p:cNvPr id="370" name=""/>
+          <p:cNvPr id="371" name=""/>
           <p:cNvSpPr/>
           <p:nvPr/>
         </p:nvSpPr>
         <p:spPr>
           <a:xfrm rot="0" flipH="0" flipV="0">
-            <a:off x="428625" y="5448300"/>
+            <a:off x="428625" y="5791200"/>
             <a:ext cx="11430000" cy="457200"/>
           </a:xfrm>
           <a:prstGeom prst="rect">
@@ -18145,13 +18580,13 @@
       </p:sp>
       <p:sp>
         <p:nvSpPr>
-          <p:cNvPr id="371" name=""/>
+          <p:cNvPr id="372" name=""/>
           <p:cNvSpPr/>
           <p:nvPr/>
         </p:nvSpPr>
         <p:spPr>
           <a:xfrm rot="0" flipH="0" flipV="0">
-            <a:off x="381000" y="5448300"/>
+            <a:off x="381000" y="5791200"/>
             <a:ext cx="11477625" cy="457200"/>
           </a:xfrm>
           <a:custGeom>
@@ -18185,13 +18620,13 @@
       </p:sp>
       <p:sp>
         <p:nvSpPr>
-          <p:cNvPr id="372" name="" descr="{&quot;isTemplate&quot;:true,&quot;type&quot;:&quot;text&quot;}"/>
-          <p:cNvSpPr txBox="1"/>
-          <p:nvPr/>
-        </p:nvSpPr>
-        <p:spPr>
-          <a:xfrm rot="0" flipH="0" flipV="0">
-            <a:off x="581025" y="5534025"/>
+          <p:cNvPr id="373" name="" descr="{&quot;isTemplate&quot;:true,&quot;type&quot;:&quot;text&quot;}"/>
+          <p:cNvSpPr txBox="1"/>
+          <p:nvPr/>
+        </p:nvSpPr>
+        <p:spPr>
+          <a:xfrm rot="0" flipH="0" flipV="0">
+            <a:off x="581025" y="5876925"/>
             <a:ext cx="11077575" cy="285750"/>
           </a:xfrm>
           <a:prstGeom prst="rect"/>
@@ -18230,7 +18665,7 @@
       </p:sp>
       <p:sp>
         <p:nvSpPr>
-          <p:cNvPr id="373" name="" descr="{&quot;isTemplate&quot;:true,&quot;type&quot;:&quot;text&quot;}"/>
+          <p:cNvPr id="374" name="" descr="{&quot;isTemplate&quot;:true,&quot;type&quot;:&quot;text&quot;}"/>
           <p:cNvSpPr txBox="1"/>
           <p:nvPr/>
         </p:nvSpPr>
@@ -18353,7 +18788,7 @@
   <p:cSld>
     <p:spTree>
       <p:nvGrpSpPr>
-        <p:cNvPr id="374" name="" descr="&lt;Slide style={{ width: '1280px', height: '720px', backgroundColor: '#FFFFFF', padding: '0px', flexDirection: 'column' }}&gt;&#13;&#10;    &lt;Box style={{ width: '1280px', height: '8px', backgroundColor: '#1E4FA8' }} /&gt;&#13;&#10;    &lt;Box style={{ padding: '26px 40px 0px 40px', flexDirection: 'row', justifyContent: 'space-between', alignItems: 'flex-end' }}&gt;&#13;&#10;        &lt;Text style={{ fontSize: 33, fontWeight: 'bold', color: '#1E4FA8' }}&gt;全局检索：先不问“在哪”，只问“像不像”&lt;/Text&gt;&#13;&#10;        &lt;Text style={{ fontSize: 15, color: '#8B97A8' }}&gt;05 / 15&lt;/Text&gt;&#13;&#10;    &lt;/Box&gt;&#13;&#10;    &lt;Box style={{ padding: '8px 40px 0px 40px' }}&gt;&#13;&#10;        &lt;Text style={{ fontSize: 20, color: '#4A5568', lineHeight: 1.4 }}&gt;每来一个关键帧，先用一个全局描述子和全部历史帧比一次，取出 20 个“可能同处”的候选——这一步完全不看拍摄顺序。&lt;/Text&gt;&#13;&#10;    &lt;/Box&gt;&#13;&#10;    &lt;Box style={{ padding: '14px 40px 0px 40px', flexDirection: 'row', gap: 20 }}&gt;&#13;&#10;        &lt;Box style={{ width: 600, flexDirection: 'column', gap: 11 }}&gt;&#13;&#10;            &lt;Box style={{ backgroundColor: '#F7F9FC', border: '1px solid #D6DCE5', borderRadius: 6, padding: '9px 16px' }}&gt;&#13;&#10;                &lt;Text style={{ fontSize: 18, color: '#1A2230', lineHeight: 1.45 }}&gt;&lt;b&gt;输入&lt;/b&gt;　新帧图像 ＋ 已收下的历史关键帧库&lt;/Text&gt;&#13;&#10;            &lt;/Box&gt;&#13;&#10;            &lt;Box style={{ backgroundColor: '#F7F9FC', border: '1px solid #D6DCE5', borderRadius: 6, padding: '9px 16px' }}&gt;&#13;&#10;                &lt;Text style={{ fontSize: 18, color: '#1A2230', lineHeight: 1.45 }}&gt;&lt;b&gt;做法&lt;/b&gt;　MegaLoc 输出 4096 维描述子；与库内全部描述子算余弦相似度，排序取前 20&lt;/Text&gt;&#13;&#10;            &lt;/Box&gt;&#13;&#10;            &lt;Box style={{ backgroundColor: '#F7F9FC', border: '1px solid #D6DCE5', borderRadius: 6, padding: '9px 16px' }}&gt;&#13;&#10;                &lt;Text style={{ fontSize: 18, color: '#1A2230', lineHeight: 1.45 }}&gt;&lt;b&gt;输出&lt;/b&gt;　20 个候选帧（只是“像”，还不保证几何对得上）&lt;/Text&gt;&#13;&#10;            &lt;/Box&gt;&#13;&#10;            &lt;Box style={{ backgroundColor: '#F0F5FC', border: '1px solid #3D7BD9', borderRadius: 6, padding: '10px 16px', flexDirection: 'column' }}&gt;&#13;&#10;                &lt;Text style={{ fontSize: 18, color: '#1A2230', lineHeight: 1.45 }}&gt;&lt;b&gt;关键取值&lt;/b&gt;　K = 20 个候选　·　num_prev_keyframes_check = 20&lt;/Text&gt;&#13;&#10;                &lt;Text style={{ fontSize: 16, color: '#4A5568', lineHeight: 1.4, marginTop: 4 }}&gt;论文写 MixVPR，开源代码因许可换成 MegaLoc；两者都是“一帧 → 一个向量”&lt;/Text&gt;&#13;&#10;            &lt;/Box&gt;&#13;&#10;        &lt;/Box&gt;&#13;&#10;        &lt;Box style={{ width: 580, flexDirection: 'column' }}&gt;&#13;&#10;            &lt;Image src=&quot;figs/fig1_vpr.png&quot; style={{ width: 580, height: 362 }} /&gt;&#13;&#10;            &lt;Text style={{ fontSize: 14.5, color: '#8B97A8', marginTop: 5 }}&gt;图 1　检索与帧序无关：n 帧只做 n 次比对，不做 n² 次。&lt;/Text&gt;&#13;&#10;        &lt;/Box&gt;&#13;&#10;    &lt;/Box&gt;&#13;&#10;    &lt;Box style={{ margin: '12px 40px 0px 40px', backgroundColor: '#F7F9FC', borderLeft: '5px solid #1E4FA8', padding: '10px 18px', flexDirection: 'column' }}&gt;&#13;&#10;        &lt;Image src=&quot;formula/f05.png&quot; style={{ width: 149.5, height: 50.0 }} /&gt;&#13;&#10;        &lt;Text style={{ fontSize: 16.5, color: '#4A5568', lineHeight: 1.4, marginTop: 3 }}&gt;相似度只看外观、不看时间——乱序输入在这里第一次被“原谅”；代价 ≈ 1 ms / 1000 对，是整条链里最便宜的一步。&lt;/Text&gt;&#13;&#10;    &lt;/Box&gt;&#13;&#10;    &lt;Box style={{ marginTop: 'auto', padding: '10px 40px 12px 40px' }}&gt;&#13;&#10;        &lt;Text style={{ fontSize: 15, color: '#8B97A8' }}&gt;治的是“乱”：不再假设新帧只和上一帧有关，而是和全部历史都有关。&lt;/Text&gt;&#13;&#10;    &lt;/Box&gt;&#13;&#10;&lt;/Slide&gt;&#13;&#10;"/>
+        <p:cNvPr id="375" name="" descr="&lt;Slide style={{ width: '1280px', height: '720px', backgroundColor: '#FFFFFF', padding: '0px', flexDirection: 'column' }}&gt;&#13;&#10;    &lt;Box style={{ width: '1280px', height: '8px', backgroundColor: '#1E4FA8' }} /&gt;&#13;&#10;    &lt;Box style={{ padding: '26px 40px 0px 40px', flexDirection: 'row', justifyContent: 'space-between', alignItems: 'flex-end' }}&gt;&#13;&#10;        &lt;Text style={{ fontSize: 33, fontWeight: 'bold', color: '#1E4FA8' }}&gt;全局检索：先不问“在哪”，只问“像不像”&lt;/Text&gt;&#13;&#10;        &lt;Text style={{ fontSize: 15, color: '#8B97A8' }}&gt;05 / 15&lt;/Text&gt;&#13;&#10;    &lt;/Box&gt;&#13;&#10;    &lt;Box style={{ padding: '8px 40px 0px 40px' }}&gt;&#13;&#10;        &lt;Text style={{ fontSize: 20, color: '#4A5568', lineHeight: 1.4 }}&gt;每来一个关键帧，先用一个全局描述子和全部历史帧比一次，取出 20 个“可能同处”的候选——这一步完全不看拍摄顺序。&lt;/Text&gt;&#13;&#10;    &lt;/Box&gt;&#13;&#10;    &lt;Box style={{ padding: '14px 40px 0px 40px', flexDirection: 'row', gap: 20 }}&gt;&#13;&#10;        &lt;Box style={{ width: 600, flexDirection: 'column', gap: 11 }}&gt;&#13;&#10;            &lt;Box style={{ backgroundColor: '#F7F9FC', border: '1px solid #D6DCE5', borderRadius: 6, padding: '9px 16px' }}&gt;&#13;&#10;                &lt;Text style={{ fontSize: 18, color: '#1A2230', lineHeight: 1.45 }}&gt;&lt;b&gt;输入&lt;/b&gt;　新帧图像 ＋ 已收下的历史关键帧库&lt;/Text&gt;&#13;&#10;            &lt;/Box&gt;&#13;&#10;            &lt;Box style={{ backgroundColor: '#F7F9FC', border: '1px solid #D6DCE5', borderRadius: 6, padding: '9px 16px' }}&gt;&#13;&#10;                &lt;Text style={{ fontSize: 18, color: '#1A2230', lineHeight: 1.45 }}&gt;&lt;b&gt;做法&lt;/b&gt;　MegaLoc 输出 4096 维描述子；与库内全部描述子算余弦相似度，排序取前 20&lt;/Text&gt;&#13;&#10;            &lt;/Box&gt;&#13;&#10;            &lt;Box style={{ backgroundColor: '#F7F9FC', border: '1px solid #D6DCE5', borderRadius: 6, padding: '9px 16px' }}&gt;&#13;&#10;                &lt;Text style={{ fontSize: 18, color: '#1A2230', lineHeight: 1.45 }}&gt;&lt;b&gt;输出&lt;/b&gt;　20 个候选帧（只是“像”，还不保证几何对得上）&lt;/Text&gt;&#13;&#10;            &lt;/Box&gt;&#13;&#10;            &lt;Box style={{ backgroundColor: '#F0F5FC', border: '1px solid #3D7BD9', borderRadius: 6, padding: '10px 16px', flexDirection: 'column' }}&gt;&#13;&#10;                &lt;Text style={{ fontSize: 18, color: '#1A2230', lineHeight: 1.45 }}&gt;&lt;b&gt;关键取值&lt;/b&gt;　K = 20 个候选　·　num_prev_keyframes_check = 20&lt;/Text&gt;&#13;&#10;                &lt;Text style={{ fontSize: 16, color: '#4A5568', lineHeight: 1.4, marginTop: 4 }}&gt;论文写 MixVPR，开源代码因许可换成 MegaLoc；两者都是“一帧 → 一个向量”&lt;/Text&gt;&#13;&#10;            &lt;/Box&gt;&#13;&#10;        &lt;/Box&gt;&#13;&#10;        &lt;Box style={{ width: 580, flexDirection: 'column' }}&gt;&#13;&#10;            &lt;Image src=&quot;figs/fig1_vpr.png&quot; style={{ width: 580, height: 362 }} /&gt;&#13;&#10;            &lt;Text style={{ fontSize: 14.5, color: '#8B97A8', marginTop: 5 }}&gt;图 1　检索与帧序无关：n 帧只做 n 次比对，不做 n² 次。&lt;/Text&gt;&#13;&#10;        &lt;/Box&gt;&#13;&#10;    &lt;/Box&gt;&#13;&#10;    &lt;Box style={{ margin: '12px 40px 0px 40px', backgroundColor: '#F7F9FC', borderLeft: '5px solid #1E4FA8', padding: '10px 18px', flexDirection: 'column' }}&gt;&#13;&#10;        &lt;Image src=&quot;formula/f05.png&quot; style={{ width: 149.5, height: 50.0 }} /&gt;&#13;&#10;        &lt;Text style={{ fontSize: 16.5, color: '#4A5568', lineHeight: 1.4, marginTop: 3 }}&gt;相似度只看外观、不看时间——乱序输入在这里第一次被“原谅”；代价 ≈ 1 ms / 1000 对，是整条链里最便宜的一步。&lt;/Text&gt;&#13;&#10;    &lt;/Box&gt;&#13;&#10;    &lt;Box style={{ marginTop: 'auto', padding: '10px 40px 12px 40px' }}&gt;&#13;&#10;        &lt;Text style={{ fontSize: 15, color: '#8B97A8' }}&gt;治的是“乱”：不再假设新帧只和上一帧有关，而是和全部历史都有关。&lt;/Text&gt;&#13;&#10;    &lt;/Box&gt;&#13;&#10;&lt;/Slide&gt;&#13;&#10;"/>
         <p:cNvGrpSpPr/>
         <p:nvPr/>
       </p:nvGrpSpPr>
@@ -18367,7 +18802,7 @@
       </p:grpSpPr>
       <p:sp>
         <p:nvSpPr>
-          <p:cNvPr id="375" name=""/>
+          <p:cNvPr id="376" name=""/>
           <p:cNvSpPr/>
           <p:nvPr/>
         </p:nvSpPr>
@@ -18391,7 +18826,7 @@
       </p:sp>
       <p:sp>
         <p:nvSpPr>
-          <p:cNvPr id="376" name=""/>
+          <p:cNvPr id="377" name=""/>
           <p:cNvSpPr/>
           <p:nvPr/>
         </p:nvSpPr>
@@ -18415,7 +18850,7 @@
       </p:sp>
       <p:sp>
         <p:nvSpPr>
-          <p:cNvPr id="377" name="" descr="{&quot;isTemplate&quot;:true,&quot;type&quot;:&quot;text&quot;}"/>
+          <p:cNvPr id="378" name="" descr="{&quot;isTemplate&quot;:true,&quot;type&quot;:&quot;text&quot;}"/>
           <p:cNvSpPr txBox="1"/>
           <p:nvPr/>
         </p:nvSpPr>
@@ -18450,7 +18885,7 @@
       </p:sp>
       <p:sp>
         <p:nvSpPr>
-          <p:cNvPr id="378" name="" descr="{&quot;isTemplate&quot;:true,&quot;type&quot;:&quot;text&quot;}"/>
+          <p:cNvPr id="379" name="" descr="{&quot;isTemplate&quot;:true,&quot;type&quot;:&quot;text&quot;}"/>
           <p:cNvSpPr txBox="1"/>
           <p:nvPr/>
         </p:nvSpPr>
@@ -18485,7 +18920,7 @@
       </p:sp>
       <p:sp>
         <p:nvSpPr>
-          <p:cNvPr id="379" name="" descr="{&quot;isTemplate&quot;:true,&quot;type&quot;:&quot;text&quot;}"/>
+          <p:cNvPr id="380" name="" descr="{&quot;isTemplate&quot;:true,&quot;type&quot;:&quot;text&quot;}"/>
           <p:cNvSpPr txBox="1"/>
           <p:nvPr/>
         </p:nvSpPr>
@@ -18540,7 +18975,7 @@
       </p:sp>
       <p:sp>
         <p:nvSpPr>
-          <p:cNvPr id="380" name=""/>
+          <p:cNvPr id="381" name=""/>
           <p:cNvSpPr/>
           <p:nvPr/>
         </p:nvSpPr>
@@ -18571,7 +19006,7 @@
       </p:sp>
       <p:sp>
         <p:nvSpPr>
-          <p:cNvPr id="381" name="" descr="{&quot;isTemplate&quot;:true,&quot;type&quot;:&quot;text&quot;}"/>
+          <p:cNvPr id="382" name="" descr="{&quot;isTemplate&quot;:true,&quot;type&quot;:&quot;text&quot;}"/>
           <p:cNvSpPr txBox="1"/>
           <p:nvPr/>
         </p:nvSpPr>
@@ -18656,7 +19091,7 @@
       </p:sp>
       <p:sp>
         <p:nvSpPr>
-          <p:cNvPr id="382" name=""/>
+          <p:cNvPr id="383" name=""/>
           <p:cNvSpPr/>
           <p:nvPr/>
         </p:nvSpPr>
@@ -18687,7 +19122,7 @@
       </p:sp>
       <p:sp>
         <p:nvSpPr>
-          <p:cNvPr id="383" name="" descr="{&quot;isTemplate&quot;:true,&quot;type&quot;:&quot;text&quot;}"/>
+          <p:cNvPr id="384" name="" descr="{&quot;isTemplate&quot;:true,&quot;type&quot;:&quot;text&quot;}"/>
           <p:cNvSpPr txBox="1"/>
           <p:nvPr/>
         </p:nvSpPr>
@@ -18784,7 +19219,7 @@
       </p:sp>
       <p:sp>
         <p:nvSpPr>
-          <p:cNvPr id="384" name=""/>
+          <p:cNvPr id="385" name=""/>
           <p:cNvSpPr/>
           <p:nvPr/>
         </p:nvSpPr>
@@ -18815,7 +19250,7 @@
       </p:sp>
       <p:sp>
         <p:nvSpPr>
-          <p:cNvPr id="385" name="" descr="{&quot;isTemplate&quot;:true,&quot;type&quot;:&quot;text&quot;}"/>
+          <p:cNvPr id="386" name="" descr="{&quot;isTemplate&quot;:true,&quot;type&quot;:&quot;text&quot;}"/>
           <p:cNvSpPr txBox="1"/>
           <p:nvPr/>
         </p:nvSpPr>
@@ -18880,7 +19315,7 @@
       </p:sp>
       <p:sp>
         <p:nvSpPr>
-          <p:cNvPr id="386" name=""/>
+          <p:cNvPr id="387" name=""/>
           <p:cNvSpPr/>
           <p:nvPr/>
         </p:nvSpPr>
@@ -18911,7 +19346,7 @@
       </p:sp>
       <p:sp>
         <p:nvSpPr>
-          <p:cNvPr id="387" name="" descr="{&quot;isTemplate&quot;:true,&quot;type&quot;:&quot;text&quot;}"/>
+          <p:cNvPr id="388" name="" descr="{&quot;isTemplate&quot;:true,&quot;type&quot;:&quot;text&quot;}"/>
           <p:cNvSpPr txBox="1"/>
           <p:nvPr/>
         </p:nvSpPr>
@@ -18986,7 +19421,7 @@
       </p:sp>
       <p:sp>
         <p:nvSpPr>
-          <p:cNvPr id="388" name="" descr="{&quot;isTemplate&quot;:true,&quot;type&quot;:&quot;text&quot;}"/>
+          <p:cNvPr id="389" name="" descr="{&quot;isTemplate&quot;:true,&quot;type&quot;:&quot;text&quot;}"/>
           <p:cNvSpPr txBox="1"/>
           <p:nvPr/>
         </p:nvSpPr>
@@ -19083,7 +19518,7 @@
       </p:sp>
       <p:pic>
         <p:nvPicPr>
-          <p:cNvPr id="389" name=""/>
+          <p:cNvPr id="390" name=""/>
           <p:cNvPicPr>
             <a:picLocks noChangeAspect="1"/>
           </p:cNvPicPr>
@@ -19109,7 +19544,7 @@
       </p:pic>
       <p:sp>
         <p:nvSpPr>
-          <p:cNvPr id="390" name="" descr="{&quot;isTemplate&quot;:true,&quot;type&quot;:&quot;text&quot;}"/>
+          <p:cNvPr id="391" name="" descr="{&quot;isTemplate&quot;:true,&quot;type&quot;:&quot;text&quot;}"/>
           <p:cNvSpPr txBox="1"/>
           <p:nvPr/>
         </p:nvSpPr>
@@ -19224,7 +19659,7 @@
       </p:sp>
       <p:sp>
         <p:nvSpPr>
-          <p:cNvPr id="391" name=""/>
+          <p:cNvPr id="392" name=""/>
           <p:cNvSpPr/>
           <p:nvPr/>
         </p:nvSpPr>
@@ -19248,7 +19683,7 @@
       </p:sp>
       <p:sp>
         <p:nvSpPr>
-          <p:cNvPr id="392" name=""/>
+          <p:cNvPr id="393" name=""/>
           <p:cNvSpPr/>
           <p:nvPr/>
         </p:nvSpPr>
@@ -19288,7 +19723,7 @@
       </p:sp>
       <p:pic>
         <p:nvPicPr>
-          <p:cNvPr id="393" name=""/>
+          <p:cNvPr id="394" name=""/>
           <p:cNvPicPr>
             <a:picLocks noChangeAspect="1"/>
           </p:cNvPicPr>
@@ -19314,7 +19749,7 @@
       </p:pic>
       <p:sp>
         <p:nvSpPr>
-          <p:cNvPr id="394" name="" descr="{&quot;isTemplate&quot;:true,&quot;type&quot;:&quot;text&quot;}"/>
+          <p:cNvPr id="395" name="" descr="{&quot;isTemplate&quot;:true,&quot;type&quot;:&quot;text&quot;}"/>
           <p:cNvSpPr txBox="1"/>
           <p:nvPr/>
         </p:nvSpPr>
@@ -19369,7 +19804,7 @@
       </p:sp>
       <p:sp>
         <p:nvSpPr>
-          <p:cNvPr id="395" name="" descr="{&quot;isTemplate&quot;:true,&quot;type&quot;:&quot;text&quot;}"/>
+          <p:cNvPr id="396" name="" descr="{&quot;isTemplate&quot;:true,&quot;type&quot;:&quot;text&quot;}"/>
           <p:cNvSpPr txBox="1"/>
           <p:nvPr/>
         </p:nvSpPr>
@@ -19412,7 +19847,7 @@
   <p:cSld>
     <p:spTree>
       <p:nvGrpSpPr>
-        <p:cNvPr id="396" name="" descr="&lt;Slide style={{ width: '1280px', height: '720px', backgroundColor: '#FFFFFF', padding: '0px', flexDirection: 'column' }}&gt;&#13;&#10;    &lt;Box style={{ width: '1280px', height: '8px', backgroundColor: '#1E4FA8' }} /&gt;&#13;&#10;    &lt;Box style={{ padding: '26px 40px 0px 40px', flexDirection: 'row', justifyContent: 'space-between', alignItems: 'flex-end' }}&gt;&#13;&#10;        &lt;Text style={{ fontSize: 33, fontWeight: 'bold', color: '#1E4FA8' }}&gt;局部粗筛：砍掉“看着像、其实没对上”的候选&lt;/Text&gt;&#13;&#10;        &lt;Text style={{ fontSize: 15, color: '#8B97A8' }}&gt;06 / 15&lt;/Text&gt;&#13;&#10;    &lt;/Box&gt;&#13;&#10;    &lt;Box style={{ padding: '8px 40px 0px 40px' }}&gt;&#13;&#10;        &lt;Text style={{ fontSize: 20, color: '#4A5568', lineHeight: 1.4 }}&gt;对 20 个候选各跑一次轻量局部匹配，按能对上的关键点数排序，只把前 5 个留给精确匹配。&lt;/Text&gt;&#13;&#10;    &lt;/Box&gt;&#13;&#10;    &lt;Box style={{ padding: '14px 40px 0px 40px', flexDirection: 'row', gap: 20 }}&gt;&#13;&#10;        &lt;Box style={{ width: 600, flexDirection: 'column', gap: 11 }}&gt;&#13;&#10;            &lt;Box style={{ backgroundColor: '#F7F9FC', border: '1px solid #D6DCE5', borderRadius: 6, padding: '9px 16px' }}&gt;&#13;&#10;                &lt;Text style={{ fontSize: 18, color: '#1A2230', lineHeight: 1.45 }}&gt;&lt;b&gt;输入&lt;/b&gt;　① 给出的 20 个候选帧&lt;/Text&gt;&#13;&#10;            &lt;/Box&gt;&#13;&#10;            &lt;Box style={{ backgroundColor: '#F7F9FC', border: '1px solid #D6DCE5', borderRadius: 6, padding: '9px 16px' }}&gt;&#13;&#10;                &lt;Text style={{ fontSize: 18, color: '#1A2230', lineHeight: 1.45 }}&gt;&lt;b&gt;做法&lt;/b&gt;　XFeat 提稀疏关键点，只比坐标一致性，得到内点对数 |M_ij|&lt;/Text&gt;&#13;&#10;            &lt;/Box&gt;&#13;&#10;            &lt;Box style={{ backgroundColor: '#F7F9FC', border: '1px solid #D6DCE5', borderRadius: 6, padding: '9px 16px' }}&gt;&#13;&#10;                &lt;Text style={{ fontSize: 18, color: '#1A2230', lineHeight: 1.45 }}&gt;&lt;b&gt;输出&lt;/b&gt;　5 个候选（外观像 ＋ 确实对上了点）&lt;/Text&gt;&#13;&#10;            &lt;/Box&gt;&#13;&#10;            &lt;Box style={{ backgroundColor: '#F0F5FC', border: '1px solid #3D7BD9', borderRadius: 6, padding: '10px 16px', flexDirection: 'column' }}&gt;&#13;&#10;                &lt;Text style={{ fontSize: 18, color: '#1A2230', lineHeight: 1.45 }}&gt;&lt;b&gt;关键取值&lt;/b&gt;　保留 K′ = 5 个　·　约 0.5 ms / 对&lt;/Text&gt;&#13;&#10;                &lt;Text style={{ fontSize: 16, color: '#4A5568', lineHeight: 1.4, marginTop: 4 }}&gt;这一步故意用“便宜但粗糙”的特征：它的任务只是排序，不是定论&lt;/Text&gt;&#13;&#10;            &lt;/Box&gt;&#13;&#10;        &lt;/Box&gt;&#13;&#10;        &lt;Box style={{ width: 580, flexDirection: 'column' }}&gt;&#13;&#10;            &lt;Image src=&quot;figs/fig2_xfeat.png&quot; style={{ width: 580, height: 362 }} /&gt;&#13;&#10;            &lt;Text style={{ fontSize: 14.5, color: '#8B97A8', marginTop: 5 }}&gt;图 2　20 个候选按内点数排序，只有前 5 个进入下一级。&lt;/Text&gt;&#13;&#10;        &lt;/Box&gt;&#13;&#10;    &lt;/Box&gt;&#13;&#10;    &lt;Box style={{ margin: '12px 40px 0px 40px', backgroundColor: '#F7F9FC', borderLeft: '5px solid #1E4FA8', padding: '10px 18px', flexDirection: 'column' }}&gt;&#13;&#10;        &lt;Image src=&quot;formula/f06.png&quot; style={{ width: 197.5, height: 30.5 }} /&gt;&#13;&#10;        &lt;Text style={{ fontSize: 16.5, color: '#4A5568', lineHeight: 1.4, marginTop: 3 }}&gt;淘汰的正是纯外观检索的典型假阳性：两个角落都“长得像窗台”，但一个点都对不上。&lt;/Text&gt;&#13;&#10;    &lt;/Box&gt;&#13;&#10;    &lt;Box style={{ marginTop: 'auto', padding: '10px 40px 12px 40px' }}&gt;&#13;&#10;        &lt;Text style={{ fontSize: 15, color: '#8B97A8' }}&gt;三级串联的意义：候选集 1000 → 20 → 5 → 1，贵的操作只作用在极小的集合上。&lt;/Text&gt;&#13;&#10;    &lt;/Box&gt;&#13;&#10;&lt;/Slide&gt;&#13;&#10;"/>
+        <p:cNvPr id="397" name="" descr="&lt;Slide style={{ width: '1280px', height: '720px', backgroundColor: '#FFFFFF', padding: '0px', flexDirection: 'column' }}&gt;&#13;&#10;    &lt;Box style={{ width: '1280px', height: '8px', backgroundColor: '#1E4FA8' }} /&gt;&#13;&#10;    &lt;Box style={{ padding: '26px 40px 0px 40px', flexDirection: 'row', justifyContent: 'space-between', alignItems: 'flex-end' }}&gt;&#13;&#10;        &lt;Text style={{ fontSize: 33, fontWeight: 'bold', color: '#1E4FA8' }}&gt;局部粗筛：砍掉“看着像、其实没对上”的候选&lt;/Text&gt;&#13;&#10;        &lt;Text style={{ fontSize: 15, color: '#8B97A8' }}&gt;06 / 15&lt;/Text&gt;&#13;&#10;    &lt;/Box&gt;&#13;&#10;    &lt;Box style={{ padding: '8px 40px 0px 40px' }}&gt;&#13;&#10;        &lt;Text style={{ fontSize: 20, color: '#4A5568', lineHeight: 1.4 }}&gt;对 20 个候选各跑一次轻量局部匹配，按能对上的关键点数排序，只把前 5 个留给精确匹配。&lt;/Text&gt;&#13;&#10;    &lt;/Box&gt;&#13;&#10;    &lt;Box style={{ padding: '14px 40px 0px 40px', flexDirection: 'row', gap: 20 }}&gt;&#13;&#10;        &lt;Box style={{ width: 600, flexDirection: 'column', gap: 11 }}&gt;&#13;&#10;            &lt;Box style={{ backgroundColor: '#F7F9FC', border: '1px solid #D6DCE5', borderRadius: 6, padding: '9px 16px' }}&gt;&#13;&#10;                &lt;Text style={{ fontSize: 18, color: '#1A2230', lineHeight: 1.45 }}&gt;&lt;b&gt;输入&lt;/b&gt;　① 给出的 20 个候选帧&lt;/Text&gt;&#13;&#10;            &lt;/Box&gt;&#13;&#10;            &lt;Box style={{ backgroundColor: '#F7F9FC', border: '1px solid #D6DCE5', borderRadius: 6, padding: '9px 16px' }}&gt;&#13;&#10;                &lt;Text style={{ fontSize: 18, color: '#1A2230', lineHeight: 1.45 }}&gt;&lt;b&gt;做法&lt;/b&gt;　XFeat 提稀疏关键点，只比坐标一致性，得到内点对数 |M_ij|&lt;/Text&gt;&#13;&#10;            &lt;/Box&gt;&#13;&#10;            &lt;Box style={{ backgroundColor: '#F7F9FC', border: '1px solid #D6DCE5', borderRadius: 6, padding: '9px 16px' }}&gt;&#13;&#10;                &lt;Text style={{ fontSize: 18, color: '#1A2230', lineHeight: 1.45 }}&gt;&lt;b&gt;输出&lt;/b&gt;　5 个候选（外观像 ＋ 确实对上了点）&lt;/Text&gt;&#13;&#10;            &lt;/Box&gt;&#13;&#10;            &lt;Box style={{ backgroundColor: '#F0F5FC', border: '1px solid #3D7BD9', borderRadius: 6, padding: '10px 16px', flexDirection: 'column' }}&gt;&#13;&#10;                &lt;Text style={{ fontSize: 18, color: '#1A2230', lineHeight: 1.45 }}&gt;&lt;b&gt;关键取值&lt;/b&gt;　保留 K′ = 5 个　·　约 0.5 ms / 对&lt;/Text&gt;&#13;&#10;                &lt;Text style={{ fontSize: 16, color: '#4A5568', lineHeight: 1.4, marginTop: 4 }}&gt;这一步故意用“便宜但粗糙”的特征：它的任务只是排序，不是定论&lt;/Text&gt;&#13;&#10;            &lt;/Box&gt;&#13;&#10;        &lt;/Box&gt;&#13;&#10;        &lt;Box style={{ width: 580, flexDirection: 'column' }}&gt;&#13;&#10;            &lt;Image src=&quot;figs/fig2_xfeat.png&quot; style={{ width: 580, height: 362 }} /&gt;&#13;&#10;            &lt;Text style={{ fontSize: 14.5, color: '#8B97A8', marginTop: 5 }}&gt;图 2　20 个候选按内点数排序，只有前 5 个进入下一级。&lt;/Text&gt;&#13;&#10;        &lt;/Box&gt;&#13;&#10;    &lt;/Box&gt;&#13;&#10;    &lt;Box style={{ margin: '12px 40px 0px 40px', backgroundColor: '#F7F9FC', borderLeft: '5px solid #1E4FA8', padding: '10px 18px', flexDirection: 'column' }}&gt;&#13;&#10;        &lt;Image src=&quot;formula/f06.png&quot; style={{ width: 197.5, height: 30.5 }} /&gt;&#13;&#10;        &lt;Text style={{ fontSize: 16.5, color: '#4A5568', lineHeight: 1.4, marginTop: 3 }}&gt;淘汰的正是纯外观检索的典型假阳性：两个角落都“长得像窗台”，但一个点都对不上。&lt;/Text&gt;&#13;&#10;    &lt;/Box&gt;&#13;&#10;    &lt;Box style={{ marginTop: 'auto', padding: '10px 40px 12px 40px' }}&gt;&#13;&#10;        &lt;Text style={{ fontSize: 15, color: '#8B97A8' }}&gt;三级串联的意义：候选集 1000 → 20 → 5 → 1，贵的操作只作用在极小的集合上。&lt;/Text&gt;&#13;&#10;    &lt;/Box&gt;&#13;&#10;&lt;/Slide&gt;&#13;&#10;"/>
         <p:cNvGrpSpPr/>
         <p:nvPr/>
       </p:nvGrpSpPr>
@@ -19426,7 +19861,7 @@
       </p:grpSpPr>
       <p:sp>
         <p:nvSpPr>
-          <p:cNvPr id="397" name=""/>
+          <p:cNvPr id="398" name=""/>
           <p:cNvSpPr/>
           <p:nvPr/>
         </p:nvSpPr>
@@ -19450,7 +19885,7 @@
       </p:sp>
       <p:sp>
         <p:nvSpPr>
-          <p:cNvPr id="398" name=""/>
+          <p:cNvPr id="399" name=""/>
           <p:cNvSpPr/>
           <p:nvPr/>
         </p:nvSpPr>
@@ -19474,7 +19909,7 @@
       </p:sp>
       <p:sp>
         <p:nvSpPr>
-          <p:cNvPr id="399" name="" descr="{&quot;isTemplate&quot;:true,&quot;type&quot;:&quot;text&quot;}"/>
+          <p:cNvPr id="400" name="" descr="{&quot;isTemplate&quot;:true,&quot;type&quot;:&quot;text&quot;}"/>
           <p:cNvSpPr txBox="1"/>
           <p:nvPr/>
         </p:nvSpPr>
@@ -19509,7 +19944,7 @@
       </p:sp>
       <p:sp>
         <p:nvSpPr>
-          <p:cNvPr id="400" name="" descr="{&quot;isTemplate&quot;:true,&quot;type&quot;:&quot;text&quot;}"/>
+          <p:cNvPr id="401" name="" descr="{&quot;isTemplate&quot;:true,&quot;type&quot;:&quot;text&quot;}"/>
           <p:cNvSpPr txBox="1"/>
           <p:nvPr/>
         </p:nvSpPr>
@@ -19544,7 +19979,7 @@
       </p:sp>
       <p:sp>
         <p:nvSpPr>
-          <p:cNvPr id="401" name="" descr="{&quot;isTemplate&quot;:true,&quot;type&quot;:&quot;text&quot;}"/>
+          <p:cNvPr id="402" name="" descr="{&quot;isTemplate&quot;:true,&quot;type&quot;:&quot;text&quot;}"/>
           <p:cNvSpPr txBox="1"/>
           <p:nvPr/>
         </p:nvSpPr>
@@ -19619,7 +20054,7 @@
       </p:sp>
       <p:sp>
         <p:nvSpPr>
-          <p:cNvPr id="402" name=""/>
+          <p:cNvPr id="403" name=""/>
           <p:cNvSpPr/>
           <p:nvPr/>
         </p:nvSpPr>
@@ -19650,7 +20085,7 @@
       </p:sp>
       <p:sp>
         <p:nvSpPr>
-          <p:cNvPr id="403" name="" descr="{&quot;isTemplate&quot;:true,&quot;type&quot;:&quot;text&quot;}"/>
+          <p:cNvPr id="404" name="" descr="{&quot;isTemplate&quot;:true,&quot;type&quot;:&quot;text&quot;}"/>
           <p:cNvSpPr txBox="1"/>
           <p:nvPr/>
         </p:nvSpPr>
@@ -19735,7 +20170,7 @@
       </p:sp>
       <p:sp>
         <p:nvSpPr>
-          <p:cNvPr id="404" name=""/>
+          <p:cNvPr id="405" name=""/>
           <p:cNvSpPr/>
           <p:nvPr/>
         </p:nvSpPr>
@@ -19766,7 +20201,7 @@
       </p:sp>
       <p:sp>
         <p:nvSpPr>
-          <p:cNvPr id="405" name="" descr="{&quot;isTemplate&quot;:true,&quot;type&quot;:&quot;text&quot;}"/>
+          <p:cNvPr id="406" name="" descr="{&quot;isTemplate&quot;:true,&quot;type&quot;:&quot;text&quot;}"/>
           <p:cNvSpPr txBox="1"/>
           <p:nvPr/>
         </p:nvSpPr>
@@ -19841,7 +20276,7 @@
       </p:sp>
       <p:sp>
         <p:nvSpPr>
-          <p:cNvPr id="406" name=""/>
+          <p:cNvPr id="407" name=""/>
           <p:cNvSpPr/>
           <p:nvPr/>
         </p:nvSpPr>
@@ -19872,7 +20307,7 @@
       </p:sp>
       <p:sp>
         <p:nvSpPr>
-          <p:cNvPr id="407" name="" descr="{&quot;isTemplate&quot;:true,&quot;type&quot;:&quot;text&quot;}"/>
+          <p:cNvPr id="408" name="" descr="{&quot;isTemplate&quot;:true,&quot;type&quot;:&quot;text&quot;}"/>
           <p:cNvSpPr txBox="1"/>
           <p:nvPr/>
         </p:nvSpPr>
@@ -19977,7 +20412,7 @@
       </p:sp>
       <p:sp>
         <p:nvSpPr>
-          <p:cNvPr id="408" name=""/>
+          <p:cNvPr id="409" name=""/>
           <p:cNvSpPr/>
           <p:nvPr/>
         </p:nvSpPr>
@@ -20008,7 +20443,7 @@
       </p:sp>
       <p:sp>
         <p:nvSpPr>
-          <p:cNvPr id="409" name="" descr="{&quot;isTemplate&quot;:true,&quot;type&quot;:&quot;text&quot;}"/>
+          <p:cNvPr id="410" name="" descr="{&quot;isTemplate&quot;:true,&quot;type&quot;:&quot;text&quot;}"/>
           <p:cNvSpPr txBox="1"/>
           <p:nvPr/>
         </p:nvSpPr>
@@ -20093,7 +20528,7 @@
       </p:sp>
       <p:sp>
         <p:nvSpPr>
-          <p:cNvPr id="410" name="" descr="{&quot;isTemplate&quot;:true,&quot;type&quot;:&quot;text&quot;}"/>
+          <p:cNvPr id="411" name="" descr="{&quot;isTemplate&quot;:true,&quot;type&quot;:&quot;text&quot;}"/>
           <p:cNvSpPr txBox="1"/>
           <p:nvPr/>
         </p:nvSpPr>
@@ -20128,7 +20563,7 @@
       </p:sp>
       <p:pic>
         <p:nvPicPr>
-          <p:cNvPr id="411" name=""/>
+          <p:cNvPr id="412" name=""/>
           <p:cNvPicPr>
             <a:picLocks noChangeAspect="1"/>
           </p:cNvPicPr>
@@ -20154,7 +20589,7 @@
       </p:pic>
       <p:sp>
         <p:nvSpPr>
-          <p:cNvPr id="412" name="" descr="{&quot;isTemplate&quot;:true,&quot;type&quot;:&quot;text&quot;}"/>
+          <p:cNvPr id="413" name="" descr="{&quot;isTemplate&quot;:true,&quot;type&quot;:&quot;text&quot;}"/>
           <p:cNvSpPr txBox="1"/>
           <p:nvPr/>
         </p:nvSpPr>
@@ -20249,7 +20684,7 @@
       </p:sp>
       <p:sp>
         <p:nvSpPr>
-          <p:cNvPr id="413" name=""/>
+          <p:cNvPr id="414" name=""/>
           <p:cNvSpPr/>
           <p:nvPr/>
         </p:nvSpPr>
@@ -20273,7 +20708,7 @@
       </p:sp>
       <p:sp>
         <p:nvSpPr>
-          <p:cNvPr id="414" name=""/>
+          <p:cNvPr id="415" name=""/>
           <p:cNvSpPr/>
           <p:nvPr/>
         </p:nvSpPr>
@@ -20313,7 +20748,7 @@
       </p:sp>
       <p:pic>
         <p:nvPicPr>
-          <p:cNvPr id="415" name=""/>
+          <p:cNvPr id="416" name=""/>
           <p:cNvPicPr>
             <a:picLocks noChangeAspect="1"/>
           </p:cNvPicPr>
@@ -20339,7 +20774,7 @@
       </p:pic>
       <p:sp>
         <p:nvSpPr>
-          <p:cNvPr id="416" name="" descr="{&quot;isTemplate&quot;:true,&quot;type&quot;:&quot;text&quot;}"/>
+          <p:cNvPr id="417" name="" descr="{&quot;isTemplate&quot;:true,&quot;type&quot;:&quot;text&quot;}"/>
           <p:cNvSpPr txBox="1"/>
           <p:nvPr/>
         </p:nvSpPr>
@@ -20374,7 +20809,7 @@
       </p:sp>
       <p:sp>
         <p:nvSpPr>
-          <p:cNvPr id="417" name="" descr="{&quot;isTemplate&quot;:true,&quot;type&quot;:&quot;text&quot;}"/>
+          <p:cNvPr id="418" name="" descr="{&quot;isTemplate&quot;:true,&quot;type&quot;:&quot;text&quot;}"/>
           <p:cNvSpPr txBox="1"/>
           <p:nvPr/>
         </p:nvSpPr>
@@ -20437,7 +20872,7 @@
   <p:cSld>
     <p:spTree>
       <p:nvGrpSpPr>
-        <p:cNvPr id="418" name="" descr="&lt;Slide style={{ width: '1280px', height: '720px', backgroundColor: '#FFFFFF', padding: '0px', flexDirection: 'column' }}&gt;&#13;&#10;    &lt;Box style={{ width: '1280px', height: '8px', backgroundColor: '#1E4FA8' }} /&gt;&#13;&#10;    &lt;Box style={{ padding: '26px 40px 0px 40px', flexDirection: 'row', justifyContent: 'space-between', alignItems: 'flex-end' }}&gt;&#13;&#10;        &lt;Text style={{ fontSize: 33, fontWeight: 'bold', color: '#1E4FA8' }}&gt;精确验证：通过才建边，边就是后面一切判断的依据&lt;/Text&gt;&#13;&#10;        &lt;Text style={{ fontSize: 15, color: '#8B97A8' }}&gt;07 / 15&lt;/Text&gt;&#13;&#10;    &lt;/Box&gt;&#13;&#10;    &lt;Box style={{ padding: '8px 40px 0px 40px' }}&gt;&#13;&#10;        &lt;Text style={{ fontSize: 20, color: '#4A5568', lineHeight: 1.4 }}&gt;对 5 个候选跑 LightGlue 精确配对，RANSAC 剔除外点，内点数超过 500 才写进协视图。&lt;/Text&gt;&#13;&#10;    &lt;/Box&gt;&#13;&#10;    &lt;Box style={{ padding: '14px 40px 0px 40px', flexDirection: 'row', gap: 20 }}&gt;&#13;&#10;        &lt;Box style={{ width: 600, flexDirection: 'column', gap: 11 }}&gt;&#13;&#10;            &lt;Box style={{ backgroundColor: '#F7F9FC', border: '1px solid #D6DCE5', borderRadius: 6, padding: '9px 16px' }}&gt;&#13;&#10;                &lt;Text style={{ fontSize: 18, color: '#1A2230', lineHeight: 1.45 }}&gt;&lt;b&gt;输入&lt;/b&gt;　② 留下的 5 个候选帧&lt;/Text&gt;&#13;&#10;            &lt;/Box&gt;&#13;&#10;            &lt;Box style={{ backgroundColor: '#F7F9FC', border: '1px solid #D6DCE5', borderRadius: 6, padding: '9px 16px' }}&gt;&#13;&#10;                &lt;Text style={{ fontSize: 18, color: '#1A2230', lineHeight: 1.45 }}&gt;&lt;b&gt;做法&lt;/b&gt;　LightGlue 精确配对 ＋ RANSAC 剔外点；内点数 |M_ij| 即“这条边有多可信”&lt;/Text&gt;&#13;&#10;            &lt;/Box&gt;&#13;&#10;            &lt;Box style={{ backgroundColor: '#F7F9FC', border: '1px solid #D6DCE5', borderRadius: 6, padding: '9px 16px' }}&gt;&#13;&#10;                &lt;Text style={{ fontSize: 18, color: '#1A2230', lineHeight: 1.45 }}&gt;&lt;b&gt;输出&lt;/b&gt;　加权协视图 G = (M, E, W)，边权 w_ij = 1/|M_ij|&lt;/Text&gt;&#13;&#10;            &lt;/Box&gt;&#13;&#10;            &lt;Box style={{ backgroundColor: '#F0F5FC', border: '1px solid #3D7BD9', borderRadius: 6, padding: '10px 16px', flexDirection: 'column' }}&gt;&#13;&#10;                &lt;Text style={{ fontSize: 18, color: '#1A2230', lineHeight: 1.45 }}&gt;&lt;b&gt;关键取值&lt;/b&gt;　τ_m = 500 内点　·　min_matches_edge = 500&lt;/Text&gt;&#13;&#10;                &lt;Text style={{ fontSize: 16, color: '#4A5568', lineHeight: 1.4, marginTop: 4 }}&gt;边权取内点数倒数：内点越多边越短，于是图上“最短路”= 最可靠的位姿链&lt;/Text&gt;&#13;&#10;            &lt;/Box&gt;&#13;&#10;        &lt;/Box&gt;&#13;&#10;        &lt;Box style={{ width: 580, flexDirection: 'column' }}&gt;&#13;&#10;            &lt;Image src=&quot;figs/fig3_lightglue.png&quot; style={{ width: 580, height: 362 }} /&gt;&#13;&#10;            &lt;Text style={{ fontSize: 14.5, color: '#8B97A8', marginTop: 5 }}&gt;图 3　绿=内点、红叉=被 RANSAC 剔除；通过的帧对才成为图上的一条边。&lt;/Text&gt;&#13;&#10;        &lt;/Box&gt;&#13;&#10;    &lt;/Box&gt;&#13;&#10;    &lt;Box style={{ margin: '12px 40px 0px 40px', backgroundColor: '#F7F9FC', borderLeft: '5px solid #1E4FA8', padding: '10px 18px', flexDirection: 'column' }}&gt;&#13;&#10;        &lt;Image src=&quot;formula/f07.png&quot; style={{ width: 498.0, height: 30.5 }} /&gt;&#13;&#10;        &lt;Text style={{ fontSize: 16.5, color: '#4A5568', lineHeight: 1.4, marginTop: 3 }}&gt;这是全链唯一产生“共视约束”的地方——后面所有位姿都由这些点对推出来，边建错，后面全歪。&lt;/Text&gt;&#13;&#10;    &lt;/Box&gt;&#13;&#10;    &lt;Box style={{ marginTop: 'auto', padding: '10px 40px 12px 40px' }}&gt;&#13;&#10;        &lt;Text style={{ fontSize: 15, color: '#8B97A8' }}&gt;到这一步为止，一张图还没解；但“谁和谁能一起算”已经确定下来了。&lt;/Text&gt;&#13;&#10;    &lt;/Box&gt;&#13;&#10;&lt;/Slide&gt;&#13;&#10;"/>
+        <p:cNvPr id="419" name="" descr="&lt;Slide style={{ width: '1280px', height: '720px', backgroundColor: '#FFFFFF', padding: '0px', flexDirection: 'column' }}&gt;&#13;&#10;    &lt;Box style={{ width: '1280px', height: '8px', backgroundColor: '#1E4FA8' }} /&gt;&#13;&#10;    &lt;Box style={{ padding: '26px 40px 0px 40px', flexDirection: 'row', justifyContent: 'space-between', alignItems: 'flex-end' }}&gt;&#13;&#10;        &lt;Text style={{ fontSize: 33, fontWeight: 'bold', color: '#1E4FA8' }}&gt;精确验证：通过才建边，边就是后面一切判断的依据&lt;/Text&gt;&#13;&#10;        &lt;Text style={{ fontSize: 15, color: '#8B97A8' }}&gt;07 / 15&lt;/Text&gt;&#13;&#10;    &lt;/Box&gt;&#13;&#10;    &lt;Box style={{ padding: '8px 40px 0px 40px' }}&gt;&#13;&#10;        &lt;Text style={{ fontSize: 20, color: '#4A5568', lineHeight: 1.4 }}&gt;对 5 个候选跑 LightGlue 精确配对，RANSAC 剔除外点，内点数超过 500 才写进协视图。&lt;/Text&gt;&#13;&#10;    &lt;/Box&gt;&#13;&#10;    &lt;Box style={{ padding: '14px 40px 0px 40px', flexDirection: 'row', gap: 20 }}&gt;&#13;&#10;        &lt;Box style={{ width: 600, flexDirection: 'column', gap: 11 }}&gt;&#13;&#10;            &lt;Box style={{ backgroundColor: '#F7F9FC', border: '1px solid #D6DCE5', borderRadius: 6, padding: '9px 16px' }}&gt;&#13;&#10;                &lt;Text style={{ fontSize: 18, color: '#1A2230', lineHeight: 1.45 }}&gt;&lt;b&gt;输入&lt;/b&gt;　② 留下的 5 个候选帧&lt;/Text&gt;&#13;&#10;            &lt;/Box&gt;&#13;&#10;            &lt;Box style={{ backgroundColor: '#F7F9FC', border: '1px solid #D6DCE5', borderRadius: 6, padding: '9px 16px' }}&gt;&#13;&#10;                &lt;Text style={{ fontSize: 18, color: '#1A2230', lineHeight: 1.45 }}&gt;&lt;b&gt;做法&lt;/b&gt;　LightGlue 精确配对 ＋ RANSAC 剔外点；内点数 |M_ij| 即“这条边有多可信”&lt;/Text&gt;&#13;&#10;            &lt;/Box&gt;&#13;&#10;            &lt;Box style={{ backgroundColor: '#F7F9FC', border: '1px solid #D6DCE5', borderRadius: 6, padding: '9px 16px' }}&gt;&#13;&#10;                &lt;Text style={{ fontSize: 18, color: '#1A2230', lineHeight: 1.45 }}&gt;&lt;b&gt;输出&lt;/b&gt;　加权协视图 G = (M, E, W)，边权 w_ij = 1/|M_ij|&lt;/Text&gt;&#13;&#10;            &lt;/Box&gt;&#13;&#10;            &lt;Box style={{ backgroundColor: '#F0F5FC', border: '1px solid #3D7BD9', borderRadius: 6, padding: '10px 16px', flexDirection: 'column' }}&gt;&#13;&#10;                &lt;Text style={{ fontSize: 18, color: '#1A2230', lineHeight: 1.45 }}&gt;&lt;b&gt;关键取值&lt;/b&gt;　τ_m = 500 内点　·　min_matches_edge = 500&lt;/Text&gt;&#13;&#10;                &lt;Text style={{ fontSize: 16, color: '#4A5568', lineHeight: 1.4, marginTop: 4 }}&gt;边权取内点数倒数：内点越多边越短，于是图上“最短路”= 最可靠的位姿链&lt;/Text&gt;&#13;&#10;            &lt;/Box&gt;&#13;&#10;        &lt;/Box&gt;&#13;&#10;        &lt;Box style={{ width: 580, flexDirection: 'column' }}&gt;&#13;&#10;            &lt;Image src=&quot;figs/fig3_lightglue.png&quot; style={{ width: 580, height: 362 }} /&gt;&#13;&#10;            &lt;Text style={{ fontSize: 14.5, color: '#8B97A8', marginTop: 5 }}&gt;图 3　绿=内点、红叉=被 RANSAC 剔除；通过的帧对才成为图上的一条边。&lt;/Text&gt;&#13;&#10;        &lt;/Box&gt;&#13;&#10;    &lt;/Box&gt;&#13;&#10;    &lt;Box style={{ margin: '12px 40px 0px 40px', backgroundColor: '#F7F9FC', borderLeft: '5px solid #1E4FA8', padding: '10px 18px', flexDirection: 'column' }}&gt;&#13;&#10;        &lt;Image src=&quot;formula/f07.png&quot; style={{ width: 498.0, height: 30.5 }} /&gt;&#13;&#10;        &lt;Text style={{ fontSize: 16.5, color: '#4A5568', lineHeight: 1.4, marginTop: 3 }}&gt;这是全链唯一产生“共视约束”的地方——后面所有位姿都由这些点对推出来，边建错，后面全歪。&lt;/Text&gt;&#13;&#10;    &lt;/Box&gt;&#13;&#10;    &lt;Box style={{ marginTop: 'auto', padding: '10px 40px 12px 40px' }}&gt;&#13;&#10;        &lt;Text style={{ fontSize: 15, color: '#8B97A8' }}&gt;到这一步为止，一张图还没解；但“谁和谁能一起算”已经确定下来了。&lt;/Text&gt;&#13;&#10;    &lt;/Box&gt;&#13;&#10;&lt;/Slide&gt;&#13;&#10;"/>
         <p:cNvGrpSpPr/>
         <p:nvPr/>
       </p:nvGrpSpPr>
@@ -20451,7 +20886,7 @@
       </p:grpSpPr>
       <p:sp>
         <p:nvSpPr>
-          <p:cNvPr id="419" name=""/>
+          <p:cNvPr id="420" name=""/>
           <p:cNvSpPr/>
           <p:nvPr/>
         </p:nvSpPr>
@@ -20475,7 +20910,7 @@
       </p:sp>
       <p:sp>
         <p:nvSpPr>
-          <p:cNvPr id="420" name=""/>
+          <p:cNvPr id="421" name=""/>
           <p:cNvSpPr/>
           <p:nvPr/>
         </p:nvSpPr>
@@ -20499,7 +20934,7 @@
       </p:sp>
       <p:sp>
         <p:nvSpPr>
-          <p:cNvPr id="421" name="" descr="{&quot;isTemplate&quot;:true,&quot;type&quot;:&quot;text&quot;}"/>
+          <p:cNvPr id="422" name="" descr="{&quot;isTemplate&quot;:true,&quot;type&quot;:&quot;text&quot;}"/>
           <p:cNvSpPr txBox="1"/>
           <p:nvPr/>
         </p:nvSpPr>
@@ -20534,7 +20969,7 @@
       </p:sp>
       <p:sp>
         <p:nvSpPr>
-          <p:cNvPr id="422" name="" descr="{&quot;isTemplate&quot;:true,&quot;type&quot;:&quot;text&quot;}"/>
+          <p:cNvPr id="423" name="" descr="{&quot;isTemplate&quot;:true,&quot;type&quot;:&quot;text&quot;}"/>
           <p:cNvSpPr txBox="1"/>
           <p:nvPr/>
         </p:nvSpPr>
@@ -20569,7 +21004,7 @@
       </p:sp>
       <p:sp>
         <p:nvSpPr>
-          <p:cNvPr id="423" name="" descr="{&quot;isTemplate&quot;:true,&quot;type&quot;:&quot;text&quot;}"/>
+          <p:cNvPr id="424" name="" descr="{&quot;isTemplate&quot;:true,&quot;type&quot;:&quot;text&quot;}"/>
           <p:cNvSpPr txBox="1"/>
           <p:nvPr/>
         </p:nvSpPr>
@@ -20684,7 +21119,7 @@
       </p:sp>
       <p:sp>
         <p:nvSpPr>
-          <p:cNvPr id="424" name=""/>
+          <p:cNvPr id="425" name=""/>
           <p:cNvSpPr/>
           <p:nvPr/>
         </p:nvSpPr>
@@ -20715,7 +21150,7 @@
       </p:sp>
       <p:sp>
         <p:nvSpPr>
-          <p:cNvPr id="425" name="" descr="{&quot;isTemplate&quot;:true,&quot;type&quot;:&quot;text&quot;}"/>
+          <p:cNvPr id="426" name="" descr="{&quot;isTemplate&quot;:true,&quot;type&quot;:&quot;text&quot;}"/>
           <p:cNvSpPr txBox="1"/>
           <p:nvPr/>
         </p:nvSpPr>
@@ -20800,7 +21235,7 @@
       </p:sp>
       <p:sp>
         <p:nvSpPr>
-          <p:cNvPr id="426" name=""/>
+          <p:cNvPr id="427" name=""/>
           <p:cNvSpPr/>
           <p:nvPr/>
         </p:nvSpPr>
@@ -20831,7 +21266,7 @@
       </p:sp>
       <p:sp>
         <p:nvSpPr>
-          <p:cNvPr id="427" name="" descr="{&quot;isTemplate&quot;:true,&quot;type&quot;:&quot;text&quot;}"/>
+          <p:cNvPr id="428" name="" descr="{&quot;isTemplate&quot;:true,&quot;type&quot;:&quot;text&quot;}"/>
           <p:cNvSpPr txBox="1"/>
           <p:nvPr/>
         </p:nvSpPr>
@@ -20958,7 +21393,7 @@
       </p:sp>
       <p:sp>
         <p:nvSpPr>
-          <p:cNvPr id="428" name=""/>
+          <p:cNvPr id="429" name=""/>
           <p:cNvSpPr/>
           <p:nvPr/>
         </p:nvSpPr>
@@ -20989,7 +21424,7 @@
       </p:sp>
       <p:sp>
         <p:nvSpPr>
-          <p:cNvPr id="429" name="" descr="{&quot;isTemplate&quot;:true,&quot;type&quot;:&quot;text&quot;}"/>
+          <p:cNvPr id="430" name="" descr="{&quot;isTemplate&quot;:true,&quot;type&quot;:&quot;text&quot;}"/>
           <p:cNvSpPr txBox="1"/>
           <p:nvPr/>
         </p:nvSpPr>
@@ -21064,7 +21499,7 @@
       </p:sp>
       <p:sp>
         <p:nvSpPr>
-          <p:cNvPr id="430" name=""/>
+          <p:cNvPr id="431" name=""/>
           <p:cNvSpPr/>
           <p:nvPr/>
         </p:nvSpPr>
@@ -21095,7 +21530,7 @@
       </p:sp>
       <p:sp>
         <p:nvSpPr>
-          <p:cNvPr id="431" name="" descr="{&quot;isTemplate&quot;:true,&quot;type&quot;:&quot;text&quot;}"/>
+          <p:cNvPr id="432" name="" descr="{&quot;isTemplate&quot;:true,&quot;type&quot;:&quot;text&quot;}"/>
           <p:cNvSpPr txBox="1"/>
           <p:nvPr/>
         </p:nvSpPr>
@@ -21170,7 +21605,7 @@
       </p:sp>
       <p:sp>
         <p:nvSpPr>
-          <p:cNvPr id="432" name="" descr="{&quot;isTemplate&quot;:true,&quot;type&quot;:&quot;text&quot;}"/>
+          <p:cNvPr id="433" name="" descr="{&quot;isTemplate&quot;:true,&quot;type&quot;:&quot;text&quot;}"/>
           <p:cNvSpPr txBox="1"/>
           <p:nvPr/>
         </p:nvSpPr>
@@ -21225,7 +21660,7 @@
       </p:sp>
       <p:pic>
         <p:nvPicPr>
-          <p:cNvPr id="433" name=""/>
+          <p:cNvPr id="434" name=""/>
           <p:cNvPicPr>
             <a:picLocks noChangeAspect="1"/>
           </p:cNvPicPr>
@@ -21251,7 +21686,7 @@
       </p:pic>
       <p:sp>
         <p:nvSpPr>
-          <p:cNvPr id="434" name="" descr="{&quot;isTemplate&quot;:true,&quot;type&quot;:&quot;text&quot;}"/>
+          <p:cNvPr id="435" name="" descr="{&quot;isTemplate&quot;:true,&quot;type&quot;:&quot;text&quot;}"/>
           <p:cNvSpPr txBox="1"/>
           <p:nvPr/>
         </p:nvSpPr>
@@ -21366,7 +21801,7 @@
       </p:sp>
       <p:sp>
         <p:nvSpPr>
-          <p:cNvPr id="435" name=""/>
+          <p:cNvPr id="436" name=""/>
           <p:cNvSpPr/>
           <p:nvPr/>
         </p:nvSpPr>
@@ -21390,7 +21825,7 @@
       </p:sp>
       <p:sp>
         <p:nvSpPr>
-          <p:cNvPr id="436" name=""/>
+          <p:cNvPr id="437" name=""/>
           <p:cNvSpPr/>
           <p:nvPr/>
         </p:nvSpPr>
@@ -21430,7 +21865,7 @@
       </p:sp>
       <p:pic>
         <p:nvPicPr>
-          <p:cNvPr id="437" name=""/>
+          <p:cNvPr id="438" name=""/>
           <p:cNvPicPr>
             <a:picLocks noChangeAspect="1"/>
           </p:cNvPicPr>
@@ -21456,7 +21891,7 @@
       </p:pic>
       <p:sp>
         <p:nvSpPr>
-          <p:cNvPr id="438" name="" descr="{&quot;isTemplate&quot;:true,&quot;type&quot;:&quot;text&quot;}"/>
+          <p:cNvPr id="439" name="" descr="{&quot;isTemplate&quot;:true,&quot;type&quot;:&quot;text&quot;}"/>
           <p:cNvSpPr txBox="1"/>
           <p:nvPr/>
         </p:nvSpPr>
@@ -21491,7 +21926,7 @@
       </p:sp>
       <p:sp>
         <p:nvSpPr>
-          <p:cNvPr id="439" name="" descr="{&quot;isTemplate&quot;:true,&quot;type&quot;:&quot;text&quot;}"/>
+          <p:cNvPr id="440" name="" descr="{&quot;isTemplate&quot;:true,&quot;type&quot;:&quot;text&quot;}"/>
           <p:cNvSpPr txBox="1"/>
           <p:nvPr/>
         </p:nvSpPr>
@@ -21534,7 +21969,7 @@
   <p:cSld>
     <p:spTree>
       <p:nvGrpSpPr>
-        <p:cNvPr id="440" name="" descr="&lt;Slide style={{ width: '1280px', height: '720px', backgroundColor: '#FFFFFF', padding: '0px', flexDirection: 'column' }}&gt;&#13;&#10;    &lt;Box style={{ width: '1280px', height: '8px', backgroundColor: '#1E4FA8' }} /&gt;&#13;&#10;    &lt;Box style={{ padding: '26px 40px 0px 40px', flexDirection: 'row', justifyContent: 'space-between', alignItems: 'flex-end' }}&gt;&#13;&#10;        &lt;Text style={{ fontSize: 33, fontWeight: 'bold', color: '#1E4FA8' }}&gt;选窗：从图里挑出最该一起优化的 20 帧&lt;/Text&gt;&#13;&#10;        &lt;Text style={{ fontSize: 15, color: '#8B97A8' }}&gt;08 / 15&lt;/Text&gt;&#13;&#10;    &lt;/Box&gt;&#13;&#10;    &lt;Box style={{ padding: '8px 40px 0px 40px' }}&gt;&#13;&#10;        &lt;Text style={{ fontSize: 20, color: '#4A5568', lineHeight: 1.4 }}&gt;不是“最近 20 帧”，而是“和当前集合连接最强的那个”——一次加一个，贪心扩张到 20 个。&lt;/Text&gt;&#13;&#10;    &lt;/Box&gt;&#13;&#10;    &lt;Box style={{ padding: '14px 40px 0px 40px', flexDirection: 'row', gap: 20 }}&gt;&#13;&#10;        &lt;Box style={{ width: 600, flexDirection: 'column', gap: 11 }}&gt;&#13;&#10;            &lt;Box style={{ backgroundColor: '#F7F9FC', border: '1px solid #D6DCE5', borderRadius: 6, padding: '9px 16px' }}&gt;&#13;&#10;                &lt;Text style={{ fontSize: 18, color: '#1A2230', lineHeight: 1.45 }}&gt;&lt;b&gt;输入&lt;/b&gt;　③ 更新后的加权协视图&lt;/Text&gt;&#13;&#10;            &lt;/Box&gt;&#13;&#10;            &lt;Box style={{ backgroundColor: '#F7F9FC', border: '1px solid #D6DCE5', borderRadius: 6, padding: '9px 16px' }}&gt;&#13;&#10;                &lt;Text style={{ fontSize: 18, color: '#1A2230', lineHeight: 1.45 }}&gt;&lt;b&gt;做法&lt;/b&gt;　每步选“与已选集合累计内点数最大”的节点加入，直到凑满 N&lt;/Text&gt;&#13;&#10;            &lt;/Box&gt;&#13;&#10;            &lt;Box style={{ backgroundColor: '#F7F9FC', border: '1px solid #D6DCE5', borderRadius: 6, padding: '9px 16px' }}&gt;&#13;&#10;                &lt;Text style={{ fontSize: 18, color: '#1A2230', lineHeight: 1.45 }}&gt;&lt;b&gt;输出&lt;/b&gt;　局部 BA 的变量集合 S（这一步只决定“算谁”，不动数值）&lt;/Text&gt;&#13;&#10;            &lt;/Box&gt;&#13;&#10;            &lt;Box style={{ backgroundColor: '#F0F5FC', border: '1px solid #3D7BD9', borderRadius: 6, padding: '10px 16px', flexDirection: 'column' }}&gt;&#13;&#10;                &lt;Text style={{ fontSize: 18, color: '#1A2230', lineHeight: 1.45 }}&gt;&lt;b&gt;关键取值&lt;/b&gt;　N = 20 帧　·　num_prev_keyframes_miniba_incr = 5&lt;/Text&gt;&#13;&#10;                &lt;Text style={{ fontSize: 16, color: '#4A5568', lineHeight: 1.4, marginTop: 4 }}&gt;每个节点平均只有约 10 条边，所以一次 argmax 的开销可以忽略&lt;/Text&gt;&#13;&#10;            &lt;/Box&gt;&#13;&#10;        &lt;/Box&gt;&#13;&#10;        &lt;Box style={{ width: 580, flexDirection: 'column' }}&gt;&#13;&#10;            &lt;Image src=&quot;figs/fig4_window.png&quot; style={{ width: 580, height: 362 }} /&gt;&#13;&#10;            &lt;Text style={{ fontSize: 14.5, color: '#8B97A8', marginTop: 5 }}&gt;图 4　实心=已选，红圈=本轮 argmax；贪心比全局最优便宜得多。&lt;/Text&gt;&#13;&#10;        &lt;/Box&gt;&#13;&#10;    &lt;/Box&gt;&#13;&#10;    &lt;Box style={{ margin: '12px 40px 0px 40px', backgroundColor: '#F7F9FC', borderLeft: '5px solid #1E4FA8', padding: '10px 18px', flexDirection: 'column' }}&gt;&#13;&#10;        &lt;Image src=&quot;formula/f08.png&quot; style={{ width: 437.0, height: 67.5 }} /&gt;&#13;&#10;        &lt;Text style={{ fontSize: 16.5, color: '#4A5568', lineHeight: 1.4, marginTop: 3 }}&gt;消融 NoKFSelection：PSNR 26.29 → 24.56 dB。选窗比匹配本身更影响最终质量——窗选错，后面怎么优化都救不回。&lt;/Text&gt;&#13;&#10;    &lt;/Box&gt;&#13;&#10;    &lt;Box style={{ marginTop: 'auto', padding: '10px 40px 12px 40px' }}&gt;&#13;&#10;        &lt;Text style={{ fontSize: 15, color: '#8B97A8' }}&gt;前四步合起来只回答一件事：哪些帧该放到同一张桌子上一起算。&lt;/Text&gt;&#13;&#10;    &lt;/Box&gt;&#13;&#10;&lt;/Slide&gt;&#13;&#10;"/>
+        <p:cNvPr id="441" name="" descr="&lt;Slide style={{ width: '1280px', height: '720px', backgroundColor: '#FFFFFF', padding: '0px', flexDirection: 'column' }}&gt;&#13;&#10;    &lt;Box style={{ width: '1280px', height: '8px', backgroundColor: '#1E4FA8' }} /&gt;&#13;&#10;    &lt;Box style={{ padding: '26px 40px 0px 40px', flexDirection: 'row', justifyContent: 'space-between', alignItems: 'flex-end' }}&gt;&#13;&#10;        &lt;Text style={{ fontSize: 33, fontWeight: 'bold', color: '#1E4FA8' }}&gt;选窗：从图里挑出最该一起优化的 20 帧&lt;/Text&gt;&#13;&#10;        &lt;Text style={{ fontSize: 15, color: '#8B97A8' }}&gt;08 / 15&lt;/Text&gt;&#13;&#10;    &lt;/Box&gt;&#13;&#10;    &lt;Box style={{ padding: '8px 40px 0px 40px' }}&gt;&#13;&#10;        &lt;Text style={{ fontSize: 20, color: '#4A5568', lineHeight: 1.4 }}&gt;不是“最近 20 帧”，而是“和当前集合连接最强的那个”——一次加一个，贪心扩张到 20 个。&lt;/Text&gt;&#13;&#10;    &lt;/Box&gt;&#13;&#10;    &lt;Box style={{ padding: '14px 40px 0px 40px', flexDirection: 'row', gap: 20 }}&gt;&#13;&#10;        &lt;Box style={{ width: 600, flexDirection: 'column', gap: 11 }}&gt;&#13;&#10;            &lt;Box style={{ backgroundColor: '#F7F9FC', border: '1px solid #D6DCE5', borderRadius: 6, padding: '9px 16px' }}&gt;&#13;&#10;                &lt;Text style={{ fontSize: 18, color: '#1A2230', lineHeight: 1.45 }}&gt;&lt;b&gt;输入&lt;/b&gt;　③ 更新后的加权协视图&lt;/Text&gt;&#13;&#10;            &lt;/Box&gt;&#13;&#10;            &lt;Box style={{ backgroundColor: '#F7F9FC', border: '1px solid #D6DCE5', borderRadius: 6, padding: '9px 16px' }}&gt;&#13;&#10;                &lt;Text style={{ fontSize: 18, color: '#1A2230', lineHeight: 1.45 }}&gt;&lt;b&gt;做法&lt;/b&gt;　每步选“与已选集合累计内点数最大”的节点加入，直到凑满 N&lt;/Text&gt;&#13;&#10;            &lt;/Box&gt;&#13;&#10;            &lt;Box style={{ backgroundColor: '#F7F9FC', border: '1px solid #D6DCE5', borderRadius: 6, padding: '9px 16px' }}&gt;&#13;&#10;                &lt;Text style={{ fontSize: 18, color: '#1A2230', lineHeight: 1.45 }}&gt;&lt;b&gt;输出&lt;/b&gt;　局部 BA 的变量集合 S（这一步只决定“算谁”，不动数值）&lt;/Text&gt;&#13;&#10;            &lt;/Box&gt;&#13;&#10;            &lt;Box style={{ backgroundColor: '#F0F5FC', border: '1px solid #3D7BD9', borderRadius: 6, padding: '10px 16px', flexDirection: 'column' }}&gt;&#13;&#10;                &lt;Text style={{ fontSize: 18, color: '#1A2230', lineHeight: 1.45 }}&gt;&lt;b&gt;关键取值&lt;/b&gt;　N = 20 帧　·　num_prev_keyframes_miniba_incr = 5&lt;/Text&gt;&#13;&#10;                &lt;Text style={{ fontSize: 16, color: '#4A5568', lineHeight: 1.4, marginTop: 4 }}&gt;每个节点平均只有约 10 条边，所以一次 argmax 的开销可以忽略&lt;/Text&gt;&#13;&#10;            &lt;/Box&gt;&#13;&#10;        &lt;/Box&gt;&#13;&#10;        &lt;Box style={{ width: 580, flexDirection: 'column' }}&gt;&#13;&#10;            &lt;Image src=&quot;figs/fig4_window.png&quot; style={{ width: 580, height: 362 }} /&gt;&#13;&#10;            &lt;Text style={{ fontSize: 14.5, color: '#8B97A8', marginTop: 5 }}&gt;图 4　实心=已选，红圈=本轮 argmax；贪心比全局最优便宜得多。&lt;/Text&gt;&#13;&#10;        &lt;/Box&gt;&#13;&#10;    &lt;/Box&gt;&#13;&#10;    &lt;Box style={{ margin: '12px 40px 0px 40px', backgroundColor: '#F7F9FC', borderLeft: '5px solid #1E4FA8', padding: '10px 18px', flexDirection: 'column' }}&gt;&#13;&#10;        &lt;Image src=&quot;formula/f08.png&quot; style={{ width: 437.0, height: 67.5 }} /&gt;&#13;&#10;        &lt;Text style={{ fontSize: 16.5, color: '#4A5568', lineHeight: 1.4, marginTop: 3 }}&gt;消融 NoKFSelection：PSNR 26.29 → 24.56 dB。选窗比匹配本身更影响最终质量——窗选错，后面怎么优化都救不回。&lt;/Text&gt;&#13;&#10;    &lt;/Box&gt;&#13;&#10;    &lt;Box style={{ marginTop: 'auto', padding: '10px 40px 12px 40px' }}&gt;&#13;&#10;        &lt;Text style={{ fontSize: 15, color: '#8B97A8' }}&gt;前四步合起来只回答一件事：哪些帧该放到同一张桌子上一起算。&lt;/Text&gt;&#13;&#10;    &lt;/Box&gt;&#13;&#10;&lt;/Slide&gt;&#13;&#10;"/>
         <p:cNvGrpSpPr/>
         <p:nvPr/>
       </p:nvGrpSpPr>
@@ -21548,7 +21983,7 @@
       </p:grpSpPr>
       <p:sp>
         <p:nvSpPr>
-          <p:cNvPr id="441" name=""/>
+          <p:cNvPr id="442" name=""/>
           <p:cNvSpPr/>
           <p:nvPr/>
         </p:nvSpPr>
@@ -21572,7 +22007,7 @@
       </p:sp>
       <p:sp>
         <p:nvSpPr>
-          <p:cNvPr id="442" name=""/>
+          <p:cNvPr id="443" name=""/>
           <p:cNvSpPr/>
           <p:nvPr/>
         </p:nvSpPr>
@@ -21596,7 +22031,7 @@
       </p:sp>
       <p:sp>
         <p:nvSpPr>
-          <p:cNvPr id="443" name="" descr="{&quot;isTemplate&quot;:true,&quot;type&quot;:&quot;text&quot;}"/>
+          <p:cNvPr id="444" name="" descr="{&quot;isTemplate&quot;:true,&quot;type&quot;:&quot;text&quot;}"/>
           <p:cNvSpPr txBox="1"/>
           <p:nvPr/>
         </p:nvSpPr>
@@ -21651,7 +22086,7 @@
       </p:sp>
       <p:sp>
         <p:nvSpPr>
-          <p:cNvPr id="444" name="" descr="{&quot;isTemplate&quot;:true,&quot;type&quot;:&quot;text&quot;}"/>
+          <p:cNvPr id="445" name="" descr="{&quot;isTemplate&quot;:true,&quot;type&quot;:&quot;text&quot;}"/>
           <p:cNvSpPr txBox="1"/>
           <p:nvPr/>
         </p:nvSpPr>
@@ -21686,7 +22121,7 @@
       </p:sp>
       <p:sp>
         <p:nvSpPr>
-          <p:cNvPr id="445" name="" descr="{&quot;isTemplate&quot;:true,&quot;type&quot;:&quot;text&quot;}"/>
+          <p:cNvPr id="446" name="" descr="{&quot;isTemplate&quot;:true,&quot;type&quot;:&quot;text&quot;}"/>
           <p:cNvSpPr txBox="1"/>
           <p:nvPr/>
         </p:nvSpPr>
@@ -21761,7 +22196,7 @@
       </p:sp>
       <p:sp>
         <p:nvSpPr>
-          <p:cNvPr id="446" name=""/>
+          <p:cNvPr id="447" name=""/>
           <p:cNvSpPr/>
           <p:nvPr/>
         </p:nvSpPr>
@@ -21792,7 +22227,7 @@
       </p:sp>
       <p:sp>
         <p:nvSpPr>
-          <p:cNvPr id="447" name="" descr="{&quot;isTemplate&quot;:true,&quot;type&quot;:&quot;text&quot;}"/>
+          <p:cNvPr id="448" name="" descr="{&quot;isTemplate&quot;:true,&quot;type&quot;:&quot;text&quot;}"/>
           <p:cNvSpPr txBox="1"/>
           <p:nvPr/>
         </p:nvSpPr>
@@ -21857,7 +22292,7 @@
       </p:sp>
       <p:sp>
         <p:nvSpPr>
-          <p:cNvPr id="448" name=""/>
+          <p:cNvPr id="449" name=""/>
           <p:cNvSpPr/>
           <p:nvPr/>
         </p:nvSpPr>
@@ -21888,7 +22323,7 @@
       </p:sp>
       <p:sp>
         <p:nvSpPr>
-          <p:cNvPr id="449" name="" descr="{&quot;isTemplate&quot;:true,&quot;type&quot;:&quot;text&quot;}"/>
+          <p:cNvPr id="450" name="" descr="{&quot;isTemplate&quot;:true,&quot;type&quot;:&quot;text&quot;}"/>
           <p:cNvSpPr txBox="1"/>
           <p:nvPr/>
         </p:nvSpPr>
@@ -21943,7 +22378,7 @@
       </p:sp>
       <p:sp>
         <p:nvSpPr>
-          <p:cNvPr id="450" name=""/>
+          <p:cNvPr id="451" name=""/>
           <p:cNvSpPr/>
           <p:nvPr/>
         </p:nvSpPr>
@@ -21974,7 +22409,7 @@
       </p:sp>
       <p:sp>
         <p:nvSpPr>
-          <p:cNvPr id="451" name="" descr="{&quot;isTemplate&quot;:true,&quot;type&quot;:&quot;text&quot;}"/>
+          <p:cNvPr id="452" name="" descr="{&quot;isTemplate&quot;:true,&quot;type&quot;:&quot;text&quot;}"/>
           <p:cNvSpPr txBox="1"/>
           <p:nvPr/>
         </p:nvSpPr>
@@ -22059,7 +22494,7 @@
       </p:sp>
       <p:sp>
         <p:nvSpPr>
-          <p:cNvPr id="452" name=""/>
+          <p:cNvPr id="453" name=""/>
           <p:cNvSpPr/>
           <p:nvPr/>
         </p:nvSpPr>
@@ -22090,7 +22525,7 @@
       </p:sp>
       <p:sp>
         <p:nvSpPr>
-          <p:cNvPr id="453" name="" descr="{&quot;isTemplate&quot;:true,&quot;type&quot;:&quot;text&quot;}"/>
+          <p:cNvPr id="454" name="" descr="{&quot;isTemplate&quot;:true,&quot;type&quot;:&quot;text&quot;}"/>
           <p:cNvSpPr txBox="1"/>
           <p:nvPr/>
         </p:nvSpPr>
@@ -22165,7 +22600,7 @@
       </p:sp>
       <p:sp>
         <p:nvSpPr>
-          <p:cNvPr id="454" name="" descr="{&quot;isTemplate&quot;:true,&quot;type&quot;:&quot;text&quot;}"/>
+          <p:cNvPr id="455" name="" descr="{&quot;isTemplate&quot;:true,&quot;type&quot;:&quot;text&quot;}"/>
           <p:cNvSpPr txBox="1"/>
           <p:nvPr/>
         </p:nvSpPr>
@@ -22240,7 +22675,7 @@
       </p:sp>
       <p:pic>
         <p:nvPicPr>
-          <p:cNvPr id="455" name=""/>
+          <p:cNvPr id="456" name=""/>
           <p:cNvPicPr>
             <a:picLocks noChangeAspect="1"/>
           </p:cNvPicPr>
@@ -22266,7 +22701,7 @@
       </p:pic>
       <p:sp>
         <p:nvSpPr>
-          <p:cNvPr id="456" name="" descr="{&quot;isTemplate&quot;:true,&quot;type&quot;:&quot;text&quot;}"/>
+          <p:cNvPr id="457" name="" descr="{&quot;isTemplate&quot;:true,&quot;type&quot;:&quot;text&quot;}"/>
           <p:cNvSpPr txBox="1"/>
           <p:nvPr/>
         </p:nvSpPr>
@@ -22381,7 +22816,7 @@
       </p:sp>
       <p:sp>
         <p:nvSpPr>
-          <p:cNvPr id="457" name=""/>
+          <p:cNvPr id="458" name=""/>
           <p:cNvSpPr/>
           <p:nvPr/>
         </p:nvSpPr>
@@ -22405,7 +22840,7 @@
       </p:sp>
       <p:sp>
         <p:nvSpPr>
-          <p:cNvPr id="458" name=""/>
+          <p:cNvPr id="459" name=""/>
           <p:cNvSpPr/>
           <p:nvPr/>
         </p:nvSpPr>
@@ -22445,7 +22880,7 @@
       </p:sp>
       <p:pic>
         <p:nvPicPr>
-          <p:cNvPr id="459" name=""/>
+          <p:cNvPr id="460" name=""/>
           <p:cNvPicPr>
             <a:picLocks noChangeAspect="1"/>
           </p:cNvPicPr>
@@ -22471,7 +22906,7 @@
       </p:pic>
       <p:sp>
         <p:nvSpPr>
-          <p:cNvPr id="460" name="" descr="{&quot;isTemplate&quot;:true,&quot;type&quot;:&quot;text&quot;}"/>
+          <p:cNvPr id="461" name="" descr="{&quot;isTemplate&quot;:true,&quot;type&quot;:&quot;text&quot;}"/>
           <p:cNvSpPr txBox="1"/>
           <p:nvPr/>
         </p:nvSpPr>
@@ -22546,7 +22981,7 @@
       </p:sp>
       <p:sp>
         <p:nvSpPr>
-          <p:cNvPr id="461" name="" descr="{&quot;isTemplate&quot;:true,&quot;type&quot;:&quot;text&quot;}"/>
+          <p:cNvPr id="462" name="" descr="{&quot;isTemplate&quot;:true,&quot;type&quot;:&quot;text&quot;}"/>
           <p:cNvSpPr txBox="1"/>
           <p:nvPr/>
         </p:nvSpPr>
@@ -22589,7 +23024,7 @@
   <p:cSld>
     <p:spTree>
       <p:nvGrpSpPr>
-        <p:cNvPr id="462" name="" descr="&lt;Slide style={{ width: '1280px', height: '720px', backgroundColor: '#FFFFFF', padding: '0px', flexDirection: 'column' }}&gt;&#13;&#10;    &lt;Box style={{ width: '1280px', height: '8px', backgroundColor: '#1E4FA8' }} /&gt;&#13;&#10;    &lt;Box style={{ padding: '26px 40px 0px 40px', flexDirection: 'row', justifyContent: 'space-between', alignItems: 'flex-end' }}&gt;&#13;&#10;        &lt;Text style={{ fontSize: 33, fontWeight: 'bold', color: '#1E4FA8' }}&gt;局部 BA：真正把位姿解出来的唯一一步&lt;/Text&gt;&#13;&#10;        &lt;Text style={{ fontSize: 15, color: '#8B97A8' }}&gt;09 / 15&lt;/Text&gt;&#13;&#10;    &lt;/Box&gt;&#13;&#10;    &lt;Box style={{ padding: '8px 40px 0px 40px' }}&gt;&#13;&#10;        &lt;Text style={{ fontSize: 20, color: '#4A5568', lineHeight: 1.4 }}&gt;在选出的 20 帧上解一次带鲁棒核的最小二乘，用 Schur 补把问题压到“只解相机”。&lt;/Text&gt;&#13;&#10;    &lt;/Box&gt;&#13;&#10;    &lt;Box style={{ padding: '14px 40px 0px 40px', flexDirection: 'row', gap: 20 }}&gt;&#13;&#10;        &lt;Box style={{ width: 600, flexDirection: 'column', gap: 11 }}&gt;&#13;&#10;            &lt;Box style={{ backgroundColor: '#F7F9FC', border: '1px solid #D6DCE5', borderRadius: 6, padding: '9px 16px' }}&gt;&#13;&#10;                &lt;Text style={{ fontSize: 18, color: '#1A2230', lineHeight: 1.45 }}&gt;&lt;b&gt;输入&lt;/b&gt;　S 内 20 个关键帧 ＋ 约 1 万路标点（按被观测次数采样）&lt;/Text&gt;&#13;&#10;            &lt;/Box&gt;&#13;&#10;            &lt;Box style={{ backgroundColor: '#F7F9FC', border: '1px solid #D6DCE5', borderRadius: 6, padding: '9px 16px' }}&gt;&#13;&#10;                &lt;Text style={{ fontSize: 18, color: '#1A2230', lineHeight: 1.45 }}&gt;&lt;b&gt;做法&lt;/b&gt;　LM 迭代：残差 = 重投影误差；构造正规方程后做稠密 Schur 消元，Cholesky 解相机&lt;/Text&gt;&#13;&#10;            &lt;/Box&gt;&#13;&#10;            &lt;Box style={{ backgroundColor: '#F7F9FC', border: '1px solid #D6DCE5', borderRadius: 6, padding: '9px 16px' }}&gt;&#13;&#10;                &lt;Text style={{ fontSize: 18, color: '#1A2230', lineHeight: 1.45 }}&gt;&lt;b&gt;输出&lt;/b&gt;　相机位姿 T_i 与三维路标点 X_j —— 重建本体&lt;/Text&gt;&#13;&#10;            &lt;/Box&gt;&#13;&#10;            &lt;Box style={{ backgroundColor: '#F0F5FC', border: '1px solid #3D7BD9', borderRadius: 6, padding: '10px 16px', flexDirection: 'column' }}&gt;&#13;&#10;                &lt;Text style={{ fontSize: 18, color: '#1A2230', lineHeight: 1.45 }}&gt;&lt;b&gt;关键取值&lt;/b&gt;　N = 20、K ≈ 1e4　·　LM 阻尼按 mul_(1 + lm) 自适应&lt;/Text&gt;&#13;&#10;                &lt;Text style={{ fontSize: 16, color: '#4A5568', lineHeight: 1.4, marginTop: 4 }}&gt;每个路标只允许被协视性选出的固定子集观测，避免观测数随帧数二次增长&lt;/Text&gt;&#13;&#10;            &lt;/Box&gt;&#13;&#10;        &lt;/Box&gt;&#13;&#10;        &lt;Box style={{ width: 580, flexDirection: 'column' }}&gt;&#13;&#10;            &lt;Image src=&quot;figs/fig5_ba.png&quot; style={{ width: 580, height: 362 }} /&gt;&#13;&#10;            &lt;Text style={{ fontSize: 14.5, color: '#8B97A8', marginTop: 5 }}&gt;图 5　二部图求解 + 分块矩阵：C 对角可逐点求逆，B 稀疏只解相机。&lt;/Text&gt;&#13;&#10;        &lt;/Box&gt;&#13;&#10;    &lt;/Box&gt;&#13;&#10;    &lt;Box style={{ margin: '12px 40px 0px 40px', backgroundColor: '#F7F9FC', borderLeft: '5px solid #1E4FA8', padding: '10px 18px', flexDirection: 'column' }}&gt;&#13;&#10;        &lt;Image src=&quot;formula/f09.png&quot; style={{ width: 596.5, height: 55.5 }} /&gt;&#13;&#10;        &lt;Text style={{ fontSize: 16.5, color: '#4A5568', lineHeight: 1.4, marginTop: 3 }}&gt;SLAM 通常只用 5 帧时间窗；这里用 20 帧并把核函数写到 GPU 上，比 g2o / CUDA-BA 快约 5 倍。&lt;/Text&gt;&#13;&#10;    &lt;/Box&gt;&#13;&#10;    &lt;Box style={{ marginTop: 'auto', padding: '10px 40px 12px 40px' }}&gt;&#13;&#10;        &lt;Text style={{ fontSize: 15, color: '#8B97A8' }}&gt;前四步是“准备”，第六步是“纠错”，只有这一步在解——位姿重建真正发生在这里。&lt;/Text&gt;&#13;&#10;    &lt;/Box&gt;&#13;&#10;&lt;/Slide&gt;&#13;&#10;"/>
+        <p:cNvPr id="463" name="" descr="&lt;Slide style={{ width: '1280px', height: '720px', backgroundColor: '#FFFFFF', padding: '0px', flexDirection: 'column' }}&gt;&#13;&#10;    &lt;Box style={{ width: '1280px', height: '8px', backgroundColor: '#1E4FA8' }} /&gt;&#13;&#10;    &lt;Box style={{ padding: '26px 40px 0px 40px', flexDirection: 'row', justifyContent: 'space-between', alignItems: 'flex-end' }}&gt;&#13;&#10;        &lt;Text style={{ fontSize: 33, fontWeight: 'bold', color: '#1E4FA8' }}&gt;局部 BA：真正把位姿解出来的唯一一步&lt;/Text&gt;&#13;&#10;        &lt;Text style={{ fontSize: 15, color: '#8B97A8' }}&gt;09 / 15&lt;/Text&gt;&#13;&#10;    &lt;/Box&gt;&#13;&#10;    &lt;Box style={{ padding: '8px 40px 0px 40px' }}&gt;&#13;&#10;        &lt;Text style={{ fontSize: 20, color: '#4A5568', lineHeight: 1.4 }}&gt;在选出的 20 帧上解一次带鲁棒核的最小二乘，用 Schur 补把问题压到“只解相机”。&lt;/Text&gt;&#13;&#10;    &lt;/Box&gt;&#13;&#10;    &lt;Box style={{ padding: '14px 40px 0px 40px', flexDirection: 'row', gap: 20 }}&gt;&#13;&#10;        &lt;Box style={{ width: 600, flexDirection: 'column', gap: 11 }}&gt;&#13;&#10;            &lt;Box style={{ backgroundColor: '#F7F9FC', border: '1px solid #D6DCE5', borderRadius: 6, padding: '9px 16px' }}&gt;&#13;&#10;                &lt;Text style={{ fontSize: 18, color: '#1A2230', lineHeight: 1.45 }}&gt;&lt;b&gt;输入&lt;/b&gt;　S 内 20 个关键帧 ＋ 约 1 万路标点（按被观测次数采样）&lt;/Text&gt;&#13;&#10;            &lt;/Box&gt;&#13;&#10;            &lt;Box style={{ backgroundColor: '#F7F9FC', border: '1px solid #D6DCE5', borderRadius: 6, padding: '9px 16px' }}&gt;&#13;&#10;                &lt;Text style={{ fontSize: 18, color: '#1A2230', lineHeight: 1.45 }}&gt;&lt;b&gt;做法&lt;/b&gt;　LM 迭代：残差 = 重投影误差；构造正规方程后做稠密 Schur 消元，Cholesky 解相机&lt;/Text&gt;&#13;&#10;            &lt;/Box&gt;&#13;&#10;            &lt;Box style={{ backgroundColor: '#F7F9FC', border: '1px solid #D6DCE5', borderRadius: 6, padding: '9px 16px' }}&gt;&#13;&#10;                &lt;Text style={{ fontSize: 18, color: '#1A2230', lineHeight: 1.45 }}&gt;&lt;b&gt;输出&lt;/b&gt;　相机位姿 T_i 与三维路标点 X_j —— 重建本体&lt;/Text&gt;&#13;&#10;            &lt;/Box&gt;&#13;&#10;            &lt;Box style={{ backgroundColor: '#F0F5FC', border: '1px solid #3D7BD9', borderRadius: 6, padding: '10px 16px', flexDirection: 'column' }}&gt;&#13;&#10;                &lt;Text style={{ fontSize: 18, color: '#1A2230', lineHeight: 1.45 }}&gt;&lt;b&gt;关键取值&lt;/b&gt;　N = 20、K ≈ 1e4　·　LM 阻尼按 mul_(1 + lm) 自适应&lt;/Text&gt;&#13;&#10;                &lt;Text style={{ fontSize: 16, color: '#4A5568', lineHeight: 1.4, marginTop: 4 }}&gt;每个路标只允许被协视性选出的固定子集观测，避免观测数随帧数二次增长&lt;/Text&gt;&#13;&#10;            &lt;/Box&gt;&#13;&#10;        &lt;/Box&gt;&#13;&#10;        &lt;Box style={{ width: 580, flexDirection: 'column' }}&gt;&#13;&#10;            &lt;Image src=&quot;figs/fig5_ba.png&quot; style={{ width: 580, height: 362 }} /&gt;&#13;&#10;            &lt;Text style={{ fontSize: 14.5, color: '#8B97A8', marginTop: 5 }}&gt;图 5　二部图求解 + 分块矩阵：C 对角可逐点求逆，B 稀疏只解相机。&lt;/Text&gt;&#13;&#10;        &lt;/Box&gt;&#13;&#10;    &lt;/Box&gt;&#13;&#10;    &lt;Box style={{ margin: '12px 40px 0px 40px', backgroundColor: '#F7F9FC', borderLeft: '5px solid #1E4FA8', padding: '10px 18px', flexDirection: 'column' }}&gt;&#13;&#10;        &lt;Image src=&quot;formula/f09.png&quot; style={{ width: 596.5, height: 55.5 }} /&gt;&#13;&#10;        &lt;Text style={{ fontSize: 16.5, color: '#4A5568', lineHeight: 1.4, marginTop: 3 }}&gt;SLAM 通常只用 5 帧时间窗；这里用 20 帧并把核函数写到 GPU 上，比 g2o / CUDA-BA 快约 5 倍。&lt;/Text&gt;&#13;&#10;    &lt;/Box&gt;&#13;&#10;    &lt;Box style={{ marginTop: 'auto', padding: '10px 40px 12px 40px' }}&gt;&#13;&#10;        &lt;Text style={{ fontSize: 15, color: '#8B97A8' }}&gt;前四步是“准备”，第六步是“纠错”，只有这一步在解——位姿重建真正发生在这里。&lt;/Text&gt;&#13;&#10;    &lt;/Box&gt;&#13;&#10;&lt;/Slide&gt;&#13;&#10;"/>
         <p:cNvGrpSpPr/>
         <p:nvPr/>
       </p:nvGrpSpPr>
@@ -22603,7 +23038,7 @@
       </p:grpSpPr>
       <p:sp>
         <p:nvSpPr>
-          <p:cNvPr id="463" name=""/>
+          <p:cNvPr id="464" name=""/>
           <p:cNvSpPr/>
           <p:nvPr/>
         </p:nvSpPr>
@@ -22627,7 +23062,7 @@
       </p:sp>
       <p:sp>
         <p:nvSpPr>
-          <p:cNvPr id="464" name=""/>
+          <p:cNvPr id="465" name=""/>
           <p:cNvSpPr/>
           <p:nvPr/>
         </p:nvSpPr>
@@ -22651,7 +23086,7 @@
       </p:sp>
       <p:sp>
         <p:nvSpPr>
-          <p:cNvPr id="465" name="" descr="{&quot;isTemplate&quot;:true,&quot;type&quot;:&quot;text&quot;}"/>
+          <p:cNvPr id="466" name="" descr="{&quot;isTemplate&quot;:true,&quot;type&quot;:&quot;text&quot;}"/>
           <p:cNvSpPr txBox="1"/>
           <p:nvPr/>
         </p:nvSpPr>
@@ -22706,7 +23141,7 @@
       </p:sp>
       <p:sp>
         <p:nvSpPr>
-          <p:cNvPr id="466" name="" descr="{&quot;isTemplate&quot;:true,&quot;type&quot;:&quot;text&quot;}"/>
+          <p:cNvPr id="467" name="" descr="{&quot;isTemplate&quot;:true,&quot;type&quot;:&quot;text&quot;}"/>
           <p:cNvSpPr txBox="1"/>
           <p:nvPr/>
         </p:nvSpPr>
@@ -22741,7 +23176,7 @@
       </p:sp>
       <p:sp>
         <p:nvSpPr>
-          <p:cNvPr id="467" name="" descr="{&quot;isTemplate&quot;:true,&quot;type&quot;:&quot;text&quot;}"/>
+          <p:cNvPr id="468" name="" descr="{&quot;isTemplate&quot;:true,&quot;type&quot;:&quot;text&quot;}"/>
           <p:cNvSpPr txBox="1"/>
           <p:nvPr/>
         </p:nvSpPr>
@@ -22816,7 +23251,7 @@
       </p:sp>
       <p:sp>
         <p:nvSpPr>
-          <p:cNvPr id="468" name=""/>
+          <p:cNvPr id="469" name=""/>
           <p:cNvSpPr/>
           <p:nvPr/>
         </p:nvSpPr>
@@ -22847,7 +23282,7 @@
       </p:sp>
       <p:sp>
         <p:nvSpPr>
-          <p:cNvPr id="469" name="" descr="{&quot;isTemplate&quot;:true,&quot;type&quot;:&quot;text&quot;}"/>
+          <p:cNvPr id="470" name="" descr="{&quot;isTemplate&quot;:true,&quot;type&quot;:&quot;text&quot;}"/>
           <p:cNvSpPr txBox="1"/>
           <p:nvPr/>
         </p:nvSpPr>
@@ -22992,7 +23427,7 @@
       </p:sp>
       <p:sp>
         <p:nvSpPr>
-          <p:cNvPr id="470" name=""/>
+          <p:cNvPr id="471" name=""/>
           <p:cNvSpPr/>
           <p:nvPr/>
         </p:nvSpPr>
@@ -23023,7 +23458,7 @@
       </p:sp>
       <p:sp>
         <p:nvSpPr>
-          <p:cNvPr id="471" name="" descr="{&quot;isTemplate&quot;:true,&quot;type&quot;:&quot;text&quot;}"/>
+          <p:cNvPr id="472" name="" descr="{&quot;isTemplate&quot;:true,&quot;type&quot;:&quot;text&quot;}"/>
           <p:cNvSpPr txBox="1"/>
           <p:nvPr/>
         </p:nvSpPr>
@@ -23150,7 +23585,7 @@
       </p:sp>
       <p:sp>
         <p:nvSpPr>
-          <p:cNvPr id="472" name=""/>
+          <p:cNvPr id="473" name=""/>
           <p:cNvSpPr/>
           <p:nvPr/>
         </p:nvSpPr>
@@ -23181,7 +23616,7 @@
       </p:sp>
       <p:sp>
         <p:nvSpPr>
-          <p:cNvPr id="473" name="" descr="{&quot;isTemplate&quot;:true,&quot;type&quot;:&quot;text&quot;}"/>
+          <p:cNvPr id="474" name="" descr="{&quot;isTemplate&quot;:true,&quot;type&quot;:&quot;text&quot;}"/>
           <p:cNvSpPr txBox="1"/>
           <p:nvPr/>
         </p:nvSpPr>
@@ -23266,7 +23701,7 @@
       </p:sp>
       <p:sp>
         <p:nvSpPr>
-          <p:cNvPr id="474" name=""/>
+          <p:cNvPr id="475" name=""/>
           <p:cNvSpPr/>
           <p:nvPr/>
         </p:nvSpPr>
@@ -23297,7 +23732,7 @@
       </p:sp>
       <p:sp>
         <p:nvSpPr>
-          <p:cNvPr id="475" name="" descr="{&quot;isTemplate&quot;:true,&quot;type&quot;:&quot;text&quot;}"/>
+          <p:cNvPr id="476" name="" descr="{&quot;isTemplate&quot;:true,&quot;type&quot;:&quot;text&quot;}"/>
           <p:cNvSpPr txBox="1"/>
           <p:nvPr/>
         </p:nvSpPr>
@@ -23422,7 +23857,7 @@
       </p:sp>
       <p:sp>
         <p:nvSpPr>
-          <p:cNvPr id="476" name="" descr="{&quot;isTemplate&quot;:true,&quot;type&quot;:&quot;text&quot;}"/>
+          <p:cNvPr id="477" name="" descr="{&quot;isTemplate&quot;:true,&quot;type&quot;:&quot;text&quot;}"/>
           <p:cNvSpPr txBox="1"/>
           <p:nvPr/>
         </p:nvSpPr>
@@ -23457,7 +23892,7 @@
       </p:sp>
       <p:pic>
         <p:nvPicPr>
-          <p:cNvPr id="477" name=""/>
+          <p:cNvPr id="478" name=""/>
           <p:cNvPicPr>
             <a:picLocks noChangeAspect="1"/>
           </p:cNvPicPr>
@@ -23483,7 +23918,7 @@
       </p:pic>
       <p:sp>
         <p:nvSpPr>
-          <p:cNvPr id="478" name="" descr="{&quot;isTemplate&quot;:true,&quot;type&quot;:&quot;text&quot;}"/>
+          <p:cNvPr id="479" name="" descr="{&quot;isTemplate&quot;:true,&quot;type&quot;:&quot;text&quot;}"/>
           <p:cNvSpPr txBox="1"/>
           <p:nvPr/>
         </p:nvSpPr>
@@ -23598,7 +24033,7 @@
       </p:sp>
       <p:sp>
         <p:nvSpPr>
-          <p:cNvPr id="479" name=""/>
+          <p:cNvPr id="480" name=""/>
           <p:cNvSpPr/>
           <p:nvPr/>
         </p:nvSpPr>
@@ -23622,7 +24057,7 @@
       </p:sp>
       <p:sp>
         <p:nvSpPr>
-          <p:cNvPr id="480" name=""/>
+          <p:cNvPr id="481" name=""/>
           <p:cNvSpPr/>
           <p:nvPr/>
         </p:nvSpPr>
@@ -23662,7 +24097,7 @@
       </p:sp>
       <p:pic>
         <p:nvPicPr>
-          <p:cNvPr id="481" name=""/>
+          <p:cNvPr id="482" name=""/>
           <p:cNvPicPr>
             <a:picLocks noChangeAspect="1"/>
           </p:cNvPicPr>
@@ -23688,7 +24123,7 @@
       </p:pic>
       <p:sp>
         <p:nvSpPr>
-          <p:cNvPr id="482" name="" descr="{&quot;isTemplate&quot;:true,&quot;type&quot;:&quot;text&quot;}"/>
+          <p:cNvPr id="483" name="" descr="{&quot;isTemplate&quot;:true,&quot;type&quot;:&quot;text&quot;}"/>
           <p:cNvSpPr txBox="1"/>
           <p:nvPr/>
         </p:nvSpPr>
@@ -23833,7 +24268,7 @@
       </p:sp>
       <p:sp>
         <p:nvSpPr>
-          <p:cNvPr id="483" name="" descr="{&quot;isTemplate&quot;:true,&quot;type&quot;:&quot;text&quot;}"/>
+          <p:cNvPr id="484" name="" descr="{&quot;isTemplate&quot;:true,&quot;type&quot;:&quot;text&quot;}"/>
           <p:cNvSpPr txBox="1"/>
           <p:nvPr/>
         </p:nvSpPr>

--- a/ecnu-cg/02-PPT/PPT-即时三维高斯泼溅重建.pptx
+++ b/ecnu-cg/02-PPT/PPT-即时三维高斯泼溅重建.pptx
@@ -5,7 +5,7 @@
     <p:sldMasterId id="2147483648" r:id="rId0"/>
   </p:sldMasterIdLst>
   <p:notesMasterIdLst>
-    <p:notesMasterId r:id="rId16"/>
+    <p:notesMasterId r:id="rId17"/>
   </p:notesMasterIdLst>
   <p:sldIdLst>
     <p:sldId id="256" r:id="rId1"/>
@@ -23,6 +23,7 @@
     <p:sldId id="268" r:id="rId13"/>
     <p:sldId id="269" r:id="rId14"/>
     <p:sldId id="270" r:id="rId15"/>
+    <p:sldId id="271" r:id="rId16"/>
   </p:sldIdLst>
   <p:sldSz cx="12192000" cy="6858000"/>
   <p:notesSz cx="6858000" cy="12192000"/>
@@ -1071,7 +1072,7 @@
   <p:cSld>
     <p:spTree>
       <p:nvGrpSpPr>
-        <p:cNvPr id="13" name="" descr="&lt;Slide style={{ width: '1280px', height: '720px', backgroundColor: '#FFFFFF', padding: '0px', flexDirection: 'column' }}&gt;&#13;&#10;    &lt;Box style={{ width: '1280px', height: '8px', backgroundColor: '#1E4FA8' }} /&gt;&#13;&#10;    &lt;Box style={{ padding: '26px 40px 0px 40px', flexDirection: 'row', justifyContent: 'space-between', alignItems: 'flex-end' }}&gt;&#13;&#10;        &lt;Text style={{ fontSize: 33, fontWeight: 'bold', color: '#1E4FA8' }}&gt;回环修正：判定“两簇其实重叠”，再把修正摊回全图&lt;/Text&gt;&#13;&#10;        &lt;Text style={{ fontSize: 15, color: '#8B97A8' }}&gt;10 / 15&lt;/Text&gt;&#13;&#10;    &lt;/Box&gt;&#13;&#10;    &lt;Box style={{ padding: '8px 40px 0px 40px' }}&gt;&#13;&#10;        &lt;Text style={{ fontSize: 20, color: '#4A5568', lineHeight: 1.4 }}&gt;不重跑全局 BA：用一次焊接窗口 BA 求出 Sim(3)，再沿主干路径按测地距离插值摊开。&lt;/Text&gt;&#13;&#10;    &lt;/Box&gt;&#13;&#10;    &lt;Box style={{ padding: '14px 40px 0px 40px', flexDirection: 'row', gap: 20 }}&gt;&#13;&#10;        &lt;Box style={{ width: 600, flexDirection: 'column', gap: 11 }}&gt;&#13;&#10;            &lt;Box style={{ backgroundColor: '#F7F9FC', border: '1px solid #D6DCE5', borderRadius: 6, padding: '9px 16px' }}&gt;&#13;&#10;                &lt;Text style={{ fontSize: 18, color: '#1A2230', lineHeight: 1.45 }}&gt;&lt;b&gt;输入&lt;/b&gt;　新边让两簇之间突然出现跨簇匹配&lt;/Text&gt;&#13;&#10;            &lt;/Box&gt;&#13;&#10;            &lt;Box style={{ backgroundColor: '#F7F9FC', border: '1px solid #D6DCE5', borderRadius: 6, padding: '9px 16px' }}&gt;&#13;&#10;                &lt;Text style={{ fontSize: 18, color: '#1A2230', lineHeight: 1.45 }}&gt;&lt;b&gt;判定&lt;/b&gt;　加权图距 &amp;#62; 10（min_loop_size）且跨簇有效匹配对 &amp;#62; 2&lt;/Text&gt;&#13;&#10;            &lt;/Box&gt;&#13;&#10;            &lt;Box style={{ backgroundColor: '#F7F9FC', border: '1px solid #D6DCE5', borderRadius: 6, padding: '9px 16px' }}&gt;&#13;&#10;                &lt;Text style={{ fontSize: 18, color: '#1A2230', lineHeight: 1.45 }}&gt;&lt;b&gt;做法&lt;/b&gt;　两簇各扩 N/2 帧做焊接 BA 得相对变换，深度变化估尺度 → Sim(3)；Dijkstra 找主干&lt;/Text&gt;&#13;&#10;            &lt;/Box&gt;&#13;&#10;            &lt;Box style={{ backgroundColor: '#F7F9FC', border: '1px solid #D6DCE5', borderRadius: 6, padding: '9px 16px' }}&gt;&#13;&#10;                &lt;Text style={{ fontSize: 18, color: '#1A2230', lineHeight: 1.45 }}&gt;&lt;b&gt;输出&lt;/b&gt;　全图位姿与高斯的同一份 Sim(3) 修正（高斯整棵子树跟着出生帧走）&lt;/Text&gt;&#13;&#10;            &lt;/Box&gt;&#13;&#10;            &lt;Box style={{ backgroundColor: '#F0F5FC', border: '1px solid #3D7BD9', borderRadius: 6, padding: '10px 16px', flexDirection: 'column' }}&gt;&#13;&#10;                &lt;Text style={{ fontSize: 18, color: '#1A2230', lineHeight: 1.45 }}&gt;&lt;b&gt;关键取值&lt;/b&gt;　min_loop_size = 10（加权图距）　·　焊接窗口两簇各扩 N/2 帧&lt;/Text&gt;&#13;&#10;                &lt;Text style={{ fontSize: 16, color: '#4A5568', lineHeight: 1.4, marginTop: 4 }}&gt;论文原文写“跳数 &amp;#62; 5”，按开源代码默认值应为加权图距 &amp;#62; 10&lt;/Text&gt;&#13;&#10;            &lt;/Box&gt;&#13;&#10;        &lt;/Box&gt;&#13;&#10;        &lt;Box style={{ width: 580, flexDirection: 'column' }}&gt;&#13;&#10;            &lt;Image src=&quot;figs/fig6_loop.png&quot; style={{ width: 580, height: 362 }} /&gt;&#13;&#10;            &lt;Text style={{ fontSize: 14.5, color: '#8B97A8', marginTop: 5 }}&gt;图 6　左：两簇间的加权图距就是回环判据；右：修正沿主干按距离摊开。&lt;/Text&gt;&#13;&#10;        &lt;/Box&gt;&#13;&#10;    &lt;/Box&gt;&#13;&#10;    &lt;Box style={{ margin: '12px 40px 0px 40px', backgroundColor: '#F7F9FC', borderLeft: '5px solid #1E4FA8', padding: '10px 18px', flexDirection: 'column' }}&gt;&#13;&#10;        &lt;Image src=&quot;formula/f10.png&quot; style={{ width: 375.0, height: 30.5 }} /&gt;&#13;&#10;        &lt;Text style={{ fontSize: 16.5, color: '#4A5568', lineHeight: 1.4, marginTop: 3 }}&gt;用“图上的距离”替换“全局优化的解”：牺牲一点精度，把回环代价从“再跑一次全局 BA”降到近似线性。&lt;/Text&gt;&#13;&#10;    &lt;/Box&gt;&#13;&#10;    &lt;Box style={{ marginTop: 'auto', padding: '10px 40px 12px 40px' }}&gt;&#13;&#10;        &lt;Text style={{ fontSize: 15, color: '#8B97A8' }}&gt;这是全文最值得借鉴的工程取舍——不追求最优解，追求“够用且算得起”。&lt;/Text&gt;&#13;&#10;    &lt;/Box&gt;&#13;&#10;&lt;/Slide&gt;&#13;&#10;"/>
+        <p:cNvPr id="13" name="" descr="&lt;Slide style={{ width: '1280px', height: '720px', backgroundColor: '#FFFFFF', padding: '0px', flexDirection: 'column' }}&gt;&#10;    &lt;Box style={{ width: '1280px', height: '8px', backgroundColor: '#1E4FA8' }} /&gt;&#10;    &lt;Box style={{ padding: '26px 40px 0px 40px', flexDirection: 'row', justifyContent: 'space-between', alignItems: 'flex-end' }}&gt;&#10;        &lt;Text style={{ fontSize: 33, fontWeight: 'bold', color: '#1E4FA8' }}&gt;回环修正：判定“两簇其实重叠”，再把修正摊回全图&lt;/Text&gt;&#10;        &lt;Text style={{ fontSize: 15, color: '#8B97A8' }}&gt;10 / 16&lt;/Text&gt;&#10;    &lt;/Box&gt;&#10;    &lt;Box style={{ padding: '8px 40px 0px 40px' }}&gt;&#10;        &lt;Text style={{ fontSize: 20, color: '#4A5568', lineHeight: 1.4 }}&gt;不重跑全局 BA：用一次焊接窗口 BA 求出 Sim(3)，再沿主干路径按测地距离插值摊开。&lt;/Text&gt;&#10;    &lt;/Box&gt;&#10;    &lt;Box style={{ padding: '14px 40px 0px 40px', flexDirection: 'row', gap: 20 }}&gt;&#10;        &lt;Box style={{ width: 600, flexDirection: 'column', gap: 11 }}&gt;&#10;            &lt;Box style={{ backgroundColor: '#F7F9FC', border: '1px solid #D6DCE5', borderRadius: 6, padding: '9px 16px' }}&gt;&#10;                &lt;Text style={{ fontSize: 18, color: '#1A2230', lineHeight: 1.45 }}&gt;&lt;b&gt;输入&lt;/b&gt;　新边让两簇之间突然出现跨簇匹配&lt;/Text&gt;&#10;            &lt;/Box&gt;&#10;            &lt;Box style={{ backgroundColor: '#F7F9FC', border: '1px solid #D6DCE5', borderRadius: 6, padding: '9px 16px' }}&gt;&#10;                &lt;Text style={{ fontSize: 18, color: '#1A2230', lineHeight: 1.45 }}&gt;&lt;b&gt;判定&lt;/b&gt;　加权图距 &amp;#62; 10（min_loop_size）且跨簇有效匹配对 &amp;#62; 2&lt;/Text&gt;&#10;            &lt;/Box&gt;&#10;            &lt;Box style={{ backgroundColor: '#F7F9FC', border: '1px solid #D6DCE5', borderRadius: 6, padding: '9px 16px' }}&gt;&#10;                &lt;Text style={{ fontSize: 18, color: '#1A2230', lineHeight: 1.45 }}&gt;&lt;b&gt;做法&lt;/b&gt;　两簇各扩 N/2 帧做焊接 BA 得相对变换，深度变化估尺度 → Sim(3)；Dijkstra 找主干&lt;/Text&gt;&#10;            &lt;/Box&gt;&#10;            &lt;Box style={{ backgroundColor: '#F7F9FC', border: '1px solid #D6DCE5', borderRadius: 6, padding: '9px 16px' }}&gt;&#10;                &lt;Text style={{ fontSize: 18, color: '#1A2230', lineHeight: 1.45 }}&gt;&lt;b&gt;输出&lt;/b&gt;　全图位姿与高斯的同一份 Sim(3) 修正（高斯整棵子树跟着出生帧走）&lt;/Text&gt;&#10;            &lt;/Box&gt;&#10;            &lt;Box style={{ backgroundColor: '#F0F5FC', border: '1px solid #3D7BD9', borderRadius: 6, padding: '10px 16px', flexDirection: 'column' }}&gt;&#10;                &lt;Text style={{ fontSize: 18, color: '#1A2230', lineHeight: 1.45 }}&gt;&lt;b&gt;关键取值&lt;/b&gt;　min_loop_size = 10（加权图距）　·　焊接窗口两簇各扩 N/2 帧&lt;/Text&gt;&#10;                &lt;Text style={{ fontSize: 16, color: '#4A5568', lineHeight: 1.4, marginTop: 4 }}&gt;论文原文写“跳数 &amp;#62; 5”，按开源代码默认值应为加权图距 &amp;#62; 10&lt;/Text&gt;&#10;            &lt;/Box&gt;&#10;        &lt;/Box&gt;&#10;        &lt;Box style={{ width: 580, flexDirection: 'column' }}&gt;&#10;            &lt;Image src=&quot;figs/fig6_loop.png&quot; style={{ width: 580, height: 362 }} /&gt;&#10;            &lt;Text style={{ fontSize: 14.5, color: '#8B97A8', marginTop: 5 }}&gt;图 6　左：两簇间的加权图距就是回环判据；右：修正沿主干按距离摊开。&lt;/Text&gt;&#10;        &lt;/Box&gt;&#10;    &lt;/Box&gt;&#10;    &lt;Box style={{ margin: '12px 40px 0px 40px', backgroundColor: '#F7F9FC', borderLeft: '5px solid #1E4FA8', padding: '10px 18px', flexDirection: 'column' }}&gt;&#10;        &lt;Image src=&quot;formula/f10.png&quot; style={{ width: 375.0, height: 30.5 }} /&gt;&#10;        &lt;Text style={{ fontSize: 16.5, color: '#4A5568', lineHeight: 1.4, marginTop: 3 }}&gt;用“图上的距离”替换“全局优化的解”：牺牲一点精度，把回环代价从“再跑一次全局 BA”降到近似线性。&lt;/Text&gt;&#10;    &lt;/Box&gt;&#10;    &lt;Box style={{ marginTop: 'auto', padding: '10px 40px 12px 40px' }}&gt;&#10;        &lt;Text style={{ fontSize: 15, color: '#8B97A8' }}&gt;这是全文最值得借鉴的工程取舍——不追求最优解，追求“够用且算得起”。&lt;/Text&gt;&#10;    &lt;/Box&gt;&#10;&lt;/Slide&gt;&#10;"/>
         <p:cNvGrpSpPr/>
         <p:nvPr/>
       </p:nvGrpSpPr>
@@ -1195,7 +1196,7 @@
                 <a:latin typeface="Microsoft YaHei"/>
                 <a:ea typeface="Microsoft YaHei"/>
               </a:rPr>
-              <a:t>10 / 15</a:t>
+              <a:t>10 / 16</a:t>
             </a:r>
             <a:endParaRPr/>
           </a:p>
@@ -2208,7 +2209,7 @@
   <p:cSld>
     <p:spTree>
       <p:nvGrpSpPr>
-        <p:cNvPr id="37" name="" descr="&lt;Slide style={{ width: '1280px', height: '720px', backgroundColor: '#FFFFFF', padding: '0px', flexDirection: 'column' }}&gt;&#13;&#10;    &lt;Box style={{ width: '1280px', height: '8px', backgroundColor: '#1E4FA8' }} /&gt;&#13;&#10;    &lt;Box style={{ padding: '26px 40px 0px 40px', flexDirection: 'row', justifyContent: 'space-between', alignItems: 'flex-end' }}&gt;&#13;&#10;        &lt;Text style={{ fontSize: 33, fontWeight: 'bold', color: '#1E4FA8' }}&gt;落位：先把深度对齐，再按屏幕尺寸压成层级&lt;/Text&gt;&#13;&#10;        &lt;Text style={{ fontSize: 15, color: '#8B97A8' }}&gt;11 / 15&lt;/Text&gt;&#13;&#10;    &lt;/Box&gt;&#13;&#10;    &lt;Box style={{ padding: '8px 40px 0px 40px' }}&gt;&#13;&#10;        &lt;Text style={{ fontSize: 20, color: '#4A5568', lineHeight: 1.4 }}&gt;位姿定下来之后才投放高斯：分块估深度尺度与偏移，再把屏幕上看不见的小高斯合并掉。&lt;/Text&gt;&#13;&#10;    &lt;/Box&gt;&#13;&#10;    &lt;Box style={{ padding: '14px 40px 0px 40px', flexDirection: 'row', gap: 20 }}&gt;&#13;&#10;        &lt;Box style={{ width: 600, flexDirection: 'column', gap: 11 }}&gt;&#13;&#10;            &lt;Box style={{ backgroundColor: '#F7F9FC', border: '1px solid #D6DCE5', borderRadius: 6, padding: '9px 16px' }}&gt;&#13;&#10;                &lt;Text style={{ fontSize: 18, color: '#1A2230', lineHeight: 1.45 }}&gt;&lt;b&gt;输入&lt;/b&gt;　位姿 ＋ 三角化稀疏点 ＋ 单目深度（Depth Anything 3）&lt;/Text&gt;&#13;&#10;            &lt;/Box&gt;&#13;&#10;            &lt;Box style={{ backgroundColor: '#F7F9FC', border: '1px solid #D6DCE5', borderRadius: 6, padding: '9px 16px' }}&gt;&#13;&#10;                &lt;Text style={{ fontSize: 18, color: '#1A2230', lineHeight: 1.45 }}&gt;&lt;b&gt;做法&lt;/b&gt;　图像切 4×4 块，每块单独拟合 s、o 再插值上采样；层级按屏幕投影尺寸合并&lt;/Text&gt;&#13;&#10;            &lt;/Box&gt;&#13;&#10;            &lt;Box style={{ backgroundColor: '#F7F9FC', border: '1px solid #D6DCE5', borderRadius: 6, padding: '9px 16px' }}&gt;&#13;&#10;                &lt;Text style={{ fontSize: 18, color: '#1A2230', lineHeight: 1.45 }}&gt;&lt;b&gt;输出&lt;/b&gt;　每关键帧固定 30 次迭代的高斯优化；显存只留“看得见”的部分&lt;/Text&gt;&#13;&#10;            &lt;/Box&gt;&#13;&#10;            &lt;Box style={{ backgroundColor: '#F0F5FC', border: '1px solid #3D7BD9', borderRadius: 6, padding: '10px 16px', flexDirection: 'column' }}&gt;&#13;&#10;                &lt;Text style={{ fontSize: 18, color: '#1A2230', lineHeight: 1.45 }}&gt;&lt;b&gt;关键取值&lt;/b&gt;　depth_grid = 4　·　τ_l = 0.5 px　·　可并数 &amp;#62; max(10%, 20 万)&lt;/Text&gt;&#13;&#10;                &lt;Text style={{ fontSize: 16, color: '#4A5568', lineHeight: 1.4, marginTop: 4 }}&gt;hierarchy_merge_ratio = 0.1、hierarchy_merge_min_count = 200000&lt;/Text&gt;&#13;&#10;            &lt;/Box&gt;&#13;&#10;        &lt;/Box&gt;&#13;&#10;        &lt;Box style={{ width: 580, flexDirection: 'column' }}&gt;&#13;&#10;            &lt;Image src=&quot;figs/fig7_gauss.png&quot; style={{ width: 580, height: 362 }} /&gt;&#13;&#10;            &lt;Text style={{ fontSize: 14.5, color: '#8B97A8', marginTop: 5 }}&gt;图 7　左：分块深度对齐；右：叶节点按屏幕尺寸合并成父节点。&lt;/Text&gt;&#13;&#10;        &lt;/Box&gt;&#13;&#10;    &lt;/Box&gt;&#13;&#10;    &lt;Box style={{ margin: '12px 40px 0px 40px', backgroundColor: '#F7F9FC', borderLeft: '5px solid #1E4FA8', padding: '10px 18px', flexDirection: 'column' }}&gt;&#13;&#10;        &lt;Image src=&quot;formula/f11.png&quot; style={{ width: 408.5, height: 26.5 }} /&gt;&#13;&#10;        &lt;Text style={{ fontSize: 16.5, color: '#4A5568', lineHeight: 1.4, marginTop: 3 }}&gt;消融 NoLoDepAlgn：26.29 → 25.41 dB。层级只压显存、不改位姿，所以能安全放在链路末端。&lt;/Text&gt;&#13;&#10;    &lt;/Box&gt;&#13;&#10;    &lt;Box style={{ marginTop: 'auto', padding: '10px 40px 12px 40px' }}&gt;&#13;&#10;        &lt;Text style={{ fontSize: 15, color: '#8B97A8' }}&gt;7 步走完，一帧的贡献结束；下一个关键帧进来，从第 ① 步重新开始。&lt;/Text&gt;&#13;&#10;    &lt;/Box&gt;&#13;&#10;&lt;/Slide&gt;&#13;&#10;"/>
+        <p:cNvPr id="37" name="" descr="&lt;Slide style={{ width: '1280px', height: '720px', backgroundColor: '#FFFFFF', padding: '0px', flexDirection: 'column' }}&gt;&#10;    &lt;Box style={{ width: '1280px', height: '8px', backgroundColor: '#1E4FA8' }} /&gt;&#10;    &lt;Box style={{ padding: '26px 40px 0px 40px', flexDirection: 'row', justifyContent: 'space-between', alignItems: 'flex-end' }}&gt;&#10;        &lt;Text style={{ fontSize: 33, fontWeight: 'bold', color: '#1E4FA8' }}&gt;落位：先把深度对齐，再按屏幕尺寸压成层级&lt;/Text&gt;&#10;        &lt;Text style={{ fontSize: 15, color: '#8B97A8' }}&gt;11 / 16&lt;/Text&gt;&#10;    &lt;/Box&gt;&#10;    &lt;Box style={{ padding: '8px 40px 0px 40px' }}&gt;&#10;        &lt;Text style={{ fontSize: 20, color: '#4A5568', lineHeight: 1.4 }}&gt;位姿定下来之后才投放高斯：分块估深度尺度与偏移，再把屏幕上看不见的小高斯合并掉。&lt;/Text&gt;&#10;    &lt;/Box&gt;&#10;    &lt;Box style={{ padding: '14px 40px 0px 40px', flexDirection: 'row', gap: 20 }}&gt;&#10;        &lt;Box style={{ width: 600, flexDirection: 'column', gap: 11 }}&gt;&#10;            &lt;Box style={{ backgroundColor: '#F7F9FC', border: '1px solid #D6DCE5', borderRadius: 6, padding: '9px 16px' }}&gt;&#10;                &lt;Text style={{ fontSize: 18, color: '#1A2230', lineHeight: 1.45 }}&gt;&lt;b&gt;输入&lt;/b&gt;　位姿 ＋ 三角化稀疏点 ＋ 单目深度（Depth Anything 3）&lt;/Text&gt;&#10;            &lt;/Box&gt;&#10;            &lt;Box style={{ backgroundColor: '#F7F9FC', border: '1px solid #D6DCE5', borderRadius: 6, padding: '9px 16px' }}&gt;&#10;                &lt;Text style={{ fontSize: 18, color: '#1A2230', lineHeight: 1.45 }}&gt;&lt;b&gt;做法&lt;/b&gt;　图像切 4×4 块，每块单独拟合 s、o 再插值上采样；层级按屏幕投影尺寸合并&lt;/Text&gt;&#10;            &lt;/Box&gt;&#10;            &lt;Box style={{ backgroundColor: '#F7F9FC', border: '1px solid #D6DCE5', borderRadius: 6, padding: '9px 16px' }}&gt;&#10;                &lt;Text style={{ fontSize: 18, color: '#1A2230', lineHeight: 1.45 }}&gt;&lt;b&gt;输出&lt;/b&gt;　每关键帧固定 30 次迭代的高斯优化；显存只留“看得见”的部分&lt;/Text&gt;&#10;            &lt;/Box&gt;&#10;            &lt;Box style={{ backgroundColor: '#F0F5FC', border: '1px solid #3D7BD9', borderRadius: 6, padding: '10px 16px', flexDirection: 'column' }}&gt;&#10;                &lt;Text style={{ fontSize: 18, color: '#1A2230', lineHeight: 1.45 }}&gt;&lt;b&gt;关键取值&lt;/b&gt;　depth_grid = 4　·　τ_l = 0.5 px　·　可并数 &amp;#62; max(10%, 20 万)&lt;/Text&gt;&#10;                &lt;Text style={{ fontSize: 16, color: '#4A5568', lineHeight: 1.4, marginTop: 4 }}&gt;hierarchy_merge_ratio = 0.1、hierarchy_merge_min_count = 200000&lt;/Text&gt;&#10;            &lt;/Box&gt;&#10;        &lt;/Box&gt;&#10;        &lt;Box style={{ width: 580, flexDirection: 'column' }}&gt;&#10;            &lt;Image src=&quot;figs/fig7_gauss.png&quot; style={{ width: 580, height: 362 }} /&gt;&#10;            &lt;Text style={{ fontSize: 14.5, color: '#8B97A8', marginTop: 5 }}&gt;图 7　左：分块深度对齐；右：叶节点按屏幕尺寸合并成父节点。&lt;/Text&gt;&#10;        &lt;/Box&gt;&#10;    &lt;/Box&gt;&#10;    &lt;Box style={{ margin: '12px 40px 0px 40px', backgroundColor: '#F7F9FC', borderLeft: '5px solid #1E4FA8', padding: '10px 18px', flexDirection: 'column' }}&gt;&#10;        &lt;Image src=&quot;formula/f11.png&quot; style={{ width: 408.5, height: 26.5 }} /&gt;&#10;        &lt;Text style={{ fontSize: 16.5, color: '#4A5568', lineHeight: 1.4, marginTop: 3 }}&gt;消融 NoLoDepAlgn：26.29 → 25.41 dB。层级只压显存、不改位姿，所以能安全放在链路末端。&lt;/Text&gt;&#10;    &lt;/Box&gt;&#10;    &lt;Box style={{ marginTop: 'auto', padding: '10px 40px 12px 40px' }}&gt;&#10;        &lt;Text style={{ fontSize: 15, color: '#8B97A8' }}&gt;7 步走完，一帧的贡献结束；下一个关键帧进来，从第 ① 步重新开始。&lt;/Text&gt;&#10;    &lt;/Box&gt;&#10;&lt;/Slide&gt;&#10;"/>
         <p:cNvGrpSpPr/>
         <p:nvPr/>
       </p:nvGrpSpPr>
@@ -2332,7 +2333,7 @@
                 <a:latin typeface="Microsoft YaHei"/>
                 <a:ea typeface="Microsoft YaHei"/>
               </a:rPr>
-              <a:t>11 / 15</a:t>
+              <a:t>11 / 16</a:t>
             </a:r>
             <a:endParaRPr/>
           </a:p>
@@ -3309,7 +3310,7 @@
   <p:cSld>
     <p:spTree>
       <p:nvGrpSpPr>
-        <p:cNvPr id="59" name="" descr="&lt;Slide style={{ width: '1280px', height: '720px', backgroundColor: '#FFFFFF', padding: '0px', flexDirection: 'column' }}&gt;&#13;&#10;    &lt;Box style={{ width: '1280px', height: '8px', backgroundColor: '#1E4FA8' }} /&gt;&#13;&#10;    &lt;Box style={{ padding: '30px 40px 0px 40px', flexDirection: 'row', justifyContent: 'space-between', alignItems: 'flex-end' }}&gt;&#13;&#10;        &lt;Text style={{ fontSize: 34, fontWeight: 'bold', color: '#1E4FA8' }}&gt;论文实验：快一个数量级，只差 1–2 dB&lt;/Text&gt;&#13;&#10;        &lt;Text style={{ fontSize: 15, color: '#8B97A8' }}&gt;12 / 15&lt;/Text&gt;&#13;&#10;    &lt;/Box&gt;&#13;&#10;    &lt;Box style={{ padding: '18px 40px 0px 40px', flexDirection: 'column' }}&gt;&#13;&#10;        &lt;Box style={{ flexDirection: 'row', backgroundColor: '#1E4FA8', padding: '11px 14px' }}&gt;&#13;&#10;            &lt;Text style={{ flex: 1.5, fontSize: 19, fontWeight: 'bold', color: '#FFFFFF' }}&gt;数据集（有序）&lt;/Text&gt;&#13;&#10;            &lt;Text style={{ flex: 1.4, fontSize: 19, fontWeight: 'bold', color: '#FFFFFF' }}&gt;本方法 PSNR / 时间&lt;/Text&gt;&#13;&#10;            &lt;Text style={{ flex: 1.7, fontSize: 19, fontWeight: 'bold', color: '#FFFFFF' }}&gt;离线参考 GLOMAP+3DGS(7k)&lt;/Text&gt;&#13;&#10;            &lt;Text style={{ flex: 1.4, fontSize: 19, fontWeight: 'bold', color: '#FFFFFF' }}&gt;结论&lt;/Text&gt;&#13;&#10;        &lt;/Box&gt;&#13;&#10;        &lt;Box style={{ flexDirection: 'row', padding: '11px 14px', borderBottom: '1px solid #D6DCE5' }}&gt;&#13;&#10;            &lt;Text style={{ flex: 1.5, fontSize: 19, color: '#1A2230' }}&gt;TUM&lt;/Text&gt;&#13;&#10;            &lt;Text style={{ flex: 1.4, fontSize: 19, fontWeight: 'bold', color: '#1E4FA8' }}&gt;24.77 / 1:22&lt;/Text&gt;&#13;&#10;            &lt;Text style={{ flex: 1.7, fontSize: 19, color: '#1A2230' }}&gt;25.29 / 3:33&lt;/Text&gt;&#13;&#10;            &lt;Text style={{ flex: 1.4, fontSize: 19, color: '#1A2230' }}&gt;比 LongSplat 快约 75×&lt;/Text&gt;&#13;&#10;        &lt;/Box&gt;&#13;&#10;        &lt;Box style={{ flexDirection: 'row', padding: '11px 14px', backgroundColor: '#F7F9FC', borderBottom: '1px solid #D6DCE5' }}&gt;&#13;&#10;            &lt;Text style={{ flex: 1.5, fontSize: 19, color: '#1A2230' }}&gt;MipNeRF360&lt;/Text&gt;&#13;&#10;            &lt;Text style={{ flex: 1.4, fontSize: 19, fontWeight: 'bold', color: '#1E4FA8' }}&gt;26.29 / 1:17&lt;/Text&gt;&#13;&#10;            &lt;Text style={{ flex: 1.7, fontSize: 19, color: '#1A2230' }}&gt;27.52 / 8:50&lt;/Text&gt;&#13;&#10;            &lt;Text style={{ flex: 1.4, fontSize: 19, color: '#1A2230' }}&gt;快 6.9×，差 1.23 dB&lt;/Text&gt;&#13;&#10;        &lt;/Box&gt;&#13;&#10;        &lt;Box style={{ flexDirection: 'row', padding: '11px 14px', borderBottom: '1px solid #D6DCE5' }}&gt;&#13;&#10;            &lt;Text style={{ flex: 1.5, fontSize: 19, color: '#1A2230' }}&gt;StaticHikes&lt;/Text&gt;&#13;&#10;            &lt;Text style={{ flex: 1.4, fontSize: 19, fontWeight: 'bold', color: '#1E4FA8' }}&gt;22.12 / 2:14&lt;/Text&gt;&#13;&#10;            &lt;Text style={{ flex: 1.7, fontSize: 19, color: '#1A2230' }}&gt;20.23 / 1:02:34&lt;/Text&gt;&#13;&#10;            &lt;Text style={{ flex: 1.4, fontSize: 19, color: '#1A2230' }}&gt;质量反超离线&lt;/Text&gt;&#13;&#10;        &lt;/Box&gt;&#13;&#10;        &lt;Box style={{ flexDirection: 'row', padding: '11px 14px', backgroundColor: '#F7F9FC', borderBottom: '1px solid #D6DCE5' }}&gt;&#13;&#10;            &lt;Text style={{ flex: 1.5, fontSize: 19, color: '#1A2230' }}&gt;CityWalk（4050 帧）&lt;/Text&gt;&#13;&#10;            &lt;Text style={{ flex: 1.4, fontSize: 19, fontWeight: 'bold', color: '#1E4FA8' }}&gt;22.03 / 29:38&lt;/Text&gt;&#13;&#10;            &lt;Text style={{ flex: 1.7, fontSize: 19, color: '#1A2230' }}&gt;Octree-GS 17.33 / 3:11:40&lt;/Text&gt;&#13;&#10;            &lt;Text style={{ flex: 1.4, fontSize: 19, color: '#1A2230' }}&gt;大场景最优&lt;/Text&gt;&#13;&#10;        &lt;/Box&gt;&#13;&#10;    &lt;/Box&gt;&#13;&#10;    &lt;Box style={{ padding: '16px 40px 0px 40px', flexDirection: 'row', gap: 16 }}&gt;&#13;&#10;        &lt;Box style={{ flex: 1, backgroundColor: '#F0F5FC', borderRadius: 6, padding: '13px 16px', flexDirection: 'column' }}&gt;&#13;&#10;            &lt;Text style={{ fontSize: 36, fontWeight: 'bold', color: '#1E4FA8' }}&gt;0.5 dB&lt;/Text&gt;&#13;&#10;            &lt;Text style={{ fontSize: 19, color: '#1A2230', lineHeight: 1.45, marginTop: 4 }}&gt;输入顺序打乱后 PSNR 26.29 → 25.73，&quot;无序&quot;不是门槛&lt;/Text&gt;&#13;&#10;        &lt;/Box&gt;&#13;&#10;        &lt;Box style={{ flex: 1, backgroundColor: '#F0F5FC', borderRadius: 6, padding: '13px 16px', flexDirection: 'column' }}&gt;&#13;&#10;            &lt;Text style={{ fontSize: 36, fontWeight: 'bold', color: '#1E4FA8' }}&gt;8.5&lt;/Text&gt;&#13;&#10;            &lt;Text style={{ fontSize: 19, color: '#1A2230', lineHeight: 1.45, marginTop: 4 }}&gt;MipNeRF360 平移 APE（对比 Photo-SLAM 161+）&lt;/Text&gt;&#13;&#10;        &lt;/Box&gt;&#13;&#10;        &lt;Box style={{ flex: 1, backgroundColor: '#F0F5FC', borderRadius: 6, padding: '13px 16px', flexDirection: 'column' }}&gt;&#13;&#10;            &lt;Text style={{ fontSize: 36, fontWeight: 'bold', color: '#1E4FA8' }}&gt;324 ms&lt;/Text&gt;&#13;&#10;            &lt;Text style={{ fontSize: 19, color: '#1A2230', lineHeight: 1.45, marginTop: 4 }}&gt;MipNeRF360 平均每帧延迟，具备&quot;即时反馈&quot;资格&lt;/Text&gt;&#13;&#10;        &lt;/Box&gt;&#13;&#10;    &lt;/Box&gt;&#13;&#10;&#13;&#10;    &lt;Box style={{ padding: '18px 40px 0px 40px', flexDirection: 'column' }}&gt;&#13;&#10;        &lt;Box style={{ flexDirection: 'row', alignItems: 'flex-end', gap: 12 }}&gt;&#13;&#10;            &lt;Text style={{ fontSize: 22, fontWeight: 'bold', color: '#1E4FA8' }}&gt;消融：哪一步最不能省&lt;/Text&gt;&#13;&#10;            &lt;Text style={{ fontSize: 16, color: '#8B97A8' }}&gt;MipNeRF360 · PSNR（dB）· 横轴自 24 起，条越长越好&lt;/Text&gt;&#13;&#10;        &lt;/Box&gt;&#13;&#10;        &lt;Box style={{ flexDirection: 'row', alignItems: 'center', padding: '8px 0px 4px 0px' }}&gt;&#13;&#10;            &lt;Text style={{ width: 330, fontSize: 17, fontWeight: 'bold', color: '#1A2230' }}&gt;完整方法&lt;/Text&gt;&#13;&#10;            &lt;Box style={{ width: 568, height: 21, backgroundColor: '#1E4FA8', borderRadius: 2 }} /&gt;&#13;&#10;            &lt;Text style={{ fontSize: 17.5, fontWeight: 'bold', color: '#1E4FA8', marginLeft: 9 }}&gt;26.29&lt;/Text&gt;&#13;&#10;        &lt;/Box&gt;&#13;&#10;        &lt;Box style={{ flexDirection: 'row', alignItems: 'center', padding: '4px 0px' }}&gt;&#13;&#10;            &lt;Text style={{ width: 330, fontSize: 17, color: '#1A2230' }}&gt;不分块深度对齐（NoLoDepAlgn）&lt;/Text&gt;&#13;&#10;            &lt;Box style={{ width: 349, height: 21, backgroundColor: '#3D7BD9', borderRadius: 2 }} /&gt;&#13;&#10;            &lt;Text style={{ fontSize: 17.5, fontWeight: 'bold', color: '#1A2230', marginLeft: 9 }}&gt;25.41　&lt;Text style={{ fontSize: 15.5, color: '#D9534F' }}&gt;−0.88&lt;/Text&gt;&lt;/Text&gt;&#13;&#10;        &lt;/Box&gt;&#13;&#10;        &lt;Box style={{ flexDirection: 'row', alignItems: 'center', padding: '4px 0px' }}&gt;&#13;&#10;            &lt;Text style={{ width: 330, fontSize: 17, color: '#1A2230' }}&gt;去掉 VPR，只比相邻 5 帧&lt;/Text&gt;&#13;&#10;            &lt;Box style={{ width: 193, height: 21, backgroundColor: '#7FA5D8', borderRadius: 2 }} /&gt;&#13;&#10;            &lt;Text style={{ fontSize: 17.5, fontWeight: 'bold', color: '#1A2230', marginLeft: 9 }}&gt;24.78　&lt;Text style={{ fontSize: 15.5, color: '#D9534F' }}&gt;−1.51&lt;/Text&gt;&lt;/Text&gt;&#13;&#10;        &lt;/Box&gt;&#13;&#10;        &lt;Box style={{ flexDirection: 'row', alignItems: 'center', padding: '4px 0px' }}&gt;&#13;&#10;            &lt;Text style={{ width: 330, fontSize: 17, color: '#1A2230' }}&gt;优化窗改成&quot;最后 20 帧&quot;&lt;/Text&gt;&#13;&#10;            &lt;Box style={{ width: 139, height: 21, backgroundColor: '#A8BFE0', borderRadius: 2 }} /&gt;&#13;&#10;            &lt;Text style={{ fontSize: 17.5, fontWeight: 'bold', color: '#1A2230', marginLeft: 9 }}&gt;24.56　&lt;Text style={{ fontSize: 15.5, color: '#D9534F' }}&gt;−1.73&lt;/Text&gt;&lt;/Text&gt;&#13;&#10;        &lt;/Box&gt;&#13;&#10;    &lt;/Box&gt;&#13;&#10;&#13;&#10;    &lt;Box style={{ margin: '12px 40px 0px 40px', backgroundColor: '#F7F9FC', borderLeft: '5px solid #1E4FA8', padding: '9px 16px' }}&gt;&#13;&#10;        &lt;Text style={{ fontSize: 17, color: '#1A2230', lineHeight: 1.4 }}&gt;三处消融都掉 0.9–1.7 dB，但省下的时间远不止——这正是&quot;&lt;b&gt;先保实时、再谈精度&lt;/b&gt;&quot;的取舍证据；其中&lt;b&gt;选窗最贵&lt;/b&gt;，所以第 08 页把它单列一页。&lt;/Text&gt;&#13;&#10;    &lt;/Box&gt;&#13;&#10;&lt;/Slide&gt;&#13;&#10;"/>
+        <p:cNvPr id="59" name="" descr="&lt;Slide style={{ width: '1280px', height: '720px', backgroundColor: '#FFFFFF', padding: '0px', flexDirection: 'column' }}&gt;&#10;    &lt;Box style={{ width: '1280px', height: '8px', backgroundColor: '#1E4FA8' }} /&gt;&#10;    &lt;Box style={{ padding: '30px 40px 0px 40px', flexDirection: 'row', justifyContent: 'space-between', alignItems: 'flex-end' }}&gt;&#10;        &lt;Text style={{ fontSize: 34, fontWeight: 'bold', color: '#1E4FA8' }}&gt;论文实验：快一个数量级，只差 1–2 dB&lt;/Text&gt;&#10;        &lt;Text style={{ fontSize: 15, color: '#8B97A8' }}&gt;12 / 16&lt;/Text&gt;&#10;    &lt;/Box&gt;&#10;    &lt;Box style={{ padding: '18px 40px 0px 40px', flexDirection: 'column' }}&gt;&#10;        &lt;Box style={{ flexDirection: 'row', backgroundColor: '#1E4FA8', padding: '11px 14px' }}&gt;&#10;            &lt;Text style={{ flex: 1.5, fontSize: 19, fontWeight: 'bold', color: '#FFFFFF' }}&gt;数据集（有序）&lt;/Text&gt;&#10;            &lt;Text style={{ flex: 1.4, fontSize: 19, fontWeight: 'bold', color: '#FFFFFF' }}&gt;本方法 PSNR / 时间&lt;/Text&gt;&#10;            &lt;Text style={{ flex: 1.7, fontSize: 19, fontWeight: 'bold', color: '#FFFFFF' }}&gt;离线参考 GLOMAP+3DGS(7k)&lt;/Text&gt;&#10;            &lt;Text style={{ flex: 1.4, fontSize: 19, fontWeight: 'bold', color: '#FFFFFF' }}&gt;结论&lt;/Text&gt;&#10;        &lt;/Box&gt;&#10;        &lt;Box style={{ flexDirection: 'row', padding: '11px 14px', borderBottom: '1px solid #D6DCE5' }}&gt;&#10;            &lt;Text style={{ flex: 1.5, fontSize: 19, color: '#1A2230' }}&gt;TUM&lt;/Text&gt;&#10;            &lt;Text style={{ flex: 1.4, fontSize: 19, fontWeight: 'bold', color: '#1E4FA8' }}&gt;24.77 / 1:22&lt;/Text&gt;&#10;            &lt;Text style={{ flex: 1.7, fontSize: 19, color: '#1A2230' }}&gt;25.29 / 3:33&lt;/Text&gt;&#10;            &lt;Text style={{ flex: 1.4, fontSize: 19, color: '#1A2230' }}&gt;比 LongSplat 快约 75×&lt;/Text&gt;&#10;        &lt;/Box&gt;&#10;        &lt;Box style={{ flexDirection: 'row', padding: '11px 14px', backgroundColor: '#F7F9FC', borderBottom: '1px solid #D6DCE5' }}&gt;&#10;            &lt;Text style={{ flex: 1.5, fontSize: 19, color: '#1A2230' }}&gt;MipNeRF360&lt;/Text&gt;&#10;            &lt;Text style={{ flex: 1.4, fontSize: 19, fontWeight: 'bold', color: '#1E4FA8' }}&gt;26.29 / 1:17&lt;/Text&gt;&#10;            &lt;Text style={{ flex: 1.7, fontSize: 19, color: '#1A2230' }}&gt;27.52 / 8:50&lt;/Text&gt;&#10;            &lt;Text style={{ flex: 1.4, fontSize: 19, color: '#1A2230' }}&gt;快 6.9×，差 1.23 dB&lt;/Text&gt;&#10;        &lt;/Box&gt;&#10;        &lt;Box style={{ flexDirection: 'row', padding: '11px 14px', borderBottom: '1px solid #D6DCE5' }}&gt;&#10;            &lt;Text style={{ flex: 1.5, fontSize: 19, color: '#1A2230' }}&gt;StaticHikes&lt;/Text&gt;&#10;            &lt;Text style={{ flex: 1.4, fontSize: 19, fontWeight: 'bold', color: '#1E4FA8' }}&gt;22.12 / 2:14&lt;/Text&gt;&#10;            &lt;Text style={{ flex: 1.7, fontSize: 19, color: '#1A2230' }}&gt;20.23 / 1:02:34&lt;/Text&gt;&#10;            &lt;Text style={{ flex: 1.4, fontSize: 19, color: '#1A2230' }}&gt;质量反超离线&lt;/Text&gt;&#10;        &lt;/Box&gt;&#10;        &lt;Box style={{ flexDirection: 'row', padding: '11px 14px', backgroundColor: '#F7F9FC', borderBottom: '1px solid #D6DCE5' }}&gt;&#10;            &lt;Text style={{ flex: 1.5, fontSize: 19, color: '#1A2230' }}&gt;CityWalk（4050 帧）&lt;/Text&gt;&#10;            &lt;Text style={{ flex: 1.4, fontSize: 19, fontWeight: 'bold', color: '#1E4FA8' }}&gt;22.03 / 29:38&lt;/Text&gt;&#10;            &lt;Text style={{ flex: 1.7, fontSize: 19, color: '#1A2230' }}&gt;Octree-GS 17.33 / 3:11:40&lt;/Text&gt;&#10;            &lt;Text style={{ flex: 1.4, fontSize: 19, color: '#1A2230' }}&gt;大场景最优&lt;/Text&gt;&#10;        &lt;/Box&gt;&#10;    &lt;/Box&gt;&#10;    &lt;Box style={{ padding: '16px 40px 0px 40px', flexDirection: 'row', gap: 16 }}&gt;&#10;        &lt;Box style={{ flex: 1, backgroundColor: '#F0F5FC', borderRadius: 6, padding: '13px 16px', flexDirection: 'column' }}&gt;&#10;            &lt;Text style={{ fontSize: 36, fontWeight: 'bold', color: '#1E4FA8' }}&gt;0.5 dB&lt;/Text&gt;&#10;            &lt;Text style={{ fontSize: 19, color: '#1A2230', lineHeight: 1.45, marginTop: 4 }}&gt;输入顺序打乱后 PSNR 26.29 → 25.73，&quot;无序&quot;不是门槛&lt;/Text&gt;&#10;        &lt;/Box&gt;&#10;        &lt;Box style={{ flex: 1, backgroundColor: '#F0F5FC', borderRadius: 6, padding: '13px 16px', flexDirection: 'column' }}&gt;&#10;            &lt;Text style={{ fontSize: 36, fontWeight: 'bold', color: '#1E4FA8' }}&gt;8.5&lt;/Text&gt;&#10;            &lt;Text style={{ fontSize: 19, color: '#1A2230', lineHeight: 1.45, marginTop: 4 }}&gt;MipNeRF360 平移 APE（对比 Photo-SLAM 161+）&lt;/Text&gt;&#10;        &lt;/Box&gt;&#10;        &lt;Box style={{ flex: 1, backgroundColor: '#F0F5FC', borderRadius: 6, padding: '13px 16px', flexDirection: 'column' }}&gt;&#10;            &lt;Text style={{ fontSize: 36, fontWeight: 'bold', color: '#1E4FA8' }}&gt;324 ms&lt;/Text&gt;&#10;            &lt;Text style={{ fontSize: 19, color: '#1A2230', lineHeight: 1.45, marginTop: 4 }}&gt;MipNeRF360 平均每帧延迟，具备&quot;即时反馈&quot;资格&lt;/Text&gt;&#10;        &lt;/Box&gt;&#10;    &lt;/Box&gt;&#10;&#10;    &lt;Box style={{ padding: '18px 40px 0px 40px', flexDirection: 'column' }}&gt;&#10;        &lt;Box style={{ flexDirection: 'row', alignItems: 'flex-end', gap: 12 }}&gt;&#10;            &lt;Text style={{ fontSize: 22, fontWeight: 'bold', color: '#1E4FA8' }}&gt;消融：哪一步最不能省&lt;/Text&gt;&#10;            &lt;Text style={{ fontSize: 16, color: '#8B97A8' }}&gt;MipNeRF360 · PSNR（dB）· 横轴自 24 起，条越长越好&lt;/Text&gt;&#10;        &lt;/Box&gt;&#10;        &lt;Box style={{ flexDirection: 'row', alignItems: 'center', padding: '8px 0px 4px 0px' }}&gt;&#10;            &lt;Text style={{ width: 330, fontSize: 17, fontWeight: 'bold', color: '#1A2230' }}&gt;完整方法&lt;/Text&gt;&#10;            &lt;Box style={{ width: 568, height: 21, backgroundColor: '#1E4FA8', borderRadius: 2 }} /&gt;&#10;            &lt;Text style={{ fontSize: 17.5, fontWeight: 'bold', color: '#1E4FA8', marginLeft: 9 }}&gt;26.29&lt;/Text&gt;&#10;        &lt;/Box&gt;&#10;        &lt;Box style={{ flexDirection: 'row', alignItems: 'center', padding: '4px 0px' }}&gt;&#10;            &lt;Text style={{ width: 330, fontSize: 17, color: '#1A2230' }}&gt;不分块深度对齐（NoLoDepAlgn）&lt;/Text&gt;&#10;            &lt;Box style={{ width: 349, height: 21, backgroundColor: '#3D7BD9', borderRadius: 2 }} /&gt;&#10;            &lt;Text style={{ fontSize: 17.5, fontWeight: 'bold', color: '#1A2230', marginLeft: 9 }}&gt;25.41　&lt;Text style={{ fontSize: 15.5, color: '#D9534F' }}&gt;−0.88&lt;/Text&gt;&lt;/Text&gt;&#10;        &lt;/Box&gt;&#10;        &lt;Box style={{ flexDirection: 'row', alignItems: 'center', padding: '4px 0px' }}&gt;&#10;            &lt;Text style={{ width: 330, fontSize: 17, color: '#1A2230' }}&gt;去掉 VPR，只比相邻 5 帧&lt;/Text&gt;&#10;            &lt;Box style={{ width: 193, height: 21, backgroundColor: '#7FA5D8', borderRadius: 2 }} /&gt;&#10;            &lt;Text style={{ fontSize: 17.5, fontWeight: 'bold', color: '#1A2230', marginLeft: 9 }}&gt;24.78　&lt;Text style={{ fontSize: 15.5, color: '#D9534F' }}&gt;−1.51&lt;/Text&gt;&lt;/Text&gt;&#10;        &lt;/Box&gt;&#10;        &lt;Box style={{ flexDirection: 'row', alignItems: 'center', padding: '4px 0px' }}&gt;&#10;            &lt;Text style={{ width: 330, fontSize: 17, color: '#1A2230' }}&gt;优化窗改成&quot;最后 20 帧&quot;&lt;/Text&gt;&#10;            &lt;Box style={{ width: 139, height: 21, backgroundColor: '#A8BFE0', borderRadius: 2 }} /&gt;&#10;            &lt;Text style={{ fontSize: 17.5, fontWeight: 'bold', color: '#1A2230', marginLeft: 9 }}&gt;24.56　&lt;Text style={{ fontSize: 15.5, color: '#D9534F' }}&gt;−1.73&lt;/Text&gt;&lt;/Text&gt;&#10;        &lt;/Box&gt;&#10;    &lt;/Box&gt;&#10;&#10;    &lt;Box style={{ margin: '12px 40px 0px 40px', backgroundColor: '#F7F9FC', borderLeft: '5px solid #1E4FA8', padding: '9px 16px' }}&gt;&#10;        &lt;Text style={{ fontSize: 17, color: '#1A2230', lineHeight: 1.4 }}&gt;三处消融都掉 0.9–1.7 dB，但省下的时间远不止——这正是&quot;&lt;b&gt;先保实时、再谈精度&lt;/b&gt;&quot;的取舍证据；其中&lt;b&gt;选窗最贵&lt;/b&gt;，所以第 08 页把它单列一页。&lt;/Text&gt;&#10;    &lt;/Box&gt;&#10;&lt;/Slide&gt;&#10;"/>
         <p:cNvGrpSpPr/>
         <p:nvPr/>
       </p:nvGrpSpPr>
@@ -3443,7 +3444,7 @@
                 <a:latin typeface="Microsoft YaHei"/>
                 <a:ea typeface="Microsoft YaHei"/>
               </a:rPr>
-              <a:t>12 / 15</a:t>
+              <a:t>12 / 16</a:t>
             </a:r>
             <a:endParaRPr/>
           </a:p>
@@ -5858,7 +5859,7 @@
   <p:cSld>
     <p:spTree>
       <p:nvGrpSpPr>
-        <p:cNvPr id="117" name="" descr="&lt;Slide style={{ width: '1280px', height: '720px', backgroundColor: '#FFFFFF', padding: '0px', flexDirection: 'column' }}&gt;&#13;&#10;    &lt;Box style={{ width: '1280px', height: '8px', backgroundColor: '#1E4FA8' }} /&gt;&#13;&#10;    &lt;Box style={{ padding: '13px 40px 0px 40px', flexDirection: 'row', justifyContent: 'space-between', alignItems: 'flex-end' }}&gt;&#13;&#10;        &lt;Text style={{ fontSize: 31, fontWeight: 'bold', color: '#1E4FA8' }}&gt;核心优化：位姿求解是作者自己写的 GPU 核&lt;/Text&gt;&#13;&#10;        &lt;Text style={{ fontSize: 15, color: '#8B97A8' }}&gt;13 / 15&lt;/Text&gt;&#13;&#10;    &lt;/Box&gt;&#13;&#10;    &lt;Box style={{ padding: '5px 40px 0px 40px' }}&gt;&#13;&#10;        &lt;Text style={{ fontSize: 17, color: '#4A5568' }}&gt;论文没有调用 g2o / Ceres / CUDA-BA，第 ⑤ 步的 BA 从残差到求解全是自己写的：&lt;b&gt;雅可比解析、LM 迭代、Schur 消元、位姿更新，四步都留在显存里&lt;/b&gt;。&lt;/Text&gt;&#13;&#10;    &lt;/Box&gt;&#13;&#10;    &lt;Box style={{ padding: '7px 40px 0px 40px', flexDirection: 'row', gap: 14 }}&gt;&#13;&#10;        &lt;Box style={{ flex: 1, flexDirection: 'column', gap: 10 }}&gt;&#13;&#10;            &lt;Box style={{ backgroundColor: '#1E1E1E', borderRadius: 5, padding: '5px 10px', flexDirection: 'column' }}&gt;&#13;&#10;                &lt;Text style={{ fontSize: 13.5, fontWeight: 'bold', color: '#8FBBFF' }}&gt;优化 1　手写解析雅可比，废掉 autograd&lt;/Text&gt;&#13;&#10;                &lt;Text style={{ fontFamily: 'Consolas', fontSize: 10, color: '#7F8C9F', marginBottom: 2 }}&gt;poses/mini_ba_utils.cu:133&lt;/Text&gt;&#13;&#10;                &lt;Image src=&quot;opt_png/01.png&quot; style={{ width: 579, height: 173 }} /&gt;&#13;&#10;            &lt;/Box&gt;&#13;&#10;            &lt;Box style={{ backgroundColor: '#1E1E1E', borderRadius: 5, padding: '5px 10px', flexDirection: 'column' }}&gt;&#13;&#10;                &lt;Text style={{ fontSize: 13.5, fontWeight: 'bold', color: '#8FBBFF' }}&gt;优化 2　手写 se(3) 指数映射，更新融成一个核&lt;/Text&gt;&#13;&#10;                &lt;Text style={{ fontFamily: 'Consolas', fontSize: 10, color: '#7F8C9F', marginBottom: 2 }}&gt;poses/mini_ba_utils.cu:186&lt;/Text&gt;&#13;&#10;                &lt;Image src=&quot;opt_png/02.png&quot; style={{ width: 579, height: 173 }} /&gt;&#13;&#10;            &lt;/Box&gt;&#13;&#10;        &lt;/Box&gt;&#13;&#10;        &lt;Box style={{ flex: 1, flexDirection: 'column', gap: 10 }}&gt;&#13;&#10;            &lt;Box style={{ backgroundColor: '#1E1E1E', borderRadius: 5, padding: '5px 10px', flexDirection: 'column' }}&gt;&#13;&#10;                &lt;Text style={{ fontSize: 13.5, fontWeight: 'bold', color: '#8FBBFF' }}&gt;优化 3　Schur 补与 Cholesky 不落回 CPU&lt;/Text&gt;&#13;&#10;                &lt;Text style={{ fontFamily: 'Consolas', fontSize: 10, color: '#7F8C9F', marginBottom: 2 }}&gt;poses/mini_ba.py:296&lt;/Text&gt;&#13;&#10;                &lt;Image src=&quot;opt_png/03.png&quot; style={{ width: 579, height: 191 }} /&gt;&#13;&#10;            &lt;/Box&gt;&#13;&#10;            &lt;Box style={{ backgroundColor: '#1E1E1E', borderRadius: 5, padding: '5px 10px', flexDirection: 'column' }}&gt;&#13;&#10;                &lt;Text style={{ fontSize: 13.5, fontWeight: 'bold', color: '#8FBBFF' }}&gt;优化 4　整轮 LM 压成一张 CUDA Graph&lt;/Text&gt;&#13;&#10;                &lt;Text style={{ fontFamily: 'Consolas', fontSize: 10, color: '#7F8C9F', marginBottom: 2 }}&gt;poses/mini_ba.py:506（无分支写法见 :391）&lt;/Text&gt;&#13;&#10;                &lt;Image src=&quot;opt_png/04.png&quot; style={{ width: 579, height: 191 }} /&gt;&#13;&#10;            &lt;/Box&gt;&#13;&#10;        &lt;/Box&gt;&#13;&#10;    &lt;/Box&gt;&#13;&#10;    &lt;Box style={{ margin: '9px 40px 0px 40px', backgroundColor: '#F0F5FC', borderLeft: '5px solid #1E4FA8', padding: '9px 18px', flexDirection: 'row', gap: 22 }}&gt;&#13;&#10;        &lt;Box style={{ flex: 1, flexDirection: 'column' }}&gt;&#13;&#10;            &lt;Text style={{ fontSize: 15.5, fontWeight: 'bold', color: '#1E4FA8' }}&gt;省掉反向图&lt;/Text&gt;&#13;&#10;            &lt;Text style={{ fontSize: 15, color: '#1A2230', lineHeight: 1.35 }}&gt;雅可比手推成解析式，残差与 J 一核同出。&lt;/Text&gt;&#13;&#10;        &lt;/Box&gt;&#13;&#10;        &lt;Box style={{ flex: 1, flexDirection: 'column' }}&gt;&#13;&#10;            &lt;Text style={{ fontSize: 15.5, fontWeight: 'bold', color: '#1E4FA8' }}&gt;省掉主机同步&lt;/Text&gt;&#13;&#10;            &lt;Text style={{ fontSize: 15, color: '#1A2230', lineHeight: 1.35 }}&gt;观测追加 atomicAdd 抢 slot，不等 CPU 派号。&lt;/Text&gt;&#13;&#10;        &lt;/Box&gt;&#13;&#10;        &lt;Box style={{ flex: 1, flexDirection: 'column' }}&gt;&#13;&#10;            &lt;Text style={{ fontSize: 15.5, fontWeight: 'bold', color: '#1E4FA8' }}&gt;省掉启动开销&lt;/Text&gt;&#13;&#10;            &lt;Text style={{ fontSize: 15, color: '#1A2230', lineHeight: 1.35 }}&gt;上百次 LM 迭代提交一次图，不许有分支。&lt;/Text&gt;&#13;&#10;        &lt;/Box&gt;&#13;&#10;    &lt;/Box&gt;&#13;&#10;    &lt;Box style={{ marginTop: 'auto', padding: '6px 40px 10px 40px' }}&gt;&#13;&#10;        &lt;Text style={{ fontSize: 13, color: '#8B97A8', lineHeight: 1.4 }}&gt;行号指向片段起点；为投影宽度做了换行与变量缩写（v = jacxr_cam − BD @ jacxr_xyz），逻辑未改。共同点不是算法更聪明，而是&lt;b&gt;把每一步都做成 GPU 原生的形状&lt;/b&gt;——这才是「普通显卡上实时」的落点。&lt;/Text&gt;&#13;&#10;    &lt;/Box&gt;&#13;&#10;&lt;/Slide&gt;&#13;&#10;"/>
+        <p:cNvPr id="117" name="" descr="&lt;Slide style={{ width: '1280px', height: '720px', backgroundColor: '#FFFFFF', padding: '0px', flexDirection: 'column' }}&gt;&#10;    &lt;Box style={{ width: '1280px', height: '8px', backgroundColor: '#1E4FA8' }} /&gt;&#10;    &lt;Box style={{ padding: '13px 40px 0px 40px', flexDirection: 'row', justifyContent: 'space-between', alignItems: 'flex-end' }}&gt;&#10;        &lt;Text style={{ fontSize: 31, fontWeight: 'bold', color: '#1E4FA8' }}&gt;核心优化：位姿求解是作者自己写的 GPU 核&lt;/Text&gt;&#10;        &lt;Text style={{ fontSize: 15, color: '#8B97A8' }}&gt;13 / 16&lt;/Text&gt;&#10;    &lt;/Box&gt;&#10;    &lt;Box style={{ padding: '5px 40px 0px 40px' }}&gt;&#10;        &lt;Text style={{ fontSize: 17, color: '#4A5568' }}&gt;论文没有调用 g2o / Ceres / CUDA-BA，第 ⑤ 步的 BA 从残差到求解全是自己写的：&lt;b&gt;雅可比解析、LM 迭代、Schur 消元、位姿更新，四步都留在显存里&lt;/b&gt;。&lt;/Text&gt;&#10;    &lt;/Box&gt;&#10;    &lt;Box style={{ padding: '7px 40px 0px 40px', flexDirection: 'row', gap: 14 }}&gt;&#10;        &lt;Box style={{ flex: 1, flexDirection: 'column', gap: 10 }}&gt;&#10;            &lt;Box style={{ backgroundColor: '#1E1E1E', borderRadius: 5, padding: '5px 10px', flexDirection: 'column' }}&gt;&#10;                &lt;Text style={{ fontSize: 13.5, fontWeight: 'bold', color: '#8FBBFF' }}&gt;优化 1　手写解析雅可比，废掉 autograd&lt;/Text&gt;&#10;                &lt;Text style={{ fontFamily: 'Consolas', fontSize: 10, color: '#7F8C9F', marginBottom: 2 }}&gt;poses/mini_ba_utils.cu:133&lt;/Text&gt;&#10;                &lt;Image src=&quot;opt_png/01.png&quot; style={{ width: 579, height: 173 }} /&gt;&#10;            &lt;/Box&gt;&#10;            &lt;Box style={{ backgroundColor: '#1E1E1E', borderRadius: 5, padding: '5px 10px', flexDirection: 'column' }}&gt;&#10;                &lt;Text style={{ fontSize: 13.5, fontWeight: 'bold', color: '#8FBBFF' }}&gt;优化 2　手写 se(3) 指数映射，更新融成一个核&lt;/Text&gt;&#10;                &lt;Text style={{ fontFamily: 'Consolas', fontSize: 10, color: '#7F8C9F', marginBottom: 2 }}&gt;poses/mini_ba_utils.cu:186&lt;/Text&gt;&#10;                &lt;Image src=&quot;opt_png/02.png&quot; style={{ width: 579, height: 173 }} /&gt;&#10;            &lt;/Box&gt;&#10;        &lt;/Box&gt;&#10;        &lt;Box style={{ flex: 1, flexDirection: 'column', gap: 10 }}&gt;&#10;            &lt;Box style={{ backgroundColor: '#1E1E1E', borderRadius: 5, padding: '5px 10px', flexDirection: 'column' }}&gt;&#10;                &lt;Text style={{ fontSize: 13.5, fontWeight: 'bold', color: '#8FBBFF' }}&gt;优化 3　Schur 补与 Cholesky 不落回 CPU&lt;/Text&gt;&#10;                &lt;Text style={{ fontFamily: 'Consolas', fontSize: 10, color: '#7F8C9F', marginBottom: 2 }}&gt;poses/mini_ba.py:296&lt;/Text&gt;&#10;                &lt;Image src=&quot;opt_png/03.png&quot; style={{ width: 579, height: 191 }} /&gt;&#10;            &lt;/Box&gt;&#10;            &lt;Box style={{ backgroundColor: '#1E1E1E', borderRadius: 5, padding: '5px 10px', flexDirection: 'column' }}&gt;&#10;                &lt;Text style={{ fontSize: 13.5, fontWeight: 'bold', color: '#8FBBFF' }}&gt;优化 4　整轮 LM 压成一张 CUDA Graph&lt;/Text&gt;&#10;                &lt;Text style={{ fontFamily: 'Consolas', fontSize: 10, color: '#7F8C9F', marginBottom: 2 }}&gt;poses/mini_ba.py:506（无分支写法见 :391）&lt;/Text&gt;&#10;                &lt;Image src=&quot;opt_png/04.png&quot; style={{ width: 579, height: 191 }} /&gt;&#10;            &lt;/Box&gt;&#10;        &lt;/Box&gt;&#10;    &lt;/Box&gt;&#10;    &lt;Box style={{ margin: '9px 40px 0px 40px', backgroundColor: '#F0F5FC', borderLeft: '5px solid #1E4FA8', padding: '9px 18px', flexDirection: 'row', gap: 22 }}&gt;&#10;        &lt;Box style={{ flex: 1, flexDirection: 'column' }}&gt;&#10;            &lt;Text style={{ fontSize: 15.5, fontWeight: 'bold', color: '#1E4FA8' }}&gt;省掉反向图&lt;/Text&gt;&#10;            &lt;Text style={{ fontSize: 15, color: '#1A2230', lineHeight: 1.35 }}&gt;雅可比手推成解析式，残差与 J 一核同出。&lt;/Text&gt;&#10;        &lt;/Box&gt;&#10;        &lt;Box style={{ flex: 1, flexDirection: 'column' }}&gt;&#10;            &lt;Text style={{ fontSize: 15.5, fontWeight: 'bold', color: '#1E4FA8' }}&gt;省掉主机同步&lt;/Text&gt;&#10;            &lt;Text style={{ fontSize: 15, color: '#1A2230', lineHeight: 1.35 }}&gt;观测追加 atomicAdd 抢 slot，不等 CPU 派号。&lt;/Text&gt;&#10;        &lt;/Box&gt;&#10;        &lt;Box style={{ flex: 1, flexDirection: 'column' }}&gt;&#10;            &lt;Text style={{ fontSize: 15.5, fontWeight: 'bold', color: '#1E4FA8' }}&gt;省掉启动开销&lt;/Text&gt;&#10;            &lt;Text style={{ fontSize: 15, color: '#1A2230', lineHeight: 1.35 }}&gt;上百次 LM 迭代提交一次图，不许有分支。&lt;/Text&gt;&#10;        &lt;/Box&gt;&#10;    &lt;/Box&gt;&#10;    &lt;Box style={{ marginTop: 'auto', padding: '6px 40px 10px 40px' }}&gt;&#10;        &lt;Text style={{ fontSize: 13, color: '#8B97A8', lineHeight: 1.4 }}&gt;行号指向片段起点；为投影宽度做了换行与变量缩写（v = jacxr_cam − BD @ jacxr_xyz），逻辑未改。共同点不是算法更聪明，而是&lt;b&gt;把每一步都做成 GPU 原生的形状&lt;/b&gt;——这才是「普通显卡上实时」的落点。&lt;/Text&gt;&#10;    &lt;/Box&gt;&#10;&lt;/Slide&gt;&#10;"/>
         <p:cNvGrpSpPr/>
         <p:nvPr/>
       </p:nvGrpSpPr>
@@ -6002,7 +6003,7 @@
                 <a:latin typeface="Microsoft YaHei"/>
                 <a:ea typeface="Microsoft YaHei"/>
               </a:rPr>
-              <a:t>13 / 15</a:t>
+              <a:t>13 / 16</a:t>
             </a:r>
             <a:endParaRPr/>
           </a:p>
@@ -7342,11 +7343,11 @@
 </file>
 
 <file path=ppt/slides/slide14.xml><?xml version="1.0" encoding="utf-8"?>
-<p:sld xmlns:p="http://schemas.openxmlformats.org/presentationml/2006/main" xmlns:a="http://schemas.openxmlformats.org/drawingml/2006/main">
+<p:sld xmlns:p="http://schemas.openxmlformats.org/presentationml/2006/main" xmlns:a="http://schemas.openxmlformats.org/drawingml/2006/main" xmlns:r="http://schemas.openxmlformats.org/officeDocument/2006/relationships">
   <p:cSld>
     <p:spTree>
       <p:nvGrpSpPr>
-        <p:cNvPr id="148" name="" descr="&lt;Slide style={{ width: '1280px', height: '720px', backgroundColor: '#FFFFFF', padding: '0px', flexDirection: 'column' }}&gt;&#13;&#10;    &lt;Box style={{ width: '1280px', height: '8px', backgroundColor: '#1E4FA8' }} /&gt;&#13;&#10;    &lt;Box style={{ padding: '18px 40px 0px 40px', flexDirection: 'row', justifyContent: 'space-between', alignItems: 'flex-end' }}&gt;&#13;&#10;        &lt;Text style={{ fontSize: 32, fontWeight: 'bold', color: '#1E4FA8' }}&gt;结论：三句话带走，加一张边界清单&lt;/Text&gt;&#13;&#10;        &lt;Text style={{ fontSize: 15, color: '#8B97A8' }}&gt;14 / 15&lt;/Text&gt;&#13;&#10;    &lt;/Box&gt;&#13;&#10;&#13;&#10;    &lt;Box style={{ padding: '15px 40px 0px 40px', flexDirection: 'column', gap: 18 }}&gt;&#13;&#10;        &lt;Box style={{ flexDirection: 'row', gap: 16, alignItems: 'flex-start' }}&gt;&#13;&#10;            &lt;Box style={{ width: '34px', height: '34px', backgroundColor: '#1E4FA8', borderRadius: 4, alignItems: 'center', justifyContent: 'center' }}&gt;&#13;&#10;                &lt;Text style={{ fontSize: 19, fontWeight: 'bold', color: '#FFFFFF' }}&gt;1&lt;/Text&gt;&#13;&#10;            &lt;/Box&gt;&#13;&#10;            &lt;Box style={{ flex: 1, flexDirection: 'column' }}&gt;&#13;&#10;                &lt;Text style={{ fontSize: 23, fontWeight: 'bold', color: '#1A2230' }}&gt;它填的是一块空格，不是&quot;更快的离线 SfM&quot;&lt;/Text&gt;&#13;&#10;                &lt;Text style={{ fontSize: 18, color: '#4A5568', lineHeight: 1.4, marginTop: 4 }}&gt;即时、无序、全局一致三者同时成立，此前没有方法做到。速度是手段，&quot;现场可判断&quot;才是目的。&lt;/Text&gt;&#13;&#10;            &lt;/Box&gt;&#13;&#10;        &lt;/Box&gt;&#13;&#10;        &lt;Box style={{ flexDirection: 'row', gap: 16, alignItems: 'flex-start' }}&gt;&#13;&#10;            &lt;Box style={{ width: '34px', height: '34px', backgroundColor: '#1E4FA8', borderRadius: 4, alignItems: 'center', justifyContent: 'center' }}&gt;&#13;&#10;                &lt;Text style={{ fontSize: 19, fontWeight: 'bold', color: '#FFFFFF' }}&gt;2&lt;/Text&gt;&#13;&#10;            &lt;/Box&gt;&#13;&#10;            &lt;Box style={{ flex: 1, flexDirection: 'column' }}&gt;&#13;&#10;                &lt;Text style={{ fontSize: 23, fontWeight: 'bold', color: '#1A2230' }}&gt;题眼是用&quot;图上的距离&quot;替换&quot;全局优化的解&quot;&lt;/Text&gt;&#13;&#10;                &lt;Text style={{ fontSize: 18, color: '#4A5568', lineHeight: 1.4, marginTop: 4 }}&gt;判定看加权图距、不看时间，求解用焊接窗口得 Sim(3)，再把修正按测地距离摊给全图——回环不必重算第二遍。&lt;/Text&gt;&#13;&#10;            &lt;/Box&gt;&#13;&#10;        &lt;/Box&gt;&#13;&#10;        &lt;Box style={{ flexDirection: 'row', gap: 16, alignItems: 'flex-start' }}&gt;&#13;&#10;            &lt;Box style={{ width: '34px', height: '34px', backgroundColor: '#0E3F8C', borderRadius: 4, alignItems: 'center', justifyContent: 'center' }}&gt;&#13;&#10;                &lt;Text style={{ fontSize: 19, fontWeight: 'bold', color: '#FFFFFF' }}&gt;3&lt;/Text&gt;&#13;&#10;            &lt;/Box&gt;&#13;&#10;            &lt;Box style={{ flex: 1, flexDirection: 'column' }}&gt;&#13;&#10;                &lt;Text style={{ fontSize: 23, fontWeight: 'bold', color: '#1A2230' }}&gt;代价是真的：让出 1.2 dB，换来一条自写的 GPU 求解栈&lt;/Text&gt;&#13;&#10;                &lt;Text style={{ fontSize: 18, color: '#4A5568', lineHeight: 1.4, marginTop: 4 }}&gt;不调 g2o / Ceres，雅可比、Schur 消元、迭代更新自己写成核——精度上限低于全局 BA，但换来了时间。&lt;/Text&gt;&#13;&#10;            &lt;/Box&gt;&#13;&#10;        &lt;/Box&gt;&#13;&#10;    &lt;/Box&gt;&#13;&#10;&#13;&#10;    &lt;Box style={{ margin: '17px 40px 0px 40px', backgroundColor: '#F7F9FC', border: '1px solid #D6DCE5', borderRadius: 6, padding: '9px 16px', flexDirection: 'column' }}&gt;&#13;&#10;        &lt;Box style={{ flexDirection: 'row', justifyContent: 'space-between', alignItems: 'baseline' }}&gt;&#13;&#10;            &lt;Text style={{ fontSize: 16, fontWeight: 'bold', color: '#1A2230' }}&gt;它现在的边界　→　对应的补法&lt;/Text&gt;&#13;&#10;            &lt;Text style={{ fontSize: 14, color: '#8B97A8' }}&gt;论文自述的局限，非我们的复现问题&lt;/Text&gt;&#13;&#10;        &lt;/Box&gt;&#13;&#10;        &lt;Box style={{ flexDirection: 'row', gap: 14, marginTop: 7 }}&gt;&#13;&#10;            &lt;Box style={{ flex: 1, flexDirection: 'column' }}&gt;&#13;&#10;                &lt;Text style={{ fontSize: 14.5, fontWeight: 'bold', color: '#B03A37' }}&gt;① 低视差直接失效&lt;/Text&gt;&#13;&#10;                &lt;Text style={{ fontSize: 14, color: '#1A2230', lineHeight: 1.35, marginTop: 2 }}&gt;低视差帧只参与渲染、不进位姿求解，避免污染轨迹&lt;/Text&gt;&#13;&#10;            &lt;/Box&gt;&#13;&#10;            &lt;Box style={{ flex: 1, flexDirection: 'column' }}&gt;&#13;&#10;                &lt;Text style={{ fontSize: 14.5, fontWeight: 'bold', color: '#B03A37' }}&gt;② 精度低于全局 BA&lt;/Text&gt;&#13;&#10;                &lt;Text style={{ fontSize: 14, color: '#1A2230', lineHeight: 1.35, marginTop: 2 }}&gt;在线出预览，结束时 GLOMAP 回填一次全局 BA，补回 1.2 dB&lt;/Text&gt;&#13;&#10;            &lt;/Box&gt;&#13;&#10;            &lt;Box style={{ flex: 1, flexDirection: 'column' }}&gt;&#13;&#10;                &lt;Text style={{ fontSize: 14.5, fontWeight: 'bold', color: '#B03A37' }}&gt;③ 上游依赖链太重&lt;/Text&gt;&#13;&#10;                &lt;Text style={{ fontSize: 14, color: '#1A2230', lineHeight: 1.35, marginTop: 2 }}&gt;采集端给实时覆盖率与误差热图，直接提示&quot;这块没拍&quot;&lt;/Text&gt;&#13;&#10;            &lt;/Box&gt;&#13;&#10;            &lt;Box style={{ flex: 1, flexDirection: 'column' }}&gt;&#13;&#10;                &lt;Text style={{ fontSize: 14.5, fontWeight: 'bold', color: '#B03A37' }}&gt;④ 阈值靠经验&lt;/Text&gt;&#13;&#10;                &lt;Text style={{ fontSize: 14, color: '#1A2230', lineHeight: 1.35, marginTop: 2 }}&gt;按纹理强度与重叠度在线估计，替代固定常数&lt;/Text&gt;&#13;&#10;            &lt;/Box&gt;&#13;&#10;        &lt;/Box&gt;&#13;&#10;    &lt;/Box&gt;&#13;&#10;&#13;&#10;    &lt;Box style={{ margin: '16px 40px 0px 40px', backgroundColor: '#FAFBFD', border: '1px solid #E3E8F0', borderRadius: 6, padding: '10px 16px 12px 16px', flexDirection: 'row' }}&gt;&#13;&#10;        &lt;Box style={{ flex: 1, borderTop: '2px solid #C8D4E4', padding: '9px 14px 0px 14px', flexDirection: 'column' }}&gt;&#13;&#10;            &lt;Text style={{ fontSize: 15, fontWeight: 'bold', color: '#3D7BD9' }}&gt;2019&lt;/Text&gt;&#13;&#10;            &lt;Text style={{ fontSize: 17.5, fontWeight: 'bold', color: '#1A2230', marginTop: 2 }}&gt;NeRF&lt;/Text&gt;&#13;&#10;            &lt;Text style={{ fontSize: 14, color: '#4A5568', lineHeight: 1.35, marginTop: 4 }}&gt;离线、必须有序输入&lt;/Text&gt;&#13;&#10;            &lt;Text style={{ fontSize: 13.5, color: '#8B97A8', lineHeight: 1.35, marginTop: 3 }}&gt;一次训练以小时计&lt;/Text&gt;&#13;&#10;        &lt;/Box&gt;&#13;&#10;        &lt;Box style={{ flex: 1, borderTop: '2px solid #C8D4E4', padding: '9px 14px 0px 14px', flexDirection: 'column' }}&gt;&#13;&#10;            &lt;Text style={{ fontSize: 15, fontWeight: 'bold', color: '#3D7BD9' }}&gt;2023&lt;/Text&gt;&#13;&#10;            &lt;Text style={{ fontSize: 17.5, fontWeight: 'bold', color: '#1A2230', marginTop: 2 }}&gt;3DGS&lt;/Text&gt;&#13;&#10;            &lt;Text style={{ fontSize: 14, color: '#4A5568', lineHeight: 1.35, marginTop: 4 }}&gt;渲染快了，位姿仍靠 COLMAP&lt;/Text&gt;&#13;&#10;            &lt;Text style={{ fontSize: 13.5, color: '#8B97A8', lineHeight: 1.35, marginTop: 3 }}&gt;前置步骤还是离线 SfM&lt;/Text&gt;&#13;&#10;        &lt;/Box&gt;&#13;&#10;        &lt;Box style={{ flex: 1, borderTop: '2px solid #C8D4E4', padding: '9px 14px 0px 14px', flexDirection: 'column' }}&gt;&#13;&#10;            &lt;Text style={{ fontSize: 15, fontWeight: 'bold', color: '#3D7BD9' }}&gt;2024–25&lt;/Text&gt;&#13;&#10;            &lt;Text style={{ fontSize: 17.5, fontWeight: 'bold', color: '#1A2230', marginTop: 2 }}&gt;增量 / 无位姿重建&lt;/Text&gt;&#13;&#10;            &lt;Text style={{ fontSize: 14, color: '#4A5568', lineHeight: 1.35, marginTop: 4 }}&gt;要么依赖有序，要么非全局&lt;/Text&gt;&#13;&#10;            &lt;Text style={{ fontSize: 13.5, color: '#8B97A8', lineHeight: 1.35, marginTop: 3 }}&gt;两条路各缺一条&lt;/Text&gt;&#13;&#10;        &lt;/Box&gt;&#13;&#10;        &lt;Box style={{ flex: 1, borderTop: '2px solid #1E4FA8', padding: '9px 14px 0px 14px', flexDirection: 'column' }}&gt;&#13;&#10;            &lt;Text style={{ fontSize: 15, fontWeight: 'bold', color: '#1E4FA8' }}&gt;2026&lt;/Text&gt;&#13;&#10;            &lt;Text style={{ fontSize: 17.5, fontWeight: 'bold', color: '#1E4FA8', marginTop: 2 }}&gt;i3dgs（本文）&lt;/Text&gt;&#13;&#10;            &lt;Text style={{ fontSize: 14, fontWeight: 'bold', color: '#1E4FA8', lineHeight: 1.35, marginTop: 4 }}&gt;即时 · 无序 · 全局一致&lt;/Text&gt;&#13;&#10;            &lt;Text style={{ fontSize: 13.5, fontWeight: 'bold', color: '#3D7BD9', lineHeight: 1.35, marginTop: 3 }}&gt;三者首次同时成立&lt;/Text&gt;&#13;&#10;        &lt;/Box&gt;&#13;&#10;    &lt;/Box&gt;&#13;&#10;&#13;&#10;    &lt;Box style={{ margin: '11px 40px 0px 40px', backgroundColor: '#1E4FA8', borderRadius: 6, padding: '14px 22px', flexDirection: 'row', alignItems: 'center', gap: 26 }}&gt;&#13;&#10;        &lt;Text style={{ fontSize: 20, fontWeight: 'bold', color: '#FFFFFF', lineHeight: 1.4, flex: 1 }}&gt;一句话总结：它把 3DGS 从&quot;拍完再算的离线工具&quot;变成了&quot;拍摄现场的仪表盘&quot;。&lt;/Text&gt;&#13;&#10;        &lt;Box style={{ flexDirection: 'column' }}&gt;&#13;&#10;            &lt;Text style={{ fontSize: 15, color: '#C3D5EF' }}&gt;论文 / 我们&lt;/Text&gt;&#13;&#10;            &lt;Text style={{ fontSize: 19, fontWeight: 'bold', color: '#FFFFFF' }}&gt;26.29 → 25.95 dB&lt;/Text&gt;&#13;&#10;        &lt;/Box&gt;&#13;&#10;    &lt;/Box&gt;&#13;&#10;&#13;&#10;    &lt;Box style={{ marginTop: 'auto', padding: '10px 40px 16px 40px', flexDirection: 'row', justifyContent: 'space-between', alignItems: 'center' }}&gt;&#13;&#10;        &lt;Text style={{ fontSize: 24, fontWeight: 'bold', color: '#1E4FA8' }}&gt;谢谢，欢迎提问&lt;/Text&gt;&#13;&#10;        &lt;Text style={{ fontSize: 14, color: '#8B97A8' }}&gt;论文：SIGGRAPH 2026 / arXiv:2607.14481 · 代码：github.com/graphdeco-inria/i3dgs&lt;/Text&gt;&#13;&#10;    &lt;/Box&gt;&#13;&#10;&lt;/Slide&gt;&#13;&#10;"/>
+        <p:cNvPr id="148" name="" descr="&lt;Slide style={{ width: '1280px', height: '720px', backgroundColor: '#FFFFFF', padding: '0px', flexDirection: 'column' }}&gt;&#10;    &lt;Box style={{ width: '1280px', height: '8px', backgroundColor: '#1E4FA8' }} /&gt;&#10;    &lt;Box style={{ padding: '14px 40px 0px 40px', flexDirection: 'row', justifyContent: 'space-between', alignItems: 'flex-end' }}&gt;&#10;        &lt;Text style={{ fontSize: 33, fontWeight: 'bold', color: '#1E4FA8' }}&gt;重建过程：同一机位，12 个瞬间&lt;/Text&gt;&#10;        &lt;Text style={{ fontSize: 15, color: '#8B97A8' }}&gt;14 / 16&lt;/Text&gt;&#10;    &lt;/Box&gt;&#10;    &lt;Box style={{ padding: '6px 40px 0px 40px' }}&gt;&#10;        &lt;Text style={{ fontSize: 19, color: '#4A5568', lineHeight: 1.35 }}&gt;85 张照片全程 &lt;b&gt;54 秒&lt;/b&gt;；12 格的&lt;b&gt;相机位姿与内参完全固定&lt;/b&gt;，唯一的变量是“模型当时建到哪儿”。&lt;/Text&gt;&#10;    &lt;/Box&gt;&#10;&#10;    &lt;Box style={{ padding: '8px 40px 0px 40px', flexDirection: 'column', gap: 6 }}&gt;&#10;        &lt;Box style={{ flexDirection: 'row', gap: 8, justifyContent: 'center' }}&gt;&#10;            &lt;Box style={{ flexDirection: 'column', alignItems: 'center' }}&gt;&#10;                &lt;Image src=&quot;prog_fix/tiles/t01.jpg&quot; style={{ width: 164, height: 219 }} /&gt;&#10;                &lt;Text style={{ fontSize: 12.5, color: '#4A5568', marginTop: 4 }}&gt;#36 ｜ 8 关键帧&lt;/Text&gt;&#10;            &lt;/Box&gt;&#10;            &lt;Box style={{ flexDirection: 'column', alignItems: 'center' }}&gt;&#10;                &lt;Image src=&quot;prog_fix/tiles/t02.jpg&quot; style={{ width: 164, height: 219 }} /&gt;&#10;                &lt;Text style={{ fontSize: 12.5, color: '#4A5568', marginTop: 4 }}&gt;#40 ｜ 9 关键帧&lt;/Text&gt;&#10;            &lt;/Box&gt;&#10;            &lt;Box style={{ flexDirection: 'column', alignItems: 'center' }}&gt;&#10;                &lt;Image src=&quot;prog_fix/tiles/t03.jpg&quot; style={{ width: 164, height: 219 }} /&gt;&#10;                &lt;Text style={{ fontSize: 12.5, color: '#4A5568', marginTop: 4 }}&gt;#44 ｜ 11 关键帧&lt;/Text&gt;&#10;            &lt;/Box&gt;&#10;            &lt;Box style={{ flexDirection: 'column', alignItems: 'center' }}&gt;&#10;                &lt;Image src=&quot;prog_fix/tiles/t04.jpg&quot; style={{ width: 164, height: 219 }} /&gt;&#10;                &lt;Text style={{ fontSize: 12.5, color: '#4A5568', marginTop: 4 }}&gt;#48 ｜ 12 关键帧&lt;/Text&gt;&#10;            &lt;/Box&gt;&#10;            &lt;Box style={{ flexDirection: 'column', alignItems: 'center' }}&gt;&#10;                &lt;Image src=&quot;prog_fix/tiles/t05.jpg&quot; style={{ width: 164, height: 219 }} /&gt;&#10;                &lt;Text style={{ fontSize: 12.5, color: '#4A5568', marginTop: 4 }}&gt;#52 ｜ 14 关键帧&lt;/Text&gt;&#10;            &lt;/Box&gt;&#10;            &lt;Box style={{ flexDirection: 'column', alignItems: 'center' }}&gt;&#10;                &lt;Image src=&quot;prog_fix/tiles/t06.jpg&quot; style={{ width: 164, height: 219 }} /&gt;&#10;                &lt;Text style={{ fontSize: 12.5, color: '#4A5568', marginTop: 4 }}&gt;#60 ｜ 18 关键帧&lt;/Text&gt;&#10;            &lt;/Box&gt;&#10;        &lt;/Box&gt;&#10;        &lt;Box style={{ flexDirection: 'row', gap: 8, justifyContent: 'center' }}&gt;&#10;            &lt;Box style={{ flexDirection: 'column', alignItems: 'center' }}&gt;&#10;                &lt;Image src=&quot;prog_fix/tiles/t07.jpg&quot; style={{ width: 164, height: 219 }} /&gt;&#10;                &lt;Text style={{ fontSize: 12.5, color: '#4A5568', marginTop: 4 }}&gt;#64 ｜ 22 关键帧&lt;/Text&gt;&#10;            &lt;/Box&gt;&#10;            &lt;Box style={{ flexDirection: 'column', alignItems: 'center' }}&gt;&#10;                &lt;Image src=&quot;prog_fix/tiles/t08.jpg&quot; style={{ width: 164, height: 219 }} /&gt;&#10;                &lt;Text style={{ fontSize: 12.5, color: '#4A5568', marginTop: 4 }}&gt;#68 ｜ 26 关键帧&lt;/Text&gt;&#10;            &lt;/Box&gt;&#10;            &lt;Box style={{ flexDirection: 'column', alignItems: 'center' }}&gt;&#10;                &lt;Image src=&quot;prog_fix/tiles/t09.jpg&quot; style={{ width: 164, height: 219 }} /&gt;&#10;                &lt;Text style={{ fontSize: 12.5, color: '#4A5568', marginTop: 4 }}&gt;#72 ｜ 32 关键帧&lt;/Text&gt;&#10;            &lt;/Box&gt;&#10;            &lt;Box style={{ flexDirection: 'column', alignItems: 'center' }}&gt;&#10;                &lt;Image src=&quot;prog_fix/tiles/t10.jpg&quot; style={{ width: 164, height: 219 }} /&gt;&#10;                &lt;Text style={{ fontSize: 12.5, color: '#4A5568', marginTop: 4 }}&gt;#76 ｜ 34 关键帧&lt;/Text&gt;&#10;            &lt;/Box&gt;&#10;            &lt;Box style={{ flexDirection: 'column', alignItems: 'center' }}&gt;&#10;                &lt;Image src=&quot;prog_fix/tiles/t11.jpg&quot; style={{ width: 164, height: 219 }} /&gt;&#10;                &lt;Text style={{ fontSize: 12.5, color: '#4A5568', marginTop: 4 }}&gt;#80 ｜ 35 关键帧&lt;/Text&gt;&#10;            &lt;/Box&gt;&#10;            &lt;Box style={{ flexDirection: 'column', alignItems: 'center' }}&gt;&#10;                &lt;Image src=&quot;prog_fix/tiles/t12.jpg&quot; style={{ width: 164, height: 219, border: '2px solid #1E4FA8' }} /&gt;&#10;                &lt;Text style={{ fontSize: 12.5, color: '#1E4FA8', fontWeight: 'bold', marginTop: 4 }}&gt;#84 ｜ 81 关键帧&lt;/Text&gt;&#10;            &lt;/Box&gt;&#10;        &lt;/Box&gt;&#10;    &lt;/Box&gt;&#10;&#10;    &lt;Box style={{ marginTop: 'auto', padding: '8px 40px 12px 40px', flexDirection: 'column', gap: 5 }}&gt;&#10;        &lt;Box style={{ backgroundColor: '#F0F5FC', borderLeft: '5px solid #1E4FA8', padding: '9px 14px' }}&gt;&#10;            &lt;Text style={{ fontSize: 17.5, color: '#1A2230', lineHeight: 1.4 }}&gt;第 36 张进来时只有 &lt;b&gt;8 个关键帧&lt;/b&gt;，画面还是一团噪点——但&lt;b&gt;哪块没拍到已经看得出来&lt;/b&gt;，这正是 immediate 的用处；第 60 张跨过 18 个关键帧后陡然清晰，第 84 张 &lt;b&gt;81 个关键帧&lt;/b&gt;、噪点收净。&lt;/Text&gt;&#10;        &lt;/Box&gt;&#10;        &lt;Text style={{ fontSize: 12.5, color: '#8B97A8', lineHeight: 1.4 }}&gt;&lt;b&gt;每一格都是那一帧处理完立刻渲染的，不用等全部拍完。&lt;/b&gt;快照由官方 --save_every 4 落盘，这轮为写盘牺牲了速度（342 s）；纯净运行 85 张 54.1 s、单帧 668 ms；前 28 帧尚无高斯，首个快照取第 36 帧。&lt;/Text&gt;&#10;    &lt;/Box&gt;&#10;&lt;/Slide&gt;&#10;"/>
         <p:cNvGrpSpPr/>
         <p:nvPr/>
       </p:nvGrpSpPr>
@@ -7414,6 +7415,1895 @@
         </p:nvSpPr>
         <p:spPr>
           <a:xfrm rot="0" flipH="0" flipV="0">
+            <a:off x="381000" y="209550"/>
+            <a:ext cx="4572000" cy="381000"/>
+          </a:xfrm>
+          <a:prstGeom prst="rect"/>
+        </p:spPr>
+        <p:txBody>
+          <a:bodyPr wrap="none" lIns="0" tIns="0" rIns="0" bIns="0"/>
+          <a:p>
+            <a:pPr>
+              <a:lnSpc>
+                <a:spcPct val="100000"/>
+              </a:lnSpc>
+            </a:pPr>
+            <a:r>
+              <a:rPr lang="zh-CN" sz="2475" b="1">
+                <a:solidFill>
+                  <a:srgbClr val="1E4FA8"/>
+                </a:solidFill>
+                <a:latin typeface="Microsoft YaHei"/>
+                <a:ea typeface="Microsoft YaHei"/>
+              </a:rPr>
+              <a:t>重建过程：同一机位，</a:t>
+            </a:r>
+            <a:r>
+              <a:rPr lang="en-US" sz="2475" b="1">
+                <a:solidFill>
+                  <a:srgbClr val="1E4FA8"/>
+                </a:solidFill>
+                <a:latin typeface="Microsoft YaHei"/>
+                <a:ea typeface="Microsoft YaHei"/>
+              </a:rPr>
+              <a:t xml:space="preserve">12 </a:t>
+            </a:r>
+            <a:r>
+              <a:rPr lang="zh-CN" sz="2475" b="1">
+                <a:solidFill>
+                  <a:srgbClr val="1E4FA8"/>
+                </a:solidFill>
+                <a:latin typeface="Microsoft YaHei"/>
+                <a:ea typeface="Microsoft YaHei"/>
+              </a:rPr>
+              <a:t>个瞬间</a:t>
+            </a:r>
+            <a:endParaRPr/>
+          </a:p>
+        </p:txBody>
+      </p:sp>
+      <p:sp>
+        <p:nvSpPr>
+          <p:cNvPr id="152" name="" descr="{&quot;isTemplate&quot;:true,&quot;type&quot;:&quot;text&quot;}"/>
+          <p:cNvSpPr txBox="1"/>
+          <p:nvPr/>
+        </p:nvSpPr>
+        <p:spPr>
+          <a:xfrm rot="0" flipH="0" flipV="0">
+            <a:off x="11325225" y="419100"/>
+            <a:ext cx="485775" cy="171450"/>
+          </a:xfrm>
+          <a:prstGeom prst="rect"/>
+        </p:spPr>
+        <p:txBody>
+          <a:bodyPr wrap="none" lIns="0" tIns="0" rIns="0" bIns="0"/>
+          <a:p>
+            <a:pPr>
+              <a:lnSpc>
+                <a:spcPct val="100000"/>
+              </a:lnSpc>
+            </a:pPr>
+            <a:r>
+              <a:rPr lang="en-US" sz="1125">
+                <a:solidFill>
+                  <a:srgbClr val="8B97A8"/>
+                </a:solidFill>
+                <a:latin typeface="Microsoft YaHei"/>
+                <a:ea typeface="Microsoft YaHei"/>
+              </a:rPr>
+              <a:t>14 / 16</a:t>
+            </a:r>
+            <a:endParaRPr/>
+          </a:p>
+        </p:txBody>
+      </p:sp>
+      <p:sp>
+        <p:nvSpPr>
+          <p:cNvPr id="153" name="" descr="{&quot;isTemplate&quot;:true,&quot;type&quot;:&quot;text&quot;}"/>
+          <p:cNvSpPr txBox="1"/>
+          <p:nvPr/>
+        </p:nvSpPr>
+        <p:spPr>
+          <a:xfrm rot="0" flipH="0" flipV="0">
+            <a:off x="381000" y="647700"/>
+            <a:ext cx="11430000" cy="295275"/>
+          </a:xfrm>
+          <a:prstGeom prst="rect"/>
+        </p:spPr>
+        <p:txBody>
+          <a:bodyPr wrap="none" lIns="0" tIns="0" rIns="0" bIns="0"/>
+          <a:p>
+            <a:pPr>
+              <a:lnSpc>
+                <a:spcPct val="135000"/>
+              </a:lnSpc>
+            </a:pPr>
+            <a:r>
+              <a:rPr lang="en-US" sz="1425">
+                <a:solidFill>
+                  <a:srgbClr val="4A5568"/>
+                </a:solidFill>
+                <a:latin typeface="Microsoft YaHei"/>
+                <a:ea typeface="Microsoft YaHei"/>
+              </a:rPr>
+              <a:t xml:space="preserve">85 </a:t>
+            </a:r>
+            <a:r>
+              <a:rPr lang="zh-CN" sz="1425">
+                <a:solidFill>
+                  <a:srgbClr val="4A5568"/>
+                </a:solidFill>
+                <a:latin typeface="Microsoft YaHei"/>
+                <a:ea typeface="Microsoft YaHei"/>
+              </a:rPr>
+              <a:t>张照片全程</a:t>
+            </a:r>
+            <a:r>
+              <a:rPr lang="en-US" sz="1425">
+                <a:solidFill>
+                  <a:srgbClr val="4A5568"/>
+                </a:solidFill>
+                <a:latin typeface="Microsoft YaHei"/>
+                <a:ea typeface="Microsoft YaHei"/>
+              </a:rPr>
+              <a:t xml:space="preserve"> </a:t>
+            </a:r>
+            <a:r>
+              <a:rPr lang="en-US" sz="1425">
+                <a:solidFill>
+                  <a:srgbClr val="4A5568"/>
+                </a:solidFill>
+                <a:latin typeface="Microsoft YaHei"/>
+                <a:ea typeface="Microsoft YaHei"/>
+              </a:rPr>
+              <a:t xml:space="preserve">54 </a:t>
+            </a:r>
+            <a:r>
+              <a:rPr lang="zh-CN" sz="1425">
+                <a:solidFill>
+                  <a:srgbClr val="4A5568"/>
+                </a:solidFill>
+                <a:latin typeface="Microsoft YaHei"/>
+                <a:ea typeface="Microsoft YaHei"/>
+              </a:rPr>
+              <a:t>秒</a:t>
+            </a:r>
+            <a:r>
+              <a:rPr lang="zh-CN" sz="1425">
+                <a:solidFill>
+                  <a:srgbClr val="4A5568"/>
+                </a:solidFill>
+                <a:latin typeface="Microsoft YaHei"/>
+                <a:ea typeface="Microsoft YaHei"/>
+              </a:rPr>
+              <a:t>；</a:t>
+            </a:r>
+            <a:r>
+              <a:rPr lang="en-US" sz="1425">
+                <a:solidFill>
+                  <a:srgbClr val="4A5568"/>
+                </a:solidFill>
+                <a:latin typeface="Microsoft YaHei"/>
+                <a:ea typeface="Microsoft YaHei"/>
+              </a:rPr>
+              <a:t xml:space="preserve">12 </a:t>
+            </a:r>
+            <a:r>
+              <a:rPr lang="zh-CN" sz="1425">
+                <a:solidFill>
+                  <a:srgbClr val="4A5568"/>
+                </a:solidFill>
+                <a:latin typeface="Microsoft YaHei"/>
+                <a:ea typeface="Microsoft YaHei"/>
+              </a:rPr>
+              <a:t>格的</a:t>
+            </a:r>
+            <a:r>
+              <a:rPr lang="zh-CN" sz="1425">
+                <a:solidFill>
+                  <a:srgbClr val="4A5568"/>
+                </a:solidFill>
+                <a:latin typeface="Microsoft YaHei"/>
+                <a:ea typeface="Microsoft YaHei"/>
+              </a:rPr>
+              <a:t>相机位姿与内参完全固定</a:t>
+            </a:r>
+            <a:r>
+              <a:rPr lang="zh-CN" sz="1425">
+                <a:solidFill>
+                  <a:srgbClr val="4A5568"/>
+                </a:solidFill>
+                <a:latin typeface="Microsoft YaHei"/>
+                <a:ea typeface="Microsoft YaHei"/>
+              </a:rPr>
+              <a:t>，唯一的变量是“模型当时建到哪儿”。</a:t>
+            </a:r>
+            <a:endParaRPr/>
+          </a:p>
+        </p:txBody>
+      </p:sp>
+      <p:pic>
+        <p:nvPicPr>
+          <p:cNvPr id="154" name=""/>
+          <p:cNvPicPr>
+            <a:picLocks noChangeAspect="1"/>
+          </p:cNvPicPr>
+          <p:nvPr/>
+        </p:nvPicPr>
+        <p:blipFill>
+          <a:blip r:embed="rId1"/>
+          <a:srcRect l="76" t="0" r="76" b="0"/>
+          <a:stretch>
+            <a:fillRect/>
+          </a:stretch>
+        </p:blipFill>
+        <p:spPr>
+          <a:xfrm rot="0" flipH="0" flipV="0">
+            <a:off x="1219200" y="1019175"/>
+            <a:ext cx="1562100" cy="2085975"/>
+          </a:xfrm>
+          <a:prstGeom prst="rect">
+            <a:avLst/>
+          </a:prstGeom>
+          <a:ln/>
+        </p:spPr>
+      </p:pic>
+      <p:sp>
+        <p:nvSpPr>
+          <p:cNvPr id="155" name="" descr="{&quot;isTemplate&quot;:true,&quot;type&quot;:&quot;text&quot;}"/>
+          <p:cNvSpPr txBox="1"/>
+          <p:nvPr/>
+        </p:nvSpPr>
+        <p:spPr>
+          <a:xfrm rot="0" flipH="0" flipV="0">
+            <a:off x="1562100" y="3143250"/>
+            <a:ext cx="876300" cy="142875"/>
+          </a:xfrm>
+          <a:prstGeom prst="rect"/>
+        </p:spPr>
+        <p:txBody>
+          <a:bodyPr wrap="none" lIns="0" tIns="0" rIns="0" bIns="0"/>
+          <a:p>
+            <a:pPr>
+              <a:lnSpc>
+                <a:spcPct val="100000"/>
+              </a:lnSpc>
+            </a:pPr>
+            <a:r>
+              <a:rPr lang="en-US" sz="938">
+                <a:solidFill>
+                  <a:srgbClr val="4A5568"/>
+                </a:solidFill>
+                <a:latin typeface="Microsoft YaHei"/>
+                <a:ea typeface="Microsoft YaHei"/>
+              </a:rPr>
+              <a:t xml:space="preserve">#36 </a:t>
+            </a:r>
+            <a:r>
+              <a:rPr lang="zh-CN" sz="938">
+                <a:solidFill>
+                  <a:srgbClr val="4A5568"/>
+                </a:solidFill>
+                <a:latin typeface="Microsoft YaHei"/>
+                <a:ea typeface="Microsoft YaHei"/>
+              </a:rPr>
+              <a:t>｜</a:t>
+            </a:r>
+            <a:r>
+              <a:rPr lang="en-US" sz="938">
+                <a:solidFill>
+                  <a:srgbClr val="4A5568"/>
+                </a:solidFill>
+                <a:latin typeface="Microsoft YaHei"/>
+                <a:ea typeface="Microsoft YaHei"/>
+              </a:rPr>
+              <a:t xml:space="preserve"> 8 </a:t>
+            </a:r>
+            <a:r>
+              <a:rPr lang="zh-CN" sz="938">
+                <a:solidFill>
+                  <a:srgbClr val="4A5568"/>
+                </a:solidFill>
+                <a:latin typeface="Microsoft YaHei"/>
+                <a:ea typeface="Microsoft YaHei"/>
+              </a:rPr>
+              <a:t>关键帧</a:t>
+            </a:r>
+            <a:endParaRPr/>
+          </a:p>
+        </p:txBody>
+      </p:sp>
+      <p:pic>
+        <p:nvPicPr>
+          <p:cNvPr id="156" name=""/>
+          <p:cNvPicPr>
+            <a:picLocks noChangeAspect="1"/>
+          </p:cNvPicPr>
+          <p:nvPr/>
+        </p:nvPicPr>
+        <p:blipFill>
+          <a:blip r:embed="rId2"/>
+          <a:srcRect l="76" t="0" r="76" b="0"/>
+          <a:stretch>
+            <a:fillRect/>
+          </a:stretch>
+        </p:blipFill>
+        <p:spPr>
+          <a:xfrm rot="0" flipH="0" flipV="0">
+            <a:off x="2857500" y="1019175"/>
+            <a:ext cx="1562100" cy="2085975"/>
+          </a:xfrm>
+          <a:prstGeom prst="rect">
+            <a:avLst/>
+          </a:prstGeom>
+          <a:ln/>
+        </p:spPr>
+      </p:pic>
+      <p:sp>
+        <p:nvSpPr>
+          <p:cNvPr id="157" name="" descr="{&quot;isTemplate&quot;:true,&quot;type&quot;:&quot;text&quot;}"/>
+          <p:cNvSpPr txBox="1"/>
+          <p:nvPr/>
+        </p:nvSpPr>
+        <p:spPr>
+          <a:xfrm rot="0" flipH="0" flipV="0">
+            <a:off x="3200400" y="3143250"/>
+            <a:ext cx="876300" cy="142875"/>
+          </a:xfrm>
+          <a:prstGeom prst="rect"/>
+        </p:spPr>
+        <p:txBody>
+          <a:bodyPr wrap="none" lIns="0" tIns="0" rIns="0" bIns="0"/>
+          <a:p>
+            <a:pPr>
+              <a:lnSpc>
+                <a:spcPct val="100000"/>
+              </a:lnSpc>
+            </a:pPr>
+            <a:r>
+              <a:rPr lang="en-US" sz="938">
+                <a:solidFill>
+                  <a:srgbClr val="4A5568"/>
+                </a:solidFill>
+                <a:latin typeface="Microsoft YaHei"/>
+                <a:ea typeface="Microsoft YaHei"/>
+              </a:rPr>
+              <a:t xml:space="preserve">#40 </a:t>
+            </a:r>
+            <a:r>
+              <a:rPr lang="zh-CN" sz="938">
+                <a:solidFill>
+                  <a:srgbClr val="4A5568"/>
+                </a:solidFill>
+                <a:latin typeface="Microsoft YaHei"/>
+                <a:ea typeface="Microsoft YaHei"/>
+              </a:rPr>
+              <a:t>｜</a:t>
+            </a:r>
+            <a:r>
+              <a:rPr lang="en-US" sz="938">
+                <a:solidFill>
+                  <a:srgbClr val="4A5568"/>
+                </a:solidFill>
+                <a:latin typeface="Microsoft YaHei"/>
+                <a:ea typeface="Microsoft YaHei"/>
+              </a:rPr>
+              <a:t xml:space="preserve"> 9 </a:t>
+            </a:r>
+            <a:r>
+              <a:rPr lang="zh-CN" sz="938">
+                <a:solidFill>
+                  <a:srgbClr val="4A5568"/>
+                </a:solidFill>
+                <a:latin typeface="Microsoft YaHei"/>
+                <a:ea typeface="Microsoft YaHei"/>
+              </a:rPr>
+              <a:t>关键帧</a:t>
+            </a:r>
+            <a:endParaRPr/>
+          </a:p>
+        </p:txBody>
+      </p:sp>
+      <p:pic>
+        <p:nvPicPr>
+          <p:cNvPr id="158" name=""/>
+          <p:cNvPicPr>
+            <a:picLocks noChangeAspect="1"/>
+          </p:cNvPicPr>
+          <p:nvPr/>
+        </p:nvPicPr>
+        <p:blipFill>
+          <a:blip r:embed="rId3"/>
+          <a:srcRect l="76" t="0" r="76" b="0"/>
+          <a:stretch>
+            <a:fillRect/>
+          </a:stretch>
+        </p:blipFill>
+        <p:spPr>
+          <a:xfrm rot="0" flipH="0" flipV="0">
+            <a:off x="4495800" y="1019175"/>
+            <a:ext cx="1562100" cy="2085975"/>
+          </a:xfrm>
+          <a:prstGeom prst="rect">
+            <a:avLst/>
+          </a:prstGeom>
+          <a:ln/>
+        </p:spPr>
+      </p:pic>
+      <p:sp>
+        <p:nvSpPr>
+          <p:cNvPr id="159" name="" descr="{&quot;isTemplate&quot;:true,&quot;type&quot;:&quot;text&quot;}"/>
+          <p:cNvSpPr txBox="1"/>
+          <p:nvPr/>
+        </p:nvSpPr>
+        <p:spPr>
+          <a:xfrm rot="0" flipH="0" flipV="0">
+            <a:off x="4810125" y="3143250"/>
+            <a:ext cx="942975" cy="142875"/>
+          </a:xfrm>
+          <a:prstGeom prst="rect"/>
+        </p:spPr>
+        <p:txBody>
+          <a:bodyPr wrap="none" lIns="0" tIns="0" rIns="0" bIns="0"/>
+          <a:p>
+            <a:pPr>
+              <a:lnSpc>
+                <a:spcPct val="100000"/>
+              </a:lnSpc>
+            </a:pPr>
+            <a:r>
+              <a:rPr lang="en-US" sz="938">
+                <a:solidFill>
+                  <a:srgbClr val="4A5568"/>
+                </a:solidFill>
+                <a:latin typeface="Microsoft YaHei"/>
+                <a:ea typeface="Microsoft YaHei"/>
+              </a:rPr>
+              <a:t xml:space="preserve">#44 </a:t>
+            </a:r>
+            <a:r>
+              <a:rPr lang="zh-CN" sz="938">
+                <a:solidFill>
+                  <a:srgbClr val="4A5568"/>
+                </a:solidFill>
+                <a:latin typeface="Microsoft YaHei"/>
+                <a:ea typeface="Microsoft YaHei"/>
+              </a:rPr>
+              <a:t>｜</a:t>
+            </a:r>
+            <a:r>
+              <a:rPr lang="en-US" sz="938">
+                <a:solidFill>
+                  <a:srgbClr val="4A5568"/>
+                </a:solidFill>
+                <a:latin typeface="Microsoft YaHei"/>
+                <a:ea typeface="Microsoft YaHei"/>
+              </a:rPr>
+              <a:t xml:space="preserve"> 11 </a:t>
+            </a:r>
+            <a:r>
+              <a:rPr lang="zh-CN" sz="938">
+                <a:solidFill>
+                  <a:srgbClr val="4A5568"/>
+                </a:solidFill>
+                <a:latin typeface="Microsoft YaHei"/>
+                <a:ea typeface="Microsoft YaHei"/>
+              </a:rPr>
+              <a:t>关键帧</a:t>
+            </a:r>
+            <a:endParaRPr/>
+          </a:p>
+        </p:txBody>
+      </p:sp>
+      <p:pic>
+        <p:nvPicPr>
+          <p:cNvPr id="160" name=""/>
+          <p:cNvPicPr>
+            <a:picLocks noChangeAspect="1"/>
+          </p:cNvPicPr>
+          <p:nvPr/>
+        </p:nvPicPr>
+        <p:blipFill>
+          <a:blip r:embed="rId4"/>
+          <a:srcRect l="76" t="0" r="76" b="0"/>
+          <a:stretch>
+            <a:fillRect/>
+          </a:stretch>
+        </p:blipFill>
+        <p:spPr>
+          <a:xfrm rot="0" flipH="0" flipV="0">
+            <a:off x="6134100" y="1019175"/>
+            <a:ext cx="1562100" cy="2085975"/>
+          </a:xfrm>
+          <a:prstGeom prst="rect">
+            <a:avLst/>
+          </a:prstGeom>
+          <a:ln/>
+        </p:spPr>
+      </p:pic>
+      <p:sp>
+        <p:nvSpPr>
+          <p:cNvPr id="161" name="" descr="{&quot;isTemplate&quot;:true,&quot;type&quot;:&quot;text&quot;}"/>
+          <p:cNvSpPr txBox="1"/>
+          <p:nvPr/>
+        </p:nvSpPr>
+        <p:spPr>
+          <a:xfrm rot="0" flipH="0" flipV="0">
+            <a:off x="6448425" y="3143250"/>
+            <a:ext cx="942975" cy="142875"/>
+          </a:xfrm>
+          <a:prstGeom prst="rect"/>
+        </p:spPr>
+        <p:txBody>
+          <a:bodyPr wrap="none" lIns="0" tIns="0" rIns="0" bIns="0"/>
+          <a:p>
+            <a:pPr>
+              <a:lnSpc>
+                <a:spcPct val="100000"/>
+              </a:lnSpc>
+            </a:pPr>
+            <a:r>
+              <a:rPr lang="en-US" sz="938">
+                <a:solidFill>
+                  <a:srgbClr val="4A5568"/>
+                </a:solidFill>
+                <a:latin typeface="Microsoft YaHei"/>
+                <a:ea typeface="Microsoft YaHei"/>
+              </a:rPr>
+              <a:t xml:space="preserve">#48 </a:t>
+            </a:r>
+            <a:r>
+              <a:rPr lang="zh-CN" sz="938">
+                <a:solidFill>
+                  <a:srgbClr val="4A5568"/>
+                </a:solidFill>
+                <a:latin typeface="Microsoft YaHei"/>
+                <a:ea typeface="Microsoft YaHei"/>
+              </a:rPr>
+              <a:t>｜</a:t>
+            </a:r>
+            <a:r>
+              <a:rPr lang="en-US" sz="938">
+                <a:solidFill>
+                  <a:srgbClr val="4A5568"/>
+                </a:solidFill>
+                <a:latin typeface="Microsoft YaHei"/>
+                <a:ea typeface="Microsoft YaHei"/>
+              </a:rPr>
+              <a:t xml:space="preserve"> 12 </a:t>
+            </a:r>
+            <a:r>
+              <a:rPr lang="zh-CN" sz="938">
+                <a:solidFill>
+                  <a:srgbClr val="4A5568"/>
+                </a:solidFill>
+                <a:latin typeface="Microsoft YaHei"/>
+                <a:ea typeface="Microsoft YaHei"/>
+              </a:rPr>
+              <a:t>关键帧</a:t>
+            </a:r>
+            <a:endParaRPr/>
+          </a:p>
+        </p:txBody>
+      </p:sp>
+      <p:pic>
+        <p:nvPicPr>
+          <p:cNvPr id="162" name=""/>
+          <p:cNvPicPr>
+            <a:picLocks noChangeAspect="1"/>
+          </p:cNvPicPr>
+          <p:nvPr/>
+        </p:nvPicPr>
+        <p:blipFill>
+          <a:blip r:embed="rId5"/>
+          <a:srcRect l="76" t="0" r="76" b="0"/>
+          <a:stretch>
+            <a:fillRect/>
+          </a:stretch>
+        </p:blipFill>
+        <p:spPr>
+          <a:xfrm rot="0" flipH="0" flipV="0">
+            <a:off x="7772400" y="1019175"/>
+            <a:ext cx="1562100" cy="2085975"/>
+          </a:xfrm>
+          <a:prstGeom prst="rect">
+            <a:avLst/>
+          </a:prstGeom>
+          <a:ln/>
+        </p:spPr>
+      </p:pic>
+      <p:sp>
+        <p:nvSpPr>
+          <p:cNvPr id="163" name="" descr="{&quot;isTemplate&quot;:true,&quot;type&quot;:&quot;text&quot;}"/>
+          <p:cNvSpPr txBox="1"/>
+          <p:nvPr/>
+        </p:nvSpPr>
+        <p:spPr>
+          <a:xfrm rot="0" flipH="0" flipV="0">
+            <a:off x="8086725" y="3143250"/>
+            <a:ext cx="942975" cy="142875"/>
+          </a:xfrm>
+          <a:prstGeom prst="rect"/>
+        </p:spPr>
+        <p:txBody>
+          <a:bodyPr wrap="none" lIns="0" tIns="0" rIns="0" bIns="0"/>
+          <a:p>
+            <a:pPr>
+              <a:lnSpc>
+                <a:spcPct val="100000"/>
+              </a:lnSpc>
+            </a:pPr>
+            <a:r>
+              <a:rPr lang="en-US" sz="938">
+                <a:solidFill>
+                  <a:srgbClr val="4A5568"/>
+                </a:solidFill>
+                <a:latin typeface="Microsoft YaHei"/>
+                <a:ea typeface="Microsoft YaHei"/>
+              </a:rPr>
+              <a:t xml:space="preserve">#52 </a:t>
+            </a:r>
+            <a:r>
+              <a:rPr lang="zh-CN" sz="938">
+                <a:solidFill>
+                  <a:srgbClr val="4A5568"/>
+                </a:solidFill>
+                <a:latin typeface="Microsoft YaHei"/>
+                <a:ea typeface="Microsoft YaHei"/>
+              </a:rPr>
+              <a:t>｜</a:t>
+            </a:r>
+            <a:r>
+              <a:rPr lang="en-US" sz="938">
+                <a:solidFill>
+                  <a:srgbClr val="4A5568"/>
+                </a:solidFill>
+                <a:latin typeface="Microsoft YaHei"/>
+                <a:ea typeface="Microsoft YaHei"/>
+              </a:rPr>
+              <a:t xml:space="preserve"> 14 </a:t>
+            </a:r>
+            <a:r>
+              <a:rPr lang="zh-CN" sz="938">
+                <a:solidFill>
+                  <a:srgbClr val="4A5568"/>
+                </a:solidFill>
+                <a:latin typeface="Microsoft YaHei"/>
+                <a:ea typeface="Microsoft YaHei"/>
+              </a:rPr>
+              <a:t>关键帧</a:t>
+            </a:r>
+            <a:endParaRPr/>
+          </a:p>
+        </p:txBody>
+      </p:sp>
+      <p:pic>
+        <p:nvPicPr>
+          <p:cNvPr id="164" name=""/>
+          <p:cNvPicPr>
+            <a:picLocks noChangeAspect="1"/>
+          </p:cNvPicPr>
+          <p:nvPr/>
+        </p:nvPicPr>
+        <p:blipFill>
+          <a:blip r:embed="rId6"/>
+          <a:srcRect l="76" t="0" r="76" b="0"/>
+          <a:stretch>
+            <a:fillRect/>
+          </a:stretch>
+        </p:blipFill>
+        <p:spPr>
+          <a:xfrm rot="0" flipH="0" flipV="0">
+            <a:off x="9410700" y="1019175"/>
+            <a:ext cx="1562100" cy="2085975"/>
+          </a:xfrm>
+          <a:prstGeom prst="rect">
+            <a:avLst/>
+          </a:prstGeom>
+          <a:ln/>
+        </p:spPr>
+      </p:pic>
+      <p:sp>
+        <p:nvSpPr>
+          <p:cNvPr id="165" name="" descr="{&quot;isTemplate&quot;:true,&quot;type&quot;:&quot;text&quot;}"/>
+          <p:cNvSpPr txBox="1"/>
+          <p:nvPr/>
+        </p:nvSpPr>
+        <p:spPr>
+          <a:xfrm rot="0" flipH="0" flipV="0">
+            <a:off x="9725025" y="3143250"/>
+            <a:ext cx="942975" cy="142875"/>
+          </a:xfrm>
+          <a:prstGeom prst="rect"/>
+        </p:spPr>
+        <p:txBody>
+          <a:bodyPr wrap="none" lIns="0" tIns="0" rIns="0" bIns="0"/>
+          <a:p>
+            <a:pPr>
+              <a:lnSpc>
+                <a:spcPct val="100000"/>
+              </a:lnSpc>
+            </a:pPr>
+            <a:r>
+              <a:rPr lang="en-US" sz="938">
+                <a:solidFill>
+                  <a:srgbClr val="4A5568"/>
+                </a:solidFill>
+                <a:latin typeface="Microsoft YaHei"/>
+                <a:ea typeface="Microsoft YaHei"/>
+              </a:rPr>
+              <a:t xml:space="preserve">#60 </a:t>
+            </a:r>
+            <a:r>
+              <a:rPr lang="zh-CN" sz="938">
+                <a:solidFill>
+                  <a:srgbClr val="4A5568"/>
+                </a:solidFill>
+                <a:latin typeface="Microsoft YaHei"/>
+                <a:ea typeface="Microsoft YaHei"/>
+              </a:rPr>
+              <a:t>｜</a:t>
+            </a:r>
+            <a:r>
+              <a:rPr lang="en-US" sz="938">
+                <a:solidFill>
+                  <a:srgbClr val="4A5568"/>
+                </a:solidFill>
+                <a:latin typeface="Microsoft YaHei"/>
+                <a:ea typeface="Microsoft YaHei"/>
+              </a:rPr>
+              <a:t xml:space="preserve"> 18 </a:t>
+            </a:r>
+            <a:r>
+              <a:rPr lang="zh-CN" sz="938">
+                <a:solidFill>
+                  <a:srgbClr val="4A5568"/>
+                </a:solidFill>
+                <a:latin typeface="Microsoft YaHei"/>
+                <a:ea typeface="Microsoft YaHei"/>
+              </a:rPr>
+              <a:t>关键帧</a:t>
+            </a:r>
+            <a:endParaRPr/>
+          </a:p>
+        </p:txBody>
+      </p:sp>
+      <p:pic>
+        <p:nvPicPr>
+          <p:cNvPr id="166" name=""/>
+          <p:cNvPicPr>
+            <a:picLocks noChangeAspect="1"/>
+          </p:cNvPicPr>
+          <p:nvPr/>
+        </p:nvPicPr>
+        <p:blipFill>
+          <a:blip r:embed="rId7"/>
+          <a:srcRect l="76" t="0" r="76" b="0"/>
+          <a:stretch>
+            <a:fillRect/>
+          </a:stretch>
+        </p:blipFill>
+        <p:spPr>
+          <a:xfrm rot="0" flipH="0" flipV="0">
+            <a:off x="1219200" y="3343275"/>
+            <a:ext cx="1562100" cy="2085975"/>
+          </a:xfrm>
+          <a:prstGeom prst="rect">
+            <a:avLst/>
+          </a:prstGeom>
+          <a:ln/>
+        </p:spPr>
+      </p:pic>
+      <p:sp>
+        <p:nvSpPr>
+          <p:cNvPr id="167" name="" descr="{&quot;isTemplate&quot;:true,&quot;type&quot;:&quot;text&quot;}"/>
+          <p:cNvSpPr txBox="1"/>
+          <p:nvPr/>
+        </p:nvSpPr>
+        <p:spPr>
+          <a:xfrm rot="0" flipH="0" flipV="0">
+            <a:off x="1533525" y="5467350"/>
+            <a:ext cx="942975" cy="142875"/>
+          </a:xfrm>
+          <a:prstGeom prst="rect"/>
+        </p:spPr>
+        <p:txBody>
+          <a:bodyPr wrap="none" lIns="0" tIns="0" rIns="0" bIns="0"/>
+          <a:p>
+            <a:pPr>
+              <a:lnSpc>
+                <a:spcPct val="100000"/>
+              </a:lnSpc>
+            </a:pPr>
+            <a:r>
+              <a:rPr lang="en-US" sz="938">
+                <a:solidFill>
+                  <a:srgbClr val="4A5568"/>
+                </a:solidFill>
+                <a:latin typeface="Microsoft YaHei"/>
+                <a:ea typeface="Microsoft YaHei"/>
+              </a:rPr>
+              <a:t xml:space="preserve">#64 </a:t>
+            </a:r>
+            <a:r>
+              <a:rPr lang="zh-CN" sz="938">
+                <a:solidFill>
+                  <a:srgbClr val="4A5568"/>
+                </a:solidFill>
+                <a:latin typeface="Microsoft YaHei"/>
+                <a:ea typeface="Microsoft YaHei"/>
+              </a:rPr>
+              <a:t>｜</a:t>
+            </a:r>
+            <a:r>
+              <a:rPr lang="en-US" sz="938">
+                <a:solidFill>
+                  <a:srgbClr val="4A5568"/>
+                </a:solidFill>
+                <a:latin typeface="Microsoft YaHei"/>
+                <a:ea typeface="Microsoft YaHei"/>
+              </a:rPr>
+              <a:t xml:space="preserve"> 22 </a:t>
+            </a:r>
+            <a:r>
+              <a:rPr lang="zh-CN" sz="938">
+                <a:solidFill>
+                  <a:srgbClr val="4A5568"/>
+                </a:solidFill>
+                <a:latin typeface="Microsoft YaHei"/>
+                <a:ea typeface="Microsoft YaHei"/>
+              </a:rPr>
+              <a:t>关键帧</a:t>
+            </a:r>
+            <a:endParaRPr/>
+          </a:p>
+        </p:txBody>
+      </p:sp>
+      <p:pic>
+        <p:nvPicPr>
+          <p:cNvPr id="168" name=""/>
+          <p:cNvPicPr>
+            <a:picLocks noChangeAspect="1"/>
+          </p:cNvPicPr>
+          <p:nvPr/>
+        </p:nvPicPr>
+        <p:blipFill>
+          <a:blip r:embed="rId8"/>
+          <a:srcRect l="76" t="0" r="76" b="0"/>
+          <a:stretch>
+            <a:fillRect/>
+          </a:stretch>
+        </p:blipFill>
+        <p:spPr>
+          <a:xfrm rot="0" flipH="0" flipV="0">
+            <a:off x="2857500" y="3343275"/>
+            <a:ext cx="1562100" cy="2085975"/>
+          </a:xfrm>
+          <a:prstGeom prst="rect">
+            <a:avLst/>
+          </a:prstGeom>
+          <a:ln/>
+        </p:spPr>
+      </p:pic>
+      <p:sp>
+        <p:nvSpPr>
+          <p:cNvPr id="169" name="" descr="{&quot;isTemplate&quot;:true,&quot;type&quot;:&quot;text&quot;}"/>
+          <p:cNvSpPr txBox="1"/>
+          <p:nvPr/>
+        </p:nvSpPr>
+        <p:spPr>
+          <a:xfrm rot="0" flipH="0" flipV="0">
+            <a:off x="3171825" y="5467350"/>
+            <a:ext cx="942975" cy="142875"/>
+          </a:xfrm>
+          <a:prstGeom prst="rect"/>
+        </p:spPr>
+        <p:txBody>
+          <a:bodyPr wrap="none" lIns="0" tIns="0" rIns="0" bIns="0"/>
+          <a:p>
+            <a:pPr>
+              <a:lnSpc>
+                <a:spcPct val="100000"/>
+              </a:lnSpc>
+            </a:pPr>
+            <a:r>
+              <a:rPr lang="en-US" sz="938">
+                <a:solidFill>
+                  <a:srgbClr val="4A5568"/>
+                </a:solidFill>
+                <a:latin typeface="Microsoft YaHei"/>
+                <a:ea typeface="Microsoft YaHei"/>
+              </a:rPr>
+              <a:t xml:space="preserve">#68 </a:t>
+            </a:r>
+            <a:r>
+              <a:rPr lang="zh-CN" sz="938">
+                <a:solidFill>
+                  <a:srgbClr val="4A5568"/>
+                </a:solidFill>
+                <a:latin typeface="Microsoft YaHei"/>
+                <a:ea typeface="Microsoft YaHei"/>
+              </a:rPr>
+              <a:t>｜</a:t>
+            </a:r>
+            <a:r>
+              <a:rPr lang="en-US" sz="938">
+                <a:solidFill>
+                  <a:srgbClr val="4A5568"/>
+                </a:solidFill>
+                <a:latin typeface="Microsoft YaHei"/>
+                <a:ea typeface="Microsoft YaHei"/>
+              </a:rPr>
+              <a:t xml:space="preserve"> 26 </a:t>
+            </a:r>
+            <a:r>
+              <a:rPr lang="zh-CN" sz="938">
+                <a:solidFill>
+                  <a:srgbClr val="4A5568"/>
+                </a:solidFill>
+                <a:latin typeface="Microsoft YaHei"/>
+                <a:ea typeface="Microsoft YaHei"/>
+              </a:rPr>
+              <a:t>关键帧</a:t>
+            </a:r>
+            <a:endParaRPr/>
+          </a:p>
+        </p:txBody>
+      </p:sp>
+      <p:pic>
+        <p:nvPicPr>
+          <p:cNvPr id="170" name=""/>
+          <p:cNvPicPr>
+            <a:picLocks noChangeAspect="1"/>
+          </p:cNvPicPr>
+          <p:nvPr/>
+        </p:nvPicPr>
+        <p:blipFill>
+          <a:blip r:embed="rId9"/>
+          <a:srcRect l="76" t="0" r="76" b="0"/>
+          <a:stretch>
+            <a:fillRect/>
+          </a:stretch>
+        </p:blipFill>
+        <p:spPr>
+          <a:xfrm rot="0" flipH="0" flipV="0">
+            <a:off x="4495800" y="3343275"/>
+            <a:ext cx="1562100" cy="2085975"/>
+          </a:xfrm>
+          <a:prstGeom prst="rect">
+            <a:avLst/>
+          </a:prstGeom>
+          <a:ln/>
+        </p:spPr>
+      </p:pic>
+      <p:sp>
+        <p:nvSpPr>
+          <p:cNvPr id="171" name="" descr="{&quot;isTemplate&quot;:true,&quot;type&quot;:&quot;text&quot;}"/>
+          <p:cNvSpPr txBox="1"/>
+          <p:nvPr/>
+        </p:nvSpPr>
+        <p:spPr>
+          <a:xfrm rot="0" flipH="0" flipV="0">
+            <a:off x="4810125" y="5467350"/>
+            <a:ext cx="942975" cy="142875"/>
+          </a:xfrm>
+          <a:prstGeom prst="rect"/>
+        </p:spPr>
+        <p:txBody>
+          <a:bodyPr wrap="none" lIns="0" tIns="0" rIns="0" bIns="0"/>
+          <a:p>
+            <a:pPr>
+              <a:lnSpc>
+                <a:spcPct val="100000"/>
+              </a:lnSpc>
+            </a:pPr>
+            <a:r>
+              <a:rPr lang="en-US" sz="938">
+                <a:solidFill>
+                  <a:srgbClr val="4A5568"/>
+                </a:solidFill>
+                <a:latin typeface="Microsoft YaHei"/>
+                <a:ea typeface="Microsoft YaHei"/>
+              </a:rPr>
+              <a:t xml:space="preserve">#72 </a:t>
+            </a:r>
+            <a:r>
+              <a:rPr lang="zh-CN" sz="938">
+                <a:solidFill>
+                  <a:srgbClr val="4A5568"/>
+                </a:solidFill>
+                <a:latin typeface="Microsoft YaHei"/>
+                <a:ea typeface="Microsoft YaHei"/>
+              </a:rPr>
+              <a:t>｜</a:t>
+            </a:r>
+            <a:r>
+              <a:rPr lang="en-US" sz="938">
+                <a:solidFill>
+                  <a:srgbClr val="4A5568"/>
+                </a:solidFill>
+                <a:latin typeface="Microsoft YaHei"/>
+                <a:ea typeface="Microsoft YaHei"/>
+              </a:rPr>
+              <a:t xml:space="preserve"> 32 </a:t>
+            </a:r>
+            <a:r>
+              <a:rPr lang="zh-CN" sz="938">
+                <a:solidFill>
+                  <a:srgbClr val="4A5568"/>
+                </a:solidFill>
+                <a:latin typeface="Microsoft YaHei"/>
+                <a:ea typeface="Microsoft YaHei"/>
+              </a:rPr>
+              <a:t>关键帧</a:t>
+            </a:r>
+            <a:endParaRPr/>
+          </a:p>
+        </p:txBody>
+      </p:sp>
+      <p:pic>
+        <p:nvPicPr>
+          <p:cNvPr id="172" name=""/>
+          <p:cNvPicPr>
+            <a:picLocks noChangeAspect="1"/>
+          </p:cNvPicPr>
+          <p:nvPr/>
+        </p:nvPicPr>
+        <p:blipFill>
+          <a:blip r:embed="rId10"/>
+          <a:srcRect l="76" t="0" r="76" b="0"/>
+          <a:stretch>
+            <a:fillRect/>
+          </a:stretch>
+        </p:blipFill>
+        <p:spPr>
+          <a:xfrm rot="0" flipH="0" flipV="0">
+            <a:off x="6134100" y="3343275"/>
+            <a:ext cx="1562100" cy="2085975"/>
+          </a:xfrm>
+          <a:prstGeom prst="rect">
+            <a:avLst/>
+          </a:prstGeom>
+          <a:ln/>
+        </p:spPr>
+      </p:pic>
+      <p:sp>
+        <p:nvSpPr>
+          <p:cNvPr id="173" name="" descr="{&quot;isTemplate&quot;:true,&quot;type&quot;:&quot;text&quot;}"/>
+          <p:cNvSpPr txBox="1"/>
+          <p:nvPr/>
+        </p:nvSpPr>
+        <p:spPr>
+          <a:xfrm rot="0" flipH="0" flipV="0">
+            <a:off x="6448425" y="5467350"/>
+            <a:ext cx="942975" cy="142875"/>
+          </a:xfrm>
+          <a:prstGeom prst="rect"/>
+        </p:spPr>
+        <p:txBody>
+          <a:bodyPr wrap="none" lIns="0" tIns="0" rIns="0" bIns="0"/>
+          <a:p>
+            <a:pPr>
+              <a:lnSpc>
+                <a:spcPct val="100000"/>
+              </a:lnSpc>
+            </a:pPr>
+            <a:r>
+              <a:rPr lang="en-US" sz="938">
+                <a:solidFill>
+                  <a:srgbClr val="4A5568"/>
+                </a:solidFill>
+                <a:latin typeface="Microsoft YaHei"/>
+                <a:ea typeface="Microsoft YaHei"/>
+              </a:rPr>
+              <a:t xml:space="preserve">#76 </a:t>
+            </a:r>
+            <a:r>
+              <a:rPr lang="zh-CN" sz="938">
+                <a:solidFill>
+                  <a:srgbClr val="4A5568"/>
+                </a:solidFill>
+                <a:latin typeface="Microsoft YaHei"/>
+                <a:ea typeface="Microsoft YaHei"/>
+              </a:rPr>
+              <a:t>｜</a:t>
+            </a:r>
+            <a:r>
+              <a:rPr lang="en-US" sz="938">
+                <a:solidFill>
+                  <a:srgbClr val="4A5568"/>
+                </a:solidFill>
+                <a:latin typeface="Microsoft YaHei"/>
+                <a:ea typeface="Microsoft YaHei"/>
+              </a:rPr>
+              <a:t xml:space="preserve"> 34 </a:t>
+            </a:r>
+            <a:r>
+              <a:rPr lang="zh-CN" sz="938">
+                <a:solidFill>
+                  <a:srgbClr val="4A5568"/>
+                </a:solidFill>
+                <a:latin typeface="Microsoft YaHei"/>
+                <a:ea typeface="Microsoft YaHei"/>
+              </a:rPr>
+              <a:t>关键帧</a:t>
+            </a:r>
+            <a:endParaRPr/>
+          </a:p>
+        </p:txBody>
+      </p:sp>
+      <p:pic>
+        <p:nvPicPr>
+          <p:cNvPr id="174" name=""/>
+          <p:cNvPicPr>
+            <a:picLocks noChangeAspect="1"/>
+          </p:cNvPicPr>
+          <p:nvPr/>
+        </p:nvPicPr>
+        <p:blipFill>
+          <a:blip r:embed="rId11"/>
+          <a:srcRect l="76" t="0" r="76" b="0"/>
+          <a:stretch>
+            <a:fillRect/>
+          </a:stretch>
+        </p:blipFill>
+        <p:spPr>
+          <a:xfrm rot="0" flipH="0" flipV="0">
+            <a:off x="7772400" y="3343275"/>
+            <a:ext cx="1562100" cy="2085975"/>
+          </a:xfrm>
+          <a:prstGeom prst="rect">
+            <a:avLst/>
+          </a:prstGeom>
+          <a:ln/>
+        </p:spPr>
+      </p:pic>
+      <p:sp>
+        <p:nvSpPr>
+          <p:cNvPr id="175" name="" descr="{&quot;isTemplate&quot;:true,&quot;type&quot;:&quot;text&quot;}"/>
+          <p:cNvSpPr txBox="1"/>
+          <p:nvPr/>
+        </p:nvSpPr>
+        <p:spPr>
+          <a:xfrm rot="0" flipH="0" flipV="0">
+            <a:off x="8086725" y="5467350"/>
+            <a:ext cx="942975" cy="142875"/>
+          </a:xfrm>
+          <a:prstGeom prst="rect"/>
+        </p:spPr>
+        <p:txBody>
+          <a:bodyPr wrap="none" lIns="0" tIns="0" rIns="0" bIns="0"/>
+          <a:p>
+            <a:pPr>
+              <a:lnSpc>
+                <a:spcPct val="100000"/>
+              </a:lnSpc>
+            </a:pPr>
+            <a:r>
+              <a:rPr lang="en-US" sz="938">
+                <a:solidFill>
+                  <a:srgbClr val="4A5568"/>
+                </a:solidFill>
+                <a:latin typeface="Microsoft YaHei"/>
+                <a:ea typeface="Microsoft YaHei"/>
+              </a:rPr>
+              <a:t xml:space="preserve">#80 </a:t>
+            </a:r>
+            <a:r>
+              <a:rPr lang="zh-CN" sz="938">
+                <a:solidFill>
+                  <a:srgbClr val="4A5568"/>
+                </a:solidFill>
+                <a:latin typeface="Microsoft YaHei"/>
+                <a:ea typeface="Microsoft YaHei"/>
+              </a:rPr>
+              <a:t>｜</a:t>
+            </a:r>
+            <a:r>
+              <a:rPr lang="en-US" sz="938">
+                <a:solidFill>
+                  <a:srgbClr val="4A5568"/>
+                </a:solidFill>
+                <a:latin typeface="Microsoft YaHei"/>
+                <a:ea typeface="Microsoft YaHei"/>
+              </a:rPr>
+              <a:t xml:space="preserve"> 35 </a:t>
+            </a:r>
+            <a:r>
+              <a:rPr lang="zh-CN" sz="938">
+                <a:solidFill>
+                  <a:srgbClr val="4A5568"/>
+                </a:solidFill>
+                <a:latin typeface="Microsoft YaHei"/>
+                <a:ea typeface="Microsoft YaHei"/>
+              </a:rPr>
+              <a:t>关键帧</a:t>
+            </a:r>
+            <a:endParaRPr/>
+          </a:p>
+        </p:txBody>
+      </p:sp>
+      <p:sp>
+        <p:nvSpPr>
+          <p:cNvPr id="176" name=""/>
+          <p:cNvSpPr/>
+          <p:nvPr/>
+        </p:nvSpPr>
+        <p:spPr>
+          <a:xfrm rot="0" flipH="0" flipV="0">
+            <a:off x="9410700" y="3343275"/>
+            <a:ext cx="1562100" cy="2085975"/>
+          </a:xfrm>
+          <a:prstGeom prst="rect">
+            <a:avLst/>
+          </a:prstGeom>
+          <a:ln w="25400">
+            <a:solidFill>
+              <a:srgbClr val="1E4FA8"/>
+            </a:solidFill>
+            <a:prstDash val="solid"/>
+          </a:ln>
+        </p:spPr>
+        <p:txBody>
+          <a:bodyPr/>
+          <a:p/>
+        </p:txBody>
+      </p:sp>
+      <p:pic>
+        <p:nvPicPr>
+          <p:cNvPr id="177" name=""/>
+          <p:cNvPicPr>
+            <a:picLocks noChangeAspect="1"/>
+          </p:cNvPicPr>
+          <p:nvPr/>
+        </p:nvPicPr>
+        <p:blipFill>
+          <a:blip r:embed="rId12"/>
+          <a:srcRect l="76" t="0" r="76" b="0"/>
+          <a:stretch>
+            <a:fillRect/>
+          </a:stretch>
+        </p:blipFill>
+        <p:spPr>
+          <a:xfrm rot="0" flipH="0" flipV="0">
+            <a:off x="9410700" y="3343275"/>
+            <a:ext cx="1562100" cy="2085975"/>
+          </a:xfrm>
+          <a:prstGeom prst="rect">
+            <a:avLst/>
+          </a:prstGeom>
+          <a:ln/>
+        </p:spPr>
+      </p:pic>
+      <p:sp>
+        <p:nvSpPr>
+          <p:cNvPr id="178" name="" descr="{&quot;isTemplate&quot;:true,&quot;type&quot;:&quot;text&quot;}"/>
+          <p:cNvSpPr txBox="1"/>
+          <p:nvPr/>
+        </p:nvSpPr>
+        <p:spPr>
+          <a:xfrm rot="0" flipH="0" flipV="0">
+            <a:off x="9715500" y="5467350"/>
+            <a:ext cx="962025" cy="142875"/>
+          </a:xfrm>
+          <a:prstGeom prst="rect"/>
+        </p:spPr>
+        <p:txBody>
+          <a:bodyPr wrap="none" lIns="0" tIns="0" rIns="0" bIns="0"/>
+          <a:p>
+            <a:pPr>
+              <a:lnSpc>
+                <a:spcPct val="100000"/>
+              </a:lnSpc>
+            </a:pPr>
+            <a:r>
+              <a:rPr lang="en-US" sz="938" b="1">
+                <a:solidFill>
+                  <a:srgbClr val="1E4FA8"/>
+                </a:solidFill>
+                <a:latin typeface="Microsoft YaHei"/>
+                <a:ea typeface="Microsoft YaHei"/>
+              </a:rPr>
+              <a:t xml:space="preserve">#84 </a:t>
+            </a:r>
+            <a:r>
+              <a:rPr lang="zh-CN" sz="938" b="1">
+                <a:solidFill>
+                  <a:srgbClr val="1E4FA8"/>
+                </a:solidFill>
+                <a:latin typeface="Microsoft YaHei"/>
+                <a:ea typeface="Microsoft YaHei"/>
+              </a:rPr>
+              <a:t>｜</a:t>
+            </a:r>
+            <a:r>
+              <a:rPr lang="en-US" sz="938" b="1">
+                <a:solidFill>
+                  <a:srgbClr val="1E4FA8"/>
+                </a:solidFill>
+                <a:latin typeface="Microsoft YaHei"/>
+                <a:ea typeface="Microsoft YaHei"/>
+              </a:rPr>
+              <a:t xml:space="preserve"> 81 </a:t>
+            </a:r>
+            <a:r>
+              <a:rPr lang="zh-CN" sz="938" b="1">
+                <a:solidFill>
+                  <a:srgbClr val="1E4FA8"/>
+                </a:solidFill>
+                <a:latin typeface="Microsoft YaHei"/>
+                <a:ea typeface="Microsoft YaHei"/>
+              </a:rPr>
+              <a:t>关键帧</a:t>
+            </a:r>
+            <a:endParaRPr/>
+          </a:p>
+        </p:txBody>
+      </p:sp>
+      <p:sp>
+        <p:nvSpPr>
+          <p:cNvPr id="179" name=""/>
+          <p:cNvSpPr/>
+          <p:nvPr/>
+        </p:nvSpPr>
+        <p:spPr>
+          <a:xfrm rot="0" flipH="0" flipV="0">
+            <a:off x="428625" y="5762625"/>
+            <a:ext cx="11430000" cy="733425"/>
+          </a:xfrm>
+          <a:prstGeom prst="rect">
+            <a:avLst/>
+          </a:prstGeom>
+          <a:solidFill>
+            <a:srgbClr val="F0F5FC"/>
+          </a:solidFill>
+          <a:ln/>
+        </p:spPr>
+        <p:txBody>
+          <a:bodyPr/>
+          <a:p/>
+        </p:txBody>
+      </p:sp>
+      <p:sp>
+        <p:nvSpPr>
+          <p:cNvPr id="180" name=""/>
+          <p:cNvSpPr/>
+          <p:nvPr/>
+        </p:nvSpPr>
+        <p:spPr>
+          <a:xfrm rot="0" flipH="0" flipV="0">
+            <a:off x="381000" y="5762625"/>
+            <a:ext cx="11477625" cy="733425"/>
+          </a:xfrm>
+          <a:custGeom>
+            <a:pathLst>
+              <a:path w="1205" h="77">
+                <a:moveTo>
+                  <a:pt x="0" y="0"/>
+                </a:moveTo>
+                <a:lnTo>
+                  <a:pt x="5" y="0"/>
+                </a:lnTo>
+                <a:lnTo>
+                  <a:pt x="5" y="77"/>
+                </a:lnTo>
+                <a:lnTo>
+                  <a:pt x="0" y="77"/>
+                </a:lnTo>
+                <a:close/>
+              </a:path>
+            </a:pathLst>
+          </a:custGeom>
+          <a:solidFill>
+            <a:srgbClr val="1E4FA8"/>
+          </a:solidFill>
+          <a:ln/>
+        </p:spPr>
+        <p:txBody>
+          <a:bodyPr/>
+          <a:p/>
+        </p:txBody>
+      </p:sp>
+      <p:sp>
+        <p:nvSpPr>
+          <p:cNvPr id="181" name="" descr="{&quot;isTemplate&quot;:true,&quot;type&quot;:&quot;text&quot;}"/>
+          <p:cNvSpPr txBox="1"/>
+          <p:nvPr/>
+        </p:nvSpPr>
+        <p:spPr>
+          <a:xfrm rot="0" flipH="0" flipV="0">
+            <a:off x="561975" y="5848350"/>
+            <a:ext cx="11115675" cy="561975"/>
+          </a:xfrm>
+          <a:prstGeom prst="rect"/>
+        </p:spPr>
+        <p:txBody>
+          <a:bodyPr wrap="square" lIns="0" tIns="0" rIns="0" bIns="0">
+            <a:normAutofit/>
+          </a:bodyPr>
+          <a:p>
+            <a:pPr>
+              <a:lnSpc>
+                <a:spcPct val="140000"/>
+              </a:lnSpc>
+            </a:pPr>
+            <a:r>
+              <a:rPr lang="zh-CN" sz="1313">
+                <a:solidFill>
+                  <a:srgbClr val="1A2230"/>
+                </a:solidFill>
+                <a:latin typeface="Microsoft YaHei"/>
+                <a:ea typeface="Microsoft YaHei"/>
+              </a:rPr>
+              <a:t>第</a:t>
+            </a:r>
+            <a:r>
+              <a:rPr lang="en-US" sz="1313">
+                <a:solidFill>
+                  <a:srgbClr val="1A2230"/>
+                </a:solidFill>
+                <a:latin typeface="Microsoft YaHei"/>
+                <a:ea typeface="Microsoft YaHei"/>
+              </a:rPr>
+              <a:t xml:space="preserve"> 36 </a:t>
+            </a:r>
+            <a:r>
+              <a:rPr lang="zh-CN" sz="1313">
+                <a:solidFill>
+                  <a:srgbClr val="1A2230"/>
+                </a:solidFill>
+                <a:latin typeface="Microsoft YaHei"/>
+                <a:ea typeface="Microsoft YaHei"/>
+              </a:rPr>
+              <a:t>张进来时只有</a:t>
+            </a:r>
+            <a:r>
+              <a:rPr lang="en-US" sz="1313">
+                <a:solidFill>
+                  <a:srgbClr val="1A2230"/>
+                </a:solidFill>
+                <a:latin typeface="Microsoft YaHei"/>
+                <a:ea typeface="Microsoft YaHei"/>
+              </a:rPr>
+              <a:t xml:space="preserve"> </a:t>
+            </a:r>
+            <a:r>
+              <a:rPr lang="en-US" sz="1313">
+                <a:solidFill>
+                  <a:srgbClr val="1A2230"/>
+                </a:solidFill>
+                <a:latin typeface="Microsoft YaHei"/>
+                <a:ea typeface="Microsoft YaHei"/>
+              </a:rPr>
+              <a:t xml:space="preserve">8 </a:t>
+            </a:r>
+            <a:r>
+              <a:rPr lang="zh-CN" sz="1313">
+                <a:solidFill>
+                  <a:srgbClr val="1A2230"/>
+                </a:solidFill>
+                <a:latin typeface="Microsoft YaHei"/>
+                <a:ea typeface="Microsoft YaHei"/>
+              </a:rPr>
+              <a:t>个关键帧</a:t>
+            </a:r>
+            <a:r>
+              <a:rPr lang="zh-CN" sz="1313">
+                <a:solidFill>
+                  <a:srgbClr val="1A2230"/>
+                </a:solidFill>
+                <a:latin typeface="Microsoft YaHei"/>
+                <a:ea typeface="Microsoft YaHei"/>
+              </a:rPr>
+              <a:t>，画面还是一团噪点——但</a:t>
+            </a:r>
+            <a:r>
+              <a:rPr lang="zh-CN" sz="1313">
+                <a:solidFill>
+                  <a:srgbClr val="1A2230"/>
+                </a:solidFill>
+                <a:latin typeface="Microsoft YaHei"/>
+                <a:ea typeface="Microsoft YaHei"/>
+              </a:rPr>
+              <a:t>哪块没拍到已经看得出来</a:t>
+            </a:r>
+            <a:r>
+              <a:rPr lang="zh-CN" sz="1313">
+                <a:solidFill>
+                  <a:srgbClr val="1A2230"/>
+                </a:solidFill>
+                <a:latin typeface="Microsoft YaHei"/>
+                <a:ea typeface="Microsoft YaHei"/>
+              </a:rPr>
+              <a:t>，这正是</a:t>
+            </a:r>
+            <a:r>
+              <a:rPr lang="en-US" sz="1313">
+                <a:solidFill>
+                  <a:srgbClr val="1A2230"/>
+                </a:solidFill>
+                <a:latin typeface="Microsoft YaHei"/>
+                <a:ea typeface="Microsoft YaHei"/>
+              </a:rPr>
+              <a:t xml:space="preserve"> immediate </a:t>
+            </a:r>
+            <a:r>
+              <a:rPr lang="zh-CN" sz="1313">
+                <a:solidFill>
+                  <a:srgbClr val="1A2230"/>
+                </a:solidFill>
+                <a:latin typeface="Microsoft YaHei"/>
+                <a:ea typeface="Microsoft YaHei"/>
+              </a:rPr>
+              <a:t>的用处；第</a:t>
+            </a:r>
+            <a:r>
+              <a:rPr lang="en-US" sz="1313">
+                <a:solidFill>
+                  <a:srgbClr val="1A2230"/>
+                </a:solidFill>
+                <a:latin typeface="Microsoft YaHei"/>
+                <a:ea typeface="Microsoft YaHei"/>
+              </a:rPr>
+              <a:t xml:space="preserve"> 60 </a:t>
+            </a:r>
+            <a:r>
+              <a:rPr lang="zh-CN" sz="1313">
+                <a:solidFill>
+                  <a:srgbClr val="1A2230"/>
+                </a:solidFill>
+                <a:latin typeface="Microsoft YaHei"/>
+                <a:ea typeface="Microsoft YaHei"/>
+              </a:rPr>
+              <a:t>张跨过</a:t>
+            </a:r>
+            <a:r>
+              <a:rPr lang="en-US" sz="1313">
+                <a:solidFill>
+                  <a:srgbClr val="1A2230"/>
+                </a:solidFill>
+                <a:latin typeface="Microsoft YaHei"/>
+                <a:ea typeface="Microsoft YaHei"/>
+              </a:rPr>
+              <a:t xml:space="preserve"> 18 </a:t>
+            </a:r>
+            <a:r>
+              <a:rPr lang="zh-CN" sz="1313">
+                <a:solidFill>
+                  <a:srgbClr val="1A2230"/>
+                </a:solidFill>
+                <a:latin typeface="Microsoft YaHei"/>
+                <a:ea typeface="Microsoft YaHei"/>
+              </a:rPr>
+              <a:t>个关键帧后陡然清晰，第</a:t>
+            </a:r>
+            <a:r>
+              <a:rPr lang="en-US" sz="1313">
+                <a:solidFill>
+                  <a:srgbClr val="1A2230"/>
+                </a:solidFill>
+                <a:latin typeface="Microsoft YaHei"/>
+                <a:ea typeface="Microsoft YaHei"/>
+              </a:rPr>
+              <a:t xml:space="preserve"> 84 </a:t>
+            </a:r>
+            <a:r>
+              <a:rPr lang="zh-CN" sz="1313">
+                <a:solidFill>
+                  <a:srgbClr val="1A2230"/>
+                </a:solidFill>
+                <a:latin typeface="Microsoft YaHei"/>
+                <a:ea typeface="Microsoft YaHei"/>
+              </a:rPr>
+              <a:t>张</a:t>
+            </a:r>
+            <a:r>
+              <a:rPr lang="en-US" sz="1313">
+                <a:solidFill>
+                  <a:srgbClr val="1A2230"/>
+                </a:solidFill>
+                <a:latin typeface="Microsoft YaHei"/>
+                <a:ea typeface="Microsoft YaHei"/>
+              </a:rPr>
+              <a:t xml:space="preserve"> </a:t>
+            </a:r>
+            <a:r>
+              <a:rPr lang="en-US" sz="1313">
+                <a:solidFill>
+                  <a:srgbClr val="1A2230"/>
+                </a:solidFill>
+                <a:latin typeface="Microsoft YaHei"/>
+                <a:ea typeface="Microsoft YaHei"/>
+              </a:rPr>
+              <a:t xml:space="preserve">81 </a:t>
+            </a:r>
+            <a:r>
+              <a:rPr lang="zh-CN" sz="1313">
+                <a:solidFill>
+                  <a:srgbClr val="1A2230"/>
+                </a:solidFill>
+                <a:latin typeface="Microsoft YaHei"/>
+                <a:ea typeface="Microsoft YaHei"/>
+              </a:rPr>
+              <a:t>个关键帧</a:t>
+            </a:r>
+            <a:r>
+              <a:rPr lang="zh-CN" sz="1313">
+                <a:solidFill>
+                  <a:srgbClr val="1A2230"/>
+                </a:solidFill>
+                <a:latin typeface="Microsoft YaHei"/>
+                <a:ea typeface="Microsoft YaHei"/>
+              </a:rPr>
+              <a:t>、噪点收净。</a:t>
+            </a:r>
+            <a:endParaRPr/>
+          </a:p>
+        </p:txBody>
+      </p:sp>
+      <p:sp>
+        <p:nvSpPr>
+          <p:cNvPr id="182" name="" descr="{&quot;isTemplate&quot;:true,&quot;type&quot;:&quot;text&quot;}"/>
+          <p:cNvSpPr txBox="1"/>
+          <p:nvPr/>
+        </p:nvSpPr>
+        <p:spPr>
+          <a:xfrm rot="0" flipH="0" flipV="0">
+            <a:off x="381000" y="6543675"/>
+            <a:ext cx="11430000" cy="200025"/>
+          </a:xfrm>
+          <a:prstGeom prst="rect"/>
+        </p:spPr>
+        <p:txBody>
+          <a:bodyPr wrap="none" lIns="0" tIns="0" rIns="0" bIns="0"/>
+          <a:p>
+            <a:pPr>
+              <a:lnSpc>
+                <a:spcPct val="140000"/>
+              </a:lnSpc>
+            </a:pPr>
+            <a:r>
+              <a:rPr lang="zh-CN" sz="938">
+                <a:solidFill>
+                  <a:srgbClr val="8B97A8"/>
+                </a:solidFill>
+                <a:latin typeface="Microsoft YaHei"/>
+                <a:ea typeface="Microsoft YaHei"/>
+              </a:rPr>
+              <a:t>每一格都是那一帧处理完立刻渲染的，不用等全部拍完。</a:t>
+            </a:r>
+            <a:r>
+              <a:rPr lang="zh-CN" sz="938">
+                <a:solidFill>
+                  <a:srgbClr val="8B97A8"/>
+                </a:solidFill>
+                <a:latin typeface="Microsoft YaHei"/>
+                <a:ea typeface="Microsoft YaHei"/>
+              </a:rPr>
+              <a:t>快照由官方</a:t>
+            </a:r>
+            <a:r>
+              <a:rPr lang="en-US" sz="938">
+                <a:solidFill>
+                  <a:srgbClr val="8B97A8"/>
+                </a:solidFill>
+                <a:latin typeface="Microsoft YaHei"/>
+                <a:ea typeface="Microsoft YaHei"/>
+              </a:rPr>
+              <a:t xml:space="preserve"> --save_every 4 </a:t>
+            </a:r>
+            <a:r>
+              <a:rPr lang="zh-CN" sz="938">
+                <a:solidFill>
+                  <a:srgbClr val="8B97A8"/>
+                </a:solidFill>
+                <a:latin typeface="Microsoft YaHei"/>
+                <a:ea typeface="Microsoft YaHei"/>
+              </a:rPr>
+              <a:t>落盘，这轮为写盘牺牲了速度（</a:t>
+            </a:r>
+            <a:r>
+              <a:rPr lang="en-US" sz="938">
+                <a:solidFill>
+                  <a:srgbClr val="8B97A8"/>
+                </a:solidFill>
+                <a:latin typeface="Microsoft YaHei"/>
+                <a:ea typeface="Microsoft YaHei"/>
+              </a:rPr>
+              <a:t>342 s</a:t>
+            </a:r>
+            <a:r>
+              <a:rPr lang="zh-CN" sz="938">
+                <a:solidFill>
+                  <a:srgbClr val="8B97A8"/>
+                </a:solidFill>
+                <a:latin typeface="Microsoft YaHei"/>
+                <a:ea typeface="Microsoft YaHei"/>
+              </a:rPr>
+              <a:t>）；纯净运行</a:t>
+            </a:r>
+            <a:r>
+              <a:rPr lang="en-US" sz="938">
+                <a:solidFill>
+                  <a:srgbClr val="8B97A8"/>
+                </a:solidFill>
+                <a:latin typeface="Microsoft YaHei"/>
+                <a:ea typeface="Microsoft YaHei"/>
+              </a:rPr>
+              <a:t xml:space="preserve"> 85 </a:t>
+            </a:r>
+            <a:r>
+              <a:rPr lang="zh-CN" sz="938">
+                <a:solidFill>
+                  <a:srgbClr val="8B97A8"/>
+                </a:solidFill>
+                <a:latin typeface="Microsoft YaHei"/>
+                <a:ea typeface="Microsoft YaHei"/>
+              </a:rPr>
+              <a:t>张</a:t>
+            </a:r>
+            <a:r>
+              <a:rPr lang="en-US" sz="938">
+                <a:solidFill>
+                  <a:srgbClr val="8B97A8"/>
+                </a:solidFill>
+                <a:latin typeface="Microsoft YaHei"/>
+                <a:ea typeface="Microsoft YaHei"/>
+              </a:rPr>
+              <a:t xml:space="preserve"> 54.1 s</a:t>
+            </a:r>
+            <a:r>
+              <a:rPr lang="zh-CN" sz="938">
+                <a:solidFill>
+                  <a:srgbClr val="8B97A8"/>
+                </a:solidFill>
+                <a:latin typeface="Microsoft YaHei"/>
+                <a:ea typeface="Microsoft YaHei"/>
+              </a:rPr>
+              <a:t>、单帧</a:t>
+            </a:r>
+            <a:r>
+              <a:rPr lang="en-US" sz="938">
+                <a:solidFill>
+                  <a:srgbClr val="8B97A8"/>
+                </a:solidFill>
+                <a:latin typeface="Microsoft YaHei"/>
+                <a:ea typeface="Microsoft YaHei"/>
+              </a:rPr>
+              <a:t xml:space="preserve"> 668 ms</a:t>
+            </a:r>
+            <a:r>
+              <a:rPr lang="zh-CN" sz="938">
+                <a:solidFill>
+                  <a:srgbClr val="8B97A8"/>
+                </a:solidFill>
+                <a:latin typeface="Microsoft YaHei"/>
+                <a:ea typeface="Microsoft YaHei"/>
+              </a:rPr>
+              <a:t>；前</a:t>
+            </a:r>
+            <a:r>
+              <a:rPr lang="en-US" sz="938">
+                <a:solidFill>
+                  <a:srgbClr val="8B97A8"/>
+                </a:solidFill>
+                <a:latin typeface="Microsoft YaHei"/>
+                <a:ea typeface="Microsoft YaHei"/>
+              </a:rPr>
+              <a:t xml:space="preserve"> 28 </a:t>
+            </a:r>
+            <a:r>
+              <a:rPr lang="zh-CN" sz="938">
+                <a:solidFill>
+                  <a:srgbClr val="8B97A8"/>
+                </a:solidFill>
+                <a:latin typeface="Microsoft YaHei"/>
+                <a:ea typeface="Microsoft YaHei"/>
+              </a:rPr>
+              <a:t>帧尚无高斯，首个快照取第</a:t>
+            </a:r>
+            <a:r>
+              <a:rPr lang="en-US" sz="938">
+                <a:solidFill>
+                  <a:srgbClr val="8B97A8"/>
+                </a:solidFill>
+                <a:latin typeface="Microsoft YaHei"/>
+                <a:ea typeface="Microsoft YaHei"/>
+              </a:rPr>
+              <a:t xml:space="preserve"> 36 </a:t>
+            </a:r>
+            <a:r>
+              <a:rPr lang="zh-CN" sz="938">
+                <a:solidFill>
+                  <a:srgbClr val="8B97A8"/>
+                </a:solidFill>
+                <a:latin typeface="Microsoft YaHei"/>
+                <a:ea typeface="Microsoft YaHei"/>
+              </a:rPr>
+              <a:t>帧。</a:t>
+            </a:r>
+            <a:endParaRPr/>
+          </a:p>
+        </p:txBody>
+      </p:sp>
+    </p:spTree>
+  </p:cSld>
+</p:sld>
+</file>
+
+<file path=ppt/slides/slide15.xml><?xml version="1.0" encoding="utf-8"?>
+<p:sld xmlns:p="http://schemas.openxmlformats.org/presentationml/2006/main" xmlns:a="http://schemas.openxmlformats.org/drawingml/2006/main">
+  <p:cSld>
+    <p:spTree>
+      <p:nvGrpSpPr>
+        <p:cNvPr id="183" name="" descr="&lt;Slide style={{ width: '1280px', height: '720px', backgroundColor: '#FFFFFF', padding: '0px', flexDirection: 'column' }}&gt;&#10;    &lt;Box style={{ width: '1280px', height: '8px', backgroundColor: '#1E4FA8' }} /&gt;&#10;    &lt;Box style={{ padding: '18px 40px 0px 40px', flexDirection: 'row', justifyContent: 'space-between', alignItems: 'flex-end' }}&gt;&#10;        &lt;Text style={{ fontSize: 32, fontWeight: 'bold', color: '#1E4FA8' }}&gt;结论：三句话带走，加一张边界清单&lt;/Text&gt;&#10;        &lt;Text style={{ fontSize: 15, color: '#8B97A8' }}&gt;15 / 16&lt;/Text&gt;&#10;    &lt;/Box&gt;&#10;&#10;    &lt;Box style={{ padding: '15px 40px 0px 40px', flexDirection: 'column', gap: 18 }}&gt;&#10;        &lt;Box style={{ flexDirection: 'row', gap: 16, alignItems: 'flex-start' }}&gt;&#10;            &lt;Box style={{ width: '34px', height: '34px', backgroundColor: '#1E4FA8', borderRadius: 4, alignItems: 'center', justifyContent: 'center' }}&gt;&#10;                &lt;Text style={{ fontSize: 19, fontWeight: 'bold', color: '#FFFFFF' }}&gt;1&lt;/Text&gt;&#10;            &lt;/Box&gt;&#10;            &lt;Box style={{ flex: 1, flexDirection: 'column' }}&gt;&#10;                &lt;Text style={{ fontSize: 23, fontWeight: 'bold', color: '#1A2230' }}&gt;它填的是一块空格，不是&quot;更快的离线 SfM&quot;&lt;/Text&gt;&#10;                &lt;Text style={{ fontSize: 18, color: '#4A5568', lineHeight: 1.4, marginTop: 4 }}&gt;即时、无序、全局一致三者同时成立，此前没有方法做到。速度是手段，&quot;现场可判断&quot;才是目的。&lt;/Text&gt;&#10;            &lt;/Box&gt;&#10;        &lt;/Box&gt;&#10;        &lt;Box style={{ flexDirection: 'row', gap: 16, alignItems: 'flex-start' }}&gt;&#10;            &lt;Box style={{ width: '34px', height: '34px', backgroundColor: '#1E4FA8', borderRadius: 4, alignItems: 'center', justifyContent: 'center' }}&gt;&#10;                &lt;Text style={{ fontSize: 19, fontWeight: 'bold', color: '#FFFFFF' }}&gt;2&lt;/Text&gt;&#10;            &lt;/Box&gt;&#10;            &lt;Box style={{ flex: 1, flexDirection: 'column' }}&gt;&#10;                &lt;Text style={{ fontSize: 23, fontWeight: 'bold', color: '#1A2230' }}&gt;题眼是用&quot;图上的距离&quot;替换&quot;全局优化的解&quot;&lt;/Text&gt;&#10;                &lt;Text style={{ fontSize: 18, color: '#4A5568', lineHeight: 1.4, marginTop: 4 }}&gt;判定看加权图距、不看时间，求解用焊接窗口得 Sim(3)，再把修正按测地距离摊给全图——回环不必重算第二遍。&lt;/Text&gt;&#10;            &lt;/Box&gt;&#10;        &lt;/Box&gt;&#10;        &lt;Box style={{ flexDirection: 'row', gap: 16, alignItems: 'flex-start' }}&gt;&#10;            &lt;Box style={{ width: '34px', height: '34px', backgroundColor: '#0E3F8C', borderRadius: 4, alignItems: 'center', justifyContent: 'center' }}&gt;&#10;                &lt;Text style={{ fontSize: 19, fontWeight: 'bold', color: '#FFFFFF' }}&gt;3&lt;/Text&gt;&#10;            &lt;/Box&gt;&#10;            &lt;Box style={{ flex: 1, flexDirection: 'column' }}&gt;&#10;                &lt;Text style={{ fontSize: 23, fontWeight: 'bold', color: '#1A2230' }}&gt;代价是真的：让出 1.2 dB，换来一条自写的 GPU 求解栈&lt;/Text&gt;&#10;                &lt;Text style={{ fontSize: 18, color: '#4A5568', lineHeight: 1.4, marginTop: 4 }}&gt;不调 g2o / Ceres，雅可比、Schur 消元、迭代更新自己写成核——精度上限低于全局 BA，但换来了时间。&lt;/Text&gt;&#10;            &lt;/Box&gt;&#10;        &lt;/Box&gt;&#10;    &lt;/Box&gt;&#10;&#10;    &lt;Box style={{ margin: '17px 40px 0px 40px', backgroundColor: '#F7F9FC', border: '1px solid #D6DCE5', borderRadius: 6, padding: '9px 16px', flexDirection: 'column' }}&gt;&#10;        &lt;Box style={{ flexDirection: 'row', justifyContent: 'space-between', alignItems: 'baseline' }}&gt;&#10;            &lt;Text style={{ fontSize: 16, fontWeight: 'bold', color: '#1A2230' }}&gt;它现在的边界　→　对应的补法&lt;/Text&gt;&#10;            &lt;Text style={{ fontSize: 14, color: '#8B97A8' }}&gt;论文自述的局限，非我们的复现问题&lt;/Text&gt;&#10;        &lt;/Box&gt;&#10;        &lt;Box style={{ flexDirection: 'row', gap: 14, marginTop: 7 }}&gt;&#10;            &lt;Box style={{ flex: 1, flexDirection: 'column' }}&gt;&#10;                &lt;Text style={{ fontSize: 14.5, fontWeight: 'bold', color: '#B03A37' }}&gt;① 低视差直接失效&lt;/Text&gt;&#10;                &lt;Text style={{ fontSize: 14, color: '#1A2230', lineHeight: 1.35, marginTop: 2 }}&gt;低视差帧只参与渲染、不进位姿求解，避免污染轨迹&lt;/Text&gt;&#10;            &lt;/Box&gt;&#10;            &lt;Box style={{ flex: 1, flexDirection: 'column' }}&gt;&#10;                &lt;Text style={{ fontSize: 14.5, fontWeight: 'bold', color: '#B03A37' }}&gt;② 精度低于全局 BA&lt;/Text&gt;&#10;                &lt;Text style={{ fontSize: 14, color: '#1A2230', lineHeight: 1.35, marginTop: 2 }}&gt;在线出预览，结束时 GLOMAP 回填一次全局 BA，补回 1.2 dB&lt;/Text&gt;&#10;            &lt;/Box&gt;&#10;            &lt;Box style={{ flex: 1, flexDirection: 'column' }}&gt;&#10;                &lt;Text style={{ fontSize: 14.5, fontWeight: 'bold', color: '#B03A37' }}&gt;③ 上游依赖链太重&lt;/Text&gt;&#10;                &lt;Text style={{ fontSize: 14, color: '#1A2230', lineHeight: 1.35, marginTop: 2 }}&gt;采集端给实时覆盖率与误差热图，直接提示&quot;这块没拍&quot;&lt;/Text&gt;&#10;            &lt;/Box&gt;&#10;            &lt;Box style={{ flex: 1, flexDirection: 'column' }}&gt;&#10;                &lt;Text style={{ fontSize: 14.5, fontWeight: 'bold', color: '#B03A37' }}&gt;④ 阈值靠经验&lt;/Text&gt;&#10;                &lt;Text style={{ fontSize: 14, color: '#1A2230', lineHeight: 1.35, marginTop: 2 }}&gt;按纹理强度与重叠度在线估计，替代固定常数&lt;/Text&gt;&#10;            &lt;/Box&gt;&#10;        &lt;/Box&gt;&#10;    &lt;/Box&gt;&#10;&#10;    &lt;Box style={{ margin: '16px 40px 0px 40px', backgroundColor: '#FAFBFD', border: '1px solid #E3E8F0', borderRadius: 6, padding: '10px 16px 12px 16px', flexDirection: 'row' }}&gt;&#10;        &lt;Box style={{ flex: 1, borderTop: '2px solid #C8D4E4', padding: '9px 14px 0px 14px', flexDirection: 'column' }}&gt;&#10;            &lt;Text style={{ fontSize: 15, fontWeight: 'bold', color: '#3D7BD9' }}&gt;2019&lt;/Text&gt;&#10;            &lt;Text style={{ fontSize: 17.5, fontWeight: 'bold', color: '#1A2230', marginTop: 2 }}&gt;NeRF&lt;/Text&gt;&#10;            &lt;Text style={{ fontSize: 14, color: '#4A5568', lineHeight: 1.35, marginTop: 4 }}&gt;离线、必须有序输入&lt;/Text&gt;&#10;            &lt;Text style={{ fontSize: 13.5, color: '#8B97A8', lineHeight: 1.35, marginTop: 3 }}&gt;一次训练以小时计&lt;/Text&gt;&#10;        &lt;/Box&gt;&#10;        &lt;Box style={{ flex: 1, borderTop: '2px solid #C8D4E4', padding: '9px 14px 0px 14px', flexDirection: 'column' }}&gt;&#10;            &lt;Text style={{ fontSize: 15, fontWeight: 'bold', color: '#3D7BD9' }}&gt;2023&lt;/Text&gt;&#10;            &lt;Text style={{ fontSize: 17.5, fontWeight: 'bold', color: '#1A2230', marginTop: 2 }}&gt;3DGS&lt;/Text&gt;&#10;            &lt;Text style={{ fontSize: 14, color: '#4A5568', lineHeight: 1.35, marginTop: 4 }}&gt;渲染快了，位姿仍靠 COLMAP&lt;/Text&gt;&#10;            &lt;Text style={{ fontSize: 13.5, color: '#8B97A8', lineHeight: 1.35, marginTop: 3 }}&gt;前置步骤还是离线 SfM&lt;/Text&gt;&#10;        &lt;/Box&gt;&#10;        &lt;Box style={{ flex: 1, borderTop: '2px solid #C8D4E4', padding: '9px 14px 0px 14px', flexDirection: 'column' }}&gt;&#10;            &lt;Text style={{ fontSize: 15, fontWeight: 'bold', color: '#3D7BD9' }}&gt;2024–25&lt;/Text&gt;&#10;            &lt;Text style={{ fontSize: 17.5, fontWeight: 'bold', color: '#1A2230', marginTop: 2 }}&gt;增量 / 无位姿重建&lt;/Text&gt;&#10;            &lt;Text style={{ fontSize: 14, color: '#4A5568', lineHeight: 1.35, marginTop: 4 }}&gt;要么依赖有序，要么非全局&lt;/Text&gt;&#10;            &lt;Text style={{ fontSize: 13.5, color: '#8B97A8', lineHeight: 1.35, marginTop: 3 }}&gt;两条路各缺一条&lt;/Text&gt;&#10;        &lt;/Box&gt;&#10;        &lt;Box style={{ flex: 1, borderTop: '2px solid #1E4FA8', padding: '9px 14px 0px 14px', flexDirection: 'column' }}&gt;&#10;            &lt;Text style={{ fontSize: 15, fontWeight: 'bold', color: '#1E4FA8' }}&gt;2026&lt;/Text&gt;&#10;            &lt;Text style={{ fontSize: 17.5, fontWeight: 'bold', color: '#1E4FA8', marginTop: 2 }}&gt;i3dgs（本文）&lt;/Text&gt;&#10;            &lt;Text style={{ fontSize: 14, fontWeight: 'bold', color: '#1E4FA8', lineHeight: 1.35, marginTop: 4 }}&gt;即时 · 无序 · 全局一致&lt;/Text&gt;&#10;            &lt;Text style={{ fontSize: 13.5, fontWeight: 'bold', color: '#3D7BD9', lineHeight: 1.35, marginTop: 3 }}&gt;三者首次同时成立&lt;/Text&gt;&#10;        &lt;/Box&gt;&#10;    &lt;/Box&gt;&#10;&#10;    &lt;Box style={{ margin: '11px 40px 0px 40px', backgroundColor: '#1E4FA8', borderRadius: 6, padding: '14px 22px', flexDirection: 'row', alignItems: 'center', gap: 26 }}&gt;&#10;        &lt;Text style={{ fontSize: 20, fontWeight: 'bold', color: '#FFFFFF', lineHeight: 1.4, flex: 1 }}&gt;一句话总结：它把 3DGS 从&quot;拍完再算的离线工具&quot;变成了&quot;拍摄现场的仪表盘&quot;。&lt;/Text&gt;&#10;        &lt;Box style={{ flexDirection: 'column' }}&gt;&#10;            &lt;Text style={{ fontSize: 15, color: '#C3D5EF' }}&gt;论文 / 我们&lt;/Text&gt;&#10;            &lt;Text style={{ fontSize: 19, fontWeight: 'bold', color: '#FFFFFF' }}&gt;26.29 → 25.95 dB&lt;/Text&gt;&#10;        &lt;/Box&gt;&#10;    &lt;/Box&gt;&#10;&#10;    &lt;Box style={{ marginTop: 'auto', padding: '10px 40px 16px 40px', flexDirection: 'row', justifyContent: 'space-between', alignItems: 'center' }}&gt;&#10;        &lt;Text style={{ fontSize: 24, fontWeight: 'bold', color: '#1E4FA8' }}&gt;谢谢，欢迎提问&lt;/Text&gt;&#10;        &lt;Text style={{ fontSize: 14, color: '#8B97A8' }}&gt;论文：SIGGRAPH 2026 / arXiv:2607.14481 · 代码：github.com/graphdeco-inria/i3dgs&lt;/Text&gt;&#10;    &lt;/Box&gt;&#10;&lt;/Slide&gt;&#10;"/>
+        <p:cNvGrpSpPr/>
+        <p:nvPr/>
+      </p:nvGrpSpPr>
+      <p:grpSpPr>
+        <a:xfrm>
+          <a:off x="0" y="0"/>
+          <a:ext cx="0" cy="0"/>
+          <a:chOff x="0" y="0"/>
+          <a:chExt cx="0" cy="0"/>
+        </a:xfrm>
+      </p:grpSpPr>
+      <p:sp>
+        <p:nvSpPr>
+          <p:cNvPr id="184" name=""/>
+          <p:cNvSpPr/>
+          <p:nvPr/>
+        </p:nvSpPr>
+        <p:spPr>
+          <a:xfrm rot="0" flipH="0" flipV="0">
+            <a:off x="0" y="0"/>
+            <a:ext cx="12192000" cy="6858000"/>
+          </a:xfrm>
+          <a:prstGeom prst="rect">
+            <a:avLst/>
+          </a:prstGeom>
+          <a:solidFill>
+            <a:srgbClr val="FFFFFF"/>
+          </a:solidFill>
+          <a:ln/>
+        </p:spPr>
+        <p:txBody>
+          <a:bodyPr/>
+          <a:p/>
+        </p:txBody>
+      </p:sp>
+      <p:sp>
+        <p:nvSpPr>
+          <p:cNvPr id="185" name=""/>
+          <p:cNvSpPr/>
+          <p:nvPr/>
+        </p:nvSpPr>
+        <p:spPr>
+          <a:xfrm rot="0" flipH="0" flipV="0">
+            <a:off x="0" y="0"/>
+            <a:ext cx="12192000" cy="76200"/>
+          </a:xfrm>
+          <a:prstGeom prst="rect">
+            <a:avLst/>
+          </a:prstGeom>
+          <a:solidFill>
+            <a:srgbClr val="1E4FA8"/>
+          </a:solidFill>
+          <a:ln/>
+        </p:spPr>
+        <p:txBody>
+          <a:bodyPr/>
+          <a:p/>
+        </p:txBody>
+      </p:sp>
+      <p:sp>
+        <p:nvSpPr>
+          <p:cNvPr id="186" name="" descr="{&quot;isTemplate&quot;:true,&quot;type&quot;:&quot;text&quot;}"/>
+          <p:cNvSpPr txBox="1"/>
+          <p:nvPr/>
+        </p:nvSpPr>
+        <p:spPr>
+          <a:xfrm rot="0" flipH="0" flipV="0">
             <a:off x="381000" y="247650"/>
             <a:ext cx="4876800" cy="371475"/>
           </a:xfrm>
@@ -7443,7 +9333,7 @@
       </p:sp>
       <p:sp>
         <p:nvSpPr>
-          <p:cNvPr id="152" name="" descr="{&quot;isTemplate&quot;:true,&quot;type&quot;:&quot;text&quot;}"/>
+          <p:cNvPr id="187" name="" descr="{&quot;isTemplate&quot;:true,&quot;type&quot;:&quot;text&quot;}"/>
           <p:cNvSpPr txBox="1"/>
           <p:nvPr/>
         </p:nvSpPr>
@@ -7470,15 +9360,15 @@
                 <a:latin typeface="Microsoft YaHei"/>
                 <a:ea typeface="Microsoft YaHei"/>
               </a:rPr>
-              <a:t>14 / 15</a:t>
-            </a:r>
-            <a:endParaRPr/>
-          </a:p>
-        </p:txBody>
-      </p:sp>
-      <p:sp>
-        <p:nvSpPr>
-          <p:cNvPr id="153" name=""/>
+              <a:t>15 / 16</a:t>
+            </a:r>
+            <a:endParaRPr/>
+          </a:p>
+        </p:txBody>
+      </p:sp>
+      <p:sp>
+        <p:nvSpPr>
+          <p:cNvPr id="188" name=""/>
           <p:cNvSpPr/>
           <p:nvPr/>
         </p:nvSpPr>
@@ -7504,7 +9394,7 @@
       </p:sp>
       <p:sp>
         <p:nvSpPr>
-          <p:cNvPr id="154" name="" descr="{&quot;isTemplate&quot;:true,&quot;type&quot;:&quot;text&quot;}"/>
+          <p:cNvPr id="189" name="" descr="{&quot;isTemplate&quot;:true,&quot;type&quot;:&quot;text&quot;}"/>
           <p:cNvSpPr txBox="1"/>
           <p:nvPr/>
         </p:nvSpPr>
@@ -7539,7 +9429,7 @@
       </p:sp>
       <p:sp>
         <p:nvSpPr>
-          <p:cNvPr id="155" name="" descr="{&quot;isTemplate&quot;:true,&quot;type&quot;:&quot;text&quot;}"/>
+          <p:cNvPr id="190" name="" descr="{&quot;isTemplate&quot;:true,&quot;type&quot;:&quot;text&quot;}"/>
           <p:cNvSpPr txBox="1"/>
           <p:nvPr/>
         </p:nvSpPr>
@@ -7604,7 +9494,7 @@
       </p:sp>
       <p:sp>
         <p:nvSpPr>
-          <p:cNvPr id="156" name="" descr="{&quot;isTemplate&quot;:true,&quot;type&quot;:&quot;text&quot;}"/>
+          <p:cNvPr id="191" name="" descr="{&quot;isTemplate&quot;:true,&quot;type&quot;:&quot;text&quot;}"/>
           <p:cNvSpPr txBox="1"/>
           <p:nvPr/>
         </p:nvSpPr>
@@ -7679,7 +9569,7 @@
       </p:sp>
       <p:sp>
         <p:nvSpPr>
-          <p:cNvPr id="157" name=""/>
+          <p:cNvPr id="192" name=""/>
           <p:cNvSpPr/>
           <p:nvPr/>
         </p:nvSpPr>
@@ -7705,7 +9595,7 @@
       </p:sp>
       <p:sp>
         <p:nvSpPr>
-          <p:cNvPr id="158" name="" descr="{&quot;isTemplate&quot;:true,&quot;type&quot;:&quot;text&quot;}"/>
+          <p:cNvPr id="193" name="" descr="{&quot;isTemplate&quot;:true,&quot;type&quot;:&quot;text&quot;}"/>
           <p:cNvSpPr txBox="1"/>
           <p:nvPr/>
         </p:nvSpPr>
@@ -7740,7 +9630,7 @@
       </p:sp>
       <p:sp>
         <p:nvSpPr>
-          <p:cNvPr id="159" name="" descr="{&quot;isTemplate&quot;:true,&quot;type&quot;:&quot;text&quot;}"/>
+          <p:cNvPr id="194" name="" descr="{&quot;isTemplate&quot;:true,&quot;type&quot;:&quot;text&quot;}"/>
           <p:cNvSpPr txBox="1"/>
           <p:nvPr/>
         </p:nvSpPr>
@@ -7845,7 +9735,7 @@
       </p:sp>
       <p:sp>
         <p:nvSpPr>
-          <p:cNvPr id="160" name="" descr="{&quot;isTemplate&quot;:true,&quot;type&quot;:&quot;text&quot;}"/>
+          <p:cNvPr id="195" name="" descr="{&quot;isTemplate&quot;:true,&quot;type&quot;:&quot;text&quot;}"/>
           <p:cNvSpPr txBox="1"/>
           <p:nvPr/>
         </p:nvSpPr>
@@ -7900,7 +9790,7 @@
       </p:sp>
       <p:sp>
         <p:nvSpPr>
-          <p:cNvPr id="161" name=""/>
+          <p:cNvPr id="196" name=""/>
           <p:cNvSpPr/>
           <p:nvPr/>
         </p:nvSpPr>
@@ -7926,7 +9816,7 @@
       </p:sp>
       <p:sp>
         <p:nvSpPr>
-          <p:cNvPr id="162" name="" descr="{&quot;isTemplate&quot;:true,&quot;type&quot;:&quot;text&quot;}"/>
+          <p:cNvPr id="197" name="" descr="{&quot;isTemplate&quot;:true,&quot;type&quot;:&quot;text&quot;}"/>
           <p:cNvSpPr txBox="1"/>
           <p:nvPr/>
         </p:nvSpPr>
@@ -7961,7 +9851,7 @@
       </p:sp>
       <p:sp>
         <p:nvSpPr>
-          <p:cNvPr id="163" name="" descr="{&quot;isTemplate&quot;:true,&quot;type&quot;:&quot;text&quot;}"/>
+          <p:cNvPr id="198" name="" descr="{&quot;isTemplate&quot;:true,&quot;type&quot;:&quot;text&quot;}"/>
           <p:cNvSpPr txBox="1"/>
           <p:nvPr/>
         </p:nvSpPr>
@@ -8036,7 +9926,7 @@
       </p:sp>
       <p:sp>
         <p:nvSpPr>
-          <p:cNvPr id="164" name="" descr="{&quot;isTemplate&quot;:true,&quot;type&quot;:&quot;text&quot;}"/>
+          <p:cNvPr id="199" name="" descr="{&quot;isTemplate&quot;:true,&quot;type&quot;:&quot;text&quot;}"/>
           <p:cNvSpPr txBox="1"/>
           <p:nvPr/>
         </p:nvSpPr>
@@ -8131,7 +10021,7 @@
       </p:sp>
       <p:sp>
         <p:nvSpPr>
-          <p:cNvPr id="165" name=""/>
+          <p:cNvPr id="200" name=""/>
           <p:cNvSpPr/>
           <p:nvPr/>
         </p:nvSpPr>
@@ -8162,7 +10052,7 @@
       </p:sp>
       <p:sp>
         <p:nvSpPr>
-          <p:cNvPr id="166" name="" descr="{&quot;isTemplate&quot;:true,&quot;type&quot;:&quot;text&quot;}"/>
+          <p:cNvPr id="201" name="" descr="{&quot;isTemplate&quot;:true,&quot;type&quot;:&quot;text&quot;}"/>
           <p:cNvSpPr txBox="1"/>
           <p:nvPr/>
         </p:nvSpPr>
@@ -8197,7 +10087,7 @@
       </p:sp>
       <p:sp>
         <p:nvSpPr>
-          <p:cNvPr id="167" name="" descr="{&quot;isTemplate&quot;:true,&quot;type&quot;:&quot;text&quot;}"/>
+          <p:cNvPr id="202" name="" descr="{&quot;isTemplate&quot;:true,&quot;type&quot;:&quot;text&quot;}"/>
           <p:cNvSpPr txBox="1"/>
           <p:nvPr/>
         </p:nvSpPr>
@@ -8232,7 +10122,7 @@
       </p:sp>
       <p:sp>
         <p:nvSpPr>
-          <p:cNvPr id="168" name="" descr="{&quot;isTemplate&quot;:true,&quot;type&quot;:&quot;text&quot;}"/>
+          <p:cNvPr id="203" name="" descr="{&quot;isTemplate&quot;:true,&quot;type&quot;:&quot;text&quot;}"/>
           <p:cNvSpPr txBox="1"/>
           <p:nvPr/>
         </p:nvSpPr>
@@ -8277,7 +10167,7 @@
       </p:sp>
       <p:sp>
         <p:nvSpPr>
-          <p:cNvPr id="169" name="" descr="{&quot;isTemplate&quot;:true,&quot;type&quot;:&quot;text&quot;}"/>
+          <p:cNvPr id="204" name="" descr="{&quot;isTemplate&quot;:true,&quot;type&quot;:&quot;text&quot;}"/>
           <p:cNvSpPr txBox="1"/>
           <p:nvPr/>
         </p:nvSpPr>
@@ -8314,7 +10204,7 @@
       </p:sp>
       <p:sp>
         <p:nvSpPr>
-          <p:cNvPr id="170" name="" descr="{&quot;isTemplate&quot;:true,&quot;type&quot;:&quot;text&quot;}"/>
+          <p:cNvPr id="205" name="" descr="{&quot;isTemplate&quot;:true,&quot;type&quot;:&quot;text&quot;}"/>
           <p:cNvSpPr txBox="1"/>
           <p:nvPr/>
         </p:nvSpPr>
@@ -8369,7 +10259,7 @@
       </p:sp>
       <p:sp>
         <p:nvSpPr>
-          <p:cNvPr id="171" name="" descr="{&quot;isTemplate&quot;:true,&quot;type&quot;:&quot;text&quot;}"/>
+          <p:cNvPr id="206" name="" descr="{&quot;isTemplate&quot;:true,&quot;type&quot;:&quot;text&quot;}"/>
           <p:cNvSpPr txBox="1"/>
           <p:nvPr/>
         </p:nvSpPr>
@@ -8456,7 +10346,7 @@
       </p:sp>
       <p:sp>
         <p:nvSpPr>
-          <p:cNvPr id="172" name="" descr="{&quot;isTemplate&quot;:true,&quot;type&quot;:&quot;text&quot;}"/>
+          <p:cNvPr id="207" name="" descr="{&quot;isTemplate&quot;:true,&quot;type&quot;:&quot;text&quot;}"/>
           <p:cNvSpPr txBox="1"/>
           <p:nvPr/>
         </p:nvSpPr>
@@ -8501,7 +10391,7 @@
       </p:sp>
       <p:sp>
         <p:nvSpPr>
-          <p:cNvPr id="173" name="" descr="{&quot;isTemplate&quot;:true,&quot;type&quot;:&quot;text&quot;}"/>
+          <p:cNvPr id="208" name="" descr="{&quot;isTemplate&quot;:true,&quot;type&quot;:&quot;text&quot;}"/>
           <p:cNvSpPr txBox="1"/>
           <p:nvPr/>
         </p:nvSpPr>
@@ -8568,7 +10458,7 @@
       </p:sp>
       <p:sp>
         <p:nvSpPr>
-          <p:cNvPr id="174" name="" descr="{&quot;isTemplate&quot;:true,&quot;type&quot;:&quot;text&quot;}"/>
+          <p:cNvPr id="209" name="" descr="{&quot;isTemplate&quot;:true,&quot;type&quot;:&quot;text&quot;}"/>
           <p:cNvSpPr txBox="1"/>
           <p:nvPr/>
         </p:nvSpPr>
@@ -8613,7 +10503,7 @@
       </p:sp>
       <p:sp>
         <p:nvSpPr>
-          <p:cNvPr id="175" name="" descr="{&quot;isTemplate&quot;:true,&quot;type&quot;:&quot;text&quot;}"/>
+          <p:cNvPr id="210" name="" descr="{&quot;isTemplate&quot;:true,&quot;type&quot;:&quot;text&quot;}"/>
           <p:cNvSpPr txBox="1"/>
           <p:nvPr/>
         </p:nvSpPr>
@@ -8648,7 +10538,7 @@
       </p:sp>
       <p:sp>
         <p:nvSpPr>
-          <p:cNvPr id="176" name=""/>
+          <p:cNvPr id="211" name=""/>
           <p:cNvSpPr/>
           <p:nvPr/>
         </p:nvSpPr>
@@ -8679,7 +10569,7 @@
       </p:sp>
       <p:sp>
         <p:nvSpPr>
-          <p:cNvPr id="177" name=""/>
+          <p:cNvPr id="212" name=""/>
           <p:cNvSpPr/>
           <p:nvPr/>
         </p:nvSpPr>
@@ -8719,7 +10609,7 @@
       </p:sp>
       <p:sp>
         <p:nvSpPr>
-          <p:cNvPr id="178" name="" descr="{&quot;isTemplate&quot;:true,&quot;type&quot;:&quot;text&quot;}"/>
+          <p:cNvPr id="213" name="" descr="{&quot;isTemplate&quot;:true,&quot;type&quot;:&quot;text&quot;}"/>
           <p:cNvSpPr txBox="1"/>
           <p:nvPr/>
         </p:nvSpPr>
@@ -8754,7 +10644,7 @@
       </p:sp>
       <p:sp>
         <p:nvSpPr>
-          <p:cNvPr id="179" name="" descr="{&quot;isTemplate&quot;:true,&quot;type&quot;:&quot;text&quot;}"/>
+          <p:cNvPr id="214" name="" descr="{&quot;isTemplate&quot;:true,&quot;type&quot;:&quot;text&quot;}"/>
           <p:cNvSpPr txBox="1"/>
           <p:nvPr/>
         </p:nvSpPr>
@@ -8789,7 +10679,7 @@
       </p:sp>
       <p:sp>
         <p:nvSpPr>
-          <p:cNvPr id="180" name="" descr="{&quot;isTemplate&quot;:true,&quot;type&quot;:&quot;text&quot;}"/>
+          <p:cNvPr id="215" name="" descr="{&quot;isTemplate&quot;:true,&quot;type&quot;:&quot;text&quot;}"/>
           <p:cNvSpPr txBox="1"/>
           <p:nvPr/>
         </p:nvSpPr>
@@ -8824,7 +10714,7 @@
       </p:sp>
       <p:sp>
         <p:nvSpPr>
-          <p:cNvPr id="181" name="" descr="{&quot;isTemplate&quot;:true,&quot;type&quot;:&quot;text&quot;}"/>
+          <p:cNvPr id="216" name="" descr="{&quot;isTemplate&quot;:true,&quot;type&quot;:&quot;text&quot;}"/>
           <p:cNvSpPr txBox="1"/>
           <p:nvPr/>
         </p:nvSpPr>
@@ -8859,7 +10749,7 @@
       </p:sp>
       <p:sp>
         <p:nvSpPr>
-          <p:cNvPr id="182" name=""/>
+          <p:cNvPr id="217" name=""/>
           <p:cNvSpPr/>
           <p:nvPr/>
         </p:nvSpPr>
@@ -8899,7 +10789,7 @@
       </p:sp>
       <p:sp>
         <p:nvSpPr>
-          <p:cNvPr id="183" name="" descr="{&quot;isTemplate&quot;:true,&quot;type&quot;:&quot;text&quot;}"/>
+          <p:cNvPr id="218" name="" descr="{&quot;isTemplate&quot;:true,&quot;type&quot;:&quot;text&quot;}"/>
           <p:cNvSpPr txBox="1"/>
           <p:nvPr/>
         </p:nvSpPr>
@@ -8934,7 +10824,7 @@
       </p:sp>
       <p:sp>
         <p:nvSpPr>
-          <p:cNvPr id="184" name="" descr="{&quot;isTemplate&quot;:true,&quot;type&quot;:&quot;text&quot;}"/>
+          <p:cNvPr id="219" name="" descr="{&quot;isTemplate&quot;:true,&quot;type&quot;:&quot;text&quot;}"/>
           <p:cNvSpPr txBox="1"/>
           <p:nvPr/>
         </p:nvSpPr>
@@ -8969,7 +10859,7 @@
       </p:sp>
       <p:sp>
         <p:nvSpPr>
-          <p:cNvPr id="185" name="" descr="{&quot;isTemplate&quot;:true,&quot;type&quot;:&quot;text&quot;}"/>
+          <p:cNvPr id="220" name="" descr="{&quot;isTemplate&quot;:true,&quot;type&quot;:&quot;text&quot;}"/>
           <p:cNvSpPr txBox="1"/>
           <p:nvPr/>
         </p:nvSpPr>
@@ -9014,7 +10904,7 @@
       </p:sp>
       <p:sp>
         <p:nvSpPr>
-          <p:cNvPr id="186" name="" descr="{&quot;isTemplate&quot;:true,&quot;type&quot;:&quot;text&quot;}"/>
+          <p:cNvPr id="221" name="" descr="{&quot;isTemplate&quot;:true,&quot;type&quot;:&quot;text&quot;}"/>
           <p:cNvSpPr txBox="1"/>
           <p:nvPr/>
         </p:nvSpPr>
@@ -9059,7 +10949,7 @@
       </p:sp>
       <p:sp>
         <p:nvSpPr>
-          <p:cNvPr id="187" name=""/>
+          <p:cNvPr id="222" name=""/>
           <p:cNvSpPr/>
           <p:nvPr/>
         </p:nvSpPr>
@@ -9099,7 +10989,7 @@
       </p:sp>
       <p:sp>
         <p:nvSpPr>
-          <p:cNvPr id="188" name="" descr="{&quot;isTemplate&quot;:true,&quot;type&quot;:&quot;text&quot;}"/>
+          <p:cNvPr id="223" name="" descr="{&quot;isTemplate&quot;:true,&quot;type&quot;:&quot;text&quot;}"/>
           <p:cNvSpPr txBox="1"/>
           <p:nvPr/>
         </p:nvSpPr>
@@ -9134,7 +11024,7 @@
       </p:sp>
       <p:sp>
         <p:nvSpPr>
-          <p:cNvPr id="189" name="" descr="{&quot;isTemplate&quot;:true,&quot;type&quot;:&quot;text&quot;}"/>
+          <p:cNvPr id="224" name="" descr="{&quot;isTemplate&quot;:true,&quot;type&quot;:&quot;text&quot;}"/>
           <p:cNvSpPr txBox="1"/>
           <p:nvPr/>
         </p:nvSpPr>
@@ -9189,7 +11079,7 @@
       </p:sp>
       <p:sp>
         <p:nvSpPr>
-          <p:cNvPr id="190" name="" descr="{&quot;isTemplate&quot;:true,&quot;type&quot;:&quot;text&quot;}"/>
+          <p:cNvPr id="225" name="" descr="{&quot;isTemplate&quot;:true,&quot;type&quot;:&quot;text&quot;}"/>
           <p:cNvSpPr txBox="1"/>
           <p:nvPr/>
         </p:nvSpPr>
@@ -9224,7 +11114,7 @@
       </p:sp>
       <p:sp>
         <p:nvSpPr>
-          <p:cNvPr id="191" name="" descr="{&quot;isTemplate&quot;:true,&quot;type&quot;:&quot;text&quot;}"/>
+          <p:cNvPr id="226" name="" descr="{&quot;isTemplate&quot;:true,&quot;type&quot;:&quot;text&quot;}"/>
           <p:cNvSpPr txBox="1"/>
           <p:nvPr/>
         </p:nvSpPr>
@@ -9259,7 +11149,7 @@
       </p:sp>
       <p:sp>
         <p:nvSpPr>
-          <p:cNvPr id="192" name=""/>
+          <p:cNvPr id="227" name=""/>
           <p:cNvSpPr/>
           <p:nvPr/>
         </p:nvSpPr>
@@ -9299,7 +11189,7 @@
       </p:sp>
       <p:sp>
         <p:nvSpPr>
-          <p:cNvPr id="193" name="" descr="{&quot;isTemplate&quot;:true,&quot;type&quot;:&quot;text&quot;}"/>
+          <p:cNvPr id="228" name="" descr="{&quot;isTemplate&quot;:true,&quot;type&quot;:&quot;text&quot;}"/>
           <p:cNvSpPr txBox="1"/>
           <p:nvPr/>
         </p:nvSpPr>
@@ -9334,7 +11224,7 @@
       </p:sp>
       <p:sp>
         <p:nvSpPr>
-          <p:cNvPr id="194" name="" descr="{&quot;isTemplate&quot;:true,&quot;type&quot;:&quot;text&quot;}"/>
+          <p:cNvPr id="229" name="" descr="{&quot;isTemplate&quot;:true,&quot;type&quot;:&quot;text&quot;}"/>
           <p:cNvSpPr txBox="1"/>
           <p:nvPr/>
         </p:nvSpPr>
@@ -9379,7 +11269,7 @@
       </p:sp>
       <p:sp>
         <p:nvSpPr>
-          <p:cNvPr id="195" name="" descr="{&quot;isTemplate&quot;:true,&quot;type&quot;:&quot;text&quot;}"/>
+          <p:cNvPr id="230" name="" descr="{&quot;isTemplate&quot;:true,&quot;type&quot;:&quot;text&quot;}"/>
           <p:cNvSpPr txBox="1"/>
           <p:nvPr/>
         </p:nvSpPr>
@@ -9454,7 +11344,7 @@
       </p:sp>
       <p:sp>
         <p:nvSpPr>
-          <p:cNvPr id="196" name="" descr="{&quot;isTemplate&quot;:true,&quot;type&quot;:&quot;text&quot;}"/>
+          <p:cNvPr id="231" name="" descr="{&quot;isTemplate&quot;:true,&quot;type&quot;:&quot;text&quot;}"/>
           <p:cNvSpPr txBox="1"/>
           <p:nvPr/>
         </p:nvSpPr>
@@ -9489,7 +11379,7 @@
       </p:sp>
       <p:sp>
         <p:nvSpPr>
-          <p:cNvPr id="197" name=""/>
+          <p:cNvPr id="232" name=""/>
           <p:cNvSpPr/>
           <p:nvPr/>
         </p:nvSpPr>
@@ -9515,7 +11405,7 @@
       </p:sp>
       <p:sp>
         <p:nvSpPr>
-          <p:cNvPr id="198" name="" descr="{&quot;isTemplate&quot;:true,&quot;type&quot;:&quot;text&quot;}"/>
+          <p:cNvPr id="233" name="" descr="{&quot;isTemplate&quot;:true,&quot;type&quot;:&quot;text&quot;}"/>
           <p:cNvSpPr txBox="1"/>
           <p:nvPr/>
         </p:nvSpPr>
@@ -9650,7 +11540,7 @@
       </p:sp>
       <p:sp>
         <p:nvSpPr>
-          <p:cNvPr id="199" name="" descr="{&quot;isTemplate&quot;:true,&quot;type&quot;:&quot;text&quot;}"/>
+          <p:cNvPr id="234" name="" descr="{&quot;isTemplate&quot;:true,&quot;type&quot;:&quot;text&quot;}"/>
           <p:cNvSpPr txBox="1"/>
           <p:nvPr/>
         </p:nvSpPr>
@@ -9705,7 +11595,7 @@
       </p:sp>
       <p:sp>
         <p:nvSpPr>
-          <p:cNvPr id="200" name="" descr="{&quot;isTemplate&quot;:true,&quot;type&quot;:&quot;text&quot;}"/>
+          <p:cNvPr id="235" name="" descr="{&quot;isTemplate&quot;:true,&quot;type&quot;:&quot;text&quot;}"/>
           <p:cNvSpPr txBox="1"/>
           <p:nvPr/>
         </p:nvSpPr>
@@ -9740,7 +11630,7 @@
       </p:sp>
       <p:sp>
         <p:nvSpPr>
-          <p:cNvPr id="201" name="" descr="{&quot;isTemplate&quot;:true,&quot;type&quot;:&quot;text&quot;}"/>
+          <p:cNvPr id="236" name="" descr="{&quot;isTemplate&quot;:true,&quot;type&quot;:&quot;text&quot;}"/>
           <p:cNvSpPr txBox="1"/>
           <p:nvPr/>
         </p:nvSpPr>
@@ -9775,7 +11665,7 @@
       </p:sp>
       <p:sp>
         <p:nvSpPr>
-          <p:cNvPr id="202" name="" descr="{&quot;isTemplate&quot;:true,&quot;type&quot;:&quot;text&quot;}"/>
+          <p:cNvPr id="237" name="" descr="{&quot;isTemplate&quot;:true,&quot;type&quot;:&quot;text&quot;}"/>
           <p:cNvSpPr txBox="1"/>
           <p:nvPr/>
         </p:nvSpPr>
@@ -9843,12 +11733,12 @@
 </p:sld>
 </file>
 
-<file path=ppt/slides/slide15.xml><?xml version="1.0" encoding="utf-8"?>
+<file path=ppt/slides/slide16.xml><?xml version="1.0" encoding="utf-8"?>
 <p:sld xmlns:p="http://schemas.openxmlformats.org/presentationml/2006/main" xmlns:a="http://schemas.openxmlformats.org/drawingml/2006/main" xmlns:r="http://schemas.openxmlformats.org/officeDocument/2006/relationships">
   <p:cSld>
     <p:spTree>
       <p:nvGrpSpPr>
-        <p:cNvPr id="203" name="" descr="&lt;Slide style={{ width: '1280px', height: '720px', backgroundColor: '#FFFFFF', padding: '0px', flexDirection: 'column' }}&gt;&#13;&#10;    &lt;Box style={{ width: '1280px', height: '8px', backgroundColor: '#1E4FA8' }} /&gt;&#13;&#10;    &lt;Box style={{ padding: '14px 40px 0px 40px', flexDirection: 'row', justifyContent: 'space-between', alignItems: 'flex-end' }}&gt;&#13;&#10;        &lt;Text style={{ fontSize: 32, fontWeight: 'bold', color: '#1E4FA8' }}&gt;附：七个步骤在源码里长什么样&lt;/Text&gt;&#13;&#10;        &lt;Text style={{ fontSize: 15, color: '#8B97A8' }}&gt;15 / 15&lt;/Text&gt;&#13;&#10;    &lt;/Box&gt;&#13;&#10;    &lt;Box style={{ padding: '5px 40px 0px 40px' }}&gt;&#13;&#10;        &lt;Text style={{ fontSize: 17, color: '#4A5568' }}&gt;真实源码截图，与第 04 页七步链、第 05–11 页逐页对应：&lt;b&gt;①②③ 定跟谁比、④ 定跟谁一起算、⑤ 才真解位姿、⑥⑦ 修漂移与压显存&lt;/b&gt;。&lt;/Text&gt;&#13;&#10;    &lt;/Box&gt;&#13;&#10;    &lt;Box style={{ padding: '8px 40px 0px 40px', flexDirection: 'row', gap: 14 }}&gt;&#13;&#10;        &lt;Box style={{ flex: 1, flexDirection: 'column', gap: 10 }}&gt;&#13;&#10;        &lt;Box style={{ backgroundColor: '#1E1E1E', borderRadius: 5, padding: '5px 11px 5px 11px', flexDirection: 'column' }}&gt;&#13;&#10;            &lt;Text style={{ fontSize: 13, fontWeight: 'bold', color: '#8FBBFF', marginBottom: 0 }}&gt;① ② ③  检索 → 粗筛 → 建边&lt;/Text&gt;&#13;&#10;            &lt;Text style={{ fontFamily: 'Consolas', fontSize: 10, color: '#7F8C9F', marginBottom: 2 }}&gt;scene/scene_model_loop_closure.py:179&lt;/Text&gt;&#13;&#10;            &lt;Image src=&quot;code_png/01.png&quot; style={{ width: 568, height: 104.5 }} /&gt;&#13;&#10;        &lt;/Box&gt;&#13;&#10;        &lt;Box style={{ backgroundColor: '#1E1E1E', borderRadius: 5, padding: '5px 11px 5px 11px', flexDirection: 'column' }}&gt;&#13;&#10;            &lt;Text style={{ fontSize: 13, fontWeight: 'bold', color: '#8FBBFF', marginBottom: 0 }}&gt;④  协视图贪心扩张（式 1）&lt;/Text&gt;&#13;&#10;            &lt;Text style={{ fontFamily: 'Consolas', fontSize: 10, color: '#7F8C9F', marginBottom: 2 }}&gt;poses/ba_problem.py:648&lt;/Text&gt;&#13;&#10;            &lt;Image src=&quot;code_png/02.png&quot; style={{ width: 568, height: 123.0 }} /&gt;&#13;&#10;        &lt;/Box&gt;&#13;&#10;        &lt;Box style={{ backgroundColor: '#1E1E1E', borderRadius: 5, padding: '5px 11px 5px 11px', flexDirection: 'column' }}&gt;&#13;&#10;            &lt;Text style={{ fontSize: 13, fontWeight: 'bold', color: '#8FBBFF', marginBottom: 0 }}&gt;⑤  局部 BA：LM 迭代 + Schur 消元&lt;/Text&gt;&#13;&#10;            &lt;Text style={{ fontFamily: 'Consolas', fontSize: 10, color: '#7F8C9F', marginBottom: 2 }}&gt;poses/mini_ba.py:285&lt;/Text&gt;&#13;&#10;            &lt;Image src=&quot;code_png/03.png&quot; style={{ width: 568, height: 160.0 }} /&gt;&#13;&#10;        &lt;/Box&gt;&#13;&#10;        &lt;/Box&gt;&#13;&#10;        &lt;Box style={{ flex: 1, flexDirection: 'column', gap: 10 }}&gt;&#13;&#10;        &lt;Box style={{ backgroundColor: '#1E1E1E', borderRadius: 5, padding: '5px 11px 5px 11px', flexDirection: 'column' }}&gt;&#13;&#10;            &lt;Text style={{ fontSize: 13, fontWeight: 'bold', color: '#8FBBFF', marginBottom: 0 }}&gt;⑥  回环检测与补边&lt;/Text&gt;&#13;&#10;            &lt;Text style={{ fontFamily: 'Consolas', fontSize: 10, color: '#7F8C9F', marginBottom: 2 }}&gt;poses/ba_problem.py:1054&lt;/Text&gt;&#13;&#10;            &lt;Image src=&quot;code_png/04.png&quot; style={{ width: 568, height: 123.0 }} /&gt;&#13;&#10;        &lt;/Box&gt;&#13;&#10;        &lt;Box style={{ backgroundColor: '#1E1E1E', borderRadius: 5, padding: '5px 11px 5px 11px', flexDirection: 'column' }}&gt;&#13;&#10;            &lt;Text style={{ fontSize: 13, fontWeight: 'bold', color: '#8FBBFF', marginBottom: 0 }}&gt;⑦-a  分块深度对齐&lt;/Text&gt;&#13;&#10;            &lt;Text style={{ fontFamily: 'Consolas', fontSize: 10, color: '#7F8C9F', marginBottom: 2 }}&gt;scene/mono_depth.py:315&lt;/Text&gt;&#13;&#10;            &lt;Image src=&quot;code_png/05.png&quot; style={{ width: 568, height: 86.0 }} /&gt;&#13;&#10;        &lt;/Box&gt;&#13;&#10;        &lt;Box style={{ backgroundColor: '#1E1E1E', borderRadius: 5, padding: '5px 11px 5px 11px', flexDirection: 'column' }}&gt;&#13;&#10;            &lt;Text style={{ fontSize: 13, fontWeight: 'bold', color: '#8FBBFF', marginBottom: 0 }}&gt;⑦-b  渐进层级与合并&lt;/Text&gt;&#13;&#10;            &lt;Text style={{ fontFamily: 'Consolas', fontSize: 10, color: '#7F8C9F', marginBottom: 2 }}&gt;scene/hierarchy_cut.py:105&lt;/Text&gt;&#13;&#10;            &lt;Image src=&quot;code_png/06.png&quot; style={{ width: 568, height: 104.5 }} /&gt;&#13;&#10;        &lt;/Box&gt;&#13;&#10;        &lt;/Box&gt;&#13;&#10;    &lt;/Box&gt;&#13;&#10;    &lt;Box style={{ padding: '7px 40px 0px 40px' }}&gt;&#13;&#10;        &lt;Text style={{ fontSize: 13.5, color: '#8B97A8', lineHeight: 1.35 }}&gt;行号指向片段起点；为投影宽度做了换行与变量缩写（w = edge_weight），逻辑未改。第 04、05–11 页已按源码默认值修正：回环触发为&lt;b&gt;加权图距 &amp;gt; 10&lt;/b&gt;；层级合并触发为&lt;b&gt;可并数 &amp;gt; max(10%, 20 万)&lt;/b&gt;，且是 &lt;b&gt;kNN 加权平均&lt;/b&gt;而非 KL。&lt;/Text&gt;&#13;&#10;    &lt;/Box&gt;&#13;&#10;&lt;/Slide&gt;&#13;&#10;"/>
+        <p:cNvPr id="238" name="" descr="&lt;Slide style={{ width: '1280px', height: '720px', backgroundColor: '#FFFFFF', padding: '0px', flexDirection: 'column' }}&gt;&#10;    &lt;Box style={{ width: '1280px', height: '8px', backgroundColor: '#1E4FA8' }} /&gt;&#10;    &lt;Box style={{ padding: '14px 40px 0px 40px', flexDirection: 'row', justifyContent: 'space-between', alignItems: 'flex-end' }}&gt;&#10;        &lt;Text style={{ fontSize: 32, fontWeight: 'bold', color: '#1E4FA8' }}&gt;附：七个步骤在源码里长什么样&lt;/Text&gt;&#10;        &lt;Text style={{ fontSize: 15, color: '#8B97A8' }}&gt;16 / 16&lt;/Text&gt;&#10;    &lt;/Box&gt;&#10;    &lt;Box style={{ padding: '5px 40px 0px 40px' }}&gt;&#10;        &lt;Text style={{ fontSize: 17, color: '#4A5568' }}&gt;真实源码截图，与第 04 页七步链、第 05–11 页逐页对应：&lt;b&gt;①②③ 定跟谁比、④ 定跟谁一起算、⑤ 才真解位姿、⑥⑦ 修漂移与压显存&lt;/b&gt;。&lt;/Text&gt;&#10;    &lt;/Box&gt;&#10;    &lt;Box style={{ padding: '8px 40px 0px 40px', flexDirection: 'row', gap: 14 }}&gt;&#10;        &lt;Box style={{ flex: 1, flexDirection: 'column', gap: 10 }}&gt;&#10;        &lt;Box style={{ backgroundColor: '#1E1E1E', borderRadius: 5, padding: '5px 11px 5px 11px', flexDirection: 'column' }}&gt;&#10;            &lt;Text style={{ fontSize: 13, fontWeight: 'bold', color: '#8FBBFF', marginBottom: 0 }}&gt;① ② ③  检索 → 粗筛 → 建边&lt;/Text&gt;&#10;            &lt;Text style={{ fontFamily: 'Consolas', fontSize: 10, color: '#7F8C9F', marginBottom: 2 }}&gt;scene/scene_model_loop_closure.py:179&lt;/Text&gt;&#10;            &lt;Image src=&quot;code_png/01.png&quot; style={{ width: 568, height: 104.5 }} /&gt;&#10;        &lt;/Box&gt;&#10;        &lt;Box style={{ backgroundColor: '#1E1E1E', borderRadius: 5, padding: '5px 11px 5px 11px', flexDirection: 'column' }}&gt;&#10;            &lt;Text style={{ fontSize: 13, fontWeight: 'bold', color: '#8FBBFF', marginBottom: 0 }}&gt;④  协视图贪心扩张（式 1）&lt;/Text&gt;&#10;            &lt;Text style={{ fontFamily: 'Consolas', fontSize: 10, color: '#7F8C9F', marginBottom: 2 }}&gt;poses/ba_problem.py:648&lt;/Text&gt;&#10;            &lt;Image src=&quot;code_png/02.png&quot; style={{ width: 568, height: 123.0 }} /&gt;&#10;        &lt;/Box&gt;&#10;        &lt;Box style={{ backgroundColor: '#1E1E1E', borderRadius: 5, padding: '5px 11px 5px 11px', flexDirection: 'column' }}&gt;&#10;            &lt;Text style={{ fontSize: 13, fontWeight: 'bold', color: '#8FBBFF', marginBottom: 0 }}&gt;⑤  局部 BA：LM 迭代 + Schur 消元&lt;/Text&gt;&#10;            &lt;Text style={{ fontFamily: 'Consolas', fontSize: 10, color: '#7F8C9F', marginBottom: 2 }}&gt;poses/mini_ba.py:285&lt;/Text&gt;&#10;            &lt;Image src=&quot;code_png/03.png&quot; style={{ width: 568, height: 160.0 }} /&gt;&#10;        &lt;/Box&gt;&#10;        &lt;/Box&gt;&#10;        &lt;Box style={{ flex: 1, flexDirection: 'column', gap: 10 }}&gt;&#10;        &lt;Box style={{ backgroundColor: '#1E1E1E', borderRadius: 5, padding: '5px 11px 5px 11px', flexDirection: 'column' }}&gt;&#10;            &lt;Text style={{ fontSize: 13, fontWeight: 'bold', color: '#8FBBFF', marginBottom: 0 }}&gt;⑥  回环检测与补边&lt;/Text&gt;&#10;            &lt;Text style={{ fontFamily: 'Consolas', fontSize: 10, color: '#7F8C9F', marginBottom: 2 }}&gt;poses/ba_problem.py:1054&lt;/Text&gt;&#10;            &lt;Image src=&quot;code_png/04.png&quot; style={{ width: 568, height: 123.0 }} /&gt;&#10;        &lt;/Box&gt;&#10;        &lt;Box style={{ backgroundColor: '#1E1E1E', borderRadius: 5, padding: '5px 11px 5px 11px', flexDirection: 'column' }}&gt;&#10;            &lt;Text style={{ fontSize: 13, fontWeight: 'bold', color: '#8FBBFF', marginBottom: 0 }}&gt;⑦-a  分块深度对齐&lt;/Text&gt;&#10;            &lt;Text style={{ fontFamily: 'Consolas', fontSize: 10, color: '#7F8C9F', marginBottom: 2 }}&gt;scene/mono_depth.py:315&lt;/Text&gt;&#10;            &lt;Image src=&quot;code_png/05.png&quot; style={{ width: 568, height: 86.0 }} /&gt;&#10;        &lt;/Box&gt;&#10;        &lt;Box style={{ backgroundColor: '#1E1E1E', borderRadius: 5, padding: '5px 11px 5px 11px', flexDirection: 'column' }}&gt;&#10;            &lt;Text style={{ fontSize: 13, fontWeight: 'bold', color: '#8FBBFF', marginBottom: 0 }}&gt;⑦-b  渐进层级与合并&lt;/Text&gt;&#10;            &lt;Text style={{ fontFamily: 'Consolas', fontSize: 10, color: '#7F8C9F', marginBottom: 2 }}&gt;scene/hierarchy_cut.py:105&lt;/Text&gt;&#10;            &lt;Image src=&quot;code_png/06.png&quot; style={{ width: 568, height: 104.5 }} /&gt;&#10;        &lt;/Box&gt;&#10;        &lt;/Box&gt;&#10;    &lt;/Box&gt;&#10;    &lt;Box style={{ padding: '7px 40px 0px 40px' }}&gt;&#10;        &lt;Text style={{ fontSize: 13.5, color: '#8B97A8', lineHeight: 1.35 }}&gt;行号指向片段起点；为投影宽度做了换行与变量缩写（w = edge_weight），逻辑未改。第 04、05–11 页已按源码默认值修正：回环触发为&lt;b&gt;加权图距 &amp;gt; 10&lt;/b&gt;；层级合并触发为&lt;b&gt;可并数 &amp;gt; max(10%, 20 万)&lt;/b&gt;，且是 &lt;b&gt;kNN 加权平均&lt;/b&gt;而非 KL。&lt;/Text&gt;&#10;    &lt;/Box&gt;&#10;&lt;/Slide&gt;&#10;"/>
         <p:cNvGrpSpPr/>
         <p:nvPr/>
       </p:nvGrpSpPr>
@@ -9862,7 +11752,7 @@
       </p:grpSpPr>
       <p:sp>
         <p:nvSpPr>
-          <p:cNvPr id="204" name=""/>
+          <p:cNvPr id="239" name=""/>
           <p:cNvSpPr/>
           <p:nvPr/>
         </p:nvSpPr>
@@ -9886,7 +11776,7 @@
       </p:sp>
       <p:sp>
         <p:nvSpPr>
-          <p:cNvPr id="205" name=""/>
+          <p:cNvPr id="240" name=""/>
           <p:cNvSpPr/>
           <p:nvPr/>
         </p:nvSpPr>
@@ -9910,7 +11800,7 @@
       </p:sp>
       <p:sp>
         <p:nvSpPr>
-          <p:cNvPr id="206" name="" descr="{&quot;isTemplate&quot;:true,&quot;type&quot;:&quot;text&quot;}"/>
+          <p:cNvPr id="241" name="" descr="{&quot;isTemplate&quot;:true,&quot;type&quot;:&quot;text&quot;}"/>
           <p:cNvSpPr txBox="1"/>
           <p:nvPr/>
         </p:nvSpPr>
@@ -9945,7 +11835,7 @@
       </p:sp>
       <p:sp>
         <p:nvSpPr>
-          <p:cNvPr id="207" name="" descr="{&quot;isTemplate&quot;:true,&quot;type&quot;:&quot;text&quot;}"/>
+          <p:cNvPr id="242" name="" descr="{&quot;isTemplate&quot;:true,&quot;type&quot;:&quot;text&quot;}"/>
           <p:cNvSpPr txBox="1"/>
           <p:nvPr/>
         </p:nvSpPr>
@@ -9972,15 +11862,15 @@
                 <a:latin typeface="Microsoft YaHei"/>
                 <a:ea typeface="Microsoft YaHei"/>
               </a:rPr>
-              <a:t>15 / 15</a:t>
-            </a:r>
-            <a:endParaRPr/>
-          </a:p>
-        </p:txBody>
-      </p:sp>
-      <p:sp>
-        <p:nvSpPr>
-          <p:cNvPr id="208" name="" descr="{&quot;isTemplate&quot;:true,&quot;type&quot;:&quot;text&quot;}"/>
+              <a:t>16 / 16</a:t>
+            </a:r>
+            <a:endParaRPr/>
+          </a:p>
+        </p:txBody>
+      </p:sp>
+      <p:sp>
+        <p:nvSpPr>
+          <p:cNvPr id="243" name="" descr="{&quot;isTemplate&quot;:true,&quot;type&quot;:&quot;text&quot;}"/>
           <p:cNvSpPr txBox="1"/>
           <p:nvPr/>
         </p:nvSpPr>
@@ -10145,7 +12035,7 @@
       </p:sp>
       <p:sp>
         <p:nvSpPr>
-          <p:cNvPr id="209" name=""/>
+          <p:cNvPr id="244" name=""/>
           <p:cNvSpPr/>
           <p:nvPr/>
         </p:nvSpPr>
@@ -10171,7 +12061,7 @@
       </p:sp>
       <p:sp>
         <p:nvSpPr>
-          <p:cNvPr id="210" name="" descr="{&quot;isTemplate&quot;:true,&quot;type&quot;:&quot;text&quot;}"/>
+          <p:cNvPr id="245" name="" descr="{&quot;isTemplate&quot;:true,&quot;type&quot;:&quot;text&quot;}"/>
           <p:cNvSpPr txBox="1"/>
           <p:nvPr/>
         </p:nvSpPr>
@@ -10256,7 +12146,7 @@
       </p:sp>
       <p:sp>
         <p:nvSpPr>
-          <p:cNvPr id="211" name="" descr="{&quot;isTemplate&quot;:true,&quot;type&quot;:&quot;text&quot;}"/>
+          <p:cNvPr id="246" name="" descr="{&quot;isTemplate&quot;:true,&quot;type&quot;:&quot;text&quot;}"/>
           <p:cNvSpPr txBox="1"/>
           <p:nvPr/>
         </p:nvSpPr>
@@ -10291,7 +12181,7 @@
       </p:sp>
       <p:pic>
         <p:nvPicPr>
-          <p:cNvPr id="212" name=""/>
+          <p:cNvPr id="247" name=""/>
           <p:cNvPicPr>
             <a:picLocks noChangeAspect="1"/>
           </p:cNvPicPr>
@@ -10317,7 +12207,7 @@
       </p:pic>
       <p:sp>
         <p:nvSpPr>
-          <p:cNvPr id="213" name=""/>
+          <p:cNvPr id="248" name=""/>
           <p:cNvSpPr/>
           <p:nvPr/>
         </p:nvSpPr>
@@ -10343,7 +12233,7 @@
       </p:sp>
       <p:sp>
         <p:nvSpPr>
-          <p:cNvPr id="214" name="" descr="{&quot;isTemplate&quot;:true,&quot;type&quot;:&quot;text&quot;}"/>
+          <p:cNvPr id="249" name="" descr="{&quot;isTemplate&quot;:true,&quot;type&quot;:&quot;text&quot;}"/>
           <p:cNvSpPr txBox="1"/>
           <p:nvPr/>
         </p:nvSpPr>
@@ -10408,7 +12298,7 @@
       </p:sp>
       <p:sp>
         <p:nvSpPr>
-          <p:cNvPr id="215" name="" descr="{&quot;isTemplate&quot;:true,&quot;type&quot;:&quot;text&quot;}"/>
+          <p:cNvPr id="250" name="" descr="{&quot;isTemplate&quot;:true,&quot;type&quot;:&quot;text&quot;}"/>
           <p:cNvSpPr txBox="1"/>
           <p:nvPr/>
         </p:nvSpPr>
@@ -10443,7 +12333,7 @@
       </p:sp>
       <p:pic>
         <p:nvPicPr>
-          <p:cNvPr id="216" name=""/>
+          <p:cNvPr id="251" name=""/>
           <p:cNvPicPr>
             <a:picLocks noChangeAspect="1"/>
           </p:cNvPicPr>
@@ -10468,7 +12358,7 @@
       </p:pic>
       <p:sp>
         <p:nvSpPr>
-          <p:cNvPr id="217" name=""/>
+          <p:cNvPr id="252" name=""/>
           <p:cNvSpPr/>
           <p:nvPr/>
         </p:nvSpPr>
@@ -10494,7 +12384,7 @@
       </p:sp>
       <p:sp>
         <p:nvSpPr>
-          <p:cNvPr id="218" name="" descr="{&quot;isTemplate&quot;:true,&quot;type&quot;:&quot;text&quot;}"/>
+          <p:cNvPr id="253" name="" descr="{&quot;isTemplate&quot;:true,&quot;type&quot;:&quot;text&quot;}"/>
           <p:cNvSpPr txBox="1"/>
           <p:nvPr/>
         </p:nvSpPr>
@@ -10599,7 +12489,7 @@
       </p:sp>
       <p:sp>
         <p:nvSpPr>
-          <p:cNvPr id="219" name="" descr="{&quot;isTemplate&quot;:true,&quot;type&quot;:&quot;text&quot;}"/>
+          <p:cNvPr id="254" name="" descr="{&quot;isTemplate&quot;:true,&quot;type&quot;:&quot;text&quot;}"/>
           <p:cNvSpPr txBox="1"/>
           <p:nvPr/>
         </p:nvSpPr>
@@ -10634,7 +12524,7 @@
       </p:sp>
       <p:pic>
         <p:nvPicPr>
-          <p:cNvPr id="220" name=""/>
+          <p:cNvPr id="255" name=""/>
           <p:cNvPicPr>
             <a:picLocks noChangeAspect="1"/>
           </p:cNvPicPr>
@@ -10659,7 +12549,7 @@
       </p:pic>
       <p:sp>
         <p:nvSpPr>
-          <p:cNvPr id="221" name=""/>
+          <p:cNvPr id="256" name=""/>
           <p:cNvSpPr/>
           <p:nvPr/>
         </p:nvSpPr>
@@ -10685,7 +12575,7 @@
       </p:sp>
       <p:sp>
         <p:nvSpPr>
-          <p:cNvPr id="222" name="" descr="{&quot;isTemplate&quot;:true,&quot;type&quot;:&quot;text&quot;}"/>
+          <p:cNvPr id="257" name="" descr="{&quot;isTemplate&quot;:true,&quot;type&quot;:&quot;text&quot;}"/>
           <p:cNvSpPr txBox="1"/>
           <p:nvPr/>
         </p:nvSpPr>
@@ -10730,7 +12620,7 @@
       </p:sp>
       <p:sp>
         <p:nvSpPr>
-          <p:cNvPr id="223" name="" descr="{&quot;isTemplate&quot;:true,&quot;type&quot;:&quot;text&quot;}"/>
+          <p:cNvPr id="258" name="" descr="{&quot;isTemplate&quot;:true,&quot;type&quot;:&quot;text&quot;}"/>
           <p:cNvSpPr txBox="1"/>
           <p:nvPr/>
         </p:nvSpPr>
@@ -10765,7 +12655,7 @@
       </p:sp>
       <p:pic>
         <p:nvPicPr>
-          <p:cNvPr id="224" name=""/>
+          <p:cNvPr id="259" name=""/>
           <p:cNvPicPr>
             <a:picLocks noChangeAspect="1"/>
           </p:cNvPicPr>
@@ -10790,7 +12680,7 @@
       </p:pic>
       <p:sp>
         <p:nvSpPr>
-          <p:cNvPr id="225" name=""/>
+          <p:cNvPr id="260" name=""/>
           <p:cNvSpPr/>
           <p:nvPr/>
         </p:nvSpPr>
@@ -10816,7 +12706,7 @@
       </p:sp>
       <p:sp>
         <p:nvSpPr>
-          <p:cNvPr id="226" name="" descr="{&quot;isTemplate&quot;:true,&quot;type&quot;:&quot;text&quot;}"/>
+          <p:cNvPr id="261" name="" descr="{&quot;isTemplate&quot;:true,&quot;type&quot;:&quot;text&quot;}"/>
           <p:cNvSpPr txBox="1"/>
           <p:nvPr/>
         </p:nvSpPr>
@@ -10861,7 +12751,7 @@
       </p:sp>
       <p:sp>
         <p:nvSpPr>
-          <p:cNvPr id="227" name="" descr="{&quot;isTemplate&quot;:true,&quot;type&quot;:&quot;text&quot;}"/>
+          <p:cNvPr id="262" name="" descr="{&quot;isTemplate&quot;:true,&quot;type&quot;:&quot;text&quot;}"/>
           <p:cNvSpPr txBox="1"/>
           <p:nvPr/>
         </p:nvSpPr>
@@ -10896,7 +12786,7 @@
       </p:sp>
       <p:pic>
         <p:nvPicPr>
-          <p:cNvPr id="228" name=""/>
+          <p:cNvPr id="263" name=""/>
           <p:cNvPicPr>
             <a:picLocks noChangeAspect="1"/>
           </p:cNvPicPr>
@@ -10921,7 +12811,7 @@
       </p:pic>
       <p:sp>
         <p:nvSpPr>
-          <p:cNvPr id="229" name=""/>
+          <p:cNvPr id="264" name=""/>
           <p:cNvSpPr/>
           <p:nvPr/>
         </p:nvSpPr>
@@ -10947,7 +12837,7 @@
       </p:sp>
       <p:sp>
         <p:nvSpPr>
-          <p:cNvPr id="230" name="" descr="{&quot;isTemplate&quot;:true,&quot;type&quot;:&quot;text&quot;}"/>
+          <p:cNvPr id="265" name="" descr="{&quot;isTemplate&quot;:true,&quot;type&quot;:&quot;text&quot;}"/>
           <p:cNvSpPr txBox="1"/>
           <p:nvPr/>
         </p:nvSpPr>
@@ -10992,7 +12882,7 @@
       </p:sp>
       <p:sp>
         <p:nvSpPr>
-          <p:cNvPr id="231" name="" descr="{&quot;isTemplate&quot;:true,&quot;type&quot;:&quot;text&quot;}"/>
+          <p:cNvPr id="266" name="" descr="{&quot;isTemplate&quot;:true,&quot;type&quot;:&quot;text&quot;}"/>
           <p:cNvSpPr txBox="1"/>
           <p:nvPr/>
         </p:nvSpPr>
@@ -11027,7 +12917,7 @@
       </p:sp>
       <p:pic>
         <p:nvPicPr>
-          <p:cNvPr id="232" name=""/>
+          <p:cNvPr id="267" name=""/>
           <p:cNvPicPr>
             <a:picLocks noChangeAspect="1"/>
           </p:cNvPicPr>
@@ -11053,7 +12943,7 @@
       </p:pic>
       <p:sp>
         <p:nvSpPr>
-          <p:cNvPr id="233" name="" descr="{&quot;isTemplate&quot;:true,&quot;type&quot;:&quot;text&quot;}"/>
+          <p:cNvPr id="268" name="" descr="{&quot;isTemplate&quot;:true,&quot;type&quot;:&quot;text&quot;}"/>
           <p:cNvSpPr txBox="1"/>
           <p:nvPr/>
         </p:nvSpPr>
@@ -11298,7 +13188,7 @@
   <p:cSld>
     <p:spTree>
       <p:nvGrpSpPr>
-        <p:cNvPr id="234" name="" descr="&lt;Slide style={{ width: '1280px', height: '720px', backgroundColor: '#FFFFFF', padding: '0px', flexDirection: 'column' }}&gt;&#10;    &lt;Box style={{ width: '1280px', height: '8px', backgroundColor: '#1E4FA8' }} /&gt;&#10;    &lt;Box style={{ padding: '24px 40px 0px 40px', flexDirection: 'row', justifyContent: 'space-between', alignItems: 'flex-end' }}&gt;&#10;        &lt;Text style={{ fontSize: 33, fontWeight: 'bold', color: '#1E4FA8' }}&gt;研究背景：两条路都卡在同一个前提上&lt;/Text&gt;&#10;        &lt;Text style={{ fontSize: 15, color: '#8B97A8' }}&gt;02 / 15&lt;/Text&gt;&#10;    &lt;/Box&gt;&#10;    &lt;Box style={{ padding: '8px 40px 0px 40px' }}&gt;&#10;        &lt;Text style={{ fontSize: 20, color: '#4A5568', lineHeight: 1.4 }}&gt;拿到“一组照片 → 一个可漫游的 3D 场景”，过去只有两条路。它们的分歧不在算法细节，而在&lt;b&gt;什么时候允许开始计算&lt;/b&gt;。&lt;/Text&gt;&#10;    &lt;/Box&gt;&#10;&#10;    &lt;Box style={{ padding: '14px 40px 0px 40px', flexDirection: 'row', gap: 22 }}&gt;&#10;        &lt;Box style={{ flex: 1, backgroundColor: '#F7F9FC', border: '1px solid #D6DCE5', borderRadius: 6, padding: '13px 18px', flexDirection: 'column' }}&gt;&#10;            &lt;Text style={{ fontSize: 24, fontWeight: 'bold', color: '#1A2230' }}&gt;路线一　离线 SfM + 3DGS&lt;/Text&gt;&#10;            &lt;Text style={{ fontSize: 16, color: '#4A5568', marginTop: 4 }}&gt;COLMAP / GLOMAP ＋ 3DGS、H3DGS、Octree-GS&lt;/Text&gt;&#10;            &lt;Text style={{ fontSize: 19, color: '#1A2230', lineHeight: 1.5, marginTop: 9 }}&gt;先把所有照片两两匹配、三角化、全局 BA 解出位姿，再训练高斯。质量最高、全局一致，但&lt;b&gt;必须等图全部到齐&lt;/b&gt;。&lt;/Text&gt;&#10;            &lt;Text style={{ fontSize: 19, color: '#1E4FA8', fontWeight: 'bold', marginTop: 8 }}&gt;前提：先有完整的照片集合&lt;/Text&gt;&#10;            &lt;Text style={{ fontSize: 19, color: '#D9534F', fontWeight: 'bold', marginTop: 2 }}&gt;代价：现场给不出任何反馈&lt;/Text&gt;&#10;        &lt;/Box&gt;&#10;        &lt;Box style={{ flex: 1, backgroundColor: '#F0F5FC', border: '1px solid #3D7BD9', borderRadius: 6, padding: '13px 18px', flexDirection: 'column' }}&gt;&#10;            &lt;Text style={{ fontSize: 24, fontWeight: 'bold', color: '#1A2230' }}&gt;路线二　增量 / 类 SLAM&lt;/Text&gt;&#10;            &lt;Text style={{ fontSize: 16, color: '#4A5568', marginTop: 4 }}&gt;Photo-SLAM、MonoGS、Droid-Splat、LongSplat&lt;/Text&gt;&#10;            &lt;Text style={{ fontSize: 19, color: '#1A2230', lineHeight: 1.5, marginTop: 9 }}&gt;边收边建、可交互，但新帧只与&lt;b&gt;时间上相邻&lt;/b&gt;的少数帧匹配（通常 5 帧窗口），转身回访、拼接两段序列就断了。&lt;/Text&gt;&#10;            &lt;Text style={{ fontSize: 19, color: '#1E4FA8', fontWeight: 'bold', marginTop: 8 }}&gt;前提：输入必须是连续视频&lt;/Text&gt;&#10;            &lt;Text style={{ fontSize: 19, color: '#D9534F', fontWeight: 'bold', marginTop: 2 }}&gt;代价：离开时间邻域就失效&lt;/Text&gt;&#10;        &lt;/Box&gt;&#10;    &lt;/Box&gt;&#10;&#10;    &lt;Box style={{ margin: '12px 40px 0px 40px', backgroundColor: '#1E4FA8', borderRadius: 6, padding: '11px 22px' }}&gt;&#10;        &lt;Text style={{ fontSize: 21, fontWeight: 'bold', color: '#FFFFFF', lineHeight: 1.4 }}&gt;两条路的前提是同一个东西：&lt;b&gt;帧序&lt;/b&gt;——一条等它全部确定，一条假设它天然有序，而真实拍摄两样都不满足。&lt;/Text&gt;&#10;    &lt;/Box&gt;&#10;&#10;    &lt;Box style={{ padding: '12px 40px 0px 40px', flexDirection: 'row', gap: 14 }}&gt;&#10;        &lt;Box style={{ flex: 1, backgroundColor: '#F7F9FC', border: '1px solid #D6DCE5', borderRadius: 6, padding: '10px 14px', flexDirection: 'column' }}&gt;&#10;            &lt;Text style={{ fontSize: 21, fontWeight: 'bold', color: '#1A2230' }}&gt;① 等&lt;/Text&gt;&#10;            &lt;Text style={{ fontSize: 16.5, color: '#1A2230', lineHeight: 1.4, marginTop: 5 }}&gt;全部图像就位才能开算，拍完不知道行不行，回家发现漏拍只能重拍。&lt;/Text&gt;&#10;            &lt;Text style={{ fontSize: 15, color: '#D9534F', fontWeight: 'bold', marginTop: 4 }}&gt;返工成本最高&lt;/Text&gt;&#10;        &lt;/Box&gt;&#10;        &lt;Box style={{ flex: 1, backgroundColor: '#F7F9FC', border: '1px solid #D6DCE5', borderRadius: 6, padding: '10px 14px', flexDirection: 'column' }}&gt;&#10;            &lt;Text style={{ fontSize: 21, fontWeight: 'bold', color: '#1A2230' }}&gt;② 乱&lt;/Text&gt;&#10;            &lt;Text style={{ fontSize: 16.5, color: '#1A2230', lineHeight: 1.4, marginTop: 5 }}&gt;随手拍的顺序与空间邻接无关，只能两两匹配：1000 张约 50 万对。&lt;/Text&gt;&#10;            &lt;Text style={{ fontSize: 15, color: '#D9534F', fontWeight: 'bold', marginTop: 4 }}&gt;SfM 从分钟变小时&lt;/Text&gt;&#10;        &lt;/Box&gt;&#10;        &lt;Box style={{ flex: 1, backgroundColor: '#F7F9FC', border: '1px solid #D6DCE5', borderRadius: 6, padding: '10px 14px', flexDirection: 'column' }}&gt;&#10;            &lt;Text style={{ fontSize: 21, fontWeight: 'bold', color: '#1A2230' }}&gt;③ 漂&lt;/Text&gt;&#10;            &lt;Text style={{ fontSize: 16.5, color: '#1A2230', lineHeight: 1.4, marginTop: 5 }}&gt;边走边建误差累积，绕一圈回来首尾差半米；传统做法重跑全局 BA。&lt;/Text&gt;&#10;            &lt;Text style={{ fontSize: 15, color: '#D9534F', fontWeight: 'bold', marginTop: 4 }}&gt;实时性当场归零&lt;/Text&gt;&#10;        &lt;/Box&gt;&#10;        &lt;Box style={{ flex: 1, backgroundColor: '#F7F9FC', border: '1px solid #D6DCE5', borderRadius: 6, padding: '10px 14px', flexDirection: 'column' }}&gt;&#10;            &lt;Text style={{ fontSize: 21, fontWeight: 'bold', color: '#1A2230' }}&gt;④ 爆&lt;/Text&gt;&#10;            &lt;Text style={{ fontSize: 16.5, color: '#1A2230', lineHeight: 1.4, marginTop: 5 }}&gt;高斯数随场景线性增长：不开层级，CityWalk 到第 795 / 4050 帧就 OOM。&lt;/Text&gt;&#10;            &lt;Text style={{ fontSize: 15, color: '#D9534F', fontWeight: 'bold', marginTop: 4 }}&gt;规模一上来就跑不完&lt;/Text&gt;&#10;        &lt;/Box&gt;&#10;    &lt;/Box&gt;&#10;&#10;    &lt;Box style={{ marginTop: 'auto', margin: '10px 40px 12px 40px', backgroundColor: '#F0F5FC', borderLeft: '5px solid #1E4FA8', padding: '9px 18px' }}&gt;&#10;        &lt;Text style={{ fontSize: 18, color: '#1A2230', lineHeight: 1.4 }}&gt;四个现象收敛成三条必须&lt;b&gt;同时&lt;/b&gt;成立的约束：即时（每帧数百毫秒）· 无序（不依赖帧序）· 全局一致（回环能修）——过去的方法最多同时满足两条。&lt;/Text&gt;&#10;    &lt;/Box&gt;&#10;&lt;/Slide&gt;&#10;"/>
+        <p:cNvPr id="269" name="" descr="&lt;Slide style={{ width: '1280px', height: '720px', backgroundColor: '#FFFFFF', padding: '0px', flexDirection: 'column' }}&gt;&#10;    &lt;Box style={{ width: '1280px', height: '8px', backgroundColor: '#1E4FA8' }} /&gt;&#10;    &lt;Box style={{ padding: '24px 40px 0px 40px', flexDirection: 'row', justifyContent: 'space-between', alignItems: 'flex-end' }}&gt;&#10;        &lt;Text style={{ fontSize: 33, fontWeight: 'bold', color: '#1E4FA8' }}&gt;研究背景：两条路都卡在同一个前提上&lt;/Text&gt;&#10;        &lt;Text style={{ fontSize: 15, color: '#8B97A8' }}&gt;02 / 16&lt;/Text&gt;&#10;    &lt;/Box&gt;&#10;    &lt;Box style={{ padding: '8px 40px 0px 40px' }}&gt;&#10;        &lt;Text style={{ fontSize: 20, color: '#4A5568', lineHeight: 1.4 }}&gt;拿到“一组照片 → 一个可漫游的 3D 场景”，过去只有两条路。它们的分歧不在算法细节，而在&lt;b&gt;什么时候允许开始计算&lt;/b&gt;。&lt;/Text&gt;&#10;    &lt;/Box&gt;&#10;&#10;    &lt;Box style={{ padding: '14px 40px 0px 40px', flexDirection: 'row', gap: 22 }}&gt;&#10;        &lt;Box style={{ flex: 1, backgroundColor: '#F7F9FC', border: '1px solid #D6DCE5', borderRadius: 6, padding: '13px 18px', flexDirection: 'column' }}&gt;&#10;            &lt;Text style={{ fontSize: 24, fontWeight: 'bold', color: '#1A2230' }}&gt;路线一　离线 SfM + 3DGS&lt;/Text&gt;&#10;            &lt;Text style={{ fontSize: 16, color: '#4A5568', marginTop: 4 }}&gt;COLMAP / GLOMAP ＋ 3DGS、H3DGS、Octree-GS&lt;/Text&gt;&#10;            &lt;Text style={{ fontSize: 19, color: '#1A2230', lineHeight: 1.5, marginTop: 9 }}&gt;先把所有照片两两匹配、三角化、全局 BA 解出位姿，再训练高斯。质量最高、全局一致，但&lt;b&gt;必须等图全部到齐&lt;/b&gt;。&lt;/Text&gt;&#10;            &lt;Text style={{ fontSize: 19, color: '#1E4FA8', fontWeight: 'bold', marginTop: 8 }}&gt;前提：先有完整的照片集合&lt;/Text&gt;&#10;            &lt;Text style={{ fontSize: 19, color: '#D9534F', fontWeight: 'bold', marginTop: 2 }}&gt;代价：现场给不出任何反馈&lt;/Text&gt;&#10;        &lt;/Box&gt;&#10;        &lt;Box style={{ flex: 1, backgroundColor: '#F0F5FC', border: '1px solid #3D7BD9', borderRadius: 6, padding: '13px 18px', flexDirection: 'column' }}&gt;&#10;            &lt;Text style={{ fontSize: 24, fontWeight: 'bold', color: '#1A2230' }}&gt;路线二　增量 / 类 SLAM&lt;/Text&gt;&#10;            &lt;Text style={{ fontSize: 16, color: '#4A5568', marginTop: 4 }}&gt;Photo-SLAM、MonoGS、Droid-Splat、LongSplat&lt;/Text&gt;&#10;            &lt;Text style={{ fontSize: 19, color: '#1A2230', lineHeight: 1.5, marginTop: 9 }}&gt;边收边建、可交互，但新帧只与&lt;b&gt;时间上相邻&lt;/b&gt;的少数帧匹配（通常 5 帧窗口），转身回访、拼接两段序列就断了。&lt;/Text&gt;&#10;            &lt;Text style={{ fontSize: 19, color: '#1E4FA8', fontWeight: 'bold', marginTop: 8 }}&gt;前提：输入必须是连续视频&lt;/Text&gt;&#10;            &lt;Text style={{ fontSize: 19, color: '#D9534F', fontWeight: 'bold', marginTop: 2 }}&gt;代价：离开时间邻域就失效&lt;/Text&gt;&#10;        &lt;/Box&gt;&#10;    &lt;/Box&gt;&#10;&#10;    &lt;Box style={{ margin: '12px 40px 0px 40px', backgroundColor: '#1E4FA8', borderRadius: 6, padding: '11px 22px' }}&gt;&#10;        &lt;Text style={{ fontSize: 21, fontWeight: 'bold', color: '#FFFFFF', lineHeight: 1.4 }}&gt;两条路的前提是同一个东西：&lt;b&gt;帧序&lt;/b&gt;——一条等它全部确定，一条假设它天然有序，而真实拍摄两样都不满足。&lt;/Text&gt;&#10;    &lt;/Box&gt;&#10;&#10;    &lt;Box style={{ padding: '12px 40px 0px 40px', flexDirection: 'row', gap: 14 }}&gt;&#10;        &lt;Box style={{ flex: 1, backgroundColor: '#F7F9FC', border: '1px solid #D6DCE5', borderRadius: 6, padding: '10px 14px', flexDirection: 'column' }}&gt;&#10;            &lt;Text style={{ fontSize: 21, fontWeight: 'bold', color: '#1A2230' }}&gt;① 等&lt;/Text&gt;&#10;            &lt;Text style={{ fontSize: 16.5, color: '#1A2230', lineHeight: 1.4, marginTop: 5 }}&gt;全部图像就位才能开算，拍完不知道行不行，回家发现漏拍只能重拍。&lt;/Text&gt;&#10;            &lt;Text style={{ fontSize: 15, color: '#D9534F', fontWeight: 'bold', marginTop: 4 }}&gt;返工成本最高&lt;/Text&gt;&#10;        &lt;/Box&gt;&#10;        &lt;Box style={{ flex: 1, backgroundColor: '#F7F9FC', border: '1px solid #D6DCE5', borderRadius: 6, padding: '10px 14px', flexDirection: 'column' }}&gt;&#10;            &lt;Text style={{ fontSize: 21, fontWeight: 'bold', color: '#1A2230' }}&gt;② 乱&lt;/Text&gt;&#10;            &lt;Text style={{ fontSize: 16.5, color: '#1A2230', lineHeight: 1.4, marginTop: 5 }}&gt;随手拍的顺序与空间邻接无关，只能两两匹配：1000 张约 50 万对。&lt;/Text&gt;&#10;            &lt;Text style={{ fontSize: 15, color: '#D9534F', fontWeight: 'bold', marginTop: 4 }}&gt;SfM 从分钟变小时&lt;/Text&gt;&#10;        &lt;/Box&gt;&#10;        &lt;Box style={{ flex: 1, backgroundColor: '#F7F9FC', border: '1px solid #D6DCE5', borderRadius: 6, padding: '10px 14px', flexDirection: 'column' }}&gt;&#10;            &lt;Text style={{ fontSize: 21, fontWeight: 'bold', color: '#1A2230' }}&gt;③ 漂&lt;/Text&gt;&#10;            &lt;Text style={{ fontSize: 16.5, color: '#1A2230', lineHeight: 1.4, marginTop: 5 }}&gt;边走边建误差累积，绕一圈回来首尾差半米；传统做法重跑全局 BA。&lt;/Text&gt;&#10;            &lt;Text style={{ fontSize: 15, color: '#D9534F', fontWeight: 'bold', marginTop: 4 }}&gt;实时性当场归零&lt;/Text&gt;&#10;        &lt;/Box&gt;&#10;        &lt;Box style={{ flex: 1, backgroundColor: '#F7F9FC', border: '1px solid #D6DCE5', borderRadius: 6, padding: '10px 14px', flexDirection: 'column' }}&gt;&#10;            &lt;Text style={{ fontSize: 21, fontWeight: 'bold', color: '#1A2230' }}&gt;④ 爆&lt;/Text&gt;&#10;            &lt;Text style={{ fontSize: 16.5, color: '#1A2230', lineHeight: 1.4, marginTop: 5 }}&gt;高斯数随场景线性增长：不开层级，CityWalk 到第 795 / 4050 帧就 OOM。&lt;/Text&gt;&#10;            &lt;Text style={{ fontSize: 15, color: '#D9534F', fontWeight: 'bold', marginTop: 4 }}&gt;规模一上来就跑不完&lt;/Text&gt;&#10;        &lt;/Box&gt;&#10;    &lt;/Box&gt;&#10;&#10;    &lt;Box style={{ marginTop: 'auto', margin: '10px 40px 12px 40px', backgroundColor: '#F0F5FC', borderLeft: '5px solid #1E4FA8', padding: '9px 18px' }}&gt;&#10;        &lt;Text style={{ fontSize: 18, color: '#1A2230', lineHeight: 1.4 }}&gt;四个现象收敛成三条必须&lt;b&gt;同时&lt;/b&gt;成立的约束：即时（每帧数百毫秒）· 无序（不依赖帧序）· 全局一致（回环能修）——过去的方法最多同时满足两条。&lt;/Text&gt;&#10;    &lt;/Box&gt;&#10;&lt;/Slide&gt;&#10;"/>
         <p:cNvGrpSpPr/>
         <p:nvPr/>
       </p:nvGrpSpPr>
@@ -11312,7 +13202,7 @@
       </p:grpSpPr>
       <p:sp>
         <p:nvSpPr>
-          <p:cNvPr id="235" name=""/>
+          <p:cNvPr id="270" name=""/>
           <p:cNvSpPr/>
           <p:nvPr/>
         </p:nvSpPr>
@@ -11336,7 +13226,7 @@
       </p:sp>
       <p:sp>
         <p:nvSpPr>
-          <p:cNvPr id="236" name=""/>
+          <p:cNvPr id="271" name=""/>
           <p:cNvSpPr/>
           <p:nvPr/>
         </p:nvSpPr>
@@ -11360,7 +13250,7 @@
       </p:sp>
       <p:sp>
         <p:nvSpPr>
-          <p:cNvPr id="237" name="" descr="{&quot;isTemplate&quot;:true,&quot;type&quot;:&quot;text&quot;}"/>
+          <p:cNvPr id="272" name="" descr="{&quot;isTemplate&quot;:true,&quot;type&quot;:&quot;text&quot;}"/>
           <p:cNvSpPr txBox="1"/>
           <p:nvPr/>
         </p:nvSpPr>
@@ -11395,7 +13285,7 @@
       </p:sp>
       <p:sp>
         <p:nvSpPr>
-          <p:cNvPr id="238" name="" descr="{&quot;isTemplate&quot;:true,&quot;type&quot;:&quot;text&quot;}"/>
+          <p:cNvPr id="273" name="" descr="{&quot;isTemplate&quot;:true,&quot;type&quot;:&quot;text&quot;}"/>
           <p:cNvSpPr txBox="1"/>
           <p:nvPr/>
         </p:nvSpPr>
@@ -11422,15 +13312,15 @@
                 <a:latin typeface="Microsoft YaHei"/>
                 <a:ea typeface="Microsoft YaHei"/>
               </a:rPr>
-              <a:t>02 / 15</a:t>
-            </a:r>
-            <a:endParaRPr/>
-          </a:p>
-        </p:txBody>
-      </p:sp>
-      <p:sp>
-        <p:nvSpPr>
-          <p:cNvPr id="239" name="" descr="{&quot;isTemplate&quot;:true,&quot;type&quot;:&quot;text&quot;}"/>
+              <a:t>02 / 16</a:t>
+            </a:r>
+            <a:endParaRPr/>
+          </a:p>
+        </p:txBody>
+      </p:sp>
+      <p:sp>
+        <p:nvSpPr>
+          <p:cNvPr id="274" name="" descr="{&quot;isTemplate&quot;:true,&quot;type&quot;:&quot;text&quot;}"/>
           <p:cNvSpPr txBox="1"/>
           <p:nvPr/>
         </p:nvSpPr>
@@ -11525,7 +13415,7 @@
       </p:sp>
       <p:sp>
         <p:nvSpPr>
-          <p:cNvPr id="240" name=""/>
+          <p:cNvPr id="275" name=""/>
           <p:cNvSpPr/>
           <p:nvPr/>
         </p:nvSpPr>
@@ -11556,7 +13446,7 @@
       </p:sp>
       <p:sp>
         <p:nvSpPr>
-          <p:cNvPr id="241" name="" descr="{&quot;isTemplate&quot;:true,&quot;type&quot;:&quot;text&quot;}"/>
+          <p:cNvPr id="276" name="" descr="{&quot;isTemplate&quot;:true,&quot;type&quot;:&quot;text&quot;}"/>
           <p:cNvSpPr txBox="1"/>
           <p:nvPr/>
         </p:nvSpPr>
@@ -11601,7 +13491,7 @@
       </p:sp>
       <p:sp>
         <p:nvSpPr>
-          <p:cNvPr id="242" name="" descr="{&quot;isTemplate&quot;:true,&quot;type&quot;:&quot;text&quot;}"/>
+          <p:cNvPr id="277" name="" descr="{&quot;isTemplate&quot;:true,&quot;type&quot;:&quot;text&quot;}"/>
           <p:cNvSpPr txBox="1"/>
           <p:nvPr/>
         </p:nvSpPr>
@@ -11696,7 +13586,7 @@
       </p:sp>
       <p:sp>
         <p:nvSpPr>
-          <p:cNvPr id="243" name="" descr="{&quot;isTemplate&quot;:true,&quot;type&quot;:&quot;text&quot;}"/>
+          <p:cNvPr id="278" name="" descr="{&quot;isTemplate&quot;:true,&quot;type&quot;:&quot;text&quot;}"/>
           <p:cNvSpPr txBox="1"/>
           <p:nvPr/>
         </p:nvSpPr>
@@ -11773,7 +13663,7 @@
       </p:sp>
       <p:sp>
         <p:nvSpPr>
-          <p:cNvPr id="244" name="" descr="{&quot;isTemplate&quot;:true,&quot;type&quot;:&quot;text&quot;}"/>
+          <p:cNvPr id="279" name="" descr="{&quot;isTemplate&quot;:true,&quot;type&quot;:&quot;text&quot;}"/>
           <p:cNvSpPr txBox="1"/>
           <p:nvPr/>
         </p:nvSpPr>
@@ -11808,7 +13698,7 @@
       </p:sp>
       <p:sp>
         <p:nvSpPr>
-          <p:cNvPr id="245" name="" descr="{&quot;isTemplate&quot;:true,&quot;type&quot;:&quot;text&quot;}"/>
+          <p:cNvPr id="280" name="" descr="{&quot;isTemplate&quot;:true,&quot;type&quot;:&quot;text&quot;}"/>
           <p:cNvSpPr txBox="1"/>
           <p:nvPr/>
         </p:nvSpPr>
@@ -11843,7 +13733,7 @@
       </p:sp>
       <p:sp>
         <p:nvSpPr>
-          <p:cNvPr id="246" name=""/>
+          <p:cNvPr id="281" name=""/>
           <p:cNvSpPr/>
           <p:nvPr/>
         </p:nvSpPr>
@@ -11874,7 +13764,7 @@
       </p:sp>
       <p:sp>
         <p:nvSpPr>
-          <p:cNvPr id="247" name="" descr="{&quot;isTemplate&quot;:true,&quot;type&quot;:&quot;text&quot;}"/>
+          <p:cNvPr id="282" name="" descr="{&quot;isTemplate&quot;:true,&quot;type&quot;:&quot;text&quot;}"/>
           <p:cNvSpPr txBox="1"/>
           <p:nvPr/>
         </p:nvSpPr>
@@ -11939,7 +13829,7 @@
       </p:sp>
       <p:sp>
         <p:nvSpPr>
-          <p:cNvPr id="248" name="" descr="{&quot;isTemplate&quot;:true,&quot;type&quot;:&quot;text&quot;}"/>
+          <p:cNvPr id="283" name="" descr="{&quot;isTemplate&quot;:true,&quot;type&quot;:&quot;text&quot;}"/>
           <p:cNvSpPr txBox="1"/>
           <p:nvPr/>
         </p:nvSpPr>
@@ -12034,7 +13924,7 @@
       </p:sp>
       <p:sp>
         <p:nvSpPr>
-          <p:cNvPr id="249" name="" descr="{&quot;isTemplate&quot;:true,&quot;type&quot;:&quot;text&quot;}"/>
+          <p:cNvPr id="284" name="" descr="{&quot;isTemplate&quot;:true,&quot;type&quot;:&quot;text&quot;}"/>
           <p:cNvSpPr txBox="1"/>
           <p:nvPr/>
         </p:nvSpPr>
@@ -12111,7 +14001,7 @@
       </p:sp>
       <p:sp>
         <p:nvSpPr>
-          <p:cNvPr id="250" name="" descr="{&quot;isTemplate&quot;:true,&quot;type&quot;:&quot;text&quot;}"/>
+          <p:cNvPr id="285" name="" descr="{&quot;isTemplate&quot;:true,&quot;type&quot;:&quot;text&quot;}"/>
           <p:cNvSpPr txBox="1"/>
           <p:nvPr/>
         </p:nvSpPr>
@@ -12146,7 +14036,7 @@
       </p:sp>
       <p:sp>
         <p:nvSpPr>
-          <p:cNvPr id="251" name="" descr="{&quot;isTemplate&quot;:true,&quot;type&quot;:&quot;text&quot;}"/>
+          <p:cNvPr id="286" name="" descr="{&quot;isTemplate&quot;:true,&quot;type&quot;:&quot;text&quot;}"/>
           <p:cNvSpPr txBox="1"/>
           <p:nvPr/>
         </p:nvSpPr>
@@ -12181,7 +14071,7 @@
       </p:sp>
       <p:sp>
         <p:nvSpPr>
-          <p:cNvPr id="252" name=""/>
+          <p:cNvPr id="287" name=""/>
           <p:cNvSpPr/>
           <p:nvPr/>
         </p:nvSpPr>
@@ -12207,7 +14097,7 @@
       </p:sp>
       <p:sp>
         <p:nvSpPr>
-          <p:cNvPr id="253" name="" descr="{&quot;isTemplate&quot;:true,&quot;type&quot;:&quot;text&quot;}"/>
+          <p:cNvPr id="288" name="" descr="{&quot;isTemplate&quot;:true,&quot;type&quot;:&quot;text&quot;}"/>
           <p:cNvSpPr txBox="1"/>
           <p:nvPr/>
         </p:nvSpPr>
@@ -12262,7 +14152,7 @@
       </p:sp>
       <p:sp>
         <p:nvSpPr>
-          <p:cNvPr id="254" name=""/>
+          <p:cNvPr id="289" name=""/>
           <p:cNvSpPr/>
           <p:nvPr/>
         </p:nvSpPr>
@@ -12293,7 +14183,7 @@
       </p:sp>
       <p:sp>
         <p:nvSpPr>
-          <p:cNvPr id="255" name="" descr="{&quot;isTemplate&quot;:true,&quot;type&quot;:&quot;text&quot;}"/>
+          <p:cNvPr id="290" name="" descr="{&quot;isTemplate&quot;:true,&quot;type&quot;:&quot;text&quot;}"/>
           <p:cNvSpPr txBox="1"/>
           <p:nvPr/>
         </p:nvSpPr>
@@ -12338,7 +14228,7 @@
       </p:sp>
       <p:sp>
         <p:nvSpPr>
-          <p:cNvPr id="256" name="" descr="{&quot;isTemplate&quot;:true,&quot;type&quot;:&quot;text&quot;}"/>
+          <p:cNvPr id="291" name="" descr="{&quot;isTemplate&quot;:true,&quot;type&quot;:&quot;text&quot;}"/>
           <p:cNvSpPr txBox="1"/>
           <p:nvPr/>
         </p:nvSpPr>
@@ -12375,7 +14265,7 @@
       </p:sp>
       <p:sp>
         <p:nvSpPr>
-          <p:cNvPr id="257" name="" descr="{&quot;isTemplate&quot;:true,&quot;type&quot;:&quot;text&quot;}"/>
+          <p:cNvPr id="292" name="" descr="{&quot;isTemplate&quot;:true,&quot;type&quot;:&quot;text&quot;}"/>
           <p:cNvSpPr txBox="1"/>
           <p:nvPr/>
         </p:nvSpPr>
@@ -12410,7 +14300,7 @@
       </p:sp>
       <p:sp>
         <p:nvSpPr>
-          <p:cNvPr id="258" name=""/>
+          <p:cNvPr id="293" name=""/>
           <p:cNvSpPr/>
           <p:nvPr/>
         </p:nvSpPr>
@@ -12441,7 +14331,7 @@
       </p:sp>
       <p:sp>
         <p:nvSpPr>
-          <p:cNvPr id="259" name="" descr="{&quot;isTemplate&quot;:true,&quot;type&quot;:&quot;text&quot;}"/>
+          <p:cNvPr id="294" name="" descr="{&quot;isTemplate&quot;:true,&quot;type&quot;:&quot;text&quot;}"/>
           <p:cNvSpPr txBox="1"/>
           <p:nvPr/>
         </p:nvSpPr>
@@ -12486,7 +14376,7 @@
       </p:sp>
       <p:sp>
         <p:nvSpPr>
-          <p:cNvPr id="260" name="" descr="{&quot;isTemplate&quot;:true,&quot;type&quot;:&quot;text&quot;}"/>
+          <p:cNvPr id="295" name="" descr="{&quot;isTemplate&quot;:true,&quot;type&quot;:&quot;text&quot;}"/>
           <p:cNvSpPr txBox="1"/>
           <p:nvPr/>
         </p:nvSpPr>
@@ -12563,7 +14453,7 @@
       </p:sp>
       <p:sp>
         <p:nvSpPr>
-          <p:cNvPr id="261" name="" descr="{&quot;isTemplate&quot;:true,&quot;type&quot;:&quot;text&quot;}"/>
+          <p:cNvPr id="296" name="" descr="{&quot;isTemplate&quot;:true,&quot;type&quot;:&quot;text&quot;}"/>
           <p:cNvSpPr txBox="1"/>
           <p:nvPr/>
         </p:nvSpPr>
@@ -12608,7 +14498,7 @@
       </p:sp>
       <p:sp>
         <p:nvSpPr>
-          <p:cNvPr id="262" name=""/>
+          <p:cNvPr id="297" name=""/>
           <p:cNvSpPr/>
           <p:nvPr/>
         </p:nvSpPr>
@@ -12639,7 +14529,7 @@
       </p:sp>
       <p:sp>
         <p:nvSpPr>
-          <p:cNvPr id="263" name="" descr="{&quot;isTemplate&quot;:true,&quot;type&quot;:&quot;text&quot;}"/>
+          <p:cNvPr id="298" name="" descr="{&quot;isTemplate&quot;:true,&quot;type&quot;:&quot;text&quot;}"/>
           <p:cNvSpPr txBox="1"/>
           <p:nvPr/>
         </p:nvSpPr>
@@ -12684,7 +14574,7 @@
       </p:sp>
       <p:sp>
         <p:nvSpPr>
-          <p:cNvPr id="264" name="" descr="{&quot;isTemplate&quot;:true,&quot;type&quot;:&quot;text&quot;}"/>
+          <p:cNvPr id="299" name="" descr="{&quot;isTemplate&quot;:true,&quot;type&quot;:&quot;text&quot;}"/>
           <p:cNvSpPr txBox="1"/>
           <p:nvPr/>
         </p:nvSpPr>
@@ -12741,7 +14631,7 @@
       </p:sp>
       <p:sp>
         <p:nvSpPr>
-          <p:cNvPr id="265" name="" descr="{&quot;isTemplate&quot;:true,&quot;type&quot;:&quot;text&quot;}"/>
+          <p:cNvPr id="300" name="" descr="{&quot;isTemplate&quot;:true,&quot;type&quot;:&quot;text&quot;}"/>
           <p:cNvSpPr txBox="1"/>
           <p:nvPr/>
         </p:nvSpPr>
@@ -12776,7 +14666,7 @@
       </p:sp>
       <p:sp>
         <p:nvSpPr>
-          <p:cNvPr id="266" name=""/>
+          <p:cNvPr id="301" name=""/>
           <p:cNvSpPr/>
           <p:nvPr/>
         </p:nvSpPr>
@@ -12807,7 +14697,7 @@
       </p:sp>
       <p:sp>
         <p:nvSpPr>
-          <p:cNvPr id="267" name="" descr="{&quot;isTemplate&quot;:true,&quot;type&quot;:&quot;text&quot;}"/>
+          <p:cNvPr id="302" name="" descr="{&quot;isTemplate&quot;:true,&quot;type&quot;:&quot;text&quot;}"/>
           <p:cNvSpPr txBox="1"/>
           <p:nvPr/>
         </p:nvSpPr>
@@ -12852,7 +14742,7 @@
       </p:sp>
       <p:sp>
         <p:nvSpPr>
-          <p:cNvPr id="268" name="" descr="{&quot;isTemplate&quot;:true,&quot;type&quot;:&quot;text&quot;}"/>
+          <p:cNvPr id="303" name="" descr="{&quot;isTemplate&quot;:true,&quot;type&quot;:&quot;text&quot;}"/>
           <p:cNvSpPr txBox="1"/>
           <p:nvPr/>
         </p:nvSpPr>
@@ -12949,7 +14839,7 @@
       </p:sp>
       <p:sp>
         <p:nvSpPr>
-          <p:cNvPr id="269" name="" descr="{&quot;isTemplate&quot;:true,&quot;type&quot;:&quot;text&quot;}"/>
+          <p:cNvPr id="304" name="" descr="{&quot;isTemplate&quot;:true,&quot;type&quot;:&quot;text&quot;}"/>
           <p:cNvSpPr txBox="1"/>
           <p:nvPr/>
         </p:nvSpPr>
@@ -12984,7 +14874,7 @@
       </p:sp>
       <p:sp>
         <p:nvSpPr>
-          <p:cNvPr id="270" name=""/>
+          <p:cNvPr id="305" name=""/>
           <p:cNvSpPr/>
           <p:nvPr/>
         </p:nvSpPr>
@@ -13008,7 +14898,7 @@
       </p:sp>
       <p:sp>
         <p:nvSpPr>
-          <p:cNvPr id="271" name=""/>
+          <p:cNvPr id="306" name=""/>
           <p:cNvSpPr/>
           <p:nvPr/>
         </p:nvSpPr>
@@ -13048,7 +14938,7 @@
       </p:sp>
       <p:sp>
         <p:nvSpPr>
-          <p:cNvPr id="272" name="" descr="{&quot;isTemplate&quot;:true,&quot;type&quot;:&quot;text&quot;}"/>
+          <p:cNvPr id="307" name="" descr="{&quot;isTemplate&quot;:true,&quot;type&quot;:&quot;text&quot;}"/>
           <p:cNvSpPr txBox="1"/>
           <p:nvPr/>
         </p:nvSpPr>
@@ -13153,7 +15043,7 @@
   <p:cSld>
     <p:spTree>
       <p:nvGrpSpPr>
-        <p:cNvPr id="273" name="" descr="&lt;Slide style={{ width: '1280px', height: '720px', backgroundColor: '#FFFFFF', padding: '0px', flexDirection: 'column' }}&gt;&#13;&#10;    &lt;Box style={{ width: '1280px', height: '8px', backgroundColor: '#1E4FA8' }} /&gt;&#13;&#10;    &lt;Box style={{ padding: '24px 40px 0px 40px', flexDirection: 'row', justifyContent: 'space-between', alignItems: 'flex-end' }}&gt;&#13;&#10;        &lt;Text style={{ fontSize: 33, fontWeight: 'bold', color: '#1E4FA8' }}&gt;摘要与贡献：它把哪件事第一次做成了&lt;/Text&gt;&#13;&#10;        &lt;Text style={{ fontSize: 15, color: '#8B97A8' }}&gt;03 / 15&lt;/Text&gt;&#13;&#10;    &lt;/Box&gt;&#13;&#10;&#13;&#10;    &lt;Box style={{ padding: '20px 40px 0px 40px', flexDirection: 'row', gap: 22 }}&gt;&#13;&#10;        &lt;Box style={{ width: 438, flexDirection: 'column', gap: 13 }}&gt;&#13;&#10;            &lt;Box style={{ backgroundColor: '#F0F5FC', borderLeft: '4px solid #1E4FA8', padding: '12px 15px', flexDirection: 'column' }}&gt;&#13;&#10;                &lt;Text style={{ fontSize: 19, fontWeight: 'bold', color: '#1E4FA8' }}&gt;问题&lt;/Text&gt;&#13;&#10;                &lt;Text style={{ fontSize: 18, color: '#1A2230', lineHeight: 1.45, marginTop: 4 }}&gt;3DGS 质量高、可实时渲染，但训练前必须由 SfM 离线解位姿；SfM 要等图到齐，且对乱序敏感。&lt;/Text&gt;&#13;&#10;            &lt;/Box&gt;&#13;&#10;            &lt;Box style={{ backgroundColor: '#F7F9FC', borderLeft: '4px solid #4A5568', padding: '12px 15px', flexDirection: 'column' }}&gt;&#13;&#10;                &lt;Text style={{ fontSize: 19, fontWeight: 'bold', color: '#4A5568' }}&gt;做法&lt;/Text&gt;&#13;&#10;                &lt;Text style={{ fontSize: 18, color: '#1A2230', lineHeight: 1.45, marginTop: 4 }}&gt;首个面向无序输入、具备全局一致性的即时 3DGS 重建：两级快速匹配 ＋ GPU 局部 BA ＋ 簇级回环图传播 ＋ 渐进式层级。&lt;/Text&gt;&#13;&#10;            &lt;/Box&gt;&#13;&#10;            &lt;Box style={{ backgroundColor: '#F0F5FC', borderLeft: '4px solid #3D7BD9', padding: '12px 15px', flexDirection: 'column' }}&gt;&#13;&#10;                &lt;Text style={{ fontSize: 19, fontWeight: 'bold', color: '#3D7BD9' }}&gt;结果&lt;/Text&gt;&#13;&#10;                &lt;Text style={{ fontSize: 18, color: '#1A2230', lineHeight: 1.45, marginTop: 4 }}&gt;MipNeRF360 上 &lt;b&gt;1 分 17 秒&lt;/b&gt;达 &lt;b&gt;26.29 dB&lt;/b&gt;（离线参考 8 分 50 秒 / 27.52 dB）；输入打乱只掉 &lt;b&gt;0.5 dB&lt;/b&gt;。&lt;/Text&gt;&#13;&#10;            &lt;/Box&gt;&#13;&#10;            &lt;Text style={{ fontSize: 15, color: '#8B97A8', lineHeight: 1.35 }}&gt;关键词：三维高斯泼溅 · 无序采集 · 即时重建 · 协视图 · 回环闭合 · 渐进式层级&lt;/Text&gt;&#13;&#10;        &lt;/Box&gt;&#13;&#10;&#13;&#10;        &lt;Box style={{ flex: 1, flexDirection: 'column', gap: 13 }}&gt;&#13;&#10;            &lt;Box style={{ flexDirection: 'row', gap: 13 }}&gt;&#13;&#10;                &lt;Box style={{ flex: 1, backgroundColor: '#F7F9FC', border: '1px solid #D6DCE5', borderRadius: 6, padding: '13px 15px', flexDirection: 'column' }}&gt;&#13;&#10;                    &lt;Box style={{ flexDirection: 'row', alignItems: 'center', gap: 8 }}&gt;&#13;&#10;                        &lt;Box style={{ width: 26, height: 26, backgroundColor: '#1E4FA8', borderRadius: 4, alignItems: 'center', justifyContent: 'center' }}&gt;&#13;&#10;                            &lt;Text style={{ fontSize: 16, fontWeight: 'bold', color: '#FFFFFF' }}&gt;1&lt;/Text&gt;&#13;&#10;                        &lt;/Box&gt;&#13;&#10;                        &lt;Text style={{ fontSize: 21, fontWeight: 'bold', color: '#1A2230' }}&gt;无序序列快速匹配&lt;/Text&gt;&#13;&#10;                    &lt;/Box&gt;&#13;&#10;                    &lt;Text style={{ fontSize: 17.5, color: '#1A2230', lineHeight: 1.45, marginTop: 7 }}&gt;三级串联把候选从 1000 收到 1；配加权协视图 ＋ 高连通贪心选窗。&lt;/Text&gt;&#13;&#10;                    &lt;Text style={{ fontSize: 15.5, color: '#1E4FA8', fontWeight: 'bold', marginTop: 7 }}&gt;治“乱” · 步骤 ①–④&lt;/Text&gt;&#13;&#10;                &lt;/Box&gt;&#13;&#10;                &lt;Box style={{ flex: 1, backgroundColor: '#F7F9FC', border: '1px solid #D6DCE5', borderRadius: 6, padding: '13px 15px', flexDirection: 'column' }}&gt;&#13;&#10;                    &lt;Box style={{ flexDirection: 'row', alignItems: 'center', gap: 8 }}&gt;&#13;&#10;                        &lt;Box style={{ width: 26, height: 26, backgroundColor: '#1E4FA8', borderRadius: 4, alignItems: 'center', justifyContent: 'center' }}&gt;&#13;&#10;                            &lt;Text style={{ fontSize: 16, fontWeight: 'bold', color: '#FFFFFF' }}&gt;2&lt;/Text&gt;&#13;&#10;                        &lt;/Box&gt;&#13;&#10;                        &lt;Text style={{ fontSize: 21, fontWeight: 'bold', color: '#1A2230' }}&gt;GPU 局部重建&lt;/Text&gt;&#13;&#10;                    &lt;/Box&gt;&#13;&#10;                    &lt;Text style={{ fontSize: 17.5, color: '#1A2230', lineHeight: 1.45, marginTop: 7 }}&gt;自写 BA 核函数（稠密 Schur 补），比现有优化器快约 5 倍；分块深度对齐。&lt;/Text&gt;&#13;&#10;                    &lt;Text style={{ fontSize: 15.5, color: '#1E4FA8', fontWeight: 'bold', marginTop: 7 }}&gt;治“慢” · 步骤 ⑤、⑦&lt;/Text&gt;&#13;&#10;                &lt;/Box&gt;&#13;&#10;            &lt;/Box&gt;&#13;&#10;            &lt;Box style={{ flexDirection: 'row', gap: 13 }}&gt;&#13;&#10;                &lt;Box style={{ flex: 1, backgroundColor: '#F7F9FC', border: '1px solid #D6DCE5', borderRadius: 6, padding: '13px 15px', flexDirection: 'column' }}&gt;&#13;&#10;                    &lt;Box style={{ flexDirection: 'row', alignItems: 'center', gap: 8 }}&gt;&#13;&#10;                        &lt;Box style={{ width: 26, height: 26, backgroundColor: '#1E4FA8', borderRadius: 4, alignItems: 'center', justifyContent: 'center' }}&gt;&#13;&#10;                            &lt;Text style={{ fontSize: 16, fontWeight: 'bold', color: '#FFFFFF' }}&gt;3&lt;/Text&gt;&#13;&#10;                        &lt;/Box&gt;&#13;&#10;                        &lt;Text style={{ fontSize: 21, fontWeight: 'bold', color: '#1A2230' }}&gt;簇级回环闭合&lt;/Text&gt;&#13;&#10;                    &lt;/Box&gt;&#13;&#10;                    &lt;Text style={{ fontSize: 17.5, color: '#1A2230', lineHeight: 1.45, marginTop: 7 }}&gt;焊接窗口 BA ＋ Dijkstra 主干测地插值，把 Sim(3) 摊到全图，不跑第二次全局优化。&lt;/Text&gt;&#13;&#10;                    &lt;Text style={{ fontSize: 15.5, color: '#D9534F', fontWeight: 'bold', marginTop: 7 }}&gt;治“漂” · 步骤 ⑥&lt;/Text&gt;&#13;&#10;                &lt;/Box&gt;&#13;&#10;                &lt;Box style={{ flex: 1, backgroundColor: '#F0F5FC', border: '1px solid #3D7BD9', borderRadius: 6, padding: '13px 15px', flexDirection: 'column' }}&gt;&#13;&#10;                    &lt;Box style={{ flexDirection: 'row', alignItems: 'center', gap: 8 }}&gt;&#13;&#10;                        &lt;Box style={{ width: 26, height: 26, backgroundColor: '#0E3F8C', borderRadius: 4, alignItems: 'center', justifyContent: 'center' }}&gt;&#13;&#10;                            &lt;Text style={{ fontSize: 16, fontWeight: 'bold', color: '#FFFFFF' }}&gt;4&lt;/Text&gt;&#13;&#10;                        &lt;/Box&gt;&#13;&#10;                        &lt;Text style={{ fontSize: 21, fontWeight: 'bold', color: '#1A2230' }}&gt;渐进式高斯层级&lt;/Text&gt;&#13;&#10;                    &lt;/Box&gt;&#13;&#10;                    &lt;Text style={{ fontSize: 17.5, color: '#1A2230', lineHeight: 1.45, marginTop: 7 }}&gt;按屏幕投影尺寸合并 / 回取，叶节点卸载到 CPU；4050 帧显存仍控在 12.8 GB 内。&lt;/Text&gt;&#13;&#10;                    &lt;Text style={{ fontSize: 15.5, color: '#1E4FA8', fontWeight: 'bold', marginTop: 7 }}&gt;治“爆” · 步骤 ⑦&lt;/Text&gt;&#13;&#10;                &lt;/Box&gt;&#13;&#10;            &lt;/Box&gt;&#13;&#10;            &lt;Box style={{ backgroundColor: '#FFFFFF', border: '1px solid #D6DCE5', borderRadius: 6, padding: '12px 15px' }}&gt;&#13;&#10;                &lt;Text style={{ fontSize: 17, color: '#4A5568', lineHeight: 1.45 }}&gt;报告里的实测（我们的复现）：MipNeRF360 &lt;b&gt;garden&lt;/b&gt; 2× 降采样 &lt;b&gt;25.95 dB / 62.7 s / 19.5 GB&lt;/b&gt;，185 帧。差距来自分辨率与测试协议，不是方法失效。&lt;/Text&gt;&#13;&#10;            &lt;/Box&gt;&#13;&#10;        &lt;/Box&gt;&#13;&#10;    &lt;/Box&gt;&#13;&#10;&#13;&#10;    &lt;Box style={{ marginTop: 'auto', margin: '12px 40px 12px 40px', backgroundColor: '#1E4FA8', borderRadius: 6, padding: '11px 22px', flexDirection: 'column' }}&gt;&#13;&#10;        &lt;Text style={{ fontSize: 19, fontWeight: 'bold', color: '#FFFFFF', lineHeight: 1.4 }}&gt;创新在哪：&lt;b&gt;不是从零发明&lt;/b&gt;。2025 的直接前作已做到“免位姿 ＋ 大场景 ＋ 即时”，但要求图像有序、且不做回环。&lt;/Text&gt;&#13;&#10;        &lt;Text style={{ fontSize: 19, color: '#D6E4F7', lineHeight: 1.4, marginTop: 3 }}&gt;本文只补这两个假设——在&lt;b&gt;全部历史&lt;/b&gt;里检索重叠帧，用&lt;b&gt;图传播&lt;/b&gt;做不重算的回环。增量不大，但恰好补在前作的假设上。&lt;/Text&gt;&#13;&#10;    &lt;/Box&gt;&#13;&#10;&lt;/Slide&gt;&#13;&#10;"/>
+        <p:cNvPr id="308" name="" descr="&lt;Slide style={{ width: '1280px', height: '720px', backgroundColor: '#FFFFFF', padding: '0px', flexDirection: 'column' }}&gt;&#10;    &lt;Box style={{ width: '1280px', height: '8px', backgroundColor: '#1E4FA8' }} /&gt;&#10;    &lt;Box style={{ padding: '24px 40px 0px 40px', flexDirection: 'row', justifyContent: 'space-between', alignItems: 'flex-end' }}&gt;&#10;        &lt;Text style={{ fontSize: 33, fontWeight: 'bold', color: '#1E4FA8' }}&gt;摘要与贡献：它把哪件事第一次做成了&lt;/Text&gt;&#10;        &lt;Text style={{ fontSize: 15, color: '#8B97A8' }}&gt;03 / 16&lt;/Text&gt;&#10;    &lt;/Box&gt;&#10;&#10;    &lt;Box style={{ padding: '20px 40px 0px 40px', flexDirection: 'row', gap: 22 }}&gt;&#10;        &lt;Box style={{ width: 438, flexDirection: 'column', gap: 13 }}&gt;&#10;            &lt;Box style={{ backgroundColor: '#F0F5FC', borderLeft: '4px solid #1E4FA8', padding: '12px 15px', flexDirection: 'column' }}&gt;&#10;                &lt;Text style={{ fontSize: 19, fontWeight: 'bold', color: '#1E4FA8' }}&gt;问题&lt;/Text&gt;&#10;                &lt;Text style={{ fontSize: 18, color: '#1A2230', lineHeight: 1.45, marginTop: 4 }}&gt;3DGS 质量高、可实时渲染，但训练前必须由 SfM 离线解位姿；SfM 要等图到齐，且对乱序敏感。&lt;/Text&gt;&#10;            &lt;/Box&gt;&#10;            &lt;Box style={{ backgroundColor: '#F7F9FC', borderLeft: '4px solid #4A5568', padding: '12px 15px', flexDirection: 'column' }}&gt;&#10;                &lt;Text style={{ fontSize: 19, fontWeight: 'bold', color: '#4A5568' }}&gt;做法&lt;/Text&gt;&#10;                &lt;Text style={{ fontSize: 18, color: '#1A2230', lineHeight: 1.45, marginTop: 4 }}&gt;首个面向无序输入、具备全局一致性的即时 3DGS 重建：两级快速匹配 ＋ GPU 局部 BA ＋ 簇级回环图传播 ＋ 渐进式层级。&lt;/Text&gt;&#10;            &lt;/Box&gt;&#10;            &lt;Box style={{ backgroundColor: '#F0F5FC', borderLeft: '4px solid #3D7BD9', padding: '12px 15px', flexDirection: 'column' }}&gt;&#10;                &lt;Text style={{ fontSize: 19, fontWeight: 'bold', color: '#3D7BD9' }}&gt;结果&lt;/Text&gt;&#10;                &lt;Text style={{ fontSize: 18, color: '#1A2230', lineHeight: 1.45, marginTop: 4 }}&gt;MipNeRF360 上 &lt;b&gt;1 分 17 秒&lt;/b&gt;达 &lt;b&gt;26.29 dB&lt;/b&gt;（离线参考 8 分 50 秒 / 27.52 dB）；输入打乱只掉 &lt;b&gt;0.5 dB&lt;/b&gt;。&lt;/Text&gt;&#10;            &lt;/Box&gt;&#10;            &lt;Text style={{ fontSize: 15, color: '#8B97A8', lineHeight: 1.35 }}&gt;关键词：三维高斯泼溅 · 无序采集 · 即时重建 · 协视图 · 回环闭合 · 渐进式层级&lt;/Text&gt;&#10;        &lt;/Box&gt;&#10;&#10;        &lt;Box style={{ flex: 1, flexDirection: 'column', gap: 13 }}&gt;&#10;            &lt;Box style={{ flexDirection: 'row', gap: 13 }}&gt;&#10;                &lt;Box style={{ flex: 1, backgroundColor: '#F7F9FC', border: '1px solid #D6DCE5', borderRadius: 6, padding: '13px 15px', flexDirection: 'column' }}&gt;&#10;                    &lt;Box style={{ flexDirection: 'row', alignItems: 'center', gap: 8 }}&gt;&#10;                        &lt;Box style={{ width: 26, height: 26, backgroundColor: '#1E4FA8', borderRadius: 4, alignItems: 'center', justifyContent: 'center' }}&gt;&#10;                            &lt;Text style={{ fontSize: 16, fontWeight: 'bold', color: '#FFFFFF' }}&gt;1&lt;/Text&gt;&#10;                        &lt;/Box&gt;&#10;                        &lt;Text style={{ fontSize: 21, fontWeight: 'bold', color: '#1A2230' }}&gt;无序序列快速匹配&lt;/Text&gt;&#10;                    &lt;/Box&gt;&#10;                    &lt;Text style={{ fontSize: 17.5, color: '#1A2230', lineHeight: 1.45, marginTop: 7 }}&gt;三级串联把候选从 1000 收到 1；配加权协视图 ＋ 高连通贪心选窗。&lt;/Text&gt;&#10;                    &lt;Text style={{ fontSize: 15.5, color: '#1E4FA8', fontWeight: 'bold', marginTop: 7 }}&gt;治“乱” · 步骤 ①–④&lt;/Text&gt;&#10;                &lt;/Box&gt;&#10;                &lt;Box style={{ flex: 1, backgroundColor: '#F7F9FC', border: '1px solid #D6DCE5', borderRadius: 6, padding: '13px 15px', flexDirection: 'column' }}&gt;&#10;                    &lt;Box style={{ flexDirection: 'row', alignItems: 'center', gap: 8 }}&gt;&#10;                        &lt;Box style={{ width: 26, height: 26, backgroundColor: '#1E4FA8', borderRadius: 4, alignItems: 'center', justifyContent: 'center' }}&gt;&#10;                            &lt;Text style={{ fontSize: 16, fontWeight: 'bold', color: '#FFFFFF' }}&gt;2&lt;/Text&gt;&#10;                        &lt;/Box&gt;&#10;                        &lt;Text style={{ fontSize: 21, fontWeight: 'bold', color: '#1A2230' }}&gt;GPU 局部重建&lt;/Text&gt;&#10;                    &lt;/Box&gt;&#10;                    &lt;Text style={{ fontSize: 17.5, color: '#1A2230', lineHeight: 1.45, marginTop: 7 }}&gt;自写 BA 核函数（稠密 Schur 补），比现有优化器快约 5 倍；分块深度对齐。&lt;/Text&gt;&#10;                    &lt;Text style={{ fontSize: 15.5, color: '#1E4FA8', fontWeight: 'bold', marginTop: 7 }}&gt;治“慢” · 步骤 ⑤、⑦&lt;/Text&gt;&#10;                &lt;/Box&gt;&#10;            &lt;/Box&gt;&#10;            &lt;Box style={{ flexDirection: 'row', gap: 13 }}&gt;&#10;                &lt;Box style={{ flex: 1, backgroundColor: '#F7F9FC', border: '1px solid #D6DCE5', borderRadius: 6, padding: '13px 15px', flexDirection: 'column' }}&gt;&#10;                    &lt;Box style={{ flexDirection: 'row', alignItems: 'center', gap: 8 }}&gt;&#10;                        &lt;Box style={{ width: 26, height: 26, backgroundColor: '#1E4FA8', borderRadius: 4, alignItems: 'center', justifyContent: 'center' }}&gt;&#10;                            &lt;Text style={{ fontSize: 16, fontWeight: 'bold', color: '#FFFFFF' }}&gt;3&lt;/Text&gt;&#10;                        &lt;/Box&gt;&#10;                        &lt;Text style={{ fontSize: 21, fontWeight: 'bold', color: '#1A2230' }}&gt;簇级回环闭合&lt;/Text&gt;&#10;                    &lt;/Box&gt;&#10;                    &lt;Text style={{ fontSize: 17.5, color: '#1A2230', lineHeight: 1.45, marginTop: 7 }}&gt;焊接窗口 BA ＋ Dijkstra 主干测地插值，把 Sim(3) 摊到全图，不跑第二次全局优化。&lt;/Text&gt;&#10;                    &lt;Text style={{ fontSize: 15.5, color: '#D9534F', fontWeight: 'bold', marginTop: 7 }}&gt;治“漂” · 步骤 ⑥&lt;/Text&gt;&#10;                &lt;/Box&gt;&#10;                &lt;Box style={{ flex: 1, backgroundColor: '#F0F5FC', border: '1px solid #3D7BD9', borderRadius: 6, padding: '13px 15px', flexDirection: 'column' }}&gt;&#10;                    &lt;Box style={{ flexDirection: 'row', alignItems: 'center', gap: 8 }}&gt;&#10;                        &lt;Box style={{ width: 26, height: 26, backgroundColor: '#0E3F8C', borderRadius: 4, alignItems: 'center', justifyContent: 'center' }}&gt;&#10;                            &lt;Text style={{ fontSize: 16, fontWeight: 'bold', color: '#FFFFFF' }}&gt;4&lt;/Text&gt;&#10;                        &lt;/Box&gt;&#10;                        &lt;Text style={{ fontSize: 21, fontWeight: 'bold', color: '#1A2230' }}&gt;渐进式高斯层级&lt;/Text&gt;&#10;                    &lt;/Box&gt;&#10;                    &lt;Text style={{ fontSize: 17.5, color: '#1A2230', lineHeight: 1.45, marginTop: 7 }}&gt;按屏幕投影尺寸合并 / 回取，叶节点卸载到 CPU；4050 帧显存仍控在 12.8 GB 内。&lt;/Text&gt;&#10;                    &lt;Text style={{ fontSize: 15.5, color: '#1E4FA8', fontWeight: 'bold', marginTop: 7 }}&gt;治“爆” · 步骤 ⑦&lt;/Text&gt;&#10;                &lt;/Box&gt;&#10;            &lt;/Box&gt;&#10;            &lt;Box style={{ backgroundColor: '#FFFFFF', border: '1px solid #D6DCE5', borderRadius: 6, padding: '12px 15px' }}&gt;&#10;                &lt;Text style={{ fontSize: 17, color: '#4A5568', lineHeight: 1.45 }}&gt;报告里的实测（我们的复现）：MipNeRF360 &lt;b&gt;garden&lt;/b&gt; 2× 降采样 &lt;b&gt;25.95 dB / 62.7 s / 19.5 GB&lt;/b&gt;，185 帧。差距来自分辨率与测试协议，不是方法失效。&lt;/Text&gt;&#10;            &lt;/Box&gt;&#10;        &lt;/Box&gt;&#10;    &lt;/Box&gt;&#10;&#10;    &lt;Box style={{ marginTop: 'auto', margin: '12px 40px 12px 40px', backgroundColor: '#1E4FA8', borderRadius: 6, padding: '11px 22px', flexDirection: 'column' }}&gt;&#10;        &lt;Text style={{ fontSize: 19, fontWeight: 'bold', color: '#FFFFFF', lineHeight: 1.4 }}&gt;创新在哪：&lt;b&gt;不是从零发明&lt;/b&gt;。2025 的直接前作已做到“免位姿 ＋ 大场景 ＋ 即时”，但要求图像有序、且不做回环。&lt;/Text&gt;&#10;        &lt;Text style={{ fontSize: 19, color: '#D6E4F7', lineHeight: 1.4, marginTop: 3 }}&gt;本文只补这两个假设——在&lt;b&gt;全部历史&lt;/b&gt;里检索重叠帧，用&lt;b&gt;图传播&lt;/b&gt;做不重算的回环。增量不大，但恰好补在前作的假设上。&lt;/Text&gt;&#10;    &lt;/Box&gt;&#10;&lt;/Slide&gt;&#10;"/>
         <p:cNvGrpSpPr/>
         <p:nvPr/>
       </p:nvGrpSpPr>
@@ -13167,7 +15057,7 @@
       </p:grpSpPr>
       <p:sp>
         <p:nvSpPr>
-          <p:cNvPr id="274" name=""/>
+          <p:cNvPr id="309" name=""/>
           <p:cNvSpPr/>
           <p:nvPr/>
         </p:nvSpPr>
@@ -13191,7 +15081,7 @@
       </p:sp>
       <p:sp>
         <p:nvSpPr>
-          <p:cNvPr id="275" name=""/>
+          <p:cNvPr id="310" name=""/>
           <p:cNvSpPr/>
           <p:nvPr/>
         </p:nvSpPr>
@@ -13215,7 +15105,7 @@
       </p:sp>
       <p:sp>
         <p:nvSpPr>
-          <p:cNvPr id="276" name="" descr="{&quot;isTemplate&quot;:true,&quot;type&quot;:&quot;text&quot;}"/>
+          <p:cNvPr id="311" name="" descr="{&quot;isTemplate&quot;:true,&quot;type&quot;:&quot;text&quot;}"/>
           <p:cNvSpPr txBox="1"/>
           <p:nvPr/>
         </p:nvSpPr>
@@ -13250,7 +15140,7 @@
       </p:sp>
       <p:sp>
         <p:nvSpPr>
-          <p:cNvPr id="277" name="" descr="{&quot;isTemplate&quot;:true,&quot;type&quot;:&quot;text&quot;}"/>
+          <p:cNvPr id="312" name="" descr="{&quot;isTemplate&quot;:true,&quot;type&quot;:&quot;text&quot;}"/>
           <p:cNvSpPr txBox="1"/>
           <p:nvPr/>
         </p:nvSpPr>
@@ -13277,15 +15167,15 @@
                 <a:latin typeface="Microsoft YaHei"/>
                 <a:ea typeface="Microsoft YaHei"/>
               </a:rPr>
-              <a:t>03 / 15</a:t>
-            </a:r>
-            <a:endParaRPr/>
-          </a:p>
-        </p:txBody>
-      </p:sp>
-      <p:sp>
-        <p:nvSpPr>
-          <p:cNvPr id="278" name=""/>
+              <a:t>03 / 16</a:t>
+            </a:r>
+            <a:endParaRPr/>
+          </a:p>
+        </p:txBody>
+      </p:sp>
+      <p:sp>
+        <p:nvSpPr>
+          <p:cNvPr id="313" name=""/>
           <p:cNvSpPr/>
           <p:nvPr/>
         </p:nvSpPr>
@@ -13309,7 +15199,7 @@
       </p:sp>
       <p:sp>
         <p:nvSpPr>
-          <p:cNvPr id="279" name=""/>
+          <p:cNvPr id="314" name=""/>
           <p:cNvSpPr/>
           <p:nvPr/>
         </p:nvSpPr>
@@ -13349,7 +15239,7 @@
       </p:sp>
       <p:sp>
         <p:nvSpPr>
-          <p:cNvPr id="280" name="" descr="{&quot;isTemplate&quot;:true,&quot;type&quot;:&quot;text&quot;}"/>
+          <p:cNvPr id="315" name="" descr="{&quot;isTemplate&quot;:true,&quot;type&quot;:&quot;text&quot;}"/>
           <p:cNvSpPr txBox="1"/>
           <p:nvPr/>
         </p:nvSpPr>
@@ -13384,7 +15274,7 @@
       </p:sp>
       <p:sp>
         <p:nvSpPr>
-          <p:cNvPr id="281" name="" descr="{&quot;isTemplate&quot;:true,&quot;type&quot;:&quot;text&quot;}"/>
+          <p:cNvPr id="316" name="" descr="{&quot;isTemplate&quot;:true,&quot;type&quot;:&quot;text&quot;}"/>
           <p:cNvSpPr txBox="1"/>
           <p:nvPr/>
         </p:nvSpPr>
@@ -13471,7 +15361,7 @@
       </p:sp>
       <p:sp>
         <p:nvSpPr>
-          <p:cNvPr id="282" name=""/>
+          <p:cNvPr id="317" name=""/>
           <p:cNvSpPr/>
           <p:nvPr/>
         </p:nvSpPr>
@@ -13495,7 +15385,7 @@
       </p:sp>
       <p:sp>
         <p:nvSpPr>
-          <p:cNvPr id="283" name=""/>
+          <p:cNvPr id="318" name=""/>
           <p:cNvSpPr/>
           <p:nvPr/>
         </p:nvSpPr>
@@ -13535,7 +15425,7 @@
       </p:sp>
       <p:sp>
         <p:nvSpPr>
-          <p:cNvPr id="284" name="" descr="{&quot;isTemplate&quot;:true,&quot;type&quot;:&quot;text&quot;}"/>
+          <p:cNvPr id="319" name="" descr="{&quot;isTemplate&quot;:true,&quot;type&quot;:&quot;text&quot;}"/>
           <p:cNvSpPr txBox="1"/>
           <p:nvPr/>
         </p:nvSpPr>
@@ -13570,7 +15460,7 @@
       </p:sp>
       <p:sp>
         <p:nvSpPr>
-          <p:cNvPr id="285" name="" descr="{&quot;isTemplate&quot;:true,&quot;type&quot;:&quot;text&quot;}"/>
+          <p:cNvPr id="320" name="" descr="{&quot;isTemplate&quot;:true,&quot;type&quot;:&quot;text&quot;}"/>
           <p:cNvSpPr txBox="1"/>
           <p:nvPr/>
         </p:nvSpPr>
@@ -13747,7 +15637,7 @@
       </p:sp>
       <p:sp>
         <p:nvSpPr>
-          <p:cNvPr id="286" name=""/>
+          <p:cNvPr id="321" name=""/>
           <p:cNvSpPr/>
           <p:nvPr/>
         </p:nvSpPr>
@@ -13771,7 +15661,7 @@
       </p:sp>
       <p:sp>
         <p:nvSpPr>
-          <p:cNvPr id="287" name=""/>
+          <p:cNvPr id="322" name=""/>
           <p:cNvSpPr/>
           <p:nvPr/>
         </p:nvSpPr>
@@ -13811,7 +15701,7 @@
       </p:sp>
       <p:sp>
         <p:nvSpPr>
-          <p:cNvPr id="288" name="" descr="{&quot;isTemplate&quot;:true,&quot;type&quot;:&quot;text&quot;}"/>
+          <p:cNvPr id="323" name="" descr="{&quot;isTemplate&quot;:true,&quot;type&quot;:&quot;text&quot;}"/>
           <p:cNvSpPr txBox="1"/>
           <p:nvPr/>
         </p:nvSpPr>
@@ -13846,7 +15736,7 @@
       </p:sp>
       <p:sp>
         <p:nvSpPr>
-          <p:cNvPr id="289" name="" descr="{&quot;isTemplate&quot;:true,&quot;type&quot;:&quot;text&quot;}"/>
+          <p:cNvPr id="324" name="" descr="{&quot;isTemplate&quot;:true,&quot;type&quot;:&quot;text&quot;}"/>
           <p:cNvSpPr txBox="1"/>
           <p:nvPr/>
         </p:nvSpPr>
@@ -14073,7 +15963,7 @@
       </p:sp>
       <p:sp>
         <p:nvSpPr>
-          <p:cNvPr id="290" name="" descr="{&quot;isTemplate&quot;:true,&quot;type&quot;:&quot;text&quot;}"/>
+          <p:cNvPr id="325" name="" descr="{&quot;isTemplate&quot;:true,&quot;type&quot;:&quot;text&quot;}"/>
           <p:cNvSpPr txBox="1"/>
           <p:nvPr/>
         </p:nvSpPr>
@@ -14210,7 +16100,7 @@
       </p:sp>
       <p:sp>
         <p:nvSpPr>
-          <p:cNvPr id="291" name=""/>
+          <p:cNvPr id="326" name=""/>
           <p:cNvSpPr/>
           <p:nvPr/>
         </p:nvSpPr>
@@ -14241,7 +16131,7 @@
       </p:sp>
       <p:sp>
         <p:nvSpPr>
-          <p:cNvPr id="292" name=""/>
+          <p:cNvPr id="327" name=""/>
           <p:cNvSpPr/>
           <p:nvPr/>
         </p:nvSpPr>
@@ -14267,7 +16157,7 @@
       </p:sp>
       <p:sp>
         <p:nvSpPr>
-          <p:cNvPr id="293" name="" descr="{&quot;isTemplate&quot;:true,&quot;type&quot;:&quot;text&quot;}"/>
+          <p:cNvPr id="328" name="" descr="{&quot;isTemplate&quot;:true,&quot;type&quot;:&quot;text&quot;}"/>
           <p:cNvSpPr txBox="1"/>
           <p:nvPr/>
         </p:nvSpPr>
@@ -14302,7 +16192,7 @@
       </p:sp>
       <p:sp>
         <p:nvSpPr>
-          <p:cNvPr id="294" name="" descr="{&quot;isTemplate&quot;:true,&quot;type&quot;:&quot;text&quot;}"/>
+          <p:cNvPr id="329" name="" descr="{&quot;isTemplate&quot;:true,&quot;type&quot;:&quot;text&quot;}"/>
           <p:cNvSpPr txBox="1"/>
           <p:nvPr/>
         </p:nvSpPr>
@@ -14337,7 +16227,7 @@
       </p:sp>
       <p:sp>
         <p:nvSpPr>
-          <p:cNvPr id="295" name="" descr="{&quot;isTemplate&quot;:true,&quot;type&quot;:&quot;text&quot;}"/>
+          <p:cNvPr id="330" name="" descr="{&quot;isTemplate&quot;:true,&quot;type&quot;:&quot;text&quot;}"/>
           <p:cNvSpPr txBox="1"/>
           <p:nvPr/>
         </p:nvSpPr>
@@ -14454,7 +16344,7 @@
       </p:sp>
       <p:sp>
         <p:nvSpPr>
-          <p:cNvPr id="296" name="" descr="{&quot;isTemplate&quot;:true,&quot;type&quot;:&quot;text&quot;}"/>
+          <p:cNvPr id="331" name="" descr="{&quot;isTemplate&quot;:true,&quot;type&quot;:&quot;text&quot;}"/>
           <p:cNvSpPr txBox="1"/>
           <p:nvPr/>
         </p:nvSpPr>
@@ -14519,7 +16409,7 @@
       </p:sp>
       <p:sp>
         <p:nvSpPr>
-          <p:cNvPr id="297" name=""/>
+          <p:cNvPr id="332" name=""/>
           <p:cNvSpPr/>
           <p:nvPr/>
         </p:nvSpPr>
@@ -14550,7 +16440,7 @@
       </p:sp>
       <p:sp>
         <p:nvSpPr>
-          <p:cNvPr id="298" name=""/>
+          <p:cNvPr id="333" name=""/>
           <p:cNvSpPr/>
           <p:nvPr/>
         </p:nvSpPr>
@@ -14576,7 +16466,7 @@
       </p:sp>
       <p:sp>
         <p:nvSpPr>
-          <p:cNvPr id="299" name="" descr="{&quot;isTemplate&quot;:true,&quot;type&quot;:&quot;text&quot;}"/>
+          <p:cNvPr id="334" name="" descr="{&quot;isTemplate&quot;:true,&quot;type&quot;:&quot;text&quot;}"/>
           <p:cNvSpPr txBox="1"/>
           <p:nvPr/>
         </p:nvSpPr>
@@ -14611,7 +16501,7 @@
       </p:sp>
       <p:sp>
         <p:nvSpPr>
-          <p:cNvPr id="300" name="" descr="{&quot;isTemplate&quot;:true,&quot;type&quot;:&quot;text&quot;}"/>
+          <p:cNvPr id="335" name="" descr="{&quot;isTemplate&quot;:true,&quot;type&quot;:&quot;text&quot;}"/>
           <p:cNvSpPr txBox="1"/>
           <p:nvPr/>
         </p:nvSpPr>
@@ -14656,7 +16546,7 @@
       </p:sp>
       <p:sp>
         <p:nvSpPr>
-          <p:cNvPr id="301" name="" descr="{&quot;isTemplate&quot;:true,&quot;type&quot;:&quot;text&quot;}"/>
+          <p:cNvPr id="336" name="" descr="{&quot;isTemplate&quot;:true,&quot;type&quot;:&quot;text&quot;}"/>
           <p:cNvSpPr txBox="1"/>
           <p:nvPr/>
         </p:nvSpPr>
@@ -14753,7 +16643,7 @@
       </p:sp>
       <p:sp>
         <p:nvSpPr>
-          <p:cNvPr id="302" name="" descr="{&quot;isTemplate&quot;:true,&quot;type&quot;:&quot;text&quot;}"/>
+          <p:cNvPr id="337" name="" descr="{&quot;isTemplate&quot;:true,&quot;type&quot;:&quot;text&quot;}"/>
           <p:cNvSpPr txBox="1"/>
           <p:nvPr/>
         </p:nvSpPr>
@@ -14828,7 +16718,7 @@
       </p:sp>
       <p:sp>
         <p:nvSpPr>
-          <p:cNvPr id="303" name=""/>
+          <p:cNvPr id="338" name=""/>
           <p:cNvSpPr/>
           <p:nvPr/>
         </p:nvSpPr>
@@ -14859,7 +16749,7 @@
       </p:sp>
       <p:sp>
         <p:nvSpPr>
-          <p:cNvPr id="304" name=""/>
+          <p:cNvPr id="339" name=""/>
           <p:cNvSpPr/>
           <p:nvPr/>
         </p:nvSpPr>
@@ -14885,7 +16775,7 @@
       </p:sp>
       <p:sp>
         <p:nvSpPr>
-          <p:cNvPr id="305" name="" descr="{&quot;isTemplate&quot;:true,&quot;type&quot;:&quot;text&quot;}"/>
+          <p:cNvPr id="340" name="" descr="{&quot;isTemplate&quot;:true,&quot;type&quot;:&quot;text&quot;}"/>
           <p:cNvSpPr txBox="1"/>
           <p:nvPr/>
         </p:nvSpPr>
@@ -14920,7 +16810,7 @@
       </p:sp>
       <p:sp>
         <p:nvSpPr>
-          <p:cNvPr id="306" name="" descr="{&quot;isTemplate&quot;:true,&quot;type&quot;:&quot;text&quot;}"/>
+          <p:cNvPr id="341" name="" descr="{&quot;isTemplate&quot;:true,&quot;type&quot;:&quot;text&quot;}"/>
           <p:cNvSpPr txBox="1"/>
           <p:nvPr/>
         </p:nvSpPr>
@@ -14955,7 +16845,7 @@
       </p:sp>
       <p:sp>
         <p:nvSpPr>
-          <p:cNvPr id="307" name="" descr="{&quot;isTemplate&quot;:true,&quot;type&quot;:&quot;text&quot;}"/>
+          <p:cNvPr id="342" name="" descr="{&quot;isTemplate&quot;:true,&quot;type&quot;:&quot;text&quot;}"/>
           <p:cNvSpPr txBox="1"/>
           <p:nvPr/>
         </p:nvSpPr>
@@ -15052,7 +16942,7 @@
       </p:sp>
       <p:sp>
         <p:nvSpPr>
-          <p:cNvPr id="308" name="" descr="{&quot;isTemplate&quot;:true,&quot;type&quot;:&quot;text&quot;}"/>
+          <p:cNvPr id="343" name="" descr="{&quot;isTemplate&quot;:true,&quot;type&quot;:&quot;text&quot;}"/>
           <p:cNvSpPr txBox="1"/>
           <p:nvPr/>
         </p:nvSpPr>
@@ -15117,7 +17007,7 @@
       </p:sp>
       <p:sp>
         <p:nvSpPr>
-          <p:cNvPr id="309" name=""/>
+          <p:cNvPr id="344" name=""/>
           <p:cNvSpPr/>
           <p:nvPr/>
         </p:nvSpPr>
@@ -15148,7 +17038,7 @@
       </p:sp>
       <p:sp>
         <p:nvSpPr>
-          <p:cNvPr id="310" name=""/>
+          <p:cNvPr id="345" name=""/>
           <p:cNvSpPr/>
           <p:nvPr/>
         </p:nvSpPr>
@@ -15174,7 +17064,7 @@
       </p:sp>
       <p:sp>
         <p:nvSpPr>
-          <p:cNvPr id="311" name="" descr="{&quot;isTemplate&quot;:true,&quot;type&quot;:&quot;text&quot;}"/>
+          <p:cNvPr id="346" name="" descr="{&quot;isTemplate&quot;:true,&quot;type&quot;:&quot;text&quot;}"/>
           <p:cNvSpPr txBox="1"/>
           <p:nvPr/>
         </p:nvSpPr>
@@ -15209,7 +17099,7 @@
       </p:sp>
       <p:sp>
         <p:nvSpPr>
-          <p:cNvPr id="312" name="" descr="{&quot;isTemplate&quot;:true,&quot;type&quot;:&quot;text&quot;}"/>
+          <p:cNvPr id="347" name="" descr="{&quot;isTemplate&quot;:true,&quot;type&quot;:&quot;text&quot;}"/>
           <p:cNvSpPr txBox="1"/>
           <p:nvPr/>
         </p:nvSpPr>
@@ -15244,7 +17134,7 @@
       </p:sp>
       <p:sp>
         <p:nvSpPr>
-          <p:cNvPr id="313" name="" descr="{&quot;isTemplate&quot;:true,&quot;type&quot;:&quot;text&quot;}"/>
+          <p:cNvPr id="348" name="" descr="{&quot;isTemplate&quot;:true,&quot;type&quot;:&quot;text&quot;}"/>
           <p:cNvSpPr txBox="1"/>
           <p:nvPr/>
         </p:nvSpPr>
@@ -15361,7 +17251,7 @@
       </p:sp>
       <p:sp>
         <p:nvSpPr>
-          <p:cNvPr id="314" name="" descr="{&quot;isTemplate&quot;:true,&quot;type&quot;:&quot;text&quot;}"/>
+          <p:cNvPr id="349" name="" descr="{&quot;isTemplate&quot;:true,&quot;type&quot;:&quot;text&quot;}"/>
           <p:cNvSpPr txBox="1"/>
           <p:nvPr/>
         </p:nvSpPr>
@@ -15426,7 +17316,7 @@
       </p:sp>
       <p:sp>
         <p:nvSpPr>
-          <p:cNvPr id="315" name=""/>
+          <p:cNvPr id="350" name=""/>
           <p:cNvSpPr/>
           <p:nvPr/>
         </p:nvSpPr>
@@ -15457,7 +17347,7 @@
       </p:sp>
       <p:sp>
         <p:nvSpPr>
-          <p:cNvPr id="316" name="" descr="{&quot;isTemplate&quot;:true,&quot;type&quot;:&quot;text&quot;}"/>
+          <p:cNvPr id="351" name="" descr="{&quot;isTemplate&quot;:true,&quot;type&quot;:&quot;text&quot;}"/>
           <p:cNvSpPr txBox="1"/>
           <p:nvPr/>
         </p:nvSpPr>
@@ -15584,7 +17474,7 @@
       </p:sp>
       <p:sp>
         <p:nvSpPr>
-          <p:cNvPr id="317" name=""/>
+          <p:cNvPr id="352" name=""/>
           <p:cNvSpPr/>
           <p:nvPr/>
         </p:nvSpPr>
@@ -15610,7 +17500,7 @@
       </p:sp>
       <p:sp>
         <p:nvSpPr>
-          <p:cNvPr id="318" name="" descr="{&quot;isTemplate&quot;:true,&quot;type&quot;:&quot;text&quot;}"/>
+          <p:cNvPr id="353" name="" descr="{&quot;isTemplate&quot;:true,&quot;type&quot;:&quot;text&quot;}"/>
           <p:cNvSpPr txBox="1"/>
           <p:nvPr/>
         </p:nvSpPr>
@@ -15765,7 +17655,7 @@
       </p:sp>
       <p:sp>
         <p:nvSpPr>
-          <p:cNvPr id="319" name="" descr="{&quot;isTemplate&quot;:true,&quot;type&quot;:&quot;text&quot;}"/>
+          <p:cNvPr id="354" name="" descr="{&quot;isTemplate&quot;:true,&quot;type&quot;:&quot;text&quot;}"/>
           <p:cNvSpPr txBox="1"/>
           <p:nvPr/>
         </p:nvSpPr>
@@ -15848,7 +17738,7 @@
   <p:cSld>
     <p:spTree>
       <p:nvGrpSpPr>
-        <p:cNvPr id="320" name="" descr="&lt;Slide style={{ width: '1280px', height: '720px', backgroundColor: '#FFFFFF', padding: '0px', flexDirection: 'column' }}&gt;&#13;&#10;    &lt;Box style={{ width: '1280px', height: '8px', backgroundColor: '#1E4FA8' }} /&gt;&#13;&#10;    &lt;Box style={{ padding: '24px 40px 0px 40px', flexDirection: 'row', justifyContent: 'space-between', alignItems: 'flex-end' }}&gt;&#13;&#10;        &lt;Text style={{ fontSize: 33, fontWeight: 'bold', color: '#1E4FA8' }}&gt;方法总览：一帧进来，走完七步&lt;/Text&gt;&#13;&#10;        &lt;Text style={{ fontSize: 15, color: '#8B97A8' }}&gt;04 / 15&lt;/Text&gt;&#13;&#10;    &lt;/Box&gt;&#13;&#10;    &lt;Box style={{ padding: '8px 40px 0px 40px' }}&gt;&#13;&#10;        &lt;Text style={{ fontSize: 20, color: '#4A5568', lineHeight: 1.4 }}&gt;设计哲学一句话：&lt;b&gt;每帧做小事，偶尔做一次大事&lt;/b&gt;。前者保证实时，后者保证不漂；每一步都对应上一页的一个病症。&lt;/Text&gt;&#13;&#10;    &lt;/Box&gt;&#13;&#10;&#13;&#10;    &lt;Box style={{ padding: '16px 40px 0px 40px', flexDirection: 'row', gap: 10 }}&gt;&#13;&#10;        &lt;Box style={{ flex: 1, backgroundColor: '#F0F5FC', borderRadius: 6, padding: '13px 11px', flexDirection: 'column' }}&gt;&#13;&#10;            &lt;Text style={{ fontSize: 29, fontWeight: 'bold', color: '#1E4FA8' }}&gt;①&lt;/Text&gt;&#13;&#10;            &lt;Text style={{ fontSize: 20, fontWeight: 'bold', color: '#1A2230', marginTop: 3 }}&gt;全局检索&lt;/Text&gt;&#13;&#10;            &lt;Text style={{ fontSize: 16.5, color: '#1A2230', lineHeight: 1.45, marginTop: 6 }}&gt;全局描述子算余弦，取 top-20 候选帧&lt;/Text&gt;&#13;&#10;            &lt;Text style={{ fontSize: 15.5, color: '#1D5FC0', fontWeight: 'bold', marginTop: 10 }}&gt;治“乱”&lt;/Text&gt;&#13;&#10;        &lt;/Box&gt;&#13;&#10;        &lt;Box style={{ flex: 1, backgroundColor: '#F0F5FC', borderRadius: 6, padding: '13px 11px', flexDirection: 'column' }}&gt;&#13;&#10;            &lt;Text style={{ fontSize: 29, fontWeight: 'bold', color: '#1E4FA8' }}&gt;②&lt;/Text&gt;&#13;&#10;            &lt;Text style={{ fontSize: 20, fontWeight: 'bold', color: '#1A2230', marginTop: 3 }}&gt;局部粗筛&lt;/Text&gt;&#13;&#10;            &lt;Text style={{ fontSize: 16.5, color: '#1A2230', lineHeight: 1.45, marginTop: 6 }}&gt;XFeat 比内点数，20 → 5 个候选&lt;/Text&gt;&#13;&#10;            &lt;Text style={{ fontSize: 15.5, color: '#1D5FC0', fontWeight: 'bold', marginTop: 10 }}&gt;治“乱”&lt;/Text&gt;&#13;&#10;        &lt;/Box&gt;&#13;&#10;        &lt;Box style={{ flex: 1, backgroundColor: '#F0F5FC', borderRadius: 6, padding: '13px 11px', flexDirection: 'column' }}&gt;&#13;&#10;            &lt;Text style={{ fontSize: 29, fontWeight: 'bold', color: '#1E4FA8' }}&gt;③&lt;/Text&gt;&#13;&#10;            &lt;Text style={{ fontSize: 20, fontWeight: 'bold', color: '#1A2230', marginTop: 3 }}&gt;精验建边&lt;/Text&gt;&#13;&#10;            &lt;Text style={{ fontSize: 16.5, color: '#1A2230', lineHeight: 1.45, marginTop: 6 }}&gt;LightGlue ＋ RANSAC，内点 &amp;gt; 500 才建边&lt;/Text&gt;&#13;&#10;            &lt;Text style={{ fontSize: 15.5, color: '#1D5FC0', fontWeight: 'bold', marginTop: 10 }}&gt;治“乱”&lt;/Text&gt;&#13;&#10;        &lt;/Box&gt;&#13;&#10;        &lt;Box style={{ flex: 1, backgroundColor: '#F7F9FC', borderRadius: 6, padding: '13px 11px', flexDirection: 'column' }}&gt;&#13;&#10;            &lt;Text style={{ fontSize: 29, fontWeight: 'bold', color: '#1E4FA8' }}&gt;④&lt;/Text&gt;&#13;&#10;            &lt;Text style={{ fontSize: 20, fontWeight: 'bold', color: '#1A2230', marginTop: 3 }}&gt;贪心选窗&lt;/Text&gt;&#13;&#10;            &lt;Text style={{ fontSize: 16.5, color: '#1A2230', lineHeight: 1.45, marginTop: 6 }}&gt;式 1 贪心扩张到 N = 20 帧&lt;/Text&gt;&#13;&#10;            &lt;Text style={{ fontSize: 15.5, color: '#1D5FC0', fontWeight: 'bold', marginTop: 10 }}&gt;定变量范围&lt;/Text&gt;&#13;&#10;        &lt;/Box&gt;&#13;&#10;        &lt;Box style={{ flex: 1, backgroundColor: '#1E4FA8', borderRadius: 6, padding: '13px 11px', flexDirection: 'column' }}&gt;&#13;&#10;            &lt;Text style={{ fontSize: 29, fontWeight: 'bold', color: '#FFFFFF' }}&gt;⑤&lt;/Text&gt;&#13;&#10;            &lt;Text style={{ fontSize: 20, fontWeight: 'bold', color: '#FFFFFF', marginTop: 3 }}&gt;局部 BA&lt;/Text&gt;&#13;&#10;            &lt;Text style={{ fontSize: 16.5, color: '#D6E4F7', lineHeight: 1.45, marginTop: 6 }}&gt;LM ＋ Schur 补，解出位姿与三维点&lt;/Text&gt;&#13;&#10;            &lt;Text style={{ fontSize: 15.5, color: '#FFFFFF', fontWeight: 'bold', marginTop: 10 }}&gt;重建本体&lt;/Text&gt;&#13;&#10;        &lt;/Box&gt;&#13;&#10;        &lt;Box style={{ flex: 1, backgroundColor: '#F7F9FC', borderRadius: 6, padding: '13px 11px', flexDirection: 'column' }}&gt;&#13;&#10;            &lt;Text style={{ fontSize: 29, fontWeight: 'bold', color: '#1E4FA8' }}&gt;⑥&lt;/Text&gt;&#13;&#10;            &lt;Text style={{ fontSize: 20, fontWeight: 'bold', color: '#1A2230', marginTop: 3 }}&gt;回环修正&lt;/Text&gt;&#13;&#10;            &lt;Text style={{ fontSize: 16.5, color: '#1A2230', lineHeight: 1.45, marginTop: 6 }}&gt;图距 &amp;gt; 10 触发，Sim(3) 沿主干摊开&lt;/Text&gt;&#13;&#10;            &lt;Text style={{ fontSize: 15.5, color: '#D9534F', fontWeight: 'bold', marginTop: 10 }}&gt;治“漂”&lt;/Text&gt;&#13;&#10;        &lt;/Box&gt;&#13;&#10;        &lt;Box style={{ flex: 1, backgroundColor: '#F7F9FC', borderRadius: 6, padding: '13px 11px', flexDirection: 'column' }}&gt;&#13;&#10;            &lt;Text style={{ fontSize: 29, fontWeight: 'bold', color: '#1E4FA8' }}&gt;⑦&lt;/Text&gt;&#13;&#10;            &lt;Text style={{ fontSize: 20, fontWeight: 'bold', color: '#1A2230', marginTop: 3 }}&gt;高斯落位&lt;/Text&gt;&#13;&#10;            &lt;Text style={{ fontSize: 16.5, color: '#1A2230', lineHeight: 1.45, marginTop: 6 }}&gt;分块深度对齐 ＋ 层级按屏幕尺寸合并&lt;/Text&gt;&#13;&#10;            &lt;Text style={{ fontSize: 15.5, color: '#1D5FC0', fontWeight: 'bold', marginTop: 10 }}&gt;治“爆”&lt;/Text&gt;&#13;&#10;        &lt;/Box&gt;&#13;&#10;    &lt;/Box&gt;&#13;&#10;&#13;&#10;    &lt;Box style={{ padding: '20px 40px 0px 40px', flexDirection: 'column' }}&gt;&#13;&#10;        &lt;Text style={{ fontSize: 20, color: '#1A2230', lineHeight: 1.5 }}&gt;数据流：&lt;b&gt;关键帧图像&lt;/b&gt;　→　&lt;b&gt;加权协视图 G&lt;/b&gt;　→　&lt;b&gt;位姿 T_i / 三维点 X_j&lt;/b&gt;　→　&lt;b&gt;高斯集合&lt;/b&gt;　→　&lt;b&gt;渐进层级&lt;/b&gt;&lt;/Text&gt;&#13;&#10;        &lt;Text style={{ fontSize: 17, color: '#4A5568', lineHeight: 1.4, marginTop: 4 }}&gt;前三步只产出“约束”，第四五步只产出“位姿”，第六步修位姿，第七步才碰辐射场。&lt;/Text&gt;&#13;&#10;    &lt;/Box&gt;&#13;&#10;&#13;&#10;    &lt;Box style={{ padding: '16px 40px 0px 40px', flexDirection: 'row', gap: 10, alignItems: 'flex-start' }}&gt;&#13;&#10;        &lt;Box style={{ backgroundColor: '#1E4FA8', borderRadius: 4, padding: '5px 12px', marginTop: 3 }}&gt;&#13;&#10;            &lt;Text style={{ fontSize: 16, fontWeight: 'bold', color: '#FFFFFF' }}&gt;时间账&lt;/Text&gt;&#13;&#10;        &lt;/Box&gt;&#13;&#10;        &lt;Box style={{ flex: 1, flexDirection: 'column', gap: 5 }}&gt;&#13;&#10;            &lt;Text style={{ fontSize: 16.5, color: '#1A2230', lineHeight: 1.35 }}&gt;&lt;b&gt;单帧预算&lt;/b&gt;　前端 27.8 ＋ 局部 BA 40.5 ＋ 高斯/层级更新 → 论文实测 &lt;b&gt;324 ms&lt;/b&gt;（峰值 386）·　本次复现 &lt;b&gt;668 ms&lt;/b&gt;&lt;/Text&gt;&#13;&#10;            &lt;Text style={{ fontSize: 16.5, color: '#1A2230', lineHeight: 1.35 }}&gt;&lt;b&gt;全流程&lt;/b&gt;　85 张 &lt;b&gt;54 s&lt;/b&gt;（ds=1）/ 30.9 s（ds=2）　←　离线 COLMAP＋3DGS 同场景 &lt;b&gt;8 min 50 s&lt;/b&gt;，本文 1 min 17 s，&lt;b&gt;快 6.9×&lt;/b&gt;&lt;/Text&gt;&#13;&#10;            &lt;Text style={{ fontSize: 16.5, color: '#4A5568', lineHeight: 1.35 }}&gt;&lt;b&gt;immediate 的含义&lt;/b&gt;　单帧 &amp;lt; 1 秒，够边拍边判断要不要补拍；&lt;b&gt;不是&lt;/b&gt; 30 fps 视频——渲染 480 fps 是 3DGS 自带的，不算本文贡献&lt;/Text&gt;&#13;&#10;        &lt;/Box&gt;&#13;&#10;    &lt;/Box&gt;&#13;&#10;&#13;&#10;    &lt;Box style={{ padding: '16px 40px 0px 40px', flexDirection: 'column', gap: 8 }}&gt;&#13;&#10;        &lt;Box style={{ backgroundColor: '#F7F9FC', borderLeft: '5px solid #1E4FA8', padding: '9px 16px' }}&gt;&#13;&#10;            &lt;Text style={{ fontSize: 17.5, color: '#1A2230', lineHeight: 1.4 }}&gt;&lt;b&gt;节奏&lt;/b&gt;　①–⑤ 与 ⑦ 每个关键帧都跑；&lt;b&gt;⑥ 只在检测到回环时跑&lt;/b&gt;——“每帧做小事、偶尔做一次大事”的具体分工。&lt;/Text&gt;&#13;&#10;        &lt;/Box&gt;&#13;&#10;        &lt;Box style={{ backgroundColor: '#F7F9FC', borderLeft: '5px solid #D6DCE5', padding: '9px 16px' }}&gt;&#13;&#10;            &lt;Text style={{ fontSize: 17.5, color: '#1A2230', lineHeight: 1.4 }}&gt;&lt;b&gt;容错&lt;/b&gt;　匹配失败的帧先“搁置”，后续出现相似帧时再取出重试——乱序输入因此不必强求一次成功。&lt;/Text&gt;&#13;&#10;        &lt;/Box&gt;&#13;&#10;    &lt;/Box&gt;&#13;&#10;&#13;&#10;    &lt;Box style={{ marginTop: 'auto', padding: '6px 40px 12px 40px' }}&gt;&#13;&#10;        &lt;Text style={{ fontSize: 15, color: '#8B97A8' }}&gt;接下来七页，一步一页：每页都是「这步在做什么 → 长什么样 → 核心公式 → 超参取值 → 为什么这么做」。&lt;/Text&gt;&#13;&#10;    &lt;/Box&gt;&#13;&#10;&lt;/Slide&gt;&#13;&#10;"/>
+        <p:cNvPr id="355" name="" descr="&lt;Slide style={{ width: '1280px', height: '720px', backgroundColor: '#FFFFFF', padding: '0px', flexDirection: 'column' }}&gt;&#10;    &lt;Box style={{ width: '1280px', height: '8px', backgroundColor: '#1E4FA8' }} /&gt;&#10;    &lt;Box style={{ padding: '24px 40px 0px 40px', flexDirection: 'row', justifyContent: 'space-between', alignItems: 'flex-end' }}&gt;&#10;        &lt;Text style={{ fontSize: 33, fontWeight: 'bold', color: '#1E4FA8' }}&gt;方法总览：一帧进来，走完七步&lt;/Text&gt;&#10;        &lt;Text style={{ fontSize: 15, color: '#8B97A8' }}&gt;04 / 16&lt;/Text&gt;&#10;    &lt;/Box&gt;&#10;    &lt;Box style={{ padding: '8px 40px 0px 40px' }}&gt;&#10;        &lt;Text style={{ fontSize: 20, color: '#4A5568', lineHeight: 1.4 }}&gt;设计哲学一句话：&lt;b&gt;每帧做小事，偶尔做一次大事&lt;/b&gt;。前者保证实时，后者保证不漂；每一步都对应上一页的一个病症。&lt;/Text&gt;&#10;    &lt;/Box&gt;&#10;&#10;    &lt;Box style={{ padding: '16px 40px 0px 40px', flexDirection: 'row', gap: 10 }}&gt;&#10;        &lt;Box style={{ flex: 1, backgroundColor: '#F0F5FC', borderRadius: 6, padding: '13px 11px', flexDirection: 'column' }}&gt;&#10;            &lt;Text style={{ fontSize: 29, fontWeight: 'bold', color: '#1E4FA8' }}&gt;①&lt;/Text&gt;&#10;            &lt;Text style={{ fontSize: 20, fontWeight: 'bold', color: '#1A2230', marginTop: 3 }}&gt;全局检索&lt;/Text&gt;&#10;            &lt;Text style={{ fontSize: 16.5, color: '#1A2230', lineHeight: 1.45, marginTop: 6 }}&gt;全局描述子算余弦，取 top-20 候选帧&lt;/Text&gt;&#10;            &lt;Text style={{ fontSize: 15.5, color: '#1D5FC0', fontWeight: 'bold', marginTop: 10 }}&gt;治“乱”&lt;/Text&gt;&#10;        &lt;/Box&gt;&#10;        &lt;Box style={{ flex: 1, backgroundColor: '#F0F5FC', borderRadius: 6, padding: '13px 11px', flexDirection: 'column' }}&gt;&#10;            &lt;Text style={{ fontSize: 29, fontWeight: 'bold', color: '#1E4FA8' }}&gt;②&lt;/Text&gt;&#10;            &lt;Text style={{ fontSize: 20, fontWeight: 'bold', color: '#1A2230', marginTop: 3 }}&gt;局部粗筛&lt;/Text&gt;&#10;            &lt;Text style={{ fontSize: 16.5, color: '#1A2230', lineHeight: 1.45, marginTop: 6 }}&gt;XFeat 比内点数，20 → 5 个候选&lt;/Text&gt;&#10;            &lt;Text style={{ fontSize: 15.5, color: '#1D5FC0', fontWeight: 'bold', marginTop: 10 }}&gt;治“乱”&lt;/Text&gt;&#10;        &lt;/Box&gt;&#10;        &lt;Box style={{ flex: 1, backgroundColor: '#F0F5FC', borderRadius: 6, padding: '13px 11px', flexDirection: 'column' }}&gt;&#10;            &lt;Text style={{ fontSize: 29, fontWeight: 'bold', color: '#1E4FA8' }}&gt;③&lt;/Text&gt;&#10;            &lt;Text style={{ fontSize: 20, fontWeight: 'bold', color: '#1A2230', marginTop: 3 }}&gt;精验建边&lt;/Text&gt;&#10;            &lt;Text style={{ fontSize: 16.5, color: '#1A2230', lineHeight: 1.45, marginTop: 6 }}&gt;LightGlue ＋ RANSAC，内点 &amp;gt; 500 才建边&lt;/Text&gt;&#10;            &lt;Text style={{ fontSize: 15.5, color: '#1D5FC0', fontWeight: 'bold', marginTop: 10 }}&gt;治“乱”&lt;/Text&gt;&#10;        &lt;/Box&gt;&#10;        &lt;Box style={{ flex: 1, backgroundColor: '#F7F9FC', borderRadius: 6, padding: '13px 11px', flexDirection: 'column' }}&gt;&#10;            &lt;Text style={{ fontSize: 29, fontWeight: 'bold', color: '#1E4FA8' }}&gt;④&lt;/Text&gt;&#10;            &lt;Text style={{ fontSize: 20, fontWeight: 'bold', color: '#1A2230', marginTop: 3 }}&gt;贪心选窗&lt;/Text&gt;&#10;            &lt;Text style={{ fontSize: 16.5, color: '#1A2230', lineHeight: 1.45, marginTop: 6 }}&gt;式 1 贪心扩张到 N = 20 帧&lt;/Text&gt;&#10;            &lt;Text style={{ fontSize: 15.5, color: '#1D5FC0', fontWeight: 'bold', marginTop: 10 }}&gt;定变量范围&lt;/Text&gt;&#10;        &lt;/Box&gt;&#10;        &lt;Box style={{ flex: 1, backgroundColor: '#1E4FA8', borderRadius: 6, padding: '13px 11px', flexDirection: 'column' }}&gt;&#10;            &lt;Text style={{ fontSize: 29, fontWeight: 'bold', color: '#FFFFFF' }}&gt;⑤&lt;/Text&gt;&#10;            &lt;Text style={{ fontSize: 20, fontWeight: 'bold', color: '#FFFFFF', marginTop: 3 }}&gt;局部 BA&lt;/Text&gt;&#10;            &lt;Text style={{ fontSize: 16.5, color: '#D6E4F7', lineHeight: 1.45, marginTop: 6 }}&gt;LM ＋ Schur 补，解出位姿与三维点&lt;/Text&gt;&#10;            &lt;Text style={{ fontSize: 15.5, color: '#FFFFFF', fontWeight: 'bold', marginTop: 10 }}&gt;重建本体&lt;/Text&gt;&#10;        &lt;/Box&gt;&#10;        &lt;Box style={{ flex: 1, backgroundColor: '#F7F9FC', borderRadius: 6, padding: '13px 11px', flexDirection: 'column' }}&gt;&#10;            &lt;Text style={{ fontSize: 29, fontWeight: 'bold', color: '#1E4FA8' }}&gt;⑥&lt;/Text&gt;&#10;            &lt;Text style={{ fontSize: 20, fontWeight: 'bold', color: '#1A2230', marginTop: 3 }}&gt;回环修正&lt;/Text&gt;&#10;            &lt;Text style={{ fontSize: 16.5, color: '#1A2230', lineHeight: 1.45, marginTop: 6 }}&gt;图距 &amp;gt; 10 触发，Sim(3) 沿主干摊开&lt;/Text&gt;&#10;            &lt;Text style={{ fontSize: 15.5, color: '#D9534F', fontWeight: 'bold', marginTop: 10 }}&gt;治“漂”&lt;/Text&gt;&#10;        &lt;/Box&gt;&#10;        &lt;Box style={{ flex: 1, backgroundColor: '#F7F9FC', borderRadius: 6, padding: '13px 11px', flexDirection: 'column' }}&gt;&#10;            &lt;Text style={{ fontSize: 29, fontWeight: 'bold', color: '#1E4FA8' }}&gt;⑦&lt;/Text&gt;&#10;            &lt;Text style={{ fontSize: 20, fontWeight: 'bold', color: '#1A2230', marginTop: 3 }}&gt;高斯落位&lt;/Text&gt;&#10;            &lt;Text style={{ fontSize: 16.5, color: '#1A2230', lineHeight: 1.45, marginTop: 6 }}&gt;分块深度对齐 ＋ 层级按屏幕尺寸合并&lt;/Text&gt;&#10;            &lt;Text style={{ fontSize: 15.5, color: '#1D5FC0', fontWeight: 'bold', marginTop: 10 }}&gt;治“爆”&lt;/Text&gt;&#10;        &lt;/Box&gt;&#10;    &lt;/Box&gt;&#10;&#10;    &lt;Box style={{ padding: '20px 40px 0px 40px', flexDirection: 'column' }}&gt;&#10;        &lt;Text style={{ fontSize: 20, color: '#1A2230', lineHeight: 1.5 }}&gt;数据流：&lt;b&gt;关键帧图像&lt;/b&gt;　→　&lt;b&gt;加权协视图 G&lt;/b&gt;　→　&lt;b&gt;位姿 T_i / 三维点 X_j&lt;/b&gt;　→　&lt;b&gt;高斯集合&lt;/b&gt;　→　&lt;b&gt;渐进层级&lt;/b&gt;&lt;/Text&gt;&#10;        &lt;Text style={{ fontSize: 17, color: '#4A5568', lineHeight: 1.4, marginTop: 4 }}&gt;前三步只产出“约束”，第四五步只产出“位姿”，第六步修位姿，第七步才碰辐射场。&lt;/Text&gt;&#10;    &lt;/Box&gt;&#10;&#10;    &lt;Box style={{ padding: '16px 40px 0px 40px', flexDirection: 'row', gap: 10, alignItems: 'flex-start' }}&gt;&#10;        &lt;Box style={{ backgroundColor: '#1E4FA8', borderRadius: 4, padding: '5px 12px', marginTop: 3 }}&gt;&#10;            &lt;Text style={{ fontSize: 16, fontWeight: 'bold', color: '#FFFFFF' }}&gt;时间账&lt;/Text&gt;&#10;        &lt;/Box&gt;&#10;        &lt;Box style={{ flex: 1, flexDirection: 'column', gap: 5 }}&gt;&#10;            &lt;Text style={{ fontSize: 16.5, color: '#1A2230', lineHeight: 1.35 }}&gt;&lt;b&gt;单帧预算&lt;/b&gt;　前端 27.8 ＋ 局部 BA 40.5 ＋ 高斯/层级更新 → 论文实测 &lt;b&gt;324 ms&lt;/b&gt;（峰值 386）·　本次复现 &lt;b&gt;668 ms&lt;/b&gt;&lt;/Text&gt;&#10;            &lt;Text style={{ fontSize: 16.5, color: '#1A2230', lineHeight: 1.35 }}&gt;&lt;b&gt;全流程&lt;/b&gt;　85 张 &lt;b&gt;54 s&lt;/b&gt;（ds=1）/ 30.9 s（ds=2）　←　离线 COLMAP＋3DGS 同场景 &lt;b&gt;8 min 50 s&lt;/b&gt;，本文 1 min 17 s，&lt;b&gt;快 6.9×&lt;/b&gt;&lt;/Text&gt;&#10;            &lt;Text style={{ fontSize: 16.5, color: '#4A5568', lineHeight: 1.35 }}&gt;&lt;b&gt;immediate 的含义&lt;/b&gt;　单帧 &amp;lt; 1 秒，够边拍边判断要不要补拍；&lt;b&gt;不是&lt;/b&gt; 30 fps 视频——渲染 480 fps 是 3DGS 自带的，不算本文贡献&lt;/Text&gt;&#10;        &lt;/Box&gt;&#10;    &lt;/Box&gt;&#10;&#10;    &lt;Box style={{ padding: '16px 40px 0px 40px', flexDirection: 'column', gap: 8 }}&gt;&#10;        &lt;Box style={{ backgroundColor: '#F7F9FC', borderLeft: '5px solid #1E4FA8', padding: '9px 16px' }}&gt;&#10;            &lt;Text style={{ fontSize: 17.5, color: '#1A2230', lineHeight: 1.4 }}&gt;&lt;b&gt;节奏&lt;/b&gt;　①–⑤ 与 ⑦ 每个关键帧都跑；&lt;b&gt;⑥ 只在检测到回环时跑&lt;/b&gt;——“每帧做小事、偶尔做一次大事”的具体分工。&lt;/Text&gt;&#10;        &lt;/Box&gt;&#10;        &lt;Box style={{ backgroundColor: '#F7F9FC', borderLeft: '5px solid #D6DCE5', padding: '9px 16px' }}&gt;&#10;            &lt;Text style={{ fontSize: 17.5, color: '#1A2230', lineHeight: 1.4 }}&gt;&lt;b&gt;容错&lt;/b&gt;　匹配失败的帧先“搁置”，后续出现相似帧时再取出重试——乱序输入因此不必强求一次成功。&lt;/Text&gt;&#10;        &lt;/Box&gt;&#10;    &lt;/Box&gt;&#10;&#10;    &lt;Box style={{ marginTop: 'auto', padding: '6px 40px 12px 40px' }}&gt;&#10;        &lt;Text style={{ fontSize: 15, color: '#8B97A8' }}&gt;接下来七页，一步一页：每页都是「这步在做什么 → 长什么样 → 核心公式 → 超参取值 → 为什么这么做」。&lt;/Text&gt;&#10;    &lt;/Box&gt;&#10;&lt;/Slide&gt;&#10;"/>
         <p:cNvGrpSpPr/>
         <p:nvPr/>
       </p:nvGrpSpPr>
@@ -15862,7 +17752,7 @@
       </p:grpSpPr>
       <p:sp>
         <p:nvSpPr>
-          <p:cNvPr id="321" name=""/>
+          <p:cNvPr id="356" name=""/>
           <p:cNvSpPr/>
           <p:nvPr/>
         </p:nvSpPr>
@@ -15886,7 +17776,7 @@
       </p:sp>
       <p:sp>
         <p:nvSpPr>
-          <p:cNvPr id="322" name=""/>
+          <p:cNvPr id="357" name=""/>
           <p:cNvSpPr/>
           <p:nvPr/>
         </p:nvSpPr>
@@ -15910,7 +17800,7 @@
       </p:sp>
       <p:sp>
         <p:nvSpPr>
-          <p:cNvPr id="323" name="" descr="{&quot;isTemplate&quot;:true,&quot;type&quot;:&quot;text&quot;}"/>
+          <p:cNvPr id="358" name="" descr="{&quot;isTemplate&quot;:true,&quot;type&quot;:&quot;text&quot;}"/>
           <p:cNvSpPr txBox="1"/>
           <p:nvPr/>
         </p:nvSpPr>
@@ -15945,7 +17835,7 @@
       </p:sp>
       <p:sp>
         <p:nvSpPr>
-          <p:cNvPr id="324" name="" descr="{&quot;isTemplate&quot;:true,&quot;type&quot;:&quot;text&quot;}"/>
+          <p:cNvPr id="359" name="" descr="{&quot;isTemplate&quot;:true,&quot;type&quot;:&quot;text&quot;}"/>
           <p:cNvSpPr txBox="1"/>
           <p:nvPr/>
         </p:nvSpPr>
@@ -15972,15 +17862,15 @@
                 <a:latin typeface="Microsoft YaHei"/>
                 <a:ea typeface="Microsoft YaHei"/>
               </a:rPr>
-              <a:t>04 / 15</a:t>
-            </a:r>
-            <a:endParaRPr/>
-          </a:p>
-        </p:txBody>
-      </p:sp>
-      <p:sp>
-        <p:nvSpPr>
-          <p:cNvPr id="325" name="" descr="{&quot;isTemplate&quot;:true,&quot;type&quot;:&quot;text&quot;}"/>
+              <a:t>04 / 16</a:t>
+            </a:r>
+            <a:endParaRPr/>
+          </a:p>
+        </p:txBody>
+      </p:sp>
+      <p:sp>
+        <p:nvSpPr>
+          <p:cNvPr id="360" name="" descr="{&quot;isTemplate&quot;:true,&quot;type&quot;:&quot;text&quot;}"/>
           <p:cNvSpPr txBox="1"/>
           <p:nvPr/>
         </p:nvSpPr>
@@ -16035,7 +17925,7 @@
       </p:sp>
       <p:sp>
         <p:nvSpPr>
-          <p:cNvPr id="326" name=""/>
+          <p:cNvPr id="361" name=""/>
           <p:cNvSpPr/>
           <p:nvPr/>
         </p:nvSpPr>
@@ -16061,7 +17951,7 @@
       </p:sp>
       <p:sp>
         <p:nvSpPr>
-          <p:cNvPr id="327" name="" descr="{&quot;isTemplate&quot;:true,&quot;type&quot;:&quot;text&quot;}"/>
+          <p:cNvPr id="362" name="" descr="{&quot;isTemplate&quot;:true,&quot;type&quot;:&quot;text&quot;}"/>
           <p:cNvSpPr txBox="1"/>
           <p:nvPr/>
         </p:nvSpPr>
@@ -16096,7 +17986,7 @@
       </p:sp>
       <p:sp>
         <p:nvSpPr>
-          <p:cNvPr id="328" name="" descr="{&quot;isTemplate&quot;:true,&quot;type&quot;:&quot;text&quot;}"/>
+          <p:cNvPr id="363" name="" descr="{&quot;isTemplate&quot;:true,&quot;type&quot;:&quot;text&quot;}"/>
           <p:cNvSpPr txBox="1"/>
           <p:nvPr/>
         </p:nvSpPr>
@@ -16131,7 +18021,7 @@
       </p:sp>
       <p:sp>
         <p:nvSpPr>
-          <p:cNvPr id="329" name="" descr="{&quot;isTemplate&quot;:true,&quot;type&quot;:&quot;text&quot;}"/>
+          <p:cNvPr id="364" name="" descr="{&quot;isTemplate&quot;:true,&quot;type&quot;:&quot;text&quot;}"/>
           <p:cNvSpPr txBox="1"/>
           <p:nvPr/>
         </p:nvSpPr>
@@ -16188,7 +18078,7 @@
       </p:sp>
       <p:sp>
         <p:nvSpPr>
-          <p:cNvPr id="330" name="" descr="{&quot;isTemplate&quot;:true,&quot;type&quot;:&quot;text&quot;}"/>
+          <p:cNvPr id="365" name="" descr="{&quot;isTemplate&quot;:true,&quot;type&quot;:&quot;text&quot;}"/>
           <p:cNvSpPr txBox="1"/>
           <p:nvPr/>
         </p:nvSpPr>
@@ -16223,7 +18113,7 @@
       </p:sp>
       <p:sp>
         <p:nvSpPr>
-          <p:cNvPr id="331" name=""/>
+          <p:cNvPr id="366" name=""/>
           <p:cNvSpPr/>
           <p:nvPr/>
         </p:nvSpPr>
@@ -16249,7 +18139,7 @@
       </p:sp>
       <p:sp>
         <p:nvSpPr>
-          <p:cNvPr id="332" name="" descr="{&quot;isTemplate&quot;:true,&quot;type&quot;:&quot;text&quot;}"/>
+          <p:cNvPr id="367" name="" descr="{&quot;isTemplate&quot;:true,&quot;type&quot;:&quot;text&quot;}"/>
           <p:cNvSpPr txBox="1"/>
           <p:nvPr/>
         </p:nvSpPr>
@@ -16284,7 +18174,7 @@
       </p:sp>
       <p:sp>
         <p:nvSpPr>
-          <p:cNvPr id="333" name="" descr="{&quot;isTemplate&quot;:true,&quot;type&quot;:&quot;text&quot;}"/>
+          <p:cNvPr id="368" name="" descr="{&quot;isTemplate&quot;:true,&quot;type&quot;:&quot;text&quot;}"/>
           <p:cNvSpPr txBox="1"/>
           <p:nvPr/>
         </p:nvSpPr>
@@ -16319,7 +18209,7 @@
       </p:sp>
       <p:sp>
         <p:nvSpPr>
-          <p:cNvPr id="334" name="" descr="{&quot;isTemplate&quot;:true,&quot;type&quot;:&quot;text&quot;}"/>
+          <p:cNvPr id="369" name="" descr="{&quot;isTemplate&quot;:true,&quot;type&quot;:&quot;text&quot;}"/>
           <p:cNvSpPr txBox="1"/>
           <p:nvPr/>
         </p:nvSpPr>
@@ -16386,7 +18276,7 @@
       </p:sp>
       <p:sp>
         <p:nvSpPr>
-          <p:cNvPr id="335" name="" descr="{&quot;isTemplate&quot;:true,&quot;type&quot;:&quot;text&quot;}"/>
+          <p:cNvPr id="370" name="" descr="{&quot;isTemplate&quot;:true,&quot;type&quot;:&quot;text&quot;}"/>
           <p:cNvSpPr txBox="1"/>
           <p:nvPr/>
         </p:nvSpPr>
@@ -16421,7 +18311,7 @@
       </p:sp>
       <p:sp>
         <p:nvSpPr>
-          <p:cNvPr id="336" name=""/>
+          <p:cNvPr id="371" name=""/>
           <p:cNvSpPr/>
           <p:nvPr/>
         </p:nvSpPr>
@@ -16447,7 +18337,7 @@
       </p:sp>
       <p:sp>
         <p:nvSpPr>
-          <p:cNvPr id="337" name="" descr="{&quot;isTemplate&quot;:true,&quot;type&quot;:&quot;text&quot;}"/>
+          <p:cNvPr id="372" name="" descr="{&quot;isTemplate&quot;:true,&quot;type&quot;:&quot;text&quot;}"/>
           <p:cNvSpPr txBox="1"/>
           <p:nvPr/>
         </p:nvSpPr>
@@ -16482,7 +18372,7 @@
       </p:sp>
       <p:sp>
         <p:nvSpPr>
-          <p:cNvPr id="338" name="" descr="{&quot;isTemplate&quot;:true,&quot;type&quot;:&quot;text&quot;}"/>
+          <p:cNvPr id="373" name="" descr="{&quot;isTemplate&quot;:true,&quot;type&quot;:&quot;text&quot;}"/>
           <p:cNvSpPr txBox="1"/>
           <p:nvPr/>
         </p:nvSpPr>
@@ -16517,7 +18407,7 @@
       </p:sp>
       <p:sp>
         <p:nvSpPr>
-          <p:cNvPr id="339" name="" descr="{&quot;isTemplate&quot;:true,&quot;type&quot;:&quot;text&quot;}"/>
+          <p:cNvPr id="374" name="" descr="{&quot;isTemplate&quot;:true,&quot;type&quot;:&quot;text&quot;}"/>
           <p:cNvSpPr txBox="1"/>
           <p:nvPr/>
         </p:nvSpPr>
@@ -16604,7 +18494,7 @@
       </p:sp>
       <p:sp>
         <p:nvSpPr>
-          <p:cNvPr id="340" name="" descr="{&quot;isTemplate&quot;:true,&quot;type&quot;:&quot;text&quot;}"/>
+          <p:cNvPr id="375" name="" descr="{&quot;isTemplate&quot;:true,&quot;type&quot;:&quot;text&quot;}"/>
           <p:cNvSpPr txBox="1"/>
           <p:nvPr/>
         </p:nvSpPr>
@@ -16639,7 +18529,7 @@
       </p:sp>
       <p:sp>
         <p:nvSpPr>
-          <p:cNvPr id="341" name=""/>
+          <p:cNvPr id="376" name=""/>
           <p:cNvSpPr/>
           <p:nvPr/>
         </p:nvSpPr>
@@ -16665,7 +18555,7 @@
       </p:sp>
       <p:sp>
         <p:nvSpPr>
-          <p:cNvPr id="342" name="" descr="{&quot;isTemplate&quot;:true,&quot;type&quot;:&quot;text&quot;}"/>
+          <p:cNvPr id="377" name="" descr="{&quot;isTemplate&quot;:true,&quot;type&quot;:&quot;text&quot;}"/>
           <p:cNvSpPr txBox="1"/>
           <p:nvPr/>
         </p:nvSpPr>
@@ -16700,7 +18590,7 @@
       </p:sp>
       <p:sp>
         <p:nvSpPr>
-          <p:cNvPr id="343" name="" descr="{&quot;isTemplate&quot;:true,&quot;type&quot;:&quot;text&quot;}"/>
+          <p:cNvPr id="378" name="" descr="{&quot;isTemplate&quot;:true,&quot;type&quot;:&quot;text&quot;}"/>
           <p:cNvSpPr txBox="1"/>
           <p:nvPr/>
         </p:nvSpPr>
@@ -16735,7 +18625,7 @@
       </p:sp>
       <p:sp>
         <p:nvSpPr>
-          <p:cNvPr id="344" name="" descr="{&quot;isTemplate&quot;:true,&quot;type&quot;:&quot;text&quot;}"/>
+          <p:cNvPr id="379" name="" descr="{&quot;isTemplate&quot;:true,&quot;type&quot;:&quot;text&quot;}"/>
           <p:cNvSpPr txBox="1"/>
           <p:nvPr/>
         </p:nvSpPr>
@@ -16812,7 +18702,7 @@
       </p:sp>
       <p:sp>
         <p:nvSpPr>
-          <p:cNvPr id="345" name="" descr="{&quot;isTemplate&quot;:true,&quot;type&quot;:&quot;text&quot;}"/>
+          <p:cNvPr id="380" name="" descr="{&quot;isTemplate&quot;:true,&quot;type&quot;:&quot;text&quot;}"/>
           <p:cNvSpPr txBox="1"/>
           <p:nvPr/>
         </p:nvSpPr>
@@ -16847,7 +18737,7 @@
       </p:sp>
       <p:sp>
         <p:nvSpPr>
-          <p:cNvPr id="346" name=""/>
+          <p:cNvPr id="381" name=""/>
           <p:cNvSpPr/>
           <p:nvPr/>
         </p:nvSpPr>
@@ -16873,7 +18763,7 @@
       </p:sp>
       <p:sp>
         <p:nvSpPr>
-          <p:cNvPr id="347" name="" descr="{&quot;isTemplate&quot;:true,&quot;type&quot;:&quot;text&quot;}"/>
+          <p:cNvPr id="382" name="" descr="{&quot;isTemplate&quot;:true,&quot;type&quot;:&quot;text&quot;}"/>
           <p:cNvSpPr txBox="1"/>
           <p:nvPr/>
         </p:nvSpPr>
@@ -16908,7 +18798,7 @@
       </p:sp>
       <p:sp>
         <p:nvSpPr>
-          <p:cNvPr id="348" name="" descr="{&quot;isTemplate&quot;:true,&quot;type&quot;:&quot;text&quot;}"/>
+          <p:cNvPr id="383" name="" descr="{&quot;isTemplate&quot;:true,&quot;type&quot;:&quot;text&quot;}"/>
           <p:cNvSpPr txBox="1"/>
           <p:nvPr/>
         </p:nvSpPr>
@@ -16953,7 +18843,7 @@
       </p:sp>
       <p:sp>
         <p:nvSpPr>
-          <p:cNvPr id="349" name="" descr="{&quot;isTemplate&quot;:true,&quot;type&quot;:&quot;text&quot;}"/>
+          <p:cNvPr id="384" name="" descr="{&quot;isTemplate&quot;:true,&quot;type&quot;:&quot;text&quot;}"/>
           <p:cNvSpPr txBox="1"/>
           <p:nvPr/>
         </p:nvSpPr>
@@ -17020,7 +18910,7 @@
       </p:sp>
       <p:sp>
         <p:nvSpPr>
-          <p:cNvPr id="350" name="" descr="{&quot;isTemplate&quot;:true,&quot;type&quot;:&quot;text&quot;}"/>
+          <p:cNvPr id="385" name="" descr="{&quot;isTemplate&quot;:true,&quot;type&quot;:&quot;text&quot;}"/>
           <p:cNvSpPr txBox="1"/>
           <p:nvPr/>
         </p:nvSpPr>
@@ -17055,7 +18945,7 @@
       </p:sp>
       <p:sp>
         <p:nvSpPr>
-          <p:cNvPr id="351" name=""/>
+          <p:cNvPr id="386" name=""/>
           <p:cNvSpPr/>
           <p:nvPr/>
         </p:nvSpPr>
@@ -17081,7 +18971,7 @@
       </p:sp>
       <p:sp>
         <p:nvSpPr>
-          <p:cNvPr id="352" name="" descr="{&quot;isTemplate&quot;:true,&quot;type&quot;:&quot;text&quot;}"/>
+          <p:cNvPr id="387" name="" descr="{&quot;isTemplate&quot;:true,&quot;type&quot;:&quot;text&quot;}"/>
           <p:cNvSpPr txBox="1"/>
           <p:nvPr/>
         </p:nvSpPr>
@@ -17116,7 +19006,7 @@
       </p:sp>
       <p:sp>
         <p:nvSpPr>
-          <p:cNvPr id="353" name="" descr="{&quot;isTemplate&quot;:true,&quot;type&quot;:&quot;text&quot;}"/>
+          <p:cNvPr id="388" name="" descr="{&quot;isTemplate&quot;:true,&quot;type&quot;:&quot;text&quot;}"/>
           <p:cNvSpPr txBox="1"/>
           <p:nvPr/>
         </p:nvSpPr>
@@ -17151,7 +19041,7 @@
       </p:sp>
       <p:sp>
         <p:nvSpPr>
-          <p:cNvPr id="354" name="" descr="{&quot;isTemplate&quot;:true,&quot;type&quot;:&quot;text&quot;}"/>
+          <p:cNvPr id="389" name="" descr="{&quot;isTemplate&quot;:true,&quot;type&quot;:&quot;text&quot;}"/>
           <p:cNvSpPr txBox="1"/>
           <p:nvPr/>
         </p:nvSpPr>
@@ -17228,7 +19118,7 @@
       </p:sp>
       <p:sp>
         <p:nvSpPr>
-          <p:cNvPr id="355" name="" descr="{&quot;isTemplate&quot;:true,&quot;type&quot;:&quot;text&quot;}"/>
+          <p:cNvPr id="390" name="" descr="{&quot;isTemplate&quot;:true,&quot;type&quot;:&quot;text&quot;}"/>
           <p:cNvSpPr txBox="1"/>
           <p:nvPr/>
         </p:nvSpPr>
@@ -17263,7 +19153,7 @@
       </p:sp>
       <p:sp>
         <p:nvSpPr>
-          <p:cNvPr id="356" name=""/>
+          <p:cNvPr id="391" name=""/>
           <p:cNvSpPr/>
           <p:nvPr/>
         </p:nvSpPr>
@@ -17289,7 +19179,7 @@
       </p:sp>
       <p:sp>
         <p:nvSpPr>
-          <p:cNvPr id="357" name="" descr="{&quot;isTemplate&quot;:true,&quot;type&quot;:&quot;text&quot;}"/>
+          <p:cNvPr id="392" name="" descr="{&quot;isTemplate&quot;:true,&quot;type&quot;:&quot;text&quot;}"/>
           <p:cNvSpPr txBox="1"/>
           <p:nvPr/>
         </p:nvSpPr>
@@ -17324,7 +19214,7 @@
       </p:sp>
       <p:sp>
         <p:nvSpPr>
-          <p:cNvPr id="358" name="" descr="{&quot;isTemplate&quot;:true,&quot;type&quot;:&quot;text&quot;}"/>
+          <p:cNvPr id="393" name="" descr="{&quot;isTemplate&quot;:true,&quot;type&quot;:&quot;text&quot;}"/>
           <p:cNvSpPr txBox="1"/>
           <p:nvPr/>
         </p:nvSpPr>
@@ -17359,7 +19249,7 @@
       </p:sp>
       <p:sp>
         <p:nvSpPr>
-          <p:cNvPr id="359" name="" descr="{&quot;isTemplate&quot;:true,&quot;type&quot;:&quot;text&quot;}"/>
+          <p:cNvPr id="394" name="" descr="{&quot;isTemplate&quot;:true,&quot;type&quot;:&quot;text&quot;}"/>
           <p:cNvSpPr txBox="1"/>
           <p:nvPr/>
         </p:nvSpPr>
@@ -17436,7 +19326,7 @@
       </p:sp>
       <p:sp>
         <p:nvSpPr>
-          <p:cNvPr id="360" name="" descr="{&quot;isTemplate&quot;:true,&quot;type&quot;:&quot;text&quot;}"/>
+          <p:cNvPr id="395" name="" descr="{&quot;isTemplate&quot;:true,&quot;type&quot;:&quot;text&quot;}"/>
           <p:cNvSpPr txBox="1"/>
           <p:nvPr/>
         </p:nvSpPr>
@@ -17471,7 +19361,7 @@
       </p:sp>
       <p:sp>
         <p:nvSpPr>
-          <p:cNvPr id="361" name="" descr="{&quot;isTemplate&quot;:true,&quot;type&quot;:&quot;text&quot;}"/>
+          <p:cNvPr id="396" name="" descr="{&quot;isTemplate&quot;:true,&quot;type&quot;:&quot;text&quot;}"/>
           <p:cNvSpPr txBox="1"/>
           <p:nvPr/>
         </p:nvSpPr>
@@ -17636,7 +19526,7 @@
       </p:sp>
       <p:sp>
         <p:nvSpPr>
-          <p:cNvPr id="362" name="" descr="{&quot;isTemplate&quot;:true,&quot;type&quot;:&quot;text&quot;}"/>
+          <p:cNvPr id="397" name="" descr="{&quot;isTemplate&quot;:true,&quot;type&quot;:&quot;text&quot;}"/>
           <p:cNvSpPr txBox="1"/>
           <p:nvPr/>
         </p:nvSpPr>
@@ -17671,7 +19561,7 @@
       </p:sp>
       <p:sp>
         <p:nvSpPr>
-          <p:cNvPr id="363" name=""/>
+          <p:cNvPr id="398" name=""/>
           <p:cNvSpPr/>
           <p:nvPr/>
         </p:nvSpPr>
@@ -17697,7 +19587,7 @@
       </p:sp>
       <p:sp>
         <p:nvSpPr>
-          <p:cNvPr id="364" name="" descr="{&quot;isTemplate&quot;:true,&quot;type&quot;:&quot;text&quot;}"/>
+          <p:cNvPr id="399" name="" descr="{&quot;isTemplate&quot;:true,&quot;type&quot;:&quot;text&quot;}"/>
           <p:cNvSpPr txBox="1"/>
           <p:nvPr/>
         </p:nvSpPr>
@@ -17732,7 +19622,7 @@
       </p:sp>
       <p:sp>
         <p:nvSpPr>
-          <p:cNvPr id="365" name="" descr="{&quot;isTemplate&quot;:true,&quot;type&quot;:&quot;text&quot;}"/>
+          <p:cNvPr id="400" name="" descr="{&quot;isTemplate&quot;:true,&quot;type&quot;:&quot;text&quot;}"/>
           <p:cNvSpPr txBox="1"/>
           <p:nvPr/>
         </p:nvSpPr>
@@ -17967,7 +19857,7 @@
       </p:sp>
       <p:sp>
         <p:nvSpPr>
-          <p:cNvPr id="366" name="" descr="{&quot;isTemplate&quot;:true,&quot;type&quot;:&quot;text&quot;}"/>
+          <p:cNvPr id="401" name="" descr="{&quot;isTemplate&quot;:true,&quot;type&quot;:&quot;text&quot;}"/>
           <p:cNvSpPr txBox="1"/>
           <p:nvPr/>
         </p:nvSpPr>
@@ -18232,7 +20122,7 @@
       </p:sp>
       <p:sp>
         <p:nvSpPr>
-          <p:cNvPr id="367" name="" descr="{&quot;isTemplate&quot;:true,&quot;type&quot;:&quot;text&quot;}"/>
+          <p:cNvPr id="402" name="" descr="{&quot;isTemplate&quot;:true,&quot;type&quot;:&quot;text&quot;}"/>
           <p:cNvSpPr txBox="1"/>
           <p:nvPr/>
         </p:nvSpPr>
@@ -18377,7 +20267,7 @@
       </p:sp>
       <p:sp>
         <p:nvSpPr>
-          <p:cNvPr id="368" name=""/>
+          <p:cNvPr id="403" name=""/>
           <p:cNvSpPr/>
           <p:nvPr/>
         </p:nvSpPr>
@@ -18401,7 +20291,7 @@
       </p:sp>
       <p:sp>
         <p:nvSpPr>
-          <p:cNvPr id="369" name=""/>
+          <p:cNvPr id="404" name=""/>
           <p:cNvSpPr/>
           <p:nvPr/>
         </p:nvSpPr>
@@ -18441,7 +20331,7 @@
       </p:sp>
       <p:sp>
         <p:nvSpPr>
-          <p:cNvPr id="370" name="" descr="{&quot;isTemplate&quot;:true,&quot;type&quot;:&quot;text&quot;}"/>
+          <p:cNvPr id="405" name="" descr="{&quot;isTemplate&quot;:true,&quot;type&quot;:&quot;text&quot;}"/>
           <p:cNvSpPr txBox="1"/>
           <p:nvPr/>
         </p:nvSpPr>
@@ -18556,7 +20446,7 @@
       </p:sp>
       <p:sp>
         <p:nvSpPr>
-          <p:cNvPr id="371" name=""/>
+          <p:cNvPr id="406" name=""/>
           <p:cNvSpPr/>
           <p:nvPr/>
         </p:nvSpPr>
@@ -18580,7 +20470,7 @@
       </p:sp>
       <p:sp>
         <p:nvSpPr>
-          <p:cNvPr id="372" name=""/>
+          <p:cNvPr id="407" name=""/>
           <p:cNvSpPr/>
           <p:nvPr/>
         </p:nvSpPr>
@@ -18620,7 +20510,7 @@
       </p:sp>
       <p:sp>
         <p:nvSpPr>
-          <p:cNvPr id="373" name="" descr="{&quot;isTemplate&quot;:true,&quot;type&quot;:&quot;text&quot;}"/>
+          <p:cNvPr id="408" name="" descr="{&quot;isTemplate&quot;:true,&quot;type&quot;:&quot;text&quot;}"/>
           <p:cNvSpPr txBox="1"/>
           <p:nvPr/>
         </p:nvSpPr>
@@ -18665,7 +20555,7 @@
       </p:sp>
       <p:sp>
         <p:nvSpPr>
-          <p:cNvPr id="374" name="" descr="{&quot;isTemplate&quot;:true,&quot;type&quot;:&quot;text&quot;}"/>
+          <p:cNvPr id="409" name="" descr="{&quot;isTemplate&quot;:true,&quot;type&quot;:&quot;text&quot;}"/>
           <p:cNvSpPr txBox="1"/>
           <p:nvPr/>
         </p:nvSpPr>
@@ -18788,7 +20678,7 @@
   <p:cSld>
     <p:spTree>
       <p:nvGrpSpPr>
-        <p:cNvPr id="375" name="" descr="&lt;Slide style={{ width: '1280px', height: '720px', backgroundColor: '#FFFFFF', padding: '0px', flexDirection: 'column' }}&gt;&#13;&#10;    &lt;Box style={{ width: '1280px', height: '8px', backgroundColor: '#1E4FA8' }} /&gt;&#13;&#10;    &lt;Box style={{ padding: '26px 40px 0px 40px', flexDirection: 'row', justifyContent: 'space-between', alignItems: 'flex-end' }}&gt;&#13;&#10;        &lt;Text style={{ fontSize: 33, fontWeight: 'bold', color: '#1E4FA8' }}&gt;全局检索：先不问“在哪”，只问“像不像”&lt;/Text&gt;&#13;&#10;        &lt;Text style={{ fontSize: 15, color: '#8B97A8' }}&gt;05 / 15&lt;/Text&gt;&#13;&#10;    &lt;/Box&gt;&#13;&#10;    &lt;Box style={{ padding: '8px 40px 0px 40px' }}&gt;&#13;&#10;        &lt;Text style={{ fontSize: 20, color: '#4A5568', lineHeight: 1.4 }}&gt;每来一个关键帧，先用一个全局描述子和全部历史帧比一次，取出 20 个“可能同处”的候选——这一步完全不看拍摄顺序。&lt;/Text&gt;&#13;&#10;    &lt;/Box&gt;&#13;&#10;    &lt;Box style={{ padding: '14px 40px 0px 40px', flexDirection: 'row', gap: 20 }}&gt;&#13;&#10;        &lt;Box style={{ width: 600, flexDirection: 'column', gap: 11 }}&gt;&#13;&#10;            &lt;Box style={{ backgroundColor: '#F7F9FC', border: '1px solid #D6DCE5', borderRadius: 6, padding: '9px 16px' }}&gt;&#13;&#10;                &lt;Text style={{ fontSize: 18, color: '#1A2230', lineHeight: 1.45 }}&gt;&lt;b&gt;输入&lt;/b&gt;　新帧图像 ＋ 已收下的历史关键帧库&lt;/Text&gt;&#13;&#10;            &lt;/Box&gt;&#13;&#10;            &lt;Box style={{ backgroundColor: '#F7F9FC', border: '1px solid #D6DCE5', borderRadius: 6, padding: '9px 16px' }}&gt;&#13;&#10;                &lt;Text style={{ fontSize: 18, color: '#1A2230', lineHeight: 1.45 }}&gt;&lt;b&gt;做法&lt;/b&gt;　MegaLoc 输出 4096 维描述子；与库内全部描述子算余弦相似度，排序取前 20&lt;/Text&gt;&#13;&#10;            &lt;/Box&gt;&#13;&#10;            &lt;Box style={{ backgroundColor: '#F7F9FC', border: '1px solid #D6DCE5', borderRadius: 6, padding: '9px 16px' }}&gt;&#13;&#10;                &lt;Text style={{ fontSize: 18, color: '#1A2230', lineHeight: 1.45 }}&gt;&lt;b&gt;输出&lt;/b&gt;　20 个候选帧（只是“像”，还不保证几何对得上）&lt;/Text&gt;&#13;&#10;            &lt;/Box&gt;&#13;&#10;            &lt;Box style={{ backgroundColor: '#F0F5FC', border: '1px solid #3D7BD9', borderRadius: 6, padding: '10px 16px', flexDirection: 'column' }}&gt;&#13;&#10;                &lt;Text style={{ fontSize: 18, color: '#1A2230', lineHeight: 1.45 }}&gt;&lt;b&gt;关键取值&lt;/b&gt;　K = 20 个候选　·　num_prev_keyframes_check = 20&lt;/Text&gt;&#13;&#10;                &lt;Text style={{ fontSize: 16, color: '#4A5568', lineHeight: 1.4, marginTop: 4 }}&gt;论文写 MixVPR，开源代码因许可换成 MegaLoc；两者都是“一帧 → 一个向量”&lt;/Text&gt;&#13;&#10;            &lt;/Box&gt;&#13;&#10;        &lt;/Box&gt;&#13;&#10;        &lt;Box style={{ width: 580, flexDirection: 'column' }}&gt;&#13;&#10;            &lt;Image src=&quot;figs/fig1_vpr.png&quot; style={{ width: 580, height: 362 }} /&gt;&#13;&#10;            &lt;Text style={{ fontSize: 14.5, color: '#8B97A8', marginTop: 5 }}&gt;图 1　检索与帧序无关：n 帧只做 n 次比对，不做 n² 次。&lt;/Text&gt;&#13;&#10;        &lt;/Box&gt;&#13;&#10;    &lt;/Box&gt;&#13;&#10;    &lt;Box style={{ margin: '12px 40px 0px 40px', backgroundColor: '#F7F9FC', borderLeft: '5px solid #1E4FA8', padding: '10px 18px', flexDirection: 'column' }}&gt;&#13;&#10;        &lt;Image src=&quot;formula/f05.png&quot; style={{ width: 149.5, height: 50.0 }} /&gt;&#13;&#10;        &lt;Text style={{ fontSize: 16.5, color: '#4A5568', lineHeight: 1.4, marginTop: 3 }}&gt;相似度只看外观、不看时间——乱序输入在这里第一次被“原谅”；代价 ≈ 1 ms / 1000 对，是整条链里最便宜的一步。&lt;/Text&gt;&#13;&#10;    &lt;/Box&gt;&#13;&#10;    &lt;Box style={{ marginTop: 'auto', padding: '10px 40px 12px 40px' }}&gt;&#13;&#10;        &lt;Text style={{ fontSize: 15, color: '#8B97A8' }}&gt;治的是“乱”：不再假设新帧只和上一帧有关，而是和全部历史都有关。&lt;/Text&gt;&#13;&#10;    &lt;/Box&gt;&#13;&#10;&lt;/Slide&gt;&#13;&#10;"/>
+        <p:cNvPr id="410" name="" descr="&lt;Slide style={{ width: '1280px', height: '720px', backgroundColor: '#FFFFFF', padding: '0px', flexDirection: 'column' }}&gt;&#10;    &lt;Box style={{ width: '1280px', height: '8px', backgroundColor: '#1E4FA8' }} /&gt;&#10;    &lt;Box style={{ padding: '26px 40px 0px 40px', flexDirection: 'row', justifyContent: 'space-between', alignItems: 'flex-end' }}&gt;&#10;        &lt;Text style={{ fontSize: 33, fontWeight: 'bold', color: '#1E4FA8' }}&gt;全局检索：先不问“在哪”，只问“像不像”&lt;/Text&gt;&#10;        &lt;Text style={{ fontSize: 15, color: '#8B97A8' }}&gt;05 / 16&lt;/Text&gt;&#10;    &lt;/Box&gt;&#10;    &lt;Box style={{ padding: '8px 40px 0px 40px' }}&gt;&#10;        &lt;Text style={{ fontSize: 20, color: '#4A5568', lineHeight: 1.4 }}&gt;每来一个关键帧，先用一个全局描述子和全部历史帧比一次，取出 20 个“可能同处”的候选——这一步完全不看拍摄顺序。&lt;/Text&gt;&#10;    &lt;/Box&gt;&#10;    &lt;Box style={{ padding: '14px 40px 0px 40px', flexDirection: 'row', gap: 20 }}&gt;&#10;        &lt;Box style={{ width: 600, flexDirection: 'column', gap: 11 }}&gt;&#10;            &lt;Box style={{ backgroundColor: '#F7F9FC', border: '1px solid #D6DCE5', borderRadius: 6, padding: '9px 16px' }}&gt;&#10;                &lt;Text style={{ fontSize: 18, color: '#1A2230', lineHeight: 1.45 }}&gt;&lt;b&gt;输入&lt;/b&gt;　新帧图像 ＋ 已收下的历史关键帧库&lt;/Text&gt;&#10;            &lt;/Box&gt;&#10;            &lt;Box style={{ backgroundColor: '#F7F9FC', border: '1px solid #D6DCE5', borderRadius: 6, padding: '9px 16px' }}&gt;&#10;                &lt;Text style={{ fontSize: 18, color: '#1A2230', lineHeight: 1.45 }}&gt;&lt;b&gt;做法&lt;/b&gt;　MegaLoc 输出 4096 维描述子；与库内全部描述子算余弦相似度，排序取前 20&lt;/Text&gt;&#10;            &lt;/Box&gt;&#10;            &lt;Box style={{ backgroundColor: '#F7F9FC', border: '1px solid #D6DCE5', borderRadius: 6, padding: '9px 16px' }}&gt;&#10;                &lt;Text style={{ fontSize: 18, color: '#1A2230', lineHeight: 1.45 }}&gt;&lt;b&gt;输出&lt;/b&gt;　20 个候选帧（只是“像”，还不保证几何对得上）&lt;/Text&gt;&#10;            &lt;/Box&gt;&#10;            &lt;Box style={{ backgroundColor: '#F0F5FC', border: '1px solid #3D7BD9', borderRadius: 6, padding: '10px 16px', flexDirection: 'column' }}&gt;&#10;                &lt;Text style={{ fontSize: 18, color: '#1A2230', lineHeight: 1.45 }}&gt;&lt;b&gt;关键取值&lt;/b&gt;　K = 20 个候选　·　num_prev_keyframes_check = 20&lt;/Text&gt;&#10;                &lt;Text style={{ fontSize: 16, color: '#4A5568', lineHeight: 1.4, marginTop: 4 }}&gt;论文写 MixVPR，开源代码因许可换成 MegaLoc；两者都是“一帧 → 一个向量”&lt;/Text&gt;&#10;            &lt;/Box&gt;&#10;        &lt;/Box&gt;&#10;        &lt;Box style={{ width: 580, flexDirection: 'column' }}&gt;&#10;            &lt;Image src=&quot;figs/fig1_vpr.png&quot; style={{ width: 580, height: 362 }} /&gt;&#10;            &lt;Text style={{ fontSize: 14.5, color: '#8B97A8', marginTop: 5 }}&gt;图 1　检索与帧序无关：n 帧只做 n 次比对，不做 n² 次。&lt;/Text&gt;&#10;        &lt;/Box&gt;&#10;    &lt;/Box&gt;&#10;    &lt;Box style={{ margin: '12px 40px 0px 40px', backgroundColor: '#F7F9FC', borderLeft: '5px solid #1E4FA8', padding: '10px 18px', flexDirection: 'column' }}&gt;&#10;        &lt;Image src=&quot;formula/f05.png&quot; style={{ width: 149.5, height: 50.0 }} /&gt;&#10;        &lt;Text style={{ fontSize: 16.5, color: '#4A5568', lineHeight: 1.4, marginTop: 3 }}&gt;相似度只看外观、不看时间——乱序输入在这里第一次被“原谅”；代价 ≈ 1 ms / 1000 对，是整条链里最便宜的一步。&lt;/Text&gt;&#10;    &lt;/Box&gt;&#10;    &lt;Box style={{ marginTop: 'auto', padding: '10px 40px 12px 40px' }}&gt;&#10;        &lt;Text style={{ fontSize: 15, color: '#8B97A8' }}&gt;治的是“乱”：不再假设新帧只和上一帧有关，而是和全部历史都有关。&lt;/Text&gt;&#10;    &lt;/Box&gt;&#10;&lt;/Slide&gt;&#10;"/>
         <p:cNvGrpSpPr/>
         <p:nvPr/>
       </p:nvGrpSpPr>
@@ -18802,7 +20692,7 @@
       </p:grpSpPr>
       <p:sp>
         <p:nvSpPr>
-          <p:cNvPr id="376" name=""/>
+          <p:cNvPr id="411" name=""/>
           <p:cNvSpPr/>
           <p:nvPr/>
         </p:nvSpPr>
@@ -18826,7 +20716,7 @@
       </p:sp>
       <p:sp>
         <p:nvSpPr>
-          <p:cNvPr id="377" name=""/>
+          <p:cNvPr id="412" name=""/>
           <p:cNvSpPr/>
           <p:nvPr/>
         </p:nvSpPr>
@@ -18850,7 +20740,7 @@
       </p:sp>
       <p:sp>
         <p:nvSpPr>
-          <p:cNvPr id="378" name="" descr="{&quot;isTemplate&quot;:true,&quot;type&quot;:&quot;text&quot;}"/>
+          <p:cNvPr id="413" name="" descr="{&quot;isTemplate&quot;:true,&quot;type&quot;:&quot;text&quot;}"/>
           <p:cNvSpPr txBox="1"/>
           <p:nvPr/>
         </p:nvSpPr>
@@ -18885,7 +20775,7 @@
       </p:sp>
       <p:sp>
         <p:nvSpPr>
-          <p:cNvPr id="379" name="" descr="{&quot;isTemplate&quot;:true,&quot;type&quot;:&quot;text&quot;}"/>
+          <p:cNvPr id="414" name="" descr="{&quot;isTemplate&quot;:true,&quot;type&quot;:&quot;text&quot;}"/>
           <p:cNvSpPr txBox="1"/>
           <p:nvPr/>
         </p:nvSpPr>
@@ -18912,15 +20802,15 @@
                 <a:latin typeface="Microsoft YaHei"/>
                 <a:ea typeface="Microsoft YaHei"/>
               </a:rPr>
-              <a:t>05 / 15</a:t>
-            </a:r>
-            <a:endParaRPr/>
-          </a:p>
-        </p:txBody>
-      </p:sp>
-      <p:sp>
-        <p:nvSpPr>
-          <p:cNvPr id="380" name="" descr="{&quot;isTemplate&quot;:true,&quot;type&quot;:&quot;text&quot;}"/>
+              <a:t>05 / 16</a:t>
+            </a:r>
+            <a:endParaRPr/>
+          </a:p>
+        </p:txBody>
+      </p:sp>
+      <p:sp>
+        <p:nvSpPr>
+          <p:cNvPr id="415" name="" descr="{&quot;isTemplate&quot;:true,&quot;type&quot;:&quot;text&quot;}"/>
           <p:cNvSpPr txBox="1"/>
           <p:nvPr/>
         </p:nvSpPr>
@@ -18975,7 +20865,7 @@
       </p:sp>
       <p:sp>
         <p:nvSpPr>
-          <p:cNvPr id="381" name=""/>
+          <p:cNvPr id="416" name=""/>
           <p:cNvSpPr/>
           <p:nvPr/>
         </p:nvSpPr>
@@ -19006,7 +20896,7 @@
       </p:sp>
       <p:sp>
         <p:nvSpPr>
-          <p:cNvPr id="382" name="" descr="{&quot;isTemplate&quot;:true,&quot;type&quot;:&quot;text&quot;}"/>
+          <p:cNvPr id="417" name="" descr="{&quot;isTemplate&quot;:true,&quot;type&quot;:&quot;text&quot;}"/>
           <p:cNvSpPr txBox="1"/>
           <p:nvPr/>
         </p:nvSpPr>
@@ -19091,7 +20981,7 @@
       </p:sp>
       <p:sp>
         <p:nvSpPr>
-          <p:cNvPr id="383" name=""/>
+          <p:cNvPr id="418" name=""/>
           <p:cNvSpPr/>
           <p:nvPr/>
         </p:nvSpPr>
@@ -19122,7 +21012,7 @@
       </p:sp>
       <p:sp>
         <p:nvSpPr>
-          <p:cNvPr id="384" name="" descr="{&quot;isTemplate&quot;:true,&quot;type&quot;:&quot;text&quot;}"/>
+          <p:cNvPr id="419" name="" descr="{&quot;isTemplate&quot;:true,&quot;type&quot;:&quot;text&quot;}"/>
           <p:cNvSpPr txBox="1"/>
           <p:nvPr/>
         </p:nvSpPr>
@@ -19219,7 +21109,7 @@
       </p:sp>
       <p:sp>
         <p:nvSpPr>
-          <p:cNvPr id="385" name=""/>
+          <p:cNvPr id="420" name=""/>
           <p:cNvSpPr/>
           <p:nvPr/>
         </p:nvSpPr>
@@ -19250,7 +21140,7 @@
       </p:sp>
       <p:sp>
         <p:nvSpPr>
-          <p:cNvPr id="386" name="" descr="{&quot;isTemplate&quot;:true,&quot;type&quot;:&quot;text&quot;}"/>
+          <p:cNvPr id="421" name="" descr="{&quot;isTemplate&quot;:true,&quot;type&quot;:&quot;text&quot;}"/>
           <p:cNvSpPr txBox="1"/>
           <p:nvPr/>
         </p:nvSpPr>
@@ -19315,7 +21205,7 @@
       </p:sp>
       <p:sp>
         <p:nvSpPr>
-          <p:cNvPr id="387" name=""/>
+          <p:cNvPr id="422" name=""/>
           <p:cNvSpPr/>
           <p:nvPr/>
         </p:nvSpPr>
@@ -19346,7 +21236,7 @@
       </p:sp>
       <p:sp>
         <p:nvSpPr>
-          <p:cNvPr id="388" name="" descr="{&quot;isTemplate&quot;:true,&quot;type&quot;:&quot;text&quot;}"/>
+          <p:cNvPr id="423" name="" descr="{&quot;isTemplate&quot;:true,&quot;type&quot;:&quot;text&quot;}"/>
           <p:cNvSpPr txBox="1"/>
           <p:nvPr/>
         </p:nvSpPr>
@@ -19421,7 +21311,7 @@
       </p:sp>
       <p:sp>
         <p:nvSpPr>
-          <p:cNvPr id="389" name="" descr="{&quot;isTemplate&quot;:true,&quot;type&quot;:&quot;text&quot;}"/>
+          <p:cNvPr id="424" name="" descr="{&quot;isTemplate&quot;:true,&quot;type&quot;:&quot;text&quot;}"/>
           <p:cNvSpPr txBox="1"/>
           <p:nvPr/>
         </p:nvSpPr>
@@ -19518,7 +21408,7 @@
       </p:sp>
       <p:pic>
         <p:nvPicPr>
-          <p:cNvPr id="390" name=""/>
+          <p:cNvPr id="425" name=""/>
           <p:cNvPicPr>
             <a:picLocks noChangeAspect="1"/>
           </p:cNvPicPr>
@@ -19544,7 +21434,7 @@
       </p:pic>
       <p:sp>
         <p:nvSpPr>
-          <p:cNvPr id="391" name="" descr="{&quot;isTemplate&quot;:true,&quot;type&quot;:&quot;text&quot;}"/>
+          <p:cNvPr id="426" name="" descr="{&quot;isTemplate&quot;:true,&quot;type&quot;:&quot;text&quot;}"/>
           <p:cNvSpPr txBox="1"/>
           <p:nvPr/>
         </p:nvSpPr>
@@ -19659,7 +21549,7 @@
       </p:sp>
       <p:sp>
         <p:nvSpPr>
-          <p:cNvPr id="392" name=""/>
+          <p:cNvPr id="427" name=""/>
           <p:cNvSpPr/>
           <p:nvPr/>
         </p:nvSpPr>
@@ -19683,7 +21573,7 @@
       </p:sp>
       <p:sp>
         <p:nvSpPr>
-          <p:cNvPr id="393" name=""/>
+          <p:cNvPr id="428" name=""/>
           <p:cNvSpPr/>
           <p:nvPr/>
         </p:nvSpPr>
@@ -19723,7 +21613,7 @@
       </p:sp>
       <p:pic>
         <p:nvPicPr>
-          <p:cNvPr id="394" name=""/>
+          <p:cNvPr id="429" name=""/>
           <p:cNvPicPr>
             <a:picLocks noChangeAspect="1"/>
           </p:cNvPicPr>
@@ -19749,7 +21639,7 @@
       </p:pic>
       <p:sp>
         <p:nvSpPr>
-          <p:cNvPr id="395" name="" descr="{&quot;isTemplate&quot;:true,&quot;type&quot;:&quot;text&quot;}"/>
+          <p:cNvPr id="430" name="" descr="{&quot;isTemplate&quot;:true,&quot;type&quot;:&quot;text&quot;}"/>
           <p:cNvSpPr txBox="1"/>
           <p:nvPr/>
         </p:nvSpPr>
@@ -19804,7 +21694,7 @@
       </p:sp>
       <p:sp>
         <p:nvSpPr>
-          <p:cNvPr id="396" name="" descr="{&quot;isTemplate&quot;:true,&quot;type&quot;:&quot;text&quot;}"/>
+          <p:cNvPr id="431" name="" descr="{&quot;isTemplate&quot;:true,&quot;type&quot;:&quot;text&quot;}"/>
           <p:cNvSpPr txBox="1"/>
           <p:nvPr/>
         </p:nvSpPr>
@@ -19847,7 +21737,7 @@
   <p:cSld>
     <p:spTree>
       <p:nvGrpSpPr>
-        <p:cNvPr id="397" name="" descr="&lt;Slide style={{ width: '1280px', height: '720px', backgroundColor: '#FFFFFF', padding: '0px', flexDirection: 'column' }}&gt;&#13;&#10;    &lt;Box style={{ width: '1280px', height: '8px', backgroundColor: '#1E4FA8' }} /&gt;&#13;&#10;    &lt;Box style={{ padding: '26px 40px 0px 40px', flexDirection: 'row', justifyContent: 'space-between', alignItems: 'flex-end' }}&gt;&#13;&#10;        &lt;Text style={{ fontSize: 33, fontWeight: 'bold', color: '#1E4FA8' }}&gt;局部粗筛：砍掉“看着像、其实没对上”的候选&lt;/Text&gt;&#13;&#10;        &lt;Text style={{ fontSize: 15, color: '#8B97A8' }}&gt;06 / 15&lt;/Text&gt;&#13;&#10;    &lt;/Box&gt;&#13;&#10;    &lt;Box style={{ padding: '8px 40px 0px 40px' }}&gt;&#13;&#10;        &lt;Text style={{ fontSize: 20, color: '#4A5568', lineHeight: 1.4 }}&gt;对 20 个候选各跑一次轻量局部匹配，按能对上的关键点数排序，只把前 5 个留给精确匹配。&lt;/Text&gt;&#13;&#10;    &lt;/Box&gt;&#13;&#10;    &lt;Box style={{ padding: '14px 40px 0px 40px', flexDirection: 'row', gap: 20 }}&gt;&#13;&#10;        &lt;Box style={{ width: 600, flexDirection: 'column', gap: 11 }}&gt;&#13;&#10;            &lt;Box style={{ backgroundColor: '#F7F9FC', border: '1px solid #D6DCE5', borderRadius: 6, padding: '9px 16px' }}&gt;&#13;&#10;                &lt;Text style={{ fontSize: 18, color: '#1A2230', lineHeight: 1.45 }}&gt;&lt;b&gt;输入&lt;/b&gt;　① 给出的 20 个候选帧&lt;/Text&gt;&#13;&#10;            &lt;/Box&gt;&#13;&#10;            &lt;Box style={{ backgroundColor: '#F7F9FC', border: '1px solid #D6DCE5', borderRadius: 6, padding: '9px 16px' }}&gt;&#13;&#10;                &lt;Text style={{ fontSize: 18, color: '#1A2230', lineHeight: 1.45 }}&gt;&lt;b&gt;做法&lt;/b&gt;　XFeat 提稀疏关键点，只比坐标一致性，得到内点对数 |M_ij|&lt;/Text&gt;&#13;&#10;            &lt;/Box&gt;&#13;&#10;            &lt;Box style={{ backgroundColor: '#F7F9FC', border: '1px solid #D6DCE5', borderRadius: 6, padding: '9px 16px' }}&gt;&#13;&#10;                &lt;Text style={{ fontSize: 18, color: '#1A2230', lineHeight: 1.45 }}&gt;&lt;b&gt;输出&lt;/b&gt;　5 个候选（外观像 ＋ 确实对上了点）&lt;/Text&gt;&#13;&#10;            &lt;/Box&gt;&#13;&#10;            &lt;Box style={{ backgroundColor: '#F0F5FC', border: '1px solid #3D7BD9', borderRadius: 6, padding: '10px 16px', flexDirection: 'column' }}&gt;&#13;&#10;                &lt;Text style={{ fontSize: 18, color: '#1A2230', lineHeight: 1.45 }}&gt;&lt;b&gt;关键取值&lt;/b&gt;　保留 K′ = 5 个　·　约 0.5 ms / 对&lt;/Text&gt;&#13;&#10;                &lt;Text style={{ fontSize: 16, color: '#4A5568', lineHeight: 1.4, marginTop: 4 }}&gt;这一步故意用“便宜但粗糙”的特征：它的任务只是排序，不是定论&lt;/Text&gt;&#13;&#10;            &lt;/Box&gt;&#13;&#10;        &lt;/Box&gt;&#13;&#10;        &lt;Box style={{ width: 580, flexDirection: 'column' }}&gt;&#13;&#10;            &lt;Image src=&quot;figs/fig2_xfeat.png&quot; style={{ width: 580, height: 362 }} /&gt;&#13;&#10;            &lt;Text style={{ fontSize: 14.5, color: '#8B97A8', marginTop: 5 }}&gt;图 2　20 个候选按内点数排序，只有前 5 个进入下一级。&lt;/Text&gt;&#13;&#10;        &lt;/Box&gt;&#13;&#10;    &lt;/Box&gt;&#13;&#10;    &lt;Box style={{ margin: '12px 40px 0px 40px', backgroundColor: '#F7F9FC', borderLeft: '5px solid #1E4FA8', padding: '10px 18px', flexDirection: 'column' }}&gt;&#13;&#10;        &lt;Image src=&quot;formula/f06.png&quot; style={{ width: 197.5, height: 30.5 }} /&gt;&#13;&#10;        &lt;Text style={{ fontSize: 16.5, color: '#4A5568', lineHeight: 1.4, marginTop: 3 }}&gt;淘汰的正是纯外观检索的典型假阳性：两个角落都“长得像窗台”，但一个点都对不上。&lt;/Text&gt;&#13;&#10;    &lt;/Box&gt;&#13;&#10;    &lt;Box style={{ marginTop: 'auto', padding: '10px 40px 12px 40px' }}&gt;&#13;&#10;        &lt;Text style={{ fontSize: 15, color: '#8B97A8' }}&gt;三级串联的意义：候选集 1000 → 20 → 5 → 1，贵的操作只作用在极小的集合上。&lt;/Text&gt;&#13;&#10;    &lt;/Box&gt;&#13;&#10;&lt;/Slide&gt;&#13;&#10;"/>
+        <p:cNvPr id="432" name="" descr="&lt;Slide style={{ width: '1280px', height: '720px', backgroundColor: '#FFFFFF', padding: '0px', flexDirection: 'column' }}&gt;&#10;    &lt;Box style={{ width: '1280px', height: '8px', backgroundColor: '#1E4FA8' }} /&gt;&#10;    &lt;Box style={{ padding: '26px 40px 0px 40px', flexDirection: 'row', justifyContent: 'space-between', alignItems: 'flex-end' }}&gt;&#10;        &lt;Text style={{ fontSize: 33, fontWeight: 'bold', color: '#1E4FA8' }}&gt;局部粗筛：砍掉“看着像、其实没对上”的候选&lt;/Text&gt;&#10;        &lt;Text style={{ fontSize: 15, color: '#8B97A8' }}&gt;06 / 16&lt;/Text&gt;&#10;    &lt;/Box&gt;&#10;    &lt;Box style={{ padding: '8px 40px 0px 40px' }}&gt;&#10;        &lt;Text style={{ fontSize: 20, color: '#4A5568', lineHeight: 1.4 }}&gt;对 20 个候选各跑一次轻量局部匹配，按能对上的关键点数排序，只把前 5 个留给精确匹配。&lt;/Text&gt;&#10;    &lt;/Box&gt;&#10;    &lt;Box style={{ padding: '14px 40px 0px 40px', flexDirection: 'row', gap: 20 }}&gt;&#10;        &lt;Box style={{ width: 600, flexDirection: 'column', gap: 11 }}&gt;&#10;            &lt;Box style={{ backgroundColor: '#F7F9FC', border: '1px solid #D6DCE5', borderRadius: 6, padding: '9px 16px' }}&gt;&#10;                &lt;Text style={{ fontSize: 18, color: '#1A2230', lineHeight: 1.45 }}&gt;&lt;b&gt;输入&lt;/b&gt;　① 给出的 20 个候选帧&lt;/Text&gt;&#10;            &lt;/Box&gt;&#10;            &lt;Box style={{ backgroundColor: '#F7F9FC', border: '1px solid #D6DCE5', borderRadius: 6, padding: '9px 16px' }}&gt;&#10;                &lt;Text style={{ fontSize: 18, color: '#1A2230', lineHeight: 1.45 }}&gt;&lt;b&gt;做法&lt;/b&gt;　XFeat 提稀疏关键点，只比坐标一致性，得到内点对数 |M_ij|&lt;/Text&gt;&#10;            &lt;/Box&gt;&#10;            &lt;Box style={{ backgroundColor: '#F7F9FC', border: '1px solid #D6DCE5', borderRadius: 6, padding: '9px 16px' }}&gt;&#10;                &lt;Text style={{ fontSize: 18, color: '#1A2230', lineHeight: 1.45 }}&gt;&lt;b&gt;输出&lt;/b&gt;　5 个候选（外观像 ＋ 确实对上了点）&lt;/Text&gt;&#10;            &lt;/Box&gt;&#10;            &lt;Box style={{ backgroundColor: '#F0F5FC', border: '1px solid #3D7BD9', borderRadius: 6, padding: '10px 16px', flexDirection: 'column' }}&gt;&#10;                &lt;Text style={{ fontSize: 18, color: '#1A2230', lineHeight: 1.45 }}&gt;&lt;b&gt;关键取值&lt;/b&gt;　保留 K′ = 5 个　·　约 0.5 ms / 对&lt;/Text&gt;&#10;                &lt;Text style={{ fontSize: 16, color: '#4A5568', lineHeight: 1.4, marginTop: 4 }}&gt;这一步故意用“便宜但粗糙”的特征：它的任务只是排序，不是定论&lt;/Text&gt;&#10;            &lt;/Box&gt;&#10;        &lt;/Box&gt;&#10;        &lt;Box style={{ width: 580, flexDirection: 'column' }}&gt;&#10;            &lt;Image src=&quot;figs/fig2_xfeat.png&quot; style={{ width: 580, height: 362 }} /&gt;&#10;            &lt;Text style={{ fontSize: 14.5, color: '#8B97A8', marginTop: 5 }}&gt;图 2　20 个候选按内点数排序，只有前 5 个进入下一级。&lt;/Text&gt;&#10;        &lt;/Box&gt;&#10;    &lt;/Box&gt;&#10;    &lt;Box style={{ margin: '12px 40px 0px 40px', backgroundColor: '#F7F9FC', borderLeft: '5px solid #1E4FA8', padding: '10px 18px', flexDirection: 'column' }}&gt;&#10;        &lt;Image src=&quot;formula/f06.png&quot; style={{ width: 197.5, height: 30.5 }} /&gt;&#10;        &lt;Text style={{ fontSize: 16.5, color: '#4A5568', lineHeight: 1.4, marginTop: 3 }}&gt;淘汰的正是纯外观检索的典型假阳性：两个角落都“长得像窗台”，但一个点都对不上。&lt;/Text&gt;&#10;    &lt;/Box&gt;&#10;    &lt;Box style={{ marginTop: 'auto', padding: '10px 40px 12px 40px' }}&gt;&#10;        &lt;Text style={{ fontSize: 15, color: '#8B97A8' }}&gt;三级串联的意义：候选集 1000 → 20 → 5 → 1，贵的操作只作用在极小的集合上。&lt;/Text&gt;&#10;    &lt;/Box&gt;&#10;&lt;/Slide&gt;&#10;"/>
         <p:cNvGrpSpPr/>
         <p:nvPr/>
       </p:nvGrpSpPr>
@@ -19861,7 +21751,7 @@
       </p:grpSpPr>
       <p:sp>
         <p:nvSpPr>
-          <p:cNvPr id="398" name=""/>
+          <p:cNvPr id="433" name=""/>
           <p:cNvSpPr/>
           <p:nvPr/>
         </p:nvSpPr>
@@ -19885,7 +21775,7 @@
       </p:sp>
       <p:sp>
         <p:nvSpPr>
-          <p:cNvPr id="399" name=""/>
+          <p:cNvPr id="434" name=""/>
           <p:cNvSpPr/>
           <p:nvPr/>
         </p:nvSpPr>
@@ -19909,7 +21799,7 @@
       </p:sp>
       <p:sp>
         <p:nvSpPr>
-          <p:cNvPr id="400" name="" descr="{&quot;isTemplate&quot;:true,&quot;type&quot;:&quot;text&quot;}"/>
+          <p:cNvPr id="435" name="" descr="{&quot;isTemplate&quot;:true,&quot;type&quot;:&quot;text&quot;}"/>
           <p:cNvSpPr txBox="1"/>
           <p:nvPr/>
         </p:nvSpPr>
@@ -19944,7 +21834,7 @@
       </p:sp>
       <p:sp>
         <p:nvSpPr>
-          <p:cNvPr id="401" name="" descr="{&quot;isTemplate&quot;:true,&quot;type&quot;:&quot;text&quot;}"/>
+          <p:cNvPr id="436" name="" descr="{&quot;isTemplate&quot;:true,&quot;type&quot;:&quot;text&quot;}"/>
           <p:cNvSpPr txBox="1"/>
           <p:nvPr/>
         </p:nvSpPr>
@@ -19971,15 +21861,15 @@
                 <a:latin typeface="Microsoft YaHei"/>
                 <a:ea typeface="Microsoft YaHei"/>
               </a:rPr>
-              <a:t>06 / 15</a:t>
-            </a:r>
-            <a:endParaRPr/>
-          </a:p>
-        </p:txBody>
-      </p:sp>
-      <p:sp>
-        <p:nvSpPr>
-          <p:cNvPr id="402" name="" descr="{&quot;isTemplate&quot;:true,&quot;type&quot;:&quot;text&quot;}"/>
+              <a:t>06 / 16</a:t>
+            </a:r>
+            <a:endParaRPr/>
+          </a:p>
+        </p:txBody>
+      </p:sp>
+      <p:sp>
+        <p:nvSpPr>
+          <p:cNvPr id="437" name="" descr="{&quot;isTemplate&quot;:true,&quot;type&quot;:&quot;text&quot;}"/>
           <p:cNvSpPr txBox="1"/>
           <p:nvPr/>
         </p:nvSpPr>
@@ -20054,7 +21944,7 @@
       </p:sp>
       <p:sp>
         <p:nvSpPr>
-          <p:cNvPr id="403" name=""/>
+          <p:cNvPr id="438" name=""/>
           <p:cNvSpPr/>
           <p:nvPr/>
         </p:nvSpPr>
@@ -20085,7 +21975,7 @@
       </p:sp>
       <p:sp>
         <p:nvSpPr>
-          <p:cNvPr id="404" name="" descr="{&quot;isTemplate&quot;:true,&quot;type&quot;:&quot;text&quot;}"/>
+          <p:cNvPr id="439" name="" descr="{&quot;isTemplate&quot;:true,&quot;type&quot;:&quot;text&quot;}"/>
           <p:cNvSpPr txBox="1"/>
           <p:nvPr/>
         </p:nvSpPr>
@@ -20170,7 +22060,7 @@
       </p:sp>
       <p:sp>
         <p:nvSpPr>
-          <p:cNvPr id="405" name=""/>
+          <p:cNvPr id="440" name=""/>
           <p:cNvSpPr/>
           <p:nvPr/>
         </p:nvSpPr>
@@ -20201,7 +22091,7 @@
       </p:sp>
       <p:sp>
         <p:nvSpPr>
-          <p:cNvPr id="406" name="" descr="{&quot;isTemplate&quot;:true,&quot;type&quot;:&quot;text&quot;}"/>
+          <p:cNvPr id="441" name="" descr="{&quot;isTemplate&quot;:true,&quot;type&quot;:&quot;text&quot;}"/>
           <p:cNvSpPr txBox="1"/>
           <p:nvPr/>
         </p:nvSpPr>
@@ -20276,7 +22166,7 @@
       </p:sp>
       <p:sp>
         <p:nvSpPr>
-          <p:cNvPr id="407" name=""/>
+          <p:cNvPr id="442" name=""/>
           <p:cNvSpPr/>
           <p:nvPr/>
         </p:nvSpPr>
@@ -20307,7 +22197,7 @@
       </p:sp>
       <p:sp>
         <p:nvSpPr>
-          <p:cNvPr id="408" name="" descr="{&quot;isTemplate&quot;:true,&quot;type&quot;:&quot;text&quot;}"/>
+          <p:cNvPr id="443" name="" descr="{&quot;isTemplate&quot;:true,&quot;type&quot;:&quot;text&quot;}"/>
           <p:cNvSpPr txBox="1"/>
           <p:nvPr/>
         </p:nvSpPr>
@@ -20412,7 +22302,7 @@
       </p:sp>
       <p:sp>
         <p:nvSpPr>
-          <p:cNvPr id="409" name=""/>
+          <p:cNvPr id="444" name=""/>
           <p:cNvSpPr/>
           <p:nvPr/>
         </p:nvSpPr>
@@ -20443,7 +22333,7 @@
       </p:sp>
       <p:sp>
         <p:nvSpPr>
-          <p:cNvPr id="410" name="" descr="{&quot;isTemplate&quot;:true,&quot;type&quot;:&quot;text&quot;}"/>
+          <p:cNvPr id="445" name="" descr="{&quot;isTemplate&quot;:true,&quot;type&quot;:&quot;text&quot;}"/>
           <p:cNvSpPr txBox="1"/>
           <p:nvPr/>
         </p:nvSpPr>
@@ -20528,7 +22418,7 @@
       </p:sp>
       <p:sp>
         <p:nvSpPr>
-          <p:cNvPr id="411" name="" descr="{&quot;isTemplate&quot;:true,&quot;type&quot;:&quot;text&quot;}"/>
+          <p:cNvPr id="446" name="" descr="{&quot;isTemplate&quot;:true,&quot;type&quot;:&quot;text&quot;}"/>
           <p:cNvSpPr txBox="1"/>
           <p:nvPr/>
         </p:nvSpPr>
@@ -20563,7 +22453,7 @@
       </p:sp>
       <p:pic>
         <p:nvPicPr>
-          <p:cNvPr id="412" name=""/>
+          <p:cNvPr id="447" name=""/>
           <p:cNvPicPr>
             <a:picLocks noChangeAspect="1"/>
           </p:cNvPicPr>
@@ -20589,7 +22479,7 @@
       </p:pic>
       <p:sp>
         <p:nvSpPr>
-          <p:cNvPr id="413" name="" descr="{&quot;isTemplate&quot;:true,&quot;type&quot;:&quot;text&quot;}"/>
+          <p:cNvPr id="448" name="" descr="{&quot;isTemplate&quot;:true,&quot;type&quot;:&quot;text&quot;}"/>
           <p:cNvSpPr txBox="1"/>
           <p:nvPr/>
         </p:nvSpPr>
@@ -20684,7 +22574,7 @@
       </p:sp>
       <p:sp>
         <p:nvSpPr>
-          <p:cNvPr id="414" name=""/>
+          <p:cNvPr id="449" name=""/>
           <p:cNvSpPr/>
           <p:nvPr/>
         </p:nvSpPr>
@@ -20708,7 +22598,7 @@
       </p:sp>
       <p:sp>
         <p:nvSpPr>
-          <p:cNvPr id="415" name=""/>
+          <p:cNvPr id="450" name=""/>
           <p:cNvSpPr/>
           <p:nvPr/>
         </p:nvSpPr>
@@ -20748,7 +22638,7 @@
       </p:sp>
       <p:pic>
         <p:nvPicPr>
-          <p:cNvPr id="416" name=""/>
+          <p:cNvPr id="451" name=""/>
           <p:cNvPicPr>
             <a:picLocks noChangeAspect="1"/>
           </p:cNvPicPr>
@@ -20774,7 +22664,7 @@
       </p:pic>
       <p:sp>
         <p:nvSpPr>
-          <p:cNvPr id="417" name="" descr="{&quot;isTemplate&quot;:true,&quot;type&quot;:&quot;text&quot;}"/>
+          <p:cNvPr id="452" name="" descr="{&quot;isTemplate&quot;:true,&quot;type&quot;:&quot;text&quot;}"/>
           <p:cNvSpPr txBox="1"/>
           <p:nvPr/>
         </p:nvSpPr>
@@ -20809,7 +22699,7 @@
       </p:sp>
       <p:sp>
         <p:nvSpPr>
-          <p:cNvPr id="418" name="" descr="{&quot;isTemplate&quot;:true,&quot;type&quot;:&quot;text&quot;}"/>
+          <p:cNvPr id="453" name="" descr="{&quot;isTemplate&quot;:true,&quot;type&quot;:&quot;text&quot;}"/>
           <p:cNvSpPr txBox="1"/>
           <p:nvPr/>
         </p:nvSpPr>
@@ -20872,7 +22762,7 @@
   <p:cSld>
     <p:spTree>
       <p:nvGrpSpPr>
-        <p:cNvPr id="419" name="" descr="&lt;Slide style={{ width: '1280px', height: '720px', backgroundColor: '#FFFFFF', padding: '0px', flexDirection: 'column' }}&gt;&#13;&#10;    &lt;Box style={{ width: '1280px', height: '8px', backgroundColor: '#1E4FA8' }} /&gt;&#13;&#10;    &lt;Box style={{ padding: '26px 40px 0px 40px', flexDirection: 'row', justifyContent: 'space-between', alignItems: 'flex-end' }}&gt;&#13;&#10;        &lt;Text style={{ fontSize: 33, fontWeight: 'bold', color: '#1E4FA8' }}&gt;精确验证：通过才建边，边就是后面一切判断的依据&lt;/Text&gt;&#13;&#10;        &lt;Text style={{ fontSize: 15, color: '#8B97A8' }}&gt;07 / 15&lt;/Text&gt;&#13;&#10;    &lt;/Box&gt;&#13;&#10;    &lt;Box style={{ padding: '8px 40px 0px 40px' }}&gt;&#13;&#10;        &lt;Text style={{ fontSize: 20, color: '#4A5568', lineHeight: 1.4 }}&gt;对 5 个候选跑 LightGlue 精确配对，RANSAC 剔除外点，内点数超过 500 才写进协视图。&lt;/Text&gt;&#13;&#10;    &lt;/Box&gt;&#13;&#10;    &lt;Box style={{ padding: '14px 40px 0px 40px', flexDirection: 'row', gap: 20 }}&gt;&#13;&#10;        &lt;Box style={{ width: 600, flexDirection: 'column', gap: 11 }}&gt;&#13;&#10;            &lt;Box style={{ backgroundColor: '#F7F9FC', border: '1px solid #D6DCE5', borderRadius: 6, padding: '9px 16px' }}&gt;&#13;&#10;                &lt;Text style={{ fontSize: 18, color: '#1A2230', lineHeight: 1.45 }}&gt;&lt;b&gt;输入&lt;/b&gt;　② 留下的 5 个候选帧&lt;/Text&gt;&#13;&#10;            &lt;/Box&gt;&#13;&#10;            &lt;Box style={{ backgroundColor: '#F7F9FC', border: '1px solid #D6DCE5', borderRadius: 6, padding: '9px 16px' }}&gt;&#13;&#10;                &lt;Text style={{ fontSize: 18, color: '#1A2230', lineHeight: 1.45 }}&gt;&lt;b&gt;做法&lt;/b&gt;　LightGlue 精确配对 ＋ RANSAC 剔外点；内点数 |M_ij| 即“这条边有多可信”&lt;/Text&gt;&#13;&#10;            &lt;/Box&gt;&#13;&#10;            &lt;Box style={{ backgroundColor: '#F7F9FC', border: '1px solid #D6DCE5', borderRadius: 6, padding: '9px 16px' }}&gt;&#13;&#10;                &lt;Text style={{ fontSize: 18, color: '#1A2230', lineHeight: 1.45 }}&gt;&lt;b&gt;输出&lt;/b&gt;　加权协视图 G = (M, E, W)，边权 w_ij = 1/|M_ij|&lt;/Text&gt;&#13;&#10;            &lt;/Box&gt;&#13;&#10;            &lt;Box style={{ backgroundColor: '#F0F5FC', border: '1px solid #3D7BD9', borderRadius: 6, padding: '10px 16px', flexDirection: 'column' }}&gt;&#13;&#10;                &lt;Text style={{ fontSize: 18, color: '#1A2230', lineHeight: 1.45 }}&gt;&lt;b&gt;关键取值&lt;/b&gt;　τ_m = 500 内点　·　min_matches_edge = 500&lt;/Text&gt;&#13;&#10;                &lt;Text style={{ fontSize: 16, color: '#4A5568', lineHeight: 1.4, marginTop: 4 }}&gt;边权取内点数倒数：内点越多边越短，于是图上“最短路”= 最可靠的位姿链&lt;/Text&gt;&#13;&#10;            &lt;/Box&gt;&#13;&#10;        &lt;/Box&gt;&#13;&#10;        &lt;Box style={{ width: 580, flexDirection: 'column' }}&gt;&#13;&#10;            &lt;Image src=&quot;figs/fig3_lightglue.png&quot; style={{ width: 580, height: 362 }} /&gt;&#13;&#10;            &lt;Text style={{ fontSize: 14.5, color: '#8B97A8', marginTop: 5 }}&gt;图 3　绿=内点、红叉=被 RANSAC 剔除；通过的帧对才成为图上的一条边。&lt;/Text&gt;&#13;&#10;        &lt;/Box&gt;&#13;&#10;    &lt;/Box&gt;&#13;&#10;    &lt;Box style={{ margin: '12px 40px 0px 40px', backgroundColor: '#F7F9FC', borderLeft: '5px solid #1E4FA8', padding: '10px 18px', flexDirection: 'column' }}&gt;&#13;&#10;        &lt;Image src=&quot;formula/f07.png&quot; style={{ width: 498.0, height: 30.5 }} /&gt;&#13;&#10;        &lt;Text style={{ fontSize: 16.5, color: '#4A5568', lineHeight: 1.4, marginTop: 3 }}&gt;这是全链唯一产生“共视约束”的地方——后面所有位姿都由这些点对推出来，边建错，后面全歪。&lt;/Text&gt;&#13;&#10;    &lt;/Box&gt;&#13;&#10;    &lt;Box style={{ marginTop: 'auto', padding: '10px 40px 12px 40px' }}&gt;&#13;&#10;        &lt;Text style={{ fontSize: 15, color: '#8B97A8' }}&gt;到这一步为止，一张图还没解；但“谁和谁能一起算”已经确定下来了。&lt;/Text&gt;&#13;&#10;    &lt;/Box&gt;&#13;&#10;&lt;/Slide&gt;&#13;&#10;"/>
+        <p:cNvPr id="454" name="" descr="&lt;Slide style={{ width: '1280px', height: '720px', backgroundColor: '#FFFFFF', padding: '0px', flexDirection: 'column' }}&gt;&#10;    &lt;Box style={{ width: '1280px', height: '8px', backgroundColor: '#1E4FA8' }} /&gt;&#10;    &lt;Box style={{ padding: '26px 40px 0px 40px', flexDirection: 'row', justifyContent: 'space-between', alignItems: 'flex-end' }}&gt;&#10;        &lt;Text style={{ fontSize: 33, fontWeight: 'bold', color: '#1E4FA8' }}&gt;精确验证：通过才建边，边就是后面一切判断的依据&lt;/Text&gt;&#10;        &lt;Text style={{ fontSize: 15, color: '#8B97A8' }}&gt;07 / 16&lt;/Text&gt;&#10;    &lt;/Box&gt;&#10;    &lt;Box style={{ padding: '8px 40px 0px 40px' }}&gt;&#10;        &lt;Text style={{ fontSize: 20, color: '#4A5568', lineHeight: 1.4 }}&gt;对 5 个候选跑 LightGlue 精确配对，RANSAC 剔除外点，内点数超过 500 才写进协视图。&lt;/Text&gt;&#10;    &lt;/Box&gt;&#10;    &lt;Box style={{ padding: '14px 40px 0px 40px', flexDirection: 'row', gap: 20 }}&gt;&#10;        &lt;Box style={{ width: 600, flexDirection: 'column', gap: 11 }}&gt;&#10;            &lt;Box style={{ backgroundColor: '#F7F9FC', border: '1px solid #D6DCE5', borderRadius: 6, padding: '9px 16px' }}&gt;&#10;                &lt;Text style={{ fontSize: 18, color: '#1A2230', lineHeight: 1.45 }}&gt;&lt;b&gt;输入&lt;/b&gt;　② 留下的 5 个候选帧&lt;/Text&gt;&#10;            &lt;/Box&gt;&#10;            &lt;Box style={{ backgroundColor: '#F7F9FC', border: '1px solid #D6DCE5', borderRadius: 6, padding: '9px 16px' }}&gt;&#10;                &lt;Text style={{ fontSize: 18, color: '#1A2230', lineHeight: 1.45 }}&gt;&lt;b&gt;做法&lt;/b&gt;　LightGlue 精确配对 ＋ RANSAC 剔外点；内点数 |M_ij| 即“这条边有多可信”&lt;/Text&gt;&#10;            &lt;/Box&gt;&#10;            &lt;Box style={{ backgroundColor: '#F7F9FC', border: '1px solid #D6DCE5', borderRadius: 6, padding: '9px 16px' }}&gt;&#10;                &lt;Text style={{ fontSize: 18, color: '#1A2230', lineHeight: 1.45 }}&gt;&lt;b&gt;输出&lt;/b&gt;　加权协视图 G = (M, E, W)，边权 w_ij = 1/|M_ij|&lt;/Text&gt;&#10;            &lt;/Box&gt;&#10;            &lt;Box style={{ backgroundColor: '#F0F5FC', border: '1px solid #3D7BD9', borderRadius: 6, padding: '10px 16px', flexDirection: 'column' }}&gt;&#10;                &lt;Text style={{ fontSize: 18, color: '#1A2230', lineHeight: 1.45 }}&gt;&lt;b&gt;关键取值&lt;/b&gt;　τ_m = 500 内点　·　min_matches_edge = 500&lt;/Text&gt;&#10;                &lt;Text style={{ fontSize: 16, color: '#4A5568', lineHeight: 1.4, marginTop: 4 }}&gt;边权取内点数倒数：内点越多边越短，于是图上“最短路”= 最可靠的位姿链&lt;/Text&gt;&#10;            &lt;/Box&gt;&#10;        &lt;/Box&gt;&#10;        &lt;Box style={{ width: 580, flexDirection: 'column' }}&gt;&#10;            &lt;Image src=&quot;figs/fig3_lightglue.png&quot; style={{ width: 580, height: 362 }} /&gt;&#10;            &lt;Text style={{ fontSize: 14.5, color: '#8B97A8', marginTop: 5 }}&gt;图 3　绿=内点、红叉=被 RANSAC 剔除；通过的帧对才成为图上的一条边。&lt;/Text&gt;&#10;        &lt;/Box&gt;&#10;    &lt;/Box&gt;&#10;    &lt;Box style={{ margin: '12px 40px 0px 40px', backgroundColor: '#F7F9FC', borderLeft: '5px solid #1E4FA8', padding: '10px 18px', flexDirection: 'column' }}&gt;&#10;        &lt;Image src=&quot;formula/f07.png&quot; style={{ width: 498.0, height: 30.5 }} /&gt;&#10;        &lt;Text style={{ fontSize: 16.5, color: '#4A5568', lineHeight: 1.4, marginTop: 3 }}&gt;这是全链唯一产生“共视约束”的地方——后面所有位姿都由这些点对推出来，边建错，后面全歪。&lt;/Text&gt;&#10;    &lt;/Box&gt;&#10;    &lt;Box style={{ marginTop: 'auto', padding: '10px 40px 12px 40px' }}&gt;&#10;        &lt;Text style={{ fontSize: 15, color: '#8B97A8' }}&gt;到这一步为止，一张图还没解；但“谁和谁能一起算”已经确定下来了。&lt;/Text&gt;&#10;    &lt;/Box&gt;&#10;&lt;/Slide&gt;&#10;"/>
         <p:cNvGrpSpPr/>
         <p:nvPr/>
       </p:nvGrpSpPr>
@@ -20886,7 +22776,7 @@
       </p:grpSpPr>
       <p:sp>
         <p:nvSpPr>
-          <p:cNvPr id="420" name=""/>
+          <p:cNvPr id="455" name=""/>
           <p:cNvSpPr/>
           <p:nvPr/>
         </p:nvSpPr>
@@ -20910,7 +22800,7 @@
       </p:sp>
       <p:sp>
         <p:nvSpPr>
-          <p:cNvPr id="421" name=""/>
+          <p:cNvPr id="456" name=""/>
           <p:cNvSpPr/>
           <p:nvPr/>
         </p:nvSpPr>
@@ -20934,7 +22824,7 @@
       </p:sp>
       <p:sp>
         <p:nvSpPr>
-          <p:cNvPr id="422" name="" descr="{&quot;isTemplate&quot;:true,&quot;type&quot;:&quot;text&quot;}"/>
+          <p:cNvPr id="457" name="" descr="{&quot;isTemplate&quot;:true,&quot;type&quot;:&quot;text&quot;}"/>
           <p:cNvSpPr txBox="1"/>
           <p:nvPr/>
         </p:nvSpPr>
@@ -20969,7 +22859,7 @@
       </p:sp>
       <p:sp>
         <p:nvSpPr>
-          <p:cNvPr id="423" name="" descr="{&quot;isTemplate&quot;:true,&quot;type&quot;:&quot;text&quot;}"/>
+          <p:cNvPr id="458" name="" descr="{&quot;isTemplate&quot;:true,&quot;type&quot;:&quot;text&quot;}"/>
           <p:cNvSpPr txBox="1"/>
           <p:nvPr/>
         </p:nvSpPr>
@@ -20996,15 +22886,15 @@
                 <a:latin typeface="Microsoft YaHei"/>
                 <a:ea typeface="Microsoft YaHei"/>
               </a:rPr>
-              <a:t>07 / 15</a:t>
-            </a:r>
-            <a:endParaRPr/>
-          </a:p>
-        </p:txBody>
-      </p:sp>
-      <p:sp>
-        <p:nvSpPr>
-          <p:cNvPr id="424" name="" descr="{&quot;isTemplate&quot;:true,&quot;type&quot;:&quot;text&quot;}"/>
+              <a:t>07 / 16</a:t>
+            </a:r>
+            <a:endParaRPr/>
+          </a:p>
+        </p:txBody>
+      </p:sp>
+      <p:sp>
+        <p:nvSpPr>
+          <p:cNvPr id="459" name="" descr="{&quot;isTemplate&quot;:true,&quot;type&quot;:&quot;text&quot;}"/>
           <p:cNvSpPr txBox="1"/>
           <p:nvPr/>
         </p:nvSpPr>
@@ -21119,7 +23009,7 @@
       </p:sp>
       <p:sp>
         <p:nvSpPr>
-          <p:cNvPr id="425" name=""/>
+          <p:cNvPr id="460" name=""/>
           <p:cNvSpPr/>
           <p:nvPr/>
         </p:nvSpPr>
@@ -21150,7 +23040,7 @@
       </p:sp>
       <p:sp>
         <p:nvSpPr>
-          <p:cNvPr id="426" name="" descr="{&quot;isTemplate&quot;:true,&quot;type&quot;:&quot;text&quot;}"/>
+          <p:cNvPr id="461" name="" descr="{&quot;isTemplate&quot;:true,&quot;type&quot;:&quot;text&quot;}"/>
           <p:cNvSpPr txBox="1"/>
           <p:nvPr/>
         </p:nvSpPr>
@@ -21235,7 +23125,7 @@
       </p:sp>
       <p:sp>
         <p:nvSpPr>
-          <p:cNvPr id="427" name=""/>
+          <p:cNvPr id="462" name=""/>
           <p:cNvSpPr/>
           <p:nvPr/>
         </p:nvSpPr>
@@ -21266,7 +23156,7 @@
       </p:sp>
       <p:sp>
         <p:nvSpPr>
-          <p:cNvPr id="428" name="" descr="{&quot;isTemplate&quot;:true,&quot;type&quot;:&quot;text&quot;}"/>
+          <p:cNvPr id="463" name="" descr="{&quot;isTemplate&quot;:true,&quot;type&quot;:&quot;text&quot;}"/>
           <p:cNvSpPr txBox="1"/>
           <p:nvPr/>
         </p:nvSpPr>
@@ -21393,7 +23283,7 @@
       </p:sp>
       <p:sp>
         <p:nvSpPr>
-          <p:cNvPr id="429" name=""/>
+          <p:cNvPr id="464" name=""/>
           <p:cNvSpPr/>
           <p:nvPr/>
         </p:nvSpPr>
@@ -21424,7 +23314,7 @@
       </p:sp>
       <p:sp>
         <p:nvSpPr>
-          <p:cNvPr id="430" name="" descr="{&quot;isTemplate&quot;:true,&quot;type&quot;:&quot;text&quot;}"/>
+          <p:cNvPr id="465" name="" descr="{&quot;isTemplate&quot;:true,&quot;type&quot;:&quot;text&quot;}"/>
           <p:cNvSpPr txBox="1"/>
           <p:nvPr/>
         </p:nvSpPr>
@@ -21499,7 +23389,7 @@
       </p:sp>
       <p:sp>
         <p:nvSpPr>
-          <p:cNvPr id="431" name=""/>
+          <p:cNvPr id="466" name=""/>
           <p:cNvSpPr/>
           <p:nvPr/>
         </p:nvSpPr>
@@ -21530,7 +23420,7 @@
       </p:sp>
       <p:sp>
         <p:nvSpPr>
-          <p:cNvPr id="432" name="" descr="{&quot;isTemplate&quot;:true,&quot;type&quot;:&quot;text&quot;}"/>
+          <p:cNvPr id="467" name="" descr="{&quot;isTemplate&quot;:true,&quot;type&quot;:&quot;text&quot;}"/>
           <p:cNvSpPr txBox="1"/>
           <p:nvPr/>
         </p:nvSpPr>
@@ -21605,7 +23495,7 @@
       </p:sp>
       <p:sp>
         <p:nvSpPr>
-          <p:cNvPr id="433" name="" descr="{&quot;isTemplate&quot;:true,&quot;type&quot;:&quot;text&quot;}"/>
+          <p:cNvPr id="468" name="" descr="{&quot;isTemplate&quot;:true,&quot;type&quot;:&quot;text&quot;}"/>
           <p:cNvSpPr txBox="1"/>
           <p:nvPr/>
         </p:nvSpPr>
@@ -21660,7 +23550,7 @@
       </p:sp>
       <p:pic>
         <p:nvPicPr>
-          <p:cNvPr id="434" name=""/>
+          <p:cNvPr id="469" name=""/>
           <p:cNvPicPr>
             <a:picLocks noChangeAspect="1"/>
           </p:cNvPicPr>
@@ -21686,7 +23576,7 @@
       </p:pic>
       <p:sp>
         <p:nvSpPr>
-          <p:cNvPr id="435" name="" descr="{&quot;isTemplate&quot;:true,&quot;type&quot;:&quot;text&quot;}"/>
+          <p:cNvPr id="470" name="" descr="{&quot;isTemplate&quot;:true,&quot;type&quot;:&quot;text&quot;}"/>
           <p:cNvSpPr txBox="1"/>
           <p:nvPr/>
         </p:nvSpPr>
@@ -21801,7 +23691,7 @@
       </p:sp>
       <p:sp>
         <p:nvSpPr>
-          <p:cNvPr id="436" name=""/>
+          <p:cNvPr id="471" name=""/>
           <p:cNvSpPr/>
           <p:nvPr/>
         </p:nvSpPr>
@@ -21825,7 +23715,7 @@
       </p:sp>
       <p:sp>
         <p:nvSpPr>
-          <p:cNvPr id="437" name=""/>
+          <p:cNvPr id="472" name=""/>
           <p:cNvSpPr/>
           <p:nvPr/>
         </p:nvSpPr>
@@ -21865,7 +23755,7 @@
       </p:sp>
       <p:pic>
         <p:nvPicPr>
-          <p:cNvPr id="438" name=""/>
+          <p:cNvPr id="473" name=""/>
           <p:cNvPicPr>
             <a:picLocks noChangeAspect="1"/>
           </p:cNvPicPr>
@@ -21891,7 +23781,7 @@
       </p:pic>
       <p:sp>
         <p:nvSpPr>
-          <p:cNvPr id="439" name="" descr="{&quot;isTemplate&quot;:true,&quot;type&quot;:&quot;text&quot;}"/>
+          <p:cNvPr id="474" name="" descr="{&quot;isTemplate&quot;:true,&quot;type&quot;:&quot;text&quot;}"/>
           <p:cNvSpPr txBox="1"/>
           <p:nvPr/>
         </p:nvSpPr>
@@ -21926,7 +23816,7 @@
       </p:sp>
       <p:sp>
         <p:nvSpPr>
-          <p:cNvPr id="440" name="" descr="{&quot;isTemplate&quot;:true,&quot;type&quot;:&quot;text&quot;}"/>
+          <p:cNvPr id="475" name="" descr="{&quot;isTemplate&quot;:true,&quot;type&quot;:&quot;text&quot;}"/>
           <p:cNvSpPr txBox="1"/>
           <p:nvPr/>
         </p:nvSpPr>
@@ -21969,7 +23859,7 @@
   <p:cSld>
     <p:spTree>
       <p:nvGrpSpPr>
-        <p:cNvPr id="441" name="" descr="&lt;Slide style={{ width: '1280px', height: '720px', backgroundColor: '#FFFFFF', padding: '0px', flexDirection: 'column' }}&gt;&#13;&#10;    &lt;Box style={{ width: '1280px', height: '8px', backgroundColor: '#1E4FA8' }} /&gt;&#13;&#10;    &lt;Box style={{ padding: '26px 40px 0px 40px', flexDirection: 'row', justifyContent: 'space-between', alignItems: 'flex-end' }}&gt;&#13;&#10;        &lt;Text style={{ fontSize: 33, fontWeight: 'bold', color: '#1E4FA8' }}&gt;选窗：从图里挑出最该一起优化的 20 帧&lt;/Text&gt;&#13;&#10;        &lt;Text style={{ fontSize: 15, color: '#8B97A8' }}&gt;08 / 15&lt;/Text&gt;&#13;&#10;    &lt;/Box&gt;&#13;&#10;    &lt;Box style={{ padding: '8px 40px 0px 40px' }}&gt;&#13;&#10;        &lt;Text style={{ fontSize: 20, color: '#4A5568', lineHeight: 1.4 }}&gt;不是“最近 20 帧”，而是“和当前集合连接最强的那个”——一次加一个，贪心扩张到 20 个。&lt;/Text&gt;&#13;&#10;    &lt;/Box&gt;&#13;&#10;    &lt;Box style={{ padding: '14px 40px 0px 40px', flexDirection: 'row', gap: 20 }}&gt;&#13;&#10;        &lt;Box style={{ width: 600, flexDirection: 'column', gap: 11 }}&gt;&#13;&#10;            &lt;Box style={{ backgroundColor: '#F7F9FC', border: '1px solid #D6DCE5', borderRadius: 6, padding: '9px 16px' }}&gt;&#13;&#10;                &lt;Text style={{ fontSize: 18, color: '#1A2230', lineHeight: 1.45 }}&gt;&lt;b&gt;输入&lt;/b&gt;　③ 更新后的加权协视图&lt;/Text&gt;&#13;&#10;            &lt;/Box&gt;&#13;&#10;            &lt;Box style={{ backgroundColor: '#F7F9FC', border: '1px solid #D6DCE5', borderRadius: 6, padding: '9px 16px' }}&gt;&#13;&#10;                &lt;Text style={{ fontSize: 18, color: '#1A2230', lineHeight: 1.45 }}&gt;&lt;b&gt;做法&lt;/b&gt;　每步选“与已选集合累计内点数最大”的节点加入，直到凑满 N&lt;/Text&gt;&#13;&#10;            &lt;/Box&gt;&#13;&#10;            &lt;Box style={{ backgroundColor: '#F7F9FC', border: '1px solid #D6DCE5', borderRadius: 6, padding: '9px 16px' }}&gt;&#13;&#10;                &lt;Text style={{ fontSize: 18, color: '#1A2230', lineHeight: 1.45 }}&gt;&lt;b&gt;输出&lt;/b&gt;　局部 BA 的变量集合 S（这一步只决定“算谁”，不动数值）&lt;/Text&gt;&#13;&#10;            &lt;/Box&gt;&#13;&#10;            &lt;Box style={{ backgroundColor: '#F0F5FC', border: '1px solid #3D7BD9', borderRadius: 6, padding: '10px 16px', flexDirection: 'column' }}&gt;&#13;&#10;                &lt;Text style={{ fontSize: 18, color: '#1A2230', lineHeight: 1.45 }}&gt;&lt;b&gt;关键取值&lt;/b&gt;　N = 20 帧　·　num_prev_keyframes_miniba_incr = 5&lt;/Text&gt;&#13;&#10;                &lt;Text style={{ fontSize: 16, color: '#4A5568', lineHeight: 1.4, marginTop: 4 }}&gt;每个节点平均只有约 10 条边，所以一次 argmax 的开销可以忽略&lt;/Text&gt;&#13;&#10;            &lt;/Box&gt;&#13;&#10;        &lt;/Box&gt;&#13;&#10;        &lt;Box style={{ width: 580, flexDirection: 'column' }}&gt;&#13;&#10;            &lt;Image src=&quot;figs/fig4_window.png&quot; style={{ width: 580, height: 362 }} /&gt;&#13;&#10;            &lt;Text style={{ fontSize: 14.5, color: '#8B97A8', marginTop: 5 }}&gt;图 4　实心=已选，红圈=本轮 argmax；贪心比全局最优便宜得多。&lt;/Text&gt;&#13;&#10;        &lt;/Box&gt;&#13;&#10;    &lt;/Box&gt;&#13;&#10;    &lt;Box style={{ margin: '12px 40px 0px 40px', backgroundColor: '#F7F9FC', borderLeft: '5px solid #1E4FA8', padding: '10px 18px', flexDirection: 'column' }}&gt;&#13;&#10;        &lt;Image src=&quot;formula/f08.png&quot; style={{ width: 437.0, height: 67.5 }} /&gt;&#13;&#10;        &lt;Text style={{ fontSize: 16.5, color: '#4A5568', lineHeight: 1.4, marginTop: 3 }}&gt;消融 NoKFSelection：PSNR 26.29 → 24.56 dB。选窗比匹配本身更影响最终质量——窗选错，后面怎么优化都救不回。&lt;/Text&gt;&#13;&#10;    &lt;/Box&gt;&#13;&#10;    &lt;Box style={{ marginTop: 'auto', padding: '10px 40px 12px 40px' }}&gt;&#13;&#10;        &lt;Text style={{ fontSize: 15, color: '#8B97A8' }}&gt;前四步合起来只回答一件事：哪些帧该放到同一张桌子上一起算。&lt;/Text&gt;&#13;&#10;    &lt;/Box&gt;&#13;&#10;&lt;/Slide&gt;&#13;&#10;"/>
+        <p:cNvPr id="476" name="" descr="&lt;Slide style={{ width: '1280px', height: '720px', backgroundColor: '#FFFFFF', padding: '0px', flexDirection: 'column' }}&gt;&#10;    &lt;Box style={{ width: '1280px', height: '8px', backgroundColor: '#1E4FA8' }} /&gt;&#10;    &lt;Box style={{ padding: '26px 40px 0px 40px', flexDirection: 'row', justifyContent: 'space-between', alignItems: 'flex-end' }}&gt;&#10;        &lt;Text style={{ fontSize: 33, fontWeight: 'bold', color: '#1E4FA8' }}&gt;选窗：从图里挑出最该一起优化的 20 帧&lt;/Text&gt;&#10;        &lt;Text style={{ fontSize: 15, color: '#8B97A8' }}&gt;08 / 16&lt;/Text&gt;&#10;    &lt;/Box&gt;&#10;    &lt;Box style={{ padding: '8px 40px 0px 40px' }}&gt;&#10;        &lt;Text style={{ fontSize: 20, color: '#4A5568', lineHeight: 1.4 }}&gt;不是“最近 20 帧”，而是“和当前集合连接最强的那个”——一次加一个，贪心扩张到 20 个。&lt;/Text&gt;&#10;    &lt;/Box&gt;&#10;    &lt;Box style={{ padding: '14px 40px 0px 40px', flexDirection: 'row', gap: 20 }}&gt;&#10;        &lt;Box style={{ width: 600, flexDirection: 'column', gap: 11 }}&gt;&#10;            &lt;Box style={{ backgroundColor: '#F7F9FC', border: '1px solid #D6DCE5', borderRadius: 6, padding: '9px 16px' }}&gt;&#10;                &lt;Text style={{ fontSize: 18, color: '#1A2230', lineHeight: 1.45 }}&gt;&lt;b&gt;输入&lt;/b&gt;　③ 更新后的加权协视图&lt;/Text&gt;&#10;            &lt;/Box&gt;&#10;            &lt;Box style={{ backgroundColor: '#F7F9FC', border: '1px solid #D6DCE5', borderRadius: 6, padding: '9px 16px' }}&gt;&#10;                &lt;Text style={{ fontSize: 18, color: '#1A2230', lineHeight: 1.45 }}&gt;&lt;b&gt;做法&lt;/b&gt;　每步选“与已选集合累计内点数最大”的节点加入，直到凑满 N&lt;/Text&gt;&#10;            &lt;/Box&gt;&#10;            &lt;Box style={{ backgroundColor: '#F7F9FC', border: '1px solid #D6DCE5', borderRadius: 6, padding: '9px 16px' }}&gt;&#10;                &lt;Text style={{ fontSize: 18, color: '#1A2230', lineHeight: 1.45 }}&gt;&lt;b&gt;输出&lt;/b&gt;　局部 BA 的变量集合 S（这一步只决定“算谁”，不动数值）&lt;/Text&gt;&#10;            &lt;/Box&gt;&#10;            &lt;Box style={{ backgroundColor: '#F0F5FC', border: '1px solid #3D7BD9', borderRadius: 6, padding: '10px 16px', flexDirection: 'column' }}&gt;&#10;                &lt;Text style={{ fontSize: 18, color: '#1A2230', lineHeight: 1.45 }}&gt;&lt;b&gt;关键取值&lt;/b&gt;　N = 20 帧　·　num_prev_keyframes_miniba_incr = 5&lt;/Text&gt;&#10;                &lt;Text style={{ fontSize: 16, color: '#4A5568', lineHeight: 1.4, marginTop: 4 }}&gt;每个节点平均只有约 10 条边，所以一次 argmax 的开销可以忽略&lt;/Text&gt;&#10;            &lt;/Box&gt;&#10;        &lt;/Box&gt;&#10;        &lt;Box style={{ width: 580, flexDirection: 'column' }}&gt;&#10;            &lt;Image src=&quot;figs/fig4_window.png&quot; style={{ width: 580, height: 362 }} /&gt;&#10;            &lt;Text style={{ fontSize: 14.5, color: '#8B97A8', marginTop: 5 }}&gt;图 4　实心=已选，红圈=本轮 argmax；贪心比全局最优便宜得多。&lt;/Text&gt;&#10;        &lt;/Box&gt;&#10;    &lt;/Box&gt;&#10;    &lt;Box style={{ margin: '12px 40px 0px 40px', backgroundColor: '#F7F9FC', borderLeft: '5px solid #1E4FA8', padding: '10px 18px', flexDirection: 'column' }}&gt;&#10;        &lt;Image src=&quot;formula/f08.png&quot; style={{ width: 437.0, height: 67.5 }} /&gt;&#10;        &lt;Text style={{ fontSize: 16.5, color: '#4A5568', lineHeight: 1.4, marginTop: 3 }}&gt;消融 NoKFSelection：PSNR 26.29 → 24.56 dB。选窗比匹配本身更影响最终质量——窗选错，后面怎么优化都救不回。&lt;/Text&gt;&#10;    &lt;/Box&gt;&#10;    &lt;Box style={{ marginTop: 'auto', padding: '10px 40px 12px 40px' }}&gt;&#10;        &lt;Text style={{ fontSize: 15, color: '#8B97A8' }}&gt;前四步合起来只回答一件事：哪些帧该放到同一张桌子上一起算。&lt;/Text&gt;&#10;    &lt;/Box&gt;&#10;&lt;/Slide&gt;&#10;"/>
         <p:cNvGrpSpPr/>
         <p:nvPr/>
       </p:nvGrpSpPr>
@@ -21983,7 +23873,7 @@
       </p:grpSpPr>
       <p:sp>
         <p:nvSpPr>
-          <p:cNvPr id="442" name=""/>
+          <p:cNvPr id="477" name=""/>
           <p:cNvSpPr/>
           <p:nvPr/>
         </p:nvSpPr>
@@ -22007,7 +23897,7 @@
       </p:sp>
       <p:sp>
         <p:nvSpPr>
-          <p:cNvPr id="443" name=""/>
+          <p:cNvPr id="478" name=""/>
           <p:cNvSpPr/>
           <p:nvPr/>
         </p:nvSpPr>
@@ -22031,7 +23921,7 @@
       </p:sp>
       <p:sp>
         <p:nvSpPr>
-          <p:cNvPr id="444" name="" descr="{&quot;isTemplate&quot;:true,&quot;type&quot;:&quot;text&quot;}"/>
+          <p:cNvPr id="479" name="" descr="{&quot;isTemplate&quot;:true,&quot;type&quot;:&quot;text&quot;}"/>
           <p:cNvSpPr txBox="1"/>
           <p:nvPr/>
         </p:nvSpPr>
@@ -22086,7 +23976,7 @@
       </p:sp>
       <p:sp>
         <p:nvSpPr>
-          <p:cNvPr id="445" name="" descr="{&quot;isTemplate&quot;:true,&quot;type&quot;:&quot;text&quot;}"/>
+          <p:cNvPr id="480" name="" descr="{&quot;isTemplate&quot;:true,&quot;type&quot;:&quot;text&quot;}"/>
           <p:cNvSpPr txBox="1"/>
           <p:nvPr/>
         </p:nvSpPr>
@@ -22113,15 +24003,15 @@
                 <a:latin typeface="Microsoft YaHei"/>
                 <a:ea typeface="Microsoft YaHei"/>
               </a:rPr>
-              <a:t>08 / 15</a:t>
-            </a:r>
-            <a:endParaRPr/>
-          </a:p>
-        </p:txBody>
-      </p:sp>
-      <p:sp>
-        <p:nvSpPr>
-          <p:cNvPr id="446" name="" descr="{&quot;isTemplate&quot;:true,&quot;type&quot;:&quot;text&quot;}"/>
+              <a:t>08 / 16</a:t>
+            </a:r>
+            <a:endParaRPr/>
+          </a:p>
+        </p:txBody>
+      </p:sp>
+      <p:sp>
+        <p:nvSpPr>
+          <p:cNvPr id="481" name="" descr="{&quot;isTemplate&quot;:true,&quot;type&quot;:&quot;text&quot;}"/>
           <p:cNvSpPr txBox="1"/>
           <p:nvPr/>
         </p:nvSpPr>
@@ -22196,7 +24086,7 @@
       </p:sp>
       <p:sp>
         <p:nvSpPr>
-          <p:cNvPr id="447" name=""/>
+          <p:cNvPr id="482" name=""/>
           <p:cNvSpPr/>
           <p:nvPr/>
         </p:nvSpPr>
@@ -22227,7 +24117,7 @@
       </p:sp>
       <p:sp>
         <p:nvSpPr>
-          <p:cNvPr id="448" name="" descr="{&quot;isTemplate&quot;:true,&quot;type&quot;:&quot;text&quot;}"/>
+          <p:cNvPr id="483" name="" descr="{&quot;isTemplate&quot;:true,&quot;type&quot;:&quot;text&quot;}"/>
           <p:cNvSpPr txBox="1"/>
           <p:nvPr/>
         </p:nvSpPr>
@@ -22292,7 +24182,7 @@
       </p:sp>
       <p:sp>
         <p:nvSpPr>
-          <p:cNvPr id="449" name=""/>
+          <p:cNvPr id="484" name=""/>
           <p:cNvSpPr/>
           <p:nvPr/>
         </p:nvSpPr>
@@ -22323,7 +24213,7 @@
       </p:sp>
       <p:sp>
         <p:nvSpPr>
-          <p:cNvPr id="450" name="" descr="{&quot;isTemplate&quot;:true,&quot;type&quot;:&quot;text&quot;}"/>
+          <p:cNvPr id="485" name="" descr="{&quot;isTemplate&quot;:true,&quot;type&quot;:&quot;text&quot;}"/>
           <p:cNvSpPr txBox="1"/>
           <p:nvPr/>
         </p:nvSpPr>
@@ -22378,7 +24268,7 @@
       </p:sp>
       <p:sp>
         <p:nvSpPr>
-          <p:cNvPr id="451" name=""/>
+          <p:cNvPr id="486" name=""/>
           <p:cNvSpPr/>
           <p:nvPr/>
         </p:nvSpPr>
@@ -22409,7 +24299,7 @@
       </p:sp>
       <p:sp>
         <p:nvSpPr>
-          <p:cNvPr id="452" name="" descr="{&quot;isTemplate&quot;:true,&quot;type&quot;:&quot;text&quot;}"/>
+          <p:cNvPr id="487" name="" descr="{&quot;isTemplate&quot;:true,&quot;type&quot;:&quot;text&quot;}"/>
           <p:cNvSpPr txBox="1"/>
           <p:nvPr/>
         </p:nvSpPr>
@@ -22494,7 +24384,7 @@
       </p:sp>
       <p:sp>
         <p:nvSpPr>
-          <p:cNvPr id="453" name=""/>
+          <p:cNvPr id="488" name=""/>
           <p:cNvSpPr/>
           <p:nvPr/>
         </p:nvSpPr>
@@ -22525,7 +24415,7 @@
       </p:sp>
       <p:sp>
         <p:nvSpPr>
-          <p:cNvPr id="454" name="" descr="{&quot;isTemplate&quot;:true,&quot;type&quot;:&quot;text&quot;}"/>
+          <p:cNvPr id="489" name="" descr="{&quot;isTemplate&quot;:true,&quot;type&quot;:&quot;text&quot;}"/>
           <p:cNvSpPr txBox="1"/>
           <p:nvPr/>
         </p:nvSpPr>
@@ -22600,7 +24490,7 @@
       </p:sp>
       <p:sp>
         <p:nvSpPr>
-          <p:cNvPr id="455" name="" descr="{&quot;isTemplate&quot;:true,&quot;type&quot;:&quot;text&quot;}"/>
+          <p:cNvPr id="490" name="" descr="{&quot;isTemplate&quot;:true,&quot;type&quot;:&quot;text&quot;}"/>
           <p:cNvSpPr txBox="1"/>
           <p:nvPr/>
         </p:nvSpPr>
@@ -22675,7 +24565,7 @@
       </p:sp>
       <p:pic>
         <p:nvPicPr>
-          <p:cNvPr id="456" name=""/>
+          <p:cNvPr id="491" name=""/>
           <p:cNvPicPr>
             <a:picLocks noChangeAspect="1"/>
           </p:cNvPicPr>
@@ -22701,7 +24591,7 @@
       </p:pic>
       <p:sp>
         <p:nvSpPr>
-          <p:cNvPr id="457" name="" descr="{&quot;isTemplate&quot;:true,&quot;type&quot;:&quot;text&quot;}"/>
+          <p:cNvPr id="492" name="" descr="{&quot;isTemplate&quot;:true,&quot;type&quot;:&quot;text&quot;}"/>
           <p:cNvSpPr txBox="1"/>
           <p:nvPr/>
         </p:nvSpPr>
@@ -22816,7 +24706,7 @@
       </p:sp>
       <p:sp>
         <p:nvSpPr>
-          <p:cNvPr id="458" name=""/>
+          <p:cNvPr id="493" name=""/>
           <p:cNvSpPr/>
           <p:nvPr/>
         </p:nvSpPr>
@@ -22840,7 +24730,7 @@
       </p:sp>
       <p:sp>
         <p:nvSpPr>
-          <p:cNvPr id="459" name=""/>
+          <p:cNvPr id="494" name=""/>
           <p:cNvSpPr/>
           <p:nvPr/>
         </p:nvSpPr>
@@ -22880,7 +24770,7 @@
       </p:sp>
       <p:pic>
         <p:nvPicPr>
-          <p:cNvPr id="460" name=""/>
+          <p:cNvPr id="495" name=""/>
           <p:cNvPicPr>
             <a:picLocks noChangeAspect="1"/>
           </p:cNvPicPr>
@@ -22906,7 +24796,7 @@
       </p:pic>
       <p:sp>
         <p:nvSpPr>
-          <p:cNvPr id="461" name="" descr="{&quot;isTemplate&quot;:true,&quot;type&quot;:&quot;text&quot;}"/>
+          <p:cNvPr id="496" name="" descr="{&quot;isTemplate&quot;:true,&quot;type&quot;:&quot;text&quot;}"/>
           <p:cNvSpPr txBox="1"/>
           <p:nvPr/>
         </p:nvSpPr>
@@ -22981,7 +24871,7 @@
       </p:sp>
       <p:sp>
         <p:nvSpPr>
-          <p:cNvPr id="462" name="" descr="{&quot;isTemplate&quot;:true,&quot;type&quot;:&quot;text&quot;}"/>
+          <p:cNvPr id="497" name="" descr="{&quot;isTemplate&quot;:true,&quot;type&quot;:&quot;text&quot;}"/>
           <p:cNvSpPr txBox="1"/>
           <p:nvPr/>
         </p:nvSpPr>
@@ -23024,7 +24914,7 @@
   <p:cSld>
     <p:spTree>
       <p:nvGrpSpPr>
-        <p:cNvPr id="463" name="" descr="&lt;Slide style={{ width: '1280px', height: '720px', backgroundColor: '#FFFFFF', padding: '0px', flexDirection: 'column' }}&gt;&#13;&#10;    &lt;Box style={{ width: '1280px', height: '8px', backgroundColor: '#1E4FA8' }} /&gt;&#13;&#10;    &lt;Box style={{ padding: '26px 40px 0px 40px', flexDirection: 'row', justifyContent: 'space-between', alignItems: 'flex-end' }}&gt;&#13;&#10;        &lt;Text style={{ fontSize: 33, fontWeight: 'bold', color: '#1E4FA8' }}&gt;局部 BA：真正把位姿解出来的唯一一步&lt;/Text&gt;&#13;&#10;        &lt;Text style={{ fontSize: 15, color: '#8B97A8' }}&gt;09 / 15&lt;/Text&gt;&#13;&#10;    &lt;/Box&gt;&#13;&#10;    &lt;Box style={{ padding: '8px 40px 0px 40px' }}&gt;&#13;&#10;        &lt;Text style={{ fontSize: 20, color: '#4A5568', lineHeight: 1.4 }}&gt;在选出的 20 帧上解一次带鲁棒核的最小二乘，用 Schur 补把问题压到“只解相机”。&lt;/Text&gt;&#13;&#10;    &lt;/Box&gt;&#13;&#10;    &lt;Box style={{ padding: '14px 40px 0px 40px', flexDirection: 'row', gap: 20 }}&gt;&#13;&#10;        &lt;Box style={{ width: 600, flexDirection: 'column', gap: 11 }}&gt;&#13;&#10;            &lt;Box style={{ backgroundColor: '#F7F9FC', border: '1px solid #D6DCE5', borderRadius: 6, padding: '9px 16px' }}&gt;&#13;&#10;                &lt;Text style={{ fontSize: 18, color: '#1A2230', lineHeight: 1.45 }}&gt;&lt;b&gt;输入&lt;/b&gt;　S 内 20 个关键帧 ＋ 约 1 万路标点（按被观测次数采样）&lt;/Text&gt;&#13;&#10;            &lt;/Box&gt;&#13;&#10;            &lt;Box style={{ backgroundColor: '#F7F9FC', border: '1px solid #D6DCE5', borderRadius: 6, padding: '9px 16px' }}&gt;&#13;&#10;                &lt;Text style={{ fontSize: 18, color: '#1A2230', lineHeight: 1.45 }}&gt;&lt;b&gt;做法&lt;/b&gt;　LM 迭代：残差 = 重投影误差；构造正规方程后做稠密 Schur 消元，Cholesky 解相机&lt;/Text&gt;&#13;&#10;            &lt;/Box&gt;&#13;&#10;            &lt;Box style={{ backgroundColor: '#F7F9FC', border: '1px solid #D6DCE5', borderRadius: 6, padding: '9px 16px' }}&gt;&#13;&#10;                &lt;Text style={{ fontSize: 18, color: '#1A2230', lineHeight: 1.45 }}&gt;&lt;b&gt;输出&lt;/b&gt;　相机位姿 T_i 与三维路标点 X_j —— 重建本体&lt;/Text&gt;&#13;&#10;            &lt;/Box&gt;&#13;&#10;            &lt;Box style={{ backgroundColor: '#F0F5FC', border: '1px solid #3D7BD9', borderRadius: 6, padding: '10px 16px', flexDirection: 'column' }}&gt;&#13;&#10;                &lt;Text style={{ fontSize: 18, color: '#1A2230', lineHeight: 1.45 }}&gt;&lt;b&gt;关键取值&lt;/b&gt;　N = 20、K ≈ 1e4　·　LM 阻尼按 mul_(1 + lm) 自适应&lt;/Text&gt;&#13;&#10;                &lt;Text style={{ fontSize: 16, color: '#4A5568', lineHeight: 1.4, marginTop: 4 }}&gt;每个路标只允许被协视性选出的固定子集观测，避免观测数随帧数二次增长&lt;/Text&gt;&#13;&#10;            &lt;/Box&gt;&#13;&#10;        &lt;/Box&gt;&#13;&#10;        &lt;Box style={{ width: 580, flexDirection: 'column' }}&gt;&#13;&#10;            &lt;Image src=&quot;figs/fig5_ba.png&quot; style={{ width: 580, height: 362 }} /&gt;&#13;&#10;            &lt;Text style={{ fontSize: 14.5, color: '#8B97A8', marginTop: 5 }}&gt;图 5　二部图求解 + 分块矩阵：C 对角可逐点求逆，B 稀疏只解相机。&lt;/Text&gt;&#13;&#10;        &lt;/Box&gt;&#13;&#10;    &lt;/Box&gt;&#13;&#10;    &lt;Box style={{ margin: '12px 40px 0px 40px', backgroundColor: '#F7F9FC', borderLeft: '5px solid #1E4FA8', padding: '10px 18px', flexDirection: 'column' }}&gt;&#13;&#10;        &lt;Image src=&quot;formula/f09.png&quot; style={{ width: 596.5, height: 55.5 }} /&gt;&#13;&#10;        &lt;Text style={{ fontSize: 16.5, color: '#4A5568', lineHeight: 1.4, marginTop: 3 }}&gt;SLAM 通常只用 5 帧时间窗；这里用 20 帧并把核函数写到 GPU 上，比 g2o / CUDA-BA 快约 5 倍。&lt;/Text&gt;&#13;&#10;    &lt;/Box&gt;&#13;&#10;    &lt;Box style={{ marginTop: 'auto', padding: '10px 40px 12px 40px' }}&gt;&#13;&#10;        &lt;Text style={{ fontSize: 15, color: '#8B97A8' }}&gt;前四步是“准备”，第六步是“纠错”，只有这一步在解——位姿重建真正发生在这里。&lt;/Text&gt;&#13;&#10;    &lt;/Box&gt;&#13;&#10;&lt;/Slide&gt;&#13;&#10;"/>
+        <p:cNvPr id="498" name="" descr="&lt;Slide style={{ width: '1280px', height: '720px', backgroundColor: '#FFFFFF', padding: '0px', flexDirection: 'column' }}&gt;&#10;    &lt;Box style={{ width: '1280px', height: '8px', backgroundColor: '#1E4FA8' }} /&gt;&#10;    &lt;Box style={{ padding: '26px 40px 0px 40px', flexDirection: 'row', justifyContent: 'space-between', alignItems: 'flex-end' }}&gt;&#10;        &lt;Text style={{ fontSize: 33, fontWeight: 'bold', color: '#1E4FA8' }}&gt;局部 BA：真正把位姿解出来的唯一一步&lt;/Text&gt;&#10;        &lt;Text style={{ fontSize: 15, color: '#8B97A8' }}&gt;09 / 16&lt;/Text&gt;&#10;    &lt;/Box&gt;&#10;    &lt;Box style={{ padding: '8px 40px 0px 40px' }}&gt;&#10;        &lt;Text style={{ fontSize: 20, color: '#4A5568', lineHeight: 1.4 }}&gt;在选出的 20 帧上解一次带鲁棒核的最小二乘，用 Schur 补把问题压到“只解相机”。&lt;/Text&gt;&#10;    &lt;/Box&gt;&#10;    &lt;Box style={{ padding: '14px 40px 0px 40px', flexDirection: 'row', gap: 20 }}&gt;&#10;        &lt;Box style={{ width: 600, flexDirection: 'column', gap: 11 }}&gt;&#10;            &lt;Box style={{ backgroundColor: '#F7F9FC', border: '1px solid #D6DCE5', borderRadius: 6, padding: '9px 16px' }}&gt;&#10;                &lt;Text style={{ fontSize: 18, color: '#1A2230', lineHeight: 1.45 }}&gt;&lt;b&gt;输入&lt;/b&gt;　S 内 20 个关键帧 ＋ 约 1 万路标点（按被观测次数采样）&lt;/Text&gt;&#10;            &lt;/Box&gt;&#10;            &lt;Box style={{ backgroundColor: '#F7F9FC', border: '1px solid #D6DCE5', borderRadius: 6, padding: '9px 16px' }}&gt;&#10;                &lt;Text style={{ fontSize: 18, color: '#1A2230', lineHeight: 1.45 }}&gt;&lt;b&gt;做法&lt;/b&gt;　LM 迭代：残差 = 重投影误差；构造正规方程后做稠密 Schur 消元，Cholesky 解相机&lt;/Text&gt;&#10;            &lt;/Box&gt;&#10;            &lt;Box style={{ backgroundColor: '#F7F9FC', border: '1px solid #D6DCE5', borderRadius: 6, padding: '9px 16px' }}&gt;&#10;                &lt;Text style={{ fontSize: 18, color: '#1A2230', lineHeight: 1.45 }}&gt;&lt;b&gt;输出&lt;/b&gt;　相机位姿 T_i 与三维路标点 X_j —— 重建本体&lt;/Text&gt;&#10;            &lt;/Box&gt;&#10;            &lt;Box style={{ backgroundColor: '#F0F5FC', border: '1px solid #3D7BD9', borderRadius: 6, padding: '10px 16px', flexDirection: 'column' }}&gt;&#10;                &lt;Text style={{ fontSize: 18, color: '#1A2230', lineHeight: 1.45 }}&gt;&lt;b&gt;关键取值&lt;/b&gt;　N = 20、K ≈ 1e4　·　LM 阻尼按 mul_(1 + lm) 自适应&lt;/Text&gt;&#10;                &lt;Text style={{ fontSize: 16, color: '#4A5568', lineHeight: 1.4, marginTop: 4 }}&gt;每个路标只允许被协视性选出的固定子集观测，避免观测数随帧数二次增长&lt;/Text&gt;&#10;            &lt;/Box&gt;&#10;        &lt;/Box&gt;&#10;        &lt;Box style={{ width: 580, flexDirection: 'column' }}&gt;&#10;            &lt;Image src=&quot;figs/fig5_ba.png&quot; style={{ width: 580, height: 362 }} /&gt;&#10;            &lt;Text style={{ fontSize: 14.5, color: '#8B97A8', marginTop: 5 }}&gt;图 5　二部图求解 + 分块矩阵：C 对角可逐点求逆，B 稀疏只解相机。&lt;/Text&gt;&#10;        &lt;/Box&gt;&#10;    &lt;/Box&gt;&#10;    &lt;Box style={{ margin: '12px 40px 0px 40px', backgroundColor: '#F7F9FC', borderLeft: '5px solid #1E4FA8', padding: '10px 18px', flexDirection: 'column' }}&gt;&#10;        &lt;Image src=&quot;formula/f09.png&quot; style={{ width: 596.5, height: 55.5 }} /&gt;&#10;        &lt;Text style={{ fontSize: 16.5, color: '#4A5568', lineHeight: 1.4, marginTop: 3 }}&gt;SLAM 通常只用 5 帧时间窗；这里用 20 帧并把核函数写到 GPU 上，比 g2o / CUDA-BA 快约 5 倍。&lt;/Text&gt;&#10;    &lt;/Box&gt;&#10;    &lt;Box style={{ marginTop: 'auto', padding: '10px 40px 12px 40px' }}&gt;&#10;        &lt;Text style={{ fontSize: 15, color: '#8B97A8' }}&gt;前四步是“准备”，第六步是“纠错”，只有这一步在解——位姿重建真正发生在这里。&lt;/Text&gt;&#10;    &lt;/Box&gt;&#10;&lt;/Slide&gt;&#10;"/>
         <p:cNvGrpSpPr/>
         <p:nvPr/>
       </p:nvGrpSpPr>
@@ -23038,7 +24928,7 @@
       </p:grpSpPr>
       <p:sp>
         <p:nvSpPr>
-          <p:cNvPr id="464" name=""/>
+          <p:cNvPr id="499" name=""/>
           <p:cNvSpPr/>
           <p:nvPr/>
         </p:nvSpPr>
@@ -23062,7 +24952,7 @@
       </p:sp>
       <p:sp>
         <p:nvSpPr>
-          <p:cNvPr id="465" name=""/>
+          <p:cNvPr id="500" name=""/>
           <p:cNvSpPr/>
           <p:nvPr/>
         </p:nvSpPr>
@@ -23086,7 +24976,7 @@
       </p:sp>
       <p:sp>
         <p:nvSpPr>
-          <p:cNvPr id="466" name="" descr="{&quot;isTemplate&quot;:true,&quot;type&quot;:&quot;text&quot;}"/>
+          <p:cNvPr id="501" name="" descr="{&quot;isTemplate&quot;:true,&quot;type&quot;:&quot;text&quot;}"/>
           <p:cNvSpPr txBox="1"/>
           <p:nvPr/>
         </p:nvSpPr>
@@ -23141,7 +25031,7 @@
       </p:sp>
       <p:sp>
         <p:nvSpPr>
-          <p:cNvPr id="467" name="" descr="{&quot;isTemplate&quot;:true,&quot;type&quot;:&quot;text&quot;}"/>
+          <p:cNvPr id="502" name="" descr="{&quot;isTemplate&quot;:true,&quot;type&quot;:&quot;text&quot;}"/>
           <p:cNvSpPr txBox="1"/>
           <p:nvPr/>
         </p:nvSpPr>
@@ -23168,15 +25058,15 @@
                 <a:latin typeface="Microsoft YaHei"/>
                 <a:ea typeface="Microsoft YaHei"/>
               </a:rPr>
-              <a:t>09 / 15</a:t>
-            </a:r>
-            <a:endParaRPr/>
-          </a:p>
-        </p:txBody>
-      </p:sp>
-      <p:sp>
-        <p:nvSpPr>
-          <p:cNvPr id="468" name="" descr="{&quot;isTemplate&quot;:true,&quot;type&quot;:&quot;text&quot;}"/>
+              <a:t>09 / 16</a:t>
+            </a:r>
+            <a:endParaRPr/>
+          </a:p>
+        </p:txBody>
+      </p:sp>
+      <p:sp>
+        <p:nvSpPr>
+          <p:cNvPr id="503" name="" descr="{&quot;isTemplate&quot;:true,&quot;type&quot;:&quot;text&quot;}"/>
           <p:cNvSpPr txBox="1"/>
           <p:nvPr/>
         </p:nvSpPr>
@@ -23251,7 +25141,7 @@
       </p:sp>
       <p:sp>
         <p:nvSpPr>
-          <p:cNvPr id="469" name=""/>
+          <p:cNvPr id="504" name=""/>
           <p:cNvSpPr/>
           <p:nvPr/>
         </p:nvSpPr>
@@ -23282,7 +25172,7 @@
       </p:sp>
       <p:sp>
         <p:nvSpPr>
-          <p:cNvPr id="470" name="" descr="{&quot;isTemplate&quot;:true,&quot;type&quot;:&quot;text&quot;}"/>
+          <p:cNvPr id="505" name="" descr="{&quot;isTemplate&quot;:true,&quot;type&quot;:&quot;text&quot;}"/>
           <p:cNvSpPr txBox="1"/>
           <p:nvPr/>
         </p:nvSpPr>
@@ -23427,7 +25317,7 @@
       </p:sp>
       <p:sp>
         <p:nvSpPr>
-          <p:cNvPr id="471" name=""/>
+          <p:cNvPr id="506" name=""/>
           <p:cNvSpPr/>
           <p:nvPr/>
         </p:nvSpPr>
@@ -23458,7 +25348,7 @@
       </p:sp>
       <p:sp>
         <p:nvSpPr>
-          <p:cNvPr id="472" name="" descr="{&quot;isTemplate&quot;:true,&quot;type&quot;:&quot;text&quot;}"/>
+          <p:cNvPr id="507" name="" descr="{&quot;isTemplate&quot;:true,&quot;type&quot;:&quot;text&quot;}"/>
           <p:cNvSpPr txBox="1"/>
           <p:nvPr/>
         </p:nvSpPr>
@@ -23585,7 +25475,7 @@
       </p:sp>
       <p:sp>
         <p:nvSpPr>
-          <p:cNvPr id="473" name=""/>
+          <p:cNvPr id="508" name=""/>
           <p:cNvSpPr/>
           <p:nvPr/>
         </p:nvSpPr>
@@ -23616,7 +25506,7 @@
       </p:sp>
       <p:sp>
         <p:nvSpPr>
-          <p:cNvPr id="474" name="" descr="{&quot;isTemplate&quot;:true,&quot;type&quot;:&quot;text&quot;}"/>
+          <p:cNvPr id="509" name="" descr="{&quot;isTemplate&quot;:true,&quot;type&quot;:&quot;text&quot;}"/>
           <p:cNvSpPr txBox="1"/>
           <p:nvPr/>
         </p:nvSpPr>
@@ -23701,7 +25591,7 @@
       </p:sp>
       <p:sp>
         <p:nvSpPr>
-          <p:cNvPr id="475" name=""/>
+          <p:cNvPr id="510" name=""/>
           <p:cNvSpPr/>
           <p:nvPr/>
         </p:nvSpPr>
@@ -23732,7 +25622,7 @@
       </p:sp>
       <p:sp>
         <p:nvSpPr>
-          <p:cNvPr id="476" name="" descr="{&quot;isTemplate&quot;:true,&quot;type&quot;:&quot;text&quot;}"/>
+          <p:cNvPr id="511" name="" descr="{&quot;isTemplate&quot;:true,&quot;type&quot;:&quot;text&quot;}"/>
           <p:cNvSpPr txBox="1"/>
           <p:nvPr/>
         </p:nvSpPr>
@@ -23857,7 +25747,7 @@
       </p:sp>
       <p:sp>
         <p:nvSpPr>
-          <p:cNvPr id="477" name="" descr="{&quot;isTemplate&quot;:true,&quot;type&quot;:&quot;text&quot;}"/>
+          <p:cNvPr id="512" name="" descr="{&quot;isTemplate&quot;:true,&quot;type&quot;:&quot;text&quot;}"/>
           <p:cNvSpPr txBox="1"/>
           <p:nvPr/>
         </p:nvSpPr>
@@ -23892,7 +25782,7 @@
       </p:sp>
       <p:pic>
         <p:nvPicPr>
-          <p:cNvPr id="478" name=""/>
+          <p:cNvPr id="513" name=""/>
           <p:cNvPicPr>
             <a:picLocks noChangeAspect="1"/>
           </p:cNvPicPr>
@@ -23918,7 +25808,7 @@
       </p:pic>
       <p:sp>
         <p:nvSpPr>
-          <p:cNvPr id="479" name="" descr="{&quot;isTemplate&quot;:true,&quot;type&quot;:&quot;text&quot;}"/>
+          <p:cNvPr id="514" name="" descr="{&quot;isTemplate&quot;:true,&quot;type&quot;:&quot;text&quot;}"/>
           <p:cNvSpPr txBox="1"/>
           <p:nvPr/>
         </p:nvSpPr>
@@ -24033,7 +25923,7 @@
       </p:sp>
       <p:sp>
         <p:nvSpPr>
-          <p:cNvPr id="480" name=""/>
+          <p:cNvPr id="515" name=""/>
           <p:cNvSpPr/>
           <p:nvPr/>
         </p:nvSpPr>
@@ -24057,7 +25947,7 @@
       </p:sp>
       <p:sp>
         <p:nvSpPr>
-          <p:cNvPr id="481" name=""/>
+          <p:cNvPr id="516" name=""/>
           <p:cNvSpPr/>
           <p:nvPr/>
         </p:nvSpPr>
@@ -24097,7 +25987,7 @@
       </p:sp>
       <p:pic>
         <p:nvPicPr>
-          <p:cNvPr id="482" name=""/>
+          <p:cNvPr id="517" name=""/>
           <p:cNvPicPr>
             <a:picLocks noChangeAspect="1"/>
           </p:cNvPicPr>
@@ -24123,7 +26013,7 @@
       </p:pic>
       <p:sp>
         <p:nvSpPr>
-          <p:cNvPr id="483" name="" descr="{&quot;isTemplate&quot;:true,&quot;type&quot;:&quot;text&quot;}"/>
+          <p:cNvPr id="518" name="" descr="{&quot;isTemplate&quot;:true,&quot;type&quot;:&quot;text&quot;}"/>
           <p:cNvSpPr txBox="1"/>
           <p:nvPr/>
         </p:nvSpPr>
@@ -24268,7 +26158,7 @@
       </p:sp>
       <p:sp>
         <p:nvSpPr>
-          <p:cNvPr id="484" name="" descr="{&quot;isTemplate&quot;:true,&quot;type&quot;:&quot;text&quot;}"/>
+          <p:cNvPr id="519" name="" descr="{&quot;isTemplate&quot;:true,&quot;type&quot;:&quot;text&quot;}"/>
           <p:cNvSpPr txBox="1"/>
           <p:nvPr/>
         </p:nvSpPr>

--- a/ecnu-cg/02-PPT/PPT-即时三维高斯泼溅重建.pptx
+++ b/ecnu-cg/02-PPT/PPT-即时三维高斯泼溅重建.pptx
@@ -7347,7 +7347,7 @@
   <p:cSld>
     <p:spTree>
       <p:nvGrpSpPr>
-        <p:cNvPr id="148" name="" descr="&lt;Slide style={{ width: '1280px', height: '720px', backgroundColor: '#FFFFFF', padding: '0px', flexDirection: 'column' }}&gt;&#10;    &lt;Box style={{ width: '1280px', height: '8px', backgroundColor: '#1E4FA8' }} /&gt;&#10;    &lt;Box style={{ padding: '14px 40px 0px 40px', flexDirection: 'row', justifyContent: 'space-between', alignItems: 'flex-end' }}&gt;&#10;        &lt;Text style={{ fontSize: 33, fontWeight: 'bold', color: '#1E4FA8' }}&gt;重建过程：同一机位，12 个瞬间&lt;/Text&gt;&#10;        &lt;Text style={{ fontSize: 15, color: '#8B97A8' }}&gt;14 / 16&lt;/Text&gt;&#10;    &lt;/Box&gt;&#10;    &lt;Box style={{ padding: '6px 40px 0px 40px' }}&gt;&#10;        &lt;Text style={{ fontSize: 19, color: '#4A5568', lineHeight: 1.35 }}&gt;85 张照片全程 &lt;b&gt;54 秒&lt;/b&gt;；12 格的&lt;b&gt;相机位姿与内参完全固定&lt;/b&gt;，唯一的变量是“模型当时建到哪儿”。&lt;/Text&gt;&#10;    &lt;/Box&gt;&#10;&#10;    &lt;Box style={{ padding: '8px 40px 0px 40px', flexDirection: 'column', gap: 6 }}&gt;&#10;        &lt;Box style={{ flexDirection: 'row', gap: 8, justifyContent: 'center' }}&gt;&#10;            &lt;Box style={{ flexDirection: 'column', alignItems: 'center' }}&gt;&#10;                &lt;Image src=&quot;prog_fix/tiles/t01.jpg&quot; style={{ width: 164, height: 219 }} /&gt;&#10;                &lt;Text style={{ fontSize: 12.5, color: '#4A5568', marginTop: 4 }}&gt;#36 ｜ 8 关键帧&lt;/Text&gt;&#10;            &lt;/Box&gt;&#10;            &lt;Box style={{ flexDirection: 'column', alignItems: 'center' }}&gt;&#10;                &lt;Image src=&quot;prog_fix/tiles/t02.jpg&quot; style={{ width: 164, height: 219 }} /&gt;&#10;                &lt;Text style={{ fontSize: 12.5, color: '#4A5568', marginTop: 4 }}&gt;#40 ｜ 9 关键帧&lt;/Text&gt;&#10;            &lt;/Box&gt;&#10;            &lt;Box style={{ flexDirection: 'column', alignItems: 'center' }}&gt;&#10;                &lt;Image src=&quot;prog_fix/tiles/t03.jpg&quot; style={{ width: 164, height: 219 }} /&gt;&#10;                &lt;Text style={{ fontSize: 12.5, color: '#4A5568', marginTop: 4 }}&gt;#44 ｜ 11 关键帧&lt;/Text&gt;&#10;            &lt;/Box&gt;&#10;            &lt;Box style={{ flexDirection: 'column', alignItems: 'center' }}&gt;&#10;                &lt;Image src=&quot;prog_fix/tiles/t04.jpg&quot; style={{ width: 164, height: 219 }} /&gt;&#10;                &lt;Text style={{ fontSize: 12.5, color: '#4A5568', marginTop: 4 }}&gt;#48 ｜ 12 关键帧&lt;/Text&gt;&#10;            &lt;/Box&gt;&#10;            &lt;Box style={{ flexDirection: 'column', alignItems: 'center' }}&gt;&#10;                &lt;Image src=&quot;prog_fix/tiles/t05.jpg&quot; style={{ width: 164, height: 219 }} /&gt;&#10;                &lt;Text style={{ fontSize: 12.5, color: '#4A5568', marginTop: 4 }}&gt;#52 ｜ 14 关键帧&lt;/Text&gt;&#10;            &lt;/Box&gt;&#10;            &lt;Box style={{ flexDirection: 'column', alignItems: 'center' }}&gt;&#10;                &lt;Image src=&quot;prog_fix/tiles/t06.jpg&quot; style={{ width: 164, height: 219 }} /&gt;&#10;                &lt;Text style={{ fontSize: 12.5, color: '#4A5568', marginTop: 4 }}&gt;#60 ｜ 18 关键帧&lt;/Text&gt;&#10;            &lt;/Box&gt;&#10;        &lt;/Box&gt;&#10;        &lt;Box style={{ flexDirection: 'row', gap: 8, justifyContent: 'center' }}&gt;&#10;            &lt;Box style={{ flexDirection: 'column', alignItems: 'center' }}&gt;&#10;                &lt;Image src=&quot;prog_fix/tiles/t07.jpg&quot; style={{ width: 164, height: 219 }} /&gt;&#10;                &lt;Text style={{ fontSize: 12.5, color: '#4A5568', marginTop: 4 }}&gt;#64 ｜ 22 关键帧&lt;/Text&gt;&#10;            &lt;/Box&gt;&#10;            &lt;Box style={{ flexDirection: 'column', alignItems: 'center' }}&gt;&#10;                &lt;Image src=&quot;prog_fix/tiles/t08.jpg&quot; style={{ width: 164, height: 219 }} /&gt;&#10;                &lt;Text style={{ fontSize: 12.5, color: '#4A5568', marginTop: 4 }}&gt;#68 ｜ 26 关键帧&lt;/Text&gt;&#10;            &lt;/Box&gt;&#10;            &lt;Box style={{ flexDirection: 'column', alignItems: 'center' }}&gt;&#10;                &lt;Image src=&quot;prog_fix/tiles/t09.jpg&quot; style={{ width: 164, height: 219 }} /&gt;&#10;                &lt;Text style={{ fontSize: 12.5, color: '#4A5568', marginTop: 4 }}&gt;#72 ｜ 32 关键帧&lt;/Text&gt;&#10;            &lt;/Box&gt;&#10;            &lt;Box style={{ flexDirection: 'column', alignItems: 'center' }}&gt;&#10;                &lt;Image src=&quot;prog_fix/tiles/t10.jpg&quot; style={{ width: 164, height: 219 }} /&gt;&#10;                &lt;Text style={{ fontSize: 12.5, color: '#4A5568', marginTop: 4 }}&gt;#76 ｜ 34 关键帧&lt;/Text&gt;&#10;            &lt;/Box&gt;&#10;            &lt;Box style={{ flexDirection: 'column', alignItems: 'center' }}&gt;&#10;                &lt;Image src=&quot;prog_fix/tiles/t11.jpg&quot; style={{ width: 164, height: 219 }} /&gt;&#10;                &lt;Text style={{ fontSize: 12.5, color: '#4A5568', marginTop: 4 }}&gt;#80 ｜ 35 关键帧&lt;/Text&gt;&#10;            &lt;/Box&gt;&#10;            &lt;Box style={{ flexDirection: 'column', alignItems: 'center' }}&gt;&#10;                &lt;Image src=&quot;prog_fix/tiles/t12.jpg&quot; style={{ width: 164, height: 219, border: '2px solid #1E4FA8' }} /&gt;&#10;                &lt;Text style={{ fontSize: 12.5, color: '#1E4FA8', fontWeight: 'bold', marginTop: 4 }}&gt;#84 ｜ 81 关键帧&lt;/Text&gt;&#10;            &lt;/Box&gt;&#10;        &lt;/Box&gt;&#10;    &lt;/Box&gt;&#10;&#10;    &lt;Box style={{ marginTop: 'auto', padding: '8px 40px 12px 40px', flexDirection: 'column', gap: 5 }}&gt;&#10;        &lt;Box style={{ backgroundColor: '#F0F5FC', borderLeft: '5px solid #1E4FA8', padding: '9px 14px' }}&gt;&#10;            &lt;Text style={{ fontSize: 17.5, color: '#1A2230', lineHeight: 1.4 }}&gt;第 36 张进来时只有 &lt;b&gt;8 个关键帧&lt;/b&gt;，画面还是一团噪点——但&lt;b&gt;哪块没拍到已经看得出来&lt;/b&gt;，这正是 immediate 的用处；第 60 张跨过 18 个关键帧后陡然清晰，第 84 张 &lt;b&gt;81 个关键帧&lt;/b&gt;、噪点收净。&lt;/Text&gt;&#10;        &lt;/Box&gt;&#10;        &lt;Text style={{ fontSize: 12.5, color: '#8B97A8', lineHeight: 1.4 }}&gt;&lt;b&gt;每一格都是那一帧处理完立刻渲染的，不用等全部拍完。&lt;/b&gt;快照由官方 --save_every 4 落盘，这轮为写盘牺牲了速度（342 s）；纯净运行 85 张 54.1 s、单帧 668 ms；前 28 帧尚无高斯，首个快照取第 36 帧。&lt;/Text&gt;&#10;    &lt;/Box&gt;&#10;&lt;/Slide&gt;&#10;"/>
+        <p:cNvPr id="148" name="" descr="&lt;Slide style={{ width: '1280px', height: '720px', backgroundColor: '#FFFFFF', padding: '0px', flexDirection: 'column' }}&gt;&#10;    &lt;Box style={{ width: '1280px', height: '8px', backgroundColor: '#1E4FA8' }} /&gt;&#10;    &lt;Box style={{ padding: '14px 40px 0px 40px', flexDirection: 'row', justifyContent: 'space-between', alignItems: 'flex-end' }}&gt;&#10;        &lt;Text style={{ fontSize: 33, fontWeight: 'bold', color: '#1E4FA8' }}&gt;重建过程：同一机位，12 个瞬间&lt;/Text&gt;&#10;        &lt;Text style={{ fontSize: 15, color: '#8B97A8' }}&gt;14 / 16&lt;/Text&gt;&#10;    &lt;/Box&gt;&#10;    &lt;Box style={{ padding: '6px 40px 0px 40px' }}&gt;&#10;        &lt;Text style={{ fontSize: 19, color: '#4A5568', lineHeight: 1.35 }}&gt;85 张照片全程 &lt;b&gt;54.5 秒&lt;/b&gt;。12 格&lt;b&gt;相机位姿与内参完全固定&lt;/b&gt;，唯一变量是“模型建到哪儿”；格下蓝字是该帧&lt;b&gt;处理完的时刻&lt;/b&gt;。&lt;/Text&gt;&#10;    &lt;/Box&gt;&#10;&#10;    &lt;Box style={{ padding: '9px 40px 0px 40px', flexDirection: 'row', gap: 16 }}&gt;&#10;        &lt;Box style={{ width: 976, flexDirection: 'column', gap: 8 }}&gt;&#10;            &lt;Box style={{ flexDirection: 'row', gap: 8, justifyContent: 'space-between' }}&gt;&#10;                &lt;Box style={{ flexDirection: 'column', alignItems: 'center' }}&gt;&#10;                    &lt;Image src=&quot;prog_fix/tiles/t01.jpg&quot; style={{ width: 156, height: 208 }} /&gt;&#10;                    &lt;Box style={{ flexDirection: 'row', alignItems: 'baseline', gap: 4, marginTop: 4 }}&gt;&#10;                        &lt;Text style={{ fontSize: 11, color: '#8B97A8' }}&gt;#36&lt;/Text&gt;&#10;                        &lt;Text style={{ fontSize: 15, fontWeight: 'bold', color: '#0F2E66' }}&gt;4.4 s&lt;/Text&gt;&#10;                        &lt;Text style={{ fontSize: 11, color: '#8B97A8' }}&gt;8 KF&lt;/Text&gt;&#10;                    &lt;/Box&gt;&#10;                &lt;/Box&gt;&#10;                &lt;Box style={{ flexDirection: 'column', alignItems: 'center' }}&gt;&#10;                    &lt;Image src=&quot;prog_fix/tiles/t02.jpg&quot; style={{ width: 156, height: 208 }} /&gt;&#10;                    &lt;Box style={{ flexDirection: 'row', alignItems: 'baseline', gap: 4, marginTop: 4 }}&gt;&#10;                        &lt;Text style={{ fontSize: 11, color: '#8B97A8' }}&gt;#40&lt;/Text&gt;&#10;                        &lt;Text style={{ fontSize: 15, fontWeight: 'bold', color: '#0F2E66' }}&gt;5.3 s&lt;/Text&gt;&#10;                        &lt;Text style={{ fontSize: 11, color: '#8B97A8' }}&gt;9 KF&lt;/Text&gt;&#10;                    &lt;/Box&gt;&#10;                &lt;/Box&gt;&#10;                &lt;Box style={{ flexDirection: 'column', alignItems: 'center' }}&gt;&#10;                    &lt;Image src=&quot;prog_fix/tiles/t03.jpg&quot; style={{ width: 156, height: 208 }} /&gt;&#10;                    &lt;Box style={{ flexDirection: 'row', alignItems: 'baseline', gap: 4, marginTop: 4 }}&gt;&#10;                        &lt;Text style={{ fontSize: 11, color: '#8B97A8' }}&gt;#44&lt;/Text&gt;&#10;                        &lt;Text style={{ fontSize: 15, fontWeight: 'bold', color: '#0F2E66' }}&gt;6.7 s&lt;/Text&gt;&#10;                        &lt;Text style={{ fontSize: 11, color: '#8B97A8' }}&gt;11 KF&lt;/Text&gt;&#10;                    &lt;/Box&gt;&#10;                &lt;/Box&gt;&#10;                &lt;Box style={{ flexDirection: 'column', alignItems: 'center' }}&gt;&#10;                    &lt;Image src=&quot;prog_fix/tiles/t04.jpg&quot; style={{ width: 156, height: 208 }} /&gt;&#10;                    &lt;Box style={{ flexDirection: 'row', alignItems: 'baseline', gap: 4, marginTop: 4 }}&gt;&#10;                        &lt;Text style={{ fontSize: 11, color: '#8B97A8' }}&gt;#48&lt;/Text&gt;&#10;                        &lt;Text style={{ fontSize: 15, fontWeight: 'bold', color: '#0F2E66' }}&gt;7.6 s&lt;/Text&gt;&#10;                        &lt;Text style={{ fontSize: 11, color: '#8B97A8' }}&gt;12 KF&lt;/Text&gt;&#10;                    &lt;/Box&gt;&#10;                &lt;/Box&gt;&#10;                &lt;Box style={{ flexDirection: 'column', alignItems: 'center' }}&gt;&#10;                    &lt;Image src=&quot;prog_fix/tiles/t05.jpg&quot; style={{ width: 156, height: 208 }} /&gt;&#10;                    &lt;Box style={{ flexDirection: 'row', alignItems: 'baseline', gap: 4, marginTop: 4 }}&gt;&#10;                        &lt;Text style={{ fontSize: 11, color: '#8B97A8' }}&gt;#52&lt;/Text&gt;&#10;                        &lt;Text style={{ fontSize: 15, fontWeight: 'bold', color: '#0F2E66' }}&gt;9.0 s&lt;/Text&gt;&#10;                        &lt;Text style={{ fontSize: 11, color: '#8B97A8' }}&gt;14 KF&lt;/Text&gt;&#10;                    &lt;/Box&gt;&#10;                &lt;/Box&gt;&#10;                &lt;Box style={{ flexDirection: 'column', alignItems: 'center' }}&gt;&#10;                    &lt;Image src=&quot;prog_fix/tiles/t06.jpg&quot; style={{ width: 156, height: 208 }} /&gt;&#10;                    &lt;Box style={{ flexDirection: 'row', alignItems: 'baseline', gap: 4, marginTop: 4 }}&gt;&#10;                        &lt;Text style={{ fontSize: 11, color: '#8B97A8' }}&gt;#60&lt;/Text&gt;&#10;                        &lt;Text style={{ fontSize: 15, fontWeight: 'bold', color: '#0F2E66' }}&gt;12.0 s&lt;/Text&gt;&#10;                        &lt;Text style={{ fontSize: 11, color: '#8B97A8' }}&gt;18 KF&lt;/Text&gt;&#10;                    &lt;/Box&gt;&#10;                &lt;/Box&gt;&#10;            &lt;/Box&gt;&#10;&#10;            &lt;Box style={{ flexDirection: 'row', gap: 8, justifyContent: 'space-between' }}&gt;&#10;                &lt;Box style={{ flexDirection: 'column', alignItems: 'center' }}&gt;&#10;                    &lt;Image src=&quot;prog_fix/tiles/t07.jpg&quot; style={{ width: 156, height: 208 }} /&gt;&#10;                    &lt;Box style={{ flexDirection: 'row', alignItems: 'baseline', gap: 4, marginTop: 4 }}&gt;&#10;                        &lt;Text style={{ fontSize: 11, color: '#8B97A8' }}&gt;#64&lt;/Text&gt;&#10;                        &lt;Text style={{ fontSize: 15, fontWeight: 'bold', color: '#0F2E66' }}&gt;14.5 s&lt;/Text&gt;&#10;                        &lt;Text style={{ fontSize: 11, color: '#8B97A8' }}&gt;22 KF&lt;/Text&gt;&#10;                    &lt;/Box&gt;&#10;                &lt;/Box&gt;&#10;                &lt;Box style={{ flexDirection: 'column', alignItems: 'center' }}&gt;&#10;                    &lt;Image src=&quot;prog_fix/tiles/t08.jpg&quot; style={{ width: 156, height: 208 }} /&gt;&#10;                    &lt;Box style={{ flexDirection: 'row', alignItems: 'baseline', gap: 4, marginTop: 4 }}&gt;&#10;                        &lt;Text style={{ fontSize: 11, color: '#8B97A8' }}&gt;#68&lt;/Text&gt;&#10;                        &lt;Text style={{ fontSize: 15, fontWeight: 'bold', color: '#0F2E66' }}&gt;17.2 s&lt;/Text&gt;&#10;                        &lt;Text style={{ fontSize: 11, color: '#8B97A8' }}&gt;26 KF&lt;/Text&gt;&#10;                    &lt;/Box&gt;&#10;                &lt;/Box&gt;&#10;                &lt;Box style={{ flexDirection: 'column', alignItems: 'center' }}&gt;&#10;                    &lt;Image src=&quot;prog_fix/tiles/t09.jpg&quot; style={{ width: 156, height: 208 }} /&gt;&#10;                    &lt;Box style={{ flexDirection: 'row', alignItems: 'baseline', gap: 4, marginTop: 4 }}&gt;&#10;                        &lt;Text style={{ fontSize: 11, color: '#8B97A8' }}&gt;#72&lt;/Text&gt;&#10;                        &lt;Text style={{ fontSize: 15, fontWeight: 'bold', color: '#0F2E66' }}&gt;21.2 s&lt;/Text&gt;&#10;                        &lt;Text style={{ fontSize: 11, color: '#8B97A8' }}&gt;32 KF&lt;/Text&gt;&#10;                    &lt;/Box&gt;&#10;                &lt;/Box&gt;&#10;                &lt;Box style={{ flexDirection: 'column', alignItems: 'center' }}&gt;&#10;                    &lt;Image src=&quot;prog_fix/tiles/t10.jpg&quot; style={{ width: 156, height: 208 }} /&gt;&#10;                    &lt;Box style={{ flexDirection: 'row', alignItems: 'baseline', gap: 4, marginTop: 4 }}&gt;&#10;                        &lt;Text style={{ fontSize: 11, color: '#8B97A8' }}&gt;#76&lt;/Text&gt;&#10;                        &lt;Text style={{ fontSize: 15, fontWeight: 'bold', color: '#0F2E66' }}&gt;22.7 s&lt;/Text&gt;&#10;                        &lt;Text style={{ fontSize: 11, color: '#8B97A8' }}&gt;34 KF&lt;/Text&gt;&#10;                    &lt;/Box&gt;&#10;                &lt;/Box&gt;&#10;                &lt;Box style={{ flexDirection: 'column', alignItems: 'center' }}&gt;&#10;                    &lt;Image src=&quot;prog_fix/tiles/t11.jpg&quot; style={{ width: 156, height: 208 }} /&gt;&#10;                    &lt;Box style={{ flexDirection: 'row', alignItems: 'baseline', gap: 4, marginTop: 4 }}&gt;&#10;                        &lt;Text style={{ fontSize: 11, color: '#8B97A8' }}&gt;#80&lt;/Text&gt;&#10;                        &lt;Text style={{ fontSize: 15, fontWeight: 'bold', color: '#0F2E66' }}&gt;23.6 s&lt;/Text&gt;&#10;                        &lt;Text style={{ fontSize: 11, color: '#8B97A8' }}&gt;35 KF&lt;/Text&gt;&#10;                    &lt;/Box&gt;&#10;                &lt;/Box&gt;&#10;                &lt;Box style={{ flexDirection: 'column', alignItems: 'center' }}&gt;&#10;                    &lt;Image src=&quot;prog_fix/tiles/t12.jpg&quot; style={{ width: 156, height: 208, border: '2px solid #1E4FA8' }} /&gt;&#10;                    &lt;Box style={{ flexDirection: 'row', alignItems: 'baseline', gap: 4, marginTop: 4 }}&gt;&#10;                        &lt;Text style={{ fontSize: 11, color: '#8B97A8' }}&gt;#84&lt;/Text&gt;&#10;                        &lt;Text style={{ fontSize: 15, fontWeight: 'bold', color: '#1E4FA8' }}&gt;26.1 s&lt;/Text&gt;&#10;                        &lt;Text style={{ fontSize: 11, color: '#8B97A8' }}&gt;81 KF&lt;/Text&gt;&#10;                    &lt;/Box&gt;&#10;                &lt;/Box&gt;&#10;            &lt;/Box&gt;&#10;        &lt;/Box&gt;&#10;&#10;        &lt;Box style={{ width: 208, backgroundColor: '#F7F9FC', borderTop: '4px solid #1E4FA8', borderRadius: 4, padding: '12px 14px', flexDirection: 'column' }}&gt;&#10;            &lt;Text style={{ fontSize: 15, fontWeight: 'bold', color: '#1E4FA8' }}&gt;重建花了多少时间&lt;/Text&gt;&#10;            &lt;Text style={{ fontSize: 12, color: '#8B97A8', marginTop: 2 }}&gt;单帧延迟（= 下一张可拍前）&lt;/Text&gt;&#10;            &lt;Box style={{ flexDirection: 'column', gap: 3, marginTop: 8 }}&gt;&#10;                &lt;Box style={{ flexDirection: 'row', justifyContent: 'space-between', alignItems: 'baseline' }}&gt;&#10;                    &lt;Text style={{ fontSize: 13.5, color: '#4A5568' }}&gt;中位&lt;/Text&gt;&#10;                    &lt;Text style={{ fontSize: 21, fontWeight: 'bold', color: '#1E4FA8' }}&gt;87 ms&lt;/Text&gt;&#10;                &lt;/Box&gt;&#10;                &lt;Box style={{ flexDirection: 'row', justifyContent: 'space-between', alignItems: 'baseline' }}&gt;&#10;                    &lt;Text style={{ fontSize: 13.5, color: '#4A5568' }}&gt;p90&lt;/Text&gt;&#10;                    &lt;Text style={{ fontSize: 21, fontWeight: 'bold', color: '#1A2230' }}&gt;756 ms&lt;/Text&gt;&#10;                &lt;/Box&gt;&#10;                &lt;Box style={{ flexDirection: 'row', justifyContent: 'space-between', alignItems: 'baseline' }}&gt;&#10;                    &lt;Text style={{ fontSize: 13.5, color: '#4A5568' }}&gt;最慢一帧&lt;/Text&gt;&#10;                    &lt;Text style={{ fontSize: 21, fontWeight: 'bold', color: '#1A2230' }}&gt;1.72 s&lt;/Text&gt;&#10;                &lt;/Box&gt;&#10;            &lt;/Box&gt;&#10;            &lt;Box style={{ height: 1, backgroundColor: '#D6DCE5', marginTop: 11, marginBottom: 9 }} /&gt;&#10;            &lt;Text style={{ fontSize: 12, color: '#8B97A8' }}&gt;整段流程（85 张）&lt;/Text&gt;&#10;            &lt;Box style={{ flexDirection: 'column', gap: 4, marginTop: 7 }}&gt;&#10;                &lt;Box style={{ flexDirection: 'row', justifyContent: 'space-between', alignItems: 'baseline' }}&gt;&#10;                    &lt;Text style={{ fontSize: 13, color: '#4A5568' }}&gt;84 帧主体&lt;/Text&gt;&#10;                    &lt;Text style={{ fontSize: 17, fontWeight: 'bold', color: '#1E4FA8' }}&gt;26.1 s&lt;/Text&gt;&#10;                &lt;/Box&gt;&#10;                &lt;Box style={{ flexDirection: 'row', justifyContent: 'space-between', alignItems: 'baseline' }}&gt;&#10;                    &lt;Text style={{ fontSize: 13, color: '#4A5568' }}&gt;收尾重试&lt;/Text&gt;&#10;                    &lt;Text style={{ fontSize: 17, fontWeight: 'bold', color: '#1A2230' }}&gt;28.4 s&lt;/Text&gt;&#10;                &lt;/Box&gt;&#10;                &lt;Box style={{ flexDirection: 'row', justifyContent: 'space-between', alignItems: 'baseline' }}&gt;&#10;                    &lt;Text style={{ fontSize: 13, color: '#4A5568' }}&gt;全程&lt;/Text&gt;&#10;                    &lt;Text style={{ fontSize: 17, fontWeight: 'bold', color: '#1A2230' }}&gt;54.5 s&lt;/Text&gt;&#10;                &lt;/Box&gt;&#10;            &lt;/Box&gt;&#10;            &lt;Box style={{ height: 1, backgroundColor: '#D6DCE5', marginTop: 10, marginBottom: 8 }} /&gt;&#10;            &lt;Text style={{ fontSize: 12, color: '#8B97A8' }}&gt;与论文对照（论文 · 本次）&lt;/Text&gt;&#10;            &lt;Box style={{ flexDirection: 'column', gap: 3, marginTop: 6 }}&gt;&#10;                &lt;Box style={{ flexDirection: 'row', justifyContent: 'space-between', alignItems: 'baseline' }}&gt;&#10;                    &lt;Text style={{ fontSize: 13, color: '#4A5568' }}&gt;平均&lt;/Text&gt;&#10;                    &lt;Text style={{ fontSize: 14.5, color: '#1A2230' }}&gt;324 ms · &lt;b style={{ color: '#1E4FA8' }}&gt;311 ms&lt;/b&gt;&lt;/Text&gt;&#10;                &lt;/Box&gt;&#10;                &lt;Box style={{ flexDirection: 'row', justifyContent: 'space-between', alignItems: 'baseline' }}&gt;&#10;                    &lt;Text style={{ fontSize: 13, color: '#4A5568' }}&gt;峰值&lt;/Text&gt;&#10;                    &lt;Text style={{ fontSize: 14.5, color: '#1A2230' }}&gt;386 ms · &lt;b style={{ color: '#1E4FA8' }}&gt;1.72 s&lt;/b&gt;&lt;/Text&gt;&#10;                &lt;/Box&gt;&#10;                &lt;Box style={{ flexDirection: 'row', justifyContent: 'space-between', alignItems: 'baseline' }}&gt;&#10;                    &lt;Text style={{ fontSize: 13, color: '#4A5568' }}&gt;全流程&lt;/Text&gt;&#10;                    &lt;Text style={{ fontSize: 14.5, color: '#1A2230' }}&gt;8 min 50 s → &lt;b style={{ color: '#1E4FA8' }}&gt;54.5 s&lt;/b&gt;&lt;/Text&gt;&#10;                &lt;/Box&gt;&#10;            &lt;/Box&gt;&#10;            &lt;Text style={{ fontSize: 11, color: '#8B97A8', lineHeight: 1.3, marginTop: 9 }}&gt;像素量为论文典型场景约 4 倍，故峰值更高；离线一栏为 COLMAP＋3DGS 同场景。&lt;/Text&gt;&#10;        &lt;/Box&gt;&#10;    &lt;/Box&gt;&#10;&#10;    &lt;Box style={{ marginTop: 'auto', padding: '8px 40px 12px 40px', flexDirection: 'column', gap: 5 }}&gt;&#10;        &lt;Box style={{ backgroundColor: '#F0F5FC', borderLeft: '5px solid #1E4FA8', padding: '8px 14px' }}&gt;&#10;            &lt;Text style={{ fontSize: 17, color: '#1A2230', lineHeight: 1.38 }}&gt;第 36 张在 &lt;b&gt;4.4 s&lt;/b&gt; 就建到 8 个关键帧——画面还是噪点，但&lt;b&gt;哪块没拍到已经看得出来&lt;/b&gt;；第 60 张（&lt;b&gt;12.0 s&lt;/b&gt;）跨过 18 个关键帧陡然清晰；第 84 张（&lt;b&gt;26.1 s&lt;/b&gt;）81 个关键帧、噪点收净。之后 28 秒只&lt;b&gt;重试搁置帧&lt;/b&gt;，不影响边拍边看。&lt;/Text&gt;&#10;        &lt;/Box&gt;&#10;        &lt;Text style={{ fontSize: 12, color: '#8B97A8', lineHeight: 1.4 }}&gt;逐帧打点实测（纯净运行，无写盘开销）：84 帧主体 26.1 s；单帧中位 87 ms、p90 756 ms、最大 1.72 s。图像取自 --save_every 4 快照轮，两轮关键帧序列一致（8 → 81）。&lt;/Text&gt;&#10;    &lt;/Box&gt;&#10;&lt;/Slide&gt;&#10;"/>
         <p:cNvGrpSpPr/>
         <p:nvPr/>
       </p:nvGrpSpPr>
@@ -7556,7 +7556,7 @@
                 <a:latin typeface="Microsoft YaHei"/>
                 <a:ea typeface="Microsoft YaHei"/>
               </a:rPr>
-              <a:t xml:space="preserve">54 </a:t>
+              <a:t xml:space="preserve">54.5 </a:t>
             </a:r>
             <a:r>
               <a:rPr lang="zh-CN" sz="1425">
@@ -7576,7 +7576,7 @@
                 <a:latin typeface="Microsoft YaHei"/>
                 <a:ea typeface="Microsoft YaHei"/>
               </a:rPr>
-              <a:t>；</a:t>
+              <a:t>。</a:t>
             </a:r>
             <a:r>
               <a:rPr lang="en-US" sz="1425">
@@ -7596,7 +7596,7 @@
                 <a:latin typeface="Microsoft YaHei"/>
                 <a:ea typeface="Microsoft YaHei"/>
               </a:rPr>
-              <a:t>格的</a:t>
+              <a:t>格</a:t>
             </a:r>
             <a:r>
               <a:rPr lang="zh-CN" sz="1425">
@@ -7616,7 +7616,27 @@
                 <a:latin typeface="Microsoft YaHei"/>
                 <a:ea typeface="Microsoft YaHei"/>
               </a:rPr>
-              <a:t>，唯一的变量是“模型当时建到哪儿”。</a:t>
+              <a:t>，唯一变量是“模型建到哪儿”；格下蓝字是该帧</a:t>
+            </a:r>
+            <a:r>
+              <a:rPr lang="zh-CN" sz="1425">
+                <a:solidFill>
+                  <a:srgbClr val="4A5568"/>
+                </a:solidFill>
+                <a:latin typeface="Microsoft YaHei"/>
+                <a:ea typeface="Microsoft YaHei"/>
+              </a:rPr>
+              <a:t>处理完的时刻</a:t>
+            </a:r>
+            <a:r>
+              <a:rPr lang="zh-CN" sz="1425">
+                <a:solidFill>
+                  <a:srgbClr val="4A5568"/>
+                </a:solidFill>
+                <a:latin typeface="Microsoft YaHei"/>
+                <a:ea typeface="Microsoft YaHei"/>
+              </a:rPr>
+              <a:t>。</a:t>
             </a:r>
             <a:endParaRPr/>
           </a:p>
@@ -7632,15 +7652,14 @@
         </p:nvPicPr>
         <p:blipFill>
           <a:blip r:embed="rId1"/>
-          <a:srcRect l="76" t="0" r="76" b="0"/>
           <a:stretch>
             <a:fillRect/>
           </a:stretch>
         </p:blipFill>
         <p:spPr>
           <a:xfrm rot="0" flipH="0" flipV="0">
-            <a:off x="1219200" y="1019175"/>
-            <a:ext cx="1562100" cy="2085975"/>
+            <a:off x="381000" y="1028700"/>
+            <a:ext cx="1485900" cy="1981200"/>
           </a:xfrm>
           <a:prstGeom prst="rect">
             <a:avLst/>
@@ -7656,8 +7675,8 @@
         </p:nvSpPr>
         <p:spPr>
           <a:xfrm rot="0" flipH="0" flipV="0">
-            <a:off x="1562100" y="3143250"/>
-            <a:ext cx="876300" cy="142875"/>
+            <a:off x="714375" y="3048000"/>
+            <a:ext cx="190500" cy="171450"/>
           </a:xfrm>
           <a:prstGeom prst="rect"/>
         </p:spPr>
@@ -7670,75 +7689,54 @@
               </a:lnSpc>
             </a:pPr>
             <a:r>
-              <a:rPr lang="en-US" sz="938">
-                <a:solidFill>
-                  <a:srgbClr val="4A5568"/>
-                </a:solidFill>
-                <a:latin typeface="Microsoft YaHei"/>
-                <a:ea typeface="Microsoft YaHei"/>
-              </a:rPr>
-              <a:t xml:space="preserve">#36 </a:t>
-            </a:r>
-            <a:r>
-              <a:rPr lang="zh-CN" sz="938">
-                <a:solidFill>
-                  <a:srgbClr val="4A5568"/>
-                </a:solidFill>
-                <a:latin typeface="Microsoft YaHei"/>
-                <a:ea typeface="Microsoft YaHei"/>
-              </a:rPr>
-              <a:t>｜</a:t>
-            </a:r>
-            <a:r>
-              <a:rPr lang="en-US" sz="938">
-                <a:solidFill>
-                  <a:srgbClr val="4A5568"/>
-                </a:solidFill>
-                <a:latin typeface="Microsoft YaHei"/>
-                <a:ea typeface="Microsoft YaHei"/>
-              </a:rPr>
-              <a:t xml:space="preserve"> 8 </a:t>
-            </a:r>
-            <a:r>
-              <a:rPr lang="zh-CN" sz="938">
-                <a:solidFill>
-                  <a:srgbClr val="4A5568"/>
-                </a:solidFill>
-                <a:latin typeface="Microsoft YaHei"/>
-                <a:ea typeface="Microsoft YaHei"/>
-              </a:rPr>
-              <a:t>关键帧</a:t>
-            </a:r>
-            <a:endParaRPr/>
-          </a:p>
-        </p:txBody>
-      </p:sp>
-      <p:pic>
-        <p:nvPicPr>
-          <p:cNvPr id="156" name=""/>
-          <p:cNvPicPr>
-            <a:picLocks noChangeAspect="1"/>
-          </p:cNvPicPr>
-          <p:nvPr/>
-        </p:nvPicPr>
-        <p:blipFill>
-          <a:blip r:embed="rId2"/>
-          <a:srcRect l="76" t="0" r="76" b="0"/>
-          <a:stretch>
-            <a:fillRect/>
-          </a:stretch>
-        </p:blipFill>
-        <p:spPr>
-          <a:xfrm rot="0" flipH="0" flipV="0">
-            <a:off x="2857500" y="1019175"/>
-            <a:ext cx="1562100" cy="2085975"/>
-          </a:xfrm>
-          <a:prstGeom prst="rect">
-            <a:avLst/>
-          </a:prstGeom>
-          <a:ln/>
-        </p:spPr>
-      </p:pic>
+              <a:rPr lang="en-US" sz="825">
+                <a:solidFill>
+                  <a:srgbClr val="8B97A8"/>
+                </a:solidFill>
+                <a:latin typeface="Microsoft YaHei"/>
+                <a:ea typeface="Microsoft YaHei"/>
+              </a:rPr>
+              <a:t>#36</a:t>
+            </a:r>
+            <a:endParaRPr/>
+          </a:p>
+        </p:txBody>
+      </p:sp>
+      <p:sp>
+        <p:nvSpPr>
+          <p:cNvPr id="156" name="" descr="{&quot;isTemplate&quot;:true,&quot;type&quot;:&quot;text&quot;}"/>
+          <p:cNvSpPr txBox="1"/>
+          <p:nvPr/>
+        </p:nvSpPr>
+        <p:spPr>
+          <a:xfrm rot="0" flipH="0" flipV="0">
+            <a:off x="942975" y="3048000"/>
+            <a:ext cx="333375" cy="171450"/>
+          </a:xfrm>
+          <a:prstGeom prst="rect"/>
+        </p:spPr>
+        <p:txBody>
+          <a:bodyPr wrap="none" lIns="0" tIns="0" rIns="0" bIns="0"/>
+          <a:p>
+            <a:pPr>
+              <a:lnSpc>
+                <a:spcPct val="100000"/>
+              </a:lnSpc>
+            </a:pPr>
+            <a:r>
+              <a:rPr lang="en-US" sz="1125" b="1">
+                <a:solidFill>
+                  <a:srgbClr val="0F2E66"/>
+                </a:solidFill>
+                <a:latin typeface="Microsoft YaHei"/>
+                <a:ea typeface="Microsoft YaHei"/>
+              </a:rPr>
+              <a:t>4.4 s</a:t>
+            </a:r>
+            <a:endParaRPr/>
+          </a:p>
+        </p:txBody>
+      </p:sp>
       <p:sp>
         <p:nvSpPr>
           <p:cNvPr id="157" name="" descr="{&quot;isTemplate&quot;:true,&quot;type&quot;:&quot;text&quot;}"/>
@@ -7747,8 +7745,8 @@
         </p:nvSpPr>
         <p:spPr>
           <a:xfrm rot="0" flipH="0" flipV="0">
-            <a:off x="3200400" y="3143250"/>
-            <a:ext cx="876300" cy="142875"/>
+            <a:off x="1314450" y="3048000"/>
+            <a:ext cx="219075" cy="171450"/>
           </a:xfrm>
           <a:prstGeom prst="rect"/>
         </p:spPr>
@@ -7761,44 +7759,14 @@
               </a:lnSpc>
             </a:pPr>
             <a:r>
-              <a:rPr lang="en-US" sz="938">
-                <a:solidFill>
-                  <a:srgbClr val="4A5568"/>
-                </a:solidFill>
-                <a:latin typeface="Microsoft YaHei"/>
-                <a:ea typeface="Microsoft YaHei"/>
-              </a:rPr>
-              <a:t xml:space="preserve">#40 </a:t>
-            </a:r>
-            <a:r>
-              <a:rPr lang="zh-CN" sz="938">
-                <a:solidFill>
-                  <a:srgbClr val="4A5568"/>
-                </a:solidFill>
-                <a:latin typeface="Microsoft YaHei"/>
-                <a:ea typeface="Microsoft YaHei"/>
-              </a:rPr>
-              <a:t>｜</a:t>
-            </a:r>
-            <a:r>
-              <a:rPr lang="en-US" sz="938">
-                <a:solidFill>
-                  <a:srgbClr val="4A5568"/>
-                </a:solidFill>
-                <a:latin typeface="Microsoft YaHei"/>
-                <a:ea typeface="Microsoft YaHei"/>
-              </a:rPr>
-              <a:t xml:space="preserve"> 9 </a:t>
-            </a:r>
-            <a:r>
-              <a:rPr lang="zh-CN" sz="938">
-                <a:solidFill>
-                  <a:srgbClr val="4A5568"/>
-                </a:solidFill>
-                <a:latin typeface="Microsoft YaHei"/>
-                <a:ea typeface="Microsoft YaHei"/>
-              </a:rPr>
-              <a:t>关键帧</a:t>
+              <a:rPr lang="en-US" sz="825">
+                <a:solidFill>
+                  <a:srgbClr val="8B97A8"/>
+                </a:solidFill>
+                <a:latin typeface="Microsoft YaHei"/>
+                <a:ea typeface="Microsoft YaHei"/>
+              </a:rPr>
+              <a:t>8 KF</a:t>
             </a:r>
             <a:endParaRPr/>
           </a:p>
@@ -7813,16 +7781,15 @@
           <p:nvPr/>
         </p:nvPicPr>
         <p:blipFill>
-          <a:blip r:embed="rId3"/>
-          <a:srcRect l="76" t="0" r="76" b="0"/>
+          <a:blip r:embed="rId2"/>
           <a:stretch>
             <a:fillRect/>
           </a:stretch>
         </p:blipFill>
         <p:spPr>
           <a:xfrm rot="0" flipH="0" flipV="0">
-            <a:off x="4495800" y="1019175"/>
-            <a:ext cx="1562100" cy="2085975"/>
+            <a:off x="1943100" y="1028700"/>
+            <a:ext cx="1485900" cy="1981200"/>
           </a:xfrm>
           <a:prstGeom prst="rect">
             <a:avLst/>
@@ -7838,8 +7805,8 @@
         </p:nvSpPr>
         <p:spPr>
           <a:xfrm rot="0" flipH="0" flipV="0">
-            <a:off x="4810125" y="3143250"/>
-            <a:ext cx="942975" cy="142875"/>
+            <a:off x="2276475" y="3048000"/>
+            <a:ext cx="190500" cy="171450"/>
           </a:xfrm>
           <a:prstGeom prst="rect"/>
         </p:spPr>
@@ -7852,75 +7819,54 @@
               </a:lnSpc>
             </a:pPr>
             <a:r>
-              <a:rPr lang="en-US" sz="938">
-                <a:solidFill>
-                  <a:srgbClr val="4A5568"/>
-                </a:solidFill>
-                <a:latin typeface="Microsoft YaHei"/>
-                <a:ea typeface="Microsoft YaHei"/>
-              </a:rPr>
-              <a:t xml:space="preserve">#44 </a:t>
-            </a:r>
-            <a:r>
-              <a:rPr lang="zh-CN" sz="938">
-                <a:solidFill>
-                  <a:srgbClr val="4A5568"/>
-                </a:solidFill>
-                <a:latin typeface="Microsoft YaHei"/>
-                <a:ea typeface="Microsoft YaHei"/>
-              </a:rPr>
-              <a:t>｜</a:t>
-            </a:r>
-            <a:r>
-              <a:rPr lang="en-US" sz="938">
-                <a:solidFill>
-                  <a:srgbClr val="4A5568"/>
-                </a:solidFill>
-                <a:latin typeface="Microsoft YaHei"/>
-                <a:ea typeface="Microsoft YaHei"/>
-              </a:rPr>
-              <a:t xml:space="preserve"> 11 </a:t>
-            </a:r>
-            <a:r>
-              <a:rPr lang="zh-CN" sz="938">
-                <a:solidFill>
-                  <a:srgbClr val="4A5568"/>
-                </a:solidFill>
-                <a:latin typeface="Microsoft YaHei"/>
-                <a:ea typeface="Microsoft YaHei"/>
-              </a:rPr>
-              <a:t>关键帧</a:t>
-            </a:r>
-            <a:endParaRPr/>
-          </a:p>
-        </p:txBody>
-      </p:sp>
-      <p:pic>
-        <p:nvPicPr>
-          <p:cNvPr id="160" name=""/>
-          <p:cNvPicPr>
-            <a:picLocks noChangeAspect="1"/>
-          </p:cNvPicPr>
-          <p:nvPr/>
-        </p:nvPicPr>
-        <p:blipFill>
-          <a:blip r:embed="rId4"/>
-          <a:srcRect l="76" t="0" r="76" b="0"/>
-          <a:stretch>
-            <a:fillRect/>
-          </a:stretch>
-        </p:blipFill>
-        <p:spPr>
-          <a:xfrm rot="0" flipH="0" flipV="0">
-            <a:off x="6134100" y="1019175"/>
-            <a:ext cx="1562100" cy="2085975"/>
-          </a:xfrm>
-          <a:prstGeom prst="rect">
-            <a:avLst/>
-          </a:prstGeom>
-          <a:ln/>
-        </p:spPr>
-      </p:pic>
+              <a:rPr lang="en-US" sz="825">
+                <a:solidFill>
+                  <a:srgbClr val="8B97A8"/>
+                </a:solidFill>
+                <a:latin typeface="Microsoft YaHei"/>
+                <a:ea typeface="Microsoft YaHei"/>
+              </a:rPr>
+              <a:t>#40</a:t>
+            </a:r>
+            <a:endParaRPr/>
+          </a:p>
+        </p:txBody>
+      </p:sp>
+      <p:sp>
+        <p:nvSpPr>
+          <p:cNvPr id="160" name="" descr="{&quot;isTemplate&quot;:true,&quot;type&quot;:&quot;text&quot;}"/>
+          <p:cNvSpPr txBox="1"/>
+          <p:nvPr/>
+        </p:nvSpPr>
+        <p:spPr>
+          <a:xfrm rot="0" flipH="0" flipV="0">
+            <a:off x="2505075" y="3048000"/>
+            <a:ext cx="333375" cy="171450"/>
+          </a:xfrm>
+          <a:prstGeom prst="rect"/>
+        </p:spPr>
+        <p:txBody>
+          <a:bodyPr wrap="none" lIns="0" tIns="0" rIns="0" bIns="0"/>
+          <a:p>
+            <a:pPr>
+              <a:lnSpc>
+                <a:spcPct val="100000"/>
+              </a:lnSpc>
+            </a:pPr>
+            <a:r>
+              <a:rPr lang="en-US" sz="1125" b="1">
+                <a:solidFill>
+                  <a:srgbClr val="0F2E66"/>
+                </a:solidFill>
+                <a:latin typeface="Microsoft YaHei"/>
+                <a:ea typeface="Microsoft YaHei"/>
+              </a:rPr>
+              <a:t>5.3 s</a:t>
+            </a:r>
+            <a:endParaRPr/>
+          </a:p>
+        </p:txBody>
+      </p:sp>
       <p:sp>
         <p:nvSpPr>
           <p:cNvPr id="161" name="" descr="{&quot;isTemplate&quot;:true,&quot;type&quot;:&quot;text&quot;}"/>
@@ -7929,8 +7875,8 @@
         </p:nvSpPr>
         <p:spPr>
           <a:xfrm rot="0" flipH="0" flipV="0">
-            <a:off x="6448425" y="3143250"/>
-            <a:ext cx="942975" cy="142875"/>
+            <a:off x="2876550" y="3048000"/>
+            <a:ext cx="219075" cy="171450"/>
           </a:xfrm>
           <a:prstGeom prst="rect"/>
         </p:spPr>
@@ -7943,44 +7889,14 @@
               </a:lnSpc>
             </a:pPr>
             <a:r>
-              <a:rPr lang="en-US" sz="938">
-                <a:solidFill>
-                  <a:srgbClr val="4A5568"/>
-                </a:solidFill>
-                <a:latin typeface="Microsoft YaHei"/>
-                <a:ea typeface="Microsoft YaHei"/>
-              </a:rPr>
-              <a:t xml:space="preserve">#48 </a:t>
-            </a:r>
-            <a:r>
-              <a:rPr lang="zh-CN" sz="938">
-                <a:solidFill>
-                  <a:srgbClr val="4A5568"/>
-                </a:solidFill>
-                <a:latin typeface="Microsoft YaHei"/>
-                <a:ea typeface="Microsoft YaHei"/>
-              </a:rPr>
-              <a:t>｜</a:t>
-            </a:r>
-            <a:r>
-              <a:rPr lang="en-US" sz="938">
-                <a:solidFill>
-                  <a:srgbClr val="4A5568"/>
-                </a:solidFill>
-                <a:latin typeface="Microsoft YaHei"/>
-                <a:ea typeface="Microsoft YaHei"/>
-              </a:rPr>
-              <a:t xml:space="preserve"> 12 </a:t>
-            </a:r>
-            <a:r>
-              <a:rPr lang="zh-CN" sz="938">
-                <a:solidFill>
-                  <a:srgbClr val="4A5568"/>
-                </a:solidFill>
-                <a:latin typeface="Microsoft YaHei"/>
-                <a:ea typeface="Microsoft YaHei"/>
-              </a:rPr>
-              <a:t>关键帧</a:t>
+              <a:rPr lang="en-US" sz="825">
+                <a:solidFill>
+                  <a:srgbClr val="8B97A8"/>
+                </a:solidFill>
+                <a:latin typeface="Microsoft YaHei"/>
+                <a:ea typeface="Microsoft YaHei"/>
+              </a:rPr>
+              <a:t>9 KF</a:t>
             </a:r>
             <a:endParaRPr/>
           </a:p>
@@ -7995,16 +7911,15 @@
           <p:nvPr/>
         </p:nvPicPr>
         <p:blipFill>
-          <a:blip r:embed="rId5"/>
-          <a:srcRect l="76" t="0" r="76" b="0"/>
+          <a:blip r:embed="rId3"/>
           <a:stretch>
             <a:fillRect/>
           </a:stretch>
         </p:blipFill>
         <p:spPr>
           <a:xfrm rot="0" flipH="0" flipV="0">
-            <a:off x="7772400" y="1019175"/>
-            <a:ext cx="1562100" cy="2085975"/>
+            <a:off x="3505200" y="1028700"/>
+            <a:ext cx="1485900" cy="1981200"/>
           </a:xfrm>
           <a:prstGeom prst="rect">
             <a:avLst/>
@@ -8020,8 +7935,8 @@
         </p:nvSpPr>
         <p:spPr>
           <a:xfrm rot="0" flipH="0" flipV="0">
-            <a:off x="8086725" y="3143250"/>
-            <a:ext cx="942975" cy="142875"/>
+            <a:off x="3810000" y="3048000"/>
+            <a:ext cx="190500" cy="171450"/>
           </a:xfrm>
           <a:prstGeom prst="rect"/>
         </p:spPr>
@@ -8034,75 +7949,54 @@
               </a:lnSpc>
             </a:pPr>
             <a:r>
-              <a:rPr lang="en-US" sz="938">
-                <a:solidFill>
-                  <a:srgbClr val="4A5568"/>
-                </a:solidFill>
-                <a:latin typeface="Microsoft YaHei"/>
-                <a:ea typeface="Microsoft YaHei"/>
-              </a:rPr>
-              <a:t xml:space="preserve">#52 </a:t>
-            </a:r>
-            <a:r>
-              <a:rPr lang="zh-CN" sz="938">
-                <a:solidFill>
-                  <a:srgbClr val="4A5568"/>
-                </a:solidFill>
-                <a:latin typeface="Microsoft YaHei"/>
-                <a:ea typeface="Microsoft YaHei"/>
-              </a:rPr>
-              <a:t>｜</a:t>
-            </a:r>
-            <a:r>
-              <a:rPr lang="en-US" sz="938">
-                <a:solidFill>
-                  <a:srgbClr val="4A5568"/>
-                </a:solidFill>
-                <a:latin typeface="Microsoft YaHei"/>
-                <a:ea typeface="Microsoft YaHei"/>
-              </a:rPr>
-              <a:t xml:space="preserve"> 14 </a:t>
-            </a:r>
-            <a:r>
-              <a:rPr lang="zh-CN" sz="938">
-                <a:solidFill>
-                  <a:srgbClr val="4A5568"/>
-                </a:solidFill>
-                <a:latin typeface="Microsoft YaHei"/>
-                <a:ea typeface="Microsoft YaHei"/>
-              </a:rPr>
-              <a:t>关键帧</a:t>
-            </a:r>
-            <a:endParaRPr/>
-          </a:p>
-        </p:txBody>
-      </p:sp>
-      <p:pic>
-        <p:nvPicPr>
-          <p:cNvPr id="164" name=""/>
-          <p:cNvPicPr>
-            <a:picLocks noChangeAspect="1"/>
-          </p:cNvPicPr>
-          <p:nvPr/>
-        </p:nvPicPr>
-        <p:blipFill>
-          <a:blip r:embed="rId6"/>
-          <a:srcRect l="76" t="0" r="76" b="0"/>
-          <a:stretch>
-            <a:fillRect/>
-          </a:stretch>
-        </p:blipFill>
-        <p:spPr>
-          <a:xfrm rot="0" flipH="0" flipV="0">
-            <a:off x="9410700" y="1019175"/>
-            <a:ext cx="1562100" cy="2085975"/>
-          </a:xfrm>
-          <a:prstGeom prst="rect">
-            <a:avLst/>
-          </a:prstGeom>
-          <a:ln/>
-        </p:spPr>
-      </p:pic>
+              <a:rPr lang="en-US" sz="825">
+                <a:solidFill>
+                  <a:srgbClr val="8B97A8"/>
+                </a:solidFill>
+                <a:latin typeface="Microsoft YaHei"/>
+                <a:ea typeface="Microsoft YaHei"/>
+              </a:rPr>
+              <a:t>#44</a:t>
+            </a:r>
+            <a:endParaRPr/>
+          </a:p>
+        </p:txBody>
+      </p:sp>
+      <p:sp>
+        <p:nvSpPr>
+          <p:cNvPr id="164" name="" descr="{&quot;isTemplate&quot;:true,&quot;type&quot;:&quot;text&quot;}"/>
+          <p:cNvSpPr txBox="1"/>
+          <p:nvPr/>
+        </p:nvSpPr>
+        <p:spPr>
+          <a:xfrm rot="0" flipH="0" flipV="0">
+            <a:off x="4038600" y="3048000"/>
+            <a:ext cx="333375" cy="171450"/>
+          </a:xfrm>
+          <a:prstGeom prst="rect"/>
+        </p:spPr>
+        <p:txBody>
+          <a:bodyPr wrap="none" lIns="0" tIns="0" rIns="0" bIns="0"/>
+          <a:p>
+            <a:pPr>
+              <a:lnSpc>
+                <a:spcPct val="100000"/>
+              </a:lnSpc>
+            </a:pPr>
+            <a:r>
+              <a:rPr lang="en-US" sz="1125" b="1">
+                <a:solidFill>
+                  <a:srgbClr val="0F2E66"/>
+                </a:solidFill>
+                <a:latin typeface="Microsoft YaHei"/>
+                <a:ea typeface="Microsoft YaHei"/>
+              </a:rPr>
+              <a:t>6.7 s</a:t>
+            </a:r>
+            <a:endParaRPr/>
+          </a:p>
+        </p:txBody>
+      </p:sp>
       <p:sp>
         <p:nvSpPr>
           <p:cNvPr id="165" name="" descr="{&quot;isTemplate&quot;:true,&quot;type&quot;:&quot;text&quot;}"/>
@@ -8111,8 +8005,8 @@
         </p:nvSpPr>
         <p:spPr>
           <a:xfrm rot="0" flipH="0" flipV="0">
-            <a:off x="9725025" y="3143250"/>
-            <a:ext cx="942975" cy="142875"/>
+            <a:off x="4410075" y="3048000"/>
+            <a:ext cx="276225" cy="171450"/>
           </a:xfrm>
           <a:prstGeom prst="rect"/>
         </p:spPr>
@@ -8125,44 +8019,14 @@
               </a:lnSpc>
             </a:pPr>
             <a:r>
-              <a:rPr lang="en-US" sz="938">
-                <a:solidFill>
-                  <a:srgbClr val="4A5568"/>
-                </a:solidFill>
-                <a:latin typeface="Microsoft YaHei"/>
-                <a:ea typeface="Microsoft YaHei"/>
-              </a:rPr>
-              <a:t xml:space="preserve">#60 </a:t>
-            </a:r>
-            <a:r>
-              <a:rPr lang="zh-CN" sz="938">
-                <a:solidFill>
-                  <a:srgbClr val="4A5568"/>
-                </a:solidFill>
-                <a:latin typeface="Microsoft YaHei"/>
-                <a:ea typeface="Microsoft YaHei"/>
-              </a:rPr>
-              <a:t>｜</a:t>
-            </a:r>
-            <a:r>
-              <a:rPr lang="en-US" sz="938">
-                <a:solidFill>
-                  <a:srgbClr val="4A5568"/>
-                </a:solidFill>
-                <a:latin typeface="Microsoft YaHei"/>
-                <a:ea typeface="Microsoft YaHei"/>
-              </a:rPr>
-              <a:t xml:space="preserve"> 18 </a:t>
-            </a:r>
-            <a:r>
-              <a:rPr lang="zh-CN" sz="938">
-                <a:solidFill>
-                  <a:srgbClr val="4A5568"/>
-                </a:solidFill>
-                <a:latin typeface="Microsoft YaHei"/>
-                <a:ea typeface="Microsoft YaHei"/>
-              </a:rPr>
-              <a:t>关键帧</a:t>
+              <a:rPr lang="en-US" sz="825">
+                <a:solidFill>
+                  <a:srgbClr val="8B97A8"/>
+                </a:solidFill>
+                <a:latin typeface="Microsoft YaHei"/>
+                <a:ea typeface="Microsoft YaHei"/>
+              </a:rPr>
+              <a:t>11 KF</a:t>
             </a:r>
             <a:endParaRPr/>
           </a:p>
@@ -8177,16 +8041,15 @@
           <p:nvPr/>
         </p:nvPicPr>
         <p:blipFill>
-          <a:blip r:embed="rId7"/>
-          <a:srcRect l="76" t="0" r="76" b="0"/>
+          <a:blip r:embed="rId4"/>
           <a:stretch>
             <a:fillRect/>
           </a:stretch>
         </p:blipFill>
         <p:spPr>
           <a:xfrm rot="0" flipH="0" flipV="0">
-            <a:off x="1219200" y="3343275"/>
-            <a:ext cx="1562100" cy="2085975"/>
+            <a:off x="5067300" y="1028700"/>
+            <a:ext cx="1485900" cy="1981200"/>
           </a:xfrm>
           <a:prstGeom prst="rect">
             <a:avLst/>
@@ -8202,8 +8065,8 @@
         </p:nvSpPr>
         <p:spPr>
           <a:xfrm rot="0" flipH="0" flipV="0">
-            <a:off x="1533525" y="5467350"/>
-            <a:ext cx="942975" cy="142875"/>
+            <a:off x="5372100" y="3048000"/>
+            <a:ext cx="190500" cy="171450"/>
           </a:xfrm>
           <a:prstGeom prst="rect"/>
         </p:spPr>
@@ -8216,75 +8079,54 @@
               </a:lnSpc>
             </a:pPr>
             <a:r>
-              <a:rPr lang="en-US" sz="938">
-                <a:solidFill>
-                  <a:srgbClr val="4A5568"/>
-                </a:solidFill>
-                <a:latin typeface="Microsoft YaHei"/>
-                <a:ea typeface="Microsoft YaHei"/>
-              </a:rPr>
-              <a:t xml:space="preserve">#64 </a:t>
-            </a:r>
-            <a:r>
-              <a:rPr lang="zh-CN" sz="938">
-                <a:solidFill>
-                  <a:srgbClr val="4A5568"/>
-                </a:solidFill>
-                <a:latin typeface="Microsoft YaHei"/>
-                <a:ea typeface="Microsoft YaHei"/>
-              </a:rPr>
-              <a:t>｜</a:t>
-            </a:r>
-            <a:r>
-              <a:rPr lang="en-US" sz="938">
-                <a:solidFill>
-                  <a:srgbClr val="4A5568"/>
-                </a:solidFill>
-                <a:latin typeface="Microsoft YaHei"/>
-                <a:ea typeface="Microsoft YaHei"/>
-              </a:rPr>
-              <a:t xml:space="preserve"> 22 </a:t>
-            </a:r>
-            <a:r>
-              <a:rPr lang="zh-CN" sz="938">
-                <a:solidFill>
-                  <a:srgbClr val="4A5568"/>
-                </a:solidFill>
-                <a:latin typeface="Microsoft YaHei"/>
-                <a:ea typeface="Microsoft YaHei"/>
-              </a:rPr>
-              <a:t>关键帧</a:t>
-            </a:r>
-            <a:endParaRPr/>
-          </a:p>
-        </p:txBody>
-      </p:sp>
-      <p:pic>
-        <p:nvPicPr>
-          <p:cNvPr id="168" name=""/>
-          <p:cNvPicPr>
-            <a:picLocks noChangeAspect="1"/>
-          </p:cNvPicPr>
-          <p:nvPr/>
-        </p:nvPicPr>
-        <p:blipFill>
-          <a:blip r:embed="rId8"/>
-          <a:srcRect l="76" t="0" r="76" b="0"/>
-          <a:stretch>
-            <a:fillRect/>
-          </a:stretch>
-        </p:blipFill>
-        <p:spPr>
-          <a:xfrm rot="0" flipH="0" flipV="0">
-            <a:off x="2857500" y="3343275"/>
-            <a:ext cx="1562100" cy="2085975"/>
-          </a:xfrm>
-          <a:prstGeom prst="rect">
-            <a:avLst/>
-          </a:prstGeom>
-          <a:ln/>
-        </p:spPr>
-      </p:pic>
+              <a:rPr lang="en-US" sz="825">
+                <a:solidFill>
+                  <a:srgbClr val="8B97A8"/>
+                </a:solidFill>
+                <a:latin typeface="Microsoft YaHei"/>
+                <a:ea typeface="Microsoft YaHei"/>
+              </a:rPr>
+              <a:t>#48</a:t>
+            </a:r>
+            <a:endParaRPr/>
+          </a:p>
+        </p:txBody>
+      </p:sp>
+      <p:sp>
+        <p:nvSpPr>
+          <p:cNvPr id="168" name="" descr="{&quot;isTemplate&quot;:true,&quot;type&quot;:&quot;text&quot;}"/>
+          <p:cNvSpPr txBox="1"/>
+          <p:nvPr/>
+        </p:nvSpPr>
+        <p:spPr>
+          <a:xfrm rot="0" flipH="0" flipV="0">
+            <a:off x="5600700" y="3048000"/>
+            <a:ext cx="333375" cy="171450"/>
+          </a:xfrm>
+          <a:prstGeom prst="rect"/>
+        </p:spPr>
+        <p:txBody>
+          <a:bodyPr wrap="none" lIns="0" tIns="0" rIns="0" bIns="0"/>
+          <a:p>
+            <a:pPr>
+              <a:lnSpc>
+                <a:spcPct val="100000"/>
+              </a:lnSpc>
+            </a:pPr>
+            <a:r>
+              <a:rPr lang="en-US" sz="1125" b="1">
+                <a:solidFill>
+                  <a:srgbClr val="0F2E66"/>
+                </a:solidFill>
+                <a:latin typeface="Microsoft YaHei"/>
+                <a:ea typeface="Microsoft YaHei"/>
+              </a:rPr>
+              <a:t>7.6 s</a:t>
+            </a:r>
+            <a:endParaRPr/>
+          </a:p>
+        </p:txBody>
+      </p:sp>
       <p:sp>
         <p:nvSpPr>
           <p:cNvPr id="169" name="" descr="{&quot;isTemplate&quot;:true,&quot;type&quot;:&quot;text&quot;}"/>
@@ -8293,8 +8135,8 @@
         </p:nvSpPr>
         <p:spPr>
           <a:xfrm rot="0" flipH="0" flipV="0">
-            <a:off x="3171825" y="5467350"/>
-            <a:ext cx="942975" cy="142875"/>
+            <a:off x="5972175" y="3048000"/>
+            <a:ext cx="276225" cy="171450"/>
           </a:xfrm>
           <a:prstGeom prst="rect"/>
         </p:spPr>
@@ -8307,44 +8149,14 @@
               </a:lnSpc>
             </a:pPr>
             <a:r>
-              <a:rPr lang="en-US" sz="938">
-                <a:solidFill>
-                  <a:srgbClr val="4A5568"/>
-                </a:solidFill>
-                <a:latin typeface="Microsoft YaHei"/>
-                <a:ea typeface="Microsoft YaHei"/>
-              </a:rPr>
-              <a:t xml:space="preserve">#68 </a:t>
-            </a:r>
-            <a:r>
-              <a:rPr lang="zh-CN" sz="938">
-                <a:solidFill>
-                  <a:srgbClr val="4A5568"/>
-                </a:solidFill>
-                <a:latin typeface="Microsoft YaHei"/>
-                <a:ea typeface="Microsoft YaHei"/>
-              </a:rPr>
-              <a:t>｜</a:t>
-            </a:r>
-            <a:r>
-              <a:rPr lang="en-US" sz="938">
-                <a:solidFill>
-                  <a:srgbClr val="4A5568"/>
-                </a:solidFill>
-                <a:latin typeface="Microsoft YaHei"/>
-                <a:ea typeface="Microsoft YaHei"/>
-              </a:rPr>
-              <a:t xml:space="preserve"> 26 </a:t>
-            </a:r>
-            <a:r>
-              <a:rPr lang="zh-CN" sz="938">
-                <a:solidFill>
-                  <a:srgbClr val="4A5568"/>
-                </a:solidFill>
-                <a:latin typeface="Microsoft YaHei"/>
-                <a:ea typeface="Microsoft YaHei"/>
-              </a:rPr>
-              <a:t>关键帧</a:t>
+              <a:rPr lang="en-US" sz="825">
+                <a:solidFill>
+                  <a:srgbClr val="8B97A8"/>
+                </a:solidFill>
+                <a:latin typeface="Microsoft YaHei"/>
+                <a:ea typeface="Microsoft YaHei"/>
+              </a:rPr>
+              <a:t>12 KF</a:t>
             </a:r>
             <a:endParaRPr/>
           </a:p>
@@ -8359,16 +8171,15 @@
           <p:nvPr/>
         </p:nvPicPr>
         <p:blipFill>
-          <a:blip r:embed="rId9"/>
-          <a:srcRect l="76" t="0" r="76" b="0"/>
+          <a:blip r:embed="rId5"/>
           <a:stretch>
             <a:fillRect/>
           </a:stretch>
         </p:blipFill>
         <p:spPr>
           <a:xfrm rot="0" flipH="0" flipV="0">
-            <a:off x="4495800" y="3343275"/>
-            <a:ext cx="1562100" cy="2085975"/>
+            <a:off x="6629400" y="1028700"/>
+            <a:ext cx="1485900" cy="1981200"/>
           </a:xfrm>
           <a:prstGeom prst="rect">
             <a:avLst/>
@@ -8384,8 +8195,8 @@
         </p:nvSpPr>
         <p:spPr>
           <a:xfrm rot="0" flipH="0" flipV="0">
-            <a:off x="4810125" y="5467350"/>
-            <a:ext cx="942975" cy="142875"/>
+            <a:off x="6934200" y="3048000"/>
+            <a:ext cx="190500" cy="171450"/>
           </a:xfrm>
           <a:prstGeom prst="rect"/>
         </p:spPr>
@@ -8398,75 +8209,54 @@
               </a:lnSpc>
             </a:pPr>
             <a:r>
-              <a:rPr lang="en-US" sz="938">
-                <a:solidFill>
-                  <a:srgbClr val="4A5568"/>
-                </a:solidFill>
-                <a:latin typeface="Microsoft YaHei"/>
-                <a:ea typeface="Microsoft YaHei"/>
-              </a:rPr>
-              <a:t xml:space="preserve">#72 </a:t>
-            </a:r>
-            <a:r>
-              <a:rPr lang="zh-CN" sz="938">
-                <a:solidFill>
-                  <a:srgbClr val="4A5568"/>
-                </a:solidFill>
-                <a:latin typeface="Microsoft YaHei"/>
-                <a:ea typeface="Microsoft YaHei"/>
-              </a:rPr>
-              <a:t>｜</a:t>
-            </a:r>
-            <a:r>
-              <a:rPr lang="en-US" sz="938">
-                <a:solidFill>
-                  <a:srgbClr val="4A5568"/>
-                </a:solidFill>
-                <a:latin typeface="Microsoft YaHei"/>
-                <a:ea typeface="Microsoft YaHei"/>
-              </a:rPr>
-              <a:t xml:space="preserve"> 32 </a:t>
-            </a:r>
-            <a:r>
-              <a:rPr lang="zh-CN" sz="938">
-                <a:solidFill>
-                  <a:srgbClr val="4A5568"/>
-                </a:solidFill>
-                <a:latin typeface="Microsoft YaHei"/>
-                <a:ea typeface="Microsoft YaHei"/>
-              </a:rPr>
-              <a:t>关键帧</a:t>
-            </a:r>
-            <a:endParaRPr/>
-          </a:p>
-        </p:txBody>
-      </p:sp>
-      <p:pic>
-        <p:nvPicPr>
-          <p:cNvPr id="172" name=""/>
-          <p:cNvPicPr>
-            <a:picLocks noChangeAspect="1"/>
-          </p:cNvPicPr>
-          <p:nvPr/>
-        </p:nvPicPr>
-        <p:blipFill>
-          <a:blip r:embed="rId10"/>
-          <a:srcRect l="76" t="0" r="76" b="0"/>
-          <a:stretch>
-            <a:fillRect/>
-          </a:stretch>
-        </p:blipFill>
-        <p:spPr>
-          <a:xfrm rot="0" flipH="0" flipV="0">
-            <a:off x="6134100" y="3343275"/>
-            <a:ext cx="1562100" cy="2085975"/>
-          </a:xfrm>
-          <a:prstGeom prst="rect">
-            <a:avLst/>
-          </a:prstGeom>
-          <a:ln/>
-        </p:spPr>
-      </p:pic>
+              <a:rPr lang="en-US" sz="825">
+                <a:solidFill>
+                  <a:srgbClr val="8B97A8"/>
+                </a:solidFill>
+                <a:latin typeface="Microsoft YaHei"/>
+                <a:ea typeface="Microsoft YaHei"/>
+              </a:rPr>
+              <a:t>#52</a:t>
+            </a:r>
+            <a:endParaRPr/>
+          </a:p>
+        </p:txBody>
+      </p:sp>
+      <p:sp>
+        <p:nvSpPr>
+          <p:cNvPr id="172" name="" descr="{&quot;isTemplate&quot;:true,&quot;type&quot;:&quot;text&quot;}"/>
+          <p:cNvSpPr txBox="1"/>
+          <p:nvPr/>
+        </p:nvSpPr>
+        <p:spPr>
+          <a:xfrm rot="0" flipH="0" flipV="0">
+            <a:off x="7162800" y="3048000"/>
+            <a:ext cx="333375" cy="171450"/>
+          </a:xfrm>
+          <a:prstGeom prst="rect"/>
+        </p:spPr>
+        <p:txBody>
+          <a:bodyPr wrap="none" lIns="0" tIns="0" rIns="0" bIns="0"/>
+          <a:p>
+            <a:pPr>
+              <a:lnSpc>
+                <a:spcPct val="100000"/>
+              </a:lnSpc>
+            </a:pPr>
+            <a:r>
+              <a:rPr lang="en-US" sz="1125" b="1">
+                <a:solidFill>
+                  <a:srgbClr val="0F2E66"/>
+                </a:solidFill>
+                <a:latin typeface="Microsoft YaHei"/>
+                <a:ea typeface="Microsoft YaHei"/>
+              </a:rPr>
+              <a:t>9.0 s</a:t>
+            </a:r>
+            <a:endParaRPr/>
+          </a:p>
+        </p:txBody>
+      </p:sp>
       <p:sp>
         <p:nvSpPr>
           <p:cNvPr id="173" name="" descr="{&quot;isTemplate&quot;:true,&quot;type&quot;:&quot;text&quot;}"/>
@@ -8475,8 +8265,8 @@
         </p:nvSpPr>
         <p:spPr>
           <a:xfrm rot="0" flipH="0" flipV="0">
-            <a:off x="6448425" y="5467350"/>
-            <a:ext cx="942975" cy="142875"/>
+            <a:off x="7534275" y="3048000"/>
+            <a:ext cx="276225" cy="171450"/>
           </a:xfrm>
           <a:prstGeom prst="rect"/>
         </p:spPr>
@@ -8489,44 +8279,14 @@
               </a:lnSpc>
             </a:pPr>
             <a:r>
-              <a:rPr lang="en-US" sz="938">
-                <a:solidFill>
-                  <a:srgbClr val="4A5568"/>
-                </a:solidFill>
-                <a:latin typeface="Microsoft YaHei"/>
-                <a:ea typeface="Microsoft YaHei"/>
-              </a:rPr>
-              <a:t xml:space="preserve">#76 </a:t>
-            </a:r>
-            <a:r>
-              <a:rPr lang="zh-CN" sz="938">
-                <a:solidFill>
-                  <a:srgbClr val="4A5568"/>
-                </a:solidFill>
-                <a:latin typeface="Microsoft YaHei"/>
-                <a:ea typeface="Microsoft YaHei"/>
-              </a:rPr>
-              <a:t>｜</a:t>
-            </a:r>
-            <a:r>
-              <a:rPr lang="en-US" sz="938">
-                <a:solidFill>
-                  <a:srgbClr val="4A5568"/>
-                </a:solidFill>
-                <a:latin typeface="Microsoft YaHei"/>
-                <a:ea typeface="Microsoft YaHei"/>
-              </a:rPr>
-              <a:t xml:space="preserve"> 34 </a:t>
-            </a:r>
-            <a:r>
-              <a:rPr lang="zh-CN" sz="938">
-                <a:solidFill>
-                  <a:srgbClr val="4A5568"/>
-                </a:solidFill>
-                <a:latin typeface="Microsoft YaHei"/>
-                <a:ea typeface="Microsoft YaHei"/>
-              </a:rPr>
-              <a:t>关键帧</a:t>
+              <a:rPr lang="en-US" sz="825">
+                <a:solidFill>
+                  <a:srgbClr val="8B97A8"/>
+                </a:solidFill>
+                <a:latin typeface="Microsoft YaHei"/>
+                <a:ea typeface="Microsoft YaHei"/>
+              </a:rPr>
+              <a:t>14 KF</a:t>
             </a:r>
             <a:endParaRPr/>
           </a:p>
@@ -8541,16 +8301,15 @@
           <p:nvPr/>
         </p:nvPicPr>
         <p:blipFill>
-          <a:blip r:embed="rId11"/>
-          <a:srcRect l="76" t="0" r="76" b="0"/>
+          <a:blip r:embed="rId6"/>
           <a:stretch>
             <a:fillRect/>
           </a:stretch>
         </p:blipFill>
         <p:spPr>
           <a:xfrm rot="0" flipH="0" flipV="0">
-            <a:off x="7772400" y="3343275"/>
-            <a:ext cx="1562100" cy="2085975"/>
+            <a:off x="8191500" y="1028700"/>
+            <a:ext cx="1485900" cy="1981200"/>
           </a:xfrm>
           <a:prstGeom prst="rect">
             <a:avLst/>
@@ -8566,8 +8325,8 @@
         </p:nvSpPr>
         <p:spPr>
           <a:xfrm rot="0" flipH="0" flipV="0">
-            <a:off x="8086725" y="5467350"/>
-            <a:ext cx="942975" cy="142875"/>
+            <a:off x="8458200" y="3048000"/>
+            <a:ext cx="190500" cy="171450"/>
           </a:xfrm>
           <a:prstGeom prst="rect"/>
         </p:spPr>
@@ -8580,59 +8339,749 @@
               </a:lnSpc>
             </a:pPr>
             <a:r>
-              <a:rPr lang="en-US" sz="938">
-                <a:solidFill>
-                  <a:srgbClr val="4A5568"/>
-                </a:solidFill>
-                <a:latin typeface="Microsoft YaHei"/>
-                <a:ea typeface="Microsoft YaHei"/>
-              </a:rPr>
-              <a:t xml:space="preserve">#80 </a:t>
-            </a:r>
-            <a:r>
-              <a:rPr lang="zh-CN" sz="938">
-                <a:solidFill>
-                  <a:srgbClr val="4A5568"/>
-                </a:solidFill>
-                <a:latin typeface="Microsoft YaHei"/>
-                <a:ea typeface="Microsoft YaHei"/>
-              </a:rPr>
-              <a:t>｜</a:t>
-            </a:r>
-            <a:r>
-              <a:rPr lang="en-US" sz="938">
-                <a:solidFill>
-                  <a:srgbClr val="4A5568"/>
-                </a:solidFill>
-                <a:latin typeface="Microsoft YaHei"/>
-                <a:ea typeface="Microsoft YaHei"/>
-              </a:rPr>
-              <a:t xml:space="preserve"> 35 </a:t>
-            </a:r>
-            <a:r>
-              <a:rPr lang="zh-CN" sz="938">
-                <a:solidFill>
-                  <a:srgbClr val="4A5568"/>
-                </a:solidFill>
-                <a:latin typeface="Microsoft YaHei"/>
-                <a:ea typeface="Microsoft YaHei"/>
-              </a:rPr>
-              <a:t>关键帧</a:t>
-            </a:r>
-            <a:endParaRPr/>
-          </a:p>
-        </p:txBody>
-      </p:sp>
-      <p:sp>
-        <p:nvSpPr>
-          <p:cNvPr id="176" name=""/>
+              <a:rPr lang="en-US" sz="825">
+                <a:solidFill>
+                  <a:srgbClr val="8B97A8"/>
+                </a:solidFill>
+                <a:latin typeface="Microsoft YaHei"/>
+                <a:ea typeface="Microsoft YaHei"/>
+              </a:rPr>
+              <a:t>#60</a:t>
+            </a:r>
+            <a:endParaRPr/>
+          </a:p>
+        </p:txBody>
+      </p:sp>
+      <p:sp>
+        <p:nvSpPr>
+          <p:cNvPr id="176" name="" descr="{&quot;isTemplate&quot;:true,&quot;type&quot;:&quot;text&quot;}"/>
+          <p:cNvSpPr txBox="1"/>
+          <p:nvPr/>
+        </p:nvSpPr>
+        <p:spPr>
+          <a:xfrm rot="0" flipH="0" flipV="0">
+            <a:off x="8686800" y="3048000"/>
+            <a:ext cx="419100" cy="171450"/>
+          </a:xfrm>
+          <a:prstGeom prst="rect"/>
+        </p:spPr>
+        <p:txBody>
+          <a:bodyPr wrap="none" lIns="0" tIns="0" rIns="0" bIns="0"/>
+          <a:p>
+            <a:pPr>
+              <a:lnSpc>
+                <a:spcPct val="100000"/>
+              </a:lnSpc>
+            </a:pPr>
+            <a:r>
+              <a:rPr lang="en-US" sz="1125" b="1">
+                <a:solidFill>
+                  <a:srgbClr val="0F2E66"/>
+                </a:solidFill>
+                <a:latin typeface="Microsoft YaHei"/>
+                <a:ea typeface="Microsoft YaHei"/>
+              </a:rPr>
+              <a:t>12.0 s</a:t>
+            </a:r>
+            <a:endParaRPr/>
+          </a:p>
+        </p:txBody>
+      </p:sp>
+      <p:sp>
+        <p:nvSpPr>
+          <p:cNvPr id="177" name="" descr="{&quot;isTemplate&quot;:true,&quot;type&quot;:&quot;text&quot;}"/>
+          <p:cNvSpPr txBox="1"/>
+          <p:nvPr/>
+        </p:nvSpPr>
+        <p:spPr>
+          <a:xfrm rot="0" flipH="0" flipV="0">
+            <a:off x="9144000" y="3048000"/>
+            <a:ext cx="276225" cy="171450"/>
+          </a:xfrm>
+          <a:prstGeom prst="rect"/>
+        </p:spPr>
+        <p:txBody>
+          <a:bodyPr wrap="none" lIns="0" tIns="0" rIns="0" bIns="0"/>
+          <a:p>
+            <a:pPr>
+              <a:lnSpc>
+                <a:spcPct val="100000"/>
+              </a:lnSpc>
+            </a:pPr>
+            <a:r>
+              <a:rPr lang="en-US" sz="825">
+                <a:solidFill>
+                  <a:srgbClr val="8B97A8"/>
+                </a:solidFill>
+                <a:latin typeface="Microsoft YaHei"/>
+                <a:ea typeface="Microsoft YaHei"/>
+              </a:rPr>
+              <a:t>18 KF</a:t>
+            </a:r>
+            <a:endParaRPr/>
+          </a:p>
+        </p:txBody>
+      </p:sp>
+      <p:pic>
+        <p:nvPicPr>
+          <p:cNvPr id="178" name=""/>
+          <p:cNvPicPr>
+            <a:picLocks noChangeAspect="1"/>
+          </p:cNvPicPr>
+          <p:nvPr/>
+        </p:nvPicPr>
+        <p:blipFill>
+          <a:blip r:embed="rId7"/>
+          <a:stretch>
+            <a:fillRect/>
+          </a:stretch>
+        </p:blipFill>
+        <p:spPr>
+          <a:xfrm rot="0" flipH="0" flipV="0">
+            <a:off x="381000" y="3295650"/>
+            <a:ext cx="1485900" cy="1981200"/>
+          </a:xfrm>
+          <a:prstGeom prst="rect">
+            <a:avLst/>
+          </a:prstGeom>
+          <a:ln/>
+        </p:spPr>
+      </p:pic>
+      <p:sp>
+        <p:nvSpPr>
+          <p:cNvPr id="179" name="" descr="{&quot;isTemplate&quot;:true,&quot;type&quot;:&quot;text&quot;}"/>
+          <p:cNvSpPr txBox="1"/>
+          <p:nvPr/>
+        </p:nvSpPr>
+        <p:spPr>
+          <a:xfrm rot="0" flipH="0" flipV="0">
+            <a:off x="647700" y="5314950"/>
+            <a:ext cx="190500" cy="171450"/>
+          </a:xfrm>
+          <a:prstGeom prst="rect"/>
+        </p:spPr>
+        <p:txBody>
+          <a:bodyPr wrap="none" lIns="0" tIns="0" rIns="0" bIns="0"/>
+          <a:p>
+            <a:pPr>
+              <a:lnSpc>
+                <a:spcPct val="100000"/>
+              </a:lnSpc>
+            </a:pPr>
+            <a:r>
+              <a:rPr lang="en-US" sz="825">
+                <a:solidFill>
+                  <a:srgbClr val="8B97A8"/>
+                </a:solidFill>
+                <a:latin typeface="Microsoft YaHei"/>
+                <a:ea typeface="Microsoft YaHei"/>
+              </a:rPr>
+              <a:t>#64</a:t>
+            </a:r>
+            <a:endParaRPr/>
+          </a:p>
+        </p:txBody>
+      </p:sp>
+      <p:sp>
+        <p:nvSpPr>
+          <p:cNvPr id="180" name="" descr="{&quot;isTemplate&quot;:true,&quot;type&quot;:&quot;text&quot;}"/>
+          <p:cNvSpPr txBox="1"/>
+          <p:nvPr/>
+        </p:nvSpPr>
+        <p:spPr>
+          <a:xfrm rot="0" flipH="0" flipV="0">
+            <a:off x="876300" y="5314950"/>
+            <a:ext cx="419100" cy="171450"/>
+          </a:xfrm>
+          <a:prstGeom prst="rect"/>
+        </p:spPr>
+        <p:txBody>
+          <a:bodyPr wrap="none" lIns="0" tIns="0" rIns="0" bIns="0"/>
+          <a:p>
+            <a:pPr>
+              <a:lnSpc>
+                <a:spcPct val="100000"/>
+              </a:lnSpc>
+            </a:pPr>
+            <a:r>
+              <a:rPr lang="en-US" sz="1125" b="1">
+                <a:solidFill>
+                  <a:srgbClr val="0F2E66"/>
+                </a:solidFill>
+                <a:latin typeface="Microsoft YaHei"/>
+                <a:ea typeface="Microsoft YaHei"/>
+              </a:rPr>
+              <a:t>14.5 s</a:t>
+            </a:r>
+            <a:endParaRPr/>
+          </a:p>
+        </p:txBody>
+      </p:sp>
+      <p:sp>
+        <p:nvSpPr>
+          <p:cNvPr id="181" name="" descr="{&quot;isTemplate&quot;:true,&quot;type&quot;:&quot;text&quot;}"/>
+          <p:cNvSpPr txBox="1"/>
+          <p:nvPr/>
+        </p:nvSpPr>
+        <p:spPr>
+          <a:xfrm rot="0" flipH="0" flipV="0">
+            <a:off x="1333500" y="5314950"/>
+            <a:ext cx="276225" cy="171450"/>
+          </a:xfrm>
+          <a:prstGeom prst="rect"/>
+        </p:spPr>
+        <p:txBody>
+          <a:bodyPr wrap="none" lIns="0" tIns="0" rIns="0" bIns="0"/>
+          <a:p>
+            <a:pPr>
+              <a:lnSpc>
+                <a:spcPct val="100000"/>
+              </a:lnSpc>
+            </a:pPr>
+            <a:r>
+              <a:rPr lang="en-US" sz="825">
+                <a:solidFill>
+                  <a:srgbClr val="8B97A8"/>
+                </a:solidFill>
+                <a:latin typeface="Microsoft YaHei"/>
+                <a:ea typeface="Microsoft YaHei"/>
+              </a:rPr>
+              <a:t>22 KF</a:t>
+            </a:r>
+            <a:endParaRPr/>
+          </a:p>
+        </p:txBody>
+      </p:sp>
+      <p:pic>
+        <p:nvPicPr>
+          <p:cNvPr id="182" name=""/>
+          <p:cNvPicPr>
+            <a:picLocks noChangeAspect="1"/>
+          </p:cNvPicPr>
+          <p:nvPr/>
+        </p:nvPicPr>
+        <p:blipFill>
+          <a:blip r:embed="rId8"/>
+          <a:stretch>
+            <a:fillRect/>
+          </a:stretch>
+        </p:blipFill>
+        <p:spPr>
+          <a:xfrm rot="0" flipH="0" flipV="0">
+            <a:off x="1943100" y="3295650"/>
+            <a:ext cx="1485900" cy="1981200"/>
+          </a:xfrm>
+          <a:prstGeom prst="rect">
+            <a:avLst/>
+          </a:prstGeom>
+          <a:ln/>
+        </p:spPr>
+      </p:pic>
+      <p:sp>
+        <p:nvSpPr>
+          <p:cNvPr id="183" name="" descr="{&quot;isTemplate&quot;:true,&quot;type&quot;:&quot;text&quot;}"/>
+          <p:cNvSpPr txBox="1"/>
+          <p:nvPr/>
+        </p:nvSpPr>
+        <p:spPr>
+          <a:xfrm rot="0" flipH="0" flipV="0">
+            <a:off x="2209800" y="5314950"/>
+            <a:ext cx="190500" cy="171450"/>
+          </a:xfrm>
+          <a:prstGeom prst="rect"/>
+        </p:spPr>
+        <p:txBody>
+          <a:bodyPr wrap="none" lIns="0" tIns="0" rIns="0" bIns="0"/>
+          <a:p>
+            <a:pPr>
+              <a:lnSpc>
+                <a:spcPct val="100000"/>
+              </a:lnSpc>
+            </a:pPr>
+            <a:r>
+              <a:rPr lang="en-US" sz="825">
+                <a:solidFill>
+                  <a:srgbClr val="8B97A8"/>
+                </a:solidFill>
+                <a:latin typeface="Microsoft YaHei"/>
+                <a:ea typeface="Microsoft YaHei"/>
+              </a:rPr>
+              <a:t>#68</a:t>
+            </a:r>
+            <a:endParaRPr/>
+          </a:p>
+        </p:txBody>
+      </p:sp>
+      <p:sp>
+        <p:nvSpPr>
+          <p:cNvPr id="184" name="" descr="{&quot;isTemplate&quot;:true,&quot;type&quot;:&quot;text&quot;}"/>
+          <p:cNvSpPr txBox="1"/>
+          <p:nvPr/>
+        </p:nvSpPr>
+        <p:spPr>
+          <a:xfrm rot="0" flipH="0" flipV="0">
+            <a:off x="2438400" y="5314950"/>
+            <a:ext cx="419100" cy="171450"/>
+          </a:xfrm>
+          <a:prstGeom prst="rect"/>
+        </p:spPr>
+        <p:txBody>
+          <a:bodyPr wrap="none" lIns="0" tIns="0" rIns="0" bIns="0"/>
+          <a:p>
+            <a:pPr>
+              <a:lnSpc>
+                <a:spcPct val="100000"/>
+              </a:lnSpc>
+            </a:pPr>
+            <a:r>
+              <a:rPr lang="en-US" sz="1125" b="1">
+                <a:solidFill>
+                  <a:srgbClr val="0F2E66"/>
+                </a:solidFill>
+                <a:latin typeface="Microsoft YaHei"/>
+                <a:ea typeface="Microsoft YaHei"/>
+              </a:rPr>
+              <a:t>17.2 s</a:t>
+            </a:r>
+            <a:endParaRPr/>
+          </a:p>
+        </p:txBody>
+      </p:sp>
+      <p:sp>
+        <p:nvSpPr>
+          <p:cNvPr id="185" name="" descr="{&quot;isTemplate&quot;:true,&quot;type&quot;:&quot;text&quot;}"/>
+          <p:cNvSpPr txBox="1"/>
+          <p:nvPr/>
+        </p:nvSpPr>
+        <p:spPr>
+          <a:xfrm rot="0" flipH="0" flipV="0">
+            <a:off x="2895600" y="5314950"/>
+            <a:ext cx="276225" cy="171450"/>
+          </a:xfrm>
+          <a:prstGeom prst="rect"/>
+        </p:spPr>
+        <p:txBody>
+          <a:bodyPr wrap="none" lIns="0" tIns="0" rIns="0" bIns="0"/>
+          <a:p>
+            <a:pPr>
+              <a:lnSpc>
+                <a:spcPct val="100000"/>
+              </a:lnSpc>
+            </a:pPr>
+            <a:r>
+              <a:rPr lang="en-US" sz="825">
+                <a:solidFill>
+                  <a:srgbClr val="8B97A8"/>
+                </a:solidFill>
+                <a:latin typeface="Microsoft YaHei"/>
+                <a:ea typeface="Microsoft YaHei"/>
+              </a:rPr>
+              <a:t>26 KF</a:t>
+            </a:r>
+            <a:endParaRPr/>
+          </a:p>
+        </p:txBody>
+      </p:sp>
+      <p:pic>
+        <p:nvPicPr>
+          <p:cNvPr id="186" name=""/>
+          <p:cNvPicPr>
+            <a:picLocks noChangeAspect="1"/>
+          </p:cNvPicPr>
+          <p:nvPr/>
+        </p:nvPicPr>
+        <p:blipFill>
+          <a:blip r:embed="rId9"/>
+          <a:stretch>
+            <a:fillRect/>
+          </a:stretch>
+        </p:blipFill>
+        <p:spPr>
+          <a:xfrm rot="0" flipH="0" flipV="0">
+            <a:off x="3505200" y="3295650"/>
+            <a:ext cx="1485900" cy="1981200"/>
+          </a:xfrm>
+          <a:prstGeom prst="rect">
+            <a:avLst/>
+          </a:prstGeom>
+          <a:ln/>
+        </p:spPr>
+      </p:pic>
+      <p:sp>
+        <p:nvSpPr>
+          <p:cNvPr id="187" name="" descr="{&quot;isTemplate&quot;:true,&quot;type&quot;:&quot;text&quot;}"/>
+          <p:cNvSpPr txBox="1"/>
+          <p:nvPr/>
+        </p:nvSpPr>
+        <p:spPr>
+          <a:xfrm rot="0" flipH="0" flipV="0">
+            <a:off x="3771900" y="5314950"/>
+            <a:ext cx="190500" cy="171450"/>
+          </a:xfrm>
+          <a:prstGeom prst="rect"/>
+        </p:spPr>
+        <p:txBody>
+          <a:bodyPr wrap="none" lIns="0" tIns="0" rIns="0" bIns="0"/>
+          <a:p>
+            <a:pPr>
+              <a:lnSpc>
+                <a:spcPct val="100000"/>
+              </a:lnSpc>
+            </a:pPr>
+            <a:r>
+              <a:rPr lang="en-US" sz="825">
+                <a:solidFill>
+                  <a:srgbClr val="8B97A8"/>
+                </a:solidFill>
+                <a:latin typeface="Microsoft YaHei"/>
+                <a:ea typeface="Microsoft YaHei"/>
+              </a:rPr>
+              <a:t>#72</a:t>
+            </a:r>
+            <a:endParaRPr/>
+          </a:p>
+        </p:txBody>
+      </p:sp>
+      <p:sp>
+        <p:nvSpPr>
+          <p:cNvPr id="188" name="" descr="{&quot;isTemplate&quot;:true,&quot;type&quot;:&quot;text&quot;}"/>
+          <p:cNvSpPr txBox="1"/>
+          <p:nvPr/>
+        </p:nvSpPr>
+        <p:spPr>
+          <a:xfrm rot="0" flipH="0" flipV="0">
+            <a:off x="4000500" y="5314950"/>
+            <a:ext cx="419100" cy="171450"/>
+          </a:xfrm>
+          <a:prstGeom prst="rect"/>
+        </p:spPr>
+        <p:txBody>
+          <a:bodyPr wrap="none" lIns="0" tIns="0" rIns="0" bIns="0"/>
+          <a:p>
+            <a:pPr>
+              <a:lnSpc>
+                <a:spcPct val="100000"/>
+              </a:lnSpc>
+            </a:pPr>
+            <a:r>
+              <a:rPr lang="en-US" sz="1125" b="1">
+                <a:solidFill>
+                  <a:srgbClr val="0F2E66"/>
+                </a:solidFill>
+                <a:latin typeface="Microsoft YaHei"/>
+                <a:ea typeface="Microsoft YaHei"/>
+              </a:rPr>
+              <a:t>21.2 s</a:t>
+            </a:r>
+            <a:endParaRPr/>
+          </a:p>
+        </p:txBody>
+      </p:sp>
+      <p:sp>
+        <p:nvSpPr>
+          <p:cNvPr id="189" name="" descr="{&quot;isTemplate&quot;:true,&quot;type&quot;:&quot;text&quot;}"/>
+          <p:cNvSpPr txBox="1"/>
+          <p:nvPr/>
+        </p:nvSpPr>
+        <p:spPr>
+          <a:xfrm rot="0" flipH="0" flipV="0">
+            <a:off x="4457700" y="5314950"/>
+            <a:ext cx="276225" cy="171450"/>
+          </a:xfrm>
+          <a:prstGeom prst="rect"/>
+        </p:spPr>
+        <p:txBody>
+          <a:bodyPr wrap="none" lIns="0" tIns="0" rIns="0" bIns="0"/>
+          <a:p>
+            <a:pPr>
+              <a:lnSpc>
+                <a:spcPct val="100000"/>
+              </a:lnSpc>
+            </a:pPr>
+            <a:r>
+              <a:rPr lang="en-US" sz="825">
+                <a:solidFill>
+                  <a:srgbClr val="8B97A8"/>
+                </a:solidFill>
+                <a:latin typeface="Microsoft YaHei"/>
+                <a:ea typeface="Microsoft YaHei"/>
+              </a:rPr>
+              <a:t>32 KF</a:t>
+            </a:r>
+            <a:endParaRPr/>
+          </a:p>
+        </p:txBody>
+      </p:sp>
+      <p:pic>
+        <p:nvPicPr>
+          <p:cNvPr id="190" name=""/>
+          <p:cNvPicPr>
+            <a:picLocks noChangeAspect="1"/>
+          </p:cNvPicPr>
+          <p:nvPr/>
+        </p:nvPicPr>
+        <p:blipFill>
+          <a:blip r:embed="rId10"/>
+          <a:stretch>
+            <a:fillRect/>
+          </a:stretch>
+        </p:blipFill>
+        <p:spPr>
+          <a:xfrm rot="0" flipH="0" flipV="0">
+            <a:off x="5067300" y="3295650"/>
+            <a:ext cx="1485900" cy="1981200"/>
+          </a:xfrm>
+          <a:prstGeom prst="rect">
+            <a:avLst/>
+          </a:prstGeom>
+          <a:ln/>
+        </p:spPr>
+      </p:pic>
+      <p:sp>
+        <p:nvSpPr>
+          <p:cNvPr id="191" name="" descr="{&quot;isTemplate&quot;:true,&quot;type&quot;:&quot;text&quot;}"/>
+          <p:cNvSpPr txBox="1"/>
+          <p:nvPr/>
+        </p:nvSpPr>
+        <p:spPr>
+          <a:xfrm rot="0" flipH="0" flipV="0">
+            <a:off x="5334000" y="5314950"/>
+            <a:ext cx="190500" cy="171450"/>
+          </a:xfrm>
+          <a:prstGeom prst="rect"/>
+        </p:spPr>
+        <p:txBody>
+          <a:bodyPr wrap="none" lIns="0" tIns="0" rIns="0" bIns="0"/>
+          <a:p>
+            <a:pPr>
+              <a:lnSpc>
+                <a:spcPct val="100000"/>
+              </a:lnSpc>
+            </a:pPr>
+            <a:r>
+              <a:rPr lang="en-US" sz="825">
+                <a:solidFill>
+                  <a:srgbClr val="8B97A8"/>
+                </a:solidFill>
+                <a:latin typeface="Microsoft YaHei"/>
+                <a:ea typeface="Microsoft YaHei"/>
+              </a:rPr>
+              <a:t>#76</a:t>
+            </a:r>
+            <a:endParaRPr/>
+          </a:p>
+        </p:txBody>
+      </p:sp>
+      <p:sp>
+        <p:nvSpPr>
+          <p:cNvPr id="192" name="" descr="{&quot;isTemplate&quot;:true,&quot;type&quot;:&quot;text&quot;}"/>
+          <p:cNvSpPr txBox="1"/>
+          <p:nvPr/>
+        </p:nvSpPr>
+        <p:spPr>
+          <a:xfrm rot="0" flipH="0" flipV="0">
+            <a:off x="5562600" y="5314950"/>
+            <a:ext cx="419100" cy="171450"/>
+          </a:xfrm>
+          <a:prstGeom prst="rect"/>
+        </p:spPr>
+        <p:txBody>
+          <a:bodyPr wrap="none" lIns="0" tIns="0" rIns="0" bIns="0"/>
+          <a:p>
+            <a:pPr>
+              <a:lnSpc>
+                <a:spcPct val="100000"/>
+              </a:lnSpc>
+            </a:pPr>
+            <a:r>
+              <a:rPr lang="en-US" sz="1125" b="1">
+                <a:solidFill>
+                  <a:srgbClr val="0F2E66"/>
+                </a:solidFill>
+                <a:latin typeface="Microsoft YaHei"/>
+                <a:ea typeface="Microsoft YaHei"/>
+              </a:rPr>
+              <a:t>22.7 s</a:t>
+            </a:r>
+            <a:endParaRPr/>
+          </a:p>
+        </p:txBody>
+      </p:sp>
+      <p:sp>
+        <p:nvSpPr>
+          <p:cNvPr id="193" name="" descr="{&quot;isTemplate&quot;:true,&quot;type&quot;:&quot;text&quot;}"/>
+          <p:cNvSpPr txBox="1"/>
+          <p:nvPr/>
+        </p:nvSpPr>
+        <p:spPr>
+          <a:xfrm rot="0" flipH="0" flipV="0">
+            <a:off x="6019800" y="5314950"/>
+            <a:ext cx="276225" cy="171450"/>
+          </a:xfrm>
+          <a:prstGeom prst="rect"/>
+        </p:spPr>
+        <p:txBody>
+          <a:bodyPr wrap="none" lIns="0" tIns="0" rIns="0" bIns="0"/>
+          <a:p>
+            <a:pPr>
+              <a:lnSpc>
+                <a:spcPct val="100000"/>
+              </a:lnSpc>
+            </a:pPr>
+            <a:r>
+              <a:rPr lang="en-US" sz="825">
+                <a:solidFill>
+                  <a:srgbClr val="8B97A8"/>
+                </a:solidFill>
+                <a:latin typeface="Microsoft YaHei"/>
+                <a:ea typeface="Microsoft YaHei"/>
+              </a:rPr>
+              <a:t>34 KF</a:t>
+            </a:r>
+            <a:endParaRPr/>
+          </a:p>
+        </p:txBody>
+      </p:sp>
+      <p:pic>
+        <p:nvPicPr>
+          <p:cNvPr id="194" name=""/>
+          <p:cNvPicPr>
+            <a:picLocks noChangeAspect="1"/>
+          </p:cNvPicPr>
+          <p:nvPr/>
+        </p:nvPicPr>
+        <p:blipFill>
+          <a:blip r:embed="rId11"/>
+          <a:stretch>
+            <a:fillRect/>
+          </a:stretch>
+        </p:blipFill>
+        <p:spPr>
+          <a:xfrm rot="0" flipH="0" flipV="0">
+            <a:off x="6629400" y="3295650"/>
+            <a:ext cx="1485900" cy="1981200"/>
+          </a:xfrm>
+          <a:prstGeom prst="rect">
+            <a:avLst/>
+          </a:prstGeom>
+          <a:ln/>
+        </p:spPr>
+      </p:pic>
+      <p:sp>
+        <p:nvSpPr>
+          <p:cNvPr id="195" name="" descr="{&quot;isTemplate&quot;:true,&quot;type&quot;:&quot;text&quot;}"/>
+          <p:cNvSpPr txBox="1"/>
+          <p:nvPr/>
+        </p:nvSpPr>
+        <p:spPr>
+          <a:xfrm rot="0" flipH="0" flipV="0">
+            <a:off x="6896100" y="5314950"/>
+            <a:ext cx="190500" cy="171450"/>
+          </a:xfrm>
+          <a:prstGeom prst="rect"/>
+        </p:spPr>
+        <p:txBody>
+          <a:bodyPr wrap="none" lIns="0" tIns="0" rIns="0" bIns="0"/>
+          <a:p>
+            <a:pPr>
+              <a:lnSpc>
+                <a:spcPct val="100000"/>
+              </a:lnSpc>
+            </a:pPr>
+            <a:r>
+              <a:rPr lang="en-US" sz="825">
+                <a:solidFill>
+                  <a:srgbClr val="8B97A8"/>
+                </a:solidFill>
+                <a:latin typeface="Microsoft YaHei"/>
+                <a:ea typeface="Microsoft YaHei"/>
+              </a:rPr>
+              <a:t>#80</a:t>
+            </a:r>
+            <a:endParaRPr/>
+          </a:p>
+        </p:txBody>
+      </p:sp>
+      <p:sp>
+        <p:nvSpPr>
+          <p:cNvPr id="196" name="" descr="{&quot;isTemplate&quot;:true,&quot;type&quot;:&quot;text&quot;}"/>
+          <p:cNvSpPr txBox="1"/>
+          <p:nvPr/>
+        </p:nvSpPr>
+        <p:spPr>
+          <a:xfrm rot="0" flipH="0" flipV="0">
+            <a:off x="7124700" y="5314950"/>
+            <a:ext cx="419100" cy="171450"/>
+          </a:xfrm>
+          <a:prstGeom prst="rect"/>
+        </p:spPr>
+        <p:txBody>
+          <a:bodyPr wrap="none" lIns="0" tIns="0" rIns="0" bIns="0"/>
+          <a:p>
+            <a:pPr>
+              <a:lnSpc>
+                <a:spcPct val="100000"/>
+              </a:lnSpc>
+            </a:pPr>
+            <a:r>
+              <a:rPr lang="en-US" sz="1125" b="1">
+                <a:solidFill>
+                  <a:srgbClr val="0F2E66"/>
+                </a:solidFill>
+                <a:latin typeface="Microsoft YaHei"/>
+                <a:ea typeface="Microsoft YaHei"/>
+              </a:rPr>
+              <a:t>23.6 s</a:t>
+            </a:r>
+            <a:endParaRPr/>
+          </a:p>
+        </p:txBody>
+      </p:sp>
+      <p:sp>
+        <p:nvSpPr>
+          <p:cNvPr id="197" name="" descr="{&quot;isTemplate&quot;:true,&quot;type&quot;:&quot;text&quot;}"/>
+          <p:cNvSpPr txBox="1"/>
+          <p:nvPr/>
+        </p:nvSpPr>
+        <p:spPr>
+          <a:xfrm rot="0" flipH="0" flipV="0">
+            <a:off x="7581900" y="5314950"/>
+            <a:ext cx="276225" cy="171450"/>
+          </a:xfrm>
+          <a:prstGeom prst="rect"/>
+        </p:spPr>
+        <p:txBody>
+          <a:bodyPr wrap="none" lIns="0" tIns="0" rIns="0" bIns="0"/>
+          <a:p>
+            <a:pPr>
+              <a:lnSpc>
+                <a:spcPct val="100000"/>
+              </a:lnSpc>
+            </a:pPr>
+            <a:r>
+              <a:rPr lang="en-US" sz="825">
+                <a:solidFill>
+                  <a:srgbClr val="8B97A8"/>
+                </a:solidFill>
+                <a:latin typeface="Microsoft YaHei"/>
+                <a:ea typeface="Microsoft YaHei"/>
+              </a:rPr>
+              <a:t>35 KF</a:t>
+            </a:r>
+            <a:endParaRPr/>
+          </a:p>
+        </p:txBody>
+      </p:sp>
+      <p:sp>
+        <p:nvSpPr>
+          <p:cNvPr id="198" name=""/>
           <p:cNvSpPr/>
           <p:nvPr/>
         </p:nvSpPr>
         <p:spPr>
           <a:xfrm rot="0" flipH="0" flipV="0">
-            <a:off x="9410700" y="3343275"/>
-            <a:ext cx="1562100" cy="2085975"/>
+            <a:off x="8191500" y="3295650"/>
+            <a:ext cx="1485900" cy="1981200"/>
           </a:xfrm>
           <a:prstGeom prst="rect">
             <a:avLst/>
@@ -8651,7 +9100,7 @@
       </p:sp>
       <p:pic>
         <p:nvPicPr>
-          <p:cNvPr id="177" name=""/>
+          <p:cNvPr id="199" name=""/>
           <p:cNvPicPr>
             <a:picLocks noChangeAspect="1"/>
           </p:cNvPicPr>
@@ -8659,15 +9108,14 @@
         </p:nvPicPr>
         <p:blipFill>
           <a:blip r:embed="rId12"/>
-          <a:srcRect l="76" t="0" r="76" b="0"/>
           <a:stretch>
             <a:fillRect/>
           </a:stretch>
         </p:blipFill>
         <p:spPr>
           <a:xfrm rot="0" flipH="0" flipV="0">
-            <a:off x="9410700" y="3343275"/>
-            <a:ext cx="1562100" cy="2085975"/>
+            <a:off x="8191500" y="3295650"/>
+            <a:ext cx="1485900" cy="1981200"/>
           </a:xfrm>
           <a:prstGeom prst="rect">
             <a:avLst/>
@@ -8677,14 +9125,14 @@
       </p:pic>
       <p:sp>
         <p:nvSpPr>
-          <p:cNvPr id="178" name="" descr="{&quot;isTemplate&quot;:true,&quot;type&quot;:&quot;text&quot;}"/>
-          <p:cNvSpPr txBox="1"/>
-          <p:nvPr/>
-        </p:nvSpPr>
-        <p:spPr>
-          <a:xfrm rot="0" flipH="0" flipV="0">
-            <a:off x="9715500" y="5467350"/>
-            <a:ext cx="962025" cy="142875"/>
+          <p:cNvPr id="200" name="" descr="{&quot;isTemplate&quot;:true,&quot;type&quot;:&quot;text&quot;}"/>
+          <p:cNvSpPr txBox="1"/>
+          <p:nvPr/>
+        </p:nvSpPr>
+        <p:spPr>
+          <a:xfrm rot="0" flipH="0" flipV="0">
+            <a:off x="8458200" y="5314950"/>
+            <a:ext cx="190500" cy="171450"/>
           </a:xfrm>
           <a:prstGeom prst="rect"/>
         </p:spPr>
@@ -8697,65 +9145,107 @@
               </a:lnSpc>
             </a:pPr>
             <a:r>
-              <a:rPr lang="en-US" sz="938" b="1">
+              <a:rPr lang="en-US" sz="825">
+                <a:solidFill>
+                  <a:srgbClr val="8B97A8"/>
+                </a:solidFill>
+                <a:latin typeface="Microsoft YaHei"/>
+                <a:ea typeface="Microsoft YaHei"/>
+              </a:rPr>
+              <a:t>#84</a:t>
+            </a:r>
+            <a:endParaRPr/>
+          </a:p>
+        </p:txBody>
+      </p:sp>
+      <p:sp>
+        <p:nvSpPr>
+          <p:cNvPr id="201" name="" descr="{&quot;isTemplate&quot;:true,&quot;type&quot;:&quot;text&quot;}"/>
+          <p:cNvSpPr txBox="1"/>
+          <p:nvPr/>
+        </p:nvSpPr>
+        <p:spPr>
+          <a:xfrm rot="0" flipH="0" flipV="0">
+            <a:off x="8686800" y="5314950"/>
+            <a:ext cx="419100" cy="171450"/>
+          </a:xfrm>
+          <a:prstGeom prst="rect"/>
+        </p:spPr>
+        <p:txBody>
+          <a:bodyPr wrap="none" lIns="0" tIns="0" rIns="0" bIns="0"/>
+          <a:p>
+            <a:pPr>
+              <a:lnSpc>
+                <a:spcPct val="100000"/>
+              </a:lnSpc>
+            </a:pPr>
+            <a:r>
+              <a:rPr lang="en-US" sz="1125" b="1">
                 <a:solidFill>
                   <a:srgbClr val="1E4FA8"/>
                 </a:solidFill>
                 <a:latin typeface="Microsoft YaHei"/>
                 <a:ea typeface="Microsoft YaHei"/>
               </a:rPr>
-              <a:t xml:space="preserve">#84 </a:t>
-            </a:r>
-            <a:r>
-              <a:rPr lang="zh-CN" sz="938" b="1">
-                <a:solidFill>
-                  <a:srgbClr val="1E4FA8"/>
-                </a:solidFill>
-                <a:latin typeface="Microsoft YaHei"/>
-                <a:ea typeface="Microsoft YaHei"/>
-              </a:rPr>
-              <a:t>｜</a:t>
-            </a:r>
-            <a:r>
-              <a:rPr lang="en-US" sz="938" b="1">
-                <a:solidFill>
-                  <a:srgbClr val="1E4FA8"/>
-                </a:solidFill>
-                <a:latin typeface="Microsoft YaHei"/>
-                <a:ea typeface="Microsoft YaHei"/>
-              </a:rPr>
-              <a:t xml:space="preserve"> 81 </a:t>
-            </a:r>
-            <a:r>
-              <a:rPr lang="zh-CN" sz="938" b="1">
-                <a:solidFill>
-                  <a:srgbClr val="1E4FA8"/>
-                </a:solidFill>
-                <a:latin typeface="Microsoft YaHei"/>
-                <a:ea typeface="Microsoft YaHei"/>
-              </a:rPr>
-              <a:t>关键帧</a:t>
-            </a:r>
-            <a:endParaRPr/>
-          </a:p>
-        </p:txBody>
-      </p:sp>
-      <p:sp>
-        <p:nvSpPr>
-          <p:cNvPr id="179" name=""/>
+              <a:t>26.1 s</a:t>
+            </a:r>
+            <a:endParaRPr/>
+          </a:p>
+        </p:txBody>
+      </p:sp>
+      <p:sp>
+        <p:nvSpPr>
+          <p:cNvPr id="202" name="" descr="{&quot;isTemplate&quot;:true,&quot;type&quot;:&quot;text&quot;}"/>
+          <p:cNvSpPr txBox="1"/>
+          <p:nvPr/>
+        </p:nvSpPr>
+        <p:spPr>
+          <a:xfrm rot="0" flipH="0" flipV="0">
+            <a:off x="9144000" y="5314950"/>
+            <a:ext cx="276225" cy="171450"/>
+          </a:xfrm>
+          <a:prstGeom prst="rect"/>
+        </p:spPr>
+        <p:txBody>
+          <a:bodyPr wrap="none" lIns="0" tIns="0" rIns="0" bIns="0"/>
+          <a:p>
+            <a:pPr>
+              <a:lnSpc>
+                <a:spcPct val="100000"/>
+              </a:lnSpc>
+            </a:pPr>
+            <a:r>
+              <a:rPr lang="en-US" sz="825">
+                <a:solidFill>
+                  <a:srgbClr val="8B97A8"/>
+                </a:solidFill>
+                <a:latin typeface="Microsoft YaHei"/>
+                <a:ea typeface="Microsoft YaHei"/>
+              </a:rPr>
+              <a:t>81 KF</a:t>
+            </a:r>
+            <a:endParaRPr/>
+          </a:p>
+        </p:txBody>
+      </p:sp>
+      <p:sp>
+        <p:nvSpPr>
+          <p:cNvPr id="203" name=""/>
           <p:cNvSpPr/>
           <p:nvPr/>
         </p:nvSpPr>
         <p:spPr>
           <a:xfrm rot="0" flipH="0" flipV="0">
-            <a:off x="428625" y="5762625"/>
-            <a:ext cx="11430000" cy="733425"/>
-          </a:xfrm>
-          <a:prstGeom prst="rect">
-            <a:avLst/>
+            <a:off x="9829800" y="1066800"/>
+            <a:ext cx="1981200" cy="4457700"/>
+          </a:xfrm>
+          <a:prstGeom prst="roundRect">
+            <a:avLst>
+              <a:gd name="adj" fmla="val 1923"/>
+            </a:avLst>
           </a:prstGeom>
           <a:solidFill>
-            <a:srgbClr val="F0F5FC"/>
+            <a:srgbClr val="F7F9FC"/>
           </a:solidFill>
           <a:ln/>
         </p:spPr>
@@ -8766,29 +9256,36 @@
       </p:sp>
       <p:sp>
         <p:nvSpPr>
-          <p:cNvPr id="180" name=""/>
+          <p:cNvPr id="204" name=""/>
           <p:cNvSpPr/>
           <p:nvPr/>
         </p:nvSpPr>
         <p:spPr>
           <a:xfrm rot="0" flipH="0" flipV="0">
-            <a:off x="381000" y="5762625"/>
-            <a:ext cx="11477625" cy="733425"/>
+            <a:off x="9829800" y="1066800"/>
+            <a:ext cx="1981200" cy="4457700"/>
           </a:xfrm>
           <a:custGeom>
             <a:pathLst>
-              <a:path w="1205" h="77">
+              <a:path w="208" h="468">
                 <a:moveTo>
-                  <a:pt x="0" y="0"/>
+                  <a:pt x="204" y="0"/>
                 </a:moveTo>
+                <a:cubicBezTo>
+                  <a:pt x="206" y="0"/>
+                  <a:pt x="208" y="2"/>
+                  <a:pt x="208" y="4"/>
+                </a:cubicBezTo>
                 <a:lnTo>
-                  <a:pt x="5" y="0"/>
+                  <a:pt x="0" y="4"/>
                 </a:lnTo>
+                <a:cubicBezTo>
+                  <a:pt x="0" y="2"/>
+                  <a:pt x="2" y="0"/>
+                  <a:pt x="4" y="0"/>
+                </a:cubicBezTo>
                 <a:lnTo>
-                  <a:pt x="5" y="77"/>
-                </a:lnTo>
-                <a:lnTo>
-                  <a:pt x="0" y="77"/>
+                  <a:pt x="204" y="0"/>
                 </a:lnTo>
                 <a:close/>
               </a:path>
@@ -8806,14 +9303,932 @@
       </p:sp>
       <p:sp>
         <p:nvSpPr>
-          <p:cNvPr id="181" name="" descr="{&quot;isTemplate&quot;:true,&quot;type&quot;:&quot;text&quot;}"/>
-          <p:cNvSpPr txBox="1"/>
-          <p:nvPr/>
-        </p:nvSpPr>
-        <p:spPr>
-          <a:xfrm rot="0" flipH="0" flipV="0">
-            <a:off x="561975" y="5848350"/>
-            <a:ext cx="11115675" cy="561975"/>
+          <p:cNvPr id="205" name="" descr="{&quot;isTemplate&quot;:true,&quot;type&quot;:&quot;text&quot;}"/>
+          <p:cNvSpPr txBox="1"/>
+          <p:nvPr/>
+        </p:nvSpPr>
+        <p:spPr>
+          <a:xfrm rot="0" flipH="0" flipV="0">
+            <a:off x="9963150" y="1181100"/>
+            <a:ext cx="1714500" cy="171450"/>
+          </a:xfrm>
+          <a:prstGeom prst="rect"/>
+        </p:spPr>
+        <p:txBody>
+          <a:bodyPr wrap="none" lIns="0" tIns="0" rIns="0" bIns="0"/>
+          <a:p>
+            <a:pPr>
+              <a:lnSpc>
+                <a:spcPct val="100000"/>
+              </a:lnSpc>
+            </a:pPr>
+            <a:r>
+              <a:rPr lang="zh-CN" sz="1125" b="1">
+                <a:solidFill>
+                  <a:srgbClr val="1E4FA8"/>
+                </a:solidFill>
+                <a:latin typeface="Microsoft YaHei"/>
+                <a:ea typeface="Microsoft YaHei"/>
+              </a:rPr>
+              <a:t>重建花了多少时间</a:t>
+            </a:r>
+            <a:endParaRPr/>
+          </a:p>
+        </p:txBody>
+      </p:sp>
+      <p:sp>
+        <p:nvSpPr>
+          <p:cNvPr id="206" name="" descr="{&quot;isTemplate&quot;:true,&quot;type&quot;:&quot;text&quot;}"/>
+          <p:cNvSpPr txBox="1"/>
+          <p:nvPr/>
+        </p:nvSpPr>
+        <p:spPr>
+          <a:xfrm rot="0" flipH="0" flipV="0">
+            <a:off x="9963150" y="1371600"/>
+            <a:ext cx="1714500" cy="142875"/>
+          </a:xfrm>
+          <a:prstGeom prst="rect"/>
+        </p:spPr>
+        <p:txBody>
+          <a:bodyPr wrap="none" lIns="0" tIns="0" rIns="0" bIns="0"/>
+          <a:p>
+            <a:pPr>
+              <a:lnSpc>
+                <a:spcPct val="100000"/>
+              </a:lnSpc>
+            </a:pPr>
+            <a:r>
+              <a:rPr lang="zh-CN" sz="900">
+                <a:solidFill>
+                  <a:srgbClr val="8B97A8"/>
+                </a:solidFill>
+                <a:latin typeface="Microsoft YaHei"/>
+                <a:ea typeface="Microsoft YaHei"/>
+              </a:rPr>
+              <a:t>单帧延迟（</a:t>
+            </a:r>
+            <a:r>
+              <a:rPr lang="en-US" sz="900">
+                <a:solidFill>
+                  <a:srgbClr val="8B97A8"/>
+                </a:solidFill>
+                <a:latin typeface="Microsoft YaHei"/>
+                <a:ea typeface="Microsoft YaHei"/>
+              </a:rPr>
+              <a:t xml:space="preserve">= </a:t>
+            </a:r>
+            <a:r>
+              <a:rPr lang="zh-CN" sz="900">
+                <a:solidFill>
+                  <a:srgbClr val="8B97A8"/>
+                </a:solidFill>
+                <a:latin typeface="Microsoft YaHei"/>
+                <a:ea typeface="Microsoft YaHei"/>
+              </a:rPr>
+              <a:t>下一张可拍前）</a:t>
+            </a:r>
+            <a:endParaRPr/>
+          </a:p>
+        </p:txBody>
+      </p:sp>
+      <p:sp>
+        <p:nvSpPr>
+          <p:cNvPr id="207" name="" descr="{&quot;isTemplate&quot;:true,&quot;type&quot;:&quot;text&quot;}"/>
+          <p:cNvSpPr txBox="1"/>
+          <p:nvPr/>
+        </p:nvSpPr>
+        <p:spPr>
+          <a:xfrm rot="0" flipH="0" flipV="0">
+            <a:off x="9963150" y="1590675"/>
+            <a:ext cx="257175" cy="247650"/>
+          </a:xfrm>
+          <a:prstGeom prst="rect"/>
+        </p:spPr>
+        <p:txBody>
+          <a:bodyPr wrap="none" lIns="0" tIns="0" rIns="0" bIns="0"/>
+          <a:p>
+            <a:pPr>
+              <a:lnSpc>
+                <a:spcPct val="100000"/>
+              </a:lnSpc>
+            </a:pPr>
+            <a:r>
+              <a:rPr lang="zh-CN" sz="1013">
+                <a:solidFill>
+                  <a:srgbClr val="4A5568"/>
+                </a:solidFill>
+                <a:latin typeface="Microsoft YaHei"/>
+                <a:ea typeface="Microsoft YaHei"/>
+              </a:rPr>
+              <a:t>中位</a:t>
+            </a:r>
+            <a:endParaRPr/>
+          </a:p>
+        </p:txBody>
+      </p:sp>
+      <p:sp>
+        <p:nvSpPr>
+          <p:cNvPr id="208" name="" descr="{&quot;isTemplate&quot;:true,&quot;type&quot;:&quot;text&quot;}"/>
+          <p:cNvSpPr txBox="1"/>
+          <p:nvPr/>
+        </p:nvSpPr>
+        <p:spPr>
+          <a:xfrm rot="0" flipH="0" flipV="0">
+            <a:off x="11068050" y="1590675"/>
+            <a:ext cx="609600" cy="247650"/>
+          </a:xfrm>
+          <a:prstGeom prst="rect"/>
+        </p:spPr>
+        <p:txBody>
+          <a:bodyPr wrap="none" lIns="0" tIns="0" rIns="0" bIns="0"/>
+          <a:p>
+            <a:pPr>
+              <a:lnSpc>
+                <a:spcPct val="100000"/>
+              </a:lnSpc>
+            </a:pPr>
+            <a:r>
+              <a:rPr lang="en-US" sz="1575" b="1">
+                <a:solidFill>
+                  <a:srgbClr val="1E4FA8"/>
+                </a:solidFill>
+                <a:latin typeface="Microsoft YaHei"/>
+                <a:ea typeface="Microsoft YaHei"/>
+              </a:rPr>
+              <a:t>87 ms</a:t>
+            </a:r>
+            <a:endParaRPr/>
+          </a:p>
+        </p:txBody>
+      </p:sp>
+      <p:sp>
+        <p:nvSpPr>
+          <p:cNvPr id="209" name="" descr="{&quot;isTemplate&quot;:true,&quot;type&quot;:&quot;text&quot;}"/>
+          <p:cNvSpPr txBox="1"/>
+          <p:nvPr/>
+        </p:nvSpPr>
+        <p:spPr>
+          <a:xfrm rot="0" flipH="0" flipV="0">
+            <a:off x="9963150" y="1866900"/>
+            <a:ext cx="238125" cy="247650"/>
+          </a:xfrm>
+          <a:prstGeom prst="rect"/>
+        </p:spPr>
+        <p:txBody>
+          <a:bodyPr wrap="none" lIns="0" tIns="0" rIns="0" bIns="0"/>
+          <a:p>
+            <a:pPr>
+              <a:lnSpc>
+                <a:spcPct val="100000"/>
+              </a:lnSpc>
+            </a:pPr>
+            <a:r>
+              <a:rPr lang="en-US" sz="1013">
+                <a:solidFill>
+                  <a:srgbClr val="4A5568"/>
+                </a:solidFill>
+                <a:latin typeface="Microsoft YaHei"/>
+                <a:ea typeface="Microsoft YaHei"/>
+              </a:rPr>
+              <a:t>p90</a:t>
+            </a:r>
+            <a:endParaRPr/>
+          </a:p>
+        </p:txBody>
+      </p:sp>
+      <p:sp>
+        <p:nvSpPr>
+          <p:cNvPr id="210" name="" descr="{&quot;isTemplate&quot;:true,&quot;type&quot;:&quot;text&quot;}"/>
+          <p:cNvSpPr txBox="1"/>
+          <p:nvPr/>
+        </p:nvSpPr>
+        <p:spPr>
+          <a:xfrm rot="0" flipH="0" flipV="0">
+            <a:off x="10944225" y="1866900"/>
+            <a:ext cx="733425" cy="247650"/>
+          </a:xfrm>
+          <a:prstGeom prst="rect"/>
+        </p:spPr>
+        <p:txBody>
+          <a:bodyPr wrap="none" lIns="0" tIns="0" rIns="0" bIns="0"/>
+          <a:p>
+            <a:pPr>
+              <a:lnSpc>
+                <a:spcPct val="100000"/>
+              </a:lnSpc>
+            </a:pPr>
+            <a:r>
+              <a:rPr lang="en-US" sz="1575" b="1">
+                <a:solidFill>
+                  <a:srgbClr val="1A2230"/>
+                </a:solidFill>
+                <a:latin typeface="Microsoft YaHei"/>
+                <a:ea typeface="Microsoft YaHei"/>
+              </a:rPr>
+              <a:t>756 ms</a:t>
+            </a:r>
+            <a:endParaRPr/>
+          </a:p>
+        </p:txBody>
+      </p:sp>
+      <p:sp>
+        <p:nvSpPr>
+          <p:cNvPr id="211" name="" descr="{&quot;isTemplate&quot;:true,&quot;type&quot;:&quot;text&quot;}"/>
+          <p:cNvSpPr txBox="1"/>
+          <p:nvPr/>
+        </p:nvSpPr>
+        <p:spPr>
+          <a:xfrm rot="0" flipH="0" flipV="0">
+            <a:off x="9963150" y="2143125"/>
+            <a:ext cx="514350" cy="247650"/>
+          </a:xfrm>
+          <a:prstGeom prst="rect"/>
+        </p:spPr>
+        <p:txBody>
+          <a:bodyPr wrap="none" lIns="0" tIns="0" rIns="0" bIns="0"/>
+          <a:p>
+            <a:pPr>
+              <a:lnSpc>
+                <a:spcPct val="100000"/>
+              </a:lnSpc>
+            </a:pPr>
+            <a:r>
+              <a:rPr lang="zh-CN" sz="1013">
+                <a:solidFill>
+                  <a:srgbClr val="4A5568"/>
+                </a:solidFill>
+                <a:latin typeface="Microsoft YaHei"/>
+                <a:ea typeface="Microsoft YaHei"/>
+              </a:rPr>
+              <a:t>最慢一帧</a:t>
+            </a:r>
+            <a:endParaRPr/>
+          </a:p>
+        </p:txBody>
+      </p:sp>
+      <p:sp>
+        <p:nvSpPr>
+          <p:cNvPr id="212" name="" descr="{&quot;isTemplate&quot;:true,&quot;type&quot;:&quot;text&quot;}"/>
+          <p:cNvSpPr txBox="1"/>
+          <p:nvPr/>
+        </p:nvSpPr>
+        <p:spPr>
+          <a:xfrm rot="0" flipH="0" flipV="0">
+            <a:off x="11087100" y="2143125"/>
+            <a:ext cx="590550" cy="247650"/>
+          </a:xfrm>
+          <a:prstGeom prst="rect"/>
+        </p:spPr>
+        <p:txBody>
+          <a:bodyPr wrap="none" lIns="0" tIns="0" rIns="0" bIns="0"/>
+          <a:p>
+            <a:pPr>
+              <a:lnSpc>
+                <a:spcPct val="100000"/>
+              </a:lnSpc>
+            </a:pPr>
+            <a:r>
+              <a:rPr lang="en-US" sz="1575" b="1">
+                <a:solidFill>
+                  <a:srgbClr val="1A2230"/>
+                </a:solidFill>
+                <a:latin typeface="Microsoft YaHei"/>
+                <a:ea typeface="Microsoft YaHei"/>
+              </a:rPr>
+              <a:t>1.72 s</a:t>
+            </a:r>
+            <a:endParaRPr/>
+          </a:p>
+        </p:txBody>
+      </p:sp>
+      <p:sp>
+        <p:nvSpPr>
+          <p:cNvPr id="213" name=""/>
+          <p:cNvSpPr/>
+          <p:nvPr/>
+        </p:nvSpPr>
+        <p:spPr>
+          <a:xfrm rot="0" flipH="0" flipV="0">
+            <a:off x="9963150" y="2495550"/>
+            <a:ext cx="1714500" cy="9525"/>
+          </a:xfrm>
+          <a:prstGeom prst="rect">
+            <a:avLst/>
+          </a:prstGeom>
+          <a:solidFill>
+            <a:srgbClr val="D6DCE5"/>
+          </a:solidFill>
+          <a:ln/>
+        </p:spPr>
+        <p:txBody>
+          <a:bodyPr/>
+          <a:p/>
+        </p:txBody>
+      </p:sp>
+      <p:sp>
+        <p:nvSpPr>
+          <p:cNvPr id="214" name="" descr="{&quot;isTemplate&quot;:true,&quot;type&quot;:&quot;text&quot;}"/>
+          <p:cNvSpPr txBox="1"/>
+          <p:nvPr/>
+        </p:nvSpPr>
+        <p:spPr>
+          <a:xfrm rot="0" flipH="0" flipV="0">
+            <a:off x="9963150" y="2590800"/>
+            <a:ext cx="1714500" cy="142875"/>
+          </a:xfrm>
+          <a:prstGeom prst="rect"/>
+        </p:spPr>
+        <p:txBody>
+          <a:bodyPr wrap="none" lIns="0" tIns="0" rIns="0" bIns="0"/>
+          <a:p>
+            <a:pPr>
+              <a:lnSpc>
+                <a:spcPct val="100000"/>
+              </a:lnSpc>
+            </a:pPr>
+            <a:r>
+              <a:rPr lang="zh-CN" sz="900">
+                <a:solidFill>
+                  <a:srgbClr val="8B97A8"/>
+                </a:solidFill>
+                <a:latin typeface="Microsoft YaHei"/>
+                <a:ea typeface="Microsoft YaHei"/>
+              </a:rPr>
+              <a:t>整段流程（</a:t>
+            </a:r>
+            <a:r>
+              <a:rPr lang="en-US" sz="900">
+                <a:solidFill>
+                  <a:srgbClr val="8B97A8"/>
+                </a:solidFill>
+                <a:latin typeface="Microsoft YaHei"/>
+                <a:ea typeface="Microsoft YaHei"/>
+              </a:rPr>
+              <a:t xml:space="preserve">85 </a:t>
+            </a:r>
+            <a:r>
+              <a:rPr lang="zh-CN" sz="900">
+                <a:solidFill>
+                  <a:srgbClr val="8B97A8"/>
+                </a:solidFill>
+                <a:latin typeface="Microsoft YaHei"/>
+                <a:ea typeface="Microsoft YaHei"/>
+              </a:rPr>
+              <a:t>张）</a:t>
+            </a:r>
+            <a:endParaRPr/>
+          </a:p>
+        </p:txBody>
+      </p:sp>
+      <p:sp>
+        <p:nvSpPr>
+          <p:cNvPr id="215" name="" descr="{&quot;isTemplate&quot;:true,&quot;type&quot;:&quot;text&quot;}"/>
+          <p:cNvSpPr txBox="1"/>
+          <p:nvPr/>
+        </p:nvSpPr>
+        <p:spPr>
+          <a:xfrm rot="0" flipH="0" flipV="0">
+            <a:off x="9963150" y="2800350"/>
+            <a:ext cx="561975" cy="200025"/>
+          </a:xfrm>
+          <a:prstGeom prst="rect"/>
+        </p:spPr>
+        <p:txBody>
+          <a:bodyPr wrap="none" lIns="0" tIns="0" rIns="0" bIns="0"/>
+          <a:p>
+            <a:pPr>
+              <a:lnSpc>
+                <a:spcPct val="100000"/>
+              </a:lnSpc>
+            </a:pPr>
+            <a:r>
+              <a:rPr lang="en-US" sz="975">
+                <a:solidFill>
+                  <a:srgbClr val="4A5568"/>
+                </a:solidFill>
+                <a:latin typeface="Microsoft YaHei"/>
+                <a:ea typeface="Microsoft YaHei"/>
+              </a:rPr>
+              <a:t xml:space="preserve">84 </a:t>
+            </a:r>
+            <a:r>
+              <a:rPr lang="zh-CN" sz="975">
+                <a:solidFill>
+                  <a:srgbClr val="4A5568"/>
+                </a:solidFill>
+                <a:latin typeface="Microsoft YaHei"/>
+                <a:ea typeface="Microsoft YaHei"/>
+              </a:rPr>
+              <a:t>帧主体</a:t>
+            </a:r>
+            <a:endParaRPr/>
+          </a:p>
+        </p:txBody>
+      </p:sp>
+      <p:sp>
+        <p:nvSpPr>
+          <p:cNvPr id="216" name="" descr="{&quot;isTemplate&quot;:true,&quot;type&quot;:&quot;text&quot;}"/>
+          <p:cNvSpPr txBox="1"/>
+          <p:nvPr/>
+        </p:nvSpPr>
+        <p:spPr>
+          <a:xfrm rot="0" flipH="0" flipV="0">
+            <a:off x="11201400" y="2800350"/>
+            <a:ext cx="476250" cy="200025"/>
+          </a:xfrm>
+          <a:prstGeom prst="rect"/>
+        </p:spPr>
+        <p:txBody>
+          <a:bodyPr wrap="none" lIns="0" tIns="0" rIns="0" bIns="0"/>
+          <a:p>
+            <a:pPr>
+              <a:lnSpc>
+                <a:spcPct val="100000"/>
+              </a:lnSpc>
+            </a:pPr>
+            <a:r>
+              <a:rPr lang="en-US" sz="1275" b="1">
+                <a:solidFill>
+                  <a:srgbClr val="1E4FA8"/>
+                </a:solidFill>
+                <a:latin typeface="Microsoft YaHei"/>
+                <a:ea typeface="Microsoft YaHei"/>
+              </a:rPr>
+              <a:t>26.1 s</a:t>
+            </a:r>
+            <a:endParaRPr/>
+          </a:p>
+        </p:txBody>
+      </p:sp>
+      <p:sp>
+        <p:nvSpPr>
+          <p:cNvPr id="217" name="" descr="{&quot;isTemplate&quot;:true,&quot;type&quot;:&quot;text&quot;}"/>
+          <p:cNvSpPr txBox="1"/>
+          <p:nvPr/>
+        </p:nvSpPr>
+        <p:spPr>
+          <a:xfrm rot="0" flipH="0" flipV="0">
+            <a:off x="9963150" y="3038475"/>
+            <a:ext cx="495300" cy="200025"/>
+          </a:xfrm>
+          <a:prstGeom prst="rect"/>
+        </p:spPr>
+        <p:txBody>
+          <a:bodyPr wrap="none" lIns="0" tIns="0" rIns="0" bIns="0"/>
+          <a:p>
+            <a:pPr>
+              <a:lnSpc>
+                <a:spcPct val="100000"/>
+              </a:lnSpc>
+            </a:pPr>
+            <a:r>
+              <a:rPr lang="zh-CN" sz="975">
+                <a:solidFill>
+                  <a:srgbClr val="4A5568"/>
+                </a:solidFill>
+                <a:latin typeface="Microsoft YaHei"/>
+                <a:ea typeface="Microsoft YaHei"/>
+              </a:rPr>
+              <a:t>收尾重试</a:t>
+            </a:r>
+            <a:endParaRPr/>
+          </a:p>
+        </p:txBody>
+      </p:sp>
+      <p:sp>
+        <p:nvSpPr>
+          <p:cNvPr id="218" name="" descr="{&quot;isTemplate&quot;:true,&quot;type&quot;:&quot;text&quot;}"/>
+          <p:cNvSpPr txBox="1"/>
+          <p:nvPr/>
+        </p:nvSpPr>
+        <p:spPr>
+          <a:xfrm rot="0" flipH="0" flipV="0">
+            <a:off x="11201400" y="3038475"/>
+            <a:ext cx="476250" cy="200025"/>
+          </a:xfrm>
+          <a:prstGeom prst="rect"/>
+        </p:spPr>
+        <p:txBody>
+          <a:bodyPr wrap="none" lIns="0" tIns="0" rIns="0" bIns="0"/>
+          <a:p>
+            <a:pPr>
+              <a:lnSpc>
+                <a:spcPct val="100000"/>
+              </a:lnSpc>
+            </a:pPr>
+            <a:r>
+              <a:rPr lang="en-US" sz="1275" b="1">
+                <a:solidFill>
+                  <a:srgbClr val="1A2230"/>
+                </a:solidFill>
+                <a:latin typeface="Microsoft YaHei"/>
+                <a:ea typeface="Microsoft YaHei"/>
+              </a:rPr>
+              <a:t>28.4 s</a:t>
+            </a:r>
+            <a:endParaRPr/>
+          </a:p>
+        </p:txBody>
+      </p:sp>
+      <p:sp>
+        <p:nvSpPr>
+          <p:cNvPr id="219" name="" descr="{&quot;isTemplate&quot;:true,&quot;type&quot;:&quot;text&quot;}"/>
+          <p:cNvSpPr txBox="1"/>
+          <p:nvPr/>
+        </p:nvSpPr>
+        <p:spPr>
+          <a:xfrm rot="0" flipH="0" flipV="0">
+            <a:off x="9963150" y="3276600"/>
+            <a:ext cx="247650" cy="200025"/>
+          </a:xfrm>
+          <a:prstGeom prst="rect"/>
+        </p:spPr>
+        <p:txBody>
+          <a:bodyPr wrap="none" lIns="0" tIns="0" rIns="0" bIns="0"/>
+          <a:p>
+            <a:pPr>
+              <a:lnSpc>
+                <a:spcPct val="100000"/>
+              </a:lnSpc>
+            </a:pPr>
+            <a:r>
+              <a:rPr lang="zh-CN" sz="975">
+                <a:solidFill>
+                  <a:srgbClr val="4A5568"/>
+                </a:solidFill>
+                <a:latin typeface="Microsoft YaHei"/>
+                <a:ea typeface="Microsoft YaHei"/>
+              </a:rPr>
+              <a:t>全程</a:t>
+            </a:r>
+            <a:endParaRPr/>
+          </a:p>
+        </p:txBody>
+      </p:sp>
+      <p:sp>
+        <p:nvSpPr>
+          <p:cNvPr id="220" name="" descr="{&quot;isTemplate&quot;:true,&quot;type&quot;:&quot;text&quot;}"/>
+          <p:cNvSpPr txBox="1"/>
+          <p:nvPr/>
+        </p:nvSpPr>
+        <p:spPr>
+          <a:xfrm rot="0" flipH="0" flipV="0">
+            <a:off x="11201400" y="3276600"/>
+            <a:ext cx="476250" cy="200025"/>
+          </a:xfrm>
+          <a:prstGeom prst="rect"/>
+        </p:spPr>
+        <p:txBody>
+          <a:bodyPr wrap="none" lIns="0" tIns="0" rIns="0" bIns="0"/>
+          <a:p>
+            <a:pPr>
+              <a:lnSpc>
+                <a:spcPct val="100000"/>
+              </a:lnSpc>
+            </a:pPr>
+            <a:r>
+              <a:rPr lang="en-US" sz="1275" b="1">
+                <a:solidFill>
+                  <a:srgbClr val="1A2230"/>
+                </a:solidFill>
+                <a:latin typeface="Microsoft YaHei"/>
+                <a:ea typeface="Microsoft YaHei"/>
+              </a:rPr>
+              <a:t>54.5 s</a:t>
+            </a:r>
+            <a:endParaRPr/>
+          </a:p>
+        </p:txBody>
+      </p:sp>
+      <p:sp>
+        <p:nvSpPr>
+          <p:cNvPr id="221" name=""/>
+          <p:cNvSpPr/>
+          <p:nvPr/>
+        </p:nvSpPr>
+        <p:spPr>
+          <a:xfrm rot="0" flipH="0" flipV="0">
+            <a:off x="9963150" y="3571875"/>
+            <a:ext cx="1714500" cy="9525"/>
+          </a:xfrm>
+          <a:prstGeom prst="rect">
+            <a:avLst/>
+          </a:prstGeom>
+          <a:solidFill>
+            <a:srgbClr val="D6DCE5"/>
+          </a:solidFill>
+          <a:ln/>
+        </p:spPr>
+        <p:txBody>
+          <a:bodyPr/>
+          <a:p/>
+        </p:txBody>
+      </p:sp>
+      <p:sp>
+        <p:nvSpPr>
+          <p:cNvPr id="222" name="" descr="{&quot;isTemplate&quot;:true,&quot;type&quot;:&quot;text&quot;}"/>
+          <p:cNvSpPr txBox="1"/>
+          <p:nvPr/>
+        </p:nvSpPr>
+        <p:spPr>
+          <a:xfrm rot="0" flipH="0" flipV="0">
+            <a:off x="9963150" y="3657600"/>
+            <a:ext cx="1714500" cy="142875"/>
+          </a:xfrm>
+          <a:prstGeom prst="rect"/>
+        </p:spPr>
+        <p:txBody>
+          <a:bodyPr wrap="none" lIns="0" tIns="0" rIns="0" bIns="0"/>
+          <a:p>
+            <a:pPr>
+              <a:lnSpc>
+                <a:spcPct val="100000"/>
+              </a:lnSpc>
+            </a:pPr>
+            <a:r>
+              <a:rPr lang="zh-CN" sz="900">
+                <a:solidFill>
+                  <a:srgbClr val="8B97A8"/>
+                </a:solidFill>
+                <a:latin typeface="Microsoft YaHei"/>
+                <a:ea typeface="Microsoft YaHei"/>
+              </a:rPr>
+              <a:t>与论文对照（论文</a:t>
+            </a:r>
+            <a:r>
+              <a:rPr lang="en-US" sz="900">
+                <a:solidFill>
+                  <a:srgbClr val="8B97A8"/>
+                </a:solidFill>
+                <a:latin typeface="Microsoft YaHei"/>
+                <a:ea typeface="Microsoft YaHei"/>
+              </a:rPr>
+              <a:t xml:space="preserve"> · </a:t>
+            </a:r>
+            <a:r>
+              <a:rPr lang="zh-CN" sz="900">
+                <a:solidFill>
+                  <a:srgbClr val="8B97A8"/>
+                </a:solidFill>
+                <a:latin typeface="Microsoft YaHei"/>
+                <a:ea typeface="Microsoft YaHei"/>
+              </a:rPr>
+              <a:t>本次）</a:t>
+            </a:r>
+            <a:endParaRPr/>
+          </a:p>
+        </p:txBody>
+      </p:sp>
+      <p:sp>
+        <p:nvSpPr>
+          <p:cNvPr id="223" name="" descr="{&quot;isTemplate&quot;:true,&quot;type&quot;:&quot;text&quot;}"/>
+          <p:cNvSpPr txBox="1"/>
+          <p:nvPr/>
+        </p:nvSpPr>
+        <p:spPr>
+          <a:xfrm rot="0" flipH="0" flipV="0">
+            <a:off x="9963150" y="3857625"/>
+            <a:ext cx="247650" cy="171450"/>
+          </a:xfrm>
+          <a:prstGeom prst="rect"/>
+        </p:spPr>
+        <p:txBody>
+          <a:bodyPr wrap="none" lIns="0" tIns="0" rIns="0" bIns="0"/>
+          <a:p>
+            <a:pPr>
+              <a:lnSpc>
+                <a:spcPct val="100000"/>
+              </a:lnSpc>
+            </a:pPr>
+            <a:r>
+              <a:rPr lang="zh-CN" sz="975">
+                <a:solidFill>
+                  <a:srgbClr val="4A5568"/>
+                </a:solidFill>
+                <a:latin typeface="Microsoft YaHei"/>
+                <a:ea typeface="Microsoft YaHei"/>
+              </a:rPr>
+              <a:t>平均</a:t>
+            </a:r>
+            <a:endParaRPr/>
+          </a:p>
+        </p:txBody>
+      </p:sp>
+      <p:sp>
+        <p:nvSpPr>
+          <p:cNvPr id="224" name="" descr="{&quot;isTemplate&quot;:true,&quot;type&quot;:&quot;text&quot;}"/>
+          <p:cNvSpPr txBox="1"/>
+          <p:nvPr/>
+        </p:nvSpPr>
+        <p:spPr>
+          <a:xfrm rot="0" flipH="0" flipV="0">
+            <a:off x="10601325" y="3857625"/>
+            <a:ext cx="1076325" cy="171450"/>
+          </a:xfrm>
+          <a:prstGeom prst="rect"/>
+        </p:spPr>
+        <p:txBody>
+          <a:bodyPr wrap="none" lIns="0" tIns="0" rIns="0" bIns="0"/>
+          <a:p>
+            <a:pPr>
+              <a:lnSpc>
+                <a:spcPct val="100000"/>
+              </a:lnSpc>
+            </a:pPr>
+            <a:r>
+              <a:rPr lang="en-US" sz="1088">
+                <a:solidFill>
+                  <a:srgbClr val="1A2230"/>
+                </a:solidFill>
+                <a:latin typeface="Microsoft YaHei"/>
+                <a:ea typeface="Microsoft YaHei"/>
+              </a:rPr>
+              <a:t xml:space="preserve">324 ms · </a:t>
+            </a:r>
+            <a:r>
+              <a:rPr lang="en-US" sz="1088">
+                <a:solidFill>
+                  <a:srgbClr val="1A2230"/>
+                </a:solidFill>
+                <a:latin typeface="Microsoft YaHei"/>
+                <a:ea typeface="Microsoft YaHei"/>
+              </a:rPr>
+              <a:t>311 ms</a:t>
+            </a:r>
+            <a:endParaRPr/>
+          </a:p>
+        </p:txBody>
+      </p:sp>
+      <p:sp>
+        <p:nvSpPr>
+          <p:cNvPr id="225" name="" descr="{&quot;isTemplate&quot;:true,&quot;type&quot;:&quot;text&quot;}"/>
+          <p:cNvSpPr txBox="1"/>
+          <p:nvPr/>
+        </p:nvSpPr>
+        <p:spPr>
+          <a:xfrm rot="0" flipH="0" flipV="0">
+            <a:off x="9963150" y="4057650"/>
+            <a:ext cx="247650" cy="171450"/>
+          </a:xfrm>
+          <a:prstGeom prst="rect"/>
+        </p:spPr>
+        <p:txBody>
+          <a:bodyPr wrap="none" lIns="0" tIns="0" rIns="0" bIns="0"/>
+          <a:p>
+            <a:pPr>
+              <a:lnSpc>
+                <a:spcPct val="100000"/>
+              </a:lnSpc>
+            </a:pPr>
+            <a:r>
+              <a:rPr lang="zh-CN" sz="975">
+                <a:solidFill>
+                  <a:srgbClr val="4A5568"/>
+                </a:solidFill>
+                <a:latin typeface="Microsoft YaHei"/>
+                <a:ea typeface="Microsoft YaHei"/>
+              </a:rPr>
+              <a:t>峰值</a:t>
+            </a:r>
+            <a:endParaRPr/>
+          </a:p>
+        </p:txBody>
+      </p:sp>
+      <p:sp>
+        <p:nvSpPr>
+          <p:cNvPr id="226" name="" descr="{&quot;isTemplate&quot;:true,&quot;type&quot;:&quot;text&quot;}"/>
+          <p:cNvSpPr txBox="1"/>
+          <p:nvPr/>
+        </p:nvSpPr>
+        <p:spPr>
+          <a:xfrm rot="0" flipH="0" flipV="0">
+            <a:off x="10696575" y="4057650"/>
+            <a:ext cx="981075" cy="171450"/>
+          </a:xfrm>
+          <a:prstGeom prst="rect"/>
+        </p:spPr>
+        <p:txBody>
+          <a:bodyPr wrap="none" lIns="0" tIns="0" rIns="0" bIns="0"/>
+          <a:p>
+            <a:pPr>
+              <a:lnSpc>
+                <a:spcPct val="100000"/>
+              </a:lnSpc>
+            </a:pPr>
+            <a:r>
+              <a:rPr lang="en-US" sz="1088">
+                <a:solidFill>
+                  <a:srgbClr val="1A2230"/>
+                </a:solidFill>
+                <a:latin typeface="Microsoft YaHei"/>
+                <a:ea typeface="Microsoft YaHei"/>
+              </a:rPr>
+              <a:t xml:space="preserve">386 ms · </a:t>
+            </a:r>
+            <a:r>
+              <a:rPr lang="en-US" sz="1088">
+                <a:solidFill>
+                  <a:srgbClr val="1A2230"/>
+                </a:solidFill>
+                <a:latin typeface="Microsoft YaHei"/>
+                <a:ea typeface="Microsoft YaHei"/>
+              </a:rPr>
+              <a:t>1.72 s</a:t>
+            </a:r>
+            <a:endParaRPr/>
+          </a:p>
+        </p:txBody>
+      </p:sp>
+      <p:sp>
+        <p:nvSpPr>
+          <p:cNvPr id="227" name="" descr="{&quot;isTemplate&quot;:true,&quot;type&quot;:&quot;text&quot;}"/>
+          <p:cNvSpPr txBox="1"/>
+          <p:nvPr/>
+        </p:nvSpPr>
+        <p:spPr>
+          <a:xfrm rot="0" flipH="0" flipV="0">
+            <a:off x="9963150" y="4257675"/>
+            <a:ext cx="371475" cy="171450"/>
+          </a:xfrm>
+          <a:prstGeom prst="rect"/>
+        </p:spPr>
+        <p:txBody>
+          <a:bodyPr wrap="none" lIns="0" tIns="0" rIns="0" bIns="0"/>
+          <a:p>
+            <a:pPr>
+              <a:lnSpc>
+                <a:spcPct val="100000"/>
+              </a:lnSpc>
+            </a:pPr>
+            <a:r>
+              <a:rPr lang="zh-CN" sz="975">
+                <a:solidFill>
+                  <a:srgbClr val="4A5568"/>
+                </a:solidFill>
+                <a:latin typeface="Microsoft YaHei"/>
+                <a:ea typeface="Microsoft YaHei"/>
+              </a:rPr>
+              <a:t>全流程</a:t>
+            </a:r>
+            <a:endParaRPr/>
+          </a:p>
+        </p:txBody>
+      </p:sp>
+      <p:sp>
+        <p:nvSpPr>
+          <p:cNvPr id="228" name="" descr="{&quot;isTemplate&quot;:true,&quot;type&quot;:&quot;text&quot;}"/>
+          <p:cNvSpPr txBox="1"/>
+          <p:nvPr/>
+        </p:nvSpPr>
+        <p:spPr>
+          <a:xfrm rot="0" flipH="0" flipV="0">
+            <a:off x="10391775" y="4257675"/>
+            <a:ext cx="1285875" cy="171450"/>
+          </a:xfrm>
+          <a:prstGeom prst="rect"/>
+        </p:spPr>
+        <p:txBody>
+          <a:bodyPr wrap="none" lIns="0" tIns="0" rIns="0" bIns="0"/>
+          <a:p>
+            <a:pPr>
+              <a:lnSpc>
+                <a:spcPct val="100000"/>
+              </a:lnSpc>
+            </a:pPr>
+            <a:r>
+              <a:rPr lang="en-US" sz="1088">
+                <a:solidFill>
+                  <a:srgbClr val="1A2230"/>
+                </a:solidFill>
+                <a:latin typeface="Microsoft YaHei"/>
+                <a:ea typeface="Microsoft YaHei"/>
+              </a:rPr>
+              <a:t xml:space="preserve">8 min 50 s → </a:t>
+            </a:r>
+            <a:r>
+              <a:rPr lang="en-US" sz="1088">
+                <a:solidFill>
+                  <a:srgbClr val="1A2230"/>
+                </a:solidFill>
+                <a:latin typeface="Microsoft YaHei"/>
+                <a:ea typeface="Microsoft YaHei"/>
+              </a:rPr>
+              <a:t>54.5 s</a:t>
+            </a:r>
+            <a:endParaRPr/>
+          </a:p>
+        </p:txBody>
+      </p:sp>
+      <p:sp>
+        <p:nvSpPr>
+          <p:cNvPr id="229" name="" descr="{&quot;isTemplate&quot;:true,&quot;type&quot;:&quot;text&quot;}"/>
+          <p:cNvSpPr txBox="1"/>
+          <p:nvPr/>
+        </p:nvSpPr>
+        <p:spPr>
+          <a:xfrm rot="0" flipH="0" flipV="0">
+            <a:off x="9963150" y="4514850"/>
+            <a:ext cx="1714500" cy="495300"/>
           </a:xfrm>
           <a:prstGeom prst="rect"/>
         </p:spPr>
@@ -8824,11 +10239,172 @@
           <a:p>
             <a:pPr>
               <a:lnSpc>
-                <a:spcPct val="140000"/>
-              </a:lnSpc>
-            </a:pPr>
-            <a:r>
-              <a:rPr lang="zh-CN" sz="1313">
+                <a:spcPct val="130000"/>
+              </a:lnSpc>
+            </a:pPr>
+            <a:r>
+              <a:rPr lang="zh-CN" sz="825">
+                <a:solidFill>
+                  <a:srgbClr val="8B97A8"/>
+                </a:solidFill>
+                <a:latin typeface="Microsoft YaHei"/>
+                <a:ea typeface="Microsoft YaHei"/>
+              </a:rPr>
+              <a:t>像素量为论文典型场景约</a:t>
+            </a:r>
+            <a:r>
+              <a:rPr lang="en-US" sz="825">
+                <a:solidFill>
+                  <a:srgbClr val="8B97A8"/>
+                </a:solidFill>
+                <a:latin typeface="Microsoft YaHei"/>
+                <a:ea typeface="Microsoft YaHei"/>
+              </a:rPr>
+              <a:t xml:space="preserve"> 4 </a:t>
+            </a:r>
+            <a:r>
+              <a:rPr lang="zh-CN" sz="825">
+                <a:solidFill>
+                  <a:srgbClr val="8B97A8"/>
+                </a:solidFill>
+                <a:latin typeface="Microsoft YaHei"/>
+                <a:ea typeface="Microsoft YaHei"/>
+              </a:rPr>
+              <a:t>倍，故峰值更高；离线一栏为</a:t>
+            </a:r>
+            <a:r>
+              <a:rPr lang="en-US" sz="825">
+                <a:solidFill>
+                  <a:srgbClr val="8B97A8"/>
+                </a:solidFill>
+                <a:latin typeface="Microsoft YaHei"/>
+                <a:ea typeface="Microsoft YaHei"/>
+              </a:rPr>
+              <a:t xml:space="preserve"> COLMAP</a:t>
+            </a:r>
+            <a:r>
+              <a:rPr lang="zh-CN" sz="825">
+                <a:solidFill>
+                  <a:srgbClr val="8B97A8"/>
+                </a:solidFill>
+                <a:latin typeface="Microsoft YaHei"/>
+                <a:ea typeface="Microsoft YaHei"/>
+              </a:rPr>
+              <a:t>＋</a:t>
+            </a:r>
+            <a:r>
+              <a:rPr lang="en-US" sz="825">
+                <a:solidFill>
+                  <a:srgbClr val="8B97A8"/>
+                </a:solidFill>
+                <a:latin typeface="Microsoft YaHei"/>
+                <a:ea typeface="Microsoft YaHei"/>
+              </a:rPr>
+              <a:t xml:space="preserve">3DGS </a:t>
+            </a:r>
+            <a:r>
+              <a:rPr lang="zh-CN" sz="825">
+                <a:solidFill>
+                  <a:srgbClr val="8B97A8"/>
+                </a:solidFill>
+                <a:latin typeface="Microsoft YaHei"/>
+                <a:ea typeface="Microsoft YaHei"/>
+              </a:rPr>
+              <a:t>同场景。</a:t>
+            </a:r>
+            <a:endParaRPr/>
+          </a:p>
+        </p:txBody>
+      </p:sp>
+      <p:sp>
+        <p:nvSpPr>
+          <p:cNvPr id="230" name=""/>
+          <p:cNvSpPr/>
+          <p:nvPr/>
+        </p:nvSpPr>
+        <p:spPr>
+          <a:xfrm rot="0" flipH="0" flipV="0">
+            <a:off x="428625" y="5800725"/>
+            <a:ext cx="11430000" cy="695325"/>
+          </a:xfrm>
+          <a:prstGeom prst="rect">
+            <a:avLst/>
+          </a:prstGeom>
+          <a:solidFill>
+            <a:srgbClr val="F0F5FC"/>
+          </a:solidFill>
+          <a:ln/>
+        </p:spPr>
+        <p:txBody>
+          <a:bodyPr/>
+          <a:p/>
+        </p:txBody>
+      </p:sp>
+      <p:sp>
+        <p:nvSpPr>
+          <p:cNvPr id="231" name=""/>
+          <p:cNvSpPr/>
+          <p:nvPr/>
+        </p:nvSpPr>
+        <p:spPr>
+          <a:xfrm rot="0" flipH="0" flipV="0">
+            <a:off x="381000" y="5800725"/>
+            <a:ext cx="11477625" cy="695325"/>
+          </a:xfrm>
+          <a:custGeom>
+            <a:pathLst>
+              <a:path w="1205" h="73">
+                <a:moveTo>
+                  <a:pt x="0" y="0"/>
+                </a:moveTo>
+                <a:lnTo>
+                  <a:pt x="5" y="0"/>
+                </a:lnTo>
+                <a:lnTo>
+                  <a:pt x="5" y="73"/>
+                </a:lnTo>
+                <a:lnTo>
+                  <a:pt x="0" y="73"/>
+                </a:lnTo>
+                <a:close/>
+              </a:path>
+            </a:pathLst>
+          </a:custGeom>
+          <a:solidFill>
+            <a:srgbClr val="1E4FA8"/>
+          </a:solidFill>
+          <a:ln/>
+        </p:spPr>
+        <p:txBody>
+          <a:bodyPr/>
+          <a:p/>
+        </p:txBody>
+      </p:sp>
+      <p:sp>
+        <p:nvSpPr>
+          <p:cNvPr id="232" name="" descr="{&quot;isTemplate&quot;:true,&quot;type&quot;:&quot;text&quot;}"/>
+          <p:cNvSpPr txBox="1"/>
+          <p:nvPr/>
+        </p:nvSpPr>
+        <p:spPr>
+          <a:xfrm rot="0" flipH="0" flipV="0">
+            <a:off x="561975" y="5876925"/>
+            <a:ext cx="11115675" cy="542925"/>
+          </a:xfrm>
+          <a:prstGeom prst="rect"/>
+        </p:spPr>
+        <p:txBody>
+          <a:bodyPr wrap="square" lIns="0" tIns="0" rIns="0" bIns="0">
+            <a:normAutofit/>
+          </a:bodyPr>
+          <a:p>
+            <a:pPr>
+              <a:lnSpc>
+                <a:spcPct val="138000"/>
+              </a:lnSpc>
+            </a:pPr>
+            <a:r>
+              <a:rPr lang="zh-CN" sz="1275">
                 <a:solidFill>
                   <a:srgbClr val="1A2230"/>
                 </a:solidFill>
@@ -8838,7 +10414,7 @@
               <a:t>第</a:t>
             </a:r>
             <a:r>
-              <a:rPr lang="en-US" sz="1313">
+              <a:rPr lang="en-US" sz="1275">
                 <a:solidFill>
                   <a:srgbClr val="1A2230"/>
                 </a:solidFill>
@@ -8848,17 +10424,17 @@
               <a:t xml:space="preserve"> 36 </a:t>
             </a:r>
             <a:r>
-              <a:rPr lang="zh-CN" sz="1313">
-                <a:solidFill>
-                  <a:srgbClr val="1A2230"/>
-                </a:solidFill>
-                <a:latin typeface="Microsoft YaHei"/>
-                <a:ea typeface="Microsoft YaHei"/>
-              </a:rPr>
-              <a:t>张进来时只有</a:t>
-            </a:r>
-            <a:r>
-              <a:rPr lang="en-US" sz="1313">
+              <a:rPr lang="zh-CN" sz="1275">
+                <a:solidFill>
+                  <a:srgbClr val="1A2230"/>
+                </a:solidFill>
+                <a:latin typeface="Microsoft YaHei"/>
+                <a:ea typeface="Microsoft YaHei"/>
+              </a:rPr>
+              <a:t>张在</a:t>
+            </a:r>
+            <a:r>
+              <a:rPr lang="en-US" sz="1275">
                 <a:solidFill>
                   <a:srgbClr val="1A2230"/>
                 </a:solidFill>
@@ -8868,37 +10444,57 @@
               <a:t xml:space="preserve"> </a:t>
             </a:r>
             <a:r>
-              <a:rPr lang="en-US" sz="1313">
-                <a:solidFill>
-                  <a:srgbClr val="1A2230"/>
-                </a:solidFill>
-                <a:latin typeface="Microsoft YaHei"/>
-                <a:ea typeface="Microsoft YaHei"/>
-              </a:rPr>
-              <a:t xml:space="preserve">8 </a:t>
-            </a:r>
-            <a:r>
-              <a:rPr lang="zh-CN" sz="1313">
-                <a:solidFill>
-                  <a:srgbClr val="1A2230"/>
-                </a:solidFill>
-                <a:latin typeface="Microsoft YaHei"/>
-                <a:ea typeface="Microsoft YaHei"/>
-              </a:rPr>
-              <a:t>个关键帧</a:t>
-            </a:r>
-            <a:r>
-              <a:rPr lang="zh-CN" sz="1313">
-                <a:solidFill>
-                  <a:srgbClr val="1A2230"/>
-                </a:solidFill>
-                <a:latin typeface="Microsoft YaHei"/>
-                <a:ea typeface="Microsoft YaHei"/>
-              </a:rPr>
-              <a:t>，画面还是一团噪点——但</a:t>
-            </a:r>
-            <a:r>
-              <a:rPr lang="zh-CN" sz="1313">
+              <a:rPr lang="en-US" sz="1275">
+                <a:solidFill>
+                  <a:srgbClr val="1A2230"/>
+                </a:solidFill>
+                <a:latin typeface="Microsoft YaHei"/>
+                <a:ea typeface="Microsoft YaHei"/>
+              </a:rPr>
+              <a:t>4.4 s</a:t>
+            </a:r>
+            <a:r>
+              <a:rPr lang="en-US" sz="1275">
+                <a:solidFill>
+                  <a:srgbClr val="1A2230"/>
+                </a:solidFill>
+                <a:latin typeface="Microsoft YaHei"/>
+                <a:ea typeface="Microsoft YaHei"/>
+              </a:rPr>
+              <a:t xml:space="preserve"> </a:t>
+            </a:r>
+            <a:r>
+              <a:rPr lang="zh-CN" sz="1275">
+                <a:solidFill>
+                  <a:srgbClr val="1A2230"/>
+                </a:solidFill>
+                <a:latin typeface="Microsoft YaHei"/>
+                <a:ea typeface="Microsoft YaHei"/>
+              </a:rPr>
+              <a:t>就建到</a:t>
+            </a:r>
+            <a:r>
+              <a:rPr lang="en-US" sz="1275">
+                <a:solidFill>
+                  <a:srgbClr val="1A2230"/>
+                </a:solidFill>
+                <a:latin typeface="Microsoft YaHei"/>
+                <a:ea typeface="Microsoft YaHei"/>
+              </a:rPr>
+              <a:t xml:space="preserve"> 8 </a:t>
+            </a:r>
+            <a:r>
+              <a:rPr lang="zh-CN" sz="1275">
+                <a:solidFill>
+                  <a:srgbClr val="1A2230"/>
+                </a:solidFill>
+                <a:latin typeface="Microsoft YaHei"/>
+                <a:ea typeface="Microsoft YaHei"/>
+              </a:rPr>
+              <a:t>个关键帧——画面还是噪点，但</a:t>
+            </a:r>
+            <a:r>
+              <a:rPr lang="zh-CN" sz="1275">
                 <a:solidFill>
                   <a:srgbClr val="1A2230"/>
                 </a:solidFill>
@@ -8908,37 +10504,17 @@
               <a:t>哪块没拍到已经看得出来</a:t>
             </a:r>
             <a:r>
-              <a:rPr lang="zh-CN" sz="1313">
-                <a:solidFill>
-                  <a:srgbClr val="1A2230"/>
-                </a:solidFill>
-                <a:latin typeface="Microsoft YaHei"/>
-                <a:ea typeface="Microsoft YaHei"/>
-              </a:rPr>
-              <a:t>，这正是</a:t>
-            </a:r>
-            <a:r>
-              <a:rPr lang="en-US" sz="1313">
-                <a:solidFill>
-                  <a:srgbClr val="1A2230"/>
-                </a:solidFill>
-                <a:latin typeface="Microsoft YaHei"/>
-                <a:ea typeface="Microsoft YaHei"/>
-              </a:rPr>
-              <a:t xml:space="preserve"> immediate </a:t>
-            </a:r>
-            <a:r>
-              <a:rPr lang="zh-CN" sz="1313">
-                <a:solidFill>
-                  <a:srgbClr val="1A2230"/>
-                </a:solidFill>
-                <a:latin typeface="Microsoft YaHei"/>
-                <a:ea typeface="Microsoft YaHei"/>
-              </a:rPr>
-              <a:t>的用处；第</a:t>
-            </a:r>
-            <a:r>
-              <a:rPr lang="en-US" sz="1313">
+              <a:rPr lang="zh-CN" sz="1275">
+                <a:solidFill>
+                  <a:srgbClr val="1A2230"/>
+                </a:solidFill>
+                <a:latin typeface="Microsoft YaHei"/>
+                <a:ea typeface="Microsoft YaHei"/>
+              </a:rPr>
+              <a:t>；第</a:t>
+            </a:r>
+            <a:r>
+              <a:rPr lang="en-US" sz="1275">
                 <a:solidFill>
                   <a:srgbClr val="1A2230"/>
                 </a:solidFill>
@@ -8948,17 +10524,37 @@
               <a:t xml:space="preserve"> 60 </a:t>
             </a:r>
             <a:r>
-              <a:rPr lang="zh-CN" sz="1313">
-                <a:solidFill>
-                  <a:srgbClr val="1A2230"/>
-                </a:solidFill>
-                <a:latin typeface="Microsoft YaHei"/>
-                <a:ea typeface="Microsoft YaHei"/>
-              </a:rPr>
-              <a:t>张跨过</a:t>
-            </a:r>
-            <a:r>
-              <a:rPr lang="en-US" sz="1313">
+              <a:rPr lang="zh-CN" sz="1275">
+                <a:solidFill>
+                  <a:srgbClr val="1A2230"/>
+                </a:solidFill>
+                <a:latin typeface="Microsoft YaHei"/>
+                <a:ea typeface="Microsoft YaHei"/>
+              </a:rPr>
+              <a:t>张（</a:t>
+            </a:r>
+            <a:r>
+              <a:rPr lang="en-US" sz="1275">
+                <a:solidFill>
+                  <a:srgbClr val="1A2230"/>
+                </a:solidFill>
+                <a:latin typeface="Microsoft YaHei"/>
+                <a:ea typeface="Microsoft YaHei"/>
+              </a:rPr>
+              <a:t>12.0 s</a:t>
+            </a:r>
+            <a:r>
+              <a:rPr lang="zh-CN" sz="1275">
+                <a:solidFill>
+                  <a:srgbClr val="1A2230"/>
+                </a:solidFill>
+                <a:latin typeface="Microsoft YaHei"/>
+                <a:ea typeface="Microsoft YaHei"/>
+              </a:rPr>
+              <a:t>）跨过</a:t>
+            </a:r>
+            <a:r>
+              <a:rPr lang="en-US" sz="1275">
                 <a:solidFill>
                   <a:srgbClr val="1A2230"/>
                 </a:solidFill>
@@ -8968,17 +10564,17 @@
               <a:t xml:space="preserve"> 18 </a:t>
             </a:r>
             <a:r>
-              <a:rPr lang="zh-CN" sz="1313">
-                <a:solidFill>
-                  <a:srgbClr val="1A2230"/>
-                </a:solidFill>
-                <a:latin typeface="Microsoft YaHei"/>
-                <a:ea typeface="Microsoft YaHei"/>
-              </a:rPr>
-              <a:t>个关键帧后陡然清晰，第</a:t>
-            </a:r>
-            <a:r>
-              <a:rPr lang="en-US" sz="1313">
+              <a:rPr lang="zh-CN" sz="1275">
+                <a:solidFill>
+                  <a:srgbClr val="1A2230"/>
+                </a:solidFill>
+                <a:latin typeface="Microsoft YaHei"/>
+                <a:ea typeface="Microsoft YaHei"/>
+              </a:rPr>
+              <a:t>个关键帧陡然清晰；第</a:t>
+            </a:r>
+            <a:r>
+              <a:rPr lang="en-US" sz="1275">
                 <a:solidFill>
                   <a:srgbClr val="1A2230"/>
                 </a:solidFill>
@@ -8988,27 +10584,37 @@
               <a:t xml:space="preserve"> 84 </a:t>
             </a:r>
             <a:r>
-              <a:rPr lang="zh-CN" sz="1313">
-                <a:solidFill>
-                  <a:srgbClr val="1A2230"/>
-                </a:solidFill>
-                <a:latin typeface="Microsoft YaHei"/>
-                <a:ea typeface="Microsoft YaHei"/>
-              </a:rPr>
-              <a:t>张</a:t>
-            </a:r>
-            <a:r>
-              <a:rPr lang="en-US" sz="1313">
-                <a:solidFill>
-                  <a:srgbClr val="1A2230"/>
-                </a:solidFill>
-                <a:latin typeface="Microsoft YaHei"/>
-                <a:ea typeface="Microsoft YaHei"/>
-              </a:rPr>
-              <a:t xml:space="preserve"> </a:t>
-            </a:r>
-            <a:r>
-              <a:rPr lang="en-US" sz="1313">
+              <a:rPr lang="zh-CN" sz="1275">
+                <a:solidFill>
+                  <a:srgbClr val="1A2230"/>
+                </a:solidFill>
+                <a:latin typeface="Microsoft YaHei"/>
+                <a:ea typeface="Microsoft YaHei"/>
+              </a:rPr>
+              <a:t>张（</a:t>
+            </a:r>
+            <a:r>
+              <a:rPr lang="en-US" sz="1275">
+                <a:solidFill>
+                  <a:srgbClr val="1A2230"/>
+                </a:solidFill>
+                <a:latin typeface="Microsoft YaHei"/>
+                <a:ea typeface="Microsoft YaHei"/>
+              </a:rPr>
+              <a:t>26.1 s</a:t>
+            </a:r>
+            <a:r>
+              <a:rPr lang="zh-CN" sz="1275">
+                <a:solidFill>
+                  <a:srgbClr val="1A2230"/>
+                </a:solidFill>
+                <a:latin typeface="Microsoft YaHei"/>
+                <a:ea typeface="Microsoft YaHei"/>
+              </a:rPr>
+              <a:t>）</a:t>
+            </a:r>
+            <a:r>
+              <a:rPr lang="en-US" sz="1275">
                 <a:solidFill>
                   <a:srgbClr val="1A2230"/>
                 </a:solidFill>
@@ -9018,32 +10624,62 @@
               <a:t xml:space="preserve">81 </a:t>
             </a:r>
             <a:r>
-              <a:rPr lang="zh-CN" sz="1313">
-                <a:solidFill>
-                  <a:srgbClr val="1A2230"/>
-                </a:solidFill>
-                <a:latin typeface="Microsoft YaHei"/>
-                <a:ea typeface="Microsoft YaHei"/>
-              </a:rPr>
-              <a:t>个关键帧</a:t>
-            </a:r>
-            <a:r>
-              <a:rPr lang="zh-CN" sz="1313">
-                <a:solidFill>
-                  <a:srgbClr val="1A2230"/>
-                </a:solidFill>
-                <a:latin typeface="Microsoft YaHei"/>
-                <a:ea typeface="Microsoft YaHei"/>
-              </a:rPr>
-              <a:t>、噪点收净。</a:t>
-            </a:r>
-            <a:endParaRPr/>
-          </a:p>
-        </p:txBody>
-      </p:sp>
-      <p:sp>
-        <p:nvSpPr>
-          <p:cNvPr id="182" name="" descr="{&quot;isTemplate&quot;:true,&quot;type&quot;:&quot;text&quot;}"/>
+              <a:rPr lang="zh-CN" sz="1275">
+                <a:solidFill>
+                  <a:srgbClr val="1A2230"/>
+                </a:solidFill>
+                <a:latin typeface="Microsoft YaHei"/>
+                <a:ea typeface="Microsoft YaHei"/>
+              </a:rPr>
+              <a:t>个关键帧、噪点收净。之后</a:t>
+            </a:r>
+            <a:r>
+              <a:rPr lang="en-US" sz="1275">
+                <a:solidFill>
+                  <a:srgbClr val="1A2230"/>
+                </a:solidFill>
+                <a:latin typeface="Microsoft YaHei"/>
+                <a:ea typeface="Microsoft YaHei"/>
+              </a:rPr>
+              <a:t xml:space="preserve"> 28 </a:t>
+            </a:r>
+            <a:r>
+              <a:rPr lang="zh-CN" sz="1275">
+                <a:solidFill>
+                  <a:srgbClr val="1A2230"/>
+                </a:solidFill>
+                <a:latin typeface="Microsoft YaHei"/>
+                <a:ea typeface="Microsoft YaHei"/>
+              </a:rPr>
+              <a:t>秒只</a:t>
+            </a:r>
+            <a:r>
+              <a:rPr lang="zh-CN" sz="1275">
+                <a:solidFill>
+                  <a:srgbClr val="1A2230"/>
+                </a:solidFill>
+                <a:latin typeface="Microsoft YaHei"/>
+                <a:ea typeface="Microsoft YaHei"/>
+              </a:rPr>
+              <a:t>重试搁置帧</a:t>
+            </a:r>
+            <a:r>
+              <a:rPr lang="zh-CN" sz="1275">
+                <a:solidFill>
+                  <a:srgbClr val="1A2230"/>
+                </a:solidFill>
+                <a:latin typeface="Microsoft YaHei"/>
+                <a:ea typeface="Microsoft YaHei"/>
+              </a:rPr>
+              <a:t>，不影响边拍边看。</a:t>
+            </a:r>
+            <a:endParaRPr/>
+          </a:p>
+        </p:txBody>
+      </p:sp>
+      <p:sp>
+        <p:nvSpPr>
+          <p:cNvPr id="233" name="" descr="{&quot;isTemplate&quot;:true,&quot;type&quot;:&quot;text&quot;}"/>
           <p:cNvSpPr txBox="1"/>
           <p:nvPr/>
         </p:nvSpPr>
@@ -9063,164 +10699,154 @@
               </a:lnSpc>
             </a:pPr>
             <a:r>
-              <a:rPr lang="zh-CN" sz="938">
+              <a:rPr lang="zh-CN" sz="900">
                 <a:solidFill>
                   <a:srgbClr val="8B97A8"/>
                 </a:solidFill>
                 <a:latin typeface="Microsoft YaHei"/>
                 <a:ea typeface="Microsoft YaHei"/>
               </a:rPr>
-              <a:t>每一格都是那一帧处理完立刻渲染的，不用等全部拍完。</a:t>
-            </a:r>
-            <a:r>
-              <a:rPr lang="zh-CN" sz="938">
+              <a:t>逐帧打点实测（纯净运行，无写盘开销）：</a:t>
+            </a:r>
+            <a:r>
+              <a:rPr lang="en-US" sz="900">
                 <a:solidFill>
                   <a:srgbClr val="8B97A8"/>
                 </a:solidFill>
                 <a:latin typeface="Microsoft YaHei"/>
                 <a:ea typeface="Microsoft YaHei"/>
               </a:rPr>
-              <a:t>快照由官方</a:t>
-            </a:r>
-            <a:r>
-              <a:rPr lang="en-US" sz="938">
+              <a:t xml:space="preserve">84 </a:t>
+            </a:r>
+            <a:r>
+              <a:rPr lang="zh-CN" sz="900">
                 <a:solidFill>
                   <a:srgbClr val="8B97A8"/>
                 </a:solidFill>
                 <a:latin typeface="Microsoft YaHei"/>
                 <a:ea typeface="Microsoft YaHei"/>
               </a:rPr>
+              <a:t>帧主体</a:t>
+            </a:r>
+            <a:r>
+              <a:rPr lang="en-US" sz="900">
+                <a:solidFill>
+                  <a:srgbClr val="8B97A8"/>
+                </a:solidFill>
+                <a:latin typeface="Microsoft YaHei"/>
+                <a:ea typeface="Microsoft YaHei"/>
+              </a:rPr>
+              <a:t xml:space="preserve"> 26.1 s</a:t>
+            </a:r>
+            <a:r>
+              <a:rPr lang="zh-CN" sz="900">
+                <a:solidFill>
+                  <a:srgbClr val="8B97A8"/>
+                </a:solidFill>
+                <a:latin typeface="Microsoft YaHei"/>
+                <a:ea typeface="Microsoft YaHei"/>
+              </a:rPr>
+              <a:t>；单帧中位</a:t>
+            </a:r>
+            <a:r>
+              <a:rPr lang="en-US" sz="900">
+                <a:solidFill>
+                  <a:srgbClr val="8B97A8"/>
+                </a:solidFill>
+                <a:latin typeface="Microsoft YaHei"/>
+                <a:ea typeface="Microsoft YaHei"/>
+              </a:rPr>
+              <a:t xml:space="preserve"> 87 ms</a:t>
+            </a:r>
+            <a:r>
+              <a:rPr lang="zh-CN" sz="900">
+                <a:solidFill>
+                  <a:srgbClr val="8B97A8"/>
+                </a:solidFill>
+                <a:latin typeface="Microsoft YaHei"/>
+                <a:ea typeface="Microsoft YaHei"/>
+              </a:rPr>
+              <a:t>、</a:t>
+            </a:r>
+            <a:r>
+              <a:rPr lang="en-US" sz="900">
+                <a:solidFill>
+                  <a:srgbClr val="8B97A8"/>
+                </a:solidFill>
+                <a:latin typeface="Microsoft YaHei"/>
+                <a:ea typeface="Microsoft YaHei"/>
+              </a:rPr>
+              <a:t>p90 756 ms</a:t>
+            </a:r>
+            <a:r>
+              <a:rPr lang="zh-CN" sz="900">
+                <a:solidFill>
+                  <a:srgbClr val="8B97A8"/>
+                </a:solidFill>
+                <a:latin typeface="Microsoft YaHei"/>
+                <a:ea typeface="Microsoft YaHei"/>
+              </a:rPr>
+              <a:t>、最大</a:t>
+            </a:r>
+            <a:r>
+              <a:rPr lang="en-US" sz="900">
+                <a:solidFill>
+                  <a:srgbClr val="8B97A8"/>
+                </a:solidFill>
+                <a:latin typeface="Microsoft YaHei"/>
+                <a:ea typeface="Microsoft YaHei"/>
+              </a:rPr>
+              <a:t xml:space="preserve"> 1.72 s</a:t>
+            </a:r>
+            <a:r>
+              <a:rPr lang="zh-CN" sz="900">
+                <a:solidFill>
+                  <a:srgbClr val="8B97A8"/>
+                </a:solidFill>
+                <a:latin typeface="Microsoft YaHei"/>
+                <a:ea typeface="Microsoft YaHei"/>
+              </a:rPr>
+              <a:t>。图像取自</a:t>
+            </a:r>
+            <a:r>
+              <a:rPr lang="en-US" sz="900">
+                <a:solidFill>
+                  <a:srgbClr val="8B97A8"/>
+                </a:solidFill>
+                <a:latin typeface="Microsoft YaHei"/>
+                <a:ea typeface="Microsoft YaHei"/>
+              </a:rPr>
               <a:t xml:space="preserve"> --save_every 4 </a:t>
             </a:r>
             <a:r>
-              <a:rPr lang="zh-CN" sz="938">
+              <a:rPr lang="zh-CN" sz="900">
                 <a:solidFill>
                   <a:srgbClr val="8B97A8"/>
                 </a:solidFill>
                 <a:latin typeface="Microsoft YaHei"/>
                 <a:ea typeface="Microsoft YaHei"/>
               </a:rPr>
-              <a:t>落盘，这轮为写盘牺牲了速度（</a:t>
-            </a:r>
-            <a:r>
-              <a:rPr lang="en-US" sz="938">
+              <a:t>快照轮，两轮关键帧序列一致（</a:t>
+            </a:r>
+            <a:r>
+              <a:rPr lang="en-US" sz="900">
                 <a:solidFill>
                   <a:srgbClr val="8B97A8"/>
                 </a:solidFill>
                 <a:latin typeface="Microsoft YaHei"/>
                 <a:ea typeface="Microsoft YaHei"/>
               </a:rPr>
-              <a:t>342 s</a:t>
-            </a:r>
-            <a:r>
-              <a:rPr lang="zh-CN" sz="938">
+              <a:t>8 → 81</a:t>
+            </a:r>
+            <a:r>
+              <a:rPr lang="zh-CN" sz="900">
                 <a:solidFill>
                   <a:srgbClr val="8B97A8"/>
                 </a:solidFill>
                 <a:latin typeface="Microsoft YaHei"/>
                 <a:ea typeface="Microsoft YaHei"/>
               </a:rPr>
-              <a:t>）；纯净运行</a:t>
-            </a:r>
-            <a:r>
-              <a:rPr lang="en-US" sz="938">
-                <a:solidFill>
-                  <a:srgbClr val="8B97A8"/>
-                </a:solidFill>
-                <a:latin typeface="Microsoft YaHei"/>
-                <a:ea typeface="Microsoft YaHei"/>
-              </a:rPr>
-              <a:t xml:space="preserve"> 85 </a:t>
-            </a:r>
-            <a:r>
-              <a:rPr lang="zh-CN" sz="938">
-                <a:solidFill>
-                  <a:srgbClr val="8B97A8"/>
-                </a:solidFill>
-                <a:latin typeface="Microsoft YaHei"/>
-                <a:ea typeface="Microsoft YaHei"/>
-              </a:rPr>
-              <a:t>张</a:t>
-            </a:r>
-            <a:r>
-              <a:rPr lang="en-US" sz="938">
-                <a:solidFill>
-                  <a:srgbClr val="8B97A8"/>
-                </a:solidFill>
-                <a:latin typeface="Microsoft YaHei"/>
-                <a:ea typeface="Microsoft YaHei"/>
-              </a:rPr>
-              <a:t xml:space="preserve"> 54.1 s</a:t>
-            </a:r>
-            <a:r>
-              <a:rPr lang="zh-CN" sz="938">
-                <a:solidFill>
-                  <a:srgbClr val="8B97A8"/>
-                </a:solidFill>
-                <a:latin typeface="Microsoft YaHei"/>
-                <a:ea typeface="Microsoft YaHei"/>
-              </a:rPr>
-              <a:t>、单帧</a:t>
-            </a:r>
-            <a:r>
-              <a:rPr lang="en-US" sz="938">
-                <a:solidFill>
-                  <a:srgbClr val="8B97A8"/>
-                </a:solidFill>
-                <a:latin typeface="Microsoft YaHei"/>
-                <a:ea typeface="Microsoft YaHei"/>
-              </a:rPr>
-              <a:t xml:space="preserve"> 668 ms</a:t>
-            </a:r>
-            <a:r>
-              <a:rPr lang="zh-CN" sz="938">
-                <a:solidFill>
-                  <a:srgbClr val="8B97A8"/>
-                </a:solidFill>
-                <a:latin typeface="Microsoft YaHei"/>
-                <a:ea typeface="Microsoft YaHei"/>
-              </a:rPr>
-              <a:t>；前</a:t>
-            </a:r>
-            <a:r>
-              <a:rPr lang="en-US" sz="938">
-                <a:solidFill>
-                  <a:srgbClr val="8B97A8"/>
-                </a:solidFill>
-                <a:latin typeface="Microsoft YaHei"/>
-                <a:ea typeface="Microsoft YaHei"/>
-              </a:rPr>
-              <a:t xml:space="preserve"> 28 </a:t>
-            </a:r>
-            <a:r>
-              <a:rPr lang="zh-CN" sz="938">
-                <a:solidFill>
-                  <a:srgbClr val="8B97A8"/>
-                </a:solidFill>
-                <a:latin typeface="Microsoft YaHei"/>
-                <a:ea typeface="Microsoft YaHei"/>
-              </a:rPr>
-              <a:t>帧尚无高斯，首个快照取第</a:t>
-            </a:r>
-            <a:r>
-              <a:rPr lang="en-US" sz="938">
-                <a:solidFill>
-                  <a:srgbClr val="8B97A8"/>
-                </a:solidFill>
-                <a:latin typeface="Microsoft YaHei"/>
-                <a:ea typeface="Microsoft YaHei"/>
-              </a:rPr>
-              <a:t xml:space="preserve"> 36 </a:t>
-            </a:r>
-            <a:r>
-              <a:rPr lang="zh-CN" sz="938">
-                <a:solidFill>
-                  <a:srgbClr val="8B97A8"/>
-                </a:solidFill>
-                <a:latin typeface="Microsoft YaHei"/>
-                <a:ea typeface="Microsoft YaHei"/>
-              </a:rPr>
-              <a:t>帧。</a:t>
+              <a:t>）。</a:t>
             </a:r>
             <a:endParaRPr/>
           </a:p>
@@ -9236,7 +10862,7 @@
   <p:cSld>
     <p:spTree>
       <p:nvGrpSpPr>
-        <p:cNvPr id="183" name="" descr="&lt;Slide style={{ width: '1280px', height: '720px', backgroundColor: '#FFFFFF', padding: '0px', flexDirection: 'column' }}&gt;&#10;    &lt;Box style={{ width: '1280px', height: '8px', backgroundColor: '#1E4FA8' }} /&gt;&#10;    &lt;Box style={{ padding: '18px 40px 0px 40px', flexDirection: 'row', justifyContent: 'space-between', alignItems: 'flex-end' }}&gt;&#10;        &lt;Text style={{ fontSize: 32, fontWeight: 'bold', color: '#1E4FA8' }}&gt;结论：三句话带走，加一张边界清单&lt;/Text&gt;&#10;        &lt;Text style={{ fontSize: 15, color: '#8B97A8' }}&gt;15 / 16&lt;/Text&gt;&#10;    &lt;/Box&gt;&#10;&#10;    &lt;Box style={{ padding: '15px 40px 0px 40px', flexDirection: 'column', gap: 18 }}&gt;&#10;        &lt;Box style={{ flexDirection: 'row', gap: 16, alignItems: 'flex-start' }}&gt;&#10;            &lt;Box style={{ width: '34px', height: '34px', backgroundColor: '#1E4FA8', borderRadius: 4, alignItems: 'center', justifyContent: 'center' }}&gt;&#10;                &lt;Text style={{ fontSize: 19, fontWeight: 'bold', color: '#FFFFFF' }}&gt;1&lt;/Text&gt;&#10;            &lt;/Box&gt;&#10;            &lt;Box style={{ flex: 1, flexDirection: 'column' }}&gt;&#10;                &lt;Text style={{ fontSize: 23, fontWeight: 'bold', color: '#1A2230' }}&gt;它填的是一块空格，不是&quot;更快的离线 SfM&quot;&lt;/Text&gt;&#10;                &lt;Text style={{ fontSize: 18, color: '#4A5568', lineHeight: 1.4, marginTop: 4 }}&gt;即时、无序、全局一致三者同时成立，此前没有方法做到。速度是手段，&quot;现场可判断&quot;才是目的。&lt;/Text&gt;&#10;            &lt;/Box&gt;&#10;        &lt;/Box&gt;&#10;        &lt;Box style={{ flexDirection: 'row', gap: 16, alignItems: 'flex-start' }}&gt;&#10;            &lt;Box style={{ width: '34px', height: '34px', backgroundColor: '#1E4FA8', borderRadius: 4, alignItems: 'center', justifyContent: 'center' }}&gt;&#10;                &lt;Text style={{ fontSize: 19, fontWeight: 'bold', color: '#FFFFFF' }}&gt;2&lt;/Text&gt;&#10;            &lt;/Box&gt;&#10;            &lt;Box style={{ flex: 1, flexDirection: 'column' }}&gt;&#10;                &lt;Text style={{ fontSize: 23, fontWeight: 'bold', color: '#1A2230' }}&gt;题眼是用&quot;图上的距离&quot;替换&quot;全局优化的解&quot;&lt;/Text&gt;&#10;                &lt;Text style={{ fontSize: 18, color: '#4A5568', lineHeight: 1.4, marginTop: 4 }}&gt;判定看加权图距、不看时间，求解用焊接窗口得 Sim(3)，再把修正按测地距离摊给全图——回环不必重算第二遍。&lt;/Text&gt;&#10;            &lt;/Box&gt;&#10;        &lt;/Box&gt;&#10;        &lt;Box style={{ flexDirection: 'row', gap: 16, alignItems: 'flex-start' }}&gt;&#10;            &lt;Box style={{ width: '34px', height: '34px', backgroundColor: '#0E3F8C', borderRadius: 4, alignItems: 'center', justifyContent: 'center' }}&gt;&#10;                &lt;Text style={{ fontSize: 19, fontWeight: 'bold', color: '#FFFFFF' }}&gt;3&lt;/Text&gt;&#10;            &lt;/Box&gt;&#10;            &lt;Box style={{ flex: 1, flexDirection: 'column' }}&gt;&#10;                &lt;Text style={{ fontSize: 23, fontWeight: 'bold', color: '#1A2230' }}&gt;代价是真的：让出 1.2 dB，换来一条自写的 GPU 求解栈&lt;/Text&gt;&#10;                &lt;Text style={{ fontSize: 18, color: '#4A5568', lineHeight: 1.4, marginTop: 4 }}&gt;不调 g2o / Ceres，雅可比、Schur 消元、迭代更新自己写成核——精度上限低于全局 BA，但换来了时间。&lt;/Text&gt;&#10;            &lt;/Box&gt;&#10;        &lt;/Box&gt;&#10;    &lt;/Box&gt;&#10;&#10;    &lt;Box style={{ margin: '17px 40px 0px 40px', backgroundColor: '#F7F9FC', border: '1px solid #D6DCE5', borderRadius: 6, padding: '9px 16px', flexDirection: 'column' }}&gt;&#10;        &lt;Box style={{ flexDirection: 'row', justifyContent: 'space-between', alignItems: 'baseline' }}&gt;&#10;            &lt;Text style={{ fontSize: 16, fontWeight: 'bold', color: '#1A2230' }}&gt;它现在的边界　→　对应的补法&lt;/Text&gt;&#10;            &lt;Text style={{ fontSize: 14, color: '#8B97A8' }}&gt;论文自述的局限，非我们的复现问题&lt;/Text&gt;&#10;        &lt;/Box&gt;&#10;        &lt;Box style={{ flexDirection: 'row', gap: 14, marginTop: 7 }}&gt;&#10;            &lt;Box style={{ flex: 1, flexDirection: 'column' }}&gt;&#10;                &lt;Text style={{ fontSize: 14.5, fontWeight: 'bold', color: '#B03A37' }}&gt;① 低视差直接失效&lt;/Text&gt;&#10;                &lt;Text style={{ fontSize: 14, color: '#1A2230', lineHeight: 1.35, marginTop: 2 }}&gt;低视差帧只参与渲染、不进位姿求解，避免污染轨迹&lt;/Text&gt;&#10;            &lt;/Box&gt;&#10;            &lt;Box style={{ flex: 1, flexDirection: 'column' }}&gt;&#10;                &lt;Text style={{ fontSize: 14.5, fontWeight: 'bold', color: '#B03A37' }}&gt;② 精度低于全局 BA&lt;/Text&gt;&#10;                &lt;Text style={{ fontSize: 14, color: '#1A2230', lineHeight: 1.35, marginTop: 2 }}&gt;在线出预览，结束时 GLOMAP 回填一次全局 BA，补回 1.2 dB&lt;/Text&gt;&#10;            &lt;/Box&gt;&#10;            &lt;Box style={{ flex: 1, flexDirection: 'column' }}&gt;&#10;                &lt;Text style={{ fontSize: 14.5, fontWeight: 'bold', color: '#B03A37' }}&gt;③ 上游依赖链太重&lt;/Text&gt;&#10;                &lt;Text style={{ fontSize: 14, color: '#1A2230', lineHeight: 1.35, marginTop: 2 }}&gt;采集端给实时覆盖率与误差热图，直接提示&quot;这块没拍&quot;&lt;/Text&gt;&#10;            &lt;/Box&gt;&#10;            &lt;Box style={{ flex: 1, flexDirection: 'column' }}&gt;&#10;                &lt;Text style={{ fontSize: 14.5, fontWeight: 'bold', color: '#B03A37' }}&gt;④ 阈值靠经验&lt;/Text&gt;&#10;                &lt;Text style={{ fontSize: 14, color: '#1A2230', lineHeight: 1.35, marginTop: 2 }}&gt;按纹理强度与重叠度在线估计，替代固定常数&lt;/Text&gt;&#10;            &lt;/Box&gt;&#10;        &lt;/Box&gt;&#10;    &lt;/Box&gt;&#10;&#10;    &lt;Box style={{ margin: '16px 40px 0px 40px', backgroundColor: '#FAFBFD', border: '1px solid #E3E8F0', borderRadius: 6, padding: '10px 16px 12px 16px', flexDirection: 'row' }}&gt;&#10;        &lt;Box style={{ flex: 1, borderTop: '2px solid #C8D4E4', padding: '9px 14px 0px 14px', flexDirection: 'column' }}&gt;&#10;            &lt;Text style={{ fontSize: 15, fontWeight: 'bold', color: '#3D7BD9' }}&gt;2019&lt;/Text&gt;&#10;            &lt;Text style={{ fontSize: 17.5, fontWeight: 'bold', color: '#1A2230', marginTop: 2 }}&gt;NeRF&lt;/Text&gt;&#10;            &lt;Text style={{ fontSize: 14, color: '#4A5568', lineHeight: 1.35, marginTop: 4 }}&gt;离线、必须有序输入&lt;/Text&gt;&#10;            &lt;Text style={{ fontSize: 13.5, color: '#8B97A8', lineHeight: 1.35, marginTop: 3 }}&gt;一次训练以小时计&lt;/Text&gt;&#10;        &lt;/Box&gt;&#10;        &lt;Box style={{ flex: 1, borderTop: '2px solid #C8D4E4', padding: '9px 14px 0px 14px', flexDirection: 'column' }}&gt;&#10;            &lt;Text style={{ fontSize: 15, fontWeight: 'bold', color: '#3D7BD9' }}&gt;2023&lt;/Text&gt;&#10;            &lt;Text style={{ fontSize: 17.5, fontWeight: 'bold', color: '#1A2230', marginTop: 2 }}&gt;3DGS&lt;/Text&gt;&#10;            &lt;Text style={{ fontSize: 14, color: '#4A5568', lineHeight: 1.35, marginTop: 4 }}&gt;渲染快了，位姿仍靠 COLMAP&lt;/Text&gt;&#10;            &lt;Text style={{ fontSize: 13.5, color: '#8B97A8', lineHeight: 1.35, marginTop: 3 }}&gt;前置步骤还是离线 SfM&lt;/Text&gt;&#10;        &lt;/Box&gt;&#10;        &lt;Box style={{ flex: 1, borderTop: '2px solid #C8D4E4', padding: '9px 14px 0px 14px', flexDirection: 'column' }}&gt;&#10;            &lt;Text style={{ fontSize: 15, fontWeight: 'bold', color: '#3D7BD9' }}&gt;2024–25&lt;/Text&gt;&#10;            &lt;Text style={{ fontSize: 17.5, fontWeight: 'bold', color: '#1A2230', marginTop: 2 }}&gt;增量 / 无位姿重建&lt;/Text&gt;&#10;            &lt;Text style={{ fontSize: 14, color: '#4A5568', lineHeight: 1.35, marginTop: 4 }}&gt;要么依赖有序，要么非全局&lt;/Text&gt;&#10;            &lt;Text style={{ fontSize: 13.5, color: '#8B97A8', lineHeight: 1.35, marginTop: 3 }}&gt;两条路各缺一条&lt;/Text&gt;&#10;        &lt;/Box&gt;&#10;        &lt;Box style={{ flex: 1, borderTop: '2px solid #1E4FA8', padding: '9px 14px 0px 14px', flexDirection: 'column' }}&gt;&#10;            &lt;Text style={{ fontSize: 15, fontWeight: 'bold', color: '#1E4FA8' }}&gt;2026&lt;/Text&gt;&#10;            &lt;Text style={{ fontSize: 17.5, fontWeight: 'bold', color: '#1E4FA8', marginTop: 2 }}&gt;i3dgs（本文）&lt;/Text&gt;&#10;            &lt;Text style={{ fontSize: 14, fontWeight: 'bold', color: '#1E4FA8', lineHeight: 1.35, marginTop: 4 }}&gt;即时 · 无序 · 全局一致&lt;/Text&gt;&#10;            &lt;Text style={{ fontSize: 13.5, fontWeight: 'bold', color: '#3D7BD9', lineHeight: 1.35, marginTop: 3 }}&gt;三者首次同时成立&lt;/Text&gt;&#10;        &lt;/Box&gt;&#10;    &lt;/Box&gt;&#10;&#10;    &lt;Box style={{ margin: '11px 40px 0px 40px', backgroundColor: '#1E4FA8', borderRadius: 6, padding: '14px 22px', flexDirection: 'row', alignItems: 'center', gap: 26 }}&gt;&#10;        &lt;Text style={{ fontSize: 20, fontWeight: 'bold', color: '#FFFFFF', lineHeight: 1.4, flex: 1 }}&gt;一句话总结：它把 3DGS 从&quot;拍完再算的离线工具&quot;变成了&quot;拍摄现场的仪表盘&quot;。&lt;/Text&gt;&#10;        &lt;Box style={{ flexDirection: 'column' }}&gt;&#10;            &lt;Text style={{ fontSize: 15, color: '#C3D5EF' }}&gt;论文 / 我们&lt;/Text&gt;&#10;            &lt;Text style={{ fontSize: 19, fontWeight: 'bold', color: '#FFFFFF' }}&gt;26.29 → 25.95 dB&lt;/Text&gt;&#10;        &lt;/Box&gt;&#10;    &lt;/Box&gt;&#10;&#10;    &lt;Box style={{ marginTop: 'auto', padding: '10px 40px 16px 40px', flexDirection: 'row', justifyContent: 'space-between', alignItems: 'center' }}&gt;&#10;        &lt;Text style={{ fontSize: 24, fontWeight: 'bold', color: '#1E4FA8' }}&gt;谢谢，欢迎提问&lt;/Text&gt;&#10;        &lt;Text style={{ fontSize: 14, color: '#8B97A8' }}&gt;论文：SIGGRAPH 2026 / arXiv:2607.14481 · 代码：github.com/graphdeco-inria/i3dgs&lt;/Text&gt;&#10;    &lt;/Box&gt;&#10;&lt;/Slide&gt;&#10;"/>
+        <p:cNvPr id="234" name="" descr="&lt;Slide style={{ width: '1280px', height: '720px', backgroundColor: '#FFFFFF', padding: '0px', flexDirection: 'column' }}&gt;&#10;    &lt;Box style={{ width: '1280px', height: '8px', backgroundColor: '#1E4FA8' }} /&gt;&#10;    &lt;Box style={{ padding: '18px 40px 0px 40px', flexDirection: 'row', justifyContent: 'space-between', alignItems: 'flex-end' }}&gt;&#10;        &lt;Text style={{ fontSize: 32, fontWeight: 'bold', color: '#1E4FA8' }}&gt;结论：三句话带走，加一张边界清单&lt;/Text&gt;&#10;        &lt;Text style={{ fontSize: 15, color: '#8B97A8' }}&gt;15 / 16&lt;/Text&gt;&#10;    &lt;/Box&gt;&#10;&#10;    &lt;Box style={{ padding: '15px 40px 0px 40px', flexDirection: 'column', gap: 18 }}&gt;&#10;        &lt;Box style={{ flexDirection: 'row', gap: 16, alignItems: 'flex-start' }}&gt;&#10;            &lt;Box style={{ width: '34px', height: '34px', backgroundColor: '#1E4FA8', borderRadius: 4, alignItems: 'center', justifyContent: 'center' }}&gt;&#10;                &lt;Text style={{ fontSize: 19, fontWeight: 'bold', color: '#FFFFFF' }}&gt;1&lt;/Text&gt;&#10;            &lt;/Box&gt;&#10;            &lt;Box style={{ flex: 1, flexDirection: 'column' }}&gt;&#10;                &lt;Text style={{ fontSize: 23, fontWeight: 'bold', color: '#1A2230' }}&gt;它填的是一块空格，不是&quot;更快的离线 SfM&quot;&lt;/Text&gt;&#10;                &lt;Text style={{ fontSize: 18, color: '#4A5568', lineHeight: 1.4, marginTop: 4 }}&gt;即时、无序、全局一致三者同时成立，此前没有方法做到。速度是手段，&quot;现场可判断&quot;才是目的。&lt;/Text&gt;&#10;            &lt;/Box&gt;&#10;        &lt;/Box&gt;&#10;        &lt;Box style={{ flexDirection: 'row', gap: 16, alignItems: 'flex-start' }}&gt;&#10;            &lt;Box style={{ width: '34px', height: '34px', backgroundColor: '#1E4FA8', borderRadius: 4, alignItems: 'center', justifyContent: 'center' }}&gt;&#10;                &lt;Text style={{ fontSize: 19, fontWeight: 'bold', color: '#FFFFFF' }}&gt;2&lt;/Text&gt;&#10;            &lt;/Box&gt;&#10;            &lt;Box style={{ flex: 1, flexDirection: 'column' }}&gt;&#10;                &lt;Text style={{ fontSize: 23, fontWeight: 'bold', color: '#1A2230' }}&gt;题眼是用&quot;图上的距离&quot;替换&quot;全局优化的解&quot;&lt;/Text&gt;&#10;                &lt;Text style={{ fontSize: 18, color: '#4A5568', lineHeight: 1.4, marginTop: 4 }}&gt;判定看加权图距、不看时间，求解用焊接窗口得 Sim(3)，再把修正按测地距离摊给全图——回环不必重算第二遍。&lt;/Text&gt;&#10;            &lt;/Box&gt;&#10;        &lt;/Box&gt;&#10;        &lt;Box style={{ flexDirection: 'row', gap: 16, alignItems: 'flex-start' }}&gt;&#10;            &lt;Box style={{ width: '34px', height: '34px', backgroundColor: '#0E3F8C', borderRadius: 4, alignItems: 'center', justifyContent: 'center' }}&gt;&#10;                &lt;Text style={{ fontSize: 19, fontWeight: 'bold', color: '#FFFFFF' }}&gt;3&lt;/Text&gt;&#10;            &lt;/Box&gt;&#10;            &lt;Box style={{ flex: 1, flexDirection: 'column' }}&gt;&#10;                &lt;Text style={{ fontSize: 23, fontWeight: 'bold', color: '#1A2230' }}&gt;代价是真的：让出 1.2 dB，换来一条自写的 GPU 求解栈&lt;/Text&gt;&#10;                &lt;Text style={{ fontSize: 18, color: '#4A5568', lineHeight: 1.4, marginTop: 4 }}&gt;不调 g2o / Ceres，雅可比、Schur 消元、迭代更新自己写成核——精度上限低于全局 BA，但换来了时间。&lt;/Text&gt;&#10;            &lt;/Box&gt;&#10;        &lt;/Box&gt;&#10;    &lt;/Box&gt;&#10;&#10;    &lt;Box style={{ margin: '17px 40px 0px 40px', backgroundColor: '#F7F9FC', border: '1px solid #D6DCE5', borderRadius: 6, padding: '9px 16px', flexDirection: 'column' }}&gt;&#10;        &lt;Box style={{ flexDirection: 'row', justifyContent: 'space-between', alignItems: 'baseline' }}&gt;&#10;            &lt;Text style={{ fontSize: 16, fontWeight: 'bold', color: '#1A2230' }}&gt;它现在的边界　→　对应的补法&lt;/Text&gt;&#10;            &lt;Text style={{ fontSize: 14, color: '#8B97A8' }}&gt;论文自述的局限，非我们的复现问题&lt;/Text&gt;&#10;        &lt;/Box&gt;&#10;        &lt;Box style={{ flexDirection: 'row', gap: 14, marginTop: 7 }}&gt;&#10;            &lt;Box style={{ flex: 1, flexDirection: 'column' }}&gt;&#10;                &lt;Text style={{ fontSize: 14.5, fontWeight: 'bold', color: '#B03A37' }}&gt;① 低视差直接失效&lt;/Text&gt;&#10;                &lt;Text style={{ fontSize: 14, color: '#1A2230', lineHeight: 1.35, marginTop: 2 }}&gt;低视差帧只参与渲染、不进位姿求解，避免污染轨迹&lt;/Text&gt;&#10;            &lt;/Box&gt;&#10;            &lt;Box style={{ flex: 1, flexDirection: 'column' }}&gt;&#10;                &lt;Text style={{ fontSize: 14.5, fontWeight: 'bold', color: '#B03A37' }}&gt;② 精度低于全局 BA&lt;/Text&gt;&#10;                &lt;Text style={{ fontSize: 14, color: '#1A2230', lineHeight: 1.35, marginTop: 2 }}&gt;在线出预览，结束时 GLOMAP 回填一次全局 BA，补回 1.2 dB&lt;/Text&gt;&#10;            &lt;/Box&gt;&#10;            &lt;Box style={{ flex: 1, flexDirection: 'column' }}&gt;&#10;                &lt;Text style={{ fontSize: 14.5, fontWeight: 'bold', color: '#B03A37' }}&gt;③ 上游依赖链太重&lt;/Text&gt;&#10;                &lt;Text style={{ fontSize: 14, color: '#1A2230', lineHeight: 1.35, marginTop: 2 }}&gt;采集端给实时覆盖率与误差热图，直接提示&quot;这块没拍&quot;&lt;/Text&gt;&#10;            &lt;/Box&gt;&#10;            &lt;Box style={{ flex: 1, flexDirection: 'column' }}&gt;&#10;                &lt;Text style={{ fontSize: 14.5, fontWeight: 'bold', color: '#B03A37' }}&gt;④ 阈值靠经验&lt;/Text&gt;&#10;                &lt;Text style={{ fontSize: 14, color: '#1A2230', lineHeight: 1.35, marginTop: 2 }}&gt;按纹理强度与重叠度在线估计，替代固定常数&lt;/Text&gt;&#10;            &lt;/Box&gt;&#10;        &lt;/Box&gt;&#10;    &lt;/Box&gt;&#10;&#10;    &lt;Box style={{ margin: '16px 40px 0px 40px', backgroundColor: '#FAFBFD', border: '1px solid #E3E8F0', borderRadius: 6, padding: '10px 16px 12px 16px', flexDirection: 'row' }}&gt;&#10;        &lt;Box style={{ flex: 1, borderTop: '2px solid #C8D4E4', padding: '9px 14px 0px 14px', flexDirection: 'column' }}&gt;&#10;            &lt;Text style={{ fontSize: 15, fontWeight: 'bold', color: '#3D7BD9' }}&gt;2019&lt;/Text&gt;&#10;            &lt;Text style={{ fontSize: 17.5, fontWeight: 'bold', color: '#1A2230', marginTop: 2 }}&gt;NeRF&lt;/Text&gt;&#10;            &lt;Text style={{ fontSize: 14, color: '#4A5568', lineHeight: 1.35, marginTop: 4 }}&gt;离线、必须有序输入&lt;/Text&gt;&#10;            &lt;Text style={{ fontSize: 13.5, color: '#8B97A8', lineHeight: 1.35, marginTop: 3 }}&gt;一次训练以小时计&lt;/Text&gt;&#10;        &lt;/Box&gt;&#10;        &lt;Box style={{ flex: 1, borderTop: '2px solid #C8D4E4', padding: '9px 14px 0px 14px', flexDirection: 'column' }}&gt;&#10;            &lt;Text style={{ fontSize: 15, fontWeight: 'bold', color: '#3D7BD9' }}&gt;2023&lt;/Text&gt;&#10;            &lt;Text style={{ fontSize: 17.5, fontWeight: 'bold', color: '#1A2230', marginTop: 2 }}&gt;3DGS&lt;/Text&gt;&#10;            &lt;Text style={{ fontSize: 14, color: '#4A5568', lineHeight: 1.35, marginTop: 4 }}&gt;渲染快了，位姿仍靠 COLMAP&lt;/Text&gt;&#10;            &lt;Text style={{ fontSize: 13.5, color: '#8B97A8', lineHeight: 1.35, marginTop: 3 }}&gt;前置步骤还是离线 SfM&lt;/Text&gt;&#10;        &lt;/Box&gt;&#10;        &lt;Box style={{ flex: 1, borderTop: '2px solid #C8D4E4', padding: '9px 14px 0px 14px', flexDirection: 'column' }}&gt;&#10;            &lt;Text style={{ fontSize: 15, fontWeight: 'bold', color: '#3D7BD9' }}&gt;2024–25&lt;/Text&gt;&#10;            &lt;Text style={{ fontSize: 17.5, fontWeight: 'bold', color: '#1A2230', marginTop: 2 }}&gt;增量 / 无位姿重建&lt;/Text&gt;&#10;            &lt;Text style={{ fontSize: 14, color: '#4A5568', lineHeight: 1.35, marginTop: 4 }}&gt;要么依赖有序，要么非全局&lt;/Text&gt;&#10;            &lt;Text style={{ fontSize: 13.5, color: '#8B97A8', lineHeight: 1.35, marginTop: 3 }}&gt;两条路各缺一条&lt;/Text&gt;&#10;        &lt;/Box&gt;&#10;        &lt;Box style={{ flex: 1, borderTop: '2px solid #1E4FA8', padding: '9px 14px 0px 14px', flexDirection: 'column' }}&gt;&#10;            &lt;Text style={{ fontSize: 15, fontWeight: 'bold', color: '#1E4FA8' }}&gt;2026&lt;/Text&gt;&#10;            &lt;Text style={{ fontSize: 17.5, fontWeight: 'bold', color: '#1E4FA8', marginTop: 2 }}&gt;i3dgs（本文）&lt;/Text&gt;&#10;            &lt;Text style={{ fontSize: 14, fontWeight: 'bold', color: '#1E4FA8', lineHeight: 1.35, marginTop: 4 }}&gt;即时 · 无序 · 全局一致&lt;/Text&gt;&#10;            &lt;Text style={{ fontSize: 13.5, fontWeight: 'bold', color: '#3D7BD9', lineHeight: 1.35, marginTop: 3 }}&gt;三者首次同时成立&lt;/Text&gt;&#10;        &lt;/Box&gt;&#10;    &lt;/Box&gt;&#10;&#10;    &lt;Box style={{ margin: '11px 40px 0px 40px', backgroundColor: '#1E4FA8', borderRadius: 6, padding: '14px 22px', flexDirection: 'row', alignItems: 'center', gap: 26 }}&gt;&#10;        &lt;Text style={{ fontSize: 20, fontWeight: 'bold', color: '#FFFFFF', lineHeight: 1.4, flex: 1 }}&gt;一句话总结：它把 3DGS 从&quot;拍完再算的离线工具&quot;变成了&quot;拍摄现场的仪表盘&quot;。&lt;/Text&gt;&#10;        &lt;Box style={{ flexDirection: 'column' }}&gt;&#10;            &lt;Text style={{ fontSize: 15, color: '#C3D5EF' }}&gt;论文 / 我们&lt;/Text&gt;&#10;            &lt;Text style={{ fontSize: 19, fontWeight: 'bold', color: '#FFFFFF' }}&gt;26.29 → 25.95 dB&lt;/Text&gt;&#10;        &lt;/Box&gt;&#10;    &lt;/Box&gt;&#10;&#10;    &lt;Box style={{ marginTop: 'auto', padding: '10px 40px 16px 40px', flexDirection: 'row', justifyContent: 'space-between', alignItems: 'center' }}&gt;&#10;        &lt;Text style={{ fontSize: 24, fontWeight: 'bold', color: '#1E4FA8' }}&gt;谢谢，欢迎提问&lt;/Text&gt;&#10;        &lt;Text style={{ fontSize: 14, color: '#8B97A8' }}&gt;论文：SIGGRAPH 2026 / arXiv:2607.14481 · 代码：github.com/graphdeco-inria/i3dgs&lt;/Text&gt;&#10;    &lt;/Box&gt;&#10;&lt;/Slide&gt;&#10;"/>
         <p:cNvGrpSpPr/>
         <p:nvPr/>
       </p:nvGrpSpPr>
@@ -9250,7 +10876,7 @@
       </p:grpSpPr>
       <p:sp>
         <p:nvSpPr>
-          <p:cNvPr id="184" name=""/>
+          <p:cNvPr id="235" name=""/>
           <p:cNvSpPr/>
           <p:nvPr/>
         </p:nvSpPr>
@@ -9274,7 +10900,7 @@
       </p:sp>
       <p:sp>
         <p:nvSpPr>
-          <p:cNvPr id="185" name=""/>
+          <p:cNvPr id="236" name=""/>
           <p:cNvSpPr/>
           <p:nvPr/>
         </p:nvSpPr>
@@ -9298,7 +10924,7 @@
       </p:sp>
       <p:sp>
         <p:nvSpPr>
-          <p:cNvPr id="186" name="" descr="{&quot;isTemplate&quot;:true,&quot;type&quot;:&quot;text&quot;}"/>
+          <p:cNvPr id="237" name="" descr="{&quot;isTemplate&quot;:true,&quot;type&quot;:&quot;text&quot;}"/>
           <p:cNvSpPr txBox="1"/>
           <p:nvPr/>
         </p:nvSpPr>
@@ -9333,7 +10959,7 @@
       </p:sp>
       <p:sp>
         <p:nvSpPr>
-          <p:cNvPr id="187" name="" descr="{&quot;isTemplate&quot;:true,&quot;type&quot;:&quot;text&quot;}"/>
+          <p:cNvPr id="238" name="" descr="{&quot;isTemplate&quot;:true,&quot;type&quot;:&quot;text&quot;}"/>
           <p:cNvSpPr txBox="1"/>
           <p:nvPr/>
         </p:nvSpPr>
@@ -9368,7 +10994,7 @@
       </p:sp>
       <p:sp>
         <p:nvSpPr>
-          <p:cNvPr id="188" name=""/>
+          <p:cNvPr id="239" name=""/>
           <p:cNvSpPr/>
           <p:nvPr/>
         </p:nvSpPr>
@@ -9394,7 +11020,7 @@
       </p:sp>
       <p:sp>
         <p:nvSpPr>
-          <p:cNvPr id="189" name="" descr="{&quot;isTemplate&quot;:true,&quot;type&quot;:&quot;text&quot;}"/>
+          <p:cNvPr id="240" name="" descr="{&quot;isTemplate&quot;:true,&quot;type&quot;:&quot;text&quot;}"/>
           <p:cNvSpPr txBox="1"/>
           <p:nvPr/>
         </p:nvSpPr>
@@ -9429,7 +11055,7 @@
       </p:sp>
       <p:sp>
         <p:nvSpPr>
-          <p:cNvPr id="190" name="" descr="{&quot;isTemplate&quot;:true,&quot;type&quot;:&quot;text&quot;}"/>
+          <p:cNvPr id="241" name="" descr="{&quot;isTemplate&quot;:true,&quot;type&quot;:&quot;text&quot;}"/>
           <p:cNvSpPr txBox="1"/>
           <p:nvPr/>
         </p:nvSpPr>
@@ -9494,7 +11120,7 @@
       </p:sp>
       <p:sp>
         <p:nvSpPr>
-          <p:cNvPr id="191" name="" descr="{&quot;isTemplate&quot;:true,&quot;type&quot;:&quot;text&quot;}"/>
+          <p:cNvPr id="242" name="" descr="{&quot;isTemplate&quot;:true,&quot;type&quot;:&quot;text&quot;}"/>
           <p:cNvSpPr txBox="1"/>
           <p:nvPr/>
         </p:nvSpPr>
@@ -9569,7 +11195,7 @@
       </p:sp>
       <p:sp>
         <p:nvSpPr>
-          <p:cNvPr id="192" name=""/>
+          <p:cNvPr id="243" name=""/>
           <p:cNvSpPr/>
           <p:nvPr/>
         </p:nvSpPr>
@@ -9595,7 +11221,7 @@
       </p:sp>
       <p:sp>
         <p:nvSpPr>
-          <p:cNvPr id="193" name="" descr="{&quot;isTemplate&quot;:true,&quot;type&quot;:&quot;text&quot;}"/>
+          <p:cNvPr id="244" name="" descr="{&quot;isTemplate&quot;:true,&quot;type&quot;:&quot;text&quot;}"/>
           <p:cNvSpPr txBox="1"/>
           <p:nvPr/>
         </p:nvSpPr>
@@ -9630,7 +11256,7 @@
       </p:sp>
       <p:sp>
         <p:nvSpPr>
-          <p:cNvPr id="194" name="" descr="{&quot;isTemplate&quot;:true,&quot;type&quot;:&quot;text&quot;}"/>
+          <p:cNvPr id="245" name="" descr="{&quot;isTemplate&quot;:true,&quot;type&quot;:&quot;text&quot;}"/>
           <p:cNvSpPr txBox="1"/>
           <p:nvPr/>
         </p:nvSpPr>
@@ -9735,7 +11361,7 @@
       </p:sp>
       <p:sp>
         <p:nvSpPr>
-          <p:cNvPr id="195" name="" descr="{&quot;isTemplate&quot;:true,&quot;type&quot;:&quot;text&quot;}"/>
+          <p:cNvPr id="246" name="" descr="{&quot;isTemplate&quot;:true,&quot;type&quot;:&quot;text&quot;}"/>
           <p:cNvSpPr txBox="1"/>
           <p:nvPr/>
         </p:nvSpPr>
@@ -9790,7 +11416,7 @@
       </p:sp>
       <p:sp>
         <p:nvSpPr>
-          <p:cNvPr id="196" name=""/>
+          <p:cNvPr id="247" name=""/>
           <p:cNvSpPr/>
           <p:nvPr/>
         </p:nvSpPr>
@@ -9816,7 +11442,7 @@
       </p:sp>
       <p:sp>
         <p:nvSpPr>
-          <p:cNvPr id="197" name="" descr="{&quot;isTemplate&quot;:true,&quot;type&quot;:&quot;text&quot;}"/>
+          <p:cNvPr id="248" name="" descr="{&quot;isTemplate&quot;:true,&quot;type&quot;:&quot;text&quot;}"/>
           <p:cNvSpPr txBox="1"/>
           <p:nvPr/>
         </p:nvSpPr>
@@ -9851,7 +11477,7 @@
       </p:sp>
       <p:sp>
         <p:nvSpPr>
-          <p:cNvPr id="198" name="" descr="{&quot;isTemplate&quot;:true,&quot;type&quot;:&quot;text&quot;}"/>
+          <p:cNvPr id="249" name="" descr="{&quot;isTemplate&quot;:true,&quot;type&quot;:&quot;text&quot;}"/>
           <p:cNvSpPr txBox="1"/>
           <p:nvPr/>
         </p:nvSpPr>
@@ -9926,7 +11552,7 @@
       </p:sp>
       <p:sp>
         <p:nvSpPr>
-          <p:cNvPr id="199" name="" descr="{&quot;isTemplate&quot;:true,&quot;type&quot;:&quot;text&quot;}"/>
+          <p:cNvPr id="250" name="" descr="{&quot;isTemplate&quot;:true,&quot;type&quot;:&quot;text&quot;}"/>
           <p:cNvSpPr txBox="1"/>
           <p:nvPr/>
         </p:nvSpPr>
@@ -10021,7 +11647,7 @@
       </p:sp>
       <p:sp>
         <p:nvSpPr>
-          <p:cNvPr id="200" name=""/>
+          <p:cNvPr id="251" name=""/>
           <p:cNvSpPr/>
           <p:nvPr/>
         </p:nvSpPr>
@@ -10052,7 +11678,7 @@
       </p:sp>
       <p:sp>
         <p:nvSpPr>
-          <p:cNvPr id="201" name="" descr="{&quot;isTemplate&quot;:true,&quot;type&quot;:&quot;text&quot;}"/>
+          <p:cNvPr id="252" name="" descr="{&quot;isTemplate&quot;:true,&quot;type&quot;:&quot;text&quot;}"/>
           <p:cNvSpPr txBox="1"/>
           <p:nvPr/>
         </p:nvSpPr>
@@ -10087,7 +11713,7 @@
       </p:sp>
       <p:sp>
         <p:nvSpPr>
-          <p:cNvPr id="202" name="" descr="{&quot;isTemplate&quot;:true,&quot;type&quot;:&quot;text&quot;}"/>
+          <p:cNvPr id="253" name="" descr="{&quot;isTemplate&quot;:true,&quot;type&quot;:&quot;text&quot;}"/>
           <p:cNvSpPr txBox="1"/>
           <p:nvPr/>
         </p:nvSpPr>
@@ -10122,7 +11748,7 @@
       </p:sp>
       <p:sp>
         <p:nvSpPr>
-          <p:cNvPr id="203" name="" descr="{&quot;isTemplate&quot;:true,&quot;type&quot;:&quot;text&quot;}"/>
+          <p:cNvPr id="254" name="" descr="{&quot;isTemplate&quot;:true,&quot;type&quot;:&quot;text&quot;}"/>
           <p:cNvSpPr txBox="1"/>
           <p:nvPr/>
         </p:nvSpPr>
@@ -10167,7 +11793,7 @@
       </p:sp>
       <p:sp>
         <p:nvSpPr>
-          <p:cNvPr id="204" name="" descr="{&quot;isTemplate&quot;:true,&quot;type&quot;:&quot;text&quot;}"/>
+          <p:cNvPr id="255" name="" descr="{&quot;isTemplate&quot;:true,&quot;type&quot;:&quot;text&quot;}"/>
           <p:cNvSpPr txBox="1"/>
           <p:nvPr/>
         </p:nvSpPr>
@@ -10204,7 +11830,7 @@
       </p:sp>
       <p:sp>
         <p:nvSpPr>
-          <p:cNvPr id="205" name="" descr="{&quot;isTemplate&quot;:true,&quot;type&quot;:&quot;text&quot;}"/>
+          <p:cNvPr id="256" name="" descr="{&quot;isTemplate&quot;:true,&quot;type&quot;:&quot;text&quot;}"/>
           <p:cNvSpPr txBox="1"/>
           <p:nvPr/>
         </p:nvSpPr>
@@ -10259,7 +11885,7 @@
       </p:sp>
       <p:sp>
         <p:nvSpPr>
-          <p:cNvPr id="206" name="" descr="{&quot;isTemplate&quot;:true,&quot;type&quot;:&quot;text&quot;}"/>
+          <p:cNvPr id="257" name="" descr="{&quot;isTemplate&quot;:true,&quot;type&quot;:&quot;text&quot;}"/>
           <p:cNvSpPr txBox="1"/>
           <p:nvPr/>
         </p:nvSpPr>
@@ -10346,7 +11972,7 @@
       </p:sp>
       <p:sp>
         <p:nvSpPr>
-          <p:cNvPr id="207" name="" descr="{&quot;isTemplate&quot;:true,&quot;type&quot;:&quot;text&quot;}"/>
+          <p:cNvPr id="258" name="" descr="{&quot;isTemplate&quot;:true,&quot;type&quot;:&quot;text&quot;}"/>
           <p:cNvSpPr txBox="1"/>
           <p:nvPr/>
         </p:nvSpPr>
@@ -10391,7 +12017,7 @@
       </p:sp>
       <p:sp>
         <p:nvSpPr>
-          <p:cNvPr id="208" name="" descr="{&quot;isTemplate&quot;:true,&quot;type&quot;:&quot;text&quot;}"/>
+          <p:cNvPr id="259" name="" descr="{&quot;isTemplate&quot;:true,&quot;type&quot;:&quot;text&quot;}"/>
           <p:cNvSpPr txBox="1"/>
           <p:nvPr/>
         </p:nvSpPr>
@@ -10458,7 +12084,7 @@
       </p:sp>
       <p:sp>
         <p:nvSpPr>
-          <p:cNvPr id="209" name="" descr="{&quot;isTemplate&quot;:true,&quot;type&quot;:&quot;text&quot;}"/>
+          <p:cNvPr id="260" name="" descr="{&quot;isTemplate&quot;:true,&quot;type&quot;:&quot;text&quot;}"/>
           <p:cNvSpPr txBox="1"/>
           <p:nvPr/>
         </p:nvSpPr>
@@ -10503,7 +12129,7 @@
       </p:sp>
       <p:sp>
         <p:nvSpPr>
-          <p:cNvPr id="210" name="" descr="{&quot;isTemplate&quot;:true,&quot;type&quot;:&quot;text&quot;}"/>
+          <p:cNvPr id="261" name="" descr="{&quot;isTemplate&quot;:true,&quot;type&quot;:&quot;text&quot;}"/>
           <p:cNvSpPr txBox="1"/>
           <p:nvPr/>
         </p:nvSpPr>
@@ -10538,7 +12164,7 @@
       </p:sp>
       <p:sp>
         <p:nvSpPr>
-          <p:cNvPr id="211" name=""/>
+          <p:cNvPr id="262" name=""/>
           <p:cNvSpPr/>
           <p:nvPr/>
         </p:nvSpPr>
@@ -10569,7 +12195,7 @@
       </p:sp>
       <p:sp>
         <p:nvSpPr>
-          <p:cNvPr id="212" name=""/>
+          <p:cNvPr id="263" name=""/>
           <p:cNvSpPr/>
           <p:nvPr/>
         </p:nvSpPr>
@@ -10609,7 +12235,7 @@
       </p:sp>
       <p:sp>
         <p:nvSpPr>
-          <p:cNvPr id="213" name="" descr="{&quot;isTemplate&quot;:true,&quot;type&quot;:&quot;text&quot;}"/>
+          <p:cNvPr id="264" name="" descr="{&quot;isTemplate&quot;:true,&quot;type&quot;:&quot;text&quot;}"/>
           <p:cNvSpPr txBox="1"/>
           <p:nvPr/>
         </p:nvSpPr>
@@ -10644,7 +12270,7 @@
       </p:sp>
       <p:sp>
         <p:nvSpPr>
-          <p:cNvPr id="214" name="" descr="{&quot;isTemplate&quot;:true,&quot;type&quot;:&quot;text&quot;}"/>
+          <p:cNvPr id="265" name="" descr="{&quot;isTemplate&quot;:true,&quot;type&quot;:&quot;text&quot;}"/>
           <p:cNvSpPr txBox="1"/>
           <p:nvPr/>
         </p:nvSpPr>
@@ -10679,7 +12305,7 @@
       </p:sp>
       <p:sp>
         <p:nvSpPr>
-          <p:cNvPr id="215" name="" descr="{&quot;isTemplate&quot;:true,&quot;type&quot;:&quot;text&quot;}"/>
+          <p:cNvPr id="266" name="" descr="{&quot;isTemplate&quot;:true,&quot;type&quot;:&quot;text&quot;}"/>
           <p:cNvSpPr txBox="1"/>
           <p:nvPr/>
         </p:nvSpPr>
@@ -10714,7 +12340,7 @@
       </p:sp>
       <p:sp>
         <p:nvSpPr>
-          <p:cNvPr id="216" name="" descr="{&quot;isTemplate&quot;:true,&quot;type&quot;:&quot;text&quot;}"/>
+          <p:cNvPr id="267" name="" descr="{&quot;isTemplate&quot;:true,&quot;type&quot;:&quot;text&quot;}"/>
           <p:cNvSpPr txBox="1"/>
           <p:nvPr/>
         </p:nvSpPr>
@@ -10749,7 +12375,7 @@
       </p:sp>
       <p:sp>
         <p:nvSpPr>
-          <p:cNvPr id="217" name=""/>
+          <p:cNvPr id="268" name=""/>
           <p:cNvSpPr/>
           <p:nvPr/>
         </p:nvSpPr>
@@ -10789,7 +12415,7 @@
       </p:sp>
       <p:sp>
         <p:nvSpPr>
-          <p:cNvPr id="218" name="" descr="{&quot;isTemplate&quot;:true,&quot;type&quot;:&quot;text&quot;}"/>
+          <p:cNvPr id="269" name="" descr="{&quot;isTemplate&quot;:true,&quot;type&quot;:&quot;text&quot;}"/>
           <p:cNvSpPr txBox="1"/>
           <p:nvPr/>
         </p:nvSpPr>
@@ -10824,7 +12450,7 @@
       </p:sp>
       <p:sp>
         <p:nvSpPr>
-          <p:cNvPr id="219" name="" descr="{&quot;isTemplate&quot;:true,&quot;type&quot;:&quot;text&quot;}"/>
+          <p:cNvPr id="270" name="" descr="{&quot;isTemplate&quot;:true,&quot;type&quot;:&quot;text&quot;}"/>
           <p:cNvSpPr txBox="1"/>
           <p:nvPr/>
         </p:nvSpPr>
@@ -10859,7 +12485,7 @@
       </p:sp>
       <p:sp>
         <p:nvSpPr>
-          <p:cNvPr id="220" name="" descr="{&quot;isTemplate&quot;:true,&quot;type&quot;:&quot;text&quot;}"/>
+          <p:cNvPr id="271" name="" descr="{&quot;isTemplate&quot;:true,&quot;type&quot;:&quot;text&quot;}"/>
           <p:cNvSpPr txBox="1"/>
           <p:nvPr/>
         </p:nvSpPr>
@@ -10904,7 +12530,7 @@
       </p:sp>
       <p:sp>
         <p:nvSpPr>
-          <p:cNvPr id="221" name="" descr="{&quot;isTemplate&quot;:true,&quot;type&quot;:&quot;text&quot;}"/>
+          <p:cNvPr id="272" name="" descr="{&quot;isTemplate&quot;:true,&quot;type&quot;:&quot;text&quot;}"/>
           <p:cNvSpPr txBox="1"/>
           <p:nvPr/>
         </p:nvSpPr>
@@ -10949,7 +12575,7 @@
       </p:sp>
       <p:sp>
         <p:nvSpPr>
-          <p:cNvPr id="222" name=""/>
+          <p:cNvPr id="273" name=""/>
           <p:cNvSpPr/>
           <p:nvPr/>
         </p:nvSpPr>
@@ -10989,7 +12615,7 @@
       </p:sp>
       <p:sp>
         <p:nvSpPr>
-          <p:cNvPr id="223" name="" descr="{&quot;isTemplate&quot;:true,&quot;type&quot;:&quot;text&quot;}"/>
+          <p:cNvPr id="274" name="" descr="{&quot;isTemplate&quot;:true,&quot;type&quot;:&quot;text&quot;}"/>
           <p:cNvSpPr txBox="1"/>
           <p:nvPr/>
         </p:nvSpPr>
@@ -11024,7 +12650,7 @@
       </p:sp>
       <p:sp>
         <p:nvSpPr>
-          <p:cNvPr id="224" name="" descr="{&quot;isTemplate&quot;:true,&quot;type&quot;:&quot;text&quot;}"/>
+          <p:cNvPr id="275" name="" descr="{&quot;isTemplate&quot;:true,&quot;type&quot;:&quot;text&quot;}"/>
           <p:cNvSpPr txBox="1"/>
           <p:nvPr/>
         </p:nvSpPr>
@@ -11079,7 +12705,7 @@
       </p:sp>
       <p:sp>
         <p:nvSpPr>
-          <p:cNvPr id="225" name="" descr="{&quot;isTemplate&quot;:true,&quot;type&quot;:&quot;text&quot;}"/>
+          <p:cNvPr id="276" name="" descr="{&quot;isTemplate&quot;:true,&quot;type&quot;:&quot;text&quot;}"/>
           <p:cNvSpPr txBox="1"/>
           <p:nvPr/>
         </p:nvSpPr>
@@ -11114,7 +12740,7 @@
       </p:sp>
       <p:sp>
         <p:nvSpPr>
-          <p:cNvPr id="226" name="" descr="{&quot;isTemplate&quot;:true,&quot;type&quot;:&quot;text&quot;}"/>
+          <p:cNvPr id="277" name="" descr="{&quot;isTemplate&quot;:true,&quot;type&quot;:&quot;text&quot;}"/>
           <p:cNvSpPr txBox="1"/>
           <p:nvPr/>
         </p:nvSpPr>
@@ -11149,7 +12775,7 @@
       </p:sp>
       <p:sp>
         <p:nvSpPr>
-          <p:cNvPr id="227" name=""/>
+          <p:cNvPr id="278" name=""/>
           <p:cNvSpPr/>
           <p:nvPr/>
         </p:nvSpPr>
@@ -11189,7 +12815,7 @@
       </p:sp>
       <p:sp>
         <p:nvSpPr>
-          <p:cNvPr id="228" name="" descr="{&quot;isTemplate&quot;:true,&quot;type&quot;:&quot;text&quot;}"/>
+          <p:cNvPr id="279" name="" descr="{&quot;isTemplate&quot;:true,&quot;type&quot;:&quot;text&quot;}"/>
           <p:cNvSpPr txBox="1"/>
           <p:nvPr/>
         </p:nvSpPr>
@@ -11224,7 +12850,7 @@
       </p:sp>
       <p:sp>
         <p:nvSpPr>
-          <p:cNvPr id="229" name="" descr="{&quot;isTemplate&quot;:true,&quot;type&quot;:&quot;text&quot;}"/>
+          <p:cNvPr id="280" name="" descr="{&quot;isTemplate&quot;:true,&quot;type&quot;:&quot;text&quot;}"/>
           <p:cNvSpPr txBox="1"/>
           <p:nvPr/>
         </p:nvSpPr>
@@ -11269,7 +12895,7 @@
       </p:sp>
       <p:sp>
         <p:nvSpPr>
-          <p:cNvPr id="230" name="" descr="{&quot;isTemplate&quot;:true,&quot;type&quot;:&quot;text&quot;}"/>
+          <p:cNvPr id="281" name="" descr="{&quot;isTemplate&quot;:true,&quot;type&quot;:&quot;text&quot;}"/>
           <p:cNvSpPr txBox="1"/>
           <p:nvPr/>
         </p:nvSpPr>
@@ -11344,7 +12970,7 @@
       </p:sp>
     